--- a/202610_株式会社すなおコンサルティング御中_LINE公式アカウント運用のご提案.pptx
+++ b/202610_株式会社すなおコンサルティング御中_LINE公式アカウント運用のご提案.pptx
@@ -2434,6 +2434,7 @@
                 <a:uFillTx/>
                 <a:latin typeface="メイリオ"/>
                 <a:ea typeface="メイリオ"/>
+                <a:cs typeface="メイリオ"/>
               </a:rPr>
               <a:t>LINE公式アカウント運用のご提案</a:t>
             </a:r>
@@ -2444,6 +2445,8 @@
               <a:effectLst/>
               <a:uFillTx/>
               <a:latin typeface="メイリオ"/>
+              <a:ea typeface="メイリオ"/>
+              <a:cs typeface="メイリオ"/>
             </a:endParaRPr>
           </a:p>
         </p:txBody>
@@ -2498,6 +2501,7 @@
                 <a:uFillTx/>
                 <a:latin typeface="メイリオ"/>
                 <a:ea typeface="メイリオ"/>
+                <a:cs typeface="メイリオ"/>
               </a:rPr>
               <a:t>広告で集めた方をLINEでナーチャリングをし、</a:t>
             </a:r>
@@ -2516,6 +2520,7 @@
                 <a:uFillTx/>
                 <a:latin typeface="メイリオ"/>
                 <a:ea typeface="メイリオ"/>
+                <a:cs typeface="メイリオ"/>
               </a:rPr>
               <a:t>セミナー参加・入会へ</a:t>
             </a:r>
@@ -2649,6 +2654,7 @@
                 <a:uFillTx/>
                 <a:latin typeface="メイリオ"/>
                 <a:ea typeface="メイリオ"/>
+                <a:cs typeface="メイリオ"/>
               </a:rPr>
               <a:t>株式会社すなおコンサルティング 御中</a:t>
             </a:r>
@@ -2659,6 +2665,8 @@
               <a:effectLst/>
               <a:uFillTx/>
               <a:latin typeface="メイリオ"/>
+              <a:ea typeface="メイリオ"/>
+              <a:cs typeface="メイリオ"/>
             </a:endParaRPr>
           </a:p>
         </p:txBody>
@@ -2742,6 +2750,7 @@
                 <a:uFillTx/>
                 <a:latin typeface="メイリオ"/>
                 <a:ea typeface="メイリオ"/>
+                <a:cs typeface="メイリオ"/>
               </a:rPr>
               <a:t>株式会社</a:t>
             </a:r>
@@ -2754,6 +2763,7 @@
                 <a:uFillTx/>
                 <a:latin typeface="メイリオ"/>
                 <a:ea typeface="メイリオ"/>
+                <a:cs typeface="メイリオ"/>
               </a:rPr>
               <a:t>DYM</a:t>
             </a:r>
@@ -2766,6 +2776,7 @@
                 <a:uFillTx/>
                 <a:latin typeface="メイリオ"/>
                 <a:ea typeface="メイリオ"/>
+                <a:cs typeface="メイリオ"/>
               </a:rPr>
               <a:t>　〒</a:t>
             </a:r>
@@ -2778,6 +2789,7 @@
                 <a:uFillTx/>
                 <a:latin typeface="メイリオ"/>
                 <a:ea typeface="メイリオ"/>
+                <a:cs typeface="メイリオ"/>
               </a:rPr>
               <a:t>141-0032</a:t>
             </a:r>
@@ -2790,6 +2802,7 @@
                 <a:uFillTx/>
                 <a:latin typeface="メイリオ"/>
                 <a:ea typeface="メイリオ"/>
+                <a:cs typeface="メイリオ"/>
               </a:rPr>
               <a:t>　東京都品川区大崎</a:t>
             </a:r>
@@ -2802,6 +2815,7 @@
                 <a:uFillTx/>
                 <a:latin typeface="メイリオ"/>
                 <a:ea typeface="メイリオ"/>
+                <a:cs typeface="メイリオ"/>
               </a:rPr>
               <a:t>1-11-2</a:t>
             </a:r>
@@ -2814,6 +2828,7 @@
                 <a:uFillTx/>
                 <a:latin typeface="メイリオ"/>
                 <a:ea typeface="メイリオ"/>
+                <a:cs typeface="メイリオ"/>
               </a:rPr>
               <a:t>　ゲートシティ大崎イーストタワー</a:t>
             </a:r>
@@ -2826,6 +2841,7 @@
                 <a:uFillTx/>
                 <a:latin typeface="メイリオ"/>
                 <a:ea typeface="メイリオ"/>
+                <a:cs typeface="メイリオ"/>
               </a:rPr>
               <a:t>10</a:t>
             </a:r>
@@ -2838,6 +2854,7 @@
                 <a:uFillTx/>
                 <a:latin typeface="メイリオ"/>
                 <a:ea typeface="メイリオ"/>
+                <a:cs typeface="メイリオ"/>
               </a:rPr>
               <a:t>階</a:t>
             </a:r>
@@ -2847,7 +2864,9 @@
               </a:solidFill>
               <a:effectLst/>
               <a:uFillTx/>
-              <a:latin typeface="Arial"/>
+              <a:latin typeface="メイリオ"/>
+              <a:ea typeface="メイリオ"/>
+              <a:cs typeface="メイリオ"/>
             </a:endParaRPr>
           </a:p>
           <a:p>
@@ -2868,6 +2887,7 @@
                 <a:uFillTx/>
                 <a:latin typeface="メイリオ"/>
                 <a:ea typeface="メイリオ"/>
+                <a:cs typeface="メイリオ"/>
               </a:rPr>
               <a:t>TEL: 03-5745-0200</a:t>
             </a:r>
@@ -2880,6 +2900,7 @@
                 <a:uFillTx/>
                 <a:latin typeface="メイリオ"/>
                 <a:ea typeface="メイリオ"/>
+                <a:cs typeface="メイリオ"/>
               </a:rPr>
               <a:t>　</a:t>
             </a:r>
@@ -2892,6 +2913,7 @@
                 <a:uFillTx/>
                 <a:latin typeface="メイリオ"/>
                 <a:ea typeface="メイリオ"/>
+                <a:cs typeface="メイリオ"/>
               </a:rPr>
               <a:t>FAX: 03-3779-8720 </a:t>
             </a:r>
@@ -2904,6 +2926,7 @@
                 <a:uFillTx/>
                 <a:latin typeface="メイリオ"/>
                 <a:ea typeface="メイリオ"/>
+                <a:cs typeface="メイリオ"/>
               </a:rPr>
               <a:t>　</a:t>
             </a:r>
@@ -2916,6 +2939,7 @@
                 <a:uFillTx/>
                 <a:latin typeface="メイリオ"/>
                 <a:ea typeface="メイリオ"/>
+                <a:cs typeface="メイリオ"/>
               </a:rPr>
               <a:t>http://dym.asia   </a:t>
             </a:r>
@@ -2928,6 +2952,7 @@
                 <a:uFillTx/>
                 <a:latin typeface="メイリオ"/>
                 <a:ea typeface="メイリオ"/>
+                <a:cs typeface="メイリオ"/>
               </a:rPr>
               <a:t>代表取締役　水谷佑毅</a:t>
             </a:r>
@@ -2937,7 +2962,9 @@
               </a:solidFill>
               <a:effectLst/>
               <a:uFillTx/>
-              <a:latin typeface="Arial"/>
+              <a:latin typeface="メイリオ"/>
+              <a:ea typeface="メイリオ"/>
+              <a:cs typeface="メイリオ"/>
             </a:endParaRPr>
           </a:p>
         </p:txBody>
@@ -3015,8 +3042,9 @@
               </a:solidFill>
               <a:effectLst/>
               <a:uFillTx/>
-              <a:latin typeface="Arial"/>
-              <a:ea typeface="ＭＳ Ｐゴシック"/>
+              <a:latin typeface="メイリオ"/>
+              <a:ea typeface="メイリオ"/>
+              <a:cs typeface="メイリオ"/>
             </a:endParaRPr>
           </a:p>
         </p:txBody>
@@ -3075,6 +3103,7 @@
                 <a:uFillTx/>
                 <a:latin typeface="メイリオ"/>
                 <a:ea typeface="メイリオ"/>
+                <a:cs typeface="メイリオ"/>
               </a:rPr>
               <a:t>貴社の明るい未来に必ず貢献致します。</a:t>
             </a:r>
@@ -3084,7 +3113,9 @@
               </a:solidFill>
               <a:effectLst/>
               <a:uFillTx/>
-              <a:latin typeface="Arial"/>
+              <a:latin typeface="メイリオ"/>
+              <a:ea typeface="メイリオ"/>
+              <a:cs typeface="メイリオ"/>
             </a:endParaRPr>
           </a:p>
         </p:txBody>
@@ -3143,6 +3174,7 @@
                 <a:uFillTx/>
                 <a:latin typeface="メイリオ"/>
                 <a:ea typeface="メイリオ"/>
+                <a:cs typeface="メイリオ"/>
               </a:rPr>
               <a:t>本社</a:t>
             </a:r>
@@ -3152,7 +3184,9 @@
               </a:solidFill>
               <a:effectLst/>
               <a:uFillTx/>
-              <a:latin typeface="Arial"/>
+              <a:latin typeface="メイリオ"/>
+              <a:ea typeface="メイリオ"/>
+              <a:cs typeface="メイリオ"/>
             </a:endParaRPr>
           </a:p>
         </p:txBody>
@@ -3211,6 +3245,7 @@
                 <a:uFillTx/>
                 <a:latin typeface="メイリオ"/>
                 <a:ea typeface="メイリオ"/>
+                <a:cs typeface="メイリオ"/>
               </a:rPr>
               <a:t>本社</a:t>
             </a:r>
@@ -3220,7 +3255,9 @@
               </a:solidFill>
               <a:effectLst/>
               <a:uFillTx/>
-              <a:latin typeface="Arial"/>
+              <a:latin typeface="メイリオ"/>
+              <a:ea typeface="メイリオ"/>
+              <a:cs typeface="メイリオ"/>
             </a:endParaRPr>
           </a:p>
         </p:txBody>
@@ -3419,7 +3456,9 @@
               </a:solidFill>
               <a:effectLst/>
               <a:uFillTx/>
-              <a:latin typeface="Calibri"/>
+              <a:latin typeface="メイリオ"/>
+              <a:ea typeface="メイリオ"/>
+              <a:cs typeface="メイリオ"/>
             </a:endParaRPr>
           </a:p>
         </p:txBody>
@@ -3484,7 +3523,9 @@
               </a:solidFill>
               <a:effectLst/>
               <a:uFillTx/>
-              <a:latin typeface="Calibri"/>
+              <a:latin typeface="メイリオ"/>
+              <a:ea typeface="メイリオ"/>
+              <a:cs typeface="メイリオ"/>
             </a:endParaRPr>
           </a:p>
         </p:txBody>
@@ -3558,6 +3599,7 @@
                 <a:uFillTx/>
                 <a:latin typeface="メイリオ"/>
                 <a:ea typeface="メイリオ"/>
+                <a:cs typeface="メイリオ"/>
               </a:rPr>
               <a:t>サマリー</a:t>
             </a:r>
@@ -3568,6 +3610,8 @@
               <a:effectLst/>
               <a:uFillTx/>
               <a:latin typeface="メイリオ"/>
+              <a:ea typeface="メイリオ"/>
+              <a:cs typeface="メイリオ"/>
             </a:endParaRPr>
           </a:p>
         </p:txBody>
@@ -3629,6 +3673,7 @@
               <a:uFillTx/>
               <a:latin typeface="メイリオ"/>
               <a:ea typeface="メイリオ"/>
+              <a:cs typeface="メイリオ"/>
             </a:endParaRPr>
           </a:p>
         </p:txBody>
@@ -3685,6 +3730,7 @@
               <a:uFillTx/>
               <a:latin typeface="メイリオ"/>
               <a:ea typeface="メイリオ"/>
+              <a:cs typeface="メイリオ"/>
             </a:endParaRPr>
           </a:p>
         </p:txBody>
@@ -3762,6 +3808,7 @@
                 <a:uFillTx/>
                 <a:latin typeface="メイリオ" panose="020B0604030504040204" pitchFamily="50" charset="-128"/>
                 <a:ea typeface="メイリオ" panose="020B0604030504040204" pitchFamily="50" charset="-128"/>
+                <a:cs typeface="メイリオ"/>
               </a:rPr>
               <a:t>広告で集めた方をLINEにため、次のイベント参加・入会（LTV）を最大化する</a:t>
             </a:r>
@@ -3769,6 +3816,8 @@
               <a:effectLst/>
               <a:uFillTx/>
               <a:latin typeface="メイリオ"/>
+              <a:ea typeface="メイリオ"/>
+              <a:cs typeface="メイリオ"/>
             </a:endParaRPr>
           </a:p>
         </p:txBody>
@@ -3810,10 +3859,15 @@
                 </a:solidFill>
                 <a:latin typeface="メイリオ" panose="020B0604030504040204" pitchFamily="50" charset="-128"/>
                 <a:ea typeface="メイリオ" panose="020B0604030504040204" pitchFamily="50" charset="-128"/>
+                <a:cs typeface="メイリオ"/>
               </a:rPr>
               <a:t>KEY TAKEAWAY</a:t>
             </a:r>
-            <a:endParaRPr lang="ja-JP" altLang="en-US" sz="1200" dirty="0"/>
+            <a:endParaRPr lang="ja-JP" altLang="en-US" sz="1200" dirty="0">
+              <a:latin typeface="メイリオ"/>
+              <a:ea typeface="メイリオ"/>
+              <a:cs typeface="メイリオ"/>
+            </a:endParaRPr>
           </a:p>
         </p:txBody>
       </p:sp>
@@ -3859,10 +3913,15 @@
                 </a:solidFill>
                 <a:latin typeface="メイリオ" panose="020B0604030504040204" pitchFamily="50" charset="-128"/>
                 <a:ea typeface="メイリオ" panose="020B0604030504040204" pitchFamily="50" charset="-128"/>
+                <a:cs typeface="メイリオ"/>
               </a:rPr>
               <a:t>広告 → イベント＋LINEにたまる → ナーチャリング → 次のイベント・入会</a:t>
             </a:r>
-            <a:endParaRPr lang="ja-JP" altLang="en-US" sz="1200" dirty="0"/>
+            <a:endParaRPr lang="ja-JP" altLang="en-US" sz="1200" dirty="0">
+              <a:latin typeface="メイリオ"/>
+              <a:ea typeface="メイリオ"/>
+              <a:cs typeface="メイリオ"/>
+            </a:endParaRPr>
           </a:p>
           <a:p>
             <a:pPr algn="ctr">
@@ -3878,10 +3937,15 @@
                 </a:solidFill>
                 <a:latin typeface="メイリオ" panose="020B0604030504040204" pitchFamily="50" charset="-128"/>
                 <a:ea typeface="メイリオ" panose="020B0604030504040204" pitchFamily="50" charset="-128"/>
+                <a:cs typeface="メイリオ"/>
               </a:rPr>
               <a:t>この流れを構築する</a:t>
             </a:r>
-            <a:endParaRPr lang="ja-JP" altLang="en-US" sz="1200" dirty="0"/>
+            <a:endParaRPr lang="ja-JP" altLang="en-US" sz="1200" dirty="0">
+              <a:latin typeface="メイリオ"/>
+              <a:ea typeface="メイリオ"/>
+              <a:cs typeface="メイリオ"/>
+            </a:endParaRPr>
           </a:p>
         </p:txBody>
       </p:sp>
@@ -3920,10 +3984,15 @@
                 </a:solidFill>
                 <a:latin typeface="メイリオ" panose="020B0604030504040204" pitchFamily="50" charset="-128"/>
                 <a:ea typeface="メイリオ" panose="020B0604030504040204" pitchFamily="50" charset="-128"/>
+                <a:cs typeface="メイリオ"/>
               </a:rPr>
               <a:t>補足ポイント</a:t>
             </a:r>
-            <a:endParaRPr lang="ja-JP" altLang="en-US" sz="1200" dirty="0"/>
+            <a:endParaRPr lang="ja-JP" altLang="en-US" sz="1200" dirty="0">
+              <a:latin typeface="メイリオ"/>
+              <a:ea typeface="メイリオ"/>
+              <a:cs typeface="メイリオ"/>
+            </a:endParaRPr>
           </a:p>
         </p:txBody>
       </p:sp>
@@ -3957,7 +4026,11 @@
             <a:pPr algn="l">
               <a:buNone/>
             </a:pPr>
-            <a:endParaRPr lang="ja-JP" altLang="en-US" sz="1200" dirty="0"/>
+            <a:endParaRPr lang="ja-JP" altLang="en-US" sz="1200" dirty="0">
+              <a:latin typeface="メイリオ"/>
+              <a:ea typeface="メイリオ"/>
+              <a:cs typeface="メイリオ"/>
+            </a:endParaRPr>
           </a:p>
         </p:txBody>
       </p:sp>
@@ -3996,10 +4069,15 @@
                 </a:solidFill>
                 <a:latin typeface="メイリオ" panose="020B0604030504040204" pitchFamily="50" charset="-128"/>
                 <a:ea typeface="メイリオ" panose="020B0604030504040204" pitchFamily="50" charset="-128"/>
+                <a:cs typeface="メイリオ"/>
               </a:rPr>
               <a:t>01 現状と課題</a:t>
             </a:r>
-            <a:endParaRPr lang="ja-JP" altLang="en-US" sz="1200" dirty="0"/>
+            <a:endParaRPr lang="ja-JP" altLang="en-US" sz="1200" dirty="0">
+              <a:latin typeface="メイリオ"/>
+              <a:ea typeface="メイリオ"/>
+              <a:cs typeface="メイリオ"/>
+            </a:endParaRPr>
           </a:p>
         </p:txBody>
       </p:sp>
@@ -4041,10 +4119,15 @@
                 </a:solidFill>
                 <a:latin typeface="メイリオ" panose="020B0604030504040204" pitchFamily="50" charset="-128"/>
                 <a:ea typeface="メイリオ" panose="020B0604030504040204" pitchFamily="50" charset="-128"/>
+                <a:cs typeface="メイリオ"/>
               </a:rPr>
               <a:t>申し込まずに離れた方・入会していない方を、次のイベントまで追う場所が無い。</a:t>
             </a:r>
-            <a:endParaRPr lang="ja-JP" altLang="en-US" sz="1200" dirty="0"/>
+            <a:endParaRPr lang="ja-JP" altLang="en-US" sz="1200" dirty="0">
+              <a:latin typeface="メイリオ"/>
+              <a:ea typeface="メイリオ"/>
+              <a:cs typeface="メイリオ"/>
+            </a:endParaRPr>
           </a:p>
         </p:txBody>
       </p:sp>
@@ -4078,7 +4161,11 @@
             <a:pPr algn="l">
               <a:buNone/>
             </a:pPr>
-            <a:endParaRPr lang="ja-JP" altLang="en-US" sz="1200" dirty="0"/>
+            <a:endParaRPr lang="ja-JP" altLang="en-US" sz="1200" dirty="0">
+              <a:latin typeface="メイリオ"/>
+              <a:ea typeface="メイリオ"/>
+              <a:cs typeface="メイリオ"/>
+            </a:endParaRPr>
           </a:p>
         </p:txBody>
       </p:sp>
@@ -4117,10 +4204,15 @@
                 </a:solidFill>
                 <a:latin typeface="メイリオ" panose="020B0604030504040204" pitchFamily="50" charset="-128"/>
                 <a:ea typeface="メイリオ" panose="020B0604030504040204" pitchFamily="50" charset="-128"/>
+                <a:cs typeface="メイリオ"/>
               </a:rPr>
               <a:t>02 施策</a:t>
             </a:r>
-            <a:endParaRPr lang="ja-JP" altLang="en-US" sz="1200" dirty="0"/>
+            <a:endParaRPr lang="ja-JP" altLang="en-US" sz="1200" dirty="0">
+              <a:latin typeface="メイリオ"/>
+              <a:ea typeface="メイリオ"/>
+              <a:cs typeface="メイリオ"/>
+            </a:endParaRPr>
           </a:p>
         </p:txBody>
       </p:sp>
@@ -4162,10 +4254,15 @@
                 </a:solidFill>
                 <a:latin typeface="メイリオ" panose="020B0604030504040204" pitchFamily="50" charset="-128"/>
                 <a:ea typeface="メイリオ" panose="020B0604030504040204" pitchFamily="50" charset="-128"/>
+                <a:cs typeface="メイリオ"/>
               </a:rPr>
               <a:t>ポップアップツールとサンクスLINE誘導で友だちにし、興味あり・予約・参加の段階ごとに配信する。</a:t>
             </a:r>
-            <a:endParaRPr lang="ja-JP" altLang="en-US" sz="1200" dirty="0"/>
+            <a:endParaRPr lang="ja-JP" altLang="en-US" sz="1200" dirty="0">
+              <a:latin typeface="メイリオ"/>
+              <a:ea typeface="メイリオ"/>
+              <a:cs typeface="メイリオ"/>
+            </a:endParaRPr>
           </a:p>
         </p:txBody>
       </p:sp>
@@ -4199,7 +4296,11 @@
             <a:pPr algn="l">
               <a:buNone/>
             </a:pPr>
-            <a:endParaRPr lang="ja-JP" altLang="en-US" sz="1200" dirty="0"/>
+            <a:endParaRPr lang="ja-JP" altLang="en-US" sz="1200" dirty="0">
+              <a:latin typeface="メイリオ"/>
+              <a:ea typeface="メイリオ"/>
+              <a:cs typeface="メイリオ"/>
+            </a:endParaRPr>
           </a:p>
         </p:txBody>
       </p:sp>
@@ -4238,10 +4339,15 @@
                 </a:solidFill>
                 <a:latin typeface="メイリオ" panose="020B0604030504040204" pitchFamily="50" charset="-128"/>
                 <a:ea typeface="メイリオ" panose="020B0604030504040204" pitchFamily="50" charset="-128"/>
+                <a:cs typeface="メイリオ"/>
               </a:rPr>
               <a:t>03 目標と費用</a:t>
             </a:r>
-            <a:endParaRPr lang="ja-JP" altLang="en-US" sz="1200" dirty="0"/>
+            <a:endParaRPr lang="ja-JP" altLang="en-US" sz="1200" dirty="0">
+              <a:latin typeface="メイリオ"/>
+              <a:ea typeface="メイリオ"/>
+              <a:cs typeface="メイリオ"/>
+            </a:endParaRPr>
           </a:p>
         </p:txBody>
       </p:sp>
@@ -4283,10 +4389,15 @@
                 </a:solidFill>
                 <a:latin typeface="メイリオ" panose="020B0604030504040204" pitchFamily="50" charset="-128"/>
                 <a:ea typeface="メイリオ" panose="020B0604030504040204" pitchFamily="50" charset="-128"/>
+                <a:cs typeface="メイリオ"/>
               </a:rPr>
               <a:t>追える人数を増やし・減らさず、入会へ。平常期 月5〜10万円／イベント期 月30万円程度。</a:t>
             </a:r>
-            <a:endParaRPr lang="ja-JP" altLang="en-US" sz="1200" dirty="0"/>
+            <a:endParaRPr lang="ja-JP" altLang="en-US" sz="1200" dirty="0">
+              <a:latin typeface="メイリオ"/>
+              <a:ea typeface="メイリオ"/>
+              <a:cs typeface="メイリオ"/>
+            </a:endParaRPr>
           </a:p>
         </p:txBody>
       </p:sp>
@@ -4359,6 +4470,7 @@
                 <a:uFillTx/>
                 <a:latin typeface="メイリオ"/>
                 <a:ea typeface="メイリオ"/>
+                <a:cs typeface="メイリオ"/>
               </a:rPr>
               <a:t>現状と課題：イベントの後、離れた方・未入会の方とのつながりが切れる</a:t>
             </a:r>
@@ -4369,6 +4481,8 @@
               <a:effectLst/>
               <a:uFillTx/>
               <a:latin typeface="メイリオ"/>
+              <a:ea typeface="メイリオ"/>
+              <a:cs typeface="メイリオ"/>
             </a:endParaRPr>
           </a:p>
         </p:txBody>
@@ -4430,6 +4544,7 @@
               <a:uFillTx/>
               <a:latin typeface="メイリオ"/>
               <a:ea typeface="メイリオ"/>
+              <a:cs typeface="メイリオ"/>
             </a:endParaRPr>
           </a:p>
         </p:txBody>
@@ -4486,6 +4601,7 @@
               <a:uFillTx/>
               <a:latin typeface="メイリオ"/>
               <a:ea typeface="メイリオ"/>
+              <a:cs typeface="メイリオ"/>
             </a:endParaRPr>
           </a:p>
         </p:txBody>
@@ -4563,6 +4679,7 @@
                 <a:uFillTx/>
                 <a:latin typeface="メイリオ" panose="020B0604030504040204" pitchFamily="50" charset="-128"/>
                 <a:ea typeface="メイリオ" panose="020B0604030504040204" pitchFamily="50" charset="-128"/>
+                <a:cs typeface="メイリオ"/>
               </a:rPr>
               <a:t>イベントで集めた方を、次のイベントまで追う仕組みが無い</a:t>
             </a:r>
@@ -4570,6 +4687,8 @@
               <a:effectLst/>
               <a:uFillTx/>
               <a:latin typeface="メイリオ"/>
+              <a:ea typeface="メイリオ"/>
+              <a:cs typeface="メイリオ"/>
             </a:endParaRPr>
           </a:p>
         </p:txBody>
@@ -4583,7 +4702,7 @@
         <p:spPr>
           <a:xfrm>
             <a:off x="502920" y="1783080"/>
-            <a:ext cx="1545336" cy="777240"/>
+            <a:ext cx="1545336" cy="914400"/>
           </a:xfrm>
           <a:prstGeom prst="rect">
             <a:avLst/>
@@ -4608,16 +4727,21 @@
               <a:buNone/>
             </a:pPr>
             <a:r>
-              <a:rPr lang="ja-JP" altLang="en-US" sz="1300" b="1" dirty="0">
+              <a:rPr lang="ja-JP" altLang="en-US" sz="1400" b="1" dirty="0">
                 <a:solidFill>
                   <a:srgbClr val="FFFFFF"/>
                 </a:solidFill>
                 <a:latin typeface="メイリオ" panose="020B0604030504040204" pitchFamily="50" charset="-128"/>
                 <a:ea typeface="メイリオ" panose="020B0604030504040204" pitchFamily="50" charset="-128"/>
+                <a:cs typeface="メイリオ"/>
               </a:rPr>
               <a:t>広告</a:t>
             </a:r>
-            <a:endParaRPr lang="ja-JP" altLang="en-US" sz="1200" dirty="0"/>
+            <a:endParaRPr lang="ja-JP" altLang="en-US" sz="1200" dirty="0">
+              <a:latin typeface="メイリオ"/>
+              <a:ea typeface="メイリオ"/>
+              <a:cs typeface="メイリオ"/>
+            </a:endParaRPr>
           </a:p>
         </p:txBody>
       </p:sp>
@@ -4630,7 +4754,7 @@
         <p:spPr>
           <a:xfrm>
             <a:off x="2048256" y="1783080"/>
-            <a:ext cx="292608" cy="777240"/>
+            <a:ext cx="292608" cy="914400"/>
           </a:xfrm>
           <a:prstGeom prst="rect">
             <a:avLst/>
@@ -4656,10 +4780,15 @@
                 </a:solidFill>
                 <a:latin typeface="メイリオ" panose="020B0604030504040204" pitchFamily="50" charset="-128"/>
                 <a:ea typeface="メイリオ" panose="020B0604030504040204" pitchFamily="50" charset="-128"/>
+                <a:cs typeface="メイリオ"/>
               </a:rPr>
               <a:t>▶</a:t>
             </a:r>
-            <a:endParaRPr lang="ja-JP" altLang="en-US" sz="1200" dirty="0"/>
+            <a:endParaRPr lang="ja-JP" altLang="en-US" sz="1200" dirty="0">
+              <a:latin typeface="メイリオ"/>
+              <a:ea typeface="メイリオ"/>
+              <a:cs typeface="メイリオ"/>
+            </a:endParaRPr>
           </a:p>
         </p:txBody>
       </p:sp>
@@ -4672,7 +4801,7 @@
         <p:spPr>
           <a:xfrm>
             <a:off x="2340864" y="1783080"/>
-            <a:ext cx="1545336" cy="777240"/>
+            <a:ext cx="1545336" cy="914400"/>
           </a:xfrm>
           <a:prstGeom prst="rect">
             <a:avLst/>
@@ -4697,16 +4826,21 @@
               <a:buNone/>
             </a:pPr>
             <a:r>
-              <a:rPr lang="ja-JP" altLang="en-US" sz="1300" b="1" dirty="0">
+              <a:rPr lang="ja-JP" altLang="en-US" sz="1400" b="1" dirty="0">
                 <a:solidFill>
                   <a:srgbClr val="FFFFFF"/>
                 </a:solidFill>
                 <a:latin typeface="メイリオ" panose="020B0604030504040204" pitchFamily="50" charset="-128"/>
                 <a:ea typeface="メイリオ" panose="020B0604030504040204" pitchFamily="50" charset="-128"/>
+                <a:cs typeface="メイリオ"/>
               </a:rPr>
               <a:t>LP</a:t>
             </a:r>
-            <a:endParaRPr lang="ja-JP" altLang="en-US" sz="1200" dirty="0"/>
+            <a:endParaRPr lang="ja-JP" altLang="en-US" sz="1200" dirty="0">
+              <a:latin typeface="メイリオ"/>
+              <a:ea typeface="メイリオ"/>
+              <a:cs typeface="メイリオ"/>
+            </a:endParaRPr>
           </a:p>
         </p:txBody>
       </p:sp>
@@ -4719,7 +4853,7 @@
         <p:spPr>
           <a:xfrm>
             <a:off x="3886200" y="1783080"/>
-            <a:ext cx="292608" cy="777240"/>
+            <a:ext cx="292608" cy="914400"/>
           </a:xfrm>
           <a:prstGeom prst="rect">
             <a:avLst/>
@@ -4745,10 +4879,15 @@
                 </a:solidFill>
                 <a:latin typeface="メイリオ" panose="020B0604030504040204" pitchFamily="50" charset="-128"/>
                 <a:ea typeface="メイリオ" panose="020B0604030504040204" pitchFamily="50" charset="-128"/>
+                <a:cs typeface="メイリオ"/>
               </a:rPr>
               <a:t>▶</a:t>
             </a:r>
-            <a:endParaRPr lang="ja-JP" altLang="en-US" sz="1200" dirty="0"/>
+            <a:endParaRPr lang="ja-JP" altLang="en-US" sz="1200" dirty="0">
+              <a:latin typeface="メイリオ"/>
+              <a:ea typeface="メイリオ"/>
+              <a:cs typeface="メイリオ"/>
+            </a:endParaRPr>
           </a:p>
         </p:txBody>
       </p:sp>
@@ -4761,7 +4900,7 @@
         <p:spPr>
           <a:xfrm>
             <a:off x="4178808" y="1783080"/>
-            <a:ext cx="1545336" cy="777240"/>
+            <a:ext cx="1545336" cy="914400"/>
           </a:xfrm>
           <a:prstGeom prst="rect">
             <a:avLst/>
@@ -4786,16 +4925,21 @@
               <a:buNone/>
             </a:pPr>
             <a:r>
-              <a:rPr lang="ja-JP" altLang="en-US" sz="1300" b="1" dirty="0">
+              <a:rPr lang="ja-JP" altLang="en-US" sz="1400" b="1" dirty="0">
                 <a:solidFill>
                   <a:srgbClr val="FFFFFF"/>
                 </a:solidFill>
                 <a:latin typeface="メイリオ" panose="020B0604030504040204" pitchFamily="50" charset="-128"/>
                 <a:ea typeface="メイリオ" panose="020B0604030504040204" pitchFamily="50" charset="-128"/>
+                <a:cs typeface="メイリオ"/>
               </a:rPr>
               <a:t>予約</a:t>
             </a:r>
-            <a:endParaRPr lang="ja-JP" altLang="en-US" sz="1200" dirty="0"/>
+            <a:endParaRPr lang="ja-JP" altLang="en-US" sz="1200" dirty="0">
+              <a:latin typeface="メイリオ"/>
+              <a:ea typeface="メイリオ"/>
+              <a:cs typeface="メイリオ"/>
+            </a:endParaRPr>
           </a:p>
         </p:txBody>
       </p:sp>
@@ -4808,7 +4952,7 @@
         <p:spPr>
           <a:xfrm>
             <a:off x="5724144" y="1783080"/>
-            <a:ext cx="292608" cy="777240"/>
+            <a:ext cx="292608" cy="914400"/>
           </a:xfrm>
           <a:prstGeom prst="rect">
             <a:avLst/>
@@ -4834,10 +4978,15 @@
                 </a:solidFill>
                 <a:latin typeface="メイリオ" panose="020B0604030504040204" pitchFamily="50" charset="-128"/>
                 <a:ea typeface="メイリオ" panose="020B0604030504040204" pitchFamily="50" charset="-128"/>
+                <a:cs typeface="メイリオ"/>
               </a:rPr>
               <a:t>▶</a:t>
             </a:r>
-            <a:endParaRPr lang="ja-JP" altLang="en-US" sz="1200" dirty="0"/>
+            <a:endParaRPr lang="ja-JP" altLang="en-US" sz="1200" dirty="0">
+              <a:latin typeface="メイリオ"/>
+              <a:ea typeface="メイリオ"/>
+              <a:cs typeface="メイリオ"/>
+            </a:endParaRPr>
           </a:p>
         </p:txBody>
       </p:sp>
@@ -4850,7 +4999,7 @@
         <p:spPr>
           <a:xfrm>
             <a:off x="6016752" y="1783080"/>
-            <a:ext cx="1545336" cy="777240"/>
+            <a:ext cx="1545336" cy="914400"/>
           </a:xfrm>
           <a:prstGeom prst="rect">
             <a:avLst/>
@@ -4875,16 +5024,21 @@
               <a:buNone/>
             </a:pPr>
             <a:r>
-              <a:rPr lang="ja-JP" altLang="en-US" sz="1300" b="1" dirty="0">
+              <a:rPr lang="ja-JP" altLang="en-US" sz="1400" b="1" dirty="0">
                 <a:solidFill>
                   <a:srgbClr val="FFFFFF"/>
                 </a:solidFill>
                 <a:latin typeface="メイリオ" panose="020B0604030504040204" pitchFamily="50" charset="-128"/>
                 <a:ea typeface="メイリオ" panose="020B0604030504040204" pitchFamily="50" charset="-128"/>
+                <a:cs typeface="メイリオ"/>
               </a:rPr>
               <a:t>イベント参加</a:t>
             </a:r>
-            <a:endParaRPr lang="ja-JP" altLang="en-US" sz="1200" dirty="0"/>
+            <a:endParaRPr lang="ja-JP" altLang="en-US" sz="1200" dirty="0">
+              <a:latin typeface="メイリオ"/>
+              <a:ea typeface="メイリオ"/>
+              <a:cs typeface="メイリオ"/>
+            </a:endParaRPr>
           </a:p>
         </p:txBody>
       </p:sp>
@@ -4897,7 +5051,7 @@
         <p:spPr>
           <a:xfrm>
             <a:off x="7562088" y="1783080"/>
-            <a:ext cx="292608" cy="777240"/>
+            <a:ext cx="292608" cy="914400"/>
           </a:xfrm>
           <a:prstGeom prst="rect">
             <a:avLst/>
@@ -4923,10 +5077,15 @@
                 </a:solidFill>
                 <a:latin typeface="メイリオ" panose="020B0604030504040204" pitchFamily="50" charset="-128"/>
                 <a:ea typeface="メイリオ" panose="020B0604030504040204" pitchFamily="50" charset="-128"/>
+                <a:cs typeface="メイリオ"/>
               </a:rPr>
               <a:t>▶</a:t>
             </a:r>
-            <a:endParaRPr lang="ja-JP" altLang="en-US" sz="1200" dirty="0"/>
+            <a:endParaRPr lang="ja-JP" altLang="en-US" sz="1200" dirty="0">
+              <a:latin typeface="メイリオ"/>
+              <a:ea typeface="メイリオ"/>
+              <a:cs typeface="メイリオ"/>
+            </a:endParaRPr>
           </a:p>
         </p:txBody>
       </p:sp>
@@ -4939,7 +5098,7 @@
         <p:spPr>
           <a:xfrm>
             <a:off x="7854696" y="1783080"/>
-            <a:ext cx="1545336" cy="777240"/>
+            <a:ext cx="1545336" cy="914400"/>
           </a:xfrm>
           <a:prstGeom prst="rect">
             <a:avLst/>
@@ -4964,16 +5123,21 @@
               <a:buNone/>
             </a:pPr>
             <a:r>
-              <a:rPr lang="ja-JP" altLang="en-US" sz="1300" b="1" dirty="0">
+              <a:rPr lang="ja-JP" altLang="en-US" sz="1400" b="1" dirty="0">
                 <a:solidFill>
                   <a:srgbClr val="FFFFFF"/>
                 </a:solidFill>
                 <a:latin typeface="メイリオ" panose="020B0604030504040204" pitchFamily="50" charset="-128"/>
                 <a:ea typeface="メイリオ" panose="020B0604030504040204" pitchFamily="50" charset="-128"/>
+                <a:cs typeface="メイリオ"/>
               </a:rPr>
               <a:t>サロン入会</a:t>
             </a:r>
-            <a:endParaRPr lang="ja-JP" altLang="en-US" sz="1200" dirty="0"/>
+            <a:endParaRPr lang="ja-JP" altLang="en-US" sz="1200" dirty="0">
+              <a:latin typeface="メイリオ"/>
+              <a:ea typeface="メイリオ"/>
+              <a:cs typeface="メイリオ"/>
+            </a:endParaRPr>
           </a:p>
         </p:txBody>
       </p:sp>
@@ -4985,7 +5149,7 @@
         </p:nvSpPr>
         <p:spPr>
           <a:xfrm>
-            <a:off x="2930652" y="2606040"/>
+            <a:off x="2930652" y="2743200"/>
             <a:ext cx="365760" cy="292608"/>
           </a:xfrm>
           <a:prstGeom prst="rect">
@@ -5012,10 +5176,15 @@
                 </a:solidFill>
                 <a:latin typeface="メイリオ" panose="020B0604030504040204" pitchFamily="50" charset="-128"/>
                 <a:ea typeface="メイリオ" panose="020B0604030504040204" pitchFamily="50" charset="-128"/>
+                <a:cs typeface="メイリオ"/>
               </a:rPr>
               <a:t>▼</a:t>
             </a:r>
-            <a:endParaRPr lang="ja-JP" altLang="en-US" sz="1200" dirty="0"/>
+            <a:endParaRPr lang="ja-JP" altLang="en-US" sz="1200" dirty="0">
+              <a:latin typeface="メイリオ"/>
+              <a:ea typeface="メイリオ"/>
+              <a:cs typeface="メイリオ"/>
+            </a:endParaRPr>
           </a:p>
         </p:txBody>
       </p:sp>
@@ -5027,8 +5196,8 @@
         </p:nvSpPr>
         <p:spPr>
           <a:xfrm>
-            <a:off x="1604772" y="2926080"/>
-            <a:ext cx="3017520" cy="1097280"/>
+            <a:off x="1467612" y="3063240"/>
+            <a:ext cx="3291840" cy="1325880"/>
           </a:xfrm>
           <a:prstGeom prst="rect">
             <a:avLst/>
@@ -5053,16 +5222,21 @@
               <a:buNone/>
             </a:pPr>
             <a:r>
-              <a:rPr lang="ja-JP" altLang="en-US" sz="1300" b="1" dirty="0">
+              <a:rPr lang="ja-JP" altLang="en-US" sz="1400" b="1" dirty="0">
                 <a:solidFill>
                   <a:srgbClr val="C00000"/>
                 </a:solidFill>
                 <a:latin typeface="メイリオ" panose="020B0604030504040204" pitchFamily="50" charset="-128"/>
                 <a:ea typeface="メイリオ" panose="020B0604030504040204" pitchFamily="50" charset="-128"/>
+                <a:cs typeface="メイリオ"/>
               </a:rPr>
               <a:t>申し込まずに離れた方</a:t>
             </a:r>
-            <a:endParaRPr lang="ja-JP" altLang="en-US" sz="1200" dirty="0"/>
+            <a:endParaRPr lang="ja-JP" altLang="en-US" sz="1200" dirty="0">
+              <a:latin typeface="メイリオ"/>
+              <a:ea typeface="メイリオ"/>
+              <a:cs typeface="メイリオ"/>
+            </a:endParaRPr>
           </a:p>
           <a:p>
             <a:pPr algn="ctr">
@@ -5072,16 +5246,21 @@
               <a:buNone/>
             </a:pPr>
             <a:r>
-              <a:rPr lang="ja-JP" altLang="en-US" sz="1200" b="0" dirty="0">
+              <a:rPr lang="ja-JP" altLang="en-US" sz="1300" b="0" dirty="0">
                 <a:solidFill>
                   <a:srgbClr val="333333"/>
                 </a:solidFill>
                 <a:latin typeface="メイリオ" panose="020B0604030504040204" pitchFamily="50" charset="-128"/>
                 <a:ea typeface="メイリオ" panose="020B0604030504040204" pitchFamily="50" charset="-128"/>
+                <a:cs typeface="メイリオ"/>
               </a:rPr>
-              <a:t>次のイベントまで、案内する手段が無い</a:t>
+              <a:t>次のイベントまで案内する手段が無い</a:t>
             </a:r>
-            <a:endParaRPr lang="ja-JP" altLang="en-US" sz="1200" dirty="0"/>
+            <a:endParaRPr lang="ja-JP" altLang="en-US" sz="1200" dirty="0">
+              <a:latin typeface="メイリオ"/>
+              <a:ea typeface="メイリオ"/>
+              <a:cs typeface="メイリオ"/>
+            </a:endParaRPr>
           </a:p>
         </p:txBody>
       </p:sp>
@@ -5093,7 +5272,7 @@
         </p:nvSpPr>
         <p:spPr>
           <a:xfrm>
-            <a:off x="6606540" y="2606040"/>
+            <a:off x="6606540" y="2743200"/>
             <a:ext cx="365760" cy="292608"/>
           </a:xfrm>
           <a:prstGeom prst="rect">
@@ -5120,10 +5299,15 @@
                 </a:solidFill>
                 <a:latin typeface="メイリオ" panose="020B0604030504040204" pitchFamily="50" charset="-128"/>
                 <a:ea typeface="メイリオ" panose="020B0604030504040204" pitchFamily="50" charset="-128"/>
+                <a:cs typeface="メイリオ"/>
               </a:rPr>
               <a:t>▼</a:t>
             </a:r>
-            <a:endParaRPr lang="ja-JP" altLang="en-US" sz="1200" dirty="0"/>
+            <a:endParaRPr lang="ja-JP" altLang="en-US" sz="1200" dirty="0">
+              <a:latin typeface="メイリオ"/>
+              <a:ea typeface="メイリオ"/>
+              <a:cs typeface="メイリオ"/>
+            </a:endParaRPr>
           </a:p>
         </p:txBody>
       </p:sp>
@@ -5135,8 +5319,8 @@
         </p:nvSpPr>
         <p:spPr>
           <a:xfrm>
-            <a:off x="5280660" y="2926080"/>
-            <a:ext cx="3017520" cy="1097280"/>
+            <a:off x="5143500" y="3063240"/>
+            <a:ext cx="3291840" cy="1325880"/>
           </a:xfrm>
           <a:prstGeom prst="rect">
             <a:avLst/>
@@ -5161,16 +5345,21 @@
               <a:buNone/>
             </a:pPr>
             <a:r>
-              <a:rPr lang="ja-JP" altLang="en-US" sz="1300" b="1" dirty="0">
+              <a:rPr lang="ja-JP" altLang="en-US" sz="1400" b="1" dirty="0">
                 <a:solidFill>
                   <a:srgbClr val="C00000"/>
                 </a:solidFill>
                 <a:latin typeface="メイリオ" panose="020B0604030504040204" pitchFamily="50" charset="-128"/>
                 <a:ea typeface="メイリオ" panose="020B0604030504040204" pitchFamily="50" charset="-128"/>
+                <a:cs typeface="メイリオ"/>
               </a:rPr>
               <a:t>参加して入会していない方</a:t>
             </a:r>
-            <a:endParaRPr lang="ja-JP" altLang="en-US" sz="1200" dirty="0"/>
+            <a:endParaRPr lang="ja-JP" altLang="en-US" sz="1200" dirty="0">
+              <a:latin typeface="メイリオ"/>
+              <a:ea typeface="メイリオ"/>
+              <a:cs typeface="メイリオ"/>
+            </a:endParaRPr>
           </a:p>
           <a:p>
             <a:pPr algn="ctr">
@@ -5180,16 +5369,21 @@
               <a:buNone/>
             </a:pPr>
             <a:r>
-              <a:rPr lang="ja-JP" altLang="en-US" sz="1200" b="0" dirty="0">
+              <a:rPr lang="ja-JP" altLang="en-US" sz="1300" b="0" dirty="0">
                 <a:solidFill>
                   <a:srgbClr val="333333"/>
                 </a:solidFill>
                 <a:latin typeface="メイリオ" panose="020B0604030504040204" pitchFamily="50" charset="-128"/>
                 <a:ea typeface="メイリオ" panose="020B0604030504040204" pitchFamily="50" charset="-128"/>
+                <a:cs typeface="メイリオ"/>
               </a:rPr>
-              <a:t>入会まで、案内を続ける手段が無い</a:t>
+              <a:t>入会まで案内を続ける手段が無い</a:t>
             </a:r>
-            <a:endParaRPr lang="ja-JP" altLang="en-US" sz="1200" dirty="0"/>
+            <a:endParaRPr lang="ja-JP" altLang="en-US" sz="1200" dirty="0">
+              <a:latin typeface="メイリオ"/>
+              <a:ea typeface="メイリオ"/>
+              <a:cs typeface="メイリオ"/>
+            </a:endParaRPr>
           </a:p>
         </p:txBody>
       </p:sp>
@@ -5201,8 +5395,8 @@
         </p:nvSpPr>
         <p:spPr>
           <a:xfrm>
-            <a:off x="502920" y="4526280"/>
-            <a:ext cx="8897112" cy="685800"/>
+            <a:off x="502920" y="4937760"/>
+            <a:ext cx="8897112" cy="777240"/>
           </a:xfrm>
           <a:prstGeom prst="rect">
             <a:avLst/>
@@ -5230,20 +5424,26 @@
                 </a:solidFill>
                 <a:latin typeface="メイリオ" panose="020B0604030504040204" pitchFamily="50" charset="-128"/>
                 <a:ea typeface="メイリオ" panose="020B0604030504040204" pitchFamily="50" charset="-128"/>
+                <a:cs typeface="メイリオ"/>
               </a:rPr>
               <a:t>次のイベントでは、</a:t>
             </a:r>
             <a:r>
-              <a:rPr lang="ja-JP" altLang="en-US" sz="1400" b="1" dirty="0">
+              <a:rPr lang="ja-JP" altLang="en-US" sz="1500" b="1" dirty="0">
                 <a:solidFill>
                   <a:srgbClr val="C00000"/>
                 </a:solidFill>
                 <a:latin typeface="メイリオ" panose="020B0604030504040204" pitchFamily="50" charset="-128"/>
                 <a:ea typeface="メイリオ" panose="020B0604030504040204" pitchFamily="50" charset="-128"/>
+                <a:cs typeface="メイリオ"/>
               </a:rPr>
               <a:t>また広告で集め直している</a:t>
             </a:r>
-            <a:endParaRPr lang="ja-JP" altLang="en-US" sz="1200" dirty="0"/>
+            <a:endParaRPr lang="ja-JP" altLang="en-US" sz="1200" dirty="0">
+              <a:latin typeface="メイリオ"/>
+              <a:ea typeface="メイリオ"/>
+              <a:cs typeface="メイリオ"/>
+            </a:endParaRPr>
           </a:p>
         </p:txBody>
       </p:sp>
@@ -5316,6 +5516,7 @@
                 <a:uFillTx/>
                 <a:latin typeface="メイリオ"/>
                 <a:ea typeface="メイリオ"/>
+                <a:cs typeface="メイリオ"/>
               </a:rPr>
               <a:t>本質課題</a:t>
             </a:r>
@@ -5326,6 +5527,8 @@
               <a:effectLst/>
               <a:uFillTx/>
               <a:latin typeface="メイリオ"/>
+              <a:ea typeface="メイリオ"/>
+              <a:cs typeface="メイリオ"/>
             </a:endParaRPr>
           </a:p>
         </p:txBody>
@@ -5387,6 +5590,7 @@
               <a:uFillTx/>
               <a:latin typeface="メイリオ"/>
               <a:ea typeface="メイリオ"/>
+              <a:cs typeface="メイリオ"/>
             </a:endParaRPr>
           </a:p>
         </p:txBody>
@@ -5443,6 +5647,7 @@
               <a:uFillTx/>
               <a:latin typeface="メイリオ"/>
               <a:ea typeface="メイリオ"/>
+              <a:cs typeface="メイリオ"/>
             </a:endParaRPr>
           </a:p>
         </p:txBody>
@@ -5520,6 +5725,7 @@
                 <a:uFillTx/>
                 <a:latin typeface="メイリオ" panose="020B0604030504040204" pitchFamily="50" charset="-128"/>
                 <a:ea typeface="メイリオ" panose="020B0604030504040204" pitchFamily="50" charset="-128"/>
+                <a:cs typeface="メイリオ"/>
               </a:rPr>
               <a:t>イベントのたびに集めた方が、手元に残っていない</a:t>
             </a:r>
@@ -5527,6 +5733,8 @@
               <a:effectLst/>
               <a:uFillTx/>
               <a:latin typeface="メイリオ"/>
+              <a:ea typeface="メイリオ"/>
+              <a:cs typeface="メイリオ"/>
             </a:endParaRPr>
           </a:p>
         </p:txBody>
@@ -5568,10 +5776,15 @@
                 </a:solidFill>
                 <a:latin typeface="メイリオ" panose="020B0604030504040204" pitchFamily="50" charset="-128"/>
                 <a:ea typeface="メイリオ" panose="020B0604030504040204" pitchFamily="50" charset="-128"/>
+                <a:cs typeface="メイリオ"/>
               </a:rPr>
               <a:t>KEY TAKEAWAY</a:t>
             </a:r>
-            <a:endParaRPr lang="ja-JP" altLang="en-US" sz="1200" dirty="0"/>
+            <a:endParaRPr lang="ja-JP" altLang="en-US" sz="1200" dirty="0">
+              <a:latin typeface="メイリオ"/>
+              <a:ea typeface="メイリオ"/>
+              <a:cs typeface="メイリオ"/>
+            </a:endParaRPr>
           </a:p>
         </p:txBody>
       </p:sp>
@@ -5617,10 +5830,15 @@
                 </a:solidFill>
                 <a:latin typeface="メイリオ" panose="020B0604030504040204" pitchFamily="50" charset="-128"/>
                 <a:ea typeface="メイリオ" panose="020B0604030504040204" pitchFamily="50" charset="-128"/>
+                <a:cs typeface="メイリオ"/>
               </a:rPr>
               <a:t>ためて追い続ける場所が無い</a:t>
             </a:r>
-            <a:endParaRPr lang="ja-JP" altLang="en-US" sz="1200" dirty="0"/>
+            <a:endParaRPr lang="ja-JP" altLang="en-US" sz="1200" dirty="0">
+              <a:latin typeface="メイリオ"/>
+              <a:ea typeface="メイリオ"/>
+              <a:cs typeface="メイリオ"/>
+            </a:endParaRPr>
           </a:p>
           <a:p>
             <a:pPr algn="ctr">
@@ -5636,10 +5854,15 @@
                 </a:solidFill>
                 <a:latin typeface="メイリオ" panose="020B0604030504040204" pitchFamily="50" charset="-128"/>
                 <a:ea typeface="メイリオ" panose="020B0604030504040204" pitchFamily="50" charset="-128"/>
+                <a:cs typeface="メイリオ"/>
               </a:rPr>
               <a:t>この場所を、LINE公式アカウントでつくる</a:t>
             </a:r>
-            <a:endParaRPr lang="ja-JP" altLang="en-US" sz="1200" dirty="0"/>
+            <a:endParaRPr lang="ja-JP" altLang="en-US" sz="1200" dirty="0">
+              <a:latin typeface="メイリオ"/>
+              <a:ea typeface="メイリオ"/>
+              <a:cs typeface="メイリオ"/>
+            </a:endParaRPr>
           </a:p>
         </p:txBody>
       </p:sp>
@@ -5678,10 +5901,15 @@
                 </a:solidFill>
                 <a:latin typeface="メイリオ" panose="020B0604030504040204" pitchFamily="50" charset="-128"/>
                 <a:ea typeface="メイリオ" panose="020B0604030504040204" pitchFamily="50" charset="-128"/>
+                <a:cs typeface="メイリオ"/>
               </a:rPr>
               <a:t>3つの課題と打ち手</a:t>
             </a:r>
-            <a:endParaRPr lang="ja-JP" altLang="en-US" sz="1200" dirty="0"/>
+            <a:endParaRPr lang="ja-JP" altLang="en-US" sz="1200" dirty="0">
+              <a:latin typeface="メイリオ"/>
+              <a:ea typeface="メイリオ"/>
+              <a:cs typeface="メイリオ"/>
+            </a:endParaRPr>
           </a:p>
         </p:txBody>
       </p:sp>
@@ -5715,7 +5943,11 @@
             <a:pPr algn="l">
               <a:buNone/>
             </a:pPr>
-            <a:endParaRPr lang="ja-JP" altLang="en-US" sz="1200" dirty="0"/>
+            <a:endParaRPr lang="ja-JP" altLang="en-US" sz="1200" dirty="0">
+              <a:latin typeface="メイリオ"/>
+              <a:ea typeface="メイリオ"/>
+              <a:cs typeface="メイリオ"/>
+            </a:endParaRPr>
           </a:p>
         </p:txBody>
       </p:sp>
@@ -5754,10 +5986,15 @@
                 </a:solidFill>
                 <a:latin typeface="メイリオ" panose="020B0604030504040204" pitchFamily="50" charset="-128"/>
                 <a:ea typeface="メイリオ" panose="020B0604030504040204" pitchFamily="50" charset="-128"/>
+                <a:cs typeface="メイリオ"/>
               </a:rPr>
               <a:t>01 集める</a:t>
             </a:r>
-            <a:endParaRPr lang="ja-JP" altLang="en-US" sz="1200" dirty="0"/>
+            <a:endParaRPr lang="ja-JP" altLang="en-US" sz="1200" dirty="0">
+              <a:latin typeface="メイリオ"/>
+              <a:ea typeface="メイリオ"/>
+              <a:cs typeface="メイリオ"/>
+            </a:endParaRPr>
           </a:p>
         </p:txBody>
       </p:sp>
@@ -5799,10 +6036,15 @@
                 </a:solidFill>
                 <a:latin typeface="メイリオ" panose="020B0604030504040204" pitchFamily="50" charset="-128"/>
                 <a:ea typeface="メイリオ" panose="020B0604030504040204" pitchFamily="50" charset="-128"/>
+                <a:cs typeface="メイリオ"/>
               </a:rPr>
               <a:t>離れる方・予約した方を、友だちにする手段が無い</a:t>
             </a:r>
-            <a:endParaRPr lang="ja-JP" altLang="en-US" sz="1200" dirty="0"/>
+            <a:endParaRPr lang="ja-JP" altLang="en-US" sz="1200" dirty="0">
+              <a:latin typeface="メイリオ"/>
+              <a:ea typeface="メイリオ"/>
+              <a:cs typeface="メイリオ"/>
+            </a:endParaRPr>
           </a:p>
         </p:txBody>
       </p:sp>
@@ -5845,10 +6087,15 @@
                 </a:solidFill>
                 <a:latin typeface="メイリオ" panose="020B0604030504040204" pitchFamily="50" charset="-128"/>
                 <a:ea typeface="メイリオ" panose="020B0604030504040204" pitchFamily="50" charset="-128"/>
+                <a:cs typeface="メイリオ"/>
               </a:rPr>
               <a:t>→ ポップアップツール・サンクスLINE誘導</a:t>
             </a:r>
-            <a:endParaRPr lang="ja-JP" altLang="en-US" sz="1200" dirty="0"/>
+            <a:endParaRPr lang="ja-JP" altLang="en-US" sz="1200" dirty="0">
+              <a:latin typeface="メイリオ"/>
+              <a:ea typeface="メイリオ"/>
+              <a:cs typeface="メイリオ"/>
+            </a:endParaRPr>
           </a:p>
         </p:txBody>
       </p:sp>
@@ -5882,7 +6129,11 @@
             <a:pPr algn="l">
               <a:buNone/>
             </a:pPr>
-            <a:endParaRPr lang="ja-JP" altLang="en-US" sz="1200" dirty="0"/>
+            <a:endParaRPr lang="ja-JP" altLang="en-US" sz="1200" dirty="0">
+              <a:latin typeface="メイリオ"/>
+              <a:ea typeface="メイリオ"/>
+              <a:cs typeface="メイリオ"/>
+            </a:endParaRPr>
           </a:p>
         </p:txBody>
       </p:sp>
@@ -5921,10 +6172,15 @@
                 </a:solidFill>
                 <a:latin typeface="メイリオ" panose="020B0604030504040204" pitchFamily="50" charset="-128"/>
                 <a:ea typeface="メイリオ" panose="020B0604030504040204" pitchFamily="50" charset="-128"/>
+                <a:cs typeface="メイリオ"/>
               </a:rPr>
               <a:t>02 追う</a:t>
             </a:r>
-            <a:endParaRPr lang="ja-JP" altLang="en-US" sz="1200" dirty="0"/>
+            <a:endParaRPr lang="ja-JP" altLang="en-US" sz="1200" dirty="0">
+              <a:latin typeface="メイリオ"/>
+              <a:ea typeface="メイリオ"/>
+              <a:cs typeface="メイリオ"/>
+            </a:endParaRPr>
           </a:p>
         </p:txBody>
       </p:sp>
@@ -5966,10 +6222,15 @@
                 </a:solidFill>
                 <a:latin typeface="メイリオ" panose="020B0604030504040204" pitchFamily="50" charset="-128"/>
                 <a:ea typeface="メイリオ" panose="020B0604030504040204" pitchFamily="50" charset="-128"/>
+                <a:cs typeface="メイリオ"/>
               </a:rPr>
               <a:t>次のイベントまで、情報を届ける手段が無い</a:t>
             </a:r>
-            <a:endParaRPr lang="ja-JP" altLang="en-US" sz="1200" dirty="0"/>
+            <a:endParaRPr lang="ja-JP" altLang="en-US" sz="1200" dirty="0">
+              <a:latin typeface="メイリオ"/>
+              <a:ea typeface="メイリオ"/>
+              <a:cs typeface="メイリオ"/>
+            </a:endParaRPr>
           </a:p>
         </p:txBody>
       </p:sp>
@@ -6012,10 +6273,15 @@
                 </a:solidFill>
                 <a:latin typeface="メイリオ" panose="020B0604030504040204" pitchFamily="50" charset="-128"/>
                 <a:ea typeface="メイリオ" panose="020B0604030504040204" pitchFamily="50" charset="-128"/>
+                <a:cs typeface="メイリオ"/>
               </a:rPr>
               <a:t>→ 平常期の配信</a:t>
             </a:r>
-            <a:endParaRPr lang="ja-JP" altLang="en-US" sz="1200" dirty="0"/>
+            <a:endParaRPr lang="ja-JP" altLang="en-US" sz="1200" dirty="0">
+              <a:latin typeface="メイリオ"/>
+              <a:ea typeface="メイリオ"/>
+              <a:cs typeface="メイリオ"/>
+            </a:endParaRPr>
           </a:p>
         </p:txBody>
       </p:sp>
@@ -6049,7 +6315,11 @@
             <a:pPr algn="l">
               <a:buNone/>
             </a:pPr>
-            <a:endParaRPr lang="ja-JP" altLang="en-US" sz="1200" dirty="0"/>
+            <a:endParaRPr lang="ja-JP" altLang="en-US" sz="1200" dirty="0">
+              <a:latin typeface="メイリオ"/>
+              <a:ea typeface="メイリオ"/>
+              <a:cs typeface="メイリオ"/>
+            </a:endParaRPr>
           </a:p>
         </p:txBody>
       </p:sp>
@@ -6088,10 +6358,15 @@
                 </a:solidFill>
                 <a:latin typeface="メイリオ" panose="020B0604030504040204" pitchFamily="50" charset="-128"/>
                 <a:ea typeface="メイリオ" panose="020B0604030504040204" pitchFamily="50" charset="-128"/>
+                <a:cs typeface="メイリオ"/>
               </a:rPr>
               <a:t>03 つなげる</a:t>
             </a:r>
-            <a:endParaRPr lang="ja-JP" altLang="en-US" sz="1200" dirty="0"/>
+            <a:endParaRPr lang="ja-JP" altLang="en-US" sz="1200" dirty="0">
+              <a:latin typeface="メイリオ"/>
+              <a:ea typeface="メイリオ"/>
+              <a:cs typeface="メイリオ"/>
+            </a:endParaRPr>
           </a:p>
         </p:txBody>
       </p:sp>
@@ -6133,10 +6408,15 @@
                 </a:solidFill>
                 <a:latin typeface="メイリオ" panose="020B0604030504040204" pitchFamily="50" charset="-128"/>
                 <a:ea typeface="メイリオ" panose="020B0604030504040204" pitchFamily="50" charset="-128"/>
+                <a:cs typeface="メイリオ"/>
               </a:rPr>
               <a:t>参加した方に、入会を案内する手段が無い</a:t>
             </a:r>
-            <a:endParaRPr lang="ja-JP" altLang="en-US" sz="1200" dirty="0"/>
+            <a:endParaRPr lang="ja-JP" altLang="en-US" sz="1200" dirty="0">
+              <a:latin typeface="メイリオ"/>
+              <a:ea typeface="メイリオ"/>
+              <a:cs typeface="メイリオ"/>
+            </a:endParaRPr>
           </a:p>
         </p:txBody>
       </p:sp>
@@ -6179,10 +6459,15 @@
                 </a:solidFill>
                 <a:latin typeface="メイリオ" panose="020B0604030504040204" pitchFamily="50" charset="-128"/>
                 <a:ea typeface="メイリオ" panose="020B0604030504040204" pitchFamily="50" charset="-128"/>
+                <a:cs typeface="メイリオ"/>
               </a:rPr>
               <a:t>→ 参加後の入会の案内</a:t>
             </a:r>
-            <a:endParaRPr lang="ja-JP" altLang="en-US" sz="1200" dirty="0"/>
+            <a:endParaRPr lang="ja-JP" altLang="en-US" sz="1200" dirty="0">
+              <a:latin typeface="メイリオ"/>
+              <a:ea typeface="メイリオ"/>
+              <a:cs typeface="メイリオ"/>
+            </a:endParaRPr>
           </a:p>
         </p:txBody>
       </p:sp>
@@ -6255,6 +6540,7 @@
                 <a:uFillTx/>
                 <a:latin typeface="メイリオ"/>
                 <a:ea typeface="メイリオ"/>
+                <a:cs typeface="メイリオ"/>
               </a:rPr>
               <a:t>なぜLINEか：広告は毎回ゼロから、LINEは積み上がる</a:t>
             </a:r>
@@ -6265,6 +6551,8 @@
               <a:effectLst/>
               <a:uFillTx/>
               <a:latin typeface="メイリオ"/>
+              <a:ea typeface="メイリオ"/>
+              <a:cs typeface="メイリオ"/>
             </a:endParaRPr>
           </a:p>
         </p:txBody>
@@ -6326,6 +6614,7 @@
               <a:uFillTx/>
               <a:latin typeface="メイリオ"/>
               <a:ea typeface="メイリオ"/>
+              <a:cs typeface="メイリオ"/>
             </a:endParaRPr>
           </a:p>
         </p:txBody>
@@ -6382,6 +6671,7 @@
               <a:uFillTx/>
               <a:latin typeface="メイリオ"/>
               <a:ea typeface="メイリオ"/>
+              <a:cs typeface="メイリオ"/>
             </a:endParaRPr>
           </a:p>
         </p:txBody>
@@ -6459,6 +6749,7 @@
                 <a:uFillTx/>
                 <a:latin typeface="メイリオ" panose="020B0604030504040204" pitchFamily="50" charset="-128"/>
                 <a:ea typeface="メイリオ" panose="020B0604030504040204" pitchFamily="50" charset="-128"/>
+                <a:cs typeface="メイリオ"/>
               </a:rPr>
               <a:t>一度つながった方に、次のイベントまで何度でも届けられる</a:t>
             </a:r>
@@ -6466,6 +6757,8 @@
               <a:effectLst/>
               <a:uFillTx/>
               <a:latin typeface="メイリオ"/>
+              <a:ea typeface="メイリオ"/>
+              <a:cs typeface="メイリオ"/>
             </a:endParaRPr>
           </a:p>
         </p:txBody>
@@ -6480,7 +6773,7 @@
         </p:nvGraphicFramePr>
         <p:xfrm>
           <a:off x="502920" y="1691640"/>
-          <a:ext cx="8897112" cy="2770632"/>
+          <a:ext cx="8897112" cy="3319272"/>
         </p:xfrm>
         <a:graphic>
           <a:graphicData uri="http://schemas.openxmlformats.org/drawingml/2006/table">
@@ -6500,7 +6793,11 @@
                       <a:pPr algn="ctr">
                         <a:buNone/>
                       </a:pPr>
-                      <a:endParaRPr lang="ja-JP" altLang="en-US" sz="1300" dirty="0"/>
+                      <a:endParaRPr lang="ja-JP" altLang="en-US" sz="1300" dirty="0">
+                        <a:latin typeface="メイリオ"/>
+                        <a:ea typeface="メイリオ"/>
+                        <a:cs typeface="メイリオ"/>
+                      </a:endParaRPr>
                     </a:p>
                   </a:txBody>
                   <a:tcPr marL="73152" marR="73152" marT="27432" marB="27432" anchor="ctr">
@@ -6560,10 +6857,15 @@
                           </a:solidFill>
                           <a:latin typeface="メイリオ" panose="020B0604030504040204" pitchFamily="50" charset="-128"/>
                           <a:ea typeface="メイリオ" panose="020B0604030504040204" pitchFamily="50" charset="-128"/>
+                          <a:cs typeface="メイリオ"/>
                         </a:rPr>
                         <a:t>広告</a:t>
                       </a:r>
-                      <a:endParaRPr lang="ja-JP" altLang="en-US" sz="1300" dirty="0"/>
+                      <a:endParaRPr lang="ja-JP" altLang="en-US" sz="1300" dirty="0">
+                        <a:latin typeface="メイリオ"/>
+                        <a:ea typeface="メイリオ"/>
+                        <a:cs typeface="メイリオ"/>
+                      </a:endParaRPr>
                     </a:p>
                   </a:txBody>
                   <a:tcPr marL="73152" marR="73152" marT="27432" marB="27432" anchor="ctr">
@@ -6623,10 +6925,15 @@
                           </a:solidFill>
                           <a:latin typeface="メイリオ" panose="020B0604030504040204" pitchFamily="50" charset="-128"/>
                           <a:ea typeface="メイリオ" panose="020B0604030504040204" pitchFamily="50" charset="-128"/>
+                          <a:cs typeface="メイリオ"/>
                         </a:rPr>
                         <a:t>LINE公式アカウント</a:t>
                       </a:r>
-                      <a:endParaRPr lang="ja-JP" altLang="en-US" sz="1300" dirty="0"/>
+                      <a:endParaRPr lang="ja-JP" altLang="en-US" sz="1300" dirty="0">
+                        <a:latin typeface="メイリオ"/>
+                        <a:ea typeface="メイリオ"/>
+                        <a:cs typeface="メイリオ"/>
+                      </a:endParaRPr>
                     </a:p>
                   </a:txBody>
                   <a:tcPr marL="73152" marR="73152" marT="27432" marB="27432" anchor="ctr">
@@ -6672,7 +6979,7 @@
                   </a:tcPr>
                 </a:tc>
               </a:tr>
-              <a:tr h="777240">
+              <a:tr h="960120">
                 <a:tc>
                   <a:txBody>
                     <a:bodyPr/>
@@ -6688,10 +6995,15 @@
                           </a:solidFill>
                           <a:latin typeface="メイリオ" panose="020B0604030504040204" pitchFamily="50" charset="-128"/>
                           <a:ea typeface="メイリオ" panose="020B0604030504040204" pitchFamily="50" charset="-128"/>
+                          <a:cs typeface="メイリオ"/>
                         </a:rPr>
                         <a:t>届く相手</a:t>
                       </a:r>
-                      <a:endParaRPr lang="ja-JP" altLang="en-US" sz="1300" dirty="0"/>
+                      <a:endParaRPr lang="ja-JP" altLang="en-US" sz="1300" dirty="0">
+                        <a:latin typeface="メイリオ"/>
+                        <a:ea typeface="メイリオ"/>
+                        <a:cs typeface="メイリオ"/>
+                      </a:endParaRPr>
                     </a:p>
                   </a:txBody>
                   <a:tcPr marL="91440" marR="73152" marT="36576" marB="36576" anchor="ctr">
@@ -6751,10 +7063,15 @@
                           </a:solidFill>
                           <a:latin typeface="メイリオ" panose="020B0604030504040204" pitchFamily="50" charset="-128"/>
                           <a:ea typeface="メイリオ" panose="020B0604030504040204" pitchFamily="50" charset="-128"/>
+                          <a:cs typeface="メイリオ"/>
                         </a:rPr>
                         <a:t>毎回、新しく集める</a:t>
                       </a:r>
-                      <a:endParaRPr lang="ja-JP" altLang="en-US" sz="1300" dirty="0"/>
+                      <a:endParaRPr lang="ja-JP" altLang="en-US" sz="1300" dirty="0">
+                        <a:latin typeface="メイリオ"/>
+                        <a:ea typeface="メイリオ"/>
+                        <a:cs typeface="メイリオ"/>
+                      </a:endParaRPr>
                     </a:p>
                   </a:txBody>
                   <a:tcPr marL="91440" marR="73152" marT="36576" marB="36576" anchor="ctr">
@@ -6814,10 +7131,15 @@
                           </a:solidFill>
                           <a:latin typeface="メイリオ" panose="020B0604030504040204" pitchFamily="50" charset="-128"/>
                           <a:ea typeface="メイリオ" panose="020B0604030504040204" pitchFamily="50" charset="-128"/>
+                          <a:cs typeface="メイリオ"/>
                         </a:rPr>
                         <a:t>一度友だちになった方に、何度でも届く</a:t>
                       </a:r>
-                      <a:endParaRPr lang="ja-JP" altLang="en-US" sz="1300" dirty="0"/>
+                      <a:endParaRPr lang="ja-JP" altLang="en-US" sz="1300" dirty="0">
+                        <a:latin typeface="メイリオ"/>
+                        <a:ea typeface="メイリオ"/>
+                        <a:cs typeface="メイリオ"/>
+                      </a:endParaRPr>
                     </a:p>
                   </a:txBody>
                   <a:tcPr marL="91440" marR="73152" marT="36576" marB="36576" anchor="ctr">
@@ -6863,7 +7185,7 @@
                   </a:tcPr>
                 </a:tc>
               </a:tr>
-              <a:tr h="777240">
+              <a:tr h="960120">
                 <a:tc>
                   <a:txBody>
                     <a:bodyPr/>
@@ -6879,10 +7201,15 @@
                           </a:solidFill>
                           <a:latin typeface="メイリオ" panose="020B0604030504040204" pitchFamily="50" charset="-128"/>
                           <a:ea typeface="メイリオ" panose="020B0604030504040204" pitchFamily="50" charset="-128"/>
+                          <a:cs typeface="メイリオ"/>
                         </a:rPr>
                         <a:t>届き方</a:t>
                       </a:r>
-                      <a:endParaRPr lang="ja-JP" altLang="en-US" sz="1300" dirty="0"/>
+                      <a:endParaRPr lang="ja-JP" altLang="en-US" sz="1300" dirty="0">
+                        <a:latin typeface="メイリオ"/>
+                        <a:ea typeface="メイリオ"/>
+                        <a:cs typeface="メイリオ"/>
+                      </a:endParaRPr>
                     </a:p>
                   </a:txBody>
                   <a:tcPr marL="91440" marR="73152" marT="36576" marB="36576" anchor="ctr">
@@ -6942,10 +7269,15 @@
                           </a:solidFill>
                           <a:latin typeface="メイリオ" panose="020B0604030504040204" pitchFamily="50" charset="-128"/>
                           <a:ea typeface="メイリオ" panose="020B0604030504040204" pitchFamily="50" charset="-128"/>
+                          <a:cs typeface="メイリオ"/>
                         </a:rPr>
                         <a:t>広告を見たときだけ</a:t>
                       </a:r>
-                      <a:endParaRPr lang="ja-JP" altLang="en-US" sz="1300" dirty="0"/>
+                      <a:endParaRPr lang="ja-JP" altLang="en-US" sz="1300" dirty="0">
+                        <a:latin typeface="メイリオ"/>
+                        <a:ea typeface="メイリオ"/>
+                        <a:cs typeface="メイリオ"/>
+                      </a:endParaRPr>
                     </a:p>
                   </a:txBody>
                   <a:tcPr marL="91440" marR="73152" marT="36576" marB="36576" anchor="ctr">
@@ -7005,10 +7337,15 @@
                           </a:solidFill>
                           <a:latin typeface="メイリオ" panose="020B0604030504040204" pitchFamily="50" charset="-128"/>
                           <a:ea typeface="メイリオ" panose="020B0604030504040204" pitchFamily="50" charset="-128"/>
+                          <a:cs typeface="メイリオ"/>
                         </a:rPr>
                         <a:t>通知で届き、見てもらいやすい</a:t>
                       </a:r>
-                      <a:endParaRPr lang="ja-JP" altLang="en-US" sz="1300" dirty="0"/>
+                      <a:endParaRPr lang="ja-JP" altLang="en-US" sz="1300" dirty="0">
+                        <a:latin typeface="メイリオ"/>
+                        <a:ea typeface="メイリオ"/>
+                        <a:cs typeface="メイリオ"/>
+                      </a:endParaRPr>
                     </a:p>
                   </a:txBody>
                   <a:tcPr marL="91440" marR="73152" marT="36576" marB="36576" anchor="ctr">
@@ -7054,7 +7391,7 @@
                   </a:tcPr>
                 </a:tc>
               </a:tr>
-              <a:tr h="777240">
+              <a:tr h="960120">
                 <a:tc>
                   <a:txBody>
                     <a:bodyPr/>
@@ -7070,10 +7407,15 @@
                           </a:solidFill>
                           <a:latin typeface="メイリオ" panose="020B0604030504040204" pitchFamily="50" charset="-128"/>
                           <a:ea typeface="メイリオ" panose="020B0604030504040204" pitchFamily="50" charset="-128"/>
+                          <a:cs typeface="メイリオ"/>
                         </a:rPr>
                         <a:t>イベントの後</a:t>
                       </a:r>
-                      <a:endParaRPr lang="ja-JP" altLang="en-US" sz="1300" dirty="0"/>
+                      <a:endParaRPr lang="ja-JP" altLang="en-US" sz="1300" dirty="0">
+                        <a:latin typeface="メイリオ"/>
+                        <a:ea typeface="メイリオ"/>
+                        <a:cs typeface="メイリオ"/>
+                      </a:endParaRPr>
                     </a:p>
                   </a:txBody>
                   <a:tcPr marL="91440" marR="73152" marT="36576" marB="36576" anchor="ctr">
@@ -7133,10 +7475,15 @@
                           </a:solidFill>
                           <a:latin typeface="メイリオ" panose="020B0604030504040204" pitchFamily="50" charset="-128"/>
                           <a:ea typeface="メイリオ" panose="020B0604030504040204" pitchFamily="50" charset="-128"/>
+                          <a:cs typeface="メイリオ"/>
                         </a:rPr>
                         <a:t>つながりが切れる</a:t>
                       </a:r>
-                      <a:endParaRPr lang="ja-JP" altLang="en-US" sz="1300" dirty="0"/>
+                      <a:endParaRPr lang="ja-JP" altLang="en-US" sz="1300" dirty="0">
+                        <a:latin typeface="メイリオ"/>
+                        <a:ea typeface="メイリオ"/>
+                        <a:cs typeface="メイリオ"/>
+                      </a:endParaRPr>
                     </a:p>
                   </a:txBody>
                   <a:tcPr marL="91440" marR="73152" marT="36576" marB="36576" anchor="ctr">
@@ -7196,10 +7543,15 @@
                           </a:solidFill>
                           <a:latin typeface="メイリオ" panose="020B0604030504040204" pitchFamily="50" charset="-128"/>
                           <a:ea typeface="メイリオ" panose="020B0604030504040204" pitchFamily="50" charset="-128"/>
+                          <a:cs typeface="メイリオ"/>
                         </a:rPr>
                         <a:t>友だちとして、毎月積み上がる</a:t>
                       </a:r>
-                      <a:endParaRPr lang="ja-JP" altLang="en-US" sz="1300" dirty="0"/>
+                      <a:endParaRPr lang="ja-JP" altLang="en-US" sz="1300" dirty="0">
+                        <a:latin typeface="メイリオ"/>
+                        <a:ea typeface="メイリオ"/>
+                        <a:cs typeface="メイリオ"/>
+                      </a:endParaRPr>
                     </a:p>
                   </a:txBody>
                   <a:tcPr marL="91440" marR="73152" marT="36576" marB="36576" anchor="ctr">
@@ -7257,8 +7609,8 @@
         </p:nvSpPr>
         <p:spPr>
           <a:xfrm>
-            <a:off x="502920" y="4846320"/>
-            <a:ext cx="8897112" cy="685800"/>
+            <a:off x="502920" y="5257800"/>
+            <a:ext cx="8897112" cy="731520"/>
           </a:xfrm>
           <a:prstGeom prst="rect">
             <a:avLst/>
@@ -7280,26 +7632,21 @@
               <a:buNone/>
             </a:pPr>
             <a:r>
-              <a:rPr lang="ja-JP" altLang="en-US" sz="1400" b="1" dirty="0">
+              <a:rPr lang="ja-JP" altLang="en-US" sz="1500" b="1" dirty="0">
                 <a:solidFill>
                   <a:srgbClr val="1F285A"/>
                 </a:solidFill>
                 <a:latin typeface="メイリオ" panose="020B0604030504040204" pitchFamily="50" charset="-128"/>
                 <a:ea typeface="メイリオ" panose="020B0604030504040204" pitchFamily="50" charset="-128"/>
+                <a:cs typeface="メイリオ"/>
               </a:rPr>
-              <a:t>この仕組みが回れば、</a:t>
+              <a:t>この仕組みが回れば、今後の広告費を抑えられる可能性もある</a:t>
             </a:r>
-            <a:r>
-              <a:rPr lang="ja-JP" altLang="en-US" sz="1400" b="1" dirty="0">
-                <a:solidFill>
-                  <a:srgbClr val="C00000"/>
-                </a:solidFill>
-                <a:latin typeface="メイリオ" panose="020B0604030504040204" pitchFamily="50" charset="-128"/>
-                <a:ea typeface="メイリオ" panose="020B0604030504040204" pitchFamily="50" charset="-128"/>
-              </a:rPr>
-              <a:t>今後の広告費を抑えられる可能性もある</a:t>
-            </a:r>
-            <a:endParaRPr lang="ja-JP" altLang="en-US" sz="1200" dirty="0"/>
+            <a:endParaRPr lang="ja-JP" altLang="en-US" sz="1200" dirty="0">
+              <a:latin typeface="メイリオ"/>
+              <a:ea typeface="メイリオ"/>
+              <a:cs typeface="メイリオ"/>
+            </a:endParaRPr>
           </a:p>
         </p:txBody>
       </p:sp>
@@ -7372,6 +7719,7 @@
                 <a:uFillTx/>
                 <a:latin typeface="メイリオ"/>
                 <a:ea typeface="メイリオ"/>
+                <a:cs typeface="メイリオ"/>
               </a:rPr>
               <a:t>友だちの入口：ポップアップツールとサンクスLINE誘導の2つ</a:t>
             </a:r>
@@ -7382,6 +7730,8 @@
               <a:effectLst/>
               <a:uFillTx/>
               <a:latin typeface="メイリオ"/>
+              <a:ea typeface="メイリオ"/>
+              <a:cs typeface="メイリオ"/>
             </a:endParaRPr>
           </a:p>
         </p:txBody>
@@ -7443,6 +7793,7 @@
               <a:uFillTx/>
               <a:latin typeface="メイリオ"/>
               <a:ea typeface="メイリオ"/>
+              <a:cs typeface="メイリオ"/>
             </a:endParaRPr>
           </a:p>
         </p:txBody>
@@ -7499,6 +7850,7 @@
               <a:uFillTx/>
               <a:latin typeface="メイリオ"/>
               <a:ea typeface="メイリオ"/>
+              <a:cs typeface="メイリオ"/>
             </a:endParaRPr>
           </a:p>
         </p:txBody>
@@ -7576,6 +7928,7 @@
                 <a:uFillTx/>
                 <a:latin typeface="メイリオ" panose="020B0604030504040204" pitchFamily="50" charset="-128"/>
                 <a:ea typeface="メイリオ" panose="020B0604030504040204" pitchFamily="50" charset="-128"/>
+                <a:cs typeface="メイリオ"/>
               </a:rPr>
               <a:t>申し込まずに離れる方と、予約した方の両方を、LINEの友だちにする</a:t>
             </a:r>
@@ -7583,6 +7936,8 @@
               <a:effectLst/>
               <a:uFillTx/>
               <a:latin typeface="メイリオ"/>
+              <a:ea typeface="メイリオ"/>
+              <a:cs typeface="メイリオ"/>
             </a:endParaRPr>
           </a:p>
         </p:txBody>
@@ -7624,10 +7979,15 @@
                 </a:solidFill>
                 <a:latin typeface="メイリオ" panose="020B0604030504040204" pitchFamily="50" charset="-128"/>
                 <a:ea typeface="メイリオ" panose="020B0604030504040204" pitchFamily="50" charset="-128"/>
+                <a:cs typeface="メイリオ"/>
               </a:rPr>
               <a:t>ポップアップツール（離脱防止）</a:t>
             </a:r>
-            <a:endParaRPr lang="ja-JP" altLang="en-US" sz="1200" dirty="0"/>
+            <a:endParaRPr lang="ja-JP" altLang="en-US" sz="1200" dirty="0">
+              <a:latin typeface="メイリオ"/>
+              <a:ea typeface="メイリオ"/>
+              <a:cs typeface="メイリオ"/>
+            </a:endParaRPr>
           </a:p>
         </p:txBody>
       </p:sp>
@@ -7641,7 +8001,7 @@
         </p:nvGraphicFramePr>
         <p:xfrm>
           <a:off x="502920" y="2103120"/>
-          <a:ext cx="4311396" cy="2194560"/>
+          <a:ext cx="4311396" cy="2743200"/>
         </p:xfrm>
         <a:graphic>
           <a:graphicData uri="http://schemas.openxmlformats.org/drawingml/2006/table">
@@ -7651,7 +8011,7 @@
                 <a:gridCol w="1234440"/>
                 <a:gridCol w="3076956"/>
               </a:tblGrid>
-              <a:tr h="731520">
+              <a:tr h="914400">
                 <a:tc>
                   <a:txBody>
                     <a:bodyPr/>
@@ -7667,10 +8027,15 @@
                           </a:solidFill>
                           <a:latin typeface="メイリオ" panose="020B0604030504040204" pitchFamily="50" charset="-128"/>
                           <a:ea typeface="メイリオ" panose="020B0604030504040204" pitchFamily="50" charset="-128"/>
+                          <a:cs typeface="メイリオ"/>
                         </a:rPr>
                         <a:t>対象</a:t>
                       </a:r>
-                      <a:endParaRPr lang="ja-JP" altLang="en-US" sz="1300" dirty="0"/>
+                      <a:endParaRPr lang="ja-JP" altLang="en-US" sz="1300" dirty="0">
+                        <a:latin typeface="メイリオ"/>
+                        <a:ea typeface="メイリオ"/>
+                        <a:cs typeface="メイリオ"/>
+                      </a:endParaRPr>
                     </a:p>
                   </a:txBody>
                   <a:tcPr marL="91440" marR="73152" marT="36576" marB="36576" anchor="ctr">
@@ -7730,10 +8095,15 @@
                           </a:solidFill>
                           <a:latin typeface="メイリオ" panose="020B0604030504040204" pitchFamily="50" charset="-128"/>
                           <a:ea typeface="メイリオ" panose="020B0604030504040204" pitchFamily="50" charset="-128"/>
+                          <a:cs typeface="メイリオ"/>
                         </a:rPr>
                         <a:t>LPで申し込まずに離れる方</a:t>
                       </a:r>
-                      <a:endParaRPr lang="ja-JP" altLang="en-US" sz="1300" dirty="0"/>
+                      <a:endParaRPr lang="ja-JP" altLang="en-US" sz="1300" dirty="0">
+                        <a:latin typeface="メイリオ"/>
+                        <a:ea typeface="メイリオ"/>
+                        <a:cs typeface="メイリオ"/>
+                      </a:endParaRPr>
                     </a:p>
                   </a:txBody>
                   <a:tcPr marL="91440" marR="73152" marT="36576" marB="36576" anchor="ctr">
@@ -7779,7 +8149,7 @@
                   </a:tcPr>
                 </a:tc>
               </a:tr>
-              <a:tr h="731520">
+              <a:tr h="914400">
                 <a:tc>
                   <a:txBody>
                     <a:bodyPr/>
@@ -7795,10 +8165,15 @@
                           </a:solidFill>
                           <a:latin typeface="メイリオ" panose="020B0604030504040204" pitchFamily="50" charset="-128"/>
                           <a:ea typeface="メイリオ" panose="020B0604030504040204" pitchFamily="50" charset="-128"/>
+                          <a:cs typeface="メイリオ"/>
                         </a:rPr>
                         <a:t>タイミング</a:t>
                       </a:r>
-                      <a:endParaRPr lang="ja-JP" altLang="en-US" sz="1300" dirty="0"/>
+                      <a:endParaRPr lang="ja-JP" altLang="en-US" sz="1300" dirty="0">
+                        <a:latin typeface="メイリオ"/>
+                        <a:ea typeface="メイリオ"/>
+                        <a:cs typeface="メイリオ"/>
+                      </a:endParaRPr>
                     </a:p>
                   </a:txBody>
                   <a:tcPr marL="91440" marR="73152" marT="36576" marB="36576" anchor="ctr">
@@ -7858,10 +8233,15 @@
                           </a:solidFill>
                           <a:latin typeface="メイリオ" panose="020B0604030504040204" pitchFamily="50" charset="-128"/>
                           <a:ea typeface="メイリオ" panose="020B0604030504040204" pitchFamily="50" charset="-128"/>
+                          <a:cs typeface="メイリオ"/>
                         </a:rPr>
                         <a:t>LPを離れようとしたとき</a:t>
                       </a:r>
-                      <a:endParaRPr lang="ja-JP" altLang="en-US" sz="1300" dirty="0"/>
+                      <a:endParaRPr lang="ja-JP" altLang="en-US" sz="1300" dirty="0">
+                        <a:latin typeface="メイリオ"/>
+                        <a:ea typeface="メイリオ"/>
+                        <a:cs typeface="メイリオ"/>
+                      </a:endParaRPr>
                     </a:p>
                   </a:txBody>
                   <a:tcPr marL="91440" marR="73152" marT="36576" marB="36576" anchor="ctr">
@@ -7907,7 +8287,7 @@
                   </a:tcPr>
                 </a:tc>
               </a:tr>
-              <a:tr h="731520">
+              <a:tr h="914400">
                 <a:tc>
                   <a:txBody>
                     <a:bodyPr/>
@@ -7923,10 +8303,15 @@
                           </a:solidFill>
                           <a:latin typeface="メイリオ" panose="020B0604030504040204" pitchFamily="50" charset="-128"/>
                           <a:ea typeface="メイリオ" panose="020B0604030504040204" pitchFamily="50" charset="-128"/>
+                          <a:cs typeface="メイリオ"/>
                         </a:rPr>
                         <a:t>案内</a:t>
                       </a:r>
-                      <a:endParaRPr lang="ja-JP" altLang="en-US" sz="1300" dirty="0"/>
+                      <a:endParaRPr lang="ja-JP" altLang="en-US" sz="1300" dirty="0">
+                        <a:latin typeface="メイリオ"/>
+                        <a:ea typeface="メイリオ"/>
+                        <a:cs typeface="メイリオ"/>
+                      </a:endParaRPr>
                     </a:p>
                   </a:txBody>
                   <a:tcPr marL="91440" marR="73152" marT="36576" marB="36576" anchor="ctr">
@@ -7986,10 +8371,15 @@
                           </a:solidFill>
                           <a:latin typeface="メイリオ" panose="020B0604030504040204" pitchFamily="50" charset="-128"/>
                           <a:ea typeface="メイリオ" panose="020B0604030504040204" pitchFamily="50" charset="-128"/>
+                          <a:cs typeface="メイリオ"/>
                         </a:rPr>
                         <a:t>次のセミナーの案内を、LINEで受け取れる</a:t>
                       </a:r>
-                      <a:endParaRPr lang="ja-JP" altLang="en-US" sz="1300" dirty="0"/>
+                      <a:endParaRPr lang="ja-JP" altLang="en-US" sz="1300" dirty="0">
+                        <a:latin typeface="メイリオ"/>
+                        <a:ea typeface="メイリオ"/>
+                        <a:cs typeface="メイリオ"/>
+                      </a:endParaRPr>
                     </a:p>
                   </a:txBody>
                   <a:tcPr marL="91440" marR="73152" marT="36576" marB="36576" anchor="ctr">
@@ -8076,10 +8466,15 @@
                 </a:solidFill>
                 <a:latin typeface="メイリオ" panose="020B0604030504040204" pitchFamily="50" charset="-128"/>
                 <a:ea typeface="メイリオ" panose="020B0604030504040204" pitchFamily="50" charset="-128"/>
+                <a:cs typeface="メイリオ"/>
               </a:rPr>
               <a:t>サンクスLINE誘導</a:t>
             </a:r>
-            <a:endParaRPr lang="ja-JP" altLang="en-US" sz="1200" dirty="0"/>
+            <a:endParaRPr lang="ja-JP" altLang="en-US" sz="1200" dirty="0">
+              <a:latin typeface="メイリオ"/>
+              <a:ea typeface="メイリオ"/>
+              <a:cs typeface="メイリオ"/>
+            </a:endParaRPr>
           </a:p>
         </p:txBody>
       </p:sp>
@@ -8093,7 +8488,7 @@
         </p:nvGraphicFramePr>
         <p:xfrm>
           <a:off x="5088636" y="2103120"/>
-          <a:ext cx="4311396" cy="2194560"/>
+          <a:ext cx="4311396" cy="2743200"/>
         </p:xfrm>
         <a:graphic>
           <a:graphicData uri="http://schemas.openxmlformats.org/drawingml/2006/table">
@@ -8103,7 +8498,7 @@
                 <a:gridCol w="1234440"/>
                 <a:gridCol w="3076956"/>
               </a:tblGrid>
-              <a:tr h="731520">
+              <a:tr h="914400">
                 <a:tc>
                   <a:txBody>
                     <a:bodyPr/>
@@ -8119,10 +8514,15 @@
                           </a:solidFill>
                           <a:latin typeface="メイリオ" panose="020B0604030504040204" pitchFamily="50" charset="-128"/>
                           <a:ea typeface="メイリオ" panose="020B0604030504040204" pitchFamily="50" charset="-128"/>
+                          <a:cs typeface="メイリオ"/>
                         </a:rPr>
                         <a:t>対象</a:t>
                       </a:r>
-                      <a:endParaRPr lang="ja-JP" altLang="en-US" sz="1300" dirty="0"/>
+                      <a:endParaRPr lang="ja-JP" altLang="en-US" sz="1300" dirty="0">
+                        <a:latin typeface="メイリオ"/>
+                        <a:ea typeface="メイリオ"/>
+                        <a:cs typeface="メイリオ"/>
+                      </a:endParaRPr>
                     </a:p>
                   </a:txBody>
                   <a:tcPr marL="91440" marR="73152" marT="36576" marB="36576" anchor="ctr">
@@ -8182,10 +8582,15 @@
                           </a:solidFill>
                           <a:latin typeface="メイリオ" panose="020B0604030504040204" pitchFamily="50" charset="-128"/>
                           <a:ea typeface="メイリオ" panose="020B0604030504040204" pitchFamily="50" charset="-128"/>
+                          <a:cs typeface="メイリオ"/>
                         </a:rPr>
                         <a:t>セミナーを予約した方</a:t>
                       </a:r>
-                      <a:endParaRPr lang="ja-JP" altLang="en-US" sz="1300" dirty="0"/>
+                      <a:endParaRPr lang="ja-JP" altLang="en-US" sz="1300" dirty="0">
+                        <a:latin typeface="メイリオ"/>
+                        <a:ea typeface="メイリオ"/>
+                        <a:cs typeface="メイリオ"/>
+                      </a:endParaRPr>
                     </a:p>
                   </a:txBody>
                   <a:tcPr marL="91440" marR="73152" marT="36576" marB="36576" anchor="ctr">
@@ -8231,7 +8636,7 @@
                   </a:tcPr>
                 </a:tc>
               </a:tr>
-              <a:tr h="731520">
+              <a:tr h="914400">
                 <a:tc>
                   <a:txBody>
                     <a:bodyPr/>
@@ -8247,10 +8652,15 @@
                           </a:solidFill>
                           <a:latin typeface="メイリオ" panose="020B0604030504040204" pitchFamily="50" charset="-128"/>
                           <a:ea typeface="メイリオ" panose="020B0604030504040204" pitchFamily="50" charset="-128"/>
+                          <a:cs typeface="メイリオ"/>
                         </a:rPr>
                         <a:t>タイミング</a:t>
                       </a:r>
-                      <a:endParaRPr lang="ja-JP" altLang="en-US" sz="1300" dirty="0"/>
+                      <a:endParaRPr lang="ja-JP" altLang="en-US" sz="1300" dirty="0">
+                        <a:latin typeface="メイリオ"/>
+                        <a:ea typeface="メイリオ"/>
+                        <a:cs typeface="メイリオ"/>
+                      </a:endParaRPr>
                     </a:p>
                   </a:txBody>
                   <a:tcPr marL="91440" marR="73152" marT="36576" marB="36576" anchor="ctr">
@@ -8310,10 +8720,15 @@
                           </a:solidFill>
                           <a:latin typeface="メイリオ" panose="020B0604030504040204" pitchFamily="50" charset="-128"/>
                           <a:ea typeface="メイリオ" panose="020B0604030504040204" pitchFamily="50" charset="-128"/>
+                          <a:cs typeface="メイリオ"/>
                         </a:rPr>
                         <a:t>予約完了の画面</a:t>
                       </a:r>
-                      <a:endParaRPr lang="ja-JP" altLang="en-US" sz="1300" dirty="0"/>
+                      <a:endParaRPr lang="ja-JP" altLang="en-US" sz="1300" dirty="0">
+                        <a:latin typeface="メイリオ"/>
+                        <a:ea typeface="メイリオ"/>
+                        <a:cs typeface="メイリオ"/>
+                      </a:endParaRPr>
                     </a:p>
                   </a:txBody>
                   <a:tcPr marL="91440" marR="73152" marT="36576" marB="36576" anchor="ctr">
@@ -8359,7 +8774,7 @@
                   </a:tcPr>
                 </a:tc>
               </a:tr>
-              <a:tr h="731520">
+              <a:tr h="914400">
                 <a:tc>
                   <a:txBody>
                     <a:bodyPr/>
@@ -8375,10 +8790,15 @@
                           </a:solidFill>
                           <a:latin typeface="メイリオ" panose="020B0604030504040204" pitchFamily="50" charset="-128"/>
                           <a:ea typeface="メイリオ" panose="020B0604030504040204" pitchFamily="50" charset="-128"/>
+                          <a:cs typeface="メイリオ"/>
                         </a:rPr>
                         <a:t>案内</a:t>
                       </a:r>
-                      <a:endParaRPr lang="ja-JP" altLang="en-US" sz="1300" dirty="0"/>
+                      <a:endParaRPr lang="ja-JP" altLang="en-US" sz="1300" dirty="0">
+                        <a:latin typeface="メイリオ"/>
+                        <a:ea typeface="メイリオ"/>
+                        <a:cs typeface="メイリオ"/>
+                      </a:endParaRPr>
                     </a:p>
                   </a:txBody>
                   <a:tcPr marL="91440" marR="73152" marT="36576" marB="36576" anchor="ctr">
@@ -8438,10 +8858,15 @@
                           </a:solidFill>
                           <a:latin typeface="メイリオ" panose="020B0604030504040204" pitchFamily="50" charset="-128"/>
                           <a:ea typeface="メイリオ" panose="020B0604030504040204" pitchFamily="50" charset="-128"/>
+                          <a:cs typeface="メイリオ"/>
                         </a:rPr>
                         <a:t>当日の案内・リマインドを、LINEで届ける</a:t>
                       </a:r>
-                      <a:endParaRPr lang="ja-JP" altLang="en-US" sz="1300" dirty="0"/>
+                      <a:endParaRPr lang="ja-JP" altLang="en-US" sz="1300" dirty="0">
+                        <a:latin typeface="メイリオ"/>
+                        <a:ea typeface="メイリオ"/>
+                        <a:cs typeface="メイリオ"/>
+                      </a:endParaRPr>
                     </a:p>
                   </a:txBody>
                   <a:tcPr marL="91440" marR="73152" marT="36576" marB="36576" anchor="ctr">
@@ -8499,8 +8924,8 @@
         </p:nvSpPr>
         <p:spPr>
           <a:xfrm>
-            <a:off x="502920" y="4617720"/>
-            <a:ext cx="8897112" cy="685800"/>
+            <a:off x="502920" y="5166360"/>
+            <a:ext cx="8897112" cy="731520"/>
           </a:xfrm>
           <a:prstGeom prst="rect">
             <a:avLst/>
@@ -8522,26 +8947,21 @@
               <a:buNone/>
             </a:pPr>
             <a:r>
-              <a:rPr lang="ja-JP" altLang="en-US" sz="1400" b="1" dirty="0">
+              <a:rPr lang="ja-JP" altLang="en-US" sz="1500" b="1" dirty="0">
                 <a:solidFill>
                   <a:srgbClr val="1F285A"/>
                 </a:solidFill>
                 <a:latin typeface="メイリオ" panose="020B0604030504040204" pitchFamily="50" charset="-128"/>
                 <a:ea typeface="メイリオ" panose="020B0604030504040204" pitchFamily="50" charset="-128"/>
+                <a:cs typeface="メイリオ"/>
               </a:rPr>
-              <a:t>どちらも、次のイベントまで</a:t>
+              <a:t>どちらも、次のイベントまで追える友だちになる</a:t>
             </a:r>
-            <a:r>
-              <a:rPr lang="ja-JP" altLang="en-US" sz="1400" b="1" dirty="0">
-                <a:solidFill>
-                  <a:srgbClr val="C00000"/>
-                </a:solidFill>
-                <a:latin typeface="メイリオ" panose="020B0604030504040204" pitchFamily="50" charset="-128"/>
-                <a:ea typeface="メイリオ" panose="020B0604030504040204" pitchFamily="50" charset="-128"/>
-              </a:rPr>
-              <a:t>追える友だちになる</a:t>
-            </a:r>
-            <a:endParaRPr lang="ja-JP" altLang="en-US" sz="1200" dirty="0"/>
+            <a:endParaRPr lang="ja-JP" altLang="en-US" sz="1200" dirty="0">
+              <a:latin typeface="メイリオ"/>
+              <a:ea typeface="メイリオ"/>
+              <a:cs typeface="メイリオ"/>
+            </a:endParaRPr>
           </a:p>
         </p:txBody>
       </p:sp>
@@ -8614,6 +9034,7 @@
                 <a:uFillTx/>
                 <a:latin typeface="メイリオ"/>
                 <a:ea typeface="メイリオ"/>
+                <a:cs typeface="メイリオ"/>
               </a:rPr>
               <a:t>配信：興味あり・予約・参加の段階ごとに、案内を変える</a:t>
             </a:r>
@@ -8624,6 +9045,8 @@
               <a:effectLst/>
               <a:uFillTx/>
               <a:latin typeface="メイリオ"/>
+              <a:ea typeface="メイリオ"/>
+              <a:cs typeface="メイリオ"/>
             </a:endParaRPr>
           </a:p>
         </p:txBody>
@@ -8685,6 +9108,7 @@
               <a:uFillTx/>
               <a:latin typeface="メイリオ"/>
               <a:ea typeface="メイリオ"/>
+              <a:cs typeface="メイリオ"/>
             </a:endParaRPr>
           </a:p>
         </p:txBody>
@@ -8741,6 +9165,7 @@
               <a:uFillTx/>
               <a:latin typeface="メイリオ"/>
               <a:ea typeface="メイリオ"/>
+              <a:cs typeface="メイリオ"/>
             </a:endParaRPr>
           </a:p>
         </p:txBody>
@@ -8818,6 +9243,7 @@
                 <a:uFillTx/>
                 <a:latin typeface="メイリオ" panose="020B0604030504040204" pitchFamily="50" charset="-128"/>
                 <a:ea typeface="メイリオ" panose="020B0604030504040204" pitchFamily="50" charset="-128"/>
+                <a:cs typeface="メイリオ"/>
               </a:rPr>
               <a:t>段階に合わせた配信で、次のイベント参加と入会へつなげる</a:t>
             </a:r>
@@ -8825,6 +9251,8 @@
               <a:effectLst/>
               <a:uFillTx/>
               <a:latin typeface="メイリオ"/>
+              <a:ea typeface="メイリオ"/>
+              <a:cs typeface="メイリオ"/>
             </a:endParaRPr>
           </a:p>
         </p:txBody>
@@ -8869,10 +9297,15 @@
                 </a:solidFill>
                 <a:latin typeface="メイリオ" panose="020B0604030504040204" pitchFamily="50" charset="-128"/>
                 <a:ea typeface="メイリオ" panose="020B0604030504040204" pitchFamily="50" charset="-128"/>
+                <a:cs typeface="メイリオ"/>
               </a:rPr>
               <a:t>興味あり</a:t>
             </a:r>
-            <a:endParaRPr lang="ja-JP" altLang="en-US" sz="1200" dirty="0"/>
+            <a:endParaRPr lang="ja-JP" altLang="en-US" sz="1200" dirty="0">
+              <a:latin typeface="メイリオ"/>
+              <a:ea typeface="メイリオ"/>
+              <a:cs typeface="メイリオ"/>
+            </a:endParaRPr>
           </a:p>
         </p:txBody>
       </p:sp>
@@ -8911,10 +9344,15 @@
                 </a:solidFill>
                 <a:latin typeface="メイリオ" panose="020B0604030504040204" pitchFamily="50" charset="-128"/>
                 <a:ea typeface="メイリオ" panose="020B0604030504040204" pitchFamily="50" charset="-128"/>
+                <a:cs typeface="メイリオ"/>
               </a:rPr>
               <a:t>▶</a:t>
             </a:r>
-            <a:endParaRPr lang="ja-JP" altLang="en-US" sz="1200" dirty="0"/>
+            <a:endParaRPr lang="ja-JP" altLang="en-US" sz="1200" dirty="0">
+              <a:latin typeface="メイリオ"/>
+              <a:ea typeface="メイリオ"/>
+              <a:cs typeface="メイリオ"/>
+            </a:endParaRPr>
           </a:p>
         </p:txBody>
       </p:sp>
@@ -8958,10 +9396,15 @@
                 </a:solidFill>
                 <a:latin typeface="メイリオ" panose="020B0604030504040204" pitchFamily="50" charset="-128"/>
                 <a:ea typeface="メイリオ" panose="020B0604030504040204" pitchFamily="50" charset="-128"/>
+                <a:cs typeface="メイリオ"/>
               </a:rPr>
               <a:t>予約</a:t>
             </a:r>
-            <a:endParaRPr lang="ja-JP" altLang="en-US" sz="1200" dirty="0"/>
+            <a:endParaRPr lang="ja-JP" altLang="en-US" sz="1200" dirty="0">
+              <a:latin typeface="メイリオ"/>
+              <a:ea typeface="メイリオ"/>
+              <a:cs typeface="メイリオ"/>
+            </a:endParaRPr>
           </a:p>
         </p:txBody>
       </p:sp>
@@ -9000,10 +9443,15 @@
                 </a:solidFill>
                 <a:latin typeface="メイリオ" panose="020B0604030504040204" pitchFamily="50" charset="-128"/>
                 <a:ea typeface="メイリオ" panose="020B0604030504040204" pitchFamily="50" charset="-128"/>
+                <a:cs typeface="メイリオ"/>
               </a:rPr>
               <a:t>▶</a:t>
             </a:r>
-            <a:endParaRPr lang="ja-JP" altLang="en-US" sz="1200" dirty="0"/>
+            <a:endParaRPr lang="ja-JP" altLang="en-US" sz="1200" dirty="0">
+              <a:latin typeface="メイリオ"/>
+              <a:ea typeface="メイリオ"/>
+              <a:cs typeface="メイリオ"/>
+            </a:endParaRPr>
           </a:p>
         </p:txBody>
       </p:sp>
@@ -9047,10 +9495,15 @@
                 </a:solidFill>
                 <a:latin typeface="メイリオ" panose="020B0604030504040204" pitchFamily="50" charset="-128"/>
                 <a:ea typeface="メイリオ" panose="020B0604030504040204" pitchFamily="50" charset="-128"/>
+                <a:cs typeface="メイリオ"/>
               </a:rPr>
               <a:t>参加</a:t>
             </a:r>
-            <a:endParaRPr lang="ja-JP" altLang="en-US" sz="1200" dirty="0"/>
+            <a:endParaRPr lang="ja-JP" altLang="en-US" sz="1200" dirty="0">
+              <a:latin typeface="メイリオ"/>
+              <a:ea typeface="メイリオ"/>
+              <a:cs typeface="メイリオ"/>
+            </a:endParaRPr>
           </a:p>
         </p:txBody>
       </p:sp>
@@ -9089,10 +9542,15 @@
                 </a:solidFill>
                 <a:latin typeface="メイリオ" panose="020B0604030504040204" pitchFamily="50" charset="-128"/>
                 <a:ea typeface="メイリオ" panose="020B0604030504040204" pitchFamily="50" charset="-128"/>
+                <a:cs typeface="メイリオ"/>
               </a:rPr>
               <a:t>▶</a:t>
             </a:r>
-            <a:endParaRPr lang="ja-JP" altLang="en-US" sz="1200" dirty="0"/>
+            <a:endParaRPr lang="ja-JP" altLang="en-US" sz="1200" dirty="0">
+              <a:latin typeface="メイリオ"/>
+              <a:ea typeface="メイリオ"/>
+              <a:cs typeface="メイリオ"/>
+            </a:endParaRPr>
           </a:p>
         </p:txBody>
       </p:sp>
@@ -9111,7 +9569,7 @@
             <a:avLst/>
           </a:prstGeom>
           <a:solidFill>
-            <a:srgbClr val="C00000"/>
+            <a:srgbClr val="1F285A"/>
           </a:solidFill>
           <a:ln>
             <a:noFill/>
@@ -9136,10 +9594,15 @@
                 </a:solidFill>
                 <a:latin typeface="メイリオ" panose="020B0604030504040204" pitchFamily="50" charset="-128"/>
                 <a:ea typeface="メイリオ" panose="020B0604030504040204" pitchFamily="50" charset="-128"/>
+                <a:cs typeface="メイリオ"/>
               </a:rPr>
               <a:t>サロン入会</a:t>
             </a:r>
-            <a:endParaRPr lang="ja-JP" altLang="en-US" sz="1200" dirty="0"/>
+            <a:endParaRPr lang="ja-JP" altLang="en-US" sz="1200" dirty="0">
+              <a:latin typeface="メイリオ"/>
+              <a:ea typeface="メイリオ"/>
+              <a:cs typeface="メイリオ"/>
+            </a:endParaRPr>
           </a:p>
         </p:txBody>
       </p:sp>
@@ -9153,7 +9616,7 @@
         </p:nvGraphicFramePr>
         <p:xfrm>
           <a:off x="502920" y="2514600"/>
-          <a:ext cx="8897112" cy="2770632"/>
+          <a:ext cx="8897112" cy="3182112"/>
         </p:xfrm>
         <a:graphic>
           <a:graphicData uri="http://schemas.openxmlformats.org/drawingml/2006/table">
@@ -9181,10 +9644,15 @@
                           </a:solidFill>
                           <a:latin typeface="メイリオ" panose="020B0604030504040204" pitchFamily="50" charset="-128"/>
                           <a:ea typeface="メイリオ" panose="020B0604030504040204" pitchFamily="50" charset="-128"/>
+                          <a:cs typeface="メイリオ"/>
                         </a:rPr>
                         <a:t>段階</a:t>
                       </a:r>
-                      <a:endParaRPr lang="ja-JP" altLang="en-US" sz="1300" dirty="0"/>
+                      <a:endParaRPr lang="ja-JP" altLang="en-US" sz="1300" dirty="0">
+                        <a:latin typeface="メイリオ"/>
+                        <a:ea typeface="メイリオ"/>
+                        <a:cs typeface="メイリオ"/>
+                      </a:endParaRPr>
                     </a:p>
                   </a:txBody>
                   <a:tcPr marL="73152" marR="73152" marT="27432" marB="27432" anchor="ctr">
@@ -9244,10 +9712,15 @@
                           </a:solidFill>
                           <a:latin typeface="メイリオ" panose="020B0604030504040204" pitchFamily="50" charset="-128"/>
                           <a:ea typeface="メイリオ" panose="020B0604030504040204" pitchFamily="50" charset="-128"/>
+                          <a:cs typeface="メイリオ"/>
                         </a:rPr>
                         <a:t>対象</a:t>
                       </a:r>
-                      <a:endParaRPr lang="ja-JP" altLang="en-US" sz="1300" dirty="0"/>
+                      <a:endParaRPr lang="ja-JP" altLang="en-US" sz="1300" dirty="0">
+                        <a:latin typeface="メイリオ"/>
+                        <a:ea typeface="メイリオ"/>
+                        <a:cs typeface="メイリオ"/>
+                      </a:endParaRPr>
                     </a:p>
                   </a:txBody>
                   <a:tcPr marL="73152" marR="73152" marT="27432" marB="27432" anchor="ctr">
@@ -9307,10 +9780,15 @@
                           </a:solidFill>
                           <a:latin typeface="メイリオ" panose="020B0604030504040204" pitchFamily="50" charset="-128"/>
                           <a:ea typeface="メイリオ" panose="020B0604030504040204" pitchFamily="50" charset="-128"/>
+                          <a:cs typeface="メイリオ"/>
                         </a:rPr>
                         <a:t>届ける内容</a:t>
                       </a:r>
-                      <a:endParaRPr lang="ja-JP" altLang="en-US" sz="1300" dirty="0"/>
+                      <a:endParaRPr lang="ja-JP" altLang="en-US" sz="1300" dirty="0">
+                        <a:latin typeface="メイリオ"/>
+                        <a:ea typeface="メイリオ"/>
+                        <a:cs typeface="メイリオ"/>
+                      </a:endParaRPr>
                     </a:p>
                   </a:txBody>
                   <a:tcPr marL="73152" marR="73152" marT="27432" marB="27432" anchor="ctr">
@@ -9370,10 +9848,15 @@
                           </a:solidFill>
                           <a:latin typeface="メイリオ" panose="020B0604030504040204" pitchFamily="50" charset="-128"/>
                           <a:ea typeface="メイリオ" panose="020B0604030504040204" pitchFamily="50" charset="-128"/>
+                          <a:cs typeface="メイリオ"/>
                         </a:rPr>
                         <a:t>ねらい</a:t>
                       </a:r>
-                      <a:endParaRPr lang="ja-JP" altLang="en-US" sz="1300" dirty="0"/>
+                      <a:endParaRPr lang="ja-JP" altLang="en-US" sz="1300" dirty="0">
+                        <a:latin typeface="メイリオ"/>
+                        <a:ea typeface="メイリオ"/>
+                        <a:cs typeface="メイリオ"/>
+                      </a:endParaRPr>
                     </a:p>
                   </a:txBody>
                   <a:tcPr marL="73152" marR="73152" marT="27432" marB="27432" anchor="ctr">
@@ -9419,7 +9902,7 @@
                   </a:tcPr>
                 </a:tc>
               </a:tr>
-              <a:tr h="777240">
+              <a:tr h="914400">
                 <a:tc>
                   <a:txBody>
                     <a:bodyPr/>
@@ -9435,10 +9918,15 @@
                           </a:solidFill>
                           <a:latin typeface="メイリオ" panose="020B0604030504040204" pitchFamily="50" charset="-128"/>
                           <a:ea typeface="メイリオ" panose="020B0604030504040204" pitchFamily="50" charset="-128"/>
+                          <a:cs typeface="メイリオ"/>
                         </a:rPr>
                         <a:t>興味あり</a:t>
                       </a:r>
-                      <a:endParaRPr lang="ja-JP" altLang="en-US" sz="1300" dirty="0"/>
+                      <a:endParaRPr lang="ja-JP" altLang="en-US" sz="1300" dirty="0">
+                        <a:latin typeface="メイリオ"/>
+                        <a:ea typeface="メイリオ"/>
+                        <a:cs typeface="メイリオ"/>
+                      </a:endParaRPr>
                     </a:p>
                   </a:txBody>
                   <a:tcPr marL="91440" marR="73152" marT="36576" marB="36576" anchor="ctr">
@@ -9498,6 +9986,7 @@
                           </a:solidFill>
                           <a:latin typeface="メイリオ" panose="020B0604030504040204" pitchFamily="50" charset="-128"/>
                           <a:ea typeface="メイリオ" panose="020B0604030504040204" pitchFamily="50" charset="-128"/>
+                          <a:cs typeface="メイリオ"/>
                         </a:rPr>
                         <a:t>予約していない方</a:t>
                       </a:r>
@@ -9508,6 +9997,7 @@
                           </a:solidFill>
                           <a:latin typeface="メイリオ" panose="020B0604030504040204" pitchFamily="50" charset="-128"/>
                           <a:ea typeface="メイリオ" panose="020B0604030504040204" pitchFamily="50" charset="-128"/>
+                          <a:cs typeface="メイリオ"/>
                         </a:rPr>
                       </a:br>
                       <a:r>
@@ -9517,10 +10007,15 @@
                           </a:solidFill>
                           <a:latin typeface="メイリオ" panose="020B0604030504040204" pitchFamily="50" charset="-128"/>
                           <a:ea typeface="メイリオ" panose="020B0604030504040204" pitchFamily="50" charset="-128"/>
+                          <a:cs typeface="メイリオ"/>
                         </a:rPr>
                         <a:t>（ポップアップツールから）</a:t>
                       </a:r>
-                      <a:endParaRPr lang="ja-JP" altLang="en-US" sz="1200" dirty="0"/>
+                      <a:endParaRPr lang="ja-JP" altLang="en-US" sz="1200" dirty="0">
+                        <a:latin typeface="メイリオ"/>
+                        <a:ea typeface="メイリオ"/>
+                        <a:cs typeface="メイリオ"/>
+                      </a:endParaRPr>
                     </a:p>
                   </a:txBody>
                   <a:tcPr marL="91440" marR="73152" marT="36576" marB="36576" anchor="ctr">
@@ -9580,10 +10075,15 @@
                           </a:solidFill>
                           <a:latin typeface="メイリオ" panose="020B0604030504040204" pitchFamily="50" charset="-128"/>
                           <a:ea typeface="メイリオ" panose="020B0604030504040204" pitchFamily="50" charset="-128"/>
+                          <a:cs typeface="メイリオ"/>
                         </a:rPr>
                         <a:t>セミナーの見どころ動画・参加特典</a:t>
                       </a:r>
-                      <a:endParaRPr lang="ja-JP" altLang="en-US" sz="1300" dirty="0"/>
+                      <a:endParaRPr lang="ja-JP" altLang="en-US" sz="1300" dirty="0">
+                        <a:latin typeface="メイリオ"/>
+                        <a:ea typeface="メイリオ"/>
+                        <a:cs typeface="メイリオ"/>
+                      </a:endParaRPr>
                     </a:p>
                   </a:txBody>
                   <a:tcPr marL="91440" marR="73152" marT="36576" marB="36576" anchor="ctr">
@@ -9643,10 +10143,15 @@
                           </a:solidFill>
                           <a:latin typeface="メイリオ" panose="020B0604030504040204" pitchFamily="50" charset="-128"/>
                           <a:ea typeface="メイリオ" panose="020B0604030504040204" pitchFamily="50" charset="-128"/>
+                          <a:cs typeface="メイリオ"/>
                         </a:rPr>
                         <a:t>予約へ</a:t>
                       </a:r>
-                      <a:endParaRPr lang="ja-JP" altLang="en-US" sz="1300" dirty="0"/>
+                      <a:endParaRPr lang="ja-JP" altLang="en-US" sz="1300" dirty="0">
+                        <a:latin typeface="メイリオ"/>
+                        <a:ea typeface="メイリオ"/>
+                        <a:cs typeface="メイリオ"/>
+                      </a:endParaRPr>
                     </a:p>
                   </a:txBody>
                   <a:tcPr marL="91440" marR="73152" marT="36576" marB="36576" anchor="ctr">
@@ -9692,7 +10197,7 @@
                   </a:tcPr>
                 </a:tc>
               </a:tr>
-              <a:tr h="777240">
+              <a:tr h="914400">
                 <a:tc>
                   <a:txBody>
                     <a:bodyPr/>
@@ -9708,10 +10213,15 @@
                           </a:solidFill>
                           <a:latin typeface="メイリオ" panose="020B0604030504040204" pitchFamily="50" charset="-128"/>
                           <a:ea typeface="メイリオ" panose="020B0604030504040204" pitchFamily="50" charset="-128"/>
+                          <a:cs typeface="メイリオ"/>
                         </a:rPr>
                         <a:t>予約</a:t>
                       </a:r>
-                      <a:endParaRPr lang="ja-JP" altLang="en-US" sz="1300" dirty="0"/>
+                      <a:endParaRPr lang="ja-JP" altLang="en-US" sz="1300" dirty="0">
+                        <a:latin typeface="メイリオ"/>
+                        <a:ea typeface="メイリオ"/>
+                        <a:cs typeface="メイリオ"/>
+                      </a:endParaRPr>
                     </a:p>
                   </a:txBody>
                   <a:tcPr marL="91440" marR="73152" marT="36576" marB="36576" anchor="ctr">
@@ -9771,6 +10281,7 @@
                           </a:solidFill>
                           <a:latin typeface="メイリオ" panose="020B0604030504040204" pitchFamily="50" charset="-128"/>
                           <a:ea typeface="メイリオ" panose="020B0604030504040204" pitchFamily="50" charset="-128"/>
+                          <a:cs typeface="メイリオ"/>
                         </a:rPr>
                         <a:t>予約した方</a:t>
                       </a:r>
@@ -9781,6 +10292,7 @@
                           </a:solidFill>
                           <a:latin typeface="メイリオ" panose="020B0604030504040204" pitchFamily="50" charset="-128"/>
                           <a:ea typeface="メイリオ" panose="020B0604030504040204" pitchFamily="50" charset="-128"/>
+                          <a:cs typeface="メイリオ"/>
                         </a:rPr>
                       </a:br>
                       <a:r>
@@ -9790,10 +10302,15 @@
                           </a:solidFill>
                           <a:latin typeface="メイリオ" panose="020B0604030504040204" pitchFamily="50" charset="-128"/>
                           <a:ea typeface="メイリオ" panose="020B0604030504040204" pitchFamily="50" charset="-128"/>
+                          <a:cs typeface="メイリオ"/>
                         </a:rPr>
                         <a:t>（サンクスLINE誘導から）</a:t>
                       </a:r>
-                      <a:endParaRPr lang="ja-JP" altLang="en-US" sz="1200" dirty="0"/>
+                      <a:endParaRPr lang="ja-JP" altLang="en-US" sz="1200" dirty="0">
+                        <a:latin typeface="メイリオ"/>
+                        <a:ea typeface="メイリオ"/>
+                        <a:cs typeface="メイリオ"/>
+                      </a:endParaRPr>
                     </a:p>
                   </a:txBody>
                   <a:tcPr marL="91440" marR="73152" marT="36576" marB="36576" anchor="ctr">
@@ -9853,10 +10370,15 @@
                           </a:solidFill>
                           <a:latin typeface="メイリオ" panose="020B0604030504040204" pitchFamily="50" charset="-128"/>
                           <a:ea typeface="メイリオ" panose="020B0604030504040204" pitchFamily="50" charset="-128"/>
+                          <a:cs typeface="メイリオ"/>
                         </a:rPr>
                         <a:t>前日のリマインド・当日の案内</a:t>
                       </a:r>
-                      <a:endParaRPr lang="ja-JP" altLang="en-US" sz="1300" dirty="0"/>
+                      <a:endParaRPr lang="ja-JP" altLang="en-US" sz="1300" dirty="0">
+                        <a:latin typeface="メイリオ"/>
+                        <a:ea typeface="メイリオ"/>
+                        <a:cs typeface="メイリオ"/>
+                      </a:endParaRPr>
                     </a:p>
                   </a:txBody>
                   <a:tcPr marL="91440" marR="73152" marT="36576" marB="36576" anchor="ctr">
@@ -9916,10 +10438,15 @@
                           </a:solidFill>
                           <a:latin typeface="メイリオ" panose="020B0604030504040204" pitchFamily="50" charset="-128"/>
                           <a:ea typeface="メイリオ" panose="020B0604030504040204" pitchFamily="50" charset="-128"/>
+                          <a:cs typeface="メイリオ"/>
                         </a:rPr>
                         <a:t>当日の参加へ</a:t>
                       </a:r>
-                      <a:endParaRPr lang="ja-JP" altLang="en-US" sz="1300" dirty="0"/>
+                      <a:endParaRPr lang="ja-JP" altLang="en-US" sz="1300" dirty="0">
+                        <a:latin typeface="メイリオ"/>
+                        <a:ea typeface="メイリオ"/>
+                        <a:cs typeface="メイリオ"/>
+                      </a:endParaRPr>
                     </a:p>
                   </a:txBody>
                   <a:tcPr marL="91440" marR="73152" marT="36576" marB="36576" anchor="ctr">
@@ -9965,7 +10492,7 @@
                   </a:tcPr>
                 </a:tc>
               </a:tr>
-              <a:tr h="777240">
+              <a:tr h="914400">
                 <a:tc>
                   <a:txBody>
                     <a:bodyPr/>
@@ -9981,10 +10508,15 @@
                           </a:solidFill>
                           <a:latin typeface="メイリオ" panose="020B0604030504040204" pitchFamily="50" charset="-128"/>
                           <a:ea typeface="メイリオ" panose="020B0604030504040204" pitchFamily="50" charset="-128"/>
+                          <a:cs typeface="メイリオ"/>
                         </a:rPr>
                         <a:t>参加</a:t>
                       </a:r>
-                      <a:endParaRPr lang="ja-JP" altLang="en-US" sz="1300" dirty="0"/>
+                      <a:endParaRPr lang="ja-JP" altLang="en-US" sz="1300" dirty="0">
+                        <a:latin typeface="メイリオ"/>
+                        <a:ea typeface="メイリオ"/>
+                        <a:cs typeface="メイリオ"/>
+                      </a:endParaRPr>
                     </a:p>
                   </a:txBody>
                   <a:tcPr marL="91440" marR="73152" marT="36576" marB="36576" anchor="ctr">
@@ -10044,10 +10576,15 @@
                           </a:solidFill>
                           <a:latin typeface="メイリオ" panose="020B0604030504040204" pitchFamily="50" charset="-128"/>
                           <a:ea typeface="メイリオ" panose="020B0604030504040204" pitchFamily="50" charset="-128"/>
+                          <a:cs typeface="メイリオ"/>
                         </a:rPr>
                         <a:t>イベントに参加した方</a:t>
                       </a:r>
-                      <a:endParaRPr lang="ja-JP" altLang="en-US" sz="1200" dirty="0"/>
+                      <a:endParaRPr lang="ja-JP" altLang="en-US" sz="1200" dirty="0">
+                        <a:latin typeface="メイリオ"/>
+                        <a:ea typeface="メイリオ"/>
+                        <a:cs typeface="メイリオ"/>
+                      </a:endParaRPr>
                     </a:p>
                   </a:txBody>
                   <a:tcPr marL="91440" marR="73152" marT="36576" marB="36576" anchor="ctr">
@@ -10107,10 +10644,15 @@
                           </a:solidFill>
                           <a:latin typeface="メイリオ" panose="020B0604030504040204" pitchFamily="50" charset="-128"/>
                           <a:ea typeface="メイリオ" panose="020B0604030504040204" pitchFamily="50" charset="-128"/>
+                          <a:cs typeface="メイリオ"/>
                         </a:rPr>
                         <a:t>イベント直後に、サロン入会の案内</a:t>
                       </a:r>
-                      <a:endParaRPr lang="ja-JP" altLang="en-US" sz="1300" dirty="0"/>
+                      <a:endParaRPr lang="ja-JP" altLang="en-US" sz="1300" dirty="0">
+                        <a:latin typeface="メイリオ"/>
+                        <a:ea typeface="メイリオ"/>
+                        <a:cs typeface="メイリオ"/>
+                      </a:endParaRPr>
                     </a:p>
                   </a:txBody>
                   <a:tcPr marL="91440" marR="73152" marT="36576" marB="36576" anchor="ctr">
@@ -10170,10 +10712,15 @@
                           </a:solidFill>
                           <a:latin typeface="メイリオ" panose="020B0604030504040204" pitchFamily="50" charset="-128"/>
                           <a:ea typeface="メイリオ" panose="020B0604030504040204" pitchFamily="50" charset="-128"/>
+                          <a:cs typeface="メイリオ"/>
                         </a:rPr>
                         <a:t>入会へ</a:t>
                       </a:r>
-                      <a:endParaRPr lang="ja-JP" altLang="en-US" sz="1300" dirty="0"/>
+                      <a:endParaRPr lang="ja-JP" altLang="en-US" sz="1300" dirty="0">
+                        <a:latin typeface="メイリオ"/>
+                        <a:ea typeface="メイリオ"/>
+                        <a:cs typeface="メイリオ"/>
+                      </a:endParaRPr>
                     </a:p>
                   </a:txBody>
                   <a:tcPr marL="91440" marR="73152" marT="36576" marB="36576" anchor="ctr">
@@ -10231,7 +10778,7 @@
         </p:nvSpPr>
         <p:spPr>
           <a:xfrm>
-            <a:off x="502920" y="5486400"/>
+            <a:off x="502920" y="5852160"/>
             <a:ext cx="8897112" cy="274320"/>
           </a:xfrm>
           <a:prstGeom prst="rect">
@@ -10261,10 +10808,15 @@
                 </a:solidFill>
                 <a:latin typeface="メイリオ" panose="020B0604030504040204" pitchFamily="50" charset="-128"/>
                 <a:ea typeface="メイリオ" panose="020B0604030504040204" pitchFamily="50" charset="-128"/>
+                <a:cs typeface="メイリオ"/>
               </a:rPr>
               <a:t>※配信の内容は、イベントの内容に合わせて設計</a:t>
             </a:r>
-            <a:endParaRPr lang="ja-JP" altLang="en-US" sz="1200" dirty="0"/>
+            <a:endParaRPr lang="ja-JP" altLang="en-US" sz="1200" dirty="0">
+              <a:latin typeface="メイリオ"/>
+              <a:ea typeface="メイリオ"/>
+              <a:cs typeface="メイリオ"/>
+            </a:endParaRPr>
           </a:p>
         </p:txBody>
       </p:sp>
@@ -10337,6 +10889,7 @@
                 <a:uFillTx/>
                 <a:latin typeface="メイリオ"/>
                 <a:ea typeface="メイリオ"/>
+                <a:cs typeface="メイリオ"/>
               </a:rPr>
               <a:t>配信の回数：平常期は月2回、イベント期は月4〜5回</a:t>
             </a:r>
@@ -10347,6 +10900,8 @@
               <a:effectLst/>
               <a:uFillTx/>
               <a:latin typeface="メイリオ"/>
+              <a:ea typeface="メイリオ"/>
+              <a:cs typeface="メイリオ"/>
             </a:endParaRPr>
           </a:p>
         </p:txBody>
@@ -10408,6 +10963,7 @@
               <a:uFillTx/>
               <a:latin typeface="メイリオ"/>
               <a:ea typeface="メイリオ"/>
+              <a:cs typeface="メイリオ"/>
             </a:endParaRPr>
           </a:p>
         </p:txBody>
@@ -10464,6 +11020,7 @@
               <a:uFillTx/>
               <a:latin typeface="メイリオ"/>
               <a:ea typeface="メイリオ"/>
+              <a:cs typeface="メイリオ"/>
             </a:endParaRPr>
           </a:p>
         </p:txBody>
@@ -10541,6 +11098,7 @@
                 <a:uFillTx/>
                 <a:latin typeface="メイリオ" panose="020B0604030504040204" pitchFamily="50" charset="-128"/>
                 <a:ea typeface="メイリオ" panose="020B0604030504040204" pitchFamily="50" charset="-128"/>
+                <a:cs typeface="メイリオ"/>
               </a:rPr>
               <a:t>イベントの無い時期もつながりを保ち、イベント期に参加・入会へつなげる</a:t>
             </a:r>
@@ -10548,6 +11106,8 @@
               <a:effectLst/>
               <a:uFillTx/>
               <a:latin typeface="メイリオ"/>
+              <a:ea typeface="メイリオ"/>
+              <a:cs typeface="メイリオ"/>
             </a:endParaRPr>
           </a:p>
         </p:txBody>
@@ -10592,10 +11152,15 @@
                 </a:solidFill>
                 <a:latin typeface="メイリオ" panose="020B0604030504040204" pitchFamily="50" charset="-128"/>
                 <a:ea typeface="メイリオ" panose="020B0604030504040204" pitchFamily="50" charset="-128"/>
+                <a:cs typeface="メイリオ"/>
               </a:rPr>
               <a:t>平常期</a:t>
             </a:r>
-            <a:endParaRPr lang="ja-JP" altLang="en-US" sz="1200" dirty="0"/>
+            <a:endParaRPr lang="ja-JP" altLang="en-US" sz="1200" dirty="0">
+              <a:latin typeface="メイリオ"/>
+              <a:ea typeface="メイリオ"/>
+              <a:cs typeface="メイリオ"/>
+            </a:endParaRPr>
           </a:p>
           <a:p>
             <a:pPr algn="ctr">
@@ -10611,10 +11176,15 @@
                 </a:solidFill>
                 <a:latin typeface="メイリオ" panose="020B0604030504040204" pitchFamily="50" charset="-128"/>
                 <a:ea typeface="メイリオ" panose="020B0604030504040204" pitchFamily="50" charset="-128"/>
+                <a:cs typeface="メイリオ"/>
               </a:rPr>
               <a:t>月2回</a:t>
             </a:r>
-            <a:endParaRPr lang="ja-JP" altLang="en-US" sz="1200" dirty="0"/>
+            <a:endParaRPr lang="ja-JP" altLang="en-US" sz="1200" dirty="0">
+              <a:latin typeface="メイリオ"/>
+              <a:ea typeface="メイリオ"/>
+              <a:cs typeface="メイリオ"/>
+            </a:endParaRPr>
           </a:p>
         </p:txBody>
       </p:sp>
@@ -10653,10 +11223,15 @@
                 </a:solidFill>
                 <a:latin typeface="メイリオ" panose="020B0604030504040204" pitchFamily="50" charset="-128"/>
                 <a:ea typeface="メイリオ" panose="020B0604030504040204" pitchFamily="50" charset="-128"/>
+                <a:cs typeface="メイリオ"/>
               </a:rPr>
               <a:t>▶</a:t>
             </a:r>
-            <a:endParaRPr lang="ja-JP" altLang="en-US" sz="1200" dirty="0"/>
+            <a:endParaRPr lang="ja-JP" altLang="en-US" sz="1200" dirty="0">
+              <a:latin typeface="メイリオ"/>
+              <a:ea typeface="メイリオ"/>
+              <a:cs typeface="メイリオ"/>
+            </a:endParaRPr>
           </a:p>
         </p:txBody>
       </p:sp>
@@ -10700,10 +11275,15 @@
                 </a:solidFill>
                 <a:latin typeface="メイリオ" panose="020B0604030504040204" pitchFamily="50" charset="-128"/>
                 <a:ea typeface="メイリオ" panose="020B0604030504040204" pitchFamily="50" charset="-128"/>
+                <a:cs typeface="メイリオ"/>
               </a:rPr>
               <a:t>イベント期</a:t>
             </a:r>
-            <a:endParaRPr lang="ja-JP" altLang="en-US" sz="1200" dirty="0"/>
+            <a:endParaRPr lang="ja-JP" altLang="en-US" sz="1200" dirty="0">
+              <a:latin typeface="メイリオ"/>
+              <a:ea typeface="メイリオ"/>
+              <a:cs typeface="メイリオ"/>
+            </a:endParaRPr>
           </a:p>
           <a:p>
             <a:pPr algn="ctr">
@@ -10719,10 +11299,15 @@
                 </a:solidFill>
                 <a:latin typeface="メイリオ" panose="020B0604030504040204" pitchFamily="50" charset="-128"/>
                 <a:ea typeface="メイリオ" panose="020B0604030504040204" pitchFamily="50" charset="-128"/>
+                <a:cs typeface="メイリオ"/>
               </a:rPr>
               <a:t>月4〜5回</a:t>
             </a:r>
-            <a:endParaRPr lang="ja-JP" altLang="en-US" sz="1200" dirty="0"/>
+            <a:endParaRPr lang="ja-JP" altLang="en-US" sz="1200" dirty="0">
+              <a:latin typeface="メイリオ"/>
+              <a:ea typeface="メイリオ"/>
+              <a:cs typeface="メイリオ"/>
+            </a:endParaRPr>
           </a:p>
         </p:txBody>
       </p:sp>
@@ -10761,10 +11346,15 @@
                 </a:solidFill>
                 <a:latin typeface="メイリオ" panose="020B0604030504040204" pitchFamily="50" charset="-128"/>
                 <a:ea typeface="メイリオ" panose="020B0604030504040204" pitchFamily="50" charset="-128"/>
+                <a:cs typeface="メイリオ"/>
               </a:rPr>
               <a:t>▶</a:t>
             </a:r>
-            <a:endParaRPr lang="ja-JP" altLang="en-US" sz="1200" dirty="0"/>
+            <a:endParaRPr lang="ja-JP" altLang="en-US" sz="1200" dirty="0">
+              <a:latin typeface="メイリオ"/>
+              <a:ea typeface="メイリオ"/>
+              <a:cs typeface="メイリオ"/>
+            </a:endParaRPr>
           </a:p>
         </p:txBody>
       </p:sp>
@@ -10808,10 +11398,15 @@
                 </a:solidFill>
                 <a:latin typeface="メイリオ" panose="020B0604030504040204" pitchFamily="50" charset="-128"/>
                 <a:ea typeface="メイリオ" panose="020B0604030504040204" pitchFamily="50" charset="-128"/>
+                <a:cs typeface="メイリオ"/>
               </a:rPr>
               <a:t>平常期</a:t>
             </a:r>
-            <a:endParaRPr lang="ja-JP" altLang="en-US" sz="1200" dirty="0"/>
+            <a:endParaRPr lang="ja-JP" altLang="en-US" sz="1200" dirty="0">
+              <a:latin typeface="メイリオ"/>
+              <a:ea typeface="メイリオ"/>
+              <a:cs typeface="メイリオ"/>
+            </a:endParaRPr>
           </a:p>
           <a:p>
             <a:pPr algn="ctr">
@@ -10827,10 +11422,15 @@
                 </a:solidFill>
                 <a:latin typeface="メイリオ" panose="020B0604030504040204" pitchFamily="50" charset="-128"/>
                 <a:ea typeface="メイリオ" panose="020B0604030504040204" pitchFamily="50" charset="-128"/>
+                <a:cs typeface="メイリオ"/>
               </a:rPr>
               <a:t>月2回</a:t>
             </a:r>
-            <a:endParaRPr lang="ja-JP" altLang="en-US" sz="1200" dirty="0"/>
+            <a:endParaRPr lang="ja-JP" altLang="en-US" sz="1200" dirty="0">
+              <a:latin typeface="メイリオ"/>
+              <a:ea typeface="メイリオ"/>
+              <a:cs typeface="メイリオ"/>
+            </a:endParaRPr>
           </a:p>
         </p:txBody>
       </p:sp>
@@ -10869,10 +11469,15 @@
                 </a:solidFill>
                 <a:latin typeface="メイリオ" panose="020B0604030504040204" pitchFamily="50" charset="-128"/>
                 <a:ea typeface="メイリオ" panose="020B0604030504040204" pitchFamily="50" charset="-128"/>
+                <a:cs typeface="メイリオ"/>
               </a:rPr>
               <a:t>▶</a:t>
             </a:r>
-            <a:endParaRPr lang="ja-JP" altLang="en-US" sz="1200" dirty="0"/>
+            <a:endParaRPr lang="ja-JP" altLang="en-US" sz="1200" dirty="0">
+              <a:latin typeface="メイリオ"/>
+              <a:ea typeface="メイリオ"/>
+              <a:cs typeface="メイリオ"/>
+            </a:endParaRPr>
           </a:p>
         </p:txBody>
       </p:sp>
@@ -10916,10 +11521,15 @@
                 </a:solidFill>
                 <a:latin typeface="メイリオ" panose="020B0604030504040204" pitchFamily="50" charset="-128"/>
                 <a:ea typeface="メイリオ" panose="020B0604030504040204" pitchFamily="50" charset="-128"/>
+                <a:cs typeface="メイリオ"/>
               </a:rPr>
               <a:t>次のイベント期</a:t>
             </a:r>
-            <a:endParaRPr lang="ja-JP" altLang="en-US" sz="1200" dirty="0"/>
+            <a:endParaRPr lang="ja-JP" altLang="en-US" sz="1200" dirty="0">
+              <a:latin typeface="メイリオ"/>
+              <a:ea typeface="メイリオ"/>
+              <a:cs typeface="メイリオ"/>
+            </a:endParaRPr>
           </a:p>
           <a:p>
             <a:pPr algn="ctr">
@@ -10935,10 +11545,15 @@
                 </a:solidFill>
                 <a:latin typeface="メイリオ" panose="020B0604030504040204" pitchFamily="50" charset="-128"/>
                 <a:ea typeface="メイリオ" panose="020B0604030504040204" pitchFamily="50" charset="-128"/>
+                <a:cs typeface="メイリオ"/>
               </a:rPr>
               <a:t>月4〜5回</a:t>
             </a:r>
-            <a:endParaRPr lang="ja-JP" altLang="en-US" sz="1200" dirty="0"/>
+            <a:endParaRPr lang="ja-JP" altLang="en-US" sz="1200" dirty="0">
+              <a:latin typeface="メイリオ"/>
+              <a:ea typeface="メイリオ"/>
+              <a:cs typeface="メイリオ"/>
+            </a:endParaRPr>
           </a:p>
         </p:txBody>
       </p:sp>
@@ -10952,7 +11567,7 @@
         </p:nvGraphicFramePr>
         <p:xfrm>
           <a:off x="502920" y="2697480"/>
-          <a:ext cx="8897112" cy="2496312"/>
+          <a:ext cx="8897112" cy="2862072"/>
         </p:xfrm>
         <a:graphic>
           <a:graphicData uri="http://schemas.openxmlformats.org/drawingml/2006/table">
@@ -10972,7 +11587,11 @@
                       <a:pPr algn="ctr">
                         <a:buNone/>
                       </a:pPr>
-                      <a:endParaRPr lang="ja-JP" altLang="en-US" sz="1300" dirty="0"/>
+                      <a:endParaRPr lang="ja-JP" altLang="en-US" sz="1300" dirty="0">
+                        <a:latin typeface="メイリオ"/>
+                        <a:ea typeface="メイリオ"/>
+                        <a:cs typeface="メイリオ"/>
+                      </a:endParaRPr>
                     </a:p>
                   </a:txBody>
                   <a:tcPr marL="73152" marR="73152" marT="27432" marB="27432" anchor="ctr">
@@ -11032,10 +11651,15 @@
                           </a:solidFill>
                           <a:latin typeface="メイリオ" panose="020B0604030504040204" pitchFamily="50" charset="-128"/>
                           <a:ea typeface="メイリオ" panose="020B0604030504040204" pitchFamily="50" charset="-128"/>
+                          <a:cs typeface="メイリオ"/>
                         </a:rPr>
                         <a:t>平常期（イベントの無い月）</a:t>
                       </a:r>
-                      <a:endParaRPr lang="ja-JP" altLang="en-US" sz="1300" dirty="0"/>
+                      <a:endParaRPr lang="ja-JP" altLang="en-US" sz="1300" dirty="0">
+                        <a:latin typeface="メイリオ"/>
+                        <a:ea typeface="メイリオ"/>
+                        <a:cs typeface="メイリオ"/>
+                      </a:endParaRPr>
                     </a:p>
                   </a:txBody>
                   <a:tcPr marL="73152" marR="73152" marT="27432" marB="27432" anchor="ctr">
@@ -11095,10 +11719,15 @@
                           </a:solidFill>
                           <a:latin typeface="メイリオ" panose="020B0604030504040204" pitchFamily="50" charset="-128"/>
                           <a:ea typeface="メイリオ" panose="020B0604030504040204" pitchFamily="50" charset="-128"/>
+                          <a:cs typeface="メイリオ"/>
                         </a:rPr>
                         <a:t>イベント期（イベントの前後）</a:t>
                       </a:r>
-                      <a:endParaRPr lang="ja-JP" altLang="en-US" sz="1300" dirty="0"/>
+                      <a:endParaRPr lang="ja-JP" altLang="en-US" sz="1300" dirty="0">
+                        <a:latin typeface="メイリオ"/>
+                        <a:ea typeface="メイリオ"/>
+                        <a:cs typeface="メイリオ"/>
+                      </a:endParaRPr>
                     </a:p>
                   </a:txBody>
                   <a:tcPr marL="73152" marR="73152" marT="27432" marB="27432" anchor="ctr">
@@ -11144,7 +11773,7 @@
                   </a:tcPr>
                 </a:tc>
               </a:tr>
-              <a:tr h="594360">
+              <a:tr h="685800">
                 <a:tc>
                   <a:txBody>
                     <a:bodyPr/>
@@ -11160,10 +11789,15 @@
                           </a:solidFill>
                           <a:latin typeface="メイリオ" panose="020B0604030504040204" pitchFamily="50" charset="-128"/>
                           <a:ea typeface="メイリオ" panose="020B0604030504040204" pitchFamily="50" charset="-128"/>
+                          <a:cs typeface="メイリオ"/>
                         </a:rPr>
                         <a:t>回数</a:t>
                       </a:r>
-                      <a:endParaRPr lang="ja-JP" altLang="en-US" sz="1300" dirty="0"/>
+                      <a:endParaRPr lang="ja-JP" altLang="en-US" sz="1300" dirty="0">
+                        <a:latin typeface="メイリオ"/>
+                        <a:ea typeface="メイリオ"/>
+                        <a:cs typeface="メイリオ"/>
+                      </a:endParaRPr>
                     </a:p>
                   </a:txBody>
                   <a:tcPr marL="91440" marR="73152" marT="36576" marB="36576" anchor="ctr">
@@ -11223,10 +11857,15 @@
                           </a:solidFill>
                           <a:latin typeface="メイリオ" panose="020B0604030504040204" pitchFamily="50" charset="-128"/>
                           <a:ea typeface="メイリオ" panose="020B0604030504040204" pitchFamily="50" charset="-128"/>
+                          <a:cs typeface="メイリオ"/>
                         </a:rPr>
                         <a:t>月2回</a:t>
                       </a:r>
-                      <a:endParaRPr lang="ja-JP" altLang="en-US" sz="1400" dirty="0"/>
+                      <a:endParaRPr lang="ja-JP" altLang="en-US" sz="1400" dirty="0">
+                        <a:latin typeface="メイリオ"/>
+                        <a:ea typeface="メイリオ"/>
+                        <a:cs typeface="メイリオ"/>
+                      </a:endParaRPr>
                     </a:p>
                   </a:txBody>
                   <a:tcPr marL="91440" marR="73152" marT="36576" marB="36576" anchor="ctr">
@@ -11286,10 +11925,15 @@
                           </a:solidFill>
                           <a:latin typeface="メイリオ" panose="020B0604030504040204" pitchFamily="50" charset="-128"/>
                           <a:ea typeface="メイリオ" panose="020B0604030504040204" pitchFamily="50" charset="-128"/>
+                          <a:cs typeface="メイリオ"/>
                         </a:rPr>
                         <a:t>月4〜5回</a:t>
                       </a:r>
-                      <a:endParaRPr lang="ja-JP" altLang="en-US" sz="1400" dirty="0"/>
+                      <a:endParaRPr lang="ja-JP" altLang="en-US" sz="1400" dirty="0">
+                        <a:latin typeface="メイリオ"/>
+                        <a:ea typeface="メイリオ"/>
+                        <a:cs typeface="メイリオ"/>
+                      </a:endParaRPr>
                     </a:p>
                   </a:txBody>
                   <a:tcPr marL="91440" marR="73152" marT="36576" marB="36576" anchor="ctr">
@@ -11335,7 +11979,7 @@
                   </a:tcPr>
                 </a:tc>
               </a:tr>
-              <a:tr h="731520">
+              <a:tr h="868680">
                 <a:tc>
                   <a:txBody>
                     <a:bodyPr/>
@@ -11351,10 +11995,15 @@
                           </a:solidFill>
                           <a:latin typeface="メイリオ" panose="020B0604030504040204" pitchFamily="50" charset="-128"/>
                           <a:ea typeface="メイリオ" panose="020B0604030504040204" pitchFamily="50" charset="-128"/>
+                          <a:cs typeface="メイリオ"/>
                         </a:rPr>
                         <a:t>内容</a:t>
                       </a:r>
-                      <a:endParaRPr lang="ja-JP" altLang="en-US" sz="1300" dirty="0"/>
+                      <a:endParaRPr lang="ja-JP" altLang="en-US" sz="1300" dirty="0">
+                        <a:latin typeface="メイリオ"/>
+                        <a:ea typeface="メイリオ"/>
+                        <a:cs typeface="メイリオ"/>
+                      </a:endParaRPr>
                     </a:p>
                   </a:txBody>
                   <a:tcPr marL="91440" marR="73152" marT="36576" marB="36576" anchor="ctr">
@@ -11414,10 +12063,15 @@
                           </a:solidFill>
                           <a:latin typeface="メイリオ" panose="020B0604030504040204" pitchFamily="50" charset="-128"/>
                           <a:ea typeface="メイリオ" panose="020B0604030504040204" pitchFamily="50" charset="-128"/>
+                          <a:cs typeface="メイリオ"/>
                         </a:rPr>
                         <a:t>定期配信1回＋企画・動画1回</a:t>
                       </a:r>
-                      <a:endParaRPr lang="ja-JP" altLang="en-US" sz="1300" dirty="0"/>
+                      <a:endParaRPr lang="ja-JP" altLang="en-US" sz="1300" dirty="0">
+                        <a:latin typeface="メイリオ"/>
+                        <a:ea typeface="メイリオ"/>
+                        <a:cs typeface="メイリオ"/>
+                      </a:endParaRPr>
                     </a:p>
                   </a:txBody>
                   <a:tcPr marL="91440" marR="73152" marT="36576" marB="36576" anchor="ctr">
@@ -11477,10 +12131,15 @@
                           </a:solidFill>
                           <a:latin typeface="メイリオ" panose="020B0604030504040204" pitchFamily="50" charset="-128"/>
                           <a:ea typeface="メイリオ" panose="020B0604030504040204" pitchFamily="50" charset="-128"/>
+                          <a:cs typeface="メイリオ"/>
                         </a:rPr>
                         <a:t>告知・リマインド・イベント直後のフォロー</a:t>
                       </a:r>
-                      <a:endParaRPr lang="ja-JP" altLang="en-US" sz="1300" dirty="0"/>
+                      <a:endParaRPr lang="ja-JP" altLang="en-US" sz="1300" dirty="0">
+                        <a:latin typeface="メイリオ"/>
+                        <a:ea typeface="メイリオ"/>
+                        <a:cs typeface="メイリオ"/>
+                      </a:endParaRPr>
                     </a:p>
                   </a:txBody>
                   <a:tcPr marL="91440" marR="73152" marT="36576" marB="36576" anchor="ctr">
@@ -11526,7 +12185,7 @@
                   </a:tcPr>
                 </a:tc>
               </a:tr>
-              <a:tr h="731520">
+              <a:tr h="868680">
                 <a:tc>
                   <a:txBody>
                     <a:bodyPr/>
@@ -11542,10 +12201,15 @@
                           </a:solidFill>
                           <a:latin typeface="メイリオ" panose="020B0604030504040204" pitchFamily="50" charset="-128"/>
                           <a:ea typeface="メイリオ" panose="020B0604030504040204" pitchFamily="50" charset="-128"/>
+                          <a:cs typeface="メイリオ"/>
                         </a:rPr>
                         <a:t>ねらい</a:t>
                       </a:r>
-                      <a:endParaRPr lang="ja-JP" altLang="en-US" sz="1300" dirty="0"/>
+                      <a:endParaRPr lang="ja-JP" altLang="en-US" sz="1300" dirty="0">
+                        <a:latin typeface="メイリオ"/>
+                        <a:ea typeface="メイリオ"/>
+                        <a:cs typeface="メイリオ"/>
+                      </a:endParaRPr>
                     </a:p>
                   </a:txBody>
                   <a:tcPr marL="91440" marR="73152" marT="36576" marB="36576" anchor="ctr">
@@ -11605,10 +12269,15 @@
                           </a:solidFill>
                           <a:latin typeface="メイリオ" panose="020B0604030504040204" pitchFamily="50" charset="-128"/>
                           <a:ea typeface="メイリオ" panose="020B0604030504040204" pitchFamily="50" charset="-128"/>
+                          <a:cs typeface="メイリオ"/>
                         </a:rPr>
                         <a:t>つながりを保ち、追える人数を減らさない</a:t>
                       </a:r>
-                      <a:endParaRPr lang="ja-JP" altLang="en-US" sz="1300" dirty="0"/>
+                      <a:endParaRPr lang="ja-JP" altLang="en-US" sz="1300" dirty="0">
+                        <a:latin typeface="メイリオ"/>
+                        <a:ea typeface="メイリオ"/>
+                        <a:cs typeface="メイリオ"/>
+                      </a:endParaRPr>
                     </a:p>
                   </a:txBody>
                   <a:tcPr marL="91440" marR="73152" marT="36576" marB="36576" anchor="ctr">
@@ -11668,10 +12337,15 @@
                           </a:solidFill>
                           <a:latin typeface="メイリオ" panose="020B0604030504040204" pitchFamily="50" charset="-128"/>
                           <a:ea typeface="メイリオ" panose="020B0604030504040204" pitchFamily="50" charset="-128"/>
+                          <a:cs typeface="メイリオ"/>
                         </a:rPr>
                         <a:t>次のイベントの参加・入会へつなげる</a:t>
                       </a:r>
-                      <a:endParaRPr lang="ja-JP" altLang="en-US" sz="1300" dirty="0"/>
+                      <a:endParaRPr lang="ja-JP" altLang="en-US" sz="1300" dirty="0">
+                        <a:latin typeface="メイリオ"/>
+                        <a:ea typeface="メイリオ"/>
+                        <a:cs typeface="メイリオ"/>
+                      </a:endParaRPr>
                     </a:p>
                   </a:txBody>
                   <a:tcPr marL="91440" marR="73152" marT="36576" marB="36576" anchor="ctr">
@@ -11729,7 +12403,7 @@
         </p:nvSpPr>
         <p:spPr>
           <a:xfrm>
-            <a:off x="502920" y="5486400"/>
+            <a:off x="502920" y="5852160"/>
             <a:ext cx="8897112" cy="274320"/>
           </a:xfrm>
           <a:prstGeom prst="rect">
@@ -11759,10 +12433,15 @@
                 </a:solidFill>
                 <a:latin typeface="メイリオ" panose="020B0604030504040204" pitchFamily="50" charset="-128"/>
                 <a:ea typeface="メイリオ" panose="020B0604030504040204" pitchFamily="50" charset="-128"/>
+                <a:cs typeface="メイリオ"/>
               </a:rPr>
               <a:t>※イベントを年4回とした場合</a:t>
             </a:r>
-            <a:endParaRPr lang="ja-JP" altLang="en-US" sz="1200" dirty="0"/>
+            <a:endParaRPr lang="ja-JP" altLang="en-US" sz="1200" dirty="0">
+              <a:latin typeface="メイリオ"/>
+              <a:ea typeface="メイリオ"/>
+              <a:cs typeface="メイリオ"/>
+            </a:endParaRPr>
           </a:p>
         </p:txBody>
       </p:sp>
@@ -11835,6 +12514,7 @@
                 <a:uFillTx/>
                 <a:latin typeface="メイリオ"/>
                 <a:ea typeface="メイリオ"/>
+                <a:cs typeface="メイリオ"/>
               </a:rPr>
               <a:t>目標：追える人数を増やし・減らさず、次のイベント参加・入会へ</a:t>
             </a:r>
@@ -11845,6 +12525,8 @@
               <a:effectLst/>
               <a:uFillTx/>
               <a:latin typeface="メイリオ"/>
+              <a:ea typeface="メイリオ"/>
+              <a:cs typeface="メイリオ"/>
             </a:endParaRPr>
           </a:p>
         </p:txBody>
@@ -11906,6 +12588,7 @@
               <a:uFillTx/>
               <a:latin typeface="メイリオ"/>
               <a:ea typeface="メイリオ"/>
+              <a:cs typeface="メイリオ"/>
             </a:endParaRPr>
           </a:p>
         </p:txBody>
@@ -11962,6 +12645,7 @@
               <a:uFillTx/>
               <a:latin typeface="メイリオ"/>
               <a:ea typeface="メイリオ"/>
+              <a:cs typeface="メイリオ"/>
             </a:endParaRPr>
           </a:p>
         </p:txBody>
@@ -12039,6 +12723,7 @@
                 <a:uFillTx/>
                 <a:latin typeface="メイリオ" panose="020B0604030504040204" pitchFamily="50" charset="-128"/>
                 <a:ea typeface="メイリオ" panose="020B0604030504040204" pitchFamily="50" charset="-128"/>
+                <a:cs typeface="メイリオ"/>
               </a:rPr>
               <a:t>時期ごとに、見る指標を分ける</a:t>
             </a:r>
@@ -12046,6 +12731,8 @@
               <a:effectLst/>
               <a:uFillTx/>
               <a:latin typeface="メイリオ"/>
+              <a:ea typeface="メイリオ"/>
+              <a:cs typeface="メイリオ"/>
             </a:endParaRPr>
           </a:p>
         </p:txBody>
@@ -12090,10 +12777,15 @@
                 </a:solidFill>
                 <a:latin typeface="メイリオ" panose="020B0604030504040204" pitchFamily="50" charset="-128"/>
                 <a:ea typeface="メイリオ" panose="020B0604030504040204" pitchFamily="50" charset="-128"/>
+                <a:cs typeface="メイリオ"/>
               </a:rPr>
               <a:t>追える人数</a:t>
             </a:r>
-            <a:endParaRPr lang="ja-JP" altLang="en-US" sz="1200" dirty="0"/>
+            <a:endParaRPr lang="ja-JP" altLang="en-US" sz="1200" dirty="0">
+              <a:latin typeface="メイリオ"/>
+              <a:ea typeface="メイリオ"/>
+              <a:cs typeface="メイリオ"/>
+            </a:endParaRPr>
           </a:p>
         </p:txBody>
       </p:sp>
@@ -12132,10 +12824,15 @@
                 </a:solidFill>
                 <a:latin typeface="メイリオ" panose="020B0604030504040204" pitchFamily="50" charset="-128"/>
                 <a:ea typeface="メイリオ" panose="020B0604030504040204" pitchFamily="50" charset="-128"/>
+                <a:cs typeface="メイリオ"/>
               </a:rPr>
               <a:t>▶</a:t>
             </a:r>
-            <a:endParaRPr lang="ja-JP" altLang="en-US" sz="1200" dirty="0"/>
+            <a:endParaRPr lang="ja-JP" altLang="en-US" sz="1200" dirty="0">
+              <a:latin typeface="メイリオ"/>
+              <a:ea typeface="メイリオ"/>
+              <a:cs typeface="メイリオ"/>
+            </a:endParaRPr>
           </a:p>
         </p:txBody>
       </p:sp>
@@ -12179,10 +12876,15 @@
                 </a:solidFill>
                 <a:latin typeface="メイリオ" panose="020B0604030504040204" pitchFamily="50" charset="-128"/>
                 <a:ea typeface="メイリオ" panose="020B0604030504040204" pitchFamily="50" charset="-128"/>
+                <a:cs typeface="メイリオ"/>
               </a:rPr>
               <a:t>次のイベントの予約・参加</a:t>
             </a:r>
-            <a:endParaRPr lang="ja-JP" altLang="en-US" sz="1200" dirty="0"/>
+            <a:endParaRPr lang="ja-JP" altLang="en-US" sz="1200" dirty="0">
+              <a:latin typeface="メイリオ"/>
+              <a:ea typeface="メイリオ"/>
+              <a:cs typeface="メイリオ"/>
+            </a:endParaRPr>
           </a:p>
         </p:txBody>
       </p:sp>
@@ -12221,10 +12923,15 @@
                 </a:solidFill>
                 <a:latin typeface="メイリオ" panose="020B0604030504040204" pitchFamily="50" charset="-128"/>
                 <a:ea typeface="メイリオ" panose="020B0604030504040204" pitchFamily="50" charset="-128"/>
+                <a:cs typeface="メイリオ"/>
               </a:rPr>
               <a:t>▶</a:t>
             </a:r>
-            <a:endParaRPr lang="ja-JP" altLang="en-US" sz="1200" dirty="0"/>
+            <a:endParaRPr lang="ja-JP" altLang="en-US" sz="1200" dirty="0">
+              <a:latin typeface="メイリオ"/>
+              <a:ea typeface="メイリオ"/>
+              <a:cs typeface="メイリオ"/>
+            </a:endParaRPr>
           </a:p>
         </p:txBody>
       </p:sp>
@@ -12243,7 +12950,7 @@
             <a:avLst/>
           </a:prstGeom>
           <a:solidFill>
-            <a:srgbClr val="C00000"/>
+            <a:srgbClr val="1F285A"/>
           </a:solidFill>
           <a:ln>
             <a:noFill/>
@@ -12268,10 +12975,15 @@
                 </a:solidFill>
                 <a:latin typeface="メイリオ" panose="020B0604030504040204" pitchFamily="50" charset="-128"/>
                 <a:ea typeface="メイリオ" panose="020B0604030504040204" pitchFamily="50" charset="-128"/>
+                <a:cs typeface="メイリオ"/>
               </a:rPr>
               <a:t>サロン入会</a:t>
             </a:r>
-            <a:endParaRPr lang="ja-JP" altLang="en-US" sz="1200" dirty="0"/>
+            <a:endParaRPr lang="ja-JP" altLang="en-US" sz="1200" dirty="0">
+              <a:latin typeface="メイリオ"/>
+              <a:ea typeface="メイリオ"/>
+              <a:cs typeface="メイリオ"/>
+            </a:endParaRPr>
           </a:p>
         </p:txBody>
       </p:sp>
@@ -12285,7 +12997,7 @@
         </p:nvGraphicFramePr>
         <p:xfrm>
           <a:off x="502920" y="2514600"/>
-          <a:ext cx="8897112" cy="2633472"/>
+          <a:ext cx="8897112" cy="3319272"/>
         </p:xfrm>
         <a:graphic>
           <a:graphicData uri="http://schemas.openxmlformats.org/drawingml/2006/table">
@@ -12312,10 +13024,15 @@
                           </a:solidFill>
                           <a:latin typeface="メイリオ" panose="020B0604030504040204" pitchFamily="50" charset="-128"/>
                           <a:ea typeface="メイリオ" panose="020B0604030504040204" pitchFamily="50" charset="-128"/>
+                          <a:cs typeface="メイリオ"/>
                         </a:rPr>
                         <a:t>指標</a:t>
                       </a:r>
-                      <a:endParaRPr lang="ja-JP" altLang="en-US" sz="1300" dirty="0"/>
+                      <a:endParaRPr lang="ja-JP" altLang="en-US" sz="1300" dirty="0">
+                        <a:latin typeface="メイリオ"/>
+                        <a:ea typeface="メイリオ"/>
+                        <a:cs typeface="メイリオ"/>
+                      </a:endParaRPr>
                     </a:p>
                   </a:txBody>
                   <a:tcPr marL="73152" marR="73152" marT="27432" marB="27432" anchor="ctr">
@@ -12375,10 +13092,15 @@
                           </a:solidFill>
                           <a:latin typeface="メイリオ" panose="020B0604030504040204" pitchFamily="50" charset="-128"/>
                           <a:ea typeface="メイリオ" panose="020B0604030504040204" pitchFamily="50" charset="-128"/>
+                          <a:cs typeface="メイリオ"/>
                         </a:rPr>
                         <a:t>見る時期</a:t>
                       </a:r>
-                      <a:endParaRPr lang="ja-JP" altLang="en-US" sz="1300" dirty="0"/>
+                      <a:endParaRPr lang="ja-JP" altLang="en-US" sz="1300" dirty="0">
+                        <a:latin typeface="メイリオ"/>
+                        <a:ea typeface="メイリオ"/>
+                        <a:cs typeface="メイリオ"/>
+                      </a:endParaRPr>
                     </a:p>
                   </a:txBody>
                   <a:tcPr marL="73152" marR="73152" marT="27432" marB="27432" anchor="ctr">
@@ -12438,10 +13160,15 @@
                           </a:solidFill>
                           <a:latin typeface="メイリオ" panose="020B0604030504040204" pitchFamily="50" charset="-128"/>
                           <a:ea typeface="メイリオ" panose="020B0604030504040204" pitchFamily="50" charset="-128"/>
+                          <a:cs typeface="メイリオ"/>
                         </a:rPr>
                         <a:t>内容</a:t>
                       </a:r>
-                      <a:endParaRPr lang="ja-JP" altLang="en-US" sz="1300" dirty="0"/>
+                      <a:endParaRPr lang="ja-JP" altLang="en-US" sz="1300" dirty="0">
+                        <a:latin typeface="メイリオ"/>
+                        <a:ea typeface="メイリオ"/>
+                        <a:cs typeface="メイリオ"/>
+                      </a:endParaRPr>
                     </a:p>
                   </a:txBody>
                   <a:tcPr marL="73152" marR="73152" marT="27432" marB="27432" anchor="ctr">
@@ -12487,7 +13214,7 @@
                   </a:tcPr>
                 </a:tc>
               </a:tr>
-              <a:tr h="731520">
+              <a:tr h="960120">
                 <a:tc>
                   <a:txBody>
                     <a:bodyPr/>
@@ -12503,10 +13230,15 @@
                           </a:solidFill>
                           <a:latin typeface="メイリオ" panose="020B0604030504040204" pitchFamily="50" charset="-128"/>
                           <a:ea typeface="メイリオ" panose="020B0604030504040204" pitchFamily="50" charset="-128"/>
+                          <a:cs typeface="メイリオ"/>
                         </a:rPr>
                         <a:t>追える人数</a:t>
                       </a:r>
-                      <a:endParaRPr lang="ja-JP" altLang="en-US" sz="1300" dirty="0"/>
+                      <a:endParaRPr lang="ja-JP" altLang="en-US" sz="1300" dirty="0">
+                        <a:latin typeface="メイリオ"/>
+                        <a:ea typeface="メイリオ"/>
+                        <a:cs typeface="メイリオ"/>
+                      </a:endParaRPr>
                     </a:p>
                   </a:txBody>
                   <a:tcPr marL="91440" marR="73152" marT="36576" marB="36576" anchor="ctr">
@@ -12566,10 +13298,15 @@
                           </a:solidFill>
                           <a:latin typeface="メイリオ" panose="020B0604030504040204" pitchFamily="50" charset="-128"/>
                           <a:ea typeface="メイリオ" panose="020B0604030504040204" pitchFamily="50" charset="-128"/>
+                          <a:cs typeface="メイリオ"/>
                         </a:rPr>
                         <a:t>平常期</a:t>
                       </a:r>
-                      <a:endParaRPr lang="ja-JP" altLang="en-US" sz="1300" dirty="0"/>
+                      <a:endParaRPr lang="ja-JP" altLang="en-US" sz="1300" dirty="0">
+                        <a:latin typeface="メイリオ"/>
+                        <a:ea typeface="メイリオ"/>
+                        <a:cs typeface="メイリオ"/>
+                      </a:endParaRPr>
                     </a:p>
                   </a:txBody>
                   <a:tcPr marL="91440" marR="73152" marT="36576" marB="36576" anchor="ctr">
@@ -12629,10 +13366,15 @@
                           </a:solidFill>
                           <a:latin typeface="メイリオ" panose="020B0604030504040204" pitchFamily="50" charset="-128"/>
                           <a:ea typeface="メイリオ" panose="020B0604030504040204" pitchFamily="50" charset="-128"/>
+                          <a:cs typeface="メイリオ"/>
                         </a:rPr>
                         <a:t>ブロックされずに届く友だちの数。増やし、減らさない</a:t>
                       </a:r>
-                      <a:endParaRPr lang="ja-JP" altLang="en-US" sz="1300" dirty="0"/>
+                      <a:endParaRPr lang="ja-JP" altLang="en-US" sz="1300" dirty="0">
+                        <a:latin typeface="メイリオ"/>
+                        <a:ea typeface="メイリオ"/>
+                        <a:cs typeface="メイリオ"/>
+                      </a:endParaRPr>
                     </a:p>
                   </a:txBody>
                   <a:tcPr marL="91440" marR="73152" marT="36576" marB="36576" anchor="ctr">
@@ -12678,7 +13420,7 @@
                   </a:tcPr>
                 </a:tc>
               </a:tr>
-              <a:tr h="731520">
+              <a:tr h="960120">
                 <a:tc>
                   <a:txBody>
                     <a:bodyPr/>
@@ -12694,10 +13436,15 @@
                           </a:solidFill>
                           <a:latin typeface="メイリオ" panose="020B0604030504040204" pitchFamily="50" charset="-128"/>
                           <a:ea typeface="メイリオ" panose="020B0604030504040204" pitchFamily="50" charset="-128"/>
+                          <a:cs typeface="メイリオ"/>
                         </a:rPr>
                         <a:t>予約・参加</a:t>
                       </a:r>
-                      <a:endParaRPr lang="ja-JP" altLang="en-US" sz="1300" dirty="0"/>
+                      <a:endParaRPr lang="ja-JP" altLang="en-US" sz="1300" dirty="0">
+                        <a:latin typeface="メイリオ"/>
+                        <a:ea typeface="メイリオ"/>
+                        <a:cs typeface="メイリオ"/>
+                      </a:endParaRPr>
                     </a:p>
                   </a:txBody>
                   <a:tcPr marL="91440" marR="73152" marT="36576" marB="36576" anchor="ctr">
@@ -12757,10 +13504,15 @@
                           </a:solidFill>
                           <a:latin typeface="メイリオ" panose="020B0604030504040204" pitchFamily="50" charset="-128"/>
                           <a:ea typeface="メイリオ" panose="020B0604030504040204" pitchFamily="50" charset="-128"/>
+                          <a:cs typeface="メイリオ"/>
                         </a:rPr>
                         <a:t>イベント期</a:t>
                       </a:r>
-                      <a:endParaRPr lang="ja-JP" altLang="en-US" sz="1300" dirty="0"/>
+                      <a:endParaRPr lang="ja-JP" altLang="en-US" sz="1300" dirty="0">
+                        <a:latin typeface="メイリオ"/>
+                        <a:ea typeface="メイリオ"/>
+                        <a:cs typeface="メイリオ"/>
+                      </a:endParaRPr>
                     </a:p>
                   </a:txBody>
                   <a:tcPr marL="91440" marR="73152" marT="36576" marB="36576" anchor="ctr">
@@ -12820,10 +13572,15 @@
                           </a:solidFill>
                           <a:latin typeface="メイリオ" panose="020B0604030504040204" pitchFamily="50" charset="-128"/>
                           <a:ea typeface="メイリオ" panose="020B0604030504040204" pitchFamily="50" charset="-128"/>
+                          <a:cs typeface="メイリオ"/>
                         </a:rPr>
                         <a:t>LINEからの予約と、当日の参加</a:t>
                       </a:r>
-                      <a:endParaRPr lang="ja-JP" altLang="en-US" sz="1300" dirty="0"/>
+                      <a:endParaRPr lang="ja-JP" altLang="en-US" sz="1300" dirty="0">
+                        <a:latin typeface="メイリオ"/>
+                        <a:ea typeface="メイリオ"/>
+                        <a:cs typeface="メイリオ"/>
+                      </a:endParaRPr>
                     </a:p>
                   </a:txBody>
                   <a:tcPr marL="91440" marR="73152" marT="36576" marB="36576" anchor="ctr">
@@ -12869,7 +13626,7 @@
                   </a:tcPr>
                 </a:tc>
               </a:tr>
-              <a:tr h="731520">
+              <a:tr h="960120">
                 <a:tc>
                   <a:txBody>
                     <a:bodyPr/>
@@ -12885,10 +13642,15 @@
                           </a:solidFill>
                           <a:latin typeface="メイリオ" panose="020B0604030504040204" pitchFamily="50" charset="-128"/>
                           <a:ea typeface="メイリオ" panose="020B0604030504040204" pitchFamily="50" charset="-128"/>
+                          <a:cs typeface="メイリオ"/>
                         </a:rPr>
                         <a:t>サロン入会</a:t>
                       </a:r>
-                      <a:endParaRPr lang="ja-JP" altLang="en-US" sz="1300" dirty="0"/>
+                      <a:endParaRPr lang="ja-JP" altLang="en-US" sz="1300" dirty="0">
+                        <a:latin typeface="メイリオ"/>
+                        <a:ea typeface="メイリオ"/>
+                        <a:cs typeface="メイリオ"/>
+                      </a:endParaRPr>
                     </a:p>
                   </a:txBody>
                   <a:tcPr marL="91440" marR="73152" marT="36576" marB="36576" anchor="ctr">
@@ -12948,10 +13710,15 @@
                           </a:solidFill>
                           <a:latin typeface="メイリオ" panose="020B0604030504040204" pitchFamily="50" charset="-128"/>
                           <a:ea typeface="メイリオ" panose="020B0604030504040204" pitchFamily="50" charset="-128"/>
+                          <a:cs typeface="メイリオ"/>
                         </a:rPr>
                         <a:t>イベントの後</a:t>
                       </a:r>
-                      <a:endParaRPr lang="ja-JP" altLang="en-US" sz="1300" dirty="0"/>
+                      <a:endParaRPr lang="ja-JP" altLang="en-US" sz="1300" dirty="0">
+                        <a:latin typeface="メイリオ"/>
+                        <a:ea typeface="メイリオ"/>
+                        <a:cs typeface="メイリオ"/>
+                      </a:endParaRPr>
                     </a:p>
                   </a:txBody>
                   <a:tcPr marL="91440" marR="73152" marT="36576" marB="36576" anchor="ctr">
@@ -13011,10 +13778,15 @@
                           </a:solidFill>
                           <a:latin typeface="メイリオ" panose="020B0604030504040204" pitchFamily="50" charset="-128"/>
                           <a:ea typeface="メイリオ" panose="020B0604030504040204" pitchFamily="50" charset="-128"/>
+                          <a:cs typeface="メイリオ"/>
                         </a:rPr>
                         <a:t>参加した方のうち、入会した方</a:t>
                       </a:r>
-                      <a:endParaRPr lang="ja-JP" altLang="en-US" sz="1300" dirty="0"/>
+                      <a:endParaRPr lang="ja-JP" altLang="en-US" sz="1300" dirty="0">
+                        <a:latin typeface="メイリオ"/>
+                        <a:ea typeface="メイリオ"/>
+                        <a:cs typeface="メイリオ"/>
+                      </a:endParaRPr>
                     </a:p>
                   </a:txBody>
                   <a:tcPr marL="91440" marR="73152" marT="36576" marB="36576" anchor="ctr">
@@ -13133,6 +13905,7 @@
                 <a:uFillTx/>
                 <a:latin typeface="メイリオ"/>
                 <a:ea typeface="メイリオ"/>
+                <a:cs typeface="メイリオ"/>
               </a:rPr>
               <a:t>概算お見積り：友だち数・予約・入会の見込み</a:t>
             </a:r>
@@ -13143,6 +13916,8 @@
               <a:effectLst/>
               <a:uFillTx/>
               <a:latin typeface="メイリオ"/>
+              <a:ea typeface="メイリオ"/>
+              <a:cs typeface="メイリオ"/>
             </a:endParaRPr>
           </a:p>
         </p:txBody>
@@ -13204,6 +13979,7 @@
               <a:uFillTx/>
               <a:latin typeface="メイリオ"/>
               <a:ea typeface="メイリオ"/>
+              <a:cs typeface="メイリオ"/>
             </a:endParaRPr>
           </a:p>
         </p:txBody>
@@ -13260,6 +14036,7 @@
               <a:uFillTx/>
               <a:latin typeface="メイリオ"/>
               <a:ea typeface="メイリオ"/>
+              <a:cs typeface="メイリオ"/>
             </a:endParaRPr>
           </a:p>
         </p:txBody>
@@ -13337,6 +14114,7 @@
                 <a:uFillTx/>
                 <a:latin typeface="メイリオ" panose="020B0604030504040204" pitchFamily="50" charset="-128"/>
                 <a:ea typeface="メイリオ" panose="020B0604030504040204" pitchFamily="50" charset="-128"/>
+                <a:cs typeface="メイリオ"/>
               </a:rPr>
               <a:t>平常期とイベント期の、友だち数と予約・入会の見込み</a:t>
             </a:r>
@@ -13344,6 +14122,8 @@
               <a:effectLst/>
               <a:uFillTx/>
               <a:latin typeface="メイリオ"/>
+              <a:ea typeface="メイリオ"/>
+              <a:cs typeface="メイリオ"/>
             </a:endParaRPr>
           </a:p>
         </p:txBody>
@@ -13357,7 +14137,7 @@
         <p:spPr>
           <a:xfrm>
             <a:off x="502920" y="1691640"/>
-            <a:ext cx="8897112" cy="4114800"/>
+            <a:ext cx="8897112" cy="4343400"/>
           </a:xfrm>
           <a:prstGeom prst="rect">
             <a:avLst/>
@@ -13386,10 +14166,15 @@
                 </a:solidFill>
                 <a:latin typeface="メイリオ" panose="020B0604030504040204" pitchFamily="50" charset="-128"/>
                 <a:ea typeface="メイリオ" panose="020B0604030504040204" pitchFamily="50" charset="-128"/>
+                <a:cs typeface="メイリオ"/>
               </a:rPr>
               <a:t>概算お見積り（SIM）の表</a:t>
             </a:r>
-            <a:endParaRPr lang="ja-JP" altLang="en-US" sz="1200" dirty="0"/>
+            <a:endParaRPr lang="ja-JP" altLang="en-US" sz="1200" dirty="0">
+              <a:latin typeface="メイリオ"/>
+              <a:ea typeface="メイリオ"/>
+              <a:cs typeface="メイリオ"/>
+            </a:endParaRPr>
           </a:p>
         </p:txBody>
       </p:sp>
@@ -13462,6 +14247,7 @@
                 <a:uFillTx/>
                 <a:latin typeface="メイリオ"/>
                 <a:ea typeface="メイリオ"/>
+                <a:cs typeface="メイリオ"/>
               </a:rPr>
               <a:t>料金：平常期 月5〜10万円、イベント期 月30万円程度</a:t>
             </a:r>
@@ -13472,6 +14258,8 @@
               <a:effectLst/>
               <a:uFillTx/>
               <a:latin typeface="メイリオ"/>
+              <a:ea typeface="メイリオ"/>
+              <a:cs typeface="メイリオ"/>
             </a:endParaRPr>
           </a:p>
         </p:txBody>
@@ -13533,6 +14321,7 @@
               <a:uFillTx/>
               <a:latin typeface="メイリオ"/>
               <a:ea typeface="メイリオ"/>
+              <a:cs typeface="メイリオ"/>
             </a:endParaRPr>
           </a:p>
         </p:txBody>
@@ -13589,6 +14378,7 @@
               <a:uFillTx/>
               <a:latin typeface="メイリオ"/>
               <a:ea typeface="メイリオ"/>
+              <a:cs typeface="メイリオ"/>
             </a:endParaRPr>
           </a:p>
         </p:txBody>
@@ -13666,6 +14456,7 @@
                 <a:uFillTx/>
                 <a:latin typeface="メイリオ" panose="020B0604030504040204" pitchFamily="50" charset="-128"/>
                 <a:ea typeface="メイリオ" panose="020B0604030504040204" pitchFamily="50" charset="-128"/>
+                <a:cs typeface="メイリオ"/>
               </a:rPr>
               <a:t>イベントの有無に合わせて、月ごとの費用を変える</a:t>
             </a:r>
@@ -13673,6 +14464,8 @@
               <a:effectLst/>
               <a:uFillTx/>
               <a:latin typeface="メイリオ"/>
+              <a:ea typeface="メイリオ"/>
+              <a:cs typeface="メイリオ"/>
             </a:endParaRPr>
           </a:p>
         </p:txBody>
@@ -13687,7 +14480,7 @@
         </p:nvGraphicFramePr>
         <p:xfrm>
           <a:off x="502920" y="1691640"/>
-          <a:ext cx="8897112" cy="2770632"/>
+          <a:ext cx="8897112" cy="3182112"/>
         </p:xfrm>
         <a:graphic>
           <a:graphicData uri="http://schemas.openxmlformats.org/drawingml/2006/table">
@@ -13714,10 +14507,15 @@
                           </a:solidFill>
                           <a:latin typeface="メイリオ" panose="020B0604030504040204" pitchFamily="50" charset="-128"/>
                           <a:ea typeface="メイリオ" panose="020B0604030504040204" pitchFamily="50" charset="-128"/>
+                          <a:cs typeface="メイリオ"/>
                         </a:rPr>
                         <a:t>区分</a:t>
                       </a:r>
-                      <a:endParaRPr lang="ja-JP" altLang="en-US" sz="1300" dirty="0"/>
+                      <a:endParaRPr lang="ja-JP" altLang="en-US" sz="1300" dirty="0">
+                        <a:latin typeface="メイリオ"/>
+                        <a:ea typeface="メイリオ"/>
+                        <a:cs typeface="メイリオ"/>
+                      </a:endParaRPr>
                     </a:p>
                   </a:txBody>
                   <a:tcPr marL="73152" marR="73152" marT="27432" marB="27432" anchor="ctr">
@@ -13777,10 +14575,15 @@
                           </a:solidFill>
                           <a:latin typeface="メイリオ" panose="020B0604030504040204" pitchFamily="50" charset="-128"/>
                           <a:ea typeface="メイリオ" panose="020B0604030504040204" pitchFamily="50" charset="-128"/>
+                          <a:cs typeface="メイリオ"/>
                         </a:rPr>
                         <a:t>月額</a:t>
                       </a:r>
-                      <a:endParaRPr lang="ja-JP" altLang="en-US" sz="1300" dirty="0"/>
+                      <a:endParaRPr lang="ja-JP" altLang="en-US" sz="1300" dirty="0">
+                        <a:latin typeface="メイリオ"/>
+                        <a:ea typeface="メイリオ"/>
+                        <a:cs typeface="メイリオ"/>
+                      </a:endParaRPr>
                     </a:p>
                   </a:txBody>
                   <a:tcPr marL="73152" marR="73152" marT="27432" marB="27432" anchor="ctr">
@@ -13840,10 +14643,15 @@
                           </a:solidFill>
                           <a:latin typeface="メイリオ" panose="020B0604030504040204" pitchFamily="50" charset="-128"/>
                           <a:ea typeface="メイリオ" panose="020B0604030504040204" pitchFamily="50" charset="-128"/>
+                          <a:cs typeface="メイリオ"/>
                         </a:rPr>
                         <a:t>内容</a:t>
                       </a:r>
-                      <a:endParaRPr lang="ja-JP" altLang="en-US" sz="1300" dirty="0"/>
+                      <a:endParaRPr lang="ja-JP" altLang="en-US" sz="1300" dirty="0">
+                        <a:latin typeface="メイリオ"/>
+                        <a:ea typeface="メイリオ"/>
+                        <a:cs typeface="メイリオ"/>
+                      </a:endParaRPr>
                     </a:p>
                   </a:txBody>
                   <a:tcPr marL="73152" marR="73152" marT="27432" marB="27432" anchor="ctr">
@@ -13889,7 +14697,7 @@
                   </a:tcPr>
                 </a:tc>
               </a:tr>
-              <a:tr h="777240">
+              <a:tr h="914400">
                 <a:tc>
                   <a:txBody>
                     <a:bodyPr/>
@@ -13905,6 +14713,7 @@
                           </a:solidFill>
                           <a:latin typeface="メイリオ" panose="020B0604030504040204" pitchFamily="50" charset="-128"/>
                           <a:ea typeface="メイリオ" panose="020B0604030504040204" pitchFamily="50" charset="-128"/>
+                          <a:cs typeface="メイリオ"/>
                         </a:rPr>
                         <a:t>平常期</a:t>
                       </a:r>
@@ -13915,6 +14724,7 @@
                           </a:solidFill>
                           <a:latin typeface="メイリオ" panose="020B0604030504040204" pitchFamily="50" charset="-128"/>
                           <a:ea typeface="メイリオ" panose="020B0604030504040204" pitchFamily="50" charset="-128"/>
+                          <a:cs typeface="メイリオ"/>
                         </a:rPr>
                       </a:br>
                       <a:r>
@@ -13924,10 +14734,15 @@
                           </a:solidFill>
                           <a:latin typeface="メイリオ" panose="020B0604030504040204" pitchFamily="50" charset="-128"/>
                           <a:ea typeface="メイリオ" panose="020B0604030504040204" pitchFamily="50" charset="-128"/>
+                          <a:cs typeface="メイリオ"/>
                         </a:rPr>
                         <a:t>（イベントの無い月）</a:t>
                       </a:r>
-                      <a:endParaRPr lang="ja-JP" altLang="en-US" sz="1250" dirty="0"/>
+                      <a:endParaRPr lang="ja-JP" altLang="en-US" sz="1250" dirty="0">
+                        <a:latin typeface="メイリオ"/>
+                        <a:ea typeface="メイリオ"/>
+                        <a:cs typeface="メイリオ"/>
+                      </a:endParaRPr>
                     </a:p>
                   </a:txBody>
                   <a:tcPr marL="91440" marR="73152" marT="36576" marB="36576" anchor="ctr">
@@ -13987,10 +14802,15 @@
                           </a:solidFill>
                           <a:latin typeface="メイリオ" panose="020B0604030504040204" pitchFamily="50" charset="-128"/>
                           <a:ea typeface="メイリオ" panose="020B0604030504040204" pitchFamily="50" charset="-128"/>
+                          <a:cs typeface="メイリオ"/>
                         </a:rPr>
                         <a:t>5〜10万円</a:t>
                       </a:r>
-                      <a:endParaRPr lang="ja-JP" altLang="en-US" sz="1600" dirty="0"/>
+                      <a:endParaRPr lang="ja-JP" altLang="en-US" sz="1600" dirty="0">
+                        <a:latin typeface="メイリオ"/>
+                        <a:ea typeface="メイリオ"/>
+                        <a:cs typeface="メイリオ"/>
+                      </a:endParaRPr>
                     </a:p>
                   </a:txBody>
                   <a:tcPr marL="91440" marR="73152" marT="36576" marB="36576" anchor="ctr">
@@ -14050,10 +14870,15 @@
                           </a:solidFill>
                           <a:latin typeface="メイリオ" panose="020B0604030504040204" pitchFamily="50" charset="-128"/>
                           <a:ea typeface="メイリオ" panose="020B0604030504040204" pitchFamily="50" charset="-128"/>
+                          <a:cs typeface="メイリオ"/>
                         </a:rPr>
                         <a:t>月2回の配信（ツール費を含む）</a:t>
                       </a:r>
-                      <a:endParaRPr lang="ja-JP" altLang="en-US" sz="1300" dirty="0"/>
+                      <a:endParaRPr lang="ja-JP" altLang="en-US" sz="1300" dirty="0">
+                        <a:latin typeface="メイリオ"/>
+                        <a:ea typeface="メイリオ"/>
+                        <a:cs typeface="メイリオ"/>
+                      </a:endParaRPr>
                     </a:p>
                   </a:txBody>
                   <a:tcPr marL="91440" marR="73152" marT="36576" marB="36576" anchor="ctr">
@@ -14099,7 +14924,7 @@
                   </a:tcPr>
                 </a:tc>
               </a:tr>
-              <a:tr h="777240">
+              <a:tr h="914400">
                 <a:tc>
                   <a:txBody>
                     <a:bodyPr/>
@@ -14115,6 +14940,7 @@
                           </a:solidFill>
                           <a:latin typeface="メイリオ" panose="020B0604030504040204" pitchFamily="50" charset="-128"/>
                           <a:ea typeface="メイリオ" panose="020B0604030504040204" pitchFamily="50" charset="-128"/>
+                          <a:cs typeface="メイリオ"/>
                         </a:rPr>
                         <a:t>イベント期</a:t>
                       </a:r>
@@ -14125,6 +14951,7 @@
                           </a:solidFill>
                           <a:latin typeface="メイリオ" panose="020B0604030504040204" pitchFamily="50" charset="-128"/>
                           <a:ea typeface="メイリオ" panose="020B0604030504040204" pitchFamily="50" charset="-128"/>
+                          <a:cs typeface="メイリオ"/>
                         </a:rPr>
                       </a:br>
                       <a:r>
@@ -14134,10 +14961,15 @@
                           </a:solidFill>
                           <a:latin typeface="メイリオ" panose="020B0604030504040204" pitchFamily="50" charset="-128"/>
                           <a:ea typeface="メイリオ" panose="020B0604030504040204" pitchFamily="50" charset="-128"/>
+                          <a:cs typeface="メイリオ"/>
                         </a:rPr>
                         <a:t>（イベントの前後）</a:t>
                       </a:r>
-                      <a:endParaRPr lang="ja-JP" altLang="en-US" sz="1250" dirty="0"/>
+                      <a:endParaRPr lang="ja-JP" altLang="en-US" sz="1250" dirty="0">
+                        <a:latin typeface="メイリオ"/>
+                        <a:ea typeface="メイリオ"/>
+                        <a:cs typeface="メイリオ"/>
+                      </a:endParaRPr>
                     </a:p>
                   </a:txBody>
                   <a:tcPr marL="91440" marR="73152" marT="36576" marB="36576" anchor="ctr">
@@ -14197,10 +15029,15 @@
                           </a:solidFill>
                           <a:latin typeface="メイリオ" panose="020B0604030504040204" pitchFamily="50" charset="-128"/>
                           <a:ea typeface="メイリオ" panose="020B0604030504040204" pitchFamily="50" charset="-128"/>
+                          <a:cs typeface="メイリオ"/>
                         </a:rPr>
                         <a:t>30万円程度</a:t>
                       </a:r>
-                      <a:endParaRPr lang="ja-JP" altLang="en-US" sz="1600" dirty="0"/>
+                      <a:endParaRPr lang="ja-JP" altLang="en-US" sz="1600" dirty="0">
+                        <a:latin typeface="メイリオ"/>
+                        <a:ea typeface="メイリオ"/>
+                        <a:cs typeface="メイリオ"/>
+                      </a:endParaRPr>
                     </a:p>
                   </a:txBody>
                   <a:tcPr marL="91440" marR="73152" marT="36576" marB="36576" anchor="ctr">
@@ -14260,10 +15097,15 @@
                           </a:solidFill>
                           <a:latin typeface="メイリオ" panose="020B0604030504040204" pitchFamily="50" charset="-128"/>
                           <a:ea typeface="メイリオ" panose="020B0604030504040204" pitchFamily="50" charset="-128"/>
+                          <a:cs typeface="メイリオ"/>
                         </a:rPr>
                         <a:t>月4〜5回の配信（告知・リマインド・イベント直後のフォロー）</a:t>
                       </a:r>
-                      <a:endParaRPr lang="ja-JP" altLang="en-US" sz="1300" dirty="0"/>
+                      <a:endParaRPr lang="ja-JP" altLang="en-US" sz="1300" dirty="0">
+                        <a:latin typeface="メイリオ"/>
+                        <a:ea typeface="メイリオ"/>
+                        <a:cs typeface="メイリオ"/>
+                      </a:endParaRPr>
                     </a:p>
                   </a:txBody>
                   <a:tcPr marL="91440" marR="73152" marT="36576" marB="36576" anchor="ctr">
@@ -14309,7 +15151,7 @@
                   </a:tcPr>
                 </a:tc>
               </a:tr>
-              <a:tr h="777240">
+              <a:tr h="914400">
                 <a:tc>
                   <a:txBody>
                     <a:bodyPr/>
@@ -14325,10 +15167,15 @@
                           </a:solidFill>
                           <a:latin typeface="メイリオ" panose="020B0604030504040204" pitchFamily="50" charset="-128"/>
                           <a:ea typeface="メイリオ" panose="020B0604030504040204" pitchFamily="50" charset="-128"/>
+                          <a:cs typeface="メイリオ"/>
                         </a:rPr>
                         <a:t>年間の目安</a:t>
                       </a:r>
-                      <a:endParaRPr lang="ja-JP" altLang="en-US" sz="1250" dirty="0"/>
+                      <a:endParaRPr lang="ja-JP" altLang="en-US" sz="1250" dirty="0">
+                        <a:latin typeface="メイリオ"/>
+                        <a:ea typeface="メイリオ"/>
+                        <a:cs typeface="メイリオ"/>
+                      </a:endParaRPr>
                     </a:p>
                   </a:txBody>
                   <a:tcPr marL="91440" marR="73152" marT="36576" marB="36576" anchor="ctr">
@@ -14388,10 +15235,15 @@
                           </a:solidFill>
                           <a:latin typeface="メイリオ" panose="020B0604030504040204" pitchFamily="50" charset="-128"/>
                           <a:ea typeface="メイリオ" panose="020B0604030504040204" pitchFamily="50" charset="-128"/>
+                          <a:cs typeface="メイリオ"/>
                         </a:rPr>
                         <a:t>約160〜200万円</a:t>
                       </a:r>
-                      <a:endParaRPr lang="ja-JP" altLang="en-US" sz="1600" dirty="0"/>
+                      <a:endParaRPr lang="ja-JP" altLang="en-US" sz="1600" dirty="0">
+                        <a:latin typeface="メイリオ"/>
+                        <a:ea typeface="メイリオ"/>
+                        <a:cs typeface="メイリオ"/>
+                      </a:endParaRPr>
                     </a:p>
                   </a:txBody>
                   <a:tcPr marL="91440" marR="73152" marT="36576" marB="36576" anchor="ctr">
@@ -14451,10 +15303,15 @@
                           </a:solidFill>
                           <a:latin typeface="メイリオ" panose="020B0604030504040204" pitchFamily="50" charset="-128"/>
                           <a:ea typeface="メイリオ" panose="020B0604030504040204" pitchFamily="50" charset="-128"/>
+                          <a:cs typeface="メイリオ"/>
                         </a:rPr>
                         <a:t>イベント期4か月＋平常期8か月</a:t>
                       </a:r>
-                      <a:endParaRPr lang="ja-JP" altLang="en-US" sz="1300" dirty="0"/>
+                      <a:endParaRPr lang="ja-JP" altLang="en-US" sz="1300" dirty="0">
+                        <a:latin typeface="メイリオ"/>
+                        <a:ea typeface="メイリオ"/>
+                        <a:cs typeface="メイリオ"/>
+                      </a:endParaRPr>
                     </a:p>
                   </a:txBody>
                   <a:tcPr marL="91440" marR="73152" marT="36576" marB="36576" anchor="ctr">
@@ -14512,7 +15369,7 @@
         </p:nvSpPr>
         <p:spPr>
           <a:xfrm>
-            <a:off x="502920" y="4892040"/>
+            <a:off x="502920" y="5166360"/>
             <a:ext cx="8897112" cy="256032"/>
           </a:xfrm>
           <a:prstGeom prst="rect">
@@ -14542,10 +15399,15 @@
                 </a:solidFill>
                 <a:latin typeface="メイリオ" panose="020B0604030504040204" pitchFamily="50" charset="-128"/>
                 <a:ea typeface="メイリオ" panose="020B0604030504040204" pitchFamily="50" charset="-128"/>
+                <a:cs typeface="メイリオ"/>
               </a:rPr>
               <a:t>※広告費は含まない</a:t>
             </a:r>
-            <a:endParaRPr lang="ja-JP" altLang="en-US" sz="1200" dirty="0"/>
+            <a:endParaRPr lang="ja-JP" altLang="en-US" sz="1200" dirty="0">
+              <a:latin typeface="メイリオ"/>
+              <a:ea typeface="メイリオ"/>
+              <a:cs typeface="メイリオ"/>
+            </a:endParaRPr>
           </a:p>
         </p:txBody>
       </p:sp>
@@ -14557,7 +15419,7 @@
         </p:nvSpPr>
         <p:spPr>
           <a:xfrm>
-            <a:off x="502920" y="5148072"/>
+            <a:off x="502920" y="5422392"/>
             <a:ext cx="8897112" cy="256032"/>
           </a:xfrm>
           <a:prstGeom prst="rect">
@@ -14587,10 +15449,15 @@
                 </a:solidFill>
                 <a:latin typeface="メイリオ" panose="020B0604030504040204" pitchFamily="50" charset="-128"/>
                 <a:ea typeface="メイリオ" panose="020B0604030504040204" pitchFamily="50" charset="-128"/>
+                <a:cs typeface="メイリオ"/>
               </a:rPr>
               <a:t>※イベントを年4回、イベント期を各1か月として計算</a:t>
             </a:r>
-            <a:endParaRPr lang="ja-JP" altLang="en-US" sz="1200" dirty="0"/>
+            <a:endParaRPr lang="ja-JP" altLang="en-US" sz="1200" dirty="0">
+              <a:latin typeface="メイリオ"/>
+              <a:ea typeface="メイリオ"/>
+              <a:cs typeface="メイリオ"/>
+            </a:endParaRPr>
           </a:p>
         </p:txBody>
       </p:sp>
@@ -14602,7 +15469,7 @@
         </p:nvSpPr>
         <p:spPr>
           <a:xfrm>
-            <a:off x="502920" y="5404104"/>
+            <a:off x="502920" y="5678424"/>
             <a:ext cx="8897112" cy="256032"/>
           </a:xfrm>
           <a:prstGeom prst="rect">
@@ -14632,10 +15499,15 @@
                 </a:solidFill>
                 <a:latin typeface="メイリオ" panose="020B0604030504040204" pitchFamily="50" charset="-128"/>
                 <a:ea typeface="メイリオ" panose="020B0604030504040204" pitchFamily="50" charset="-128"/>
+                <a:cs typeface="メイリオ"/>
               </a:rPr>
               <a:t>※施策内容・配信本数・連携範囲等により、費用は個別にお見積り</a:t>
             </a:r>
-            <a:endParaRPr lang="ja-JP" altLang="en-US" sz="1200" dirty="0"/>
+            <a:endParaRPr lang="ja-JP" altLang="en-US" sz="1200" dirty="0">
+              <a:latin typeface="メイリオ"/>
+              <a:ea typeface="メイリオ"/>
+              <a:cs typeface="メイリオ"/>
+            </a:endParaRPr>
           </a:p>
         </p:txBody>
       </p:sp>
@@ -14708,6 +15580,7 @@
                 <a:uFillTx/>
                 <a:latin typeface="メイリオ"/>
                 <a:ea typeface="メイリオ"/>
+                <a:cs typeface="メイリオ"/>
               </a:rPr>
               <a:t>スケジュール：初期構築に約1か月、構築後に運用を開始</a:t>
             </a:r>
@@ -14718,6 +15591,8 @@
               <a:effectLst/>
               <a:uFillTx/>
               <a:latin typeface="メイリオ"/>
+              <a:ea typeface="メイリオ"/>
+              <a:cs typeface="メイリオ"/>
             </a:endParaRPr>
           </a:p>
         </p:txBody>
@@ -14779,6 +15654,7 @@
               <a:uFillTx/>
               <a:latin typeface="メイリオ"/>
               <a:ea typeface="メイリオ"/>
+              <a:cs typeface="メイリオ"/>
             </a:endParaRPr>
           </a:p>
         </p:txBody>
@@ -14835,6 +15711,7 @@
               <a:uFillTx/>
               <a:latin typeface="メイリオ"/>
               <a:ea typeface="メイリオ"/>
+              <a:cs typeface="メイリオ"/>
             </a:endParaRPr>
           </a:p>
         </p:txBody>
@@ -14912,6 +15789,7 @@
                 <a:uFillTx/>
                 <a:latin typeface="メイリオ" panose="020B0604030504040204" pitchFamily="50" charset="-128"/>
                 <a:ea typeface="メイリオ" panose="020B0604030504040204" pitchFamily="50" charset="-128"/>
+                <a:cs typeface="メイリオ"/>
               </a:rPr>
               <a:t>お申込みから約1か月で、友だちの入口と配信の準備を整える</a:t>
             </a:r>
@@ -14919,6 +15797,8 @@
               <a:effectLst/>
               <a:uFillTx/>
               <a:latin typeface="メイリオ"/>
+              <a:ea typeface="メイリオ"/>
+              <a:cs typeface="メイリオ"/>
             </a:endParaRPr>
           </a:p>
         </p:txBody>
@@ -14932,7 +15812,7 @@
         <p:spPr>
           <a:xfrm>
             <a:off x="502920" y="1691640"/>
-            <a:ext cx="2770632" cy="685800"/>
+            <a:ext cx="2770632" cy="822960"/>
           </a:xfrm>
           <a:prstGeom prst="rect">
             <a:avLst/>
@@ -14957,16 +15837,21 @@
               <a:buNone/>
             </a:pPr>
             <a:r>
-              <a:rPr lang="ja-JP" altLang="en-US" sz="1300" b="1" dirty="0">
+              <a:rPr lang="ja-JP" altLang="en-US" sz="1400" b="1" dirty="0">
                 <a:solidFill>
                   <a:srgbClr val="1F285A"/>
                 </a:solidFill>
                 <a:latin typeface="メイリオ" panose="020B0604030504040204" pitchFamily="50" charset="-128"/>
                 <a:ea typeface="メイリオ" panose="020B0604030504040204" pitchFamily="50" charset="-128"/>
+                <a:cs typeface="メイリオ"/>
               </a:rPr>
               <a:t>お申込み</a:t>
             </a:r>
-            <a:endParaRPr lang="ja-JP" altLang="en-US" sz="1200" dirty="0"/>
+            <a:endParaRPr lang="ja-JP" altLang="en-US" sz="1200" dirty="0">
+              <a:latin typeface="メイリオ"/>
+              <a:ea typeface="メイリオ"/>
+              <a:cs typeface="メイリオ"/>
+            </a:endParaRPr>
           </a:p>
         </p:txBody>
       </p:sp>
@@ -14979,7 +15864,7 @@
         <p:spPr>
           <a:xfrm>
             <a:off x="3273552" y="1691640"/>
-            <a:ext cx="292608" cy="685800"/>
+            <a:ext cx="292608" cy="822960"/>
           </a:xfrm>
           <a:prstGeom prst="rect">
             <a:avLst/>
@@ -15005,10 +15890,15 @@
                 </a:solidFill>
                 <a:latin typeface="メイリオ" panose="020B0604030504040204" pitchFamily="50" charset="-128"/>
                 <a:ea typeface="メイリオ" panose="020B0604030504040204" pitchFamily="50" charset="-128"/>
+                <a:cs typeface="メイリオ"/>
               </a:rPr>
               <a:t>▶</a:t>
             </a:r>
-            <a:endParaRPr lang="ja-JP" altLang="en-US" sz="1200" dirty="0"/>
+            <a:endParaRPr lang="ja-JP" altLang="en-US" sz="1200" dirty="0">
+              <a:latin typeface="メイリオ"/>
+              <a:ea typeface="メイリオ"/>
+              <a:cs typeface="メイリオ"/>
+            </a:endParaRPr>
           </a:p>
         </p:txBody>
       </p:sp>
@@ -15021,7 +15911,7 @@
         <p:spPr>
           <a:xfrm>
             <a:off x="3566159" y="1691640"/>
-            <a:ext cx="2770632" cy="685800"/>
+            <a:ext cx="2770632" cy="822960"/>
           </a:xfrm>
           <a:prstGeom prst="rect">
             <a:avLst/>
@@ -15046,16 +15936,21 @@
               <a:buNone/>
             </a:pPr>
             <a:r>
-              <a:rPr lang="ja-JP" altLang="en-US" sz="1300" b="1" dirty="0">
+              <a:rPr lang="ja-JP" altLang="en-US" sz="1400" b="1" dirty="0">
                 <a:solidFill>
                   <a:srgbClr val="FFFFFF"/>
                 </a:solidFill>
                 <a:latin typeface="メイリオ" panose="020B0604030504040204" pitchFamily="50" charset="-128"/>
                 <a:ea typeface="メイリオ" panose="020B0604030504040204" pitchFamily="50" charset="-128"/>
+                <a:cs typeface="メイリオ"/>
               </a:rPr>
               <a:t>初期構築（約1か月）</a:t>
             </a:r>
-            <a:endParaRPr lang="ja-JP" altLang="en-US" sz="1200" dirty="0"/>
+            <a:endParaRPr lang="ja-JP" altLang="en-US" sz="1200" dirty="0">
+              <a:latin typeface="メイリオ"/>
+              <a:ea typeface="メイリオ"/>
+              <a:cs typeface="メイリオ"/>
+            </a:endParaRPr>
           </a:p>
         </p:txBody>
       </p:sp>
@@ -15068,7 +15963,7 @@
         <p:spPr>
           <a:xfrm>
             <a:off x="6336792" y="1691640"/>
-            <a:ext cx="292608" cy="685800"/>
+            <a:ext cx="292608" cy="822960"/>
           </a:xfrm>
           <a:prstGeom prst="rect">
             <a:avLst/>
@@ -15094,10 +15989,15 @@
                 </a:solidFill>
                 <a:latin typeface="メイリオ" panose="020B0604030504040204" pitchFamily="50" charset="-128"/>
                 <a:ea typeface="メイリオ" panose="020B0604030504040204" pitchFamily="50" charset="-128"/>
+                <a:cs typeface="メイリオ"/>
               </a:rPr>
               <a:t>▶</a:t>
             </a:r>
-            <a:endParaRPr lang="ja-JP" altLang="en-US" sz="1200" dirty="0"/>
+            <a:endParaRPr lang="ja-JP" altLang="en-US" sz="1200" dirty="0">
+              <a:latin typeface="メイリオ"/>
+              <a:ea typeface="メイリオ"/>
+              <a:cs typeface="メイリオ"/>
+            </a:endParaRPr>
           </a:p>
         </p:txBody>
       </p:sp>
@@ -15110,7 +16010,7 @@
         <p:spPr>
           <a:xfrm>
             <a:off x="6629399" y="1691640"/>
-            <a:ext cx="2770632" cy="685800"/>
+            <a:ext cx="2770632" cy="822960"/>
           </a:xfrm>
           <a:prstGeom prst="rect">
             <a:avLst/>
@@ -15135,16 +16035,21 @@
               <a:buNone/>
             </a:pPr>
             <a:r>
-              <a:rPr lang="ja-JP" altLang="en-US" sz="1300" b="1" dirty="0">
+              <a:rPr lang="ja-JP" altLang="en-US" sz="1400" b="1" dirty="0">
                 <a:solidFill>
                   <a:srgbClr val="FFFFFF"/>
                 </a:solidFill>
                 <a:latin typeface="メイリオ" panose="020B0604030504040204" pitchFamily="50" charset="-128"/>
                 <a:ea typeface="メイリオ" panose="020B0604030504040204" pitchFamily="50" charset="-128"/>
+                <a:cs typeface="メイリオ"/>
               </a:rPr>
               <a:t>運用開始</a:t>
             </a:r>
-            <a:endParaRPr lang="ja-JP" altLang="en-US" sz="1200" dirty="0"/>
+            <a:endParaRPr lang="ja-JP" altLang="en-US" sz="1200" dirty="0">
+              <a:latin typeface="メイリオ"/>
+              <a:ea typeface="メイリオ"/>
+              <a:cs typeface="メイリオ"/>
+            </a:endParaRPr>
           </a:p>
         </p:txBody>
       </p:sp>
@@ -15156,8 +16061,8 @@
         </p:nvSpPr>
         <p:spPr>
           <a:xfrm>
-            <a:off x="502920" y="2514600"/>
-            <a:ext cx="2770632" cy="1737360"/>
+            <a:off x="502920" y="2697480"/>
+            <a:ext cx="2770632" cy="3108960"/>
           </a:xfrm>
           <a:prstGeom prst="rect">
             <a:avLst/>
@@ -15177,40 +16082,50 @@
           <a:p>
             <a:pPr algn="l">
               <a:lnSpc>
-                <a:spcPct val="130000"/>
+                <a:spcPct val="150000"/>
               </a:lnSpc>
               <a:buNone/>
             </a:pPr>
             <a:r>
-              <a:rPr lang="ja-JP" altLang="en-US" sz="1300" b="0" dirty="0">
+              <a:rPr lang="ja-JP" altLang="en-US" sz="1400" b="0" dirty="0">
                 <a:solidFill>
                   <a:srgbClr val="333333"/>
                 </a:solidFill>
                 <a:latin typeface="メイリオ" panose="020B0604030504040204" pitchFamily="50" charset="-128"/>
                 <a:ea typeface="メイリオ" panose="020B0604030504040204" pitchFamily="50" charset="-128"/>
+                <a:cs typeface="メイリオ"/>
               </a:rPr>
               <a:t>・ご契約</a:t>
             </a:r>
-            <a:endParaRPr lang="ja-JP" altLang="en-US" sz="1200" dirty="0"/>
+            <a:endParaRPr lang="ja-JP" altLang="en-US" sz="1200" dirty="0">
+              <a:latin typeface="メイリオ"/>
+              <a:ea typeface="メイリオ"/>
+              <a:cs typeface="メイリオ"/>
+            </a:endParaRPr>
           </a:p>
           <a:p>
             <a:pPr algn="l">
               <a:lnSpc>
-                <a:spcPct val="130000"/>
+                <a:spcPct val="150000"/>
               </a:lnSpc>
               <a:buNone/>
             </a:pPr>
             <a:r>
-              <a:rPr lang="ja-JP" altLang="en-US" sz="1300" b="0" dirty="0">
+              <a:rPr lang="ja-JP" altLang="en-US" sz="1400" b="0" dirty="0">
                 <a:solidFill>
                   <a:srgbClr val="333333"/>
                 </a:solidFill>
                 <a:latin typeface="メイリオ" panose="020B0604030504040204" pitchFamily="50" charset="-128"/>
                 <a:ea typeface="メイリオ" panose="020B0604030504040204" pitchFamily="50" charset="-128"/>
+                <a:cs typeface="メイリオ"/>
               </a:rPr>
               <a:t>・運用方針のすり合わせ</a:t>
             </a:r>
-            <a:endParaRPr lang="ja-JP" altLang="en-US" sz="1200" dirty="0"/>
+            <a:endParaRPr lang="ja-JP" altLang="en-US" sz="1200" dirty="0">
+              <a:latin typeface="メイリオ"/>
+              <a:ea typeface="メイリオ"/>
+              <a:cs typeface="メイリオ"/>
+            </a:endParaRPr>
           </a:p>
         </p:txBody>
       </p:sp>
@@ -15222,8 +16137,8 @@
         </p:nvSpPr>
         <p:spPr>
           <a:xfrm>
-            <a:off x="3566159" y="2514600"/>
-            <a:ext cx="2770632" cy="1737360"/>
+            <a:off x="3566159" y="2697480"/>
+            <a:ext cx="2770632" cy="3108960"/>
           </a:xfrm>
           <a:prstGeom prst="rect">
             <a:avLst/>
@@ -15243,78 +16158,98 @@
           <a:p>
             <a:pPr algn="l">
               <a:lnSpc>
-                <a:spcPct val="130000"/>
+                <a:spcPct val="150000"/>
               </a:lnSpc>
               <a:buNone/>
             </a:pPr>
             <a:r>
-              <a:rPr lang="ja-JP" altLang="en-US" sz="1300" b="0" dirty="0">
+              <a:rPr lang="ja-JP" altLang="en-US" sz="1400" b="0" dirty="0">
                 <a:solidFill>
                   <a:srgbClr val="333333"/>
                 </a:solidFill>
                 <a:latin typeface="メイリオ" panose="020B0604030504040204" pitchFamily="50" charset="-128"/>
                 <a:ea typeface="メイリオ" panose="020B0604030504040204" pitchFamily="50" charset="-128"/>
+                <a:cs typeface="メイリオ"/>
               </a:rPr>
               <a:t>・アカウントの設定</a:t>
             </a:r>
-            <a:endParaRPr lang="ja-JP" altLang="en-US" sz="1200" dirty="0"/>
+            <a:endParaRPr lang="ja-JP" altLang="en-US" sz="1200" dirty="0">
+              <a:latin typeface="メイリオ"/>
+              <a:ea typeface="メイリオ"/>
+              <a:cs typeface="メイリオ"/>
+            </a:endParaRPr>
           </a:p>
           <a:p>
             <a:pPr algn="l">
               <a:lnSpc>
-                <a:spcPct val="130000"/>
+                <a:spcPct val="150000"/>
               </a:lnSpc>
               <a:buNone/>
             </a:pPr>
             <a:r>
-              <a:rPr lang="ja-JP" altLang="en-US" sz="1300" b="0" dirty="0">
+              <a:rPr lang="ja-JP" altLang="en-US" sz="1400" b="0" dirty="0">
                 <a:solidFill>
                   <a:srgbClr val="333333"/>
                 </a:solidFill>
                 <a:latin typeface="メイリオ" panose="020B0604030504040204" pitchFamily="50" charset="-128"/>
                 <a:ea typeface="メイリオ" panose="020B0604030504040204" pitchFamily="50" charset="-128"/>
+                <a:cs typeface="メイリオ"/>
               </a:rPr>
               <a:t>・ポップアップツールの設置</a:t>
             </a:r>
-            <a:endParaRPr lang="ja-JP" altLang="en-US" sz="1200" dirty="0"/>
+            <a:endParaRPr lang="ja-JP" altLang="en-US" sz="1200" dirty="0">
+              <a:latin typeface="メイリオ"/>
+              <a:ea typeface="メイリオ"/>
+              <a:cs typeface="メイリオ"/>
+            </a:endParaRPr>
           </a:p>
           <a:p>
             <a:pPr algn="l">
               <a:lnSpc>
-                <a:spcPct val="130000"/>
+                <a:spcPct val="150000"/>
               </a:lnSpc>
               <a:buNone/>
             </a:pPr>
             <a:r>
-              <a:rPr lang="ja-JP" altLang="en-US" sz="1300" b="0" dirty="0">
+              <a:rPr lang="ja-JP" altLang="en-US" sz="1400" b="0" dirty="0">
                 <a:solidFill>
                   <a:srgbClr val="333333"/>
                 </a:solidFill>
                 <a:latin typeface="メイリオ" panose="020B0604030504040204" pitchFamily="50" charset="-128"/>
                 <a:ea typeface="メイリオ" panose="020B0604030504040204" pitchFamily="50" charset="-128"/>
+                <a:cs typeface="メイリオ"/>
               </a:rPr>
               <a:t>・サンクスLINE誘導の設置</a:t>
             </a:r>
-            <a:endParaRPr lang="ja-JP" altLang="en-US" sz="1200" dirty="0"/>
+            <a:endParaRPr lang="ja-JP" altLang="en-US" sz="1200" dirty="0">
+              <a:latin typeface="メイリオ"/>
+              <a:ea typeface="メイリオ"/>
+              <a:cs typeface="メイリオ"/>
+            </a:endParaRPr>
           </a:p>
           <a:p>
             <a:pPr algn="l">
               <a:lnSpc>
-                <a:spcPct val="130000"/>
+                <a:spcPct val="150000"/>
               </a:lnSpc>
               <a:buNone/>
             </a:pPr>
             <a:r>
-              <a:rPr lang="ja-JP" altLang="en-US" sz="1300" b="0" dirty="0">
+              <a:rPr lang="ja-JP" altLang="en-US" sz="1400" b="0" dirty="0">
                 <a:solidFill>
                   <a:srgbClr val="333333"/>
                 </a:solidFill>
                 <a:latin typeface="メイリオ" panose="020B0604030504040204" pitchFamily="50" charset="-128"/>
                 <a:ea typeface="メイリオ" panose="020B0604030504040204" pitchFamily="50" charset="-128"/>
+                <a:cs typeface="メイリオ"/>
               </a:rPr>
               <a:t>・段階ごとの配信の設計</a:t>
             </a:r>
-            <a:endParaRPr lang="ja-JP" altLang="en-US" sz="1200" dirty="0"/>
+            <a:endParaRPr lang="ja-JP" altLang="en-US" sz="1200" dirty="0">
+              <a:latin typeface="メイリオ"/>
+              <a:ea typeface="メイリオ"/>
+              <a:cs typeface="メイリオ"/>
+            </a:endParaRPr>
           </a:p>
         </p:txBody>
       </p:sp>
@@ -15326,8 +16261,8 @@
         </p:nvSpPr>
         <p:spPr>
           <a:xfrm>
-            <a:off x="6629399" y="2514600"/>
-            <a:ext cx="2770632" cy="1737360"/>
+            <a:off x="6629399" y="2697480"/>
+            <a:ext cx="2770632" cy="3108960"/>
           </a:xfrm>
           <a:prstGeom prst="rect">
             <a:avLst/>
@@ -15347,40 +16282,50 @@
           <a:p>
             <a:pPr algn="l">
               <a:lnSpc>
-                <a:spcPct val="130000"/>
+                <a:spcPct val="150000"/>
               </a:lnSpc>
               <a:buNone/>
             </a:pPr>
             <a:r>
-              <a:rPr lang="ja-JP" altLang="en-US" sz="1300" b="0" dirty="0">
+              <a:rPr lang="ja-JP" altLang="en-US" sz="1400" b="0" dirty="0">
                 <a:solidFill>
                   <a:srgbClr val="333333"/>
                 </a:solidFill>
                 <a:latin typeface="メイリオ" panose="020B0604030504040204" pitchFamily="50" charset="-128"/>
                 <a:ea typeface="メイリオ" panose="020B0604030504040204" pitchFamily="50" charset="-128"/>
+                <a:cs typeface="メイリオ"/>
               </a:rPr>
               <a:t>・平常期・イベント期の配信</a:t>
             </a:r>
-            <a:endParaRPr lang="ja-JP" altLang="en-US" sz="1200" dirty="0"/>
+            <a:endParaRPr lang="ja-JP" altLang="en-US" sz="1200" dirty="0">
+              <a:latin typeface="メイリオ"/>
+              <a:ea typeface="メイリオ"/>
+              <a:cs typeface="メイリオ"/>
+            </a:endParaRPr>
           </a:p>
           <a:p>
             <a:pPr algn="l">
               <a:lnSpc>
-                <a:spcPct val="130000"/>
+                <a:spcPct val="150000"/>
               </a:lnSpc>
               <a:buNone/>
             </a:pPr>
             <a:r>
-              <a:rPr lang="ja-JP" altLang="en-US" sz="1300" b="0" dirty="0">
+              <a:rPr lang="ja-JP" altLang="en-US" sz="1400" b="0" dirty="0">
                 <a:solidFill>
                   <a:srgbClr val="333333"/>
                 </a:solidFill>
                 <a:latin typeface="メイリオ" panose="020B0604030504040204" pitchFamily="50" charset="-128"/>
                 <a:ea typeface="メイリオ" panose="020B0604030504040204" pitchFamily="50" charset="-128"/>
+                <a:cs typeface="メイリオ"/>
               </a:rPr>
               <a:t>・配信の結果を確認し、改善</a:t>
             </a:r>
-            <a:endParaRPr lang="ja-JP" altLang="en-US" sz="1200" dirty="0"/>
+            <a:endParaRPr lang="ja-JP" altLang="en-US" sz="1200" dirty="0">
+              <a:latin typeface="メイリオ"/>
+              <a:ea typeface="メイリオ"/>
+              <a:cs typeface="メイリオ"/>
+            </a:endParaRPr>
           </a:p>
         </p:txBody>
       </p:sp>
@@ -15453,6 +16398,7 @@
                 <a:uFillTx/>
                 <a:latin typeface="メイリオ"/>
                 <a:ea typeface="メイリオ"/>
+                <a:cs typeface="メイリオ"/>
               </a:rPr>
               <a:t>成果報酬プラン：リスクを抑えて始められるプラン</a:t>
             </a:r>
@@ -15463,6 +16409,8 @@
               <a:effectLst/>
               <a:uFillTx/>
               <a:latin typeface="メイリオ"/>
+              <a:ea typeface="メイリオ"/>
+              <a:cs typeface="メイリオ"/>
             </a:endParaRPr>
           </a:p>
         </p:txBody>
@@ -15524,6 +16472,7 @@
               <a:uFillTx/>
               <a:latin typeface="メイリオ"/>
               <a:ea typeface="メイリオ"/>
+              <a:cs typeface="メイリオ"/>
             </a:endParaRPr>
           </a:p>
         </p:txBody>
@@ -15580,6 +16529,7 @@
               <a:uFillTx/>
               <a:latin typeface="メイリオ"/>
               <a:ea typeface="メイリオ"/>
+              <a:cs typeface="メイリオ"/>
             </a:endParaRPr>
           </a:p>
         </p:txBody>
@@ -15657,6 +16607,7 @@
                 <a:uFillTx/>
                 <a:latin typeface="メイリオ" panose="020B0604030504040204" pitchFamily="50" charset="-128"/>
                 <a:ea typeface="メイリオ" panose="020B0604030504040204" pitchFamily="50" charset="-128"/>
+                <a:cs typeface="メイリオ"/>
               </a:rPr>
               <a:t>固定費のプランに加えて、成果に応じて費用が決まるプランも選択可能</a:t>
             </a:r>
@@ -15664,6 +16615,8 @@
               <a:effectLst/>
               <a:uFillTx/>
               <a:latin typeface="メイリオ"/>
+              <a:ea typeface="メイリオ"/>
+              <a:cs typeface="メイリオ"/>
             </a:endParaRPr>
           </a:p>
         </p:txBody>
@@ -15705,10 +16658,15 @@
                 </a:solidFill>
                 <a:latin typeface="メイリオ" panose="020B0604030504040204" pitchFamily="50" charset="-128"/>
                 <a:ea typeface="メイリオ" panose="020B0604030504040204" pitchFamily="50" charset="-128"/>
+                <a:cs typeface="メイリオ"/>
               </a:rPr>
               <a:t>固定費のプラン</a:t>
             </a:r>
-            <a:endParaRPr lang="ja-JP" altLang="en-US" sz="1200" dirty="0"/>
+            <a:endParaRPr lang="ja-JP" altLang="en-US" sz="1200" dirty="0">
+              <a:latin typeface="メイリオ"/>
+              <a:ea typeface="メイリオ"/>
+              <a:cs typeface="メイリオ"/>
+            </a:endParaRPr>
           </a:p>
         </p:txBody>
       </p:sp>
@@ -15721,7 +16679,7 @@
         <p:spPr>
           <a:xfrm>
             <a:off x="502920" y="2103120"/>
-            <a:ext cx="4311396" cy="2377440"/>
+            <a:ext cx="4311396" cy="3657600"/>
           </a:xfrm>
           <a:prstGeom prst="rect">
             <a:avLst/>
@@ -15746,16 +16704,21 @@
               <a:buNone/>
             </a:pPr>
             <a:r>
-              <a:rPr lang="ja-JP" altLang="en-US" sz="1600" b="1" dirty="0">
+              <a:rPr lang="ja-JP" altLang="en-US" sz="1800" b="1" dirty="0">
                 <a:solidFill>
                   <a:srgbClr val="1F285A"/>
                 </a:solidFill>
                 <a:latin typeface="メイリオ" panose="020B0604030504040204" pitchFamily="50" charset="-128"/>
                 <a:ea typeface="メイリオ" panose="020B0604030504040204" pitchFamily="50" charset="-128"/>
+                <a:cs typeface="メイリオ"/>
               </a:rPr>
               <a:t>平常期　月5〜10万円</a:t>
             </a:r>
-            <a:endParaRPr lang="ja-JP" altLang="en-US" sz="1200" dirty="0"/>
+            <a:endParaRPr lang="ja-JP" altLang="en-US" sz="1200" dirty="0">
+              <a:latin typeface="メイリオ"/>
+              <a:ea typeface="メイリオ"/>
+              <a:cs typeface="メイリオ"/>
+            </a:endParaRPr>
           </a:p>
           <a:p>
             <a:pPr algn="ctr">
@@ -15765,16 +16728,21 @@
               <a:buNone/>
             </a:pPr>
             <a:r>
-              <a:rPr lang="ja-JP" altLang="en-US" sz="1600" b="1" dirty="0">
+              <a:rPr lang="ja-JP" altLang="en-US" sz="1800" b="1" dirty="0">
                 <a:solidFill>
                   <a:srgbClr val="1F285A"/>
                 </a:solidFill>
                 <a:latin typeface="メイリオ" panose="020B0604030504040204" pitchFamily="50" charset="-128"/>
                 <a:ea typeface="メイリオ" panose="020B0604030504040204" pitchFamily="50" charset="-128"/>
+                <a:cs typeface="メイリオ"/>
               </a:rPr>
               <a:t>イベント期　月30万円程度</a:t>
             </a:r>
-            <a:endParaRPr lang="ja-JP" altLang="en-US" sz="1200" dirty="0"/>
+            <a:endParaRPr lang="ja-JP" altLang="en-US" sz="1200" dirty="0">
+              <a:latin typeface="メイリオ"/>
+              <a:ea typeface="メイリオ"/>
+              <a:cs typeface="メイリオ"/>
+            </a:endParaRPr>
           </a:p>
         </p:txBody>
       </p:sp>
@@ -15815,10 +16783,15 @@
                 </a:solidFill>
                 <a:latin typeface="メイリオ" panose="020B0604030504040204" pitchFamily="50" charset="-128"/>
                 <a:ea typeface="メイリオ" panose="020B0604030504040204" pitchFamily="50" charset="-128"/>
+                <a:cs typeface="メイリオ"/>
               </a:rPr>
               <a:t>成果報酬プラン</a:t>
             </a:r>
-            <a:endParaRPr lang="ja-JP" altLang="en-US" sz="1200" dirty="0"/>
+            <a:endParaRPr lang="ja-JP" altLang="en-US" sz="1200" dirty="0">
+              <a:latin typeface="メイリオ"/>
+              <a:ea typeface="メイリオ"/>
+              <a:cs typeface="メイリオ"/>
+            </a:endParaRPr>
           </a:p>
         </p:txBody>
       </p:sp>
@@ -15831,7 +16804,7 @@
         <p:spPr>
           <a:xfrm>
             <a:off x="5088636" y="2103120"/>
-            <a:ext cx="4311396" cy="2377440"/>
+            <a:ext cx="4311396" cy="3657600"/>
           </a:xfrm>
           <a:prstGeom prst="rect">
             <a:avLst/>
@@ -15860,10 +16833,15 @@
                 </a:solidFill>
                 <a:latin typeface="メイリオ" panose="020B0604030504040204" pitchFamily="50" charset="-128"/>
                 <a:ea typeface="メイリオ" panose="020B0604030504040204" pitchFamily="50" charset="-128"/>
+                <a:cs typeface="メイリオ"/>
               </a:rPr>
               <a:t>成果の地点・単価</a:t>
             </a:r>
-            <a:endParaRPr lang="ja-JP" altLang="en-US" sz="1200" dirty="0"/>
+            <a:endParaRPr lang="ja-JP" altLang="en-US" sz="1200" dirty="0">
+              <a:latin typeface="メイリオ"/>
+              <a:ea typeface="メイリオ"/>
+              <a:cs typeface="メイリオ"/>
+            </a:endParaRPr>
           </a:p>
         </p:txBody>
       </p:sp>

--- a/202610_株式会社すなおコンサルティング御中_LINE公式アカウント運用のご提案.pptx
+++ b/202610_株式会社すなおコンサルティング御中_LINE公式アカウント運用のご提案.pptx
@@ -25,10 +25,6 @@
     <p:sldId id="2980" r:id="rId80"/>
     <p:sldId id="2981" r:id="rId81"/>
     <p:sldId id="2982" r:id="rId82"/>
-    <p:sldId id="2983" r:id="rId83"/>
-    <p:sldId id="2984" r:id="rId84"/>
-    <p:sldId id="2985" r:id="rId85"/>
-    <p:sldId id="2986" r:id="rId86"/>
     <p:sldId id="612" r:id="rId64"/>
   </p:sldIdLst>
   <p:sldSz cx="9906000" cy="6858000" type="A4"/>
@@ -4561,13 +4557,7 @@
       <p:grpSpPr/>
       <p:sp>
         <p:nvSpPr>
-          <p:cNvPr id="4" name="Google Shape;752;p28">
-            <a:extLst>
-              <a:ext uri="{FF2B5EF4-FFF2-40B4-BE49-F238E27FC236}">
-                <a16:creationId xmlns:a16="http://schemas.microsoft.com/office/drawing/2014/main" id="{0D14D38F-F567-ACF2-CDEB-76004FDB5B51}"/>
-              </a:ext>
-            </a:extLst>
-          </p:cNvPr>
+          <p:cNvPr id="2" name="Google Shape;752;p28"/>
           <p:cNvSpPr txBox="1"/>
           <p:nvPr/>
         </p:nvSpPr>
@@ -4601,63 +4591,857 @@
                 <a:cs typeface="メイリオ"/>
                 <a:sym typeface="Meiryo"/>
               </a:rPr>
-              <a:t>資料アジェンダ</a:t>
+              <a:t>現状と課題</a:t>
             </a:r>
           </a:p>
         </p:txBody>
       </p:sp>
       <p:sp>
         <p:nvSpPr>
-          <p:cNvPr id="2" name="正方形/長方形 1">
-            <a:extLst>
-              <a:ext uri="{FF2B5EF4-FFF2-40B4-BE49-F238E27FC236}">
-                <a16:creationId xmlns:a16="http://schemas.microsoft.com/office/drawing/2014/main" id="{636C1E2A-AC35-76CA-EBEE-CAD4F26CF45A}"/>
-              </a:ext>
-            </a:extLst>
-          </p:cNvPr>
+          <p:cNvPr id="3" name="正方形/長方形 8"/>
           <p:cNvSpPr/>
           <p:nvPr/>
         </p:nvSpPr>
         <p:spPr>
           <a:xfrm>
-            <a:off x="1460711" y="3038203"/>
-            <a:ext cx="6984604" cy="584775"/>
+            <a:off x="0" y="777240"/>
+            <a:ext cx="1801368" cy="502920"/>
           </a:xfrm>
           <a:prstGeom prst="rect">
             <a:avLst/>
           </a:prstGeom>
+          <a:solidFill>
+            <a:srgbClr val="002060"/>
+          </a:solidFill>
+          <a:ln>
+            <a:noFill/>
+          </a:ln>
+        </p:spPr>
+        <p:style>
+          <a:lnRef idx="2">
+            <a:schemeClr val="accent1">
+              <a:shade val="15000"/>
+            </a:schemeClr>
+          </a:lnRef>
+          <a:fillRef idx="1">
+            <a:schemeClr val="accent1"/>
+          </a:fillRef>
+          <a:effectRef idx="0">
+            <a:schemeClr val="accent1"/>
+          </a:effectRef>
+          <a:fontRef idx="minor">
+            <a:schemeClr val="lt1"/>
+          </a:fontRef>
+        </p:style>
+        <p:txBody>
+          <a:bodyPr rtlCol="0" anchor="ctr"/>
+          <a:lstStyle/>
+          <a:p>
+            <a:pPr algn="ctr"/>
+            <a:r>
+              <a:rPr kumimoji="1" lang="en-US" altLang="ja-JP" sz="1400" dirty="0">
+                <a:latin typeface="メイリオ" panose="020B0604030504040204" pitchFamily="50" charset="-128"/>
+                <a:ea typeface="メイリオ" panose="020B0604030504040204" pitchFamily="50" charset="-128"/>
+                <a:cs typeface="メイリオ"/>
+              </a:rPr>
+              <a:t>現状</a:t>
+            </a:r>
+          </a:p>
+        </p:txBody>
+      </p:sp>
+      <p:sp>
+        <p:nvSpPr>
+          <p:cNvPr id="4" name="Google Shape;752;p28"/>
+          <p:cNvSpPr txBox="1"/>
+          <p:nvPr/>
+        </p:nvSpPr>
+        <p:spPr>
+          <a:xfrm>
+            <a:off x="1984248" y="859536"/>
+            <a:ext cx="7708392" cy="338328"/>
+          </a:xfrm>
+          <a:prstGeom prst="rect">
+            <a:avLst/>
+          </a:prstGeom>
+          <a:noFill/>
+          <a:ln>
+            <a:noFill/>
+          </a:ln>
         </p:spPr>
         <p:txBody>
-          <a:bodyPr wrap="none">
+          <a:bodyPr spcFirstLastPara="1" wrap="square" lIns="91425" tIns="45700" rIns="91425" bIns="45700" anchor="ctr" anchorCtr="0">
             <a:spAutoFit/>
           </a:bodyPr>
           <a:lstStyle/>
           <a:p>
-            <a:pPr algn="ctr"/>
-            <a:r>
-              <a:rPr lang="en-US" altLang="ja-JP" sz="3200" b="1" dirty="0">
-                <a:solidFill>
-                  <a:schemeClr val="tx1">
-                    <a:lumMod val="75000"/>
-                    <a:lumOff val="25000"/>
-                  </a:schemeClr>
-                </a:solidFill>
+            <a:r>
+              <a:rPr lang="en-US" altLang="ja-JP" sz="1600" b="1" dirty="0">
                 <a:latin typeface="メイリオ" panose="020B0604030504040204" pitchFamily="50" charset="-128"/>
                 <a:ea typeface="メイリオ" panose="020B0604030504040204" pitchFamily="50" charset="-128"/>
-                <a:cs typeface="メイリオ" panose="020B0604030504040204" pitchFamily="50" charset="-128"/>
-              </a:rPr>
-              <a:t>現状と課題</a:t>
-            </a:r>
-            <a:endParaRPr lang="en-US" altLang="ja-IS" sz="3200" b="1" dirty="0">
-              <a:solidFill>
-                <a:schemeClr val="tx1">
-                  <a:lumMod val="75000"/>
-                  <a:lumOff val="25000"/>
-                </a:schemeClr>
-              </a:solidFill>
+                <a:cs typeface="メイリオ"/>
+                <a:sym typeface="Meiryo"/>
+              </a:rPr>
+              <a:t>イベントの後、離れた方・未入会の方とのつながりが切れる</a:t>
+            </a:r>
+            <a:endParaRPr lang="en-US" altLang="ja-JP" sz="1600" b="1" dirty="0">
               <a:latin typeface="メイリオ" panose="020B0604030504040204" pitchFamily="50" charset="-128"/>
               <a:ea typeface="メイリオ" panose="020B0604030504040204" pitchFamily="50" charset="-128"/>
-              <a:cs typeface="メイリオ" panose="020B0604030504040204" pitchFamily="50" charset="-128"/>
+              <a:cs typeface="メイリオ"/>
+              <a:sym typeface="Meiryo"/>
+            </a:endParaRPr>
+          </a:p>
+        </p:txBody>
+      </p:sp>
+      <p:sp>
+        <p:nvSpPr>
+          <p:cNvPr id="5" name="流れ1"/>
+          <p:cNvSpPr/>
+          <p:nvPr/>
+        </p:nvSpPr>
+        <p:spPr>
+          <a:xfrm>
+            <a:off x="502920" y="1691640"/>
+            <a:ext cx="1530705" cy="914400"/>
+          </a:xfrm>
+          <a:prstGeom prst="rect">
+            <a:avLst/>
+          </a:prstGeom>
+          <a:solidFill>
+            <a:srgbClr val="DCE6F2"/>
+          </a:solidFill>
+          <a:ln>
+            <a:noFill/>
+          </a:ln>
+        </p:spPr>
+        <p:txBody>
+          <a:bodyPr wrap="square" lIns="54864" tIns="36576" rIns="54864" bIns="36576" rtlCol="0" anchor="ctr">
+            <a:noAutofit/>
+          </a:bodyPr>
+          <a:lstStyle/>
+          <a:p>
+            <a:pPr algn="ctr">
+              <a:lnSpc>
+                <a:spcPct val="115000"/>
+              </a:lnSpc>
+              <a:buNone/>
+            </a:pPr>
+            <a:r>
+              <a:rPr lang="ja-JP" altLang="en-US" sz="1500" b="1" dirty="0">
+                <a:solidFill>
+                  <a:srgbClr val="002060"/>
+                </a:solidFill>
+                <a:latin typeface="メイリオ" panose="020B0604030504040204" pitchFamily="50" charset="-128"/>
+                <a:ea typeface="メイリオ" panose="020B0604030504040204" pitchFamily="50" charset="-128"/>
+                <a:cs typeface="メイリオ"/>
+              </a:rPr>
+              <a:t>広告</a:t>
+            </a:r>
+            <a:endParaRPr lang="ja-JP" altLang="en-US" sz="1200" dirty="0">
+              <a:latin typeface="メイリオ"/>
+              <a:ea typeface="メイリオ"/>
+              <a:cs typeface="メイリオ"/>
+            </a:endParaRPr>
+          </a:p>
+        </p:txBody>
+      </p:sp>
+      <p:sp>
+        <p:nvSpPr>
+          <p:cNvPr id="6" name="矢印"/>
+          <p:cNvSpPr/>
+          <p:nvPr/>
+        </p:nvSpPr>
+        <p:spPr>
+          <a:xfrm>
+            <a:off x="2033625" y="1691640"/>
+            <a:ext cx="310896" cy="914400"/>
+          </a:xfrm>
+          <a:prstGeom prst="rect">
+            <a:avLst/>
+          </a:prstGeom>
+          <a:noFill/>
+          <a:ln>
+            <a:noFill/>
+          </a:ln>
+        </p:spPr>
+        <p:txBody>
+          <a:bodyPr wrap="square" lIns="0" tIns="0" rIns="0" bIns="0" rtlCol="0" anchor="ctr">
+            <a:noAutofit/>
+          </a:bodyPr>
+          <a:lstStyle/>
+          <a:p>
+            <a:pPr algn="ctr">
+              <a:buNone/>
+            </a:pPr>
+            <a:r>
+              <a:rPr lang="ja-JP" altLang="en-US" sz="1400" b="0" dirty="0">
+                <a:solidFill>
+                  <a:srgbClr val="002060"/>
+                </a:solidFill>
+                <a:latin typeface="メイリオ" panose="020B0604030504040204" pitchFamily="50" charset="-128"/>
+                <a:ea typeface="メイリオ" panose="020B0604030504040204" pitchFamily="50" charset="-128"/>
+                <a:cs typeface="メイリオ"/>
+              </a:rPr>
+              <a:t>▶</a:t>
+            </a:r>
+            <a:endParaRPr lang="ja-JP" altLang="en-US" sz="1200" dirty="0">
+              <a:latin typeface="メイリオ"/>
+              <a:ea typeface="メイリオ"/>
+              <a:cs typeface="メイリオ"/>
+            </a:endParaRPr>
+          </a:p>
+        </p:txBody>
+      </p:sp>
+      <p:sp>
+        <p:nvSpPr>
+          <p:cNvPr id="7" name="流れ2"/>
+          <p:cNvSpPr/>
+          <p:nvPr/>
+        </p:nvSpPr>
+        <p:spPr>
+          <a:xfrm>
+            <a:off x="2344521" y="1691640"/>
+            <a:ext cx="1530705" cy="914400"/>
+          </a:xfrm>
+          <a:prstGeom prst="rect">
+            <a:avLst/>
+          </a:prstGeom>
+          <a:solidFill>
+            <a:srgbClr val="DCE6F2"/>
+          </a:solidFill>
+          <a:ln>
+            <a:noFill/>
+          </a:ln>
+        </p:spPr>
+        <p:txBody>
+          <a:bodyPr wrap="square" lIns="54864" tIns="36576" rIns="54864" bIns="36576" rtlCol="0" anchor="ctr">
+            <a:noAutofit/>
+          </a:bodyPr>
+          <a:lstStyle/>
+          <a:p>
+            <a:pPr algn="ctr">
+              <a:lnSpc>
+                <a:spcPct val="115000"/>
+              </a:lnSpc>
+              <a:buNone/>
+            </a:pPr>
+            <a:r>
+              <a:rPr lang="ja-JP" altLang="en-US" sz="1500" b="1" dirty="0">
+                <a:solidFill>
+                  <a:srgbClr val="002060"/>
+                </a:solidFill>
+                <a:latin typeface="メイリオ" panose="020B0604030504040204" pitchFamily="50" charset="-128"/>
+                <a:ea typeface="メイリオ" panose="020B0604030504040204" pitchFamily="50" charset="-128"/>
+                <a:cs typeface="メイリオ"/>
+              </a:rPr>
+              <a:t>LP</a:t>
+            </a:r>
+            <a:endParaRPr lang="ja-JP" altLang="en-US" sz="1200" dirty="0">
+              <a:latin typeface="メイリオ"/>
+              <a:ea typeface="メイリオ"/>
+              <a:cs typeface="メイリオ"/>
+            </a:endParaRPr>
+          </a:p>
+        </p:txBody>
+      </p:sp>
+      <p:sp>
+        <p:nvSpPr>
+          <p:cNvPr id="8" name="矢印"/>
+          <p:cNvSpPr/>
+          <p:nvPr/>
+        </p:nvSpPr>
+        <p:spPr>
+          <a:xfrm>
+            <a:off x="3875227" y="1691640"/>
+            <a:ext cx="310896" cy="914400"/>
+          </a:xfrm>
+          <a:prstGeom prst="rect">
+            <a:avLst/>
+          </a:prstGeom>
+          <a:noFill/>
+          <a:ln>
+            <a:noFill/>
+          </a:ln>
+        </p:spPr>
+        <p:txBody>
+          <a:bodyPr wrap="square" lIns="0" tIns="0" rIns="0" bIns="0" rtlCol="0" anchor="ctr">
+            <a:noAutofit/>
+          </a:bodyPr>
+          <a:lstStyle/>
+          <a:p>
+            <a:pPr algn="ctr">
+              <a:buNone/>
+            </a:pPr>
+            <a:r>
+              <a:rPr lang="ja-JP" altLang="en-US" sz="1400" b="0" dirty="0">
+                <a:solidFill>
+                  <a:srgbClr val="002060"/>
+                </a:solidFill>
+                <a:latin typeface="メイリオ" panose="020B0604030504040204" pitchFamily="50" charset="-128"/>
+                <a:ea typeface="メイリオ" panose="020B0604030504040204" pitchFamily="50" charset="-128"/>
+                <a:cs typeface="メイリオ"/>
+              </a:rPr>
+              <a:t>▶</a:t>
+            </a:r>
+            <a:endParaRPr lang="ja-JP" altLang="en-US" sz="1200" dirty="0">
+              <a:latin typeface="メイリオ"/>
+              <a:ea typeface="メイリオ"/>
+              <a:cs typeface="メイリオ"/>
+            </a:endParaRPr>
+          </a:p>
+        </p:txBody>
+      </p:sp>
+      <p:sp>
+        <p:nvSpPr>
+          <p:cNvPr id="9" name="流れ3"/>
+          <p:cNvSpPr/>
+          <p:nvPr/>
+        </p:nvSpPr>
+        <p:spPr>
+          <a:xfrm>
+            <a:off x="4186123" y="1691640"/>
+            <a:ext cx="1530705" cy="914400"/>
+          </a:xfrm>
+          <a:prstGeom prst="rect">
+            <a:avLst/>
+          </a:prstGeom>
+          <a:solidFill>
+            <a:srgbClr val="DCE6F2"/>
+          </a:solidFill>
+          <a:ln>
+            <a:noFill/>
+          </a:ln>
+        </p:spPr>
+        <p:txBody>
+          <a:bodyPr wrap="square" lIns="54864" tIns="36576" rIns="54864" bIns="36576" rtlCol="0" anchor="ctr">
+            <a:noAutofit/>
+          </a:bodyPr>
+          <a:lstStyle/>
+          <a:p>
+            <a:pPr algn="ctr">
+              <a:lnSpc>
+                <a:spcPct val="115000"/>
+              </a:lnSpc>
+              <a:buNone/>
+            </a:pPr>
+            <a:r>
+              <a:rPr lang="ja-JP" altLang="en-US" sz="1500" b="1" dirty="0">
+                <a:solidFill>
+                  <a:srgbClr val="002060"/>
+                </a:solidFill>
+                <a:latin typeface="メイリオ" panose="020B0604030504040204" pitchFamily="50" charset="-128"/>
+                <a:ea typeface="メイリオ" panose="020B0604030504040204" pitchFamily="50" charset="-128"/>
+                <a:cs typeface="メイリオ"/>
+              </a:rPr>
+              <a:t>予約</a:t>
+            </a:r>
+            <a:endParaRPr lang="ja-JP" altLang="en-US" sz="1200" dirty="0">
+              <a:latin typeface="メイリオ"/>
+              <a:ea typeface="メイリオ"/>
+              <a:cs typeface="メイリオ"/>
+            </a:endParaRPr>
+          </a:p>
+        </p:txBody>
+      </p:sp>
+      <p:sp>
+        <p:nvSpPr>
+          <p:cNvPr id="10" name="矢印"/>
+          <p:cNvSpPr/>
+          <p:nvPr/>
+        </p:nvSpPr>
+        <p:spPr>
+          <a:xfrm>
+            <a:off x="5716828" y="1691640"/>
+            <a:ext cx="310896" cy="914400"/>
+          </a:xfrm>
+          <a:prstGeom prst="rect">
+            <a:avLst/>
+          </a:prstGeom>
+          <a:noFill/>
+          <a:ln>
+            <a:noFill/>
+          </a:ln>
+        </p:spPr>
+        <p:txBody>
+          <a:bodyPr wrap="square" lIns="0" tIns="0" rIns="0" bIns="0" rtlCol="0" anchor="ctr">
+            <a:noAutofit/>
+          </a:bodyPr>
+          <a:lstStyle/>
+          <a:p>
+            <a:pPr algn="ctr">
+              <a:buNone/>
+            </a:pPr>
+            <a:r>
+              <a:rPr lang="ja-JP" altLang="en-US" sz="1400" b="0" dirty="0">
+                <a:solidFill>
+                  <a:srgbClr val="002060"/>
+                </a:solidFill>
+                <a:latin typeface="メイリオ" panose="020B0604030504040204" pitchFamily="50" charset="-128"/>
+                <a:ea typeface="メイリオ" panose="020B0604030504040204" pitchFamily="50" charset="-128"/>
+                <a:cs typeface="メイリオ"/>
+              </a:rPr>
+              <a:t>▶</a:t>
+            </a:r>
+            <a:endParaRPr lang="ja-JP" altLang="en-US" sz="1200" dirty="0">
+              <a:latin typeface="メイリオ"/>
+              <a:ea typeface="メイリオ"/>
+              <a:cs typeface="メイリオ"/>
+            </a:endParaRPr>
+          </a:p>
+        </p:txBody>
+      </p:sp>
+      <p:sp>
+        <p:nvSpPr>
+          <p:cNvPr id="11" name="流れ4"/>
+          <p:cNvSpPr/>
+          <p:nvPr/>
+        </p:nvSpPr>
+        <p:spPr>
+          <a:xfrm>
+            <a:off x="6027724" y="1691640"/>
+            <a:ext cx="1530705" cy="914400"/>
+          </a:xfrm>
+          <a:prstGeom prst="rect">
+            <a:avLst/>
+          </a:prstGeom>
+          <a:solidFill>
+            <a:srgbClr val="DCE6F2"/>
+          </a:solidFill>
+          <a:ln>
+            <a:noFill/>
+          </a:ln>
+        </p:spPr>
+        <p:txBody>
+          <a:bodyPr wrap="square" lIns="54864" tIns="36576" rIns="54864" bIns="36576" rtlCol="0" anchor="ctr">
+            <a:noAutofit/>
+          </a:bodyPr>
+          <a:lstStyle/>
+          <a:p>
+            <a:pPr algn="ctr">
+              <a:lnSpc>
+                <a:spcPct val="115000"/>
+              </a:lnSpc>
+              <a:buNone/>
+            </a:pPr>
+            <a:r>
+              <a:rPr lang="ja-JP" altLang="en-US" sz="1500" b="1" dirty="0">
+                <a:solidFill>
+                  <a:srgbClr val="002060"/>
+                </a:solidFill>
+                <a:latin typeface="メイリオ" panose="020B0604030504040204" pitchFamily="50" charset="-128"/>
+                <a:ea typeface="メイリオ" panose="020B0604030504040204" pitchFamily="50" charset="-128"/>
+                <a:cs typeface="メイリオ"/>
+              </a:rPr>
+              <a:t>イベント参加</a:t>
+            </a:r>
+            <a:endParaRPr lang="ja-JP" altLang="en-US" sz="1200" dirty="0">
+              <a:latin typeface="メイリオ"/>
+              <a:ea typeface="メイリオ"/>
+              <a:cs typeface="メイリオ"/>
+            </a:endParaRPr>
+          </a:p>
+        </p:txBody>
+      </p:sp>
+      <p:sp>
+        <p:nvSpPr>
+          <p:cNvPr id="12" name="矢印"/>
+          <p:cNvSpPr/>
+          <p:nvPr/>
+        </p:nvSpPr>
+        <p:spPr>
+          <a:xfrm>
+            <a:off x="7558430" y="1691640"/>
+            <a:ext cx="310896" cy="914400"/>
+          </a:xfrm>
+          <a:prstGeom prst="rect">
+            <a:avLst/>
+          </a:prstGeom>
+          <a:noFill/>
+          <a:ln>
+            <a:noFill/>
+          </a:ln>
+        </p:spPr>
+        <p:txBody>
+          <a:bodyPr wrap="square" lIns="0" tIns="0" rIns="0" bIns="0" rtlCol="0" anchor="ctr">
+            <a:noAutofit/>
+          </a:bodyPr>
+          <a:lstStyle/>
+          <a:p>
+            <a:pPr algn="ctr">
+              <a:buNone/>
+            </a:pPr>
+            <a:r>
+              <a:rPr lang="ja-JP" altLang="en-US" sz="1400" b="0" dirty="0">
+                <a:solidFill>
+                  <a:srgbClr val="002060"/>
+                </a:solidFill>
+                <a:latin typeface="メイリオ" panose="020B0604030504040204" pitchFamily="50" charset="-128"/>
+                <a:ea typeface="メイリオ" panose="020B0604030504040204" pitchFamily="50" charset="-128"/>
+                <a:cs typeface="メイリオ"/>
+              </a:rPr>
+              <a:t>▶</a:t>
+            </a:r>
+            <a:endParaRPr lang="ja-JP" altLang="en-US" sz="1200" dirty="0">
+              <a:latin typeface="メイリオ"/>
+              <a:ea typeface="メイリオ"/>
+              <a:cs typeface="メイリオ"/>
+            </a:endParaRPr>
+          </a:p>
+        </p:txBody>
+      </p:sp>
+      <p:sp>
+        <p:nvSpPr>
+          <p:cNvPr id="13" name="流れ5"/>
+          <p:cNvSpPr/>
+          <p:nvPr/>
+        </p:nvSpPr>
+        <p:spPr>
+          <a:xfrm>
+            <a:off x="7869326" y="1691640"/>
+            <a:ext cx="1530705" cy="914400"/>
+          </a:xfrm>
+          <a:prstGeom prst="rect">
+            <a:avLst/>
+          </a:prstGeom>
+          <a:solidFill>
+            <a:srgbClr val="002060"/>
+          </a:solidFill>
+          <a:ln>
+            <a:noFill/>
+          </a:ln>
+        </p:spPr>
+        <p:txBody>
+          <a:bodyPr wrap="square" lIns="54864" tIns="36576" rIns="54864" bIns="36576" rtlCol="0" anchor="ctr">
+            <a:noAutofit/>
+          </a:bodyPr>
+          <a:lstStyle/>
+          <a:p>
+            <a:pPr algn="ctr">
+              <a:lnSpc>
+                <a:spcPct val="115000"/>
+              </a:lnSpc>
+              <a:buNone/>
+            </a:pPr>
+            <a:r>
+              <a:rPr lang="ja-JP" altLang="en-US" sz="1500" b="1" dirty="0">
+                <a:solidFill>
+                  <a:srgbClr val="FFFFFF"/>
+                </a:solidFill>
+                <a:latin typeface="メイリオ" panose="020B0604030504040204" pitchFamily="50" charset="-128"/>
+                <a:ea typeface="メイリオ" panose="020B0604030504040204" pitchFamily="50" charset="-128"/>
+                <a:cs typeface="メイリオ"/>
+              </a:rPr>
+              <a:t>サロン入会</a:t>
+            </a:r>
+            <a:endParaRPr lang="ja-JP" altLang="en-US" sz="1200" dirty="0">
+              <a:latin typeface="メイリオ"/>
+              <a:ea typeface="メイリオ"/>
+              <a:cs typeface="メイリオ"/>
+            </a:endParaRPr>
+          </a:p>
+        </p:txBody>
+      </p:sp>
+      <p:sp>
+        <p:nvSpPr>
+          <p:cNvPr id="14" name="矢印下"/>
+          <p:cNvSpPr/>
+          <p:nvPr/>
+        </p:nvSpPr>
+        <p:spPr>
+          <a:xfrm>
+            <a:off x="2926994" y="2651760"/>
+            <a:ext cx="365760" cy="292608"/>
+          </a:xfrm>
+          <a:prstGeom prst="rect">
+            <a:avLst/>
+          </a:prstGeom>
+          <a:noFill/>
+          <a:ln>
+            <a:noFill/>
+          </a:ln>
+        </p:spPr>
+        <p:txBody>
+          <a:bodyPr wrap="square" lIns="0" tIns="0" rIns="0" bIns="0" rtlCol="0" anchor="ctr">
+            <a:noAutofit/>
+          </a:bodyPr>
+          <a:lstStyle/>
+          <a:p>
+            <a:pPr algn="ctr">
+              <a:buNone/>
+            </a:pPr>
+            <a:r>
+              <a:rPr lang="ja-JP" altLang="en-US" sz="1300" b="0" dirty="0">
+                <a:solidFill>
+                  <a:srgbClr val="C00000"/>
+                </a:solidFill>
+                <a:latin typeface="メイリオ" panose="020B0604030504040204" pitchFamily="50" charset="-128"/>
+                <a:ea typeface="メイリオ" panose="020B0604030504040204" pitchFamily="50" charset="-128"/>
+                <a:cs typeface="メイリオ"/>
+              </a:rPr>
+              <a:t>▼</a:t>
+            </a:r>
+            <a:endParaRPr lang="ja-JP" altLang="en-US" sz="1200" dirty="0">
+              <a:latin typeface="メイリオ"/>
+              <a:ea typeface="メイリオ"/>
+              <a:cs typeface="メイリオ"/>
+            </a:endParaRPr>
+          </a:p>
+        </p:txBody>
+      </p:sp>
+      <p:sp>
+        <p:nvSpPr>
+          <p:cNvPr id="15" name="切れる1"/>
+          <p:cNvSpPr/>
+          <p:nvPr/>
+        </p:nvSpPr>
+        <p:spPr>
+          <a:xfrm>
+            <a:off x="1463954" y="2971800"/>
+            <a:ext cx="3291840" cy="1371600"/>
+          </a:xfrm>
+          <a:prstGeom prst="rect">
+            <a:avLst/>
+          </a:prstGeom>
+          <a:noFill/>
+          <a:ln w="9525">
+            <a:solidFill>
+              <a:srgbClr val="C00000"/>
+            </a:solidFill>
+          </a:ln>
+        </p:spPr>
+        <p:txBody>
+          <a:bodyPr wrap="square" lIns="91440" tIns="54864" rIns="91440" bIns="54864" rtlCol="0" anchor="ctr">
+            <a:noAutofit/>
+          </a:bodyPr>
+          <a:lstStyle/>
+          <a:p>
+            <a:pPr algn="ctr">
+              <a:lnSpc>
+                <a:spcPct val="130000"/>
+              </a:lnSpc>
+              <a:buNone/>
+            </a:pPr>
+            <a:r>
+              <a:rPr lang="ja-JP" altLang="en-US" sz="1500" b="1" dirty="0">
+                <a:solidFill>
+                  <a:srgbClr val="C00000"/>
+                </a:solidFill>
+                <a:latin typeface="メイリオ" panose="020B0604030504040204" pitchFamily="50" charset="-128"/>
+                <a:ea typeface="メイリオ" panose="020B0604030504040204" pitchFamily="50" charset="-128"/>
+                <a:cs typeface="メイリオ"/>
+              </a:rPr>
+              <a:t>申し込まずに離れた方</a:t>
+            </a:r>
+            <a:endParaRPr lang="ja-JP" altLang="en-US" sz="1200" dirty="0">
+              <a:latin typeface="メイリオ"/>
+              <a:ea typeface="メイリオ"/>
+              <a:cs typeface="メイリオ"/>
+            </a:endParaRPr>
+          </a:p>
+          <a:p>
+            <a:pPr algn="ctr">
+              <a:lnSpc>
+                <a:spcPct val="130000"/>
+              </a:lnSpc>
+              <a:buNone/>
+            </a:pPr>
+            <a:r>
+              <a:rPr lang="ja-JP" altLang="en-US" sz="1400" b="0" dirty="0">
+                <a:solidFill>
+                  <a:srgbClr val="333333"/>
+                </a:solidFill>
+                <a:latin typeface="メイリオ" panose="020B0604030504040204" pitchFamily="50" charset="-128"/>
+                <a:ea typeface="メイリオ" panose="020B0604030504040204" pitchFamily="50" charset="-128"/>
+                <a:cs typeface="メイリオ"/>
+              </a:rPr>
+              <a:t>次のイベントまで案内する手段が無い</a:t>
+            </a:r>
+            <a:endParaRPr lang="ja-JP" altLang="en-US" sz="1200" dirty="0">
+              <a:latin typeface="メイリオ"/>
+              <a:ea typeface="メイリオ"/>
+              <a:cs typeface="メイリオ"/>
+            </a:endParaRPr>
+          </a:p>
+        </p:txBody>
+      </p:sp>
+      <p:sp>
+        <p:nvSpPr>
+          <p:cNvPr id="16" name="矢印下"/>
+          <p:cNvSpPr/>
+          <p:nvPr/>
+        </p:nvSpPr>
+        <p:spPr>
+          <a:xfrm>
+            <a:off x="6610197" y="2651760"/>
+            <a:ext cx="365760" cy="292608"/>
+          </a:xfrm>
+          <a:prstGeom prst="rect">
+            <a:avLst/>
+          </a:prstGeom>
+          <a:noFill/>
+          <a:ln>
+            <a:noFill/>
+          </a:ln>
+        </p:spPr>
+        <p:txBody>
+          <a:bodyPr wrap="square" lIns="0" tIns="0" rIns="0" bIns="0" rtlCol="0" anchor="ctr">
+            <a:noAutofit/>
+          </a:bodyPr>
+          <a:lstStyle/>
+          <a:p>
+            <a:pPr algn="ctr">
+              <a:buNone/>
+            </a:pPr>
+            <a:r>
+              <a:rPr lang="ja-JP" altLang="en-US" sz="1300" b="0" dirty="0">
+                <a:solidFill>
+                  <a:srgbClr val="C00000"/>
+                </a:solidFill>
+                <a:latin typeface="メイリオ" panose="020B0604030504040204" pitchFamily="50" charset="-128"/>
+                <a:ea typeface="メイリオ" panose="020B0604030504040204" pitchFamily="50" charset="-128"/>
+                <a:cs typeface="メイリオ"/>
+              </a:rPr>
+              <a:t>▼</a:t>
+            </a:r>
+            <a:endParaRPr lang="ja-JP" altLang="en-US" sz="1200" dirty="0">
+              <a:latin typeface="メイリオ"/>
+              <a:ea typeface="メイリオ"/>
+              <a:cs typeface="メイリオ"/>
+            </a:endParaRPr>
+          </a:p>
+        </p:txBody>
+      </p:sp>
+      <p:sp>
+        <p:nvSpPr>
+          <p:cNvPr id="17" name="切れる3"/>
+          <p:cNvSpPr/>
+          <p:nvPr/>
+        </p:nvSpPr>
+        <p:spPr>
+          <a:xfrm>
+            <a:off x="5147157" y="2971800"/>
+            <a:ext cx="3291840" cy="1371600"/>
+          </a:xfrm>
+          <a:prstGeom prst="rect">
+            <a:avLst/>
+          </a:prstGeom>
+          <a:noFill/>
+          <a:ln w="9525">
+            <a:solidFill>
+              <a:srgbClr val="C00000"/>
+            </a:solidFill>
+          </a:ln>
+        </p:spPr>
+        <p:txBody>
+          <a:bodyPr wrap="square" lIns="91440" tIns="54864" rIns="91440" bIns="54864" rtlCol="0" anchor="ctr">
+            <a:noAutofit/>
+          </a:bodyPr>
+          <a:lstStyle/>
+          <a:p>
+            <a:pPr algn="ctr">
+              <a:lnSpc>
+                <a:spcPct val="130000"/>
+              </a:lnSpc>
+              <a:buNone/>
+            </a:pPr>
+            <a:r>
+              <a:rPr lang="ja-JP" altLang="en-US" sz="1500" b="1" dirty="0">
+                <a:solidFill>
+                  <a:srgbClr val="C00000"/>
+                </a:solidFill>
+                <a:latin typeface="メイリオ" panose="020B0604030504040204" pitchFamily="50" charset="-128"/>
+                <a:ea typeface="メイリオ" panose="020B0604030504040204" pitchFamily="50" charset="-128"/>
+                <a:cs typeface="メイリオ"/>
+              </a:rPr>
+              <a:t>参加して入会していない方</a:t>
+            </a:r>
+            <a:endParaRPr lang="ja-JP" altLang="en-US" sz="1200" dirty="0">
+              <a:latin typeface="メイリオ"/>
+              <a:ea typeface="メイリオ"/>
+              <a:cs typeface="メイリオ"/>
+            </a:endParaRPr>
+          </a:p>
+          <a:p>
+            <a:pPr algn="ctr">
+              <a:lnSpc>
+                <a:spcPct val="130000"/>
+              </a:lnSpc>
+              <a:buNone/>
+            </a:pPr>
+            <a:r>
+              <a:rPr lang="ja-JP" altLang="en-US" sz="1400" b="0" dirty="0">
+                <a:solidFill>
+                  <a:srgbClr val="333333"/>
+                </a:solidFill>
+                <a:latin typeface="メイリオ" panose="020B0604030504040204" pitchFamily="50" charset="-128"/>
+                <a:ea typeface="メイリオ" panose="020B0604030504040204" pitchFamily="50" charset="-128"/>
+                <a:cs typeface="メイリオ"/>
+              </a:rPr>
+              <a:t>入会まで案内を続ける手段が無い</a:t>
+            </a:r>
+            <a:endParaRPr lang="ja-JP" altLang="en-US" sz="1200" dirty="0">
+              <a:latin typeface="メイリオ"/>
+              <a:ea typeface="メイリオ"/>
+              <a:cs typeface="メイリオ"/>
+            </a:endParaRPr>
+          </a:p>
+        </p:txBody>
+      </p:sp>
+      <p:sp>
+        <p:nvSpPr>
+          <p:cNvPr id="18" name="示唆"/>
+          <p:cNvSpPr/>
+          <p:nvPr/>
+        </p:nvSpPr>
+        <p:spPr>
+          <a:xfrm>
+            <a:off x="502920" y="4846320"/>
+            <a:ext cx="8897112" cy="777240"/>
+          </a:xfrm>
+          <a:prstGeom prst="rect">
+            <a:avLst/>
+          </a:prstGeom>
+          <a:solidFill>
+            <a:srgbClr val="F2F2F2"/>
+          </a:solidFill>
+          <a:ln>
+            <a:noFill/>
+          </a:ln>
+        </p:spPr>
+        <p:txBody>
+          <a:bodyPr wrap="square" lIns="73152" tIns="36576" rIns="73152" bIns="36576" rtlCol="0" anchor="ctr">
+            <a:noAutofit/>
+          </a:bodyPr>
+          <a:lstStyle/>
+          <a:p>
+            <a:pPr algn="ctr">
+              <a:buNone/>
+            </a:pPr>
+            <a:r>
+              <a:rPr lang="ja-JP" altLang="en-US" sz="1600" b="1" dirty="0">
+                <a:solidFill>
+                  <a:srgbClr val="002060"/>
+                </a:solidFill>
+                <a:latin typeface="メイリオ" panose="020B0604030504040204" pitchFamily="50" charset="-128"/>
+                <a:ea typeface="メイリオ" panose="020B0604030504040204" pitchFamily="50" charset="-128"/>
+                <a:cs typeface="メイリオ"/>
+              </a:rPr>
+              <a:t>次のイベントでは、</a:t>
+            </a:r>
+            <a:r>
+              <a:rPr lang="ja-JP" altLang="en-US" sz="1600" b="1" dirty="0">
+                <a:solidFill>
+                  <a:srgbClr val="C00000"/>
+                </a:solidFill>
+                <a:latin typeface="メイリオ" panose="020B0604030504040204" pitchFamily="50" charset="-128"/>
+                <a:ea typeface="メイリオ" panose="020B0604030504040204" pitchFamily="50" charset="-128"/>
+                <a:cs typeface="メイリオ"/>
+              </a:rPr>
+              <a:t>また広告で集め直している</a:t>
+            </a:r>
+            <a:endParaRPr lang="ja-JP" altLang="en-US" sz="1200" dirty="0">
+              <a:latin typeface="メイリオ"/>
+              <a:ea typeface="メイリオ"/>
+              <a:cs typeface="メイリオ"/>
             </a:endParaRPr>
           </a:p>
         </p:txBody>
@@ -4716,7 +5500,7 @@
                 <a:cs typeface="メイリオ"/>
                 <a:sym typeface="Meiryo"/>
               </a:rPr>
-              <a:t>現状と課題</a:t>
+              <a:t>本質課題</a:t>
             </a:r>
           </a:p>
         </p:txBody>
@@ -4769,7 +5553,7 @@
                 <a:ea typeface="メイリオ" panose="020B0604030504040204" pitchFamily="50" charset="-128"/>
                 <a:cs typeface="メイリオ"/>
               </a:rPr>
-              <a:t>現状</a:t>
+              <a:t>本質課題</a:t>
             </a:r>
           </a:p>
         </p:txBody>
@@ -4806,7 +5590,7 @@
                 <a:cs typeface="メイリオ"/>
                 <a:sym typeface="Meiryo"/>
               </a:rPr>
-              <a:t>イベントの後、離れた方・未入会の方とのつながりが切れる</a:t>
+              <a:t>ためて追い続ける場所が無い。この場所を、LINE公式アカウントでつくる</a:t>
             </a:r>
             <a:endParaRPr lang="en-US" altLang="ja-JP" sz="1600" b="1" dirty="0">
               <a:latin typeface="メイリオ" panose="020B0604030504040204" pitchFamily="50" charset="-128"/>
@@ -4819,47 +5603,44 @@
       </p:sp>
       <p:sp>
         <p:nvSpPr>
-          <p:cNvPr id="5" name="流れ1"/>
+          <p:cNvPr id="5" name="見出し 01 集める"/>
           <p:cNvSpPr/>
           <p:nvPr/>
         </p:nvSpPr>
         <p:spPr>
           <a:xfrm>
-            <a:off x="502920" y="1691640"/>
-            <a:ext cx="1530705" cy="914400"/>
+            <a:off x="502920" y="1600200"/>
+            <a:ext cx="2782824" cy="411480"/>
           </a:xfrm>
           <a:prstGeom prst="rect">
             <a:avLst/>
           </a:prstGeom>
           <a:solidFill>
-            <a:srgbClr val="DCE6F2"/>
+            <a:srgbClr val="002060"/>
           </a:solidFill>
           <a:ln>
             <a:noFill/>
           </a:ln>
         </p:spPr>
         <p:txBody>
-          <a:bodyPr wrap="square" lIns="54864" tIns="36576" rIns="54864" bIns="36576" rtlCol="0" anchor="ctr">
+          <a:bodyPr wrap="square" lIns="73152" tIns="36576" rIns="73152" bIns="36576" rtlCol="0" anchor="ctr">
             <a:noAutofit/>
           </a:bodyPr>
           <a:lstStyle/>
           <a:p>
             <a:pPr algn="ctr">
-              <a:lnSpc>
-                <a:spcPct val="115000"/>
-              </a:lnSpc>
               <a:buNone/>
             </a:pPr>
             <a:r>
-              <a:rPr lang="ja-JP" altLang="en-US" sz="1500" b="1" dirty="0">
-                <a:solidFill>
-                  <a:srgbClr val="002060"/>
+              <a:rPr lang="ja-JP" altLang="en-US" sz="1400" b="1" dirty="0">
+                <a:solidFill>
+                  <a:srgbClr val="FFFFFF"/>
                 </a:solidFill>
                 <a:latin typeface="メイリオ" panose="020B0604030504040204" pitchFamily="50" charset="-128"/>
                 <a:ea typeface="メイリオ" panose="020B0604030504040204" pitchFamily="50" charset="-128"/>
                 <a:cs typeface="メイリオ"/>
               </a:rPr>
-              <a:t>広告</a:t>
+              <a:t>01 集める</a:t>
             </a:r>
             <a:endParaRPr lang="ja-JP" altLang="en-US" sz="1200" dirty="0">
               <a:latin typeface="メイリオ"/>
@@ -4871,14 +5652,66 @@
       </p:sp>
       <p:sp>
         <p:nvSpPr>
-          <p:cNvPr id="6" name="矢印"/>
+          <p:cNvPr id="6" name="課題1"/>
           <p:cNvSpPr/>
           <p:nvPr/>
         </p:nvSpPr>
         <p:spPr>
           <a:xfrm>
-            <a:off x="2033625" y="1691640"/>
-            <a:ext cx="310896" cy="914400"/>
+            <a:off x="502920" y="2011680"/>
+            <a:ext cx="2782824" cy="1783080"/>
+          </a:xfrm>
+          <a:prstGeom prst="rect">
+            <a:avLst/>
+          </a:prstGeom>
+          <a:solidFill>
+            <a:srgbClr val="F2F2F2"/>
+          </a:solidFill>
+          <a:ln>
+            <a:noFill/>
+          </a:ln>
+        </p:spPr>
+        <p:txBody>
+          <a:bodyPr wrap="square" lIns="137160" tIns="91440" rIns="137160" bIns="91440" rtlCol="0" anchor="ctr">
+            <a:noAutofit/>
+          </a:bodyPr>
+          <a:lstStyle/>
+          <a:p>
+            <a:pPr algn="ctr">
+              <a:lnSpc>
+                <a:spcPct val="140000"/>
+              </a:lnSpc>
+              <a:buNone/>
+            </a:pPr>
+            <a:r>
+              <a:rPr lang="ja-JP" altLang="en-US" sz="1500" b="0" dirty="0">
+                <a:solidFill>
+                  <a:srgbClr val="333333"/>
+                </a:solidFill>
+                <a:latin typeface="メイリオ" panose="020B0604030504040204" pitchFamily="50" charset="-128"/>
+                <a:ea typeface="メイリオ" panose="020B0604030504040204" pitchFamily="50" charset="-128"/>
+                <a:cs typeface="メイリオ"/>
+              </a:rPr>
+              <a:t>離れる方・予約した方を、友だちにする手段が無い</a:t>
+            </a:r>
+            <a:endParaRPr lang="ja-JP" altLang="en-US" sz="1200" dirty="0">
+              <a:latin typeface="メイリオ"/>
+              <a:ea typeface="メイリオ"/>
+              <a:cs typeface="メイリオ"/>
+            </a:endParaRPr>
+          </a:p>
+        </p:txBody>
+      </p:sp>
+      <p:sp>
+        <p:nvSpPr>
+          <p:cNvPr id="7" name="矢印下"/>
+          <p:cNvSpPr/>
+          <p:nvPr/>
+        </p:nvSpPr>
+        <p:spPr>
+          <a:xfrm>
+            <a:off x="1665732" y="3840480"/>
+            <a:ext cx="457200" cy="411480"/>
           </a:xfrm>
           <a:prstGeom prst="rect">
             <a:avLst/>
@@ -4898,7 +5731,7 @@
               <a:buNone/>
             </a:pPr>
             <a:r>
-              <a:rPr lang="ja-JP" altLang="en-US" sz="1400" b="0" dirty="0">
+              <a:rPr lang="ja-JP" altLang="en-US" sz="1600" b="0" dirty="0">
                 <a:solidFill>
                   <a:srgbClr val="002060"/>
                 </a:solidFill>
@@ -4906,7 +5739,7 @@
                 <a:ea typeface="メイリオ" panose="020B0604030504040204" pitchFamily="50" charset="-128"/>
                 <a:cs typeface="メイリオ"/>
               </a:rPr>
-              <a:t>▶</a:t>
+              <a:t>▼</a:t>
             </a:r>
             <a:endParaRPr lang="ja-JP" altLang="en-US" sz="1200" dirty="0">
               <a:latin typeface="メイリオ"/>
@@ -4918,14 +5751,14 @@
       </p:sp>
       <p:sp>
         <p:nvSpPr>
-          <p:cNvPr id="7" name="流れ2"/>
+          <p:cNvPr id="8" name="打ち手1"/>
           <p:cNvSpPr/>
           <p:nvPr/>
         </p:nvSpPr>
         <p:spPr>
           <a:xfrm>
-            <a:off x="2344521" y="1691640"/>
-            <a:ext cx="1530705" cy="914400"/>
+            <a:off x="502920" y="4297680"/>
+            <a:ext cx="2782824" cy="1737360"/>
           </a:xfrm>
           <a:prstGeom prst="rect">
             <a:avLst/>
@@ -4938,19 +5771,19 @@
           </a:ln>
         </p:spPr>
         <p:txBody>
-          <a:bodyPr wrap="square" lIns="54864" tIns="36576" rIns="54864" bIns="36576" rtlCol="0" anchor="ctr">
+          <a:bodyPr wrap="square" lIns="73152" tIns="36576" rIns="73152" bIns="36576" rtlCol="0" anchor="ctr">
             <a:noAutofit/>
           </a:bodyPr>
           <a:lstStyle/>
           <a:p>
             <a:pPr algn="ctr">
               <a:lnSpc>
-                <a:spcPct val="115000"/>
+                <a:spcPct val="130000"/>
               </a:lnSpc>
               <a:buNone/>
             </a:pPr>
             <a:r>
-              <a:rPr lang="ja-JP" altLang="en-US" sz="1500" b="1" dirty="0">
+              <a:rPr lang="ja-JP" altLang="en-US" sz="1600" b="1" dirty="0">
                 <a:solidFill>
                   <a:srgbClr val="002060"/>
                 </a:solidFill>
@@ -4958,7 +5791,31 @@
                 <a:ea typeface="メイリオ" panose="020B0604030504040204" pitchFamily="50" charset="-128"/>
                 <a:cs typeface="メイリオ"/>
               </a:rPr>
-              <a:t>LP</a:t>
+              <a:t>ポップアップツール</a:t>
+            </a:r>
+            <a:endParaRPr lang="ja-JP" altLang="en-US" sz="1200" dirty="0">
+              <a:latin typeface="メイリオ"/>
+              <a:ea typeface="メイリオ"/>
+              <a:cs typeface="メイリオ"/>
+            </a:endParaRPr>
+          </a:p>
+          <a:p>
+            <a:pPr algn="ctr">
+              <a:lnSpc>
+                <a:spcPct val="130000"/>
+              </a:lnSpc>
+              <a:buNone/>
+            </a:pPr>
+            <a:r>
+              <a:rPr lang="ja-JP" altLang="en-US" sz="1600" b="1" dirty="0">
+                <a:solidFill>
+                  <a:srgbClr val="002060"/>
+                </a:solidFill>
+                <a:latin typeface="メイリオ" panose="020B0604030504040204" pitchFamily="50" charset="-128"/>
+                <a:ea typeface="メイリオ" panose="020B0604030504040204" pitchFamily="50" charset="-128"/>
+                <a:cs typeface="メイリオ"/>
+              </a:rPr>
+              <a:t>サンクスLINE誘導</a:t>
             </a:r>
             <a:endParaRPr lang="ja-JP" altLang="en-US" sz="1200" dirty="0">
               <a:latin typeface="メイリオ"/>
@@ -4970,14 +5827,115 @@
       </p:sp>
       <p:sp>
         <p:nvSpPr>
-          <p:cNvPr id="8" name="矢印"/>
+          <p:cNvPr id="9" name="見出し 02 追う"/>
           <p:cNvSpPr/>
           <p:nvPr/>
         </p:nvSpPr>
         <p:spPr>
           <a:xfrm>
-            <a:off x="3875227" y="1691640"/>
-            <a:ext cx="310896" cy="914400"/>
+            <a:off x="3560064" y="1600200"/>
+            <a:ext cx="2782824" cy="411480"/>
+          </a:xfrm>
+          <a:prstGeom prst="rect">
+            <a:avLst/>
+          </a:prstGeom>
+          <a:solidFill>
+            <a:srgbClr val="002060"/>
+          </a:solidFill>
+          <a:ln>
+            <a:noFill/>
+          </a:ln>
+        </p:spPr>
+        <p:txBody>
+          <a:bodyPr wrap="square" lIns="73152" tIns="36576" rIns="73152" bIns="36576" rtlCol="0" anchor="ctr">
+            <a:noAutofit/>
+          </a:bodyPr>
+          <a:lstStyle/>
+          <a:p>
+            <a:pPr algn="ctr">
+              <a:buNone/>
+            </a:pPr>
+            <a:r>
+              <a:rPr lang="ja-JP" altLang="en-US" sz="1400" b="1" dirty="0">
+                <a:solidFill>
+                  <a:srgbClr val="FFFFFF"/>
+                </a:solidFill>
+                <a:latin typeface="メイリオ" panose="020B0604030504040204" pitchFamily="50" charset="-128"/>
+                <a:ea typeface="メイリオ" panose="020B0604030504040204" pitchFamily="50" charset="-128"/>
+                <a:cs typeface="メイリオ"/>
+              </a:rPr>
+              <a:t>02 追う</a:t>
+            </a:r>
+            <a:endParaRPr lang="ja-JP" altLang="en-US" sz="1200" dirty="0">
+              <a:latin typeface="メイリオ"/>
+              <a:ea typeface="メイリオ"/>
+              <a:cs typeface="メイリオ"/>
+            </a:endParaRPr>
+          </a:p>
+        </p:txBody>
+      </p:sp>
+      <p:sp>
+        <p:nvSpPr>
+          <p:cNvPr id="10" name="課題2"/>
+          <p:cNvSpPr/>
+          <p:nvPr/>
+        </p:nvSpPr>
+        <p:spPr>
+          <a:xfrm>
+            <a:off x="3560064" y="2011680"/>
+            <a:ext cx="2782824" cy="1783080"/>
+          </a:xfrm>
+          <a:prstGeom prst="rect">
+            <a:avLst/>
+          </a:prstGeom>
+          <a:solidFill>
+            <a:srgbClr val="F2F2F2"/>
+          </a:solidFill>
+          <a:ln>
+            <a:noFill/>
+          </a:ln>
+        </p:spPr>
+        <p:txBody>
+          <a:bodyPr wrap="square" lIns="137160" tIns="91440" rIns="137160" bIns="91440" rtlCol="0" anchor="ctr">
+            <a:noAutofit/>
+          </a:bodyPr>
+          <a:lstStyle/>
+          <a:p>
+            <a:pPr algn="ctr">
+              <a:lnSpc>
+                <a:spcPct val="140000"/>
+              </a:lnSpc>
+              <a:buNone/>
+            </a:pPr>
+            <a:r>
+              <a:rPr lang="ja-JP" altLang="en-US" sz="1500" b="0" dirty="0">
+                <a:solidFill>
+                  <a:srgbClr val="333333"/>
+                </a:solidFill>
+                <a:latin typeface="メイリオ" panose="020B0604030504040204" pitchFamily="50" charset="-128"/>
+                <a:ea typeface="メイリオ" panose="020B0604030504040204" pitchFamily="50" charset="-128"/>
+                <a:cs typeface="メイリオ"/>
+              </a:rPr>
+              <a:t>次のイベントまで、情報を届ける手段が無い</a:t>
+            </a:r>
+            <a:endParaRPr lang="ja-JP" altLang="en-US" sz="1200" dirty="0">
+              <a:latin typeface="メイリオ"/>
+              <a:ea typeface="メイリオ"/>
+              <a:cs typeface="メイリオ"/>
+            </a:endParaRPr>
+          </a:p>
+        </p:txBody>
+      </p:sp>
+      <p:sp>
+        <p:nvSpPr>
+          <p:cNvPr id="11" name="矢印下"/>
+          <p:cNvSpPr/>
+          <p:nvPr/>
+        </p:nvSpPr>
+        <p:spPr>
+          <a:xfrm>
+            <a:off x="4722876" y="3840480"/>
+            <a:ext cx="457200" cy="411480"/>
           </a:xfrm>
           <a:prstGeom prst="rect">
             <a:avLst/>
@@ -4997,7 +5955,7 @@
               <a:buNone/>
             </a:pPr>
             <a:r>
-              <a:rPr lang="ja-JP" altLang="en-US" sz="1400" b="0" dirty="0">
+              <a:rPr lang="ja-JP" altLang="en-US" sz="1600" b="0" dirty="0">
                 <a:solidFill>
                   <a:srgbClr val="002060"/>
                 </a:solidFill>
@@ -5005,7 +5963,7 @@
                 <a:ea typeface="メイリオ" panose="020B0604030504040204" pitchFamily="50" charset="-128"/>
                 <a:cs typeface="メイリオ"/>
               </a:rPr>
-              <a:t>▶</a:t>
+              <a:t>▼</a:t>
             </a:r>
             <a:endParaRPr lang="ja-JP" altLang="en-US" sz="1200" dirty="0">
               <a:latin typeface="メイリオ"/>
@@ -5017,14 +5975,14 @@
       </p:sp>
       <p:sp>
         <p:nvSpPr>
-          <p:cNvPr id="9" name="流れ3"/>
+          <p:cNvPr id="12" name="打ち手2"/>
           <p:cNvSpPr/>
           <p:nvPr/>
         </p:nvSpPr>
         <p:spPr>
           <a:xfrm>
-            <a:off x="4186123" y="1691640"/>
-            <a:ext cx="1530705" cy="914400"/>
+            <a:off x="3560064" y="4297680"/>
+            <a:ext cx="2782824" cy="1737360"/>
           </a:xfrm>
           <a:prstGeom prst="rect">
             <a:avLst/>
@@ -5037,19 +5995,19 @@
           </a:ln>
         </p:spPr>
         <p:txBody>
-          <a:bodyPr wrap="square" lIns="54864" tIns="36576" rIns="54864" bIns="36576" rtlCol="0" anchor="ctr">
+          <a:bodyPr wrap="square" lIns="73152" tIns="36576" rIns="73152" bIns="36576" rtlCol="0" anchor="ctr">
             <a:noAutofit/>
           </a:bodyPr>
           <a:lstStyle/>
           <a:p>
             <a:pPr algn="ctr">
               <a:lnSpc>
-                <a:spcPct val="115000"/>
+                <a:spcPct val="130000"/>
               </a:lnSpc>
               <a:buNone/>
             </a:pPr>
             <a:r>
-              <a:rPr lang="ja-JP" altLang="en-US" sz="1500" b="1" dirty="0">
+              <a:rPr lang="ja-JP" altLang="en-US" sz="1600" b="1" dirty="0">
                 <a:solidFill>
                   <a:srgbClr val="002060"/>
                 </a:solidFill>
@@ -5057,7 +6015,7 @@
                 <a:ea typeface="メイリオ" panose="020B0604030504040204" pitchFamily="50" charset="-128"/>
                 <a:cs typeface="メイリオ"/>
               </a:rPr>
-              <a:t>予約</a:t>
+              <a:t>平常期の配信</a:t>
             </a:r>
             <a:endParaRPr lang="ja-JP" altLang="en-US" sz="1200" dirty="0">
               <a:latin typeface="メイリオ"/>
@@ -5069,14 +6027,115 @@
       </p:sp>
       <p:sp>
         <p:nvSpPr>
-          <p:cNvPr id="10" name="矢印"/>
+          <p:cNvPr id="13" name="見出し 03 つなげる"/>
           <p:cNvSpPr/>
           <p:nvPr/>
         </p:nvSpPr>
         <p:spPr>
           <a:xfrm>
-            <a:off x="5716828" y="1691640"/>
-            <a:ext cx="310896" cy="914400"/>
+            <a:off x="6617208" y="1600200"/>
+            <a:ext cx="2782824" cy="411480"/>
+          </a:xfrm>
+          <a:prstGeom prst="rect">
+            <a:avLst/>
+          </a:prstGeom>
+          <a:solidFill>
+            <a:srgbClr val="002060"/>
+          </a:solidFill>
+          <a:ln>
+            <a:noFill/>
+          </a:ln>
+        </p:spPr>
+        <p:txBody>
+          <a:bodyPr wrap="square" lIns="73152" tIns="36576" rIns="73152" bIns="36576" rtlCol="0" anchor="ctr">
+            <a:noAutofit/>
+          </a:bodyPr>
+          <a:lstStyle/>
+          <a:p>
+            <a:pPr algn="ctr">
+              <a:buNone/>
+            </a:pPr>
+            <a:r>
+              <a:rPr lang="ja-JP" altLang="en-US" sz="1400" b="1" dirty="0">
+                <a:solidFill>
+                  <a:srgbClr val="FFFFFF"/>
+                </a:solidFill>
+                <a:latin typeface="メイリオ" panose="020B0604030504040204" pitchFamily="50" charset="-128"/>
+                <a:ea typeface="メイリオ" panose="020B0604030504040204" pitchFamily="50" charset="-128"/>
+                <a:cs typeface="メイリオ"/>
+              </a:rPr>
+              <a:t>03 つなげる</a:t>
+            </a:r>
+            <a:endParaRPr lang="ja-JP" altLang="en-US" sz="1200" dirty="0">
+              <a:latin typeface="メイリオ"/>
+              <a:ea typeface="メイリオ"/>
+              <a:cs typeface="メイリオ"/>
+            </a:endParaRPr>
+          </a:p>
+        </p:txBody>
+      </p:sp>
+      <p:sp>
+        <p:nvSpPr>
+          <p:cNvPr id="14" name="課題3"/>
+          <p:cNvSpPr/>
+          <p:nvPr/>
+        </p:nvSpPr>
+        <p:spPr>
+          <a:xfrm>
+            <a:off x="6617208" y="2011680"/>
+            <a:ext cx="2782824" cy="1783080"/>
+          </a:xfrm>
+          <a:prstGeom prst="rect">
+            <a:avLst/>
+          </a:prstGeom>
+          <a:solidFill>
+            <a:srgbClr val="F2F2F2"/>
+          </a:solidFill>
+          <a:ln>
+            <a:noFill/>
+          </a:ln>
+        </p:spPr>
+        <p:txBody>
+          <a:bodyPr wrap="square" lIns="137160" tIns="91440" rIns="137160" bIns="91440" rtlCol="0" anchor="ctr">
+            <a:noAutofit/>
+          </a:bodyPr>
+          <a:lstStyle/>
+          <a:p>
+            <a:pPr algn="ctr">
+              <a:lnSpc>
+                <a:spcPct val="140000"/>
+              </a:lnSpc>
+              <a:buNone/>
+            </a:pPr>
+            <a:r>
+              <a:rPr lang="ja-JP" altLang="en-US" sz="1500" b="0" dirty="0">
+                <a:solidFill>
+                  <a:srgbClr val="333333"/>
+                </a:solidFill>
+                <a:latin typeface="メイリオ" panose="020B0604030504040204" pitchFamily="50" charset="-128"/>
+                <a:ea typeface="メイリオ" panose="020B0604030504040204" pitchFamily="50" charset="-128"/>
+                <a:cs typeface="メイリオ"/>
+              </a:rPr>
+              <a:t>参加した方に、入会を案内する手段が無い</a:t>
+            </a:r>
+            <a:endParaRPr lang="ja-JP" altLang="en-US" sz="1200" dirty="0">
+              <a:latin typeface="メイリオ"/>
+              <a:ea typeface="メイリオ"/>
+              <a:cs typeface="メイリオ"/>
+            </a:endParaRPr>
+          </a:p>
+        </p:txBody>
+      </p:sp>
+      <p:sp>
+        <p:nvSpPr>
+          <p:cNvPr id="15" name="矢印下"/>
+          <p:cNvSpPr/>
+          <p:nvPr/>
+        </p:nvSpPr>
+        <p:spPr>
+          <a:xfrm>
+            <a:off x="7780020" y="3840480"/>
+            <a:ext cx="457200" cy="411480"/>
           </a:xfrm>
           <a:prstGeom prst="rect">
             <a:avLst/>
@@ -5096,7 +6155,7 @@
               <a:buNone/>
             </a:pPr>
             <a:r>
-              <a:rPr lang="ja-JP" altLang="en-US" sz="1400" b="0" dirty="0">
+              <a:rPr lang="ja-JP" altLang="en-US" sz="1600" b="0" dirty="0">
                 <a:solidFill>
                   <a:srgbClr val="002060"/>
                 </a:solidFill>
@@ -5104,7 +6163,7 @@
                 <a:ea typeface="メイリオ" panose="020B0604030504040204" pitchFamily="50" charset="-128"/>
                 <a:cs typeface="メイリオ"/>
               </a:rPr>
-              <a:t>▶</a:t>
+              <a:t>▼</a:t>
             </a:r>
             <a:endParaRPr lang="ja-JP" altLang="en-US" sz="1200" dirty="0">
               <a:latin typeface="メイリオ"/>
@@ -5116,14 +6175,14 @@
       </p:sp>
       <p:sp>
         <p:nvSpPr>
-          <p:cNvPr id="11" name="流れ4"/>
+          <p:cNvPr id="16" name="打ち手3"/>
           <p:cNvSpPr/>
           <p:nvPr/>
         </p:nvSpPr>
         <p:spPr>
           <a:xfrm>
-            <a:off x="6027724" y="1691640"/>
-            <a:ext cx="1530705" cy="914400"/>
+            <a:off x="6617208" y="4297680"/>
+            <a:ext cx="2782824" cy="1737360"/>
           </a:xfrm>
           <a:prstGeom prst="rect">
             <a:avLst/>
@@ -5136,205 +6195,7 @@
           </a:ln>
         </p:spPr>
         <p:txBody>
-          <a:bodyPr wrap="square" lIns="54864" tIns="36576" rIns="54864" bIns="36576" rtlCol="0" anchor="ctr">
-            <a:noAutofit/>
-          </a:bodyPr>
-          <a:lstStyle/>
-          <a:p>
-            <a:pPr algn="ctr">
-              <a:lnSpc>
-                <a:spcPct val="115000"/>
-              </a:lnSpc>
-              <a:buNone/>
-            </a:pPr>
-            <a:r>
-              <a:rPr lang="ja-JP" altLang="en-US" sz="1500" b="1" dirty="0">
-                <a:solidFill>
-                  <a:srgbClr val="002060"/>
-                </a:solidFill>
-                <a:latin typeface="メイリオ" panose="020B0604030504040204" pitchFamily="50" charset="-128"/>
-                <a:ea typeface="メイリオ" panose="020B0604030504040204" pitchFamily="50" charset="-128"/>
-                <a:cs typeface="メイリオ"/>
-              </a:rPr>
-              <a:t>イベント参加</a:t>
-            </a:r>
-            <a:endParaRPr lang="ja-JP" altLang="en-US" sz="1200" dirty="0">
-              <a:latin typeface="メイリオ"/>
-              <a:ea typeface="メイリオ"/>
-              <a:cs typeface="メイリオ"/>
-            </a:endParaRPr>
-          </a:p>
-        </p:txBody>
-      </p:sp>
-      <p:sp>
-        <p:nvSpPr>
-          <p:cNvPr id="12" name="矢印"/>
-          <p:cNvSpPr/>
-          <p:nvPr/>
-        </p:nvSpPr>
-        <p:spPr>
-          <a:xfrm>
-            <a:off x="7558430" y="1691640"/>
-            <a:ext cx="310896" cy="914400"/>
-          </a:xfrm>
-          <a:prstGeom prst="rect">
-            <a:avLst/>
-          </a:prstGeom>
-          <a:noFill/>
-          <a:ln>
-            <a:noFill/>
-          </a:ln>
-        </p:spPr>
-        <p:txBody>
-          <a:bodyPr wrap="square" lIns="0" tIns="0" rIns="0" bIns="0" rtlCol="0" anchor="ctr">
-            <a:noAutofit/>
-          </a:bodyPr>
-          <a:lstStyle/>
-          <a:p>
-            <a:pPr algn="ctr">
-              <a:buNone/>
-            </a:pPr>
-            <a:r>
-              <a:rPr lang="ja-JP" altLang="en-US" sz="1400" b="0" dirty="0">
-                <a:solidFill>
-                  <a:srgbClr val="002060"/>
-                </a:solidFill>
-                <a:latin typeface="メイリオ" panose="020B0604030504040204" pitchFamily="50" charset="-128"/>
-                <a:ea typeface="メイリオ" panose="020B0604030504040204" pitchFamily="50" charset="-128"/>
-                <a:cs typeface="メイリオ"/>
-              </a:rPr>
-              <a:t>▶</a:t>
-            </a:r>
-            <a:endParaRPr lang="ja-JP" altLang="en-US" sz="1200" dirty="0">
-              <a:latin typeface="メイリオ"/>
-              <a:ea typeface="メイリオ"/>
-              <a:cs typeface="メイリオ"/>
-            </a:endParaRPr>
-          </a:p>
-        </p:txBody>
-      </p:sp>
-      <p:sp>
-        <p:nvSpPr>
-          <p:cNvPr id="13" name="流れ5"/>
-          <p:cNvSpPr/>
-          <p:nvPr/>
-        </p:nvSpPr>
-        <p:spPr>
-          <a:xfrm>
-            <a:off x="7869326" y="1691640"/>
-            <a:ext cx="1530705" cy="914400"/>
-          </a:xfrm>
-          <a:prstGeom prst="rect">
-            <a:avLst/>
-          </a:prstGeom>
-          <a:solidFill>
-            <a:srgbClr val="002060"/>
-          </a:solidFill>
-          <a:ln>
-            <a:noFill/>
-          </a:ln>
-        </p:spPr>
-        <p:txBody>
-          <a:bodyPr wrap="square" lIns="54864" tIns="36576" rIns="54864" bIns="36576" rtlCol="0" anchor="ctr">
-            <a:noAutofit/>
-          </a:bodyPr>
-          <a:lstStyle/>
-          <a:p>
-            <a:pPr algn="ctr">
-              <a:lnSpc>
-                <a:spcPct val="115000"/>
-              </a:lnSpc>
-              <a:buNone/>
-            </a:pPr>
-            <a:r>
-              <a:rPr lang="ja-JP" altLang="en-US" sz="1500" b="1" dirty="0">
-                <a:solidFill>
-                  <a:srgbClr val="FFFFFF"/>
-                </a:solidFill>
-                <a:latin typeface="メイリオ" panose="020B0604030504040204" pitchFamily="50" charset="-128"/>
-                <a:ea typeface="メイリオ" panose="020B0604030504040204" pitchFamily="50" charset="-128"/>
-                <a:cs typeface="メイリオ"/>
-              </a:rPr>
-              <a:t>サロン入会</a:t>
-            </a:r>
-            <a:endParaRPr lang="ja-JP" altLang="en-US" sz="1200" dirty="0">
-              <a:latin typeface="メイリオ"/>
-              <a:ea typeface="メイリオ"/>
-              <a:cs typeface="メイリオ"/>
-            </a:endParaRPr>
-          </a:p>
-        </p:txBody>
-      </p:sp>
-      <p:sp>
-        <p:nvSpPr>
-          <p:cNvPr id="14" name="矢印下"/>
-          <p:cNvSpPr/>
-          <p:nvPr/>
-        </p:nvSpPr>
-        <p:spPr>
-          <a:xfrm>
-            <a:off x="2926994" y="2651760"/>
-            <a:ext cx="365760" cy="292608"/>
-          </a:xfrm>
-          <a:prstGeom prst="rect">
-            <a:avLst/>
-          </a:prstGeom>
-          <a:noFill/>
-          <a:ln>
-            <a:noFill/>
-          </a:ln>
-        </p:spPr>
-        <p:txBody>
-          <a:bodyPr wrap="square" lIns="0" tIns="0" rIns="0" bIns="0" rtlCol="0" anchor="ctr">
-            <a:noAutofit/>
-          </a:bodyPr>
-          <a:lstStyle/>
-          <a:p>
-            <a:pPr algn="ctr">
-              <a:buNone/>
-            </a:pPr>
-            <a:r>
-              <a:rPr lang="ja-JP" altLang="en-US" sz="1300" b="0" dirty="0">
-                <a:solidFill>
-                  <a:srgbClr val="C00000"/>
-                </a:solidFill>
-                <a:latin typeface="メイリオ" panose="020B0604030504040204" pitchFamily="50" charset="-128"/>
-                <a:ea typeface="メイリオ" panose="020B0604030504040204" pitchFamily="50" charset="-128"/>
-                <a:cs typeface="メイリオ"/>
-              </a:rPr>
-              <a:t>▼</a:t>
-            </a:r>
-            <a:endParaRPr lang="ja-JP" altLang="en-US" sz="1200" dirty="0">
-              <a:latin typeface="メイリオ"/>
-              <a:ea typeface="メイリオ"/>
-              <a:cs typeface="メイリオ"/>
-            </a:endParaRPr>
-          </a:p>
-        </p:txBody>
-      </p:sp>
-      <p:sp>
-        <p:nvSpPr>
-          <p:cNvPr id="15" name="切れる1"/>
-          <p:cNvSpPr/>
-          <p:nvPr/>
-        </p:nvSpPr>
-        <p:spPr>
-          <a:xfrm>
-            <a:off x="1463954" y="2971800"/>
-            <a:ext cx="3291840" cy="1371600"/>
-          </a:xfrm>
-          <a:prstGeom prst="rect">
-            <a:avLst/>
-          </a:prstGeom>
-          <a:noFill/>
-          <a:ln w="9525">
-            <a:solidFill>
-              <a:srgbClr val="C00000"/>
-            </a:solidFill>
-          </a:ln>
-        </p:spPr>
-        <p:txBody>
-          <a:bodyPr wrap="square" lIns="91440" tIns="54864" rIns="91440" bIns="54864" rtlCol="0" anchor="ctr">
+          <a:bodyPr wrap="square" lIns="73152" tIns="36576" rIns="73152" bIns="36576" rtlCol="0" anchor="ctr">
             <a:noAutofit/>
           </a:bodyPr>
           <a:lstStyle/>
@@ -5346,222 +6207,15 @@
               <a:buNone/>
             </a:pPr>
             <a:r>
-              <a:rPr lang="ja-JP" altLang="en-US" sz="1500" b="1" dirty="0">
-                <a:solidFill>
-                  <a:srgbClr val="C00000"/>
+              <a:rPr lang="ja-JP" altLang="en-US" sz="1600" b="1" dirty="0">
+                <a:solidFill>
+                  <a:srgbClr val="002060"/>
                 </a:solidFill>
                 <a:latin typeface="メイリオ" panose="020B0604030504040204" pitchFamily="50" charset="-128"/>
                 <a:ea typeface="メイリオ" panose="020B0604030504040204" pitchFamily="50" charset="-128"/>
                 <a:cs typeface="メイリオ"/>
               </a:rPr>
-              <a:t>申し込まずに離れた方</a:t>
-            </a:r>
-            <a:endParaRPr lang="ja-JP" altLang="en-US" sz="1200" dirty="0">
-              <a:latin typeface="メイリオ"/>
-              <a:ea typeface="メイリオ"/>
-              <a:cs typeface="メイリオ"/>
-            </a:endParaRPr>
-          </a:p>
-          <a:p>
-            <a:pPr algn="ctr">
-              <a:lnSpc>
-                <a:spcPct val="130000"/>
-              </a:lnSpc>
-              <a:buNone/>
-            </a:pPr>
-            <a:r>
-              <a:rPr lang="ja-JP" altLang="en-US" sz="1400" b="0" dirty="0">
-                <a:solidFill>
-                  <a:srgbClr val="333333"/>
-                </a:solidFill>
-                <a:latin typeface="メイリオ" panose="020B0604030504040204" pitchFamily="50" charset="-128"/>
-                <a:ea typeface="メイリオ" panose="020B0604030504040204" pitchFamily="50" charset="-128"/>
-                <a:cs typeface="メイリオ"/>
-              </a:rPr>
-              <a:t>次のイベントまで案内する手段が無い</a:t>
-            </a:r>
-            <a:endParaRPr lang="ja-JP" altLang="en-US" sz="1200" dirty="0">
-              <a:latin typeface="メイリオ"/>
-              <a:ea typeface="メイリオ"/>
-              <a:cs typeface="メイリオ"/>
-            </a:endParaRPr>
-          </a:p>
-        </p:txBody>
-      </p:sp>
-      <p:sp>
-        <p:nvSpPr>
-          <p:cNvPr id="16" name="矢印下"/>
-          <p:cNvSpPr/>
-          <p:nvPr/>
-        </p:nvSpPr>
-        <p:spPr>
-          <a:xfrm>
-            <a:off x="6610197" y="2651760"/>
-            <a:ext cx="365760" cy="292608"/>
-          </a:xfrm>
-          <a:prstGeom prst="rect">
-            <a:avLst/>
-          </a:prstGeom>
-          <a:noFill/>
-          <a:ln>
-            <a:noFill/>
-          </a:ln>
-        </p:spPr>
-        <p:txBody>
-          <a:bodyPr wrap="square" lIns="0" tIns="0" rIns="0" bIns="0" rtlCol="0" anchor="ctr">
-            <a:noAutofit/>
-          </a:bodyPr>
-          <a:lstStyle/>
-          <a:p>
-            <a:pPr algn="ctr">
-              <a:buNone/>
-            </a:pPr>
-            <a:r>
-              <a:rPr lang="ja-JP" altLang="en-US" sz="1300" b="0" dirty="0">
-                <a:solidFill>
-                  <a:srgbClr val="C00000"/>
-                </a:solidFill>
-                <a:latin typeface="メイリオ" panose="020B0604030504040204" pitchFamily="50" charset="-128"/>
-                <a:ea typeface="メイリオ" panose="020B0604030504040204" pitchFamily="50" charset="-128"/>
-                <a:cs typeface="メイリオ"/>
-              </a:rPr>
-              <a:t>▼</a:t>
-            </a:r>
-            <a:endParaRPr lang="ja-JP" altLang="en-US" sz="1200" dirty="0">
-              <a:latin typeface="メイリオ"/>
-              <a:ea typeface="メイリオ"/>
-              <a:cs typeface="メイリオ"/>
-            </a:endParaRPr>
-          </a:p>
-        </p:txBody>
-      </p:sp>
-      <p:sp>
-        <p:nvSpPr>
-          <p:cNvPr id="17" name="切れる3"/>
-          <p:cNvSpPr/>
-          <p:nvPr/>
-        </p:nvSpPr>
-        <p:spPr>
-          <a:xfrm>
-            <a:off x="5147157" y="2971800"/>
-            <a:ext cx="3291840" cy="1371600"/>
-          </a:xfrm>
-          <a:prstGeom prst="rect">
-            <a:avLst/>
-          </a:prstGeom>
-          <a:noFill/>
-          <a:ln w="9525">
-            <a:solidFill>
-              <a:srgbClr val="C00000"/>
-            </a:solidFill>
-          </a:ln>
-        </p:spPr>
-        <p:txBody>
-          <a:bodyPr wrap="square" lIns="91440" tIns="54864" rIns="91440" bIns="54864" rtlCol="0" anchor="ctr">
-            <a:noAutofit/>
-          </a:bodyPr>
-          <a:lstStyle/>
-          <a:p>
-            <a:pPr algn="ctr">
-              <a:lnSpc>
-                <a:spcPct val="130000"/>
-              </a:lnSpc>
-              <a:buNone/>
-            </a:pPr>
-            <a:r>
-              <a:rPr lang="ja-JP" altLang="en-US" sz="1500" b="1" dirty="0">
-                <a:solidFill>
-                  <a:srgbClr val="C00000"/>
-                </a:solidFill>
-                <a:latin typeface="メイリオ" panose="020B0604030504040204" pitchFamily="50" charset="-128"/>
-                <a:ea typeface="メイリオ" panose="020B0604030504040204" pitchFamily="50" charset="-128"/>
-                <a:cs typeface="メイリオ"/>
-              </a:rPr>
-              <a:t>参加して入会していない方</a:t>
-            </a:r>
-            <a:endParaRPr lang="ja-JP" altLang="en-US" sz="1200" dirty="0">
-              <a:latin typeface="メイリオ"/>
-              <a:ea typeface="メイリオ"/>
-              <a:cs typeface="メイリオ"/>
-            </a:endParaRPr>
-          </a:p>
-          <a:p>
-            <a:pPr algn="ctr">
-              <a:lnSpc>
-                <a:spcPct val="130000"/>
-              </a:lnSpc>
-              <a:buNone/>
-            </a:pPr>
-            <a:r>
-              <a:rPr lang="ja-JP" altLang="en-US" sz="1400" b="0" dirty="0">
-                <a:solidFill>
-                  <a:srgbClr val="333333"/>
-                </a:solidFill>
-                <a:latin typeface="メイリオ" panose="020B0604030504040204" pitchFamily="50" charset="-128"/>
-                <a:ea typeface="メイリオ" panose="020B0604030504040204" pitchFamily="50" charset="-128"/>
-                <a:cs typeface="メイリオ"/>
-              </a:rPr>
-              <a:t>入会まで案内を続ける手段が無い</a:t>
-            </a:r>
-            <a:endParaRPr lang="ja-JP" altLang="en-US" sz="1200" dirty="0">
-              <a:latin typeface="メイリオ"/>
-              <a:ea typeface="メイリオ"/>
-              <a:cs typeface="メイリオ"/>
-            </a:endParaRPr>
-          </a:p>
-        </p:txBody>
-      </p:sp>
-      <p:sp>
-        <p:nvSpPr>
-          <p:cNvPr id="18" name="示唆"/>
-          <p:cNvSpPr/>
-          <p:nvPr/>
-        </p:nvSpPr>
-        <p:spPr>
-          <a:xfrm>
-            <a:off x="502920" y="4846320"/>
-            <a:ext cx="8897112" cy="777240"/>
-          </a:xfrm>
-          <a:prstGeom prst="rect">
-            <a:avLst/>
-          </a:prstGeom>
-          <a:solidFill>
-            <a:srgbClr val="F2F2F2"/>
-          </a:solidFill>
-          <a:ln>
-            <a:noFill/>
-          </a:ln>
-        </p:spPr>
-        <p:txBody>
-          <a:bodyPr wrap="square" lIns="73152" tIns="36576" rIns="73152" bIns="36576" rtlCol="0" anchor="ctr">
-            <a:noAutofit/>
-          </a:bodyPr>
-          <a:lstStyle/>
-          <a:p>
-            <a:pPr algn="ctr">
-              <a:buNone/>
-            </a:pPr>
-            <a:r>
-              <a:rPr lang="ja-JP" altLang="en-US" sz="1600" b="1" dirty="0">
-                <a:solidFill>
-                  <a:srgbClr val="002060"/>
-                </a:solidFill>
-                <a:latin typeface="メイリオ" panose="020B0604030504040204" pitchFamily="50" charset="-128"/>
-                <a:ea typeface="メイリオ" panose="020B0604030504040204" pitchFamily="50" charset="-128"/>
-                <a:cs typeface="メイリオ"/>
-              </a:rPr>
-              <a:t>次のイベントでは、</a:t>
-            </a:r>
-            <a:r>
-              <a:rPr lang="ja-JP" altLang="en-US" sz="1600" b="1" dirty="0">
-                <a:solidFill>
-                  <a:srgbClr val="C00000"/>
-                </a:solidFill>
-                <a:latin typeface="メイリオ" panose="020B0604030504040204" pitchFamily="50" charset="-128"/>
-                <a:ea typeface="メイリオ" panose="020B0604030504040204" pitchFamily="50" charset="-128"/>
-                <a:cs typeface="メイリオ"/>
-              </a:rPr>
-              <a:t>また広告で集め直している</a:t>
+              <a:t>参加後の入会の案内</a:t>
             </a:r>
             <a:endParaRPr lang="ja-JP" altLang="en-US" sz="1200" dirty="0">
               <a:latin typeface="メイリオ"/>
@@ -5625,906 +6279,6 @@
                 <a:cs typeface="メイリオ"/>
                 <a:sym typeface="Meiryo"/>
               </a:rPr>
-              <a:t>本質課題</a:t>
-            </a:r>
-          </a:p>
-        </p:txBody>
-      </p:sp>
-      <p:sp>
-        <p:nvSpPr>
-          <p:cNvPr id="3" name="正方形/長方形 8"/>
-          <p:cNvSpPr/>
-          <p:nvPr/>
-        </p:nvSpPr>
-        <p:spPr>
-          <a:xfrm>
-            <a:off x="0" y="777240"/>
-            <a:ext cx="1801368" cy="502920"/>
-          </a:xfrm>
-          <a:prstGeom prst="rect">
-            <a:avLst/>
-          </a:prstGeom>
-          <a:solidFill>
-            <a:srgbClr val="002060"/>
-          </a:solidFill>
-          <a:ln>
-            <a:noFill/>
-          </a:ln>
-        </p:spPr>
-        <p:style>
-          <a:lnRef idx="2">
-            <a:schemeClr val="accent1">
-              <a:shade val="15000"/>
-            </a:schemeClr>
-          </a:lnRef>
-          <a:fillRef idx="1">
-            <a:schemeClr val="accent1"/>
-          </a:fillRef>
-          <a:effectRef idx="0">
-            <a:schemeClr val="accent1"/>
-          </a:effectRef>
-          <a:fontRef idx="minor">
-            <a:schemeClr val="lt1"/>
-          </a:fontRef>
-        </p:style>
-        <p:txBody>
-          <a:bodyPr rtlCol="0" anchor="ctr"/>
-          <a:lstStyle/>
-          <a:p>
-            <a:pPr algn="ctr"/>
-            <a:r>
-              <a:rPr kumimoji="1" lang="en-US" altLang="ja-JP" sz="1400" dirty="0">
-                <a:latin typeface="メイリオ" panose="020B0604030504040204" pitchFamily="50" charset="-128"/>
-                <a:ea typeface="メイリオ" panose="020B0604030504040204" pitchFamily="50" charset="-128"/>
-                <a:cs typeface="メイリオ"/>
-              </a:rPr>
-              <a:t>本質課題</a:t>
-            </a:r>
-          </a:p>
-        </p:txBody>
-      </p:sp>
-      <p:sp>
-        <p:nvSpPr>
-          <p:cNvPr id="4" name="Google Shape;752;p28"/>
-          <p:cNvSpPr txBox="1"/>
-          <p:nvPr/>
-        </p:nvSpPr>
-        <p:spPr>
-          <a:xfrm>
-            <a:off x="1984248" y="859536"/>
-            <a:ext cx="7708392" cy="338328"/>
-          </a:xfrm>
-          <a:prstGeom prst="rect">
-            <a:avLst/>
-          </a:prstGeom>
-          <a:noFill/>
-          <a:ln>
-            <a:noFill/>
-          </a:ln>
-        </p:spPr>
-        <p:txBody>
-          <a:bodyPr spcFirstLastPara="1" wrap="square" lIns="91425" tIns="45700" rIns="91425" bIns="45700" anchor="ctr" anchorCtr="0">
-            <a:spAutoFit/>
-          </a:bodyPr>
-          <a:lstStyle/>
-          <a:p>
-            <a:r>
-              <a:rPr lang="en-US" altLang="ja-JP" sz="1600" b="1" dirty="0">
-                <a:latin typeface="メイリオ" panose="020B0604030504040204" pitchFamily="50" charset="-128"/>
-                <a:ea typeface="メイリオ" panose="020B0604030504040204" pitchFamily="50" charset="-128"/>
-                <a:cs typeface="メイリオ"/>
-                <a:sym typeface="Meiryo"/>
-              </a:rPr>
-              <a:t>ためて追い続ける場所が無い。この場所を、LINE公式アカウントでつくる</a:t>
-            </a:r>
-            <a:endParaRPr lang="en-US" altLang="ja-JP" sz="1600" b="1" dirty="0">
-              <a:latin typeface="メイリオ" panose="020B0604030504040204" pitchFamily="50" charset="-128"/>
-              <a:ea typeface="メイリオ" panose="020B0604030504040204" pitchFamily="50" charset="-128"/>
-              <a:cs typeface="メイリオ"/>
-              <a:sym typeface="Meiryo"/>
-            </a:endParaRPr>
-          </a:p>
-        </p:txBody>
-      </p:sp>
-      <p:sp>
-        <p:nvSpPr>
-          <p:cNvPr id="5" name="見出し 01 集める"/>
-          <p:cNvSpPr/>
-          <p:nvPr/>
-        </p:nvSpPr>
-        <p:spPr>
-          <a:xfrm>
-            <a:off x="502920" y="1600200"/>
-            <a:ext cx="2782824" cy="411480"/>
-          </a:xfrm>
-          <a:prstGeom prst="rect">
-            <a:avLst/>
-          </a:prstGeom>
-          <a:solidFill>
-            <a:srgbClr val="002060"/>
-          </a:solidFill>
-          <a:ln>
-            <a:noFill/>
-          </a:ln>
-        </p:spPr>
-        <p:txBody>
-          <a:bodyPr wrap="square" lIns="73152" tIns="36576" rIns="73152" bIns="36576" rtlCol="0" anchor="ctr">
-            <a:noAutofit/>
-          </a:bodyPr>
-          <a:lstStyle/>
-          <a:p>
-            <a:pPr algn="ctr">
-              <a:buNone/>
-            </a:pPr>
-            <a:r>
-              <a:rPr lang="ja-JP" altLang="en-US" sz="1400" b="1" dirty="0">
-                <a:solidFill>
-                  <a:srgbClr val="FFFFFF"/>
-                </a:solidFill>
-                <a:latin typeface="メイリオ" panose="020B0604030504040204" pitchFamily="50" charset="-128"/>
-                <a:ea typeface="メイリオ" panose="020B0604030504040204" pitchFamily="50" charset="-128"/>
-                <a:cs typeface="メイリオ"/>
-              </a:rPr>
-              <a:t>01 集める</a:t>
-            </a:r>
-            <a:endParaRPr lang="ja-JP" altLang="en-US" sz="1200" dirty="0">
-              <a:latin typeface="メイリオ"/>
-              <a:ea typeface="メイリオ"/>
-              <a:cs typeface="メイリオ"/>
-            </a:endParaRPr>
-          </a:p>
-        </p:txBody>
-      </p:sp>
-      <p:sp>
-        <p:nvSpPr>
-          <p:cNvPr id="6" name="課題1"/>
-          <p:cNvSpPr/>
-          <p:nvPr/>
-        </p:nvSpPr>
-        <p:spPr>
-          <a:xfrm>
-            <a:off x="502920" y="2011680"/>
-            <a:ext cx="2782824" cy="1783080"/>
-          </a:xfrm>
-          <a:prstGeom prst="rect">
-            <a:avLst/>
-          </a:prstGeom>
-          <a:solidFill>
-            <a:srgbClr val="F2F2F2"/>
-          </a:solidFill>
-          <a:ln>
-            <a:noFill/>
-          </a:ln>
-        </p:spPr>
-        <p:txBody>
-          <a:bodyPr wrap="square" lIns="137160" tIns="91440" rIns="137160" bIns="91440" rtlCol="0" anchor="ctr">
-            <a:noAutofit/>
-          </a:bodyPr>
-          <a:lstStyle/>
-          <a:p>
-            <a:pPr algn="ctr">
-              <a:lnSpc>
-                <a:spcPct val="140000"/>
-              </a:lnSpc>
-              <a:buNone/>
-            </a:pPr>
-            <a:r>
-              <a:rPr lang="ja-JP" altLang="en-US" sz="1500" b="0" dirty="0">
-                <a:solidFill>
-                  <a:srgbClr val="333333"/>
-                </a:solidFill>
-                <a:latin typeface="メイリオ" panose="020B0604030504040204" pitchFamily="50" charset="-128"/>
-                <a:ea typeface="メイリオ" panose="020B0604030504040204" pitchFamily="50" charset="-128"/>
-                <a:cs typeface="メイリオ"/>
-              </a:rPr>
-              <a:t>離れる方・予約した方を、友だちにする手段が無い</a:t>
-            </a:r>
-            <a:endParaRPr lang="ja-JP" altLang="en-US" sz="1200" dirty="0">
-              <a:latin typeface="メイリオ"/>
-              <a:ea typeface="メイリオ"/>
-              <a:cs typeface="メイリオ"/>
-            </a:endParaRPr>
-          </a:p>
-        </p:txBody>
-      </p:sp>
-      <p:sp>
-        <p:nvSpPr>
-          <p:cNvPr id="7" name="矢印下"/>
-          <p:cNvSpPr/>
-          <p:nvPr/>
-        </p:nvSpPr>
-        <p:spPr>
-          <a:xfrm>
-            <a:off x="1665732" y="3840480"/>
-            <a:ext cx="457200" cy="411480"/>
-          </a:xfrm>
-          <a:prstGeom prst="rect">
-            <a:avLst/>
-          </a:prstGeom>
-          <a:noFill/>
-          <a:ln>
-            <a:noFill/>
-          </a:ln>
-        </p:spPr>
-        <p:txBody>
-          <a:bodyPr wrap="square" lIns="0" tIns="0" rIns="0" bIns="0" rtlCol="0" anchor="ctr">
-            <a:noAutofit/>
-          </a:bodyPr>
-          <a:lstStyle/>
-          <a:p>
-            <a:pPr algn="ctr">
-              <a:buNone/>
-            </a:pPr>
-            <a:r>
-              <a:rPr lang="ja-JP" altLang="en-US" sz="1600" b="0" dirty="0">
-                <a:solidFill>
-                  <a:srgbClr val="002060"/>
-                </a:solidFill>
-                <a:latin typeface="メイリオ" panose="020B0604030504040204" pitchFamily="50" charset="-128"/>
-                <a:ea typeface="メイリオ" panose="020B0604030504040204" pitchFamily="50" charset="-128"/>
-                <a:cs typeface="メイリオ"/>
-              </a:rPr>
-              <a:t>▼</a:t>
-            </a:r>
-            <a:endParaRPr lang="ja-JP" altLang="en-US" sz="1200" dirty="0">
-              <a:latin typeface="メイリオ"/>
-              <a:ea typeface="メイリオ"/>
-              <a:cs typeface="メイリオ"/>
-            </a:endParaRPr>
-          </a:p>
-        </p:txBody>
-      </p:sp>
-      <p:sp>
-        <p:nvSpPr>
-          <p:cNvPr id="8" name="打ち手1"/>
-          <p:cNvSpPr/>
-          <p:nvPr/>
-        </p:nvSpPr>
-        <p:spPr>
-          <a:xfrm>
-            <a:off x="502920" y="4297680"/>
-            <a:ext cx="2782824" cy="1737360"/>
-          </a:xfrm>
-          <a:prstGeom prst="rect">
-            <a:avLst/>
-          </a:prstGeom>
-          <a:solidFill>
-            <a:srgbClr val="DCE6F2"/>
-          </a:solidFill>
-          <a:ln>
-            <a:noFill/>
-          </a:ln>
-        </p:spPr>
-        <p:txBody>
-          <a:bodyPr wrap="square" lIns="73152" tIns="36576" rIns="73152" bIns="36576" rtlCol="0" anchor="ctr">
-            <a:noAutofit/>
-          </a:bodyPr>
-          <a:lstStyle/>
-          <a:p>
-            <a:pPr algn="ctr">
-              <a:lnSpc>
-                <a:spcPct val="130000"/>
-              </a:lnSpc>
-              <a:buNone/>
-            </a:pPr>
-            <a:r>
-              <a:rPr lang="ja-JP" altLang="en-US" sz="1600" b="1" dirty="0">
-                <a:solidFill>
-                  <a:srgbClr val="002060"/>
-                </a:solidFill>
-                <a:latin typeface="メイリオ" panose="020B0604030504040204" pitchFamily="50" charset="-128"/>
-                <a:ea typeface="メイリオ" panose="020B0604030504040204" pitchFamily="50" charset="-128"/>
-                <a:cs typeface="メイリオ"/>
-              </a:rPr>
-              <a:t>ポップアップツール</a:t>
-            </a:r>
-            <a:endParaRPr lang="ja-JP" altLang="en-US" sz="1200" dirty="0">
-              <a:latin typeface="メイリオ"/>
-              <a:ea typeface="メイリオ"/>
-              <a:cs typeface="メイリオ"/>
-            </a:endParaRPr>
-          </a:p>
-          <a:p>
-            <a:pPr algn="ctr">
-              <a:lnSpc>
-                <a:spcPct val="130000"/>
-              </a:lnSpc>
-              <a:buNone/>
-            </a:pPr>
-            <a:r>
-              <a:rPr lang="ja-JP" altLang="en-US" sz="1600" b="1" dirty="0">
-                <a:solidFill>
-                  <a:srgbClr val="002060"/>
-                </a:solidFill>
-                <a:latin typeface="メイリオ" panose="020B0604030504040204" pitchFamily="50" charset="-128"/>
-                <a:ea typeface="メイリオ" panose="020B0604030504040204" pitchFamily="50" charset="-128"/>
-                <a:cs typeface="メイリオ"/>
-              </a:rPr>
-              <a:t>サンクスLINE誘導</a:t>
-            </a:r>
-            <a:endParaRPr lang="ja-JP" altLang="en-US" sz="1200" dirty="0">
-              <a:latin typeface="メイリオ"/>
-              <a:ea typeface="メイリオ"/>
-              <a:cs typeface="メイリオ"/>
-            </a:endParaRPr>
-          </a:p>
-        </p:txBody>
-      </p:sp>
-      <p:sp>
-        <p:nvSpPr>
-          <p:cNvPr id="9" name="見出し 02 追う"/>
-          <p:cNvSpPr/>
-          <p:nvPr/>
-        </p:nvSpPr>
-        <p:spPr>
-          <a:xfrm>
-            <a:off x="3560064" y="1600200"/>
-            <a:ext cx="2782824" cy="411480"/>
-          </a:xfrm>
-          <a:prstGeom prst="rect">
-            <a:avLst/>
-          </a:prstGeom>
-          <a:solidFill>
-            <a:srgbClr val="002060"/>
-          </a:solidFill>
-          <a:ln>
-            <a:noFill/>
-          </a:ln>
-        </p:spPr>
-        <p:txBody>
-          <a:bodyPr wrap="square" lIns="73152" tIns="36576" rIns="73152" bIns="36576" rtlCol="0" anchor="ctr">
-            <a:noAutofit/>
-          </a:bodyPr>
-          <a:lstStyle/>
-          <a:p>
-            <a:pPr algn="ctr">
-              <a:buNone/>
-            </a:pPr>
-            <a:r>
-              <a:rPr lang="ja-JP" altLang="en-US" sz="1400" b="1" dirty="0">
-                <a:solidFill>
-                  <a:srgbClr val="FFFFFF"/>
-                </a:solidFill>
-                <a:latin typeface="メイリオ" panose="020B0604030504040204" pitchFamily="50" charset="-128"/>
-                <a:ea typeface="メイリオ" panose="020B0604030504040204" pitchFamily="50" charset="-128"/>
-                <a:cs typeface="メイリオ"/>
-              </a:rPr>
-              <a:t>02 追う</a:t>
-            </a:r>
-            <a:endParaRPr lang="ja-JP" altLang="en-US" sz="1200" dirty="0">
-              <a:latin typeface="メイリオ"/>
-              <a:ea typeface="メイリオ"/>
-              <a:cs typeface="メイリオ"/>
-            </a:endParaRPr>
-          </a:p>
-        </p:txBody>
-      </p:sp>
-      <p:sp>
-        <p:nvSpPr>
-          <p:cNvPr id="10" name="課題2"/>
-          <p:cNvSpPr/>
-          <p:nvPr/>
-        </p:nvSpPr>
-        <p:spPr>
-          <a:xfrm>
-            <a:off x="3560064" y="2011680"/>
-            <a:ext cx="2782824" cy="1783080"/>
-          </a:xfrm>
-          <a:prstGeom prst="rect">
-            <a:avLst/>
-          </a:prstGeom>
-          <a:solidFill>
-            <a:srgbClr val="F2F2F2"/>
-          </a:solidFill>
-          <a:ln>
-            <a:noFill/>
-          </a:ln>
-        </p:spPr>
-        <p:txBody>
-          <a:bodyPr wrap="square" lIns="137160" tIns="91440" rIns="137160" bIns="91440" rtlCol="0" anchor="ctr">
-            <a:noAutofit/>
-          </a:bodyPr>
-          <a:lstStyle/>
-          <a:p>
-            <a:pPr algn="ctr">
-              <a:lnSpc>
-                <a:spcPct val="140000"/>
-              </a:lnSpc>
-              <a:buNone/>
-            </a:pPr>
-            <a:r>
-              <a:rPr lang="ja-JP" altLang="en-US" sz="1500" b="0" dirty="0">
-                <a:solidFill>
-                  <a:srgbClr val="333333"/>
-                </a:solidFill>
-                <a:latin typeface="メイリオ" panose="020B0604030504040204" pitchFamily="50" charset="-128"/>
-                <a:ea typeface="メイリオ" panose="020B0604030504040204" pitchFamily="50" charset="-128"/>
-                <a:cs typeface="メイリオ"/>
-              </a:rPr>
-              <a:t>次のイベントまで、情報を届ける手段が無い</a:t>
-            </a:r>
-            <a:endParaRPr lang="ja-JP" altLang="en-US" sz="1200" dirty="0">
-              <a:latin typeface="メイリオ"/>
-              <a:ea typeface="メイリオ"/>
-              <a:cs typeface="メイリオ"/>
-            </a:endParaRPr>
-          </a:p>
-        </p:txBody>
-      </p:sp>
-      <p:sp>
-        <p:nvSpPr>
-          <p:cNvPr id="11" name="矢印下"/>
-          <p:cNvSpPr/>
-          <p:nvPr/>
-        </p:nvSpPr>
-        <p:spPr>
-          <a:xfrm>
-            <a:off x="4722876" y="3840480"/>
-            <a:ext cx="457200" cy="411480"/>
-          </a:xfrm>
-          <a:prstGeom prst="rect">
-            <a:avLst/>
-          </a:prstGeom>
-          <a:noFill/>
-          <a:ln>
-            <a:noFill/>
-          </a:ln>
-        </p:spPr>
-        <p:txBody>
-          <a:bodyPr wrap="square" lIns="0" tIns="0" rIns="0" bIns="0" rtlCol="0" anchor="ctr">
-            <a:noAutofit/>
-          </a:bodyPr>
-          <a:lstStyle/>
-          <a:p>
-            <a:pPr algn="ctr">
-              <a:buNone/>
-            </a:pPr>
-            <a:r>
-              <a:rPr lang="ja-JP" altLang="en-US" sz="1600" b="0" dirty="0">
-                <a:solidFill>
-                  <a:srgbClr val="002060"/>
-                </a:solidFill>
-                <a:latin typeface="メイリオ" panose="020B0604030504040204" pitchFamily="50" charset="-128"/>
-                <a:ea typeface="メイリオ" panose="020B0604030504040204" pitchFamily="50" charset="-128"/>
-                <a:cs typeface="メイリオ"/>
-              </a:rPr>
-              <a:t>▼</a:t>
-            </a:r>
-            <a:endParaRPr lang="ja-JP" altLang="en-US" sz="1200" dirty="0">
-              <a:latin typeface="メイリオ"/>
-              <a:ea typeface="メイリオ"/>
-              <a:cs typeface="メイリオ"/>
-            </a:endParaRPr>
-          </a:p>
-        </p:txBody>
-      </p:sp>
-      <p:sp>
-        <p:nvSpPr>
-          <p:cNvPr id="12" name="打ち手2"/>
-          <p:cNvSpPr/>
-          <p:nvPr/>
-        </p:nvSpPr>
-        <p:spPr>
-          <a:xfrm>
-            <a:off x="3560064" y="4297680"/>
-            <a:ext cx="2782824" cy="1737360"/>
-          </a:xfrm>
-          <a:prstGeom prst="rect">
-            <a:avLst/>
-          </a:prstGeom>
-          <a:solidFill>
-            <a:srgbClr val="DCE6F2"/>
-          </a:solidFill>
-          <a:ln>
-            <a:noFill/>
-          </a:ln>
-        </p:spPr>
-        <p:txBody>
-          <a:bodyPr wrap="square" lIns="73152" tIns="36576" rIns="73152" bIns="36576" rtlCol="0" anchor="ctr">
-            <a:noAutofit/>
-          </a:bodyPr>
-          <a:lstStyle/>
-          <a:p>
-            <a:pPr algn="ctr">
-              <a:lnSpc>
-                <a:spcPct val="130000"/>
-              </a:lnSpc>
-              <a:buNone/>
-            </a:pPr>
-            <a:r>
-              <a:rPr lang="ja-JP" altLang="en-US" sz="1600" b="1" dirty="0">
-                <a:solidFill>
-                  <a:srgbClr val="002060"/>
-                </a:solidFill>
-                <a:latin typeface="メイリオ" panose="020B0604030504040204" pitchFamily="50" charset="-128"/>
-                <a:ea typeface="メイリオ" panose="020B0604030504040204" pitchFamily="50" charset="-128"/>
-                <a:cs typeface="メイリオ"/>
-              </a:rPr>
-              <a:t>平常期の配信</a:t>
-            </a:r>
-            <a:endParaRPr lang="ja-JP" altLang="en-US" sz="1200" dirty="0">
-              <a:latin typeface="メイリオ"/>
-              <a:ea typeface="メイリオ"/>
-              <a:cs typeface="メイリオ"/>
-            </a:endParaRPr>
-          </a:p>
-        </p:txBody>
-      </p:sp>
-      <p:sp>
-        <p:nvSpPr>
-          <p:cNvPr id="13" name="見出し 03 つなげる"/>
-          <p:cNvSpPr/>
-          <p:nvPr/>
-        </p:nvSpPr>
-        <p:spPr>
-          <a:xfrm>
-            <a:off x="6617208" y="1600200"/>
-            <a:ext cx="2782824" cy="411480"/>
-          </a:xfrm>
-          <a:prstGeom prst="rect">
-            <a:avLst/>
-          </a:prstGeom>
-          <a:solidFill>
-            <a:srgbClr val="002060"/>
-          </a:solidFill>
-          <a:ln>
-            <a:noFill/>
-          </a:ln>
-        </p:spPr>
-        <p:txBody>
-          <a:bodyPr wrap="square" lIns="73152" tIns="36576" rIns="73152" bIns="36576" rtlCol="0" anchor="ctr">
-            <a:noAutofit/>
-          </a:bodyPr>
-          <a:lstStyle/>
-          <a:p>
-            <a:pPr algn="ctr">
-              <a:buNone/>
-            </a:pPr>
-            <a:r>
-              <a:rPr lang="ja-JP" altLang="en-US" sz="1400" b="1" dirty="0">
-                <a:solidFill>
-                  <a:srgbClr val="FFFFFF"/>
-                </a:solidFill>
-                <a:latin typeface="メイリオ" panose="020B0604030504040204" pitchFamily="50" charset="-128"/>
-                <a:ea typeface="メイリオ" panose="020B0604030504040204" pitchFamily="50" charset="-128"/>
-                <a:cs typeface="メイリオ"/>
-              </a:rPr>
-              <a:t>03 つなげる</a:t>
-            </a:r>
-            <a:endParaRPr lang="ja-JP" altLang="en-US" sz="1200" dirty="0">
-              <a:latin typeface="メイリオ"/>
-              <a:ea typeface="メイリオ"/>
-              <a:cs typeface="メイリオ"/>
-            </a:endParaRPr>
-          </a:p>
-        </p:txBody>
-      </p:sp>
-      <p:sp>
-        <p:nvSpPr>
-          <p:cNvPr id="14" name="課題3"/>
-          <p:cNvSpPr/>
-          <p:nvPr/>
-        </p:nvSpPr>
-        <p:spPr>
-          <a:xfrm>
-            <a:off x="6617208" y="2011680"/>
-            <a:ext cx="2782824" cy="1783080"/>
-          </a:xfrm>
-          <a:prstGeom prst="rect">
-            <a:avLst/>
-          </a:prstGeom>
-          <a:solidFill>
-            <a:srgbClr val="F2F2F2"/>
-          </a:solidFill>
-          <a:ln>
-            <a:noFill/>
-          </a:ln>
-        </p:spPr>
-        <p:txBody>
-          <a:bodyPr wrap="square" lIns="137160" tIns="91440" rIns="137160" bIns="91440" rtlCol="0" anchor="ctr">
-            <a:noAutofit/>
-          </a:bodyPr>
-          <a:lstStyle/>
-          <a:p>
-            <a:pPr algn="ctr">
-              <a:lnSpc>
-                <a:spcPct val="140000"/>
-              </a:lnSpc>
-              <a:buNone/>
-            </a:pPr>
-            <a:r>
-              <a:rPr lang="ja-JP" altLang="en-US" sz="1500" b="0" dirty="0">
-                <a:solidFill>
-                  <a:srgbClr val="333333"/>
-                </a:solidFill>
-                <a:latin typeface="メイリオ" panose="020B0604030504040204" pitchFamily="50" charset="-128"/>
-                <a:ea typeface="メイリオ" panose="020B0604030504040204" pitchFamily="50" charset="-128"/>
-                <a:cs typeface="メイリオ"/>
-              </a:rPr>
-              <a:t>参加した方に、入会を案内する手段が無い</a:t>
-            </a:r>
-            <a:endParaRPr lang="ja-JP" altLang="en-US" sz="1200" dirty="0">
-              <a:latin typeface="メイリオ"/>
-              <a:ea typeface="メイリオ"/>
-              <a:cs typeface="メイリオ"/>
-            </a:endParaRPr>
-          </a:p>
-        </p:txBody>
-      </p:sp>
-      <p:sp>
-        <p:nvSpPr>
-          <p:cNvPr id="15" name="矢印下"/>
-          <p:cNvSpPr/>
-          <p:nvPr/>
-        </p:nvSpPr>
-        <p:spPr>
-          <a:xfrm>
-            <a:off x="7780020" y="3840480"/>
-            <a:ext cx="457200" cy="411480"/>
-          </a:xfrm>
-          <a:prstGeom prst="rect">
-            <a:avLst/>
-          </a:prstGeom>
-          <a:noFill/>
-          <a:ln>
-            <a:noFill/>
-          </a:ln>
-        </p:spPr>
-        <p:txBody>
-          <a:bodyPr wrap="square" lIns="0" tIns="0" rIns="0" bIns="0" rtlCol="0" anchor="ctr">
-            <a:noAutofit/>
-          </a:bodyPr>
-          <a:lstStyle/>
-          <a:p>
-            <a:pPr algn="ctr">
-              <a:buNone/>
-            </a:pPr>
-            <a:r>
-              <a:rPr lang="ja-JP" altLang="en-US" sz="1600" b="0" dirty="0">
-                <a:solidFill>
-                  <a:srgbClr val="002060"/>
-                </a:solidFill>
-                <a:latin typeface="メイリオ" panose="020B0604030504040204" pitchFamily="50" charset="-128"/>
-                <a:ea typeface="メイリオ" panose="020B0604030504040204" pitchFamily="50" charset="-128"/>
-                <a:cs typeface="メイリオ"/>
-              </a:rPr>
-              <a:t>▼</a:t>
-            </a:r>
-            <a:endParaRPr lang="ja-JP" altLang="en-US" sz="1200" dirty="0">
-              <a:latin typeface="メイリオ"/>
-              <a:ea typeface="メイリオ"/>
-              <a:cs typeface="メイリオ"/>
-            </a:endParaRPr>
-          </a:p>
-        </p:txBody>
-      </p:sp>
-      <p:sp>
-        <p:nvSpPr>
-          <p:cNvPr id="16" name="打ち手3"/>
-          <p:cNvSpPr/>
-          <p:nvPr/>
-        </p:nvSpPr>
-        <p:spPr>
-          <a:xfrm>
-            <a:off x="6617208" y="4297680"/>
-            <a:ext cx="2782824" cy="1737360"/>
-          </a:xfrm>
-          <a:prstGeom prst="rect">
-            <a:avLst/>
-          </a:prstGeom>
-          <a:solidFill>
-            <a:srgbClr val="DCE6F2"/>
-          </a:solidFill>
-          <a:ln>
-            <a:noFill/>
-          </a:ln>
-        </p:spPr>
-        <p:txBody>
-          <a:bodyPr wrap="square" lIns="73152" tIns="36576" rIns="73152" bIns="36576" rtlCol="0" anchor="ctr">
-            <a:noAutofit/>
-          </a:bodyPr>
-          <a:lstStyle/>
-          <a:p>
-            <a:pPr algn="ctr">
-              <a:lnSpc>
-                <a:spcPct val="130000"/>
-              </a:lnSpc>
-              <a:buNone/>
-            </a:pPr>
-            <a:r>
-              <a:rPr lang="ja-JP" altLang="en-US" sz="1600" b="1" dirty="0">
-                <a:solidFill>
-                  <a:srgbClr val="002060"/>
-                </a:solidFill>
-                <a:latin typeface="メイリオ" panose="020B0604030504040204" pitchFamily="50" charset="-128"/>
-                <a:ea typeface="メイリオ" panose="020B0604030504040204" pitchFamily="50" charset="-128"/>
-                <a:cs typeface="メイリオ"/>
-              </a:rPr>
-              <a:t>参加後の入会の案内</a:t>
-            </a:r>
-            <a:endParaRPr lang="ja-JP" altLang="en-US" sz="1200" dirty="0">
-              <a:latin typeface="メイリオ"/>
-              <a:ea typeface="メイリオ"/>
-              <a:cs typeface="メイリオ"/>
-            </a:endParaRPr>
-          </a:p>
-        </p:txBody>
-      </p:sp>
-    </p:spTree>
-  </p:cSld>
-  <p:clrMapOvr>
-    <a:masterClrMapping/>
-  </p:clrMapOvr>
-</p:sld>
-</file>
-
-<file path=ppt/slides/slide67.xml><?xml version="1.0" encoding="utf-8"?>
-<p:sld xmlns:a="http://schemas.openxmlformats.org/drawingml/2006/main" xmlns:p="http://schemas.openxmlformats.org/presentationml/2006/main" xmlns:r="http://schemas.openxmlformats.org/officeDocument/2006/relationships">
-  <p:cSld>
-    <p:spTree>
-      <p:nvGrpSpPr>
-        <p:cNvPr id="1" name=""/>
-        <p:cNvGrpSpPr/>
-        <p:nvPr/>
-      </p:nvGrpSpPr>
-      <p:grpSpPr/>
-      <p:sp>
-        <p:nvSpPr>
-          <p:cNvPr id="4" name="Google Shape;752;p28">
-            <a:extLst>
-              <a:ext uri="{FF2B5EF4-FFF2-40B4-BE49-F238E27FC236}">
-                <a16:creationId xmlns:a16="http://schemas.microsoft.com/office/drawing/2014/main" id="{0D14D38F-F567-ACF2-CDEB-76004FDB5B51}"/>
-              </a:ext>
-            </a:extLst>
-          </p:cNvPr>
-          <p:cNvSpPr txBox="1"/>
-          <p:nvPr/>
-        </p:nvSpPr>
-        <p:spPr>
-          <a:xfrm>
-            <a:off x="548883" y="138137"/>
-            <a:ext cx="6276325" cy="338514"/>
-          </a:xfrm>
-          <a:prstGeom prst="rect">
-            <a:avLst/>
-          </a:prstGeom>
-          <a:noFill/>
-          <a:ln>
-            <a:noFill/>
-          </a:ln>
-        </p:spPr>
-        <p:txBody>
-          <a:bodyPr spcFirstLastPara="1" wrap="square" lIns="91425" tIns="45700" rIns="91425" bIns="45700" anchor="ctr" anchorCtr="0">
-            <a:spAutoFit/>
-          </a:bodyPr>
-          <a:lstStyle/>
-          <a:p>
-            <a:pPr lvl="0"/>
-            <a:r>
-              <a:rPr lang="ja-JP" altLang="en-US" sz="1600" b="1" dirty="0">
-                <a:solidFill>
-                  <a:srgbClr val="323366"/>
-                </a:solidFill>
-                <a:latin typeface="メイリオ" panose="020B0604030504040204" pitchFamily="50" charset="-128"/>
-                <a:ea typeface="メイリオ" panose="020B0604030504040204" pitchFamily="50" charset="-128"/>
-                <a:cs typeface="メイリオ"/>
-                <a:sym typeface="Meiryo"/>
-              </a:rPr>
-              <a:t>資料アジェンダ</a:t>
-            </a:r>
-          </a:p>
-        </p:txBody>
-      </p:sp>
-      <p:sp>
-        <p:nvSpPr>
-          <p:cNvPr id="2" name="正方形/長方形 1">
-            <a:extLst>
-              <a:ext uri="{FF2B5EF4-FFF2-40B4-BE49-F238E27FC236}">
-                <a16:creationId xmlns:a16="http://schemas.microsoft.com/office/drawing/2014/main" id="{636C1E2A-AC35-76CA-EBEE-CAD4F26CF45A}"/>
-              </a:ext>
-            </a:extLst>
-          </p:cNvPr>
-          <p:cNvSpPr/>
-          <p:nvPr/>
-        </p:nvSpPr>
-        <p:spPr>
-          <a:xfrm>
-            <a:off x="1460711" y="3038203"/>
-            <a:ext cx="6984604" cy="584775"/>
-          </a:xfrm>
-          <a:prstGeom prst="rect">
-            <a:avLst/>
-          </a:prstGeom>
-        </p:spPr>
-        <p:txBody>
-          <a:bodyPr wrap="none">
-            <a:spAutoFit/>
-          </a:bodyPr>
-          <a:lstStyle/>
-          <a:p>
-            <a:pPr algn="ctr"/>
-            <a:r>
-              <a:rPr lang="en-US" altLang="ja-JP" sz="3200" b="1" dirty="0">
-                <a:solidFill>
-                  <a:schemeClr val="tx1">
-                    <a:lumMod val="75000"/>
-                    <a:lumOff val="25000"/>
-                  </a:schemeClr>
-                </a:solidFill>
-                <a:latin typeface="メイリオ" panose="020B0604030504040204" pitchFamily="50" charset="-128"/>
-                <a:ea typeface="メイリオ" panose="020B0604030504040204" pitchFamily="50" charset="-128"/>
-                <a:cs typeface="メイリオ" panose="020B0604030504040204" pitchFamily="50" charset="-128"/>
-              </a:rPr>
-              <a:t>なぜLINEか</a:t>
-            </a:r>
-            <a:endParaRPr lang="en-US" altLang="ja-IS" sz="3200" b="1" dirty="0">
-              <a:solidFill>
-                <a:schemeClr val="tx1">
-                  <a:lumMod val="75000"/>
-                  <a:lumOff val="25000"/>
-                </a:schemeClr>
-              </a:solidFill>
-              <a:latin typeface="メイリオ" panose="020B0604030504040204" pitchFamily="50" charset="-128"/>
-              <a:ea typeface="メイリオ" panose="020B0604030504040204" pitchFamily="50" charset="-128"/>
-              <a:cs typeface="メイリオ" panose="020B0604030504040204" pitchFamily="50" charset="-128"/>
-            </a:endParaRPr>
-          </a:p>
-        </p:txBody>
-      </p:sp>
-    </p:spTree>
-  </p:cSld>
-  <p:clrMapOvr>
-    <a:masterClrMapping/>
-  </p:clrMapOvr>
-</p:sld>
-</file>
-
-<file path=ppt/slides/slide68.xml><?xml version="1.0" encoding="utf-8"?>
-<p:sld xmlns:a="http://schemas.openxmlformats.org/drawingml/2006/main" xmlns:p="http://schemas.openxmlformats.org/presentationml/2006/main" xmlns:r="http://schemas.openxmlformats.org/officeDocument/2006/relationships">
-  <p:cSld>
-    <p:spTree>
-      <p:nvGrpSpPr>
-        <p:cNvPr id="1" name=""/>
-        <p:cNvGrpSpPr/>
-        <p:nvPr/>
-      </p:nvGrpSpPr>
-      <p:grpSpPr/>
-      <p:sp>
-        <p:nvSpPr>
-          <p:cNvPr id="2" name="Google Shape;752;p28"/>
-          <p:cNvSpPr txBox="1"/>
-          <p:nvPr/>
-        </p:nvSpPr>
-        <p:spPr>
-          <a:xfrm>
-            <a:off x="548883" y="138137"/>
-            <a:ext cx="6276325" cy="338514"/>
-          </a:xfrm>
-          <a:prstGeom prst="rect">
-            <a:avLst/>
-          </a:prstGeom>
-          <a:noFill/>
-          <a:ln>
-            <a:noFill/>
-          </a:ln>
-        </p:spPr>
-        <p:txBody>
-          <a:bodyPr spcFirstLastPara="1" wrap="square" lIns="91425" tIns="45700" rIns="91425" bIns="45700" anchor="ctr" anchorCtr="0">
-            <a:spAutoFit/>
-          </a:bodyPr>
-          <a:lstStyle/>
-          <a:p>
-            <a:pPr lvl="0"/>
-            <a:r>
-              <a:rPr lang="ja-JP" altLang="en-US" sz="1600" b="1" dirty="0">
-                <a:solidFill>
-                  <a:srgbClr val="323366"/>
-                </a:solidFill>
-                <a:latin typeface="メイリオ" panose="020B0604030504040204" pitchFamily="50" charset="-128"/>
-                <a:ea typeface="メイリオ" panose="020B0604030504040204" pitchFamily="50" charset="-128"/>
-                <a:cs typeface="メイリオ"/>
-                <a:sym typeface="Meiryo"/>
-              </a:rPr>
               <a:t>なぜLINEか</a:t>
             </a:r>
           </a:p>
@@ -7521,7 +7275,7 @@
 </p:sld>
 </file>
 
-<file path=ppt/slides/slide69.xml><?xml version="1.0" encoding="utf-8"?>
+<file path=ppt/slides/slide67.xml><?xml version="1.0" encoding="utf-8"?>
 <p:sld xmlns:a="http://schemas.openxmlformats.org/drawingml/2006/main" xmlns:p="http://schemas.openxmlformats.org/presentationml/2006/main" xmlns:r="http://schemas.openxmlformats.org/officeDocument/2006/relationships">
   <p:cSld>
     <p:spTree>
@@ -7533,13 +7287,7 @@
       <p:grpSpPr/>
       <p:sp>
         <p:nvSpPr>
-          <p:cNvPr id="4" name="Google Shape;752;p28">
-            <a:extLst>
-              <a:ext uri="{FF2B5EF4-FFF2-40B4-BE49-F238E27FC236}">
-                <a16:creationId xmlns:a16="http://schemas.microsoft.com/office/drawing/2014/main" id="{0D14D38F-F567-ACF2-CDEB-76004FDB5B51}"/>
-              </a:ext>
-            </a:extLst>
-          </p:cNvPr>
+          <p:cNvPr id="2" name="Google Shape;752;p28"/>
           <p:cNvSpPr txBox="1"/>
           <p:nvPr/>
         </p:nvSpPr>
@@ -7573,67 +7321,956 @@
                 <a:cs typeface="メイリオ"/>
                 <a:sym typeface="Meiryo"/>
               </a:rPr>
-              <a:t>資料アジェンダ</a:t>
+              <a:t>LINEで気をつける点</a:t>
             </a:r>
           </a:p>
         </p:txBody>
       </p:sp>
       <p:sp>
         <p:nvSpPr>
-          <p:cNvPr id="2" name="正方形/長方形 1">
-            <a:extLst>
-              <a:ext uri="{FF2B5EF4-FFF2-40B4-BE49-F238E27FC236}">
-                <a16:creationId xmlns:a16="http://schemas.microsoft.com/office/drawing/2014/main" id="{636C1E2A-AC35-76CA-EBEE-CAD4F26CF45A}"/>
-              </a:ext>
-            </a:extLst>
-          </p:cNvPr>
+          <p:cNvPr id="3" name="正方形/長方形 8"/>
           <p:cNvSpPr/>
           <p:nvPr/>
         </p:nvSpPr>
         <p:spPr>
           <a:xfrm>
-            <a:off x="1460711" y="3038203"/>
-            <a:ext cx="6984604" cy="584775"/>
+            <a:off x="0" y="777240"/>
+            <a:ext cx="2057400" cy="502920"/>
           </a:xfrm>
           <a:prstGeom prst="rect">
             <a:avLst/>
           </a:prstGeom>
+          <a:solidFill>
+            <a:srgbClr val="002060"/>
+          </a:solidFill>
+          <a:ln>
+            <a:noFill/>
+          </a:ln>
+        </p:spPr>
+        <p:style>
+          <a:lnRef idx="2">
+            <a:schemeClr val="accent1">
+              <a:shade val="15000"/>
+            </a:schemeClr>
+          </a:lnRef>
+          <a:fillRef idx="1">
+            <a:schemeClr val="accent1"/>
+          </a:fillRef>
+          <a:effectRef idx="0">
+            <a:schemeClr val="accent1"/>
+          </a:effectRef>
+          <a:fontRef idx="minor">
+            <a:schemeClr val="lt1"/>
+          </a:fontRef>
+        </p:style>
+        <p:txBody>
+          <a:bodyPr rtlCol="0" anchor="ctr"/>
+          <a:lstStyle/>
+          <a:p>
+            <a:pPr algn="ctr"/>
+            <a:r>
+              <a:rPr kumimoji="1" lang="en-US" altLang="ja-JP" sz="1400" dirty="0">
+                <a:latin typeface="メイリオ" panose="020B0604030504040204" pitchFamily="50" charset="-128"/>
+                <a:ea typeface="メイリオ" panose="020B0604030504040204" pitchFamily="50" charset="-128"/>
+                <a:cs typeface="メイリオ"/>
+              </a:rPr>
+              <a:t>気をつける点と対策</a:t>
+            </a:r>
+          </a:p>
+        </p:txBody>
+      </p:sp>
+      <p:sp>
+        <p:nvSpPr>
+          <p:cNvPr id="4" name="Google Shape;752;p28"/>
+          <p:cNvSpPr txBox="1"/>
+          <p:nvPr/>
+        </p:nvSpPr>
+        <p:spPr>
+          <a:xfrm>
+            <a:off x="2240280" y="859536"/>
+            <a:ext cx="7452360" cy="338328"/>
+          </a:xfrm>
+          <a:prstGeom prst="rect">
+            <a:avLst/>
+          </a:prstGeom>
+          <a:noFill/>
+          <a:ln>
+            <a:noFill/>
+          </a:ln>
         </p:spPr>
         <p:txBody>
-          <a:bodyPr wrap="none">
+          <a:bodyPr spcFirstLastPara="1" wrap="square" lIns="91425" tIns="45700" rIns="91425" bIns="45700" anchor="ctr" anchorCtr="0">
             <a:spAutoFit/>
           </a:bodyPr>
           <a:lstStyle/>
           <a:p>
-            <a:pPr algn="ctr"/>
-            <a:r>
-              <a:rPr lang="en-US" altLang="ja-JP" sz="3200" b="1" dirty="0">
-                <a:solidFill>
-                  <a:schemeClr val="tx1">
-                    <a:lumMod val="75000"/>
-                    <a:lumOff val="25000"/>
-                  </a:schemeClr>
-                </a:solidFill>
+            <a:r>
+              <a:rPr lang="en-US" altLang="ja-JP" sz="1600" b="1" dirty="0">
                 <a:latin typeface="メイリオ" panose="020B0604030504040204" pitchFamily="50" charset="-128"/>
                 <a:ea typeface="メイリオ" panose="020B0604030504040204" pitchFamily="50" charset="-128"/>
-                <a:cs typeface="メイリオ" panose="020B0604030504040204" pitchFamily="50" charset="-128"/>
-              </a:rPr>
-              <a:t>施策：友だちの入口と配信</a:t>
-            </a:r>
-            <a:endParaRPr lang="en-US" altLang="ja-IS" sz="3200" b="1" dirty="0">
-              <a:solidFill>
-                <a:schemeClr val="tx1">
-                  <a:lumMod val="75000"/>
-                  <a:lumOff val="25000"/>
-                </a:schemeClr>
-              </a:solidFill>
+                <a:cs typeface="メイリオ"/>
+                <a:sym typeface="Meiryo"/>
+              </a:rPr>
+              <a:t>気をつける点は、運用の設計で抑える</a:t>
+            </a:r>
+            <a:endParaRPr lang="en-US" altLang="ja-JP" sz="1600" b="1" dirty="0">
               <a:latin typeface="メイリオ" panose="020B0604030504040204" pitchFamily="50" charset="-128"/>
               <a:ea typeface="メイリオ" panose="020B0604030504040204" pitchFamily="50" charset="-128"/>
-              <a:cs typeface="メイリオ" panose="020B0604030504040204" pitchFamily="50" charset="-128"/>
+              <a:cs typeface="メイリオ"/>
+              <a:sym typeface="Meiryo"/>
             </a:endParaRPr>
           </a:p>
         </p:txBody>
       </p:sp>
+      <p:graphicFrame>
+        <p:nvGraphicFramePr>
+          <p:cNvPr id="5" name="気をつける点 4"/>
+          <p:cNvGraphicFramePr>
+            <a:graphicFrameLocks noGrp="1"/>
+          </p:cNvGraphicFramePr>
+          <p:nvPr/>
+        </p:nvGraphicFramePr>
+        <p:xfrm>
+          <a:off x="502920" y="1600200"/>
+          <a:ext cx="8897112" cy="4023360"/>
+        </p:xfrm>
+        <a:graphic>
+          <a:graphicData uri="http://schemas.openxmlformats.org/drawingml/2006/table">
+            <a:tbl>
+              <a:tblPr/>
+              <a:tblGrid>
+                <a:gridCol w="1828800"/>
+                <a:gridCol w="3291840"/>
+                <a:gridCol w="3776472"/>
+              </a:tblGrid>
+              <a:tr h="457200">
+                <a:tc>
+                  <a:txBody>
+                    <a:bodyPr/>
+                    <a:lstStyle/>
+                    <a:p>
+                      <a:pPr algn="ctr">
+                        <a:buNone/>
+                      </a:pPr>
+                      <a:r>
+                        <a:rPr lang="ja-JP" altLang="en-US" sz="1400" b="1" dirty="0">
+                          <a:solidFill>
+                            <a:srgbClr val="FFFFFF"/>
+                          </a:solidFill>
+                          <a:latin typeface="メイリオ" panose="020B0604030504040204" pitchFamily="50" charset="-128"/>
+                          <a:ea typeface="メイリオ" panose="020B0604030504040204" pitchFamily="50" charset="-128"/>
+                          <a:cs typeface="メイリオ"/>
+                        </a:rPr>
+                        <a:t>気をつける点</a:t>
+                      </a:r>
+                      <a:endParaRPr lang="ja-JP" altLang="en-US" sz="1400" dirty="0">
+                        <a:latin typeface="メイリオ"/>
+                        <a:ea typeface="メイリオ"/>
+                        <a:cs typeface="メイリオ"/>
+                      </a:endParaRPr>
+                    </a:p>
+                  </a:txBody>
+                  <a:tcPr marL="73152" marR="73152" marT="27432" marB="27432" anchor="ctr">
+                    <a:lnL w="9525" cap="flat" cmpd="sng" algn="ctr">
+                      <a:solidFill>
+                        <a:srgbClr val="BFBFBF"/>
+                      </a:solidFill>
+                      <a:prstDash val="solid"/>
+                      <a:round/>
+                      <a:headEnd type="none" w="med" len="med"/>
+                      <a:tailEnd type="none" w="med" len="med"/>
+                    </a:lnL>
+                    <a:lnR w="9525" cap="flat" cmpd="sng" algn="ctr">
+                      <a:solidFill>
+                        <a:srgbClr val="BFBFBF"/>
+                      </a:solidFill>
+                      <a:prstDash val="solid"/>
+                      <a:round/>
+                      <a:headEnd type="none" w="med" len="med"/>
+                      <a:tailEnd type="none" w="med" len="med"/>
+                    </a:lnR>
+                    <a:lnT w="9525" cap="flat" cmpd="sng" algn="ctr">
+                      <a:solidFill>
+                        <a:srgbClr val="BFBFBF"/>
+                      </a:solidFill>
+                      <a:prstDash val="solid"/>
+                      <a:round/>
+                      <a:headEnd type="none" w="med" len="med"/>
+                      <a:tailEnd type="none" w="med" len="med"/>
+                    </a:lnT>
+                    <a:lnB w="9525" cap="flat" cmpd="sng" algn="ctr">
+                      <a:solidFill>
+                        <a:srgbClr val="BFBFBF"/>
+                      </a:solidFill>
+                      <a:prstDash val="solid"/>
+                      <a:round/>
+                      <a:headEnd type="none" w="med" len="med"/>
+                      <a:tailEnd type="none" w="med" len="med"/>
+                    </a:lnB>
+                    <a:solidFill>
+                      <a:srgbClr val="002060"/>
+                    </a:solidFill>
+                  </a:tcPr>
+                </a:tc>
+                <a:tc>
+                  <a:txBody>
+                    <a:bodyPr/>
+                    <a:lstStyle/>
+                    <a:p>
+                      <a:pPr algn="ctr">
+                        <a:buNone/>
+                      </a:pPr>
+                      <a:r>
+                        <a:rPr lang="ja-JP" altLang="en-US" sz="1400" b="1" dirty="0">
+                          <a:solidFill>
+                            <a:srgbClr val="FFFFFF"/>
+                          </a:solidFill>
+                          <a:latin typeface="メイリオ" panose="020B0604030504040204" pitchFamily="50" charset="-128"/>
+                          <a:ea typeface="メイリオ" panose="020B0604030504040204" pitchFamily="50" charset="-128"/>
+                          <a:cs typeface="メイリオ"/>
+                        </a:rPr>
+                        <a:t>内容</a:t>
+                      </a:r>
+                      <a:endParaRPr lang="ja-JP" altLang="en-US" sz="1400" dirty="0">
+                        <a:latin typeface="メイリオ"/>
+                        <a:ea typeface="メイリオ"/>
+                        <a:cs typeface="メイリオ"/>
+                      </a:endParaRPr>
+                    </a:p>
+                  </a:txBody>
+                  <a:tcPr marL="73152" marR="73152" marT="27432" marB="27432" anchor="ctr">
+                    <a:lnL w="9525" cap="flat" cmpd="sng" algn="ctr">
+                      <a:solidFill>
+                        <a:srgbClr val="BFBFBF"/>
+                      </a:solidFill>
+                      <a:prstDash val="solid"/>
+                      <a:round/>
+                      <a:headEnd type="none" w="med" len="med"/>
+                      <a:tailEnd type="none" w="med" len="med"/>
+                    </a:lnL>
+                    <a:lnR w="9525" cap="flat" cmpd="sng" algn="ctr">
+                      <a:solidFill>
+                        <a:srgbClr val="BFBFBF"/>
+                      </a:solidFill>
+                      <a:prstDash val="solid"/>
+                      <a:round/>
+                      <a:headEnd type="none" w="med" len="med"/>
+                      <a:tailEnd type="none" w="med" len="med"/>
+                    </a:lnR>
+                    <a:lnT w="9525" cap="flat" cmpd="sng" algn="ctr">
+                      <a:solidFill>
+                        <a:srgbClr val="BFBFBF"/>
+                      </a:solidFill>
+                      <a:prstDash val="solid"/>
+                      <a:round/>
+                      <a:headEnd type="none" w="med" len="med"/>
+                      <a:tailEnd type="none" w="med" len="med"/>
+                    </a:lnT>
+                    <a:lnB w="9525" cap="flat" cmpd="sng" algn="ctr">
+                      <a:solidFill>
+                        <a:srgbClr val="BFBFBF"/>
+                      </a:solidFill>
+                      <a:prstDash val="solid"/>
+                      <a:round/>
+                      <a:headEnd type="none" w="med" len="med"/>
+                      <a:tailEnd type="none" w="med" len="med"/>
+                    </a:lnB>
+                    <a:solidFill>
+                      <a:srgbClr val="002060"/>
+                    </a:solidFill>
+                  </a:tcPr>
+                </a:tc>
+                <a:tc>
+                  <a:txBody>
+                    <a:bodyPr/>
+                    <a:lstStyle/>
+                    <a:p>
+                      <a:pPr algn="ctr">
+                        <a:buNone/>
+                      </a:pPr>
+                      <a:r>
+                        <a:rPr lang="ja-JP" altLang="en-US" sz="1400" b="1" dirty="0">
+                          <a:solidFill>
+                            <a:srgbClr val="FFFFFF"/>
+                          </a:solidFill>
+                          <a:latin typeface="メイリオ" panose="020B0604030504040204" pitchFamily="50" charset="-128"/>
+                          <a:ea typeface="メイリオ" panose="020B0604030504040204" pitchFamily="50" charset="-128"/>
+                          <a:cs typeface="メイリオ"/>
+                        </a:rPr>
+                        <a:t>対策</a:t>
+                      </a:r>
+                      <a:endParaRPr lang="ja-JP" altLang="en-US" sz="1400" dirty="0">
+                        <a:latin typeface="メイリオ"/>
+                        <a:ea typeface="メイリオ"/>
+                        <a:cs typeface="メイリオ"/>
+                      </a:endParaRPr>
+                    </a:p>
+                  </a:txBody>
+                  <a:tcPr marL="73152" marR="73152" marT="27432" marB="27432" anchor="ctr">
+                    <a:lnL w="9525" cap="flat" cmpd="sng" algn="ctr">
+                      <a:solidFill>
+                        <a:srgbClr val="BFBFBF"/>
+                      </a:solidFill>
+                      <a:prstDash val="solid"/>
+                      <a:round/>
+                      <a:headEnd type="none" w="med" len="med"/>
+                      <a:tailEnd type="none" w="med" len="med"/>
+                    </a:lnL>
+                    <a:lnR w="9525" cap="flat" cmpd="sng" algn="ctr">
+                      <a:solidFill>
+                        <a:srgbClr val="BFBFBF"/>
+                      </a:solidFill>
+                      <a:prstDash val="solid"/>
+                      <a:round/>
+                      <a:headEnd type="none" w="med" len="med"/>
+                      <a:tailEnd type="none" w="med" len="med"/>
+                    </a:lnR>
+                    <a:lnT w="9525" cap="flat" cmpd="sng" algn="ctr">
+                      <a:solidFill>
+                        <a:srgbClr val="BFBFBF"/>
+                      </a:solidFill>
+                      <a:prstDash val="solid"/>
+                      <a:round/>
+                      <a:headEnd type="none" w="med" len="med"/>
+                      <a:tailEnd type="none" w="med" len="med"/>
+                    </a:lnT>
+                    <a:lnB w="9525" cap="flat" cmpd="sng" algn="ctr">
+                      <a:solidFill>
+                        <a:srgbClr val="BFBFBF"/>
+                      </a:solidFill>
+                      <a:prstDash val="solid"/>
+                      <a:round/>
+                      <a:headEnd type="none" w="med" len="med"/>
+                      <a:tailEnd type="none" w="med" len="med"/>
+                    </a:lnB>
+                    <a:solidFill>
+                      <a:srgbClr val="002060"/>
+                    </a:solidFill>
+                  </a:tcPr>
+                </a:tc>
+              </a:tr>
+              <a:tr h="1188720">
+                <a:tc>
+                  <a:txBody>
+                    <a:bodyPr/>
+                    <a:lstStyle/>
+                    <a:p>
+                      <a:pPr algn="ctr">
+                        <a:buNone/>
+                      </a:pPr>
+                      <a:r>
+                        <a:rPr lang="ja-JP" altLang="en-US" sz="1400" b="1" dirty="0">
+                          <a:solidFill>
+                            <a:srgbClr val="002060"/>
+                          </a:solidFill>
+                          <a:latin typeface="メイリオ" panose="020B0604030504040204" pitchFamily="50" charset="-128"/>
+                          <a:ea typeface="メイリオ" panose="020B0604030504040204" pitchFamily="50" charset="-128"/>
+                          <a:cs typeface="メイリオ"/>
+                        </a:rPr>
+                        <a:t>ブロック</a:t>
+                      </a:r>
+                      <a:endParaRPr lang="ja-JP" altLang="en-US" sz="1400" dirty="0">
+                        <a:latin typeface="メイリオ"/>
+                        <a:ea typeface="メイリオ"/>
+                        <a:cs typeface="メイリオ"/>
+                      </a:endParaRPr>
+                    </a:p>
+                  </a:txBody>
+                  <a:tcPr marL="91440" marR="73152" marT="36576" marB="36576" anchor="ctr">
+                    <a:lnL w="9525" cap="flat" cmpd="sng" algn="ctr">
+                      <a:solidFill>
+                        <a:srgbClr val="BFBFBF"/>
+                      </a:solidFill>
+                      <a:prstDash val="solid"/>
+                      <a:round/>
+                      <a:headEnd type="none" w="med" len="med"/>
+                      <a:tailEnd type="none" w="med" len="med"/>
+                    </a:lnL>
+                    <a:lnR w="9525" cap="flat" cmpd="sng" algn="ctr">
+                      <a:solidFill>
+                        <a:srgbClr val="BFBFBF"/>
+                      </a:solidFill>
+                      <a:prstDash val="solid"/>
+                      <a:round/>
+                      <a:headEnd type="none" w="med" len="med"/>
+                      <a:tailEnd type="none" w="med" len="med"/>
+                    </a:lnR>
+                    <a:lnT w="9525" cap="flat" cmpd="sng" algn="ctr">
+                      <a:solidFill>
+                        <a:srgbClr val="BFBFBF"/>
+                      </a:solidFill>
+                      <a:prstDash val="solid"/>
+                      <a:round/>
+                      <a:headEnd type="none" w="med" len="med"/>
+                      <a:tailEnd type="none" w="med" len="med"/>
+                    </a:lnT>
+                    <a:lnB w="9525" cap="flat" cmpd="sng" algn="ctr">
+                      <a:solidFill>
+                        <a:srgbClr val="BFBFBF"/>
+                      </a:solidFill>
+                      <a:prstDash val="solid"/>
+                      <a:round/>
+                      <a:headEnd type="none" w="med" len="med"/>
+                      <a:tailEnd type="none" w="med" len="med"/>
+                    </a:lnB>
+                    <a:solidFill>
+                      <a:srgbClr val="DCE6F2"/>
+                    </a:solidFill>
+                  </a:tcPr>
+                </a:tc>
+                <a:tc>
+                  <a:txBody>
+                    <a:bodyPr/>
+                    <a:lstStyle/>
+                    <a:p>
+                      <a:pPr algn="l">
+                        <a:buNone/>
+                      </a:pPr>
+                      <a:r>
+                        <a:rPr lang="ja-JP" altLang="en-US" sz="1400" b="0" dirty="0">
+                          <a:solidFill>
+                            <a:srgbClr val="333333"/>
+                          </a:solidFill>
+                          <a:latin typeface="メイリオ" panose="020B0604030504040204" pitchFamily="50" charset="-128"/>
+                          <a:ea typeface="メイリオ" panose="020B0604030504040204" pitchFamily="50" charset="-128"/>
+                          <a:cs typeface="メイリオ"/>
+                        </a:rPr>
+                        <a:t>配信が多い・合わない内容だと、ブロックされる</a:t>
+                      </a:r>
+                      <a:endParaRPr lang="ja-JP" altLang="en-US" sz="1400" dirty="0">
+                        <a:latin typeface="メイリオ"/>
+                        <a:ea typeface="メイリオ"/>
+                        <a:cs typeface="メイリオ"/>
+                      </a:endParaRPr>
+                    </a:p>
+                  </a:txBody>
+                  <a:tcPr marL="91440" marR="73152" marT="36576" marB="36576" anchor="ctr">
+                    <a:lnL w="9525" cap="flat" cmpd="sng" algn="ctr">
+                      <a:solidFill>
+                        <a:srgbClr val="BFBFBF"/>
+                      </a:solidFill>
+                      <a:prstDash val="solid"/>
+                      <a:round/>
+                      <a:headEnd type="none" w="med" len="med"/>
+                      <a:tailEnd type="none" w="med" len="med"/>
+                    </a:lnL>
+                    <a:lnR w="9525" cap="flat" cmpd="sng" algn="ctr">
+                      <a:solidFill>
+                        <a:srgbClr val="BFBFBF"/>
+                      </a:solidFill>
+                      <a:prstDash val="solid"/>
+                      <a:round/>
+                      <a:headEnd type="none" w="med" len="med"/>
+                      <a:tailEnd type="none" w="med" len="med"/>
+                    </a:lnR>
+                    <a:lnT w="9525" cap="flat" cmpd="sng" algn="ctr">
+                      <a:solidFill>
+                        <a:srgbClr val="BFBFBF"/>
+                      </a:solidFill>
+                      <a:prstDash val="solid"/>
+                      <a:round/>
+                      <a:headEnd type="none" w="med" len="med"/>
+                      <a:tailEnd type="none" w="med" len="med"/>
+                    </a:lnT>
+                    <a:lnB w="9525" cap="flat" cmpd="sng" algn="ctr">
+                      <a:solidFill>
+                        <a:srgbClr val="BFBFBF"/>
+                      </a:solidFill>
+                      <a:prstDash val="solid"/>
+                      <a:round/>
+                      <a:headEnd type="none" w="med" len="med"/>
+                      <a:tailEnd type="none" w="med" len="med"/>
+                    </a:lnB>
+                    <a:solidFill>
+                      <a:srgbClr val="FFFFFF"/>
+                    </a:solidFill>
+                  </a:tcPr>
+                </a:tc>
+                <a:tc>
+                  <a:txBody>
+                    <a:bodyPr/>
+                    <a:lstStyle/>
+                    <a:p>
+                      <a:pPr algn="l">
+                        <a:buNone/>
+                      </a:pPr>
+                      <a:r>
+                        <a:rPr lang="ja-JP" altLang="en-US" sz="1400" b="1" dirty="0">
+                          <a:solidFill>
+                            <a:srgbClr val="002060"/>
+                          </a:solidFill>
+                          <a:latin typeface="メイリオ" panose="020B0604030504040204" pitchFamily="50" charset="-128"/>
+                          <a:ea typeface="メイリオ" panose="020B0604030504040204" pitchFamily="50" charset="-128"/>
+                          <a:cs typeface="メイリオ"/>
+                        </a:rPr>
+                        <a:t>段階に合わせて、配信の中身と回数を変える</a:t>
+                      </a:r>
+                      <a:endParaRPr lang="ja-JP" altLang="en-US" sz="1400" dirty="0">
+                        <a:latin typeface="メイリオ"/>
+                        <a:ea typeface="メイリオ"/>
+                        <a:cs typeface="メイリオ"/>
+                      </a:endParaRPr>
+                    </a:p>
+                  </a:txBody>
+                  <a:tcPr marL="91440" marR="73152" marT="36576" marB="36576" anchor="ctr">
+                    <a:lnL w="9525" cap="flat" cmpd="sng" algn="ctr">
+                      <a:solidFill>
+                        <a:srgbClr val="BFBFBF"/>
+                      </a:solidFill>
+                      <a:prstDash val="solid"/>
+                      <a:round/>
+                      <a:headEnd type="none" w="med" len="med"/>
+                      <a:tailEnd type="none" w="med" len="med"/>
+                    </a:lnL>
+                    <a:lnR w="9525" cap="flat" cmpd="sng" algn="ctr">
+                      <a:solidFill>
+                        <a:srgbClr val="BFBFBF"/>
+                      </a:solidFill>
+                      <a:prstDash val="solid"/>
+                      <a:round/>
+                      <a:headEnd type="none" w="med" len="med"/>
+                      <a:tailEnd type="none" w="med" len="med"/>
+                    </a:lnR>
+                    <a:lnT w="9525" cap="flat" cmpd="sng" algn="ctr">
+                      <a:solidFill>
+                        <a:srgbClr val="BFBFBF"/>
+                      </a:solidFill>
+                      <a:prstDash val="solid"/>
+                      <a:round/>
+                      <a:headEnd type="none" w="med" len="med"/>
+                      <a:tailEnd type="none" w="med" len="med"/>
+                    </a:lnT>
+                    <a:lnB w="9525" cap="flat" cmpd="sng" algn="ctr">
+                      <a:solidFill>
+                        <a:srgbClr val="BFBFBF"/>
+                      </a:solidFill>
+                      <a:prstDash val="solid"/>
+                      <a:round/>
+                      <a:headEnd type="none" w="med" len="med"/>
+                      <a:tailEnd type="none" w="med" len="med"/>
+                    </a:lnB>
+                    <a:solidFill>
+                      <a:srgbClr val="FFFFFF"/>
+                    </a:solidFill>
+                  </a:tcPr>
+                </a:tc>
+              </a:tr>
+              <a:tr h="1188720">
+                <a:tc>
+                  <a:txBody>
+                    <a:bodyPr/>
+                    <a:lstStyle/>
+                    <a:p>
+                      <a:pPr algn="ctr">
+                        <a:buNone/>
+                      </a:pPr>
+                      <a:r>
+                        <a:rPr lang="ja-JP" altLang="en-US" sz="1400" b="1" dirty="0">
+                          <a:solidFill>
+                            <a:srgbClr val="002060"/>
+                          </a:solidFill>
+                          <a:latin typeface="メイリオ" panose="020B0604030504040204" pitchFamily="50" charset="-128"/>
+                          <a:ea typeface="メイリオ" panose="020B0604030504040204" pitchFamily="50" charset="-128"/>
+                          <a:cs typeface="メイリオ"/>
+                        </a:rPr>
+                        <a:t>配信費</a:t>
+                      </a:r>
+                      <a:endParaRPr lang="ja-JP" altLang="en-US" sz="1400" dirty="0">
+                        <a:latin typeface="メイリオ"/>
+                        <a:ea typeface="メイリオ"/>
+                        <a:cs typeface="メイリオ"/>
+                      </a:endParaRPr>
+                    </a:p>
+                  </a:txBody>
+                  <a:tcPr marL="91440" marR="73152" marT="36576" marB="36576" anchor="ctr">
+                    <a:lnL w="9525" cap="flat" cmpd="sng" algn="ctr">
+                      <a:solidFill>
+                        <a:srgbClr val="BFBFBF"/>
+                      </a:solidFill>
+                      <a:prstDash val="solid"/>
+                      <a:round/>
+                      <a:headEnd type="none" w="med" len="med"/>
+                      <a:tailEnd type="none" w="med" len="med"/>
+                    </a:lnL>
+                    <a:lnR w="9525" cap="flat" cmpd="sng" algn="ctr">
+                      <a:solidFill>
+                        <a:srgbClr val="BFBFBF"/>
+                      </a:solidFill>
+                      <a:prstDash val="solid"/>
+                      <a:round/>
+                      <a:headEnd type="none" w="med" len="med"/>
+                      <a:tailEnd type="none" w="med" len="med"/>
+                    </a:lnR>
+                    <a:lnT w="9525" cap="flat" cmpd="sng" algn="ctr">
+                      <a:solidFill>
+                        <a:srgbClr val="BFBFBF"/>
+                      </a:solidFill>
+                      <a:prstDash val="solid"/>
+                      <a:round/>
+                      <a:headEnd type="none" w="med" len="med"/>
+                      <a:tailEnd type="none" w="med" len="med"/>
+                    </a:lnT>
+                    <a:lnB w="9525" cap="flat" cmpd="sng" algn="ctr">
+                      <a:solidFill>
+                        <a:srgbClr val="BFBFBF"/>
+                      </a:solidFill>
+                      <a:prstDash val="solid"/>
+                      <a:round/>
+                      <a:headEnd type="none" w="med" len="med"/>
+                      <a:tailEnd type="none" w="med" len="med"/>
+                    </a:lnB>
+                    <a:solidFill>
+                      <a:srgbClr val="DCE6F2"/>
+                    </a:solidFill>
+                  </a:tcPr>
+                </a:tc>
+                <a:tc>
+                  <a:txBody>
+                    <a:bodyPr/>
+                    <a:lstStyle/>
+                    <a:p>
+                      <a:pPr algn="l">
+                        <a:buNone/>
+                      </a:pPr>
+                      <a:r>
+                        <a:rPr lang="ja-JP" altLang="en-US" sz="1400" b="0" dirty="0">
+                          <a:solidFill>
+                            <a:srgbClr val="333333"/>
+                          </a:solidFill>
+                          <a:latin typeface="メイリオ" panose="020B0604030504040204" pitchFamily="50" charset="-128"/>
+                          <a:ea typeface="メイリオ" panose="020B0604030504040204" pitchFamily="50" charset="-128"/>
+                          <a:cs typeface="メイリオ"/>
+                        </a:rPr>
+                        <a:t>配信の数に応じて、LINEの費用がかかる</a:t>
+                      </a:r>
+                      <a:endParaRPr lang="ja-JP" altLang="en-US" sz="1400" dirty="0">
+                        <a:latin typeface="メイリオ"/>
+                        <a:ea typeface="メイリオ"/>
+                        <a:cs typeface="メイリオ"/>
+                      </a:endParaRPr>
+                    </a:p>
+                  </a:txBody>
+                  <a:tcPr marL="91440" marR="73152" marT="36576" marB="36576" anchor="ctr">
+                    <a:lnL w="9525" cap="flat" cmpd="sng" algn="ctr">
+                      <a:solidFill>
+                        <a:srgbClr val="BFBFBF"/>
+                      </a:solidFill>
+                      <a:prstDash val="solid"/>
+                      <a:round/>
+                      <a:headEnd type="none" w="med" len="med"/>
+                      <a:tailEnd type="none" w="med" len="med"/>
+                    </a:lnL>
+                    <a:lnR w="9525" cap="flat" cmpd="sng" algn="ctr">
+                      <a:solidFill>
+                        <a:srgbClr val="BFBFBF"/>
+                      </a:solidFill>
+                      <a:prstDash val="solid"/>
+                      <a:round/>
+                      <a:headEnd type="none" w="med" len="med"/>
+                      <a:tailEnd type="none" w="med" len="med"/>
+                    </a:lnR>
+                    <a:lnT w="9525" cap="flat" cmpd="sng" algn="ctr">
+                      <a:solidFill>
+                        <a:srgbClr val="BFBFBF"/>
+                      </a:solidFill>
+                      <a:prstDash val="solid"/>
+                      <a:round/>
+                      <a:headEnd type="none" w="med" len="med"/>
+                      <a:tailEnd type="none" w="med" len="med"/>
+                    </a:lnT>
+                    <a:lnB w="9525" cap="flat" cmpd="sng" algn="ctr">
+                      <a:solidFill>
+                        <a:srgbClr val="BFBFBF"/>
+                      </a:solidFill>
+                      <a:prstDash val="solid"/>
+                      <a:round/>
+                      <a:headEnd type="none" w="med" len="med"/>
+                      <a:tailEnd type="none" w="med" len="med"/>
+                    </a:lnB>
+                    <a:solidFill>
+                      <a:srgbClr val="FFFFFF"/>
+                    </a:solidFill>
+                  </a:tcPr>
+                </a:tc>
+                <a:tc>
+                  <a:txBody>
+                    <a:bodyPr/>
+                    <a:lstStyle/>
+                    <a:p>
+                      <a:pPr algn="l">
+                        <a:buNone/>
+                      </a:pPr>
+                      <a:r>
+                        <a:rPr lang="ja-JP" altLang="en-US" sz="1400" b="1" dirty="0">
+                          <a:solidFill>
+                            <a:srgbClr val="002060"/>
+                          </a:solidFill>
+                          <a:latin typeface="メイリオ" panose="020B0604030504040204" pitchFamily="50" charset="-128"/>
+                          <a:ea typeface="メイリオ" panose="020B0604030504040204" pitchFamily="50" charset="-128"/>
+                          <a:cs typeface="メイリオ"/>
+                        </a:rPr>
+                        <a:t>イベントの無い時期は月2回に抑える</a:t>
+                      </a:r>
+                      <a:endParaRPr lang="ja-JP" altLang="en-US" sz="1400" dirty="0">
+                        <a:latin typeface="メイリオ"/>
+                        <a:ea typeface="メイリオ"/>
+                        <a:cs typeface="メイリオ"/>
+                      </a:endParaRPr>
+                    </a:p>
+                  </a:txBody>
+                  <a:tcPr marL="91440" marR="73152" marT="36576" marB="36576" anchor="ctr">
+                    <a:lnL w="9525" cap="flat" cmpd="sng" algn="ctr">
+                      <a:solidFill>
+                        <a:srgbClr val="BFBFBF"/>
+                      </a:solidFill>
+                      <a:prstDash val="solid"/>
+                      <a:round/>
+                      <a:headEnd type="none" w="med" len="med"/>
+                      <a:tailEnd type="none" w="med" len="med"/>
+                    </a:lnL>
+                    <a:lnR w="9525" cap="flat" cmpd="sng" algn="ctr">
+                      <a:solidFill>
+                        <a:srgbClr val="BFBFBF"/>
+                      </a:solidFill>
+                      <a:prstDash val="solid"/>
+                      <a:round/>
+                      <a:headEnd type="none" w="med" len="med"/>
+                      <a:tailEnd type="none" w="med" len="med"/>
+                    </a:lnR>
+                    <a:lnT w="9525" cap="flat" cmpd="sng" algn="ctr">
+                      <a:solidFill>
+                        <a:srgbClr val="BFBFBF"/>
+                      </a:solidFill>
+                      <a:prstDash val="solid"/>
+                      <a:round/>
+                      <a:headEnd type="none" w="med" len="med"/>
+                      <a:tailEnd type="none" w="med" len="med"/>
+                    </a:lnT>
+                    <a:lnB w="9525" cap="flat" cmpd="sng" algn="ctr">
+                      <a:solidFill>
+                        <a:srgbClr val="BFBFBF"/>
+                      </a:solidFill>
+                      <a:prstDash val="solid"/>
+                      <a:round/>
+                      <a:headEnd type="none" w="med" len="med"/>
+                      <a:tailEnd type="none" w="med" len="med"/>
+                    </a:lnB>
+                    <a:solidFill>
+                      <a:srgbClr val="FFFFFF"/>
+                    </a:solidFill>
+                  </a:tcPr>
+                </a:tc>
+              </a:tr>
+              <a:tr h="1188720">
+                <a:tc>
+                  <a:txBody>
+                    <a:bodyPr/>
+                    <a:lstStyle/>
+                    <a:p>
+                      <a:pPr algn="ctr">
+                        <a:buNone/>
+                      </a:pPr>
+                      <a:r>
+                        <a:rPr lang="ja-JP" altLang="en-US" sz="1400" b="1" dirty="0">
+                          <a:solidFill>
+                            <a:srgbClr val="002060"/>
+                          </a:solidFill>
+                          <a:latin typeface="メイリオ" panose="020B0604030504040204" pitchFamily="50" charset="-128"/>
+                          <a:ea typeface="メイリオ" panose="020B0604030504040204" pitchFamily="50" charset="-128"/>
+                          <a:cs typeface="メイリオ"/>
+                        </a:rPr>
+                        <a:t>時間</a:t>
+                      </a:r>
+                      <a:endParaRPr lang="ja-JP" altLang="en-US" sz="1400" dirty="0">
+                        <a:latin typeface="メイリオ"/>
+                        <a:ea typeface="メイリオ"/>
+                        <a:cs typeface="メイリオ"/>
+                      </a:endParaRPr>
+                    </a:p>
+                  </a:txBody>
+                  <a:tcPr marL="91440" marR="73152" marT="36576" marB="36576" anchor="ctr">
+                    <a:lnL w="9525" cap="flat" cmpd="sng" algn="ctr">
+                      <a:solidFill>
+                        <a:srgbClr val="BFBFBF"/>
+                      </a:solidFill>
+                      <a:prstDash val="solid"/>
+                      <a:round/>
+                      <a:headEnd type="none" w="med" len="med"/>
+                      <a:tailEnd type="none" w="med" len="med"/>
+                    </a:lnL>
+                    <a:lnR w="9525" cap="flat" cmpd="sng" algn="ctr">
+                      <a:solidFill>
+                        <a:srgbClr val="BFBFBF"/>
+                      </a:solidFill>
+                      <a:prstDash val="solid"/>
+                      <a:round/>
+                      <a:headEnd type="none" w="med" len="med"/>
+                      <a:tailEnd type="none" w="med" len="med"/>
+                    </a:lnR>
+                    <a:lnT w="9525" cap="flat" cmpd="sng" algn="ctr">
+                      <a:solidFill>
+                        <a:srgbClr val="BFBFBF"/>
+                      </a:solidFill>
+                      <a:prstDash val="solid"/>
+                      <a:round/>
+                      <a:headEnd type="none" w="med" len="med"/>
+                      <a:tailEnd type="none" w="med" len="med"/>
+                    </a:lnT>
+                    <a:lnB w="9525" cap="flat" cmpd="sng" algn="ctr">
+                      <a:solidFill>
+                        <a:srgbClr val="BFBFBF"/>
+                      </a:solidFill>
+                      <a:prstDash val="solid"/>
+                      <a:round/>
+                      <a:headEnd type="none" w="med" len="med"/>
+                      <a:tailEnd type="none" w="med" len="med"/>
+                    </a:lnB>
+                    <a:solidFill>
+                      <a:srgbClr val="DCE6F2"/>
+                    </a:solidFill>
+                  </a:tcPr>
+                </a:tc>
+                <a:tc>
+                  <a:txBody>
+                    <a:bodyPr/>
+                    <a:lstStyle/>
+                    <a:p>
+                      <a:pPr algn="l">
+                        <a:buNone/>
+                      </a:pPr>
+                      <a:r>
+                        <a:rPr lang="ja-JP" altLang="en-US" sz="1400" b="0" dirty="0">
+                          <a:solidFill>
+                            <a:srgbClr val="333333"/>
+                          </a:solidFill>
+                          <a:latin typeface="メイリオ" panose="020B0604030504040204" pitchFamily="50" charset="-128"/>
+                          <a:ea typeface="メイリオ" panose="020B0604030504040204" pitchFamily="50" charset="-128"/>
+                          <a:cs typeface="メイリオ"/>
+                        </a:rPr>
+                        <a:t>友だちがたまるまで、時間がかかる</a:t>
+                      </a:r>
+                      <a:endParaRPr lang="ja-JP" altLang="en-US" sz="1400" dirty="0">
+                        <a:latin typeface="メイリオ"/>
+                        <a:ea typeface="メイリオ"/>
+                        <a:cs typeface="メイリオ"/>
+                      </a:endParaRPr>
+                    </a:p>
+                  </a:txBody>
+                  <a:tcPr marL="91440" marR="73152" marT="36576" marB="36576" anchor="ctr">
+                    <a:lnL w="9525" cap="flat" cmpd="sng" algn="ctr">
+                      <a:solidFill>
+                        <a:srgbClr val="BFBFBF"/>
+                      </a:solidFill>
+                      <a:prstDash val="solid"/>
+                      <a:round/>
+                      <a:headEnd type="none" w="med" len="med"/>
+                      <a:tailEnd type="none" w="med" len="med"/>
+                    </a:lnL>
+                    <a:lnR w="9525" cap="flat" cmpd="sng" algn="ctr">
+                      <a:solidFill>
+                        <a:srgbClr val="BFBFBF"/>
+                      </a:solidFill>
+                      <a:prstDash val="solid"/>
+                      <a:round/>
+                      <a:headEnd type="none" w="med" len="med"/>
+                      <a:tailEnd type="none" w="med" len="med"/>
+                    </a:lnR>
+                    <a:lnT w="9525" cap="flat" cmpd="sng" algn="ctr">
+                      <a:solidFill>
+                        <a:srgbClr val="BFBFBF"/>
+                      </a:solidFill>
+                      <a:prstDash val="solid"/>
+                      <a:round/>
+                      <a:headEnd type="none" w="med" len="med"/>
+                      <a:tailEnd type="none" w="med" len="med"/>
+                    </a:lnT>
+                    <a:lnB w="9525" cap="flat" cmpd="sng" algn="ctr">
+                      <a:solidFill>
+                        <a:srgbClr val="BFBFBF"/>
+                      </a:solidFill>
+                      <a:prstDash val="solid"/>
+                      <a:round/>
+                      <a:headEnd type="none" w="med" len="med"/>
+                      <a:tailEnd type="none" w="med" len="med"/>
+                    </a:lnB>
+                    <a:solidFill>
+                      <a:srgbClr val="FFFFFF"/>
+                    </a:solidFill>
+                  </a:tcPr>
+                </a:tc>
+                <a:tc>
+                  <a:txBody>
+                    <a:bodyPr/>
+                    <a:lstStyle/>
+                    <a:p>
+                      <a:pPr algn="l">
+                        <a:buNone/>
+                      </a:pPr>
+                      <a:r>
+                        <a:rPr lang="ja-JP" altLang="en-US" sz="1400" b="1" dirty="0">
+                          <a:solidFill>
+                            <a:srgbClr val="002060"/>
+                          </a:solidFill>
+                          <a:latin typeface="メイリオ" panose="020B0604030504040204" pitchFamily="50" charset="-128"/>
+                          <a:ea typeface="メイリオ" panose="020B0604030504040204" pitchFamily="50" charset="-128"/>
+                          <a:cs typeface="メイリオ"/>
+                        </a:rPr>
+                        <a:t>次のイベントから入口を置き、イベントごとに積み上げる</a:t>
+                      </a:r>
+                      <a:endParaRPr lang="ja-JP" altLang="en-US" sz="1400" dirty="0">
+                        <a:latin typeface="メイリオ"/>
+                        <a:ea typeface="メイリオ"/>
+                        <a:cs typeface="メイリオ"/>
+                      </a:endParaRPr>
+                    </a:p>
+                  </a:txBody>
+                  <a:tcPr marL="91440" marR="73152" marT="36576" marB="36576" anchor="ctr">
+                    <a:lnL w="9525" cap="flat" cmpd="sng" algn="ctr">
+                      <a:solidFill>
+                        <a:srgbClr val="BFBFBF"/>
+                      </a:solidFill>
+                      <a:prstDash val="solid"/>
+                      <a:round/>
+                      <a:headEnd type="none" w="med" len="med"/>
+                      <a:tailEnd type="none" w="med" len="med"/>
+                    </a:lnL>
+                    <a:lnR w="9525" cap="flat" cmpd="sng" algn="ctr">
+                      <a:solidFill>
+                        <a:srgbClr val="BFBFBF"/>
+                      </a:solidFill>
+                      <a:prstDash val="solid"/>
+                      <a:round/>
+                      <a:headEnd type="none" w="med" len="med"/>
+                      <a:tailEnd type="none" w="med" len="med"/>
+                    </a:lnR>
+                    <a:lnT w="9525" cap="flat" cmpd="sng" algn="ctr">
+                      <a:solidFill>
+                        <a:srgbClr val="BFBFBF"/>
+                      </a:solidFill>
+                      <a:prstDash val="solid"/>
+                      <a:round/>
+                      <a:headEnd type="none" w="med" len="med"/>
+                      <a:tailEnd type="none" w="med" len="med"/>
+                    </a:lnT>
+                    <a:lnB w="9525" cap="flat" cmpd="sng" algn="ctr">
+                      <a:solidFill>
+                        <a:srgbClr val="BFBFBF"/>
+                      </a:solidFill>
+                      <a:prstDash val="solid"/>
+                      <a:round/>
+                      <a:headEnd type="none" w="med" len="med"/>
+                      <a:tailEnd type="none" w="med" len="med"/>
+                    </a:lnB>
+                    <a:solidFill>
+                      <a:srgbClr val="FFFFFF"/>
+                    </a:solidFill>
+                  </a:tcPr>
+                </a:tc>
+              </a:tr>
+            </a:tbl>
+          </a:graphicData>
+        </a:graphic>
+      </p:graphicFrame>
     </p:spTree>
   </p:cSld>
   <p:clrMapOvr>
@@ -7642,7 +8279,7 @@
 </p:sld>
 </file>
 
-<file path=ppt/slides/slide70.xml><?xml version="1.0" encoding="utf-8"?>
+<file path=ppt/slides/slide68.xml><?xml version="1.0" encoding="utf-8"?>
 <p:sld xmlns:a="http://schemas.openxmlformats.org/drawingml/2006/main" xmlns:p="http://schemas.openxmlformats.org/presentationml/2006/main" xmlns:r="http://schemas.openxmlformats.org/officeDocument/2006/relationships">
   <p:cSld>
     <p:spTree>
@@ -8820,7 +9457,7 @@
 </p:sld>
 </file>
 
-<file path=ppt/slides/slide71.xml><?xml version="1.0" encoding="utf-8"?>
+<file path=ppt/slides/slide69.xml><?xml version="1.0" encoding="utf-8"?>
 <p:sld xmlns:a="http://schemas.openxmlformats.org/drawingml/2006/main" xmlns:p="http://schemas.openxmlformats.org/presentationml/2006/main" xmlns:r="http://schemas.openxmlformats.org/officeDocument/2006/relationships">
   <p:cSld>
     <p:spTree>
@@ -10535,1613 +11172,7 @@
 </p:sld>
 </file>
 
-<file path=ppt/slides/slide72.xml><?xml version="1.0" encoding="utf-8"?>
-<p:sld xmlns:a="http://schemas.openxmlformats.org/drawingml/2006/main" xmlns:p="http://schemas.openxmlformats.org/presentationml/2006/main" xmlns:r="http://schemas.openxmlformats.org/officeDocument/2006/relationships">
-  <p:cSld>
-    <p:spTree>
-      <p:nvGrpSpPr>
-        <p:cNvPr id="1" name=""/>
-        <p:cNvGrpSpPr/>
-        <p:nvPr/>
-      </p:nvGrpSpPr>
-      <p:grpSpPr/>
-      <p:sp>
-        <p:nvSpPr>
-          <p:cNvPr id="2" name="Google Shape;752;p28"/>
-          <p:cNvSpPr txBox="1"/>
-          <p:nvPr/>
-        </p:nvSpPr>
-        <p:spPr>
-          <a:xfrm>
-            <a:off x="548883" y="138137"/>
-            <a:ext cx="6276325" cy="338514"/>
-          </a:xfrm>
-          <a:prstGeom prst="rect">
-            <a:avLst/>
-          </a:prstGeom>
-          <a:noFill/>
-          <a:ln>
-            <a:noFill/>
-          </a:ln>
-        </p:spPr>
-        <p:txBody>
-          <a:bodyPr spcFirstLastPara="1" wrap="square" lIns="91425" tIns="45700" rIns="91425" bIns="45700" anchor="ctr" anchorCtr="0">
-            <a:spAutoFit/>
-          </a:bodyPr>
-          <a:lstStyle/>
-          <a:p>
-            <a:pPr lvl="0"/>
-            <a:r>
-              <a:rPr lang="ja-JP" altLang="en-US" sz="1600" b="1" dirty="0">
-                <a:solidFill>
-                  <a:srgbClr val="323366"/>
-                </a:solidFill>
-                <a:latin typeface="メイリオ" panose="020B0604030504040204" pitchFamily="50" charset="-128"/>
-                <a:ea typeface="メイリオ" panose="020B0604030504040204" pitchFamily="50" charset="-128"/>
-                <a:cs typeface="メイリオ"/>
-                <a:sym typeface="Meiryo"/>
-              </a:rPr>
-              <a:t>配信の回数</a:t>
-            </a:r>
-          </a:p>
-        </p:txBody>
-      </p:sp>
-      <p:sp>
-        <p:nvSpPr>
-          <p:cNvPr id="3" name="正方形/長方形 8"/>
-          <p:cNvSpPr/>
-          <p:nvPr/>
-        </p:nvSpPr>
-        <p:spPr>
-          <a:xfrm>
-            <a:off x="0" y="777240"/>
-            <a:ext cx="1874520" cy="502920"/>
-          </a:xfrm>
-          <a:prstGeom prst="rect">
-            <a:avLst/>
-          </a:prstGeom>
-          <a:solidFill>
-            <a:srgbClr val="002060"/>
-          </a:solidFill>
-          <a:ln>
-            <a:noFill/>
-          </a:ln>
-        </p:spPr>
-        <p:style>
-          <a:lnRef idx="2">
-            <a:schemeClr val="accent1">
-              <a:shade val="15000"/>
-            </a:schemeClr>
-          </a:lnRef>
-          <a:fillRef idx="1">
-            <a:schemeClr val="accent1"/>
-          </a:fillRef>
-          <a:effectRef idx="0">
-            <a:schemeClr val="accent1"/>
-          </a:effectRef>
-          <a:fontRef idx="minor">
-            <a:schemeClr val="lt1"/>
-          </a:fontRef>
-        </p:style>
-        <p:txBody>
-          <a:bodyPr rtlCol="0" anchor="ctr"/>
-          <a:lstStyle/>
-          <a:p>
-            <a:pPr algn="ctr"/>
-            <a:r>
-              <a:rPr kumimoji="1" lang="en-US" altLang="ja-JP" sz="1400" dirty="0">
-                <a:latin typeface="メイリオ" panose="020B0604030504040204" pitchFamily="50" charset="-128"/>
-                <a:ea typeface="メイリオ" panose="020B0604030504040204" pitchFamily="50" charset="-128"/>
-                <a:cs typeface="メイリオ"/>
-              </a:rPr>
-              <a:t>配信スケジュール</a:t>
-            </a:r>
-          </a:p>
-        </p:txBody>
-      </p:sp>
-      <p:sp>
-        <p:nvSpPr>
-          <p:cNvPr id="4" name="Google Shape;752;p28"/>
-          <p:cNvSpPr txBox="1"/>
-          <p:nvPr/>
-        </p:nvSpPr>
-        <p:spPr>
-          <a:xfrm>
-            <a:off x="2057400" y="859536"/>
-            <a:ext cx="7635240" cy="338328"/>
-          </a:xfrm>
-          <a:prstGeom prst="rect">
-            <a:avLst/>
-          </a:prstGeom>
-          <a:noFill/>
-          <a:ln>
-            <a:noFill/>
-          </a:ln>
-        </p:spPr>
-        <p:txBody>
-          <a:bodyPr spcFirstLastPara="1" wrap="square" lIns="91425" tIns="45700" rIns="91425" bIns="45700" anchor="ctr" anchorCtr="0">
-            <a:spAutoFit/>
-          </a:bodyPr>
-          <a:lstStyle/>
-          <a:p>
-            <a:r>
-              <a:rPr lang="en-US" altLang="ja-JP" sz="1600" b="1" dirty="0">
-                <a:latin typeface="メイリオ" panose="020B0604030504040204" pitchFamily="50" charset="-128"/>
-                <a:ea typeface="メイリオ" panose="020B0604030504040204" pitchFamily="50" charset="-128"/>
-                <a:cs typeface="メイリオ"/>
-                <a:sym typeface="Meiryo"/>
-              </a:rPr>
-              <a:t>平常期は月2回、イベント期は月4〜5回</a:t>
-            </a:r>
-            <a:endParaRPr lang="en-US" altLang="ja-JP" sz="1600" b="1" dirty="0">
-              <a:latin typeface="メイリオ" panose="020B0604030504040204" pitchFamily="50" charset="-128"/>
-              <a:ea typeface="メイリオ" panose="020B0604030504040204" pitchFamily="50" charset="-128"/>
-              <a:cs typeface="メイリオ"/>
-              <a:sym typeface="Meiryo"/>
-            </a:endParaRPr>
-          </a:p>
-        </p:txBody>
-      </p:sp>
-      <p:sp>
-        <p:nvSpPr>
-          <p:cNvPr id="5" name="流れ1"/>
-          <p:cNvSpPr/>
-          <p:nvPr/>
-        </p:nvSpPr>
-        <p:spPr>
-          <a:xfrm>
-            <a:off x="502920" y="1600200"/>
-            <a:ext cx="1991106" cy="777240"/>
-          </a:xfrm>
-          <a:prstGeom prst="rect">
-            <a:avLst/>
-          </a:prstGeom>
-          <a:solidFill>
-            <a:srgbClr val="DCE6F2"/>
-          </a:solidFill>
-          <a:ln>
-            <a:noFill/>
-          </a:ln>
-        </p:spPr>
-        <p:txBody>
-          <a:bodyPr wrap="square" lIns="54864" tIns="36576" rIns="54864" bIns="36576" rtlCol="0" anchor="ctr">
-            <a:noAutofit/>
-          </a:bodyPr>
-          <a:lstStyle/>
-          <a:p>
-            <a:pPr algn="ctr">
-              <a:lnSpc>
-                <a:spcPct val="115000"/>
-              </a:lnSpc>
-              <a:buNone/>
-            </a:pPr>
-            <a:r>
-              <a:rPr lang="ja-JP" altLang="en-US" sz="1400" b="1" dirty="0">
-                <a:solidFill>
-                  <a:srgbClr val="002060"/>
-                </a:solidFill>
-                <a:latin typeface="メイリオ" panose="020B0604030504040204" pitchFamily="50" charset="-128"/>
-                <a:ea typeface="メイリオ" panose="020B0604030504040204" pitchFamily="50" charset="-128"/>
-                <a:cs typeface="メイリオ"/>
-              </a:rPr>
-              <a:t>平常期</a:t>
-            </a:r>
-            <a:endParaRPr lang="ja-JP" altLang="en-US" sz="1200" dirty="0">
-              <a:latin typeface="メイリオ"/>
-              <a:ea typeface="メイリオ"/>
-              <a:cs typeface="メイリオ"/>
-            </a:endParaRPr>
-          </a:p>
-          <a:p>
-            <a:pPr algn="ctr">
-              <a:lnSpc>
-                <a:spcPct val="115000"/>
-              </a:lnSpc>
-              <a:buNone/>
-            </a:pPr>
-            <a:r>
-              <a:rPr lang="ja-JP" altLang="en-US" sz="1400" b="1" dirty="0">
-                <a:solidFill>
-                  <a:srgbClr val="002060"/>
-                </a:solidFill>
-                <a:latin typeface="メイリオ" panose="020B0604030504040204" pitchFamily="50" charset="-128"/>
-                <a:ea typeface="メイリオ" panose="020B0604030504040204" pitchFamily="50" charset="-128"/>
-                <a:cs typeface="メイリオ"/>
-              </a:rPr>
-              <a:t>月2回</a:t>
-            </a:r>
-            <a:endParaRPr lang="ja-JP" altLang="en-US" sz="1200" dirty="0">
-              <a:latin typeface="メイリオ"/>
-              <a:ea typeface="メイリオ"/>
-              <a:cs typeface="メイリオ"/>
-            </a:endParaRPr>
-          </a:p>
-        </p:txBody>
-      </p:sp>
-      <p:sp>
-        <p:nvSpPr>
-          <p:cNvPr id="6" name="矢印"/>
-          <p:cNvSpPr/>
-          <p:nvPr/>
-        </p:nvSpPr>
-        <p:spPr>
-          <a:xfrm>
-            <a:off x="2494026" y="1600200"/>
-            <a:ext cx="310896" cy="777240"/>
-          </a:xfrm>
-          <a:prstGeom prst="rect">
-            <a:avLst/>
-          </a:prstGeom>
-          <a:noFill/>
-          <a:ln>
-            <a:noFill/>
-          </a:ln>
-        </p:spPr>
-        <p:txBody>
-          <a:bodyPr wrap="square" lIns="0" tIns="0" rIns="0" bIns="0" rtlCol="0" anchor="ctr">
-            <a:noAutofit/>
-          </a:bodyPr>
-          <a:lstStyle/>
-          <a:p>
-            <a:pPr algn="ctr">
-              <a:buNone/>
-            </a:pPr>
-            <a:r>
-              <a:rPr lang="ja-JP" altLang="en-US" sz="1400" b="0" dirty="0">
-                <a:solidFill>
-                  <a:srgbClr val="002060"/>
-                </a:solidFill>
-                <a:latin typeface="メイリオ" panose="020B0604030504040204" pitchFamily="50" charset="-128"/>
-                <a:ea typeface="メイリオ" panose="020B0604030504040204" pitchFamily="50" charset="-128"/>
-                <a:cs typeface="メイリオ"/>
-              </a:rPr>
-              <a:t>▶</a:t>
-            </a:r>
-            <a:endParaRPr lang="ja-JP" altLang="en-US" sz="1200" dirty="0">
-              <a:latin typeface="メイリオ"/>
-              <a:ea typeface="メイリオ"/>
-              <a:cs typeface="メイリオ"/>
-            </a:endParaRPr>
-          </a:p>
-        </p:txBody>
-      </p:sp>
-      <p:sp>
-        <p:nvSpPr>
-          <p:cNvPr id="7" name="流れ2"/>
-          <p:cNvSpPr/>
-          <p:nvPr/>
-        </p:nvSpPr>
-        <p:spPr>
-          <a:xfrm>
-            <a:off x="2804922" y="1600200"/>
-            <a:ext cx="1991106" cy="777240"/>
-          </a:xfrm>
-          <a:prstGeom prst="rect">
-            <a:avLst/>
-          </a:prstGeom>
-          <a:solidFill>
-            <a:srgbClr val="002060"/>
-          </a:solidFill>
-          <a:ln>
-            <a:noFill/>
-          </a:ln>
-        </p:spPr>
-        <p:txBody>
-          <a:bodyPr wrap="square" lIns="54864" tIns="36576" rIns="54864" bIns="36576" rtlCol="0" anchor="ctr">
-            <a:noAutofit/>
-          </a:bodyPr>
-          <a:lstStyle/>
-          <a:p>
-            <a:pPr algn="ctr">
-              <a:lnSpc>
-                <a:spcPct val="115000"/>
-              </a:lnSpc>
-              <a:buNone/>
-            </a:pPr>
-            <a:r>
-              <a:rPr lang="ja-JP" altLang="en-US" sz="1400" b="1" dirty="0">
-                <a:solidFill>
-                  <a:srgbClr val="FFFFFF"/>
-                </a:solidFill>
-                <a:latin typeface="メイリオ" panose="020B0604030504040204" pitchFamily="50" charset="-128"/>
-                <a:ea typeface="メイリオ" panose="020B0604030504040204" pitchFamily="50" charset="-128"/>
-                <a:cs typeface="メイリオ"/>
-              </a:rPr>
-              <a:t>イベント期</a:t>
-            </a:r>
-            <a:endParaRPr lang="ja-JP" altLang="en-US" sz="1200" dirty="0">
-              <a:latin typeface="メイリオ"/>
-              <a:ea typeface="メイリオ"/>
-              <a:cs typeface="メイリオ"/>
-            </a:endParaRPr>
-          </a:p>
-          <a:p>
-            <a:pPr algn="ctr">
-              <a:lnSpc>
-                <a:spcPct val="115000"/>
-              </a:lnSpc>
-              <a:buNone/>
-            </a:pPr>
-            <a:r>
-              <a:rPr lang="ja-JP" altLang="en-US" sz="1400" b="1" dirty="0">
-                <a:solidFill>
-                  <a:srgbClr val="FFFFFF"/>
-                </a:solidFill>
-                <a:latin typeface="メイリオ" panose="020B0604030504040204" pitchFamily="50" charset="-128"/>
-                <a:ea typeface="メイリオ" panose="020B0604030504040204" pitchFamily="50" charset="-128"/>
-                <a:cs typeface="メイリオ"/>
-              </a:rPr>
-              <a:t>月4〜5回</a:t>
-            </a:r>
-            <a:endParaRPr lang="ja-JP" altLang="en-US" sz="1200" dirty="0">
-              <a:latin typeface="メイリオ"/>
-              <a:ea typeface="メイリオ"/>
-              <a:cs typeface="メイリオ"/>
-            </a:endParaRPr>
-          </a:p>
-        </p:txBody>
-      </p:sp>
-      <p:sp>
-        <p:nvSpPr>
-          <p:cNvPr id="8" name="矢印"/>
-          <p:cNvSpPr/>
-          <p:nvPr/>
-        </p:nvSpPr>
-        <p:spPr>
-          <a:xfrm>
-            <a:off x="4796028" y="1600200"/>
-            <a:ext cx="310896" cy="777240"/>
-          </a:xfrm>
-          <a:prstGeom prst="rect">
-            <a:avLst/>
-          </a:prstGeom>
-          <a:noFill/>
-          <a:ln>
-            <a:noFill/>
-          </a:ln>
-        </p:spPr>
-        <p:txBody>
-          <a:bodyPr wrap="square" lIns="0" tIns="0" rIns="0" bIns="0" rtlCol="0" anchor="ctr">
-            <a:noAutofit/>
-          </a:bodyPr>
-          <a:lstStyle/>
-          <a:p>
-            <a:pPr algn="ctr">
-              <a:buNone/>
-            </a:pPr>
-            <a:r>
-              <a:rPr lang="ja-JP" altLang="en-US" sz="1400" b="0" dirty="0">
-                <a:solidFill>
-                  <a:srgbClr val="002060"/>
-                </a:solidFill>
-                <a:latin typeface="メイリオ" panose="020B0604030504040204" pitchFamily="50" charset="-128"/>
-                <a:ea typeface="メイリオ" panose="020B0604030504040204" pitchFamily="50" charset="-128"/>
-                <a:cs typeface="メイリオ"/>
-              </a:rPr>
-              <a:t>▶</a:t>
-            </a:r>
-            <a:endParaRPr lang="ja-JP" altLang="en-US" sz="1200" dirty="0">
-              <a:latin typeface="メイリオ"/>
-              <a:ea typeface="メイリオ"/>
-              <a:cs typeface="メイリオ"/>
-            </a:endParaRPr>
-          </a:p>
-        </p:txBody>
-      </p:sp>
-      <p:sp>
-        <p:nvSpPr>
-          <p:cNvPr id="9" name="流れ3"/>
-          <p:cNvSpPr/>
-          <p:nvPr/>
-        </p:nvSpPr>
-        <p:spPr>
-          <a:xfrm>
-            <a:off x="5106924" y="1600200"/>
-            <a:ext cx="1991106" cy="777240"/>
-          </a:xfrm>
-          <a:prstGeom prst="rect">
-            <a:avLst/>
-          </a:prstGeom>
-          <a:solidFill>
-            <a:srgbClr val="DCE6F2"/>
-          </a:solidFill>
-          <a:ln>
-            <a:noFill/>
-          </a:ln>
-        </p:spPr>
-        <p:txBody>
-          <a:bodyPr wrap="square" lIns="54864" tIns="36576" rIns="54864" bIns="36576" rtlCol="0" anchor="ctr">
-            <a:noAutofit/>
-          </a:bodyPr>
-          <a:lstStyle/>
-          <a:p>
-            <a:pPr algn="ctr">
-              <a:lnSpc>
-                <a:spcPct val="115000"/>
-              </a:lnSpc>
-              <a:buNone/>
-            </a:pPr>
-            <a:r>
-              <a:rPr lang="ja-JP" altLang="en-US" sz="1400" b="1" dirty="0">
-                <a:solidFill>
-                  <a:srgbClr val="002060"/>
-                </a:solidFill>
-                <a:latin typeface="メイリオ" panose="020B0604030504040204" pitchFamily="50" charset="-128"/>
-                <a:ea typeface="メイリオ" panose="020B0604030504040204" pitchFamily="50" charset="-128"/>
-                <a:cs typeface="メイリオ"/>
-              </a:rPr>
-              <a:t>平常期</a:t>
-            </a:r>
-            <a:endParaRPr lang="ja-JP" altLang="en-US" sz="1200" dirty="0">
-              <a:latin typeface="メイリオ"/>
-              <a:ea typeface="メイリオ"/>
-              <a:cs typeface="メイリオ"/>
-            </a:endParaRPr>
-          </a:p>
-          <a:p>
-            <a:pPr algn="ctr">
-              <a:lnSpc>
-                <a:spcPct val="115000"/>
-              </a:lnSpc>
-              <a:buNone/>
-            </a:pPr>
-            <a:r>
-              <a:rPr lang="ja-JP" altLang="en-US" sz="1400" b="1" dirty="0">
-                <a:solidFill>
-                  <a:srgbClr val="002060"/>
-                </a:solidFill>
-                <a:latin typeface="メイリオ" panose="020B0604030504040204" pitchFamily="50" charset="-128"/>
-                <a:ea typeface="メイリオ" panose="020B0604030504040204" pitchFamily="50" charset="-128"/>
-                <a:cs typeface="メイリオ"/>
-              </a:rPr>
-              <a:t>月2回</a:t>
-            </a:r>
-            <a:endParaRPr lang="ja-JP" altLang="en-US" sz="1200" dirty="0">
-              <a:latin typeface="メイリオ"/>
-              <a:ea typeface="メイリオ"/>
-              <a:cs typeface="メイリオ"/>
-            </a:endParaRPr>
-          </a:p>
-        </p:txBody>
-      </p:sp>
-      <p:sp>
-        <p:nvSpPr>
-          <p:cNvPr id="10" name="矢印"/>
-          <p:cNvSpPr/>
-          <p:nvPr/>
-        </p:nvSpPr>
-        <p:spPr>
-          <a:xfrm>
-            <a:off x="7098030" y="1600200"/>
-            <a:ext cx="310896" cy="777240"/>
-          </a:xfrm>
-          <a:prstGeom prst="rect">
-            <a:avLst/>
-          </a:prstGeom>
-          <a:noFill/>
-          <a:ln>
-            <a:noFill/>
-          </a:ln>
-        </p:spPr>
-        <p:txBody>
-          <a:bodyPr wrap="square" lIns="0" tIns="0" rIns="0" bIns="0" rtlCol="0" anchor="ctr">
-            <a:noAutofit/>
-          </a:bodyPr>
-          <a:lstStyle/>
-          <a:p>
-            <a:pPr algn="ctr">
-              <a:buNone/>
-            </a:pPr>
-            <a:r>
-              <a:rPr lang="ja-JP" altLang="en-US" sz="1400" b="0" dirty="0">
-                <a:solidFill>
-                  <a:srgbClr val="002060"/>
-                </a:solidFill>
-                <a:latin typeface="メイリオ" panose="020B0604030504040204" pitchFamily="50" charset="-128"/>
-                <a:ea typeface="メイリオ" panose="020B0604030504040204" pitchFamily="50" charset="-128"/>
-                <a:cs typeface="メイリオ"/>
-              </a:rPr>
-              <a:t>▶</a:t>
-            </a:r>
-            <a:endParaRPr lang="ja-JP" altLang="en-US" sz="1200" dirty="0">
-              <a:latin typeface="メイリオ"/>
-              <a:ea typeface="メイリオ"/>
-              <a:cs typeface="メイリオ"/>
-            </a:endParaRPr>
-          </a:p>
-        </p:txBody>
-      </p:sp>
-      <p:sp>
-        <p:nvSpPr>
-          <p:cNvPr id="11" name="流れ4"/>
-          <p:cNvSpPr/>
-          <p:nvPr/>
-        </p:nvSpPr>
-        <p:spPr>
-          <a:xfrm>
-            <a:off x="7408926" y="1600200"/>
-            <a:ext cx="1991106" cy="777240"/>
-          </a:xfrm>
-          <a:prstGeom prst="rect">
-            <a:avLst/>
-          </a:prstGeom>
-          <a:solidFill>
-            <a:srgbClr val="002060"/>
-          </a:solidFill>
-          <a:ln>
-            <a:noFill/>
-          </a:ln>
-        </p:spPr>
-        <p:txBody>
-          <a:bodyPr wrap="square" lIns="54864" tIns="36576" rIns="54864" bIns="36576" rtlCol="0" anchor="ctr">
-            <a:noAutofit/>
-          </a:bodyPr>
-          <a:lstStyle/>
-          <a:p>
-            <a:pPr algn="ctr">
-              <a:lnSpc>
-                <a:spcPct val="115000"/>
-              </a:lnSpc>
-              <a:buNone/>
-            </a:pPr>
-            <a:r>
-              <a:rPr lang="ja-JP" altLang="en-US" sz="1400" b="1" dirty="0">
-                <a:solidFill>
-                  <a:srgbClr val="FFFFFF"/>
-                </a:solidFill>
-                <a:latin typeface="メイリオ" panose="020B0604030504040204" pitchFamily="50" charset="-128"/>
-                <a:ea typeface="メイリオ" panose="020B0604030504040204" pitchFamily="50" charset="-128"/>
-                <a:cs typeface="メイリオ"/>
-              </a:rPr>
-              <a:t>次のイベント期</a:t>
-            </a:r>
-            <a:endParaRPr lang="ja-JP" altLang="en-US" sz="1200" dirty="0">
-              <a:latin typeface="メイリオ"/>
-              <a:ea typeface="メイリオ"/>
-              <a:cs typeface="メイリオ"/>
-            </a:endParaRPr>
-          </a:p>
-          <a:p>
-            <a:pPr algn="ctr">
-              <a:lnSpc>
-                <a:spcPct val="115000"/>
-              </a:lnSpc>
-              <a:buNone/>
-            </a:pPr>
-            <a:r>
-              <a:rPr lang="ja-JP" altLang="en-US" sz="1400" b="1" dirty="0">
-                <a:solidFill>
-                  <a:srgbClr val="FFFFFF"/>
-                </a:solidFill>
-                <a:latin typeface="メイリオ" panose="020B0604030504040204" pitchFamily="50" charset="-128"/>
-                <a:ea typeface="メイリオ" panose="020B0604030504040204" pitchFamily="50" charset="-128"/>
-                <a:cs typeface="メイリオ"/>
-              </a:rPr>
-              <a:t>月4〜5回</a:t>
-            </a:r>
-            <a:endParaRPr lang="ja-JP" altLang="en-US" sz="1200" dirty="0">
-              <a:latin typeface="メイリオ"/>
-              <a:ea typeface="メイリオ"/>
-              <a:cs typeface="メイリオ"/>
-            </a:endParaRPr>
-          </a:p>
-        </p:txBody>
-      </p:sp>
-      <p:graphicFrame>
-        <p:nvGraphicFramePr>
-          <p:cNvPr id="12" name="配信の回数 11"/>
-          <p:cNvGraphicFramePr>
-            <a:graphicFrameLocks noGrp="1"/>
-          </p:cNvGraphicFramePr>
-          <p:nvPr/>
-        </p:nvGraphicFramePr>
-        <p:xfrm>
-          <a:off x="502920" y="2606040"/>
-          <a:ext cx="8897112" cy="3017520"/>
-        </p:xfrm>
-        <a:graphic>
-          <a:graphicData uri="http://schemas.openxmlformats.org/drawingml/2006/table">
-            <a:tbl>
-              <a:tblPr/>
-              <a:tblGrid>
-                <a:gridCol w="1463040"/>
-                <a:gridCol w="3717036"/>
-                <a:gridCol w="3717036"/>
-              </a:tblGrid>
-              <a:tr h="457200">
-                <a:tc>
-                  <a:txBody>
-                    <a:bodyPr/>
-                    <a:lstStyle/>
-                    <a:p>
-                      <a:pPr algn="ctr">
-                        <a:buNone/>
-                      </a:pPr>
-                      <a:endParaRPr lang="ja-JP" altLang="en-US" sz="1400" dirty="0">
-                        <a:latin typeface="メイリオ"/>
-                        <a:ea typeface="メイリオ"/>
-                        <a:cs typeface="メイリオ"/>
-                      </a:endParaRPr>
-                    </a:p>
-                  </a:txBody>
-                  <a:tcPr marL="73152" marR="73152" marT="27432" marB="27432" anchor="ctr">
-                    <a:lnL w="9525" cap="flat" cmpd="sng" algn="ctr">
-                      <a:solidFill>
-                        <a:srgbClr val="BFBFBF"/>
-                      </a:solidFill>
-                      <a:prstDash val="solid"/>
-                      <a:round/>
-                      <a:headEnd type="none" w="med" len="med"/>
-                      <a:tailEnd type="none" w="med" len="med"/>
-                    </a:lnL>
-                    <a:lnR w="9525" cap="flat" cmpd="sng" algn="ctr">
-                      <a:solidFill>
-                        <a:srgbClr val="BFBFBF"/>
-                      </a:solidFill>
-                      <a:prstDash val="solid"/>
-                      <a:round/>
-                      <a:headEnd type="none" w="med" len="med"/>
-                      <a:tailEnd type="none" w="med" len="med"/>
-                    </a:lnR>
-                    <a:lnT w="9525" cap="flat" cmpd="sng" algn="ctr">
-                      <a:solidFill>
-                        <a:srgbClr val="BFBFBF"/>
-                      </a:solidFill>
-                      <a:prstDash val="solid"/>
-                      <a:round/>
-                      <a:headEnd type="none" w="med" len="med"/>
-                      <a:tailEnd type="none" w="med" len="med"/>
-                    </a:lnT>
-                    <a:lnB w="9525" cap="flat" cmpd="sng" algn="ctr">
-                      <a:solidFill>
-                        <a:srgbClr val="BFBFBF"/>
-                      </a:solidFill>
-                      <a:prstDash val="solid"/>
-                      <a:round/>
-                      <a:headEnd type="none" w="med" len="med"/>
-                      <a:tailEnd type="none" w="med" len="med"/>
-                    </a:lnB>
-                    <a:solidFill>
-                      <a:srgbClr val="002060"/>
-                    </a:solidFill>
-                  </a:tcPr>
-                </a:tc>
-                <a:tc>
-                  <a:txBody>
-                    <a:bodyPr/>
-                    <a:lstStyle/>
-                    <a:p>
-                      <a:pPr algn="ctr">
-                        <a:buNone/>
-                      </a:pPr>
-                      <a:r>
-                        <a:rPr lang="ja-JP" altLang="en-US" sz="1400" b="1" dirty="0">
-                          <a:solidFill>
-                            <a:srgbClr val="FFFFFF"/>
-                          </a:solidFill>
-                          <a:latin typeface="メイリオ" panose="020B0604030504040204" pitchFamily="50" charset="-128"/>
-                          <a:ea typeface="メイリオ" panose="020B0604030504040204" pitchFamily="50" charset="-128"/>
-                          <a:cs typeface="メイリオ"/>
-                        </a:rPr>
-                        <a:t>平常期（イベントの無い月）</a:t>
-                      </a:r>
-                      <a:endParaRPr lang="ja-JP" altLang="en-US" sz="1400" dirty="0">
-                        <a:latin typeface="メイリオ"/>
-                        <a:ea typeface="メイリオ"/>
-                        <a:cs typeface="メイリオ"/>
-                      </a:endParaRPr>
-                    </a:p>
-                  </a:txBody>
-                  <a:tcPr marL="73152" marR="73152" marT="27432" marB="27432" anchor="ctr">
-                    <a:lnL w="9525" cap="flat" cmpd="sng" algn="ctr">
-                      <a:solidFill>
-                        <a:srgbClr val="BFBFBF"/>
-                      </a:solidFill>
-                      <a:prstDash val="solid"/>
-                      <a:round/>
-                      <a:headEnd type="none" w="med" len="med"/>
-                      <a:tailEnd type="none" w="med" len="med"/>
-                    </a:lnL>
-                    <a:lnR w="9525" cap="flat" cmpd="sng" algn="ctr">
-                      <a:solidFill>
-                        <a:srgbClr val="BFBFBF"/>
-                      </a:solidFill>
-                      <a:prstDash val="solid"/>
-                      <a:round/>
-                      <a:headEnd type="none" w="med" len="med"/>
-                      <a:tailEnd type="none" w="med" len="med"/>
-                    </a:lnR>
-                    <a:lnT w="9525" cap="flat" cmpd="sng" algn="ctr">
-                      <a:solidFill>
-                        <a:srgbClr val="BFBFBF"/>
-                      </a:solidFill>
-                      <a:prstDash val="solid"/>
-                      <a:round/>
-                      <a:headEnd type="none" w="med" len="med"/>
-                      <a:tailEnd type="none" w="med" len="med"/>
-                    </a:lnT>
-                    <a:lnB w="9525" cap="flat" cmpd="sng" algn="ctr">
-                      <a:solidFill>
-                        <a:srgbClr val="BFBFBF"/>
-                      </a:solidFill>
-                      <a:prstDash val="solid"/>
-                      <a:round/>
-                      <a:headEnd type="none" w="med" len="med"/>
-                      <a:tailEnd type="none" w="med" len="med"/>
-                    </a:lnB>
-                    <a:solidFill>
-                      <a:srgbClr val="002060"/>
-                    </a:solidFill>
-                  </a:tcPr>
-                </a:tc>
-                <a:tc>
-                  <a:txBody>
-                    <a:bodyPr/>
-                    <a:lstStyle/>
-                    <a:p>
-                      <a:pPr algn="ctr">
-                        <a:buNone/>
-                      </a:pPr>
-                      <a:r>
-                        <a:rPr lang="ja-JP" altLang="en-US" sz="1400" b="1" dirty="0">
-                          <a:solidFill>
-                            <a:srgbClr val="FFFFFF"/>
-                          </a:solidFill>
-                          <a:latin typeface="メイリオ" panose="020B0604030504040204" pitchFamily="50" charset="-128"/>
-                          <a:ea typeface="メイリオ" panose="020B0604030504040204" pitchFamily="50" charset="-128"/>
-                          <a:cs typeface="メイリオ"/>
-                        </a:rPr>
-                        <a:t>イベント期（イベントの前後）</a:t>
-                      </a:r>
-                      <a:endParaRPr lang="ja-JP" altLang="en-US" sz="1400" dirty="0">
-                        <a:latin typeface="メイリオ"/>
-                        <a:ea typeface="メイリオ"/>
-                        <a:cs typeface="メイリオ"/>
-                      </a:endParaRPr>
-                    </a:p>
-                  </a:txBody>
-                  <a:tcPr marL="73152" marR="73152" marT="27432" marB="27432" anchor="ctr">
-                    <a:lnL w="9525" cap="flat" cmpd="sng" algn="ctr">
-                      <a:solidFill>
-                        <a:srgbClr val="BFBFBF"/>
-                      </a:solidFill>
-                      <a:prstDash val="solid"/>
-                      <a:round/>
-                      <a:headEnd type="none" w="med" len="med"/>
-                      <a:tailEnd type="none" w="med" len="med"/>
-                    </a:lnL>
-                    <a:lnR w="9525" cap="flat" cmpd="sng" algn="ctr">
-                      <a:solidFill>
-                        <a:srgbClr val="BFBFBF"/>
-                      </a:solidFill>
-                      <a:prstDash val="solid"/>
-                      <a:round/>
-                      <a:headEnd type="none" w="med" len="med"/>
-                      <a:tailEnd type="none" w="med" len="med"/>
-                    </a:lnR>
-                    <a:lnT w="9525" cap="flat" cmpd="sng" algn="ctr">
-                      <a:solidFill>
-                        <a:srgbClr val="BFBFBF"/>
-                      </a:solidFill>
-                      <a:prstDash val="solid"/>
-                      <a:round/>
-                      <a:headEnd type="none" w="med" len="med"/>
-                      <a:tailEnd type="none" w="med" len="med"/>
-                    </a:lnT>
-                    <a:lnB w="9525" cap="flat" cmpd="sng" algn="ctr">
-                      <a:solidFill>
-                        <a:srgbClr val="BFBFBF"/>
-                      </a:solidFill>
-                      <a:prstDash val="solid"/>
-                      <a:round/>
-                      <a:headEnd type="none" w="med" len="med"/>
-                      <a:tailEnd type="none" w="med" len="med"/>
-                    </a:lnB>
-                    <a:solidFill>
-                      <a:srgbClr val="002060"/>
-                    </a:solidFill>
-                  </a:tcPr>
-                </a:tc>
-              </a:tr>
-              <a:tr h="731520">
-                <a:tc>
-                  <a:txBody>
-                    <a:bodyPr/>
-                    <a:lstStyle/>
-                    <a:p>
-                      <a:pPr algn="ctr">
-                        <a:buNone/>
-                      </a:pPr>
-                      <a:r>
-                        <a:rPr lang="ja-JP" altLang="en-US" sz="1400" b="1" dirty="0">
-                          <a:solidFill>
-                            <a:srgbClr val="002060"/>
-                          </a:solidFill>
-                          <a:latin typeface="メイリオ" panose="020B0604030504040204" pitchFamily="50" charset="-128"/>
-                          <a:ea typeface="メイリオ" panose="020B0604030504040204" pitchFamily="50" charset="-128"/>
-                          <a:cs typeface="メイリオ"/>
-                        </a:rPr>
-                        <a:t>回数</a:t>
-                      </a:r>
-                      <a:endParaRPr lang="ja-JP" altLang="en-US" sz="1400" dirty="0">
-                        <a:latin typeface="メイリオ"/>
-                        <a:ea typeface="メイリオ"/>
-                        <a:cs typeface="メイリオ"/>
-                      </a:endParaRPr>
-                    </a:p>
-                  </a:txBody>
-                  <a:tcPr marL="91440" marR="73152" marT="36576" marB="36576" anchor="ctr">
-                    <a:lnL w="9525" cap="flat" cmpd="sng" algn="ctr">
-                      <a:solidFill>
-                        <a:srgbClr val="BFBFBF"/>
-                      </a:solidFill>
-                      <a:prstDash val="solid"/>
-                      <a:round/>
-                      <a:headEnd type="none" w="med" len="med"/>
-                      <a:tailEnd type="none" w="med" len="med"/>
-                    </a:lnL>
-                    <a:lnR w="9525" cap="flat" cmpd="sng" algn="ctr">
-                      <a:solidFill>
-                        <a:srgbClr val="BFBFBF"/>
-                      </a:solidFill>
-                      <a:prstDash val="solid"/>
-                      <a:round/>
-                      <a:headEnd type="none" w="med" len="med"/>
-                      <a:tailEnd type="none" w="med" len="med"/>
-                    </a:lnR>
-                    <a:lnT w="9525" cap="flat" cmpd="sng" algn="ctr">
-                      <a:solidFill>
-                        <a:srgbClr val="BFBFBF"/>
-                      </a:solidFill>
-                      <a:prstDash val="solid"/>
-                      <a:round/>
-                      <a:headEnd type="none" w="med" len="med"/>
-                      <a:tailEnd type="none" w="med" len="med"/>
-                    </a:lnT>
-                    <a:lnB w="9525" cap="flat" cmpd="sng" algn="ctr">
-                      <a:solidFill>
-                        <a:srgbClr val="BFBFBF"/>
-                      </a:solidFill>
-                      <a:prstDash val="solid"/>
-                      <a:round/>
-                      <a:headEnd type="none" w="med" len="med"/>
-                      <a:tailEnd type="none" w="med" len="med"/>
-                    </a:lnB>
-                    <a:solidFill>
-                      <a:srgbClr val="DCE6F2"/>
-                    </a:solidFill>
-                  </a:tcPr>
-                </a:tc>
-                <a:tc>
-                  <a:txBody>
-                    <a:bodyPr/>
-                    <a:lstStyle/>
-                    <a:p>
-                      <a:pPr algn="ctr">
-                        <a:buNone/>
-                      </a:pPr>
-                      <a:r>
-                        <a:rPr lang="ja-JP" altLang="en-US" sz="1600" b="1" dirty="0">
-                          <a:solidFill>
-                            <a:srgbClr val="002060"/>
-                          </a:solidFill>
-                          <a:latin typeface="メイリオ" panose="020B0604030504040204" pitchFamily="50" charset="-128"/>
-                          <a:ea typeface="メイリオ" panose="020B0604030504040204" pitchFamily="50" charset="-128"/>
-                          <a:cs typeface="メイリオ"/>
-                        </a:rPr>
-                        <a:t>月2回</a:t>
-                      </a:r>
-                      <a:endParaRPr lang="ja-JP" altLang="en-US" sz="1600" dirty="0">
-                        <a:latin typeface="メイリオ"/>
-                        <a:ea typeface="メイリオ"/>
-                        <a:cs typeface="メイリオ"/>
-                      </a:endParaRPr>
-                    </a:p>
-                  </a:txBody>
-                  <a:tcPr marL="91440" marR="73152" marT="36576" marB="36576" anchor="ctr">
-                    <a:lnL w="9525" cap="flat" cmpd="sng" algn="ctr">
-                      <a:solidFill>
-                        <a:srgbClr val="BFBFBF"/>
-                      </a:solidFill>
-                      <a:prstDash val="solid"/>
-                      <a:round/>
-                      <a:headEnd type="none" w="med" len="med"/>
-                      <a:tailEnd type="none" w="med" len="med"/>
-                    </a:lnL>
-                    <a:lnR w="9525" cap="flat" cmpd="sng" algn="ctr">
-                      <a:solidFill>
-                        <a:srgbClr val="BFBFBF"/>
-                      </a:solidFill>
-                      <a:prstDash val="solid"/>
-                      <a:round/>
-                      <a:headEnd type="none" w="med" len="med"/>
-                      <a:tailEnd type="none" w="med" len="med"/>
-                    </a:lnR>
-                    <a:lnT w="9525" cap="flat" cmpd="sng" algn="ctr">
-                      <a:solidFill>
-                        <a:srgbClr val="BFBFBF"/>
-                      </a:solidFill>
-                      <a:prstDash val="solid"/>
-                      <a:round/>
-                      <a:headEnd type="none" w="med" len="med"/>
-                      <a:tailEnd type="none" w="med" len="med"/>
-                    </a:lnT>
-                    <a:lnB w="9525" cap="flat" cmpd="sng" algn="ctr">
-                      <a:solidFill>
-                        <a:srgbClr val="BFBFBF"/>
-                      </a:solidFill>
-                      <a:prstDash val="solid"/>
-                      <a:round/>
-                      <a:headEnd type="none" w="med" len="med"/>
-                      <a:tailEnd type="none" w="med" len="med"/>
-                    </a:lnB>
-                    <a:solidFill>
-                      <a:srgbClr val="FFFFFF"/>
-                    </a:solidFill>
-                  </a:tcPr>
-                </a:tc>
-                <a:tc>
-                  <a:txBody>
-                    <a:bodyPr/>
-                    <a:lstStyle/>
-                    <a:p>
-                      <a:pPr algn="ctr">
-                        <a:buNone/>
-                      </a:pPr>
-                      <a:r>
-                        <a:rPr lang="ja-JP" altLang="en-US" sz="1600" b="1" dirty="0">
-                          <a:solidFill>
-                            <a:srgbClr val="002060"/>
-                          </a:solidFill>
-                          <a:latin typeface="メイリオ" panose="020B0604030504040204" pitchFamily="50" charset="-128"/>
-                          <a:ea typeface="メイリオ" panose="020B0604030504040204" pitchFamily="50" charset="-128"/>
-                          <a:cs typeface="メイリオ"/>
-                        </a:rPr>
-                        <a:t>月4〜5回</a:t>
-                      </a:r>
-                      <a:endParaRPr lang="ja-JP" altLang="en-US" sz="1600" dirty="0">
-                        <a:latin typeface="メイリオ"/>
-                        <a:ea typeface="メイリオ"/>
-                        <a:cs typeface="メイリオ"/>
-                      </a:endParaRPr>
-                    </a:p>
-                  </a:txBody>
-                  <a:tcPr marL="91440" marR="73152" marT="36576" marB="36576" anchor="ctr">
-                    <a:lnL w="9525" cap="flat" cmpd="sng" algn="ctr">
-                      <a:solidFill>
-                        <a:srgbClr val="BFBFBF"/>
-                      </a:solidFill>
-                      <a:prstDash val="solid"/>
-                      <a:round/>
-                      <a:headEnd type="none" w="med" len="med"/>
-                      <a:tailEnd type="none" w="med" len="med"/>
-                    </a:lnL>
-                    <a:lnR w="9525" cap="flat" cmpd="sng" algn="ctr">
-                      <a:solidFill>
-                        <a:srgbClr val="BFBFBF"/>
-                      </a:solidFill>
-                      <a:prstDash val="solid"/>
-                      <a:round/>
-                      <a:headEnd type="none" w="med" len="med"/>
-                      <a:tailEnd type="none" w="med" len="med"/>
-                    </a:lnR>
-                    <a:lnT w="9525" cap="flat" cmpd="sng" algn="ctr">
-                      <a:solidFill>
-                        <a:srgbClr val="BFBFBF"/>
-                      </a:solidFill>
-                      <a:prstDash val="solid"/>
-                      <a:round/>
-                      <a:headEnd type="none" w="med" len="med"/>
-                      <a:tailEnd type="none" w="med" len="med"/>
-                    </a:lnT>
-                    <a:lnB w="9525" cap="flat" cmpd="sng" algn="ctr">
-                      <a:solidFill>
-                        <a:srgbClr val="BFBFBF"/>
-                      </a:solidFill>
-                      <a:prstDash val="solid"/>
-                      <a:round/>
-                      <a:headEnd type="none" w="med" len="med"/>
-                      <a:tailEnd type="none" w="med" len="med"/>
-                    </a:lnB>
-                    <a:solidFill>
-                      <a:srgbClr val="FFFFFF"/>
-                    </a:solidFill>
-                  </a:tcPr>
-                </a:tc>
-              </a:tr>
-              <a:tr h="914400">
-                <a:tc>
-                  <a:txBody>
-                    <a:bodyPr/>
-                    <a:lstStyle/>
-                    <a:p>
-                      <a:pPr algn="ctr">
-                        <a:buNone/>
-                      </a:pPr>
-                      <a:r>
-                        <a:rPr lang="ja-JP" altLang="en-US" sz="1400" b="1" dirty="0">
-                          <a:solidFill>
-                            <a:srgbClr val="002060"/>
-                          </a:solidFill>
-                          <a:latin typeface="メイリオ" panose="020B0604030504040204" pitchFamily="50" charset="-128"/>
-                          <a:ea typeface="メイリオ" panose="020B0604030504040204" pitchFamily="50" charset="-128"/>
-                          <a:cs typeface="メイリオ"/>
-                        </a:rPr>
-                        <a:t>内容</a:t>
-                      </a:r>
-                      <a:endParaRPr lang="ja-JP" altLang="en-US" sz="1400" dirty="0">
-                        <a:latin typeface="メイリオ"/>
-                        <a:ea typeface="メイリオ"/>
-                        <a:cs typeface="メイリオ"/>
-                      </a:endParaRPr>
-                    </a:p>
-                  </a:txBody>
-                  <a:tcPr marL="91440" marR="73152" marT="36576" marB="36576" anchor="ctr">
-                    <a:lnL w="9525" cap="flat" cmpd="sng" algn="ctr">
-                      <a:solidFill>
-                        <a:srgbClr val="BFBFBF"/>
-                      </a:solidFill>
-                      <a:prstDash val="solid"/>
-                      <a:round/>
-                      <a:headEnd type="none" w="med" len="med"/>
-                      <a:tailEnd type="none" w="med" len="med"/>
-                    </a:lnL>
-                    <a:lnR w="9525" cap="flat" cmpd="sng" algn="ctr">
-                      <a:solidFill>
-                        <a:srgbClr val="BFBFBF"/>
-                      </a:solidFill>
-                      <a:prstDash val="solid"/>
-                      <a:round/>
-                      <a:headEnd type="none" w="med" len="med"/>
-                      <a:tailEnd type="none" w="med" len="med"/>
-                    </a:lnR>
-                    <a:lnT w="9525" cap="flat" cmpd="sng" algn="ctr">
-                      <a:solidFill>
-                        <a:srgbClr val="BFBFBF"/>
-                      </a:solidFill>
-                      <a:prstDash val="solid"/>
-                      <a:round/>
-                      <a:headEnd type="none" w="med" len="med"/>
-                      <a:tailEnd type="none" w="med" len="med"/>
-                    </a:lnT>
-                    <a:lnB w="9525" cap="flat" cmpd="sng" algn="ctr">
-                      <a:solidFill>
-                        <a:srgbClr val="BFBFBF"/>
-                      </a:solidFill>
-                      <a:prstDash val="solid"/>
-                      <a:round/>
-                      <a:headEnd type="none" w="med" len="med"/>
-                      <a:tailEnd type="none" w="med" len="med"/>
-                    </a:lnB>
-                    <a:solidFill>
-                      <a:srgbClr val="DCE6F2"/>
-                    </a:solidFill>
-                  </a:tcPr>
-                </a:tc>
-                <a:tc>
-                  <a:txBody>
-                    <a:bodyPr/>
-                    <a:lstStyle/>
-                    <a:p>
-                      <a:pPr algn="l">
-                        <a:buNone/>
-                      </a:pPr>
-                      <a:r>
-                        <a:rPr lang="ja-JP" altLang="en-US" sz="1400" b="0" dirty="0">
-                          <a:solidFill>
-                            <a:srgbClr val="333333"/>
-                          </a:solidFill>
-                          <a:latin typeface="メイリオ" panose="020B0604030504040204" pitchFamily="50" charset="-128"/>
-                          <a:ea typeface="メイリオ" panose="020B0604030504040204" pitchFamily="50" charset="-128"/>
-                          <a:cs typeface="メイリオ"/>
-                        </a:rPr>
-                        <a:t>定期配信1回＋企画・動画1回</a:t>
-                      </a:r>
-                      <a:endParaRPr lang="ja-JP" altLang="en-US" sz="1400" dirty="0">
-                        <a:latin typeface="メイリオ"/>
-                        <a:ea typeface="メイリオ"/>
-                        <a:cs typeface="メイリオ"/>
-                      </a:endParaRPr>
-                    </a:p>
-                  </a:txBody>
-                  <a:tcPr marL="91440" marR="73152" marT="36576" marB="36576" anchor="ctr">
-                    <a:lnL w="9525" cap="flat" cmpd="sng" algn="ctr">
-                      <a:solidFill>
-                        <a:srgbClr val="BFBFBF"/>
-                      </a:solidFill>
-                      <a:prstDash val="solid"/>
-                      <a:round/>
-                      <a:headEnd type="none" w="med" len="med"/>
-                      <a:tailEnd type="none" w="med" len="med"/>
-                    </a:lnL>
-                    <a:lnR w="9525" cap="flat" cmpd="sng" algn="ctr">
-                      <a:solidFill>
-                        <a:srgbClr val="BFBFBF"/>
-                      </a:solidFill>
-                      <a:prstDash val="solid"/>
-                      <a:round/>
-                      <a:headEnd type="none" w="med" len="med"/>
-                      <a:tailEnd type="none" w="med" len="med"/>
-                    </a:lnR>
-                    <a:lnT w="9525" cap="flat" cmpd="sng" algn="ctr">
-                      <a:solidFill>
-                        <a:srgbClr val="BFBFBF"/>
-                      </a:solidFill>
-                      <a:prstDash val="solid"/>
-                      <a:round/>
-                      <a:headEnd type="none" w="med" len="med"/>
-                      <a:tailEnd type="none" w="med" len="med"/>
-                    </a:lnT>
-                    <a:lnB w="9525" cap="flat" cmpd="sng" algn="ctr">
-                      <a:solidFill>
-                        <a:srgbClr val="BFBFBF"/>
-                      </a:solidFill>
-                      <a:prstDash val="solid"/>
-                      <a:round/>
-                      <a:headEnd type="none" w="med" len="med"/>
-                      <a:tailEnd type="none" w="med" len="med"/>
-                    </a:lnB>
-                    <a:solidFill>
-                      <a:srgbClr val="FFFFFF"/>
-                    </a:solidFill>
-                  </a:tcPr>
-                </a:tc>
-                <a:tc>
-                  <a:txBody>
-                    <a:bodyPr/>
-                    <a:lstStyle/>
-                    <a:p>
-                      <a:pPr algn="l">
-                        <a:buNone/>
-                      </a:pPr>
-                      <a:r>
-                        <a:rPr lang="ja-JP" altLang="en-US" sz="1400" b="0" dirty="0">
-                          <a:solidFill>
-                            <a:srgbClr val="333333"/>
-                          </a:solidFill>
-                          <a:latin typeface="メイリオ" panose="020B0604030504040204" pitchFamily="50" charset="-128"/>
-                          <a:ea typeface="メイリオ" panose="020B0604030504040204" pitchFamily="50" charset="-128"/>
-                          <a:cs typeface="メイリオ"/>
-                        </a:rPr>
-                        <a:t>告知・リマインド・イベント直後のフォロー</a:t>
-                      </a:r>
-                      <a:endParaRPr lang="ja-JP" altLang="en-US" sz="1400" dirty="0">
-                        <a:latin typeface="メイリオ"/>
-                        <a:ea typeface="メイリオ"/>
-                        <a:cs typeface="メイリオ"/>
-                      </a:endParaRPr>
-                    </a:p>
-                  </a:txBody>
-                  <a:tcPr marL="91440" marR="73152" marT="36576" marB="36576" anchor="ctr">
-                    <a:lnL w="9525" cap="flat" cmpd="sng" algn="ctr">
-                      <a:solidFill>
-                        <a:srgbClr val="BFBFBF"/>
-                      </a:solidFill>
-                      <a:prstDash val="solid"/>
-                      <a:round/>
-                      <a:headEnd type="none" w="med" len="med"/>
-                      <a:tailEnd type="none" w="med" len="med"/>
-                    </a:lnL>
-                    <a:lnR w="9525" cap="flat" cmpd="sng" algn="ctr">
-                      <a:solidFill>
-                        <a:srgbClr val="BFBFBF"/>
-                      </a:solidFill>
-                      <a:prstDash val="solid"/>
-                      <a:round/>
-                      <a:headEnd type="none" w="med" len="med"/>
-                      <a:tailEnd type="none" w="med" len="med"/>
-                    </a:lnR>
-                    <a:lnT w="9525" cap="flat" cmpd="sng" algn="ctr">
-                      <a:solidFill>
-                        <a:srgbClr val="BFBFBF"/>
-                      </a:solidFill>
-                      <a:prstDash val="solid"/>
-                      <a:round/>
-                      <a:headEnd type="none" w="med" len="med"/>
-                      <a:tailEnd type="none" w="med" len="med"/>
-                    </a:lnT>
-                    <a:lnB w="9525" cap="flat" cmpd="sng" algn="ctr">
-                      <a:solidFill>
-                        <a:srgbClr val="BFBFBF"/>
-                      </a:solidFill>
-                      <a:prstDash val="solid"/>
-                      <a:round/>
-                      <a:headEnd type="none" w="med" len="med"/>
-                      <a:tailEnd type="none" w="med" len="med"/>
-                    </a:lnB>
-                    <a:solidFill>
-                      <a:srgbClr val="FFFFFF"/>
-                    </a:solidFill>
-                  </a:tcPr>
-                </a:tc>
-              </a:tr>
-              <a:tr h="914400">
-                <a:tc>
-                  <a:txBody>
-                    <a:bodyPr/>
-                    <a:lstStyle/>
-                    <a:p>
-                      <a:pPr algn="ctr">
-                        <a:buNone/>
-                      </a:pPr>
-                      <a:r>
-                        <a:rPr lang="ja-JP" altLang="en-US" sz="1400" b="1" dirty="0">
-                          <a:solidFill>
-                            <a:srgbClr val="002060"/>
-                          </a:solidFill>
-                          <a:latin typeface="メイリオ" panose="020B0604030504040204" pitchFamily="50" charset="-128"/>
-                          <a:ea typeface="メイリオ" panose="020B0604030504040204" pitchFamily="50" charset="-128"/>
-                          <a:cs typeface="メイリオ"/>
-                        </a:rPr>
-                        <a:t>ねらい</a:t>
-                      </a:r>
-                      <a:endParaRPr lang="ja-JP" altLang="en-US" sz="1400" dirty="0">
-                        <a:latin typeface="メイリオ"/>
-                        <a:ea typeface="メイリオ"/>
-                        <a:cs typeface="メイリオ"/>
-                      </a:endParaRPr>
-                    </a:p>
-                  </a:txBody>
-                  <a:tcPr marL="91440" marR="73152" marT="36576" marB="36576" anchor="ctr">
-                    <a:lnL w="9525" cap="flat" cmpd="sng" algn="ctr">
-                      <a:solidFill>
-                        <a:srgbClr val="BFBFBF"/>
-                      </a:solidFill>
-                      <a:prstDash val="solid"/>
-                      <a:round/>
-                      <a:headEnd type="none" w="med" len="med"/>
-                      <a:tailEnd type="none" w="med" len="med"/>
-                    </a:lnL>
-                    <a:lnR w="9525" cap="flat" cmpd="sng" algn="ctr">
-                      <a:solidFill>
-                        <a:srgbClr val="BFBFBF"/>
-                      </a:solidFill>
-                      <a:prstDash val="solid"/>
-                      <a:round/>
-                      <a:headEnd type="none" w="med" len="med"/>
-                      <a:tailEnd type="none" w="med" len="med"/>
-                    </a:lnR>
-                    <a:lnT w="9525" cap="flat" cmpd="sng" algn="ctr">
-                      <a:solidFill>
-                        <a:srgbClr val="BFBFBF"/>
-                      </a:solidFill>
-                      <a:prstDash val="solid"/>
-                      <a:round/>
-                      <a:headEnd type="none" w="med" len="med"/>
-                      <a:tailEnd type="none" w="med" len="med"/>
-                    </a:lnT>
-                    <a:lnB w="9525" cap="flat" cmpd="sng" algn="ctr">
-                      <a:solidFill>
-                        <a:srgbClr val="BFBFBF"/>
-                      </a:solidFill>
-                      <a:prstDash val="solid"/>
-                      <a:round/>
-                      <a:headEnd type="none" w="med" len="med"/>
-                      <a:tailEnd type="none" w="med" len="med"/>
-                    </a:lnB>
-                    <a:solidFill>
-                      <a:srgbClr val="DCE6F2"/>
-                    </a:solidFill>
-                  </a:tcPr>
-                </a:tc>
-                <a:tc>
-                  <a:txBody>
-                    <a:bodyPr/>
-                    <a:lstStyle/>
-                    <a:p>
-                      <a:pPr algn="l">
-                        <a:buNone/>
-                      </a:pPr>
-                      <a:r>
-                        <a:rPr lang="ja-JP" altLang="en-US" sz="1400" b="0" dirty="0">
-                          <a:solidFill>
-                            <a:srgbClr val="333333"/>
-                          </a:solidFill>
-                          <a:latin typeface="メイリオ" panose="020B0604030504040204" pitchFamily="50" charset="-128"/>
-                          <a:ea typeface="メイリオ" panose="020B0604030504040204" pitchFamily="50" charset="-128"/>
-                          <a:cs typeface="メイリオ"/>
-                        </a:rPr>
-                        <a:t>つながりを保ち、追える人数を減らさない</a:t>
-                      </a:r>
-                      <a:endParaRPr lang="ja-JP" altLang="en-US" sz="1400" dirty="0">
-                        <a:latin typeface="メイリオ"/>
-                        <a:ea typeface="メイリオ"/>
-                        <a:cs typeface="メイリオ"/>
-                      </a:endParaRPr>
-                    </a:p>
-                  </a:txBody>
-                  <a:tcPr marL="91440" marR="73152" marT="36576" marB="36576" anchor="ctr">
-                    <a:lnL w="9525" cap="flat" cmpd="sng" algn="ctr">
-                      <a:solidFill>
-                        <a:srgbClr val="BFBFBF"/>
-                      </a:solidFill>
-                      <a:prstDash val="solid"/>
-                      <a:round/>
-                      <a:headEnd type="none" w="med" len="med"/>
-                      <a:tailEnd type="none" w="med" len="med"/>
-                    </a:lnL>
-                    <a:lnR w="9525" cap="flat" cmpd="sng" algn="ctr">
-                      <a:solidFill>
-                        <a:srgbClr val="BFBFBF"/>
-                      </a:solidFill>
-                      <a:prstDash val="solid"/>
-                      <a:round/>
-                      <a:headEnd type="none" w="med" len="med"/>
-                      <a:tailEnd type="none" w="med" len="med"/>
-                    </a:lnR>
-                    <a:lnT w="9525" cap="flat" cmpd="sng" algn="ctr">
-                      <a:solidFill>
-                        <a:srgbClr val="BFBFBF"/>
-                      </a:solidFill>
-                      <a:prstDash val="solid"/>
-                      <a:round/>
-                      <a:headEnd type="none" w="med" len="med"/>
-                      <a:tailEnd type="none" w="med" len="med"/>
-                    </a:lnT>
-                    <a:lnB w="9525" cap="flat" cmpd="sng" algn="ctr">
-                      <a:solidFill>
-                        <a:srgbClr val="BFBFBF"/>
-                      </a:solidFill>
-                      <a:prstDash val="solid"/>
-                      <a:round/>
-                      <a:headEnd type="none" w="med" len="med"/>
-                      <a:tailEnd type="none" w="med" len="med"/>
-                    </a:lnB>
-                    <a:solidFill>
-                      <a:srgbClr val="FFFFFF"/>
-                    </a:solidFill>
-                  </a:tcPr>
-                </a:tc>
-                <a:tc>
-                  <a:txBody>
-                    <a:bodyPr/>
-                    <a:lstStyle/>
-                    <a:p>
-                      <a:pPr algn="l">
-                        <a:buNone/>
-                      </a:pPr>
-                      <a:r>
-                        <a:rPr lang="ja-JP" altLang="en-US" sz="1400" b="0" dirty="0">
-                          <a:solidFill>
-                            <a:srgbClr val="333333"/>
-                          </a:solidFill>
-                          <a:latin typeface="メイリオ" panose="020B0604030504040204" pitchFamily="50" charset="-128"/>
-                          <a:ea typeface="メイリオ" panose="020B0604030504040204" pitchFamily="50" charset="-128"/>
-                          <a:cs typeface="メイリオ"/>
-                        </a:rPr>
-                        <a:t>次のイベントの参加・入会へつなげる</a:t>
-                      </a:r>
-                      <a:endParaRPr lang="ja-JP" altLang="en-US" sz="1400" dirty="0">
-                        <a:latin typeface="メイリオ"/>
-                        <a:ea typeface="メイリオ"/>
-                        <a:cs typeface="メイリオ"/>
-                      </a:endParaRPr>
-                    </a:p>
-                  </a:txBody>
-                  <a:tcPr marL="91440" marR="73152" marT="36576" marB="36576" anchor="ctr">
-                    <a:lnL w="9525" cap="flat" cmpd="sng" algn="ctr">
-                      <a:solidFill>
-                        <a:srgbClr val="BFBFBF"/>
-                      </a:solidFill>
-                      <a:prstDash val="solid"/>
-                      <a:round/>
-                      <a:headEnd type="none" w="med" len="med"/>
-                      <a:tailEnd type="none" w="med" len="med"/>
-                    </a:lnL>
-                    <a:lnR w="9525" cap="flat" cmpd="sng" algn="ctr">
-                      <a:solidFill>
-                        <a:srgbClr val="BFBFBF"/>
-                      </a:solidFill>
-                      <a:prstDash val="solid"/>
-                      <a:round/>
-                      <a:headEnd type="none" w="med" len="med"/>
-                      <a:tailEnd type="none" w="med" len="med"/>
-                    </a:lnR>
-                    <a:lnT w="9525" cap="flat" cmpd="sng" algn="ctr">
-                      <a:solidFill>
-                        <a:srgbClr val="BFBFBF"/>
-                      </a:solidFill>
-                      <a:prstDash val="solid"/>
-                      <a:round/>
-                      <a:headEnd type="none" w="med" len="med"/>
-                      <a:tailEnd type="none" w="med" len="med"/>
-                    </a:lnT>
-                    <a:lnB w="9525" cap="flat" cmpd="sng" algn="ctr">
-                      <a:solidFill>
-                        <a:srgbClr val="BFBFBF"/>
-                      </a:solidFill>
-                      <a:prstDash val="solid"/>
-                      <a:round/>
-                      <a:headEnd type="none" w="med" len="med"/>
-                      <a:tailEnd type="none" w="med" len="med"/>
-                    </a:lnB>
-                    <a:solidFill>
-                      <a:srgbClr val="FFFFFF"/>
-                    </a:solidFill>
-                  </a:tcPr>
-                </a:tc>
-              </a:tr>
-            </a:tbl>
-          </a:graphicData>
-        </a:graphic>
-      </p:graphicFrame>
-      <p:sp>
-        <p:nvSpPr>
-          <p:cNvPr id="13" name="注記"/>
-          <p:cNvSpPr/>
-          <p:nvPr/>
-        </p:nvSpPr>
-        <p:spPr>
-          <a:xfrm>
-            <a:off x="502920" y="5897880"/>
-            <a:ext cx="8897112" cy="256032"/>
-          </a:xfrm>
-          <a:prstGeom prst="rect">
-            <a:avLst/>
-          </a:prstGeom>
-          <a:noFill/>
-          <a:ln>
-            <a:noFill/>
-          </a:ln>
-        </p:spPr>
-        <p:txBody>
-          <a:bodyPr wrap="square" lIns="0" tIns="0" rIns="0" bIns="0" rtlCol="0" anchor="t">
-            <a:noAutofit/>
-          </a:bodyPr>
-          <a:lstStyle/>
-          <a:p>
-            <a:pPr algn="l">
-              <a:buNone/>
-            </a:pPr>
-            <a:r>
-              <a:rPr lang="ja-JP" altLang="en-US" sz="900" b="0" dirty="0">
-                <a:solidFill>
-                  <a:srgbClr val="7F7F7F"/>
-                </a:solidFill>
-                <a:latin typeface="メイリオ" panose="020B0604030504040204" pitchFamily="50" charset="-128"/>
-                <a:ea typeface="メイリオ" panose="020B0604030504040204" pitchFamily="50" charset="-128"/>
-                <a:cs typeface="メイリオ"/>
-              </a:rPr>
-              <a:t>※イベントを年4回とした場合</a:t>
-            </a:r>
-            <a:endParaRPr lang="ja-JP" altLang="en-US" sz="1200" dirty="0">
-              <a:latin typeface="メイリオ"/>
-              <a:ea typeface="メイリオ"/>
-              <a:cs typeface="メイリオ"/>
-            </a:endParaRPr>
-          </a:p>
-        </p:txBody>
-      </p:sp>
-    </p:spTree>
-  </p:cSld>
-  <p:clrMapOvr>
-    <a:masterClrMapping/>
-  </p:clrMapOvr>
-</p:sld>
-</file>
-
-<file path=ppt/slides/slide73.xml><?xml version="1.0" encoding="utf-8"?>
-<p:sld xmlns:a="http://schemas.openxmlformats.org/drawingml/2006/main" xmlns:p="http://schemas.openxmlformats.org/presentationml/2006/main" xmlns:r="http://schemas.openxmlformats.org/officeDocument/2006/relationships">
-  <p:cSld>
-    <p:spTree>
-      <p:nvGrpSpPr>
-        <p:cNvPr id="1" name=""/>
-        <p:cNvGrpSpPr/>
-        <p:nvPr/>
-      </p:nvGrpSpPr>
-      <p:grpSpPr/>
-      <p:sp>
-        <p:nvSpPr>
-          <p:cNvPr id="4" name="Google Shape;752;p28">
-            <a:extLst>
-              <a:ext uri="{FF2B5EF4-FFF2-40B4-BE49-F238E27FC236}">
-                <a16:creationId xmlns:a16="http://schemas.microsoft.com/office/drawing/2014/main" id="{0D14D38F-F567-ACF2-CDEB-76004FDB5B51}"/>
-              </a:ext>
-            </a:extLst>
-          </p:cNvPr>
-          <p:cNvSpPr txBox="1"/>
-          <p:nvPr/>
-        </p:nvSpPr>
-        <p:spPr>
-          <a:xfrm>
-            <a:off x="548883" y="138137"/>
-            <a:ext cx="6276325" cy="338514"/>
-          </a:xfrm>
-          <a:prstGeom prst="rect">
-            <a:avLst/>
-          </a:prstGeom>
-          <a:noFill/>
-          <a:ln>
-            <a:noFill/>
-          </a:ln>
-        </p:spPr>
-        <p:txBody>
-          <a:bodyPr spcFirstLastPara="1" wrap="square" lIns="91425" tIns="45700" rIns="91425" bIns="45700" anchor="ctr" anchorCtr="0">
-            <a:spAutoFit/>
-          </a:bodyPr>
-          <a:lstStyle/>
-          <a:p>
-            <a:pPr lvl="0"/>
-            <a:r>
-              <a:rPr lang="ja-JP" altLang="en-US" sz="1600" b="1" dirty="0">
-                <a:solidFill>
-                  <a:srgbClr val="323366"/>
-                </a:solidFill>
-                <a:latin typeface="メイリオ" panose="020B0604030504040204" pitchFamily="50" charset="-128"/>
-                <a:ea typeface="メイリオ" panose="020B0604030504040204" pitchFamily="50" charset="-128"/>
-                <a:cs typeface="メイリオ"/>
-                <a:sym typeface="Meiryo"/>
-              </a:rPr>
-              <a:t>資料アジェンダ</a:t>
-            </a:r>
-          </a:p>
-        </p:txBody>
-      </p:sp>
-      <p:sp>
-        <p:nvSpPr>
-          <p:cNvPr id="2" name="正方形/長方形 1">
-            <a:extLst>
-              <a:ext uri="{FF2B5EF4-FFF2-40B4-BE49-F238E27FC236}">
-                <a16:creationId xmlns:a16="http://schemas.microsoft.com/office/drawing/2014/main" id="{636C1E2A-AC35-76CA-EBEE-CAD4F26CF45A}"/>
-              </a:ext>
-            </a:extLst>
-          </p:cNvPr>
-          <p:cNvSpPr/>
-          <p:nvPr/>
-        </p:nvSpPr>
-        <p:spPr>
-          <a:xfrm>
-            <a:off x="1460711" y="3038203"/>
-            <a:ext cx="6984604" cy="584775"/>
-          </a:xfrm>
-          <a:prstGeom prst="rect">
-            <a:avLst/>
-          </a:prstGeom>
-        </p:spPr>
-        <p:txBody>
-          <a:bodyPr wrap="none">
-            <a:spAutoFit/>
-          </a:bodyPr>
-          <a:lstStyle/>
-          <a:p>
-            <a:pPr algn="ctr"/>
-            <a:r>
-              <a:rPr lang="en-US" altLang="ja-JP" sz="3200" b="1" dirty="0">
-                <a:solidFill>
-                  <a:schemeClr val="tx1">
-                    <a:lumMod val="75000"/>
-                    <a:lumOff val="25000"/>
-                  </a:schemeClr>
-                </a:solidFill>
-                <a:latin typeface="メイリオ" panose="020B0604030504040204" pitchFamily="50" charset="-128"/>
-                <a:ea typeface="メイリオ" panose="020B0604030504040204" pitchFamily="50" charset="-128"/>
-                <a:cs typeface="メイリオ" panose="020B0604030504040204" pitchFamily="50" charset="-128"/>
-              </a:rPr>
-              <a:t>目標と費用</a:t>
-            </a:r>
-            <a:endParaRPr lang="en-US" altLang="ja-IS" sz="3200" b="1" dirty="0">
-              <a:solidFill>
-                <a:schemeClr val="tx1">
-                  <a:lumMod val="75000"/>
-                  <a:lumOff val="25000"/>
-                </a:schemeClr>
-              </a:solidFill>
-              <a:latin typeface="メイリオ" panose="020B0604030504040204" pitchFamily="50" charset="-128"/>
-              <a:ea typeface="メイリオ" panose="020B0604030504040204" pitchFamily="50" charset="-128"/>
-              <a:cs typeface="メイリオ" panose="020B0604030504040204" pitchFamily="50" charset="-128"/>
-            </a:endParaRPr>
-          </a:p>
-        </p:txBody>
-      </p:sp>
-    </p:spTree>
-  </p:cSld>
-  <p:clrMapOvr>
-    <a:masterClrMapping/>
-  </p:clrMapOvr>
-</p:sld>
-</file>
-
-<file path=ppt/slides/slide74.xml><?xml version="1.0" encoding="utf-8"?>
+<file path=ppt/slides/slide70.xml><?xml version="1.0" encoding="utf-8"?>
 <p:sld xmlns:a="http://schemas.openxmlformats.org/drawingml/2006/main" xmlns:p="http://schemas.openxmlformats.org/presentationml/2006/main" xmlns:r="http://schemas.openxmlformats.org/officeDocument/2006/relationships">
   <p:cSld>
     <p:spTree>
@@ -13395,7 +12426,7 @@
 </p:sld>
 </file>
 
-<file path=ppt/slides/slide75.xml><?xml version="1.0" encoding="utf-8"?>
+<file path=ppt/slides/slide71.xml><?xml version="1.0" encoding="utf-8"?>
 <p:sld xmlns:a="http://schemas.openxmlformats.org/drawingml/2006/main" xmlns:p="http://schemas.openxmlformats.org/presentationml/2006/main" xmlns:r="http://schemas.openxmlformats.org/officeDocument/2006/relationships">
   <p:cSld>
     <p:spTree>
@@ -13600,7 +12631,7 @@
 </p:sld>
 </file>
 
-<file path=ppt/slides/slide76.xml><?xml version="1.0" encoding="utf-8"?>
+<file path=ppt/slides/slide72.xml><?xml version="1.0" encoding="utf-8"?>
 <p:sld xmlns:a="http://schemas.openxmlformats.org/drawingml/2006/main" xmlns:p="http://schemas.openxmlformats.org/presentationml/2006/main" xmlns:r="http://schemas.openxmlformats.org/officeDocument/2006/relationships">
   <p:cSld>
     <p:spTree>
@@ -14787,7 +13818,7 @@
 </p:sld>
 </file>
 
-<file path=ppt/slides/slide77.xml><?xml version="1.0" encoding="utf-8"?>
+<file path=ppt/slides/slide73.xml><?xml version="1.0" encoding="utf-8"?>
 <p:sld xmlns:a="http://schemas.openxmlformats.org/drawingml/2006/main" xmlns:p="http://schemas.openxmlformats.org/presentationml/2006/main" xmlns:r="http://schemas.openxmlformats.org/officeDocument/2006/relationships">
   <p:cSld>
     <p:spTree>
@@ -16112,7 +15143,7 @@
 </p:sld>
 </file>
 
-<file path=ppt/slides/slide78.xml><?xml version="1.0" encoding="utf-8"?>
+<file path=ppt/slides/slide74.xml><?xml version="1.0" encoding="utf-8"?>
 <p:sld xmlns:a="http://schemas.openxmlformats.org/drawingml/2006/main" xmlns:p="http://schemas.openxmlformats.org/presentationml/2006/main" xmlns:r="http://schemas.openxmlformats.org/officeDocument/2006/relationships">
   <p:cSld>
     <p:spTree>

--- a/202610_株式会社すなおコンサルティング御中_LINE公式アカウント運用のご提案.pptx
+++ b/202610_株式会社すなおコンサルティング御中_LINE公式アカウント運用のご提案.pptx
@@ -3755,7 +3755,24 @@
                 <a:cs typeface="メイリオ"/>
                 <a:sym typeface="Meiryo"/>
               </a:rPr>
-              <a:t>広告で集めた方をLINEにため、次のイベント参加・入会（LTV）を最大化する</a:t>
+              <a:t>広告で集めた方をLINEにため、</a:t>
+            </a:r>
+            <a:endParaRPr lang="en-US" altLang="ja-JP" sz="1600" b="1" dirty="0">
+              <a:latin typeface="メイリオ" panose="020B0604030504040204" pitchFamily="50" charset="-128"/>
+              <a:ea typeface="メイリオ" panose="020B0604030504040204" pitchFamily="50" charset="-128"/>
+              <a:cs typeface="メイリオ"/>
+              <a:sym typeface="Meiryo"/>
+            </a:endParaRPr>
+          </a:p>
+          <a:p>
+            <a:r>
+              <a:rPr lang="en-US" altLang="ja-JP" sz="1600" b="1" dirty="0">
+                <a:latin typeface="メイリオ" panose="020B0604030504040204" pitchFamily="50" charset="-128"/>
+                <a:ea typeface="メイリオ" panose="020B0604030504040204" pitchFamily="50" charset="-128"/>
+                <a:cs typeface="メイリオ"/>
+                <a:sym typeface="Meiryo"/>
+              </a:rPr>
+              <a:t>次のイベント参加数・入会数を伸ばし、LTVを最大化する</a:t>
             </a:r>
             <a:endParaRPr lang="en-US" altLang="ja-JP" sz="1600" b="1" dirty="0">
               <a:latin typeface="メイリオ" panose="020B0604030504040204" pitchFamily="50" charset="-128"/>
@@ -5425,7 +5442,7 @@
                 <a:ea typeface="メイリオ" panose="020B0604030504040204" pitchFamily="50" charset="-128"/>
                 <a:cs typeface="メイリオ"/>
               </a:rPr>
-              <a:t>次のイベントでは、</a:t>
+              <a:t>イベントのたびに、</a:t>
             </a:r>
             <a:r>
               <a:rPr lang="ja-JP" altLang="en-US" sz="1600" b="1" dirty="0">
@@ -5436,7 +5453,7 @@
                 <a:ea typeface="メイリオ" panose="020B0604030504040204" pitchFamily="50" charset="-128"/>
                 <a:cs typeface="メイリオ"/>
               </a:rPr>
-              <a:t>また広告で集め直している</a:t>
+              <a:t>広告で一から集める形になっている</a:t>
             </a:r>
             <a:endParaRPr lang="ja-JP" altLang="en-US" sz="1200" dirty="0">
               <a:latin typeface="メイリオ"/>
@@ -14719,39 +14736,7 @@
                 <a:ea typeface="メイリオ" panose="020B0604030504040204" pitchFamily="50" charset="-128"/>
                 <a:cs typeface="メイリオ"/>
               </a:rPr>
-              <a:t>サイト</a:t>
-            </a:r>
-            <a:r>
-              <a:rPr lang="en-US" altLang="ja-JP" sz="2400" dirty="0">
-                <a:latin typeface="メイリオ" panose="020B0604030504040204" pitchFamily="50" charset="-128"/>
-                <a:ea typeface="メイリオ" panose="020B0604030504040204" pitchFamily="50" charset="-128"/>
-                <a:cs typeface="メイリオ"/>
-              </a:rPr>
-              <a:t>/LINE</a:t>
-            </a:r>
-            <a:r>
-              <a:rPr lang="ja-JP" altLang="en-US" sz="2400" dirty="0">
-                <a:latin typeface="メイリオ" panose="020B0604030504040204" pitchFamily="50" charset="-128"/>
-                <a:ea typeface="メイリオ" panose="020B0604030504040204" pitchFamily="50" charset="-128"/>
-                <a:cs typeface="メイリオ"/>
-              </a:rPr>
-              <a:t>上への実装については、約</a:t>
-            </a:r>
-            <a:r>
-              <a:rPr lang="en-US" altLang="ja-JP" sz="2400" dirty="0">
-                <a:latin typeface="メイリオ" panose="020B0604030504040204" pitchFamily="50" charset="-128"/>
-                <a:ea typeface="メイリオ" panose="020B0604030504040204" pitchFamily="50" charset="-128"/>
-                <a:cs typeface="メイリオ"/>
-              </a:rPr>
-              <a:t>1</a:t>
-            </a:r>
-            <a:r>
-              <a:rPr lang="ja-JP" altLang="en-US" sz="2400" dirty="0">
-                <a:latin typeface="メイリオ" panose="020B0604030504040204" pitchFamily="50" charset="-128"/>
-                <a:ea typeface="メイリオ" panose="020B0604030504040204" pitchFamily="50" charset="-128"/>
-                <a:cs typeface="メイリオ"/>
-              </a:rPr>
-              <a:t>か月程度を頂き進行。</a:t>
+              <a:t>サイト・LINEへの実装は、初期設計が整い次第、順次進行</a:t>
             </a:r>
             <a:endParaRPr lang="ja-JP" altLang="en-US" sz="2400" dirty="0">
               <a:latin typeface="メイリオ"/>
@@ -14796,105 +14781,6 @@
               </a:rPr>
               <a:t>※貴社の作業・確認にかかる時間により、前後する可能性あり</a:t>
             </a:r>
-          </a:p>
-        </p:txBody>
-      </p:sp>
-      <p:cxnSp>
-        <p:nvCxnSpPr>
-          <p:cNvPr id="21" name="直線矢印コネクタ 20"/>
-          <p:cNvCxnSpPr/>
-          <p:nvPr/>
-        </p:nvCxnSpPr>
-        <p:spPr>
-          <a:xfrm>
-            <a:off x="6985106" y="2256762"/>
-            <a:ext cx="0" cy="3086100"/>
-          </a:xfrm>
-          <a:prstGeom prst="straightConnector1">
-            <a:avLst/>
-          </a:prstGeom>
-          <a:ln w="38100">
-            <a:solidFill>
-              <a:schemeClr val="tx1">
-                <a:lumMod val="75000"/>
-                <a:lumOff val="25000"/>
-              </a:schemeClr>
-            </a:solidFill>
-            <a:prstDash val="sysDash"/>
-            <a:tailEnd type="triangle"/>
-          </a:ln>
-        </p:spPr>
-        <p:style>
-          <a:lnRef idx="1">
-            <a:schemeClr val="accent1"/>
-          </a:lnRef>
-          <a:fillRef idx="0">
-            <a:schemeClr val="accent1"/>
-          </a:fillRef>
-          <a:effectRef idx="0">
-            <a:schemeClr val="accent1"/>
-          </a:effectRef>
-          <a:fontRef idx="minor">
-            <a:schemeClr val="tx1"/>
-          </a:fontRef>
-        </p:style>
-      </p:cxnSp>
-      <p:sp>
-        <p:nvSpPr>
-          <p:cNvPr id="22" name="正方形/長方形 21"/>
-          <p:cNvSpPr/>
-          <p:nvPr/>
-        </p:nvSpPr>
-        <p:spPr>
-          <a:xfrm>
-            <a:off x="7042256" y="2130871"/>
-            <a:ext cx="742511" cy="276999"/>
-          </a:xfrm>
-          <a:prstGeom prst="rect">
-            <a:avLst/>
-          </a:prstGeom>
-          <a:solidFill>
-            <a:schemeClr val="accent1">
-              <a:lumMod val="20000"/>
-              <a:lumOff val="80000"/>
-            </a:schemeClr>
-          </a:solidFill>
-        </p:spPr>
-        <p:txBody>
-          <a:bodyPr wrap="none">
-            <a:spAutoFit/>
-          </a:bodyPr>
-          <a:lstStyle/>
-          <a:p>
-            <a:r>
-              <a:rPr lang="ja-JP" altLang="en-US" sz="1200" dirty="0">
-                <a:latin typeface="メイリオ" panose="020B0604030504040204" pitchFamily="50" charset="-128"/>
-                <a:ea typeface="メイリオ" panose="020B0604030504040204" pitchFamily="50" charset="-128"/>
-                <a:cs typeface="メイリオ"/>
-              </a:rPr>
-              <a:t>約</a:t>
-            </a:r>
-            <a:r>
-              <a:rPr lang="en-US" altLang="ja-JP" sz="1200" dirty="0">
-                <a:latin typeface="メイリオ" panose="020B0604030504040204" pitchFamily="50" charset="-128"/>
-                <a:ea typeface="メイリオ" panose="020B0604030504040204" pitchFamily="50" charset="-128"/>
-                <a:cs typeface="メイリオ"/>
-              </a:rPr>
-              <a:t>1</a:t>
-            </a:r>
-            <a:r>
-              <a:rPr lang="ja-JP" altLang="en-US" sz="1200" dirty="0">
-                <a:latin typeface="メイリオ" panose="020B0604030504040204" pitchFamily="50" charset="-128"/>
-                <a:ea typeface="メイリオ" panose="020B0604030504040204" pitchFamily="50" charset="-128"/>
-                <a:cs typeface="メイリオ"/>
-              </a:rPr>
-              <a:t>か月</a:t>
-            </a:r>
-            <a:endParaRPr lang="ja-JP" altLang="en-US" sz="1200" dirty="0">
-              <a:latin typeface="メイリオ"/>
-              <a:ea typeface="メイリオ"/>
-              <a:cs typeface="メイリオ"/>
-            </a:endParaRPr>
           </a:p>
         </p:txBody>
       </p:sp>

--- a/202610_株式会社すなおコンサルティング御中_LINE公式アカウント運用のご提案.pptx
+++ b/202610_株式会社すなおコンサルティング御中_LINE公式アカウント運用のご提案.pptx
@@ -5442,7 +5442,7 @@
                 <a:ea typeface="メイリオ" panose="020B0604030504040204" pitchFamily="50" charset="-128"/>
                 <a:cs typeface="メイリオ"/>
               </a:rPr>
-              <a:t>イベントのたびに、</a:t>
+              <a:t>集めた方を、次のイベントの集客に</a:t>
             </a:r>
             <a:r>
               <a:rPr lang="ja-JP" altLang="en-US" sz="1600" b="1" dirty="0">
@@ -5453,7 +5453,7 @@
                 <a:ea typeface="メイリオ" panose="020B0604030504040204" pitchFamily="50" charset="-128"/>
                 <a:cs typeface="メイリオ"/>
               </a:rPr>
-              <a:t>広告で一から集める形になっている</a:t>
+              <a:t>活かしきれていない</a:t>
             </a:r>
             <a:endParaRPr lang="ja-JP" altLang="en-US" sz="1200" dirty="0">
               <a:latin typeface="メイリオ"/>

--- a/202610_株式会社すなおコンサルティング御中_LINE公式アカウント運用のご提案.pptx
+++ b/202610_株式会社すなおコンサルティング御中_LINE公式アカウント運用のご提案.pptx
@@ -4544,7 +4544,7 @@
                 <a:ea typeface="メイリオ" panose="020B0604030504040204" pitchFamily="50" charset="-128"/>
                 <a:cs typeface="メイリオ"/>
               </a:rPr>
-              <a:t>平常期 月5〜10万円／イベント期 月30万円程度</a:t>
+              <a:t>費用は、3つのプランから選択可能</a:t>
             </a:r>
             <a:endParaRPr lang="ja-JP" altLang="en-US" sz="1200" dirty="0">
               <a:latin typeface="メイリオ"/>
@@ -8026,7 +8026,7 @@
                           <a:ea typeface="メイリオ" panose="020B0604030504040204" pitchFamily="50" charset="-128"/>
                           <a:cs typeface="メイリオ"/>
                         </a:rPr>
-                        <a:t>イベントの無い時期は月2回に抑える</a:t>
+                        <a:t>イベントの無い時期は、配信の回数を絞る</a:t>
                       </a:r>
                       <a:endParaRPr lang="ja-JP" altLang="en-US" sz="1400" dirty="0">
                         <a:latin typeface="メイリオ"/>
@@ -12784,7 +12784,7 @@
                 <a:cs typeface="メイリオ"/>
                 <a:sym typeface="Meiryo"/>
               </a:rPr>
-              <a:t>平常期 月5〜10万円、イベント期 月30万円程度</a:t>
+              <a:t>ご予算と運用の体制に合わせて、3つのプランから選択可能</a:t>
             </a:r>
             <a:endParaRPr lang="en-US" altLang="ja-JP" sz="1600" b="1" dirty="0">
               <a:latin typeface="メイリオ" panose="020B0604030504040204" pitchFamily="50" charset="-128"/>
@@ -12805,18 +12805,19 @@
         </p:nvGraphicFramePr>
         <p:xfrm>
           <a:off x="502920" y="1600200"/>
-          <a:ext cx="8897112" cy="3474720"/>
+          <a:ext cx="8897112" cy="3200400"/>
         </p:xfrm>
         <a:graphic>
           <a:graphicData uri="http://schemas.openxmlformats.org/drawingml/2006/table">
             <a:tbl>
               <a:tblPr/>
               <a:tblGrid>
-                <a:gridCol w="2103120"/>
-                <a:gridCol w="2377440"/>
-                <a:gridCol w="4416552"/>
+                <a:gridCol w="1463040"/>
+                <a:gridCol w="2478024"/>
+                <a:gridCol w="2478024"/>
+                <a:gridCol w="2478024"/>
               </a:tblGrid>
-              <a:tr h="457200">
+              <a:tr h="594360">
                 <a:tc>
                   <a:txBody>
                     <a:bodyPr/>
@@ -12825,17 +12826,6 @@
                       <a:pPr algn="ctr">
                         <a:buNone/>
                       </a:pPr>
-                      <a:r>
-                        <a:rPr lang="ja-JP" altLang="en-US" sz="1400" b="1" dirty="0">
-                          <a:solidFill>
-                            <a:srgbClr val="FFFFFF"/>
-                          </a:solidFill>
-                          <a:latin typeface="メイリオ" panose="020B0604030504040204" pitchFamily="50" charset="-128"/>
-                          <a:ea typeface="メイリオ" panose="020B0604030504040204" pitchFamily="50" charset="-128"/>
-                          <a:cs typeface="メイリオ"/>
-                        </a:rPr>
-                        <a:t>区分</a:t>
-                      </a:r>
                       <a:endParaRPr lang="ja-JP" altLang="en-US" sz="1400" dirty="0">
                         <a:latin typeface="メイリオ"/>
                         <a:ea typeface="メイリオ"/>
@@ -12902,7 +12892,28 @@
                           <a:ea typeface="メイリオ" panose="020B0604030504040204" pitchFamily="50" charset="-128"/>
                           <a:cs typeface="メイリオ"/>
                         </a:rPr>
-                        <a:t>月額</a:t>
+                        <a:t>プラン①</a:t>
+                      </a:r>
+                      <a:br>
+                        <a:rPr lang="ja-JP" altLang="en-US" sz="1400" b="1" dirty="0">
+                          <a:solidFill>
+                            <a:srgbClr val="FFFFFF"/>
+                          </a:solidFill>
+                          <a:latin typeface="メイリオ" panose="020B0604030504040204" pitchFamily="50" charset="-128"/>
+                          <a:ea typeface="メイリオ" panose="020B0604030504040204" pitchFamily="50" charset="-128"/>
+                          <a:cs typeface="メイリオ"/>
+                        </a:rPr>
+                      </a:br>
+                      <a:r>
+                        <a:rPr lang="ja-JP" altLang="en-US" sz="1400" b="1" dirty="0">
+                          <a:solidFill>
+                            <a:srgbClr val="FFFFFF"/>
+                          </a:solidFill>
+                          <a:latin typeface="メイリオ" panose="020B0604030504040204" pitchFamily="50" charset="-128"/>
+                          <a:ea typeface="メイリオ" panose="020B0604030504040204" pitchFamily="50" charset="-128"/>
+                          <a:cs typeface="メイリオ"/>
+                        </a:rPr>
+                        <a:t>初期設計のみ</a:t>
                       </a:r>
                       <a:endParaRPr lang="ja-JP" altLang="en-US" sz="1400" dirty="0">
                         <a:latin typeface="メイリオ"/>
@@ -12970,7 +12981,28 @@
                           <a:ea typeface="メイリオ" panose="020B0604030504040204" pitchFamily="50" charset="-128"/>
                           <a:cs typeface="メイリオ"/>
                         </a:rPr>
-                        <a:t>内容</a:t>
+                        <a:t>プラン②</a:t>
+                      </a:r>
+                      <a:br>
+                        <a:rPr lang="ja-JP" altLang="en-US" sz="1400" b="1" dirty="0">
+                          <a:solidFill>
+                            <a:srgbClr val="FFFFFF"/>
+                          </a:solidFill>
+                          <a:latin typeface="メイリオ" panose="020B0604030504040204" pitchFamily="50" charset="-128"/>
+                          <a:ea typeface="メイリオ" panose="020B0604030504040204" pitchFamily="50" charset="-128"/>
+                          <a:cs typeface="メイリオ"/>
+                        </a:rPr>
+                      </a:br>
+                      <a:r>
+                        <a:rPr lang="ja-JP" altLang="en-US" sz="1400" b="1" dirty="0">
+                          <a:solidFill>
+                            <a:srgbClr val="FFFFFF"/>
+                          </a:solidFill>
+                          <a:latin typeface="メイリオ" panose="020B0604030504040204" pitchFamily="50" charset="-128"/>
+                          <a:ea typeface="メイリオ" panose="020B0604030504040204" pitchFamily="50" charset="-128"/>
+                          <a:cs typeface="メイリオ"/>
+                        </a:rPr>
+                        <a:t>イベントに合わせた運用</a:t>
                       </a:r>
                       <a:endParaRPr lang="ja-JP" altLang="en-US" sz="1400" dirty="0">
                         <a:latin typeface="メイリオ"/>
@@ -13021,8 +13053,750 @@
                     </a:solidFill>
                   </a:tcPr>
                 </a:tc>
+                <a:tc>
+                  <a:txBody>
+                    <a:bodyPr/>
+                    <a:lstStyle/>
+                    <a:p>
+                      <a:pPr algn="ctr">
+                        <a:buNone/>
+                      </a:pPr>
+                      <a:r>
+                        <a:rPr lang="ja-JP" altLang="en-US" sz="1400" b="1" dirty="0">
+                          <a:solidFill>
+                            <a:srgbClr val="FFFFFF"/>
+                          </a:solidFill>
+                          <a:latin typeface="メイリオ" panose="020B0604030504040204" pitchFamily="50" charset="-128"/>
+                          <a:ea typeface="メイリオ" panose="020B0604030504040204" pitchFamily="50" charset="-128"/>
+                          <a:cs typeface="メイリオ"/>
+                        </a:rPr>
+                        <a:t>プラン③</a:t>
+                      </a:r>
+                      <a:br>
+                        <a:rPr lang="ja-JP" altLang="en-US" sz="1400" b="1" dirty="0">
+                          <a:solidFill>
+                            <a:srgbClr val="FFFFFF"/>
+                          </a:solidFill>
+                          <a:latin typeface="メイリオ" panose="020B0604030504040204" pitchFamily="50" charset="-128"/>
+                          <a:ea typeface="メイリオ" panose="020B0604030504040204" pitchFamily="50" charset="-128"/>
+                          <a:cs typeface="メイリオ"/>
+                        </a:rPr>
+                      </a:br>
+                      <a:r>
+                        <a:rPr lang="ja-JP" altLang="en-US" sz="1400" b="1" dirty="0">
+                          <a:solidFill>
+                            <a:srgbClr val="FFFFFF"/>
+                          </a:solidFill>
+                          <a:latin typeface="メイリオ" panose="020B0604030504040204" pitchFamily="50" charset="-128"/>
+                          <a:ea typeface="メイリオ" panose="020B0604030504040204" pitchFamily="50" charset="-128"/>
+                          <a:cs typeface="メイリオ"/>
+                        </a:rPr>
+                        <a:t>通年の運用・改善</a:t>
+                      </a:r>
+                      <a:endParaRPr lang="ja-JP" altLang="en-US" sz="1400" dirty="0">
+                        <a:latin typeface="メイリオ"/>
+                        <a:ea typeface="メイリオ"/>
+                        <a:cs typeface="メイリオ"/>
+                      </a:endParaRPr>
+                    </a:p>
+                  </a:txBody>
+                  <a:tcPr marL="73152" marR="73152" marT="27432" marB="27432" anchor="ctr">
+                    <a:lnL w="9525" cap="flat" cmpd="sng" algn="ctr">
+                      <a:solidFill>
+                        <a:srgbClr val="BFBFBF"/>
+                      </a:solidFill>
+                      <a:prstDash val="solid"/>
+                      <a:round/>
+                      <a:headEnd type="none" w="med" len="med"/>
+                      <a:tailEnd type="none" w="med" len="med"/>
+                    </a:lnL>
+                    <a:lnR w="9525" cap="flat" cmpd="sng" algn="ctr">
+                      <a:solidFill>
+                        <a:srgbClr val="BFBFBF"/>
+                      </a:solidFill>
+                      <a:prstDash val="solid"/>
+                      <a:round/>
+                      <a:headEnd type="none" w="med" len="med"/>
+                      <a:tailEnd type="none" w="med" len="med"/>
+                    </a:lnR>
+                    <a:lnT w="9525" cap="flat" cmpd="sng" algn="ctr">
+                      <a:solidFill>
+                        <a:srgbClr val="BFBFBF"/>
+                      </a:solidFill>
+                      <a:prstDash val="solid"/>
+                      <a:round/>
+                      <a:headEnd type="none" w="med" len="med"/>
+                      <a:tailEnd type="none" w="med" len="med"/>
+                    </a:lnT>
+                    <a:lnB w="9525" cap="flat" cmpd="sng" algn="ctr">
+                      <a:solidFill>
+                        <a:srgbClr val="BFBFBF"/>
+                      </a:solidFill>
+                      <a:prstDash val="solid"/>
+                      <a:round/>
+                      <a:headEnd type="none" w="med" len="med"/>
+                      <a:tailEnd type="none" w="med" len="med"/>
+                    </a:lnB>
+                    <a:solidFill>
+                      <a:srgbClr val="002060"/>
+                    </a:solidFill>
+                  </a:tcPr>
+                </a:tc>
               </a:tr>
-              <a:tr h="1005840">
+              <a:tr h="868680">
+                <a:tc>
+                  <a:txBody>
+                    <a:bodyPr/>
+                    <a:lstStyle/>
+                    <a:p>
+                      <a:pPr algn="ctr">
+                        <a:buNone/>
+                      </a:pPr>
+                      <a:r>
+                        <a:rPr lang="ja-JP" altLang="en-US" sz="1300" b="1" dirty="0">
+                          <a:solidFill>
+                            <a:srgbClr val="002060"/>
+                          </a:solidFill>
+                          <a:latin typeface="メイリオ" panose="020B0604030504040204" pitchFamily="50" charset="-128"/>
+                          <a:ea typeface="メイリオ" panose="020B0604030504040204" pitchFamily="50" charset="-128"/>
+                          <a:cs typeface="メイリオ"/>
+                        </a:rPr>
+                        <a:t>内容</a:t>
+                      </a:r>
+                      <a:endParaRPr lang="ja-JP" altLang="en-US" sz="1300" dirty="0">
+                        <a:latin typeface="メイリオ"/>
+                        <a:ea typeface="メイリオ"/>
+                        <a:cs typeface="メイリオ"/>
+                      </a:endParaRPr>
+                    </a:p>
+                  </a:txBody>
+                  <a:tcPr marL="91440" marR="73152" marT="36576" marB="36576" anchor="ctr">
+                    <a:lnL w="9525" cap="flat" cmpd="sng" algn="ctr">
+                      <a:solidFill>
+                        <a:srgbClr val="BFBFBF"/>
+                      </a:solidFill>
+                      <a:prstDash val="solid"/>
+                      <a:round/>
+                      <a:headEnd type="none" w="med" len="med"/>
+                      <a:tailEnd type="none" w="med" len="med"/>
+                    </a:lnL>
+                    <a:lnR w="9525" cap="flat" cmpd="sng" algn="ctr">
+                      <a:solidFill>
+                        <a:srgbClr val="BFBFBF"/>
+                      </a:solidFill>
+                      <a:prstDash val="solid"/>
+                      <a:round/>
+                      <a:headEnd type="none" w="med" len="med"/>
+                      <a:tailEnd type="none" w="med" len="med"/>
+                    </a:lnR>
+                    <a:lnT w="9525" cap="flat" cmpd="sng" algn="ctr">
+                      <a:solidFill>
+                        <a:srgbClr val="BFBFBF"/>
+                      </a:solidFill>
+                      <a:prstDash val="solid"/>
+                      <a:round/>
+                      <a:headEnd type="none" w="med" len="med"/>
+                      <a:tailEnd type="none" w="med" len="med"/>
+                    </a:lnT>
+                    <a:lnB w="9525" cap="flat" cmpd="sng" algn="ctr">
+                      <a:solidFill>
+                        <a:srgbClr val="BFBFBF"/>
+                      </a:solidFill>
+                      <a:prstDash val="solid"/>
+                      <a:round/>
+                      <a:headEnd type="none" w="med" len="med"/>
+                      <a:tailEnd type="none" w="med" len="med"/>
+                    </a:lnB>
+                    <a:solidFill>
+                      <a:srgbClr val="DCE6F2"/>
+                    </a:solidFill>
+                  </a:tcPr>
+                </a:tc>
+                <a:tc>
+                  <a:txBody>
+                    <a:bodyPr/>
+                    <a:lstStyle/>
+                    <a:p>
+                      <a:pPr algn="l">
+                        <a:buNone/>
+                      </a:pPr>
+                      <a:r>
+                        <a:rPr lang="ja-JP" altLang="en-US" sz="1250" b="0" dirty="0">
+                          <a:solidFill>
+                            <a:srgbClr val="333333"/>
+                          </a:solidFill>
+                          <a:latin typeface="メイリオ" panose="020B0604030504040204" pitchFamily="50" charset="-128"/>
+                          <a:ea typeface="メイリオ" panose="020B0604030504040204" pitchFamily="50" charset="-128"/>
+                          <a:cs typeface="メイリオ"/>
+                        </a:rPr>
+                        <a:t>入口と配信の仕組みを構築</a:t>
+                      </a:r>
+                      <a:br>
+                        <a:rPr lang="ja-JP" altLang="en-US" sz="1250" b="0" dirty="0">
+                          <a:solidFill>
+                            <a:srgbClr val="333333"/>
+                          </a:solidFill>
+                          <a:latin typeface="メイリオ" panose="020B0604030504040204" pitchFamily="50" charset="-128"/>
+                          <a:ea typeface="メイリオ" panose="020B0604030504040204" pitchFamily="50" charset="-128"/>
+                          <a:cs typeface="メイリオ"/>
+                        </a:rPr>
+                      </a:br>
+                      <a:r>
+                        <a:rPr lang="ja-JP" altLang="en-US" sz="1250" b="0" dirty="0">
+                          <a:solidFill>
+                            <a:srgbClr val="333333"/>
+                          </a:solidFill>
+                          <a:latin typeface="メイリオ" panose="020B0604030504040204" pitchFamily="50" charset="-128"/>
+                          <a:ea typeface="メイリオ" panose="020B0604030504040204" pitchFamily="50" charset="-128"/>
+                          <a:cs typeface="メイリオ"/>
+                        </a:rPr>
+                        <a:t>配信は貴社で運用</a:t>
+                      </a:r>
+                      <a:endParaRPr lang="ja-JP" altLang="en-US" sz="1250" dirty="0">
+                        <a:latin typeface="メイリオ"/>
+                        <a:ea typeface="メイリオ"/>
+                        <a:cs typeface="メイリオ"/>
+                      </a:endParaRPr>
+                    </a:p>
+                  </a:txBody>
+                  <a:tcPr marL="91440" marR="73152" marT="36576" marB="36576" anchor="ctr">
+                    <a:lnL w="9525" cap="flat" cmpd="sng" algn="ctr">
+                      <a:solidFill>
+                        <a:srgbClr val="BFBFBF"/>
+                      </a:solidFill>
+                      <a:prstDash val="solid"/>
+                      <a:round/>
+                      <a:headEnd type="none" w="med" len="med"/>
+                      <a:tailEnd type="none" w="med" len="med"/>
+                    </a:lnL>
+                    <a:lnR w="9525" cap="flat" cmpd="sng" algn="ctr">
+                      <a:solidFill>
+                        <a:srgbClr val="BFBFBF"/>
+                      </a:solidFill>
+                      <a:prstDash val="solid"/>
+                      <a:round/>
+                      <a:headEnd type="none" w="med" len="med"/>
+                      <a:tailEnd type="none" w="med" len="med"/>
+                    </a:lnR>
+                    <a:lnT w="9525" cap="flat" cmpd="sng" algn="ctr">
+                      <a:solidFill>
+                        <a:srgbClr val="BFBFBF"/>
+                      </a:solidFill>
+                      <a:prstDash val="solid"/>
+                      <a:round/>
+                      <a:headEnd type="none" w="med" len="med"/>
+                      <a:tailEnd type="none" w="med" len="med"/>
+                    </a:lnT>
+                    <a:lnB w="9525" cap="flat" cmpd="sng" algn="ctr">
+                      <a:solidFill>
+                        <a:srgbClr val="BFBFBF"/>
+                      </a:solidFill>
+                      <a:prstDash val="solid"/>
+                      <a:round/>
+                      <a:headEnd type="none" w="med" len="med"/>
+                      <a:tailEnd type="none" w="med" len="med"/>
+                    </a:lnB>
+                    <a:solidFill>
+                      <a:srgbClr val="FFFFFF"/>
+                    </a:solidFill>
+                  </a:tcPr>
+                </a:tc>
+                <a:tc>
+                  <a:txBody>
+                    <a:bodyPr/>
+                    <a:lstStyle/>
+                    <a:p>
+                      <a:pPr algn="l">
+                        <a:buNone/>
+                      </a:pPr>
+                      <a:r>
+                        <a:rPr lang="ja-JP" altLang="en-US" sz="1250" b="0" dirty="0">
+                          <a:solidFill>
+                            <a:srgbClr val="333333"/>
+                          </a:solidFill>
+                          <a:latin typeface="メイリオ" panose="020B0604030504040204" pitchFamily="50" charset="-128"/>
+                          <a:ea typeface="メイリオ" panose="020B0604030504040204" pitchFamily="50" charset="-128"/>
+                          <a:cs typeface="メイリオ"/>
+                        </a:rPr>
+                        <a:t>弊社で配信</a:t>
+                      </a:r>
+                      <a:br>
+                        <a:rPr lang="ja-JP" altLang="en-US" sz="1250" b="0" dirty="0">
+                          <a:solidFill>
+                            <a:srgbClr val="333333"/>
+                          </a:solidFill>
+                          <a:latin typeface="メイリオ" panose="020B0604030504040204" pitchFamily="50" charset="-128"/>
+                          <a:ea typeface="メイリオ" panose="020B0604030504040204" pitchFamily="50" charset="-128"/>
+                          <a:cs typeface="メイリオ"/>
+                        </a:rPr>
+                      </a:br>
+                      <a:r>
+                        <a:rPr lang="ja-JP" altLang="en-US" sz="1250" b="0" dirty="0">
+                          <a:solidFill>
+                            <a:srgbClr val="333333"/>
+                          </a:solidFill>
+                          <a:latin typeface="メイリオ" panose="020B0604030504040204" pitchFamily="50" charset="-128"/>
+                          <a:ea typeface="メイリオ" panose="020B0604030504040204" pitchFamily="50" charset="-128"/>
+                          <a:cs typeface="メイリオ"/>
+                        </a:rPr>
+                        <a:t>平常期 月2回</a:t>
+                      </a:r>
+                      <a:br>
+                        <a:rPr lang="ja-JP" altLang="en-US" sz="1250" b="0" dirty="0">
+                          <a:solidFill>
+                            <a:srgbClr val="333333"/>
+                          </a:solidFill>
+                          <a:latin typeface="メイリオ" panose="020B0604030504040204" pitchFamily="50" charset="-128"/>
+                          <a:ea typeface="メイリオ" panose="020B0604030504040204" pitchFamily="50" charset="-128"/>
+                          <a:cs typeface="メイリオ"/>
+                        </a:rPr>
+                      </a:br>
+                      <a:r>
+                        <a:rPr lang="ja-JP" altLang="en-US" sz="1250" b="0" dirty="0">
+                          <a:solidFill>
+                            <a:srgbClr val="333333"/>
+                          </a:solidFill>
+                          <a:latin typeface="メイリオ" panose="020B0604030504040204" pitchFamily="50" charset="-128"/>
+                          <a:ea typeface="メイリオ" panose="020B0604030504040204" pitchFamily="50" charset="-128"/>
+                          <a:cs typeface="メイリオ"/>
+                        </a:rPr>
+                        <a:t>イベント期 月4〜5回</a:t>
+                      </a:r>
+                      <a:endParaRPr lang="ja-JP" altLang="en-US" sz="1250" dirty="0">
+                        <a:latin typeface="メイリオ"/>
+                        <a:ea typeface="メイリオ"/>
+                        <a:cs typeface="メイリオ"/>
+                      </a:endParaRPr>
+                    </a:p>
+                  </a:txBody>
+                  <a:tcPr marL="91440" marR="73152" marT="36576" marB="36576" anchor="ctr">
+                    <a:lnL w="9525" cap="flat" cmpd="sng" algn="ctr">
+                      <a:solidFill>
+                        <a:srgbClr val="BFBFBF"/>
+                      </a:solidFill>
+                      <a:prstDash val="solid"/>
+                      <a:round/>
+                      <a:headEnd type="none" w="med" len="med"/>
+                      <a:tailEnd type="none" w="med" len="med"/>
+                    </a:lnL>
+                    <a:lnR w="9525" cap="flat" cmpd="sng" algn="ctr">
+                      <a:solidFill>
+                        <a:srgbClr val="BFBFBF"/>
+                      </a:solidFill>
+                      <a:prstDash val="solid"/>
+                      <a:round/>
+                      <a:headEnd type="none" w="med" len="med"/>
+                      <a:tailEnd type="none" w="med" len="med"/>
+                    </a:lnR>
+                    <a:lnT w="9525" cap="flat" cmpd="sng" algn="ctr">
+                      <a:solidFill>
+                        <a:srgbClr val="BFBFBF"/>
+                      </a:solidFill>
+                      <a:prstDash val="solid"/>
+                      <a:round/>
+                      <a:headEnd type="none" w="med" len="med"/>
+                      <a:tailEnd type="none" w="med" len="med"/>
+                    </a:lnT>
+                    <a:lnB w="9525" cap="flat" cmpd="sng" algn="ctr">
+                      <a:solidFill>
+                        <a:srgbClr val="BFBFBF"/>
+                      </a:solidFill>
+                      <a:prstDash val="solid"/>
+                      <a:round/>
+                      <a:headEnd type="none" w="med" len="med"/>
+                      <a:tailEnd type="none" w="med" len="med"/>
+                    </a:lnB>
+                    <a:solidFill>
+                      <a:srgbClr val="FFFFFF"/>
+                    </a:solidFill>
+                  </a:tcPr>
+                </a:tc>
+                <a:tc>
+                  <a:txBody>
+                    <a:bodyPr/>
+                    <a:lstStyle/>
+                    <a:p>
+                      <a:pPr algn="l">
+                        <a:buNone/>
+                      </a:pPr>
+                      <a:r>
+                        <a:rPr lang="ja-JP" altLang="en-US" sz="1250" b="0" dirty="0">
+                          <a:solidFill>
+                            <a:srgbClr val="333333"/>
+                          </a:solidFill>
+                          <a:latin typeface="メイリオ" panose="020B0604030504040204" pitchFamily="50" charset="-128"/>
+                          <a:ea typeface="メイリオ" panose="020B0604030504040204" pitchFamily="50" charset="-128"/>
+                          <a:cs typeface="メイリオ"/>
+                        </a:rPr>
+                        <a:t>弊社で配信＋レポート・定例会</a:t>
+                      </a:r>
+                      <a:br>
+                        <a:rPr lang="ja-JP" altLang="en-US" sz="1250" b="0" dirty="0">
+                          <a:solidFill>
+                            <a:srgbClr val="333333"/>
+                          </a:solidFill>
+                          <a:latin typeface="メイリオ" panose="020B0604030504040204" pitchFamily="50" charset="-128"/>
+                          <a:ea typeface="メイリオ" panose="020B0604030504040204" pitchFamily="50" charset="-128"/>
+                          <a:cs typeface="メイリオ"/>
+                        </a:rPr>
+                      </a:br>
+                      <a:r>
+                        <a:rPr lang="ja-JP" altLang="en-US" sz="1250" b="0" dirty="0">
+                          <a:solidFill>
+                            <a:srgbClr val="333333"/>
+                          </a:solidFill>
+                          <a:latin typeface="メイリオ" panose="020B0604030504040204" pitchFamily="50" charset="-128"/>
+                          <a:ea typeface="メイリオ" panose="020B0604030504040204" pitchFamily="50" charset="-128"/>
+                          <a:cs typeface="メイリオ"/>
+                        </a:rPr>
+                        <a:t>平常期 月3回</a:t>
+                      </a:r>
+                      <a:br>
+                        <a:rPr lang="ja-JP" altLang="en-US" sz="1250" b="0" dirty="0">
+                          <a:solidFill>
+                            <a:srgbClr val="333333"/>
+                          </a:solidFill>
+                          <a:latin typeface="メイリオ" panose="020B0604030504040204" pitchFamily="50" charset="-128"/>
+                          <a:ea typeface="メイリオ" panose="020B0604030504040204" pitchFamily="50" charset="-128"/>
+                          <a:cs typeface="メイリオ"/>
+                        </a:rPr>
+                      </a:br>
+                      <a:r>
+                        <a:rPr lang="ja-JP" altLang="en-US" sz="1250" b="0" dirty="0">
+                          <a:solidFill>
+                            <a:srgbClr val="333333"/>
+                          </a:solidFill>
+                          <a:latin typeface="メイリオ" panose="020B0604030504040204" pitchFamily="50" charset="-128"/>
+                          <a:ea typeface="メイリオ" panose="020B0604030504040204" pitchFamily="50" charset="-128"/>
+                          <a:cs typeface="メイリオ"/>
+                        </a:rPr>
+                        <a:t>イベント期 月5回</a:t>
+                      </a:r>
+                      <a:endParaRPr lang="ja-JP" altLang="en-US" sz="1250" dirty="0">
+                        <a:latin typeface="メイリオ"/>
+                        <a:ea typeface="メイリオ"/>
+                        <a:cs typeface="メイリオ"/>
+                      </a:endParaRPr>
+                    </a:p>
+                  </a:txBody>
+                  <a:tcPr marL="91440" marR="73152" marT="36576" marB="36576" anchor="ctr">
+                    <a:lnL w="9525" cap="flat" cmpd="sng" algn="ctr">
+                      <a:solidFill>
+                        <a:srgbClr val="BFBFBF"/>
+                      </a:solidFill>
+                      <a:prstDash val="solid"/>
+                      <a:round/>
+                      <a:headEnd type="none" w="med" len="med"/>
+                      <a:tailEnd type="none" w="med" len="med"/>
+                    </a:lnL>
+                    <a:lnR w="9525" cap="flat" cmpd="sng" algn="ctr">
+                      <a:solidFill>
+                        <a:srgbClr val="BFBFBF"/>
+                      </a:solidFill>
+                      <a:prstDash val="solid"/>
+                      <a:round/>
+                      <a:headEnd type="none" w="med" len="med"/>
+                      <a:tailEnd type="none" w="med" len="med"/>
+                    </a:lnR>
+                    <a:lnT w="9525" cap="flat" cmpd="sng" algn="ctr">
+                      <a:solidFill>
+                        <a:srgbClr val="BFBFBF"/>
+                      </a:solidFill>
+                      <a:prstDash val="solid"/>
+                      <a:round/>
+                      <a:headEnd type="none" w="med" len="med"/>
+                      <a:tailEnd type="none" w="med" len="med"/>
+                    </a:lnT>
+                    <a:lnB w="9525" cap="flat" cmpd="sng" algn="ctr">
+                      <a:solidFill>
+                        <a:srgbClr val="BFBFBF"/>
+                      </a:solidFill>
+                      <a:prstDash val="solid"/>
+                      <a:round/>
+                      <a:headEnd type="none" w="med" len="med"/>
+                      <a:tailEnd type="none" w="med" len="med"/>
+                    </a:lnB>
+                    <a:solidFill>
+                      <a:srgbClr val="FFFFFF"/>
+                    </a:solidFill>
+                  </a:tcPr>
+                </a:tc>
+              </a:tr>
+              <a:tr h="548640">
+                <a:tc>
+                  <a:txBody>
+                    <a:bodyPr/>
+                    <a:lstStyle/>
+                    <a:p>
+                      <a:pPr algn="ctr">
+                        <a:buNone/>
+                      </a:pPr>
+                      <a:r>
+                        <a:rPr lang="ja-JP" altLang="en-US" sz="1300" b="1" dirty="0">
+                          <a:solidFill>
+                            <a:srgbClr val="002060"/>
+                          </a:solidFill>
+                          <a:latin typeface="メイリオ" panose="020B0604030504040204" pitchFamily="50" charset="-128"/>
+                          <a:ea typeface="メイリオ" panose="020B0604030504040204" pitchFamily="50" charset="-128"/>
+                          <a:cs typeface="メイリオ"/>
+                        </a:rPr>
+                        <a:t>初期費用</a:t>
+                      </a:r>
+                      <a:endParaRPr lang="ja-JP" altLang="en-US" sz="1300" dirty="0">
+                        <a:latin typeface="メイリオ"/>
+                        <a:ea typeface="メイリオ"/>
+                        <a:cs typeface="メイリオ"/>
+                      </a:endParaRPr>
+                    </a:p>
+                  </a:txBody>
+                  <a:tcPr marL="91440" marR="73152" marT="36576" marB="36576" anchor="ctr">
+                    <a:lnL w="9525" cap="flat" cmpd="sng" algn="ctr">
+                      <a:solidFill>
+                        <a:srgbClr val="BFBFBF"/>
+                      </a:solidFill>
+                      <a:prstDash val="solid"/>
+                      <a:round/>
+                      <a:headEnd type="none" w="med" len="med"/>
+                      <a:tailEnd type="none" w="med" len="med"/>
+                    </a:lnL>
+                    <a:lnR w="9525" cap="flat" cmpd="sng" algn="ctr">
+                      <a:solidFill>
+                        <a:srgbClr val="BFBFBF"/>
+                      </a:solidFill>
+                      <a:prstDash val="solid"/>
+                      <a:round/>
+                      <a:headEnd type="none" w="med" len="med"/>
+                      <a:tailEnd type="none" w="med" len="med"/>
+                    </a:lnR>
+                    <a:lnT w="9525" cap="flat" cmpd="sng" algn="ctr">
+                      <a:solidFill>
+                        <a:srgbClr val="BFBFBF"/>
+                      </a:solidFill>
+                      <a:prstDash val="solid"/>
+                      <a:round/>
+                      <a:headEnd type="none" w="med" len="med"/>
+                      <a:tailEnd type="none" w="med" len="med"/>
+                    </a:lnT>
+                    <a:lnB w="9525" cap="flat" cmpd="sng" algn="ctr">
+                      <a:solidFill>
+                        <a:srgbClr val="BFBFBF"/>
+                      </a:solidFill>
+                      <a:prstDash val="solid"/>
+                      <a:round/>
+                      <a:headEnd type="none" w="med" len="med"/>
+                      <a:tailEnd type="none" w="med" len="med"/>
+                    </a:lnB>
+                    <a:solidFill>
+                      <a:srgbClr val="DCE6F2"/>
+                    </a:solidFill>
+                  </a:tcPr>
+                </a:tc>
+                <a:tc>
+                  <a:txBody>
+                    <a:bodyPr/>
+                    <a:lstStyle/>
+                    <a:p>
+                      <a:pPr algn="ctr">
+                        <a:buNone/>
+                      </a:pPr>
+                      <a:r>
+                        <a:rPr lang="ja-JP" altLang="en-US" sz="1700" b="1" dirty="0">
+                          <a:solidFill>
+                            <a:srgbClr val="002060"/>
+                          </a:solidFill>
+                          <a:latin typeface="メイリオ" panose="020B0604030504040204" pitchFamily="50" charset="-128"/>
+                          <a:ea typeface="メイリオ" panose="020B0604030504040204" pitchFamily="50" charset="-128"/>
+                          <a:cs typeface="メイリオ"/>
+                        </a:rPr>
+                        <a:t>10万円〜</a:t>
+                      </a:r>
+                      <a:endParaRPr lang="ja-JP" altLang="en-US" sz="1700" dirty="0">
+                        <a:latin typeface="メイリオ"/>
+                        <a:ea typeface="メイリオ"/>
+                        <a:cs typeface="メイリオ"/>
+                      </a:endParaRPr>
+                    </a:p>
+                  </a:txBody>
+                  <a:tcPr marL="91440" marR="73152" marT="36576" marB="36576" anchor="ctr">
+                    <a:lnL w="9525" cap="flat" cmpd="sng" algn="ctr">
+                      <a:solidFill>
+                        <a:srgbClr val="BFBFBF"/>
+                      </a:solidFill>
+                      <a:prstDash val="solid"/>
+                      <a:round/>
+                      <a:headEnd type="none" w="med" len="med"/>
+                      <a:tailEnd type="none" w="med" len="med"/>
+                    </a:lnL>
+                    <a:lnR w="9525" cap="flat" cmpd="sng" algn="ctr">
+                      <a:solidFill>
+                        <a:srgbClr val="BFBFBF"/>
+                      </a:solidFill>
+                      <a:prstDash val="solid"/>
+                      <a:round/>
+                      <a:headEnd type="none" w="med" len="med"/>
+                      <a:tailEnd type="none" w="med" len="med"/>
+                    </a:lnR>
+                    <a:lnT w="9525" cap="flat" cmpd="sng" algn="ctr">
+                      <a:solidFill>
+                        <a:srgbClr val="BFBFBF"/>
+                      </a:solidFill>
+                      <a:prstDash val="solid"/>
+                      <a:round/>
+                      <a:headEnd type="none" w="med" len="med"/>
+                      <a:tailEnd type="none" w="med" len="med"/>
+                    </a:lnT>
+                    <a:lnB w="9525" cap="flat" cmpd="sng" algn="ctr">
+                      <a:solidFill>
+                        <a:srgbClr val="BFBFBF"/>
+                      </a:solidFill>
+                      <a:prstDash val="solid"/>
+                      <a:round/>
+                      <a:headEnd type="none" w="med" len="med"/>
+                      <a:tailEnd type="none" w="med" len="med"/>
+                    </a:lnB>
+                    <a:solidFill>
+                      <a:srgbClr val="FFFFFF"/>
+                    </a:solidFill>
+                  </a:tcPr>
+                </a:tc>
+                <a:tc>
+                  <a:txBody>
+                    <a:bodyPr/>
+                    <a:lstStyle/>
+                    <a:p>
+                      <a:pPr algn="ctr">
+                        <a:buNone/>
+                      </a:pPr>
+                      <a:r>
+                        <a:rPr lang="ja-JP" altLang="en-US" sz="1700" b="1" dirty="0">
+                          <a:solidFill>
+                            <a:srgbClr val="002060"/>
+                          </a:solidFill>
+                          <a:latin typeface="メイリオ" panose="020B0604030504040204" pitchFamily="50" charset="-128"/>
+                          <a:ea typeface="メイリオ" panose="020B0604030504040204" pitchFamily="50" charset="-128"/>
+                          <a:cs typeface="メイリオ"/>
+                        </a:rPr>
+                        <a:t>10万円〜</a:t>
+                      </a:r>
+                      <a:endParaRPr lang="ja-JP" altLang="en-US" sz="1700" dirty="0">
+                        <a:latin typeface="メイリオ"/>
+                        <a:ea typeface="メイリオ"/>
+                        <a:cs typeface="メイリオ"/>
+                      </a:endParaRPr>
+                    </a:p>
+                  </a:txBody>
+                  <a:tcPr marL="91440" marR="73152" marT="36576" marB="36576" anchor="ctr">
+                    <a:lnL w="9525" cap="flat" cmpd="sng" algn="ctr">
+                      <a:solidFill>
+                        <a:srgbClr val="BFBFBF"/>
+                      </a:solidFill>
+                      <a:prstDash val="solid"/>
+                      <a:round/>
+                      <a:headEnd type="none" w="med" len="med"/>
+                      <a:tailEnd type="none" w="med" len="med"/>
+                    </a:lnL>
+                    <a:lnR w="9525" cap="flat" cmpd="sng" algn="ctr">
+                      <a:solidFill>
+                        <a:srgbClr val="BFBFBF"/>
+                      </a:solidFill>
+                      <a:prstDash val="solid"/>
+                      <a:round/>
+                      <a:headEnd type="none" w="med" len="med"/>
+                      <a:tailEnd type="none" w="med" len="med"/>
+                    </a:lnR>
+                    <a:lnT w="9525" cap="flat" cmpd="sng" algn="ctr">
+                      <a:solidFill>
+                        <a:srgbClr val="BFBFBF"/>
+                      </a:solidFill>
+                      <a:prstDash val="solid"/>
+                      <a:round/>
+                      <a:headEnd type="none" w="med" len="med"/>
+                      <a:tailEnd type="none" w="med" len="med"/>
+                    </a:lnT>
+                    <a:lnB w="9525" cap="flat" cmpd="sng" algn="ctr">
+                      <a:solidFill>
+                        <a:srgbClr val="BFBFBF"/>
+                      </a:solidFill>
+                      <a:prstDash val="solid"/>
+                      <a:round/>
+                      <a:headEnd type="none" w="med" len="med"/>
+                      <a:tailEnd type="none" w="med" len="med"/>
+                    </a:lnB>
+                    <a:solidFill>
+                      <a:srgbClr val="FFFFFF"/>
+                    </a:solidFill>
+                  </a:tcPr>
+                </a:tc>
+                <a:tc>
+                  <a:txBody>
+                    <a:bodyPr/>
+                    <a:lstStyle/>
+                    <a:p>
+                      <a:pPr algn="ctr">
+                        <a:buNone/>
+                      </a:pPr>
+                      <a:r>
+                        <a:rPr lang="ja-JP" altLang="en-US" sz="1700" b="1" dirty="0">
+                          <a:solidFill>
+                            <a:srgbClr val="002060"/>
+                          </a:solidFill>
+                          <a:latin typeface="メイリオ" panose="020B0604030504040204" pitchFamily="50" charset="-128"/>
+                          <a:ea typeface="メイリオ" panose="020B0604030504040204" pitchFamily="50" charset="-128"/>
+                          <a:cs typeface="メイリオ"/>
+                        </a:rPr>
+                        <a:t>10万円〜</a:t>
+                      </a:r>
+                      <a:endParaRPr lang="ja-JP" altLang="en-US" sz="1700" dirty="0">
+                        <a:latin typeface="メイリオ"/>
+                        <a:ea typeface="メイリオ"/>
+                        <a:cs typeface="メイリオ"/>
+                      </a:endParaRPr>
+                    </a:p>
+                  </a:txBody>
+                  <a:tcPr marL="91440" marR="73152" marT="36576" marB="36576" anchor="ctr">
+                    <a:lnL w="9525" cap="flat" cmpd="sng" algn="ctr">
+                      <a:solidFill>
+                        <a:srgbClr val="BFBFBF"/>
+                      </a:solidFill>
+                      <a:prstDash val="solid"/>
+                      <a:round/>
+                      <a:headEnd type="none" w="med" len="med"/>
+                      <a:tailEnd type="none" w="med" len="med"/>
+                    </a:lnL>
+                    <a:lnR w="9525" cap="flat" cmpd="sng" algn="ctr">
+                      <a:solidFill>
+                        <a:srgbClr val="BFBFBF"/>
+                      </a:solidFill>
+                      <a:prstDash val="solid"/>
+                      <a:round/>
+                      <a:headEnd type="none" w="med" len="med"/>
+                      <a:tailEnd type="none" w="med" len="med"/>
+                    </a:lnR>
+                    <a:lnT w="9525" cap="flat" cmpd="sng" algn="ctr">
+                      <a:solidFill>
+                        <a:srgbClr val="BFBFBF"/>
+                      </a:solidFill>
+                      <a:prstDash val="solid"/>
+                      <a:round/>
+                      <a:headEnd type="none" w="med" len="med"/>
+                      <a:tailEnd type="none" w="med" len="med"/>
+                    </a:lnT>
+                    <a:lnB w="9525" cap="flat" cmpd="sng" algn="ctr">
+                      <a:solidFill>
+                        <a:srgbClr val="BFBFBF"/>
+                      </a:solidFill>
+                      <a:prstDash val="solid"/>
+                      <a:round/>
+                      <a:headEnd type="none" w="med" len="med"/>
+                      <a:tailEnd type="none" w="med" len="med"/>
+                    </a:lnB>
+                    <a:solidFill>
+                      <a:srgbClr val="FFFFFF"/>
+                    </a:solidFill>
+                  </a:tcPr>
+                </a:tc>
+              </a:tr>
+              <a:tr h="594360">
                 <a:tc>
                   <a:txBody>
                     <a:bodyPr/>
@@ -13061,7 +13835,7 @@
                           <a:ea typeface="メイリオ" panose="020B0604030504040204" pitchFamily="50" charset="-128"/>
                           <a:cs typeface="メイリオ"/>
                         </a:rPr>
-                        <a:t>（イベントの無い月）</a:t>
+                        <a:t>（月額）</a:t>
                       </a:r>
                       <a:endParaRPr lang="ja-JP" altLang="en-US" sz="1300" dirty="0">
                         <a:latin typeface="メイリオ"/>
@@ -13121,7 +13895,7 @@
                         <a:buNone/>
                       </a:pPr>
                       <a:r>
-                        <a:rPr lang="ja-JP" altLang="en-US" sz="1800" b="1" dirty="0">
+                        <a:rPr lang="ja-JP" altLang="en-US" sz="1700" b="1" dirty="0">
                           <a:solidFill>
                             <a:srgbClr val="002060"/>
                           </a:solidFill>
@@ -13129,9 +13903,9 @@
                           <a:ea typeface="メイリオ" panose="020B0604030504040204" pitchFamily="50" charset="-128"/>
                           <a:cs typeface="メイリオ"/>
                         </a:rPr>
-                        <a:t>5〜10万円</a:t>
+                        <a:t>0円</a:t>
                       </a:r>
-                      <a:endParaRPr lang="ja-JP" altLang="en-US" sz="1800" dirty="0">
+                      <a:endParaRPr lang="ja-JP" altLang="en-US" sz="1700" dirty="0">
                         <a:latin typeface="メイリオ"/>
                         <a:ea typeface="メイリオ"/>
                         <a:cs typeface="メイリオ"/>
@@ -13185,21 +13959,21 @@
                     <a:bodyPr/>
                     <a:lstStyle/>
                     <a:p>
-                      <a:pPr algn="l">
+                      <a:pPr algn="ctr">
                         <a:buNone/>
                       </a:pPr>
                       <a:r>
-                        <a:rPr lang="ja-JP" altLang="en-US" sz="1400" b="0" dirty="0">
+                        <a:rPr lang="ja-JP" altLang="en-US" sz="1700" b="1" dirty="0">
                           <a:solidFill>
-                            <a:srgbClr val="333333"/>
+                            <a:srgbClr val="002060"/>
                           </a:solidFill>
                           <a:latin typeface="メイリオ" panose="020B0604030504040204" pitchFamily="50" charset="-128"/>
                           <a:ea typeface="メイリオ" panose="020B0604030504040204" pitchFamily="50" charset="-128"/>
                           <a:cs typeface="メイリオ"/>
                         </a:rPr>
-                        <a:t>月2回の配信（ツール費を含む）</a:t>
+                        <a:t>5〜10万円</a:t>
                       </a:r>
-                      <a:endParaRPr lang="ja-JP" altLang="en-US" sz="1400" dirty="0">
+                      <a:endParaRPr lang="ja-JP" altLang="en-US" sz="1700" dirty="0">
                         <a:latin typeface="メイリオ"/>
                         <a:ea typeface="メイリオ"/>
                         <a:cs typeface="メイリオ"/>
@@ -13248,8 +14022,76 @@
                     </a:solidFill>
                   </a:tcPr>
                 </a:tc>
+                <a:tc>
+                  <a:txBody>
+                    <a:bodyPr/>
+                    <a:lstStyle/>
+                    <a:p>
+                      <a:pPr algn="ctr">
+                        <a:buNone/>
+                      </a:pPr>
+                      <a:r>
+                        <a:rPr lang="ja-JP" altLang="en-US" sz="1700" b="1" dirty="0">
+                          <a:solidFill>
+                            <a:srgbClr val="002060"/>
+                          </a:solidFill>
+                          <a:latin typeface="メイリオ" panose="020B0604030504040204" pitchFamily="50" charset="-128"/>
+                          <a:ea typeface="メイリオ" panose="020B0604030504040204" pitchFamily="50" charset="-128"/>
+                          <a:cs typeface="メイリオ"/>
+                        </a:rPr>
+                        <a:t>20万円〜</a:t>
+                      </a:r>
+                      <a:endParaRPr lang="ja-JP" altLang="en-US" sz="1700" dirty="0">
+                        <a:latin typeface="メイリオ"/>
+                        <a:ea typeface="メイリオ"/>
+                        <a:cs typeface="メイリオ"/>
+                      </a:endParaRPr>
+                    </a:p>
+                  </a:txBody>
+                  <a:tcPr marL="91440" marR="73152" marT="36576" marB="36576" anchor="ctr">
+                    <a:lnL w="9525" cap="flat" cmpd="sng" algn="ctr">
+                      <a:solidFill>
+                        <a:srgbClr val="BFBFBF"/>
+                      </a:solidFill>
+                      <a:prstDash val="solid"/>
+                      <a:round/>
+                      <a:headEnd type="none" w="med" len="med"/>
+                      <a:tailEnd type="none" w="med" len="med"/>
+                    </a:lnL>
+                    <a:lnR w="9525" cap="flat" cmpd="sng" algn="ctr">
+                      <a:solidFill>
+                        <a:srgbClr val="BFBFBF"/>
+                      </a:solidFill>
+                      <a:prstDash val="solid"/>
+                      <a:round/>
+                      <a:headEnd type="none" w="med" len="med"/>
+                      <a:tailEnd type="none" w="med" len="med"/>
+                    </a:lnR>
+                    <a:lnT w="9525" cap="flat" cmpd="sng" algn="ctr">
+                      <a:solidFill>
+                        <a:srgbClr val="BFBFBF"/>
+                      </a:solidFill>
+                      <a:prstDash val="solid"/>
+                      <a:round/>
+                      <a:headEnd type="none" w="med" len="med"/>
+                      <a:tailEnd type="none" w="med" len="med"/>
+                    </a:lnT>
+                    <a:lnB w="9525" cap="flat" cmpd="sng" algn="ctr">
+                      <a:solidFill>
+                        <a:srgbClr val="BFBFBF"/>
+                      </a:solidFill>
+                      <a:prstDash val="solid"/>
+                      <a:round/>
+                      <a:headEnd type="none" w="med" len="med"/>
+                      <a:tailEnd type="none" w="med" len="med"/>
+                    </a:lnB>
+                    <a:solidFill>
+                      <a:srgbClr val="FFFFFF"/>
+                    </a:solidFill>
+                  </a:tcPr>
+                </a:tc>
               </a:tr>
-              <a:tr h="1005840">
+              <a:tr h="594360">
                 <a:tc>
                   <a:txBody>
                     <a:bodyPr/>
@@ -13288,7 +14130,7 @@
                           <a:ea typeface="メイリオ" panose="020B0604030504040204" pitchFamily="50" charset="-128"/>
                           <a:cs typeface="メイリオ"/>
                         </a:rPr>
-                        <a:t>（イベントの前後）</a:t>
+                        <a:t>（月額）</a:t>
                       </a:r>
                       <a:endParaRPr lang="ja-JP" altLang="en-US" sz="1300" dirty="0">
                         <a:latin typeface="メイリオ"/>
@@ -13348,7 +14190,7 @@
                         <a:buNone/>
                       </a:pPr>
                       <a:r>
-                        <a:rPr lang="ja-JP" altLang="en-US" sz="1800" b="1" dirty="0">
+                        <a:rPr lang="ja-JP" altLang="en-US" sz="1700" b="1" dirty="0">
                           <a:solidFill>
                             <a:srgbClr val="002060"/>
                           </a:solidFill>
@@ -13356,9 +14198,9 @@
                           <a:ea typeface="メイリオ" panose="020B0604030504040204" pitchFamily="50" charset="-128"/>
                           <a:cs typeface="メイリオ"/>
                         </a:rPr>
-                        <a:t>30万円程度</a:t>
+                        <a:t>0円</a:t>
                       </a:r>
-                      <a:endParaRPr lang="ja-JP" altLang="en-US" sz="1800" dirty="0">
+                      <a:endParaRPr lang="ja-JP" altLang="en-US" sz="1700" dirty="0">
                         <a:latin typeface="メイリオ"/>
                         <a:ea typeface="メイリオ"/>
                         <a:cs typeface="メイリオ"/>
@@ -13412,21 +14254,21 @@
                     <a:bodyPr/>
                     <a:lstStyle/>
                     <a:p>
-                      <a:pPr algn="l">
+                      <a:pPr algn="ctr">
                         <a:buNone/>
                       </a:pPr>
                       <a:r>
-                        <a:rPr lang="ja-JP" altLang="en-US" sz="1400" b="0" dirty="0">
+                        <a:rPr lang="ja-JP" altLang="en-US" sz="1700" b="1" dirty="0">
                           <a:solidFill>
-                            <a:srgbClr val="333333"/>
+                            <a:srgbClr val="002060"/>
                           </a:solidFill>
                           <a:latin typeface="メイリオ" panose="020B0604030504040204" pitchFamily="50" charset="-128"/>
                           <a:ea typeface="メイリオ" panose="020B0604030504040204" pitchFamily="50" charset="-128"/>
                           <a:cs typeface="メイリオ"/>
                         </a:rPr>
-                        <a:t>月4〜5回の配信（告知・リマインド・イベント直後のフォロー）</a:t>
+                        <a:t>30万円程度</a:t>
                       </a:r>
-                      <a:endParaRPr lang="ja-JP" altLang="en-US" sz="1400" dirty="0">
+                      <a:endParaRPr lang="ja-JP" altLang="en-US" sz="1700" dirty="0">
                         <a:latin typeface="メイリオ"/>
                         <a:ea typeface="メイリオ"/>
                         <a:cs typeface="メイリオ"/>
@@ -13475,8 +14317,101 @@
                     </a:solidFill>
                   </a:tcPr>
                 </a:tc>
+                <a:tc>
+                  <a:txBody>
+                    <a:bodyPr/>
+                    <a:lstStyle/>
+                    <a:p>
+                      <a:pPr algn="ctr">
+                        <a:buNone/>
+                      </a:pPr>
+                      <a:r>
+                        <a:rPr lang="ja-JP" altLang="en-US" sz="1700" b="1" dirty="0">
+                          <a:solidFill>
+                            <a:srgbClr val="002060"/>
+                          </a:solidFill>
+                          <a:latin typeface="メイリオ" panose="020B0604030504040204" pitchFamily="50" charset="-128"/>
+                          <a:ea typeface="メイリオ" panose="020B0604030504040204" pitchFamily="50" charset="-128"/>
+                          <a:cs typeface="メイリオ"/>
+                        </a:rPr>
+                        <a:t>30万円〜</a:t>
+                      </a:r>
+                      <a:endParaRPr lang="ja-JP" altLang="en-US" sz="1700" dirty="0">
+                        <a:latin typeface="メイリオ"/>
+                        <a:ea typeface="メイリオ"/>
+                        <a:cs typeface="メイリオ"/>
+                      </a:endParaRPr>
+                    </a:p>
+                  </a:txBody>
+                  <a:tcPr marL="91440" marR="73152" marT="36576" marB="36576" anchor="ctr">
+                    <a:lnL w="9525" cap="flat" cmpd="sng" algn="ctr">
+                      <a:solidFill>
+                        <a:srgbClr val="BFBFBF"/>
+                      </a:solidFill>
+                      <a:prstDash val="solid"/>
+                      <a:round/>
+                      <a:headEnd type="none" w="med" len="med"/>
+                      <a:tailEnd type="none" w="med" len="med"/>
+                    </a:lnL>
+                    <a:lnR w="9525" cap="flat" cmpd="sng" algn="ctr">
+                      <a:solidFill>
+                        <a:srgbClr val="BFBFBF"/>
+                      </a:solidFill>
+                      <a:prstDash val="solid"/>
+                      <a:round/>
+                      <a:headEnd type="none" w="med" len="med"/>
+                      <a:tailEnd type="none" w="med" len="med"/>
+                    </a:lnR>
+                    <a:lnT w="9525" cap="flat" cmpd="sng" algn="ctr">
+                      <a:solidFill>
+                        <a:srgbClr val="BFBFBF"/>
+                      </a:solidFill>
+                      <a:prstDash val="solid"/>
+                      <a:round/>
+                      <a:headEnd type="none" w="med" len="med"/>
+                      <a:tailEnd type="none" w="med" len="med"/>
+                    </a:lnT>
+                    <a:lnB w="9525" cap="flat" cmpd="sng" algn="ctr">
+                      <a:solidFill>
+                        <a:srgbClr val="BFBFBF"/>
+                      </a:solidFill>
+                      <a:prstDash val="solid"/>
+                      <a:round/>
+                      <a:headEnd type="none" w="med" len="med"/>
+                      <a:tailEnd type="none" w="med" len="med"/>
+                    </a:lnB>
+                    <a:solidFill>
+                      <a:srgbClr val="FFFFFF"/>
+                    </a:solidFill>
+                  </a:tcPr>
+                </a:tc>
               </a:tr>
-              <a:tr h="1005840">
+            </a:tbl>
+          </a:graphicData>
+        </a:graphic>
+      </p:graphicFrame>
+      <p:graphicFrame>
+        <p:nvGraphicFramePr>
+          <p:cNvPr id="6" name="ツール費 5"/>
+          <p:cNvGraphicFramePr>
+            <a:graphicFrameLocks noGrp="1"/>
+          </p:cNvGraphicFramePr>
+          <p:nvPr/>
+        </p:nvGraphicFramePr>
+        <p:xfrm>
+          <a:off x="502920" y="4937760"/>
+          <a:ext cx="8897112" cy="640080"/>
+        </p:xfrm>
+        <a:graphic>
+          <a:graphicData uri="http://schemas.openxmlformats.org/drawingml/2006/table">
+            <a:tbl>
+              <a:tblPr/>
+              <a:tblGrid>
+                <a:gridCol w="1463040"/>
+                <a:gridCol w="3717036"/>
+                <a:gridCol w="3717036"/>
+              </a:tblGrid>
+              <a:tr h="640080">
                 <a:tc>
                   <a:txBody>
                     <a:bodyPr/>
@@ -13494,7 +14429,28 @@
                           <a:ea typeface="メイリオ" panose="020B0604030504040204" pitchFamily="50" charset="-128"/>
                           <a:cs typeface="メイリオ"/>
                         </a:rPr>
-                        <a:t>年間の目安</a:t>
+                        <a:t>ツール費</a:t>
+                      </a:r>
+                      <a:br>
+                        <a:rPr lang="ja-JP" altLang="en-US" sz="1300" b="1" dirty="0">
+                          <a:solidFill>
+                            <a:srgbClr val="002060"/>
+                          </a:solidFill>
+                          <a:latin typeface="メイリオ" panose="020B0604030504040204" pitchFamily="50" charset="-128"/>
+                          <a:ea typeface="メイリオ" panose="020B0604030504040204" pitchFamily="50" charset="-128"/>
+                          <a:cs typeface="メイリオ"/>
+                        </a:rPr>
+                      </a:br>
+                      <a:r>
+                        <a:rPr lang="ja-JP" altLang="en-US" sz="1300" b="1" dirty="0">
+                          <a:solidFill>
+                            <a:srgbClr val="002060"/>
+                          </a:solidFill>
+                          <a:latin typeface="メイリオ" panose="020B0604030504040204" pitchFamily="50" charset="-128"/>
+                          <a:ea typeface="メイリオ" panose="020B0604030504040204" pitchFamily="50" charset="-128"/>
+                          <a:cs typeface="メイリオ"/>
+                        </a:rPr>
+                        <a:t>（別途）</a:t>
                       </a:r>
                       <a:endParaRPr lang="ja-JP" altLang="en-US" sz="1300" dirty="0">
                         <a:latin typeface="メイリオ"/>
@@ -13554,17 +14510,38 @@
                         <a:buNone/>
                       </a:pPr>
                       <a:r>
-                        <a:rPr lang="ja-JP" altLang="en-US" sz="1800" b="1" dirty="0">
+                        <a:rPr lang="ja-JP" altLang="en-US" sz="1300" b="0" dirty="0">
                           <a:solidFill>
-                            <a:srgbClr val="002060"/>
+                            <a:srgbClr val="333333"/>
                           </a:solidFill>
                           <a:latin typeface="メイリオ" panose="020B0604030504040204" pitchFamily="50" charset="-128"/>
                           <a:ea typeface="メイリオ" panose="020B0604030504040204" pitchFamily="50" charset="-128"/>
                           <a:cs typeface="メイリオ"/>
                         </a:rPr>
-                        <a:t>約160〜200万円</a:t>
+                        <a:t>ポップアップツール</a:t>
                       </a:r>
-                      <a:endParaRPr lang="ja-JP" altLang="en-US" sz="1800" dirty="0">
+                      <a:br>
+                        <a:rPr lang="ja-JP" altLang="en-US" sz="1300" b="0" dirty="0">
+                          <a:solidFill>
+                            <a:srgbClr val="333333"/>
+                          </a:solidFill>
+                          <a:latin typeface="メイリオ" panose="020B0604030504040204" pitchFamily="50" charset="-128"/>
+                          <a:ea typeface="メイリオ" panose="020B0604030504040204" pitchFamily="50" charset="-128"/>
+                          <a:cs typeface="メイリオ"/>
+                        </a:rPr>
+                      </a:br>
+                      <a:r>
+                        <a:rPr lang="ja-JP" altLang="en-US" sz="1300" b="0" dirty="0">
+                          <a:solidFill>
+                            <a:srgbClr val="333333"/>
+                          </a:solidFill>
+                          <a:latin typeface="メイリオ" panose="020B0604030504040204" pitchFamily="50" charset="-128"/>
+                          <a:ea typeface="メイリオ" panose="020B0604030504040204" pitchFamily="50" charset="-128"/>
+                          <a:cs typeface="メイリオ"/>
+                        </a:rPr>
+                        <a:t>初期1.5万円／月額3万円</a:t>
+                      </a:r>
+                      <a:endParaRPr lang="ja-JP" altLang="en-US" sz="1300" dirty="0">
                         <a:latin typeface="メイリオ"/>
                         <a:ea typeface="メイリオ"/>
                         <a:cs typeface="メイリオ"/>
@@ -13618,11 +14595,11 @@
                     <a:bodyPr/>
                     <a:lstStyle/>
                     <a:p>
-                      <a:pPr algn="l">
+                      <a:pPr algn="ctr">
                         <a:buNone/>
                       </a:pPr>
                       <a:r>
-                        <a:rPr lang="ja-JP" altLang="en-US" sz="1400" b="0" dirty="0">
+                        <a:rPr lang="ja-JP" altLang="en-US" sz="1300" b="0" dirty="0">
                           <a:solidFill>
                             <a:srgbClr val="333333"/>
                           </a:solidFill>
@@ -13630,9 +14607,30 @@
                           <a:ea typeface="メイリオ" panose="020B0604030504040204" pitchFamily="50" charset="-128"/>
                           <a:cs typeface="メイリオ"/>
                         </a:rPr>
-                        <a:t>イベント期4か月＋平常期8か月</a:t>
+                        <a:t>サンクスLINE誘導</a:t>
                       </a:r>
-                      <a:endParaRPr lang="ja-JP" altLang="en-US" sz="1400" dirty="0">
+                      <a:br>
+                        <a:rPr lang="ja-JP" altLang="en-US" sz="1300" b="0" dirty="0">
+                          <a:solidFill>
+                            <a:srgbClr val="333333"/>
+                          </a:solidFill>
+                          <a:latin typeface="メイリオ" panose="020B0604030504040204" pitchFamily="50" charset="-128"/>
+                          <a:ea typeface="メイリオ" panose="020B0604030504040204" pitchFamily="50" charset="-128"/>
+                          <a:cs typeface="メイリオ"/>
+                        </a:rPr>
+                      </a:br>
+                      <a:r>
+                        <a:rPr lang="ja-JP" altLang="en-US" sz="1300" b="0" dirty="0">
+                          <a:solidFill>
+                            <a:srgbClr val="333333"/>
+                          </a:solidFill>
+                          <a:latin typeface="メイリオ" panose="020B0604030504040204" pitchFamily="50" charset="-128"/>
+                          <a:ea typeface="メイリオ" panose="020B0604030504040204" pitchFamily="50" charset="-128"/>
+                          <a:cs typeface="メイリオ"/>
+                        </a:rPr>
+                        <a:t>初期15万円／月額3万円〜</a:t>
+                      </a:r>
+                      <a:endParaRPr lang="ja-JP" altLang="en-US" sz="1300" dirty="0">
                         <a:latin typeface="メイリオ"/>
                         <a:ea typeface="メイリオ"/>
                         <a:cs typeface="メイリオ"/>
@@ -13688,14 +14686,14 @@
       </p:graphicFrame>
       <p:sp>
         <p:nvSpPr>
-          <p:cNvPr id="6" name="注記"/>
+          <p:cNvPr id="7" name="注記"/>
           <p:cNvSpPr/>
           <p:nvPr/>
         </p:nvSpPr>
         <p:spPr>
           <a:xfrm>
-            <a:off x="502920" y="5257800"/>
-            <a:ext cx="8897112" cy="256032"/>
+            <a:off x="502920" y="5687568"/>
+            <a:ext cx="8897112" cy="237744"/>
           </a:xfrm>
           <a:prstGeom prst="rect">
             <a:avLst/>
@@ -13723,54 +14721,7 @@
                 <a:ea typeface="メイリオ" panose="020B0604030504040204" pitchFamily="50" charset="-128"/>
                 <a:cs typeface="メイリオ"/>
               </a:rPr>
-              <a:t>※広告費は含まない</a:t>
-            </a:r>
-            <a:endParaRPr lang="ja-JP" altLang="en-US" sz="1200" dirty="0">
-              <a:latin typeface="メイリオ"/>
-              <a:ea typeface="メイリオ"/>
-              <a:cs typeface="メイリオ"/>
-            </a:endParaRPr>
-          </a:p>
-        </p:txBody>
-      </p:sp>
-      <p:sp>
-        <p:nvSpPr>
-          <p:cNvPr id="7" name="注記"/>
-          <p:cNvSpPr/>
-          <p:nvPr/>
-        </p:nvSpPr>
-        <p:spPr>
-          <a:xfrm>
-            <a:off x="502920" y="5513832"/>
-            <a:ext cx="8897112" cy="256032"/>
-          </a:xfrm>
-          <a:prstGeom prst="rect">
-            <a:avLst/>
-          </a:prstGeom>
-          <a:noFill/>
-          <a:ln>
-            <a:noFill/>
-          </a:ln>
-        </p:spPr>
-        <p:txBody>
-          <a:bodyPr wrap="square" lIns="0" tIns="0" rIns="0" bIns="0" rtlCol="0" anchor="t">
-            <a:noAutofit/>
-          </a:bodyPr>
-          <a:lstStyle/>
-          <a:p>
-            <a:pPr algn="l">
-              <a:buNone/>
-            </a:pPr>
-            <a:r>
-              <a:rPr lang="ja-JP" altLang="en-US" sz="900" b="0" dirty="0">
-                <a:solidFill>
-                  <a:srgbClr val="7F7F7F"/>
-                </a:solidFill>
-                <a:latin typeface="メイリオ" panose="020B0604030504040204" pitchFamily="50" charset="-128"/>
-                <a:ea typeface="メイリオ" panose="020B0604030504040204" pitchFamily="50" charset="-128"/>
-                <a:cs typeface="メイリオ"/>
-              </a:rPr>
-              <a:t>※イベントを年4回、イベント期を各1か月として計算</a:t>
+              <a:t>※広告費・LINE公式アカウントの利用料は含まない。いずれも6か月〜の契約</a:t>
             </a:r>
             <a:endParaRPr lang="ja-JP" altLang="en-US" sz="1200" dirty="0">
               <a:latin typeface="メイリオ"/>
@@ -13788,8 +14739,8 @@
         </p:nvSpPr>
         <p:spPr>
           <a:xfrm>
-            <a:off x="502920" y="5769864"/>
-            <a:ext cx="8897112" cy="256032"/>
+            <a:off x="502920" y="5925312"/>
+            <a:ext cx="8897112" cy="237744"/>
           </a:xfrm>
           <a:prstGeom prst="rect">
             <a:avLst/>

--- a/202610_株式会社すなおコンサルティング御中_LINE公式アカウント運用のご提案.pptx
+++ b/202610_株式会社すなおコンサルティング御中_LINE公式アカウント運用のご提案.pptx
@@ -12805,7 +12805,7 @@
         </p:nvGraphicFramePr>
         <p:xfrm>
           <a:off x="502920" y="1600200"/>
-          <a:ext cx="8897112" cy="3200400"/>
+          <a:ext cx="8897112" cy="4023360"/>
         </p:xfrm>
         <a:graphic>
           <a:graphicData uri="http://schemas.openxmlformats.org/drawingml/2006/table">
@@ -12817,7 +12817,7 @@
                 <a:gridCol w="2478024"/>
                 <a:gridCol w="2478024"/>
               </a:tblGrid>
-              <a:tr h="594360">
+              <a:tr h="640080">
                 <a:tc>
                   <a:txBody>
                     <a:bodyPr/>
@@ -13143,7 +13143,7 @@
                   </a:tcPr>
                 </a:tc>
               </a:tr>
-              <a:tr h="868680">
+              <a:tr h="1051560">
                 <a:tc>
                   <a:txBody>
                     <a:bodyPr/>
@@ -13522,7 +13522,7 @@
                   </a:tcPr>
                 </a:tc>
               </a:tr>
-              <a:tr h="548640">
+              <a:tr h="777240">
                 <a:tc>
                   <a:txBody>
                     <a:bodyPr/>
@@ -13796,7 +13796,7 @@
                   </a:tcPr>
                 </a:tc>
               </a:tr>
-              <a:tr h="594360">
+              <a:tr h="777240">
                 <a:tc>
                   <a:txBody>
                     <a:bodyPr/>
@@ -14091,7 +14091,7 @@
                   </a:tcPr>
                 </a:tc>
               </a:tr>
-              <a:tr h="594360">
+              <a:tr h="777240">
                 <a:tc>
                   <a:txBody>
                     <a:bodyPr/>
@@ -14390,309 +14390,15 @@
           </a:graphicData>
         </a:graphic>
       </p:graphicFrame>
-      <p:graphicFrame>
-        <p:nvGraphicFramePr>
-          <p:cNvPr id="6" name="ツール費 5"/>
-          <p:cNvGraphicFramePr>
-            <a:graphicFrameLocks noGrp="1"/>
-          </p:cNvGraphicFramePr>
-          <p:nvPr/>
-        </p:nvGraphicFramePr>
-        <p:xfrm>
-          <a:off x="502920" y="4937760"/>
-          <a:ext cx="8897112" cy="640080"/>
-        </p:xfrm>
-        <a:graphic>
-          <a:graphicData uri="http://schemas.openxmlformats.org/drawingml/2006/table">
-            <a:tbl>
-              <a:tblPr/>
-              <a:tblGrid>
-                <a:gridCol w="1463040"/>
-                <a:gridCol w="3717036"/>
-                <a:gridCol w="3717036"/>
-              </a:tblGrid>
-              <a:tr h="640080">
-                <a:tc>
-                  <a:txBody>
-                    <a:bodyPr/>
-                    <a:lstStyle/>
-                    <a:p>
-                      <a:pPr algn="ctr">
-                        <a:buNone/>
-                      </a:pPr>
-                      <a:r>
-                        <a:rPr lang="ja-JP" altLang="en-US" sz="1300" b="1" dirty="0">
-                          <a:solidFill>
-                            <a:srgbClr val="002060"/>
-                          </a:solidFill>
-                          <a:latin typeface="メイリオ" panose="020B0604030504040204" pitchFamily="50" charset="-128"/>
-                          <a:ea typeface="メイリオ" panose="020B0604030504040204" pitchFamily="50" charset="-128"/>
-                          <a:cs typeface="メイリオ"/>
-                        </a:rPr>
-                        <a:t>ツール費</a:t>
-                      </a:r>
-                      <a:br>
-                        <a:rPr lang="ja-JP" altLang="en-US" sz="1300" b="1" dirty="0">
-                          <a:solidFill>
-                            <a:srgbClr val="002060"/>
-                          </a:solidFill>
-                          <a:latin typeface="メイリオ" panose="020B0604030504040204" pitchFamily="50" charset="-128"/>
-                          <a:ea typeface="メイリオ" panose="020B0604030504040204" pitchFamily="50" charset="-128"/>
-                          <a:cs typeface="メイリオ"/>
-                        </a:rPr>
-                      </a:br>
-                      <a:r>
-                        <a:rPr lang="ja-JP" altLang="en-US" sz="1300" b="1" dirty="0">
-                          <a:solidFill>
-                            <a:srgbClr val="002060"/>
-                          </a:solidFill>
-                          <a:latin typeface="メイリオ" panose="020B0604030504040204" pitchFamily="50" charset="-128"/>
-                          <a:ea typeface="メイリオ" panose="020B0604030504040204" pitchFamily="50" charset="-128"/>
-                          <a:cs typeface="メイリオ"/>
-                        </a:rPr>
-                        <a:t>（別途）</a:t>
-                      </a:r>
-                      <a:endParaRPr lang="ja-JP" altLang="en-US" sz="1300" dirty="0">
-                        <a:latin typeface="メイリオ"/>
-                        <a:ea typeface="メイリオ"/>
-                        <a:cs typeface="メイリオ"/>
-                      </a:endParaRPr>
-                    </a:p>
-                  </a:txBody>
-                  <a:tcPr marL="91440" marR="73152" marT="36576" marB="36576" anchor="ctr">
-                    <a:lnL w="9525" cap="flat" cmpd="sng" algn="ctr">
-                      <a:solidFill>
-                        <a:srgbClr val="BFBFBF"/>
-                      </a:solidFill>
-                      <a:prstDash val="solid"/>
-                      <a:round/>
-                      <a:headEnd type="none" w="med" len="med"/>
-                      <a:tailEnd type="none" w="med" len="med"/>
-                    </a:lnL>
-                    <a:lnR w="9525" cap="flat" cmpd="sng" algn="ctr">
-                      <a:solidFill>
-                        <a:srgbClr val="BFBFBF"/>
-                      </a:solidFill>
-                      <a:prstDash val="solid"/>
-                      <a:round/>
-                      <a:headEnd type="none" w="med" len="med"/>
-                      <a:tailEnd type="none" w="med" len="med"/>
-                    </a:lnR>
-                    <a:lnT w="9525" cap="flat" cmpd="sng" algn="ctr">
-                      <a:solidFill>
-                        <a:srgbClr val="BFBFBF"/>
-                      </a:solidFill>
-                      <a:prstDash val="solid"/>
-                      <a:round/>
-                      <a:headEnd type="none" w="med" len="med"/>
-                      <a:tailEnd type="none" w="med" len="med"/>
-                    </a:lnT>
-                    <a:lnB w="9525" cap="flat" cmpd="sng" algn="ctr">
-                      <a:solidFill>
-                        <a:srgbClr val="BFBFBF"/>
-                      </a:solidFill>
-                      <a:prstDash val="solid"/>
-                      <a:round/>
-                      <a:headEnd type="none" w="med" len="med"/>
-                      <a:tailEnd type="none" w="med" len="med"/>
-                    </a:lnB>
-                    <a:solidFill>
-                      <a:srgbClr val="DCE6F2"/>
-                    </a:solidFill>
-                  </a:tcPr>
-                </a:tc>
-                <a:tc>
-                  <a:txBody>
-                    <a:bodyPr/>
-                    <a:lstStyle/>
-                    <a:p>
-                      <a:pPr algn="ctr">
-                        <a:buNone/>
-                      </a:pPr>
-                      <a:r>
-                        <a:rPr lang="ja-JP" altLang="en-US" sz="1300" b="0" dirty="0">
-                          <a:solidFill>
-                            <a:srgbClr val="333333"/>
-                          </a:solidFill>
-                          <a:latin typeface="メイリオ" panose="020B0604030504040204" pitchFamily="50" charset="-128"/>
-                          <a:ea typeface="メイリオ" panose="020B0604030504040204" pitchFamily="50" charset="-128"/>
-                          <a:cs typeface="メイリオ"/>
-                        </a:rPr>
-                        <a:t>ポップアップツール</a:t>
-                      </a:r>
-                      <a:br>
-                        <a:rPr lang="ja-JP" altLang="en-US" sz="1300" b="0" dirty="0">
-                          <a:solidFill>
-                            <a:srgbClr val="333333"/>
-                          </a:solidFill>
-                          <a:latin typeface="メイリオ" panose="020B0604030504040204" pitchFamily="50" charset="-128"/>
-                          <a:ea typeface="メイリオ" panose="020B0604030504040204" pitchFamily="50" charset="-128"/>
-                          <a:cs typeface="メイリオ"/>
-                        </a:rPr>
-                      </a:br>
-                      <a:r>
-                        <a:rPr lang="ja-JP" altLang="en-US" sz="1300" b="0" dirty="0">
-                          <a:solidFill>
-                            <a:srgbClr val="333333"/>
-                          </a:solidFill>
-                          <a:latin typeface="メイリオ" panose="020B0604030504040204" pitchFamily="50" charset="-128"/>
-                          <a:ea typeface="メイリオ" panose="020B0604030504040204" pitchFamily="50" charset="-128"/>
-                          <a:cs typeface="メイリオ"/>
-                        </a:rPr>
-                        <a:t>初期1.5万円／月額3万円</a:t>
-                      </a:r>
-                      <a:endParaRPr lang="ja-JP" altLang="en-US" sz="1300" dirty="0">
-                        <a:latin typeface="メイリオ"/>
-                        <a:ea typeface="メイリオ"/>
-                        <a:cs typeface="メイリオ"/>
-                      </a:endParaRPr>
-                    </a:p>
-                  </a:txBody>
-                  <a:tcPr marL="91440" marR="73152" marT="36576" marB="36576" anchor="ctr">
-                    <a:lnL w="9525" cap="flat" cmpd="sng" algn="ctr">
-                      <a:solidFill>
-                        <a:srgbClr val="BFBFBF"/>
-                      </a:solidFill>
-                      <a:prstDash val="solid"/>
-                      <a:round/>
-                      <a:headEnd type="none" w="med" len="med"/>
-                      <a:tailEnd type="none" w="med" len="med"/>
-                    </a:lnL>
-                    <a:lnR w="9525" cap="flat" cmpd="sng" algn="ctr">
-                      <a:solidFill>
-                        <a:srgbClr val="BFBFBF"/>
-                      </a:solidFill>
-                      <a:prstDash val="solid"/>
-                      <a:round/>
-                      <a:headEnd type="none" w="med" len="med"/>
-                      <a:tailEnd type="none" w="med" len="med"/>
-                    </a:lnR>
-                    <a:lnT w="9525" cap="flat" cmpd="sng" algn="ctr">
-                      <a:solidFill>
-                        <a:srgbClr val="BFBFBF"/>
-                      </a:solidFill>
-                      <a:prstDash val="solid"/>
-                      <a:round/>
-                      <a:headEnd type="none" w="med" len="med"/>
-                      <a:tailEnd type="none" w="med" len="med"/>
-                    </a:lnT>
-                    <a:lnB w="9525" cap="flat" cmpd="sng" algn="ctr">
-                      <a:solidFill>
-                        <a:srgbClr val="BFBFBF"/>
-                      </a:solidFill>
-                      <a:prstDash val="solid"/>
-                      <a:round/>
-                      <a:headEnd type="none" w="med" len="med"/>
-                      <a:tailEnd type="none" w="med" len="med"/>
-                    </a:lnB>
-                    <a:solidFill>
-                      <a:srgbClr val="FFFFFF"/>
-                    </a:solidFill>
-                  </a:tcPr>
-                </a:tc>
-                <a:tc>
-                  <a:txBody>
-                    <a:bodyPr/>
-                    <a:lstStyle/>
-                    <a:p>
-                      <a:pPr algn="ctr">
-                        <a:buNone/>
-                      </a:pPr>
-                      <a:r>
-                        <a:rPr lang="ja-JP" altLang="en-US" sz="1300" b="0" dirty="0">
-                          <a:solidFill>
-                            <a:srgbClr val="333333"/>
-                          </a:solidFill>
-                          <a:latin typeface="メイリオ" panose="020B0604030504040204" pitchFamily="50" charset="-128"/>
-                          <a:ea typeface="メイリオ" panose="020B0604030504040204" pitchFamily="50" charset="-128"/>
-                          <a:cs typeface="メイリオ"/>
-                        </a:rPr>
-                        <a:t>サンクスLINE誘導</a:t>
-                      </a:r>
-                      <a:br>
-                        <a:rPr lang="ja-JP" altLang="en-US" sz="1300" b="0" dirty="0">
-                          <a:solidFill>
-                            <a:srgbClr val="333333"/>
-                          </a:solidFill>
-                          <a:latin typeface="メイリオ" panose="020B0604030504040204" pitchFamily="50" charset="-128"/>
-                          <a:ea typeface="メイリオ" panose="020B0604030504040204" pitchFamily="50" charset="-128"/>
-                          <a:cs typeface="メイリオ"/>
-                        </a:rPr>
-                      </a:br>
-                      <a:r>
-                        <a:rPr lang="ja-JP" altLang="en-US" sz="1300" b="0" dirty="0">
-                          <a:solidFill>
-                            <a:srgbClr val="333333"/>
-                          </a:solidFill>
-                          <a:latin typeface="メイリオ" panose="020B0604030504040204" pitchFamily="50" charset="-128"/>
-                          <a:ea typeface="メイリオ" panose="020B0604030504040204" pitchFamily="50" charset="-128"/>
-                          <a:cs typeface="メイリオ"/>
-                        </a:rPr>
-                        <a:t>初期15万円／月額3万円〜</a:t>
-                      </a:r>
-                      <a:endParaRPr lang="ja-JP" altLang="en-US" sz="1300" dirty="0">
-                        <a:latin typeface="メイリオ"/>
-                        <a:ea typeface="メイリオ"/>
-                        <a:cs typeface="メイリオ"/>
-                      </a:endParaRPr>
-                    </a:p>
-                  </a:txBody>
-                  <a:tcPr marL="91440" marR="73152" marT="36576" marB="36576" anchor="ctr">
-                    <a:lnL w="9525" cap="flat" cmpd="sng" algn="ctr">
-                      <a:solidFill>
-                        <a:srgbClr val="BFBFBF"/>
-                      </a:solidFill>
-                      <a:prstDash val="solid"/>
-                      <a:round/>
-                      <a:headEnd type="none" w="med" len="med"/>
-                      <a:tailEnd type="none" w="med" len="med"/>
-                    </a:lnL>
-                    <a:lnR w="9525" cap="flat" cmpd="sng" algn="ctr">
-                      <a:solidFill>
-                        <a:srgbClr val="BFBFBF"/>
-                      </a:solidFill>
-                      <a:prstDash val="solid"/>
-                      <a:round/>
-                      <a:headEnd type="none" w="med" len="med"/>
-                      <a:tailEnd type="none" w="med" len="med"/>
-                    </a:lnR>
-                    <a:lnT w="9525" cap="flat" cmpd="sng" algn="ctr">
-                      <a:solidFill>
-                        <a:srgbClr val="BFBFBF"/>
-                      </a:solidFill>
-                      <a:prstDash val="solid"/>
-                      <a:round/>
-                      <a:headEnd type="none" w="med" len="med"/>
-                      <a:tailEnd type="none" w="med" len="med"/>
-                    </a:lnT>
-                    <a:lnB w="9525" cap="flat" cmpd="sng" algn="ctr">
-                      <a:solidFill>
-                        <a:srgbClr val="BFBFBF"/>
-                      </a:solidFill>
-                      <a:prstDash val="solid"/>
-                      <a:round/>
-                      <a:headEnd type="none" w="med" len="med"/>
-                      <a:tailEnd type="none" w="med" len="med"/>
-                    </a:lnB>
-                    <a:solidFill>
-                      <a:srgbClr val="FFFFFF"/>
-                    </a:solidFill>
-                  </a:tcPr>
-                </a:tc>
-              </a:tr>
-            </a:tbl>
-          </a:graphicData>
-        </a:graphic>
-      </p:graphicFrame>
       <p:sp>
         <p:nvSpPr>
-          <p:cNvPr id="7" name="注記"/>
+          <p:cNvPr id="6" name="注記"/>
           <p:cNvSpPr/>
           <p:nvPr/>
         </p:nvSpPr>
         <p:spPr>
           <a:xfrm>
-            <a:off x="502920" y="5687568"/>
+            <a:off x="502920" y="5760720"/>
             <a:ext cx="8897112" cy="237744"/>
           </a:xfrm>
           <a:prstGeom prst="rect">
@@ -14721,7 +14427,7 @@
                 <a:ea typeface="メイリオ" panose="020B0604030504040204" pitchFamily="50" charset="-128"/>
                 <a:cs typeface="メイリオ"/>
               </a:rPr>
-              <a:t>※広告費・LINE公式アカウントの利用料は含まない。いずれも6か月〜の契約</a:t>
+              <a:t>※広告費・ツール費・LINE公式アカウントの利用料は含まない。いずれも6か月〜の契約</a:t>
             </a:r>
             <a:endParaRPr lang="ja-JP" altLang="en-US" sz="1200" dirty="0">
               <a:latin typeface="メイリオ"/>
@@ -14733,13 +14439,13 @@
       </p:sp>
       <p:sp>
         <p:nvSpPr>
-          <p:cNvPr id="8" name="注記"/>
+          <p:cNvPr id="7" name="注記"/>
           <p:cNvSpPr/>
           <p:nvPr/>
         </p:nvSpPr>
         <p:spPr>
           <a:xfrm>
-            <a:off x="502920" y="5925312"/>
+            <a:off x="502920" y="5998464"/>
             <a:ext cx="8897112" cy="237744"/>
           </a:xfrm>
           <a:prstGeom prst="rect">

--- a/202610_株式会社すなおコンサルティング御中_LINE公式アカウント運用のご提案.pptx
+++ b/202610_株式会社すなおコンサルティング御中_LINE公式アカウント運用のご提案.pptx
@@ -25,6 +25,9 @@
     <p:sldId id="2980" r:id="rId80"/>
     <p:sldId id="2981" r:id="rId81"/>
     <p:sldId id="2982" r:id="rId82"/>
+    <p:sldId id="2983" r:id="rId83"/>
+    <p:sldId id="2984" r:id="rId84"/>
+    <p:sldId id="2985" r:id="rId85"/>
     <p:sldId id="612" r:id="rId64"/>
   </p:sldIdLst>
   <p:sldSz cx="9906000" cy="6858000" type="A4"/>
@@ -17077,6 +17080,6394 @@
             <a:endParaRPr lang="ja-JP" altLang="en-US" sz="1200" dirty="0">
               <a:latin typeface="メイリオ"/>
               <a:ea typeface="メイリオ"/>
+              <a:cs typeface="メイリオ"/>
+            </a:endParaRPr>
+          </a:p>
+        </p:txBody>
+      </p:sp>
+    </p:spTree>
+  </p:cSld>
+  <p:clrMapOvr>
+    <a:masterClrMapping/>
+  </p:clrMapOvr>
+</p:sld>
+</file>
+
+<file path=ppt/slides/slide75.xml><?xml version="1.0" encoding="utf-8"?>
+<p:sld xmlns:a="http://schemas.openxmlformats.org/drawingml/2006/main" xmlns:p="http://schemas.openxmlformats.org/presentationml/2006/main" xmlns:r="http://schemas.openxmlformats.org/officeDocument/2006/relationships">
+  <p:cSld>
+    <p:spTree>
+      <p:nvGrpSpPr>
+        <p:cNvPr id="1" name=""/>
+        <p:cNvGrpSpPr/>
+        <p:nvPr/>
+      </p:nvGrpSpPr>
+      <p:grpSpPr/>
+      <p:sp>
+        <p:nvSpPr>
+          <p:cNvPr id="4" name="Google Shape;752;p28">
+            <a:extLst>
+              <a:ext uri="{FF2B5EF4-FFF2-40B4-BE49-F238E27FC236}">
+                <a16:creationId xmlns:a16="http://schemas.microsoft.com/office/drawing/2014/main" id="{0D14D38F-F567-ACF2-CDEB-76004FDB5B51}"/>
+              </a:ext>
+            </a:extLst>
+          </p:cNvPr>
+          <p:cNvSpPr txBox="1"/>
+          <p:nvPr/>
+        </p:nvSpPr>
+        <p:spPr>
+          <a:xfrm>
+            <a:off x="548883" y="138137"/>
+            <a:ext cx="6276325" cy="338514"/>
+          </a:xfrm>
+          <a:prstGeom prst="rect">
+            <a:avLst/>
+          </a:prstGeom>
+          <a:noFill/>
+          <a:ln>
+            <a:noFill/>
+          </a:ln>
+        </p:spPr>
+        <p:txBody>
+          <a:bodyPr spcFirstLastPara="1" wrap="square" lIns="91425" tIns="45700" rIns="91425" bIns="45700" anchor="ctr" anchorCtr="0">
+            <a:spAutoFit/>
+          </a:bodyPr>
+          <a:lstStyle/>
+          <a:p>
+            <a:pPr lvl="0"/>
+            <a:r>
+              <a:rPr lang="ja-JP" altLang="en-US" sz="1600" b="1" dirty="0">
+                <a:solidFill>
+                  <a:srgbClr val="323366"/>
+                </a:solidFill>
+                <a:latin typeface="メイリオ" panose="020B0604030504040204" pitchFamily="50" charset="-128"/>
+                <a:ea typeface="メイリオ" panose="020B0604030504040204" pitchFamily="50" charset="-128"/>
+                <a:cs typeface="メイリオ"/>
+                <a:sym typeface="Meiryo"/>
+              </a:rPr>
+              <a:t>資料アジェンダ</a:t>
+            </a:r>
+          </a:p>
+        </p:txBody>
+      </p:sp>
+      <p:sp>
+        <p:nvSpPr>
+          <p:cNvPr id="2" name="正方形/長方形 1">
+            <a:extLst>
+              <a:ext uri="{FF2B5EF4-FFF2-40B4-BE49-F238E27FC236}">
+                <a16:creationId xmlns:a16="http://schemas.microsoft.com/office/drawing/2014/main" id="{636C1E2A-AC35-76CA-EBEE-CAD4F26CF45A}"/>
+              </a:ext>
+            </a:extLst>
+          </p:cNvPr>
+          <p:cNvSpPr/>
+          <p:nvPr/>
+        </p:nvSpPr>
+        <p:spPr>
+          <a:xfrm>
+            <a:off x="1460711" y="3038203"/>
+            <a:ext cx="6984604" cy="584775"/>
+          </a:xfrm>
+          <a:prstGeom prst="rect">
+            <a:avLst/>
+          </a:prstGeom>
+        </p:spPr>
+        <p:txBody>
+          <a:bodyPr wrap="none">
+            <a:spAutoFit/>
+          </a:bodyPr>
+          <a:lstStyle/>
+          <a:p>
+            <a:pPr algn="ctr"/>
+            <a:r>
+              <a:rPr lang="en-US" altLang="ja-JP" sz="3200" b="1" dirty="0">
+                <a:solidFill>
+                  <a:schemeClr val="tx1">
+                    <a:lumMod val="75000"/>
+                    <a:lumOff val="25000"/>
+                  </a:schemeClr>
+                </a:solidFill>
+                <a:latin typeface="メイリオ" panose="020B0604030504040204" pitchFamily="50" charset="-128"/>
+                <a:ea typeface="メイリオ" panose="020B0604030504040204" pitchFamily="50" charset="-128"/>
+                <a:cs typeface="メイリオ" panose="020B0604030504040204" pitchFamily="50" charset="-128"/>
+              </a:rPr>
+              <a:t>Appendix</a:t>
+            </a:r>
+            <a:endParaRPr lang="en-US" altLang="ja-IS" sz="3200" b="1" dirty="0">
+              <a:solidFill>
+                <a:schemeClr val="tx1">
+                  <a:lumMod val="75000"/>
+                  <a:lumOff val="25000"/>
+                </a:schemeClr>
+              </a:solidFill>
+              <a:latin typeface="メイリオ" panose="020B0604030504040204" pitchFamily="50" charset="-128"/>
+              <a:ea typeface="メイリオ" panose="020B0604030504040204" pitchFamily="50" charset="-128"/>
+              <a:cs typeface="メイリオ" panose="020B0604030504040204" pitchFamily="50" charset="-128"/>
+            </a:endParaRPr>
+          </a:p>
+        </p:txBody>
+      </p:sp>
+    </p:spTree>
+  </p:cSld>
+  <p:clrMapOvr>
+    <a:masterClrMapping/>
+  </p:clrMapOvr>
+</p:sld>
+</file>
+
+<file path=ppt/slides/slide76.xml><?xml version="1.0" encoding="utf-8"?>
+<p:sld xmlns:a="http://schemas.openxmlformats.org/drawingml/2006/main" xmlns:p="http://schemas.openxmlformats.org/presentationml/2006/main" xmlns:r="http://schemas.openxmlformats.org/officeDocument/2006/relationships">
+  <p:cSld>
+    <p:spTree>
+      <p:nvGrpSpPr>
+        <p:cNvPr id="1" name=""/>
+        <p:cNvGrpSpPr/>
+        <p:nvPr/>
+      </p:nvGrpSpPr>
+      <p:grpSpPr/>
+      <p:sp>
+        <p:nvSpPr>
+          <p:cNvPr id="22" name="Google Shape;752;p28">
+            <a:extLst>
+              <a:ext uri="{FF2B5EF4-FFF2-40B4-BE49-F238E27FC236}">
+                <a16:creationId xmlns:a16="http://schemas.microsoft.com/office/drawing/2014/main" id="{AB249BA1-EB38-DDA6-8221-FC109239C49F}"/>
+              </a:ext>
+            </a:extLst>
+          </p:cNvPr>
+          <p:cNvSpPr txBox="1"/>
+          <p:nvPr/>
+        </p:nvSpPr>
+        <p:spPr>
+          <a:xfrm>
+            <a:off x="548883" y="138138"/>
+            <a:ext cx="6276325" cy="338514"/>
+          </a:xfrm>
+          <a:prstGeom prst="rect">
+            <a:avLst/>
+          </a:prstGeom>
+          <a:noFill/>
+          <a:ln>
+            <a:noFill/>
+          </a:ln>
+        </p:spPr>
+        <p:txBody>
+          <a:bodyPr spcFirstLastPara="1" wrap="square" lIns="91425" tIns="45700" rIns="91425" bIns="45700" anchor="ctr" anchorCtr="0">
+            <a:spAutoFit/>
+          </a:bodyPr>
+          <a:lstStyle/>
+          <a:p>
+            <a:pPr lvl="0"/>
+            <a:r>
+              <a:rPr lang="ja-JP" altLang="en-US" sz="1600" b="1" dirty="0">
+                <a:solidFill>
+                  <a:srgbClr val="002060"/>
+                </a:solidFill>
+                <a:latin typeface="メイリオ"/>
+                <a:ea typeface="メイリオ"/>
+                <a:cs typeface="メイリオ"/>
+                <a:sym typeface="Meiryo"/>
+              </a:rPr>
+              <a:t>新規友だちの追加</a:t>
+            </a:r>
+            <a:r>
+              <a:rPr lang="ja-JP" altLang="en-US" sz="1600" b="1" dirty="0">
+                <a:solidFill>
+                  <a:srgbClr val="323366"/>
+                </a:solidFill>
+                <a:latin typeface="メイリオ" panose="020B0604030504040204" pitchFamily="50" charset="-128"/>
+                <a:ea typeface="メイリオ" panose="020B0604030504040204" pitchFamily="50" charset="-128"/>
+                <a:cs typeface="メイリオ"/>
+                <a:sym typeface="Meiryo"/>
+              </a:rPr>
+              <a:t>（ポップアップ </a:t>
+            </a:r>
+            <a:r>
+              <a:rPr lang="en-US" altLang="ja-JP" sz="1600" b="1" dirty="0">
+                <a:solidFill>
+                  <a:srgbClr val="323366"/>
+                </a:solidFill>
+                <a:latin typeface="メイリオ" panose="020B0604030504040204" pitchFamily="50" charset="-128"/>
+                <a:ea typeface="メイリオ" panose="020B0604030504040204" pitchFamily="50" charset="-128"/>
+                <a:cs typeface="メイリオ"/>
+                <a:sym typeface="Meiryo"/>
+              </a:rPr>
+              <a:t>/ </a:t>
+            </a:r>
+            <a:r>
+              <a:rPr lang="ja-JP" altLang="en-US" sz="1600" b="1" dirty="0">
+                <a:solidFill>
+                  <a:srgbClr val="323366"/>
+                </a:solidFill>
+                <a:latin typeface="メイリオ" panose="020B0604030504040204" pitchFamily="50" charset="-128"/>
+                <a:ea typeface="メイリオ" panose="020B0604030504040204" pitchFamily="50" charset="-128"/>
+                <a:cs typeface="メイリオ"/>
+                <a:sym typeface="Meiryo"/>
+              </a:rPr>
+              <a:t>離脱防止）</a:t>
+            </a:r>
+          </a:p>
+        </p:txBody>
+      </p:sp>
+      <p:grpSp>
+        <p:nvGrpSpPr>
+          <p:cNvPr id="3" name="グループ化 2">
+            <a:extLst>
+              <a:ext uri="{FF2B5EF4-FFF2-40B4-BE49-F238E27FC236}">
+                <a16:creationId xmlns:a16="http://schemas.microsoft.com/office/drawing/2014/main" id="{EA805D6F-0719-17C7-4E97-2705F1D9A93C}"/>
+              </a:ext>
+            </a:extLst>
+          </p:cNvPr>
+          <p:cNvGrpSpPr/>
+          <p:nvPr/>
+        </p:nvGrpSpPr>
+        <p:grpSpPr>
+          <a:xfrm>
+            <a:off x="543398" y="777681"/>
+            <a:ext cx="3105325" cy="485102"/>
+            <a:chOff x="507969" y="928495"/>
+            <a:chExt cx="3105325" cy="485102"/>
+          </a:xfrm>
+        </p:grpSpPr>
+        <p:sp>
+          <p:nvSpPr>
+            <p:cNvPr id="4" name="Google Shape;51;p19">
+              <a:extLst>
+                <a:ext uri="{FF2B5EF4-FFF2-40B4-BE49-F238E27FC236}">
+                  <a16:creationId xmlns:a16="http://schemas.microsoft.com/office/drawing/2014/main" id="{0895EF17-7734-EE92-7BF3-5B0ADCDC65B8}"/>
+                </a:ext>
+              </a:extLst>
+            </p:cNvPr>
+            <p:cNvSpPr/>
+            <p:nvPr/>
+          </p:nvSpPr>
+          <p:spPr>
+            <a:xfrm>
+              <a:off x="507969" y="928495"/>
+              <a:ext cx="3105325" cy="485102"/>
+            </a:xfrm>
+            <a:prstGeom prst="roundRect">
+              <a:avLst>
+                <a:gd name="adj" fmla="val 16667"/>
+              </a:avLst>
+            </a:prstGeom>
+            <a:solidFill>
+              <a:schemeClr val="dk1"/>
+            </a:solidFill>
+            <a:ln>
+              <a:noFill/>
+            </a:ln>
+          </p:spPr>
+          <p:txBody>
+            <a:bodyPr spcFirstLastPara="1" wrap="square" lIns="91425" tIns="45700" rIns="91425" bIns="45700" anchor="ctr" anchorCtr="0">
+              <a:noAutofit/>
+            </a:bodyPr>
+            <a:lstStyle>
+              <a:defPPr marR="0" lvl="0" algn="l" rtl="0">
+                <a:lnSpc>
+                  <a:spcPct val="100000"/>
+                </a:lnSpc>
+                <a:spcBef>
+                  <a:spcPts val="0"/>
+                </a:spcBef>
+                <a:spcAft>
+                  <a:spcPts val="0"/>
+                </a:spcAft>
+              </a:defPPr>
+              <a:lvl1pPr marR="0" lvl="0" algn="l" rtl="0">
+                <a:lnSpc>
+                  <a:spcPct val="100000"/>
+                </a:lnSpc>
+                <a:spcBef>
+                  <a:spcPts val="0"/>
+                </a:spcBef>
+                <a:spcAft>
+                  <a:spcPts val="0"/>
+                </a:spcAft>
+                <a:buClr>
+                  <a:srgbClr val="000000"/>
+                </a:buClr>
+                <a:buFont typeface="Arial"/>
+                <a:defRPr sz="1400" b="0" i="0" u="none" strike="noStrike" cap="none">
+                  <a:solidFill>
+                    <a:srgbClr val="000000"/>
+                  </a:solidFill>
+                  <a:latin typeface="メイリオ"/>
+                  <a:ea typeface="メイリオ"/>
+                  <a:cs typeface="メイリオ"/>
+                  <a:sym typeface="Arial"/>
+                </a:defRPr>
+              </a:lvl1pPr>
+              <a:lvl2pPr marR="0" lvl="1" algn="l" rtl="0">
+                <a:lnSpc>
+                  <a:spcPct val="100000"/>
+                </a:lnSpc>
+                <a:spcBef>
+                  <a:spcPts val="0"/>
+                </a:spcBef>
+                <a:spcAft>
+                  <a:spcPts val="0"/>
+                </a:spcAft>
+                <a:buClr>
+                  <a:srgbClr val="000000"/>
+                </a:buClr>
+                <a:buFont typeface="Arial"/>
+                <a:defRPr sz="1400" b="0" i="0" u="none" strike="noStrike" cap="none">
+                  <a:solidFill>
+                    <a:srgbClr val="000000"/>
+                  </a:solidFill>
+                  <a:latin typeface="メイリオ"/>
+                  <a:ea typeface="メイリオ"/>
+                  <a:cs typeface="メイリオ"/>
+                  <a:sym typeface="Arial"/>
+                </a:defRPr>
+              </a:lvl2pPr>
+              <a:lvl3pPr marR="0" lvl="2" algn="l" rtl="0">
+                <a:lnSpc>
+                  <a:spcPct val="100000"/>
+                </a:lnSpc>
+                <a:spcBef>
+                  <a:spcPts val="0"/>
+                </a:spcBef>
+                <a:spcAft>
+                  <a:spcPts val="0"/>
+                </a:spcAft>
+                <a:buClr>
+                  <a:srgbClr val="000000"/>
+                </a:buClr>
+                <a:buFont typeface="Arial"/>
+                <a:defRPr sz="1400" b="0" i="0" u="none" strike="noStrike" cap="none">
+                  <a:solidFill>
+                    <a:srgbClr val="000000"/>
+                  </a:solidFill>
+                  <a:latin typeface="メイリオ"/>
+                  <a:ea typeface="メイリオ"/>
+                  <a:cs typeface="メイリオ"/>
+                  <a:sym typeface="Arial"/>
+                </a:defRPr>
+              </a:lvl3pPr>
+              <a:lvl4pPr marR="0" lvl="3" algn="l" rtl="0">
+                <a:lnSpc>
+                  <a:spcPct val="100000"/>
+                </a:lnSpc>
+                <a:spcBef>
+                  <a:spcPts val="0"/>
+                </a:spcBef>
+                <a:spcAft>
+                  <a:spcPts val="0"/>
+                </a:spcAft>
+                <a:buClr>
+                  <a:srgbClr val="000000"/>
+                </a:buClr>
+                <a:buFont typeface="Arial"/>
+                <a:defRPr sz="1400" b="0" i="0" u="none" strike="noStrike" cap="none">
+                  <a:solidFill>
+                    <a:srgbClr val="000000"/>
+                  </a:solidFill>
+                  <a:latin typeface="メイリオ"/>
+                  <a:ea typeface="メイリオ"/>
+                  <a:cs typeface="メイリオ"/>
+                  <a:sym typeface="Arial"/>
+                </a:defRPr>
+              </a:lvl4pPr>
+              <a:lvl5pPr marR="0" lvl="4" algn="l" rtl="0">
+                <a:lnSpc>
+                  <a:spcPct val="100000"/>
+                </a:lnSpc>
+                <a:spcBef>
+                  <a:spcPts val="0"/>
+                </a:spcBef>
+                <a:spcAft>
+                  <a:spcPts val="0"/>
+                </a:spcAft>
+                <a:buClr>
+                  <a:srgbClr val="000000"/>
+                </a:buClr>
+                <a:buFont typeface="Arial"/>
+                <a:defRPr sz="1400" b="0" i="0" u="none" strike="noStrike" cap="none">
+                  <a:solidFill>
+                    <a:srgbClr val="000000"/>
+                  </a:solidFill>
+                  <a:latin typeface="メイリオ"/>
+                  <a:ea typeface="メイリオ"/>
+                  <a:cs typeface="メイリオ"/>
+                  <a:sym typeface="Arial"/>
+                </a:defRPr>
+              </a:lvl5pPr>
+              <a:lvl6pPr marR="0" lvl="5" algn="l" rtl="0">
+                <a:lnSpc>
+                  <a:spcPct val="100000"/>
+                </a:lnSpc>
+                <a:spcBef>
+                  <a:spcPts val="0"/>
+                </a:spcBef>
+                <a:spcAft>
+                  <a:spcPts val="0"/>
+                </a:spcAft>
+                <a:buClr>
+                  <a:srgbClr val="000000"/>
+                </a:buClr>
+                <a:buFont typeface="Arial"/>
+                <a:defRPr sz="1400" b="0" i="0" u="none" strike="noStrike" cap="none">
+                  <a:solidFill>
+                    <a:srgbClr val="000000"/>
+                  </a:solidFill>
+                  <a:latin typeface="メイリオ"/>
+                  <a:ea typeface="メイリオ"/>
+                  <a:cs typeface="メイリオ"/>
+                  <a:sym typeface="Arial"/>
+                </a:defRPr>
+              </a:lvl6pPr>
+              <a:lvl7pPr marR="0" lvl="6" algn="l" rtl="0">
+                <a:lnSpc>
+                  <a:spcPct val="100000"/>
+                </a:lnSpc>
+                <a:spcBef>
+                  <a:spcPts val="0"/>
+                </a:spcBef>
+                <a:spcAft>
+                  <a:spcPts val="0"/>
+                </a:spcAft>
+                <a:buClr>
+                  <a:srgbClr val="000000"/>
+                </a:buClr>
+                <a:buFont typeface="Arial"/>
+                <a:defRPr sz="1400" b="0" i="0" u="none" strike="noStrike" cap="none">
+                  <a:solidFill>
+                    <a:srgbClr val="000000"/>
+                  </a:solidFill>
+                  <a:latin typeface="メイリオ"/>
+                  <a:ea typeface="メイリオ"/>
+                  <a:cs typeface="メイリオ"/>
+                  <a:sym typeface="Arial"/>
+                </a:defRPr>
+              </a:lvl7pPr>
+              <a:lvl8pPr marR="0" lvl="7" algn="l" rtl="0">
+                <a:lnSpc>
+                  <a:spcPct val="100000"/>
+                </a:lnSpc>
+                <a:spcBef>
+                  <a:spcPts val="0"/>
+                </a:spcBef>
+                <a:spcAft>
+                  <a:spcPts val="0"/>
+                </a:spcAft>
+                <a:buClr>
+                  <a:srgbClr val="000000"/>
+                </a:buClr>
+                <a:buFont typeface="Arial"/>
+                <a:defRPr sz="1400" b="0" i="0" u="none" strike="noStrike" cap="none">
+                  <a:solidFill>
+                    <a:srgbClr val="000000"/>
+                  </a:solidFill>
+                  <a:latin typeface="メイリオ"/>
+                  <a:ea typeface="メイリオ"/>
+                  <a:cs typeface="メイリオ"/>
+                  <a:sym typeface="Arial"/>
+                </a:defRPr>
+              </a:lvl8pPr>
+              <a:lvl9pPr marR="0" lvl="8" algn="l" rtl="0">
+                <a:lnSpc>
+                  <a:spcPct val="100000"/>
+                </a:lnSpc>
+                <a:spcBef>
+                  <a:spcPts val="0"/>
+                </a:spcBef>
+                <a:spcAft>
+                  <a:spcPts val="0"/>
+                </a:spcAft>
+                <a:buClr>
+                  <a:srgbClr val="000000"/>
+                </a:buClr>
+                <a:buFont typeface="Arial"/>
+                <a:defRPr sz="1400" b="0" i="0" u="none" strike="noStrike" cap="none">
+                  <a:solidFill>
+                    <a:srgbClr val="000000"/>
+                  </a:solidFill>
+                  <a:latin typeface="メイリオ"/>
+                  <a:ea typeface="メイリオ"/>
+                  <a:cs typeface="メイリオ"/>
+                  <a:sym typeface="Arial"/>
+                </a:defRPr>
+              </a:lvl9pPr>
+            </a:lstStyle>
+            <a:p>
+              <a:pPr marL="0" marR="0" lvl="0" indent="0" algn="ctr" rtl="0">
+                <a:lnSpc>
+                  <a:spcPct val="100000"/>
+                </a:lnSpc>
+                <a:spcBef>
+                  <a:spcPts val="0"/>
+                </a:spcBef>
+                <a:spcAft>
+                  <a:spcPts val="0"/>
+                </a:spcAft>
+                <a:buClr>
+                  <a:srgbClr val="000000"/>
+                </a:buClr>
+                <a:buSzPts val="1400"/>
+                <a:buFont typeface="Arial"/>
+                <a:buNone/>
+              </a:pPr>
+              <a:endParaRPr sz="1400" b="1" i="0" u="none" strike="noStrike" cap="none" dirty="0">
+                <a:solidFill>
+                  <a:schemeClr val="lt1"/>
+                </a:solidFill>
+                <a:latin typeface="メイリオ"/>
+                <a:ea typeface="メイリオ"/>
+                <a:cs typeface="メイリオ"/>
+                <a:sym typeface="Meiryo"/>
+              </a:endParaRPr>
+            </a:p>
+          </p:txBody>
+        </p:sp>
+        <p:sp>
+          <p:nvSpPr>
+            <p:cNvPr id="5" name="テキスト ボックス 4">
+              <a:extLst>
+                <a:ext uri="{FF2B5EF4-FFF2-40B4-BE49-F238E27FC236}">
+                  <a16:creationId xmlns:a16="http://schemas.microsoft.com/office/drawing/2014/main" id="{23AD98A9-882F-05AA-BB4E-3FB88AAA7C20}"/>
+                </a:ext>
+              </a:extLst>
+            </p:cNvPr>
+            <p:cNvSpPr txBox="1"/>
+            <p:nvPr/>
+          </p:nvSpPr>
+          <p:spPr>
+            <a:xfrm>
+              <a:off x="687498" y="938979"/>
+              <a:ext cx="2746265" cy="357790"/>
+            </a:xfrm>
+            <a:prstGeom prst="rect">
+              <a:avLst/>
+            </a:prstGeom>
+            <a:noFill/>
+          </p:spPr>
+          <p:txBody>
+            <a:bodyPr wrap="none" rtlCol="0">
+              <a:spAutoFit/>
+            </a:bodyPr>
+            <a:lstStyle>
+              <a:defPPr marR="0" lvl="0" algn="l" rtl="0">
+                <a:lnSpc>
+                  <a:spcPct val="100000"/>
+                </a:lnSpc>
+                <a:spcBef>
+                  <a:spcPts val="0"/>
+                </a:spcBef>
+                <a:spcAft>
+                  <a:spcPts val="0"/>
+                </a:spcAft>
+              </a:defPPr>
+              <a:lvl1pPr marR="0" lvl="0" algn="l" rtl="0">
+                <a:lnSpc>
+                  <a:spcPct val="100000"/>
+                </a:lnSpc>
+                <a:spcBef>
+                  <a:spcPts val="0"/>
+                </a:spcBef>
+                <a:spcAft>
+                  <a:spcPts val="0"/>
+                </a:spcAft>
+                <a:buClr>
+                  <a:srgbClr val="000000"/>
+                </a:buClr>
+                <a:buFont typeface="Arial"/>
+                <a:defRPr sz="1400" b="0" i="0" u="none" strike="noStrike" cap="none">
+                  <a:solidFill>
+                    <a:srgbClr val="000000"/>
+                  </a:solidFill>
+                  <a:latin typeface="メイリオ"/>
+                  <a:ea typeface="メイリオ"/>
+                  <a:cs typeface="メイリオ"/>
+                  <a:sym typeface="Arial"/>
+                </a:defRPr>
+              </a:lvl1pPr>
+              <a:lvl2pPr marR="0" lvl="1" algn="l" rtl="0">
+                <a:lnSpc>
+                  <a:spcPct val="100000"/>
+                </a:lnSpc>
+                <a:spcBef>
+                  <a:spcPts val="0"/>
+                </a:spcBef>
+                <a:spcAft>
+                  <a:spcPts val="0"/>
+                </a:spcAft>
+                <a:buClr>
+                  <a:srgbClr val="000000"/>
+                </a:buClr>
+                <a:buFont typeface="Arial"/>
+                <a:defRPr sz="1400" b="0" i="0" u="none" strike="noStrike" cap="none">
+                  <a:solidFill>
+                    <a:srgbClr val="000000"/>
+                  </a:solidFill>
+                  <a:latin typeface="メイリオ"/>
+                  <a:ea typeface="メイリオ"/>
+                  <a:cs typeface="メイリオ"/>
+                  <a:sym typeface="Arial"/>
+                </a:defRPr>
+              </a:lvl2pPr>
+              <a:lvl3pPr marR="0" lvl="2" algn="l" rtl="0">
+                <a:lnSpc>
+                  <a:spcPct val="100000"/>
+                </a:lnSpc>
+                <a:spcBef>
+                  <a:spcPts val="0"/>
+                </a:spcBef>
+                <a:spcAft>
+                  <a:spcPts val="0"/>
+                </a:spcAft>
+                <a:buClr>
+                  <a:srgbClr val="000000"/>
+                </a:buClr>
+                <a:buFont typeface="Arial"/>
+                <a:defRPr sz="1400" b="0" i="0" u="none" strike="noStrike" cap="none">
+                  <a:solidFill>
+                    <a:srgbClr val="000000"/>
+                  </a:solidFill>
+                  <a:latin typeface="メイリオ"/>
+                  <a:ea typeface="メイリオ"/>
+                  <a:cs typeface="メイリオ"/>
+                  <a:sym typeface="Arial"/>
+                </a:defRPr>
+              </a:lvl3pPr>
+              <a:lvl4pPr marR="0" lvl="3" algn="l" rtl="0">
+                <a:lnSpc>
+                  <a:spcPct val="100000"/>
+                </a:lnSpc>
+                <a:spcBef>
+                  <a:spcPts val="0"/>
+                </a:spcBef>
+                <a:spcAft>
+                  <a:spcPts val="0"/>
+                </a:spcAft>
+                <a:buClr>
+                  <a:srgbClr val="000000"/>
+                </a:buClr>
+                <a:buFont typeface="Arial"/>
+                <a:defRPr sz="1400" b="0" i="0" u="none" strike="noStrike" cap="none">
+                  <a:solidFill>
+                    <a:srgbClr val="000000"/>
+                  </a:solidFill>
+                  <a:latin typeface="メイリオ"/>
+                  <a:ea typeface="メイリオ"/>
+                  <a:cs typeface="メイリオ"/>
+                  <a:sym typeface="Arial"/>
+                </a:defRPr>
+              </a:lvl4pPr>
+              <a:lvl5pPr marR="0" lvl="4" algn="l" rtl="0">
+                <a:lnSpc>
+                  <a:spcPct val="100000"/>
+                </a:lnSpc>
+                <a:spcBef>
+                  <a:spcPts val="0"/>
+                </a:spcBef>
+                <a:spcAft>
+                  <a:spcPts val="0"/>
+                </a:spcAft>
+                <a:buClr>
+                  <a:srgbClr val="000000"/>
+                </a:buClr>
+                <a:buFont typeface="Arial"/>
+                <a:defRPr sz="1400" b="0" i="0" u="none" strike="noStrike" cap="none">
+                  <a:solidFill>
+                    <a:srgbClr val="000000"/>
+                  </a:solidFill>
+                  <a:latin typeface="メイリオ"/>
+                  <a:ea typeface="メイリオ"/>
+                  <a:cs typeface="メイリオ"/>
+                  <a:sym typeface="Arial"/>
+                </a:defRPr>
+              </a:lvl5pPr>
+              <a:lvl6pPr marR="0" lvl="5" algn="l" rtl="0">
+                <a:lnSpc>
+                  <a:spcPct val="100000"/>
+                </a:lnSpc>
+                <a:spcBef>
+                  <a:spcPts val="0"/>
+                </a:spcBef>
+                <a:spcAft>
+                  <a:spcPts val="0"/>
+                </a:spcAft>
+                <a:buClr>
+                  <a:srgbClr val="000000"/>
+                </a:buClr>
+                <a:buFont typeface="Arial"/>
+                <a:defRPr sz="1400" b="0" i="0" u="none" strike="noStrike" cap="none">
+                  <a:solidFill>
+                    <a:srgbClr val="000000"/>
+                  </a:solidFill>
+                  <a:latin typeface="メイリオ"/>
+                  <a:ea typeface="メイリオ"/>
+                  <a:cs typeface="メイリオ"/>
+                  <a:sym typeface="Arial"/>
+                </a:defRPr>
+              </a:lvl6pPr>
+              <a:lvl7pPr marR="0" lvl="6" algn="l" rtl="0">
+                <a:lnSpc>
+                  <a:spcPct val="100000"/>
+                </a:lnSpc>
+                <a:spcBef>
+                  <a:spcPts val="0"/>
+                </a:spcBef>
+                <a:spcAft>
+                  <a:spcPts val="0"/>
+                </a:spcAft>
+                <a:buClr>
+                  <a:srgbClr val="000000"/>
+                </a:buClr>
+                <a:buFont typeface="Arial"/>
+                <a:defRPr sz="1400" b="0" i="0" u="none" strike="noStrike" cap="none">
+                  <a:solidFill>
+                    <a:srgbClr val="000000"/>
+                  </a:solidFill>
+                  <a:latin typeface="メイリオ"/>
+                  <a:ea typeface="メイリオ"/>
+                  <a:cs typeface="メイリオ"/>
+                  <a:sym typeface="Arial"/>
+                </a:defRPr>
+              </a:lvl7pPr>
+              <a:lvl8pPr marR="0" lvl="7" algn="l" rtl="0">
+                <a:lnSpc>
+                  <a:spcPct val="100000"/>
+                </a:lnSpc>
+                <a:spcBef>
+                  <a:spcPts val="0"/>
+                </a:spcBef>
+                <a:spcAft>
+                  <a:spcPts val="0"/>
+                </a:spcAft>
+                <a:buClr>
+                  <a:srgbClr val="000000"/>
+                </a:buClr>
+                <a:buFont typeface="Arial"/>
+                <a:defRPr sz="1400" b="0" i="0" u="none" strike="noStrike" cap="none">
+                  <a:solidFill>
+                    <a:srgbClr val="000000"/>
+                  </a:solidFill>
+                  <a:latin typeface="メイリオ"/>
+                  <a:ea typeface="メイリオ"/>
+                  <a:cs typeface="メイリオ"/>
+                  <a:sym typeface="Arial"/>
+                </a:defRPr>
+              </a:lvl8pPr>
+              <a:lvl9pPr marR="0" lvl="8" algn="l" rtl="0">
+                <a:lnSpc>
+                  <a:spcPct val="100000"/>
+                </a:lnSpc>
+                <a:spcBef>
+                  <a:spcPts val="0"/>
+                </a:spcBef>
+                <a:spcAft>
+                  <a:spcPts val="0"/>
+                </a:spcAft>
+                <a:buClr>
+                  <a:srgbClr val="000000"/>
+                </a:buClr>
+                <a:buFont typeface="Arial"/>
+                <a:defRPr sz="1400" b="0" i="0" u="none" strike="noStrike" cap="none">
+                  <a:solidFill>
+                    <a:srgbClr val="000000"/>
+                  </a:solidFill>
+                  <a:latin typeface="メイリオ"/>
+                  <a:ea typeface="メイリオ"/>
+                  <a:cs typeface="メイリオ"/>
+                  <a:sym typeface="Arial"/>
+                </a:defRPr>
+              </a:lvl9pPr>
+            </a:lstStyle>
+            <a:p>
+              <a:pPr>
+                <a:lnSpc>
+                  <a:spcPct val="120000"/>
+                </a:lnSpc>
+              </a:pPr>
+              <a:r>
+                <a:rPr kumimoji="1" lang="ja-JP" altLang="en-US" sz="1500" b="1" dirty="0">
+                  <a:solidFill>
+                    <a:schemeClr val="bg1"/>
+                  </a:solidFill>
+                  <a:latin typeface="メイリオ" panose="020B0604030504040204" pitchFamily="34" charset="-128"/>
+                  <a:ea typeface="メイリオ" panose="020B0604030504040204" pitchFamily="34" charset="-128"/>
+                  <a:cs typeface="メイリオ"/>
+                </a:rPr>
+                <a:t>ポップアップ</a:t>
+              </a:r>
+              <a:r>
+                <a:rPr kumimoji="1" lang="en-US" altLang="ja-JP" sz="1500" b="1" dirty="0">
+                  <a:solidFill>
+                    <a:schemeClr val="bg1"/>
+                  </a:solidFill>
+                  <a:latin typeface="メイリオ" panose="020B0604030504040204" pitchFamily="34" charset="-128"/>
+                  <a:ea typeface="メイリオ" panose="020B0604030504040204" pitchFamily="34" charset="-128"/>
+                  <a:cs typeface="メイリオ"/>
+                </a:rPr>
+                <a:t>(</a:t>
+              </a:r>
+              <a:r>
+                <a:rPr kumimoji="1" lang="ja-JP" altLang="en-US" sz="1500" b="1" dirty="0">
+                  <a:solidFill>
+                    <a:schemeClr val="bg1"/>
+                  </a:solidFill>
+                  <a:latin typeface="メイリオ" panose="020B0604030504040204" pitchFamily="34" charset="-128"/>
+                  <a:ea typeface="メイリオ" panose="020B0604030504040204" pitchFamily="34" charset="-128"/>
+                  <a:cs typeface="メイリオ"/>
+                </a:rPr>
+                <a:t>離脱防止 など</a:t>
+              </a:r>
+              <a:r>
+                <a:rPr kumimoji="1" lang="en-US" altLang="ja-JP" sz="1500" b="1" dirty="0">
+                  <a:solidFill>
+                    <a:schemeClr val="bg1"/>
+                  </a:solidFill>
+                  <a:latin typeface="メイリオ" panose="020B0604030504040204" pitchFamily="34" charset="-128"/>
+                  <a:ea typeface="メイリオ" panose="020B0604030504040204" pitchFamily="34" charset="-128"/>
+                  <a:cs typeface="メイリオ"/>
+                </a:rPr>
+                <a:t>)</a:t>
+              </a:r>
+              <a:endParaRPr kumimoji="1" lang="ja-JP" altLang="en-US" sz="1500" b="1" dirty="0">
+                <a:solidFill>
+                  <a:schemeClr val="bg1"/>
+                </a:solidFill>
+                <a:latin typeface="メイリオ" panose="020B0604030504040204" pitchFamily="34" charset="-128"/>
+                <a:ea typeface="メイリオ" panose="020B0604030504040204" pitchFamily="34" charset="-128"/>
+                <a:cs typeface="メイリオ"/>
+              </a:endParaRPr>
+            </a:p>
+          </p:txBody>
+        </p:sp>
+      </p:grpSp>
+      <p:sp>
+        <p:nvSpPr>
+          <p:cNvPr id="8" name="正方形/長方形 7">
+            <a:extLst>
+              <a:ext uri="{FF2B5EF4-FFF2-40B4-BE49-F238E27FC236}">
+                <a16:creationId xmlns:a16="http://schemas.microsoft.com/office/drawing/2014/main" id="{EB668975-CA29-64DD-88DF-17EAAC94AE34}"/>
+              </a:ext>
+            </a:extLst>
+          </p:cNvPr>
+          <p:cNvSpPr/>
+          <p:nvPr/>
+        </p:nvSpPr>
+        <p:spPr>
+          <a:xfrm>
+            <a:off x="3806311" y="788165"/>
+            <a:ext cx="5880088" cy="584775"/>
+          </a:xfrm>
+          <a:prstGeom prst="rect">
+            <a:avLst/>
+          </a:prstGeom>
+        </p:spPr>
+        <p:txBody>
+          <a:bodyPr wrap="square">
+            <a:spAutoFit/>
+          </a:bodyPr>
+          <a:lstStyle/>
+          <a:p>
+            <a:pPr lvl="0" algn="ctr">
+              <a:buClr>
+                <a:schemeClr val="dk1"/>
+              </a:buClr>
+              <a:buSzPts val="1500"/>
+            </a:pPr>
+            <a:r>
+              <a:rPr lang="en-US" altLang="ja-JP" sz="1600" dirty="0">
+                <a:latin typeface="メイリオ"/>
+                <a:ea typeface="メイリオ"/>
+                <a:cs typeface="メイリオ"/>
+                <a:sym typeface="Meiryo"/>
+              </a:rPr>
+              <a:t>WEB</a:t>
+            </a:r>
+            <a:r>
+              <a:rPr lang="ja-JP" altLang="en-US" sz="1600" dirty="0">
+                <a:latin typeface="メイリオ"/>
+                <a:ea typeface="メイリオ"/>
+                <a:cs typeface="メイリオ"/>
+                <a:sym typeface="Meiryo"/>
+              </a:rPr>
+              <a:t>サイト上の特定アクションを起こしたユーザーに対して</a:t>
+            </a:r>
+            <a:endParaRPr lang="en-US" altLang="ja-JP" sz="1600" dirty="0">
+              <a:latin typeface="メイリオ"/>
+              <a:ea typeface="メイリオ"/>
+              <a:cs typeface="メイリオ"/>
+              <a:sym typeface="Meiryo"/>
+            </a:endParaRPr>
+          </a:p>
+          <a:p>
+            <a:pPr lvl="0" algn="ctr">
+              <a:buClr>
+                <a:schemeClr val="dk1"/>
+              </a:buClr>
+              <a:buSzPts val="1500"/>
+            </a:pPr>
+            <a:r>
+              <a:rPr lang="ja-JP" altLang="en-US" sz="1600" dirty="0">
+                <a:latin typeface="メイリオ"/>
+                <a:ea typeface="メイリオ"/>
+                <a:cs typeface="メイリオ"/>
+                <a:sym typeface="Meiryo"/>
+              </a:rPr>
+              <a:t>ポップアップの形で</a:t>
+            </a:r>
+            <a:r>
+              <a:rPr lang="en-US" altLang="ja-JP" sz="1600" dirty="0">
+                <a:latin typeface="メイリオ"/>
+                <a:ea typeface="メイリオ"/>
+                <a:cs typeface="メイリオ"/>
+                <a:sym typeface="Meiryo"/>
+              </a:rPr>
+              <a:t>LINE</a:t>
+            </a:r>
+            <a:r>
+              <a:rPr lang="ja-JP" altLang="en-US" sz="1600" dirty="0">
+                <a:latin typeface="メイリオ"/>
+                <a:ea typeface="メイリオ"/>
+                <a:cs typeface="メイリオ"/>
+                <a:sym typeface="Meiryo"/>
+              </a:rPr>
+              <a:t>誘導の動線を提示。</a:t>
+            </a:r>
+          </a:p>
+        </p:txBody>
+      </p:sp>
+      <p:pic>
+        <p:nvPicPr>
+          <p:cNvPr id="6" name="図 5">
+            <a:extLst>
+              <a:ext uri="{FF2B5EF4-FFF2-40B4-BE49-F238E27FC236}">
+                <a16:creationId xmlns:a16="http://schemas.microsoft.com/office/drawing/2014/main" id="{4BC18E84-0DF3-01E6-D82D-0A9DCD2D5F30}"/>
+              </a:ext>
+            </a:extLst>
+          </p:cNvPr>
+          <p:cNvPicPr>
+            <a:picLocks noChangeAspect="1"/>
+          </p:cNvPicPr>
+          <p:nvPr/>
+        </p:nvPicPr>
+        <p:blipFill>
+          <a:blip r:embed="rId3"/>
+          <a:stretch>
+            <a:fillRect/>
+          </a:stretch>
+        </p:blipFill>
+        <p:spPr>
+          <a:xfrm>
+            <a:off x="5764329" y="2258734"/>
+            <a:ext cx="1524677" cy="3096752"/>
+          </a:xfrm>
+          <a:prstGeom prst="rect">
+            <a:avLst/>
+          </a:prstGeom>
+        </p:spPr>
+      </p:pic>
+      <p:sp>
+        <p:nvSpPr>
+          <p:cNvPr id="9" name="テキスト ボックス 8">
+            <a:extLst>
+              <a:ext uri="{FF2B5EF4-FFF2-40B4-BE49-F238E27FC236}">
+                <a16:creationId xmlns:a16="http://schemas.microsoft.com/office/drawing/2014/main" id="{10FACA28-BE3D-80E4-091C-39F6141694C7}"/>
+              </a:ext>
+            </a:extLst>
+          </p:cNvPr>
+          <p:cNvSpPr txBox="1"/>
+          <p:nvPr/>
+        </p:nvSpPr>
+        <p:spPr>
+          <a:xfrm>
+            <a:off x="5214938" y="1372940"/>
+            <a:ext cx="4148137" cy="261610"/>
+          </a:xfrm>
+          <a:prstGeom prst="rect">
+            <a:avLst/>
+          </a:prstGeom>
+          <a:noFill/>
+        </p:spPr>
+        <p:txBody>
+          <a:bodyPr wrap="square">
+            <a:spAutoFit/>
+          </a:bodyPr>
+          <a:lstStyle/>
+          <a:p>
+            <a:r>
+              <a:rPr lang="en-US" altLang="ja-JP" sz="1050" dirty="0">
+                <a:solidFill>
+                  <a:srgbClr val="FF0000"/>
+                </a:solidFill>
+                <a:latin typeface="メイリオ"/>
+                <a:ea typeface="メイリオ"/>
+                <a:cs typeface="メイリオ"/>
+                <a:sym typeface="Meiryo"/>
+              </a:rPr>
+              <a:t>LINE</a:t>
+            </a:r>
+            <a:r>
+              <a:rPr lang="ja-JP" altLang="en-US" sz="1050" dirty="0">
+                <a:solidFill>
+                  <a:srgbClr val="FF0000"/>
+                </a:solidFill>
+                <a:latin typeface="メイリオ"/>
+                <a:ea typeface="メイリオ"/>
+                <a:cs typeface="メイリオ"/>
+                <a:sym typeface="Meiryo"/>
+              </a:rPr>
+              <a:t>以外の注力動線への誘導も同バナーから実施が可能です。</a:t>
+            </a:r>
+            <a:endParaRPr lang="ja-JP" altLang="en-US" sz="1050" dirty="0">
+              <a:solidFill>
+                <a:srgbClr val="FF0000"/>
+              </a:solidFill>
+              <a:latin typeface="メイリオ"/>
+              <a:ea typeface="メイリオ"/>
+              <a:cs typeface="メイリオ"/>
+            </a:endParaRPr>
+          </a:p>
+        </p:txBody>
+      </p:sp>
+      <p:pic>
+        <p:nvPicPr>
+          <p:cNvPr id="11" name="図 10">
+            <a:extLst>
+              <a:ext uri="{FF2B5EF4-FFF2-40B4-BE49-F238E27FC236}">
+                <a16:creationId xmlns:a16="http://schemas.microsoft.com/office/drawing/2014/main" id="{FC908A63-1EE8-A605-1D4F-460FED9442AA}"/>
+              </a:ext>
+            </a:extLst>
+          </p:cNvPr>
+          <p:cNvPicPr>
+            <a:picLocks noChangeAspect="1"/>
+          </p:cNvPicPr>
+          <p:nvPr/>
+        </p:nvPicPr>
+        <p:blipFill>
+          <a:blip r:embed="rId3"/>
+          <a:stretch>
+            <a:fillRect/>
+          </a:stretch>
+        </p:blipFill>
+        <p:spPr>
+          <a:xfrm>
+            <a:off x="8032877" y="2846109"/>
+            <a:ext cx="1524677" cy="3096752"/>
+          </a:xfrm>
+          <a:prstGeom prst="rect">
+            <a:avLst/>
+          </a:prstGeom>
+        </p:spPr>
+      </p:pic>
+      <p:sp>
+        <p:nvSpPr>
+          <p:cNvPr id="12" name="矢印: 右 11">
+            <a:extLst>
+              <a:ext uri="{FF2B5EF4-FFF2-40B4-BE49-F238E27FC236}">
+                <a16:creationId xmlns:a16="http://schemas.microsoft.com/office/drawing/2014/main" id="{C5B2A6E8-796B-963F-0A04-9B9D1A36ADF0}"/>
+              </a:ext>
+            </a:extLst>
+          </p:cNvPr>
+          <p:cNvSpPr/>
+          <p:nvPr/>
+        </p:nvSpPr>
+        <p:spPr>
+          <a:xfrm>
+            <a:off x="7373222" y="3359435"/>
+            <a:ext cx="571500" cy="619125"/>
+          </a:xfrm>
+          <a:prstGeom prst="rightArrow">
+            <a:avLst>
+              <a:gd name="adj1" fmla="val 64359"/>
+              <a:gd name="adj2" fmla="val 50000"/>
+            </a:avLst>
+          </a:prstGeom>
+          <a:solidFill>
+            <a:schemeClr val="tx2">
+              <a:lumMod val="50000"/>
+            </a:schemeClr>
+          </a:solidFill>
+          <a:ln>
+            <a:noFill/>
+          </a:ln>
+        </p:spPr>
+        <p:style>
+          <a:lnRef idx="2">
+            <a:schemeClr val="accent1">
+              <a:shade val="15000"/>
+            </a:schemeClr>
+          </a:lnRef>
+          <a:fillRef idx="1">
+            <a:schemeClr val="accent1"/>
+          </a:fillRef>
+          <a:effectRef idx="0">
+            <a:schemeClr val="accent1"/>
+          </a:effectRef>
+          <a:fontRef idx="minor">
+            <a:schemeClr val="lt1"/>
+          </a:fontRef>
+        </p:style>
+        <p:txBody>
+          <a:bodyPr rtlCol="0" anchor="ctr"/>
+          <a:lstStyle/>
+          <a:p>
+            <a:pPr algn="ctr"/>
+            <a:endParaRPr kumimoji="1" lang="ja-JP" altLang="en-US">
+              <a:latin typeface="メイリオ"/>
+              <a:ea typeface="メイリオ"/>
+              <a:cs typeface="メイリオ"/>
+            </a:endParaRPr>
+          </a:p>
+        </p:txBody>
+      </p:sp>
+      <p:sp>
+        <p:nvSpPr>
+          <p:cNvPr id="13" name="正方形/長方形 12">
+            <a:extLst>
+              <a:ext uri="{FF2B5EF4-FFF2-40B4-BE49-F238E27FC236}">
+                <a16:creationId xmlns:a16="http://schemas.microsoft.com/office/drawing/2014/main" id="{DB49FAB7-0FB8-4D5F-CF13-A19BBA28C8C7}"/>
+              </a:ext>
+            </a:extLst>
+          </p:cNvPr>
+          <p:cNvSpPr/>
+          <p:nvPr/>
+        </p:nvSpPr>
+        <p:spPr>
+          <a:xfrm>
+            <a:off x="8117093" y="3057525"/>
+            <a:ext cx="1371145" cy="2585494"/>
+          </a:xfrm>
+          <a:prstGeom prst="rect">
+            <a:avLst/>
+          </a:prstGeom>
+          <a:solidFill>
+            <a:schemeClr val="tx1">
+              <a:lumMod val="75000"/>
+              <a:lumOff val="25000"/>
+              <a:alpha val="70000"/>
+            </a:schemeClr>
+          </a:solidFill>
+          <a:ln>
+            <a:noFill/>
+          </a:ln>
+        </p:spPr>
+        <p:style>
+          <a:lnRef idx="2">
+            <a:schemeClr val="accent1">
+              <a:shade val="15000"/>
+            </a:schemeClr>
+          </a:lnRef>
+          <a:fillRef idx="1">
+            <a:schemeClr val="accent1"/>
+          </a:fillRef>
+          <a:effectRef idx="0">
+            <a:schemeClr val="accent1"/>
+          </a:effectRef>
+          <a:fontRef idx="minor">
+            <a:schemeClr val="lt1"/>
+          </a:fontRef>
+        </p:style>
+        <p:txBody>
+          <a:bodyPr rtlCol="0" anchor="ctr"/>
+          <a:lstStyle/>
+          <a:p>
+            <a:pPr algn="ctr"/>
+            <a:endParaRPr kumimoji="1" lang="ja-JP" altLang="en-US">
+              <a:latin typeface="メイリオ"/>
+              <a:ea typeface="メイリオ"/>
+              <a:cs typeface="メイリオ"/>
+            </a:endParaRPr>
+          </a:p>
+        </p:txBody>
+      </p:sp>
+      <p:sp>
+        <p:nvSpPr>
+          <p:cNvPr id="15" name="Google Shape;51;p19">
+            <a:extLst>
+              <a:ext uri="{FF2B5EF4-FFF2-40B4-BE49-F238E27FC236}">
+                <a16:creationId xmlns:a16="http://schemas.microsoft.com/office/drawing/2014/main" id="{1B34220E-1DA3-AC59-C2DE-15AB3320AC1C}"/>
+              </a:ext>
+            </a:extLst>
+          </p:cNvPr>
+          <p:cNvSpPr/>
+          <p:nvPr/>
+        </p:nvSpPr>
+        <p:spPr>
+          <a:xfrm>
+            <a:off x="543399" y="1321261"/>
+            <a:ext cx="1510826" cy="485102"/>
+          </a:xfrm>
+          <a:prstGeom prst="roundRect">
+            <a:avLst>
+              <a:gd name="adj" fmla="val 16667"/>
+            </a:avLst>
+          </a:prstGeom>
+          <a:solidFill>
+            <a:schemeClr val="tx2"/>
+          </a:solidFill>
+          <a:ln>
+            <a:noFill/>
+          </a:ln>
+        </p:spPr>
+        <p:txBody>
+          <a:bodyPr spcFirstLastPara="1" wrap="square" lIns="91425" tIns="45700" rIns="91425" bIns="45700" anchor="ctr" anchorCtr="0">
+            <a:noAutofit/>
+          </a:bodyPr>
+          <a:lstStyle>
+            <a:defPPr marR="0" lvl="0" algn="l" rtl="0">
+              <a:lnSpc>
+                <a:spcPct val="100000"/>
+              </a:lnSpc>
+              <a:spcBef>
+                <a:spcPts val="0"/>
+              </a:spcBef>
+              <a:spcAft>
+                <a:spcPts val="0"/>
+              </a:spcAft>
+            </a:defPPr>
+            <a:lvl1pPr marR="0" lvl="0" algn="l" rtl="0">
+              <a:lnSpc>
+                <a:spcPct val="100000"/>
+              </a:lnSpc>
+              <a:spcBef>
+                <a:spcPts val="0"/>
+              </a:spcBef>
+              <a:spcAft>
+                <a:spcPts val="0"/>
+              </a:spcAft>
+              <a:buClr>
+                <a:srgbClr val="000000"/>
+              </a:buClr>
+              <a:buFont typeface="Arial"/>
+              <a:defRPr sz="1400" b="0" i="0" u="none" strike="noStrike" cap="none">
+                <a:solidFill>
+                  <a:srgbClr val="000000"/>
+                </a:solidFill>
+                <a:latin typeface="メイリオ"/>
+                <a:ea typeface="メイリオ"/>
+                <a:cs typeface="メイリオ"/>
+                <a:sym typeface="Arial"/>
+              </a:defRPr>
+            </a:lvl1pPr>
+            <a:lvl2pPr marR="0" lvl="1" algn="l" rtl="0">
+              <a:lnSpc>
+                <a:spcPct val="100000"/>
+              </a:lnSpc>
+              <a:spcBef>
+                <a:spcPts val="0"/>
+              </a:spcBef>
+              <a:spcAft>
+                <a:spcPts val="0"/>
+              </a:spcAft>
+              <a:buClr>
+                <a:srgbClr val="000000"/>
+              </a:buClr>
+              <a:buFont typeface="Arial"/>
+              <a:defRPr sz="1400" b="0" i="0" u="none" strike="noStrike" cap="none">
+                <a:solidFill>
+                  <a:srgbClr val="000000"/>
+                </a:solidFill>
+                <a:latin typeface="メイリオ"/>
+                <a:ea typeface="メイリオ"/>
+                <a:cs typeface="メイリオ"/>
+                <a:sym typeface="Arial"/>
+              </a:defRPr>
+            </a:lvl2pPr>
+            <a:lvl3pPr marR="0" lvl="2" algn="l" rtl="0">
+              <a:lnSpc>
+                <a:spcPct val="100000"/>
+              </a:lnSpc>
+              <a:spcBef>
+                <a:spcPts val="0"/>
+              </a:spcBef>
+              <a:spcAft>
+                <a:spcPts val="0"/>
+              </a:spcAft>
+              <a:buClr>
+                <a:srgbClr val="000000"/>
+              </a:buClr>
+              <a:buFont typeface="Arial"/>
+              <a:defRPr sz="1400" b="0" i="0" u="none" strike="noStrike" cap="none">
+                <a:solidFill>
+                  <a:srgbClr val="000000"/>
+                </a:solidFill>
+                <a:latin typeface="メイリオ"/>
+                <a:ea typeface="メイリオ"/>
+                <a:cs typeface="メイリオ"/>
+                <a:sym typeface="Arial"/>
+              </a:defRPr>
+            </a:lvl3pPr>
+            <a:lvl4pPr marR="0" lvl="3" algn="l" rtl="0">
+              <a:lnSpc>
+                <a:spcPct val="100000"/>
+              </a:lnSpc>
+              <a:spcBef>
+                <a:spcPts val="0"/>
+              </a:spcBef>
+              <a:spcAft>
+                <a:spcPts val="0"/>
+              </a:spcAft>
+              <a:buClr>
+                <a:srgbClr val="000000"/>
+              </a:buClr>
+              <a:buFont typeface="Arial"/>
+              <a:defRPr sz="1400" b="0" i="0" u="none" strike="noStrike" cap="none">
+                <a:solidFill>
+                  <a:srgbClr val="000000"/>
+                </a:solidFill>
+                <a:latin typeface="メイリオ"/>
+                <a:ea typeface="メイリオ"/>
+                <a:cs typeface="メイリオ"/>
+                <a:sym typeface="Arial"/>
+              </a:defRPr>
+            </a:lvl4pPr>
+            <a:lvl5pPr marR="0" lvl="4" algn="l" rtl="0">
+              <a:lnSpc>
+                <a:spcPct val="100000"/>
+              </a:lnSpc>
+              <a:spcBef>
+                <a:spcPts val="0"/>
+              </a:spcBef>
+              <a:spcAft>
+                <a:spcPts val="0"/>
+              </a:spcAft>
+              <a:buClr>
+                <a:srgbClr val="000000"/>
+              </a:buClr>
+              <a:buFont typeface="Arial"/>
+              <a:defRPr sz="1400" b="0" i="0" u="none" strike="noStrike" cap="none">
+                <a:solidFill>
+                  <a:srgbClr val="000000"/>
+                </a:solidFill>
+                <a:latin typeface="メイリオ"/>
+                <a:ea typeface="メイリオ"/>
+                <a:cs typeface="メイリオ"/>
+                <a:sym typeface="Arial"/>
+              </a:defRPr>
+            </a:lvl5pPr>
+            <a:lvl6pPr marR="0" lvl="5" algn="l" rtl="0">
+              <a:lnSpc>
+                <a:spcPct val="100000"/>
+              </a:lnSpc>
+              <a:spcBef>
+                <a:spcPts val="0"/>
+              </a:spcBef>
+              <a:spcAft>
+                <a:spcPts val="0"/>
+              </a:spcAft>
+              <a:buClr>
+                <a:srgbClr val="000000"/>
+              </a:buClr>
+              <a:buFont typeface="Arial"/>
+              <a:defRPr sz="1400" b="0" i="0" u="none" strike="noStrike" cap="none">
+                <a:solidFill>
+                  <a:srgbClr val="000000"/>
+                </a:solidFill>
+                <a:latin typeface="メイリオ"/>
+                <a:ea typeface="メイリオ"/>
+                <a:cs typeface="メイリオ"/>
+                <a:sym typeface="Arial"/>
+              </a:defRPr>
+            </a:lvl6pPr>
+            <a:lvl7pPr marR="0" lvl="6" algn="l" rtl="0">
+              <a:lnSpc>
+                <a:spcPct val="100000"/>
+              </a:lnSpc>
+              <a:spcBef>
+                <a:spcPts val="0"/>
+              </a:spcBef>
+              <a:spcAft>
+                <a:spcPts val="0"/>
+              </a:spcAft>
+              <a:buClr>
+                <a:srgbClr val="000000"/>
+              </a:buClr>
+              <a:buFont typeface="Arial"/>
+              <a:defRPr sz="1400" b="0" i="0" u="none" strike="noStrike" cap="none">
+                <a:solidFill>
+                  <a:srgbClr val="000000"/>
+                </a:solidFill>
+                <a:latin typeface="メイリオ"/>
+                <a:ea typeface="メイリオ"/>
+                <a:cs typeface="メイリオ"/>
+                <a:sym typeface="Arial"/>
+              </a:defRPr>
+            </a:lvl7pPr>
+            <a:lvl8pPr marR="0" lvl="7" algn="l" rtl="0">
+              <a:lnSpc>
+                <a:spcPct val="100000"/>
+              </a:lnSpc>
+              <a:spcBef>
+                <a:spcPts val="0"/>
+              </a:spcBef>
+              <a:spcAft>
+                <a:spcPts val="0"/>
+              </a:spcAft>
+              <a:buClr>
+                <a:srgbClr val="000000"/>
+              </a:buClr>
+              <a:buFont typeface="Arial"/>
+              <a:defRPr sz="1400" b="0" i="0" u="none" strike="noStrike" cap="none">
+                <a:solidFill>
+                  <a:srgbClr val="000000"/>
+                </a:solidFill>
+                <a:latin typeface="メイリオ"/>
+                <a:ea typeface="メイリオ"/>
+                <a:cs typeface="メイリオ"/>
+                <a:sym typeface="Arial"/>
+              </a:defRPr>
+            </a:lvl8pPr>
+            <a:lvl9pPr marR="0" lvl="8" algn="l" rtl="0">
+              <a:lnSpc>
+                <a:spcPct val="100000"/>
+              </a:lnSpc>
+              <a:spcBef>
+                <a:spcPts val="0"/>
+              </a:spcBef>
+              <a:spcAft>
+                <a:spcPts val="0"/>
+              </a:spcAft>
+              <a:buClr>
+                <a:srgbClr val="000000"/>
+              </a:buClr>
+              <a:buFont typeface="Arial"/>
+              <a:defRPr sz="1400" b="0" i="0" u="none" strike="noStrike" cap="none">
+                <a:solidFill>
+                  <a:srgbClr val="000000"/>
+                </a:solidFill>
+                <a:latin typeface="メイリオ"/>
+                <a:ea typeface="メイリオ"/>
+                <a:cs typeface="メイリオ"/>
+                <a:sym typeface="Arial"/>
+              </a:defRPr>
+            </a:lvl9pPr>
+          </a:lstStyle>
+          <a:p>
+            <a:pPr marL="0" marR="0" lvl="0" indent="0" algn="ctr" rtl="0">
+              <a:lnSpc>
+                <a:spcPct val="100000"/>
+              </a:lnSpc>
+              <a:spcBef>
+                <a:spcPts val="0"/>
+              </a:spcBef>
+              <a:spcAft>
+                <a:spcPts val="0"/>
+              </a:spcAft>
+              <a:buClr>
+                <a:srgbClr val="000000"/>
+              </a:buClr>
+              <a:buSzPts val="1400"/>
+              <a:buFont typeface="Arial"/>
+              <a:buNone/>
+            </a:pPr>
+            <a:r>
+              <a:rPr lang="ja-JP" altLang="en-US" sz="1400" b="1" i="0" u="none" strike="noStrike" cap="none" dirty="0">
+                <a:solidFill>
+                  <a:schemeClr val="lt1"/>
+                </a:solidFill>
+                <a:latin typeface="メイリオ"/>
+                <a:ea typeface="メイリオ"/>
+                <a:cs typeface="メイリオ"/>
+                <a:sym typeface="Meiryo"/>
+              </a:rPr>
+              <a:t>初期：</a:t>
+            </a:r>
+            <a:r>
+              <a:rPr lang="en-US" altLang="ja-JP" sz="1400" b="1" i="0" u="none" strike="noStrike" cap="none" dirty="0">
+                <a:solidFill>
+                  <a:schemeClr val="lt1"/>
+                </a:solidFill>
+                <a:latin typeface="メイリオ"/>
+                <a:ea typeface="メイリオ"/>
+                <a:cs typeface="メイリオ"/>
+                <a:sym typeface="Meiryo"/>
+              </a:rPr>
+              <a:t>1.5</a:t>
+            </a:r>
+            <a:r>
+              <a:rPr lang="ja-JP" altLang="en-US" sz="1400" b="1" i="0" u="none" strike="noStrike" cap="none" dirty="0">
+                <a:solidFill>
+                  <a:schemeClr val="lt1"/>
+                </a:solidFill>
+                <a:latin typeface="メイリオ"/>
+                <a:ea typeface="メイリオ"/>
+                <a:cs typeface="メイリオ"/>
+                <a:sym typeface="Meiryo"/>
+              </a:rPr>
+              <a:t>万円</a:t>
+            </a:r>
+            <a:endParaRPr sz="1400" b="1" i="0" u="none" strike="noStrike" cap="none" dirty="0">
+              <a:solidFill>
+                <a:schemeClr val="lt1"/>
+              </a:solidFill>
+              <a:latin typeface="メイリオ"/>
+              <a:ea typeface="メイリオ"/>
+              <a:cs typeface="メイリオ"/>
+              <a:sym typeface="Meiryo"/>
+            </a:endParaRPr>
+          </a:p>
+        </p:txBody>
+      </p:sp>
+      <p:sp>
+        <p:nvSpPr>
+          <p:cNvPr id="17" name="Google Shape;51;p19">
+            <a:extLst>
+              <a:ext uri="{FF2B5EF4-FFF2-40B4-BE49-F238E27FC236}">
+                <a16:creationId xmlns:a16="http://schemas.microsoft.com/office/drawing/2014/main" id="{EBA2E7AC-5299-C000-0A43-CCF8CE458AAF}"/>
+              </a:ext>
+            </a:extLst>
+          </p:cNvPr>
+          <p:cNvSpPr/>
+          <p:nvPr/>
+        </p:nvSpPr>
+        <p:spPr>
+          <a:xfrm>
+            <a:off x="2137897" y="1321261"/>
+            <a:ext cx="1510826" cy="485102"/>
+          </a:xfrm>
+          <a:prstGeom prst="roundRect">
+            <a:avLst>
+              <a:gd name="adj" fmla="val 16667"/>
+            </a:avLst>
+          </a:prstGeom>
+          <a:solidFill>
+            <a:schemeClr val="tx2"/>
+          </a:solidFill>
+          <a:ln>
+            <a:noFill/>
+          </a:ln>
+        </p:spPr>
+        <p:txBody>
+          <a:bodyPr spcFirstLastPara="1" wrap="square" lIns="91425" tIns="45700" rIns="91425" bIns="45700" anchor="ctr" anchorCtr="0">
+            <a:noAutofit/>
+          </a:bodyPr>
+          <a:lstStyle>
+            <a:defPPr marR="0" lvl="0" algn="l" rtl="0">
+              <a:lnSpc>
+                <a:spcPct val="100000"/>
+              </a:lnSpc>
+              <a:spcBef>
+                <a:spcPts val="0"/>
+              </a:spcBef>
+              <a:spcAft>
+                <a:spcPts val="0"/>
+              </a:spcAft>
+            </a:defPPr>
+            <a:lvl1pPr marR="0" lvl="0" algn="l" rtl="0">
+              <a:lnSpc>
+                <a:spcPct val="100000"/>
+              </a:lnSpc>
+              <a:spcBef>
+                <a:spcPts val="0"/>
+              </a:spcBef>
+              <a:spcAft>
+                <a:spcPts val="0"/>
+              </a:spcAft>
+              <a:buClr>
+                <a:srgbClr val="000000"/>
+              </a:buClr>
+              <a:buFont typeface="Arial"/>
+              <a:defRPr sz="1400" b="0" i="0" u="none" strike="noStrike" cap="none">
+                <a:solidFill>
+                  <a:srgbClr val="000000"/>
+                </a:solidFill>
+                <a:latin typeface="メイリオ"/>
+                <a:ea typeface="メイリオ"/>
+                <a:cs typeface="メイリオ"/>
+                <a:sym typeface="Arial"/>
+              </a:defRPr>
+            </a:lvl1pPr>
+            <a:lvl2pPr marR="0" lvl="1" algn="l" rtl="0">
+              <a:lnSpc>
+                <a:spcPct val="100000"/>
+              </a:lnSpc>
+              <a:spcBef>
+                <a:spcPts val="0"/>
+              </a:spcBef>
+              <a:spcAft>
+                <a:spcPts val="0"/>
+              </a:spcAft>
+              <a:buClr>
+                <a:srgbClr val="000000"/>
+              </a:buClr>
+              <a:buFont typeface="Arial"/>
+              <a:defRPr sz="1400" b="0" i="0" u="none" strike="noStrike" cap="none">
+                <a:solidFill>
+                  <a:srgbClr val="000000"/>
+                </a:solidFill>
+                <a:latin typeface="メイリオ"/>
+                <a:ea typeface="メイリオ"/>
+                <a:cs typeface="メイリオ"/>
+                <a:sym typeface="Arial"/>
+              </a:defRPr>
+            </a:lvl2pPr>
+            <a:lvl3pPr marR="0" lvl="2" algn="l" rtl="0">
+              <a:lnSpc>
+                <a:spcPct val="100000"/>
+              </a:lnSpc>
+              <a:spcBef>
+                <a:spcPts val="0"/>
+              </a:spcBef>
+              <a:spcAft>
+                <a:spcPts val="0"/>
+              </a:spcAft>
+              <a:buClr>
+                <a:srgbClr val="000000"/>
+              </a:buClr>
+              <a:buFont typeface="Arial"/>
+              <a:defRPr sz="1400" b="0" i="0" u="none" strike="noStrike" cap="none">
+                <a:solidFill>
+                  <a:srgbClr val="000000"/>
+                </a:solidFill>
+                <a:latin typeface="メイリオ"/>
+                <a:ea typeface="メイリオ"/>
+                <a:cs typeface="メイリオ"/>
+                <a:sym typeface="Arial"/>
+              </a:defRPr>
+            </a:lvl3pPr>
+            <a:lvl4pPr marR="0" lvl="3" algn="l" rtl="0">
+              <a:lnSpc>
+                <a:spcPct val="100000"/>
+              </a:lnSpc>
+              <a:spcBef>
+                <a:spcPts val="0"/>
+              </a:spcBef>
+              <a:spcAft>
+                <a:spcPts val="0"/>
+              </a:spcAft>
+              <a:buClr>
+                <a:srgbClr val="000000"/>
+              </a:buClr>
+              <a:buFont typeface="Arial"/>
+              <a:defRPr sz="1400" b="0" i="0" u="none" strike="noStrike" cap="none">
+                <a:solidFill>
+                  <a:srgbClr val="000000"/>
+                </a:solidFill>
+                <a:latin typeface="メイリオ"/>
+                <a:ea typeface="メイリオ"/>
+                <a:cs typeface="メイリオ"/>
+                <a:sym typeface="Arial"/>
+              </a:defRPr>
+            </a:lvl4pPr>
+            <a:lvl5pPr marR="0" lvl="4" algn="l" rtl="0">
+              <a:lnSpc>
+                <a:spcPct val="100000"/>
+              </a:lnSpc>
+              <a:spcBef>
+                <a:spcPts val="0"/>
+              </a:spcBef>
+              <a:spcAft>
+                <a:spcPts val="0"/>
+              </a:spcAft>
+              <a:buClr>
+                <a:srgbClr val="000000"/>
+              </a:buClr>
+              <a:buFont typeface="Arial"/>
+              <a:defRPr sz="1400" b="0" i="0" u="none" strike="noStrike" cap="none">
+                <a:solidFill>
+                  <a:srgbClr val="000000"/>
+                </a:solidFill>
+                <a:latin typeface="メイリオ"/>
+                <a:ea typeface="メイリオ"/>
+                <a:cs typeface="メイリオ"/>
+                <a:sym typeface="Arial"/>
+              </a:defRPr>
+            </a:lvl5pPr>
+            <a:lvl6pPr marR="0" lvl="5" algn="l" rtl="0">
+              <a:lnSpc>
+                <a:spcPct val="100000"/>
+              </a:lnSpc>
+              <a:spcBef>
+                <a:spcPts val="0"/>
+              </a:spcBef>
+              <a:spcAft>
+                <a:spcPts val="0"/>
+              </a:spcAft>
+              <a:buClr>
+                <a:srgbClr val="000000"/>
+              </a:buClr>
+              <a:buFont typeface="Arial"/>
+              <a:defRPr sz="1400" b="0" i="0" u="none" strike="noStrike" cap="none">
+                <a:solidFill>
+                  <a:srgbClr val="000000"/>
+                </a:solidFill>
+                <a:latin typeface="メイリオ"/>
+                <a:ea typeface="メイリオ"/>
+                <a:cs typeface="メイリオ"/>
+                <a:sym typeface="Arial"/>
+              </a:defRPr>
+            </a:lvl6pPr>
+            <a:lvl7pPr marR="0" lvl="6" algn="l" rtl="0">
+              <a:lnSpc>
+                <a:spcPct val="100000"/>
+              </a:lnSpc>
+              <a:spcBef>
+                <a:spcPts val="0"/>
+              </a:spcBef>
+              <a:spcAft>
+                <a:spcPts val="0"/>
+              </a:spcAft>
+              <a:buClr>
+                <a:srgbClr val="000000"/>
+              </a:buClr>
+              <a:buFont typeface="Arial"/>
+              <a:defRPr sz="1400" b="0" i="0" u="none" strike="noStrike" cap="none">
+                <a:solidFill>
+                  <a:srgbClr val="000000"/>
+                </a:solidFill>
+                <a:latin typeface="メイリオ"/>
+                <a:ea typeface="メイリオ"/>
+                <a:cs typeface="メイリオ"/>
+                <a:sym typeface="Arial"/>
+              </a:defRPr>
+            </a:lvl7pPr>
+            <a:lvl8pPr marR="0" lvl="7" algn="l" rtl="0">
+              <a:lnSpc>
+                <a:spcPct val="100000"/>
+              </a:lnSpc>
+              <a:spcBef>
+                <a:spcPts val="0"/>
+              </a:spcBef>
+              <a:spcAft>
+                <a:spcPts val="0"/>
+              </a:spcAft>
+              <a:buClr>
+                <a:srgbClr val="000000"/>
+              </a:buClr>
+              <a:buFont typeface="Arial"/>
+              <a:defRPr sz="1400" b="0" i="0" u="none" strike="noStrike" cap="none">
+                <a:solidFill>
+                  <a:srgbClr val="000000"/>
+                </a:solidFill>
+                <a:latin typeface="メイリオ"/>
+                <a:ea typeface="メイリオ"/>
+                <a:cs typeface="メイリオ"/>
+                <a:sym typeface="Arial"/>
+              </a:defRPr>
+            </a:lvl8pPr>
+            <a:lvl9pPr marR="0" lvl="8" algn="l" rtl="0">
+              <a:lnSpc>
+                <a:spcPct val="100000"/>
+              </a:lnSpc>
+              <a:spcBef>
+                <a:spcPts val="0"/>
+              </a:spcBef>
+              <a:spcAft>
+                <a:spcPts val="0"/>
+              </a:spcAft>
+              <a:buClr>
+                <a:srgbClr val="000000"/>
+              </a:buClr>
+              <a:buFont typeface="Arial"/>
+              <a:defRPr sz="1400" b="0" i="0" u="none" strike="noStrike" cap="none">
+                <a:solidFill>
+                  <a:srgbClr val="000000"/>
+                </a:solidFill>
+                <a:latin typeface="メイリオ"/>
+                <a:ea typeface="メイリオ"/>
+                <a:cs typeface="メイリオ"/>
+                <a:sym typeface="Arial"/>
+              </a:defRPr>
+            </a:lvl9pPr>
+          </a:lstStyle>
+          <a:p>
+            <a:pPr marL="0" marR="0" lvl="0" indent="0" algn="ctr" rtl="0">
+              <a:lnSpc>
+                <a:spcPct val="100000"/>
+              </a:lnSpc>
+              <a:spcBef>
+                <a:spcPts val="0"/>
+              </a:spcBef>
+              <a:spcAft>
+                <a:spcPts val="0"/>
+              </a:spcAft>
+              <a:buClr>
+                <a:srgbClr val="000000"/>
+              </a:buClr>
+              <a:buSzPts val="1400"/>
+              <a:buFont typeface="Arial"/>
+              <a:buNone/>
+            </a:pPr>
+            <a:r>
+              <a:rPr lang="ja-JP" altLang="en-US" sz="1400" b="1" i="0" u="none" strike="noStrike" cap="none" dirty="0">
+                <a:solidFill>
+                  <a:schemeClr val="lt1"/>
+                </a:solidFill>
+                <a:latin typeface="メイリオ"/>
+                <a:ea typeface="メイリオ"/>
+                <a:cs typeface="メイリオ"/>
+                <a:sym typeface="Meiryo"/>
+              </a:rPr>
+              <a:t>月額</a:t>
+            </a:r>
+            <a:r>
+              <a:rPr lang="en-US" altLang="ja-JP" sz="1400" b="1" i="0" u="none" strike="noStrike" cap="none" dirty="0">
+                <a:solidFill>
+                  <a:schemeClr val="lt1"/>
+                </a:solidFill>
+                <a:latin typeface="メイリオ"/>
+                <a:ea typeface="メイリオ"/>
+                <a:cs typeface="メイリオ"/>
+                <a:sym typeface="Meiryo"/>
+              </a:rPr>
+              <a:t>3</a:t>
+            </a:r>
+            <a:r>
+              <a:rPr lang="ja-JP" altLang="en-US" sz="1400" b="1" i="0" u="none" strike="noStrike" cap="none" dirty="0">
+                <a:solidFill>
+                  <a:schemeClr val="lt1"/>
+                </a:solidFill>
+                <a:latin typeface="メイリオ"/>
+                <a:ea typeface="メイリオ"/>
+                <a:cs typeface="メイリオ"/>
+                <a:sym typeface="Meiryo"/>
+              </a:rPr>
+              <a:t>万円</a:t>
+            </a:r>
+            <a:endParaRPr sz="1400" b="1" i="0" u="none" strike="noStrike" cap="none" dirty="0">
+              <a:solidFill>
+                <a:schemeClr val="lt1"/>
+              </a:solidFill>
+              <a:latin typeface="メイリオ"/>
+              <a:ea typeface="メイリオ"/>
+              <a:cs typeface="メイリオ"/>
+              <a:sym typeface="Meiryo"/>
+            </a:endParaRPr>
+          </a:p>
+        </p:txBody>
+      </p:sp>
+      <p:pic>
+        <p:nvPicPr>
+          <p:cNvPr id="19" name="図 18">
+            <a:extLst>
+              <a:ext uri="{FF2B5EF4-FFF2-40B4-BE49-F238E27FC236}">
+                <a16:creationId xmlns:a16="http://schemas.microsoft.com/office/drawing/2014/main" id="{98FF8283-5B2F-5018-9D25-736A384B4D23}"/>
+              </a:ext>
+            </a:extLst>
+          </p:cNvPr>
+          <p:cNvPicPr>
+            <a:picLocks noChangeAspect="1"/>
+          </p:cNvPicPr>
+          <p:nvPr/>
+        </p:nvPicPr>
+        <p:blipFill>
+          <a:blip r:embed="rId2"/>
+          <a:stretch>
+            <a:fillRect/>
+          </a:stretch>
+        </p:blipFill>
+        <p:spPr>
+          <a:xfrm>
+            <a:off x="8263942" y="3752836"/>
+            <a:ext cx="1062545" cy="1115066"/>
+          </a:xfrm>
+          <a:prstGeom prst="rect">
+            <a:avLst/>
+          </a:prstGeom>
+        </p:spPr>
+      </p:pic>
+      <p:sp>
+        <p:nvSpPr>
+          <p:cNvPr id="24" name="正方形/長方形 23">
+            <a:extLst>
+              <a:ext uri="{FF2B5EF4-FFF2-40B4-BE49-F238E27FC236}">
+                <a16:creationId xmlns:a16="http://schemas.microsoft.com/office/drawing/2014/main" id="{E4AE5F6C-0BA5-6768-64B9-9CD156133552}"/>
+              </a:ext>
+            </a:extLst>
+          </p:cNvPr>
+          <p:cNvSpPr/>
+          <p:nvPr/>
+        </p:nvSpPr>
+        <p:spPr>
+          <a:xfrm>
+            <a:off x="5769326" y="1938056"/>
+            <a:ext cx="3788228" cy="244151"/>
+          </a:xfrm>
+          <a:prstGeom prst="rect">
+            <a:avLst/>
+          </a:prstGeom>
+          <a:solidFill>
+            <a:schemeClr val="tx2"/>
+          </a:solidFill>
+          <a:ln>
+            <a:noFill/>
+          </a:ln>
+        </p:spPr>
+        <p:style>
+          <a:lnRef idx="2">
+            <a:schemeClr val="accent1">
+              <a:shade val="15000"/>
+            </a:schemeClr>
+          </a:lnRef>
+          <a:fillRef idx="1">
+            <a:schemeClr val="accent1"/>
+          </a:fillRef>
+          <a:effectRef idx="0">
+            <a:schemeClr val="accent1"/>
+          </a:effectRef>
+          <a:fontRef idx="minor">
+            <a:schemeClr val="lt1"/>
+          </a:fontRef>
+        </p:style>
+        <p:txBody>
+          <a:bodyPr rtlCol="0" anchor="ctr"/>
+          <a:lstStyle/>
+          <a:p>
+            <a:pPr algn="ctr"/>
+            <a:r>
+              <a:rPr lang="ja-JP" altLang="en-US" sz="1100" b="1" dirty="0">
+                <a:solidFill>
+                  <a:schemeClr val="bg1"/>
+                </a:solidFill>
+                <a:latin typeface="メイリオ" panose="020B0604030504040204" pitchFamily="50" charset="-128"/>
+                <a:ea typeface="メイリオ" panose="020B0604030504040204" pitchFamily="50" charset="-128"/>
+                <a:cs typeface="メイリオ"/>
+              </a:rPr>
+              <a:t>動作イメージ</a:t>
+            </a:r>
+            <a:endParaRPr kumimoji="1" lang="ja-JP" altLang="en-US" sz="1100" b="1" dirty="0">
+              <a:solidFill>
+                <a:schemeClr val="bg1"/>
+              </a:solidFill>
+              <a:latin typeface="メイリオ" panose="020B0604030504040204" pitchFamily="50" charset="-128"/>
+              <a:ea typeface="メイリオ" panose="020B0604030504040204" pitchFamily="50" charset="-128"/>
+              <a:cs typeface="メイリオ"/>
+            </a:endParaRPr>
+          </a:p>
+        </p:txBody>
+      </p:sp>
+      <p:pic>
+        <p:nvPicPr>
+          <p:cNvPr id="7" name="図 6">
+            <a:extLst>
+              <a:ext uri="{FF2B5EF4-FFF2-40B4-BE49-F238E27FC236}">
+                <a16:creationId xmlns:a16="http://schemas.microsoft.com/office/drawing/2014/main" id="{669C67AE-8870-AB99-9BB8-030F3AB8CB3B}"/>
+              </a:ext>
+            </a:extLst>
+          </p:cNvPr>
+          <p:cNvPicPr>
+            <a:picLocks noChangeAspect="1"/>
+          </p:cNvPicPr>
+          <p:nvPr/>
+        </p:nvPicPr>
+        <p:blipFill>
+          <a:blip r:embed="rId5"/>
+          <a:stretch>
+            <a:fillRect/>
+          </a:stretch>
+        </p:blipFill>
+        <p:spPr>
+          <a:xfrm>
+            <a:off x="543398" y="4259719"/>
+            <a:ext cx="5059180" cy="2191534"/>
+          </a:xfrm>
+          <a:prstGeom prst="rect">
+            <a:avLst/>
+          </a:prstGeom>
+        </p:spPr>
+      </p:pic>
+      <p:pic>
+        <p:nvPicPr>
+          <p:cNvPr id="14" name="図 13">
+            <a:extLst>
+              <a:ext uri="{FF2B5EF4-FFF2-40B4-BE49-F238E27FC236}">
+                <a16:creationId xmlns:a16="http://schemas.microsoft.com/office/drawing/2014/main" id="{CFFD213E-DE33-0075-6E07-F24DBD7A9441}"/>
+              </a:ext>
+            </a:extLst>
+          </p:cNvPr>
+          <p:cNvPicPr>
+            <a:picLocks noChangeAspect="1"/>
+          </p:cNvPicPr>
+          <p:nvPr/>
+        </p:nvPicPr>
+        <p:blipFill>
+          <a:blip r:embed="rId4"/>
+          <a:stretch>
+            <a:fillRect/>
+          </a:stretch>
+        </p:blipFill>
+        <p:spPr>
+          <a:xfrm>
+            <a:off x="579513" y="1977951"/>
+            <a:ext cx="5023065" cy="2231287"/>
+          </a:xfrm>
+          <a:prstGeom prst="rect">
+            <a:avLst/>
+          </a:prstGeom>
+        </p:spPr>
+      </p:pic>
+    </p:spTree>
+  </p:cSld>
+  <p:clrMapOvr>
+    <a:masterClrMapping/>
+  </p:clrMapOvr>
+</p:sld>
+</file>
+
+<file path=ppt/slides/slide77.xml><?xml version="1.0" encoding="utf-8"?>
+<p:sld xmlns:a="http://schemas.openxmlformats.org/drawingml/2006/main" xmlns:p="http://schemas.openxmlformats.org/presentationml/2006/main" xmlns:r="http://schemas.openxmlformats.org/officeDocument/2006/relationships">
+  <p:cSld>
+    <p:spTree>
+      <p:nvGrpSpPr>
+        <p:cNvPr id="1" name=""/>
+        <p:cNvGrpSpPr/>
+        <p:nvPr/>
+      </p:nvGrpSpPr>
+      <p:grpSpPr/>
+      <p:sp>
+        <p:nvSpPr>
+          <p:cNvPr id="22" name="Google Shape;752;p28">
+            <a:extLst>
+              <a:ext uri="{FF2B5EF4-FFF2-40B4-BE49-F238E27FC236}">
+                <a16:creationId xmlns:a16="http://schemas.microsoft.com/office/drawing/2014/main" id="{AA80CD04-9456-70DB-2E44-D3EDB1461933}"/>
+              </a:ext>
+            </a:extLst>
+          </p:cNvPr>
+          <p:cNvSpPr txBox="1"/>
+          <p:nvPr/>
+        </p:nvSpPr>
+        <p:spPr>
+          <a:xfrm>
+            <a:off x="548883" y="138137"/>
+            <a:ext cx="6276325" cy="338514"/>
+          </a:xfrm>
+          <a:prstGeom prst="rect">
+            <a:avLst/>
+          </a:prstGeom>
+          <a:noFill/>
+          <a:ln>
+            <a:noFill/>
+          </a:ln>
+        </p:spPr>
+        <p:txBody>
+          <a:bodyPr spcFirstLastPara="1" wrap="square" lIns="91425" tIns="45700" rIns="91425" bIns="45700" anchor="ctr" anchorCtr="0">
+            <a:spAutoFit/>
+          </a:bodyPr>
+          <a:lstStyle/>
+          <a:p>
+            <a:pPr lvl="0"/>
+            <a:r>
+              <a:rPr lang="ja-JP" altLang="en-US" sz="1600" b="1" dirty="0">
+                <a:solidFill>
+                  <a:srgbClr val="002060"/>
+                </a:solidFill>
+                <a:latin typeface="メイリオ"/>
+                <a:ea typeface="メイリオ"/>
+                <a:cs typeface="メイリオ"/>
+                <a:sym typeface="Meiryo"/>
+              </a:rPr>
+              <a:t>新規友だちの追加</a:t>
+            </a:r>
+            <a:r>
+              <a:rPr lang="ja-JP" altLang="en-US" sz="1600" b="1" dirty="0">
+                <a:solidFill>
+                  <a:srgbClr val="323366"/>
+                </a:solidFill>
+                <a:latin typeface="メイリオ" panose="020B0604030504040204" pitchFamily="50" charset="-128"/>
+                <a:ea typeface="メイリオ" panose="020B0604030504040204" pitchFamily="50" charset="-128"/>
+                <a:cs typeface="メイリオ"/>
+                <a:sym typeface="Meiryo"/>
+              </a:rPr>
+              <a:t>（サンクス</a:t>
+            </a:r>
+            <a:r>
+              <a:rPr lang="en-US" altLang="ja-JP" sz="1600" b="1" dirty="0">
+                <a:solidFill>
+                  <a:srgbClr val="323366"/>
+                </a:solidFill>
+                <a:latin typeface="メイリオ" panose="020B0604030504040204" pitchFamily="50" charset="-128"/>
+                <a:ea typeface="メイリオ" panose="020B0604030504040204" pitchFamily="50" charset="-128"/>
+                <a:cs typeface="メイリオ"/>
+                <a:sym typeface="Meiryo"/>
+              </a:rPr>
+              <a:t>LINE</a:t>
+            </a:r>
+            <a:r>
+              <a:rPr lang="ja-JP" altLang="en-US" sz="1600" b="1" dirty="0">
+                <a:solidFill>
+                  <a:srgbClr val="323366"/>
+                </a:solidFill>
+                <a:latin typeface="メイリオ" panose="020B0604030504040204" pitchFamily="50" charset="-128"/>
+                <a:ea typeface="メイリオ" panose="020B0604030504040204" pitchFamily="50" charset="-128"/>
+                <a:cs typeface="メイリオ"/>
+                <a:sym typeface="Meiryo"/>
+              </a:rPr>
+              <a:t>誘導）</a:t>
+            </a:r>
+          </a:p>
+        </p:txBody>
+      </p:sp>
+      <p:sp>
+        <p:nvSpPr>
+          <p:cNvPr id="11" name="正方形/長方形 10">
+            <a:extLst>
+              <a:ext uri="{FF2B5EF4-FFF2-40B4-BE49-F238E27FC236}">
+                <a16:creationId xmlns:a16="http://schemas.microsoft.com/office/drawing/2014/main" id="{189A6A4C-E34E-E7CF-D6DD-C175E600A94D}"/>
+              </a:ext>
+            </a:extLst>
+          </p:cNvPr>
+          <p:cNvSpPr/>
+          <p:nvPr/>
+        </p:nvSpPr>
+        <p:spPr>
+          <a:xfrm>
+            <a:off x="1404798" y="1938056"/>
+            <a:ext cx="1859036" cy="244151"/>
+          </a:xfrm>
+          <a:prstGeom prst="rect">
+            <a:avLst/>
+          </a:prstGeom>
+          <a:solidFill>
+            <a:schemeClr val="bg1">
+              <a:lumMod val="95000"/>
+            </a:schemeClr>
+          </a:solidFill>
+          <a:ln>
+            <a:noFill/>
+          </a:ln>
+        </p:spPr>
+        <p:style>
+          <a:lnRef idx="2">
+            <a:schemeClr val="accent1">
+              <a:shade val="15000"/>
+            </a:schemeClr>
+          </a:lnRef>
+          <a:fillRef idx="1">
+            <a:schemeClr val="accent1"/>
+          </a:fillRef>
+          <a:effectRef idx="0">
+            <a:schemeClr val="accent1"/>
+          </a:effectRef>
+          <a:fontRef idx="minor">
+            <a:schemeClr val="lt1"/>
+          </a:fontRef>
+        </p:style>
+        <p:txBody>
+          <a:bodyPr rtlCol="0" anchor="ctr"/>
+          <a:lstStyle/>
+          <a:p>
+            <a:pPr algn="ctr"/>
+            <a:r>
+              <a:rPr kumimoji="1" lang="en-US" altLang="ja-JP" sz="1100" b="1" dirty="0">
+                <a:solidFill>
+                  <a:schemeClr val="tx1">
+                    <a:lumMod val="50000"/>
+                    <a:lumOff val="50000"/>
+                  </a:schemeClr>
+                </a:solidFill>
+                <a:latin typeface="メイリオ" panose="020B0604030504040204" pitchFamily="50" charset="-128"/>
+                <a:ea typeface="メイリオ" panose="020B0604030504040204" pitchFamily="50" charset="-128"/>
+                <a:cs typeface="メイリオ"/>
+              </a:rPr>
+              <a:t>WEB</a:t>
+            </a:r>
+            <a:r>
+              <a:rPr kumimoji="1" lang="ja-JP" altLang="en-US" sz="1100" b="1" dirty="0">
+                <a:solidFill>
+                  <a:schemeClr val="tx1">
+                    <a:lumMod val="50000"/>
+                    <a:lumOff val="50000"/>
+                  </a:schemeClr>
+                </a:solidFill>
+                <a:latin typeface="メイリオ" panose="020B0604030504040204" pitchFamily="50" charset="-128"/>
+                <a:ea typeface="メイリオ" panose="020B0604030504040204" pitchFamily="50" charset="-128"/>
+                <a:cs typeface="メイリオ"/>
+              </a:rPr>
+              <a:t>サイト</a:t>
+            </a:r>
+          </a:p>
+        </p:txBody>
+      </p:sp>
+      <p:sp>
+        <p:nvSpPr>
+          <p:cNvPr id="16" name="正方形/長方形 15">
+            <a:extLst>
+              <a:ext uri="{FF2B5EF4-FFF2-40B4-BE49-F238E27FC236}">
+                <a16:creationId xmlns:a16="http://schemas.microsoft.com/office/drawing/2014/main" id="{32BBF438-B1EF-A61A-EE3D-69CD39766C7E}"/>
+              </a:ext>
+            </a:extLst>
+          </p:cNvPr>
+          <p:cNvSpPr/>
+          <p:nvPr/>
+        </p:nvSpPr>
+        <p:spPr>
+          <a:xfrm>
+            <a:off x="5808682" y="2415743"/>
+            <a:ext cx="3748873" cy="1821208"/>
+          </a:xfrm>
+          <a:prstGeom prst="rect">
+            <a:avLst/>
+          </a:prstGeom>
+          <a:noFill/>
+          <a:ln>
+            <a:solidFill>
+              <a:schemeClr val="tx2">
+                <a:lumMod val="20000"/>
+                <a:lumOff val="80000"/>
+              </a:schemeClr>
+            </a:solidFill>
+          </a:ln>
+        </p:spPr>
+        <p:style>
+          <a:lnRef idx="2">
+            <a:schemeClr val="accent1">
+              <a:shade val="15000"/>
+            </a:schemeClr>
+          </a:lnRef>
+          <a:fillRef idx="1">
+            <a:schemeClr val="accent1"/>
+          </a:fillRef>
+          <a:effectRef idx="0">
+            <a:schemeClr val="accent1"/>
+          </a:effectRef>
+          <a:fontRef idx="minor">
+            <a:schemeClr val="lt1"/>
+          </a:fontRef>
+        </p:style>
+        <p:txBody>
+          <a:bodyPr rtlCol="0" anchor="ctr"/>
+          <a:lstStyle/>
+          <a:p>
+            <a:pPr algn="ctr"/>
+            <a:endParaRPr kumimoji="1" lang="ja-JP" altLang="en-US">
+              <a:latin typeface="メイリオ"/>
+              <a:ea typeface="メイリオ"/>
+              <a:cs typeface="メイリオ"/>
+            </a:endParaRPr>
+          </a:p>
+        </p:txBody>
+      </p:sp>
+      <p:sp>
+        <p:nvSpPr>
+          <p:cNvPr id="17" name="正方形/長方形 16">
+            <a:extLst>
+              <a:ext uri="{FF2B5EF4-FFF2-40B4-BE49-F238E27FC236}">
+                <a16:creationId xmlns:a16="http://schemas.microsoft.com/office/drawing/2014/main" id="{1A1E4128-77DC-C871-EE20-5BD43326E078}"/>
+              </a:ext>
+            </a:extLst>
+          </p:cNvPr>
+          <p:cNvSpPr/>
+          <p:nvPr/>
+        </p:nvSpPr>
+        <p:spPr>
+          <a:xfrm>
+            <a:off x="5808681" y="4588963"/>
+            <a:ext cx="3748873" cy="1821208"/>
+          </a:xfrm>
+          <a:prstGeom prst="rect">
+            <a:avLst/>
+          </a:prstGeom>
+          <a:noFill/>
+          <a:ln>
+            <a:solidFill>
+              <a:schemeClr val="tx2">
+                <a:lumMod val="20000"/>
+                <a:lumOff val="80000"/>
+              </a:schemeClr>
+            </a:solidFill>
+          </a:ln>
+        </p:spPr>
+        <p:style>
+          <a:lnRef idx="2">
+            <a:schemeClr val="accent1">
+              <a:shade val="15000"/>
+            </a:schemeClr>
+          </a:lnRef>
+          <a:fillRef idx="1">
+            <a:schemeClr val="accent1"/>
+          </a:fillRef>
+          <a:effectRef idx="0">
+            <a:schemeClr val="accent1"/>
+          </a:effectRef>
+          <a:fontRef idx="minor">
+            <a:schemeClr val="lt1"/>
+          </a:fontRef>
+        </p:style>
+        <p:txBody>
+          <a:bodyPr rtlCol="0" anchor="ctr"/>
+          <a:lstStyle/>
+          <a:p>
+            <a:pPr algn="ctr"/>
+            <a:endParaRPr kumimoji="1" lang="ja-JP" altLang="en-US">
+              <a:latin typeface="メイリオ"/>
+              <a:ea typeface="メイリオ"/>
+              <a:cs typeface="メイリオ"/>
+            </a:endParaRPr>
+          </a:p>
+        </p:txBody>
+      </p:sp>
+      <p:sp>
+        <p:nvSpPr>
+          <p:cNvPr id="20" name="正方形/長方形 19">
+            <a:extLst>
+              <a:ext uri="{FF2B5EF4-FFF2-40B4-BE49-F238E27FC236}">
+                <a16:creationId xmlns:a16="http://schemas.microsoft.com/office/drawing/2014/main" id="{F37BB268-660A-FEE4-BB39-0E338F1DDC23}"/>
+              </a:ext>
+            </a:extLst>
+          </p:cNvPr>
+          <p:cNvSpPr/>
+          <p:nvPr/>
+        </p:nvSpPr>
+        <p:spPr>
+          <a:xfrm>
+            <a:off x="5974632" y="2304788"/>
+            <a:ext cx="1859036" cy="244151"/>
+          </a:xfrm>
+          <a:prstGeom prst="rect">
+            <a:avLst/>
+          </a:prstGeom>
+          <a:solidFill>
+            <a:schemeClr val="accent1">
+              <a:lumMod val="20000"/>
+              <a:lumOff val="80000"/>
+            </a:schemeClr>
+          </a:solidFill>
+          <a:ln>
+            <a:noFill/>
+          </a:ln>
+        </p:spPr>
+        <p:style>
+          <a:lnRef idx="2">
+            <a:schemeClr val="accent1">
+              <a:shade val="15000"/>
+            </a:schemeClr>
+          </a:lnRef>
+          <a:fillRef idx="1">
+            <a:schemeClr val="accent1"/>
+          </a:fillRef>
+          <a:effectRef idx="0">
+            <a:schemeClr val="accent1"/>
+          </a:effectRef>
+          <a:fontRef idx="minor">
+            <a:schemeClr val="lt1"/>
+          </a:fontRef>
+        </p:style>
+        <p:txBody>
+          <a:bodyPr rtlCol="0" anchor="ctr"/>
+          <a:lstStyle/>
+          <a:p>
+            <a:pPr algn="ctr"/>
+            <a:r>
+              <a:rPr lang="ja-JP" altLang="en-US" sz="1100" b="1" dirty="0">
+                <a:solidFill>
+                  <a:schemeClr val="tx1"/>
+                </a:solidFill>
+                <a:latin typeface="メイリオ" panose="020B0604030504040204" pitchFamily="50" charset="-128"/>
+                <a:ea typeface="メイリオ" panose="020B0604030504040204" pitchFamily="50" charset="-128"/>
+                <a:cs typeface="メイリオ"/>
+              </a:rPr>
+              <a:t>非</a:t>
+            </a:r>
+            <a:r>
+              <a:rPr lang="en-US" altLang="ja-JP" sz="1100" b="1" dirty="0">
+                <a:solidFill>
+                  <a:schemeClr val="tx1"/>
+                </a:solidFill>
+                <a:latin typeface="メイリオ" panose="020B0604030504040204" pitchFamily="50" charset="-128"/>
+                <a:ea typeface="メイリオ" panose="020B0604030504040204" pitchFamily="50" charset="-128"/>
+                <a:cs typeface="メイリオ"/>
+              </a:rPr>
+              <a:t>LINE</a:t>
+            </a:r>
+            <a:r>
+              <a:rPr lang="ja-JP" altLang="en-US" sz="1100" b="1" dirty="0">
+                <a:solidFill>
+                  <a:schemeClr val="tx1"/>
+                </a:solidFill>
+                <a:latin typeface="メイリオ" panose="020B0604030504040204" pitchFamily="50" charset="-128"/>
+                <a:ea typeface="メイリオ" panose="020B0604030504040204" pitchFamily="50" charset="-128"/>
+                <a:cs typeface="メイリオ"/>
+              </a:rPr>
+              <a:t>友だちの場合</a:t>
+            </a:r>
+          </a:p>
+        </p:txBody>
+      </p:sp>
+      <p:sp>
+        <p:nvSpPr>
+          <p:cNvPr id="21" name="正方形/長方形 20">
+            <a:extLst>
+              <a:ext uri="{FF2B5EF4-FFF2-40B4-BE49-F238E27FC236}">
+                <a16:creationId xmlns:a16="http://schemas.microsoft.com/office/drawing/2014/main" id="{C9FF4626-FD17-CA1C-8064-F46606D0BCCE}"/>
+              </a:ext>
+            </a:extLst>
+          </p:cNvPr>
+          <p:cNvSpPr/>
+          <p:nvPr/>
+        </p:nvSpPr>
+        <p:spPr>
+          <a:xfrm>
+            <a:off x="5974632" y="4466888"/>
+            <a:ext cx="1859036" cy="244151"/>
+          </a:xfrm>
+          <a:prstGeom prst="rect">
+            <a:avLst/>
+          </a:prstGeom>
+          <a:solidFill>
+            <a:schemeClr val="accent1">
+              <a:lumMod val="20000"/>
+              <a:lumOff val="80000"/>
+            </a:schemeClr>
+          </a:solidFill>
+          <a:ln>
+            <a:noFill/>
+          </a:ln>
+        </p:spPr>
+        <p:style>
+          <a:lnRef idx="2">
+            <a:schemeClr val="accent1">
+              <a:shade val="15000"/>
+            </a:schemeClr>
+          </a:lnRef>
+          <a:fillRef idx="1">
+            <a:schemeClr val="accent1"/>
+          </a:fillRef>
+          <a:effectRef idx="0">
+            <a:schemeClr val="accent1"/>
+          </a:effectRef>
+          <a:fontRef idx="minor">
+            <a:schemeClr val="lt1"/>
+          </a:fontRef>
+        </p:style>
+        <p:txBody>
+          <a:bodyPr rtlCol="0" anchor="ctr"/>
+          <a:lstStyle/>
+          <a:p>
+            <a:pPr algn="ctr"/>
+            <a:r>
+              <a:rPr lang="ja-JP" altLang="en-US" sz="1100" b="1" dirty="0">
+                <a:solidFill>
+                  <a:schemeClr val="tx1"/>
+                </a:solidFill>
+                <a:latin typeface="メイリオ" panose="020B0604030504040204" pitchFamily="50" charset="-128"/>
+                <a:ea typeface="メイリオ" panose="020B0604030504040204" pitchFamily="50" charset="-128"/>
+                <a:cs typeface="メイリオ"/>
+              </a:rPr>
+              <a:t>既存の</a:t>
+            </a:r>
+            <a:r>
+              <a:rPr lang="en-US" altLang="ja-JP" sz="1100" b="1" dirty="0">
+                <a:solidFill>
+                  <a:schemeClr val="tx1"/>
+                </a:solidFill>
+                <a:latin typeface="メイリオ" panose="020B0604030504040204" pitchFamily="50" charset="-128"/>
+                <a:ea typeface="メイリオ" panose="020B0604030504040204" pitchFamily="50" charset="-128"/>
+                <a:cs typeface="メイリオ"/>
+              </a:rPr>
+              <a:t>LINE</a:t>
+            </a:r>
+            <a:r>
+              <a:rPr lang="ja-JP" altLang="en-US" sz="1100" b="1" dirty="0">
+                <a:solidFill>
+                  <a:schemeClr val="tx1"/>
+                </a:solidFill>
+                <a:latin typeface="メイリオ" panose="020B0604030504040204" pitchFamily="50" charset="-128"/>
+                <a:ea typeface="メイリオ" panose="020B0604030504040204" pitchFamily="50" charset="-128"/>
+                <a:cs typeface="メイリオ"/>
+              </a:rPr>
+              <a:t>友だちの場合</a:t>
+            </a:r>
+          </a:p>
+        </p:txBody>
+      </p:sp>
+      <p:cxnSp>
+        <p:nvCxnSpPr>
+          <p:cNvPr id="23" name="直線矢印コネクタ 22">
+            <a:extLst>
+              <a:ext uri="{FF2B5EF4-FFF2-40B4-BE49-F238E27FC236}">
+                <a16:creationId xmlns:a16="http://schemas.microsoft.com/office/drawing/2014/main" id="{8F202453-7FF9-8AE7-D10D-66F74A74A2F4}"/>
+              </a:ext>
+            </a:extLst>
+          </p:cNvPr>
+          <p:cNvCxnSpPr/>
+          <p:nvPr/>
+        </p:nvCxnSpPr>
+        <p:spPr>
+          <a:xfrm>
+            <a:off x="4361857" y="3239708"/>
+            <a:ext cx="1407469" cy="0"/>
+          </a:xfrm>
+          <a:prstGeom prst="straightConnector1">
+            <a:avLst/>
+          </a:prstGeom>
+          <a:ln w="19050">
+            <a:solidFill>
+              <a:srgbClr val="00B050">
+                <a:alpha val="80000"/>
+              </a:srgbClr>
+            </a:solidFill>
+            <a:prstDash val="sysDot"/>
+            <a:tailEnd type="triangle"/>
+          </a:ln>
+        </p:spPr>
+        <p:style>
+          <a:lnRef idx="1">
+            <a:schemeClr val="accent1"/>
+          </a:lnRef>
+          <a:fillRef idx="0">
+            <a:schemeClr val="accent1"/>
+          </a:fillRef>
+          <a:effectRef idx="0">
+            <a:schemeClr val="accent1"/>
+          </a:effectRef>
+          <a:fontRef idx="minor">
+            <a:schemeClr val="tx1"/>
+          </a:fontRef>
+        </p:style>
+      </p:cxnSp>
+      <p:cxnSp>
+        <p:nvCxnSpPr>
+          <p:cNvPr id="24" name="直線矢印コネクタ 23">
+            <a:extLst>
+              <a:ext uri="{FF2B5EF4-FFF2-40B4-BE49-F238E27FC236}">
+                <a16:creationId xmlns:a16="http://schemas.microsoft.com/office/drawing/2014/main" id="{C92F6E28-BBFF-1A56-AC22-CA16D2F1B1EA}"/>
+              </a:ext>
+            </a:extLst>
+          </p:cNvPr>
+          <p:cNvCxnSpPr>
+            <a:cxnSpLocks/>
+          </p:cNvCxnSpPr>
+          <p:nvPr/>
+        </p:nvCxnSpPr>
+        <p:spPr>
+          <a:xfrm>
+            <a:off x="4361857" y="3392108"/>
+            <a:ext cx="1407469" cy="1358385"/>
+          </a:xfrm>
+          <a:prstGeom prst="straightConnector1">
+            <a:avLst/>
+          </a:prstGeom>
+          <a:ln w="19050">
+            <a:solidFill>
+              <a:srgbClr val="00B050">
+                <a:alpha val="80000"/>
+              </a:srgbClr>
+            </a:solidFill>
+            <a:prstDash val="sysDot"/>
+            <a:tailEnd type="triangle"/>
+          </a:ln>
+        </p:spPr>
+        <p:style>
+          <a:lnRef idx="1">
+            <a:schemeClr val="accent1"/>
+          </a:lnRef>
+          <a:fillRef idx="0">
+            <a:schemeClr val="accent1"/>
+          </a:fillRef>
+          <a:effectRef idx="0">
+            <a:schemeClr val="accent1"/>
+          </a:effectRef>
+          <a:fontRef idx="minor">
+            <a:schemeClr val="tx1"/>
+          </a:fontRef>
+        </p:style>
+      </p:cxnSp>
+      <p:sp>
+        <p:nvSpPr>
+          <p:cNvPr id="29" name="正方形/長方形 28">
+            <a:extLst>
+              <a:ext uri="{FF2B5EF4-FFF2-40B4-BE49-F238E27FC236}">
+                <a16:creationId xmlns:a16="http://schemas.microsoft.com/office/drawing/2014/main" id="{1D29A9C3-A3E8-0780-A758-0C8E7E376668}"/>
+              </a:ext>
+            </a:extLst>
+          </p:cNvPr>
+          <p:cNvSpPr/>
+          <p:nvPr/>
+        </p:nvSpPr>
+        <p:spPr>
+          <a:xfrm>
+            <a:off x="4867227" y="2304788"/>
+            <a:ext cx="374449" cy="3205847"/>
+          </a:xfrm>
+          <a:prstGeom prst="rect">
+            <a:avLst/>
+          </a:prstGeom>
+          <a:solidFill>
+            <a:srgbClr val="00FF00">
+              <a:alpha val="40000"/>
+            </a:srgbClr>
+          </a:solidFill>
+          <a:ln>
+            <a:noFill/>
+          </a:ln>
+        </p:spPr>
+        <p:style>
+          <a:lnRef idx="2">
+            <a:schemeClr val="accent1">
+              <a:shade val="15000"/>
+            </a:schemeClr>
+          </a:lnRef>
+          <a:fillRef idx="1">
+            <a:schemeClr val="accent1"/>
+          </a:fillRef>
+          <a:effectRef idx="0">
+            <a:schemeClr val="accent1"/>
+          </a:effectRef>
+          <a:fontRef idx="minor">
+            <a:schemeClr val="lt1"/>
+          </a:fontRef>
+        </p:style>
+        <p:txBody>
+          <a:bodyPr rtlCol="0" anchor="ctr"/>
+          <a:lstStyle/>
+          <a:p>
+            <a:pPr algn="ctr"/>
+            <a:r>
+              <a:rPr lang="ja-JP" altLang="en-US" sz="1100" b="1" dirty="0">
+                <a:solidFill>
+                  <a:schemeClr val="tx1"/>
+                </a:solidFill>
+                <a:latin typeface="メイリオ" panose="020B0604030504040204" pitchFamily="50" charset="-128"/>
+                <a:ea typeface="メイリオ" panose="020B0604030504040204" pitchFamily="50" charset="-128"/>
+                <a:cs typeface="メイリオ"/>
+              </a:rPr>
+              <a:t>｜</a:t>
+            </a:r>
+            <a:r>
+              <a:rPr lang="en-US" altLang="ja-JP" sz="1100" b="1" dirty="0">
+                <a:solidFill>
+                  <a:schemeClr val="tx1"/>
+                </a:solidFill>
+                <a:latin typeface="メイリオ" panose="020B0604030504040204" pitchFamily="50" charset="-128"/>
+                <a:ea typeface="メイリオ" panose="020B0604030504040204" pitchFamily="50" charset="-128"/>
+                <a:cs typeface="メイリオ"/>
+              </a:rPr>
+              <a:t>D</a:t>
+            </a:r>
+          </a:p>
+          <a:p>
+            <a:pPr algn="ctr"/>
+            <a:r>
+              <a:rPr kumimoji="1" lang="en-US" altLang="ja-JP" sz="1100" b="1" dirty="0">
+                <a:solidFill>
+                  <a:schemeClr val="tx1"/>
+                </a:solidFill>
+                <a:latin typeface="メイリオ" panose="020B0604030504040204" pitchFamily="50" charset="-128"/>
+                <a:ea typeface="メイリオ" panose="020B0604030504040204" pitchFamily="50" charset="-128"/>
+                <a:cs typeface="メイリオ"/>
+              </a:rPr>
+              <a:t>Y</a:t>
+            </a:r>
+          </a:p>
+          <a:p>
+            <a:pPr algn="ctr"/>
+            <a:r>
+              <a:rPr lang="en-US" altLang="ja-JP" sz="1100" b="1" dirty="0">
+                <a:solidFill>
+                  <a:schemeClr val="tx1"/>
+                </a:solidFill>
+                <a:latin typeface="メイリオ" panose="020B0604030504040204" pitchFamily="50" charset="-128"/>
+                <a:ea typeface="メイリオ" panose="020B0604030504040204" pitchFamily="50" charset="-128"/>
+                <a:cs typeface="メイリオ"/>
+              </a:rPr>
+              <a:t>M</a:t>
+            </a:r>
+            <a:r>
+              <a:rPr lang="ja-JP" altLang="en-US" sz="1100" b="1" dirty="0">
+                <a:solidFill>
+                  <a:schemeClr val="tx1"/>
+                </a:solidFill>
+                <a:latin typeface="メイリオ" panose="020B0604030504040204" pitchFamily="50" charset="-128"/>
+                <a:ea typeface="メイリオ" panose="020B0604030504040204" pitchFamily="50" charset="-128"/>
+                <a:cs typeface="メイリオ"/>
+              </a:rPr>
+              <a:t>ツ</a:t>
+            </a:r>
+            <a:endParaRPr lang="en-US" altLang="ja-JP" sz="1100" b="1" dirty="0">
+              <a:solidFill>
+                <a:schemeClr val="tx1"/>
+              </a:solidFill>
+              <a:latin typeface="メイリオ" panose="020B0604030504040204" pitchFamily="50" charset="-128"/>
+              <a:ea typeface="メイリオ" panose="020B0604030504040204" pitchFamily="50" charset="-128"/>
+              <a:cs typeface="メイリオ"/>
+            </a:endParaRPr>
+          </a:p>
+          <a:p>
+            <a:pPr algn="ctr"/>
+            <a:r>
+              <a:rPr kumimoji="1" lang="ja-JP" altLang="en-US" sz="1100" b="1" dirty="0">
+                <a:solidFill>
+                  <a:schemeClr val="tx1"/>
+                </a:solidFill>
+                <a:latin typeface="メイリオ" panose="020B0604030504040204" pitchFamily="50" charset="-128"/>
+                <a:ea typeface="メイリオ" panose="020B0604030504040204" pitchFamily="50" charset="-128"/>
+                <a:cs typeface="メイリオ"/>
+              </a:rPr>
+              <a:t>｜ルで</a:t>
+            </a:r>
+            <a:endParaRPr kumimoji="1" lang="en-US" altLang="ja-JP" sz="1100" b="1" dirty="0">
+              <a:solidFill>
+                <a:schemeClr val="tx1"/>
+              </a:solidFill>
+              <a:latin typeface="メイリオ" panose="020B0604030504040204" pitchFamily="50" charset="-128"/>
+              <a:ea typeface="メイリオ" panose="020B0604030504040204" pitchFamily="50" charset="-128"/>
+              <a:cs typeface="メイリオ"/>
+            </a:endParaRPr>
+          </a:p>
+          <a:p>
+            <a:pPr algn="ctr"/>
+            <a:r>
+              <a:rPr kumimoji="1" lang="en-US" altLang="ja-JP" sz="1100" b="1" dirty="0">
+                <a:solidFill>
+                  <a:schemeClr val="tx1"/>
+                </a:solidFill>
+                <a:latin typeface="メイリオ" panose="020B0604030504040204" pitchFamily="50" charset="-128"/>
+                <a:ea typeface="メイリオ" panose="020B0604030504040204" pitchFamily="50" charset="-128"/>
+                <a:cs typeface="メイリオ"/>
+              </a:rPr>
+              <a:t>L</a:t>
+            </a:r>
+            <a:br>
+              <a:rPr kumimoji="1" lang="en-US" altLang="ja-JP" sz="1100" b="1" dirty="0">
+                <a:solidFill>
+                  <a:schemeClr val="tx1"/>
+                </a:solidFill>
+                <a:latin typeface="メイリオ" panose="020B0604030504040204" pitchFamily="50" charset="-128"/>
+                <a:ea typeface="メイリオ" panose="020B0604030504040204" pitchFamily="50" charset="-128"/>
+                <a:cs typeface="メイリオ"/>
+              </a:rPr>
+            </a:br>
+            <a:r>
+              <a:rPr kumimoji="1" lang="en-US" altLang="ja-JP" sz="1100" b="1" dirty="0">
+                <a:solidFill>
+                  <a:schemeClr val="tx1"/>
+                </a:solidFill>
+                <a:latin typeface="メイリオ" panose="020B0604030504040204" pitchFamily="50" charset="-128"/>
+                <a:ea typeface="メイリオ" panose="020B0604030504040204" pitchFamily="50" charset="-128"/>
+                <a:cs typeface="メイリオ"/>
+              </a:rPr>
+              <a:t>I</a:t>
+            </a:r>
+          </a:p>
+          <a:p>
+            <a:pPr algn="ctr"/>
+            <a:r>
+              <a:rPr lang="en-US" altLang="ja-JP" sz="1100" b="1" dirty="0">
+                <a:solidFill>
+                  <a:schemeClr val="tx1"/>
+                </a:solidFill>
+                <a:latin typeface="メイリオ" panose="020B0604030504040204" pitchFamily="50" charset="-128"/>
+                <a:ea typeface="メイリオ" panose="020B0604030504040204" pitchFamily="50" charset="-128"/>
+                <a:cs typeface="メイリオ"/>
+              </a:rPr>
+              <a:t>N</a:t>
+            </a:r>
+            <a:br>
+              <a:rPr lang="en-US" altLang="ja-JP" sz="1100" b="1" dirty="0">
+                <a:solidFill>
+                  <a:schemeClr val="tx1"/>
+                </a:solidFill>
+                <a:latin typeface="メイリオ" panose="020B0604030504040204" pitchFamily="50" charset="-128"/>
+                <a:ea typeface="メイリオ" panose="020B0604030504040204" pitchFamily="50" charset="-128"/>
+                <a:cs typeface="メイリオ"/>
+              </a:rPr>
+            </a:br>
+            <a:r>
+              <a:rPr lang="en-US" altLang="ja-JP" sz="1100" b="1" dirty="0">
+                <a:solidFill>
+                  <a:schemeClr val="tx1"/>
+                </a:solidFill>
+                <a:latin typeface="メイリオ" panose="020B0604030504040204" pitchFamily="50" charset="-128"/>
+                <a:ea typeface="メイリオ" panose="020B0604030504040204" pitchFamily="50" charset="-128"/>
+                <a:cs typeface="メイリオ"/>
+              </a:rPr>
+              <a:t>E</a:t>
+            </a:r>
+          </a:p>
+          <a:p>
+            <a:pPr algn="ctr"/>
+            <a:r>
+              <a:rPr kumimoji="1" lang="ja-JP" altLang="en-US" sz="1100" b="1" dirty="0">
+                <a:solidFill>
+                  <a:schemeClr val="tx1"/>
+                </a:solidFill>
+                <a:latin typeface="メイリオ" panose="020B0604030504040204" pitchFamily="50" charset="-128"/>
+                <a:ea typeface="メイリオ" panose="020B0604030504040204" pitchFamily="50" charset="-128"/>
+                <a:cs typeface="メイリオ"/>
+              </a:rPr>
+              <a:t>動線</a:t>
+            </a:r>
+            <a:endParaRPr kumimoji="1" lang="en-US" altLang="ja-JP" sz="1100" b="1" dirty="0">
+              <a:solidFill>
+                <a:schemeClr val="tx1"/>
+              </a:solidFill>
+              <a:latin typeface="メイリオ" panose="020B0604030504040204" pitchFamily="50" charset="-128"/>
+              <a:ea typeface="メイリオ" panose="020B0604030504040204" pitchFamily="50" charset="-128"/>
+              <a:cs typeface="メイリオ"/>
+            </a:endParaRPr>
+          </a:p>
+          <a:p>
+            <a:pPr algn="ctr"/>
+            <a:r>
+              <a:rPr lang="ja-JP" altLang="en-US" sz="1100" b="1" dirty="0">
+                <a:solidFill>
+                  <a:schemeClr val="tx1"/>
+                </a:solidFill>
+                <a:latin typeface="メイリオ" panose="020B0604030504040204" pitchFamily="50" charset="-128"/>
+                <a:ea typeface="メイリオ" panose="020B0604030504040204" pitchFamily="50" charset="-128"/>
+                <a:cs typeface="メイリオ"/>
+              </a:rPr>
+              <a:t>に</a:t>
+            </a:r>
+            <a:endParaRPr kumimoji="1" lang="en-US" altLang="ja-JP" sz="1100" b="1" dirty="0">
+              <a:solidFill>
+                <a:schemeClr val="tx1"/>
+              </a:solidFill>
+              <a:latin typeface="メイリオ" panose="020B0604030504040204" pitchFamily="50" charset="-128"/>
+              <a:ea typeface="メイリオ" panose="020B0604030504040204" pitchFamily="50" charset="-128"/>
+              <a:cs typeface="メイリオ"/>
+            </a:endParaRPr>
+          </a:p>
+          <a:p>
+            <a:pPr algn="ctr"/>
+            <a:r>
+              <a:rPr kumimoji="1" lang="ja-JP" altLang="en-US" sz="1100" b="1" dirty="0">
+                <a:solidFill>
+                  <a:schemeClr val="tx1"/>
+                </a:solidFill>
+                <a:latin typeface="メイリオ" panose="020B0604030504040204" pitchFamily="50" charset="-128"/>
+                <a:ea typeface="メイリオ" panose="020B0604030504040204" pitchFamily="50" charset="-128"/>
+                <a:cs typeface="メイリオ"/>
+              </a:rPr>
+              <a:t>｜</a:t>
+            </a:r>
+          </a:p>
+        </p:txBody>
+      </p:sp>
+      <p:pic>
+        <p:nvPicPr>
+          <p:cNvPr id="45" name="図 44" descr="グラフィカル ユーザー インターフェイス, アプリケーション, Teams&#10;&#10;AI 生成コンテンツは誤りを含む可能性があります。">
+            <a:extLst>
+              <a:ext uri="{FF2B5EF4-FFF2-40B4-BE49-F238E27FC236}">
+                <a16:creationId xmlns:a16="http://schemas.microsoft.com/office/drawing/2014/main" id="{E91CA7A5-62B3-F1F8-38C3-DDCE33E1CC3D}"/>
+              </a:ext>
+            </a:extLst>
+          </p:cNvPr>
+          <p:cNvPicPr>
+            <a:picLocks noChangeAspect="1"/>
+          </p:cNvPicPr>
+          <p:nvPr/>
+        </p:nvPicPr>
+        <p:blipFill>
+          <a:blip r:embed="rId5" cstate="print">
+            <a:extLst>
+              <a:ext uri="{28A0092B-C50C-407E-A947-70E740481C1C}">
+                <a14:useLocalDpi xmlns:a14="http://schemas.microsoft.com/office/drawing/2010/main" val="0"/>
+              </a:ext>
+            </a:extLst>
+          </a:blip>
+          <a:srcRect t="4580"/>
+          <a:stretch>
+            <a:fillRect/>
+          </a:stretch>
+        </p:blipFill>
+        <p:spPr>
+          <a:xfrm>
+            <a:off x="7999618" y="2128994"/>
+            <a:ext cx="1231081" cy="2085097"/>
+          </a:xfrm>
+          <a:prstGeom prst="rect">
+            <a:avLst/>
+          </a:prstGeom>
+        </p:spPr>
+      </p:pic>
+      <p:pic>
+        <p:nvPicPr>
+          <p:cNvPr id="46" name="図 45" descr="電卓の写真のスマートフォンのスクリーンショット&#10;&#10;AI 生成コンテンツは誤りを含む可能性があります。">
+            <a:extLst>
+              <a:ext uri="{FF2B5EF4-FFF2-40B4-BE49-F238E27FC236}">
+                <a16:creationId xmlns:a16="http://schemas.microsoft.com/office/drawing/2014/main" id="{31EEAD2C-3BE8-0210-FD8E-46D52B30A0AE}"/>
+              </a:ext>
+            </a:extLst>
+          </p:cNvPr>
+          <p:cNvPicPr>
+            <a:picLocks noChangeAspect="1"/>
+          </p:cNvPicPr>
+          <p:nvPr/>
+        </p:nvPicPr>
+        <p:blipFill>
+          <a:blip r:embed="rId3" cstate="print">
+            <a:extLst>
+              <a:ext uri="{28A0092B-C50C-407E-A947-70E740481C1C}">
+                <a14:useLocalDpi xmlns:a14="http://schemas.microsoft.com/office/drawing/2010/main" val="0"/>
+              </a:ext>
+            </a:extLst>
+          </a:blip>
+          <a:srcRect t="4580"/>
+          <a:stretch>
+            <a:fillRect/>
+          </a:stretch>
+        </p:blipFill>
+        <p:spPr>
+          <a:xfrm>
+            <a:off x="7999618" y="4325046"/>
+            <a:ext cx="1231081" cy="2085098"/>
+          </a:xfrm>
+          <a:prstGeom prst="rect">
+            <a:avLst/>
+          </a:prstGeom>
+        </p:spPr>
+      </p:pic>
+      <p:sp>
+        <p:nvSpPr>
+          <p:cNvPr id="48" name="テキスト ボックス 47">
+            <a:extLst>
+              <a:ext uri="{FF2B5EF4-FFF2-40B4-BE49-F238E27FC236}">
+                <a16:creationId xmlns:a16="http://schemas.microsoft.com/office/drawing/2014/main" id="{E989AEB3-EF0E-8885-B426-8B6A5E01F40A}"/>
+              </a:ext>
+            </a:extLst>
+          </p:cNvPr>
+          <p:cNvSpPr txBox="1"/>
+          <p:nvPr/>
+        </p:nvSpPr>
+        <p:spPr>
+          <a:xfrm>
+            <a:off x="5974631" y="2701376"/>
+            <a:ext cx="1859035" cy="430887"/>
+          </a:xfrm>
+          <a:prstGeom prst="rect">
+            <a:avLst/>
+          </a:prstGeom>
+          <a:noFill/>
+        </p:spPr>
+        <p:txBody>
+          <a:bodyPr wrap="square">
+            <a:spAutoFit/>
+          </a:bodyPr>
+          <a:lstStyle/>
+          <a:p>
+            <a:r>
+              <a:rPr kumimoji="1" lang="ja-JP" altLang="en-US" sz="1100" b="1" dirty="0">
+                <a:latin typeface="メイリオ" panose="020B0604030504040204" pitchFamily="50" charset="-128"/>
+                <a:ea typeface="メイリオ" panose="020B0604030504040204" pitchFamily="50" charset="-128"/>
+                <a:cs typeface="メイリオ"/>
+              </a:rPr>
+              <a:t>公式アカウントの</a:t>
+            </a:r>
+            <a:r>
+              <a:rPr lang="ja-JP" altLang="en-US" sz="1100" b="1" dirty="0">
+                <a:latin typeface="メイリオ" panose="020B0604030504040204" pitchFamily="50" charset="-128"/>
+                <a:ea typeface="メイリオ" panose="020B0604030504040204" pitchFamily="50" charset="-128"/>
+                <a:cs typeface="メイリオ"/>
+              </a:rPr>
+              <a:t>友だち</a:t>
+            </a:r>
+            <a:endParaRPr lang="en-US" altLang="ja-JP" sz="1100" b="1" dirty="0">
+              <a:latin typeface="メイリオ" panose="020B0604030504040204" pitchFamily="50" charset="-128"/>
+              <a:ea typeface="メイリオ" panose="020B0604030504040204" pitchFamily="50" charset="-128"/>
+              <a:cs typeface="メイリオ"/>
+            </a:endParaRPr>
+          </a:p>
+          <a:p>
+            <a:r>
+              <a:rPr lang="ja-JP" altLang="en-US" sz="1100" b="1" dirty="0">
+                <a:latin typeface="メイリオ" panose="020B0604030504040204" pitchFamily="50" charset="-128"/>
+                <a:ea typeface="メイリオ" panose="020B0604030504040204" pitchFamily="50" charset="-128"/>
+                <a:cs typeface="メイリオ"/>
+              </a:rPr>
+              <a:t>登録ページ</a:t>
+            </a:r>
+            <a:r>
+              <a:rPr lang="ja-JP" altLang="en-US" sz="1100" dirty="0">
+                <a:latin typeface="メイリオ" panose="020B0604030504040204" pitchFamily="50" charset="-128"/>
+                <a:ea typeface="メイリオ" panose="020B0604030504040204" pitchFamily="50" charset="-128"/>
+                <a:cs typeface="メイリオ"/>
+              </a:rPr>
+              <a:t>へ遷移する。</a:t>
+            </a:r>
+            <a:endParaRPr kumimoji="1" lang="ja-JP" altLang="en-US" sz="1100" dirty="0">
+              <a:latin typeface="メイリオ" panose="020B0604030504040204" pitchFamily="50" charset="-128"/>
+              <a:ea typeface="メイリオ" panose="020B0604030504040204" pitchFamily="50" charset="-128"/>
+              <a:cs typeface="メイリオ"/>
+            </a:endParaRPr>
+          </a:p>
+        </p:txBody>
+      </p:sp>
+      <p:sp>
+        <p:nvSpPr>
+          <p:cNvPr id="49" name="テキスト ボックス 48">
+            <a:extLst>
+              <a:ext uri="{FF2B5EF4-FFF2-40B4-BE49-F238E27FC236}">
+                <a16:creationId xmlns:a16="http://schemas.microsoft.com/office/drawing/2014/main" id="{4E6D08E3-E0B3-1DF4-0533-E4EE67240415}"/>
+              </a:ext>
+            </a:extLst>
+          </p:cNvPr>
+          <p:cNvSpPr txBox="1"/>
+          <p:nvPr/>
+        </p:nvSpPr>
+        <p:spPr>
+          <a:xfrm>
+            <a:off x="5971905" y="4914274"/>
+            <a:ext cx="1859035" cy="1384995"/>
+          </a:xfrm>
+          <a:prstGeom prst="rect">
+            <a:avLst/>
+          </a:prstGeom>
+          <a:noFill/>
+        </p:spPr>
+        <p:txBody>
+          <a:bodyPr wrap="square">
+            <a:spAutoFit/>
+          </a:bodyPr>
+          <a:lstStyle/>
+          <a:p>
+            <a:r>
+              <a:rPr kumimoji="1" lang="ja-JP" altLang="en-US" sz="1100" b="1" dirty="0">
+                <a:latin typeface="メイリオ" panose="020B0604030504040204" pitchFamily="50" charset="-128"/>
+                <a:ea typeface="メイリオ" panose="020B0604030504040204" pitchFamily="50" charset="-128"/>
+                <a:cs typeface="メイリオ"/>
+              </a:rPr>
+              <a:t>公式アカウントの</a:t>
+            </a:r>
+            <a:r>
+              <a:rPr lang="ja-JP" altLang="en-US" sz="1100" b="1" dirty="0">
+                <a:latin typeface="メイリオ" panose="020B0604030504040204" pitchFamily="50" charset="-128"/>
+                <a:ea typeface="メイリオ" panose="020B0604030504040204" pitchFamily="50" charset="-128"/>
+                <a:cs typeface="メイリオ"/>
+              </a:rPr>
+              <a:t>トーク</a:t>
+            </a:r>
+            <a:endParaRPr lang="en-US" altLang="ja-JP" sz="1100" b="1" dirty="0">
+              <a:latin typeface="メイリオ" panose="020B0604030504040204" pitchFamily="50" charset="-128"/>
+              <a:ea typeface="メイリオ" panose="020B0604030504040204" pitchFamily="50" charset="-128"/>
+              <a:cs typeface="メイリオ"/>
+            </a:endParaRPr>
+          </a:p>
+          <a:p>
+            <a:r>
+              <a:rPr lang="ja-JP" altLang="en-US" sz="1100" b="1" dirty="0">
+                <a:latin typeface="メイリオ" panose="020B0604030504040204" pitchFamily="50" charset="-128"/>
+                <a:ea typeface="メイリオ" panose="020B0604030504040204" pitchFamily="50" charset="-128"/>
+                <a:cs typeface="メイリオ"/>
+              </a:rPr>
+              <a:t>画面</a:t>
+            </a:r>
+            <a:r>
+              <a:rPr lang="ja-JP" altLang="en-US" sz="1100" dirty="0">
+                <a:latin typeface="メイリオ" panose="020B0604030504040204" pitchFamily="50" charset="-128"/>
+                <a:ea typeface="メイリオ" panose="020B0604030504040204" pitchFamily="50" charset="-128"/>
+                <a:cs typeface="メイリオ"/>
+              </a:rPr>
+              <a:t>へ遷移する。</a:t>
+            </a:r>
+            <a:endParaRPr lang="en-US" altLang="ja-JP" sz="1100" dirty="0">
+              <a:latin typeface="メイリオ" panose="020B0604030504040204" pitchFamily="50" charset="-128"/>
+              <a:ea typeface="メイリオ" panose="020B0604030504040204" pitchFamily="50" charset="-128"/>
+              <a:cs typeface="メイリオ"/>
+            </a:endParaRPr>
+          </a:p>
+          <a:p>
+            <a:r>
+              <a:rPr kumimoji="1" lang="en-US" altLang="ja-JP" sz="1000" dirty="0">
+                <a:solidFill>
+                  <a:srgbClr val="FF0000"/>
+                </a:solidFill>
+                <a:latin typeface="メイリオ" panose="020B0604030504040204" pitchFamily="50" charset="-128"/>
+                <a:ea typeface="メイリオ" panose="020B0604030504040204" pitchFamily="50" charset="-128"/>
+                <a:cs typeface="メイリオ"/>
+              </a:rPr>
+              <a:t>※</a:t>
+            </a:r>
+            <a:r>
+              <a:rPr kumimoji="1" lang="ja-JP" altLang="en-US" sz="1000" dirty="0">
+                <a:solidFill>
+                  <a:srgbClr val="FF0000"/>
+                </a:solidFill>
+                <a:latin typeface="メイリオ" panose="020B0604030504040204" pitchFamily="50" charset="-128"/>
+                <a:ea typeface="メイリオ" panose="020B0604030504040204" pitchFamily="50" charset="-128"/>
+                <a:cs typeface="メイリオ"/>
+              </a:rPr>
+              <a:t>設定によりフォーム入力</a:t>
+            </a:r>
+            <a:endParaRPr kumimoji="1" lang="en-US" altLang="ja-JP" sz="1000" dirty="0">
+              <a:solidFill>
+                <a:srgbClr val="FF0000"/>
+              </a:solidFill>
+              <a:latin typeface="メイリオ" panose="020B0604030504040204" pitchFamily="50" charset="-128"/>
+              <a:ea typeface="メイリオ" panose="020B0604030504040204" pitchFamily="50" charset="-128"/>
+              <a:cs typeface="メイリオ"/>
+            </a:endParaRPr>
+          </a:p>
+          <a:p>
+            <a:r>
+              <a:rPr lang="ja-JP" altLang="en-US" sz="1000" dirty="0">
+                <a:solidFill>
+                  <a:srgbClr val="FF0000"/>
+                </a:solidFill>
+                <a:latin typeface="メイリオ" panose="020B0604030504040204" pitchFamily="50" charset="-128"/>
+                <a:ea typeface="メイリオ" panose="020B0604030504040204" pitchFamily="50" charset="-128"/>
+                <a:cs typeface="メイリオ"/>
+              </a:rPr>
+              <a:t>　内容を踏襲した入力画面</a:t>
+            </a:r>
+            <a:endParaRPr lang="en-US" altLang="ja-JP" sz="1000" dirty="0">
+              <a:solidFill>
+                <a:srgbClr val="FF0000"/>
+              </a:solidFill>
+              <a:latin typeface="メイリオ" panose="020B0604030504040204" pitchFamily="50" charset="-128"/>
+              <a:ea typeface="メイリオ" panose="020B0604030504040204" pitchFamily="50" charset="-128"/>
+              <a:cs typeface="メイリオ"/>
+            </a:endParaRPr>
+          </a:p>
+          <a:p>
+            <a:r>
+              <a:rPr kumimoji="1" lang="ja-JP" altLang="en-US" sz="1000" dirty="0">
+                <a:solidFill>
+                  <a:srgbClr val="FF0000"/>
+                </a:solidFill>
+                <a:latin typeface="メイリオ" panose="020B0604030504040204" pitchFamily="50" charset="-128"/>
+                <a:ea typeface="メイリオ" panose="020B0604030504040204" pitchFamily="50" charset="-128"/>
+                <a:cs typeface="メイリオ"/>
+              </a:rPr>
+              <a:t>　を表示させることが可能。</a:t>
+            </a:r>
+            <a:endParaRPr kumimoji="1" lang="en-US" altLang="ja-JP" sz="1000" dirty="0">
+              <a:solidFill>
+                <a:srgbClr val="FF0000"/>
+              </a:solidFill>
+              <a:latin typeface="メイリオ" panose="020B0604030504040204" pitchFamily="50" charset="-128"/>
+              <a:ea typeface="メイリオ" panose="020B0604030504040204" pitchFamily="50" charset="-128"/>
+              <a:cs typeface="メイリオ"/>
+            </a:endParaRPr>
+          </a:p>
+          <a:p>
+            <a:endParaRPr lang="en-US" altLang="ja-JP" sz="1000" dirty="0">
+              <a:solidFill>
+                <a:srgbClr val="FF0000"/>
+              </a:solidFill>
+              <a:latin typeface="メイリオ" panose="020B0604030504040204" pitchFamily="50" charset="-128"/>
+              <a:ea typeface="メイリオ" panose="020B0604030504040204" pitchFamily="50" charset="-128"/>
+              <a:cs typeface="メイリオ"/>
+            </a:endParaRPr>
+          </a:p>
+          <a:p>
+            <a:r>
+              <a:rPr lang="ja-JP" altLang="en-US" sz="1100" b="1" dirty="0">
+                <a:latin typeface="メイリオ" panose="020B0604030504040204" pitchFamily="50" charset="-128"/>
+                <a:ea typeface="メイリオ" panose="020B0604030504040204" pitchFamily="50" charset="-128"/>
+                <a:cs typeface="メイリオ"/>
+              </a:rPr>
+              <a:t>↓</a:t>
+            </a:r>
+            <a:endParaRPr lang="en-US" altLang="ja-JP" sz="1100" b="1" dirty="0">
+              <a:latin typeface="メイリオ" panose="020B0604030504040204" pitchFamily="50" charset="-128"/>
+              <a:ea typeface="メイリオ" panose="020B0604030504040204" pitchFamily="50" charset="-128"/>
+              <a:cs typeface="メイリオ"/>
+            </a:endParaRPr>
+          </a:p>
+          <a:p>
+            <a:r>
+              <a:rPr kumimoji="1" lang="ja-JP" altLang="en-US" sz="1100" b="1" dirty="0">
+                <a:latin typeface="メイリオ" panose="020B0604030504040204" pitchFamily="50" charset="-128"/>
+                <a:ea typeface="メイリオ" panose="020B0604030504040204" pitchFamily="50" charset="-128"/>
+                <a:cs typeface="メイリオ"/>
+              </a:rPr>
+              <a:t>配信セグメントに利用可</a:t>
+            </a:r>
+            <a:endParaRPr kumimoji="1" lang="ja-JP" altLang="en-US" sz="1100" dirty="0">
+              <a:latin typeface="メイリオ" panose="020B0604030504040204" pitchFamily="50" charset="-128"/>
+              <a:ea typeface="メイリオ" panose="020B0604030504040204" pitchFamily="50" charset="-128"/>
+              <a:cs typeface="メイリオ"/>
+            </a:endParaRPr>
+          </a:p>
+        </p:txBody>
+      </p:sp>
+      <p:pic>
+        <p:nvPicPr>
+          <p:cNvPr id="56" name="図 55">
+            <a:extLst>
+              <a:ext uri="{FF2B5EF4-FFF2-40B4-BE49-F238E27FC236}">
+                <a16:creationId xmlns:a16="http://schemas.microsoft.com/office/drawing/2014/main" id="{0B7B313D-7D5F-4357-9B38-DFC3DBC5FCF6}"/>
+              </a:ext>
+            </a:extLst>
+          </p:cNvPr>
+          <p:cNvPicPr>
+            <a:picLocks noChangeAspect="1"/>
+          </p:cNvPicPr>
+          <p:nvPr/>
+        </p:nvPicPr>
+        <p:blipFill>
+          <a:blip r:embed="rId9"/>
+          <a:stretch>
+            <a:fillRect/>
+          </a:stretch>
+        </p:blipFill>
+        <p:spPr>
+          <a:xfrm>
+            <a:off x="8048301" y="3085325"/>
+            <a:ext cx="1133712" cy="110223"/>
+          </a:xfrm>
+          <a:prstGeom prst="rect">
+            <a:avLst/>
+          </a:prstGeom>
+        </p:spPr>
+      </p:pic>
+      <p:pic>
+        <p:nvPicPr>
+          <p:cNvPr id="57" name="図 56">
+            <a:extLst>
+              <a:ext uri="{FF2B5EF4-FFF2-40B4-BE49-F238E27FC236}">
+                <a16:creationId xmlns:a16="http://schemas.microsoft.com/office/drawing/2014/main" id="{A8EA42C4-338F-850B-B276-B83DC2A73148}"/>
+              </a:ext>
+            </a:extLst>
+          </p:cNvPr>
+          <p:cNvPicPr>
+            <a:picLocks noChangeAspect="1"/>
+          </p:cNvPicPr>
+          <p:nvPr/>
+        </p:nvPicPr>
+        <p:blipFill>
+          <a:blip r:embed="rId7"/>
+          <a:stretch>
+            <a:fillRect/>
+          </a:stretch>
+        </p:blipFill>
+        <p:spPr>
+          <a:xfrm>
+            <a:off x="8378027" y="3091633"/>
+            <a:ext cx="479964" cy="106659"/>
+          </a:xfrm>
+          <a:prstGeom prst="rect">
+            <a:avLst/>
+          </a:prstGeom>
+        </p:spPr>
+      </p:pic>
+      <p:pic>
+        <p:nvPicPr>
+          <p:cNvPr id="58" name="図 57">
+            <a:extLst>
+              <a:ext uri="{FF2B5EF4-FFF2-40B4-BE49-F238E27FC236}">
+                <a16:creationId xmlns:a16="http://schemas.microsoft.com/office/drawing/2014/main" id="{CCB04072-A708-EEE7-1345-D4C9E9FA9C1D}"/>
+              </a:ext>
+            </a:extLst>
+          </p:cNvPr>
+          <p:cNvPicPr>
+            <a:picLocks noChangeAspect="1"/>
+          </p:cNvPicPr>
+          <p:nvPr/>
+        </p:nvPicPr>
+        <p:blipFill>
+          <a:blip r:embed="rId7"/>
+          <a:stretch>
+            <a:fillRect/>
+          </a:stretch>
+        </p:blipFill>
+        <p:spPr>
+          <a:xfrm>
+            <a:off x="8395919" y="4322141"/>
+            <a:ext cx="334412" cy="74315"/>
+          </a:xfrm>
+          <a:prstGeom prst="rect">
+            <a:avLst/>
+          </a:prstGeom>
+        </p:spPr>
+      </p:pic>
+      <p:pic>
+        <p:nvPicPr>
+          <p:cNvPr id="59" name="図 58">
+            <a:extLst>
+              <a:ext uri="{FF2B5EF4-FFF2-40B4-BE49-F238E27FC236}">
+                <a16:creationId xmlns:a16="http://schemas.microsoft.com/office/drawing/2014/main" id="{EDED354B-362F-AAF7-76A6-52D8547EDC91}"/>
+              </a:ext>
+            </a:extLst>
+          </p:cNvPr>
+          <p:cNvPicPr>
+            <a:picLocks noChangeAspect="1"/>
+          </p:cNvPicPr>
+          <p:nvPr/>
+        </p:nvPicPr>
+        <p:blipFill>
+          <a:blip r:embed="rId7"/>
+          <a:stretch>
+            <a:fillRect/>
+          </a:stretch>
+        </p:blipFill>
+        <p:spPr>
+          <a:xfrm>
+            <a:off x="8548319" y="4474541"/>
+            <a:ext cx="334412" cy="74315"/>
+          </a:xfrm>
+          <a:prstGeom prst="rect">
+            <a:avLst/>
+          </a:prstGeom>
+        </p:spPr>
+      </p:pic>
+      <p:sp>
+        <p:nvSpPr>
+          <p:cNvPr id="1030" name="楕円 1029">
+            <a:extLst>
+              <a:ext uri="{FF2B5EF4-FFF2-40B4-BE49-F238E27FC236}">
+                <a16:creationId xmlns:a16="http://schemas.microsoft.com/office/drawing/2014/main" id="{A0934BB8-8F8D-D4F0-8D59-8F32A6A6E03A}"/>
+              </a:ext>
+            </a:extLst>
+          </p:cNvPr>
+          <p:cNvSpPr/>
+          <p:nvPr/>
+        </p:nvSpPr>
+        <p:spPr>
+          <a:xfrm>
+            <a:off x="8414131" y="2644225"/>
+            <a:ext cx="396000" cy="396000"/>
+          </a:xfrm>
+          <a:prstGeom prst="ellipse">
+            <a:avLst/>
+          </a:prstGeom>
+          <a:solidFill>
+            <a:schemeClr val="bg1">
+              <a:lumMod val="95000"/>
+            </a:schemeClr>
+          </a:solidFill>
+          <a:ln w="9525">
+            <a:solidFill>
+              <a:schemeClr val="tx1"/>
+            </a:solidFill>
+          </a:ln>
+        </p:spPr>
+        <p:style>
+          <a:lnRef idx="2">
+            <a:schemeClr val="accent1">
+              <a:shade val="15000"/>
+            </a:schemeClr>
+          </a:lnRef>
+          <a:fillRef idx="1">
+            <a:schemeClr val="accent1"/>
+          </a:fillRef>
+          <a:effectRef idx="0">
+            <a:schemeClr val="accent1"/>
+          </a:effectRef>
+          <a:fontRef idx="minor">
+            <a:schemeClr val="lt1"/>
+          </a:fontRef>
+        </p:style>
+        <p:txBody>
+          <a:bodyPr rtlCol="0" anchor="ctr"/>
+          <a:lstStyle/>
+          <a:p>
+            <a:pPr algn="ctr"/>
+            <a:r>
+              <a:rPr kumimoji="1" lang="ja-JP" altLang="en-US" sz="600" dirty="0">
+                <a:solidFill>
+                  <a:schemeClr val="tx1"/>
+                </a:solidFill>
+                <a:latin typeface="メイリオ" panose="020B0604030504040204" pitchFamily="50" charset="-128"/>
+                <a:ea typeface="メイリオ" panose="020B0604030504040204" pitchFamily="50" charset="-128"/>
+                <a:cs typeface="メイリオ"/>
+              </a:rPr>
+              <a:t>ロゴ</a:t>
+            </a:r>
+          </a:p>
+        </p:txBody>
+      </p:sp>
+      <p:sp>
+        <p:nvSpPr>
+          <p:cNvPr id="34" name="正方形/長方形 33">
+            <a:extLst>
+              <a:ext uri="{FF2B5EF4-FFF2-40B4-BE49-F238E27FC236}">
+                <a16:creationId xmlns:a16="http://schemas.microsoft.com/office/drawing/2014/main" id="{A593FC72-954C-48DC-E845-1A5FCE4C9E00}"/>
+              </a:ext>
+            </a:extLst>
+          </p:cNvPr>
+          <p:cNvSpPr/>
+          <p:nvPr/>
+        </p:nvSpPr>
+        <p:spPr>
+          <a:xfrm>
+            <a:off x="315283" y="2196668"/>
+            <a:ext cx="1778402" cy="3994401"/>
+          </a:xfrm>
+          <a:prstGeom prst="rect">
+            <a:avLst/>
+          </a:prstGeom>
+          <a:noFill/>
+          <a:ln>
+            <a:solidFill>
+              <a:schemeClr val="tx2">
+                <a:lumMod val="20000"/>
+                <a:lumOff val="80000"/>
+              </a:schemeClr>
+            </a:solidFill>
+          </a:ln>
+        </p:spPr>
+        <p:style>
+          <a:lnRef idx="2">
+            <a:schemeClr val="accent1">
+              <a:shade val="15000"/>
+            </a:schemeClr>
+          </a:lnRef>
+          <a:fillRef idx="1">
+            <a:schemeClr val="accent1"/>
+          </a:fillRef>
+          <a:effectRef idx="0">
+            <a:schemeClr val="accent1"/>
+          </a:effectRef>
+          <a:fontRef idx="minor">
+            <a:schemeClr val="lt1"/>
+          </a:fontRef>
+        </p:style>
+        <p:txBody>
+          <a:bodyPr rtlCol="0" anchor="ctr"/>
+          <a:lstStyle/>
+          <a:p>
+            <a:pPr algn="ctr"/>
+            <a:endParaRPr kumimoji="1" lang="ja-JP" altLang="en-US">
+              <a:latin typeface="メイリオ"/>
+              <a:ea typeface="メイリオ"/>
+              <a:cs typeface="メイリオ"/>
+            </a:endParaRPr>
+          </a:p>
+        </p:txBody>
+      </p:sp>
+      <p:sp>
+        <p:nvSpPr>
+          <p:cNvPr id="35" name="二等辺三角形 34">
+            <a:extLst>
+              <a:ext uri="{FF2B5EF4-FFF2-40B4-BE49-F238E27FC236}">
+                <a16:creationId xmlns:a16="http://schemas.microsoft.com/office/drawing/2014/main" id="{D9FB7255-AF30-7B82-6180-D447A3754744}"/>
+              </a:ext>
+            </a:extLst>
+          </p:cNvPr>
+          <p:cNvSpPr/>
+          <p:nvPr/>
+        </p:nvSpPr>
+        <p:spPr>
+          <a:xfrm rot="5400000">
+            <a:off x="2108593" y="2360745"/>
+            <a:ext cx="252701" cy="198744"/>
+          </a:xfrm>
+          <a:prstGeom prst="triangle">
+            <a:avLst/>
+          </a:prstGeom>
+          <a:solidFill>
+            <a:schemeClr val="tx2"/>
+          </a:solidFill>
+          <a:ln>
+            <a:noFill/>
+          </a:ln>
+        </p:spPr>
+        <p:style>
+          <a:lnRef idx="2">
+            <a:schemeClr val="accent1">
+              <a:shade val="15000"/>
+            </a:schemeClr>
+          </a:lnRef>
+          <a:fillRef idx="1">
+            <a:schemeClr val="accent1"/>
+          </a:fillRef>
+          <a:effectRef idx="0">
+            <a:schemeClr val="accent1"/>
+          </a:effectRef>
+          <a:fontRef idx="minor">
+            <a:schemeClr val="lt1"/>
+          </a:fontRef>
+        </p:style>
+        <p:txBody>
+          <a:bodyPr rtlCol="0" anchor="ctr"/>
+          <a:lstStyle/>
+          <a:p>
+            <a:pPr algn="ctr"/>
+            <a:endParaRPr kumimoji="1" lang="ja-JP" altLang="en-US">
+              <a:latin typeface="メイリオ"/>
+              <a:ea typeface="メイリオ"/>
+              <a:cs typeface="メイリオ"/>
+            </a:endParaRPr>
+          </a:p>
+        </p:txBody>
+      </p:sp>
+      <p:sp>
+        <p:nvSpPr>
+          <p:cNvPr id="36" name="二等辺三角形 35">
+            <a:extLst>
+              <a:ext uri="{FF2B5EF4-FFF2-40B4-BE49-F238E27FC236}">
+                <a16:creationId xmlns:a16="http://schemas.microsoft.com/office/drawing/2014/main" id="{626832A8-575E-5E2B-73F4-BE5567514E57}"/>
+              </a:ext>
+            </a:extLst>
+          </p:cNvPr>
+          <p:cNvSpPr/>
+          <p:nvPr/>
+        </p:nvSpPr>
+        <p:spPr>
+          <a:xfrm rot="5400000">
+            <a:off x="2225165" y="2360745"/>
+            <a:ext cx="252701" cy="198744"/>
+          </a:xfrm>
+          <a:prstGeom prst="triangle">
+            <a:avLst/>
+          </a:prstGeom>
+          <a:solidFill>
+            <a:schemeClr val="tx2"/>
+          </a:solidFill>
+          <a:ln>
+            <a:noFill/>
+          </a:ln>
+        </p:spPr>
+        <p:style>
+          <a:lnRef idx="2">
+            <a:schemeClr val="accent1">
+              <a:shade val="15000"/>
+            </a:schemeClr>
+          </a:lnRef>
+          <a:fillRef idx="1">
+            <a:schemeClr val="accent1"/>
+          </a:fillRef>
+          <a:effectRef idx="0">
+            <a:schemeClr val="accent1"/>
+          </a:effectRef>
+          <a:fontRef idx="minor">
+            <a:schemeClr val="lt1"/>
+          </a:fontRef>
+        </p:style>
+        <p:txBody>
+          <a:bodyPr rtlCol="0" anchor="ctr"/>
+          <a:lstStyle/>
+          <a:p>
+            <a:pPr algn="ctr"/>
+            <a:endParaRPr kumimoji="1" lang="ja-JP" altLang="en-US">
+              <a:latin typeface="メイリオ"/>
+              <a:ea typeface="メイリオ"/>
+              <a:cs typeface="メイリオ"/>
+            </a:endParaRPr>
+          </a:p>
+        </p:txBody>
+      </p:sp>
+      <p:sp>
+        <p:nvSpPr>
+          <p:cNvPr id="37" name="二等辺三角形 36">
+            <a:extLst>
+              <a:ext uri="{FF2B5EF4-FFF2-40B4-BE49-F238E27FC236}">
+                <a16:creationId xmlns:a16="http://schemas.microsoft.com/office/drawing/2014/main" id="{9D8E2C96-1207-00B8-6FC3-23370EFD7A03}"/>
+              </a:ext>
+            </a:extLst>
+          </p:cNvPr>
+          <p:cNvSpPr/>
+          <p:nvPr/>
+        </p:nvSpPr>
+        <p:spPr>
+          <a:xfrm rot="5400000">
+            <a:off x="2341737" y="2360745"/>
+            <a:ext cx="252701" cy="198744"/>
+          </a:xfrm>
+          <a:prstGeom prst="triangle">
+            <a:avLst/>
+          </a:prstGeom>
+          <a:solidFill>
+            <a:schemeClr val="tx2"/>
+          </a:solidFill>
+          <a:ln>
+            <a:noFill/>
+          </a:ln>
+        </p:spPr>
+        <p:style>
+          <a:lnRef idx="2">
+            <a:schemeClr val="accent1">
+              <a:shade val="15000"/>
+            </a:schemeClr>
+          </a:lnRef>
+          <a:fillRef idx="1">
+            <a:schemeClr val="accent1"/>
+          </a:fillRef>
+          <a:effectRef idx="0">
+            <a:schemeClr val="accent1"/>
+          </a:effectRef>
+          <a:fontRef idx="minor">
+            <a:schemeClr val="lt1"/>
+          </a:fontRef>
+        </p:style>
+        <p:txBody>
+          <a:bodyPr rtlCol="0" anchor="ctr"/>
+          <a:lstStyle/>
+          <a:p>
+            <a:pPr algn="ctr"/>
+            <a:endParaRPr kumimoji="1" lang="ja-JP" altLang="en-US">
+              <a:latin typeface="メイリオ"/>
+              <a:ea typeface="メイリオ"/>
+              <a:cs typeface="メイリオ"/>
+            </a:endParaRPr>
+          </a:p>
+        </p:txBody>
+      </p:sp>
+      <p:sp>
+        <p:nvSpPr>
+          <p:cNvPr id="38" name="正方形/長方形 37">
+            <a:extLst>
+              <a:ext uri="{FF2B5EF4-FFF2-40B4-BE49-F238E27FC236}">
+                <a16:creationId xmlns:a16="http://schemas.microsoft.com/office/drawing/2014/main" id="{28671F13-F479-AFF6-9832-C7C00D2D05EE}"/>
+              </a:ext>
+            </a:extLst>
+          </p:cNvPr>
+          <p:cNvSpPr/>
+          <p:nvPr/>
+        </p:nvSpPr>
+        <p:spPr>
+          <a:xfrm>
+            <a:off x="614547" y="4198381"/>
+            <a:ext cx="1154315" cy="244151"/>
+          </a:xfrm>
+          <a:prstGeom prst="rect">
+            <a:avLst/>
+          </a:prstGeom>
+          <a:solidFill>
+            <a:schemeClr val="bg1">
+              <a:lumMod val="75000"/>
+            </a:schemeClr>
+          </a:solidFill>
+          <a:ln>
+            <a:noFill/>
+          </a:ln>
+        </p:spPr>
+        <p:style>
+          <a:lnRef idx="2">
+            <a:schemeClr val="accent1">
+              <a:shade val="15000"/>
+            </a:schemeClr>
+          </a:lnRef>
+          <a:fillRef idx="1">
+            <a:schemeClr val="accent1"/>
+          </a:fillRef>
+          <a:effectRef idx="0">
+            <a:schemeClr val="accent1"/>
+          </a:effectRef>
+          <a:fontRef idx="minor">
+            <a:schemeClr val="lt1"/>
+          </a:fontRef>
+        </p:style>
+        <p:txBody>
+          <a:bodyPr rtlCol="0" anchor="ctr"/>
+          <a:lstStyle/>
+          <a:p>
+            <a:pPr algn="ctr"/>
+            <a:r>
+              <a:rPr kumimoji="1" lang="ja-JP" altLang="en-US" sz="1100" b="1" dirty="0">
+                <a:latin typeface="メイリオ" panose="020B0604030504040204" pitchFamily="50" charset="-128"/>
+                <a:ea typeface="メイリオ" panose="020B0604030504040204" pitchFamily="50" charset="-128"/>
+                <a:cs typeface="メイリオ"/>
+              </a:rPr>
+              <a:t>フォーム</a:t>
+            </a:r>
+          </a:p>
+        </p:txBody>
+      </p:sp>
+      <p:pic>
+        <p:nvPicPr>
+          <p:cNvPr id="40" name="図 39" descr="テキスト, 手紙&#10;&#10;AI 生成コンテンツは誤りを含む可能性があります。">
+            <a:extLst>
+              <a:ext uri="{FF2B5EF4-FFF2-40B4-BE49-F238E27FC236}">
+                <a16:creationId xmlns:a16="http://schemas.microsoft.com/office/drawing/2014/main" id="{2B8DDCE0-83B3-5BAA-0FFE-3D329FBE2D94}"/>
+              </a:ext>
+            </a:extLst>
+          </p:cNvPr>
+          <p:cNvPicPr>
+            <a:picLocks noChangeAspect="1"/>
+          </p:cNvPicPr>
+          <p:nvPr/>
+        </p:nvPicPr>
+        <p:blipFill>
+          <a:blip r:embed="rId6" cstate="print">
+            <a:extLst>
+              <a:ext uri="{28A0092B-C50C-407E-A947-70E740481C1C}">
+                <a14:useLocalDpi xmlns:a14="http://schemas.microsoft.com/office/drawing/2010/main" val="0"/>
+              </a:ext>
+            </a:extLst>
+          </a:blip>
+          <a:srcRect t="4580"/>
+          <a:stretch>
+            <a:fillRect/>
+          </a:stretch>
+        </p:blipFill>
+        <p:spPr>
+          <a:xfrm>
+            <a:off x="663353" y="2289246"/>
+            <a:ext cx="1048252" cy="1775437"/>
+          </a:xfrm>
+          <a:prstGeom prst="rect">
+            <a:avLst/>
+          </a:prstGeom>
+        </p:spPr>
+      </p:pic>
+      <p:pic>
+        <p:nvPicPr>
+          <p:cNvPr id="41" name="図 40">
+            <a:extLst>
+              <a:ext uri="{FF2B5EF4-FFF2-40B4-BE49-F238E27FC236}">
+                <a16:creationId xmlns:a16="http://schemas.microsoft.com/office/drawing/2014/main" id="{EE7C7FD3-78CB-4D67-F96A-D6F8017FE224}"/>
+              </a:ext>
+            </a:extLst>
+          </p:cNvPr>
+          <p:cNvPicPr>
+            <a:picLocks noChangeAspect="1"/>
+          </p:cNvPicPr>
+          <p:nvPr/>
+        </p:nvPicPr>
+        <p:blipFill>
+          <a:blip r:embed="rId4"/>
+          <a:stretch>
+            <a:fillRect/>
+          </a:stretch>
+        </p:blipFill>
+        <p:spPr>
+          <a:xfrm>
+            <a:off x="641171" y="2325575"/>
+            <a:ext cx="494484" cy="86136"/>
+          </a:xfrm>
+          <a:prstGeom prst="rect">
+            <a:avLst/>
+          </a:prstGeom>
+        </p:spPr>
+      </p:pic>
+      <p:pic>
+        <p:nvPicPr>
+          <p:cNvPr id="42" name="図 41">
+            <a:extLst>
+              <a:ext uri="{FF2B5EF4-FFF2-40B4-BE49-F238E27FC236}">
+                <a16:creationId xmlns:a16="http://schemas.microsoft.com/office/drawing/2014/main" id="{2E6CA8C2-2D04-CD9A-C431-4766768BBF3D}"/>
+              </a:ext>
+            </a:extLst>
+          </p:cNvPr>
+          <p:cNvPicPr>
+            <a:picLocks noChangeAspect="1"/>
+          </p:cNvPicPr>
+          <p:nvPr/>
+        </p:nvPicPr>
+        <p:blipFill>
+          <a:blip r:embed="rId4"/>
+          <a:stretch>
+            <a:fillRect/>
+          </a:stretch>
+        </p:blipFill>
+        <p:spPr>
+          <a:xfrm>
+            <a:off x="630233" y="2328011"/>
+            <a:ext cx="494484" cy="86136"/>
+          </a:xfrm>
+          <a:prstGeom prst="rect">
+            <a:avLst/>
+          </a:prstGeom>
+        </p:spPr>
+      </p:pic>
+      <p:pic>
+        <p:nvPicPr>
+          <p:cNvPr id="47" name="図 46">
+            <a:extLst>
+              <a:ext uri="{FF2B5EF4-FFF2-40B4-BE49-F238E27FC236}">
+                <a16:creationId xmlns:a16="http://schemas.microsoft.com/office/drawing/2014/main" id="{E5BE860E-2799-E5F4-ADCA-4ADBD44E0D0C}"/>
+              </a:ext>
+            </a:extLst>
+          </p:cNvPr>
+          <p:cNvPicPr>
+            <a:picLocks noChangeAspect="1"/>
+          </p:cNvPicPr>
+          <p:nvPr/>
+        </p:nvPicPr>
+        <p:blipFill>
+          <a:blip r:embed="rId4"/>
+          <a:stretch>
+            <a:fillRect/>
+          </a:stretch>
+        </p:blipFill>
+        <p:spPr>
+          <a:xfrm>
+            <a:off x="810116" y="3773334"/>
+            <a:ext cx="494484" cy="86136"/>
+          </a:xfrm>
+          <a:prstGeom prst="rect">
+            <a:avLst/>
+          </a:prstGeom>
+        </p:spPr>
+      </p:pic>
+      <p:pic>
+        <p:nvPicPr>
+          <p:cNvPr id="55" name="図 54">
+            <a:extLst>
+              <a:ext uri="{FF2B5EF4-FFF2-40B4-BE49-F238E27FC236}">
+                <a16:creationId xmlns:a16="http://schemas.microsoft.com/office/drawing/2014/main" id="{8AF12F67-4C9A-867F-4608-8FE9DA811630}"/>
+              </a:ext>
+            </a:extLst>
+          </p:cNvPr>
+          <p:cNvPicPr>
+            <a:picLocks noChangeAspect="1"/>
+          </p:cNvPicPr>
+          <p:nvPr/>
+        </p:nvPicPr>
+        <p:blipFill>
+          <a:blip r:embed="rId2"/>
+          <a:stretch>
+            <a:fillRect/>
+          </a:stretch>
+        </p:blipFill>
+        <p:spPr>
+          <a:xfrm>
+            <a:off x="647157" y="2445202"/>
+            <a:ext cx="1076073" cy="1468487"/>
+          </a:xfrm>
+          <a:prstGeom prst="rect">
+            <a:avLst/>
+          </a:prstGeom>
+        </p:spPr>
+      </p:pic>
+      <p:pic>
+        <p:nvPicPr>
+          <p:cNvPr id="1024" name="図 1023">
+            <a:extLst>
+              <a:ext uri="{FF2B5EF4-FFF2-40B4-BE49-F238E27FC236}">
+                <a16:creationId xmlns:a16="http://schemas.microsoft.com/office/drawing/2014/main" id="{E5E4719A-E6F5-34E0-F2FD-37322E2A76AA}"/>
+              </a:ext>
+            </a:extLst>
+          </p:cNvPr>
+          <p:cNvPicPr>
+            <a:picLocks noChangeAspect="1"/>
+          </p:cNvPicPr>
+          <p:nvPr/>
+        </p:nvPicPr>
+        <p:blipFill>
+          <a:blip r:embed="rId10"/>
+          <a:stretch>
+            <a:fillRect/>
+          </a:stretch>
+        </p:blipFill>
+        <p:spPr>
+          <a:xfrm>
+            <a:off x="1125324" y="2303179"/>
+            <a:ext cx="560995" cy="133465"/>
+          </a:xfrm>
+          <a:prstGeom prst="rect">
+            <a:avLst/>
+          </a:prstGeom>
+        </p:spPr>
+      </p:pic>
+      <p:sp>
+        <p:nvSpPr>
+          <p:cNvPr id="1026" name="テキスト ボックス 1025">
+            <a:extLst>
+              <a:ext uri="{FF2B5EF4-FFF2-40B4-BE49-F238E27FC236}">
+                <a16:creationId xmlns:a16="http://schemas.microsoft.com/office/drawing/2014/main" id="{1B57767B-4EA3-C247-B88C-4D505A95BD20}"/>
+              </a:ext>
+            </a:extLst>
+          </p:cNvPr>
+          <p:cNvSpPr txBox="1"/>
+          <p:nvPr/>
+        </p:nvSpPr>
+        <p:spPr>
+          <a:xfrm>
+            <a:off x="-490844" y="4711039"/>
+            <a:ext cx="3405553" cy="400110"/>
+          </a:xfrm>
+          <a:prstGeom prst="rect">
+            <a:avLst/>
+          </a:prstGeom>
+          <a:noFill/>
+        </p:spPr>
+        <p:txBody>
+          <a:bodyPr wrap="square">
+            <a:spAutoFit/>
+          </a:bodyPr>
+          <a:lstStyle/>
+          <a:p>
+            <a:pPr algn="ctr"/>
+            <a:r>
+              <a:rPr lang="en-US" altLang="ja-JP" sz="1000" b="1" dirty="0">
+                <a:solidFill>
+                  <a:srgbClr val="FF0000"/>
+                </a:solidFill>
+                <a:latin typeface="メイリオ" panose="020B0604030504040204" pitchFamily="50" charset="-128"/>
+                <a:ea typeface="メイリオ" panose="020B0604030504040204" pitchFamily="50" charset="-128"/>
+                <a:cs typeface="メイリオ"/>
+              </a:rPr>
+              <a:t>※</a:t>
+            </a:r>
+            <a:r>
+              <a:rPr lang="ja-JP" altLang="en-US" sz="1000" b="1" dirty="0">
+                <a:solidFill>
+                  <a:srgbClr val="FF0000"/>
+                </a:solidFill>
+                <a:latin typeface="メイリオ" panose="020B0604030504040204" pitchFamily="50" charset="-128"/>
+                <a:ea typeface="メイリオ" panose="020B0604030504040204" pitchFamily="50" charset="-128"/>
+                <a:cs typeface="メイリオ"/>
+              </a:rPr>
+              <a:t>入力した内容を</a:t>
+            </a:r>
+            <a:endParaRPr lang="en-US" altLang="ja-JP" sz="1000" b="1" dirty="0">
+              <a:solidFill>
+                <a:srgbClr val="FF0000"/>
+              </a:solidFill>
+              <a:latin typeface="メイリオ" panose="020B0604030504040204" pitchFamily="50" charset="-128"/>
+              <a:ea typeface="メイリオ" panose="020B0604030504040204" pitchFamily="50" charset="-128"/>
+              <a:cs typeface="メイリオ"/>
+            </a:endParaRPr>
+          </a:p>
+          <a:p>
+            <a:pPr algn="ctr"/>
+            <a:r>
+              <a:rPr lang="ja-JP" altLang="en-US" sz="1000" b="1" dirty="0">
+                <a:solidFill>
+                  <a:srgbClr val="FF0000"/>
+                </a:solidFill>
+                <a:latin typeface="メイリオ" panose="020B0604030504040204" pitchFamily="50" charset="-128"/>
+                <a:ea typeface="メイリオ" panose="020B0604030504040204" pitchFamily="50" charset="-128"/>
+                <a:cs typeface="メイリオ"/>
+              </a:rPr>
+              <a:t>トークに反映が可能。</a:t>
+            </a:r>
+            <a:endParaRPr lang="en-US" altLang="ja-JP" sz="1000" b="1" dirty="0">
+              <a:solidFill>
+                <a:srgbClr val="FF0000"/>
+              </a:solidFill>
+              <a:latin typeface="メイリオ" panose="020B0604030504040204" pitchFamily="50" charset="-128"/>
+              <a:ea typeface="メイリオ" panose="020B0604030504040204" pitchFamily="50" charset="-128"/>
+              <a:cs typeface="メイリオ"/>
+            </a:endParaRPr>
+          </a:p>
+        </p:txBody>
+      </p:sp>
+      <p:sp>
+        <p:nvSpPr>
+          <p:cNvPr id="1032" name="正方形/長方形 1031">
+            <a:extLst>
+              <a:ext uri="{FF2B5EF4-FFF2-40B4-BE49-F238E27FC236}">
+                <a16:creationId xmlns:a16="http://schemas.microsoft.com/office/drawing/2014/main" id="{D1D96D42-255C-636E-49E5-2CDA95DD6764}"/>
+              </a:ext>
+            </a:extLst>
+          </p:cNvPr>
+          <p:cNvSpPr/>
+          <p:nvPr/>
+        </p:nvSpPr>
+        <p:spPr>
+          <a:xfrm>
+            <a:off x="2584156" y="2196668"/>
+            <a:ext cx="1778402" cy="3994401"/>
+          </a:xfrm>
+          <a:prstGeom prst="rect">
+            <a:avLst/>
+          </a:prstGeom>
+          <a:solidFill>
+            <a:schemeClr val="bg1"/>
+          </a:solidFill>
+          <a:ln>
+            <a:solidFill>
+              <a:schemeClr val="tx2">
+                <a:lumMod val="20000"/>
+                <a:lumOff val="80000"/>
+              </a:schemeClr>
+            </a:solidFill>
+          </a:ln>
+        </p:spPr>
+        <p:style>
+          <a:lnRef idx="2">
+            <a:schemeClr val="accent1">
+              <a:shade val="15000"/>
+            </a:schemeClr>
+          </a:lnRef>
+          <a:fillRef idx="1">
+            <a:schemeClr val="accent1"/>
+          </a:fillRef>
+          <a:effectRef idx="0">
+            <a:schemeClr val="accent1"/>
+          </a:effectRef>
+          <a:fontRef idx="minor">
+            <a:schemeClr val="lt1"/>
+          </a:fontRef>
+        </p:style>
+        <p:txBody>
+          <a:bodyPr rtlCol="0" anchor="ctr"/>
+          <a:lstStyle/>
+          <a:p>
+            <a:pPr algn="ctr"/>
+            <a:endParaRPr kumimoji="1" lang="ja-JP" altLang="en-US">
+              <a:latin typeface="メイリオ"/>
+              <a:ea typeface="メイリオ"/>
+              <a:cs typeface="メイリオ"/>
+            </a:endParaRPr>
+          </a:p>
+        </p:txBody>
+      </p:sp>
+      <p:sp>
+        <p:nvSpPr>
+          <p:cNvPr id="1034" name="正方形/長方形 1033">
+            <a:extLst>
+              <a:ext uri="{FF2B5EF4-FFF2-40B4-BE49-F238E27FC236}">
+                <a16:creationId xmlns:a16="http://schemas.microsoft.com/office/drawing/2014/main" id="{8693E451-BCB1-207B-6B73-131F2A8588BF}"/>
+              </a:ext>
+            </a:extLst>
+          </p:cNvPr>
+          <p:cNvSpPr/>
+          <p:nvPr/>
+        </p:nvSpPr>
+        <p:spPr>
+          <a:xfrm>
+            <a:off x="2909322" y="4198381"/>
+            <a:ext cx="1154315" cy="244151"/>
+          </a:xfrm>
+          <a:prstGeom prst="rect">
+            <a:avLst/>
+          </a:prstGeom>
+          <a:solidFill>
+            <a:schemeClr val="tx1">
+              <a:lumMod val="65000"/>
+              <a:lumOff val="35000"/>
+            </a:schemeClr>
+          </a:solidFill>
+          <a:ln>
+            <a:noFill/>
+          </a:ln>
+        </p:spPr>
+        <p:style>
+          <a:lnRef idx="2">
+            <a:schemeClr val="accent1">
+              <a:shade val="15000"/>
+            </a:schemeClr>
+          </a:lnRef>
+          <a:fillRef idx="1">
+            <a:schemeClr val="accent1"/>
+          </a:fillRef>
+          <a:effectRef idx="0">
+            <a:schemeClr val="accent1"/>
+          </a:effectRef>
+          <a:fontRef idx="minor">
+            <a:schemeClr val="lt1"/>
+          </a:fontRef>
+        </p:style>
+        <p:txBody>
+          <a:bodyPr rtlCol="0" anchor="ctr"/>
+          <a:lstStyle/>
+          <a:p>
+            <a:pPr algn="ctr"/>
+            <a:r>
+              <a:rPr kumimoji="1" lang="en-US" altLang="ja-JP" sz="1100" b="1" dirty="0">
+                <a:latin typeface="メイリオ" panose="020B0604030504040204" pitchFamily="50" charset="-128"/>
+                <a:ea typeface="メイリオ" panose="020B0604030504040204" pitchFamily="50" charset="-128"/>
+                <a:cs typeface="メイリオ"/>
+              </a:rPr>
+              <a:t>CV</a:t>
+            </a:r>
+            <a:endParaRPr kumimoji="1" lang="ja-JP" altLang="en-US" sz="1100" b="1" dirty="0">
+              <a:latin typeface="メイリオ" panose="020B0604030504040204" pitchFamily="50" charset="-128"/>
+              <a:ea typeface="メイリオ" panose="020B0604030504040204" pitchFamily="50" charset="-128"/>
+              <a:cs typeface="メイリオ"/>
+            </a:endParaRPr>
+          </a:p>
+        </p:txBody>
+      </p:sp>
+      <p:sp>
+        <p:nvSpPr>
+          <p:cNvPr id="1036" name="正方形/長方形 1035">
+            <a:extLst>
+              <a:ext uri="{FF2B5EF4-FFF2-40B4-BE49-F238E27FC236}">
+                <a16:creationId xmlns:a16="http://schemas.microsoft.com/office/drawing/2014/main" id="{43EEA9CC-C52C-B219-FF18-6E6EA44E4D24}"/>
+              </a:ext>
+            </a:extLst>
+          </p:cNvPr>
+          <p:cNvSpPr/>
+          <p:nvPr/>
+        </p:nvSpPr>
+        <p:spPr>
+          <a:xfrm>
+            <a:off x="2692868" y="4436119"/>
+            <a:ext cx="1396722" cy="1045027"/>
+          </a:xfrm>
+          <a:prstGeom prst="rect">
+            <a:avLst/>
+          </a:prstGeom>
+          <a:solidFill>
+            <a:schemeClr val="bg1"/>
+          </a:solidFill>
+          <a:ln>
+            <a:noFill/>
+          </a:ln>
+        </p:spPr>
+        <p:style>
+          <a:lnRef idx="2">
+            <a:schemeClr val="accent1">
+              <a:shade val="15000"/>
+            </a:schemeClr>
+          </a:lnRef>
+          <a:fillRef idx="1">
+            <a:schemeClr val="accent1"/>
+          </a:fillRef>
+          <a:effectRef idx="0">
+            <a:schemeClr val="accent1"/>
+          </a:effectRef>
+          <a:fontRef idx="minor">
+            <a:schemeClr val="lt1"/>
+          </a:fontRef>
+        </p:style>
+        <p:txBody>
+          <a:bodyPr rtlCol="0" anchor="ctr"/>
+          <a:lstStyle/>
+          <a:p>
+            <a:r>
+              <a:rPr kumimoji="1" lang="ja-JP" altLang="en-US" sz="1100" b="1" dirty="0">
+                <a:solidFill>
+                  <a:schemeClr val="tx1">
+                    <a:lumMod val="50000"/>
+                    <a:lumOff val="50000"/>
+                  </a:schemeClr>
+                </a:solidFill>
+                <a:latin typeface="メイリオ" panose="020B0604030504040204" pitchFamily="50" charset="-128"/>
+                <a:ea typeface="メイリオ" panose="020B0604030504040204" pitchFamily="50" charset="-128"/>
+                <a:cs typeface="メイリオ"/>
+              </a:rPr>
+              <a:t>・購入完了</a:t>
+            </a:r>
+            <a:endParaRPr kumimoji="1" lang="en-US" altLang="ja-JP" sz="1100" b="1" dirty="0">
+              <a:solidFill>
+                <a:schemeClr val="tx1">
+                  <a:lumMod val="50000"/>
+                  <a:lumOff val="50000"/>
+                </a:schemeClr>
+              </a:solidFill>
+              <a:latin typeface="メイリオ" panose="020B0604030504040204" pitchFamily="50" charset="-128"/>
+              <a:ea typeface="メイリオ" panose="020B0604030504040204" pitchFamily="50" charset="-128"/>
+              <a:cs typeface="メイリオ"/>
+            </a:endParaRPr>
+          </a:p>
+          <a:p>
+            <a:r>
+              <a:rPr kumimoji="1" lang="ja-JP" altLang="en-US" sz="1100" b="1" dirty="0">
+                <a:solidFill>
+                  <a:schemeClr val="tx1">
+                    <a:lumMod val="50000"/>
+                    <a:lumOff val="50000"/>
+                  </a:schemeClr>
+                </a:solidFill>
+                <a:latin typeface="メイリオ" panose="020B0604030504040204" pitchFamily="50" charset="-128"/>
+                <a:ea typeface="メイリオ" panose="020B0604030504040204" pitchFamily="50" charset="-128"/>
+                <a:cs typeface="メイリオ"/>
+              </a:rPr>
+              <a:t>・セミナー予約</a:t>
+            </a:r>
+            <a:endParaRPr kumimoji="1" lang="en-US" altLang="ja-JP" sz="1100" b="1" dirty="0">
+              <a:solidFill>
+                <a:schemeClr val="tx1">
+                  <a:lumMod val="50000"/>
+                  <a:lumOff val="50000"/>
+                </a:schemeClr>
+              </a:solidFill>
+              <a:latin typeface="メイリオ" panose="020B0604030504040204" pitchFamily="50" charset="-128"/>
+              <a:ea typeface="メイリオ" panose="020B0604030504040204" pitchFamily="50" charset="-128"/>
+              <a:cs typeface="メイリオ"/>
+            </a:endParaRPr>
+          </a:p>
+          <a:p>
+            <a:r>
+              <a:rPr kumimoji="1" lang="ja-JP" altLang="en-US" sz="1100" b="1" dirty="0">
+                <a:solidFill>
+                  <a:schemeClr val="tx1">
+                    <a:lumMod val="50000"/>
+                    <a:lumOff val="50000"/>
+                  </a:schemeClr>
+                </a:solidFill>
+                <a:latin typeface="メイリオ" panose="020B0604030504040204" pitchFamily="50" charset="-128"/>
+                <a:ea typeface="メイリオ" panose="020B0604030504040204" pitchFamily="50" charset="-128"/>
+                <a:cs typeface="メイリオ"/>
+              </a:rPr>
+              <a:t>・登録完了</a:t>
+            </a:r>
+            <a:endParaRPr kumimoji="1" lang="en-US" altLang="ja-JP" sz="1100" b="1" dirty="0">
+              <a:solidFill>
+                <a:schemeClr val="tx1">
+                  <a:lumMod val="50000"/>
+                  <a:lumOff val="50000"/>
+                </a:schemeClr>
+              </a:solidFill>
+              <a:latin typeface="メイリオ" panose="020B0604030504040204" pitchFamily="50" charset="-128"/>
+              <a:ea typeface="メイリオ" panose="020B0604030504040204" pitchFamily="50" charset="-128"/>
+              <a:cs typeface="メイリオ"/>
+            </a:endParaRPr>
+          </a:p>
+          <a:p>
+            <a:r>
+              <a:rPr lang="ja-JP" altLang="en-US" sz="1100" b="1" dirty="0">
+                <a:solidFill>
+                  <a:schemeClr val="tx1">
+                    <a:lumMod val="50000"/>
+                    <a:lumOff val="50000"/>
+                  </a:schemeClr>
+                </a:solidFill>
+                <a:latin typeface="メイリオ" panose="020B0604030504040204" pitchFamily="50" charset="-128"/>
+                <a:ea typeface="メイリオ" panose="020B0604030504040204" pitchFamily="50" charset="-128"/>
+                <a:cs typeface="メイリオ"/>
+              </a:rPr>
+              <a:t>・メルマガ登録</a:t>
+            </a:r>
+            <a:endParaRPr lang="en-US" altLang="ja-JP" sz="1100" b="1" dirty="0">
+              <a:solidFill>
+                <a:schemeClr val="tx1">
+                  <a:lumMod val="50000"/>
+                  <a:lumOff val="50000"/>
+                </a:schemeClr>
+              </a:solidFill>
+              <a:latin typeface="メイリオ" panose="020B0604030504040204" pitchFamily="50" charset="-128"/>
+              <a:ea typeface="メイリオ" panose="020B0604030504040204" pitchFamily="50" charset="-128"/>
+              <a:cs typeface="メイリオ"/>
+            </a:endParaRPr>
+          </a:p>
+          <a:p>
+            <a:r>
+              <a:rPr kumimoji="1" lang="ja-JP" altLang="en-US" sz="1100" b="1" dirty="0">
+                <a:solidFill>
+                  <a:schemeClr val="tx1">
+                    <a:lumMod val="50000"/>
+                    <a:lumOff val="50000"/>
+                  </a:schemeClr>
+                </a:solidFill>
+                <a:latin typeface="メイリオ" panose="020B0604030504040204" pitchFamily="50" charset="-128"/>
+                <a:ea typeface="メイリオ" panose="020B0604030504040204" pitchFamily="50" charset="-128"/>
+                <a:cs typeface="メイリオ"/>
+              </a:rPr>
+              <a:t>・その他</a:t>
+            </a:r>
+          </a:p>
+        </p:txBody>
+      </p:sp>
+      <p:pic>
+        <p:nvPicPr>
+          <p:cNvPr id="1038" name="図 1037" descr="テキスト, 手紙&#10;&#10;AI 生成コンテンツは誤りを含む可能性があります。">
+            <a:extLst>
+              <a:ext uri="{FF2B5EF4-FFF2-40B4-BE49-F238E27FC236}">
+                <a16:creationId xmlns:a16="http://schemas.microsoft.com/office/drawing/2014/main" id="{85260668-6C66-A032-FFE0-0276021F9433}"/>
+              </a:ext>
+            </a:extLst>
+          </p:cNvPr>
+          <p:cNvPicPr>
+            <a:picLocks noChangeAspect="1"/>
+          </p:cNvPicPr>
+          <p:nvPr/>
+        </p:nvPicPr>
+        <p:blipFill>
+          <a:blip r:embed="rId6" cstate="print">
+            <a:extLst>
+              <a:ext uri="{28A0092B-C50C-407E-A947-70E740481C1C}">
+                <a14:useLocalDpi xmlns:a14="http://schemas.microsoft.com/office/drawing/2010/main" val="0"/>
+              </a:ext>
+            </a:extLst>
+          </a:blip>
+          <a:srcRect t="4580"/>
+          <a:stretch>
+            <a:fillRect/>
+          </a:stretch>
+        </p:blipFill>
+        <p:spPr>
+          <a:xfrm>
+            <a:off x="2977448" y="2296209"/>
+            <a:ext cx="1048252" cy="1775437"/>
+          </a:xfrm>
+          <a:prstGeom prst="rect">
+            <a:avLst/>
+          </a:prstGeom>
+        </p:spPr>
+      </p:pic>
+      <p:pic>
+        <p:nvPicPr>
+          <p:cNvPr id="1039" name="Picture 2" descr="買い物完了！イラスト｜無料イラスト・フリー素材なら「イラストAC」">
+            <a:extLst>
+              <a:ext uri="{FF2B5EF4-FFF2-40B4-BE49-F238E27FC236}">
+                <a16:creationId xmlns:a16="http://schemas.microsoft.com/office/drawing/2014/main" id="{23D05307-D6FE-6284-27D3-3433EE0122E2}"/>
+              </a:ext>
+            </a:extLst>
+          </p:cNvPr>
+          <p:cNvPicPr>
+            <a:picLocks noChangeAspect="1" noChangeArrowheads="1"/>
+          </p:cNvPicPr>
+          <p:nvPr/>
+        </p:nvPicPr>
+        <p:blipFill rotWithShape="1">
+          <a:blip r:embed="rId8" cstate="print">
+            <a:extLst>
+              <a:ext uri="{28A0092B-C50C-407E-A947-70E740481C1C}">
+                <a14:useLocalDpi xmlns:a14="http://schemas.microsoft.com/office/drawing/2010/main" val="0"/>
+              </a:ext>
+            </a:extLst>
+          </a:blip>
+          <a:srcRect l="20270" r="23682"/>
+          <a:stretch>
+            <a:fillRect/>
+          </a:stretch>
+        </p:blipFill>
+        <p:spPr bwMode="auto">
+          <a:xfrm>
+            <a:off x="3866329" y="4627146"/>
+            <a:ext cx="395417" cy="529521"/>
+          </a:xfrm>
+          <a:prstGeom prst="rect">
+            <a:avLst/>
+          </a:prstGeom>
+          <a:noFill/>
+          <a:extLst>
+            <a:ext uri="{909E8E84-426E-40DD-AFC4-6F175D3DCCD1}">
+              <a14:hiddenFill xmlns:a14="http://schemas.microsoft.com/office/drawing/2010/main">
+                <a:solidFill>
+                  <a:srgbClr val="FFFFFF"/>
+                </a:solidFill>
+              </a14:hiddenFill>
+            </a:ext>
+          </a:extLst>
+        </p:spPr>
+      </p:pic>
+      <p:pic>
+        <p:nvPicPr>
+          <p:cNvPr id="1040" name="図 1039">
+            <a:extLst>
+              <a:ext uri="{FF2B5EF4-FFF2-40B4-BE49-F238E27FC236}">
+                <a16:creationId xmlns:a16="http://schemas.microsoft.com/office/drawing/2014/main" id="{D40EFC68-F8C8-CACE-392A-C804A102B410}"/>
+              </a:ext>
+            </a:extLst>
+          </p:cNvPr>
+          <p:cNvPicPr>
+            <a:picLocks noChangeAspect="1"/>
+          </p:cNvPicPr>
+          <p:nvPr/>
+        </p:nvPicPr>
+        <p:blipFill>
+          <a:blip r:embed="rId4"/>
+          <a:stretch>
+            <a:fillRect/>
+          </a:stretch>
+        </p:blipFill>
+        <p:spPr>
+          <a:xfrm>
+            <a:off x="2955266" y="2332538"/>
+            <a:ext cx="494484" cy="86136"/>
+          </a:xfrm>
+          <a:prstGeom prst="rect">
+            <a:avLst/>
+          </a:prstGeom>
+        </p:spPr>
+      </p:pic>
+      <p:pic>
+        <p:nvPicPr>
+          <p:cNvPr id="1041" name="図 1040">
+            <a:extLst>
+              <a:ext uri="{FF2B5EF4-FFF2-40B4-BE49-F238E27FC236}">
+                <a16:creationId xmlns:a16="http://schemas.microsoft.com/office/drawing/2014/main" id="{BA9B0596-4197-6BA5-B58D-7E67FD1379B1}"/>
+              </a:ext>
+            </a:extLst>
+          </p:cNvPr>
+          <p:cNvPicPr>
+            <a:picLocks noChangeAspect="1"/>
+          </p:cNvPicPr>
+          <p:nvPr/>
+        </p:nvPicPr>
+        <p:blipFill>
+          <a:blip r:embed="rId4"/>
+          <a:stretch>
+            <a:fillRect/>
+          </a:stretch>
+        </p:blipFill>
+        <p:spPr>
+          <a:xfrm>
+            <a:off x="2944328" y="2334974"/>
+            <a:ext cx="494484" cy="86136"/>
+          </a:xfrm>
+          <a:prstGeom prst="rect">
+            <a:avLst/>
+          </a:prstGeom>
+        </p:spPr>
+      </p:pic>
+      <p:pic>
+        <p:nvPicPr>
+          <p:cNvPr id="1042" name="図 1041">
+            <a:extLst>
+              <a:ext uri="{FF2B5EF4-FFF2-40B4-BE49-F238E27FC236}">
+                <a16:creationId xmlns:a16="http://schemas.microsoft.com/office/drawing/2014/main" id="{A3D5D1CE-703D-3244-20B5-0CBB6C5EB467}"/>
+              </a:ext>
+            </a:extLst>
+          </p:cNvPr>
+          <p:cNvPicPr>
+            <a:picLocks noChangeAspect="1"/>
+          </p:cNvPicPr>
+          <p:nvPr/>
+        </p:nvPicPr>
+        <p:blipFill>
+          <a:blip r:embed="rId4"/>
+          <a:stretch>
+            <a:fillRect/>
+          </a:stretch>
+        </p:blipFill>
+        <p:spPr>
+          <a:xfrm>
+            <a:off x="3124211" y="3780297"/>
+            <a:ext cx="494484" cy="86136"/>
+          </a:xfrm>
+          <a:prstGeom prst="rect">
+            <a:avLst/>
+          </a:prstGeom>
+        </p:spPr>
+      </p:pic>
+      <p:sp>
+        <p:nvSpPr>
+          <p:cNvPr id="1043" name="テキスト ボックス 1042">
+            <a:extLst>
+              <a:ext uri="{FF2B5EF4-FFF2-40B4-BE49-F238E27FC236}">
+                <a16:creationId xmlns:a16="http://schemas.microsoft.com/office/drawing/2014/main" id="{434489DF-76E5-B08D-AB93-7A020A3C23F0}"/>
+              </a:ext>
+            </a:extLst>
+          </p:cNvPr>
+          <p:cNvSpPr txBox="1"/>
+          <p:nvPr/>
+        </p:nvSpPr>
+        <p:spPr>
+          <a:xfrm>
+            <a:off x="1254839" y="5195928"/>
+            <a:ext cx="1679395" cy="338554"/>
+          </a:xfrm>
+          <a:prstGeom prst="rect">
+            <a:avLst/>
+          </a:prstGeom>
+          <a:solidFill>
+            <a:schemeClr val="bg1">
+              <a:alpha val="56000"/>
+            </a:schemeClr>
+          </a:solidFill>
+        </p:spPr>
+        <p:txBody>
+          <a:bodyPr wrap="square">
+            <a:spAutoFit/>
+          </a:bodyPr>
+          <a:lstStyle/>
+          <a:p>
+            <a:pPr algn="ctr"/>
+            <a:r>
+              <a:rPr lang="en-US" altLang="ja-JP" sz="800" b="1" dirty="0">
+                <a:solidFill>
+                  <a:schemeClr val="bg1">
+                    <a:lumMod val="85000"/>
+                  </a:schemeClr>
+                </a:solidFill>
+                <a:latin typeface="メイリオ" panose="020B0604030504040204" pitchFamily="50" charset="-128"/>
+                <a:ea typeface="メイリオ" panose="020B0604030504040204" pitchFamily="50" charset="-128"/>
+                <a:cs typeface="メイリオ"/>
+              </a:rPr>
+              <a:t>※</a:t>
+            </a:r>
+            <a:r>
+              <a:rPr lang="ja-JP" altLang="en-US" sz="800" b="1" dirty="0">
+                <a:solidFill>
+                  <a:schemeClr val="bg1">
+                    <a:lumMod val="85000"/>
+                  </a:schemeClr>
+                </a:solidFill>
+                <a:latin typeface="メイリオ" panose="020B0604030504040204" pitchFamily="50" charset="-128"/>
+                <a:ea typeface="メイリオ" panose="020B0604030504040204" pitchFamily="50" charset="-128"/>
+                <a:cs typeface="メイリオ"/>
+              </a:rPr>
+              <a:t>ユーザーの個人情報収集が</a:t>
+            </a:r>
+            <a:endParaRPr lang="en-US" altLang="ja-JP" sz="800" b="1" dirty="0">
+              <a:solidFill>
+                <a:schemeClr val="bg1">
+                  <a:lumMod val="85000"/>
+                </a:schemeClr>
+              </a:solidFill>
+              <a:latin typeface="メイリオ" panose="020B0604030504040204" pitchFamily="50" charset="-128"/>
+              <a:ea typeface="メイリオ" panose="020B0604030504040204" pitchFamily="50" charset="-128"/>
+              <a:cs typeface="メイリオ"/>
+            </a:endParaRPr>
+          </a:p>
+          <a:p>
+            <a:pPr algn="ctr"/>
+            <a:r>
+              <a:rPr lang="ja-JP" altLang="en-US" sz="800" b="1" dirty="0">
+                <a:solidFill>
+                  <a:schemeClr val="bg1">
+                    <a:lumMod val="85000"/>
+                  </a:schemeClr>
+                </a:solidFill>
+                <a:latin typeface="メイリオ" panose="020B0604030504040204" pitchFamily="50" charset="-128"/>
+                <a:ea typeface="メイリオ" panose="020B0604030504040204" pitchFamily="50" charset="-128"/>
+                <a:cs typeface="メイリオ"/>
+              </a:rPr>
+              <a:t>完了したタイミング</a:t>
+            </a:r>
+            <a:endParaRPr kumimoji="1" lang="ja-JP" altLang="en-US" sz="800" b="1" dirty="0">
+              <a:solidFill>
+                <a:schemeClr val="bg1">
+                  <a:lumMod val="85000"/>
+                </a:schemeClr>
+              </a:solidFill>
+              <a:latin typeface="メイリオ" panose="020B0604030504040204" pitchFamily="50" charset="-128"/>
+              <a:ea typeface="メイリオ" panose="020B0604030504040204" pitchFamily="50" charset="-128"/>
+              <a:cs typeface="メイリオ"/>
+            </a:endParaRPr>
+          </a:p>
+        </p:txBody>
+      </p:sp>
+      <p:grpSp>
+        <p:nvGrpSpPr>
+          <p:cNvPr id="3" name="グループ化 2">
+            <a:extLst>
+              <a:ext uri="{FF2B5EF4-FFF2-40B4-BE49-F238E27FC236}">
+                <a16:creationId xmlns:a16="http://schemas.microsoft.com/office/drawing/2014/main" id="{E76D8F54-2926-2D56-7238-F66ACCBC4F20}"/>
+              </a:ext>
+            </a:extLst>
+          </p:cNvPr>
+          <p:cNvGrpSpPr/>
+          <p:nvPr/>
+        </p:nvGrpSpPr>
+        <p:grpSpPr>
+          <a:xfrm>
+            <a:off x="543398" y="777681"/>
+            <a:ext cx="3105325" cy="485102"/>
+            <a:chOff x="507969" y="928495"/>
+            <a:chExt cx="3105325" cy="485102"/>
+          </a:xfrm>
+        </p:grpSpPr>
+        <p:sp>
+          <p:nvSpPr>
+            <p:cNvPr id="4" name="Google Shape;51;p19">
+              <a:extLst>
+                <a:ext uri="{FF2B5EF4-FFF2-40B4-BE49-F238E27FC236}">
+                  <a16:creationId xmlns:a16="http://schemas.microsoft.com/office/drawing/2014/main" id="{98F6BB16-EFC6-9846-2A11-E624E876E64B}"/>
+                </a:ext>
+              </a:extLst>
+            </p:cNvPr>
+            <p:cNvSpPr/>
+            <p:nvPr/>
+          </p:nvSpPr>
+          <p:spPr>
+            <a:xfrm>
+              <a:off x="507969" y="928495"/>
+              <a:ext cx="3105325" cy="485102"/>
+            </a:xfrm>
+            <a:prstGeom prst="roundRect">
+              <a:avLst>
+                <a:gd name="adj" fmla="val 16667"/>
+              </a:avLst>
+            </a:prstGeom>
+            <a:solidFill>
+              <a:schemeClr val="dk1"/>
+            </a:solidFill>
+            <a:ln>
+              <a:noFill/>
+            </a:ln>
+          </p:spPr>
+          <p:txBody>
+            <a:bodyPr spcFirstLastPara="1" wrap="square" lIns="91425" tIns="45700" rIns="91425" bIns="45700" anchor="ctr" anchorCtr="0">
+              <a:noAutofit/>
+            </a:bodyPr>
+            <a:lstStyle>
+              <a:defPPr marR="0" lvl="0" algn="l" rtl="0">
+                <a:lnSpc>
+                  <a:spcPct val="100000"/>
+                </a:lnSpc>
+                <a:spcBef>
+                  <a:spcPts val="0"/>
+                </a:spcBef>
+                <a:spcAft>
+                  <a:spcPts val="0"/>
+                </a:spcAft>
+              </a:defPPr>
+              <a:lvl1pPr marR="0" lvl="0" algn="l" rtl="0">
+                <a:lnSpc>
+                  <a:spcPct val="100000"/>
+                </a:lnSpc>
+                <a:spcBef>
+                  <a:spcPts val="0"/>
+                </a:spcBef>
+                <a:spcAft>
+                  <a:spcPts val="0"/>
+                </a:spcAft>
+                <a:buClr>
+                  <a:srgbClr val="000000"/>
+                </a:buClr>
+                <a:buFont typeface="Arial"/>
+                <a:defRPr sz="1400" b="0" i="0" u="none" strike="noStrike" cap="none">
+                  <a:solidFill>
+                    <a:srgbClr val="000000"/>
+                  </a:solidFill>
+                  <a:latin typeface="メイリオ"/>
+                  <a:ea typeface="メイリオ"/>
+                  <a:cs typeface="メイリオ"/>
+                  <a:sym typeface="Arial"/>
+                </a:defRPr>
+              </a:lvl1pPr>
+              <a:lvl2pPr marR="0" lvl="1" algn="l" rtl="0">
+                <a:lnSpc>
+                  <a:spcPct val="100000"/>
+                </a:lnSpc>
+                <a:spcBef>
+                  <a:spcPts val="0"/>
+                </a:spcBef>
+                <a:spcAft>
+                  <a:spcPts val="0"/>
+                </a:spcAft>
+                <a:buClr>
+                  <a:srgbClr val="000000"/>
+                </a:buClr>
+                <a:buFont typeface="Arial"/>
+                <a:defRPr sz="1400" b="0" i="0" u="none" strike="noStrike" cap="none">
+                  <a:solidFill>
+                    <a:srgbClr val="000000"/>
+                  </a:solidFill>
+                  <a:latin typeface="メイリオ"/>
+                  <a:ea typeface="メイリオ"/>
+                  <a:cs typeface="メイリオ"/>
+                  <a:sym typeface="Arial"/>
+                </a:defRPr>
+              </a:lvl2pPr>
+              <a:lvl3pPr marR="0" lvl="2" algn="l" rtl="0">
+                <a:lnSpc>
+                  <a:spcPct val="100000"/>
+                </a:lnSpc>
+                <a:spcBef>
+                  <a:spcPts val="0"/>
+                </a:spcBef>
+                <a:spcAft>
+                  <a:spcPts val="0"/>
+                </a:spcAft>
+                <a:buClr>
+                  <a:srgbClr val="000000"/>
+                </a:buClr>
+                <a:buFont typeface="Arial"/>
+                <a:defRPr sz="1400" b="0" i="0" u="none" strike="noStrike" cap="none">
+                  <a:solidFill>
+                    <a:srgbClr val="000000"/>
+                  </a:solidFill>
+                  <a:latin typeface="メイリオ"/>
+                  <a:ea typeface="メイリオ"/>
+                  <a:cs typeface="メイリオ"/>
+                  <a:sym typeface="Arial"/>
+                </a:defRPr>
+              </a:lvl3pPr>
+              <a:lvl4pPr marR="0" lvl="3" algn="l" rtl="0">
+                <a:lnSpc>
+                  <a:spcPct val="100000"/>
+                </a:lnSpc>
+                <a:spcBef>
+                  <a:spcPts val="0"/>
+                </a:spcBef>
+                <a:spcAft>
+                  <a:spcPts val="0"/>
+                </a:spcAft>
+                <a:buClr>
+                  <a:srgbClr val="000000"/>
+                </a:buClr>
+                <a:buFont typeface="Arial"/>
+                <a:defRPr sz="1400" b="0" i="0" u="none" strike="noStrike" cap="none">
+                  <a:solidFill>
+                    <a:srgbClr val="000000"/>
+                  </a:solidFill>
+                  <a:latin typeface="メイリオ"/>
+                  <a:ea typeface="メイリオ"/>
+                  <a:cs typeface="メイリオ"/>
+                  <a:sym typeface="Arial"/>
+                </a:defRPr>
+              </a:lvl4pPr>
+              <a:lvl5pPr marR="0" lvl="4" algn="l" rtl="0">
+                <a:lnSpc>
+                  <a:spcPct val="100000"/>
+                </a:lnSpc>
+                <a:spcBef>
+                  <a:spcPts val="0"/>
+                </a:spcBef>
+                <a:spcAft>
+                  <a:spcPts val="0"/>
+                </a:spcAft>
+                <a:buClr>
+                  <a:srgbClr val="000000"/>
+                </a:buClr>
+                <a:buFont typeface="Arial"/>
+                <a:defRPr sz="1400" b="0" i="0" u="none" strike="noStrike" cap="none">
+                  <a:solidFill>
+                    <a:srgbClr val="000000"/>
+                  </a:solidFill>
+                  <a:latin typeface="メイリオ"/>
+                  <a:ea typeface="メイリオ"/>
+                  <a:cs typeface="メイリオ"/>
+                  <a:sym typeface="Arial"/>
+                </a:defRPr>
+              </a:lvl5pPr>
+              <a:lvl6pPr marR="0" lvl="5" algn="l" rtl="0">
+                <a:lnSpc>
+                  <a:spcPct val="100000"/>
+                </a:lnSpc>
+                <a:spcBef>
+                  <a:spcPts val="0"/>
+                </a:spcBef>
+                <a:spcAft>
+                  <a:spcPts val="0"/>
+                </a:spcAft>
+                <a:buClr>
+                  <a:srgbClr val="000000"/>
+                </a:buClr>
+                <a:buFont typeface="Arial"/>
+                <a:defRPr sz="1400" b="0" i="0" u="none" strike="noStrike" cap="none">
+                  <a:solidFill>
+                    <a:srgbClr val="000000"/>
+                  </a:solidFill>
+                  <a:latin typeface="メイリオ"/>
+                  <a:ea typeface="メイリオ"/>
+                  <a:cs typeface="メイリオ"/>
+                  <a:sym typeface="Arial"/>
+                </a:defRPr>
+              </a:lvl6pPr>
+              <a:lvl7pPr marR="0" lvl="6" algn="l" rtl="0">
+                <a:lnSpc>
+                  <a:spcPct val="100000"/>
+                </a:lnSpc>
+                <a:spcBef>
+                  <a:spcPts val="0"/>
+                </a:spcBef>
+                <a:spcAft>
+                  <a:spcPts val="0"/>
+                </a:spcAft>
+                <a:buClr>
+                  <a:srgbClr val="000000"/>
+                </a:buClr>
+                <a:buFont typeface="Arial"/>
+                <a:defRPr sz="1400" b="0" i="0" u="none" strike="noStrike" cap="none">
+                  <a:solidFill>
+                    <a:srgbClr val="000000"/>
+                  </a:solidFill>
+                  <a:latin typeface="メイリオ"/>
+                  <a:ea typeface="メイリオ"/>
+                  <a:cs typeface="メイリオ"/>
+                  <a:sym typeface="Arial"/>
+                </a:defRPr>
+              </a:lvl7pPr>
+              <a:lvl8pPr marR="0" lvl="7" algn="l" rtl="0">
+                <a:lnSpc>
+                  <a:spcPct val="100000"/>
+                </a:lnSpc>
+                <a:spcBef>
+                  <a:spcPts val="0"/>
+                </a:spcBef>
+                <a:spcAft>
+                  <a:spcPts val="0"/>
+                </a:spcAft>
+                <a:buClr>
+                  <a:srgbClr val="000000"/>
+                </a:buClr>
+                <a:buFont typeface="Arial"/>
+                <a:defRPr sz="1400" b="0" i="0" u="none" strike="noStrike" cap="none">
+                  <a:solidFill>
+                    <a:srgbClr val="000000"/>
+                  </a:solidFill>
+                  <a:latin typeface="メイリオ"/>
+                  <a:ea typeface="メイリオ"/>
+                  <a:cs typeface="メイリオ"/>
+                  <a:sym typeface="Arial"/>
+                </a:defRPr>
+              </a:lvl8pPr>
+              <a:lvl9pPr marR="0" lvl="8" algn="l" rtl="0">
+                <a:lnSpc>
+                  <a:spcPct val="100000"/>
+                </a:lnSpc>
+                <a:spcBef>
+                  <a:spcPts val="0"/>
+                </a:spcBef>
+                <a:spcAft>
+                  <a:spcPts val="0"/>
+                </a:spcAft>
+                <a:buClr>
+                  <a:srgbClr val="000000"/>
+                </a:buClr>
+                <a:buFont typeface="Arial"/>
+                <a:defRPr sz="1400" b="0" i="0" u="none" strike="noStrike" cap="none">
+                  <a:solidFill>
+                    <a:srgbClr val="000000"/>
+                  </a:solidFill>
+                  <a:latin typeface="メイリオ"/>
+                  <a:ea typeface="メイリオ"/>
+                  <a:cs typeface="メイリオ"/>
+                  <a:sym typeface="Arial"/>
+                </a:defRPr>
+              </a:lvl9pPr>
+            </a:lstStyle>
+            <a:p>
+              <a:pPr marL="0" marR="0" lvl="0" indent="0" algn="ctr" rtl="0">
+                <a:lnSpc>
+                  <a:spcPct val="100000"/>
+                </a:lnSpc>
+                <a:spcBef>
+                  <a:spcPts val="0"/>
+                </a:spcBef>
+                <a:spcAft>
+                  <a:spcPts val="0"/>
+                </a:spcAft>
+                <a:buClr>
+                  <a:srgbClr val="000000"/>
+                </a:buClr>
+                <a:buSzPts val="1400"/>
+                <a:buFont typeface="Arial"/>
+                <a:buNone/>
+              </a:pPr>
+              <a:endParaRPr sz="1400" b="1" i="0" u="none" strike="noStrike" cap="none" dirty="0">
+                <a:solidFill>
+                  <a:schemeClr val="lt1"/>
+                </a:solidFill>
+                <a:latin typeface="メイリオ"/>
+                <a:ea typeface="メイリオ"/>
+                <a:cs typeface="メイリオ"/>
+                <a:sym typeface="Meiryo"/>
+              </a:endParaRPr>
+            </a:p>
+          </p:txBody>
+        </p:sp>
+        <p:sp>
+          <p:nvSpPr>
+            <p:cNvPr id="5" name="テキスト ボックス 4">
+              <a:extLst>
+                <a:ext uri="{FF2B5EF4-FFF2-40B4-BE49-F238E27FC236}">
+                  <a16:creationId xmlns:a16="http://schemas.microsoft.com/office/drawing/2014/main" id="{560EDF30-5F09-B70A-2993-8CD4F9E40EFA}"/>
+                </a:ext>
+              </a:extLst>
+            </p:cNvPr>
+            <p:cNvSpPr txBox="1"/>
+            <p:nvPr/>
+          </p:nvSpPr>
+          <p:spPr>
+            <a:xfrm>
+              <a:off x="1140096" y="988192"/>
+              <a:ext cx="1832553" cy="357790"/>
+            </a:xfrm>
+            <a:prstGeom prst="rect">
+              <a:avLst/>
+            </a:prstGeom>
+            <a:noFill/>
+          </p:spPr>
+          <p:txBody>
+            <a:bodyPr wrap="none" rtlCol="0">
+              <a:spAutoFit/>
+            </a:bodyPr>
+            <a:lstStyle>
+              <a:defPPr marR="0" lvl="0" algn="l" rtl="0">
+                <a:lnSpc>
+                  <a:spcPct val="100000"/>
+                </a:lnSpc>
+                <a:spcBef>
+                  <a:spcPts val="0"/>
+                </a:spcBef>
+                <a:spcAft>
+                  <a:spcPts val="0"/>
+                </a:spcAft>
+              </a:defPPr>
+              <a:lvl1pPr marR="0" lvl="0" algn="l" rtl="0">
+                <a:lnSpc>
+                  <a:spcPct val="100000"/>
+                </a:lnSpc>
+                <a:spcBef>
+                  <a:spcPts val="0"/>
+                </a:spcBef>
+                <a:spcAft>
+                  <a:spcPts val="0"/>
+                </a:spcAft>
+                <a:buClr>
+                  <a:srgbClr val="000000"/>
+                </a:buClr>
+                <a:buFont typeface="Arial"/>
+                <a:defRPr sz="1400" b="0" i="0" u="none" strike="noStrike" cap="none">
+                  <a:solidFill>
+                    <a:srgbClr val="000000"/>
+                  </a:solidFill>
+                  <a:latin typeface="メイリオ"/>
+                  <a:ea typeface="メイリオ"/>
+                  <a:cs typeface="メイリオ"/>
+                  <a:sym typeface="Arial"/>
+                </a:defRPr>
+              </a:lvl1pPr>
+              <a:lvl2pPr marR="0" lvl="1" algn="l" rtl="0">
+                <a:lnSpc>
+                  <a:spcPct val="100000"/>
+                </a:lnSpc>
+                <a:spcBef>
+                  <a:spcPts val="0"/>
+                </a:spcBef>
+                <a:spcAft>
+                  <a:spcPts val="0"/>
+                </a:spcAft>
+                <a:buClr>
+                  <a:srgbClr val="000000"/>
+                </a:buClr>
+                <a:buFont typeface="Arial"/>
+                <a:defRPr sz="1400" b="0" i="0" u="none" strike="noStrike" cap="none">
+                  <a:solidFill>
+                    <a:srgbClr val="000000"/>
+                  </a:solidFill>
+                  <a:latin typeface="メイリオ"/>
+                  <a:ea typeface="メイリオ"/>
+                  <a:cs typeface="メイリオ"/>
+                  <a:sym typeface="Arial"/>
+                </a:defRPr>
+              </a:lvl2pPr>
+              <a:lvl3pPr marR="0" lvl="2" algn="l" rtl="0">
+                <a:lnSpc>
+                  <a:spcPct val="100000"/>
+                </a:lnSpc>
+                <a:spcBef>
+                  <a:spcPts val="0"/>
+                </a:spcBef>
+                <a:spcAft>
+                  <a:spcPts val="0"/>
+                </a:spcAft>
+                <a:buClr>
+                  <a:srgbClr val="000000"/>
+                </a:buClr>
+                <a:buFont typeface="Arial"/>
+                <a:defRPr sz="1400" b="0" i="0" u="none" strike="noStrike" cap="none">
+                  <a:solidFill>
+                    <a:srgbClr val="000000"/>
+                  </a:solidFill>
+                  <a:latin typeface="メイリオ"/>
+                  <a:ea typeface="メイリオ"/>
+                  <a:cs typeface="メイリオ"/>
+                  <a:sym typeface="Arial"/>
+                </a:defRPr>
+              </a:lvl3pPr>
+              <a:lvl4pPr marR="0" lvl="3" algn="l" rtl="0">
+                <a:lnSpc>
+                  <a:spcPct val="100000"/>
+                </a:lnSpc>
+                <a:spcBef>
+                  <a:spcPts val="0"/>
+                </a:spcBef>
+                <a:spcAft>
+                  <a:spcPts val="0"/>
+                </a:spcAft>
+                <a:buClr>
+                  <a:srgbClr val="000000"/>
+                </a:buClr>
+                <a:buFont typeface="Arial"/>
+                <a:defRPr sz="1400" b="0" i="0" u="none" strike="noStrike" cap="none">
+                  <a:solidFill>
+                    <a:srgbClr val="000000"/>
+                  </a:solidFill>
+                  <a:latin typeface="メイリオ"/>
+                  <a:ea typeface="メイリオ"/>
+                  <a:cs typeface="メイリオ"/>
+                  <a:sym typeface="Arial"/>
+                </a:defRPr>
+              </a:lvl4pPr>
+              <a:lvl5pPr marR="0" lvl="4" algn="l" rtl="0">
+                <a:lnSpc>
+                  <a:spcPct val="100000"/>
+                </a:lnSpc>
+                <a:spcBef>
+                  <a:spcPts val="0"/>
+                </a:spcBef>
+                <a:spcAft>
+                  <a:spcPts val="0"/>
+                </a:spcAft>
+                <a:buClr>
+                  <a:srgbClr val="000000"/>
+                </a:buClr>
+                <a:buFont typeface="Arial"/>
+                <a:defRPr sz="1400" b="0" i="0" u="none" strike="noStrike" cap="none">
+                  <a:solidFill>
+                    <a:srgbClr val="000000"/>
+                  </a:solidFill>
+                  <a:latin typeface="メイリオ"/>
+                  <a:ea typeface="メイリオ"/>
+                  <a:cs typeface="メイリオ"/>
+                  <a:sym typeface="Arial"/>
+                </a:defRPr>
+              </a:lvl5pPr>
+              <a:lvl6pPr marR="0" lvl="5" algn="l" rtl="0">
+                <a:lnSpc>
+                  <a:spcPct val="100000"/>
+                </a:lnSpc>
+                <a:spcBef>
+                  <a:spcPts val="0"/>
+                </a:spcBef>
+                <a:spcAft>
+                  <a:spcPts val="0"/>
+                </a:spcAft>
+                <a:buClr>
+                  <a:srgbClr val="000000"/>
+                </a:buClr>
+                <a:buFont typeface="Arial"/>
+                <a:defRPr sz="1400" b="0" i="0" u="none" strike="noStrike" cap="none">
+                  <a:solidFill>
+                    <a:srgbClr val="000000"/>
+                  </a:solidFill>
+                  <a:latin typeface="メイリオ"/>
+                  <a:ea typeface="メイリオ"/>
+                  <a:cs typeface="メイリオ"/>
+                  <a:sym typeface="Arial"/>
+                </a:defRPr>
+              </a:lvl6pPr>
+              <a:lvl7pPr marR="0" lvl="6" algn="l" rtl="0">
+                <a:lnSpc>
+                  <a:spcPct val="100000"/>
+                </a:lnSpc>
+                <a:spcBef>
+                  <a:spcPts val="0"/>
+                </a:spcBef>
+                <a:spcAft>
+                  <a:spcPts val="0"/>
+                </a:spcAft>
+                <a:buClr>
+                  <a:srgbClr val="000000"/>
+                </a:buClr>
+                <a:buFont typeface="Arial"/>
+                <a:defRPr sz="1400" b="0" i="0" u="none" strike="noStrike" cap="none">
+                  <a:solidFill>
+                    <a:srgbClr val="000000"/>
+                  </a:solidFill>
+                  <a:latin typeface="メイリオ"/>
+                  <a:ea typeface="メイリオ"/>
+                  <a:cs typeface="メイリオ"/>
+                  <a:sym typeface="Arial"/>
+                </a:defRPr>
+              </a:lvl7pPr>
+              <a:lvl8pPr marR="0" lvl="7" algn="l" rtl="0">
+                <a:lnSpc>
+                  <a:spcPct val="100000"/>
+                </a:lnSpc>
+                <a:spcBef>
+                  <a:spcPts val="0"/>
+                </a:spcBef>
+                <a:spcAft>
+                  <a:spcPts val="0"/>
+                </a:spcAft>
+                <a:buClr>
+                  <a:srgbClr val="000000"/>
+                </a:buClr>
+                <a:buFont typeface="Arial"/>
+                <a:defRPr sz="1400" b="0" i="0" u="none" strike="noStrike" cap="none">
+                  <a:solidFill>
+                    <a:srgbClr val="000000"/>
+                  </a:solidFill>
+                  <a:latin typeface="メイリオ"/>
+                  <a:ea typeface="メイリオ"/>
+                  <a:cs typeface="メイリオ"/>
+                  <a:sym typeface="Arial"/>
+                </a:defRPr>
+              </a:lvl8pPr>
+              <a:lvl9pPr marR="0" lvl="8" algn="l" rtl="0">
+                <a:lnSpc>
+                  <a:spcPct val="100000"/>
+                </a:lnSpc>
+                <a:spcBef>
+                  <a:spcPts val="0"/>
+                </a:spcBef>
+                <a:spcAft>
+                  <a:spcPts val="0"/>
+                </a:spcAft>
+                <a:buClr>
+                  <a:srgbClr val="000000"/>
+                </a:buClr>
+                <a:buFont typeface="Arial"/>
+                <a:defRPr sz="1400" b="0" i="0" u="none" strike="noStrike" cap="none">
+                  <a:solidFill>
+                    <a:srgbClr val="000000"/>
+                  </a:solidFill>
+                  <a:latin typeface="メイリオ"/>
+                  <a:ea typeface="メイリオ"/>
+                  <a:cs typeface="メイリオ"/>
+                  <a:sym typeface="Arial"/>
+                </a:defRPr>
+              </a:lvl9pPr>
+            </a:lstStyle>
+            <a:p>
+              <a:pPr>
+                <a:lnSpc>
+                  <a:spcPct val="120000"/>
+                </a:lnSpc>
+              </a:pPr>
+              <a:r>
+                <a:rPr kumimoji="1" lang="ja-JP" altLang="en-US" sz="1500" b="1" dirty="0">
+                  <a:solidFill>
+                    <a:schemeClr val="bg1"/>
+                  </a:solidFill>
+                  <a:latin typeface="メイリオ" panose="020B0604030504040204" pitchFamily="34" charset="-128"/>
+                  <a:ea typeface="メイリオ" panose="020B0604030504040204" pitchFamily="34" charset="-128"/>
+                  <a:cs typeface="メイリオ"/>
+                </a:rPr>
+                <a:t>サンクス</a:t>
+              </a:r>
+              <a:r>
+                <a:rPr kumimoji="1" lang="en-US" altLang="ja-JP" sz="1500" b="1" dirty="0">
+                  <a:solidFill>
+                    <a:schemeClr val="bg1"/>
+                  </a:solidFill>
+                  <a:latin typeface="メイリオ" panose="020B0604030504040204" pitchFamily="34" charset="-128"/>
+                  <a:ea typeface="メイリオ" panose="020B0604030504040204" pitchFamily="34" charset="-128"/>
+                  <a:cs typeface="メイリオ"/>
+                </a:rPr>
+                <a:t>LINE</a:t>
+              </a:r>
+              <a:r>
+                <a:rPr kumimoji="1" lang="ja-JP" altLang="en-US" sz="1500" b="1" dirty="0">
+                  <a:solidFill>
+                    <a:schemeClr val="bg1"/>
+                  </a:solidFill>
+                  <a:latin typeface="メイリオ" panose="020B0604030504040204" pitchFamily="34" charset="-128"/>
+                  <a:ea typeface="メイリオ" panose="020B0604030504040204" pitchFamily="34" charset="-128"/>
+                  <a:cs typeface="メイリオ"/>
+                </a:rPr>
+                <a:t>誘導</a:t>
+              </a:r>
+            </a:p>
+          </p:txBody>
+        </p:sp>
+      </p:grpSp>
+      <p:sp>
+        <p:nvSpPr>
+          <p:cNvPr id="6" name="正方形/長方形 5">
+            <a:extLst>
+              <a:ext uri="{FF2B5EF4-FFF2-40B4-BE49-F238E27FC236}">
+                <a16:creationId xmlns:a16="http://schemas.microsoft.com/office/drawing/2014/main" id="{8B20BFF3-9D3E-A4D7-FF5A-70927F78FC9D}"/>
+              </a:ext>
+            </a:extLst>
+          </p:cNvPr>
+          <p:cNvSpPr/>
+          <p:nvPr/>
+        </p:nvSpPr>
+        <p:spPr>
+          <a:xfrm>
+            <a:off x="8247347" y="4702330"/>
+            <a:ext cx="899499" cy="799596"/>
+          </a:xfrm>
+          <a:prstGeom prst="rect">
+            <a:avLst/>
+          </a:prstGeom>
+          <a:noFill/>
+          <a:ln>
+            <a:solidFill>
+              <a:srgbClr val="FF0000"/>
+            </a:solidFill>
+          </a:ln>
+        </p:spPr>
+        <p:style>
+          <a:lnRef idx="2">
+            <a:schemeClr val="accent1">
+              <a:shade val="15000"/>
+            </a:schemeClr>
+          </a:lnRef>
+          <a:fillRef idx="1">
+            <a:schemeClr val="accent1"/>
+          </a:fillRef>
+          <a:effectRef idx="0">
+            <a:schemeClr val="accent1"/>
+          </a:effectRef>
+          <a:fontRef idx="minor">
+            <a:schemeClr val="lt1"/>
+          </a:fontRef>
+        </p:style>
+        <p:txBody>
+          <a:bodyPr rtlCol="0" anchor="ctr"/>
+          <a:lstStyle/>
+          <a:p>
+            <a:pPr algn="ctr"/>
+            <a:endParaRPr kumimoji="1" lang="ja-JP" altLang="en-US">
+              <a:latin typeface="メイリオ"/>
+              <a:ea typeface="メイリオ"/>
+              <a:cs typeface="メイリオ"/>
+            </a:endParaRPr>
+          </a:p>
+        </p:txBody>
+      </p:sp>
+      <p:cxnSp>
+        <p:nvCxnSpPr>
+          <p:cNvPr id="7" name="コネクタ: カギ線 6">
+            <a:extLst>
+              <a:ext uri="{FF2B5EF4-FFF2-40B4-BE49-F238E27FC236}">
+                <a16:creationId xmlns:a16="http://schemas.microsoft.com/office/drawing/2014/main" id="{C5EB654A-0759-70F8-6BA7-95CA3A0F983F}"/>
+              </a:ext>
+            </a:extLst>
+          </p:cNvPr>
+          <p:cNvCxnSpPr>
+            <a:cxnSpLocks/>
+          </p:cNvCxnSpPr>
+          <p:nvPr/>
+        </p:nvCxnSpPr>
+        <p:spPr>
+          <a:xfrm flipV="1">
+            <a:off x="7672763" y="5102505"/>
+            <a:ext cx="574585" cy="332494"/>
+          </a:xfrm>
+          <a:prstGeom prst="bentConnector3">
+            <a:avLst>
+              <a:gd name="adj1" fmla="val 50000"/>
+            </a:avLst>
+          </a:prstGeom>
+          <a:ln w="15875">
+            <a:solidFill>
+              <a:srgbClr val="FF0000"/>
+            </a:solidFill>
+            <a:prstDash val="sysDot"/>
+            <a:tailEnd type="triangle"/>
+          </a:ln>
+        </p:spPr>
+        <p:style>
+          <a:lnRef idx="1">
+            <a:schemeClr val="accent1"/>
+          </a:lnRef>
+          <a:fillRef idx="0">
+            <a:schemeClr val="accent1"/>
+          </a:fillRef>
+          <a:effectRef idx="0">
+            <a:schemeClr val="accent1"/>
+          </a:effectRef>
+          <a:fontRef idx="minor">
+            <a:schemeClr val="tx1"/>
+          </a:fontRef>
+        </p:style>
+      </p:cxnSp>
+      <p:cxnSp>
+        <p:nvCxnSpPr>
+          <p:cNvPr id="13" name="直線矢印コネクタ 12">
+            <a:extLst>
+              <a:ext uri="{FF2B5EF4-FFF2-40B4-BE49-F238E27FC236}">
+                <a16:creationId xmlns:a16="http://schemas.microsoft.com/office/drawing/2014/main" id="{218E3FE3-7B20-5966-421F-4ECB81603538}"/>
+              </a:ext>
+            </a:extLst>
+          </p:cNvPr>
+          <p:cNvCxnSpPr>
+            <a:cxnSpLocks/>
+            <a:stCxn id="48" idx="2"/>
+            <a:endCxn id="21" idx="0"/>
+          </p:cNvCxnSpPr>
+          <p:nvPr/>
+        </p:nvCxnSpPr>
+        <p:spPr>
+          <a:xfrm>
+            <a:off x="6904149" y="3132263"/>
+            <a:ext cx="1" cy="1334625"/>
+          </a:xfrm>
+          <a:prstGeom prst="straightConnector1">
+            <a:avLst/>
+          </a:prstGeom>
+          <a:ln w="19050">
+            <a:solidFill>
+              <a:srgbClr val="00B050">
+                <a:alpha val="80000"/>
+              </a:srgbClr>
+            </a:solidFill>
+            <a:prstDash val="sysDot"/>
+            <a:tailEnd type="triangle"/>
+          </a:ln>
+        </p:spPr>
+        <p:style>
+          <a:lnRef idx="1">
+            <a:schemeClr val="accent1"/>
+          </a:lnRef>
+          <a:fillRef idx="0">
+            <a:schemeClr val="accent1"/>
+          </a:fillRef>
+          <a:effectRef idx="0">
+            <a:schemeClr val="accent1"/>
+          </a:effectRef>
+          <a:fontRef idx="minor">
+            <a:schemeClr val="tx1"/>
+          </a:fontRef>
+        </p:style>
+      </p:cxnSp>
+      <p:sp>
+        <p:nvSpPr>
+          <p:cNvPr id="19" name="テキスト ボックス 18">
+            <a:extLst>
+              <a:ext uri="{FF2B5EF4-FFF2-40B4-BE49-F238E27FC236}">
+                <a16:creationId xmlns:a16="http://schemas.microsoft.com/office/drawing/2014/main" id="{DBDB9444-3A0E-B235-58FC-9F8C81BAEA44}"/>
+              </a:ext>
+            </a:extLst>
+          </p:cNvPr>
+          <p:cNvSpPr txBox="1"/>
+          <p:nvPr/>
+        </p:nvSpPr>
+        <p:spPr>
+          <a:xfrm>
+            <a:off x="6323825" y="3523709"/>
+            <a:ext cx="1161782" cy="261610"/>
+          </a:xfrm>
+          <a:prstGeom prst="rect">
+            <a:avLst/>
+          </a:prstGeom>
+          <a:solidFill>
+            <a:schemeClr val="bg1">
+              <a:alpha val="70000"/>
+            </a:schemeClr>
+          </a:solidFill>
+        </p:spPr>
+        <p:txBody>
+          <a:bodyPr wrap="square">
+            <a:spAutoFit/>
+          </a:bodyPr>
+          <a:lstStyle/>
+          <a:p>
+            <a:pPr algn="ctr"/>
+            <a:r>
+              <a:rPr kumimoji="1" lang="ja-JP" altLang="en-US" sz="1100" b="1" dirty="0">
+                <a:solidFill>
+                  <a:srgbClr val="00C057"/>
+                </a:solidFill>
+                <a:latin typeface="メイリオ" panose="020B0604030504040204" pitchFamily="50" charset="-128"/>
+                <a:ea typeface="メイリオ" panose="020B0604030504040204" pitchFamily="50" charset="-128"/>
+                <a:cs typeface="メイリオ"/>
+              </a:rPr>
+              <a:t>友だち追加後</a:t>
+            </a:r>
+            <a:endParaRPr lang="ja-JP" altLang="en-US" sz="1100" dirty="0">
+              <a:solidFill>
+                <a:srgbClr val="00C057"/>
+              </a:solidFill>
+              <a:latin typeface="メイリオ"/>
+              <a:ea typeface="メイリオ"/>
+              <a:cs typeface="メイリオ"/>
+            </a:endParaRPr>
+          </a:p>
+        </p:txBody>
+      </p:sp>
+      <p:sp>
+        <p:nvSpPr>
+          <p:cNvPr id="9" name="正方形/長方形 8">
+            <a:extLst>
+              <a:ext uri="{FF2B5EF4-FFF2-40B4-BE49-F238E27FC236}">
+                <a16:creationId xmlns:a16="http://schemas.microsoft.com/office/drawing/2014/main" id="{DC4FF56C-47EE-47DB-92F1-3F0EF57613D9}"/>
+              </a:ext>
+            </a:extLst>
+          </p:cNvPr>
+          <p:cNvSpPr/>
+          <p:nvPr/>
+        </p:nvSpPr>
+        <p:spPr>
+          <a:xfrm>
+            <a:off x="3806311" y="788165"/>
+            <a:ext cx="5880088" cy="584775"/>
+          </a:xfrm>
+          <a:prstGeom prst="rect">
+            <a:avLst/>
+          </a:prstGeom>
+        </p:spPr>
+        <p:txBody>
+          <a:bodyPr wrap="square">
+            <a:spAutoFit/>
+          </a:bodyPr>
+          <a:lstStyle/>
+          <a:p>
+            <a:pPr lvl="0" algn="ctr">
+              <a:buClr>
+                <a:schemeClr val="dk1"/>
+              </a:buClr>
+              <a:buSzPts val="1500"/>
+            </a:pPr>
+            <a:r>
+              <a:rPr lang="ja-JP" altLang="en-US" sz="1600" dirty="0">
+                <a:latin typeface="メイリオ"/>
+                <a:ea typeface="メイリオ"/>
+                <a:cs typeface="メイリオ"/>
+                <a:sym typeface="Meiryo"/>
+              </a:rPr>
+              <a:t>サンクス到達時の</a:t>
+            </a:r>
+            <a:r>
+              <a:rPr lang="en-US" altLang="ja-JP" sz="1600" dirty="0">
+                <a:latin typeface="メイリオ"/>
+                <a:ea typeface="メイリオ"/>
+                <a:cs typeface="メイリオ"/>
+                <a:sym typeface="Meiryo"/>
+              </a:rPr>
+              <a:t>LINE</a:t>
+            </a:r>
+            <a:r>
+              <a:rPr lang="ja-JP" altLang="en-US" sz="1600" dirty="0">
+                <a:latin typeface="メイリオ"/>
+                <a:ea typeface="メイリオ"/>
+                <a:cs typeface="メイリオ"/>
+                <a:sym typeface="Meiryo"/>
+              </a:rPr>
+              <a:t>動線が弊社開発により可能に。</a:t>
+            </a:r>
+            <a:endParaRPr lang="en-US" altLang="ja-JP" sz="1600" dirty="0">
+              <a:latin typeface="メイリオ"/>
+              <a:ea typeface="メイリオ"/>
+              <a:cs typeface="メイリオ"/>
+              <a:sym typeface="Meiryo"/>
+            </a:endParaRPr>
+          </a:p>
+          <a:p>
+            <a:pPr lvl="0" algn="ctr">
+              <a:buClr>
+                <a:schemeClr val="dk1"/>
+              </a:buClr>
+              <a:buSzPts val="1500"/>
+            </a:pPr>
+            <a:r>
+              <a:rPr lang="ja-JP" altLang="en-US" sz="1600" dirty="0">
+                <a:latin typeface="メイリオ"/>
+                <a:ea typeface="メイリオ"/>
+                <a:cs typeface="メイリオ"/>
+                <a:sym typeface="Meiryo"/>
+              </a:rPr>
+              <a:t>費用を抑えての導入が可能で、新規反響の質改善に寄与。</a:t>
+            </a:r>
+          </a:p>
+        </p:txBody>
+      </p:sp>
+      <p:sp>
+        <p:nvSpPr>
+          <p:cNvPr id="14" name="テキスト ボックス 13">
+            <a:extLst>
+              <a:ext uri="{FF2B5EF4-FFF2-40B4-BE49-F238E27FC236}">
+                <a16:creationId xmlns:a16="http://schemas.microsoft.com/office/drawing/2014/main" id="{5ED6F7D2-546D-BF9F-9805-58455D7E2831}"/>
+              </a:ext>
+            </a:extLst>
+          </p:cNvPr>
+          <p:cNvSpPr txBox="1"/>
+          <p:nvPr/>
+        </p:nvSpPr>
+        <p:spPr>
+          <a:xfrm>
+            <a:off x="4091506" y="1549623"/>
+            <a:ext cx="4718625" cy="230832"/>
+          </a:xfrm>
+          <a:prstGeom prst="rect">
+            <a:avLst/>
+          </a:prstGeom>
+          <a:noFill/>
+        </p:spPr>
+        <p:txBody>
+          <a:bodyPr wrap="square">
+            <a:spAutoFit/>
+          </a:bodyPr>
+          <a:lstStyle/>
+          <a:p>
+            <a:r>
+              <a:rPr lang="en-US" altLang="ja-JP" sz="900" dirty="0">
+                <a:solidFill>
+                  <a:srgbClr val="FF0000"/>
+                </a:solidFill>
+                <a:latin typeface="メイリオ" panose="020B0604030504040204" pitchFamily="50" charset="-128"/>
+                <a:ea typeface="メイリオ" panose="020B0604030504040204" pitchFamily="50" charset="-128"/>
+                <a:cs typeface="メイリオ"/>
+                <a:sym typeface="Meiryo"/>
+              </a:rPr>
+              <a:t>※</a:t>
+            </a:r>
+            <a:r>
+              <a:rPr lang="ja-JP" altLang="en-US" sz="900" dirty="0">
+                <a:solidFill>
+                  <a:srgbClr val="FF0000"/>
+                </a:solidFill>
+                <a:latin typeface="メイリオ" panose="020B0604030504040204" pitchFamily="50" charset="-128"/>
+                <a:ea typeface="メイリオ" panose="020B0604030504040204" pitchFamily="50" charset="-128"/>
+                <a:cs typeface="メイリオ"/>
+                <a:sym typeface="Meiryo"/>
+              </a:rPr>
+              <a:t>既存</a:t>
+            </a:r>
+            <a:r>
+              <a:rPr lang="en-US" altLang="ja-JP" sz="900" dirty="0">
+                <a:solidFill>
+                  <a:srgbClr val="FF0000"/>
+                </a:solidFill>
+                <a:latin typeface="メイリオ" panose="020B0604030504040204" pitchFamily="50" charset="-128"/>
+                <a:ea typeface="メイリオ" panose="020B0604030504040204" pitchFamily="50" charset="-128"/>
+                <a:cs typeface="メイリオ"/>
+                <a:sym typeface="Meiryo"/>
+              </a:rPr>
+              <a:t>API</a:t>
+            </a:r>
+            <a:r>
+              <a:rPr lang="ja-JP" altLang="en-US" sz="900" dirty="0">
+                <a:solidFill>
+                  <a:srgbClr val="FF0000"/>
+                </a:solidFill>
+                <a:latin typeface="メイリオ" panose="020B0604030504040204" pitchFamily="50" charset="-128"/>
+                <a:ea typeface="メイリオ" panose="020B0604030504040204" pitchFamily="50" charset="-128"/>
+                <a:cs typeface="メイリオ"/>
+                <a:sym typeface="Meiryo"/>
+              </a:rPr>
+              <a:t>ツールとの併用についても、問題なく稼働が可能。</a:t>
+            </a:r>
+            <a:endParaRPr lang="ja-JP" altLang="en-US" sz="900" dirty="0">
+              <a:solidFill>
+                <a:srgbClr val="FF0000"/>
+              </a:solidFill>
+              <a:latin typeface="メイリオ"/>
+              <a:ea typeface="メイリオ"/>
+              <a:cs typeface="メイリオ"/>
+            </a:endParaRPr>
+          </a:p>
+        </p:txBody>
+      </p:sp>
+      <p:sp>
+        <p:nvSpPr>
+          <p:cNvPr id="8" name="正方形/長方形 7">
+            <a:extLst>
+              <a:ext uri="{FF2B5EF4-FFF2-40B4-BE49-F238E27FC236}">
+                <a16:creationId xmlns:a16="http://schemas.microsoft.com/office/drawing/2014/main" id="{F5B8C83A-7191-D772-EF88-AE268D007E63}"/>
+              </a:ext>
+            </a:extLst>
+          </p:cNvPr>
+          <p:cNvSpPr/>
+          <p:nvPr/>
+        </p:nvSpPr>
+        <p:spPr>
+          <a:xfrm>
+            <a:off x="5769326" y="1938056"/>
+            <a:ext cx="3788228" cy="244151"/>
+          </a:xfrm>
+          <a:prstGeom prst="rect">
+            <a:avLst/>
+          </a:prstGeom>
+          <a:solidFill>
+            <a:schemeClr val="tx2"/>
+          </a:solidFill>
+          <a:ln>
+            <a:noFill/>
+          </a:ln>
+        </p:spPr>
+        <p:style>
+          <a:lnRef idx="2">
+            <a:schemeClr val="accent1">
+              <a:shade val="15000"/>
+            </a:schemeClr>
+          </a:lnRef>
+          <a:fillRef idx="1">
+            <a:schemeClr val="accent1"/>
+          </a:fillRef>
+          <a:effectRef idx="0">
+            <a:schemeClr val="accent1"/>
+          </a:effectRef>
+          <a:fontRef idx="minor">
+            <a:schemeClr val="lt1"/>
+          </a:fontRef>
+        </p:style>
+        <p:txBody>
+          <a:bodyPr rtlCol="0" anchor="ctr"/>
+          <a:lstStyle/>
+          <a:p>
+            <a:pPr algn="ctr"/>
+            <a:r>
+              <a:rPr lang="ja-JP" altLang="en-US" sz="1100" b="1" dirty="0">
+                <a:solidFill>
+                  <a:schemeClr val="bg1"/>
+                </a:solidFill>
+                <a:latin typeface="メイリオ" panose="020B0604030504040204" pitchFamily="50" charset="-128"/>
+                <a:ea typeface="メイリオ" panose="020B0604030504040204" pitchFamily="50" charset="-128"/>
+                <a:cs typeface="メイリオ"/>
+              </a:rPr>
+              <a:t>動作イメージ</a:t>
+            </a:r>
+            <a:endParaRPr kumimoji="1" lang="ja-JP" altLang="en-US" sz="1100" b="1" dirty="0">
+              <a:solidFill>
+                <a:schemeClr val="bg1"/>
+              </a:solidFill>
+              <a:latin typeface="メイリオ" panose="020B0604030504040204" pitchFamily="50" charset="-128"/>
+              <a:ea typeface="メイリオ" panose="020B0604030504040204" pitchFamily="50" charset="-128"/>
+              <a:cs typeface="メイリオ"/>
+            </a:endParaRPr>
+          </a:p>
+        </p:txBody>
+      </p:sp>
+      <p:sp>
+        <p:nvSpPr>
+          <p:cNvPr id="26" name="Google Shape;51;p19">
+            <a:extLst>
+              <a:ext uri="{FF2B5EF4-FFF2-40B4-BE49-F238E27FC236}">
+                <a16:creationId xmlns:a16="http://schemas.microsoft.com/office/drawing/2014/main" id="{A4070FDA-7C99-27DE-6A9C-437C1D5DD3B3}"/>
+              </a:ext>
+            </a:extLst>
+          </p:cNvPr>
+          <p:cNvSpPr/>
+          <p:nvPr/>
+        </p:nvSpPr>
+        <p:spPr>
+          <a:xfrm>
+            <a:off x="543399" y="1321261"/>
+            <a:ext cx="1510826" cy="485102"/>
+          </a:xfrm>
+          <a:prstGeom prst="roundRect">
+            <a:avLst>
+              <a:gd name="adj" fmla="val 16667"/>
+            </a:avLst>
+          </a:prstGeom>
+          <a:solidFill>
+            <a:schemeClr val="tx2"/>
+          </a:solidFill>
+          <a:ln>
+            <a:noFill/>
+          </a:ln>
+        </p:spPr>
+        <p:txBody>
+          <a:bodyPr spcFirstLastPara="1" wrap="square" lIns="91425" tIns="45700" rIns="91425" bIns="45700" anchor="ctr" anchorCtr="0">
+            <a:noAutofit/>
+          </a:bodyPr>
+          <a:lstStyle>
+            <a:defPPr marR="0" lvl="0" algn="l" rtl="0">
+              <a:lnSpc>
+                <a:spcPct val="100000"/>
+              </a:lnSpc>
+              <a:spcBef>
+                <a:spcPts val="0"/>
+              </a:spcBef>
+              <a:spcAft>
+                <a:spcPts val="0"/>
+              </a:spcAft>
+            </a:defPPr>
+            <a:lvl1pPr marR="0" lvl="0" algn="l" rtl="0">
+              <a:lnSpc>
+                <a:spcPct val="100000"/>
+              </a:lnSpc>
+              <a:spcBef>
+                <a:spcPts val="0"/>
+              </a:spcBef>
+              <a:spcAft>
+                <a:spcPts val="0"/>
+              </a:spcAft>
+              <a:buClr>
+                <a:srgbClr val="000000"/>
+              </a:buClr>
+              <a:buFont typeface="Arial"/>
+              <a:defRPr sz="1400" b="0" i="0" u="none" strike="noStrike" cap="none">
+                <a:solidFill>
+                  <a:srgbClr val="000000"/>
+                </a:solidFill>
+                <a:latin typeface="メイリオ"/>
+                <a:ea typeface="メイリオ"/>
+                <a:cs typeface="メイリオ"/>
+                <a:sym typeface="Arial"/>
+              </a:defRPr>
+            </a:lvl1pPr>
+            <a:lvl2pPr marR="0" lvl="1" algn="l" rtl="0">
+              <a:lnSpc>
+                <a:spcPct val="100000"/>
+              </a:lnSpc>
+              <a:spcBef>
+                <a:spcPts val="0"/>
+              </a:spcBef>
+              <a:spcAft>
+                <a:spcPts val="0"/>
+              </a:spcAft>
+              <a:buClr>
+                <a:srgbClr val="000000"/>
+              </a:buClr>
+              <a:buFont typeface="Arial"/>
+              <a:defRPr sz="1400" b="0" i="0" u="none" strike="noStrike" cap="none">
+                <a:solidFill>
+                  <a:srgbClr val="000000"/>
+                </a:solidFill>
+                <a:latin typeface="メイリオ"/>
+                <a:ea typeface="メイリオ"/>
+                <a:cs typeface="メイリオ"/>
+                <a:sym typeface="Arial"/>
+              </a:defRPr>
+            </a:lvl2pPr>
+            <a:lvl3pPr marR="0" lvl="2" algn="l" rtl="0">
+              <a:lnSpc>
+                <a:spcPct val="100000"/>
+              </a:lnSpc>
+              <a:spcBef>
+                <a:spcPts val="0"/>
+              </a:spcBef>
+              <a:spcAft>
+                <a:spcPts val="0"/>
+              </a:spcAft>
+              <a:buClr>
+                <a:srgbClr val="000000"/>
+              </a:buClr>
+              <a:buFont typeface="Arial"/>
+              <a:defRPr sz="1400" b="0" i="0" u="none" strike="noStrike" cap="none">
+                <a:solidFill>
+                  <a:srgbClr val="000000"/>
+                </a:solidFill>
+                <a:latin typeface="メイリオ"/>
+                <a:ea typeface="メイリオ"/>
+                <a:cs typeface="メイリオ"/>
+                <a:sym typeface="Arial"/>
+              </a:defRPr>
+            </a:lvl3pPr>
+            <a:lvl4pPr marR="0" lvl="3" algn="l" rtl="0">
+              <a:lnSpc>
+                <a:spcPct val="100000"/>
+              </a:lnSpc>
+              <a:spcBef>
+                <a:spcPts val="0"/>
+              </a:spcBef>
+              <a:spcAft>
+                <a:spcPts val="0"/>
+              </a:spcAft>
+              <a:buClr>
+                <a:srgbClr val="000000"/>
+              </a:buClr>
+              <a:buFont typeface="Arial"/>
+              <a:defRPr sz="1400" b="0" i="0" u="none" strike="noStrike" cap="none">
+                <a:solidFill>
+                  <a:srgbClr val="000000"/>
+                </a:solidFill>
+                <a:latin typeface="メイリオ"/>
+                <a:ea typeface="メイリオ"/>
+                <a:cs typeface="メイリオ"/>
+                <a:sym typeface="Arial"/>
+              </a:defRPr>
+            </a:lvl4pPr>
+            <a:lvl5pPr marR="0" lvl="4" algn="l" rtl="0">
+              <a:lnSpc>
+                <a:spcPct val="100000"/>
+              </a:lnSpc>
+              <a:spcBef>
+                <a:spcPts val="0"/>
+              </a:spcBef>
+              <a:spcAft>
+                <a:spcPts val="0"/>
+              </a:spcAft>
+              <a:buClr>
+                <a:srgbClr val="000000"/>
+              </a:buClr>
+              <a:buFont typeface="Arial"/>
+              <a:defRPr sz="1400" b="0" i="0" u="none" strike="noStrike" cap="none">
+                <a:solidFill>
+                  <a:srgbClr val="000000"/>
+                </a:solidFill>
+                <a:latin typeface="メイリオ"/>
+                <a:ea typeface="メイリオ"/>
+                <a:cs typeface="メイリオ"/>
+                <a:sym typeface="Arial"/>
+              </a:defRPr>
+            </a:lvl5pPr>
+            <a:lvl6pPr marR="0" lvl="5" algn="l" rtl="0">
+              <a:lnSpc>
+                <a:spcPct val="100000"/>
+              </a:lnSpc>
+              <a:spcBef>
+                <a:spcPts val="0"/>
+              </a:spcBef>
+              <a:spcAft>
+                <a:spcPts val="0"/>
+              </a:spcAft>
+              <a:buClr>
+                <a:srgbClr val="000000"/>
+              </a:buClr>
+              <a:buFont typeface="Arial"/>
+              <a:defRPr sz="1400" b="0" i="0" u="none" strike="noStrike" cap="none">
+                <a:solidFill>
+                  <a:srgbClr val="000000"/>
+                </a:solidFill>
+                <a:latin typeface="メイリオ"/>
+                <a:ea typeface="メイリオ"/>
+                <a:cs typeface="メイリオ"/>
+                <a:sym typeface="Arial"/>
+              </a:defRPr>
+            </a:lvl6pPr>
+            <a:lvl7pPr marR="0" lvl="6" algn="l" rtl="0">
+              <a:lnSpc>
+                <a:spcPct val="100000"/>
+              </a:lnSpc>
+              <a:spcBef>
+                <a:spcPts val="0"/>
+              </a:spcBef>
+              <a:spcAft>
+                <a:spcPts val="0"/>
+              </a:spcAft>
+              <a:buClr>
+                <a:srgbClr val="000000"/>
+              </a:buClr>
+              <a:buFont typeface="Arial"/>
+              <a:defRPr sz="1400" b="0" i="0" u="none" strike="noStrike" cap="none">
+                <a:solidFill>
+                  <a:srgbClr val="000000"/>
+                </a:solidFill>
+                <a:latin typeface="メイリオ"/>
+                <a:ea typeface="メイリオ"/>
+                <a:cs typeface="メイリオ"/>
+                <a:sym typeface="Arial"/>
+              </a:defRPr>
+            </a:lvl7pPr>
+            <a:lvl8pPr marR="0" lvl="7" algn="l" rtl="0">
+              <a:lnSpc>
+                <a:spcPct val="100000"/>
+              </a:lnSpc>
+              <a:spcBef>
+                <a:spcPts val="0"/>
+              </a:spcBef>
+              <a:spcAft>
+                <a:spcPts val="0"/>
+              </a:spcAft>
+              <a:buClr>
+                <a:srgbClr val="000000"/>
+              </a:buClr>
+              <a:buFont typeface="Arial"/>
+              <a:defRPr sz="1400" b="0" i="0" u="none" strike="noStrike" cap="none">
+                <a:solidFill>
+                  <a:srgbClr val="000000"/>
+                </a:solidFill>
+                <a:latin typeface="メイリオ"/>
+                <a:ea typeface="メイリオ"/>
+                <a:cs typeface="メイリオ"/>
+                <a:sym typeface="Arial"/>
+              </a:defRPr>
+            </a:lvl8pPr>
+            <a:lvl9pPr marR="0" lvl="8" algn="l" rtl="0">
+              <a:lnSpc>
+                <a:spcPct val="100000"/>
+              </a:lnSpc>
+              <a:spcBef>
+                <a:spcPts val="0"/>
+              </a:spcBef>
+              <a:spcAft>
+                <a:spcPts val="0"/>
+              </a:spcAft>
+              <a:buClr>
+                <a:srgbClr val="000000"/>
+              </a:buClr>
+              <a:buFont typeface="Arial"/>
+              <a:defRPr sz="1400" b="0" i="0" u="none" strike="noStrike" cap="none">
+                <a:solidFill>
+                  <a:srgbClr val="000000"/>
+                </a:solidFill>
+                <a:latin typeface="メイリオ"/>
+                <a:ea typeface="メイリオ"/>
+                <a:cs typeface="メイリオ"/>
+                <a:sym typeface="Arial"/>
+              </a:defRPr>
+            </a:lvl9pPr>
+          </a:lstStyle>
+          <a:p>
+            <a:pPr marL="0" marR="0" lvl="0" indent="0" algn="ctr" rtl="0">
+              <a:lnSpc>
+                <a:spcPct val="100000"/>
+              </a:lnSpc>
+              <a:spcBef>
+                <a:spcPts val="0"/>
+              </a:spcBef>
+              <a:spcAft>
+                <a:spcPts val="0"/>
+              </a:spcAft>
+              <a:buClr>
+                <a:srgbClr val="000000"/>
+              </a:buClr>
+              <a:buSzPts val="1400"/>
+              <a:buFont typeface="Arial"/>
+              <a:buNone/>
+            </a:pPr>
+            <a:r>
+              <a:rPr lang="ja-JP" altLang="en-US" sz="1400" b="1" i="0" u="none" strike="noStrike" cap="none" dirty="0">
+                <a:solidFill>
+                  <a:schemeClr val="lt1"/>
+                </a:solidFill>
+                <a:latin typeface="メイリオ"/>
+                <a:ea typeface="メイリオ"/>
+                <a:cs typeface="メイリオ"/>
+                <a:sym typeface="Meiryo"/>
+              </a:rPr>
+              <a:t>初期：15万円</a:t>
+            </a:r>
+            <a:endParaRPr sz="1400" b="1" i="0" u="none" strike="noStrike" cap="none" dirty="0">
+              <a:solidFill>
+                <a:schemeClr val="lt1"/>
+              </a:solidFill>
+              <a:latin typeface="メイリオ"/>
+              <a:ea typeface="メイリオ"/>
+              <a:cs typeface="メイリオ"/>
+              <a:sym typeface="Meiryo"/>
+            </a:endParaRPr>
+          </a:p>
+        </p:txBody>
+      </p:sp>
+      <p:sp>
+        <p:nvSpPr>
+          <p:cNvPr id="28" name="Google Shape;51;p19">
+            <a:extLst>
+              <a:ext uri="{FF2B5EF4-FFF2-40B4-BE49-F238E27FC236}">
+                <a16:creationId xmlns:a16="http://schemas.microsoft.com/office/drawing/2014/main" id="{40C4675F-5DCC-DD57-BE14-B3A7697A02CD}"/>
+              </a:ext>
+            </a:extLst>
+          </p:cNvPr>
+          <p:cNvSpPr/>
+          <p:nvPr/>
+        </p:nvSpPr>
+        <p:spPr>
+          <a:xfrm>
+            <a:off x="2137897" y="1321261"/>
+            <a:ext cx="1510826" cy="485102"/>
+          </a:xfrm>
+          <a:prstGeom prst="roundRect">
+            <a:avLst>
+              <a:gd name="adj" fmla="val 16667"/>
+            </a:avLst>
+          </a:prstGeom>
+          <a:solidFill>
+            <a:schemeClr val="tx2"/>
+          </a:solidFill>
+          <a:ln>
+            <a:noFill/>
+          </a:ln>
+        </p:spPr>
+        <p:txBody>
+          <a:bodyPr spcFirstLastPara="1" wrap="square" lIns="91425" tIns="45700" rIns="91425" bIns="45700" anchor="ctr" anchorCtr="0">
+            <a:noAutofit/>
+          </a:bodyPr>
+          <a:lstStyle>
+            <a:defPPr marR="0" lvl="0" algn="l" rtl="0">
+              <a:lnSpc>
+                <a:spcPct val="100000"/>
+              </a:lnSpc>
+              <a:spcBef>
+                <a:spcPts val="0"/>
+              </a:spcBef>
+              <a:spcAft>
+                <a:spcPts val="0"/>
+              </a:spcAft>
+            </a:defPPr>
+            <a:lvl1pPr marR="0" lvl="0" algn="l" rtl="0">
+              <a:lnSpc>
+                <a:spcPct val="100000"/>
+              </a:lnSpc>
+              <a:spcBef>
+                <a:spcPts val="0"/>
+              </a:spcBef>
+              <a:spcAft>
+                <a:spcPts val="0"/>
+              </a:spcAft>
+              <a:buClr>
+                <a:srgbClr val="000000"/>
+              </a:buClr>
+              <a:buFont typeface="Arial"/>
+              <a:defRPr sz="1400" b="0" i="0" u="none" strike="noStrike" cap="none">
+                <a:solidFill>
+                  <a:srgbClr val="000000"/>
+                </a:solidFill>
+                <a:latin typeface="メイリオ"/>
+                <a:ea typeface="メイリオ"/>
+                <a:cs typeface="メイリオ"/>
+                <a:sym typeface="Arial"/>
+              </a:defRPr>
+            </a:lvl1pPr>
+            <a:lvl2pPr marR="0" lvl="1" algn="l" rtl="0">
+              <a:lnSpc>
+                <a:spcPct val="100000"/>
+              </a:lnSpc>
+              <a:spcBef>
+                <a:spcPts val="0"/>
+              </a:spcBef>
+              <a:spcAft>
+                <a:spcPts val="0"/>
+              </a:spcAft>
+              <a:buClr>
+                <a:srgbClr val="000000"/>
+              </a:buClr>
+              <a:buFont typeface="Arial"/>
+              <a:defRPr sz="1400" b="0" i="0" u="none" strike="noStrike" cap="none">
+                <a:solidFill>
+                  <a:srgbClr val="000000"/>
+                </a:solidFill>
+                <a:latin typeface="メイリオ"/>
+                <a:ea typeface="メイリオ"/>
+                <a:cs typeface="メイリオ"/>
+                <a:sym typeface="Arial"/>
+              </a:defRPr>
+            </a:lvl2pPr>
+            <a:lvl3pPr marR="0" lvl="2" algn="l" rtl="0">
+              <a:lnSpc>
+                <a:spcPct val="100000"/>
+              </a:lnSpc>
+              <a:spcBef>
+                <a:spcPts val="0"/>
+              </a:spcBef>
+              <a:spcAft>
+                <a:spcPts val="0"/>
+              </a:spcAft>
+              <a:buClr>
+                <a:srgbClr val="000000"/>
+              </a:buClr>
+              <a:buFont typeface="Arial"/>
+              <a:defRPr sz="1400" b="0" i="0" u="none" strike="noStrike" cap="none">
+                <a:solidFill>
+                  <a:srgbClr val="000000"/>
+                </a:solidFill>
+                <a:latin typeface="メイリオ"/>
+                <a:ea typeface="メイリオ"/>
+                <a:cs typeface="メイリオ"/>
+                <a:sym typeface="Arial"/>
+              </a:defRPr>
+            </a:lvl3pPr>
+            <a:lvl4pPr marR="0" lvl="3" algn="l" rtl="0">
+              <a:lnSpc>
+                <a:spcPct val="100000"/>
+              </a:lnSpc>
+              <a:spcBef>
+                <a:spcPts val="0"/>
+              </a:spcBef>
+              <a:spcAft>
+                <a:spcPts val="0"/>
+              </a:spcAft>
+              <a:buClr>
+                <a:srgbClr val="000000"/>
+              </a:buClr>
+              <a:buFont typeface="Arial"/>
+              <a:defRPr sz="1400" b="0" i="0" u="none" strike="noStrike" cap="none">
+                <a:solidFill>
+                  <a:srgbClr val="000000"/>
+                </a:solidFill>
+                <a:latin typeface="メイリオ"/>
+                <a:ea typeface="メイリオ"/>
+                <a:cs typeface="メイリオ"/>
+                <a:sym typeface="Arial"/>
+              </a:defRPr>
+            </a:lvl4pPr>
+            <a:lvl5pPr marR="0" lvl="4" algn="l" rtl="0">
+              <a:lnSpc>
+                <a:spcPct val="100000"/>
+              </a:lnSpc>
+              <a:spcBef>
+                <a:spcPts val="0"/>
+              </a:spcBef>
+              <a:spcAft>
+                <a:spcPts val="0"/>
+              </a:spcAft>
+              <a:buClr>
+                <a:srgbClr val="000000"/>
+              </a:buClr>
+              <a:buFont typeface="Arial"/>
+              <a:defRPr sz="1400" b="0" i="0" u="none" strike="noStrike" cap="none">
+                <a:solidFill>
+                  <a:srgbClr val="000000"/>
+                </a:solidFill>
+                <a:latin typeface="メイリオ"/>
+                <a:ea typeface="メイリオ"/>
+                <a:cs typeface="メイリオ"/>
+                <a:sym typeface="Arial"/>
+              </a:defRPr>
+            </a:lvl5pPr>
+            <a:lvl6pPr marR="0" lvl="5" algn="l" rtl="0">
+              <a:lnSpc>
+                <a:spcPct val="100000"/>
+              </a:lnSpc>
+              <a:spcBef>
+                <a:spcPts val="0"/>
+              </a:spcBef>
+              <a:spcAft>
+                <a:spcPts val="0"/>
+              </a:spcAft>
+              <a:buClr>
+                <a:srgbClr val="000000"/>
+              </a:buClr>
+              <a:buFont typeface="Arial"/>
+              <a:defRPr sz="1400" b="0" i="0" u="none" strike="noStrike" cap="none">
+                <a:solidFill>
+                  <a:srgbClr val="000000"/>
+                </a:solidFill>
+                <a:latin typeface="メイリオ"/>
+                <a:ea typeface="メイリオ"/>
+                <a:cs typeface="メイリオ"/>
+                <a:sym typeface="Arial"/>
+              </a:defRPr>
+            </a:lvl6pPr>
+            <a:lvl7pPr marR="0" lvl="6" algn="l" rtl="0">
+              <a:lnSpc>
+                <a:spcPct val="100000"/>
+              </a:lnSpc>
+              <a:spcBef>
+                <a:spcPts val="0"/>
+              </a:spcBef>
+              <a:spcAft>
+                <a:spcPts val="0"/>
+              </a:spcAft>
+              <a:buClr>
+                <a:srgbClr val="000000"/>
+              </a:buClr>
+              <a:buFont typeface="Arial"/>
+              <a:defRPr sz="1400" b="0" i="0" u="none" strike="noStrike" cap="none">
+                <a:solidFill>
+                  <a:srgbClr val="000000"/>
+                </a:solidFill>
+                <a:latin typeface="メイリオ"/>
+                <a:ea typeface="メイリオ"/>
+                <a:cs typeface="メイリオ"/>
+                <a:sym typeface="Arial"/>
+              </a:defRPr>
+            </a:lvl7pPr>
+            <a:lvl8pPr marR="0" lvl="7" algn="l" rtl="0">
+              <a:lnSpc>
+                <a:spcPct val="100000"/>
+              </a:lnSpc>
+              <a:spcBef>
+                <a:spcPts val="0"/>
+              </a:spcBef>
+              <a:spcAft>
+                <a:spcPts val="0"/>
+              </a:spcAft>
+              <a:buClr>
+                <a:srgbClr val="000000"/>
+              </a:buClr>
+              <a:buFont typeface="Arial"/>
+              <a:defRPr sz="1400" b="0" i="0" u="none" strike="noStrike" cap="none">
+                <a:solidFill>
+                  <a:srgbClr val="000000"/>
+                </a:solidFill>
+                <a:latin typeface="メイリオ"/>
+                <a:ea typeface="メイリオ"/>
+                <a:cs typeface="メイリオ"/>
+                <a:sym typeface="Arial"/>
+              </a:defRPr>
+            </a:lvl8pPr>
+            <a:lvl9pPr marR="0" lvl="8" algn="l" rtl="0">
+              <a:lnSpc>
+                <a:spcPct val="100000"/>
+              </a:lnSpc>
+              <a:spcBef>
+                <a:spcPts val="0"/>
+              </a:spcBef>
+              <a:spcAft>
+                <a:spcPts val="0"/>
+              </a:spcAft>
+              <a:buClr>
+                <a:srgbClr val="000000"/>
+              </a:buClr>
+              <a:buFont typeface="Arial"/>
+              <a:defRPr sz="1400" b="0" i="0" u="none" strike="noStrike" cap="none">
+                <a:solidFill>
+                  <a:srgbClr val="000000"/>
+                </a:solidFill>
+                <a:latin typeface="メイリオ"/>
+                <a:ea typeface="メイリオ"/>
+                <a:cs typeface="メイリオ"/>
+                <a:sym typeface="Arial"/>
+              </a:defRPr>
+            </a:lvl9pPr>
+          </a:lstStyle>
+          <a:p>
+            <a:pPr marL="0" marR="0" lvl="0" indent="0" algn="ctr" rtl="0">
+              <a:lnSpc>
+                <a:spcPct val="100000"/>
+              </a:lnSpc>
+              <a:spcBef>
+                <a:spcPts val="0"/>
+              </a:spcBef>
+              <a:spcAft>
+                <a:spcPts val="0"/>
+              </a:spcAft>
+              <a:buClr>
+                <a:srgbClr val="000000"/>
+              </a:buClr>
+              <a:buSzPts val="1400"/>
+              <a:buFont typeface="Arial"/>
+              <a:buNone/>
+            </a:pPr>
+            <a:r>
+              <a:rPr lang="ja-JP" altLang="en-US" sz="1400" b="1" i="0" u="none" strike="noStrike" cap="none" dirty="0">
+                <a:solidFill>
+                  <a:schemeClr val="lt1"/>
+                </a:solidFill>
+                <a:latin typeface="メイリオ"/>
+                <a:ea typeface="メイリオ"/>
+                <a:cs typeface="メイリオ"/>
+                <a:sym typeface="Meiryo"/>
+              </a:rPr>
+              <a:t>月額</a:t>
+            </a:r>
+            <a:r>
+              <a:rPr lang="en-US" altLang="ja-JP" sz="1400" b="1" i="0" u="none" strike="noStrike" cap="none" dirty="0">
+                <a:solidFill>
+                  <a:schemeClr val="lt1"/>
+                </a:solidFill>
+                <a:latin typeface="メイリオ"/>
+                <a:ea typeface="メイリオ"/>
+                <a:cs typeface="メイリオ"/>
+                <a:sym typeface="Meiryo"/>
+              </a:rPr>
+              <a:t>3</a:t>
+            </a:r>
+            <a:r>
+              <a:rPr lang="ja-JP" altLang="en-US" sz="1400" b="1" i="0" u="none" strike="noStrike" cap="none" dirty="0">
+                <a:solidFill>
+                  <a:schemeClr val="lt1"/>
+                </a:solidFill>
+                <a:latin typeface="メイリオ"/>
+                <a:ea typeface="メイリオ"/>
+                <a:cs typeface="メイリオ"/>
+                <a:sym typeface="Meiryo"/>
+              </a:rPr>
+              <a:t>万円～</a:t>
+            </a:r>
+            <a:endParaRPr lang="en-US" altLang="ja-JP" sz="1400" b="1" i="0" u="none" strike="noStrike" cap="none" dirty="0">
+              <a:solidFill>
+                <a:schemeClr val="lt1"/>
+              </a:solidFill>
+              <a:latin typeface="メイリオ"/>
+              <a:ea typeface="メイリオ"/>
+              <a:cs typeface="メイリオ"/>
+              <a:sym typeface="Meiryo"/>
+            </a:endParaRPr>
+          </a:p>
+          <a:p>
+            <a:pPr marL="0" marR="0" lvl="0" indent="0" algn="ctr" rtl="0">
+              <a:lnSpc>
+                <a:spcPct val="100000"/>
+              </a:lnSpc>
+              <a:spcBef>
+                <a:spcPts val="0"/>
+              </a:spcBef>
+              <a:spcAft>
+                <a:spcPts val="0"/>
+              </a:spcAft>
+              <a:buClr>
+                <a:srgbClr val="000000"/>
+              </a:buClr>
+              <a:buSzPts val="1400"/>
+              <a:buFont typeface="Arial"/>
+              <a:buNone/>
+            </a:pPr>
+            <a:r>
+              <a:rPr lang="en-US" altLang="ja-JP" sz="1050" b="1" dirty="0">
+                <a:solidFill>
+                  <a:srgbClr val="FFFF00"/>
+                </a:solidFill>
+                <a:latin typeface="メイリオ"/>
+                <a:ea typeface="メイリオ"/>
+                <a:cs typeface="メイリオ"/>
+                <a:sym typeface="Meiryo"/>
+              </a:rPr>
+              <a:t>+</a:t>
+            </a:r>
+            <a:r>
+              <a:rPr lang="ja-JP" altLang="en-US" sz="1050" b="1" dirty="0">
+                <a:solidFill>
+                  <a:srgbClr val="FFFF00"/>
+                </a:solidFill>
+                <a:latin typeface="メイリオ"/>
+                <a:ea typeface="メイリオ"/>
+                <a:cs typeface="メイリオ"/>
+                <a:sym typeface="Meiryo"/>
+              </a:rPr>
+              <a:t>設定地点追加</a:t>
+            </a:r>
+            <a:endParaRPr sz="1050" b="1" i="0" u="none" strike="noStrike" cap="none" dirty="0">
+              <a:solidFill>
+                <a:srgbClr val="FFFF00"/>
+              </a:solidFill>
+              <a:latin typeface="メイリオ"/>
+              <a:ea typeface="メイリオ"/>
+              <a:cs typeface="メイリオ"/>
+              <a:sym typeface="Meiryo"/>
+            </a:endParaRPr>
+          </a:p>
+        </p:txBody>
+      </p:sp>
+      <p:cxnSp>
+        <p:nvCxnSpPr>
+          <p:cNvPr id="30" name="コネクタ: カギ線 29">
+            <a:extLst>
+              <a:ext uri="{FF2B5EF4-FFF2-40B4-BE49-F238E27FC236}">
+                <a16:creationId xmlns:a16="http://schemas.microsoft.com/office/drawing/2014/main" id="{D9706AF3-2C8D-6646-76C8-7802A4F734FC}"/>
+              </a:ext>
+            </a:extLst>
+          </p:cNvPr>
+          <p:cNvCxnSpPr>
+            <a:cxnSpLocks/>
+          </p:cNvCxnSpPr>
+          <p:nvPr/>
+        </p:nvCxnSpPr>
+        <p:spPr>
+          <a:xfrm rot="16200000" flipH="1">
+            <a:off x="3294819" y="3047336"/>
+            <a:ext cx="430977" cy="4596748"/>
+          </a:xfrm>
+          <a:prstGeom prst="bentConnector2">
+            <a:avLst/>
+          </a:prstGeom>
+          <a:ln w="15875">
+            <a:solidFill>
+              <a:srgbClr val="FF0000"/>
+            </a:solidFill>
+            <a:prstDash val="sysDot"/>
+            <a:tailEnd type="triangle"/>
+          </a:ln>
+        </p:spPr>
+        <p:style>
+          <a:lnRef idx="1">
+            <a:schemeClr val="accent1"/>
+          </a:lnRef>
+          <a:fillRef idx="0">
+            <a:schemeClr val="accent1"/>
+          </a:fillRef>
+          <a:effectRef idx="0">
+            <a:schemeClr val="accent1"/>
+          </a:effectRef>
+          <a:fontRef idx="minor">
+            <a:schemeClr val="tx1"/>
+          </a:fontRef>
+        </p:style>
+      </p:cxnSp>
+      <p:sp>
+        <p:nvSpPr>
+          <p:cNvPr id="50" name="テキスト ボックス 49">
+            <a:extLst>
+              <a:ext uri="{FF2B5EF4-FFF2-40B4-BE49-F238E27FC236}">
+                <a16:creationId xmlns:a16="http://schemas.microsoft.com/office/drawing/2014/main" id="{97C92C6B-4F06-7ED3-0627-D0C168299913}"/>
+              </a:ext>
+            </a:extLst>
+          </p:cNvPr>
+          <p:cNvSpPr txBox="1"/>
+          <p:nvPr/>
+        </p:nvSpPr>
+        <p:spPr>
+          <a:xfrm>
+            <a:off x="115187" y="5639542"/>
+            <a:ext cx="5785781" cy="461665"/>
+          </a:xfrm>
+          <a:prstGeom prst="rect">
+            <a:avLst/>
+          </a:prstGeom>
+          <a:solidFill>
+            <a:schemeClr val="bg1">
+              <a:alpha val="62000"/>
+            </a:schemeClr>
+          </a:solidFill>
+        </p:spPr>
+        <p:txBody>
+          <a:bodyPr wrap="square">
+            <a:spAutoFit/>
+          </a:bodyPr>
+          <a:lstStyle/>
+          <a:p>
+            <a:pPr algn="ctr"/>
+            <a:r>
+              <a:rPr lang="ja-JP" altLang="ja-JP" sz="1200" dirty="0">
+                <a:latin typeface="メイリオ" panose="020B0604030504040204" pitchFamily="50" charset="-128"/>
+                <a:ea typeface="メイリオ" panose="020B0604030504040204" pitchFamily="50" charset="-128"/>
+                <a:cs typeface="メイリオ"/>
+              </a:rPr>
+              <a:t>高開封率のLINEに誘導</a:t>
+            </a:r>
+            <a:r>
+              <a:rPr lang="ja-JP" altLang="en-US" sz="1200" dirty="0">
+                <a:latin typeface="メイリオ" panose="020B0604030504040204" pitchFamily="50" charset="-128"/>
+                <a:ea typeface="メイリオ" panose="020B0604030504040204" pitchFamily="50" charset="-128"/>
+                <a:cs typeface="メイリオ"/>
+              </a:rPr>
+              <a:t>して</a:t>
+            </a:r>
+            <a:r>
+              <a:rPr lang="ja-JP" altLang="ja-JP" sz="1200" dirty="0">
+                <a:latin typeface="メイリオ" panose="020B0604030504040204" pitchFamily="50" charset="-128"/>
+                <a:ea typeface="メイリオ" panose="020B0604030504040204" pitchFamily="50" charset="-128"/>
+                <a:cs typeface="メイリオ"/>
+              </a:rPr>
+              <a:t>反響→実売上への引上げ率、リピート率改善。</a:t>
+            </a:r>
+            <a:endParaRPr lang="en-US" altLang="ja-JP" sz="1200" dirty="0">
+              <a:latin typeface="メイリオ" panose="020B0604030504040204" pitchFamily="50" charset="-128"/>
+              <a:ea typeface="メイリオ" panose="020B0604030504040204" pitchFamily="50" charset="-128"/>
+              <a:cs typeface="メイリオ"/>
+            </a:endParaRPr>
+          </a:p>
+          <a:p>
+            <a:pPr algn="ctr"/>
+            <a:r>
+              <a:rPr lang="ja-JP" altLang="ja-JP" sz="1200" dirty="0">
+                <a:latin typeface="メイリオ" panose="020B0604030504040204" pitchFamily="50" charset="-128"/>
+                <a:ea typeface="メイリオ" panose="020B0604030504040204" pitchFamily="50" charset="-128"/>
+                <a:cs typeface="メイリオ"/>
+              </a:rPr>
+              <a:t> </a:t>
+            </a:r>
+            <a:r>
+              <a:rPr lang="ja-JP" altLang="ja-JP" sz="1200" b="1" dirty="0">
+                <a:solidFill>
+                  <a:srgbClr val="002060"/>
+                </a:solidFill>
+                <a:latin typeface="メイリオ" panose="020B0604030504040204" pitchFamily="50" charset="-128"/>
+                <a:ea typeface="メイリオ" panose="020B0604030504040204" pitchFamily="50" charset="-128"/>
+                <a:cs typeface="メイリオ"/>
+              </a:rPr>
+              <a:t>弊社運用の美容クリニック様では、予約後来院率にて40-50%程度の改善を実現</a:t>
+            </a:r>
+            <a:r>
+              <a:rPr lang="ja-JP" altLang="ja-JP" sz="1200" dirty="0">
+                <a:latin typeface="メイリオ" panose="020B0604030504040204" pitchFamily="50" charset="-128"/>
+                <a:ea typeface="メイリオ" panose="020B0604030504040204" pitchFamily="50" charset="-128"/>
+                <a:cs typeface="メイリオ"/>
+              </a:rPr>
+              <a:t>。</a:t>
+            </a:r>
+            <a:endParaRPr lang="ja-JP" altLang="en-US" sz="1200" dirty="0">
+              <a:latin typeface="メイリオ" panose="020B0604030504040204" pitchFamily="50" charset="-128"/>
+              <a:ea typeface="メイリオ" panose="020B0604030504040204" pitchFamily="50" charset="-128"/>
               <a:cs typeface="メイリオ"/>
             </a:endParaRPr>
           </a:p>

--- a/202610_株式会社すなおコンサルティング御中_LINE公式アカウント運用のご提案.pptx
+++ b/202610_株式会社すなおコンサルティング御中_LINE公式アカウント運用のご提案.pptx
@@ -28,6 +28,8 @@
     <p:sldId id="2983" r:id="rId83"/>
     <p:sldId id="2984" r:id="rId84"/>
     <p:sldId id="2985" r:id="rId85"/>
+    <p:sldId id="2986" r:id="rId86"/>
+    <p:sldId id="2987" r:id="rId87"/>
     <p:sldId id="612" r:id="rId64"/>
   </p:sldIdLst>
   <p:sldSz cx="9906000" cy="6858000" type="A4"/>
@@ -4611,7 +4613,7 @@
                 <a:cs typeface="メイリオ"/>
                 <a:sym typeface="Meiryo"/>
               </a:rPr>
-              <a:t>現状と課題</a:t>
+              <a:t>保険営業の方の環境</a:t>
             </a:r>
           </a:p>
         </p:txBody>
@@ -4664,7 +4666,7 @@
                 <a:ea typeface="メイリオ" panose="020B0604030504040204" pitchFamily="50" charset="-128"/>
                 <a:cs typeface="メイリオ"/>
               </a:rPr>
-              <a:t>現状</a:t>
+              <a:t>市場環境</a:t>
             </a:r>
           </a:p>
         </p:txBody>
@@ -4701,7 +4703,7 @@
                 <a:cs typeface="メイリオ"/>
                 <a:sym typeface="Meiryo"/>
               </a:rPr>
-              <a:t>イベントの後、離れた方・未入会の方とのつながりが切れる</a:t>
+              <a:t>保険の加入は今も営業職員が中心。一方で、お客様と会う回数は減っている</a:t>
             </a:r>
             <a:endParaRPr lang="en-US" altLang="ja-JP" sz="1600" b="1" dirty="0">
               <a:latin typeface="メイリオ" panose="020B0604030504040204" pitchFamily="50" charset="-128"/>
@@ -4714,47 +4716,44 @@
       </p:sp>
       <p:sp>
         <p:nvSpPr>
-          <p:cNvPr id="5" name="流れ1"/>
+          <p:cNvPr id="5" name="見出し 生命保険の営業職員数（各年度末・名）"/>
           <p:cNvSpPr/>
           <p:nvPr/>
         </p:nvSpPr>
         <p:spPr>
           <a:xfrm>
-            <a:off x="502920" y="1691640"/>
-            <a:ext cx="1530705" cy="914400"/>
+            <a:off x="502920" y="1600200"/>
+            <a:ext cx="4343400" cy="411480"/>
           </a:xfrm>
           <a:prstGeom prst="rect">
             <a:avLst/>
           </a:prstGeom>
           <a:solidFill>
-            <a:srgbClr val="DCE6F2"/>
+            <a:srgbClr val="002060"/>
           </a:solidFill>
           <a:ln>
             <a:noFill/>
           </a:ln>
         </p:spPr>
         <p:txBody>
-          <a:bodyPr wrap="square" lIns="54864" tIns="36576" rIns="54864" bIns="36576" rtlCol="0" anchor="ctr">
+          <a:bodyPr wrap="square" lIns="73152" tIns="36576" rIns="73152" bIns="36576" rtlCol="0" anchor="ctr">
             <a:noAutofit/>
           </a:bodyPr>
           <a:lstStyle/>
           <a:p>
             <a:pPr algn="ctr">
-              <a:lnSpc>
-                <a:spcPct val="115000"/>
-              </a:lnSpc>
               <a:buNone/>
             </a:pPr>
             <a:r>
-              <a:rPr lang="ja-JP" altLang="en-US" sz="1500" b="1" dirty="0">
-                <a:solidFill>
-                  <a:srgbClr val="002060"/>
+              <a:rPr lang="ja-JP" altLang="en-US" sz="1400" b="1" dirty="0">
+                <a:solidFill>
+                  <a:srgbClr val="FFFFFF"/>
                 </a:solidFill>
                 <a:latin typeface="メイリオ" panose="020B0604030504040204" pitchFamily="50" charset="-128"/>
                 <a:ea typeface="メイリオ" panose="020B0604030504040204" pitchFamily="50" charset="-128"/>
                 <a:cs typeface="メイリオ"/>
               </a:rPr>
-              <a:t>広告</a:t>
+              <a:t>生命保険の営業職員数（各年度末・名）</a:t>
             </a:r>
             <a:endParaRPr lang="ja-JP" altLang="en-US" sz="1200" dirty="0">
               <a:latin typeface="メイリオ"/>
@@ -4766,14 +4765,712 @@
       </p:sp>
       <p:sp>
         <p:nvSpPr>
-          <p:cNvPr id="6" name="矢印"/>
+          <p:cNvPr id="6" name="棒 2020"/>
           <p:cNvSpPr/>
           <p:nvPr/>
         </p:nvSpPr>
         <p:spPr>
           <a:xfrm>
-            <a:off x="2033625" y="1691640"/>
-            <a:ext cx="310896" cy="914400"/>
+            <a:off x="653796" y="2662249"/>
+            <a:ext cx="566928" cy="1864030"/>
+          </a:xfrm>
+          <a:prstGeom prst="rect">
+            <a:avLst/>
+          </a:prstGeom>
+          <a:solidFill>
+            <a:srgbClr val="8E9BC4"/>
+          </a:solidFill>
+          <a:ln>
+            <a:noFill/>
+          </a:ln>
+        </p:spPr>
+        <p:txBody>
+          <a:bodyPr wrap="square" lIns="73152" tIns="36576" rIns="73152" bIns="36576" rtlCol="0" anchor="ctr">
+            <a:noAutofit/>
+          </a:bodyPr>
+          <a:lstStyle/>
+          <a:p>
+            <a:pPr algn="l">
+              <a:buNone/>
+            </a:pPr>
+            <a:endParaRPr lang="ja-JP" altLang="en-US" sz="1200" dirty="0">
+              <a:latin typeface="メイリオ"/>
+              <a:ea typeface="メイリオ"/>
+              <a:cs typeface="メイリオ"/>
+            </a:endParaRPr>
+          </a:p>
+        </p:txBody>
+      </p:sp>
+      <p:sp>
+        <p:nvSpPr>
+          <p:cNvPr id="7" name="値 2020"/>
+          <p:cNvSpPr/>
+          <p:nvPr/>
+        </p:nvSpPr>
+        <p:spPr>
+          <a:xfrm>
+            <a:off x="502920" y="2369641"/>
+            <a:ext cx="868680" cy="274320"/>
+          </a:xfrm>
+          <a:prstGeom prst="rect">
+            <a:avLst/>
+          </a:prstGeom>
+          <a:noFill/>
+          <a:ln>
+            <a:noFill/>
+          </a:ln>
+        </p:spPr>
+        <p:txBody>
+          <a:bodyPr wrap="square" lIns="0" tIns="0" rIns="0" bIns="0" rtlCol="0" anchor="b">
+            <a:noAutofit/>
+          </a:bodyPr>
+          <a:lstStyle/>
+          <a:p>
+            <a:pPr algn="ctr">
+              <a:buNone/>
+            </a:pPr>
+            <a:r>
+              <a:rPr lang="ja-JP" altLang="en-US" sz="1200" b="1" dirty="0">
+                <a:solidFill>
+                  <a:srgbClr val="002060"/>
+                </a:solidFill>
+                <a:latin typeface="メイリオ" panose="020B0604030504040204" pitchFamily="50" charset="-128"/>
+                <a:ea typeface="メイリオ" panose="020B0604030504040204" pitchFamily="50" charset="-128"/>
+                <a:cs typeface="メイリオ"/>
+              </a:rPr>
+              <a:t>248,601</a:t>
+            </a:r>
+            <a:endParaRPr lang="ja-JP" altLang="en-US" sz="1200" dirty="0">
+              <a:latin typeface="メイリオ"/>
+              <a:ea typeface="メイリオ"/>
+              <a:cs typeface="メイリオ"/>
+            </a:endParaRPr>
+          </a:p>
+        </p:txBody>
+      </p:sp>
+      <p:sp>
+        <p:nvSpPr>
+          <p:cNvPr id="8" name="年度 2020"/>
+          <p:cNvSpPr/>
+          <p:nvPr/>
+        </p:nvSpPr>
+        <p:spPr>
+          <a:xfrm>
+            <a:off x="502920" y="4572000"/>
+            <a:ext cx="868680" cy="274320"/>
+          </a:xfrm>
+          <a:prstGeom prst="rect">
+            <a:avLst/>
+          </a:prstGeom>
+          <a:noFill/>
+          <a:ln>
+            <a:noFill/>
+          </a:ln>
+        </p:spPr>
+        <p:txBody>
+          <a:bodyPr wrap="square" lIns="0" tIns="0" rIns="0" bIns="0" rtlCol="0" anchor="t">
+            <a:noAutofit/>
+          </a:bodyPr>
+          <a:lstStyle/>
+          <a:p>
+            <a:pPr algn="ctr">
+              <a:buNone/>
+            </a:pPr>
+            <a:r>
+              <a:rPr lang="ja-JP" altLang="en-US" sz="1200" b="0" dirty="0">
+                <a:solidFill>
+                  <a:srgbClr val="333333"/>
+                </a:solidFill>
+                <a:latin typeface="メイリオ" panose="020B0604030504040204" pitchFamily="50" charset="-128"/>
+                <a:ea typeface="メイリオ" panose="020B0604030504040204" pitchFamily="50" charset="-128"/>
+                <a:cs typeface="メイリオ"/>
+              </a:rPr>
+              <a:t>2020年度</a:t>
+            </a:r>
+            <a:endParaRPr lang="ja-JP" altLang="en-US" sz="1200" dirty="0">
+              <a:latin typeface="メイリオ"/>
+              <a:ea typeface="メイリオ"/>
+              <a:cs typeface="メイリオ"/>
+            </a:endParaRPr>
+          </a:p>
+        </p:txBody>
+      </p:sp>
+      <p:sp>
+        <p:nvSpPr>
+          <p:cNvPr id="9" name="棒 2021"/>
+          <p:cNvSpPr/>
+          <p:nvPr/>
+        </p:nvSpPr>
+        <p:spPr>
+          <a:xfrm>
+            <a:off x="1522476" y="2704643"/>
+            <a:ext cx="566928" cy="1821636"/>
+          </a:xfrm>
+          <a:prstGeom prst="rect">
+            <a:avLst/>
+          </a:prstGeom>
+          <a:solidFill>
+            <a:srgbClr val="8E9BC4"/>
+          </a:solidFill>
+          <a:ln>
+            <a:noFill/>
+          </a:ln>
+        </p:spPr>
+        <p:txBody>
+          <a:bodyPr wrap="square" lIns="73152" tIns="36576" rIns="73152" bIns="36576" rtlCol="0" anchor="ctr">
+            <a:noAutofit/>
+          </a:bodyPr>
+          <a:lstStyle/>
+          <a:p>
+            <a:pPr algn="l">
+              <a:buNone/>
+            </a:pPr>
+            <a:endParaRPr lang="ja-JP" altLang="en-US" sz="1200" dirty="0">
+              <a:latin typeface="メイリオ"/>
+              <a:ea typeface="メイリオ"/>
+              <a:cs typeface="メイリオ"/>
+            </a:endParaRPr>
+          </a:p>
+        </p:txBody>
+      </p:sp>
+      <p:sp>
+        <p:nvSpPr>
+          <p:cNvPr id="10" name="値 2021"/>
+          <p:cNvSpPr/>
+          <p:nvPr/>
+        </p:nvSpPr>
+        <p:spPr>
+          <a:xfrm>
+            <a:off x="1371600" y="2412035"/>
+            <a:ext cx="868680" cy="274320"/>
+          </a:xfrm>
+          <a:prstGeom prst="rect">
+            <a:avLst/>
+          </a:prstGeom>
+          <a:noFill/>
+          <a:ln>
+            <a:noFill/>
+          </a:ln>
+        </p:spPr>
+        <p:txBody>
+          <a:bodyPr wrap="square" lIns="0" tIns="0" rIns="0" bIns="0" rtlCol="0" anchor="b">
+            <a:noAutofit/>
+          </a:bodyPr>
+          <a:lstStyle/>
+          <a:p>
+            <a:pPr algn="ctr">
+              <a:buNone/>
+            </a:pPr>
+            <a:r>
+              <a:rPr lang="ja-JP" altLang="en-US" sz="1200" b="1" dirty="0">
+                <a:solidFill>
+                  <a:srgbClr val="002060"/>
+                </a:solidFill>
+                <a:latin typeface="メイリオ" panose="020B0604030504040204" pitchFamily="50" charset="-128"/>
+                <a:ea typeface="メイリオ" panose="020B0604030504040204" pitchFamily="50" charset="-128"/>
+                <a:cs typeface="メイリオ"/>
+              </a:rPr>
+              <a:t>242,947</a:t>
+            </a:r>
+            <a:endParaRPr lang="ja-JP" altLang="en-US" sz="1200" dirty="0">
+              <a:latin typeface="メイリオ"/>
+              <a:ea typeface="メイリオ"/>
+              <a:cs typeface="メイリオ"/>
+            </a:endParaRPr>
+          </a:p>
+        </p:txBody>
+      </p:sp>
+      <p:sp>
+        <p:nvSpPr>
+          <p:cNvPr id="11" name="年度 2021"/>
+          <p:cNvSpPr/>
+          <p:nvPr/>
+        </p:nvSpPr>
+        <p:spPr>
+          <a:xfrm>
+            <a:off x="1371600" y="4572000"/>
+            <a:ext cx="868680" cy="274320"/>
+          </a:xfrm>
+          <a:prstGeom prst="rect">
+            <a:avLst/>
+          </a:prstGeom>
+          <a:noFill/>
+          <a:ln>
+            <a:noFill/>
+          </a:ln>
+        </p:spPr>
+        <p:txBody>
+          <a:bodyPr wrap="square" lIns="0" tIns="0" rIns="0" bIns="0" rtlCol="0" anchor="t">
+            <a:noAutofit/>
+          </a:bodyPr>
+          <a:lstStyle/>
+          <a:p>
+            <a:pPr algn="ctr">
+              <a:buNone/>
+            </a:pPr>
+            <a:r>
+              <a:rPr lang="ja-JP" altLang="en-US" sz="1200" b="0" dirty="0">
+                <a:solidFill>
+                  <a:srgbClr val="333333"/>
+                </a:solidFill>
+                <a:latin typeface="メイリオ" panose="020B0604030504040204" pitchFamily="50" charset="-128"/>
+                <a:ea typeface="メイリオ" panose="020B0604030504040204" pitchFamily="50" charset="-128"/>
+                <a:cs typeface="メイリオ"/>
+              </a:rPr>
+              <a:t>2021年度</a:t>
+            </a:r>
+            <a:endParaRPr lang="ja-JP" altLang="en-US" sz="1200" dirty="0">
+              <a:latin typeface="メイリオ"/>
+              <a:ea typeface="メイリオ"/>
+              <a:cs typeface="メイリオ"/>
+            </a:endParaRPr>
+          </a:p>
+        </p:txBody>
+      </p:sp>
+      <p:sp>
+        <p:nvSpPr>
+          <p:cNvPr id="12" name="棒 2022"/>
+          <p:cNvSpPr/>
+          <p:nvPr/>
+        </p:nvSpPr>
+        <p:spPr>
+          <a:xfrm>
+            <a:off x="2391156" y="2673646"/>
+            <a:ext cx="566928" cy="1852633"/>
+          </a:xfrm>
+          <a:prstGeom prst="rect">
+            <a:avLst/>
+          </a:prstGeom>
+          <a:solidFill>
+            <a:srgbClr val="8E9BC4"/>
+          </a:solidFill>
+          <a:ln>
+            <a:noFill/>
+          </a:ln>
+        </p:spPr>
+        <p:txBody>
+          <a:bodyPr wrap="square" lIns="73152" tIns="36576" rIns="73152" bIns="36576" rtlCol="0" anchor="ctr">
+            <a:noAutofit/>
+          </a:bodyPr>
+          <a:lstStyle/>
+          <a:p>
+            <a:pPr algn="l">
+              <a:buNone/>
+            </a:pPr>
+            <a:endParaRPr lang="ja-JP" altLang="en-US" sz="1200" dirty="0">
+              <a:latin typeface="メイリオ"/>
+              <a:ea typeface="メイリオ"/>
+              <a:cs typeface="メイリオ"/>
+            </a:endParaRPr>
+          </a:p>
+        </p:txBody>
+      </p:sp>
+      <p:sp>
+        <p:nvSpPr>
+          <p:cNvPr id="13" name="値 2022"/>
+          <p:cNvSpPr/>
+          <p:nvPr/>
+        </p:nvSpPr>
+        <p:spPr>
+          <a:xfrm>
+            <a:off x="2240280" y="2381038"/>
+            <a:ext cx="868680" cy="274320"/>
+          </a:xfrm>
+          <a:prstGeom prst="rect">
+            <a:avLst/>
+          </a:prstGeom>
+          <a:noFill/>
+          <a:ln>
+            <a:noFill/>
+          </a:ln>
+        </p:spPr>
+        <p:txBody>
+          <a:bodyPr wrap="square" lIns="0" tIns="0" rIns="0" bIns="0" rtlCol="0" anchor="b">
+            <a:noAutofit/>
+          </a:bodyPr>
+          <a:lstStyle/>
+          <a:p>
+            <a:pPr algn="ctr">
+              <a:buNone/>
+            </a:pPr>
+            <a:r>
+              <a:rPr lang="ja-JP" altLang="en-US" sz="1200" b="1" dirty="0">
+                <a:solidFill>
+                  <a:srgbClr val="002060"/>
+                </a:solidFill>
+                <a:latin typeface="メイリオ" panose="020B0604030504040204" pitchFamily="50" charset="-128"/>
+                <a:ea typeface="メイリオ" panose="020B0604030504040204" pitchFamily="50" charset="-128"/>
+                <a:cs typeface="メイリオ"/>
+              </a:rPr>
+              <a:t>247,081</a:t>
+            </a:r>
+            <a:endParaRPr lang="ja-JP" altLang="en-US" sz="1200" dirty="0">
+              <a:latin typeface="メイリオ"/>
+              <a:ea typeface="メイリオ"/>
+              <a:cs typeface="メイリオ"/>
+            </a:endParaRPr>
+          </a:p>
+        </p:txBody>
+      </p:sp>
+      <p:sp>
+        <p:nvSpPr>
+          <p:cNvPr id="14" name="年度 2022"/>
+          <p:cNvSpPr/>
+          <p:nvPr/>
+        </p:nvSpPr>
+        <p:spPr>
+          <a:xfrm>
+            <a:off x="2240280" y="4572000"/>
+            <a:ext cx="868680" cy="274320"/>
+          </a:xfrm>
+          <a:prstGeom prst="rect">
+            <a:avLst/>
+          </a:prstGeom>
+          <a:noFill/>
+          <a:ln>
+            <a:noFill/>
+          </a:ln>
+        </p:spPr>
+        <p:txBody>
+          <a:bodyPr wrap="square" lIns="0" tIns="0" rIns="0" bIns="0" rtlCol="0" anchor="t">
+            <a:noAutofit/>
+          </a:bodyPr>
+          <a:lstStyle/>
+          <a:p>
+            <a:pPr algn="ctr">
+              <a:buNone/>
+            </a:pPr>
+            <a:r>
+              <a:rPr lang="ja-JP" altLang="en-US" sz="1200" b="0" dirty="0">
+                <a:solidFill>
+                  <a:srgbClr val="333333"/>
+                </a:solidFill>
+                <a:latin typeface="メイリオ" panose="020B0604030504040204" pitchFamily="50" charset="-128"/>
+                <a:ea typeface="メイリオ" panose="020B0604030504040204" pitchFamily="50" charset="-128"/>
+                <a:cs typeface="メイリオ"/>
+              </a:rPr>
+              <a:t>2022年度</a:t>
+            </a:r>
+            <a:endParaRPr lang="ja-JP" altLang="en-US" sz="1200" dirty="0">
+              <a:latin typeface="メイリオ"/>
+              <a:ea typeface="メイリオ"/>
+              <a:cs typeface="メイリオ"/>
+            </a:endParaRPr>
+          </a:p>
+        </p:txBody>
+      </p:sp>
+      <p:sp>
+        <p:nvSpPr>
+          <p:cNvPr id="15" name="棒 2023"/>
+          <p:cNvSpPr/>
+          <p:nvPr/>
+        </p:nvSpPr>
+        <p:spPr>
+          <a:xfrm>
+            <a:off x="3259835" y="2719970"/>
+            <a:ext cx="566928" cy="1806309"/>
+          </a:xfrm>
+          <a:prstGeom prst="rect">
+            <a:avLst/>
+          </a:prstGeom>
+          <a:solidFill>
+            <a:srgbClr val="8E9BC4"/>
+          </a:solidFill>
+          <a:ln>
+            <a:noFill/>
+          </a:ln>
+        </p:spPr>
+        <p:txBody>
+          <a:bodyPr wrap="square" lIns="73152" tIns="36576" rIns="73152" bIns="36576" rtlCol="0" anchor="ctr">
+            <a:noAutofit/>
+          </a:bodyPr>
+          <a:lstStyle/>
+          <a:p>
+            <a:pPr algn="l">
+              <a:buNone/>
+            </a:pPr>
+            <a:endParaRPr lang="ja-JP" altLang="en-US" sz="1200" dirty="0">
+              <a:latin typeface="メイリオ"/>
+              <a:ea typeface="メイリオ"/>
+              <a:cs typeface="メイリオ"/>
+            </a:endParaRPr>
+          </a:p>
+        </p:txBody>
+      </p:sp>
+      <p:sp>
+        <p:nvSpPr>
+          <p:cNvPr id="16" name="値 2023"/>
+          <p:cNvSpPr/>
+          <p:nvPr/>
+        </p:nvSpPr>
+        <p:spPr>
+          <a:xfrm>
+            <a:off x="3108959" y="2427362"/>
+            <a:ext cx="868680" cy="274320"/>
+          </a:xfrm>
+          <a:prstGeom prst="rect">
+            <a:avLst/>
+          </a:prstGeom>
+          <a:noFill/>
+          <a:ln>
+            <a:noFill/>
+          </a:ln>
+        </p:spPr>
+        <p:txBody>
+          <a:bodyPr wrap="square" lIns="0" tIns="0" rIns="0" bIns="0" rtlCol="0" anchor="b">
+            <a:noAutofit/>
+          </a:bodyPr>
+          <a:lstStyle/>
+          <a:p>
+            <a:pPr algn="ctr">
+              <a:buNone/>
+            </a:pPr>
+            <a:r>
+              <a:rPr lang="ja-JP" altLang="en-US" sz="1200" b="1" dirty="0">
+                <a:solidFill>
+                  <a:srgbClr val="002060"/>
+                </a:solidFill>
+                <a:latin typeface="メイリオ" panose="020B0604030504040204" pitchFamily="50" charset="-128"/>
+                <a:ea typeface="メイリオ" panose="020B0604030504040204" pitchFamily="50" charset="-128"/>
+                <a:cs typeface="メイリオ"/>
+              </a:rPr>
+              <a:t>240,903</a:t>
+            </a:r>
+            <a:endParaRPr lang="ja-JP" altLang="en-US" sz="1200" dirty="0">
+              <a:latin typeface="メイリオ"/>
+              <a:ea typeface="メイリオ"/>
+              <a:cs typeface="メイリオ"/>
+            </a:endParaRPr>
+          </a:p>
+        </p:txBody>
+      </p:sp>
+      <p:sp>
+        <p:nvSpPr>
+          <p:cNvPr id="17" name="年度 2023"/>
+          <p:cNvSpPr/>
+          <p:nvPr/>
+        </p:nvSpPr>
+        <p:spPr>
+          <a:xfrm>
+            <a:off x="3108959" y="4572000"/>
+            <a:ext cx="868680" cy="274320"/>
+          </a:xfrm>
+          <a:prstGeom prst="rect">
+            <a:avLst/>
+          </a:prstGeom>
+          <a:noFill/>
+          <a:ln>
+            <a:noFill/>
+          </a:ln>
+        </p:spPr>
+        <p:txBody>
+          <a:bodyPr wrap="square" lIns="0" tIns="0" rIns="0" bIns="0" rtlCol="0" anchor="t">
+            <a:noAutofit/>
+          </a:bodyPr>
+          <a:lstStyle/>
+          <a:p>
+            <a:pPr algn="ctr">
+              <a:buNone/>
+            </a:pPr>
+            <a:r>
+              <a:rPr lang="ja-JP" altLang="en-US" sz="1200" b="0" dirty="0">
+                <a:solidFill>
+                  <a:srgbClr val="333333"/>
+                </a:solidFill>
+                <a:latin typeface="メイリオ" panose="020B0604030504040204" pitchFamily="50" charset="-128"/>
+                <a:ea typeface="メイリオ" panose="020B0604030504040204" pitchFamily="50" charset="-128"/>
+                <a:cs typeface="メイリオ"/>
+              </a:rPr>
+              <a:t>2023年度</a:t>
+            </a:r>
+            <a:endParaRPr lang="ja-JP" altLang="en-US" sz="1200" dirty="0">
+              <a:latin typeface="メイリオ"/>
+              <a:ea typeface="メイリオ"/>
+              <a:cs typeface="メイリオ"/>
+            </a:endParaRPr>
+          </a:p>
+        </p:txBody>
+      </p:sp>
+      <p:sp>
+        <p:nvSpPr>
+          <p:cNvPr id="18" name="棒 2024"/>
+          <p:cNvSpPr/>
+          <p:nvPr/>
+        </p:nvSpPr>
+        <p:spPr>
+          <a:xfrm>
+            <a:off x="4128515" y="2715441"/>
+            <a:ext cx="566928" cy="1810838"/>
+          </a:xfrm>
+          <a:prstGeom prst="rect">
+            <a:avLst/>
+          </a:prstGeom>
+          <a:solidFill>
+            <a:srgbClr val="002060"/>
+          </a:solidFill>
+          <a:ln>
+            <a:noFill/>
+          </a:ln>
+        </p:spPr>
+        <p:txBody>
+          <a:bodyPr wrap="square" lIns="73152" tIns="36576" rIns="73152" bIns="36576" rtlCol="0" anchor="ctr">
+            <a:noAutofit/>
+          </a:bodyPr>
+          <a:lstStyle/>
+          <a:p>
+            <a:pPr algn="l">
+              <a:buNone/>
+            </a:pPr>
+            <a:endParaRPr lang="ja-JP" altLang="en-US" sz="1200" dirty="0">
+              <a:latin typeface="メイリオ"/>
+              <a:ea typeface="メイリオ"/>
+              <a:cs typeface="メイリオ"/>
+            </a:endParaRPr>
+          </a:p>
+        </p:txBody>
+      </p:sp>
+      <p:sp>
+        <p:nvSpPr>
+          <p:cNvPr id="19" name="値 2024"/>
+          <p:cNvSpPr/>
+          <p:nvPr/>
+        </p:nvSpPr>
+        <p:spPr>
+          <a:xfrm>
+            <a:off x="3977639" y="2422833"/>
+            <a:ext cx="868680" cy="274320"/>
+          </a:xfrm>
+          <a:prstGeom prst="rect">
+            <a:avLst/>
+          </a:prstGeom>
+          <a:noFill/>
+          <a:ln>
+            <a:noFill/>
+          </a:ln>
+        </p:spPr>
+        <p:txBody>
+          <a:bodyPr wrap="square" lIns="0" tIns="0" rIns="0" bIns="0" rtlCol="0" anchor="b">
+            <a:noAutofit/>
+          </a:bodyPr>
+          <a:lstStyle/>
+          <a:p>
+            <a:pPr algn="ctr">
+              <a:buNone/>
+            </a:pPr>
+            <a:r>
+              <a:rPr lang="ja-JP" altLang="en-US" sz="1200" b="1" dirty="0">
+                <a:solidFill>
+                  <a:srgbClr val="002060"/>
+                </a:solidFill>
+                <a:latin typeface="メイリオ" panose="020B0604030504040204" pitchFamily="50" charset="-128"/>
+                <a:ea typeface="メイリオ" panose="020B0604030504040204" pitchFamily="50" charset="-128"/>
+                <a:cs typeface="メイリオ"/>
+              </a:rPr>
+              <a:t>241,507</a:t>
+            </a:r>
+            <a:endParaRPr lang="ja-JP" altLang="en-US" sz="1200" dirty="0">
+              <a:latin typeface="メイリオ"/>
+              <a:ea typeface="メイリオ"/>
+              <a:cs typeface="メイリオ"/>
+            </a:endParaRPr>
+          </a:p>
+        </p:txBody>
+      </p:sp>
+      <p:sp>
+        <p:nvSpPr>
+          <p:cNvPr id="20" name="年度 2024"/>
+          <p:cNvSpPr/>
+          <p:nvPr/>
+        </p:nvSpPr>
+        <p:spPr>
+          <a:xfrm>
+            <a:off x="3977639" y="4572000"/>
+            <a:ext cx="868680" cy="274320"/>
+          </a:xfrm>
+          <a:prstGeom prst="rect">
+            <a:avLst/>
+          </a:prstGeom>
+          <a:noFill/>
+          <a:ln>
+            <a:noFill/>
+          </a:ln>
+        </p:spPr>
+        <p:txBody>
+          <a:bodyPr wrap="square" lIns="0" tIns="0" rIns="0" bIns="0" rtlCol="0" anchor="t">
+            <a:noAutofit/>
+          </a:bodyPr>
+          <a:lstStyle/>
+          <a:p>
+            <a:pPr algn="ctr">
+              <a:buNone/>
+            </a:pPr>
+            <a:r>
+              <a:rPr lang="ja-JP" altLang="en-US" sz="1200" b="0" dirty="0">
+                <a:solidFill>
+                  <a:srgbClr val="333333"/>
+                </a:solidFill>
+                <a:latin typeface="メイリオ" panose="020B0604030504040204" pitchFamily="50" charset="-128"/>
+                <a:ea typeface="メイリオ" panose="020B0604030504040204" pitchFamily="50" charset="-128"/>
+                <a:cs typeface="メイリオ"/>
+              </a:rPr>
+              <a:t>2024年度</a:t>
+            </a:r>
+            <a:endParaRPr lang="ja-JP" altLang="en-US" sz="1200" dirty="0">
+              <a:latin typeface="メイリオ"/>
+              <a:ea typeface="メイリオ"/>
+              <a:cs typeface="メイリオ"/>
+            </a:endParaRPr>
+          </a:p>
+        </p:txBody>
+      </p:sp>
+      <p:sp>
+        <p:nvSpPr>
+          <p:cNvPr id="21" name="基線"/>
+          <p:cNvSpPr/>
+          <p:nvPr/>
+        </p:nvSpPr>
+        <p:spPr>
+          <a:xfrm>
+            <a:off x="502920" y="4526280"/>
+            <a:ext cx="4343400" cy="9144"/>
+          </a:xfrm>
+          <a:prstGeom prst="rect">
+            <a:avLst/>
+          </a:prstGeom>
+          <a:solidFill>
+            <a:srgbClr val="7F7F7F"/>
+          </a:solidFill>
+          <a:ln>
+            <a:noFill/>
+          </a:ln>
+        </p:spPr>
+        <p:txBody>
+          <a:bodyPr wrap="square" lIns="73152" tIns="36576" rIns="73152" bIns="36576" rtlCol="0" anchor="ctr">
+            <a:noAutofit/>
+          </a:bodyPr>
+          <a:lstStyle/>
+          <a:p>
+            <a:pPr algn="l">
+              <a:buNone/>
+            </a:pPr>
+            <a:endParaRPr lang="ja-JP" altLang="en-US" sz="1200" dirty="0">
+              <a:latin typeface="メイリオ"/>
+              <a:ea typeface="メイリオ"/>
+              <a:cs typeface="メイリオ"/>
+            </a:endParaRPr>
+          </a:p>
+        </p:txBody>
+      </p:sp>
+      <p:sp>
+        <p:nvSpPr>
+          <p:cNvPr id="22" name="棒の示唆"/>
+          <p:cNvSpPr/>
+          <p:nvPr/>
+        </p:nvSpPr>
+        <p:spPr>
+          <a:xfrm>
+            <a:off x="502920" y="4937760"/>
+            <a:ext cx="4343400" cy="365760"/>
           </a:xfrm>
           <a:prstGeom prst="rect">
             <a:avLst/>
@@ -4793,7 +5490,7 @@
               <a:buNone/>
             </a:pPr>
             <a:r>
-              <a:rPr lang="ja-JP" altLang="en-US" sz="1400" b="0" dirty="0">
+              <a:rPr lang="ja-JP" altLang="en-US" sz="1500" b="1" dirty="0">
                 <a:solidFill>
                   <a:srgbClr val="002060"/>
                 </a:solidFill>
@@ -4801,7 +5498,7 @@
                 <a:ea typeface="メイリオ" panose="020B0604030504040204" pitchFamily="50" charset="-128"/>
                 <a:cs typeface="メイリオ"/>
               </a:rPr>
-              <a:t>▶</a:t>
+              <a:t>約24万人で横ばい</a:t>
             </a:r>
             <a:endParaRPr lang="ja-JP" altLang="en-US" sz="1200" dirty="0">
               <a:latin typeface="メイリオ"/>
@@ -4813,47 +5510,44 @@
       </p:sp>
       <p:sp>
         <p:nvSpPr>
-          <p:cNvPr id="7" name="流れ2"/>
+          <p:cNvPr id="23" name="見出し 保険の加入経路"/>
           <p:cNvSpPr/>
           <p:nvPr/>
         </p:nvSpPr>
         <p:spPr>
           <a:xfrm>
-            <a:off x="2344521" y="1691640"/>
-            <a:ext cx="1530705" cy="914400"/>
+            <a:off x="5074920" y="1600200"/>
+            <a:ext cx="4325112" cy="411480"/>
           </a:xfrm>
           <a:prstGeom prst="rect">
             <a:avLst/>
           </a:prstGeom>
           <a:solidFill>
-            <a:srgbClr val="DCE6F2"/>
+            <a:srgbClr val="002060"/>
           </a:solidFill>
           <a:ln>
             <a:noFill/>
           </a:ln>
         </p:spPr>
         <p:txBody>
-          <a:bodyPr wrap="square" lIns="54864" tIns="36576" rIns="54864" bIns="36576" rtlCol="0" anchor="ctr">
+          <a:bodyPr wrap="square" lIns="73152" tIns="36576" rIns="73152" bIns="36576" rtlCol="0" anchor="ctr">
             <a:noAutofit/>
           </a:bodyPr>
           <a:lstStyle/>
           <a:p>
             <a:pPr algn="ctr">
-              <a:lnSpc>
-                <a:spcPct val="115000"/>
-              </a:lnSpc>
               <a:buNone/>
             </a:pPr>
             <a:r>
-              <a:rPr lang="ja-JP" altLang="en-US" sz="1500" b="1" dirty="0">
-                <a:solidFill>
-                  <a:srgbClr val="002060"/>
+              <a:rPr lang="ja-JP" altLang="en-US" sz="1400" b="1" dirty="0">
+                <a:solidFill>
+                  <a:srgbClr val="FFFFFF"/>
                 </a:solidFill>
                 <a:latin typeface="メイリオ" panose="020B0604030504040204" pitchFamily="50" charset="-128"/>
                 <a:ea typeface="メイリオ" panose="020B0604030504040204" pitchFamily="50" charset="-128"/>
                 <a:cs typeface="メイリオ"/>
               </a:rPr>
-              <a:t>LP</a:t>
+              <a:t>保険の加入経路</a:t>
             </a:r>
             <a:endParaRPr lang="ja-JP" altLang="en-US" sz="1200" dirty="0">
               <a:latin typeface="メイリオ"/>
@@ -4865,14 +5559,14 @@
       </p:sp>
       <p:sp>
         <p:nvSpPr>
-          <p:cNvPr id="8" name="矢印"/>
+          <p:cNvPr id="24" name="数字 56.7%"/>
           <p:cNvSpPr/>
           <p:nvPr/>
         </p:nvSpPr>
         <p:spPr>
           <a:xfrm>
-            <a:off x="3875227" y="1691640"/>
-            <a:ext cx="310896" cy="914400"/>
+            <a:off x="5074920" y="2057400"/>
+            <a:ext cx="1600200" cy="1143000"/>
           </a:xfrm>
           <a:prstGeom prst="rect">
             <a:avLst/>
@@ -4892,7 +5586,7 @@
               <a:buNone/>
             </a:pPr>
             <a:r>
-              <a:rPr lang="ja-JP" altLang="en-US" sz="1400" b="0" dirty="0">
+              <a:rPr lang="ja-JP" altLang="en-US" sz="3200" b="1" dirty="0">
                 <a:solidFill>
                   <a:srgbClr val="002060"/>
                 </a:solidFill>
@@ -4900,7 +5594,7 @@
                 <a:ea typeface="メイリオ" panose="020B0604030504040204" pitchFamily="50" charset="-128"/>
                 <a:cs typeface="メイリオ"/>
               </a:rPr>
-              <a:t>▶</a:t>
+              <a:t>56.7%</a:t>
             </a:r>
             <a:endParaRPr lang="ja-JP" altLang="en-US" sz="1200" dirty="0">
               <a:latin typeface="メイリオ"/>
@@ -4912,47 +5606,142 @@
       </p:sp>
       <p:sp>
         <p:nvSpPr>
-          <p:cNvPr id="9" name="流れ3"/>
+          <p:cNvPr id="25" name="説明 56.7%"/>
           <p:cNvSpPr/>
           <p:nvPr/>
         </p:nvSpPr>
         <p:spPr>
           <a:xfrm>
-            <a:off x="4186123" y="1691640"/>
-            <a:ext cx="1530705" cy="914400"/>
+            <a:off x="6675120" y="2057400"/>
+            <a:ext cx="2724912" cy="1143000"/>
+          </a:xfrm>
+          <a:prstGeom prst="rect">
+            <a:avLst/>
+          </a:prstGeom>
+          <a:noFill/>
+          <a:ln>
+            <a:noFill/>
+          </a:ln>
+        </p:spPr>
+        <p:txBody>
+          <a:bodyPr wrap="square" lIns="45720" tIns="0" rIns="0" bIns="0" rtlCol="0" anchor="ctr">
+            <a:noAutofit/>
+          </a:bodyPr>
+          <a:lstStyle/>
+          <a:p>
+            <a:pPr algn="l">
+              <a:lnSpc>
+                <a:spcPct val="125000"/>
+              </a:lnSpc>
+              <a:buNone/>
+            </a:pPr>
+            <a:r>
+              <a:rPr lang="ja-JP" altLang="en-US" sz="1300" b="0" dirty="0">
+                <a:solidFill>
+                  <a:srgbClr val="333333"/>
+                </a:solidFill>
+                <a:latin typeface="メイリオ" panose="020B0604030504040204" pitchFamily="50" charset="-128"/>
+                <a:ea typeface="メイリオ" panose="020B0604030504040204" pitchFamily="50" charset="-128"/>
+                <a:cs typeface="メイリオ"/>
+              </a:rPr>
+              <a:t>生命保険の加入経路のうち</a:t>
+            </a:r>
+            <a:endParaRPr lang="ja-JP" altLang="en-US" sz="1200" dirty="0">
+              <a:latin typeface="メイリオ"/>
+              <a:ea typeface="メイリオ"/>
+              <a:cs typeface="メイリオ"/>
+            </a:endParaRPr>
+          </a:p>
+          <a:p>
+            <a:pPr algn="l">
+              <a:lnSpc>
+                <a:spcPct val="125000"/>
+              </a:lnSpc>
+              <a:buNone/>
+            </a:pPr>
+            <a:r>
+              <a:rPr lang="ja-JP" altLang="en-US" sz="1300" b="1" dirty="0">
+                <a:solidFill>
+                  <a:srgbClr val="002060"/>
+                </a:solidFill>
+                <a:latin typeface="メイリオ" panose="020B0604030504040204" pitchFamily="50" charset="-128"/>
+                <a:ea typeface="メイリオ" panose="020B0604030504040204" pitchFamily="50" charset="-128"/>
+                <a:cs typeface="メイリオ"/>
+              </a:rPr>
+              <a:t>「生命保険会社の営業職員」</a:t>
+            </a:r>
+            <a:endParaRPr lang="ja-JP" altLang="en-US" sz="1200" dirty="0">
+              <a:latin typeface="メイリオ"/>
+              <a:ea typeface="メイリオ"/>
+              <a:cs typeface="メイリオ"/>
+            </a:endParaRPr>
+          </a:p>
+          <a:p>
+            <a:pPr algn="l">
+              <a:lnSpc>
+                <a:spcPct val="125000"/>
+              </a:lnSpc>
+              <a:buNone/>
+            </a:pPr>
+            <a:r>
+              <a:rPr lang="ja-JP" altLang="en-US" sz="1200" b="0" dirty="0">
+                <a:solidFill>
+                  <a:srgbClr val="7F7F7F"/>
+                </a:solidFill>
+                <a:latin typeface="メイリオ" panose="020B0604030504040204" pitchFamily="50" charset="-128"/>
+                <a:ea typeface="メイリオ" panose="020B0604030504040204" pitchFamily="50" charset="-128"/>
+                <a:cs typeface="メイリオ"/>
+              </a:rPr>
+              <a:t>（2024年調査）</a:t>
+            </a:r>
+            <a:endParaRPr lang="ja-JP" altLang="en-US" sz="1200" dirty="0">
+              <a:latin typeface="メイリオ"/>
+              <a:ea typeface="メイリオ"/>
+              <a:cs typeface="メイリオ"/>
+            </a:endParaRPr>
+          </a:p>
+        </p:txBody>
+      </p:sp>
+      <p:sp>
+        <p:nvSpPr>
+          <p:cNvPr id="26" name="見出し お客様との接触回数"/>
+          <p:cNvSpPr/>
+          <p:nvPr/>
+        </p:nvSpPr>
+        <p:spPr>
+          <a:xfrm>
+            <a:off x="5074920" y="3429000"/>
+            <a:ext cx="4325112" cy="411480"/>
           </a:xfrm>
           <a:prstGeom prst="rect">
             <a:avLst/>
           </a:prstGeom>
           <a:solidFill>
-            <a:srgbClr val="DCE6F2"/>
+            <a:srgbClr val="002060"/>
           </a:solidFill>
           <a:ln>
             <a:noFill/>
           </a:ln>
         </p:spPr>
         <p:txBody>
-          <a:bodyPr wrap="square" lIns="54864" tIns="36576" rIns="54864" bIns="36576" rtlCol="0" anchor="ctr">
+          <a:bodyPr wrap="square" lIns="73152" tIns="36576" rIns="73152" bIns="36576" rtlCol="0" anchor="ctr">
             <a:noAutofit/>
           </a:bodyPr>
           <a:lstStyle/>
           <a:p>
             <a:pPr algn="ctr">
-              <a:lnSpc>
-                <a:spcPct val="115000"/>
-              </a:lnSpc>
               <a:buNone/>
             </a:pPr>
             <a:r>
-              <a:rPr lang="ja-JP" altLang="en-US" sz="1500" b="1" dirty="0">
-                <a:solidFill>
-                  <a:srgbClr val="002060"/>
+              <a:rPr lang="ja-JP" altLang="en-US" sz="1400" b="1" dirty="0">
+                <a:solidFill>
+                  <a:srgbClr val="FFFFFF"/>
                 </a:solidFill>
                 <a:latin typeface="メイリオ" panose="020B0604030504040204" pitchFamily="50" charset="-128"/>
                 <a:ea typeface="メイリオ" panose="020B0604030504040204" pitchFamily="50" charset="-128"/>
                 <a:cs typeface="メイリオ"/>
               </a:rPr>
-              <a:t>予約</a:t>
+              <a:t>お客様との接触回数</a:t>
             </a:r>
             <a:endParaRPr lang="ja-JP" altLang="en-US" sz="1200" dirty="0">
               <a:latin typeface="メイリオ"/>
@@ -4964,14 +5753,14 @@
       </p:sp>
       <p:sp>
         <p:nvSpPr>
-          <p:cNvPr id="10" name="矢印"/>
+          <p:cNvPr id="27" name="数字 55.5%"/>
           <p:cNvSpPr/>
           <p:nvPr/>
         </p:nvSpPr>
         <p:spPr>
           <a:xfrm>
-            <a:off x="5716828" y="1691640"/>
-            <a:ext cx="310896" cy="914400"/>
+            <a:off x="5074920" y="3886200"/>
+            <a:ext cx="1600200" cy="1417319"/>
           </a:xfrm>
           <a:prstGeom prst="rect">
             <a:avLst/>
@@ -4991,7 +5780,7 @@
               <a:buNone/>
             </a:pPr>
             <a:r>
-              <a:rPr lang="ja-JP" altLang="en-US" sz="1400" b="0" dirty="0">
+              <a:rPr lang="ja-JP" altLang="en-US" sz="3200" b="1" dirty="0">
                 <a:solidFill>
                   <a:srgbClr val="002060"/>
                 </a:solidFill>
@@ -4999,7 +5788,7 @@
                 <a:ea typeface="メイリオ" panose="020B0604030504040204" pitchFamily="50" charset="-128"/>
                 <a:cs typeface="メイリオ"/>
               </a:rPr>
-              <a:t>▶</a:t>
+              <a:t>55.5%</a:t>
             </a:r>
             <a:endParaRPr lang="ja-JP" altLang="en-US" sz="1200" dirty="0">
               <a:latin typeface="メイリオ"/>
@@ -5011,66 +5800,14 @@
       </p:sp>
       <p:sp>
         <p:nvSpPr>
-          <p:cNvPr id="11" name="流れ4"/>
+          <p:cNvPr id="28" name="説明 55.5%"/>
           <p:cNvSpPr/>
           <p:nvPr/>
         </p:nvSpPr>
         <p:spPr>
           <a:xfrm>
-            <a:off x="6027724" y="1691640"/>
-            <a:ext cx="1530705" cy="914400"/>
-          </a:xfrm>
-          <a:prstGeom prst="rect">
-            <a:avLst/>
-          </a:prstGeom>
-          <a:solidFill>
-            <a:srgbClr val="DCE6F2"/>
-          </a:solidFill>
-          <a:ln>
-            <a:noFill/>
-          </a:ln>
-        </p:spPr>
-        <p:txBody>
-          <a:bodyPr wrap="square" lIns="54864" tIns="36576" rIns="54864" bIns="36576" rtlCol="0" anchor="ctr">
-            <a:noAutofit/>
-          </a:bodyPr>
-          <a:lstStyle/>
-          <a:p>
-            <a:pPr algn="ctr">
-              <a:lnSpc>
-                <a:spcPct val="115000"/>
-              </a:lnSpc>
-              <a:buNone/>
-            </a:pPr>
-            <a:r>
-              <a:rPr lang="ja-JP" altLang="en-US" sz="1500" b="1" dirty="0">
-                <a:solidFill>
-                  <a:srgbClr val="002060"/>
-                </a:solidFill>
-                <a:latin typeface="メイリオ" panose="020B0604030504040204" pitchFamily="50" charset="-128"/>
-                <a:ea typeface="メイリオ" panose="020B0604030504040204" pitchFamily="50" charset="-128"/>
-                <a:cs typeface="メイリオ"/>
-              </a:rPr>
-              <a:t>イベント参加</a:t>
-            </a:r>
-            <a:endParaRPr lang="ja-JP" altLang="en-US" sz="1200" dirty="0">
-              <a:latin typeface="メイリオ"/>
-              <a:ea typeface="メイリオ"/>
-              <a:cs typeface="メイリオ"/>
-            </a:endParaRPr>
-          </a:p>
-        </p:txBody>
-      </p:sp>
-      <p:sp>
-        <p:nvSpPr>
-          <p:cNvPr id="12" name="矢印"/>
-          <p:cNvSpPr/>
-          <p:nvPr/>
-        </p:nvSpPr>
-        <p:spPr>
-          <a:xfrm>
-            <a:off x="7558430" y="1691640"/>
-            <a:ext cx="310896" cy="914400"/>
+            <a:off x="6675120" y="3886200"/>
+            <a:ext cx="2724912" cy="1417319"/>
           </a:xfrm>
           <a:prstGeom prst="rect">
             <a:avLst/>
@@ -5081,24 +5818,27 @@
           </a:ln>
         </p:spPr>
         <p:txBody>
-          <a:bodyPr wrap="square" lIns="0" tIns="0" rIns="0" bIns="0" rtlCol="0" anchor="ctr">
+          <a:bodyPr wrap="square" lIns="45720" tIns="0" rIns="0" bIns="0" rtlCol="0" anchor="ctr">
             <a:noAutofit/>
           </a:bodyPr>
           <a:lstStyle/>
           <a:p>
-            <a:pPr algn="ctr">
+            <a:pPr algn="l">
+              <a:lnSpc>
+                <a:spcPct val="125000"/>
+              </a:lnSpc>
               <a:buNone/>
             </a:pPr>
             <a:r>
-              <a:rPr lang="ja-JP" altLang="en-US" sz="1400" b="0" dirty="0">
-                <a:solidFill>
-                  <a:srgbClr val="002060"/>
+              <a:rPr lang="ja-JP" altLang="en-US" sz="1300" b="0" dirty="0">
+                <a:solidFill>
+                  <a:srgbClr val="333333"/>
                 </a:solidFill>
                 <a:latin typeface="メイリオ" panose="020B0604030504040204" pitchFamily="50" charset="-128"/>
                 <a:ea typeface="メイリオ" panose="020B0604030504040204" pitchFamily="50" charset="-128"/>
                 <a:cs typeface="メイリオ"/>
               </a:rPr>
-              <a:t>▶</a:t>
+              <a:t>コロナ前と比べ、お客様との</a:t>
             </a:r>
             <a:endParaRPr lang="ja-JP" altLang="en-US" sz="1200" dirty="0">
               <a:latin typeface="メイリオ"/>
@@ -5106,316 +5846,66 @@
               <a:cs typeface="メイリオ"/>
             </a:endParaRPr>
           </a:p>
+          <a:p>
+            <a:pPr algn="l">
+              <a:lnSpc>
+                <a:spcPct val="125000"/>
+              </a:lnSpc>
+              <a:buNone/>
+            </a:pPr>
+            <a:r>
+              <a:rPr lang="ja-JP" altLang="en-US" sz="1300" b="1" dirty="0">
+                <a:solidFill>
+                  <a:srgbClr val="002060"/>
+                </a:solidFill>
+                <a:latin typeface="メイリオ" panose="020B0604030504040204" pitchFamily="50" charset="-128"/>
+                <a:ea typeface="メイリオ" panose="020B0604030504040204" pitchFamily="50" charset="-128"/>
+                <a:cs typeface="メイリオ"/>
+              </a:rPr>
+              <a:t>接触回数が「減少した」営業職員</a:t>
+            </a:r>
+            <a:endParaRPr lang="ja-JP" altLang="en-US" sz="1200" dirty="0">
+              <a:latin typeface="メイリオ"/>
+              <a:ea typeface="メイリオ"/>
+              <a:cs typeface="メイリオ"/>
+            </a:endParaRPr>
+          </a:p>
+          <a:p>
+            <a:pPr algn="l">
+              <a:lnSpc>
+                <a:spcPct val="125000"/>
+              </a:lnSpc>
+              <a:buNone/>
+            </a:pPr>
+            <a:r>
+              <a:rPr lang="ja-JP" altLang="en-US" sz="1200" b="0" dirty="0">
+                <a:solidFill>
+                  <a:srgbClr val="7F7F7F"/>
+                </a:solidFill>
+                <a:latin typeface="メイリオ" panose="020B0604030504040204" pitchFamily="50" charset="-128"/>
+                <a:ea typeface="メイリオ" panose="020B0604030504040204" pitchFamily="50" charset="-128"/>
+                <a:cs typeface="メイリオ"/>
+              </a:rPr>
+              <a:t>（2023年調査）</a:t>
+            </a:r>
+            <a:endParaRPr lang="ja-JP" altLang="en-US" sz="1200" dirty="0">
+              <a:latin typeface="メイリオ"/>
+              <a:ea typeface="メイリオ"/>
+              <a:cs typeface="メイリオ"/>
+            </a:endParaRPr>
+          </a:p>
         </p:txBody>
       </p:sp>
       <p:sp>
         <p:nvSpPr>
-          <p:cNvPr id="13" name="流れ5"/>
+          <p:cNvPr id="29" name="示唆"/>
           <p:cNvSpPr/>
           <p:nvPr/>
         </p:nvSpPr>
         <p:spPr>
           <a:xfrm>
-            <a:off x="7869326" y="1691640"/>
-            <a:ext cx="1530705" cy="914400"/>
-          </a:xfrm>
-          <a:prstGeom prst="rect">
-            <a:avLst/>
-          </a:prstGeom>
-          <a:solidFill>
-            <a:srgbClr val="002060"/>
-          </a:solidFill>
-          <a:ln>
-            <a:noFill/>
-          </a:ln>
-        </p:spPr>
-        <p:txBody>
-          <a:bodyPr wrap="square" lIns="54864" tIns="36576" rIns="54864" bIns="36576" rtlCol="0" anchor="ctr">
-            <a:noAutofit/>
-          </a:bodyPr>
-          <a:lstStyle/>
-          <a:p>
-            <a:pPr algn="ctr">
-              <a:lnSpc>
-                <a:spcPct val="115000"/>
-              </a:lnSpc>
-              <a:buNone/>
-            </a:pPr>
-            <a:r>
-              <a:rPr lang="ja-JP" altLang="en-US" sz="1500" b="1" dirty="0">
-                <a:solidFill>
-                  <a:srgbClr val="FFFFFF"/>
-                </a:solidFill>
-                <a:latin typeface="メイリオ" panose="020B0604030504040204" pitchFamily="50" charset="-128"/>
-                <a:ea typeface="メイリオ" panose="020B0604030504040204" pitchFamily="50" charset="-128"/>
-                <a:cs typeface="メイリオ"/>
-              </a:rPr>
-              <a:t>サロン入会</a:t>
-            </a:r>
-            <a:endParaRPr lang="ja-JP" altLang="en-US" sz="1200" dirty="0">
-              <a:latin typeface="メイリオ"/>
-              <a:ea typeface="メイリオ"/>
-              <a:cs typeface="メイリオ"/>
-            </a:endParaRPr>
-          </a:p>
-        </p:txBody>
-      </p:sp>
-      <p:sp>
-        <p:nvSpPr>
-          <p:cNvPr id="14" name="矢印下"/>
-          <p:cNvSpPr/>
-          <p:nvPr/>
-        </p:nvSpPr>
-        <p:spPr>
-          <a:xfrm>
-            <a:off x="2926994" y="2651760"/>
-            <a:ext cx="365760" cy="292608"/>
-          </a:xfrm>
-          <a:prstGeom prst="rect">
-            <a:avLst/>
-          </a:prstGeom>
-          <a:noFill/>
-          <a:ln>
-            <a:noFill/>
-          </a:ln>
-        </p:spPr>
-        <p:txBody>
-          <a:bodyPr wrap="square" lIns="0" tIns="0" rIns="0" bIns="0" rtlCol="0" anchor="ctr">
-            <a:noAutofit/>
-          </a:bodyPr>
-          <a:lstStyle/>
-          <a:p>
-            <a:pPr algn="ctr">
-              <a:buNone/>
-            </a:pPr>
-            <a:r>
-              <a:rPr lang="ja-JP" altLang="en-US" sz="1300" b="0" dirty="0">
-                <a:solidFill>
-                  <a:srgbClr val="C00000"/>
-                </a:solidFill>
-                <a:latin typeface="メイリオ" panose="020B0604030504040204" pitchFamily="50" charset="-128"/>
-                <a:ea typeface="メイリオ" panose="020B0604030504040204" pitchFamily="50" charset="-128"/>
-                <a:cs typeface="メイリオ"/>
-              </a:rPr>
-              <a:t>▼</a:t>
-            </a:r>
-            <a:endParaRPr lang="ja-JP" altLang="en-US" sz="1200" dirty="0">
-              <a:latin typeface="メイリオ"/>
-              <a:ea typeface="メイリオ"/>
-              <a:cs typeface="メイリオ"/>
-            </a:endParaRPr>
-          </a:p>
-        </p:txBody>
-      </p:sp>
-      <p:sp>
-        <p:nvSpPr>
-          <p:cNvPr id="15" name="切れる1"/>
-          <p:cNvSpPr/>
-          <p:nvPr/>
-        </p:nvSpPr>
-        <p:spPr>
-          <a:xfrm>
-            <a:off x="1463954" y="2971800"/>
-            <a:ext cx="3291840" cy="1371600"/>
-          </a:xfrm>
-          <a:prstGeom prst="rect">
-            <a:avLst/>
-          </a:prstGeom>
-          <a:noFill/>
-          <a:ln w="9525">
-            <a:solidFill>
-              <a:srgbClr val="C00000"/>
-            </a:solidFill>
-          </a:ln>
-        </p:spPr>
-        <p:txBody>
-          <a:bodyPr wrap="square" lIns="91440" tIns="54864" rIns="91440" bIns="54864" rtlCol="0" anchor="ctr">
-            <a:noAutofit/>
-          </a:bodyPr>
-          <a:lstStyle/>
-          <a:p>
-            <a:pPr algn="ctr">
-              <a:lnSpc>
-                <a:spcPct val="130000"/>
-              </a:lnSpc>
-              <a:buNone/>
-            </a:pPr>
-            <a:r>
-              <a:rPr lang="ja-JP" altLang="en-US" sz="1500" b="1" dirty="0">
-                <a:solidFill>
-                  <a:srgbClr val="C00000"/>
-                </a:solidFill>
-                <a:latin typeface="メイリオ" panose="020B0604030504040204" pitchFamily="50" charset="-128"/>
-                <a:ea typeface="メイリオ" panose="020B0604030504040204" pitchFamily="50" charset="-128"/>
-                <a:cs typeface="メイリオ"/>
-              </a:rPr>
-              <a:t>申し込まずに離れた方</a:t>
-            </a:r>
-            <a:endParaRPr lang="ja-JP" altLang="en-US" sz="1200" dirty="0">
-              <a:latin typeface="メイリオ"/>
-              <a:ea typeface="メイリオ"/>
-              <a:cs typeface="メイリオ"/>
-            </a:endParaRPr>
-          </a:p>
-          <a:p>
-            <a:pPr algn="ctr">
-              <a:lnSpc>
-                <a:spcPct val="130000"/>
-              </a:lnSpc>
-              <a:buNone/>
-            </a:pPr>
-            <a:r>
-              <a:rPr lang="ja-JP" altLang="en-US" sz="1400" b="0" dirty="0">
-                <a:solidFill>
-                  <a:srgbClr val="333333"/>
-                </a:solidFill>
-                <a:latin typeface="メイリオ" panose="020B0604030504040204" pitchFamily="50" charset="-128"/>
-                <a:ea typeface="メイリオ" panose="020B0604030504040204" pitchFamily="50" charset="-128"/>
-                <a:cs typeface="メイリオ"/>
-              </a:rPr>
-              <a:t>次のイベントまで案内する手段が無い</a:t>
-            </a:r>
-            <a:endParaRPr lang="ja-JP" altLang="en-US" sz="1200" dirty="0">
-              <a:latin typeface="メイリオ"/>
-              <a:ea typeface="メイリオ"/>
-              <a:cs typeface="メイリオ"/>
-            </a:endParaRPr>
-          </a:p>
-        </p:txBody>
-      </p:sp>
-      <p:sp>
-        <p:nvSpPr>
-          <p:cNvPr id="16" name="矢印下"/>
-          <p:cNvSpPr/>
-          <p:nvPr/>
-        </p:nvSpPr>
-        <p:spPr>
-          <a:xfrm>
-            <a:off x="6610197" y="2651760"/>
-            <a:ext cx="365760" cy="292608"/>
-          </a:xfrm>
-          <a:prstGeom prst="rect">
-            <a:avLst/>
-          </a:prstGeom>
-          <a:noFill/>
-          <a:ln>
-            <a:noFill/>
-          </a:ln>
-        </p:spPr>
-        <p:txBody>
-          <a:bodyPr wrap="square" lIns="0" tIns="0" rIns="0" bIns="0" rtlCol="0" anchor="ctr">
-            <a:noAutofit/>
-          </a:bodyPr>
-          <a:lstStyle/>
-          <a:p>
-            <a:pPr algn="ctr">
-              <a:buNone/>
-            </a:pPr>
-            <a:r>
-              <a:rPr lang="ja-JP" altLang="en-US" sz="1300" b="0" dirty="0">
-                <a:solidFill>
-                  <a:srgbClr val="C00000"/>
-                </a:solidFill>
-                <a:latin typeface="メイリオ" panose="020B0604030504040204" pitchFamily="50" charset="-128"/>
-                <a:ea typeface="メイリオ" panose="020B0604030504040204" pitchFamily="50" charset="-128"/>
-                <a:cs typeface="メイリオ"/>
-              </a:rPr>
-              <a:t>▼</a:t>
-            </a:r>
-            <a:endParaRPr lang="ja-JP" altLang="en-US" sz="1200" dirty="0">
-              <a:latin typeface="メイリオ"/>
-              <a:ea typeface="メイリオ"/>
-              <a:cs typeface="メイリオ"/>
-            </a:endParaRPr>
-          </a:p>
-        </p:txBody>
-      </p:sp>
-      <p:sp>
-        <p:nvSpPr>
-          <p:cNvPr id="17" name="切れる3"/>
-          <p:cNvSpPr/>
-          <p:nvPr/>
-        </p:nvSpPr>
-        <p:spPr>
-          <a:xfrm>
-            <a:off x="5147157" y="2971800"/>
-            <a:ext cx="3291840" cy="1371600"/>
-          </a:xfrm>
-          <a:prstGeom prst="rect">
-            <a:avLst/>
-          </a:prstGeom>
-          <a:noFill/>
-          <a:ln w="9525">
-            <a:solidFill>
-              <a:srgbClr val="C00000"/>
-            </a:solidFill>
-          </a:ln>
-        </p:spPr>
-        <p:txBody>
-          <a:bodyPr wrap="square" lIns="91440" tIns="54864" rIns="91440" bIns="54864" rtlCol="0" anchor="ctr">
-            <a:noAutofit/>
-          </a:bodyPr>
-          <a:lstStyle/>
-          <a:p>
-            <a:pPr algn="ctr">
-              <a:lnSpc>
-                <a:spcPct val="130000"/>
-              </a:lnSpc>
-              <a:buNone/>
-            </a:pPr>
-            <a:r>
-              <a:rPr lang="ja-JP" altLang="en-US" sz="1500" b="1" dirty="0">
-                <a:solidFill>
-                  <a:srgbClr val="C00000"/>
-                </a:solidFill>
-                <a:latin typeface="メイリオ" panose="020B0604030504040204" pitchFamily="50" charset="-128"/>
-                <a:ea typeface="メイリオ" panose="020B0604030504040204" pitchFamily="50" charset="-128"/>
-                <a:cs typeface="メイリオ"/>
-              </a:rPr>
-              <a:t>参加して入会していない方</a:t>
-            </a:r>
-            <a:endParaRPr lang="ja-JP" altLang="en-US" sz="1200" dirty="0">
-              <a:latin typeface="メイリオ"/>
-              <a:ea typeface="メイリオ"/>
-              <a:cs typeface="メイリオ"/>
-            </a:endParaRPr>
-          </a:p>
-          <a:p>
-            <a:pPr algn="ctr">
-              <a:lnSpc>
-                <a:spcPct val="130000"/>
-              </a:lnSpc>
-              <a:buNone/>
-            </a:pPr>
-            <a:r>
-              <a:rPr lang="ja-JP" altLang="en-US" sz="1400" b="0" dirty="0">
-                <a:solidFill>
-                  <a:srgbClr val="333333"/>
-                </a:solidFill>
-                <a:latin typeface="メイリオ" panose="020B0604030504040204" pitchFamily="50" charset="-128"/>
-                <a:ea typeface="メイリオ" panose="020B0604030504040204" pitchFamily="50" charset="-128"/>
-                <a:cs typeface="メイリオ"/>
-              </a:rPr>
-              <a:t>入会まで案内を続ける手段が無い</a:t>
-            </a:r>
-            <a:endParaRPr lang="ja-JP" altLang="en-US" sz="1200" dirty="0">
-              <a:latin typeface="メイリオ"/>
-              <a:ea typeface="メイリオ"/>
-              <a:cs typeface="メイリオ"/>
-            </a:endParaRPr>
-          </a:p>
-        </p:txBody>
-      </p:sp>
-      <p:sp>
-        <p:nvSpPr>
-          <p:cNvPr id="18" name="示唆"/>
-          <p:cNvSpPr/>
-          <p:nvPr/>
-        </p:nvSpPr>
-        <p:spPr>
-          <a:xfrm>
-            <a:off x="502920" y="4846320"/>
-            <a:ext cx="8897112" cy="777240"/>
+            <a:off x="502920" y="5440680"/>
+            <a:ext cx="8897112" cy="457200"/>
           </a:xfrm>
           <a:prstGeom prst="rect">
             <a:avLst/>
@@ -5437,7 +5927,7 @@
               <a:buNone/>
             </a:pPr>
             <a:r>
-              <a:rPr lang="ja-JP" altLang="en-US" sz="1600" b="1" dirty="0">
+              <a:rPr lang="ja-JP" altLang="en-US" sz="1500" b="1" dirty="0">
                 <a:solidFill>
                   <a:srgbClr val="002060"/>
                 </a:solidFill>
@@ -5445,18 +5935,148 @@
                 <a:ea typeface="メイリオ" panose="020B0604030504040204" pitchFamily="50" charset="-128"/>
                 <a:cs typeface="メイリオ"/>
               </a:rPr>
-              <a:t>集めた方を、次のイベントの集客に</a:t>
-            </a:r>
-            <a:r>
-              <a:rPr lang="ja-JP" altLang="en-US" sz="1600" b="1" dirty="0">
-                <a:solidFill>
-                  <a:srgbClr val="C00000"/>
+              <a:t>会える回数が減る中で、成果を出す営業のやり方が求められている</a:t>
+            </a:r>
+            <a:endParaRPr lang="ja-JP" altLang="en-US" sz="1200" dirty="0">
+              <a:latin typeface="メイリオ"/>
+              <a:ea typeface="メイリオ"/>
+              <a:cs typeface="メイリオ"/>
+            </a:endParaRPr>
+          </a:p>
+        </p:txBody>
+      </p:sp>
+      <p:sp>
+        <p:nvSpPr>
+          <p:cNvPr id="30" name="注記"/>
+          <p:cNvSpPr/>
+          <p:nvPr/>
+        </p:nvSpPr>
+        <p:spPr>
+          <a:xfrm>
+            <a:off x="502920" y="5961888"/>
+            <a:ext cx="8897112" cy="137160"/>
+          </a:xfrm>
+          <a:prstGeom prst="rect">
+            <a:avLst/>
+          </a:prstGeom>
+          <a:noFill/>
+          <a:ln>
+            <a:noFill/>
+          </a:ln>
+        </p:spPr>
+        <p:txBody>
+          <a:bodyPr wrap="square" lIns="0" tIns="0" rIns="0" bIns="0" rtlCol="0" anchor="t">
+            <a:noAutofit/>
+          </a:bodyPr>
+          <a:lstStyle/>
+          <a:p>
+            <a:pPr algn="l">
+              <a:buNone/>
+            </a:pPr>
+            <a:r>
+              <a:rPr lang="ja-JP" altLang="en-US" sz="900" b="0" dirty="0">
+                <a:solidFill>
+                  <a:srgbClr val="7F7F7F"/>
                 </a:solidFill>
                 <a:latin typeface="メイリオ" panose="020B0604030504040204" pitchFamily="50" charset="-128"/>
                 <a:ea typeface="メイリオ" panose="020B0604030504040204" pitchFamily="50" charset="-128"/>
                 <a:cs typeface="メイリオ"/>
               </a:rPr>
-              <a:t>活かしきれていない</a:t>
+              <a:t>※営業職員数：生命保険協会「2025年版 生命保険の動向」（加盟会社の年度末登録営業職員数）</a:t>
+            </a:r>
+            <a:endParaRPr lang="ja-JP" altLang="en-US" sz="1200" dirty="0">
+              <a:latin typeface="メイリオ"/>
+              <a:ea typeface="メイリオ"/>
+              <a:cs typeface="メイリオ"/>
+            </a:endParaRPr>
+          </a:p>
+        </p:txBody>
+      </p:sp>
+      <p:sp>
+        <p:nvSpPr>
+          <p:cNvPr id="31" name="注記"/>
+          <p:cNvSpPr/>
+          <p:nvPr/>
+        </p:nvSpPr>
+        <p:spPr>
+          <a:xfrm>
+            <a:off x="502920" y="6099048"/>
+            <a:ext cx="8897112" cy="137160"/>
+          </a:xfrm>
+          <a:prstGeom prst="rect">
+            <a:avLst/>
+          </a:prstGeom>
+          <a:noFill/>
+          <a:ln>
+            <a:noFill/>
+          </a:ln>
+        </p:spPr>
+        <p:txBody>
+          <a:bodyPr wrap="square" lIns="0" tIns="0" rIns="0" bIns="0" rtlCol="0" anchor="t">
+            <a:noAutofit/>
+          </a:bodyPr>
+          <a:lstStyle/>
+          <a:p>
+            <a:pPr algn="l">
+              <a:buNone/>
+            </a:pPr>
+            <a:r>
+              <a:rPr lang="ja-JP" altLang="en-US" sz="900" b="0" dirty="0">
+                <a:solidFill>
+                  <a:srgbClr val="7F7F7F"/>
+                </a:solidFill>
+                <a:latin typeface="メイリオ" panose="020B0604030504040204" pitchFamily="50" charset="-128"/>
+                <a:ea typeface="メイリオ" panose="020B0604030504040204" pitchFamily="50" charset="-128"/>
+                <a:cs typeface="メイリオ"/>
+              </a:rPr>
+              <a:t>※加入経路：生命保険文化センター「2024（令和6）年度 生命保険に関する全国実態調査」（直近の加入が2019年以降の世帯）</a:t>
+            </a:r>
+            <a:endParaRPr lang="ja-JP" altLang="en-US" sz="1200" dirty="0">
+              <a:latin typeface="メイリオ"/>
+              <a:ea typeface="メイリオ"/>
+              <a:cs typeface="メイリオ"/>
+            </a:endParaRPr>
+          </a:p>
+        </p:txBody>
+      </p:sp>
+      <p:sp>
+        <p:nvSpPr>
+          <p:cNvPr id="32" name="注記"/>
+          <p:cNvSpPr/>
+          <p:nvPr/>
+        </p:nvSpPr>
+        <p:spPr>
+          <a:xfrm>
+            <a:off x="502920" y="6236207"/>
+            <a:ext cx="8897112" cy="137160"/>
+          </a:xfrm>
+          <a:prstGeom prst="rect">
+            <a:avLst/>
+          </a:prstGeom>
+          <a:noFill/>
+          <a:ln>
+            <a:noFill/>
+          </a:ln>
+        </p:spPr>
+        <p:txBody>
+          <a:bodyPr wrap="square" lIns="0" tIns="0" rIns="0" bIns="0" rtlCol="0" anchor="t">
+            <a:noAutofit/>
+          </a:bodyPr>
+          <a:lstStyle/>
+          <a:p>
+            <a:pPr algn="l">
+              <a:buNone/>
+            </a:pPr>
+            <a:r>
+              <a:rPr lang="ja-JP" altLang="en-US" sz="900" b="0" dirty="0">
+                <a:solidFill>
+                  <a:srgbClr val="7F7F7F"/>
+                </a:solidFill>
+                <a:latin typeface="メイリオ" panose="020B0604030504040204" pitchFamily="50" charset="-128"/>
+                <a:ea typeface="メイリオ" panose="020B0604030504040204" pitchFamily="50" charset="-128"/>
+                <a:cs typeface="メイリオ"/>
+              </a:rPr>
+              <a:t>※接触回数：矢野経済研究所「生命保険の営業職員アンケート調査」（2023年4〜6月、生命保険の営業職員400名）</a:t>
             </a:r>
             <a:endParaRPr lang="ja-JP" altLang="en-US" sz="1200" dirty="0">
               <a:latin typeface="メイリオ"/>
@@ -5520,7 +6140,7 @@
                 <a:cs typeface="メイリオ"/>
                 <a:sym typeface="Meiryo"/>
               </a:rPr>
-              <a:t>本質課題</a:t>
+              <a:t>現状と課題</a:t>
             </a:r>
           </a:p>
         </p:txBody>
@@ -5573,7 +6193,7 @@
                 <a:ea typeface="メイリオ" panose="020B0604030504040204" pitchFamily="50" charset="-128"/>
                 <a:cs typeface="メイリオ"/>
               </a:rPr>
-              <a:t>本質課題</a:t>
+              <a:t>現状</a:t>
             </a:r>
           </a:p>
         </p:txBody>
@@ -5610,7 +6230,7 @@
                 <a:cs typeface="メイリオ"/>
                 <a:sym typeface="Meiryo"/>
               </a:rPr>
-              <a:t>ためて追い続ける場所が無い。この場所を、LINE公式アカウントでつくる</a:t>
+              <a:t>イベントの後、離れた方・未入会の方とのつながりが切れる</a:t>
             </a:r>
             <a:endParaRPr lang="en-US" altLang="ja-JP" sz="1600" b="1" dirty="0">
               <a:latin typeface="メイリオ" panose="020B0604030504040204" pitchFamily="50" charset="-128"/>
@@ -5623,44 +6243,47 @@
       </p:sp>
       <p:sp>
         <p:nvSpPr>
-          <p:cNvPr id="5" name="見出し 01 集める"/>
+          <p:cNvPr id="5" name="流れ1"/>
           <p:cNvSpPr/>
           <p:nvPr/>
         </p:nvSpPr>
         <p:spPr>
           <a:xfrm>
-            <a:off x="502920" y="1600200"/>
-            <a:ext cx="2782824" cy="411480"/>
+            <a:off x="502920" y="1691640"/>
+            <a:ext cx="1530705" cy="914400"/>
           </a:xfrm>
           <a:prstGeom prst="rect">
             <a:avLst/>
           </a:prstGeom>
           <a:solidFill>
-            <a:srgbClr val="002060"/>
+            <a:srgbClr val="DCE6F2"/>
           </a:solidFill>
           <a:ln>
             <a:noFill/>
           </a:ln>
         </p:spPr>
         <p:txBody>
-          <a:bodyPr wrap="square" lIns="73152" tIns="36576" rIns="73152" bIns="36576" rtlCol="0" anchor="ctr">
+          <a:bodyPr wrap="square" lIns="54864" tIns="36576" rIns="54864" bIns="36576" rtlCol="0" anchor="ctr">
             <a:noAutofit/>
           </a:bodyPr>
           <a:lstStyle/>
           <a:p>
             <a:pPr algn="ctr">
+              <a:lnSpc>
+                <a:spcPct val="115000"/>
+              </a:lnSpc>
               <a:buNone/>
             </a:pPr>
             <a:r>
-              <a:rPr lang="ja-JP" altLang="en-US" sz="1400" b="1" dirty="0">
-                <a:solidFill>
-                  <a:srgbClr val="FFFFFF"/>
+              <a:rPr lang="ja-JP" altLang="en-US" sz="1500" b="1" dirty="0">
+                <a:solidFill>
+                  <a:srgbClr val="002060"/>
                 </a:solidFill>
                 <a:latin typeface="メイリオ" panose="020B0604030504040204" pitchFamily="50" charset="-128"/>
                 <a:ea typeface="メイリオ" panose="020B0604030504040204" pitchFamily="50" charset="-128"/>
                 <a:cs typeface="メイリオ"/>
               </a:rPr>
-              <a:t>01 集める</a:t>
+              <a:t>広告</a:t>
             </a:r>
             <a:endParaRPr lang="ja-JP" altLang="en-US" sz="1200" dirty="0">
               <a:latin typeface="メイリオ"/>
@@ -5672,66 +6295,14 @@
       </p:sp>
       <p:sp>
         <p:nvSpPr>
-          <p:cNvPr id="6" name="課題1"/>
+          <p:cNvPr id="6" name="矢印"/>
           <p:cNvSpPr/>
           <p:nvPr/>
         </p:nvSpPr>
         <p:spPr>
           <a:xfrm>
-            <a:off x="502920" y="2011680"/>
-            <a:ext cx="2782824" cy="1783080"/>
-          </a:xfrm>
-          <a:prstGeom prst="rect">
-            <a:avLst/>
-          </a:prstGeom>
-          <a:solidFill>
-            <a:srgbClr val="F2F2F2"/>
-          </a:solidFill>
-          <a:ln>
-            <a:noFill/>
-          </a:ln>
-        </p:spPr>
-        <p:txBody>
-          <a:bodyPr wrap="square" lIns="137160" tIns="91440" rIns="137160" bIns="91440" rtlCol="0" anchor="ctr">
-            <a:noAutofit/>
-          </a:bodyPr>
-          <a:lstStyle/>
-          <a:p>
-            <a:pPr algn="ctr">
-              <a:lnSpc>
-                <a:spcPct val="140000"/>
-              </a:lnSpc>
-              <a:buNone/>
-            </a:pPr>
-            <a:r>
-              <a:rPr lang="ja-JP" altLang="en-US" sz="1500" b="0" dirty="0">
-                <a:solidFill>
-                  <a:srgbClr val="333333"/>
-                </a:solidFill>
-                <a:latin typeface="メイリオ" panose="020B0604030504040204" pitchFamily="50" charset="-128"/>
-                <a:ea typeface="メイリオ" panose="020B0604030504040204" pitchFamily="50" charset="-128"/>
-                <a:cs typeface="メイリオ"/>
-              </a:rPr>
-              <a:t>離れる方・予約した方を、友だちにする手段が無い</a:t>
-            </a:r>
-            <a:endParaRPr lang="ja-JP" altLang="en-US" sz="1200" dirty="0">
-              <a:latin typeface="メイリオ"/>
-              <a:ea typeface="メイリオ"/>
-              <a:cs typeface="メイリオ"/>
-            </a:endParaRPr>
-          </a:p>
-        </p:txBody>
-      </p:sp>
-      <p:sp>
-        <p:nvSpPr>
-          <p:cNvPr id="7" name="矢印下"/>
-          <p:cNvSpPr/>
-          <p:nvPr/>
-        </p:nvSpPr>
-        <p:spPr>
-          <a:xfrm>
-            <a:off x="1665732" y="3840480"/>
-            <a:ext cx="457200" cy="411480"/>
+            <a:off x="2033625" y="1691640"/>
+            <a:ext cx="310896" cy="914400"/>
           </a:xfrm>
           <a:prstGeom prst="rect">
             <a:avLst/>
@@ -5751,7 +6322,7 @@
               <a:buNone/>
             </a:pPr>
             <a:r>
-              <a:rPr lang="ja-JP" altLang="en-US" sz="1600" b="0" dirty="0">
+              <a:rPr lang="ja-JP" altLang="en-US" sz="1400" b="0" dirty="0">
                 <a:solidFill>
                   <a:srgbClr val="002060"/>
                 </a:solidFill>
@@ -5759,7 +6330,7 @@
                 <a:ea typeface="メイリオ" panose="020B0604030504040204" pitchFamily="50" charset="-128"/>
                 <a:cs typeface="メイリオ"/>
               </a:rPr>
-              <a:t>▼</a:t>
+              <a:t>▶</a:t>
             </a:r>
             <a:endParaRPr lang="ja-JP" altLang="en-US" sz="1200" dirty="0">
               <a:latin typeface="メイリオ"/>
@@ -5771,14 +6342,14 @@
       </p:sp>
       <p:sp>
         <p:nvSpPr>
-          <p:cNvPr id="8" name="打ち手1"/>
+          <p:cNvPr id="7" name="流れ2"/>
           <p:cNvSpPr/>
           <p:nvPr/>
         </p:nvSpPr>
         <p:spPr>
           <a:xfrm>
-            <a:off x="502920" y="4297680"/>
-            <a:ext cx="2782824" cy="1737360"/>
+            <a:off x="2344521" y="1691640"/>
+            <a:ext cx="1530705" cy="914400"/>
           </a:xfrm>
           <a:prstGeom prst="rect">
             <a:avLst/>
@@ -5791,19 +6362,19 @@
           </a:ln>
         </p:spPr>
         <p:txBody>
-          <a:bodyPr wrap="square" lIns="73152" tIns="36576" rIns="73152" bIns="36576" rtlCol="0" anchor="ctr">
+          <a:bodyPr wrap="square" lIns="54864" tIns="36576" rIns="54864" bIns="36576" rtlCol="0" anchor="ctr">
             <a:noAutofit/>
           </a:bodyPr>
           <a:lstStyle/>
           <a:p>
             <a:pPr algn="ctr">
               <a:lnSpc>
-                <a:spcPct val="130000"/>
+                <a:spcPct val="115000"/>
               </a:lnSpc>
               <a:buNone/>
             </a:pPr>
             <a:r>
-              <a:rPr lang="ja-JP" altLang="en-US" sz="1600" b="1" dirty="0">
+              <a:rPr lang="ja-JP" altLang="en-US" sz="1500" b="1" dirty="0">
                 <a:solidFill>
                   <a:srgbClr val="002060"/>
                 </a:solidFill>
@@ -5811,7 +6382,7 @@
                 <a:ea typeface="メイリオ" panose="020B0604030504040204" pitchFamily="50" charset="-128"/>
                 <a:cs typeface="メイリオ"/>
               </a:rPr>
-              <a:t>ポップアップツール</a:t>
+              <a:t>LP</a:t>
             </a:r>
             <a:endParaRPr lang="ja-JP" altLang="en-US" sz="1200" dirty="0">
               <a:latin typeface="メイリオ"/>
@@ -5819,143 +6390,18 @@
               <a:cs typeface="メイリオ"/>
             </a:endParaRPr>
           </a:p>
-          <a:p>
-            <a:pPr algn="ctr">
-              <a:lnSpc>
-                <a:spcPct val="130000"/>
-              </a:lnSpc>
-              <a:buNone/>
-            </a:pPr>
-            <a:r>
-              <a:rPr lang="ja-JP" altLang="en-US" sz="1600" b="1" dirty="0">
-                <a:solidFill>
-                  <a:srgbClr val="002060"/>
-                </a:solidFill>
-                <a:latin typeface="メイリオ" panose="020B0604030504040204" pitchFamily="50" charset="-128"/>
-                <a:ea typeface="メイリオ" panose="020B0604030504040204" pitchFamily="50" charset="-128"/>
-                <a:cs typeface="メイリオ"/>
-              </a:rPr>
-              <a:t>サンクスLINE誘導</a:t>
-            </a:r>
-            <a:endParaRPr lang="ja-JP" altLang="en-US" sz="1200" dirty="0">
-              <a:latin typeface="メイリオ"/>
-              <a:ea typeface="メイリオ"/>
-              <a:cs typeface="メイリオ"/>
-            </a:endParaRPr>
-          </a:p>
         </p:txBody>
       </p:sp>
       <p:sp>
         <p:nvSpPr>
-          <p:cNvPr id="9" name="見出し 02 追う"/>
+          <p:cNvPr id="8" name="矢印"/>
           <p:cNvSpPr/>
           <p:nvPr/>
         </p:nvSpPr>
         <p:spPr>
           <a:xfrm>
-            <a:off x="3560064" y="1600200"/>
-            <a:ext cx="2782824" cy="411480"/>
-          </a:xfrm>
-          <a:prstGeom prst="rect">
-            <a:avLst/>
-          </a:prstGeom>
-          <a:solidFill>
-            <a:srgbClr val="002060"/>
-          </a:solidFill>
-          <a:ln>
-            <a:noFill/>
-          </a:ln>
-        </p:spPr>
-        <p:txBody>
-          <a:bodyPr wrap="square" lIns="73152" tIns="36576" rIns="73152" bIns="36576" rtlCol="0" anchor="ctr">
-            <a:noAutofit/>
-          </a:bodyPr>
-          <a:lstStyle/>
-          <a:p>
-            <a:pPr algn="ctr">
-              <a:buNone/>
-            </a:pPr>
-            <a:r>
-              <a:rPr lang="ja-JP" altLang="en-US" sz="1400" b="1" dirty="0">
-                <a:solidFill>
-                  <a:srgbClr val="FFFFFF"/>
-                </a:solidFill>
-                <a:latin typeface="メイリオ" panose="020B0604030504040204" pitchFamily="50" charset="-128"/>
-                <a:ea typeface="メイリオ" panose="020B0604030504040204" pitchFamily="50" charset="-128"/>
-                <a:cs typeface="メイリオ"/>
-              </a:rPr>
-              <a:t>02 追う</a:t>
-            </a:r>
-            <a:endParaRPr lang="ja-JP" altLang="en-US" sz="1200" dirty="0">
-              <a:latin typeface="メイリオ"/>
-              <a:ea typeface="メイリオ"/>
-              <a:cs typeface="メイリオ"/>
-            </a:endParaRPr>
-          </a:p>
-        </p:txBody>
-      </p:sp>
-      <p:sp>
-        <p:nvSpPr>
-          <p:cNvPr id="10" name="課題2"/>
-          <p:cNvSpPr/>
-          <p:nvPr/>
-        </p:nvSpPr>
-        <p:spPr>
-          <a:xfrm>
-            <a:off x="3560064" y="2011680"/>
-            <a:ext cx="2782824" cy="1783080"/>
-          </a:xfrm>
-          <a:prstGeom prst="rect">
-            <a:avLst/>
-          </a:prstGeom>
-          <a:solidFill>
-            <a:srgbClr val="F2F2F2"/>
-          </a:solidFill>
-          <a:ln>
-            <a:noFill/>
-          </a:ln>
-        </p:spPr>
-        <p:txBody>
-          <a:bodyPr wrap="square" lIns="137160" tIns="91440" rIns="137160" bIns="91440" rtlCol="0" anchor="ctr">
-            <a:noAutofit/>
-          </a:bodyPr>
-          <a:lstStyle/>
-          <a:p>
-            <a:pPr algn="ctr">
-              <a:lnSpc>
-                <a:spcPct val="140000"/>
-              </a:lnSpc>
-              <a:buNone/>
-            </a:pPr>
-            <a:r>
-              <a:rPr lang="ja-JP" altLang="en-US" sz="1500" b="0" dirty="0">
-                <a:solidFill>
-                  <a:srgbClr val="333333"/>
-                </a:solidFill>
-                <a:latin typeface="メイリオ" panose="020B0604030504040204" pitchFamily="50" charset="-128"/>
-                <a:ea typeface="メイリオ" panose="020B0604030504040204" pitchFamily="50" charset="-128"/>
-                <a:cs typeface="メイリオ"/>
-              </a:rPr>
-              <a:t>次のイベントまで、情報を届ける手段が無い</a:t>
-            </a:r>
-            <a:endParaRPr lang="ja-JP" altLang="en-US" sz="1200" dirty="0">
-              <a:latin typeface="メイリオ"/>
-              <a:ea typeface="メイリオ"/>
-              <a:cs typeface="メイリオ"/>
-            </a:endParaRPr>
-          </a:p>
-        </p:txBody>
-      </p:sp>
-      <p:sp>
-        <p:nvSpPr>
-          <p:cNvPr id="11" name="矢印下"/>
-          <p:cNvSpPr/>
-          <p:nvPr/>
-        </p:nvSpPr>
-        <p:spPr>
-          <a:xfrm>
-            <a:off x="4722876" y="3840480"/>
-            <a:ext cx="457200" cy="411480"/>
+            <a:off x="3875227" y="1691640"/>
+            <a:ext cx="310896" cy="914400"/>
           </a:xfrm>
           <a:prstGeom prst="rect">
             <a:avLst/>
@@ -5975,7 +6421,7 @@
               <a:buNone/>
             </a:pPr>
             <a:r>
-              <a:rPr lang="ja-JP" altLang="en-US" sz="1600" b="0" dirty="0">
+              <a:rPr lang="ja-JP" altLang="en-US" sz="1400" b="0" dirty="0">
                 <a:solidFill>
                   <a:srgbClr val="002060"/>
                 </a:solidFill>
@@ -5983,7 +6429,7 @@
                 <a:ea typeface="メイリオ" panose="020B0604030504040204" pitchFamily="50" charset="-128"/>
                 <a:cs typeface="メイリオ"/>
               </a:rPr>
-              <a:t>▼</a:t>
+              <a:t>▶</a:t>
             </a:r>
             <a:endParaRPr lang="ja-JP" altLang="en-US" sz="1200" dirty="0">
               <a:latin typeface="メイリオ"/>
@@ -5995,14 +6441,14 @@
       </p:sp>
       <p:sp>
         <p:nvSpPr>
-          <p:cNvPr id="12" name="打ち手2"/>
+          <p:cNvPr id="9" name="流れ3"/>
           <p:cNvSpPr/>
           <p:nvPr/>
         </p:nvSpPr>
         <p:spPr>
           <a:xfrm>
-            <a:off x="3560064" y="4297680"/>
-            <a:ext cx="2782824" cy="1737360"/>
+            <a:off x="4186123" y="1691640"/>
+            <a:ext cx="1530705" cy="914400"/>
           </a:xfrm>
           <a:prstGeom prst="rect">
             <a:avLst/>
@@ -6015,19 +6461,19 @@
           </a:ln>
         </p:spPr>
         <p:txBody>
-          <a:bodyPr wrap="square" lIns="73152" tIns="36576" rIns="73152" bIns="36576" rtlCol="0" anchor="ctr">
+          <a:bodyPr wrap="square" lIns="54864" tIns="36576" rIns="54864" bIns="36576" rtlCol="0" anchor="ctr">
             <a:noAutofit/>
           </a:bodyPr>
           <a:lstStyle/>
           <a:p>
             <a:pPr algn="ctr">
               <a:lnSpc>
-                <a:spcPct val="130000"/>
+                <a:spcPct val="115000"/>
               </a:lnSpc>
               <a:buNone/>
             </a:pPr>
             <a:r>
-              <a:rPr lang="ja-JP" altLang="en-US" sz="1600" b="1" dirty="0">
+              <a:rPr lang="ja-JP" altLang="en-US" sz="1500" b="1" dirty="0">
                 <a:solidFill>
                   <a:srgbClr val="002060"/>
                 </a:solidFill>
@@ -6035,7 +6481,7 @@
                 <a:ea typeface="メイリオ" panose="020B0604030504040204" pitchFamily="50" charset="-128"/>
                 <a:cs typeface="メイリオ"/>
               </a:rPr>
-              <a:t>平常期の配信</a:t>
+              <a:t>予約</a:t>
             </a:r>
             <a:endParaRPr lang="ja-JP" altLang="en-US" sz="1200" dirty="0">
               <a:latin typeface="メイリオ"/>
@@ -6047,115 +6493,14 @@
       </p:sp>
       <p:sp>
         <p:nvSpPr>
-          <p:cNvPr id="13" name="見出し 03 つなげる"/>
+          <p:cNvPr id="10" name="矢印"/>
           <p:cNvSpPr/>
           <p:nvPr/>
         </p:nvSpPr>
         <p:spPr>
           <a:xfrm>
-            <a:off x="6617208" y="1600200"/>
-            <a:ext cx="2782824" cy="411480"/>
-          </a:xfrm>
-          <a:prstGeom prst="rect">
-            <a:avLst/>
-          </a:prstGeom>
-          <a:solidFill>
-            <a:srgbClr val="002060"/>
-          </a:solidFill>
-          <a:ln>
-            <a:noFill/>
-          </a:ln>
-        </p:spPr>
-        <p:txBody>
-          <a:bodyPr wrap="square" lIns="73152" tIns="36576" rIns="73152" bIns="36576" rtlCol="0" anchor="ctr">
-            <a:noAutofit/>
-          </a:bodyPr>
-          <a:lstStyle/>
-          <a:p>
-            <a:pPr algn="ctr">
-              <a:buNone/>
-            </a:pPr>
-            <a:r>
-              <a:rPr lang="ja-JP" altLang="en-US" sz="1400" b="1" dirty="0">
-                <a:solidFill>
-                  <a:srgbClr val="FFFFFF"/>
-                </a:solidFill>
-                <a:latin typeface="メイリオ" panose="020B0604030504040204" pitchFamily="50" charset="-128"/>
-                <a:ea typeface="メイリオ" panose="020B0604030504040204" pitchFamily="50" charset="-128"/>
-                <a:cs typeface="メイリオ"/>
-              </a:rPr>
-              <a:t>03 つなげる</a:t>
-            </a:r>
-            <a:endParaRPr lang="ja-JP" altLang="en-US" sz="1200" dirty="0">
-              <a:latin typeface="メイリオ"/>
-              <a:ea typeface="メイリオ"/>
-              <a:cs typeface="メイリオ"/>
-            </a:endParaRPr>
-          </a:p>
-        </p:txBody>
-      </p:sp>
-      <p:sp>
-        <p:nvSpPr>
-          <p:cNvPr id="14" name="課題3"/>
-          <p:cNvSpPr/>
-          <p:nvPr/>
-        </p:nvSpPr>
-        <p:spPr>
-          <a:xfrm>
-            <a:off x="6617208" y="2011680"/>
-            <a:ext cx="2782824" cy="1783080"/>
-          </a:xfrm>
-          <a:prstGeom prst="rect">
-            <a:avLst/>
-          </a:prstGeom>
-          <a:solidFill>
-            <a:srgbClr val="F2F2F2"/>
-          </a:solidFill>
-          <a:ln>
-            <a:noFill/>
-          </a:ln>
-        </p:spPr>
-        <p:txBody>
-          <a:bodyPr wrap="square" lIns="137160" tIns="91440" rIns="137160" bIns="91440" rtlCol="0" anchor="ctr">
-            <a:noAutofit/>
-          </a:bodyPr>
-          <a:lstStyle/>
-          <a:p>
-            <a:pPr algn="ctr">
-              <a:lnSpc>
-                <a:spcPct val="140000"/>
-              </a:lnSpc>
-              <a:buNone/>
-            </a:pPr>
-            <a:r>
-              <a:rPr lang="ja-JP" altLang="en-US" sz="1500" b="0" dirty="0">
-                <a:solidFill>
-                  <a:srgbClr val="333333"/>
-                </a:solidFill>
-                <a:latin typeface="メイリオ" panose="020B0604030504040204" pitchFamily="50" charset="-128"/>
-                <a:ea typeface="メイリオ" panose="020B0604030504040204" pitchFamily="50" charset="-128"/>
-                <a:cs typeface="メイリオ"/>
-              </a:rPr>
-              <a:t>参加した方に、入会を案内する手段が無い</a:t>
-            </a:r>
-            <a:endParaRPr lang="ja-JP" altLang="en-US" sz="1200" dirty="0">
-              <a:latin typeface="メイリオ"/>
-              <a:ea typeface="メイリオ"/>
-              <a:cs typeface="メイリオ"/>
-            </a:endParaRPr>
-          </a:p>
-        </p:txBody>
-      </p:sp>
-      <p:sp>
-        <p:nvSpPr>
-          <p:cNvPr id="15" name="矢印下"/>
-          <p:cNvSpPr/>
-          <p:nvPr/>
-        </p:nvSpPr>
-        <p:spPr>
-          <a:xfrm>
-            <a:off x="7780020" y="3840480"/>
-            <a:ext cx="457200" cy="411480"/>
+            <a:off x="5716828" y="1691640"/>
+            <a:ext cx="310896" cy="914400"/>
           </a:xfrm>
           <a:prstGeom prst="rect">
             <a:avLst/>
@@ -6175,7 +6520,7 @@
               <a:buNone/>
             </a:pPr>
             <a:r>
-              <a:rPr lang="ja-JP" altLang="en-US" sz="1600" b="0" dirty="0">
+              <a:rPr lang="ja-JP" altLang="en-US" sz="1400" b="0" dirty="0">
                 <a:solidFill>
                   <a:srgbClr val="002060"/>
                 </a:solidFill>
@@ -6183,7 +6528,7 @@
                 <a:ea typeface="メイリオ" panose="020B0604030504040204" pitchFamily="50" charset="-128"/>
                 <a:cs typeface="メイリオ"/>
               </a:rPr>
-              <a:t>▼</a:t>
+              <a:t>▶</a:t>
             </a:r>
             <a:endParaRPr lang="ja-JP" altLang="en-US" sz="1200" dirty="0">
               <a:latin typeface="メイリオ"/>
@@ -6195,14 +6540,14 @@
       </p:sp>
       <p:sp>
         <p:nvSpPr>
-          <p:cNvPr id="16" name="打ち手3"/>
+          <p:cNvPr id="11" name="流れ4"/>
           <p:cNvSpPr/>
           <p:nvPr/>
         </p:nvSpPr>
         <p:spPr>
           <a:xfrm>
-            <a:off x="6617208" y="4297680"/>
-            <a:ext cx="2782824" cy="1737360"/>
+            <a:off x="6027724" y="1691640"/>
+            <a:ext cx="1530705" cy="914400"/>
           </a:xfrm>
           <a:prstGeom prst="rect">
             <a:avLst/>
@@ -6215,7 +6560,205 @@
           </a:ln>
         </p:spPr>
         <p:txBody>
-          <a:bodyPr wrap="square" lIns="73152" tIns="36576" rIns="73152" bIns="36576" rtlCol="0" anchor="ctr">
+          <a:bodyPr wrap="square" lIns="54864" tIns="36576" rIns="54864" bIns="36576" rtlCol="0" anchor="ctr">
+            <a:noAutofit/>
+          </a:bodyPr>
+          <a:lstStyle/>
+          <a:p>
+            <a:pPr algn="ctr">
+              <a:lnSpc>
+                <a:spcPct val="115000"/>
+              </a:lnSpc>
+              <a:buNone/>
+            </a:pPr>
+            <a:r>
+              <a:rPr lang="ja-JP" altLang="en-US" sz="1500" b="1" dirty="0">
+                <a:solidFill>
+                  <a:srgbClr val="002060"/>
+                </a:solidFill>
+                <a:latin typeface="メイリオ" panose="020B0604030504040204" pitchFamily="50" charset="-128"/>
+                <a:ea typeface="メイリオ" panose="020B0604030504040204" pitchFamily="50" charset="-128"/>
+                <a:cs typeface="メイリオ"/>
+              </a:rPr>
+              <a:t>イベント参加</a:t>
+            </a:r>
+            <a:endParaRPr lang="ja-JP" altLang="en-US" sz="1200" dirty="0">
+              <a:latin typeface="メイリオ"/>
+              <a:ea typeface="メイリオ"/>
+              <a:cs typeface="メイリオ"/>
+            </a:endParaRPr>
+          </a:p>
+        </p:txBody>
+      </p:sp>
+      <p:sp>
+        <p:nvSpPr>
+          <p:cNvPr id="12" name="矢印"/>
+          <p:cNvSpPr/>
+          <p:nvPr/>
+        </p:nvSpPr>
+        <p:spPr>
+          <a:xfrm>
+            <a:off x="7558430" y="1691640"/>
+            <a:ext cx="310896" cy="914400"/>
+          </a:xfrm>
+          <a:prstGeom prst="rect">
+            <a:avLst/>
+          </a:prstGeom>
+          <a:noFill/>
+          <a:ln>
+            <a:noFill/>
+          </a:ln>
+        </p:spPr>
+        <p:txBody>
+          <a:bodyPr wrap="square" lIns="0" tIns="0" rIns="0" bIns="0" rtlCol="0" anchor="ctr">
+            <a:noAutofit/>
+          </a:bodyPr>
+          <a:lstStyle/>
+          <a:p>
+            <a:pPr algn="ctr">
+              <a:buNone/>
+            </a:pPr>
+            <a:r>
+              <a:rPr lang="ja-JP" altLang="en-US" sz="1400" b="0" dirty="0">
+                <a:solidFill>
+                  <a:srgbClr val="002060"/>
+                </a:solidFill>
+                <a:latin typeface="メイリオ" panose="020B0604030504040204" pitchFamily="50" charset="-128"/>
+                <a:ea typeface="メイリオ" panose="020B0604030504040204" pitchFamily="50" charset="-128"/>
+                <a:cs typeface="メイリオ"/>
+              </a:rPr>
+              <a:t>▶</a:t>
+            </a:r>
+            <a:endParaRPr lang="ja-JP" altLang="en-US" sz="1200" dirty="0">
+              <a:latin typeface="メイリオ"/>
+              <a:ea typeface="メイリオ"/>
+              <a:cs typeface="メイリオ"/>
+            </a:endParaRPr>
+          </a:p>
+        </p:txBody>
+      </p:sp>
+      <p:sp>
+        <p:nvSpPr>
+          <p:cNvPr id="13" name="流れ5"/>
+          <p:cNvSpPr/>
+          <p:nvPr/>
+        </p:nvSpPr>
+        <p:spPr>
+          <a:xfrm>
+            <a:off x="7869326" y="1691640"/>
+            <a:ext cx="1530705" cy="914400"/>
+          </a:xfrm>
+          <a:prstGeom prst="rect">
+            <a:avLst/>
+          </a:prstGeom>
+          <a:solidFill>
+            <a:srgbClr val="002060"/>
+          </a:solidFill>
+          <a:ln>
+            <a:noFill/>
+          </a:ln>
+        </p:spPr>
+        <p:txBody>
+          <a:bodyPr wrap="square" lIns="54864" tIns="36576" rIns="54864" bIns="36576" rtlCol="0" anchor="ctr">
+            <a:noAutofit/>
+          </a:bodyPr>
+          <a:lstStyle/>
+          <a:p>
+            <a:pPr algn="ctr">
+              <a:lnSpc>
+                <a:spcPct val="115000"/>
+              </a:lnSpc>
+              <a:buNone/>
+            </a:pPr>
+            <a:r>
+              <a:rPr lang="ja-JP" altLang="en-US" sz="1500" b="1" dirty="0">
+                <a:solidFill>
+                  <a:srgbClr val="FFFFFF"/>
+                </a:solidFill>
+                <a:latin typeface="メイリオ" panose="020B0604030504040204" pitchFamily="50" charset="-128"/>
+                <a:ea typeface="メイリオ" panose="020B0604030504040204" pitchFamily="50" charset="-128"/>
+                <a:cs typeface="メイリオ"/>
+              </a:rPr>
+              <a:t>サロン入会</a:t>
+            </a:r>
+            <a:endParaRPr lang="ja-JP" altLang="en-US" sz="1200" dirty="0">
+              <a:latin typeface="メイリオ"/>
+              <a:ea typeface="メイリオ"/>
+              <a:cs typeface="メイリオ"/>
+            </a:endParaRPr>
+          </a:p>
+        </p:txBody>
+      </p:sp>
+      <p:sp>
+        <p:nvSpPr>
+          <p:cNvPr id="14" name="矢印下"/>
+          <p:cNvSpPr/>
+          <p:nvPr/>
+        </p:nvSpPr>
+        <p:spPr>
+          <a:xfrm>
+            <a:off x="2926994" y="2651760"/>
+            <a:ext cx="365760" cy="292608"/>
+          </a:xfrm>
+          <a:prstGeom prst="rect">
+            <a:avLst/>
+          </a:prstGeom>
+          <a:noFill/>
+          <a:ln>
+            <a:noFill/>
+          </a:ln>
+        </p:spPr>
+        <p:txBody>
+          <a:bodyPr wrap="square" lIns="0" tIns="0" rIns="0" bIns="0" rtlCol="0" anchor="ctr">
+            <a:noAutofit/>
+          </a:bodyPr>
+          <a:lstStyle/>
+          <a:p>
+            <a:pPr algn="ctr">
+              <a:buNone/>
+            </a:pPr>
+            <a:r>
+              <a:rPr lang="ja-JP" altLang="en-US" sz="1300" b="0" dirty="0">
+                <a:solidFill>
+                  <a:srgbClr val="C00000"/>
+                </a:solidFill>
+                <a:latin typeface="メイリオ" panose="020B0604030504040204" pitchFamily="50" charset="-128"/>
+                <a:ea typeface="メイリオ" panose="020B0604030504040204" pitchFamily="50" charset="-128"/>
+                <a:cs typeface="メイリオ"/>
+              </a:rPr>
+              <a:t>▼</a:t>
+            </a:r>
+            <a:endParaRPr lang="ja-JP" altLang="en-US" sz="1200" dirty="0">
+              <a:latin typeface="メイリオ"/>
+              <a:ea typeface="メイリオ"/>
+              <a:cs typeface="メイリオ"/>
+            </a:endParaRPr>
+          </a:p>
+        </p:txBody>
+      </p:sp>
+      <p:sp>
+        <p:nvSpPr>
+          <p:cNvPr id="15" name="切れる1"/>
+          <p:cNvSpPr/>
+          <p:nvPr/>
+        </p:nvSpPr>
+        <p:spPr>
+          <a:xfrm>
+            <a:off x="1463954" y="2971800"/>
+            <a:ext cx="3291840" cy="1371600"/>
+          </a:xfrm>
+          <a:prstGeom prst="rect">
+            <a:avLst/>
+          </a:prstGeom>
+          <a:noFill/>
+          <a:ln w="9525">
+            <a:solidFill>
+              <a:srgbClr val="C00000"/>
+            </a:solidFill>
+          </a:ln>
+        </p:spPr>
+        <p:txBody>
+          <a:bodyPr wrap="square" lIns="91440" tIns="54864" rIns="91440" bIns="54864" rtlCol="0" anchor="ctr">
             <a:noAutofit/>
           </a:bodyPr>
           <a:lstStyle/>
@@ -6227,15 +6770,222 @@
               <a:buNone/>
             </a:pPr>
             <a:r>
-              <a:rPr lang="ja-JP" altLang="en-US" sz="1600" b="1" dirty="0">
-                <a:solidFill>
-                  <a:srgbClr val="002060"/>
+              <a:rPr lang="ja-JP" altLang="en-US" sz="1500" b="1" dirty="0">
+                <a:solidFill>
+                  <a:srgbClr val="C00000"/>
                 </a:solidFill>
                 <a:latin typeface="メイリオ" panose="020B0604030504040204" pitchFamily="50" charset="-128"/>
                 <a:ea typeface="メイリオ" panose="020B0604030504040204" pitchFamily="50" charset="-128"/>
                 <a:cs typeface="メイリオ"/>
               </a:rPr>
-              <a:t>参加後の入会の案内</a:t>
+              <a:t>申し込まずに離れた方</a:t>
+            </a:r>
+            <a:endParaRPr lang="ja-JP" altLang="en-US" sz="1200" dirty="0">
+              <a:latin typeface="メイリオ"/>
+              <a:ea typeface="メイリオ"/>
+              <a:cs typeface="メイリオ"/>
+            </a:endParaRPr>
+          </a:p>
+          <a:p>
+            <a:pPr algn="ctr">
+              <a:lnSpc>
+                <a:spcPct val="130000"/>
+              </a:lnSpc>
+              <a:buNone/>
+            </a:pPr>
+            <a:r>
+              <a:rPr lang="ja-JP" altLang="en-US" sz="1400" b="0" dirty="0">
+                <a:solidFill>
+                  <a:srgbClr val="333333"/>
+                </a:solidFill>
+                <a:latin typeface="メイリオ" panose="020B0604030504040204" pitchFamily="50" charset="-128"/>
+                <a:ea typeface="メイリオ" panose="020B0604030504040204" pitchFamily="50" charset="-128"/>
+                <a:cs typeface="メイリオ"/>
+              </a:rPr>
+              <a:t>次のイベントまで案内する手段が無い</a:t>
+            </a:r>
+            <a:endParaRPr lang="ja-JP" altLang="en-US" sz="1200" dirty="0">
+              <a:latin typeface="メイリオ"/>
+              <a:ea typeface="メイリオ"/>
+              <a:cs typeface="メイリオ"/>
+            </a:endParaRPr>
+          </a:p>
+        </p:txBody>
+      </p:sp>
+      <p:sp>
+        <p:nvSpPr>
+          <p:cNvPr id="16" name="矢印下"/>
+          <p:cNvSpPr/>
+          <p:nvPr/>
+        </p:nvSpPr>
+        <p:spPr>
+          <a:xfrm>
+            <a:off x="6610197" y="2651760"/>
+            <a:ext cx="365760" cy="292608"/>
+          </a:xfrm>
+          <a:prstGeom prst="rect">
+            <a:avLst/>
+          </a:prstGeom>
+          <a:noFill/>
+          <a:ln>
+            <a:noFill/>
+          </a:ln>
+        </p:spPr>
+        <p:txBody>
+          <a:bodyPr wrap="square" lIns="0" tIns="0" rIns="0" bIns="0" rtlCol="0" anchor="ctr">
+            <a:noAutofit/>
+          </a:bodyPr>
+          <a:lstStyle/>
+          <a:p>
+            <a:pPr algn="ctr">
+              <a:buNone/>
+            </a:pPr>
+            <a:r>
+              <a:rPr lang="ja-JP" altLang="en-US" sz="1300" b="0" dirty="0">
+                <a:solidFill>
+                  <a:srgbClr val="C00000"/>
+                </a:solidFill>
+                <a:latin typeface="メイリオ" panose="020B0604030504040204" pitchFamily="50" charset="-128"/>
+                <a:ea typeface="メイリオ" panose="020B0604030504040204" pitchFamily="50" charset="-128"/>
+                <a:cs typeface="メイリオ"/>
+              </a:rPr>
+              <a:t>▼</a:t>
+            </a:r>
+            <a:endParaRPr lang="ja-JP" altLang="en-US" sz="1200" dirty="0">
+              <a:latin typeface="メイリオ"/>
+              <a:ea typeface="メイリオ"/>
+              <a:cs typeface="メイリオ"/>
+            </a:endParaRPr>
+          </a:p>
+        </p:txBody>
+      </p:sp>
+      <p:sp>
+        <p:nvSpPr>
+          <p:cNvPr id="17" name="切れる3"/>
+          <p:cNvSpPr/>
+          <p:nvPr/>
+        </p:nvSpPr>
+        <p:spPr>
+          <a:xfrm>
+            <a:off x="5147157" y="2971800"/>
+            <a:ext cx="3291840" cy="1371600"/>
+          </a:xfrm>
+          <a:prstGeom prst="rect">
+            <a:avLst/>
+          </a:prstGeom>
+          <a:noFill/>
+          <a:ln w="9525">
+            <a:solidFill>
+              <a:srgbClr val="C00000"/>
+            </a:solidFill>
+          </a:ln>
+        </p:spPr>
+        <p:txBody>
+          <a:bodyPr wrap="square" lIns="91440" tIns="54864" rIns="91440" bIns="54864" rtlCol="0" anchor="ctr">
+            <a:noAutofit/>
+          </a:bodyPr>
+          <a:lstStyle/>
+          <a:p>
+            <a:pPr algn="ctr">
+              <a:lnSpc>
+                <a:spcPct val="130000"/>
+              </a:lnSpc>
+              <a:buNone/>
+            </a:pPr>
+            <a:r>
+              <a:rPr lang="ja-JP" altLang="en-US" sz="1500" b="1" dirty="0">
+                <a:solidFill>
+                  <a:srgbClr val="C00000"/>
+                </a:solidFill>
+                <a:latin typeface="メイリオ" panose="020B0604030504040204" pitchFamily="50" charset="-128"/>
+                <a:ea typeface="メイリオ" panose="020B0604030504040204" pitchFamily="50" charset="-128"/>
+                <a:cs typeface="メイリオ"/>
+              </a:rPr>
+              <a:t>参加して入会していない方</a:t>
+            </a:r>
+            <a:endParaRPr lang="ja-JP" altLang="en-US" sz="1200" dirty="0">
+              <a:latin typeface="メイリオ"/>
+              <a:ea typeface="メイリオ"/>
+              <a:cs typeface="メイリオ"/>
+            </a:endParaRPr>
+          </a:p>
+          <a:p>
+            <a:pPr algn="ctr">
+              <a:lnSpc>
+                <a:spcPct val="130000"/>
+              </a:lnSpc>
+              <a:buNone/>
+            </a:pPr>
+            <a:r>
+              <a:rPr lang="ja-JP" altLang="en-US" sz="1400" b="0" dirty="0">
+                <a:solidFill>
+                  <a:srgbClr val="333333"/>
+                </a:solidFill>
+                <a:latin typeface="メイリオ" panose="020B0604030504040204" pitchFamily="50" charset="-128"/>
+                <a:ea typeface="メイリオ" panose="020B0604030504040204" pitchFamily="50" charset="-128"/>
+                <a:cs typeface="メイリオ"/>
+              </a:rPr>
+              <a:t>入会まで案内を続ける手段が無い</a:t>
+            </a:r>
+            <a:endParaRPr lang="ja-JP" altLang="en-US" sz="1200" dirty="0">
+              <a:latin typeface="メイリオ"/>
+              <a:ea typeface="メイリオ"/>
+              <a:cs typeface="メイリオ"/>
+            </a:endParaRPr>
+          </a:p>
+        </p:txBody>
+      </p:sp>
+      <p:sp>
+        <p:nvSpPr>
+          <p:cNvPr id="18" name="示唆"/>
+          <p:cNvSpPr/>
+          <p:nvPr/>
+        </p:nvSpPr>
+        <p:spPr>
+          <a:xfrm>
+            <a:off x="502920" y="4846320"/>
+            <a:ext cx="8897112" cy="777240"/>
+          </a:xfrm>
+          <a:prstGeom prst="rect">
+            <a:avLst/>
+          </a:prstGeom>
+          <a:solidFill>
+            <a:srgbClr val="F2F2F2"/>
+          </a:solidFill>
+          <a:ln>
+            <a:noFill/>
+          </a:ln>
+        </p:spPr>
+        <p:txBody>
+          <a:bodyPr wrap="square" lIns="73152" tIns="36576" rIns="73152" bIns="36576" rtlCol="0" anchor="ctr">
+            <a:noAutofit/>
+          </a:bodyPr>
+          <a:lstStyle/>
+          <a:p>
+            <a:pPr algn="ctr">
+              <a:buNone/>
+            </a:pPr>
+            <a:r>
+              <a:rPr lang="ja-JP" altLang="en-US" sz="1600" b="1" dirty="0">
+                <a:solidFill>
+                  <a:srgbClr val="002060"/>
+                </a:solidFill>
+                <a:latin typeface="メイリオ" panose="020B0604030504040204" pitchFamily="50" charset="-128"/>
+                <a:ea typeface="メイリオ" panose="020B0604030504040204" pitchFamily="50" charset="-128"/>
+                <a:cs typeface="メイリオ"/>
+              </a:rPr>
+              <a:t>集めた方を、次のイベントの集客に</a:t>
+            </a:r>
+            <a:r>
+              <a:rPr lang="ja-JP" altLang="en-US" sz="1600" b="1" dirty="0">
+                <a:solidFill>
+                  <a:srgbClr val="C00000"/>
+                </a:solidFill>
+                <a:latin typeface="メイリオ" panose="020B0604030504040204" pitchFamily="50" charset="-128"/>
+                <a:ea typeface="メイリオ" panose="020B0604030504040204" pitchFamily="50" charset="-128"/>
+                <a:cs typeface="メイリオ"/>
+              </a:rPr>
+              <a:t>活かしきれていない</a:t>
             </a:r>
             <a:endParaRPr lang="ja-JP" altLang="en-US" sz="1200" dirty="0">
               <a:latin typeface="メイリオ"/>
@@ -6299,6 +7049,785 @@
                 <a:cs typeface="メイリオ"/>
                 <a:sym typeface="Meiryo"/>
               </a:rPr>
+              <a:t>本質課題</a:t>
+            </a:r>
+          </a:p>
+        </p:txBody>
+      </p:sp>
+      <p:sp>
+        <p:nvSpPr>
+          <p:cNvPr id="3" name="正方形/長方形 8"/>
+          <p:cNvSpPr/>
+          <p:nvPr/>
+        </p:nvSpPr>
+        <p:spPr>
+          <a:xfrm>
+            <a:off x="0" y="777240"/>
+            <a:ext cx="1801368" cy="502920"/>
+          </a:xfrm>
+          <a:prstGeom prst="rect">
+            <a:avLst/>
+          </a:prstGeom>
+          <a:solidFill>
+            <a:srgbClr val="002060"/>
+          </a:solidFill>
+          <a:ln>
+            <a:noFill/>
+          </a:ln>
+        </p:spPr>
+        <p:style>
+          <a:lnRef idx="2">
+            <a:schemeClr val="accent1">
+              <a:shade val="15000"/>
+            </a:schemeClr>
+          </a:lnRef>
+          <a:fillRef idx="1">
+            <a:schemeClr val="accent1"/>
+          </a:fillRef>
+          <a:effectRef idx="0">
+            <a:schemeClr val="accent1"/>
+          </a:effectRef>
+          <a:fontRef idx="minor">
+            <a:schemeClr val="lt1"/>
+          </a:fontRef>
+        </p:style>
+        <p:txBody>
+          <a:bodyPr rtlCol="0" anchor="ctr"/>
+          <a:lstStyle/>
+          <a:p>
+            <a:pPr algn="ctr"/>
+            <a:r>
+              <a:rPr kumimoji="1" lang="en-US" altLang="ja-JP" sz="1400" dirty="0">
+                <a:latin typeface="メイリオ" panose="020B0604030504040204" pitchFamily="50" charset="-128"/>
+                <a:ea typeface="メイリオ" panose="020B0604030504040204" pitchFamily="50" charset="-128"/>
+                <a:cs typeface="メイリオ"/>
+              </a:rPr>
+              <a:t>本質課題</a:t>
+            </a:r>
+          </a:p>
+        </p:txBody>
+      </p:sp>
+      <p:sp>
+        <p:nvSpPr>
+          <p:cNvPr id="4" name="Google Shape;752;p28"/>
+          <p:cNvSpPr txBox="1"/>
+          <p:nvPr/>
+        </p:nvSpPr>
+        <p:spPr>
+          <a:xfrm>
+            <a:off x="1984248" y="859536"/>
+            <a:ext cx="7708392" cy="338328"/>
+          </a:xfrm>
+          <a:prstGeom prst="rect">
+            <a:avLst/>
+          </a:prstGeom>
+          <a:noFill/>
+          <a:ln>
+            <a:noFill/>
+          </a:ln>
+        </p:spPr>
+        <p:txBody>
+          <a:bodyPr spcFirstLastPara="1" wrap="square" lIns="91425" tIns="45700" rIns="91425" bIns="45700" anchor="ctr" anchorCtr="0">
+            <a:spAutoFit/>
+          </a:bodyPr>
+          <a:lstStyle/>
+          <a:p>
+            <a:r>
+              <a:rPr lang="en-US" altLang="ja-JP" sz="1600" b="1" dirty="0">
+                <a:latin typeface="メイリオ" panose="020B0604030504040204" pitchFamily="50" charset="-128"/>
+                <a:ea typeface="メイリオ" panose="020B0604030504040204" pitchFamily="50" charset="-128"/>
+                <a:cs typeface="メイリオ"/>
+                <a:sym typeface="Meiryo"/>
+              </a:rPr>
+              <a:t>ためて追い続ける場所が無い。この場所を、LINE公式アカウントでつくる</a:t>
+            </a:r>
+            <a:endParaRPr lang="en-US" altLang="ja-JP" sz="1600" b="1" dirty="0">
+              <a:latin typeface="メイリオ" panose="020B0604030504040204" pitchFamily="50" charset="-128"/>
+              <a:ea typeface="メイリオ" panose="020B0604030504040204" pitchFamily="50" charset="-128"/>
+              <a:cs typeface="メイリオ"/>
+              <a:sym typeface="Meiryo"/>
+            </a:endParaRPr>
+          </a:p>
+        </p:txBody>
+      </p:sp>
+      <p:sp>
+        <p:nvSpPr>
+          <p:cNvPr id="5" name="見出し 01 集める"/>
+          <p:cNvSpPr/>
+          <p:nvPr/>
+        </p:nvSpPr>
+        <p:spPr>
+          <a:xfrm>
+            <a:off x="502920" y="1600200"/>
+            <a:ext cx="2782824" cy="411480"/>
+          </a:xfrm>
+          <a:prstGeom prst="rect">
+            <a:avLst/>
+          </a:prstGeom>
+          <a:solidFill>
+            <a:srgbClr val="002060"/>
+          </a:solidFill>
+          <a:ln>
+            <a:noFill/>
+          </a:ln>
+        </p:spPr>
+        <p:txBody>
+          <a:bodyPr wrap="square" lIns="73152" tIns="36576" rIns="73152" bIns="36576" rtlCol="0" anchor="ctr">
+            <a:noAutofit/>
+          </a:bodyPr>
+          <a:lstStyle/>
+          <a:p>
+            <a:pPr algn="ctr">
+              <a:buNone/>
+            </a:pPr>
+            <a:r>
+              <a:rPr lang="ja-JP" altLang="en-US" sz="1400" b="1" dirty="0">
+                <a:solidFill>
+                  <a:srgbClr val="FFFFFF"/>
+                </a:solidFill>
+                <a:latin typeface="メイリオ" panose="020B0604030504040204" pitchFamily="50" charset="-128"/>
+                <a:ea typeface="メイリオ" panose="020B0604030504040204" pitchFamily="50" charset="-128"/>
+                <a:cs typeface="メイリオ"/>
+              </a:rPr>
+              <a:t>01 集める</a:t>
+            </a:r>
+            <a:endParaRPr lang="ja-JP" altLang="en-US" sz="1200" dirty="0">
+              <a:latin typeface="メイリオ"/>
+              <a:ea typeface="メイリオ"/>
+              <a:cs typeface="メイリオ"/>
+            </a:endParaRPr>
+          </a:p>
+        </p:txBody>
+      </p:sp>
+      <p:sp>
+        <p:nvSpPr>
+          <p:cNvPr id="6" name="課題1"/>
+          <p:cNvSpPr/>
+          <p:nvPr/>
+        </p:nvSpPr>
+        <p:spPr>
+          <a:xfrm>
+            <a:off x="502920" y="2011680"/>
+            <a:ext cx="2782824" cy="1783080"/>
+          </a:xfrm>
+          <a:prstGeom prst="rect">
+            <a:avLst/>
+          </a:prstGeom>
+          <a:solidFill>
+            <a:srgbClr val="F2F2F2"/>
+          </a:solidFill>
+          <a:ln>
+            <a:noFill/>
+          </a:ln>
+        </p:spPr>
+        <p:txBody>
+          <a:bodyPr wrap="square" lIns="137160" tIns="91440" rIns="137160" bIns="91440" rtlCol="0" anchor="ctr">
+            <a:noAutofit/>
+          </a:bodyPr>
+          <a:lstStyle/>
+          <a:p>
+            <a:pPr algn="ctr">
+              <a:lnSpc>
+                <a:spcPct val="140000"/>
+              </a:lnSpc>
+              <a:buNone/>
+            </a:pPr>
+            <a:r>
+              <a:rPr lang="ja-JP" altLang="en-US" sz="1500" b="0" dirty="0">
+                <a:solidFill>
+                  <a:srgbClr val="333333"/>
+                </a:solidFill>
+                <a:latin typeface="メイリオ" panose="020B0604030504040204" pitchFamily="50" charset="-128"/>
+                <a:ea typeface="メイリオ" panose="020B0604030504040204" pitchFamily="50" charset="-128"/>
+                <a:cs typeface="メイリオ"/>
+              </a:rPr>
+              <a:t>離れる方・予約した方を、友だちにする手段が無い</a:t>
+            </a:r>
+            <a:endParaRPr lang="ja-JP" altLang="en-US" sz="1200" dirty="0">
+              <a:latin typeface="メイリオ"/>
+              <a:ea typeface="メイリオ"/>
+              <a:cs typeface="メイリオ"/>
+            </a:endParaRPr>
+          </a:p>
+        </p:txBody>
+      </p:sp>
+      <p:sp>
+        <p:nvSpPr>
+          <p:cNvPr id="7" name="矢印下"/>
+          <p:cNvSpPr/>
+          <p:nvPr/>
+        </p:nvSpPr>
+        <p:spPr>
+          <a:xfrm>
+            <a:off x="1665732" y="3840480"/>
+            <a:ext cx="457200" cy="411480"/>
+          </a:xfrm>
+          <a:prstGeom prst="rect">
+            <a:avLst/>
+          </a:prstGeom>
+          <a:noFill/>
+          <a:ln>
+            <a:noFill/>
+          </a:ln>
+        </p:spPr>
+        <p:txBody>
+          <a:bodyPr wrap="square" lIns="0" tIns="0" rIns="0" bIns="0" rtlCol="0" anchor="ctr">
+            <a:noAutofit/>
+          </a:bodyPr>
+          <a:lstStyle/>
+          <a:p>
+            <a:pPr algn="ctr">
+              <a:buNone/>
+            </a:pPr>
+            <a:r>
+              <a:rPr lang="ja-JP" altLang="en-US" sz="1600" b="0" dirty="0">
+                <a:solidFill>
+                  <a:srgbClr val="002060"/>
+                </a:solidFill>
+                <a:latin typeface="メイリオ" panose="020B0604030504040204" pitchFamily="50" charset="-128"/>
+                <a:ea typeface="メイリオ" panose="020B0604030504040204" pitchFamily="50" charset="-128"/>
+                <a:cs typeface="メイリオ"/>
+              </a:rPr>
+              <a:t>▼</a:t>
+            </a:r>
+            <a:endParaRPr lang="ja-JP" altLang="en-US" sz="1200" dirty="0">
+              <a:latin typeface="メイリオ"/>
+              <a:ea typeface="メイリオ"/>
+              <a:cs typeface="メイリオ"/>
+            </a:endParaRPr>
+          </a:p>
+        </p:txBody>
+      </p:sp>
+      <p:sp>
+        <p:nvSpPr>
+          <p:cNvPr id="8" name="打ち手1"/>
+          <p:cNvSpPr/>
+          <p:nvPr/>
+        </p:nvSpPr>
+        <p:spPr>
+          <a:xfrm>
+            <a:off x="502920" y="4297680"/>
+            <a:ext cx="2782824" cy="1737360"/>
+          </a:xfrm>
+          <a:prstGeom prst="rect">
+            <a:avLst/>
+          </a:prstGeom>
+          <a:solidFill>
+            <a:srgbClr val="DCE6F2"/>
+          </a:solidFill>
+          <a:ln>
+            <a:noFill/>
+          </a:ln>
+        </p:spPr>
+        <p:txBody>
+          <a:bodyPr wrap="square" lIns="73152" tIns="36576" rIns="73152" bIns="36576" rtlCol="0" anchor="ctr">
+            <a:noAutofit/>
+          </a:bodyPr>
+          <a:lstStyle/>
+          <a:p>
+            <a:pPr algn="ctr">
+              <a:lnSpc>
+                <a:spcPct val="130000"/>
+              </a:lnSpc>
+              <a:buNone/>
+            </a:pPr>
+            <a:r>
+              <a:rPr lang="ja-JP" altLang="en-US" sz="1600" b="1" dirty="0">
+                <a:solidFill>
+                  <a:srgbClr val="002060"/>
+                </a:solidFill>
+                <a:latin typeface="メイリオ" panose="020B0604030504040204" pitchFamily="50" charset="-128"/>
+                <a:ea typeface="メイリオ" panose="020B0604030504040204" pitchFamily="50" charset="-128"/>
+                <a:cs typeface="メイリオ"/>
+              </a:rPr>
+              <a:t>ポップアップツール</a:t>
+            </a:r>
+            <a:endParaRPr lang="ja-JP" altLang="en-US" sz="1200" dirty="0">
+              <a:latin typeface="メイリオ"/>
+              <a:ea typeface="メイリオ"/>
+              <a:cs typeface="メイリオ"/>
+            </a:endParaRPr>
+          </a:p>
+          <a:p>
+            <a:pPr algn="ctr">
+              <a:lnSpc>
+                <a:spcPct val="130000"/>
+              </a:lnSpc>
+              <a:buNone/>
+            </a:pPr>
+            <a:r>
+              <a:rPr lang="ja-JP" altLang="en-US" sz="1600" b="1" dirty="0">
+                <a:solidFill>
+                  <a:srgbClr val="002060"/>
+                </a:solidFill>
+                <a:latin typeface="メイリオ" panose="020B0604030504040204" pitchFamily="50" charset="-128"/>
+                <a:ea typeface="メイリオ" panose="020B0604030504040204" pitchFamily="50" charset="-128"/>
+                <a:cs typeface="メイリオ"/>
+              </a:rPr>
+              <a:t>サンクスLINE誘導</a:t>
+            </a:r>
+            <a:endParaRPr lang="ja-JP" altLang="en-US" sz="1200" dirty="0">
+              <a:latin typeface="メイリオ"/>
+              <a:ea typeface="メイリオ"/>
+              <a:cs typeface="メイリオ"/>
+            </a:endParaRPr>
+          </a:p>
+        </p:txBody>
+      </p:sp>
+      <p:sp>
+        <p:nvSpPr>
+          <p:cNvPr id="9" name="見出し 02 追う"/>
+          <p:cNvSpPr/>
+          <p:nvPr/>
+        </p:nvSpPr>
+        <p:spPr>
+          <a:xfrm>
+            <a:off x="3560064" y="1600200"/>
+            <a:ext cx="2782824" cy="411480"/>
+          </a:xfrm>
+          <a:prstGeom prst="rect">
+            <a:avLst/>
+          </a:prstGeom>
+          <a:solidFill>
+            <a:srgbClr val="002060"/>
+          </a:solidFill>
+          <a:ln>
+            <a:noFill/>
+          </a:ln>
+        </p:spPr>
+        <p:txBody>
+          <a:bodyPr wrap="square" lIns="73152" tIns="36576" rIns="73152" bIns="36576" rtlCol="0" anchor="ctr">
+            <a:noAutofit/>
+          </a:bodyPr>
+          <a:lstStyle/>
+          <a:p>
+            <a:pPr algn="ctr">
+              <a:buNone/>
+            </a:pPr>
+            <a:r>
+              <a:rPr lang="ja-JP" altLang="en-US" sz="1400" b="1" dirty="0">
+                <a:solidFill>
+                  <a:srgbClr val="FFFFFF"/>
+                </a:solidFill>
+                <a:latin typeface="メイリオ" panose="020B0604030504040204" pitchFamily="50" charset="-128"/>
+                <a:ea typeface="メイリオ" panose="020B0604030504040204" pitchFamily="50" charset="-128"/>
+                <a:cs typeface="メイリオ"/>
+              </a:rPr>
+              <a:t>02 追う</a:t>
+            </a:r>
+            <a:endParaRPr lang="ja-JP" altLang="en-US" sz="1200" dirty="0">
+              <a:latin typeface="メイリオ"/>
+              <a:ea typeface="メイリオ"/>
+              <a:cs typeface="メイリオ"/>
+            </a:endParaRPr>
+          </a:p>
+        </p:txBody>
+      </p:sp>
+      <p:sp>
+        <p:nvSpPr>
+          <p:cNvPr id="10" name="課題2"/>
+          <p:cNvSpPr/>
+          <p:nvPr/>
+        </p:nvSpPr>
+        <p:spPr>
+          <a:xfrm>
+            <a:off x="3560064" y="2011680"/>
+            <a:ext cx="2782824" cy="1783080"/>
+          </a:xfrm>
+          <a:prstGeom prst="rect">
+            <a:avLst/>
+          </a:prstGeom>
+          <a:solidFill>
+            <a:srgbClr val="F2F2F2"/>
+          </a:solidFill>
+          <a:ln>
+            <a:noFill/>
+          </a:ln>
+        </p:spPr>
+        <p:txBody>
+          <a:bodyPr wrap="square" lIns="137160" tIns="91440" rIns="137160" bIns="91440" rtlCol="0" anchor="ctr">
+            <a:noAutofit/>
+          </a:bodyPr>
+          <a:lstStyle/>
+          <a:p>
+            <a:pPr algn="ctr">
+              <a:lnSpc>
+                <a:spcPct val="140000"/>
+              </a:lnSpc>
+              <a:buNone/>
+            </a:pPr>
+            <a:r>
+              <a:rPr lang="ja-JP" altLang="en-US" sz="1500" b="0" dirty="0">
+                <a:solidFill>
+                  <a:srgbClr val="333333"/>
+                </a:solidFill>
+                <a:latin typeface="メイリオ" panose="020B0604030504040204" pitchFamily="50" charset="-128"/>
+                <a:ea typeface="メイリオ" panose="020B0604030504040204" pitchFamily="50" charset="-128"/>
+                <a:cs typeface="メイリオ"/>
+              </a:rPr>
+              <a:t>次のイベントまで、情報を届ける手段が無い</a:t>
+            </a:r>
+            <a:endParaRPr lang="ja-JP" altLang="en-US" sz="1200" dirty="0">
+              <a:latin typeface="メイリオ"/>
+              <a:ea typeface="メイリオ"/>
+              <a:cs typeface="メイリオ"/>
+            </a:endParaRPr>
+          </a:p>
+        </p:txBody>
+      </p:sp>
+      <p:sp>
+        <p:nvSpPr>
+          <p:cNvPr id="11" name="矢印下"/>
+          <p:cNvSpPr/>
+          <p:nvPr/>
+        </p:nvSpPr>
+        <p:spPr>
+          <a:xfrm>
+            <a:off x="4722876" y="3840480"/>
+            <a:ext cx="457200" cy="411480"/>
+          </a:xfrm>
+          <a:prstGeom prst="rect">
+            <a:avLst/>
+          </a:prstGeom>
+          <a:noFill/>
+          <a:ln>
+            <a:noFill/>
+          </a:ln>
+        </p:spPr>
+        <p:txBody>
+          <a:bodyPr wrap="square" lIns="0" tIns="0" rIns="0" bIns="0" rtlCol="0" anchor="ctr">
+            <a:noAutofit/>
+          </a:bodyPr>
+          <a:lstStyle/>
+          <a:p>
+            <a:pPr algn="ctr">
+              <a:buNone/>
+            </a:pPr>
+            <a:r>
+              <a:rPr lang="ja-JP" altLang="en-US" sz="1600" b="0" dirty="0">
+                <a:solidFill>
+                  <a:srgbClr val="002060"/>
+                </a:solidFill>
+                <a:latin typeface="メイリオ" panose="020B0604030504040204" pitchFamily="50" charset="-128"/>
+                <a:ea typeface="メイリオ" panose="020B0604030504040204" pitchFamily="50" charset="-128"/>
+                <a:cs typeface="メイリオ"/>
+              </a:rPr>
+              <a:t>▼</a:t>
+            </a:r>
+            <a:endParaRPr lang="ja-JP" altLang="en-US" sz="1200" dirty="0">
+              <a:latin typeface="メイリオ"/>
+              <a:ea typeface="メイリオ"/>
+              <a:cs typeface="メイリオ"/>
+            </a:endParaRPr>
+          </a:p>
+        </p:txBody>
+      </p:sp>
+      <p:sp>
+        <p:nvSpPr>
+          <p:cNvPr id="12" name="打ち手2"/>
+          <p:cNvSpPr/>
+          <p:nvPr/>
+        </p:nvSpPr>
+        <p:spPr>
+          <a:xfrm>
+            <a:off x="3560064" y="4297680"/>
+            <a:ext cx="2782824" cy="1737360"/>
+          </a:xfrm>
+          <a:prstGeom prst="rect">
+            <a:avLst/>
+          </a:prstGeom>
+          <a:solidFill>
+            <a:srgbClr val="DCE6F2"/>
+          </a:solidFill>
+          <a:ln>
+            <a:noFill/>
+          </a:ln>
+        </p:spPr>
+        <p:txBody>
+          <a:bodyPr wrap="square" lIns="73152" tIns="36576" rIns="73152" bIns="36576" rtlCol="0" anchor="ctr">
+            <a:noAutofit/>
+          </a:bodyPr>
+          <a:lstStyle/>
+          <a:p>
+            <a:pPr algn="ctr">
+              <a:lnSpc>
+                <a:spcPct val="130000"/>
+              </a:lnSpc>
+              <a:buNone/>
+            </a:pPr>
+            <a:r>
+              <a:rPr lang="ja-JP" altLang="en-US" sz="1600" b="1" dirty="0">
+                <a:solidFill>
+                  <a:srgbClr val="002060"/>
+                </a:solidFill>
+                <a:latin typeface="メイリオ" panose="020B0604030504040204" pitchFamily="50" charset="-128"/>
+                <a:ea typeface="メイリオ" panose="020B0604030504040204" pitchFamily="50" charset="-128"/>
+                <a:cs typeface="メイリオ"/>
+              </a:rPr>
+              <a:t>平常期の配信</a:t>
+            </a:r>
+            <a:endParaRPr lang="ja-JP" altLang="en-US" sz="1200" dirty="0">
+              <a:latin typeface="メイリオ"/>
+              <a:ea typeface="メイリオ"/>
+              <a:cs typeface="メイリオ"/>
+            </a:endParaRPr>
+          </a:p>
+        </p:txBody>
+      </p:sp>
+      <p:sp>
+        <p:nvSpPr>
+          <p:cNvPr id="13" name="見出し 03 つなげる"/>
+          <p:cNvSpPr/>
+          <p:nvPr/>
+        </p:nvSpPr>
+        <p:spPr>
+          <a:xfrm>
+            <a:off x="6617208" y="1600200"/>
+            <a:ext cx="2782824" cy="411480"/>
+          </a:xfrm>
+          <a:prstGeom prst="rect">
+            <a:avLst/>
+          </a:prstGeom>
+          <a:solidFill>
+            <a:srgbClr val="002060"/>
+          </a:solidFill>
+          <a:ln>
+            <a:noFill/>
+          </a:ln>
+        </p:spPr>
+        <p:txBody>
+          <a:bodyPr wrap="square" lIns="73152" tIns="36576" rIns="73152" bIns="36576" rtlCol="0" anchor="ctr">
+            <a:noAutofit/>
+          </a:bodyPr>
+          <a:lstStyle/>
+          <a:p>
+            <a:pPr algn="ctr">
+              <a:buNone/>
+            </a:pPr>
+            <a:r>
+              <a:rPr lang="ja-JP" altLang="en-US" sz="1400" b="1" dirty="0">
+                <a:solidFill>
+                  <a:srgbClr val="FFFFFF"/>
+                </a:solidFill>
+                <a:latin typeface="メイリオ" panose="020B0604030504040204" pitchFamily="50" charset="-128"/>
+                <a:ea typeface="メイリオ" panose="020B0604030504040204" pitchFamily="50" charset="-128"/>
+                <a:cs typeface="メイリオ"/>
+              </a:rPr>
+              <a:t>03 つなげる</a:t>
+            </a:r>
+            <a:endParaRPr lang="ja-JP" altLang="en-US" sz="1200" dirty="0">
+              <a:latin typeface="メイリオ"/>
+              <a:ea typeface="メイリオ"/>
+              <a:cs typeface="メイリオ"/>
+            </a:endParaRPr>
+          </a:p>
+        </p:txBody>
+      </p:sp>
+      <p:sp>
+        <p:nvSpPr>
+          <p:cNvPr id="14" name="課題3"/>
+          <p:cNvSpPr/>
+          <p:nvPr/>
+        </p:nvSpPr>
+        <p:spPr>
+          <a:xfrm>
+            <a:off x="6617208" y="2011680"/>
+            <a:ext cx="2782824" cy="1783080"/>
+          </a:xfrm>
+          <a:prstGeom prst="rect">
+            <a:avLst/>
+          </a:prstGeom>
+          <a:solidFill>
+            <a:srgbClr val="F2F2F2"/>
+          </a:solidFill>
+          <a:ln>
+            <a:noFill/>
+          </a:ln>
+        </p:spPr>
+        <p:txBody>
+          <a:bodyPr wrap="square" lIns="137160" tIns="91440" rIns="137160" bIns="91440" rtlCol="0" anchor="ctr">
+            <a:noAutofit/>
+          </a:bodyPr>
+          <a:lstStyle/>
+          <a:p>
+            <a:pPr algn="ctr">
+              <a:lnSpc>
+                <a:spcPct val="140000"/>
+              </a:lnSpc>
+              <a:buNone/>
+            </a:pPr>
+            <a:r>
+              <a:rPr lang="ja-JP" altLang="en-US" sz="1500" b="0" dirty="0">
+                <a:solidFill>
+                  <a:srgbClr val="333333"/>
+                </a:solidFill>
+                <a:latin typeface="メイリオ" panose="020B0604030504040204" pitchFamily="50" charset="-128"/>
+                <a:ea typeface="メイリオ" panose="020B0604030504040204" pitchFamily="50" charset="-128"/>
+                <a:cs typeface="メイリオ"/>
+              </a:rPr>
+              <a:t>参加した方に、入会を案内する手段が無い</a:t>
+            </a:r>
+            <a:endParaRPr lang="ja-JP" altLang="en-US" sz="1200" dirty="0">
+              <a:latin typeface="メイリオ"/>
+              <a:ea typeface="メイリオ"/>
+              <a:cs typeface="メイリオ"/>
+            </a:endParaRPr>
+          </a:p>
+        </p:txBody>
+      </p:sp>
+      <p:sp>
+        <p:nvSpPr>
+          <p:cNvPr id="15" name="矢印下"/>
+          <p:cNvSpPr/>
+          <p:nvPr/>
+        </p:nvSpPr>
+        <p:spPr>
+          <a:xfrm>
+            <a:off x="7780020" y="3840480"/>
+            <a:ext cx="457200" cy="411480"/>
+          </a:xfrm>
+          <a:prstGeom prst="rect">
+            <a:avLst/>
+          </a:prstGeom>
+          <a:noFill/>
+          <a:ln>
+            <a:noFill/>
+          </a:ln>
+        </p:spPr>
+        <p:txBody>
+          <a:bodyPr wrap="square" lIns="0" tIns="0" rIns="0" bIns="0" rtlCol="0" anchor="ctr">
+            <a:noAutofit/>
+          </a:bodyPr>
+          <a:lstStyle/>
+          <a:p>
+            <a:pPr algn="ctr">
+              <a:buNone/>
+            </a:pPr>
+            <a:r>
+              <a:rPr lang="ja-JP" altLang="en-US" sz="1600" b="0" dirty="0">
+                <a:solidFill>
+                  <a:srgbClr val="002060"/>
+                </a:solidFill>
+                <a:latin typeface="メイリオ" panose="020B0604030504040204" pitchFamily="50" charset="-128"/>
+                <a:ea typeface="メイリオ" panose="020B0604030504040204" pitchFamily="50" charset="-128"/>
+                <a:cs typeface="メイリオ"/>
+              </a:rPr>
+              <a:t>▼</a:t>
+            </a:r>
+            <a:endParaRPr lang="ja-JP" altLang="en-US" sz="1200" dirty="0">
+              <a:latin typeface="メイリオ"/>
+              <a:ea typeface="メイリオ"/>
+              <a:cs typeface="メイリオ"/>
+            </a:endParaRPr>
+          </a:p>
+        </p:txBody>
+      </p:sp>
+      <p:sp>
+        <p:nvSpPr>
+          <p:cNvPr id="16" name="打ち手3"/>
+          <p:cNvSpPr/>
+          <p:nvPr/>
+        </p:nvSpPr>
+        <p:spPr>
+          <a:xfrm>
+            <a:off x="6617208" y="4297680"/>
+            <a:ext cx="2782824" cy="1737360"/>
+          </a:xfrm>
+          <a:prstGeom prst="rect">
+            <a:avLst/>
+          </a:prstGeom>
+          <a:solidFill>
+            <a:srgbClr val="DCE6F2"/>
+          </a:solidFill>
+          <a:ln>
+            <a:noFill/>
+          </a:ln>
+        </p:spPr>
+        <p:txBody>
+          <a:bodyPr wrap="square" lIns="73152" tIns="36576" rIns="73152" bIns="36576" rtlCol="0" anchor="ctr">
+            <a:noAutofit/>
+          </a:bodyPr>
+          <a:lstStyle/>
+          <a:p>
+            <a:pPr algn="ctr">
+              <a:lnSpc>
+                <a:spcPct val="130000"/>
+              </a:lnSpc>
+              <a:buNone/>
+            </a:pPr>
+            <a:r>
+              <a:rPr lang="ja-JP" altLang="en-US" sz="1600" b="1" dirty="0">
+                <a:solidFill>
+                  <a:srgbClr val="002060"/>
+                </a:solidFill>
+                <a:latin typeface="メイリオ" panose="020B0604030504040204" pitchFamily="50" charset="-128"/>
+                <a:ea typeface="メイリオ" panose="020B0604030504040204" pitchFamily="50" charset="-128"/>
+                <a:cs typeface="メイリオ"/>
+              </a:rPr>
+              <a:t>参加後の入会の案内</a:t>
+            </a:r>
+            <a:endParaRPr lang="ja-JP" altLang="en-US" sz="1200" dirty="0">
+              <a:latin typeface="メイリオ"/>
+              <a:ea typeface="メイリオ"/>
+              <a:cs typeface="メイリオ"/>
+            </a:endParaRPr>
+          </a:p>
+        </p:txBody>
+      </p:sp>
+    </p:spTree>
+  </p:cSld>
+  <p:clrMapOvr>
+    <a:masterClrMapping/>
+  </p:clrMapOvr>
+</p:sld>
+</file>
+
+<file path=ppt/slides/slide67.xml><?xml version="1.0" encoding="utf-8"?>
+<p:sld xmlns:a="http://schemas.openxmlformats.org/drawingml/2006/main" xmlns:p="http://schemas.openxmlformats.org/presentationml/2006/main" xmlns:r="http://schemas.openxmlformats.org/officeDocument/2006/relationships">
+  <p:cSld>
+    <p:spTree>
+      <p:nvGrpSpPr>
+        <p:cNvPr id="1" name=""/>
+        <p:cNvGrpSpPr/>
+        <p:nvPr/>
+      </p:nvGrpSpPr>
+      <p:grpSpPr/>
+      <p:sp>
+        <p:nvSpPr>
+          <p:cNvPr id="2" name="Google Shape;752;p28"/>
+          <p:cNvSpPr txBox="1"/>
+          <p:nvPr/>
+        </p:nvSpPr>
+        <p:spPr>
+          <a:xfrm>
+            <a:off x="548883" y="138137"/>
+            <a:ext cx="6276325" cy="338514"/>
+          </a:xfrm>
+          <a:prstGeom prst="rect">
+            <a:avLst/>
+          </a:prstGeom>
+          <a:noFill/>
+          <a:ln>
+            <a:noFill/>
+          </a:ln>
+        </p:spPr>
+        <p:txBody>
+          <a:bodyPr spcFirstLastPara="1" wrap="square" lIns="91425" tIns="45700" rIns="91425" bIns="45700" anchor="ctr" anchorCtr="0">
+            <a:spAutoFit/>
+          </a:bodyPr>
+          <a:lstStyle/>
+          <a:p>
+            <a:pPr lvl="0"/>
+            <a:r>
+              <a:rPr lang="ja-JP" altLang="en-US" sz="1600" b="1" dirty="0">
+                <a:solidFill>
+                  <a:srgbClr val="323366"/>
+                </a:solidFill>
+                <a:latin typeface="メイリオ" panose="020B0604030504040204" pitchFamily="50" charset="-128"/>
+                <a:ea typeface="メイリオ" panose="020B0604030504040204" pitchFamily="50" charset="-128"/>
+                <a:cs typeface="メイリオ"/>
+                <a:sym typeface="Meiryo"/>
+              </a:rPr>
               <a:t>なぜLINEか</a:t>
             </a:r>
           </a:p>
@@ -7295,7 +8824,7 @@
 </p:sld>
 </file>
 
-<file path=ppt/slides/slide67.xml><?xml version="1.0" encoding="utf-8"?>
+<file path=ppt/slides/slide68.xml><?xml version="1.0" encoding="utf-8"?>
 <p:sld xmlns:a="http://schemas.openxmlformats.org/drawingml/2006/main" xmlns:p="http://schemas.openxmlformats.org/presentationml/2006/main" xmlns:r="http://schemas.openxmlformats.org/officeDocument/2006/relationships">
   <p:cSld>
     <p:spTree>
@@ -8299,7 +9828,1530 @@
 </p:sld>
 </file>
 
-<file path=ppt/slides/slide68.xml><?xml version="1.0" encoding="utf-8"?>
+<file path=ppt/slides/slide69.xml><?xml version="1.0" encoding="utf-8"?>
+<p:sld xmlns:a="http://schemas.openxmlformats.org/drawingml/2006/main" xmlns:p="http://schemas.openxmlformats.org/presentationml/2006/main" xmlns:r="http://schemas.openxmlformats.org/officeDocument/2006/relationships">
+  <p:cSld>
+    <p:spTree>
+      <p:nvGrpSpPr>
+        <p:cNvPr id="1" name=""/>
+        <p:cNvGrpSpPr/>
+        <p:nvPr/>
+      </p:nvGrpSpPr>
+      <p:grpSpPr/>
+      <p:sp>
+        <p:nvSpPr>
+          <p:cNvPr id="2" name="Google Shape;752;p28"/>
+          <p:cNvSpPr txBox="1"/>
+          <p:nvPr/>
+        </p:nvSpPr>
+        <p:spPr>
+          <a:xfrm>
+            <a:off x="548883" y="138137"/>
+            <a:ext cx="6276325" cy="338514"/>
+          </a:xfrm>
+          <a:prstGeom prst="rect">
+            <a:avLst/>
+          </a:prstGeom>
+          <a:noFill/>
+          <a:ln>
+            <a:noFill/>
+          </a:ln>
+        </p:spPr>
+        <p:txBody>
+          <a:bodyPr spcFirstLastPara="1" wrap="square" lIns="91425" tIns="45700" rIns="91425" bIns="45700" anchor="ctr" anchorCtr="0">
+            <a:spAutoFit/>
+          </a:bodyPr>
+          <a:lstStyle/>
+          <a:p>
+            <a:pPr lvl="0"/>
+            <a:r>
+              <a:rPr lang="ja-JP" altLang="en-US" sz="1600" b="1" dirty="0">
+                <a:solidFill>
+                  <a:srgbClr val="323366"/>
+                </a:solidFill>
+                <a:latin typeface="メイリオ" panose="020B0604030504040204" pitchFamily="50" charset="-128"/>
+                <a:ea typeface="メイリオ" panose="020B0604030504040204" pitchFamily="50" charset="-128"/>
+                <a:cs typeface="メイリオ"/>
+                <a:sym typeface="Meiryo"/>
+              </a:rPr>
+              <a:t>他社のLINE運用</a:t>
+            </a:r>
+          </a:p>
+        </p:txBody>
+      </p:sp>
+      <p:sp>
+        <p:nvSpPr>
+          <p:cNvPr id="3" name="正方形/長方形 8"/>
+          <p:cNvSpPr/>
+          <p:nvPr/>
+        </p:nvSpPr>
+        <p:spPr>
+          <a:xfrm>
+            <a:off x="0" y="777240"/>
+            <a:ext cx="1801368" cy="502920"/>
+          </a:xfrm>
+          <a:prstGeom prst="rect">
+            <a:avLst/>
+          </a:prstGeom>
+          <a:solidFill>
+            <a:srgbClr val="002060"/>
+          </a:solidFill>
+          <a:ln>
+            <a:noFill/>
+          </a:ln>
+        </p:spPr>
+        <p:style>
+          <a:lnRef idx="2">
+            <a:schemeClr val="accent1">
+              <a:shade val="15000"/>
+            </a:schemeClr>
+          </a:lnRef>
+          <a:fillRef idx="1">
+            <a:schemeClr val="accent1"/>
+          </a:fillRef>
+          <a:effectRef idx="0">
+            <a:schemeClr val="accent1"/>
+          </a:effectRef>
+          <a:fontRef idx="minor">
+            <a:schemeClr val="lt1"/>
+          </a:fontRef>
+        </p:style>
+        <p:txBody>
+          <a:bodyPr rtlCol="0" anchor="ctr"/>
+          <a:lstStyle/>
+          <a:p>
+            <a:pPr algn="ctr"/>
+            <a:r>
+              <a:rPr kumimoji="1" lang="en-US" altLang="ja-JP" sz="1400" dirty="0">
+                <a:latin typeface="メイリオ" panose="020B0604030504040204" pitchFamily="50" charset="-128"/>
+                <a:ea typeface="メイリオ" panose="020B0604030504040204" pitchFamily="50" charset="-128"/>
+                <a:cs typeface="メイリオ"/>
+              </a:rPr>
+              <a:t>他社の運用</a:t>
+            </a:r>
+          </a:p>
+        </p:txBody>
+      </p:sp>
+      <p:sp>
+        <p:nvSpPr>
+          <p:cNvPr id="4" name="Google Shape;752;p28"/>
+          <p:cNvSpPr txBox="1"/>
+          <p:nvPr/>
+        </p:nvSpPr>
+        <p:spPr>
+          <a:xfrm>
+            <a:off x="1984248" y="859536"/>
+            <a:ext cx="7708392" cy="338328"/>
+          </a:xfrm>
+          <a:prstGeom prst="rect">
+            <a:avLst/>
+          </a:prstGeom>
+          <a:noFill/>
+          <a:ln>
+            <a:noFill/>
+          </a:ln>
+        </p:spPr>
+        <p:txBody>
+          <a:bodyPr spcFirstLastPara="1" wrap="square" lIns="91425" tIns="45700" rIns="91425" bIns="45700" anchor="ctr" anchorCtr="0">
+            <a:spAutoFit/>
+          </a:bodyPr>
+          <a:lstStyle/>
+          <a:p>
+            <a:r>
+              <a:rPr lang="en-US" altLang="ja-JP" sz="1600" b="1" dirty="0">
+                <a:latin typeface="メイリオ" panose="020B0604030504040204" pitchFamily="50" charset="-128"/>
+                <a:ea typeface="メイリオ" panose="020B0604030504040204" pitchFamily="50" charset="-128"/>
+                <a:cs typeface="メイリオ"/>
+                <a:sym typeface="Meiryo"/>
+              </a:rPr>
+              <a:t>保険営業の方向けの他社も、LINEで特典を渡し、友だちに学びを届けている</a:t>
+            </a:r>
+            <a:endParaRPr lang="en-US" altLang="ja-JP" sz="1600" b="1" dirty="0">
+              <a:latin typeface="メイリオ" panose="020B0604030504040204" pitchFamily="50" charset="-128"/>
+              <a:ea typeface="メイリオ" panose="020B0604030504040204" pitchFamily="50" charset="-128"/>
+              <a:cs typeface="メイリオ"/>
+              <a:sym typeface="Meiryo"/>
+            </a:endParaRPr>
+          </a:p>
+        </p:txBody>
+      </p:sp>
+      <p:sp>
+        <p:nvSpPr>
+          <p:cNvPr id="5" name="見出し 画面"/>
+          <p:cNvSpPr/>
+          <p:nvPr/>
+        </p:nvSpPr>
+        <p:spPr>
+          <a:xfrm>
+            <a:off x="502920" y="1572768"/>
+            <a:ext cx="1481328" cy="310896"/>
+          </a:xfrm>
+          <a:prstGeom prst="rect">
+            <a:avLst/>
+          </a:prstGeom>
+          <a:noFill/>
+          <a:ln>
+            <a:noFill/>
+          </a:ln>
+        </p:spPr>
+        <p:txBody>
+          <a:bodyPr wrap="square" lIns="0" tIns="0" rIns="0" bIns="18288" rtlCol="0" anchor="b">
+            <a:noAutofit/>
+          </a:bodyPr>
+          <a:lstStyle/>
+          <a:p>
+            <a:pPr algn="ctr">
+              <a:buNone/>
+            </a:pPr>
+            <a:r>
+              <a:rPr lang="ja-JP" altLang="en-US" sz="1200" b="1" dirty="0">
+                <a:solidFill>
+                  <a:srgbClr val="002060"/>
+                </a:solidFill>
+                <a:latin typeface="メイリオ" panose="020B0604030504040204" pitchFamily="50" charset="-128"/>
+                <a:ea typeface="メイリオ" panose="020B0604030504040204" pitchFamily="50" charset="-128"/>
+                <a:cs typeface="メイリオ"/>
+              </a:rPr>
+              <a:t>野沢塾のあいさつ</a:t>
+            </a:r>
+            <a:endParaRPr lang="ja-JP" altLang="en-US" sz="1200" dirty="0">
+              <a:latin typeface="メイリオ"/>
+              <a:ea typeface="メイリオ"/>
+              <a:cs typeface="メイリオ"/>
+            </a:endParaRPr>
+          </a:p>
+        </p:txBody>
+      </p:sp>
+      <p:pic>
+        <p:nvPicPr>
+          <p:cNvPr id="6" name="Picture 5" descr="sunao_line_nozawa_aisatsu.png"/>
+          <p:cNvPicPr>
+            <a:picLocks noChangeAspect="1"/>
+          </p:cNvPicPr>
+          <p:nvPr/>
+        </p:nvPicPr>
+        <p:blipFill>
+          <a:blip r:embed="rId2"/>
+          <a:stretch>
+            <a:fillRect/>
+          </a:stretch>
+        </p:blipFill>
+        <p:spPr>
+          <a:xfrm>
+            <a:off x="502920" y="1920240"/>
+            <a:ext cx="1481328" cy="3208652"/>
+          </a:xfrm>
+          <a:prstGeom prst="rect">
+            <a:avLst/>
+          </a:prstGeom>
+          <a:ln w="9525">
+            <a:solidFill>
+              <a:srgbClr val="BFBFBF"/>
+            </a:solidFill>
+          </a:ln>
+        </p:spPr>
+      </p:pic>
+      <p:graphicFrame>
+        <p:nvGraphicFramePr>
+          <p:cNvPr id="7" name="他社のLINE運用 6"/>
+          <p:cNvGraphicFramePr>
+            <a:graphicFrameLocks noGrp="1"/>
+          </p:cNvGraphicFramePr>
+          <p:nvPr/>
+        </p:nvGraphicFramePr>
+        <p:xfrm>
+          <a:off x="2258568" y="1572768"/>
+          <a:ext cx="7141464" cy="3520440"/>
+        </p:xfrm>
+        <a:graphic>
+          <a:graphicData uri="http://schemas.openxmlformats.org/drawingml/2006/table">
+            <a:tbl>
+              <a:tblPr/>
+              <a:tblGrid>
+                <a:gridCol w="1143000"/>
+                <a:gridCol w="2999232"/>
+                <a:gridCol w="2999232"/>
+              </a:tblGrid>
+              <a:tr h="411480">
+                <a:tc>
+                  <a:txBody>
+                    <a:bodyPr/>
+                    <a:lstStyle/>
+                    <a:p>
+                      <a:pPr algn="ctr">
+                        <a:buNone/>
+                      </a:pPr>
+                      <a:endParaRPr lang="ja-JP" altLang="en-US" sz="1300" dirty="0">
+                        <a:latin typeface="メイリオ"/>
+                        <a:ea typeface="メイリオ"/>
+                        <a:cs typeface="メイリオ"/>
+                      </a:endParaRPr>
+                    </a:p>
+                  </a:txBody>
+                  <a:tcPr marL="73152" marR="73152" marT="27432" marB="27432" anchor="ctr">
+                    <a:lnL w="9525" cap="flat" cmpd="sng" algn="ctr">
+                      <a:solidFill>
+                        <a:srgbClr val="BFBFBF"/>
+                      </a:solidFill>
+                      <a:prstDash val="solid"/>
+                      <a:round/>
+                      <a:headEnd type="none" w="med" len="med"/>
+                      <a:tailEnd type="none" w="med" len="med"/>
+                    </a:lnL>
+                    <a:lnR w="9525" cap="flat" cmpd="sng" algn="ctr">
+                      <a:solidFill>
+                        <a:srgbClr val="BFBFBF"/>
+                      </a:solidFill>
+                      <a:prstDash val="solid"/>
+                      <a:round/>
+                      <a:headEnd type="none" w="med" len="med"/>
+                      <a:tailEnd type="none" w="med" len="med"/>
+                    </a:lnR>
+                    <a:lnT w="9525" cap="flat" cmpd="sng" algn="ctr">
+                      <a:solidFill>
+                        <a:srgbClr val="BFBFBF"/>
+                      </a:solidFill>
+                      <a:prstDash val="solid"/>
+                      <a:round/>
+                      <a:headEnd type="none" w="med" len="med"/>
+                      <a:tailEnd type="none" w="med" len="med"/>
+                    </a:lnT>
+                    <a:lnB w="9525" cap="flat" cmpd="sng" algn="ctr">
+                      <a:solidFill>
+                        <a:srgbClr val="BFBFBF"/>
+                      </a:solidFill>
+                      <a:prstDash val="solid"/>
+                      <a:round/>
+                      <a:headEnd type="none" w="med" len="med"/>
+                      <a:tailEnd type="none" w="med" len="med"/>
+                    </a:lnB>
+                    <a:solidFill>
+                      <a:srgbClr val="002060"/>
+                    </a:solidFill>
+                  </a:tcPr>
+                </a:tc>
+                <a:tc>
+                  <a:txBody>
+                    <a:bodyPr/>
+                    <a:lstStyle/>
+                    <a:p>
+                      <a:pPr algn="ctr">
+                        <a:buNone/>
+                      </a:pPr>
+                      <a:r>
+                        <a:rPr lang="ja-JP" altLang="en-US" sz="1300" b="1" dirty="0">
+                          <a:solidFill>
+                            <a:srgbClr val="FFFFFF"/>
+                          </a:solidFill>
+                          <a:latin typeface="メイリオ" panose="020B0604030504040204" pitchFamily="50" charset="-128"/>
+                          <a:ea typeface="メイリオ" panose="020B0604030504040204" pitchFamily="50" charset="-128"/>
+                          <a:cs typeface="メイリオ"/>
+                        </a:rPr>
+                        <a:t>野沢塾</a:t>
+                      </a:r>
+                      <a:endParaRPr lang="ja-JP" altLang="en-US" sz="1300" dirty="0">
+                        <a:latin typeface="メイリオ"/>
+                        <a:ea typeface="メイリオ"/>
+                        <a:cs typeface="メイリオ"/>
+                      </a:endParaRPr>
+                    </a:p>
+                  </a:txBody>
+                  <a:tcPr marL="73152" marR="73152" marT="27432" marB="27432" anchor="ctr">
+                    <a:lnL w="9525" cap="flat" cmpd="sng" algn="ctr">
+                      <a:solidFill>
+                        <a:srgbClr val="BFBFBF"/>
+                      </a:solidFill>
+                      <a:prstDash val="solid"/>
+                      <a:round/>
+                      <a:headEnd type="none" w="med" len="med"/>
+                      <a:tailEnd type="none" w="med" len="med"/>
+                    </a:lnL>
+                    <a:lnR w="9525" cap="flat" cmpd="sng" algn="ctr">
+                      <a:solidFill>
+                        <a:srgbClr val="BFBFBF"/>
+                      </a:solidFill>
+                      <a:prstDash val="solid"/>
+                      <a:round/>
+                      <a:headEnd type="none" w="med" len="med"/>
+                      <a:tailEnd type="none" w="med" len="med"/>
+                    </a:lnR>
+                    <a:lnT w="9525" cap="flat" cmpd="sng" algn="ctr">
+                      <a:solidFill>
+                        <a:srgbClr val="BFBFBF"/>
+                      </a:solidFill>
+                      <a:prstDash val="solid"/>
+                      <a:round/>
+                      <a:headEnd type="none" w="med" len="med"/>
+                      <a:tailEnd type="none" w="med" len="med"/>
+                    </a:lnT>
+                    <a:lnB w="9525" cap="flat" cmpd="sng" algn="ctr">
+                      <a:solidFill>
+                        <a:srgbClr val="BFBFBF"/>
+                      </a:solidFill>
+                      <a:prstDash val="solid"/>
+                      <a:round/>
+                      <a:headEnd type="none" w="med" len="med"/>
+                      <a:tailEnd type="none" w="med" len="med"/>
+                    </a:lnB>
+                    <a:solidFill>
+                      <a:srgbClr val="002060"/>
+                    </a:solidFill>
+                  </a:tcPr>
+                </a:tc>
+                <a:tc>
+                  <a:txBody>
+                    <a:bodyPr/>
+                    <a:lstStyle/>
+                    <a:p>
+                      <a:pPr algn="ctr">
+                        <a:buNone/>
+                      </a:pPr>
+                      <a:r>
+                        <a:rPr lang="ja-JP" altLang="en-US" sz="1300" b="1" dirty="0">
+                          <a:solidFill>
+                            <a:srgbClr val="FFFFFF"/>
+                          </a:solidFill>
+                          <a:latin typeface="メイリオ" panose="020B0604030504040204" pitchFamily="50" charset="-128"/>
+                          <a:ea typeface="メイリオ" panose="020B0604030504040204" pitchFamily="50" charset="-128"/>
+                          <a:cs typeface="メイリオ"/>
+                        </a:rPr>
+                        <a:t>R&amp;C保険営業ラボ</a:t>
+                      </a:r>
+                      <a:endParaRPr lang="ja-JP" altLang="en-US" sz="1300" dirty="0">
+                        <a:latin typeface="メイリオ"/>
+                        <a:ea typeface="メイリオ"/>
+                        <a:cs typeface="メイリオ"/>
+                      </a:endParaRPr>
+                    </a:p>
+                  </a:txBody>
+                  <a:tcPr marL="73152" marR="73152" marT="27432" marB="27432" anchor="ctr">
+                    <a:lnL w="9525" cap="flat" cmpd="sng" algn="ctr">
+                      <a:solidFill>
+                        <a:srgbClr val="BFBFBF"/>
+                      </a:solidFill>
+                      <a:prstDash val="solid"/>
+                      <a:round/>
+                      <a:headEnd type="none" w="med" len="med"/>
+                      <a:tailEnd type="none" w="med" len="med"/>
+                    </a:lnL>
+                    <a:lnR w="9525" cap="flat" cmpd="sng" algn="ctr">
+                      <a:solidFill>
+                        <a:srgbClr val="BFBFBF"/>
+                      </a:solidFill>
+                      <a:prstDash val="solid"/>
+                      <a:round/>
+                      <a:headEnd type="none" w="med" len="med"/>
+                      <a:tailEnd type="none" w="med" len="med"/>
+                    </a:lnR>
+                    <a:lnT w="9525" cap="flat" cmpd="sng" algn="ctr">
+                      <a:solidFill>
+                        <a:srgbClr val="BFBFBF"/>
+                      </a:solidFill>
+                      <a:prstDash val="solid"/>
+                      <a:round/>
+                      <a:headEnd type="none" w="med" len="med"/>
+                      <a:tailEnd type="none" w="med" len="med"/>
+                    </a:lnT>
+                    <a:lnB w="9525" cap="flat" cmpd="sng" algn="ctr">
+                      <a:solidFill>
+                        <a:srgbClr val="BFBFBF"/>
+                      </a:solidFill>
+                      <a:prstDash val="solid"/>
+                      <a:round/>
+                      <a:headEnd type="none" w="med" len="med"/>
+                      <a:tailEnd type="none" w="med" len="med"/>
+                    </a:lnB>
+                    <a:solidFill>
+                      <a:srgbClr val="002060"/>
+                    </a:solidFill>
+                  </a:tcPr>
+                </a:tc>
+              </a:tr>
+              <a:tr h="731520">
+                <a:tc>
+                  <a:txBody>
+                    <a:bodyPr/>
+                    <a:lstStyle/>
+                    <a:p>
+                      <a:pPr algn="ctr">
+                        <a:buNone/>
+                      </a:pPr>
+                      <a:r>
+                        <a:rPr lang="ja-JP" altLang="en-US" sz="1300" b="1" dirty="0">
+                          <a:solidFill>
+                            <a:srgbClr val="002060"/>
+                          </a:solidFill>
+                          <a:latin typeface="メイリオ" panose="020B0604030504040204" pitchFamily="50" charset="-128"/>
+                          <a:ea typeface="メイリオ" panose="020B0604030504040204" pitchFamily="50" charset="-128"/>
+                          <a:cs typeface="メイリオ"/>
+                        </a:rPr>
+                        <a:t>サービス</a:t>
+                      </a:r>
+                      <a:endParaRPr lang="ja-JP" altLang="en-US" sz="1300" dirty="0">
+                        <a:latin typeface="メイリオ"/>
+                        <a:ea typeface="メイリオ"/>
+                        <a:cs typeface="メイリオ"/>
+                      </a:endParaRPr>
+                    </a:p>
+                  </a:txBody>
+                  <a:tcPr marL="91440" marR="73152" marT="36576" marB="36576" anchor="ctr">
+                    <a:lnL w="9525" cap="flat" cmpd="sng" algn="ctr">
+                      <a:solidFill>
+                        <a:srgbClr val="BFBFBF"/>
+                      </a:solidFill>
+                      <a:prstDash val="solid"/>
+                      <a:round/>
+                      <a:headEnd type="none" w="med" len="med"/>
+                      <a:tailEnd type="none" w="med" len="med"/>
+                    </a:lnL>
+                    <a:lnR w="9525" cap="flat" cmpd="sng" algn="ctr">
+                      <a:solidFill>
+                        <a:srgbClr val="BFBFBF"/>
+                      </a:solidFill>
+                      <a:prstDash val="solid"/>
+                      <a:round/>
+                      <a:headEnd type="none" w="med" len="med"/>
+                      <a:tailEnd type="none" w="med" len="med"/>
+                    </a:lnR>
+                    <a:lnT w="9525" cap="flat" cmpd="sng" algn="ctr">
+                      <a:solidFill>
+                        <a:srgbClr val="BFBFBF"/>
+                      </a:solidFill>
+                      <a:prstDash val="solid"/>
+                      <a:round/>
+                      <a:headEnd type="none" w="med" len="med"/>
+                      <a:tailEnd type="none" w="med" len="med"/>
+                    </a:lnT>
+                    <a:lnB w="9525" cap="flat" cmpd="sng" algn="ctr">
+                      <a:solidFill>
+                        <a:srgbClr val="BFBFBF"/>
+                      </a:solidFill>
+                      <a:prstDash val="solid"/>
+                      <a:round/>
+                      <a:headEnd type="none" w="med" len="med"/>
+                      <a:tailEnd type="none" w="med" len="med"/>
+                    </a:lnB>
+                    <a:solidFill>
+                      <a:srgbClr val="DCE6F2"/>
+                    </a:solidFill>
+                  </a:tcPr>
+                </a:tc>
+                <a:tc>
+                  <a:txBody>
+                    <a:bodyPr/>
+                    <a:lstStyle/>
+                    <a:p>
+                      <a:pPr algn="l">
+                        <a:buNone/>
+                      </a:pPr>
+                      <a:r>
+                        <a:rPr lang="ja-JP" altLang="en-US" sz="1200" b="0" dirty="0">
+                          <a:solidFill>
+                            <a:srgbClr val="333333"/>
+                          </a:solidFill>
+                          <a:latin typeface="メイリオ" panose="020B0604030504040204" pitchFamily="50" charset="-128"/>
+                          <a:ea typeface="メイリオ" panose="020B0604030504040204" pitchFamily="50" charset="-128"/>
+                          <a:cs typeface="メイリオ"/>
+                        </a:rPr>
+                        <a:t>保険営業の方向けの講座</a:t>
+                      </a:r>
+                      <a:br>
+                        <a:rPr lang="ja-JP" altLang="en-US" sz="1200" b="0" dirty="0">
+                          <a:solidFill>
+                            <a:srgbClr val="333333"/>
+                          </a:solidFill>
+                          <a:latin typeface="メイリオ" panose="020B0604030504040204" pitchFamily="50" charset="-128"/>
+                          <a:ea typeface="メイリオ" panose="020B0604030504040204" pitchFamily="50" charset="-128"/>
+                          <a:cs typeface="メイリオ"/>
+                        </a:rPr>
+                      </a:br>
+                      <a:r>
+                        <a:rPr lang="ja-JP" altLang="en-US" sz="1200" b="0" dirty="0">
+                          <a:solidFill>
+                            <a:srgbClr val="333333"/>
+                          </a:solidFill>
+                          <a:latin typeface="メイリオ" panose="020B0604030504040204" pitchFamily="50" charset="-128"/>
+                          <a:ea typeface="メイリオ" panose="020B0604030504040204" pitchFamily="50" charset="-128"/>
+                          <a:cs typeface="メイリオ"/>
+                        </a:rPr>
+                        <a:t>オンラインサロン（月2回）</a:t>
+                      </a:r>
+                      <a:endParaRPr lang="ja-JP" altLang="en-US" sz="1200" dirty="0">
+                        <a:latin typeface="メイリオ"/>
+                        <a:ea typeface="メイリオ"/>
+                        <a:cs typeface="メイリオ"/>
+                      </a:endParaRPr>
+                    </a:p>
+                  </a:txBody>
+                  <a:tcPr marL="91440" marR="73152" marT="36576" marB="36576" anchor="ctr">
+                    <a:lnL w="9525" cap="flat" cmpd="sng" algn="ctr">
+                      <a:solidFill>
+                        <a:srgbClr val="BFBFBF"/>
+                      </a:solidFill>
+                      <a:prstDash val="solid"/>
+                      <a:round/>
+                      <a:headEnd type="none" w="med" len="med"/>
+                      <a:tailEnd type="none" w="med" len="med"/>
+                    </a:lnL>
+                    <a:lnR w="9525" cap="flat" cmpd="sng" algn="ctr">
+                      <a:solidFill>
+                        <a:srgbClr val="BFBFBF"/>
+                      </a:solidFill>
+                      <a:prstDash val="solid"/>
+                      <a:round/>
+                      <a:headEnd type="none" w="med" len="med"/>
+                      <a:tailEnd type="none" w="med" len="med"/>
+                    </a:lnR>
+                    <a:lnT w="9525" cap="flat" cmpd="sng" algn="ctr">
+                      <a:solidFill>
+                        <a:srgbClr val="BFBFBF"/>
+                      </a:solidFill>
+                      <a:prstDash val="solid"/>
+                      <a:round/>
+                      <a:headEnd type="none" w="med" len="med"/>
+                      <a:tailEnd type="none" w="med" len="med"/>
+                    </a:lnT>
+                    <a:lnB w="9525" cap="flat" cmpd="sng" algn="ctr">
+                      <a:solidFill>
+                        <a:srgbClr val="BFBFBF"/>
+                      </a:solidFill>
+                      <a:prstDash val="solid"/>
+                      <a:round/>
+                      <a:headEnd type="none" w="med" len="med"/>
+                      <a:tailEnd type="none" w="med" len="med"/>
+                    </a:lnB>
+                    <a:solidFill>
+                      <a:srgbClr val="FFFFFF"/>
+                    </a:solidFill>
+                  </a:tcPr>
+                </a:tc>
+                <a:tc>
+                  <a:txBody>
+                    <a:bodyPr/>
+                    <a:lstStyle/>
+                    <a:p>
+                      <a:pPr algn="l">
+                        <a:buNone/>
+                      </a:pPr>
+                      <a:r>
+                        <a:rPr lang="ja-JP" altLang="en-US" sz="1200" b="0" dirty="0">
+                          <a:solidFill>
+                            <a:srgbClr val="333333"/>
+                          </a:solidFill>
+                          <a:latin typeface="メイリオ" panose="020B0604030504040204" pitchFamily="50" charset="-128"/>
+                          <a:ea typeface="メイリオ" panose="020B0604030504040204" pitchFamily="50" charset="-128"/>
+                          <a:cs typeface="メイリオ"/>
+                        </a:rPr>
+                        <a:t>保険営業の方向けの無料の学習サービス</a:t>
+                      </a:r>
+                      <a:br>
+                        <a:rPr lang="ja-JP" altLang="en-US" sz="1200" b="0" dirty="0">
+                          <a:solidFill>
+                            <a:srgbClr val="333333"/>
+                          </a:solidFill>
+                          <a:latin typeface="メイリオ" panose="020B0604030504040204" pitchFamily="50" charset="-128"/>
+                          <a:ea typeface="メイリオ" panose="020B0604030504040204" pitchFamily="50" charset="-128"/>
+                          <a:cs typeface="メイリオ"/>
+                        </a:rPr>
+                      </a:br>
+                      <a:r>
+                        <a:rPr lang="ja-JP" altLang="en-US" sz="1200" b="0" dirty="0">
+                          <a:solidFill>
+                            <a:srgbClr val="333333"/>
+                          </a:solidFill>
+                          <a:latin typeface="メイリオ" panose="020B0604030504040204" pitchFamily="50" charset="-128"/>
+                          <a:ea typeface="メイリオ" panose="020B0604030504040204" pitchFamily="50" charset="-128"/>
+                          <a:cs typeface="メイリオ"/>
+                        </a:rPr>
+                        <a:t>（2026年9月開始）</a:t>
+                      </a:r>
+                      <a:endParaRPr lang="ja-JP" altLang="en-US" sz="1200" dirty="0">
+                        <a:latin typeface="メイリオ"/>
+                        <a:ea typeface="メイリオ"/>
+                        <a:cs typeface="メイリオ"/>
+                      </a:endParaRPr>
+                    </a:p>
+                  </a:txBody>
+                  <a:tcPr marL="91440" marR="73152" marT="36576" marB="36576" anchor="ctr">
+                    <a:lnL w="9525" cap="flat" cmpd="sng" algn="ctr">
+                      <a:solidFill>
+                        <a:srgbClr val="BFBFBF"/>
+                      </a:solidFill>
+                      <a:prstDash val="solid"/>
+                      <a:round/>
+                      <a:headEnd type="none" w="med" len="med"/>
+                      <a:tailEnd type="none" w="med" len="med"/>
+                    </a:lnL>
+                    <a:lnR w="9525" cap="flat" cmpd="sng" algn="ctr">
+                      <a:solidFill>
+                        <a:srgbClr val="BFBFBF"/>
+                      </a:solidFill>
+                      <a:prstDash val="solid"/>
+                      <a:round/>
+                      <a:headEnd type="none" w="med" len="med"/>
+                      <a:tailEnd type="none" w="med" len="med"/>
+                    </a:lnR>
+                    <a:lnT w="9525" cap="flat" cmpd="sng" algn="ctr">
+                      <a:solidFill>
+                        <a:srgbClr val="BFBFBF"/>
+                      </a:solidFill>
+                      <a:prstDash val="solid"/>
+                      <a:round/>
+                      <a:headEnd type="none" w="med" len="med"/>
+                      <a:tailEnd type="none" w="med" len="med"/>
+                    </a:lnT>
+                    <a:lnB w="9525" cap="flat" cmpd="sng" algn="ctr">
+                      <a:solidFill>
+                        <a:srgbClr val="BFBFBF"/>
+                      </a:solidFill>
+                      <a:prstDash val="solid"/>
+                      <a:round/>
+                      <a:headEnd type="none" w="med" len="med"/>
+                      <a:tailEnd type="none" w="med" len="med"/>
+                    </a:lnB>
+                    <a:solidFill>
+                      <a:srgbClr val="FFFFFF"/>
+                    </a:solidFill>
+                  </a:tcPr>
+                </a:tc>
+              </a:tr>
+              <a:tr h="640080">
+                <a:tc>
+                  <a:txBody>
+                    <a:bodyPr/>
+                    <a:lstStyle/>
+                    <a:p>
+                      <a:pPr algn="ctr">
+                        <a:buNone/>
+                      </a:pPr>
+                      <a:r>
+                        <a:rPr lang="ja-JP" altLang="en-US" sz="1300" b="1" dirty="0">
+                          <a:solidFill>
+                            <a:srgbClr val="002060"/>
+                          </a:solidFill>
+                          <a:latin typeface="メイリオ" panose="020B0604030504040204" pitchFamily="50" charset="-128"/>
+                          <a:ea typeface="メイリオ" panose="020B0604030504040204" pitchFamily="50" charset="-128"/>
+                          <a:cs typeface="メイリオ"/>
+                        </a:rPr>
+                        <a:t>入口</a:t>
+                      </a:r>
+                      <a:endParaRPr lang="ja-JP" altLang="en-US" sz="1300" dirty="0">
+                        <a:latin typeface="メイリオ"/>
+                        <a:ea typeface="メイリオ"/>
+                        <a:cs typeface="メイリオ"/>
+                      </a:endParaRPr>
+                    </a:p>
+                  </a:txBody>
+                  <a:tcPr marL="91440" marR="73152" marT="36576" marB="36576" anchor="ctr">
+                    <a:lnL w="9525" cap="flat" cmpd="sng" algn="ctr">
+                      <a:solidFill>
+                        <a:srgbClr val="BFBFBF"/>
+                      </a:solidFill>
+                      <a:prstDash val="solid"/>
+                      <a:round/>
+                      <a:headEnd type="none" w="med" len="med"/>
+                      <a:tailEnd type="none" w="med" len="med"/>
+                    </a:lnL>
+                    <a:lnR w="9525" cap="flat" cmpd="sng" algn="ctr">
+                      <a:solidFill>
+                        <a:srgbClr val="BFBFBF"/>
+                      </a:solidFill>
+                      <a:prstDash val="solid"/>
+                      <a:round/>
+                      <a:headEnd type="none" w="med" len="med"/>
+                      <a:tailEnd type="none" w="med" len="med"/>
+                    </a:lnR>
+                    <a:lnT w="9525" cap="flat" cmpd="sng" algn="ctr">
+                      <a:solidFill>
+                        <a:srgbClr val="BFBFBF"/>
+                      </a:solidFill>
+                      <a:prstDash val="solid"/>
+                      <a:round/>
+                      <a:headEnd type="none" w="med" len="med"/>
+                      <a:tailEnd type="none" w="med" len="med"/>
+                    </a:lnT>
+                    <a:lnB w="9525" cap="flat" cmpd="sng" algn="ctr">
+                      <a:solidFill>
+                        <a:srgbClr val="BFBFBF"/>
+                      </a:solidFill>
+                      <a:prstDash val="solid"/>
+                      <a:round/>
+                      <a:headEnd type="none" w="med" len="med"/>
+                      <a:tailEnd type="none" w="med" len="med"/>
+                    </a:lnB>
+                    <a:solidFill>
+                      <a:srgbClr val="DCE6F2"/>
+                    </a:solidFill>
+                  </a:tcPr>
+                </a:tc>
+                <a:tc>
+                  <a:txBody>
+                    <a:bodyPr/>
+                    <a:lstStyle/>
+                    <a:p>
+                      <a:pPr algn="l">
+                        <a:buNone/>
+                      </a:pPr>
+                      <a:r>
+                        <a:rPr lang="ja-JP" altLang="en-US" sz="1200" b="0" dirty="0">
+                          <a:solidFill>
+                            <a:srgbClr val="333333"/>
+                          </a:solidFill>
+                          <a:latin typeface="メイリオ" panose="020B0604030504040204" pitchFamily="50" charset="-128"/>
+                          <a:ea typeface="メイリオ" panose="020B0604030504040204" pitchFamily="50" charset="-128"/>
+                          <a:cs typeface="メイリオ"/>
+                        </a:rPr>
+                        <a:t>サイトの「公式LINE登録」ボタン</a:t>
+                      </a:r>
+                      <a:endParaRPr lang="ja-JP" altLang="en-US" sz="1200" dirty="0">
+                        <a:latin typeface="メイリオ"/>
+                        <a:ea typeface="メイリオ"/>
+                        <a:cs typeface="メイリオ"/>
+                      </a:endParaRPr>
+                    </a:p>
+                  </a:txBody>
+                  <a:tcPr marL="91440" marR="73152" marT="36576" marB="36576" anchor="ctr">
+                    <a:lnL w="9525" cap="flat" cmpd="sng" algn="ctr">
+                      <a:solidFill>
+                        <a:srgbClr val="BFBFBF"/>
+                      </a:solidFill>
+                      <a:prstDash val="solid"/>
+                      <a:round/>
+                      <a:headEnd type="none" w="med" len="med"/>
+                      <a:tailEnd type="none" w="med" len="med"/>
+                    </a:lnL>
+                    <a:lnR w="9525" cap="flat" cmpd="sng" algn="ctr">
+                      <a:solidFill>
+                        <a:srgbClr val="BFBFBF"/>
+                      </a:solidFill>
+                      <a:prstDash val="solid"/>
+                      <a:round/>
+                      <a:headEnd type="none" w="med" len="med"/>
+                      <a:tailEnd type="none" w="med" len="med"/>
+                    </a:lnR>
+                    <a:lnT w="9525" cap="flat" cmpd="sng" algn="ctr">
+                      <a:solidFill>
+                        <a:srgbClr val="BFBFBF"/>
+                      </a:solidFill>
+                      <a:prstDash val="solid"/>
+                      <a:round/>
+                      <a:headEnd type="none" w="med" len="med"/>
+                      <a:tailEnd type="none" w="med" len="med"/>
+                    </a:lnT>
+                    <a:lnB w="9525" cap="flat" cmpd="sng" algn="ctr">
+                      <a:solidFill>
+                        <a:srgbClr val="BFBFBF"/>
+                      </a:solidFill>
+                      <a:prstDash val="solid"/>
+                      <a:round/>
+                      <a:headEnd type="none" w="med" len="med"/>
+                      <a:tailEnd type="none" w="med" len="med"/>
+                    </a:lnB>
+                    <a:solidFill>
+                      <a:srgbClr val="FFFFFF"/>
+                    </a:solidFill>
+                  </a:tcPr>
+                </a:tc>
+                <a:tc>
+                  <a:txBody>
+                    <a:bodyPr/>
+                    <a:lstStyle/>
+                    <a:p>
+                      <a:pPr algn="l">
+                        <a:buNone/>
+                      </a:pPr>
+                      <a:r>
+                        <a:rPr lang="ja-JP" altLang="en-US" sz="1200" b="0" dirty="0">
+                          <a:solidFill>
+                            <a:srgbClr val="333333"/>
+                          </a:solidFill>
+                          <a:latin typeface="メイリオ" panose="020B0604030504040204" pitchFamily="50" charset="-128"/>
+                          <a:ea typeface="メイリオ" panose="020B0604030504040204" pitchFamily="50" charset="-128"/>
+                          <a:cs typeface="メイリオ"/>
+                        </a:rPr>
+                        <a:t>社員の紹介URLから</a:t>
+                      </a:r>
+                      <a:br>
+                        <a:rPr lang="ja-JP" altLang="en-US" sz="1200" b="0" dirty="0">
+                          <a:solidFill>
+                            <a:srgbClr val="333333"/>
+                          </a:solidFill>
+                          <a:latin typeface="メイリオ" panose="020B0604030504040204" pitchFamily="50" charset="-128"/>
+                          <a:ea typeface="メイリオ" panose="020B0604030504040204" pitchFamily="50" charset="-128"/>
+                          <a:cs typeface="メイリオ"/>
+                        </a:rPr>
+                      </a:br>
+                      <a:r>
+                        <a:rPr lang="ja-JP" altLang="en-US" sz="1200" b="0" dirty="0">
+                          <a:solidFill>
+                            <a:srgbClr val="333333"/>
+                          </a:solidFill>
+                          <a:latin typeface="メイリオ" panose="020B0604030504040204" pitchFamily="50" charset="-128"/>
+                          <a:ea typeface="メイリオ" panose="020B0604030504040204" pitchFamily="50" charset="-128"/>
+                          <a:cs typeface="メイリオ"/>
+                        </a:rPr>
+                        <a:t>友だち追加（招待制）</a:t>
+                      </a:r>
+                      <a:endParaRPr lang="ja-JP" altLang="en-US" sz="1200" dirty="0">
+                        <a:latin typeface="メイリオ"/>
+                        <a:ea typeface="メイリオ"/>
+                        <a:cs typeface="メイリオ"/>
+                      </a:endParaRPr>
+                    </a:p>
+                  </a:txBody>
+                  <a:tcPr marL="91440" marR="73152" marT="36576" marB="36576" anchor="ctr">
+                    <a:lnL w="9525" cap="flat" cmpd="sng" algn="ctr">
+                      <a:solidFill>
+                        <a:srgbClr val="BFBFBF"/>
+                      </a:solidFill>
+                      <a:prstDash val="solid"/>
+                      <a:round/>
+                      <a:headEnd type="none" w="med" len="med"/>
+                      <a:tailEnd type="none" w="med" len="med"/>
+                    </a:lnL>
+                    <a:lnR w="9525" cap="flat" cmpd="sng" algn="ctr">
+                      <a:solidFill>
+                        <a:srgbClr val="BFBFBF"/>
+                      </a:solidFill>
+                      <a:prstDash val="solid"/>
+                      <a:round/>
+                      <a:headEnd type="none" w="med" len="med"/>
+                      <a:tailEnd type="none" w="med" len="med"/>
+                    </a:lnR>
+                    <a:lnT w="9525" cap="flat" cmpd="sng" algn="ctr">
+                      <a:solidFill>
+                        <a:srgbClr val="BFBFBF"/>
+                      </a:solidFill>
+                      <a:prstDash val="solid"/>
+                      <a:round/>
+                      <a:headEnd type="none" w="med" len="med"/>
+                      <a:tailEnd type="none" w="med" len="med"/>
+                    </a:lnT>
+                    <a:lnB w="9525" cap="flat" cmpd="sng" algn="ctr">
+                      <a:solidFill>
+                        <a:srgbClr val="BFBFBF"/>
+                      </a:solidFill>
+                      <a:prstDash val="solid"/>
+                      <a:round/>
+                      <a:headEnd type="none" w="med" len="med"/>
+                      <a:tailEnd type="none" w="med" len="med"/>
+                    </a:lnB>
+                    <a:solidFill>
+                      <a:srgbClr val="FFFFFF"/>
+                    </a:solidFill>
+                  </a:tcPr>
+                </a:tc>
+              </a:tr>
+              <a:tr h="640080">
+                <a:tc>
+                  <a:txBody>
+                    <a:bodyPr/>
+                    <a:lstStyle/>
+                    <a:p>
+                      <a:pPr algn="ctr">
+                        <a:buNone/>
+                      </a:pPr>
+                      <a:r>
+                        <a:rPr lang="ja-JP" altLang="en-US" sz="1300" b="1" dirty="0">
+                          <a:solidFill>
+                            <a:srgbClr val="002060"/>
+                          </a:solidFill>
+                          <a:latin typeface="メイリオ" panose="020B0604030504040204" pitchFamily="50" charset="-128"/>
+                          <a:ea typeface="メイリオ" panose="020B0604030504040204" pitchFamily="50" charset="-128"/>
+                          <a:cs typeface="メイリオ"/>
+                        </a:rPr>
+                        <a:t>特典</a:t>
+                      </a:r>
+                      <a:endParaRPr lang="ja-JP" altLang="en-US" sz="1300" dirty="0">
+                        <a:latin typeface="メイリオ"/>
+                        <a:ea typeface="メイリオ"/>
+                        <a:cs typeface="メイリオ"/>
+                      </a:endParaRPr>
+                    </a:p>
+                  </a:txBody>
+                  <a:tcPr marL="91440" marR="73152" marT="36576" marB="36576" anchor="ctr">
+                    <a:lnL w="9525" cap="flat" cmpd="sng" algn="ctr">
+                      <a:solidFill>
+                        <a:srgbClr val="BFBFBF"/>
+                      </a:solidFill>
+                      <a:prstDash val="solid"/>
+                      <a:round/>
+                      <a:headEnd type="none" w="med" len="med"/>
+                      <a:tailEnd type="none" w="med" len="med"/>
+                    </a:lnL>
+                    <a:lnR w="9525" cap="flat" cmpd="sng" algn="ctr">
+                      <a:solidFill>
+                        <a:srgbClr val="BFBFBF"/>
+                      </a:solidFill>
+                      <a:prstDash val="solid"/>
+                      <a:round/>
+                      <a:headEnd type="none" w="med" len="med"/>
+                      <a:tailEnd type="none" w="med" len="med"/>
+                    </a:lnR>
+                    <a:lnT w="9525" cap="flat" cmpd="sng" algn="ctr">
+                      <a:solidFill>
+                        <a:srgbClr val="BFBFBF"/>
+                      </a:solidFill>
+                      <a:prstDash val="solid"/>
+                      <a:round/>
+                      <a:headEnd type="none" w="med" len="med"/>
+                      <a:tailEnd type="none" w="med" len="med"/>
+                    </a:lnT>
+                    <a:lnB w="9525" cap="flat" cmpd="sng" algn="ctr">
+                      <a:solidFill>
+                        <a:srgbClr val="BFBFBF"/>
+                      </a:solidFill>
+                      <a:prstDash val="solid"/>
+                      <a:round/>
+                      <a:headEnd type="none" w="med" len="med"/>
+                      <a:tailEnd type="none" w="med" len="med"/>
+                    </a:lnB>
+                    <a:solidFill>
+                      <a:srgbClr val="DCE6F2"/>
+                    </a:solidFill>
+                  </a:tcPr>
+                </a:tc>
+                <a:tc>
+                  <a:txBody>
+                    <a:bodyPr/>
+                    <a:lstStyle/>
+                    <a:p>
+                      <a:pPr algn="l">
+                        <a:buNone/>
+                      </a:pPr>
+                      <a:r>
+                        <a:rPr lang="ja-JP" altLang="en-US" sz="1200" b="1" dirty="0">
+                          <a:solidFill>
+                            <a:srgbClr val="002060"/>
+                          </a:solidFill>
+                          <a:latin typeface="メイリオ" panose="020B0604030504040204" pitchFamily="50" charset="-128"/>
+                          <a:ea typeface="メイリオ" panose="020B0604030504040204" pitchFamily="50" charset="-128"/>
+                          <a:cs typeface="メイリオ"/>
+                        </a:rPr>
+                        <a:t>「営業力向上トークスクリプト3本」</a:t>
+                      </a:r>
+                      <a:br>
+                        <a:rPr lang="ja-JP" altLang="en-US" sz="1200" b="1" dirty="0">
+                          <a:solidFill>
+                            <a:srgbClr val="002060"/>
+                          </a:solidFill>
+                          <a:latin typeface="メイリオ" panose="020B0604030504040204" pitchFamily="50" charset="-128"/>
+                          <a:ea typeface="メイリオ" panose="020B0604030504040204" pitchFamily="50" charset="-128"/>
+                          <a:cs typeface="メイリオ"/>
+                        </a:rPr>
+                      </a:br>
+                      <a:r>
+                        <a:rPr lang="ja-JP" altLang="en-US" sz="1200" b="1" dirty="0">
+                          <a:solidFill>
+                            <a:srgbClr val="002060"/>
+                          </a:solidFill>
+                          <a:latin typeface="メイリオ" panose="020B0604030504040204" pitchFamily="50" charset="-128"/>
+                          <a:ea typeface="メイリオ" panose="020B0604030504040204" pitchFamily="50" charset="-128"/>
+                          <a:cs typeface="メイリオ"/>
+                        </a:rPr>
+                        <a:t>の動画</a:t>
+                      </a:r>
+                      <a:endParaRPr lang="ja-JP" altLang="en-US" sz="1200" dirty="0">
+                        <a:latin typeface="メイリオ"/>
+                        <a:ea typeface="メイリオ"/>
+                        <a:cs typeface="メイリオ"/>
+                      </a:endParaRPr>
+                    </a:p>
+                  </a:txBody>
+                  <a:tcPr marL="91440" marR="73152" marT="36576" marB="36576" anchor="ctr">
+                    <a:lnL w="9525" cap="flat" cmpd="sng" algn="ctr">
+                      <a:solidFill>
+                        <a:srgbClr val="BFBFBF"/>
+                      </a:solidFill>
+                      <a:prstDash val="solid"/>
+                      <a:round/>
+                      <a:headEnd type="none" w="med" len="med"/>
+                      <a:tailEnd type="none" w="med" len="med"/>
+                    </a:lnL>
+                    <a:lnR w="9525" cap="flat" cmpd="sng" algn="ctr">
+                      <a:solidFill>
+                        <a:srgbClr val="BFBFBF"/>
+                      </a:solidFill>
+                      <a:prstDash val="solid"/>
+                      <a:round/>
+                      <a:headEnd type="none" w="med" len="med"/>
+                      <a:tailEnd type="none" w="med" len="med"/>
+                    </a:lnR>
+                    <a:lnT w="9525" cap="flat" cmpd="sng" algn="ctr">
+                      <a:solidFill>
+                        <a:srgbClr val="BFBFBF"/>
+                      </a:solidFill>
+                      <a:prstDash val="solid"/>
+                      <a:round/>
+                      <a:headEnd type="none" w="med" len="med"/>
+                      <a:tailEnd type="none" w="med" len="med"/>
+                    </a:lnT>
+                    <a:lnB w="9525" cap="flat" cmpd="sng" algn="ctr">
+                      <a:solidFill>
+                        <a:srgbClr val="BFBFBF"/>
+                      </a:solidFill>
+                      <a:prstDash val="solid"/>
+                      <a:round/>
+                      <a:headEnd type="none" w="med" len="med"/>
+                      <a:tailEnd type="none" w="med" len="med"/>
+                    </a:lnB>
+                    <a:solidFill>
+                      <a:srgbClr val="FFFFFF"/>
+                    </a:solidFill>
+                  </a:tcPr>
+                </a:tc>
+                <a:tc>
+                  <a:txBody>
+                    <a:bodyPr/>
+                    <a:lstStyle/>
+                    <a:p>
+                      <a:pPr algn="l">
+                        <a:buNone/>
+                      </a:pPr>
+                      <a:r>
+                        <a:rPr lang="ja-JP" altLang="en-US" sz="1200" b="1" dirty="0">
+                          <a:solidFill>
+                            <a:srgbClr val="002060"/>
+                          </a:solidFill>
+                          <a:latin typeface="メイリオ" panose="020B0604030504040204" pitchFamily="50" charset="-128"/>
+                          <a:ea typeface="メイリオ" panose="020B0604030504040204" pitchFamily="50" charset="-128"/>
+                          <a:cs typeface="メイリオ"/>
+                        </a:rPr>
+                        <a:t>LINEそのものが、無料の学習サービス</a:t>
+                      </a:r>
+                      <a:endParaRPr lang="ja-JP" altLang="en-US" sz="1200" dirty="0">
+                        <a:latin typeface="メイリオ"/>
+                        <a:ea typeface="メイリオ"/>
+                        <a:cs typeface="メイリオ"/>
+                      </a:endParaRPr>
+                    </a:p>
+                  </a:txBody>
+                  <a:tcPr marL="91440" marR="73152" marT="36576" marB="36576" anchor="ctr">
+                    <a:lnL w="9525" cap="flat" cmpd="sng" algn="ctr">
+                      <a:solidFill>
+                        <a:srgbClr val="BFBFBF"/>
+                      </a:solidFill>
+                      <a:prstDash val="solid"/>
+                      <a:round/>
+                      <a:headEnd type="none" w="med" len="med"/>
+                      <a:tailEnd type="none" w="med" len="med"/>
+                    </a:lnL>
+                    <a:lnR w="9525" cap="flat" cmpd="sng" algn="ctr">
+                      <a:solidFill>
+                        <a:srgbClr val="BFBFBF"/>
+                      </a:solidFill>
+                      <a:prstDash val="solid"/>
+                      <a:round/>
+                      <a:headEnd type="none" w="med" len="med"/>
+                      <a:tailEnd type="none" w="med" len="med"/>
+                    </a:lnR>
+                    <a:lnT w="9525" cap="flat" cmpd="sng" algn="ctr">
+                      <a:solidFill>
+                        <a:srgbClr val="BFBFBF"/>
+                      </a:solidFill>
+                      <a:prstDash val="solid"/>
+                      <a:round/>
+                      <a:headEnd type="none" w="med" len="med"/>
+                      <a:tailEnd type="none" w="med" len="med"/>
+                    </a:lnT>
+                    <a:lnB w="9525" cap="flat" cmpd="sng" algn="ctr">
+                      <a:solidFill>
+                        <a:srgbClr val="BFBFBF"/>
+                      </a:solidFill>
+                      <a:prstDash val="solid"/>
+                      <a:round/>
+                      <a:headEnd type="none" w="med" len="med"/>
+                      <a:tailEnd type="none" w="med" len="med"/>
+                    </a:lnB>
+                    <a:solidFill>
+                      <a:srgbClr val="FFFFFF"/>
+                    </a:solidFill>
+                  </a:tcPr>
+                </a:tc>
+              </a:tr>
+              <a:tr h="1097280">
+                <a:tc>
+                  <a:txBody>
+                    <a:bodyPr/>
+                    <a:lstStyle/>
+                    <a:p>
+                      <a:pPr algn="ctr">
+                        <a:buNone/>
+                      </a:pPr>
+                      <a:r>
+                        <a:rPr lang="ja-JP" altLang="en-US" sz="1300" b="1" dirty="0">
+                          <a:solidFill>
+                            <a:srgbClr val="002060"/>
+                          </a:solidFill>
+                          <a:latin typeface="メイリオ" panose="020B0604030504040204" pitchFamily="50" charset="-128"/>
+                          <a:ea typeface="メイリオ" panose="020B0604030504040204" pitchFamily="50" charset="-128"/>
+                          <a:cs typeface="メイリオ"/>
+                        </a:rPr>
+                        <a:t>追加後の</a:t>
+                      </a:r>
+                      <a:br>
+                        <a:rPr lang="ja-JP" altLang="en-US" sz="1300" b="1" dirty="0">
+                          <a:solidFill>
+                            <a:srgbClr val="002060"/>
+                          </a:solidFill>
+                          <a:latin typeface="メイリオ" panose="020B0604030504040204" pitchFamily="50" charset="-128"/>
+                          <a:ea typeface="メイリオ" panose="020B0604030504040204" pitchFamily="50" charset="-128"/>
+                          <a:cs typeface="メイリオ"/>
+                        </a:rPr>
+                      </a:br>
+                      <a:r>
+                        <a:rPr lang="ja-JP" altLang="en-US" sz="1300" b="1" dirty="0">
+                          <a:solidFill>
+                            <a:srgbClr val="002060"/>
+                          </a:solidFill>
+                          <a:latin typeface="メイリオ" panose="020B0604030504040204" pitchFamily="50" charset="-128"/>
+                          <a:ea typeface="メイリオ" panose="020B0604030504040204" pitchFamily="50" charset="-128"/>
+                          <a:cs typeface="メイリオ"/>
+                        </a:rPr>
+                        <a:t>配信</a:t>
+                      </a:r>
+                      <a:endParaRPr lang="ja-JP" altLang="en-US" sz="1300" dirty="0">
+                        <a:latin typeface="メイリオ"/>
+                        <a:ea typeface="メイリオ"/>
+                        <a:cs typeface="メイリオ"/>
+                      </a:endParaRPr>
+                    </a:p>
+                  </a:txBody>
+                  <a:tcPr marL="91440" marR="73152" marT="36576" marB="36576" anchor="ctr">
+                    <a:lnL w="9525" cap="flat" cmpd="sng" algn="ctr">
+                      <a:solidFill>
+                        <a:srgbClr val="BFBFBF"/>
+                      </a:solidFill>
+                      <a:prstDash val="solid"/>
+                      <a:round/>
+                      <a:headEnd type="none" w="med" len="med"/>
+                      <a:tailEnd type="none" w="med" len="med"/>
+                    </a:lnL>
+                    <a:lnR w="9525" cap="flat" cmpd="sng" algn="ctr">
+                      <a:solidFill>
+                        <a:srgbClr val="BFBFBF"/>
+                      </a:solidFill>
+                      <a:prstDash val="solid"/>
+                      <a:round/>
+                      <a:headEnd type="none" w="med" len="med"/>
+                      <a:tailEnd type="none" w="med" len="med"/>
+                    </a:lnR>
+                    <a:lnT w="9525" cap="flat" cmpd="sng" algn="ctr">
+                      <a:solidFill>
+                        <a:srgbClr val="BFBFBF"/>
+                      </a:solidFill>
+                      <a:prstDash val="solid"/>
+                      <a:round/>
+                      <a:headEnd type="none" w="med" len="med"/>
+                      <a:tailEnd type="none" w="med" len="med"/>
+                    </a:lnT>
+                    <a:lnB w="9525" cap="flat" cmpd="sng" algn="ctr">
+                      <a:solidFill>
+                        <a:srgbClr val="BFBFBF"/>
+                      </a:solidFill>
+                      <a:prstDash val="solid"/>
+                      <a:round/>
+                      <a:headEnd type="none" w="med" len="med"/>
+                      <a:tailEnd type="none" w="med" len="med"/>
+                    </a:lnB>
+                    <a:solidFill>
+                      <a:srgbClr val="DCE6F2"/>
+                    </a:solidFill>
+                  </a:tcPr>
+                </a:tc>
+                <a:tc>
+                  <a:txBody>
+                    <a:bodyPr/>
+                    <a:lstStyle/>
+                    <a:p>
+                      <a:pPr algn="l">
+                        <a:buNone/>
+                      </a:pPr>
+                      <a:r>
+                        <a:rPr lang="ja-JP" altLang="en-US" sz="1200" b="0" dirty="0">
+                          <a:solidFill>
+                            <a:srgbClr val="333333"/>
+                          </a:solidFill>
+                          <a:latin typeface="メイリオ" panose="020B0604030504040204" pitchFamily="50" charset="-128"/>
+                          <a:ea typeface="メイリオ" panose="020B0604030504040204" pitchFamily="50" charset="-128"/>
+                          <a:cs typeface="メイリオ"/>
+                        </a:rPr>
+                        <a:t>あいさつで、特典のURLとパスワードを届ける。「最新情報を定期的に配信」と案内</a:t>
+                      </a:r>
+                      <a:endParaRPr lang="ja-JP" altLang="en-US" sz="1200" dirty="0">
+                        <a:latin typeface="メイリオ"/>
+                        <a:ea typeface="メイリオ"/>
+                        <a:cs typeface="メイリオ"/>
+                      </a:endParaRPr>
+                    </a:p>
+                  </a:txBody>
+                  <a:tcPr marL="91440" marR="73152" marT="36576" marB="36576" anchor="ctr">
+                    <a:lnL w="9525" cap="flat" cmpd="sng" algn="ctr">
+                      <a:solidFill>
+                        <a:srgbClr val="BFBFBF"/>
+                      </a:solidFill>
+                      <a:prstDash val="solid"/>
+                      <a:round/>
+                      <a:headEnd type="none" w="med" len="med"/>
+                      <a:tailEnd type="none" w="med" len="med"/>
+                    </a:lnL>
+                    <a:lnR w="9525" cap="flat" cmpd="sng" algn="ctr">
+                      <a:solidFill>
+                        <a:srgbClr val="BFBFBF"/>
+                      </a:solidFill>
+                      <a:prstDash val="solid"/>
+                      <a:round/>
+                      <a:headEnd type="none" w="med" len="med"/>
+                      <a:tailEnd type="none" w="med" len="med"/>
+                    </a:lnR>
+                    <a:lnT w="9525" cap="flat" cmpd="sng" algn="ctr">
+                      <a:solidFill>
+                        <a:srgbClr val="BFBFBF"/>
+                      </a:solidFill>
+                      <a:prstDash val="solid"/>
+                      <a:round/>
+                      <a:headEnd type="none" w="med" len="med"/>
+                      <a:tailEnd type="none" w="med" len="med"/>
+                    </a:lnT>
+                    <a:lnB w="9525" cap="flat" cmpd="sng" algn="ctr">
+                      <a:solidFill>
+                        <a:srgbClr val="BFBFBF"/>
+                      </a:solidFill>
+                      <a:prstDash val="solid"/>
+                      <a:round/>
+                      <a:headEnd type="none" w="med" len="med"/>
+                      <a:tailEnd type="none" w="med" len="med"/>
+                    </a:lnB>
+                    <a:solidFill>
+                      <a:srgbClr val="FFFFFF"/>
+                    </a:solidFill>
+                  </a:tcPr>
+                </a:tc>
+                <a:tc>
+                  <a:txBody>
+                    <a:bodyPr/>
+                    <a:lstStyle/>
+                    <a:p>
+                      <a:pPr algn="l">
+                        <a:buNone/>
+                      </a:pPr>
+                      <a:r>
+                        <a:rPr lang="ja-JP" altLang="en-US" sz="1200" b="0" dirty="0">
+                          <a:solidFill>
+                            <a:srgbClr val="333333"/>
+                          </a:solidFill>
+                          <a:latin typeface="メイリオ" panose="020B0604030504040204" pitchFamily="50" charset="-128"/>
+                          <a:ea typeface="メイリオ" panose="020B0604030504040204" pitchFamily="50" charset="-128"/>
+                          <a:cs typeface="メイリオ"/>
+                        </a:rPr>
+                        <a:t>登録時に5問のアンケート。答えに合わせて、資料・動画・セミナーのアーカイブ・トークスクリプトを段階的に配信</a:t>
+                      </a:r>
+                      <a:endParaRPr lang="ja-JP" altLang="en-US" sz="1200" dirty="0">
+                        <a:latin typeface="メイリオ"/>
+                        <a:ea typeface="メイリオ"/>
+                        <a:cs typeface="メイリオ"/>
+                      </a:endParaRPr>
+                    </a:p>
+                  </a:txBody>
+                  <a:tcPr marL="91440" marR="73152" marT="36576" marB="36576" anchor="ctr">
+                    <a:lnL w="9525" cap="flat" cmpd="sng" algn="ctr">
+                      <a:solidFill>
+                        <a:srgbClr val="BFBFBF"/>
+                      </a:solidFill>
+                      <a:prstDash val="solid"/>
+                      <a:round/>
+                      <a:headEnd type="none" w="med" len="med"/>
+                      <a:tailEnd type="none" w="med" len="med"/>
+                    </a:lnL>
+                    <a:lnR w="9525" cap="flat" cmpd="sng" algn="ctr">
+                      <a:solidFill>
+                        <a:srgbClr val="BFBFBF"/>
+                      </a:solidFill>
+                      <a:prstDash val="solid"/>
+                      <a:round/>
+                      <a:headEnd type="none" w="med" len="med"/>
+                      <a:tailEnd type="none" w="med" len="med"/>
+                    </a:lnR>
+                    <a:lnT w="9525" cap="flat" cmpd="sng" algn="ctr">
+                      <a:solidFill>
+                        <a:srgbClr val="BFBFBF"/>
+                      </a:solidFill>
+                      <a:prstDash val="solid"/>
+                      <a:round/>
+                      <a:headEnd type="none" w="med" len="med"/>
+                      <a:tailEnd type="none" w="med" len="med"/>
+                    </a:lnT>
+                    <a:lnB w="9525" cap="flat" cmpd="sng" algn="ctr">
+                      <a:solidFill>
+                        <a:srgbClr val="BFBFBF"/>
+                      </a:solidFill>
+                      <a:prstDash val="solid"/>
+                      <a:round/>
+                      <a:headEnd type="none" w="med" len="med"/>
+                      <a:tailEnd type="none" w="med" len="med"/>
+                    </a:lnB>
+                    <a:solidFill>
+                      <a:srgbClr val="FFFFFF"/>
+                    </a:solidFill>
+                  </a:tcPr>
+                </a:tc>
+              </a:tr>
+            </a:tbl>
+          </a:graphicData>
+        </a:graphic>
+      </p:graphicFrame>
+      <p:sp>
+        <p:nvSpPr>
+          <p:cNvPr id="8" name="示唆"/>
+          <p:cNvSpPr/>
+          <p:nvPr/>
+        </p:nvSpPr>
+        <p:spPr>
+          <a:xfrm>
+            <a:off x="502920" y="5349240"/>
+            <a:ext cx="8897112" cy="502920"/>
+          </a:xfrm>
+          <a:prstGeom prst="rect">
+            <a:avLst/>
+          </a:prstGeom>
+          <a:solidFill>
+            <a:srgbClr val="F2F2F2"/>
+          </a:solidFill>
+          <a:ln>
+            <a:noFill/>
+          </a:ln>
+        </p:spPr>
+        <p:txBody>
+          <a:bodyPr wrap="square" lIns="73152" tIns="36576" rIns="73152" bIns="36576" rtlCol="0" anchor="ctr">
+            <a:noAutofit/>
+          </a:bodyPr>
+          <a:lstStyle/>
+          <a:p>
+            <a:pPr algn="ctr">
+              <a:buNone/>
+            </a:pPr>
+            <a:r>
+              <a:rPr lang="ja-JP" altLang="en-US" sz="1500" b="1" dirty="0">
+                <a:solidFill>
+                  <a:srgbClr val="002060"/>
+                </a:solidFill>
+                <a:latin typeface="メイリオ" panose="020B0604030504040204" pitchFamily="50" charset="-128"/>
+                <a:ea typeface="メイリオ" panose="020B0604030504040204" pitchFamily="50" charset="-128"/>
+                <a:cs typeface="メイリオ"/>
+              </a:rPr>
+              <a:t>すなおコンサルティング様は、イベントの予約・参加に合わせた案内で、入会へつなげる</a:t>
+            </a:r>
+            <a:endParaRPr lang="ja-JP" altLang="en-US" sz="1200" dirty="0">
+              <a:latin typeface="メイリオ"/>
+              <a:ea typeface="メイリオ"/>
+              <a:cs typeface="メイリオ"/>
+            </a:endParaRPr>
+          </a:p>
+        </p:txBody>
+      </p:sp>
+      <p:sp>
+        <p:nvSpPr>
+          <p:cNvPr id="9" name="注記"/>
+          <p:cNvSpPr/>
+          <p:nvPr/>
+        </p:nvSpPr>
+        <p:spPr>
+          <a:xfrm>
+            <a:off x="502920" y="5943600"/>
+            <a:ext cx="8897112" cy="146304"/>
+          </a:xfrm>
+          <a:prstGeom prst="rect">
+            <a:avLst/>
+          </a:prstGeom>
+          <a:noFill/>
+          <a:ln>
+            <a:noFill/>
+          </a:ln>
+        </p:spPr>
+        <p:txBody>
+          <a:bodyPr wrap="square" lIns="0" tIns="0" rIns="0" bIns="0" rtlCol="0" anchor="t">
+            <a:noAutofit/>
+          </a:bodyPr>
+          <a:lstStyle/>
+          <a:p>
+            <a:pPr algn="l">
+              <a:buNone/>
+            </a:pPr>
+            <a:r>
+              <a:rPr lang="ja-JP" altLang="en-US" sz="900" b="0" dirty="0">
+                <a:solidFill>
+                  <a:srgbClr val="7F7F7F"/>
+                </a:solidFill>
+                <a:latin typeface="メイリオ" panose="020B0604030504040204" pitchFamily="50" charset="-128"/>
+                <a:ea typeface="メイリオ" panose="020B0604030504040204" pitchFamily="50" charset="-128"/>
+                <a:cs typeface="メイリオ"/>
+              </a:rPr>
+              <a:t>※野沢塾：LINE公式アカウント（2026年10月19日確認）・公式サイト（2026年10月18日確認）より。画面の名前とパスワードは伏せている</a:t>
+            </a:r>
+            <a:endParaRPr lang="ja-JP" altLang="en-US" sz="1200" dirty="0">
+              <a:latin typeface="メイリオ"/>
+              <a:ea typeface="メイリオ"/>
+              <a:cs typeface="メイリオ"/>
+            </a:endParaRPr>
+          </a:p>
+        </p:txBody>
+      </p:sp>
+      <p:sp>
+        <p:nvSpPr>
+          <p:cNvPr id="10" name="注記"/>
+          <p:cNvSpPr/>
+          <p:nvPr/>
+        </p:nvSpPr>
+        <p:spPr>
+          <a:xfrm>
+            <a:off x="502920" y="6089904"/>
+            <a:ext cx="8897112" cy="146304"/>
+          </a:xfrm>
+          <a:prstGeom prst="rect">
+            <a:avLst/>
+          </a:prstGeom>
+          <a:noFill/>
+          <a:ln>
+            <a:noFill/>
+          </a:ln>
+        </p:spPr>
+        <p:txBody>
+          <a:bodyPr wrap="square" lIns="0" tIns="0" rIns="0" bIns="0" rtlCol="0" anchor="t">
+            <a:noAutofit/>
+          </a:bodyPr>
+          <a:lstStyle/>
+          <a:p>
+            <a:pPr algn="l">
+              <a:buNone/>
+            </a:pPr>
+            <a:r>
+              <a:rPr lang="ja-JP" altLang="en-US" sz="900" b="0" dirty="0">
+                <a:solidFill>
+                  <a:srgbClr val="7F7F7F"/>
+                </a:solidFill>
+                <a:latin typeface="メイリオ" panose="020B0604030504040204" pitchFamily="50" charset="-128"/>
+                <a:ea typeface="メイリオ" panose="020B0604030504040204" pitchFamily="50" charset="-128"/>
+                <a:cs typeface="メイリオ"/>
+              </a:rPr>
+              <a:t>※R&amp;C保険営業ラボ：R&amp;C株式会社のプレスリリースより。招待制のため、画面は未掲載</a:t>
+            </a:r>
+            <a:endParaRPr lang="ja-JP" altLang="en-US" sz="1200" dirty="0">
+              <a:latin typeface="メイリオ"/>
+              <a:ea typeface="メイリオ"/>
+              <a:cs typeface="メイリオ"/>
+            </a:endParaRPr>
+          </a:p>
+        </p:txBody>
+      </p:sp>
+    </p:spTree>
+  </p:cSld>
+  <p:clrMapOvr>
+    <a:masterClrMapping/>
+  </p:clrMapOvr>
+</p:sld>
+</file>
+
+<file path=ppt/slides/slide70.xml><?xml version="1.0" encoding="utf-8"?>
 <p:sld xmlns:a="http://schemas.openxmlformats.org/drawingml/2006/main" xmlns:p="http://schemas.openxmlformats.org/presentationml/2006/main" xmlns:r="http://schemas.openxmlformats.org/officeDocument/2006/relationships">
   <p:cSld>
     <p:spTree>
@@ -9477,7 +12529,7 @@
 </p:sld>
 </file>
 
-<file path=ppt/slides/slide69.xml><?xml version="1.0" encoding="utf-8"?>
+<file path=ppt/slides/slide71.xml><?xml version="1.0" encoding="utf-8"?>
 <p:sld xmlns:a="http://schemas.openxmlformats.org/drawingml/2006/main" xmlns:p="http://schemas.openxmlformats.org/presentationml/2006/main" xmlns:r="http://schemas.openxmlformats.org/officeDocument/2006/relationships">
   <p:cSld>
     <p:spTree>
@@ -9992,8 +13044,8 @@
               <a:tblGrid>
                 <a:gridCol w="1371600"/>
                 <a:gridCol w="2514600"/>
-                <a:gridCol w="3364992"/>
-                <a:gridCol w="1645920"/>
+                <a:gridCol w="3639312"/>
+                <a:gridCol w="1371600"/>
               </a:tblGrid>
               <a:tr h="457200">
                 <a:tc>
@@ -10739,7 +13791,7 @@
                           <a:ea typeface="メイリオ" panose="020B0604030504040204" pitchFamily="50" charset="-128"/>
                           <a:cs typeface="メイリオ"/>
                         </a:rPr>
-                        <a:t>前日のリマインド・当日の案内</a:t>
+                        <a:t>日程ごとに、前日・当日のお知らせ</a:t>
                       </a:r>
                       <a:endParaRPr lang="ja-JP" altLang="en-US" sz="1400" dirty="0">
                         <a:latin typeface="メイリオ"/>
@@ -11013,7 +14065,49 @@
                           <a:ea typeface="メイリオ" panose="020B0604030504040204" pitchFamily="50" charset="-128"/>
                           <a:cs typeface="メイリオ"/>
                         </a:rPr>
-                        <a:t>イベント直後に、サロン入会の案内</a:t>
+                        <a:t>イベント直後に、</a:t>
+                      </a:r>
+                      <a:br>
+                        <a:rPr lang="ja-JP" altLang="en-US" sz="1400" b="0" dirty="0">
+                          <a:solidFill>
+                            <a:srgbClr val="333333"/>
+                          </a:solidFill>
+                          <a:latin typeface="メイリオ" panose="020B0604030504040204" pitchFamily="50" charset="-128"/>
+                          <a:ea typeface="メイリオ" panose="020B0604030504040204" pitchFamily="50" charset="-128"/>
+                          <a:cs typeface="メイリオ"/>
+                        </a:rPr>
+                      </a:br>
+                      <a:r>
+                        <a:rPr lang="ja-JP" altLang="en-US" sz="1400" b="0" dirty="0">
+                          <a:solidFill>
+                            <a:srgbClr val="333333"/>
+                          </a:solidFill>
+                          <a:latin typeface="メイリオ" panose="020B0604030504040204" pitchFamily="50" charset="-128"/>
+                          <a:ea typeface="メイリオ" panose="020B0604030504040204" pitchFamily="50" charset="-128"/>
+                          <a:cs typeface="メイリオ"/>
+                        </a:rPr>
+                        <a:t>サロンの申込みフォームを直接案内</a:t>
+                      </a:r>
+                      <a:br>
+                        <a:rPr lang="ja-JP" altLang="en-US" sz="1400" b="0" dirty="0">
+                          <a:solidFill>
+                            <a:srgbClr val="333333"/>
+                          </a:solidFill>
+                          <a:latin typeface="メイリオ" panose="020B0604030504040204" pitchFamily="50" charset="-128"/>
+                          <a:ea typeface="メイリオ" panose="020B0604030504040204" pitchFamily="50" charset="-128"/>
+                          <a:cs typeface="メイリオ"/>
+                        </a:rPr>
+                      </a:br>
+                      <a:r>
+                        <a:rPr lang="ja-JP" altLang="en-US" sz="1400" b="0" dirty="0">
+                          <a:solidFill>
+                            <a:srgbClr val="333333"/>
+                          </a:solidFill>
+                          <a:latin typeface="メイリオ" panose="020B0604030504040204" pitchFamily="50" charset="-128"/>
+                          <a:ea typeface="メイリオ" panose="020B0604030504040204" pitchFamily="50" charset="-128"/>
+                          <a:cs typeface="メイリオ"/>
+                        </a:rPr>
+                        <a:t>（申込みはいつでも可能）</a:t>
                       </a:r>
                       <a:endParaRPr lang="ja-JP" altLang="en-US" sz="1400" dirty="0">
                         <a:latin typeface="メイリオ"/>
@@ -11192,7 +14286,7 @@
 </p:sld>
 </file>
 
-<file path=ppt/slides/slide70.xml><?xml version="1.0" encoding="utf-8"?>
+<file path=ppt/slides/slide72.xml><?xml version="1.0" encoding="utf-8"?>
 <p:sld xmlns:a="http://schemas.openxmlformats.org/drawingml/2006/main" xmlns:p="http://schemas.openxmlformats.org/presentationml/2006/main" xmlns:r="http://schemas.openxmlformats.org/officeDocument/2006/relationships">
   <p:cSld>
     <p:spTree>
@@ -12446,7 +15540,7 @@
 </p:sld>
 </file>
 
-<file path=ppt/slides/slide71.xml><?xml version="1.0" encoding="utf-8"?>
+<file path=ppt/slides/slide73.xml><?xml version="1.0" encoding="utf-8"?>
 <p:sld xmlns:a="http://schemas.openxmlformats.org/drawingml/2006/main" xmlns:p="http://schemas.openxmlformats.org/presentationml/2006/main" xmlns:r="http://schemas.openxmlformats.org/officeDocument/2006/relationships">
   <p:cSld>
     <p:spTree>
@@ -12651,7 +15745,7 @@
 </p:sld>
 </file>
 
-<file path=ppt/slides/slide72.xml><?xml version="1.0" encoding="utf-8"?>
+<file path=ppt/slides/slide74.xml><?xml version="1.0" encoding="utf-8"?>
 <p:sld xmlns:a="http://schemas.openxmlformats.org/drawingml/2006/main" xmlns:p="http://schemas.openxmlformats.org/presentationml/2006/main" xmlns:r="http://schemas.openxmlformats.org/officeDocument/2006/relationships">
   <p:cSld>
     <p:spTree>
@@ -14495,7 +17589,7 @@
 </p:sld>
 </file>
 
-<file path=ppt/slides/slide73.xml><?xml version="1.0" encoding="utf-8"?>
+<file path=ppt/slides/slide75.xml><?xml version="1.0" encoding="utf-8"?>
 <p:sld xmlns:a="http://schemas.openxmlformats.org/drawingml/2006/main" xmlns:p="http://schemas.openxmlformats.org/presentationml/2006/main" xmlns:r="http://schemas.openxmlformats.org/officeDocument/2006/relationships">
   <p:cSld>
     <p:spTree>
@@ -15689,7 +18783,7 @@
 </p:sld>
 </file>
 
-<file path=ppt/slides/slide74.xml><?xml version="1.0" encoding="utf-8"?>
+<file path=ppt/slides/slide76.xml><?xml version="1.0" encoding="utf-8"?>
 <p:sld xmlns:a="http://schemas.openxmlformats.org/drawingml/2006/main" xmlns:p="http://schemas.openxmlformats.org/presentationml/2006/main" xmlns:r="http://schemas.openxmlformats.org/officeDocument/2006/relationships">
   <p:cSld>
     <p:spTree>
@@ -17093,7 +20187,7 @@
 </p:sld>
 </file>
 
-<file path=ppt/slides/slide75.xml><?xml version="1.0" encoding="utf-8"?>
+<file path=ppt/slides/slide77.xml><?xml version="1.0" encoding="utf-8"?>
 <p:sld xmlns:a="http://schemas.openxmlformats.org/drawingml/2006/main" xmlns:p="http://schemas.openxmlformats.org/presentationml/2006/main" xmlns:r="http://schemas.openxmlformats.org/officeDocument/2006/relationships">
   <p:cSld>
     <p:spTree>
@@ -17214,7 +20308,7 @@
 </p:sld>
 </file>
 
-<file path=ppt/slides/slide76.xml><?xml version="1.0" encoding="utf-8"?>
+<file path=ppt/slides/slide78.xml><?xml version="1.0" encoding="utf-8"?>
 <p:sld xmlns:a="http://schemas.openxmlformats.org/drawingml/2006/main" xmlns:p="http://schemas.openxmlformats.org/presentationml/2006/main" xmlns:r="http://schemas.openxmlformats.org/officeDocument/2006/relationships">
   <p:cSld>
     <p:spTree>
@@ -19099,7 +22193,7 @@
 </p:sld>
 </file>
 
-<file path=ppt/slides/slide77.xml><?xml version="1.0" encoding="utf-8"?>
+<file path=ppt/slides/slide79.xml><?xml version="1.0" encoding="utf-8"?>
 <p:sld xmlns:a="http://schemas.openxmlformats.org/drawingml/2006/main" xmlns:p="http://schemas.openxmlformats.org/presentationml/2006/main" xmlns:r="http://schemas.openxmlformats.org/officeDocument/2006/relationships">
   <p:cSld>
     <p:spTree>

--- a/202610_株式会社すなおコンサルティング御中_LINE公式アカウント運用のご提案.pptx
+++ b/202610_株式会社すなおコンサルティング御中_LINE公式アカウント運用のご提案.pptx
@@ -15586,7 +15586,7 @@
                 <a:cs typeface="メイリオ"/>
                 <a:sym typeface="Meiryo"/>
               </a:rPr>
-              <a:t>概算お見積り</a:t>
+              <a:t>概算お見積り：6か月の見込み</a:t>
             </a:r>
           </a:p>
         </p:txBody>
@@ -15639,7 +15639,7 @@
                 <a:ea typeface="メイリオ" panose="020B0604030504040204" pitchFamily="50" charset="-128"/>
                 <a:cs typeface="メイリオ"/>
               </a:rPr>
-              <a:t>見込み</a:t>
+              <a:t>プラン②</a:t>
             </a:r>
           </a:p>
         </p:txBody>
@@ -15676,7 +15676,7 @@
                 <a:cs typeface="メイリオ"/>
                 <a:sym typeface="Meiryo"/>
               </a:rPr>
-              <a:t>平常期・イベント期の友だち数と、予約・入会の見込み</a:t>
+              <a:t>イベントのたびに友だちが増え、6か月目に追える人数は554人</a:t>
             </a:r>
             <a:endParaRPr lang="en-US" altLang="ja-JP" sz="1600" b="1" dirty="0">
               <a:latin typeface="メイリオ" panose="020B0604030504040204" pitchFamily="50" charset="-128"/>
@@ -15687,39 +15687,5095 @@
           </a:p>
         </p:txBody>
       </p:sp>
+      <p:graphicFrame>
+        <p:nvGraphicFramePr>
+          <p:cNvPr id="5" name="概算お見積り 4"/>
+          <p:cNvGraphicFramePr>
+            <a:graphicFrameLocks noGrp="1"/>
+          </p:cNvGraphicFramePr>
+          <p:nvPr/>
+        </p:nvGraphicFramePr>
+        <p:xfrm>
+          <a:off x="502920" y="1554480"/>
+          <a:ext cx="8897112" cy="3712464"/>
+        </p:xfrm>
+        <a:graphic>
+          <a:graphicData uri="http://schemas.openxmlformats.org/drawingml/2006/table">
+            <a:tbl>
+              <a:tblPr/>
+              <a:tblGrid>
+                <a:gridCol w="2103120"/>
+                <a:gridCol w="914400"/>
+                <a:gridCol w="979932"/>
+                <a:gridCol w="979932"/>
+                <a:gridCol w="979932"/>
+                <a:gridCol w="979932"/>
+                <a:gridCol w="979932"/>
+                <a:gridCol w="979932"/>
+              </a:tblGrid>
+              <a:tr h="566928">
+                <a:tc>
+                  <a:txBody>
+                    <a:bodyPr/>
+                    <a:lstStyle/>
+                    <a:p>
+                      <a:pPr algn="ctr">
+                        <a:buNone/>
+                      </a:pPr>
+                      <a:endParaRPr lang="ja-JP" altLang="en-US" sz="1200" dirty="0">
+                        <a:latin typeface="メイリオ"/>
+                        <a:ea typeface="メイリオ"/>
+                        <a:cs typeface="メイリオ"/>
+                      </a:endParaRPr>
+                    </a:p>
+                  </a:txBody>
+                  <a:tcPr marL="73152" marR="73152" marT="27432" marB="27432" anchor="ctr">
+                    <a:lnL w="9525" cap="flat" cmpd="sng" algn="ctr">
+                      <a:solidFill>
+                        <a:srgbClr val="BFBFBF"/>
+                      </a:solidFill>
+                      <a:prstDash val="solid"/>
+                      <a:round/>
+                      <a:headEnd type="none" w="med" len="med"/>
+                      <a:tailEnd type="none" w="med" len="med"/>
+                    </a:lnL>
+                    <a:lnR w="9525" cap="flat" cmpd="sng" algn="ctr">
+                      <a:solidFill>
+                        <a:srgbClr val="BFBFBF"/>
+                      </a:solidFill>
+                      <a:prstDash val="solid"/>
+                      <a:round/>
+                      <a:headEnd type="none" w="med" len="med"/>
+                      <a:tailEnd type="none" w="med" len="med"/>
+                    </a:lnR>
+                    <a:lnT w="9525" cap="flat" cmpd="sng" algn="ctr">
+                      <a:solidFill>
+                        <a:srgbClr val="BFBFBF"/>
+                      </a:solidFill>
+                      <a:prstDash val="solid"/>
+                      <a:round/>
+                      <a:headEnd type="none" w="med" len="med"/>
+                      <a:tailEnd type="none" w="med" len="med"/>
+                    </a:lnT>
+                    <a:lnB w="9525" cap="flat" cmpd="sng" algn="ctr">
+                      <a:solidFill>
+                        <a:srgbClr val="BFBFBF"/>
+                      </a:solidFill>
+                      <a:prstDash val="solid"/>
+                      <a:round/>
+                      <a:headEnd type="none" w="med" len="med"/>
+                      <a:tailEnd type="none" w="med" len="med"/>
+                    </a:lnB>
+                    <a:solidFill>
+                      <a:srgbClr val="002060"/>
+                    </a:solidFill>
+                  </a:tcPr>
+                </a:tc>
+                <a:tc>
+                  <a:txBody>
+                    <a:bodyPr/>
+                    <a:lstStyle/>
+                    <a:p>
+                      <a:pPr algn="ctr">
+                        <a:buNone/>
+                      </a:pPr>
+                      <a:r>
+                        <a:rPr lang="ja-JP" altLang="en-US" sz="1200" b="1" dirty="0">
+                          <a:solidFill>
+                            <a:srgbClr val="FFFFFF"/>
+                          </a:solidFill>
+                          <a:latin typeface="メイリオ" panose="020B0604030504040204" pitchFamily="50" charset="-128"/>
+                          <a:ea typeface="メイリオ" panose="020B0604030504040204" pitchFamily="50" charset="-128"/>
+                          <a:cs typeface="メイリオ"/>
+                        </a:rPr>
+                        <a:t>初期</a:t>
+                      </a:r>
+                      <a:endParaRPr lang="ja-JP" altLang="en-US" sz="1200" dirty="0">
+                        <a:latin typeface="メイリオ"/>
+                        <a:ea typeface="メイリオ"/>
+                        <a:cs typeface="メイリオ"/>
+                      </a:endParaRPr>
+                    </a:p>
+                  </a:txBody>
+                  <a:tcPr marL="73152" marR="73152" marT="27432" marB="27432" anchor="ctr">
+                    <a:lnL w="9525" cap="flat" cmpd="sng" algn="ctr">
+                      <a:solidFill>
+                        <a:srgbClr val="BFBFBF"/>
+                      </a:solidFill>
+                      <a:prstDash val="solid"/>
+                      <a:round/>
+                      <a:headEnd type="none" w="med" len="med"/>
+                      <a:tailEnd type="none" w="med" len="med"/>
+                    </a:lnL>
+                    <a:lnR w="9525" cap="flat" cmpd="sng" algn="ctr">
+                      <a:solidFill>
+                        <a:srgbClr val="BFBFBF"/>
+                      </a:solidFill>
+                      <a:prstDash val="solid"/>
+                      <a:round/>
+                      <a:headEnd type="none" w="med" len="med"/>
+                      <a:tailEnd type="none" w="med" len="med"/>
+                    </a:lnR>
+                    <a:lnT w="9525" cap="flat" cmpd="sng" algn="ctr">
+                      <a:solidFill>
+                        <a:srgbClr val="BFBFBF"/>
+                      </a:solidFill>
+                      <a:prstDash val="solid"/>
+                      <a:round/>
+                      <a:headEnd type="none" w="med" len="med"/>
+                      <a:tailEnd type="none" w="med" len="med"/>
+                    </a:lnT>
+                    <a:lnB w="9525" cap="flat" cmpd="sng" algn="ctr">
+                      <a:solidFill>
+                        <a:srgbClr val="BFBFBF"/>
+                      </a:solidFill>
+                      <a:prstDash val="solid"/>
+                      <a:round/>
+                      <a:headEnd type="none" w="med" len="med"/>
+                      <a:tailEnd type="none" w="med" len="med"/>
+                    </a:lnB>
+                    <a:solidFill>
+                      <a:srgbClr val="002060"/>
+                    </a:solidFill>
+                  </a:tcPr>
+                </a:tc>
+                <a:tc>
+                  <a:txBody>
+                    <a:bodyPr/>
+                    <a:lstStyle/>
+                    <a:p>
+                      <a:pPr algn="ctr">
+                        <a:buNone/>
+                      </a:pPr>
+                      <a:r>
+                        <a:rPr lang="ja-JP" altLang="en-US" sz="1200" b="1" dirty="0">
+                          <a:solidFill>
+                            <a:srgbClr val="FFFFFF"/>
+                          </a:solidFill>
+                          <a:latin typeface="メイリオ" panose="020B0604030504040204" pitchFamily="50" charset="-128"/>
+                          <a:ea typeface="メイリオ" panose="020B0604030504040204" pitchFamily="50" charset="-128"/>
+                          <a:cs typeface="メイリオ"/>
+                        </a:rPr>
+                        <a:t>1か月目</a:t>
+                      </a:r>
+                      <a:br>
+                        <a:rPr lang="ja-JP" altLang="en-US" sz="1200" b="1" dirty="0">
+                          <a:solidFill>
+                            <a:srgbClr val="FFFFFF"/>
+                          </a:solidFill>
+                          <a:latin typeface="メイリオ" panose="020B0604030504040204" pitchFamily="50" charset="-128"/>
+                          <a:ea typeface="メイリオ" panose="020B0604030504040204" pitchFamily="50" charset="-128"/>
+                          <a:cs typeface="メイリオ"/>
+                        </a:rPr>
+                      </a:br>
+                      <a:r>
+                        <a:rPr lang="ja-JP" altLang="en-US" sz="1200" b="1" dirty="0">
+                          <a:solidFill>
+                            <a:srgbClr val="FFFFFF"/>
+                          </a:solidFill>
+                          <a:latin typeface="メイリオ" panose="020B0604030504040204" pitchFamily="50" charset="-128"/>
+                          <a:ea typeface="メイリオ" panose="020B0604030504040204" pitchFamily="50" charset="-128"/>
+                          <a:cs typeface="メイリオ"/>
+                        </a:rPr>
+                        <a:t>イベント期</a:t>
+                      </a:r>
+                      <a:endParaRPr lang="ja-JP" altLang="en-US" sz="1200" dirty="0">
+                        <a:latin typeface="メイリオ"/>
+                        <a:ea typeface="メイリオ"/>
+                        <a:cs typeface="メイリオ"/>
+                      </a:endParaRPr>
+                    </a:p>
+                  </a:txBody>
+                  <a:tcPr marL="73152" marR="73152" marT="27432" marB="27432" anchor="ctr">
+                    <a:lnL w="9525" cap="flat" cmpd="sng" algn="ctr">
+                      <a:solidFill>
+                        <a:srgbClr val="BFBFBF"/>
+                      </a:solidFill>
+                      <a:prstDash val="solid"/>
+                      <a:round/>
+                      <a:headEnd type="none" w="med" len="med"/>
+                      <a:tailEnd type="none" w="med" len="med"/>
+                    </a:lnL>
+                    <a:lnR w="9525" cap="flat" cmpd="sng" algn="ctr">
+                      <a:solidFill>
+                        <a:srgbClr val="BFBFBF"/>
+                      </a:solidFill>
+                      <a:prstDash val="solid"/>
+                      <a:round/>
+                      <a:headEnd type="none" w="med" len="med"/>
+                      <a:tailEnd type="none" w="med" len="med"/>
+                    </a:lnR>
+                    <a:lnT w="9525" cap="flat" cmpd="sng" algn="ctr">
+                      <a:solidFill>
+                        <a:srgbClr val="BFBFBF"/>
+                      </a:solidFill>
+                      <a:prstDash val="solid"/>
+                      <a:round/>
+                      <a:headEnd type="none" w="med" len="med"/>
+                      <a:tailEnd type="none" w="med" len="med"/>
+                    </a:lnT>
+                    <a:lnB w="9525" cap="flat" cmpd="sng" algn="ctr">
+                      <a:solidFill>
+                        <a:srgbClr val="BFBFBF"/>
+                      </a:solidFill>
+                      <a:prstDash val="solid"/>
+                      <a:round/>
+                      <a:headEnd type="none" w="med" len="med"/>
+                      <a:tailEnd type="none" w="med" len="med"/>
+                    </a:lnB>
+                    <a:solidFill>
+                      <a:srgbClr val="002060"/>
+                    </a:solidFill>
+                  </a:tcPr>
+                </a:tc>
+                <a:tc>
+                  <a:txBody>
+                    <a:bodyPr/>
+                    <a:lstStyle/>
+                    <a:p>
+                      <a:pPr algn="ctr">
+                        <a:buNone/>
+                      </a:pPr>
+                      <a:r>
+                        <a:rPr lang="ja-JP" altLang="en-US" sz="1200" b="1" dirty="0">
+                          <a:solidFill>
+                            <a:srgbClr val="FFFFFF"/>
+                          </a:solidFill>
+                          <a:latin typeface="メイリオ" panose="020B0604030504040204" pitchFamily="50" charset="-128"/>
+                          <a:ea typeface="メイリオ" panose="020B0604030504040204" pitchFamily="50" charset="-128"/>
+                          <a:cs typeface="メイリオ"/>
+                        </a:rPr>
+                        <a:t>2か月目</a:t>
+                      </a:r>
+                      <a:br>
+                        <a:rPr lang="ja-JP" altLang="en-US" sz="1200" b="1" dirty="0">
+                          <a:solidFill>
+                            <a:srgbClr val="FFFFFF"/>
+                          </a:solidFill>
+                          <a:latin typeface="メイリオ" panose="020B0604030504040204" pitchFamily="50" charset="-128"/>
+                          <a:ea typeface="メイリオ" panose="020B0604030504040204" pitchFamily="50" charset="-128"/>
+                          <a:cs typeface="メイリオ"/>
+                        </a:rPr>
+                      </a:br>
+                      <a:r>
+                        <a:rPr lang="ja-JP" altLang="en-US" sz="1200" b="1" dirty="0">
+                          <a:solidFill>
+                            <a:srgbClr val="FFFFFF"/>
+                          </a:solidFill>
+                          <a:latin typeface="メイリオ" panose="020B0604030504040204" pitchFamily="50" charset="-128"/>
+                          <a:ea typeface="メイリオ" panose="020B0604030504040204" pitchFamily="50" charset="-128"/>
+                          <a:cs typeface="メイリオ"/>
+                        </a:rPr>
+                        <a:t>平常期</a:t>
+                      </a:r>
+                      <a:endParaRPr lang="ja-JP" altLang="en-US" sz="1200" dirty="0">
+                        <a:latin typeface="メイリオ"/>
+                        <a:ea typeface="メイリオ"/>
+                        <a:cs typeface="メイリオ"/>
+                      </a:endParaRPr>
+                    </a:p>
+                  </a:txBody>
+                  <a:tcPr marL="73152" marR="73152" marT="27432" marB="27432" anchor="ctr">
+                    <a:lnL w="9525" cap="flat" cmpd="sng" algn="ctr">
+                      <a:solidFill>
+                        <a:srgbClr val="BFBFBF"/>
+                      </a:solidFill>
+                      <a:prstDash val="solid"/>
+                      <a:round/>
+                      <a:headEnd type="none" w="med" len="med"/>
+                      <a:tailEnd type="none" w="med" len="med"/>
+                    </a:lnL>
+                    <a:lnR w="9525" cap="flat" cmpd="sng" algn="ctr">
+                      <a:solidFill>
+                        <a:srgbClr val="BFBFBF"/>
+                      </a:solidFill>
+                      <a:prstDash val="solid"/>
+                      <a:round/>
+                      <a:headEnd type="none" w="med" len="med"/>
+                      <a:tailEnd type="none" w="med" len="med"/>
+                    </a:lnR>
+                    <a:lnT w="9525" cap="flat" cmpd="sng" algn="ctr">
+                      <a:solidFill>
+                        <a:srgbClr val="BFBFBF"/>
+                      </a:solidFill>
+                      <a:prstDash val="solid"/>
+                      <a:round/>
+                      <a:headEnd type="none" w="med" len="med"/>
+                      <a:tailEnd type="none" w="med" len="med"/>
+                    </a:lnT>
+                    <a:lnB w="9525" cap="flat" cmpd="sng" algn="ctr">
+                      <a:solidFill>
+                        <a:srgbClr val="BFBFBF"/>
+                      </a:solidFill>
+                      <a:prstDash val="solid"/>
+                      <a:round/>
+                      <a:headEnd type="none" w="med" len="med"/>
+                      <a:tailEnd type="none" w="med" len="med"/>
+                    </a:lnB>
+                    <a:solidFill>
+                      <a:srgbClr val="002060"/>
+                    </a:solidFill>
+                  </a:tcPr>
+                </a:tc>
+                <a:tc>
+                  <a:txBody>
+                    <a:bodyPr/>
+                    <a:lstStyle/>
+                    <a:p>
+                      <a:pPr algn="ctr">
+                        <a:buNone/>
+                      </a:pPr>
+                      <a:r>
+                        <a:rPr lang="ja-JP" altLang="en-US" sz="1200" b="1" dirty="0">
+                          <a:solidFill>
+                            <a:srgbClr val="FFFFFF"/>
+                          </a:solidFill>
+                          <a:latin typeface="メイリオ" panose="020B0604030504040204" pitchFamily="50" charset="-128"/>
+                          <a:ea typeface="メイリオ" panose="020B0604030504040204" pitchFamily="50" charset="-128"/>
+                          <a:cs typeface="メイリオ"/>
+                        </a:rPr>
+                        <a:t>3か月目</a:t>
+                      </a:r>
+                      <a:br>
+                        <a:rPr lang="ja-JP" altLang="en-US" sz="1200" b="1" dirty="0">
+                          <a:solidFill>
+                            <a:srgbClr val="FFFFFF"/>
+                          </a:solidFill>
+                          <a:latin typeface="メイリオ" panose="020B0604030504040204" pitchFamily="50" charset="-128"/>
+                          <a:ea typeface="メイリオ" panose="020B0604030504040204" pitchFamily="50" charset="-128"/>
+                          <a:cs typeface="メイリオ"/>
+                        </a:rPr>
+                      </a:br>
+                      <a:r>
+                        <a:rPr lang="ja-JP" altLang="en-US" sz="1200" b="1" dirty="0">
+                          <a:solidFill>
+                            <a:srgbClr val="FFFFFF"/>
+                          </a:solidFill>
+                          <a:latin typeface="メイリオ" panose="020B0604030504040204" pitchFamily="50" charset="-128"/>
+                          <a:ea typeface="メイリオ" panose="020B0604030504040204" pitchFamily="50" charset="-128"/>
+                          <a:cs typeface="メイリオ"/>
+                        </a:rPr>
+                        <a:t>平常期</a:t>
+                      </a:r>
+                      <a:endParaRPr lang="ja-JP" altLang="en-US" sz="1200" dirty="0">
+                        <a:latin typeface="メイリオ"/>
+                        <a:ea typeface="メイリオ"/>
+                        <a:cs typeface="メイリオ"/>
+                      </a:endParaRPr>
+                    </a:p>
+                  </a:txBody>
+                  <a:tcPr marL="73152" marR="73152" marT="27432" marB="27432" anchor="ctr">
+                    <a:lnL w="9525" cap="flat" cmpd="sng" algn="ctr">
+                      <a:solidFill>
+                        <a:srgbClr val="BFBFBF"/>
+                      </a:solidFill>
+                      <a:prstDash val="solid"/>
+                      <a:round/>
+                      <a:headEnd type="none" w="med" len="med"/>
+                      <a:tailEnd type="none" w="med" len="med"/>
+                    </a:lnL>
+                    <a:lnR w="9525" cap="flat" cmpd="sng" algn="ctr">
+                      <a:solidFill>
+                        <a:srgbClr val="BFBFBF"/>
+                      </a:solidFill>
+                      <a:prstDash val="solid"/>
+                      <a:round/>
+                      <a:headEnd type="none" w="med" len="med"/>
+                      <a:tailEnd type="none" w="med" len="med"/>
+                    </a:lnR>
+                    <a:lnT w="9525" cap="flat" cmpd="sng" algn="ctr">
+                      <a:solidFill>
+                        <a:srgbClr val="BFBFBF"/>
+                      </a:solidFill>
+                      <a:prstDash val="solid"/>
+                      <a:round/>
+                      <a:headEnd type="none" w="med" len="med"/>
+                      <a:tailEnd type="none" w="med" len="med"/>
+                    </a:lnT>
+                    <a:lnB w="9525" cap="flat" cmpd="sng" algn="ctr">
+                      <a:solidFill>
+                        <a:srgbClr val="BFBFBF"/>
+                      </a:solidFill>
+                      <a:prstDash val="solid"/>
+                      <a:round/>
+                      <a:headEnd type="none" w="med" len="med"/>
+                      <a:tailEnd type="none" w="med" len="med"/>
+                    </a:lnB>
+                    <a:solidFill>
+                      <a:srgbClr val="002060"/>
+                    </a:solidFill>
+                  </a:tcPr>
+                </a:tc>
+                <a:tc>
+                  <a:txBody>
+                    <a:bodyPr/>
+                    <a:lstStyle/>
+                    <a:p>
+                      <a:pPr algn="ctr">
+                        <a:buNone/>
+                      </a:pPr>
+                      <a:r>
+                        <a:rPr lang="ja-JP" altLang="en-US" sz="1200" b="1" dirty="0">
+                          <a:solidFill>
+                            <a:srgbClr val="FFFFFF"/>
+                          </a:solidFill>
+                          <a:latin typeface="メイリオ" panose="020B0604030504040204" pitchFamily="50" charset="-128"/>
+                          <a:ea typeface="メイリオ" panose="020B0604030504040204" pitchFamily="50" charset="-128"/>
+                          <a:cs typeface="メイリオ"/>
+                        </a:rPr>
+                        <a:t>4か月目</a:t>
+                      </a:r>
+                      <a:br>
+                        <a:rPr lang="ja-JP" altLang="en-US" sz="1200" b="1" dirty="0">
+                          <a:solidFill>
+                            <a:srgbClr val="FFFFFF"/>
+                          </a:solidFill>
+                          <a:latin typeface="メイリオ" panose="020B0604030504040204" pitchFamily="50" charset="-128"/>
+                          <a:ea typeface="メイリオ" panose="020B0604030504040204" pitchFamily="50" charset="-128"/>
+                          <a:cs typeface="メイリオ"/>
+                        </a:rPr>
+                      </a:br>
+                      <a:r>
+                        <a:rPr lang="ja-JP" altLang="en-US" sz="1200" b="1" dirty="0">
+                          <a:solidFill>
+                            <a:srgbClr val="FFFFFF"/>
+                          </a:solidFill>
+                          <a:latin typeface="メイリオ" panose="020B0604030504040204" pitchFamily="50" charset="-128"/>
+                          <a:ea typeface="メイリオ" panose="020B0604030504040204" pitchFamily="50" charset="-128"/>
+                          <a:cs typeface="メイリオ"/>
+                        </a:rPr>
+                        <a:t>イベント期</a:t>
+                      </a:r>
+                      <a:endParaRPr lang="ja-JP" altLang="en-US" sz="1200" dirty="0">
+                        <a:latin typeface="メイリオ"/>
+                        <a:ea typeface="メイリオ"/>
+                        <a:cs typeface="メイリオ"/>
+                      </a:endParaRPr>
+                    </a:p>
+                  </a:txBody>
+                  <a:tcPr marL="73152" marR="73152" marT="27432" marB="27432" anchor="ctr">
+                    <a:lnL w="9525" cap="flat" cmpd="sng" algn="ctr">
+                      <a:solidFill>
+                        <a:srgbClr val="BFBFBF"/>
+                      </a:solidFill>
+                      <a:prstDash val="solid"/>
+                      <a:round/>
+                      <a:headEnd type="none" w="med" len="med"/>
+                      <a:tailEnd type="none" w="med" len="med"/>
+                    </a:lnL>
+                    <a:lnR w="9525" cap="flat" cmpd="sng" algn="ctr">
+                      <a:solidFill>
+                        <a:srgbClr val="BFBFBF"/>
+                      </a:solidFill>
+                      <a:prstDash val="solid"/>
+                      <a:round/>
+                      <a:headEnd type="none" w="med" len="med"/>
+                      <a:tailEnd type="none" w="med" len="med"/>
+                    </a:lnR>
+                    <a:lnT w="9525" cap="flat" cmpd="sng" algn="ctr">
+                      <a:solidFill>
+                        <a:srgbClr val="BFBFBF"/>
+                      </a:solidFill>
+                      <a:prstDash val="solid"/>
+                      <a:round/>
+                      <a:headEnd type="none" w="med" len="med"/>
+                      <a:tailEnd type="none" w="med" len="med"/>
+                    </a:lnT>
+                    <a:lnB w="9525" cap="flat" cmpd="sng" algn="ctr">
+                      <a:solidFill>
+                        <a:srgbClr val="BFBFBF"/>
+                      </a:solidFill>
+                      <a:prstDash val="solid"/>
+                      <a:round/>
+                      <a:headEnd type="none" w="med" len="med"/>
+                      <a:tailEnd type="none" w="med" len="med"/>
+                    </a:lnB>
+                    <a:solidFill>
+                      <a:srgbClr val="002060"/>
+                    </a:solidFill>
+                  </a:tcPr>
+                </a:tc>
+                <a:tc>
+                  <a:txBody>
+                    <a:bodyPr/>
+                    <a:lstStyle/>
+                    <a:p>
+                      <a:pPr algn="ctr">
+                        <a:buNone/>
+                      </a:pPr>
+                      <a:r>
+                        <a:rPr lang="ja-JP" altLang="en-US" sz="1200" b="1" dirty="0">
+                          <a:solidFill>
+                            <a:srgbClr val="FFFFFF"/>
+                          </a:solidFill>
+                          <a:latin typeface="メイリオ" panose="020B0604030504040204" pitchFamily="50" charset="-128"/>
+                          <a:ea typeface="メイリオ" panose="020B0604030504040204" pitchFamily="50" charset="-128"/>
+                          <a:cs typeface="メイリオ"/>
+                        </a:rPr>
+                        <a:t>5か月目</a:t>
+                      </a:r>
+                      <a:br>
+                        <a:rPr lang="ja-JP" altLang="en-US" sz="1200" b="1" dirty="0">
+                          <a:solidFill>
+                            <a:srgbClr val="FFFFFF"/>
+                          </a:solidFill>
+                          <a:latin typeface="メイリオ" panose="020B0604030504040204" pitchFamily="50" charset="-128"/>
+                          <a:ea typeface="メイリオ" panose="020B0604030504040204" pitchFamily="50" charset="-128"/>
+                          <a:cs typeface="メイリオ"/>
+                        </a:rPr>
+                      </a:br>
+                      <a:r>
+                        <a:rPr lang="ja-JP" altLang="en-US" sz="1200" b="1" dirty="0">
+                          <a:solidFill>
+                            <a:srgbClr val="FFFFFF"/>
+                          </a:solidFill>
+                          <a:latin typeface="メイリオ" panose="020B0604030504040204" pitchFamily="50" charset="-128"/>
+                          <a:ea typeface="メイリオ" panose="020B0604030504040204" pitchFamily="50" charset="-128"/>
+                          <a:cs typeface="メイリオ"/>
+                        </a:rPr>
+                        <a:t>平常期</a:t>
+                      </a:r>
+                      <a:endParaRPr lang="ja-JP" altLang="en-US" sz="1200" dirty="0">
+                        <a:latin typeface="メイリオ"/>
+                        <a:ea typeface="メイリオ"/>
+                        <a:cs typeface="メイリオ"/>
+                      </a:endParaRPr>
+                    </a:p>
+                  </a:txBody>
+                  <a:tcPr marL="73152" marR="73152" marT="27432" marB="27432" anchor="ctr">
+                    <a:lnL w="9525" cap="flat" cmpd="sng" algn="ctr">
+                      <a:solidFill>
+                        <a:srgbClr val="BFBFBF"/>
+                      </a:solidFill>
+                      <a:prstDash val="solid"/>
+                      <a:round/>
+                      <a:headEnd type="none" w="med" len="med"/>
+                      <a:tailEnd type="none" w="med" len="med"/>
+                    </a:lnL>
+                    <a:lnR w="9525" cap="flat" cmpd="sng" algn="ctr">
+                      <a:solidFill>
+                        <a:srgbClr val="BFBFBF"/>
+                      </a:solidFill>
+                      <a:prstDash val="solid"/>
+                      <a:round/>
+                      <a:headEnd type="none" w="med" len="med"/>
+                      <a:tailEnd type="none" w="med" len="med"/>
+                    </a:lnR>
+                    <a:lnT w="9525" cap="flat" cmpd="sng" algn="ctr">
+                      <a:solidFill>
+                        <a:srgbClr val="BFBFBF"/>
+                      </a:solidFill>
+                      <a:prstDash val="solid"/>
+                      <a:round/>
+                      <a:headEnd type="none" w="med" len="med"/>
+                      <a:tailEnd type="none" w="med" len="med"/>
+                    </a:lnT>
+                    <a:lnB w="9525" cap="flat" cmpd="sng" algn="ctr">
+                      <a:solidFill>
+                        <a:srgbClr val="BFBFBF"/>
+                      </a:solidFill>
+                      <a:prstDash val="solid"/>
+                      <a:round/>
+                      <a:headEnd type="none" w="med" len="med"/>
+                      <a:tailEnd type="none" w="med" len="med"/>
+                    </a:lnB>
+                    <a:solidFill>
+                      <a:srgbClr val="002060"/>
+                    </a:solidFill>
+                  </a:tcPr>
+                </a:tc>
+                <a:tc>
+                  <a:txBody>
+                    <a:bodyPr/>
+                    <a:lstStyle/>
+                    <a:p>
+                      <a:pPr algn="ctr">
+                        <a:buNone/>
+                      </a:pPr>
+                      <a:r>
+                        <a:rPr lang="ja-JP" altLang="en-US" sz="1200" b="1" dirty="0">
+                          <a:solidFill>
+                            <a:srgbClr val="FFFFFF"/>
+                          </a:solidFill>
+                          <a:latin typeface="メイリオ" panose="020B0604030504040204" pitchFamily="50" charset="-128"/>
+                          <a:ea typeface="メイリオ" panose="020B0604030504040204" pitchFamily="50" charset="-128"/>
+                          <a:cs typeface="メイリオ"/>
+                        </a:rPr>
+                        <a:t>6か月目</a:t>
+                      </a:r>
+                      <a:br>
+                        <a:rPr lang="ja-JP" altLang="en-US" sz="1200" b="1" dirty="0">
+                          <a:solidFill>
+                            <a:srgbClr val="FFFFFF"/>
+                          </a:solidFill>
+                          <a:latin typeface="メイリオ" panose="020B0604030504040204" pitchFamily="50" charset="-128"/>
+                          <a:ea typeface="メイリオ" panose="020B0604030504040204" pitchFamily="50" charset="-128"/>
+                          <a:cs typeface="メイリオ"/>
+                        </a:rPr>
+                      </a:br>
+                      <a:r>
+                        <a:rPr lang="ja-JP" altLang="en-US" sz="1200" b="1" dirty="0">
+                          <a:solidFill>
+                            <a:srgbClr val="FFFFFF"/>
+                          </a:solidFill>
+                          <a:latin typeface="メイリオ" panose="020B0604030504040204" pitchFamily="50" charset="-128"/>
+                          <a:ea typeface="メイリオ" panose="020B0604030504040204" pitchFamily="50" charset="-128"/>
+                          <a:cs typeface="メイリオ"/>
+                        </a:rPr>
+                        <a:t>平常期</a:t>
+                      </a:r>
+                      <a:endParaRPr lang="ja-JP" altLang="en-US" sz="1200" dirty="0">
+                        <a:latin typeface="メイリオ"/>
+                        <a:ea typeface="メイリオ"/>
+                        <a:cs typeface="メイリオ"/>
+                      </a:endParaRPr>
+                    </a:p>
+                  </a:txBody>
+                  <a:tcPr marL="73152" marR="73152" marT="27432" marB="27432" anchor="ctr">
+                    <a:lnL w="9525" cap="flat" cmpd="sng" algn="ctr">
+                      <a:solidFill>
+                        <a:srgbClr val="BFBFBF"/>
+                      </a:solidFill>
+                      <a:prstDash val="solid"/>
+                      <a:round/>
+                      <a:headEnd type="none" w="med" len="med"/>
+                      <a:tailEnd type="none" w="med" len="med"/>
+                    </a:lnL>
+                    <a:lnR w="9525" cap="flat" cmpd="sng" algn="ctr">
+                      <a:solidFill>
+                        <a:srgbClr val="BFBFBF"/>
+                      </a:solidFill>
+                      <a:prstDash val="solid"/>
+                      <a:round/>
+                      <a:headEnd type="none" w="med" len="med"/>
+                      <a:tailEnd type="none" w="med" len="med"/>
+                    </a:lnR>
+                    <a:lnT w="9525" cap="flat" cmpd="sng" algn="ctr">
+                      <a:solidFill>
+                        <a:srgbClr val="BFBFBF"/>
+                      </a:solidFill>
+                      <a:prstDash val="solid"/>
+                      <a:round/>
+                      <a:headEnd type="none" w="med" len="med"/>
+                      <a:tailEnd type="none" w="med" len="med"/>
+                    </a:lnT>
+                    <a:lnB w="9525" cap="flat" cmpd="sng" algn="ctr">
+                      <a:solidFill>
+                        <a:srgbClr val="BFBFBF"/>
+                      </a:solidFill>
+                      <a:prstDash val="solid"/>
+                      <a:round/>
+                      <a:headEnd type="none" w="med" len="med"/>
+                      <a:tailEnd type="none" w="med" len="med"/>
+                    </a:lnB>
+                    <a:solidFill>
+                      <a:srgbClr val="002060"/>
+                    </a:solidFill>
+                  </a:tcPr>
+                </a:tc>
+              </a:tr>
+              <a:tr h="393192">
+                <a:tc>
+                  <a:txBody>
+                    <a:bodyPr/>
+                    <a:lstStyle/>
+                    <a:p>
+                      <a:pPr algn="ctr">
+                        <a:buNone/>
+                      </a:pPr>
+                      <a:r>
+                        <a:rPr lang="ja-JP" altLang="en-US" sz="1200" b="1" dirty="0">
+                          <a:solidFill>
+                            <a:srgbClr val="002060"/>
+                          </a:solidFill>
+                          <a:latin typeface="メイリオ" panose="020B0604030504040204" pitchFamily="50" charset="-128"/>
+                          <a:ea typeface="メイリオ" panose="020B0604030504040204" pitchFamily="50" charset="-128"/>
+                          <a:cs typeface="メイリオ"/>
+                        </a:rPr>
+                        <a:t>友だちの増加（人）</a:t>
+                      </a:r>
+                      <a:endParaRPr lang="ja-JP" altLang="en-US" sz="1200" dirty="0">
+                        <a:latin typeface="メイリオ"/>
+                        <a:ea typeface="メイリオ"/>
+                        <a:cs typeface="メイリオ"/>
+                      </a:endParaRPr>
+                    </a:p>
+                  </a:txBody>
+                  <a:tcPr marL="91440" marR="73152" marT="36576" marB="36576" anchor="ctr">
+                    <a:lnL w="9525" cap="flat" cmpd="sng" algn="ctr">
+                      <a:solidFill>
+                        <a:srgbClr val="BFBFBF"/>
+                      </a:solidFill>
+                      <a:prstDash val="solid"/>
+                      <a:round/>
+                      <a:headEnd type="none" w="med" len="med"/>
+                      <a:tailEnd type="none" w="med" len="med"/>
+                    </a:lnL>
+                    <a:lnR w="9525" cap="flat" cmpd="sng" algn="ctr">
+                      <a:solidFill>
+                        <a:srgbClr val="BFBFBF"/>
+                      </a:solidFill>
+                      <a:prstDash val="solid"/>
+                      <a:round/>
+                      <a:headEnd type="none" w="med" len="med"/>
+                      <a:tailEnd type="none" w="med" len="med"/>
+                    </a:lnR>
+                    <a:lnT w="9525" cap="flat" cmpd="sng" algn="ctr">
+                      <a:solidFill>
+                        <a:srgbClr val="BFBFBF"/>
+                      </a:solidFill>
+                      <a:prstDash val="solid"/>
+                      <a:round/>
+                      <a:headEnd type="none" w="med" len="med"/>
+                      <a:tailEnd type="none" w="med" len="med"/>
+                    </a:lnT>
+                    <a:lnB w="9525" cap="flat" cmpd="sng" algn="ctr">
+                      <a:solidFill>
+                        <a:srgbClr val="BFBFBF"/>
+                      </a:solidFill>
+                      <a:prstDash val="solid"/>
+                      <a:round/>
+                      <a:headEnd type="none" w="med" len="med"/>
+                      <a:tailEnd type="none" w="med" len="med"/>
+                    </a:lnB>
+                    <a:solidFill>
+                      <a:srgbClr val="DCE6F2"/>
+                    </a:solidFill>
+                  </a:tcPr>
+                </a:tc>
+                <a:tc>
+                  <a:txBody>
+                    <a:bodyPr/>
+                    <a:lstStyle/>
+                    <a:p>
+                      <a:pPr algn="ctr">
+                        <a:buNone/>
+                      </a:pPr>
+                      <a:r>
+                        <a:rPr lang="ja-JP" altLang="en-US" sz="1300" b="0" dirty="0">
+                          <a:solidFill>
+                            <a:srgbClr val="333333"/>
+                          </a:solidFill>
+                          <a:latin typeface="メイリオ" panose="020B0604030504040204" pitchFamily="50" charset="-128"/>
+                          <a:ea typeface="メイリオ" panose="020B0604030504040204" pitchFamily="50" charset="-128"/>
+                          <a:cs typeface="メイリオ"/>
+                        </a:rPr>
+                        <a:t>-</a:t>
+                      </a:r>
+                      <a:endParaRPr lang="ja-JP" altLang="en-US" sz="1300" dirty="0">
+                        <a:latin typeface="メイリオ"/>
+                        <a:ea typeface="メイリオ"/>
+                        <a:cs typeface="メイリオ"/>
+                      </a:endParaRPr>
+                    </a:p>
+                  </a:txBody>
+                  <a:tcPr marL="91440" marR="73152" marT="36576" marB="36576" anchor="ctr">
+                    <a:lnL w="9525" cap="flat" cmpd="sng" algn="ctr">
+                      <a:solidFill>
+                        <a:srgbClr val="BFBFBF"/>
+                      </a:solidFill>
+                      <a:prstDash val="solid"/>
+                      <a:round/>
+                      <a:headEnd type="none" w="med" len="med"/>
+                      <a:tailEnd type="none" w="med" len="med"/>
+                    </a:lnL>
+                    <a:lnR w="9525" cap="flat" cmpd="sng" algn="ctr">
+                      <a:solidFill>
+                        <a:srgbClr val="BFBFBF"/>
+                      </a:solidFill>
+                      <a:prstDash val="solid"/>
+                      <a:round/>
+                      <a:headEnd type="none" w="med" len="med"/>
+                      <a:tailEnd type="none" w="med" len="med"/>
+                    </a:lnR>
+                    <a:lnT w="9525" cap="flat" cmpd="sng" algn="ctr">
+                      <a:solidFill>
+                        <a:srgbClr val="BFBFBF"/>
+                      </a:solidFill>
+                      <a:prstDash val="solid"/>
+                      <a:round/>
+                      <a:headEnd type="none" w="med" len="med"/>
+                      <a:tailEnd type="none" w="med" len="med"/>
+                    </a:lnT>
+                    <a:lnB w="9525" cap="flat" cmpd="sng" algn="ctr">
+                      <a:solidFill>
+                        <a:srgbClr val="BFBFBF"/>
+                      </a:solidFill>
+                      <a:prstDash val="solid"/>
+                      <a:round/>
+                      <a:headEnd type="none" w="med" len="med"/>
+                      <a:tailEnd type="none" w="med" len="med"/>
+                    </a:lnB>
+                    <a:solidFill>
+                      <a:srgbClr val="FFFFFF"/>
+                    </a:solidFill>
+                  </a:tcPr>
+                </a:tc>
+                <a:tc>
+                  <a:txBody>
+                    <a:bodyPr/>
+                    <a:lstStyle/>
+                    <a:p>
+                      <a:pPr algn="ctr">
+                        <a:buNone/>
+                      </a:pPr>
+                      <a:r>
+                        <a:rPr lang="ja-JP" altLang="en-US" sz="1300" b="0" dirty="0">
+                          <a:solidFill>
+                            <a:srgbClr val="333333"/>
+                          </a:solidFill>
+                          <a:latin typeface="メイリオ" panose="020B0604030504040204" pitchFamily="50" charset="-128"/>
+                          <a:ea typeface="メイリオ" panose="020B0604030504040204" pitchFamily="50" charset="-128"/>
+                          <a:cs typeface="メイリオ"/>
+                        </a:rPr>
+                        <a:t>401</a:t>
+                      </a:r>
+                      <a:endParaRPr lang="ja-JP" altLang="en-US" sz="1300" dirty="0">
+                        <a:latin typeface="メイリオ"/>
+                        <a:ea typeface="メイリオ"/>
+                        <a:cs typeface="メイリオ"/>
+                      </a:endParaRPr>
+                    </a:p>
+                  </a:txBody>
+                  <a:tcPr marL="91440" marR="73152" marT="36576" marB="36576" anchor="ctr">
+                    <a:lnL w="9525" cap="flat" cmpd="sng" algn="ctr">
+                      <a:solidFill>
+                        <a:srgbClr val="BFBFBF"/>
+                      </a:solidFill>
+                      <a:prstDash val="solid"/>
+                      <a:round/>
+                      <a:headEnd type="none" w="med" len="med"/>
+                      <a:tailEnd type="none" w="med" len="med"/>
+                    </a:lnL>
+                    <a:lnR w="9525" cap="flat" cmpd="sng" algn="ctr">
+                      <a:solidFill>
+                        <a:srgbClr val="BFBFBF"/>
+                      </a:solidFill>
+                      <a:prstDash val="solid"/>
+                      <a:round/>
+                      <a:headEnd type="none" w="med" len="med"/>
+                      <a:tailEnd type="none" w="med" len="med"/>
+                    </a:lnR>
+                    <a:lnT w="9525" cap="flat" cmpd="sng" algn="ctr">
+                      <a:solidFill>
+                        <a:srgbClr val="BFBFBF"/>
+                      </a:solidFill>
+                      <a:prstDash val="solid"/>
+                      <a:round/>
+                      <a:headEnd type="none" w="med" len="med"/>
+                      <a:tailEnd type="none" w="med" len="med"/>
+                    </a:lnT>
+                    <a:lnB w="9525" cap="flat" cmpd="sng" algn="ctr">
+                      <a:solidFill>
+                        <a:srgbClr val="BFBFBF"/>
+                      </a:solidFill>
+                      <a:prstDash val="solid"/>
+                      <a:round/>
+                      <a:headEnd type="none" w="med" len="med"/>
+                      <a:tailEnd type="none" w="med" len="med"/>
+                    </a:lnB>
+                    <a:solidFill>
+                      <a:srgbClr val="FFFFFF"/>
+                    </a:solidFill>
+                  </a:tcPr>
+                </a:tc>
+                <a:tc>
+                  <a:txBody>
+                    <a:bodyPr/>
+                    <a:lstStyle/>
+                    <a:p>
+                      <a:pPr algn="ctr">
+                        <a:buNone/>
+                      </a:pPr>
+                      <a:r>
+                        <a:rPr lang="ja-JP" altLang="en-US" sz="1300" b="0" dirty="0">
+                          <a:solidFill>
+                            <a:srgbClr val="333333"/>
+                          </a:solidFill>
+                          <a:latin typeface="メイリオ" panose="020B0604030504040204" pitchFamily="50" charset="-128"/>
+                          <a:ea typeface="メイリオ" panose="020B0604030504040204" pitchFamily="50" charset="-128"/>
+                          <a:cs typeface="メイリオ"/>
+                        </a:rPr>
+                        <a:t>0</a:t>
+                      </a:r>
+                      <a:endParaRPr lang="ja-JP" altLang="en-US" sz="1300" dirty="0">
+                        <a:latin typeface="メイリオ"/>
+                        <a:ea typeface="メイリオ"/>
+                        <a:cs typeface="メイリオ"/>
+                      </a:endParaRPr>
+                    </a:p>
+                  </a:txBody>
+                  <a:tcPr marL="91440" marR="73152" marT="36576" marB="36576" anchor="ctr">
+                    <a:lnL w="9525" cap="flat" cmpd="sng" algn="ctr">
+                      <a:solidFill>
+                        <a:srgbClr val="BFBFBF"/>
+                      </a:solidFill>
+                      <a:prstDash val="solid"/>
+                      <a:round/>
+                      <a:headEnd type="none" w="med" len="med"/>
+                      <a:tailEnd type="none" w="med" len="med"/>
+                    </a:lnL>
+                    <a:lnR w="9525" cap="flat" cmpd="sng" algn="ctr">
+                      <a:solidFill>
+                        <a:srgbClr val="BFBFBF"/>
+                      </a:solidFill>
+                      <a:prstDash val="solid"/>
+                      <a:round/>
+                      <a:headEnd type="none" w="med" len="med"/>
+                      <a:tailEnd type="none" w="med" len="med"/>
+                    </a:lnR>
+                    <a:lnT w="9525" cap="flat" cmpd="sng" algn="ctr">
+                      <a:solidFill>
+                        <a:srgbClr val="BFBFBF"/>
+                      </a:solidFill>
+                      <a:prstDash val="solid"/>
+                      <a:round/>
+                      <a:headEnd type="none" w="med" len="med"/>
+                      <a:tailEnd type="none" w="med" len="med"/>
+                    </a:lnT>
+                    <a:lnB w="9525" cap="flat" cmpd="sng" algn="ctr">
+                      <a:solidFill>
+                        <a:srgbClr val="BFBFBF"/>
+                      </a:solidFill>
+                      <a:prstDash val="solid"/>
+                      <a:round/>
+                      <a:headEnd type="none" w="med" len="med"/>
+                      <a:tailEnd type="none" w="med" len="med"/>
+                    </a:lnB>
+                    <a:solidFill>
+                      <a:srgbClr val="FFFFFF"/>
+                    </a:solidFill>
+                  </a:tcPr>
+                </a:tc>
+                <a:tc>
+                  <a:txBody>
+                    <a:bodyPr/>
+                    <a:lstStyle/>
+                    <a:p>
+                      <a:pPr algn="ctr">
+                        <a:buNone/>
+                      </a:pPr>
+                      <a:r>
+                        <a:rPr lang="ja-JP" altLang="en-US" sz="1300" b="0" dirty="0">
+                          <a:solidFill>
+                            <a:srgbClr val="333333"/>
+                          </a:solidFill>
+                          <a:latin typeface="メイリオ" panose="020B0604030504040204" pitchFamily="50" charset="-128"/>
+                          <a:ea typeface="メイリオ" panose="020B0604030504040204" pitchFamily="50" charset="-128"/>
+                          <a:cs typeface="メイリオ"/>
+                        </a:rPr>
+                        <a:t>0</a:t>
+                      </a:r>
+                      <a:endParaRPr lang="ja-JP" altLang="en-US" sz="1300" dirty="0">
+                        <a:latin typeface="メイリオ"/>
+                        <a:ea typeface="メイリオ"/>
+                        <a:cs typeface="メイリオ"/>
+                      </a:endParaRPr>
+                    </a:p>
+                  </a:txBody>
+                  <a:tcPr marL="91440" marR="73152" marT="36576" marB="36576" anchor="ctr">
+                    <a:lnL w="9525" cap="flat" cmpd="sng" algn="ctr">
+                      <a:solidFill>
+                        <a:srgbClr val="BFBFBF"/>
+                      </a:solidFill>
+                      <a:prstDash val="solid"/>
+                      <a:round/>
+                      <a:headEnd type="none" w="med" len="med"/>
+                      <a:tailEnd type="none" w="med" len="med"/>
+                    </a:lnL>
+                    <a:lnR w="9525" cap="flat" cmpd="sng" algn="ctr">
+                      <a:solidFill>
+                        <a:srgbClr val="BFBFBF"/>
+                      </a:solidFill>
+                      <a:prstDash val="solid"/>
+                      <a:round/>
+                      <a:headEnd type="none" w="med" len="med"/>
+                      <a:tailEnd type="none" w="med" len="med"/>
+                    </a:lnR>
+                    <a:lnT w="9525" cap="flat" cmpd="sng" algn="ctr">
+                      <a:solidFill>
+                        <a:srgbClr val="BFBFBF"/>
+                      </a:solidFill>
+                      <a:prstDash val="solid"/>
+                      <a:round/>
+                      <a:headEnd type="none" w="med" len="med"/>
+                      <a:tailEnd type="none" w="med" len="med"/>
+                    </a:lnT>
+                    <a:lnB w="9525" cap="flat" cmpd="sng" algn="ctr">
+                      <a:solidFill>
+                        <a:srgbClr val="BFBFBF"/>
+                      </a:solidFill>
+                      <a:prstDash val="solid"/>
+                      <a:round/>
+                      <a:headEnd type="none" w="med" len="med"/>
+                      <a:tailEnd type="none" w="med" len="med"/>
+                    </a:lnB>
+                    <a:solidFill>
+                      <a:srgbClr val="FFFFFF"/>
+                    </a:solidFill>
+                  </a:tcPr>
+                </a:tc>
+                <a:tc>
+                  <a:txBody>
+                    <a:bodyPr/>
+                    <a:lstStyle/>
+                    <a:p>
+                      <a:pPr algn="ctr">
+                        <a:buNone/>
+                      </a:pPr>
+                      <a:r>
+                        <a:rPr lang="ja-JP" altLang="en-US" sz="1300" b="0" dirty="0">
+                          <a:solidFill>
+                            <a:srgbClr val="333333"/>
+                          </a:solidFill>
+                          <a:latin typeface="メイリオ" panose="020B0604030504040204" pitchFamily="50" charset="-128"/>
+                          <a:ea typeface="メイリオ" panose="020B0604030504040204" pitchFamily="50" charset="-128"/>
+                          <a:cs typeface="メイリオ"/>
+                        </a:rPr>
+                        <a:t>401</a:t>
+                      </a:r>
+                      <a:endParaRPr lang="ja-JP" altLang="en-US" sz="1300" dirty="0">
+                        <a:latin typeface="メイリオ"/>
+                        <a:ea typeface="メイリオ"/>
+                        <a:cs typeface="メイリオ"/>
+                      </a:endParaRPr>
+                    </a:p>
+                  </a:txBody>
+                  <a:tcPr marL="91440" marR="73152" marT="36576" marB="36576" anchor="ctr">
+                    <a:lnL w="9525" cap="flat" cmpd="sng" algn="ctr">
+                      <a:solidFill>
+                        <a:srgbClr val="BFBFBF"/>
+                      </a:solidFill>
+                      <a:prstDash val="solid"/>
+                      <a:round/>
+                      <a:headEnd type="none" w="med" len="med"/>
+                      <a:tailEnd type="none" w="med" len="med"/>
+                    </a:lnL>
+                    <a:lnR w="9525" cap="flat" cmpd="sng" algn="ctr">
+                      <a:solidFill>
+                        <a:srgbClr val="BFBFBF"/>
+                      </a:solidFill>
+                      <a:prstDash val="solid"/>
+                      <a:round/>
+                      <a:headEnd type="none" w="med" len="med"/>
+                      <a:tailEnd type="none" w="med" len="med"/>
+                    </a:lnR>
+                    <a:lnT w="9525" cap="flat" cmpd="sng" algn="ctr">
+                      <a:solidFill>
+                        <a:srgbClr val="BFBFBF"/>
+                      </a:solidFill>
+                      <a:prstDash val="solid"/>
+                      <a:round/>
+                      <a:headEnd type="none" w="med" len="med"/>
+                      <a:tailEnd type="none" w="med" len="med"/>
+                    </a:lnT>
+                    <a:lnB w="9525" cap="flat" cmpd="sng" algn="ctr">
+                      <a:solidFill>
+                        <a:srgbClr val="BFBFBF"/>
+                      </a:solidFill>
+                      <a:prstDash val="solid"/>
+                      <a:round/>
+                      <a:headEnd type="none" w="med" len="med"/>
+                      <a:tailEnd type="none" w="med" len="med"/>
+                    </a:lnB>
+                    <a:solidFill>
+                      <a:srgbClr val="FFFFFF"/>
+                    </a:solidFill>
+                  </a:tcPr>
+                </a:tc>
+                <a:tc>
+                  <a:txBody>
+                    <a:bodyPr/>
+                    <a:lstStyle/>
+                    <a:p>
+                      <a:pPr algn="ctr">
+                        <a:buNone/>
+                      </a:pPr>
+                      <a:r>
+                        <a:rPr lang="ja-JP" altLang="en-US" sz="1300" b="0" dirty="0">
+                          <a:solidFill>
+                            <a:srgbClr val="333333"/>
+                          </a:solidFill>
+                          <a:latin typeface="メイリオ" panose="020B0604030504040204" pitchFamily="50" charset="-128"/>
+                          <a:ea typeface="メイリオ" panose="020B0604030504040204" pitchFamily="50" charset="-128"/>
+                          <a:cs typeface="メイリオ"/>
+                        </a:rPr>
+                        <a:t>0</a:t>
+                      </a:r>
+                      <a:endParaRPr lang="ja-JP" altLang="en-US" sz="1300" dirty="0">
+                        <a:latin typeface="メイリオ"/>
+                        <a:ea typeface="メイリオ"/>
+                        <a:cs typeface="メイリオ"/>
+                      </a:endParaRPr>
+                    </a:p>
+                  </a:txBody>
+                  <a:tcPr marL="91440" marR="73152" marT="36576" marB="36576" anchor="ctr">
+                    <a:lnL w="9525" cap="flat" cmpd="sng" algn="ctr">
+                      <a:solidFill>
+                        <a:srgbClr val="BFBFBF"/>
+                      </a:solidFill>
+                      <a:prstDash val="solid"/>
+                      <a:round/>
+                      <a:headEnd type="none" w="med" len="med"/>
+                      <a:tailEnd type="none" w="med" len="med"/>
+                    </a:lnL>
+                    <a:lnR w="9525" cap="flat" cmpd="sng" algn="ctr">
+                      <a:solidFill>
+                        <a:srgbClr val="BFBFBF"/>
+                      </a:solidFill>
+                      <a:prstDash val="solid"/>
+                      <a:round/>
+                      <a:headEnd type="none" w="med" len="med"/>
+                      <a:tailEnd type="none" w="med" len="med"/>
+                    </a:lnR>
+                    <a:lnT w="9525" cap="flat" cmpd="sng" algn="ctr">
+                      <a:solidFill>
+                        <a:srgbClr val="BFBFBF"/>
+                      </a:solidFill>
+                      <a:prstDash val="solid"/>
+                      <a:round/>
+                      <a:headEnd type="none" w="med" len="med"/>
+                      <a:tailEnd type="none" w="med" len="med"/>
+                    </a:lnT>
+                    <a:lnB w="9525" cap="flat" cmpd="sng" algn="ctr">
+                      <a:solidFill>
+                        <a:srgbClr val="BFBFBF"/>
+                      </a:solidFill>
+                      <a:prstDash val="solid"/>
+                      <a:round/>
+                      <a:headEnd type="none" w="med" len="med"/>
+                      <a:tailEnd type="none" w="med" len="med"/>
+                    </a:lnB>
+                    <a:solidFill>
+                      <a:srgbClr val="FFFFFF"/>
+                    </a:solidFill>
+                  </a:tcPr>
+                </a:tc>
+                <a:tc>
+                  <a:txBody>
+                    <a:bodyPr/>
+                    <a:lstStyle/>
+                    <a:p>
+                      <a:pPr algn="ctr">
+                        <a:buNone/>
+                      </a:pPr>
+                      <a:r>
+                        <a:rPr lang="ja-JP" altLang="en-US" sz="1300" b="0" dirty="0">
+                          <a:solidFill>
+                            <a:srgbClr val="333333"/>
+                          </a:solidFill>
+                          <a:latin typeface="メイリオ" panose="020B0604030504040204" pitchFamily="50" charset="-128"/>
+                          <a:ea typeface="メイリオ" panose="020B0604030504040204" pitchFamily="50" charset="-128"/>
+                          <a:cs typeface="メイリオ"/>
+                        </a:rPr>
+                        <a:t>0</a:t>
+                      </a:r>
+                      <a:endParaRPr lang="ja-JP" altLang="en-US" sz="1300" dirty="0">
+                        <a:latin typeface="メイリオ"/>
+                        <a:ea typeface="メイリオ"/>
+                        <a:cs typeface="メイリオ"/>
+                      </a:endParaRPr>
+                    </a:p>
+                  </a:txBody>
+                  <a:tcPr marL="91440" marR="73152" marT="36576" marB="36576" anchor="ctr">
+                    <a:lnL w="9525" cap="flat" cmpd="sng" algn="ctr">
+                      <a:solidFill>
+                        <a:srgbClr val="BFBFBF"/>
+                      </a:solidFill>
+                      <a:prstDash val="solid"/>
+                      <a:round/>
+                      <a:headEnd type="none" w="med" len="med"/>
+                      <a:tailEnd type="none" w="med" len="med"/>
+                    </a:lnL>
+                    <a:lnR w="9525" cap="flat" cmpd="sng" algn="ctr">
+                      <a:solidFill>
+                        <a:srgbClr val="BFBFBF"/>
+                      </a:solidFill>
+                      <a:prstDash val="solid"/>
+                      <a:round/>
+                      <a:headEnd type="none" w="med" len="med"/>
+                      <a:tailEnd type="none" w="med" len="med"/>
+                    </a:lnR>
+                    <a:lnT w="9525" cap="flat" cmpd="sng" algn="ctr">
+                      <a:solidFill>
+                        <a:srgbClr val="BFBFBF"/>
+                      </a:solidFill>
+                      <a:prstDash val="solid"/>
+                      <a:round/>
+                      <a:headEnd type="none" w="med" len="med"/>
+                      <a:tailEnd type="none" w="med" len="med"/>
+                    </a:lnT>
+                    <a:lnB w="9525" cap="flat" cmpd="sng" algn="ctr">
+                      <a:solidFill>
+                        <a:srgbClr val="BFBFBF"/>
+                      </a:solidFill>
+                      <a:prstDash val="solid"/>
+                      <a:round/>
+                      <a:headEnd type="none" w="med" len="med"/>
+                      <a:tailEnd type="none" w="med" len="med"/>
+                    </a:lnB>
+                    <a:solidFill>
+                      <a:srgbClr val="FFFFFF"/>
+                    </a:solidFill>
+                  </a:tcPr>
+                </a:tc>
+              </a:tr>
+              <a:tr h="393192">
+                <a:tc>
+                  <a:txBody>
+                    <a:bodyPr/>
+                    <a:lstStyle/>
+                    <a:p>
+                      <a:pPr algn="ctr">
+                        <a:buNone/>
+                      </a:pPr>
+                      <a:r>
+                        <a:rPr lang="ja-JP" altLang="en-US" sz="1200" b="1" dirty="0">
+                          <a:solidFill>
+                            <a:srgbClr val="002060"/>
+                          </a:solidFill>
+                          <a:latin typeface="メイリオ" panose="020B0604030504040204" pitchFamily="50" charset="-128"/>
+                          <a:ea typeface="メイリオ" panose="020B0604030504040204" pitchFamily="50" charset="-128"/>
+                          <a:cs typeface="メイリオ"/>
+                        </a:rPr>
+                        <a:t>追える人数（人）</a:t>
+                      </a:r>
+                      <a:endParaRPr lang="ja-JP" altLang="en-US" sz="1200" dirty="0">
+                        <a:latin typeface="メイリオ"/>
+                        <a:ea typeface="メイリオ"/>
+                        <a:cs typeface="メイリオ"/>
+                      </a:endParaRPr>
+                    </a:p>
+                  </a:txBody>
+                  <a:tcPr marL="91440" marR="73152" marT="36576" marB="36576" anchor="ctr">
+                    <a:lnL w="9525" cap="flat" cmpd="sng" algn="ctr">
+                      <a:solidFill>
+                        <a:srgbClr val="BFBFBF"/>
+                      </a:solidFill>
+                      <a:prstDash val="solid"/>
+                      <a:round/>
+                      <a:headEnd type="none" w="med" len="med"/>
+                      <a:tailEnd type="none" w="med" len="med"/>
+                    </a:lnL>
+                    <a:lnR w="9525" cap="flat" cmpd="sng" algn="ctr">
+                      <a:solidFill>
+                        <a:srgbClr val="BFBFBF"/>
+                      </a:solidFill>
+                      <a:prstDash val="solid"/>
+                      <a:round/>
+                      <a:headEnd type="none" w="med" len="med"/>
+                      <a:tailEnd type="none" w="med" len="med"/>
+                    </a:lnR>
+                    <a:lnT w="9525" cap="flat" cmpd="sng" algn="ctr">
+                      <a:solidFill>
+                        <a:srgbClr val="BFBFBF"/>
+                      </a:solidFill>
+                      <a:prstDash val="solid"/>
+                      <a:round/>
+                      <a:headEnd type="none" w="med" len="med"/>
+                      <a:tailEnd type="none" w="med" len="med"/>
+                    </a:lnT>
+                    <a:lnB w="9525" cap="flat" cmpd="sng" algn="ctr">
+                      <a:solidFill>
+                        <a:srgbClr val="BFBFBF"/>
+                      </a:solidFill>
+                      <a:prstDash val="solid"/>
+                      <a:round/>
+                      <a:headEnd type="none" w="med" len="med"/>
+                      <a:tailEnd type="none" w="med" len="med"/>
+                    </a:lnB>
+                    <a:solidFill>
+                      <a:srgbClr val="DCE6F2"/>
+                    </a:solidFill>
+                  </a:tcPr>
+                </a:tc>
+                <a:tc>
+                  <a:txBody>
+                    <a:bodyPr/>
+                    <a:lstStyle/>
+                    <a:p>
+                      <a:pPr algn="ctr">
+                        <a:buNone/>
+                      </a:pPr>
+                      <a:r>
+                        <a:rPr lang="ja-JP" altLang="en-US" sz="1300" b="0" dirty="0">
+                          <a:solidFill>
+                            <a:srgbClr val="333333"/>
+                          </a:solidFill>
+                          <a:latin typeface="メイリオ" panose="020B0604030504040204" pitchFamily="50" charset="-128"/>
+                          <a:ea typeface="メイリオ" panose="020B0604030504040204" pitchFamily="50" charset="-128"/>
+                          <a:cs typeface="メイリオ"/>
+                        </a:rPr>
+                        <a:t>-</a:t>
+                      </a:r>
+                      <a:endParaRPr lang="ja-JP" altLang="en-US" sz="1300" dirty="0">
+                        <a:latin typeface="メイリオ"/>
+                        <a:ea typeface="メイリオ"/>
+                        <a:cs typeface="メイリオ"/>
+                      </a:endParaRPr>
+                    </a:p>
+                  </a:txBody>
+                  <a:tcPr marL="91440" marR="73152" marT="36576" marB="36576" anchor="ctr">
+                    <a:lnL w="9525" cap="flat" cmpd="sng" algn="ctr">
+                      <a:solidFill>
+                        <a:srgbClr val="BFBFBF"/>
+                      </a:solidFill>
+                      <a:prstDash val="solid"/>
+                      <a:round/>
+                      <a:headEnd type="none" w="med" len="med"/>
+                      <a:tailEnd type="none" w="med" len="med"/>
+                    </a:lnL>
+                    <a:lnR w="9525" cap="flat" cmpd="sng" algn="ctr">
+                      <a:solidFill>
+                        <a:srgbClr val="BFBFBF"/>
+                      </a:solidFill>
+                      <a:prstDash val="solid"/>
+                      <a:round/>
+                      <a:headEnd type="none" w="med" len="med"/>
+                      <a:tailEnd type="none" w="med" len="med"/>
+                    </a:lnR>
+                    <a:lnT w="9525" cap="flat" cmpd="sng" algn="ctr">
+                      <a:solidFill>
+                        <a:srgbClr val="BFBFBF"/>
+                      </a:solidFill>
+                      <a:prstDash val="solid"/>
+                      <a:round/>
+                      <a:headEnd type="none" w="med" len="med"/>
+                      <a:tailEnd type="none" w="med" len="med"/>
+                    </a:lnT>
+                    <a:lnB w="9525" cap="flat" cmpd="sng" algn="ctr">
+                      <a:solidFill>
+                        <a:srgbClr val="BFBFBF"/>
+                      </a:solidFill>
+                      <a:prstDash val="solid"/>
+                      <a:round/>
+                      <a:headEnd type="none" w="med" len="med"/>
+                      <a:tailEnd type="none" w="med" len="med"/>
+                    </a:lnB>
+                    <a:solidFill>
+                      <a:srgbClr val="FFFFFF"/>
+                    </a:solidFill>
+                  </a:tcPr>
+                </a:tc>
+                <a:tc>
+                  <a:txBody>
+                    <a:bodyPr/>
+                    <a:lstStyle/>
+                    <a:p>
+                      <a:pPr algn="ctr">
+                        <a:buNone/>
+                      </a:pPr>
+                      <a:r>
+                        <a:rPr lang="ja-JP" altLang="en-US" sz="1300" b="1" dirty="0">
+                          <a:solidFill>
+                            <a:srgbClr val="002060"/>
+                          </a:solidFill>
+                          <a:latin typeface="メイリオ" panose="020B0604030504040204" pitchFamily="50" charset="-128"/>
+                          <a:ea typeface="メイリオ" panose="020B0604030504040204" pitchFamily="50" charset="-128"/>
+                          <a:cs typeface="メイリオ"/>
+                        </a:rPr>
+                        <a:t>289</a:t>
+                      </a:r>
+                      <a:endParaRPr lang="ja-JP" altLang="en-US" sz="1300" dirty="0">
+                        <a:latin typeface="メイリオ"/>
+                        <a:ea typeface="メイリオ"/>
+                        <a:cs typeface="メイリオ"/>
+                      </a:endParaRPr>
+                    </a:p>
+                  </a:txBody>
+                  <a:tcPr marL="91440" marR="73152" marT="36576" marB="36576" anchor="ctr">
+                    <a:lnL w="9525" cap="flat" cmpd="sng" algn="ctr">
+                      <a:solidFill>
+                        <a:srgbClr val="BFBFBF"/>
+                      </a:solidFill>
+                      <a:prstDash val="solid"/>
+                      <a:round/>
+                      <a:headEnd type="none" w="med" len="med"/>
+                      <a:tailEnd type="none" w="med" len="med"/>
+                    </a:lnL>
+                    <a:lnR w="9525" cap="flat" cmpd="sng" algn="ctr">
+                      <a:solidFill>
+                        <a:srgbClr val="BFBFBF"/>
+                      </a:solidFill>
+                      <a:prstDash val="solid"/>
+                      <a:round/>
+                      <a:headEnd type="none" w="med" len="med"/>
+                      <a:tailEnd type="none" w="med" len="med"/>
+                    </a:lnR>
+                    <a:lnT w="9525" cap="flat" cmpd="sng" algn="ctr">
+                      <a:solidFill>
+                        <a:srgbClr val="BFBFBF"/>
+                      </a:solidFill>
+                      <a:prstDash val="solid"/>
+                      <a:round/>
+                      <a:headEnd type="none" w="med" len="med"/>
+                      <a:tailEnd type="none" w="med" len="med"/>
+                    </a:lnT>
+                    <a:lnB w="9525" cap="flat" cmpd="sng" algn="ctr">
+                      <a:solidFill>
+                        <a:srgbClr val="BFBFBF"/>
+                      </a:solidFill>
+                      <a:prstDash val="solid"/>
+                      <a:round/>
+                      <a:headEnd type="none" w="med" len="med"/>
+                      <a:tailEnd type="none" w="med" len="med"/>
+                    </a:lnB>
+                    <a:solidFill>
+                      <a:srgbClr val="FFFFFF"/>
+                    </a:solidFill>
+                  </a:tcPr>
+                </a:tc>
+                <a:tc>
+                  <a:txBody>
+                    <a:bodyPr/>
+                    <a:lstStyle/>
+                    <a:p>
+                      <a:pPr algn="ctr">
+                        <a:buNone/>
+                      </a:pPr>
+                      <a:r>
+                        <a:rPr lang="ja-JP" altLang="en-US" sz="1300" b="1" dirty="0">
+                          <a:solidFill>
+                            <a:srgbClr val="002060"/>
+                          </a:solidFill>
+                          <a:latin typeface="メイリオ" panose="020B0604030504040204" pitchFamily="50" charset="-128"/>
+                          <a:ea typeface="メイリオ" panose="020B0604030504040204" pitchFamily="50" charset="-128"/>
+                          <a:cs typeface="メイリオ"/>
+                        </a:rPr>
+                        <a:t>285</a:t>
+                      </a:r>
+                      <a:endParaRPr lang="ja-JP" altLang="en-US" sz="1300" dirty="0">
+                        <a:latin typeface="メイリオ"/>
+                        <a:ea typeface="メイリオ"/>
+                        <a:cs typeface="メイリオ"/>
+                      </a:endParaRPr>
+                    </a:p>
+                  </a:txBody>
+                  <a:tcPr marL="91440" marR="73152" marT="36576" marB="36576" anchor="ctr">
+                    <a:lnL w="9525" cap="flat" cmpd="sng" algn="ctr">
+                      <a:solidFill>
+                        <a:srgbClr val="BFBFBF"/>
+                      </a:solidFill>
+                      <a:prstDash val="solid"/>
+                      <a:round/>
+                      <a:headEnd type="none" w="med" len="med"/>
+                      <a:tailEnd type="none" w="med" len="med"/>
+                    </a:lnL>
+                    <a:lnR w="9525" cap="flat" cmpd="sng" algn="ctr">
+                      <a:solidFill>
+                        <a:srgbClr val="BFBFBF"/>
+                      </a:solidFill>
+                      <a:prstDash val="solid"/>
+                      <a:round/>
+                      <a:headEnd type="none" w="med" len="med"/>
+                      <a:tailEnd type="none" w="med" len="med"/>
+                    </a:lnR>
+                    <a:lnT w="9525" cap="flat" cmpd="sng" algn="ctr">
+                      <a:solidFill>
+                        <a:srgbClr val="BFBFBF"/>
+                      </a:solidFill>
+                      <a:prstDash val="solid"/>
+                      <a:round/>
+                      <a:headEnd type="none" w="med" len="med"/>
+                      <a:tailEnd type="none" w="med" len="med"/>
+                    </a:lnT>
+                    <a:lnB w="9525" cap="flat" cmpd="sng" algn="ctr">
+                      <a:solidFill>
+                        <a:srgbClr val="BFBFBF"/>
+                      </a:solidFill>
+                      <a:prstDash val="solid"/>
+                      <a:round/>
+                      <a:headEnd type="none" w="med" len="med"/>
+                      <a:tailEnd type="none" w="med" len="med"/>
+                    </a:lnB>
+                    <a:solidFill>
+                      <a:srgbClr val="FFFFFF"/>
+                    </a:solidFill>
+                  </a:tcPr>
+                </a:tc>
+                <a:tc>
+                  <a:txBody>
+                    <a:bodyPr/>
+                    <a:lstStyle/>
+                    <a:p>
+                      <a:pPr algn="ctr">
+                        <a:buNone/>
+                      </a:pPr>
+                      <a:r>
+                        <a:rPr lang="ja-JP" altLang="en-US" sz="1300" b="1" dirty="0">
+                          <a:solidFill>
+                            <a:srgbClr val="002060"/>
+                          </a:solidFill>
+                          <a:latin typeface="メイリオ" panose="020B0604030504040204" pitchFamily="50" charset="-128"/>
+                          <a:ea typeface="メイリオ" panose="020B0604030504040204" pitchFamily="50" charset="-128"/>
+                          <a:cs typeface="メイリオ"/>
+                        </a:rPr>
+                        <a:t>283</a:t>
+                      </a:r>
+                      <a:endParaRPr lang="ja-JP" altLang="en-US" sz="1300" dirty="0">
+                        <a:latin typeface="メイリオ"/>
+                        <a:ea typeface="メイリオ"/>
+                        <a:cs typeface="メイリオ"/>
+                      </a:endParaRPr>
+                    </a:p>
+                  </a:txBody>
+                  <a:tcPr marL="91440" marR="73152" marT="36576" marB="36576" anchor="ctr">
+                    <a:lnL w="9525" cap="flat" cmpd="sng" algn="ctr">
+                      <a:solidFill>
+                        <a:srgbClr val="BFBFBF"/>
+                      </a:solidFill>
+                      <a:prstDash val="solid"/>
+                      <a:round/>
+                      <a:headEnd type="none" w="med" len="med"/>
+                      <a:tailEnd type="none" w="med" len="med"/>
+                    </a:lnL>
+                    <a:lnR w="9525" cap="flat" cmpd="sng" algn="ctr">
+                      <a:solidFill>
+                        <a:srgbClr val="BFBFBF"/>
+                      </a:solidFill>
+                      <a:prstDash val="solid"/>
+                      <a:round/>
+                      <a:headEnd type="none" w="med" len="med"/>
+                      <a:tailEnd type="none" w="med" len="med"/>
+                    </a:lnR>
+                    <a:lnT w="9525" cap="flat" cmpd="sng" algn="ctr">
+                      <a:solidFill>
+                        <a:srgbClr val="BFBFBF"/>
+                      </a:solidFill>
+                      <a:prstDash val="solid"/>
+                      <a:round/>
+                      <a:headEnd type="none" w="med" len="med"/>
+                      <a:tailEnd type="none" w="med" len="med"/>
+                    </a:lnT>
+                    <a:lnB w="9525" cap="flat" cmpd="sng" algn="ctr">
+                      <a:solidFill>
+                        <a:srgbClr val="BFBFBF"/>
+                      </a:solidFill>
+                      <a:prstDash val="solid"/>
+                      <a:round/>
+                      <a:headEnd type="none" w="med" len="med"/>
+                      <a:tailEnd type="none" w="med" len="med"/>
+                    </a:lnB>
+                    <a:solidFill>
+                      <a:srgbClr val="FFFFFF"/>
+                    </a:solidFill>
+                  </a:tcPr>
+                </a:tc>
+                <a:tc>
+                  <a:txBody>
+                    <a:bodyPr/>
+                    <a:lstStyle/>
+                    <a:p>
+                      <a:pPr algn="ctr">
+                        <a:buNone/>
+                      </a:pPr>
+                      <a:r>
+                        <a:rPr lang="ja-JP" altLang="en-US" sz="1300" b="1" dirty="0">
+                          <a:solidFill>
+                            <a:srgbClr val="002060"/>
+                          </a:solidFill>
+                          <a:latin typeface="メイリオ" panose="020B0604030504040204" pitchFamily="50" charset="-128"/>
+                          <a:ea typeface="メイリオ" panose="020B0604030504040204" pitchFamily="50" charset="-128"/>
+                          <a:cs typeface="メイリオ"/>
+                        </a:rPr>
+                        <a:t>562</a:t>
+                      </a:r>
+                      <a:endParaRPr lang="ja-JP" altLang="en-US" sz="1300" dirty="0">
+                        <a:latin typeface="メイリオ"/>
+                        <a:ea typeface="メイリオ"/>
+                        <a:cs typeface="メイリオ"/>
+                      </a:endParaRPr>
+                    </a:p>
+                  </a:txBody>
+                  <a:tcPr marL="91440" marR="73152" marT="36576" marB="36576" anchor="ctr">
+                    <a:lnL w="9525" cap="flat" cmpd="sng" algn="ctr">
+                      <a:solidFill>
+                        <a:srgbClr val="BFBFBF"/>
+                      </a:solidFill>
+                      <a:prstDash val="solid"/>
+                      <a:round/>
+                      <a:headEnd type="none" w="med" len="med"/>
+                      <a:tailEnd type="none" w="med" len="med"/>
+                    </a:lnL>
+                    <a:lnR w="9525" cap="flat" cmpd="sng" algn="ctr">
+                      <a:solidFill>
+                        <a:srgbClr val="BFBFBF"/>
+                      </a:solidFill>
+                      <a:prstDash val="solid"/>
+                      <a:round/>
+                      <a:headEnd type="none" w="med" len="med"/>
+                      <a:tailEnd type="none" w="med" len="med"/>
+                    </a:lnR>
+                    <a:lnT w="9525" cap="flat" cmpd="sng" algn="ctr">
+                      <a:solidFill>
+                        <a:srgbClr val="BFBFBF"/>
+                      </a:solidFill>
+                      <a:prstDash val="solid"/>
+                      <a:round/>
+                      <a:headEnd type="none" w="med" len="med"/>
+                      <a:tailEnd type="none" w="med" len="med"/>
+                    </a:lnT>
+                    <a:lnB w="9525" cap="flat" cmpd="sng" algn="ctr">
+                      <a:solidFill>
+                        <a:srgbClr val="BFBFBF"/>
+                      </a:solidFill>
+                      <a:prstDash val="solid"/>
+                      <a:round/>
+                      <a:headEnd type="none" w="med" len="med"/>
+                      <a:tailEnd type="none" w="med" len="med"/>
+                    </a:lnB>
+                    <a:solidFill>
+                      <a:srgbClr val="FFFFFF"/>
+                    </a:solidFill>
+                  </a:tcPr>
+                </a:tc>
+                <a:tc>
+                  <a:txBody>
+                    <a:bodyPr/>
+                    <a:lstStyle/>
+                    <a:p>
+                      <a:pPr algn="ctr">
+                        <a:buNone/>
+                      </a:pPr>
+                      <a:r>
+                        <a:rPr lang="ja-JP" altLang="en-US" sz="1300" b="1" dirty="0">
+                          <a:solidFill>
+                            <a:srgbClr val="002060"/>
+                          </a:solidFill>
+                          <a:latin typeface="メイリオ" panose="020B0604030504040204" pitchFamily="50" charset="-128"/>
+                          <a:ea typeface="メイリオ" panose="020B0604030504040204" pitchFamily="50" charset="-128"/>
+                          <a:cs typeface="メイリオ"/>
+                        </a:rPr>
+                        <a:t>558</a:t>
+                      </a:r>
+                      <a:endParaRPr lang="ja-JP" altLang="en-US" sz="1300" dirty="0">
+                        <a:latin typeface="メイリオ"/>
+                        <a:ea typeface="メイリオ"/>
+                        <a:cs typeface="メイリオ"/>
+                      </a:endParaRPr>
+                    </a:p>
+                  </a:txBody>
+                  <a:tcPr marL="91440" marR="73152" marT="36576" marB="36576" anchor="ctr">
+                    <a:lnL w="9525" cap="flat" cmpd="sng" algn="ctr">
+                      <a:solidFill>
+                        <a:srgbClr val="BFBFBF"/>
+                      </a:solidFill>
+                      <a:prstDash val="solid"/>
+                      <a:round/>
+                      <a:headEnd type="none" w="med" len="med"/>
+                      <a:tailEnd type="none" w="med" len="med"/>
+                    </a:lnL>
+                    <a:lnR w="9525" cap="flat" cmpd="sng" algn="ctr">
+                      <a:solidFill>
+                        <a:srgbClr val="BFBFBF"/>
+                      </a:solidFill>
+                      <a:prstDash val="solid"/>
+                      <a:round/>
+                      <a:headEnd type="none" w="med" len="med"/>
+                      <a:tailEnd type="none" w="med" len="med"/>
+                    </a:lnR>
+                    <a:lnT w="9525" cap="flat" cmpd="sng" algn="ctr">
+                      <a:solidFill>
+                        <a:srgbClr val="BFBFBF"/>
+                      </a:solidFill>
+                      <a:prstDash val="solid"/>
+                      <a:round/>
+                      <a:headEnd type="none" w="med" len="med"/>
+                      <a:tailEnd type="none" w="med" len="med"/>
+                    </a:lnT>
+                    <a:lnB w="9525" cap="flat" cmpd="sng" algn="ctr">
+                      <a:solidFill>
+                        <a:srgbClr val="BFBFBF"/>
+                      </a:solidFill>
+                      <a:prstDash val="solid"/>
+                      <a:round/>
+                      <a:headEnd type="none" w="med" len="med"/>
+                      <a:tailEnd type="none" w="med" len="med"/>
+                    </a:lnB>
+                    <a:solidFill>
+                      <a:srgbClr val="FFFFFF"/>
+                    </a:solidFill>
+                  </a:tcPr>
+                </a:tc>
+                <a:tc>
+                  <a:txBody>
+                    <a:bodyPr/>
+                    <a:lstStyle/>
+                    <a:p>
+                      <a:pPr algn="ctr">
+                        <a:buNone/>
+                      </a:pPr>
+                      <a:r>
+                        <a:rPr lang="ja-JP" altLang="en-US" sz="1300" b="1" dirty="0">
+                          <a:solidFill>
+                            <a:srgbClr val="002060"/>
+                          </a:solidFill>
+                          <a:latin typeface="メイリオ" panose="020B0604030504040204" pitchFamily="50" charset="-128"/>
+                          <a:ea typeface="メイリオ" panose="020B0604030504040204" pitchFamily="50" charset="-128"/>
+                          <a:cs typeface="メイリオ"/>
+                        </a:rPr>
+                        <a:t>554</a:t>
+                      </a:r>
+                      <a:endParaRPr lang="ja-JP" altLang="en-US" sz="1300" dirty="0">
+                        <a:latin typeface="メイリオ"/>
+                        <a:ea typeface="メイリオ"/>
+                        <a:cs typeface="メイリオ"/>
+                      </a:endParaRPr>
+                    </a:p>
+                  </a:txBody>
+                  <a:tcPr marL="91440" marR="73152" marT="36576" marB="36576" anchor="ctr">
+                    <a:lnL w="9525" cap="flat" cmpd="sng" algn="ctr">
+                      <a:solidFill>
+                        <a:srgbClr val="BFBFBF"/>
+                      </a:solidFill>
+                      <a:prstDash val="solid"/>
+                      <a:round/>
+                      <a:headEnd type="none" w="med" len="med"/>
+                      <a:tailEnd type="none" w="med" len="med"/>
+                    </a:lnL>
+                    <a:lnR w="9525" cap="flat" cmpd="sng" algn="ctr">
+                      <a:solidFill>
+                        <a:srgbClr val="BFBFBF"/>
+                      </a:solidFill>
+                      <a:prstDash val="solid"/>
+                      <a:round/>
+                      <a:headEnd type="none" w="med" len="med"/>
+                      <a:tailEnd type="none" w="med" len="med"/>
+                    </a:lnR>
+                    <a:lnT w="9525" cap="flat" cmpd="sng" algn="ctr">
+                      <a:solidFill>
+                        <a:srgbClr val="BFBFBF"/>
+                      </a:solidFill>
+                      <a:prstDash val="solid"/>
+                      <a:round/>
+                      <a:headEnd type="none" w="med" len="med"/>
+                      <a:tailEnd type="none" w="med" len="med"/>
+                    </a:lnT>
+                    <a:lnB w="9525" cap="flat" cmpd="sng" algn="ctr">
+                      <a:solidFill>
+                        <a:srgbClr val="BFBFBF"/>
+                      </a:solidFill>
+                      <a:prstDash val="solid"/>
+                      <a:round/>
+                      <a:headEnd type="none" w="med" len="med"/>
+                      <a:tailEnd type="none" w="med" len="med"/>
+                    </a:lnB>
+                    <a:solidFill>
+                      <a:srgbClr val="FFFFFF"/>
+                    </a:solidFill>
+                  </a:tcPr>
+                </a:tc>
+              </a:tr>
+              <a:tr h="393192">
+                <a:tc>
+                  <a:txBody>
+                    <a:bodyPr/>
+                    <a:lstStyle/>
+                    <a:p>
+                      <a:pPr algn="ctr">
+                        <a:buNone/>
+                      </a:pPr>
+                      <a:r>
+                        <a:rPr lang="ja-JP" altLang="en-US" sz="1200" b="1" dirty="0">
+                          <a:solidFill>
+                            <a:srgbClr val="002060"/>
+                          </a:solidFill>
+                          <a:latin typeface="メイリオ" panose="020B0604030504040204" pitchFamily="50" charset="-128"/>
+                          <a:ea typeface="メイリオ" panose="020B0604030504040204" pitchFamily="50" charset="-128"/>
+                          <a:cs typeface="メイリオ"/>
+                        </a:rPr>
+                        <a:t>セミナー予約（件）</a:t>
+                      </a:r>
+                      <a:endParaRPr lang="ja-JP" altLang="en-US" sz="1200" dirty="0">
+                        <a:latin typeface="メイリオ"/>
+                        <a:ea typeface="メイリオ"/>
+                        <a:cs typeface="メイリオ"/>
+                      </a:endParaRPr>
+                    </a:p>
+                  </a:txBody>
+                  <a:tcPr marL="91440" marR="73152" marT="36576" marB="36576" anchor="ctr">
+                    <a:lnL w="9525" cap="flat" cmpd="sng" algn="ctr">
+                      <a:solidFill>
+                        <a:srgbClr val="BFBFBF"/>
+                      </a:solidFill>
+                      <a:prstDash val="solid"/>
+                      <a:round/>
+                      <a:headEnd type="none" w="med" len="med"/>
+                      <a:tailEnd type="none" w="med" len="med"/>
+                    </a:lnL>
+                    <a:lnR w="9525" cap="flat" cmpd="sng" algn="ctr">
+                      <a:solidFill>
+                        <a:srgbClr val="BFBFBF"/>
+                      </a:solidFill>
+                      <a:prstDash val="solid"/>
+                      <a:round/>
+                      <a:headEnd type="none" w="med" len="med"/>
+                      <a:tailEnd type="none" w="med" len="med"/>
+                    </a:lnR>
+                    <a:lnT w="9525" cap="flat" cmpd="sng" algn="ctr">
+                      <a:solidFill>
+                        <a:srgbClr val="BFBFBF"/>
+                      </a:solidFill>
+                      <a:prstDash val="solid"/>
+                      <a:round/>
+                      <a:headEnd type="none" w="med" len="med"/>
+                      <a:tailEnd type="none" w="med" len="med"/>
+                    </a:lnT>
+                    <a:lnB w="9525" cap="flat" cmpd="sng" algn="ctr">
+                      <a:solidFill>
+                        <a:srgbClr val="BFBFBF"/>
+                      </a:solidFill>
+                      <a:prstDash val="solid"/>
+                      <a:round/>
+                      <a:headEnd type="none" w="med" len="med"/>
+                      <a:tailEnd type="none" w="med" len="med"/>
+                    </a:lnB>
+                    <a:solidFill>
+                      <a:srgbClr val="DCE6F2"/>
+                    </a:solidFill>
+                  </a:tcPr>
+                </a:tc>
+                <a:tc>
+                  <a:txBody>
+                    <a:bodyPr/>
+                    <a:lstStyle/>
+                    <a:p>
+                      <a:pPr algn="ctr">
+                        <a:buNone/>
+                      </a:pPr>
+                      <a:r>
+                        <a:rPr lang="ja-JP" altLang="en-US" sz="1300" b="0" dirty="0">
+                          <a:solidFill>
+                            <a:srgbClr val="333333"/>
+                          </a:solidFill>
+                          <a:latin typeface="メイリオ" panose="020B0604030504040204" pitchFamily="50" charset="-128"/>
+                          <a:ea typeface="メイリオ" panose="020B0604030504040204" pitchFamily="50" charset="-128"/>
+                          <a:cs typeface="メイリオ"/>
+                        </a:rPr>
+                        <a:t>-</a:t>
+                      </a:r>
+                      <a:endParaRPr lang="ja-JP" altLang="en-US" sz="1300" dirty="0">
+                        <a:latin typeface="メイリオ"/>
+                        <a:ea typeface="メイリオ"/>
+                        <a:cs typeface="メイリオ"/>
+                      </a:endParaRPr>
+                    </a:p>
+                  </a:txBody>
+                  <a:tcPr marL="91440" marR="73152" marT="36576" marB="36576" anchor="ctr">
+                    <a:lnL w="9525" cap="flat" cmpd="sng" algn="ctr">
+                      <a:solidFill>
+                        <a:srgbClr val="BFBFBF"/>
+                      </a:solidFill>
+                      <a:prstDash val="solid"/>
+                      <a:round/>
+                      <a:headEnd type="none" w="med" len="med"/>
+                      <a:tailEnd type="none" w="med" len="med"/>
+                    </a:lnL>
+                    <a:lnR w="9525" cap="flat" cmpd="sng" algn="ctr">
+                      <a:solidFill>
+                        <a:srgbClr val="BFBFBF"/>
+                      </a:solidFill>
+                      <a:prstDash val="solid"/>
+                      <a:round/>
+                      <a:headEnd type="none" w="med" len="med"/>
+                      <a:tailEnd type="none" w="med" len="med"/>
+                    </a:lnR>
+                    <a:lnT w="9525" cap="flat" cmpd="sng" algn="ctr">
+                      <a:solidFill>
+                        <a:srgbClr val="BFBFBF"/>
+                      </a:solidFill>
+                      <a:prstDash val="solid"/>
+                      <a:round/>
+                      <a:headEnd type="none" w="med" len="med"/>
+                      <a:tailEnd type="none" w="med" len="med"/>
+                    </a:lnT>
+                    <a:lnB w="9525" cap="flat" cmpd="sng" algn="ctr">
+                      <a:solidFill>
+                        <a:srgbClr val="BFBFBF"/>
+                      </a:solidFill>
+                      <a:prstDash val="solid"/>
+                      <a:round/>
+                      <a:headEnd type="none" w="med" len="med"/>
+                      <a:tailEnd type="none" w="med" len="med"/>
+                    </a:lnB>
+                    <a:solidFill>
+                      <a:srgbClr val="FFFFFF"/>
+                    </a:solidFill>
+                  </a:tcPr>
+                </a:tc>
+                <a:tc>
+                  <a:txBody>
+                    <a:bodyPr/>
+                    <a:lstStyle/>
+                    <a:p>
+                      <a:pPr algn="ctr">
+                        <a:buNone/>
+                      </a:pPr>
+                      <a:r>
+                        <a:rPr lang="ja-JP" altLang="en-US" sz="1300" b="0" dirty="0">
+                          <a:solidFill>
+                            <a:srgbClr val="333333"/>
+                          </a:solidFill>
+                          <a:latin typeface="メイリオ" panose="020B0604030504040204" pitchFamily="50" charset="-128"/>
+                          <a:ea typeface="メイリオ" panose="020B0604030504040204" pitchFamily="50" charset="-128"/>
+                          <a:cs typeface="メイリオ"/>
+                        </a:rPr>
+                        <a:t>5</a:t>
+                      </a:r>
+                      <a:endParaRPr lang="ja-JP" altLang="en-US" sz="1300" dirty="0">
+                        <a:latin typeface="メイリオ"/>
+                        <a:ea typeface="メイリオ"/>
+                        <a:cs typeface="メイリオ"/>
+                      </a:endParaRPr>
+                    </a:p>
+                  </a:txBody>
+                  <a:tcPr marL="91440" marR="73152" marT="36576" marB="36576" anchor="ctr">
+                    <a:lnL w="9525" cap="flat" cmpd="sng" algn="ctr">
+                      <a:solidFill>
+                        <a:srgbClr val="BFBFBF"/>
+                      </a:solidFill>
+                      <a:prstDash val="solid"/>
+                      <a:round/>
+                      <a:headEnd type="none" w="med" len="med"/>
+                      <a:tailEnd type="none" w="med" len="med"/>
+                    </a:lnL>
+                    <a:lnR w="9525" cap="flat" cmpd="sng" algn="ctr">
+                      <a:solidFill>
+                        <a:srgbClr val="BFBFBF"/>
+                      </a:solidFill>
+                      <a:prstDash val="solid"/>
+                      <a:round/>
+                      <a:headEnd type="none" w="med" len="med"/>
+                      <a:tailEnd type="none" w="med" len="med"/>
+                    </a:lnR>
+                    <a:lnT w="9525" cap="flat" cmpd="sng" algn="ctr">
+                      <a:solidFill>
+                        <a:srgbClr val="BFBFBF"/>
+                      </a:solidFill>
+                      <a:prstDash val="solid"/>
+                      <a:round/>
+                      <a:headEnd type="none" w="med" len="med"/>
+                      <a:tailEnd type="none" w="med" len="med"/>
+                    </a:lnT>
+                    <a:lnB w="9525" cap="flat" cmpd="sng" algn="ctr">
+                      <a:solidFill>
+                        <a:srgbClr val="BFBFBF"/>
+                      </a:solidFill>
+                      <a:prstDash val="solid"/>
+                      <a:round/>
+                      <a:headEnd type="none" w="med" len="med"/>
+                      <a:tailEnd type="none" w="med" len="med"/>
+                    </a:lnB>
+                    <a:solidFill>
+                      <a:srgbClr val="FFFFFF"/>
+                    </a:solidFill>
+                  </a:tcPr>
+                </a:tc>
+                <a:tc>
+                  <a:txBody>
+                    <a:bodyPr/>
+                    <a:lstStyle/>
+                    <a:p>
+                      <a:pPr algn="ctr">
+                        <a:buNone/>
+                      </a:pPr>
+                      <a:r>
+                        <a:rPr lang="ja-JP" altLang="en-US" sz="1300" b="0" dirty="0">
+                          <a:solidFill>
+                            <a:srgbClr val="333333"/>
+                          </a:solidFill>
+                          <a:latin typeface="メイリオ" panose="020B0604030504040204" pitchFamily="50" charset="-128"/>
+                          <a:ea typeface="メイリオ" panose="020B0604030504040204" pitchFamily="50" charset="-128"/>
+                          <a:cs typeface="メイリオ"/>
+                        </a:rPr>
+                        <a:t>0</a:t>
+                      </a:r>
+                      <a:endParaRPr lang="ja-JP" altLang="en-US" sz="1300" dirty="0">
+                        <a:latin typeface="メイリオ"/>
+                        <a:ea typeface="メイリオ"/>
+                        <a:cs typeface="メイリオ"/>
+                      </a:endParaRPr>
+                    </a:p>
+                  </a:txBody>
+                  <a:tcPr marL="91440" marR="73152" marT="36576" marB="36576" anchor="ctr">
+                    <a:lnL w="9525" cap="flat" cmpd="sng" algn="ctr">
+                      <a:solidFill>
+                        <a:srgbClr val="BFBFBF"/>
+                      </a:solidFill>
+                      <a:prstDash val="solid"/>
+                      <a:round/>
+                      <a:headEnd type="none" w="med" len="med"/>
+                      <a:tailEnd type="none" w="med" len="med"/>
+                    </a:lnL>
+                    <a:lnR w="9525" cap="flat" cmpd="sng" algn="ctr">
+                      <a:solidFill>
+                        <a:srgbClr val="BFBFBF"/>
+                      </a:solidFill>
+                      <a:prstDash val="solid"/>
+                      <a:round/>
+                      <a:headEnd type="none" w="med" len="med"/>
+                      <a:tailEnd type="none" w="med" len="med"/>
+                    </a:lnR>
+                    <a:lnT w="9525" cap="flat" cmpd="sng" algn="ctr">
+                      <a:solidFill>
+                        <a:srgbClr val="BFBFBF"/>
+                      </a:solidFill>
+                      <a:prstDash val="solid"/>
+                      <a:round/>
+                      <a:headEnd type="none" w="med" len="med"/>
+                      <a:tailEnd type="none" w="med" len="med"/>
+                    </a:lnT>
+                    <a:lnB w="9525" cap="flat" cmpd="sng" algn="ctr">
+                      <a:solidFill>
+                        <a:srgbClr val="BFBFBF"/>
+                      </a:solidFill>
+                      <a:prstDash val="solid"/>
+                      <a:round/>
+                      <a:headEnd type="none" w="med" len="med"/>
+                      <a:tailEnd type="none" w="med" len="med"/>
+                    </a:lnB>
+                    <a:solidFill>
+                      <a:srgbClr val="FFFFFF"/>
+                    </a:solidFill>
+                  </a:tcPr>
+                </a:tc>
+                <a:tc>
+                  <a:txBody>
+                    <a:bodyPr/>
+                    <a:lstStyle/>
+                    <a:p>
+                      <a:pPr algn="ctr">
+                        <a:buNone/>
+                      </a:pPr>
+                      <a:r>
+                        <a:rPr lang="ja-JP" altLang="en-US" sz="1300" b="0" dirty="0">
+                          <a:solidFill>
+                            <a:srgbClr val="333333"/>
+                          </a:solidFill>
+                          <a:latin typeface="メイリオ" panose="020B0604030504040204" pitchFamily="50" charset="-128"/>
+                          <a:ea typeface="メイリオ" panose="020B0604030504040204" pitchFamily="50" charset="-128"/>
+                          <a:cs typeface="メイリオ"/>
+                        </a:rPr>
+                        <a:t>0</a:t>
+                      </a:r>
+                      <a:endParaRPr lang="ja-JP" altLang="en-US" sz="1300" dirty="0">
+                        <a:latin typeface="メイリオ"/>
+                        <a:ea typeface="メイリオ"/>
+                        <a:cs typeface="メイリオ"/>
+                      </a:endParaRPr>
+                    </a:p>
+                  </a:txBody>
+                  <a:tcPr marL="91440" marR="73152" marT="36576" marB="36576" anchor="ctr">
+                    <a:lnL w="9525" cap="flat" cmpd="sng" algn="ctr">
+                      <a:solidFill>
+                        <a:srgbClr val="BFBFBF"/>
+                      </a:solidFill>
+                      <a:prstDash val="solid"/>
+                      <a:round/>
+                      <a:headEnd type="none" w="med" len="med"/>
+                      <a:tailEnd type="none" w="med" len="med"/>
+                    </a:lnL>
+                    <a:lnR w="9525" cap="flat" cmpd="sng" algn="ctr">
+                      <a:solidFill>
+                        <a:srgbClr val="BFBFBF"/>
+                      </a:solidFill>
+                      <a:prstDash val="solid"/>
+                      <a:round/>
+                      <a:headEnd type="none" w="med" len="med"/>
+                      <a:tailEnd type="none" w="med" len="med"/>
+                    </a:lnR>
+                    <a:lnT w="9525" cap="flat" cmpd="sng" algn="ctr">
+                      <a:solidFill>
+                        <a:srgbClr val="BFBFBF"/>
+                      </a:solidFill>
+                      <a:prstDash val="solid"/>
+                      <a:round/>
+                      <a:headEnd type="none" w="med" len="med"/>
+                      <a:tailEnd type="none" w="med" len="med"/>
+                    </a:lnT>
+                    <a:lnB w="9525" cap="flat" cmpd="sng" algn="ctr">
+                      <a:solidFill>
+                        <a:srgbClr val="BFBFBF"/>
+                      </a:solidFill>
+                      <a:prstDash val="solid"/>
+                      <a:round/>
+                      <a:headEnd type="none" w="med" len="med"/>
+                      <a:tailEnd type="none" w="med" len="med"/>
+                    </a:lnB>
+                    <a:solidFill>
+                      <a:srgbClr val="FFFFFF"/>
+                    </a:solidFill>
+                  </a:tcPr>
+                </a:tc>
+                <a:tc>
+                  <a:txBody>
+                    <a:bodyPr/>
+                    <a:lstStyle/>
+                    <a:p>
+                      <a:pPr algn="ctr">
+                        <a:buNone/>
+                      </a:pPr>
+                      <a:r>
+                        <a:rPr lang="ja-JP" altLang="en-US" sz="1300" b="0" dirty="0">
+                          <a:solidFill>
+                            <a:srgbClr val="333333"/>
+                          </a:solidFill>
+                          <a:latin typeface="メイリオ" panose="020B0604030504040204" pitchFamily="50" charset="-128"/>
+                          <a:ea typeface="メイリオ" panose="020B0604030504040204" pitchFamily="50" charset="-128"/>
+                          <a:cs typeface="メイリオ"/>
+                        </a:rPr>
+                        <a:t>7</a:t>
+                      </a:r>
+                      <a:endParaRPr lang="ja-JP" altLang="en-US" sz="1300" dirty="0">
+                        <a:latin typeface="メイリオ"/>
+                        <a:ea typeface="メイリオ"/>
+                        <a:cs typeface="メイリオ"/>
+                      </a:endParaRPr>
+                    </a:p>
+                  </a:txBody>
+                  <a:tcPr marL="91440" marR="73152" marT="36576" marB="36576" anchor="ctr">
+                    <a:lnL w="9525" cap="flat" cmpd="sng" algn="ctr">
+                      <a:solidFill>
+                        <a:srgbClr val="BFBFBF"/>
+                      </a:solidFill>
+                      <a:prstDash val="solid"/>
+                      <a:round/>
+                      <a:headEnd type="none" w="med" len="med"/>
+                      <a:tailEnd type="none" w="med" len="med"/>
+                    </a:lnL>
+                    <a:lnR w="9525" cap="flat" cmpd="sng" algn="ctr">
+                      <a:solidFill>
+                        <a:srgbClr val="BFBFBF"/>
+                      </a:solidFill>
+                      <a:prstDash val="solid"/>
+                      <a:round/>
+                      <a:headEnd type="none" w="med" len="med"/>
+                      <a:tailEnd type="none" w="med" len="med"/>
+                    </a:lnR>
+                    <a:lnT w="9525" cap="flat" cmpd="sng" algn="ctr">
+                      <a:solidFill>
+                        <a:srgbClr val="BFBFBF"/>
+                      </a:solidFill>
+                      <a:prstDash val="solid"/>
+                      <a:round/>
+                      <a:headEnd type="none" w="med" len="med"/>
+                      <a:tailEnd type="none" w="med" len="med"/>
+                    </a:lnT>
+                    <a:lnB w="9525" cap="flat" cmpd="sng" algn="ctr">
+                      <a:solidFill>
+                        <a:srgbClr val="BFBFBF"/>
+                      </a:solidFill>
+                      <a:prstDash val="solid"/>
+                      <a:round/>
+                      <a:headEnd type="none" w="med" len="med"/>
+                      <a:tailEnd type="none" w="med" len="med"/>
+                    </a:lnB>
+                    <a:solidFill>
+                      <a:srgbClr val="FFFFFF"/>
+                    </a:solidFill>
+                  </a:tcPr>
+                </a:tc>
+                <a:tc>
+                  <a:txBody>
+                    <a:bodyPr/>
+                    <a:lstStyle/>
+                    <a:p>
+                      <a:pPr algn="ctr">
+                        <a:buNone/>
+                      </a:pPr>
+                      <a:r>
+                        <a:rPr lang="ja-JP" altLang="en-US" sz="1300" b="0" dirty="0">
+                          <a:solidFill>
+                            <a:srgbClr val="333333"/>
+                          </a:solidFill>
+                          <a:latin typeface="メイリオ" panose="020B0604030504040204" pitchFamily="50" charset="-128"/>
+                          <a:ea typeface="メイリオ" panose="020B0604030504040204" pitchFamily="50" charset="-128"/>
+                          <a:cs typeface="メイリオ"/>
+                        </a:rPr>
+                        <a:t>0</a:t>
+                      </a:r>
+                      <a:endParaRPr lang="ja-JP" altLang="en-US" sz="1300" dirty="0">
+                        <a:latin typeface="メイリオ"/>
+                        <a:ea typeface="メイリオ"/>
+                        <a:cs typeface="メイリオ"/>
+                      </a:endParaRPr>
+                    </a:p>
+                  </a:txBody>
+                  <a:tcPr marL="91440" marR="73152" marT="36576" marB="36576" anchor="ctr">
+                    <a:lnL w="9525" cap="flat" cmpd="sng" algn="ctr">
+                      <a:solidFill>
+                        <a:srgbClr val="BFBFBF"/>
+                      </a:solidFill>
+                      <a:prstDash val="solid"/>
+                      <a:round/>
+                      <a:headEnd type="none" w="med" len="med"/>
+                      <a:tailEnd type="none" w="med" len="med"/>
+                    </a:lnL>
+                    <a:lnR w="9525" cap="flat" cmpd="sng" algn="ctr">
+                      <a:solidFill>
+                        <a:srgbClr val="BFBFBF"/>
+                      </a:solidFill>
+                      <a:prstDash val="solid"/>
+                      <a:round/>
+                      <a:headEnd type="none" w="med" len="med"/>
+                      <a:tailEnd type="none" w="med" len="med"/>
+                    </a:lnR>
+                    <a:lnT w="9525" cap="flat" cmpd="sng" algn="ctr">
+                      <a:solidFill>
+                        <a:srgbClr val="BFBFBF"/>
+                      </a:solidFill>
+                      <a:prstDash val="solid"/>
+                      <a:round/>
+                      <a:headEnd type="none" w="med" len="med"/>
+                      <a:tailEnd type="none" w="med" len="med"/>
+                    </a:lnT>
+                    <a:lnB w="9525" cap="flat" cmpd="sng" algn="ctr">
+                      <a:solidFill>
+                        <a:srgbClr val="BFBFBF"/>
+                      </a:solidFill>
+                      <a:prstDash val="solid"/>
+                      <a:round/>
+                      <a:headEnd type="none" w="med" len="med"/>
+                      <a:tailEnd type="none" w="med" len="med"/>
+                    </a:lnB>
+                    <a:solidFill>
+                      <a:srgbClr val="FFFFFF"/>
+                    </a:solidFill>
+                  </a:tcPr>
+                </a:tc>
+                <a:tc>
+                  <a:txBody>
+                    <a:bodyPr/>
+                    <a:lstStyle/>
+                    <a:p>
+                      <a:pPr algn="ctr">
+                        <a:buNone/>
+                      </a:pPr>
+                      <a:r>
+                        <a:rPr lang="ja-JP" altLang="en-US" sz="1300" b="0" dirty="0">
+                          <a:solidFill>
+                            <a:srgbClr val="333333"/>
+                          </a:solidFill>
+                          <a:latin typeface="メイリオ" panose="020B0604030504040204" pitchFamily="50" charset="-128"/>
+                          <a:ea typeface="メイリオ" panose="020B0604030504040204" pitchFamily="50" charset="-128"/>
+                          <a:cs typeface="メイリオ"/>
+                        </a:rPr>
+                        <a:t>0</a:t>
+                      </a:r>
+                      <a:endParaRPr lang="ja-JP" altLang="en-US" sz="1300" dirty="0">
+                        <a:latin typeface="メイリオ"/>
+                        <a:ea typeface="メイリオ"/>
+                        <a:cs typeface="メイリオ"/>
+                      </a:endParaRPr>
+                    </a:p>
+                  </a:txBody>
+                  <a:tcPr marL="91440" marR="73152" marT="36576" marB="36576" anchor="ctr">
+                    <a:lnL w="9525" cap="flat" cmpd="sng" algn="ctr">
+                      <a:solidFill>
+                        <a:srgbClr val="BFBFBF"/>
+                      </a:solidFill>
+                      <a:prstDash val="solid"/>
+                      <a:round/>
+                      <a:headEnd type="none" w="med" len="med"/>
+                      <a:tailEnd type="none" w="med" len="med"/>
+                    </a:lnL>
+                    <a:lnR w="9525" cap="flat" cmpd="sng" algn="ctr">
+                      <a:solidFill>
+                        <a:srgbClr val="BFBFBF"/>
+                      </a:solidFill>
+                      <a:prstDash val="solid"/>
+                      <a:round/>
+                      <a:headEnd type="none" w="med" len="med"/>
+                      <a:tailEnd type="none" w="med" len="med"/>
+                    </a:lnR>
+                    <a:lnT w="9525" cap="flat" cmpd="sng" algn="ctr">
+                      <a:solidFill>
+                        <a:srgbClr val="BFBFBF"/>
+                      </a:solidFill>
+                      <a:prstDash val="solid"/>
+                      <a:round/>
+                      <a:headEnd type="none" w="med" len="med"/>
+                      <a:tailEnd type="none" w="med" len="med"/>
+                    </a:lnT>
+                    <a:lnB w="9525" cap="flat" cmpd="sng" algn="ctr">
+                      <a:solidFill>
+                        <a:srgbClr val="BFBFBF"/>
+                      </a:solidFill>
+                      <a:prstDash val="solid"/>
+                      <a:round/>
+                      <a:headEnd type="none" w="med" len="med"/>
+                      <a:tailEnd type="none" w="med" len="med"/>
+                    </a:lnB>
+                    <a:solidFill>
+                      <a:srgbClr val="FFFFFF"/>
+                    </a:solidFill>
+                  </a:tcPr>
+                </a:tc>
+              </a:tr>
+              <a:tr h="393192">
+                <a:tc>
+                  <a:txBody>
+                    <a:bodyPr/>
+                    <a:lstStyle/>
+                    <a:p>
+                      <a:pPr algn="ctr">
+                        <a:buNone/>
+                      </a:pPr>
+                      <a:r>
+                        <a:rPr lang="ja-JP" altLang="en-US" sz="1200" b="1" dirty="0">
+                          <a:solidFill>
+                            <a:srgbClr val="002060"/>
+                          </a:solidFill>
+                          <a:latin typeface="メイリオ" panose="020B0604030504040204" pitchFamily="50" charset="-128"/>
+                          <a:ea typeface="メイリオ" panose="020B0604030504040204" pitchFamily="50" charset="-128"/>
+                          <a:cs typeface="メイリオ"/>
+                        </a:rPr>
+                        <a:t>サロン入会（件）</a:t>
+                      </a:r>
+                      <a:endParaRPr lang="ja-JP" altLang="en-US" sz="1200" dirty="0">
+                        <a:latin typeface="メイリオ"/>
+                        <a:ea typeface="メイリオ"/>
+                        <a:cs typeface="メイリオ"/>
+                      </a:endParaRPr>
+                    </a:p>
+                  </a:txBody>
+                  <a:tcPr marL="91440" marR="73152" marT="36576" marB="36576" anchor="ctr">
+                    <a:lnL w="9525" cap="flat" cmpd="sng" algn="ctr">
+                      <a:solidFill>
+                        <a:srgbClr val="BFBFBF"/>
+                      </a:solidFill>
+                      <a:prstDash val="solid"/>
+                      <a:round/>
+                      <a:headEnd type="none" w="med" len="med"/>
+                      <a:tailEnd type="none" w="med" len="med"/>
+                    </a:lnL>
+                    <a:lnR w="9525" cap="flat" cmpd="sng" algn="ctr">
+                      <a:solidFill>
+                        <a:srgbClr val="BFBFBF"/>
+                      </a:solidFill>
+                      <a:prstDash val="solid"/>
+                      <a:round/>
+                      <a:headEnd type="none" w="med" len="med"/>
+                      <a:tailEnd type="none" w="med" len="med"/>
+                    </a:lnR>
+                    <a:lnT w="9525" cap="flat" cmpd="sng" algn="ctr">
+                      <a:solidFill>
+                        <a:srgbClr val="BFBFBF"/>
+                      </a:solidFill>
+                      <a:prstDash val="solid"/>
+                      <a:round/>
+                      <a:headEnd type="none" w="med" len="med"/>
+                      <a:tailEnd type="none" w="med" len="med"/>
+                    </a:lnT>
+                    <a:lnB w="9525" cap="flat" cmpd="sng" algn="ctr">
+                      <a:solidFill>
+                        <a:srgbClr val="BFBFBF"/>
+                      </a:solidFill>
+                      <a:prstDash val="solid"/>
+                      <a:round/>
+                      <a:headEnd type="none" w="med" len="med"/>
+                      <a:tailEnd type="none" w="med" len="med"/>
+                    </a:lnB>
+                    <a:solidFill>
+                      <a:srgbClr val="DCE6F2"/>
+                    </a:solidFill>
+                  </a:tcPr>
+                </a:tc>
+                <a:tc>
+                  <a:txBody>
+                    <a:bodyPr/>
+                    <a:lstStyle/>
+                    <a:p>
+                      <a:pPr algn="ctr">
+                        <a:buNone/>
+                      </a:pPr>
+                      <a:r>
+                        <a:rPr lang="ja-JP" altLang="en-US" sz="1300" b="0" dirty="0">
+                          <a:solidFill>
+                            <a:srgbClr val="333333"/>
+                          </a:solidFill>
+                          <a:latin typeface="メイリオ" panose="020B0604030504040204" pitchFamily="50" charset="-128"/>
+                          <a:ea typeface="メイリオ" panose="020B0604030504040204" pitchFamily="50" charset="-128"/>
+                          <a:cs typeface="メイリオ"/>
+                        </a:rPr>
+                        <a:t>-</a:t>
+                      </a:r>
+                      <a:endParaRPr lang="ja-JP" altLang="en-US" sz="1300" dirty="0">
+                        <a:latin typeface="メイリオ"/>
+                        <a:ea typeface="メイリオ"/>
+                        <a:cs typeface="メイリオ"/>
+                      </a:endParaRPr>
+                    </a:p>
+                  </a:txBody>
+                  <a:tcPr marL="91440" marR="73152" marT="36576" marB="36576" anchor="ctr">
+                    <a:lnL w="9525" cap="flat" cmpd="sng" algn="ctr">
+                      <a:solidFill>
+                        <a:srgbClr val="BFBFBF"/>
+                      </a:solidFill>
+                      <a:prstDash val="solid"/>
+                      <a:round/>
+                      <a:headEnd type="none" w="med" len="med"/>
+                      <a:tailEnd type="none" w="med" len="med"/>
+                    </a:lnL>
+                    <a:lnR w="9525" cap="flat" cmpd="sng" algn="ctr">
+                      <a:solidFill>
+                        <a:srgbClr val="BFBFBF"/>
+                      </a:solidFill>
+                      <a:prstDash val="solid"/>
+                      <a:round/>
+                      <a:headEnd type="none" w="med" len="med"/>
+                      <a:tailEnd type="none" w="med" len="med"/>
+                    </a:lnR>
+                    <a:lnT w="9525" cap="flat" cmpd="sng" algn="ctr">
+                      <a:solidFill>
+                        <a:srgbClr val="BFBFBF"/>
+                      </a:solidFill>
+                      <a:prstDash val="solid"/>
+                      <a:round/>
+                      <a:headEnd type="none" w="med" len="med"/>
+                      <a:tailEnd type="none" w="med" len="med"/>
+                    </a:lnT>
+                    <a:lnB w="9525" cap="flat" cmpd="sng" algn="ctr">
+                      <a:solidFill>
+                        <a:srgbClr val="BFBFBF"/>
+                      </a:solidFill>
+                      <a:prstDash val="solid"/>
+                      <a:round/>
+                      <a:headEnd type="none" w="med" len="med"/>
+                      <a:tailEnd type="none" w="med" len="med"/>
+                    </a:lnB>
+                    <a:solidFill>
+                      <a:srgbClr val="FFFFFF"/>
+                    </a:solidFill>
+                  </a:tcPr>
+                </a:tc>
+                <a:tc>
+                  <a:txBody>
+                    <a:bodyPr/>
+                    <a:lstStyle/>
+                    <a:p>
+                      <a:pPr algn="ctr">
+                        <a:buNone/>
+                      </a:pPr>
+                      <a:r>
+                        <a:rPr lang="ja-JP" altLang="en-US" sz="1300" b="0" dirty="0">
+                          <a:solidFill>
+                            <a:srgbClr val="333333"/>
+                          </a:solidFill>
+                          <a:latin typeface="メイリオ" panose="020B0604030504040204" pitchFamily="50" charset="-128"/>
+                          <a:ea typeface="メイリオ" panose="020B0604030504040204" pitchFamily="50" charset="-128"/>
+                          <a:cs typeface="メイリオ"/>
+                        </a:rPr>
+                        <a:t>1</a:t>
+                      </a:r>
+                      <a:endParaRPr lang="ja-JP" altLang="en-US" sz="1300" dirty="0">
+                        <a:latin typeface="メイリオ"/>
+                        <a:ea typeface="メイリオ"/>
+                        <a:cs typeface="メイリオ"/>
+                      </a:endParaRPr>
+                    </a:p>
+                  </a:txBody>
+                  <a:tcPr marL="91440" marR="73152" marT="36576" marB="36576" anchor="ctr">
+                    <a:lnL w="9525" cap="flat" cmpd="sng" algn="ctr">
+                      <a:solidFill>
+                        <a:srgbClr val="BFBFBF"/>
+                      </a:solidFill>
+                      <a:prstDash val="solid"/>
+                      <a:round/>
+                      <a:headEnd type="none" w="med" len="med"/>
+                      <a:tailEnd type="none" w="med" len="med"/>
+                    </a:lnL>
+                    <a:lnR w="9525" cap="flat" cmpd="sng" algn="ctr">
+                      <a:solidFill>
+                        <a:srgbClr val="BFBFBF"/>
+                      </a:solidFill>
+                      <a:prstDash val="solid"/>
+                      <a:round/>
+                      <a:headEnd type="none" w="med" len="med"/>
+                      <a:tailEnd type="none" w="med" len="med"/>
+                    </a:lnR>
+                    <a:lnT w="9525" cap="flat" cmpd="sng" algn="ctr">
+                      <a:solidFill>
+                        <a:srgbClr val="BFBFBF"/>
+                      </a:solidFill>
+                      <a:prstDash val="solid"/>
+                      <a:round/>
+                      <a:headEnd type="none" w="med" len="med"/>
+                      <a:tailEnd type="none" w="med" len="med"/>
+                    </a:lnT>
+                    <a:lnB w="9525" cap="flat" cmpd="sng" algn="ctr">
+                      <a:solidFill>
+                        <a:srgbClr val="BFBFBF"/>
+                      </a:solidFill>
+                      <a:prstDash val="solid"/>
+                      <a:round/>
+                      <a:headEnd type="none" w="med" len="med"/>
+                      <a:tailEnd type="none" w="med" len="med"/>
+                    </a:lnB>
+                    <a:solidFill>
+                      <a:srgbClr val="FFFFFF"/>
+                    </a:solidFill>
+                  </a:tcPr>
+                </a:tc>
+                <a:tc>
+                  <a:txBody>
+                    <a:bodyPr/>
+                    <a:lstStyle/>
+                    <a:p>
+                      <a:pPr algn="ctr">
+                        <a:buNone/>
+                      </a:pPr>
+                      <a:r>
+                        <a:rPr lang="ja-JP" altLang="en-US" sz="1300" b="0" dirty="0">
+                          <a:solidFill>
+                            <a:srgbClr val="333333"/>
+                          </a:solidFill>
+                          <a:latin typeface="メイリオ" panose="020B0604030504040204" pitchFamily="50" charset="-128"/>
+                          <a:ea typeface="メイリオ" panose="020B0604030504040204" pitchFamily="50" charset="-128"/>
+                          <a:cs typeface="メイリオ"/>
+                        </a:rPr>
+                        <a:t>1</a:t>
+                      </a:r>
+                      <a:endParaRPr lang="ja-JP" altLang="en-US" sz="1300" dirty="0">
+                        <a:latin typeface="メイリオ"/>
+                        <a:ea typeface="メイリオ"/>
+                        <a:cs typeface="メイリオ"/>
+                      </a:endParaRPr>
+                    </a:p>
+                  </a:txBody>
+                  <a:tcPr marL="91440" marR="73152" marT="36576" marB="36576" anchor="ctr">
+                    <a:lnL w="9525" cap="flat" cmpd="sng" algn="ctr">
+                      <a:solidFill>
+                        <a:srgbClr val="BFBFBF"/>
+                      </a:solidFill>
+                      <a:prstDash val="solid"/>
+                      <a:round/>
+                      <a:headEnd type="none" w="med" len="med"/>
+                      <a:tailEnd type="none" w="med" len="med"/>
+                    </a:lnL>
+                    <a:lnR w="9525" cap="flat" cmpd="sng" algn="ctr">
+                      <a:solidFill>
+                        <a:srgbClr val="BFBFBF"/>
+                      </a:solidFill>
+                      <a:prstDash val="solid"/>
+                      <a:round/>
+                      <a:headEnd type="none" w="med" len="med"/>
+                      <a:tailEnd type="none" w="med" len="med"/>
+                    </a:lnR>
+                    <a:lnT w="9525" cap="flat" cmpd="sng" algn="ctr">
+                      <a:solidFill>
+                        <a:srgbClr val="BFBFBF"/>
+                      </a:solidFill>
+                      <a:prstDash val="solid"/>
+                      <a:round/>
+                      <a:headEnd type="none" w="med" len="med"/>
+                      <a:tailEnd type="none" w="med" len="med"/>
+                    </a:lnT>
+                    <a:lnB w="9525" cap="flat" cmpd="sng" algn="ctr">
+                      <a:solidFill>
+                        <a:srgbClr val="BFBFBF"/>
+                      </a:solidFill>
+                      <a:prstDash val="solid"/>
+                      <a:round/>
+                      <a:headEnd type="none" w="med" len="med"/>
+                      <a:tailEnd type="none" w="med" len="med"/>
+                    </a:lnB>
+                    <a:solidFill>
+                      <a:srgbClr val="FFFFFF"/>
+                    </a:solidFill>
+                  </a:tcPr>
+                </a:tc>
+                <a:tc>
+                  <a:txBody>
+                    <a:bodyPr/>
+                    <a:lstStyle/>
+                    <a:p>
+                      <a:pPr algn="ctr">
+                        <a:buNone/>
+                      </a:pPr>
+                      <a:r>
+                        <a:rPr lang="ja-JP" altLang="en-US" sz="1300" b="0" dirty="0">
+                          <a:solidFill>
+                            <a:srgbClr val="333333"/>
+                          </a:solidFill>
+                          <a:latin typeface="メイリオ" panose="020B0604030504040204" pitchFamily="50" charset="-128"/>
+                          <a:ea typeface="メイリオ" panose="020B0604030504040204" pitchFamily="50" charset="-128"/>
+                          <a:cs typeface="メイリオ"/>
+                        </a:rPr>
+                        <a:t>1</a:t>
+                      </a:r>
+                      <a:endParaRPr lang="ja-JP" altLang="en-US" sz="1300" dirty="0">
+                        <a:latin typeface="メイリオ"/>
+                        <a:ea typeface="メイリオ"/>
+                        <a:cs typeface="メイリオ"/>
+                      </a:endParaRPr>
+                    </a:p>
+                  </a:txBody>
+                  <a:tcPr marL="91440" marR="73152" marT="36576" marB="36576" anchor="ctr">
+                    <a:lnL w="9525" cap="flat" cmpd="sng" algn="ctr">
+                      <a:solidFill>
+                        <a:srgbClr val="BFBFBF"/>
+                      </a:solidFill>
+                      <a:prstDash val="solid"/>
+                      <a:round/>
+                      <a:headEnd type="none" w="med" len="med"/>
+                      <a:tailEnd type="none" w="med" len="med"/>
+                    </a:lnL>
+                    <a:lnR w="9525" cap="flat" cmpd="sng" algn="ctr">
+                      <a:solidFill>
+                        <a:srgbClr val="BFBFBF"/>
+                      </a:solidFill>
+                      <a:prstDash val="solid"/>
+                      <a:round/>
+                      <a:headEnd type="none" w="med" len="med"/>
+                      <a:tailEnd type="none" w="med" len="med"/>
+                    </a:lnR>
+                    <a:lnT w="9525" cap="flat" cmpd="sng" algn="ctr">
+                      <a:solidFill>
+                        <a:srgbClr val="BFBFBF"/>
+                      </a:solidFill>
+                      <a:prstDash val="solid"/>
+                      <a:round/>
+                      <a:headEnd type="none" w="med" len="med"/>
+                      <a:tailEnd type="none" w="med" len="med"/>
+                    </a:lnT>
+                    <a:lnB w="9525" cap="flat" cmpd="sng" algn="ctr">
+                      <a:solidFill>
+                        <a:srgbClr val="BFBFBF"/>
+                      </a:solidFill>
+                      <a:prstDash val="solid"/>
+                      <a:round/>
+                      <a:headEnd type="none" w="med" len="med"/>
+                      <a:tailEnd type="none" w="med" len="med"/>
+                    </a:lnB>
+                    <a:solidFill>
+                      <a:srgbClr val="FFFFFF"/>
+                    </a:solidFill>
+                  </a:tcPr>
+                </a:tc>
+                <a:tc>
+                  <a:txBody>
+                    <a:bodyPr/>
+                    <a:lstStyle/>
+                    <a:p>
+                      <a:pPr algn="ctr">
+                        <a:buNone/>
+                      </a:pPr>
+                      <a:r>
+                        <a:rPr lang="ja-JP" altLang="en-US" sz="1300" b="0" dirty="0">
+                          <a:solidFill>
+                            <a:srgbClr val="333333"/>
+                          </a:solidFill>
+                          <a:latin typeface="メイリオ" panose="020B0604030504040204" pitchFamily="50" charset="-128"/>
+                          <a:ea typeface="メイリオ" panose="020B0604030504040204" pitchFamily="50" charset="-128"/>
+                          <a:cs typeface="メイリオ"/>
+                        </a:rPr>
+                        <a:t>1</a:t>
+                      </a:r>
+                      <a:endParaRPr lang="ja-JP" altLang="en-US" sz="1300" dirty="0">
+                        <a:latin typeface="メイリオ"/>
+                        <a:ea typeface="メイリオ"/>
+                        <a:cs typeface="メイリオ"/>
+                      </a:endParaRPr>
+                    </a:p>
+                  </a:txBody>
+                  <a:tcPr marL="91440" marR="73152" marT="36576" marB="36576" anchor="ctr">
+                    <a:lnL w="9525" cap="flat" cmpd="sng" algn="ctr">
+                      <a:solidFill>
+                        <a:srgbClr val="BFBFBF"/>
+                      </a:solidFill>
+                      <a:prstDash val="solid"/>
+                      <a:round/>
+                      <a:headEnd type="none" w="med" len="med"/>
+                      <a:tailEnd type="none" w="med" len="med"/>
+                    </a:lnL>
+                    <a:lnR w="9525" cap="flat" cmpd="sng" algn="ctr">
+                      <a:solidFill>
+                        <a:srgbClr val="BFBFBF"/>
+                      </a:solidFill>
+                      <a:prstDash val="solid"/>
+                      <a:round/>
+                      <a:headEnd type="none" w="med" len="med"/>
+                      <a:tailEnd type="none" w="med" len="med"/>
+                    </a:lnR>
+                    <a:lnT w="9525" cap="flat" cmpd="sng" algn="ctr">
+                      <a:solidFill>
+                        <a:srgbClr val="BFBFBF"/>
+                      </a:solidFill>
+                      <a:prstDash val="solid"/>
+                      <a:round/>
+                      <a:headEnd type="none" w="med" len="med"/>
+                      <a:tailEnd type="none" w="med" len="med"/>
+                    </a:lnT>
+                    <a:lnB w="9525" cap="flat" cmpd="sng" algn="ctr">
+                      <a:solidFill>
+                        <a:srgbClr val="BFBFBF"/>
+                      </a:solidFill>
+                      <a:prstDash val="solid"/>
+                      <a:round/>
+                      <a:headEnd type="none" w="med" len="med"/>
+                      <a:tailEnd type="none" w="med" len="med"/>
+                    </a:lnB>
+                    <a:solidFill>
+                      <a:srgbClr val="FFFFFF"/>
+                    </a:solidFill>
+                  </a:tcPr>
+                </a:tc>
+                <a:tc>
+                  <a:txBody>
+                    <a:bodyPr/>
+                    <a:lstStyle/>
+                    <a:p>
+                      <a:pPr algn="ctr">
+                        <a:buNone/>
+                      </a:pPr>
+                      <a:r>
+                        <a:rPr lang="ja-JP" altLang="en-US" sz="1300" b="0" dirty="0">
+                          <a:solidFill>
+                            <a:srgbClr val="333333"/>
+                          </a:solidFill>
+                          <a:latin typeface="メイリオ" panose="020B0604030504040204" pitchFamily="50" charset="-128"/>
+                          <a:ea typeface="メイリオ" panose="020B0604030504040204" pitchFamily="50" charset="-128"/>
+                          <a:cs typeface="メイリオ"/>
+                        </a:rPr>
+                        <a:t>1</a:t>
+                      </a:r>
+                      <a:endParaRPr lang="ja-JP" altLang="en-US" sz="1300" dirty="0">
+                        <a:latin typeface="メイリオ"/>
+                        <a:ea typeface="メイリオ"/>
+                        <a:cs typeface="メイリオ"/>
+                      </a:endParaRPr>
+                    </a:p>
+                  </a:txBody>
+                  <a:tcPr marL="91440" marR="73152" marT="36576" marB="36576" anchor="ctr">
+                    <a:lnL w="9525" cap="flat" cmpd="sng" algn="ctr">
+                      <a:solidFill>
+                        <a:srgbClr val="BFBFBF"/>
+                      </a:solidFill>
+                      <a:prstDash val="solid"/>
+                      <a:round/>
+                      <a:headEnd type="none" w="med" len="med"/>
+                      <a:tailEnd type="none" w="med" len="med"/>
+                    </a:lnL>
+                    <a:lnR w="9525" cap="flat" cmpd="sng" algn="ctr">
+                      <a:solidFill>
+                        <a:srgbClr val="BFBFBF"/>
+                      </a:solidFill>
+                      <a:prstDash val="solid"/>
+                      <a:round/>
+                      <a:headEnd type="none" w="med" len="med"/>
+                      <a:tailEnd type="none" w="med" len="med"/>
+                    </a:lnR>
+                    <a:lnT w="9525" cap="flat" cmpd="sng" algn="ctr">
+                      <a:solidFill>
+                        <a:srgbClr val="BFBFBF"/>
+                      </a:solidFill>
+                      <a:prstDash val="solid"/>
+                      <a:round/>
+                      <a:headEnd type="none" w="med" len="med"/>
+                      <a:tailEnd type="none" w="med" len="med"/>
+                    </a:lnT>
+                    <a:lnB w="9525" cap="flat" cmpd="sng" algn="ctr">
+                      <a:solidFill>
+                        <a:srgbClr val="BFBFBF"/>
+                      </a:solidFill>
+                      <a:prstDash val="solid"/>
+                      <a:round/>
+                      <a:headEnd type="none" w="med" len="med"/>
+                      <a:tailEnd type="none" w="med" len="med"/>
+                    </a:lnB>
+                    <a:solidFill>
+                      <a:srgbClr val="FFFFFF"/>
+                    </a:solidFill>
+                  </a:tcPr>
+                </a:tc>
+                <a:tc>
+                  <a:txBody>
+                    <a:bodyPr/>
+                    <a:lstStyle/>
+                    <a:p>
+                      <a:pPr algn="ctr">
+                        <a:buNone/>
+                      </a:pPr>
+                      <a:r>
+                        <a:rPr lang="ja-JP" altLang="en-US" sz="1300" b="0" dirty="0">
+                          <a:solidFill>
+                            <a:srgbClr val="333333"/>
+                          </a:solidFill>
+                          <a:latin typeface="メイリオ" panose="020B0604030504040204" pitchFamily="50" charset="-128"/>
+                          <a:ea typeface="メイリオ" panose="020B0604030504040204" pitchFamily="50" charset="-128"/>
+                          <a:cs typeface="メイリオ"/>
+                        </a:rPr>
+                        <a:t>1</a:t>
+                      </a:r>
+                      <a:endParaRPr lang="ja-JP" altLang="en-US" sz="1300" dirty="0">
+                        <a:latin typeface="メイリオ"/>
+                        <a:ea typeface="メイリオ"/>
+                        <a:cs typeface="メイリオ"/>
+                      </a:endParaRPr>
+                    </a:p>
+                  </a:txBody>
+                  <a:tcPr marL="91440" marR="73152" marT="36576" marB="36576" anchor="ctr">
+                    <a:lnL w="9525" cap="flat" cmpd="sng" algn="ctr">
+                      <a:solidFill>
+                        <a:srgbClr val="BFBFBF"/>
+                      </a:solidFill>
+                      <a:prstDash val="solid"/>
+                      <a:round/>
+                      <a:headEnd type="none" w="med" len="med"/>
+                      <a:tailEnd type="none" w="med" len="med"/>
+                    </a:lnL>
+                    <a:lnR w="9525" cap="flat" cmpd="sng" algn="ctr">
+                      <a:solidFill>
+                        <a:srgbClr val="BFBFBF"/>
+                      </a:solidFill>
+                      <a:prstDash val="solid"/>
+                      <a:round/>
+                      <a:headEnd type="none" w="med" len="med"/>
+                      <a:tailEnd type="none" w="med" len="med"/>
+                    </a:lnR>
+                    <a:lnT w="9525" cap="flat" cmpd="sng" algn="ctr">
+                      <a:solidFill>
+                        <a:srgbClr val="BFBFBF"/>
+                      </a:solidFill>
+                      <a:prstDash val="solid"/>
+                      <a:round/>
+                      <a:headEnd type="none" w="med" len="med"/>
+                      <a:tailEnd type="none" w="med" len="med"/>
+                    </a:lnT>
+                    <a:lnB w="9525" cap="flat" cmpd="sng" algn="ctr">
+                      <a:solidFill>
+                        <a:srgbClr val="BFBFBF"/>
+                      </a:solidFill>
+                      <a:prstDash val="solid"/>
+                      <a:round/>
+                      <a:headEnd type="none" w="med" len="med"/>
+                      <a:tailEnd type="none" w="med" len="med"/>
+                    </a:lnB>
+                    <a:solidFill>
+                      <a:srgbClr val="FFFFFF"/>
+                    </a:solidFill>
+                  </a:tcPr>
+                </a:tc>
+              </a:tr>
+              <a:tr h="393192">
+                <a:tc>
+                  <a:txBody>
+                    <a:bodyPr/>
+                    <a:lstStyle/>
+                    <a:p>
+                      <a:pPr algn="ctr">
+                        <a:buNone/>
+                      </a:pPr>
+                      <a:r>
+                        <a:rPr lang="ja-JP" altLang="en-US" sz="1200" b="1" dirty="0">
+                          <a:solidFill>
+                            <a:srgbClr val="002060"/>
+                          </a:solidFill>
+                          <a:latin typeface="メイリオ" panose="020B0604030504040204" pitchFamily="50" charset="-128"/>
+                          <a:ea typeface="メイリオ" panose="020B0604030504040204" pitchFamily="50" charset="-128"/>
+                          <a:cs typeface="メイリオ"/>
+                        </a:rPr>
+                        <a:t>LINE運用コンサル（円）</a:t>
+                      </a:r>
+                      <a:endParaRPr lang="ja-JP" altLang="en-US" sz="1200" dirty="0">
+                        <a:latin typeface="メイリオ"/>
+                        <a:ea typeface="メイリオ"/>
+                        <a:cs typeface="メイリオ"/>
+                      </a:endParaRPr>
+                    </a:p>
+                  </a:txBody>
+                  <a:tcPr marL="91440" marR="73152" marT="36576" marB="36576" anchor="ctr">
+                    <a:lnL w="9525" cap="flat" cmpd="sng" algn="ctr">
+                      <a:solidFill>
+                        <a:srgbClr val="BFBFBF"/>
+                      </a:solidFill>
+                      <a:prstDash val="solid"/>
+                      <a:round/>
+                      <a:headEnd type="none" w="med" len="med"/>
+                      <a:tailEnd type="none" w="med" len="med"/>
+                    </a:lnL>
+                    <a:lnR w="9525" cap="flat" cmpd="sng" algn="ctr">
+                      <a:solidFill>
+                        <a:srgbClr val="BFBFBF"/>
+                      </a:solidFill>
+                      <a:prstDash val="solid"/>
+                      <a:round/>
+                      <a:headEnd type="none" w="med" len="med"/>
+                      <a:tailEnd type="none" w="med" len="med"/>
+                    </a:lnR>
+                    <a:lnT w="9525" cap="flat" cmpd="sng" algn="ctr">
+                      <a:solidFill>
+                        <a:srgbClr val="BFBFBF"/>
+                      </a:solidFill>
+                      <a:prstDash val="solid"/>
+                      <a:round/>
+                      <a:headEnd type="none" w="med" len="med"/>
+                      <a:tailEnd type="none" w="med" len="med"/>
+                    </a:lnT>
+                    <a:lnB w="9525" cap="flat" cmpd="sng" algn="ctr">
+                      <a:solidFill>
+                        <a:srgbClr val="BFBFBF"/>
+                      </a:solidFill>
+                      <a:prstDash val="solid"/>
+                      <a:round/>
+                      <a:headEnd type="none" w="med" len="med"/>
+                      <a:tailEnd type="none" w="med" len="med"/>
+                    </a:lnB>
+                    <a:solidFill>
+                      <a:srgbClr val="F2F2F2"/>
+                    </a:solidFill>
+                  </a:tcPr>
+                </a:tc>
+                <a:tc>
+                  <a:txBody>
+                    <a:bodyPr/>
+                    <a:lstStyle/>
+                    <a:p>
+                      <a:pPr algn="ctr">
+                        <a:buNone/>
+                      </a:pPr>
+                      <a:r>
+                        <a:rPr lang="ja-JP" altLang="en-US" sz="1300" b="0" dirty="0">
+                          <a:solidFill>
+                            <a:srgbClr val="333333"/>
+                          </a:solidFill>
+                          <a:latin typeface="メイリオ" panose="020B0604030504040204" pitchFamily="50" charset="-128"/>
+                          <a:ea typeface="メイリオ" panose="020B0604030504040204" pitchFamily="50" charset="-128"/>
+                          <a:cs typeface="メイリオ"/>
+                        </a:rPr>
+                        <a:t>100,000</a:t>
+                      </a:r>
+                      <a:endParaRPr lang="ja-JP" altLang="en-US" sz="1300" dirty="0">
+                        <a:latin typeface="メイリオ"/>
+                        <a:ea typeface="メイリオ"/>
+                        <a:cs typeface="メイリオ"/>
+                      </a:endParaRPr>
+                    </a:p>
+                  </a:txBody>
+                  <a:tcPr marL="91440" marR="73152" marT="36576" marB="36576" anchor="ctr">
+                    <a:lnL w="9525" cap="flat" cmpd="sng" algn="ctr">
+                      <a:solidFill>
+                        <a:srgbClr val="BFBFBF"/>
+                      </a:solidFill>
+                      <a:prstDash val="solid"/>
+                      <a:round/>
+                      <a:headEnd type="none" w="med" len="med"/>
+                      <a:tailEnd type="none" w="med" len="med"/>
+                    </a:lnL>
+                    <a:lnR w="9525" cap="flat" cmpd="sng" algn="ctr">
+                      <a:solidFill>
+                        <a:srgbClr val="BFBFBF"/>
+                      </a:solidFill>
+                      <a:prstDash val="solid"/>
+                      <a:round/>
+                      <a:headEnd type="none" w="med" len="med"/>
+                      <a:tailEnd type="none" w="med" len="med"/>
+                    </a:lnR>
+                    <a:lnT w="9525" cap="flat" cmpd="sng" algn="ctr">
+                      <a:solidFill>
+                        <a:srgbClr val="BFBFBF"/>
+                      </a:solidFill>
+                      <a:prstDash val="solid"/>
+                      <a:round/>
+                      <a:headEnd type="none" w="med" len="med"/>
+                      <a:tailEnd type="none" w="med" len="med"/>
+                    </a:lnT>
+                    <a:lnB w="9525" cap="flat" cmpd="sng" algn="ctr">
+                      <a:solidFill>
+                        <a:srgbClr val="BFBFBF"/>
+                      </a:solidFill>
+                      <a:prstDash val="solid"/>
+                      <a:round/>
+                      <a:headEnd type="none" w="med" len="med"/>
+                      <a:tailEnd type="none" w="med" len="med"/>
+                    </a:lnB>
+                    <a:solidFill>
+                      <a:srgbClr val="FFFFFF"/>
+                    </a:solidFill>
+                  </a:tcPr>
+                </a:tc>
+                <a:tc>
+                  <a:txBody>
+                    <a:bodyPr/>
+                    <a:lstStyle/>
+                    <a:p>
+                      <a:pPr algn="ctr">
+                        <a:buNone/>
+                      </a:pPr>
+                      <a:r>
+                        <a:rPr lang="ja-JP" altLang="en-US" sz="1300" b="0" dirty="0">
+                          <a:solidFill>
+                            <a:srgbClr val="333333"/>
+                          </a:solidFill>
+                          <a:latin typeface="メイリオ" panose="020B0604030504040204" pitchFamily="50" charset="-128"/>
+                          <a:ea typeface="メイリオ" panose="020B0604030504040204" pitchFamily="50" charset="-128"/>
+                          <a:cs typeface="メイリオ"/>
+                        </a:rPr>
+                        <a:t>300,000</a:t>
+                      </a:r>
+                      <a:endParaRPr lang="ja-JP" altLang="en-US" sz="1300" dirty="0">
+                        <a:latin typeface="メイリオ"/>
+                        <a:ea typeface="メイリオ"/>
+                        <a:cs typeface="メイリオ"/>
+                      </a:endParaRPr>
+                    </a:p>
+                  </a:txBody>
+                  <a:tcPr marL="91440" marR="73152" marT="36576" marB="36576" anchor="ctr">
+                    <a:lnL w="9525" cap="flat" cmpd="sng" algn="ctr">
+                      <a:solidFill>
+                        <a:srgbClr val="BFBFBF"/>
+                      </a:solidFill>
+                      <a:prstDash val="solid"/>
+                      <a:round/>
+                      <a:headEnd type="none" w="med" len="med"/>
+                      <a:tailEnd type="none" w="med" len="med"/>
+                    </a:lnL>
+                    <a:lnR w="9525" cap="flat" cmpd="sng" algn="ctr">
+                      <a:solidFill>
+                        <a:srgbClr val="BFBFBF"/>
+                      </a:solidFill>
+                      <a:prstDash val="solid"/>
+                      <a:round/>
+                      <a:headEnd type="none" w="med" len="med"/>
+                      <a:tailEnd type="none" w="med" len="med"/>
+                    </a:lnR>
+                    <a:lnT w="9525" cap="flat" cmpd="sng" algn="ctr">
+                      <a:solidFill>
+                        <a:srgbClr val="BFBFBF"/>
+                      </a:solidFill>
+                      <a:prstDash val="solid"/>
+                      <a:round/>
+                      <a:headEnd type="none" w="med" len="med"/>
+                      <a:tailEnd type="none" w="med" len="med"/>
+                    </a:lnT>
+                    <a:lnB w="9525" cap="flat" cmpd="sng" algn="ctr">
+                      <a:solidFill>
+                        <a:srgbClr val="BFBFBF"/>
+                      </a:solidFill>
+                      <a:prstDash val="solid"/>
+                      <a:round/>
+                      <a:headEnd type="none" w="med" len="med"/>
+                      <a:tailEnd type="none" w="med" len="med"/>
+                    </a:lnB>
+                    <a:solidFill>
+                      <a:srgbClr val="FFFFFF"/>
+                    </a:solidFill>
+                  </a:tcPr>
+                </a:tc>
+                <a:tc>
+                  <a:txBody>
+                    <a:bodyPr/>
+                    <a:lstStyle/>
+                    <a:p>
+                      <a:pPr algn="ctr">
+                        <a:buNone/>
+                      </a:pPr>
+                      <a:r>
+                        <a:rPr lang="ja-JP" altLang="en-US" sz="1300" b="0" dirty="0">
+                          <a:solidFill>
+                            <a:srgbClr val="333333"/>
+                          </a:solidFill>
+                          <a:latin typeface="メイリオ" panose="020B0604030504040204" pitchFamily="50" charset="-128"/>
+                          <a:ea typeface="メイリオ" panose="020B0604030504040204" pitchFamily="50" charset="-128"/>
+                          <a:cs typeface="メイリオ"/>
+                        </a:rPr>
+                        <a:t>100,000</a:t>
+                      </a:r>
+                      <a:endParaRPr lang="ja-JP" altLang="en-US" sz="1300" dirty="0">
+                        <a:latin typeface="メイリオ"/>
+                        <a:ea typeface="メイリオ"/>
+                        <a:cs typeface="メイリオ"/>
+                      </a:endParaRPr>
+                    </a:p>
+                  </a:txBody>
+                  <a:tcPr marL="91440" marR="73152" marT="36576" marB="36576" anchor="ctr">
+                    <a:lnL w="9525" cap="flat" cmpd="sng" algn="ctr">
+                      <a:solidFill>
+                        <a:srgbClr val="BFBFBF"/>
+                      </a:solidFill>
+                      <a:prstDash val="solid"/>
+                      <a:round/>
+                      <a:headEnd type="none" w="med" len="med"/>
+                      <a:tailEnd type="none" w="med" len="med"/>
+                    </a:lnL>
+                    <a:lnR w="9525" cap="flat" cmpd="sng" algn="ctr">
+                      <a:solidFill>
+                        <a:srgbClr val="BFBFBF"/>
+                      </a:solidFill>
+                      <a:prstDash val="solid"/>
+                      <a:round/>
+                      <a:headEnd type="none" w="med" len="med"/>
+                      <a:tailEnd type="none" w="med" len="med"/>
+                    </a:lnR>
+                    <a:lnT w="9525" cap="flat" cmpd="sng" algn="ctr">
+                      <a:solidFill>
+                        <a:srgbClr val="BFBFBF"/>
+                      </a:solidFill>
+                      <a:prstDash val="solid"/>
+                      <a:round/>
+                      <a:headEnd type="none" w="med" len="med"/>
+                      <a:tailEnd type="none" w="med" len="med"/>
+                    </a:lnT>
+                    <a:lnB w="9525" cap="flat" cmpd="sng" algn="ctr">
+                      <a:solidFill>
+                        <a:srgbClr val="BFBFBF"/>
+                      </a:solidFill>
+                      <a:prstDash val="solid"/>
+                      <a:round/>
+                      <a:headEnd type="none" w="med" len="med"/>
+                      <a:tailEnd type="none" w="med" len="med"/>
+                    </a:lnB>
+                    <a:solidFill>
+                      <a:srgbClr val="FFFFFF"/>
+                    </a:solidFill>
+                  </a:tcPr>
+                </a:tc>
+                <a:tc>
+                  <a:txBody>
+                    <a:bodyPr/>
+                    <a:lstStyle/>
+                    <a:p>
+                      <a:pPr algn="ctr">
+                        <a:buNone/>
+                      </a:pPr>
+                      <a:r>
+                        <a:rPr lang="ja-JP" altLang="en-US" sz="1300" b="0" dirty="0">
+                          <a:solidFill>
+                            <a:srgbClr val="333333"/>
+                          </a:solidFill>
+                          <a:latin typeface="メイリオ" panose="020B0604030504040204" pitchFamily="50" charset="-128"/>
+                          <a:ea typeface="メイリオ" panose="020B0604030504040204" pitchFamily="50" charset="-128"/>
+                          <a:cs typeface="メイリオ"/>
+                        </a:rPr>
+                        <a:t>100,000</a:t>
+                      </a:r>
+                      <a:endParaRPr lang="ja-JP" altLang="en-US" sz="1300" dirty="0">
+                        <a:latin typeface="メイリオ"/>
+                        <a:ea typeface="メイリオ"/>
+                        <a:cs typeface="メイリオ"/>
+                      </a:endParaRPr>
+                    </a:p>
+                  </a:txBody>
+                  <a:tcPr marL="91440" marR="73152" marT="36576" marB="36576" anchor="ctr">
+                    <a:lnL w="9525" cap="flat" cmpd="sng" algn="ctr">
+                      <a:solidFill>
+                        <a:srgbClr val="BFBFBF"/>
+                      </a:solidFill>
+                      <a:prstDash val="solid"/>
+                      <a:round/>
+                      <a:headEnd type="none" w="med" len="med"/>
+                      <a:tailEnd type="none" w="med" len="med"/>
+                    </a:lnL>
+                    <a:lnR w="9525" cap="flat" cmpd="sng" algn="ctr">
+                      <a:solidFill>
+                        <a:srgbClr val="BFBFBF"/>
+                      </a:solidFill>
+                      <a:prstDash val="solid"/>
+                      <a:round/>
+                      <a:headEnd type="none" w="med" len="med"/>
+                      <a:tailEnd type="none" w="med" len="med"/>
+                    </a:lnR>
+                    <a:lnT w="9525" cap="flat" cmpd="sng" algn="ctr">
+                      <a:solidFill>
+                        <a:srgbClr val="BFBFBF"/>
+                      </a:solidFill>
+                      <a:prstDash val="solid"/>
+                      <a:round/>
+                      <a:headEnd type="none" w="med" len="med"/>
+                      <a:tailEnd type="none" w="med" len="med"/>
+                    </a:lnT>
+                    <a:lnB w="9525" cap="flat" cmpd="sng" algn="ctr">
+                      <a:solidFill>
+                        <a:srgbClr val="BFBFBF"/>
+                      </a:solidFill>
+                      <a:prstDash val="solid"/>
+                      <a:round/>
+                      <a:headEnd type="none" w="med" len="med"/>
+                      <a:tailEnd type="none" w="med" len="med"/>
+                    </a:lnB>
+                    <a:solidFill>
+                      <a:srgbClr val="FFFFFF"/>
+                    </a:solidFill>
+                  </a:tcPr>
+                </a:tc>
+                <a:tc>
+                  <a:txBody>
+                    <a:bodyPr/>
+                    <a:lstStyle/>
+                    <a:p>
+                      <a:pPr algn="ctr">
+                        <a:buNone/>
+                      </a:pPr>
+                      <a:r>
+                        <a:rPr lang="ja-JP" altLang="en-US" sz="1300" b="0" dirty="0">
+                          <a:solidFill>
+                            <a:srgbClr val="333333"/>
+                          </a:solidFill>
+                          <a:latin typeface="メイリオ" panose="020B0604030504040204" pitchFamily="50" charset="-128"/>
+                          <a:ea typeface="メイリオ" panose="020B0604030504040204" pitchFamily="50" charset="-128"/>
+                          <a:cs typeface="メイリオ"/>
+                        </a:rPr>
+                        <a:t>300,000</a:t>
+                      </a:r>
+                      <a:endParaRPr lang="ja-JP" altLang="en-US" sz="1300" dirty="0">
+                        <a:latin typeface="メイリオ"/>
+                        <a:ea typeface="メイリオ"/>
+                        <a:cs typeface="メイリオ"/>
+                      </a:endParaRPr>
+                    </a:p>
+                  </a:txBody>
+                  <a:tcPr marL="91440" marR="73152" marT="36576" marB="36576" anchor="ctr">
+                    <a:lnL w="9525" cap="flat" cmpd="sng" algn="ctr">
+                      <a:solidFill>
+                        <a:srgbClr val="BFBFBF"/>
+                      </a:solidFill>
+                      <a:prstDash val="solid"/>
+                      <a:round/>
+                      <a:headEnd type="none" w="med" len="med"/>
+                      <a:tailEnd type="none" w="med" len="med"/>
+                    </a:lnL>
+                    <a:lnR w="9525" cap="flat" cmpd="sng" algn="ctr">
+                      <a:solidFill>
+                        <a:srgbClr val="BFBFBF"/>
+                      </a:solidFill>
+                      <a:prstDash val="solid"/>
+                      <a:round/>
+                      <a:headEnd type="none" w="med" len="med"/>
+                      <a:tailEnd type="none" w="med" len="med"/>
+                    </a:lnR>
+                    <a:lnT w="9525" cap="flat" cmpd="sng" algn="ctr">
+                      <a:solidFill>
+                        <a:srgbClr val="BFBFBF"/>
+                      </a:solidFill>
+                      <a:prstDash val="solid"/>
+                      <a:round/>
+                      <a:headEnd type="none" w="med" len="med"/>
+                      <a:tailEnd type="none" w="med" len="med"/>
+                    </a:lnT>
+                    <a:lnB w="9525" cap="flat" cmpd="sng" algn="ctr">
+                      <a:solidFill>
+                        <a:srgbClr val="BFBFBF"/>
+                      </a:solidFill>
+                      <a:prstDash val="solid"/>
+                      <a:round/>
+                      <a:headEnd type="none" w="med" len="med"/>
+                      <a:tailEnd type="none" w="med" len="med"/>
+                    </a:lnB>
+                    <a:solidFill>
+                      <a:srgbClr val="FFFFFF"/>
+                    </a:solidFill>
+                  </a:tcPr>
+                </a:tc>
+                <a:tc>
+                  <a:txBody>
+                    <a:bodyPr/>
+                    <a:lstStyle/>
+                    <a:p>
+                      <a:pPr algn="ctr">
+                        <a:buNone/>
+                      </a:pPr>
+                      <a:r>
+                        <a:rPr lang="ja-JP" altLang="en-US" sz="1300" b="0" dirty="0">
+                          <a:solidFill>
+                            <a:srgbClr val="333333"/>
+                          </a:solidFill>
+                          <a:latin typeface="メイリオ" panose="020B0604030504040204" pitchFamily="50" charset="-128"/>
+                          <a:ea typeface="メイリオ" panose="020B0604030504040204" pitchFamily="50" charset="-128"/>
+                          <a:cs typeface="メイリオ"/>
+                        </a:rPr>
+                        <a:t>100,000</a:t>
+                      </a:r>
+                      <a:endParaRPr lang="ja-JP" altLang="en-US" sz="1300" dirty="0">
+                        <a:latin typeface="メイリオ"/>
+                        <a:ea typeface="メイリオ"/>
+                        <a:cs typeface="メイリオ"/>
+                      </a:endParaRPr>
+                    </a:p>
+                  </a:txBody>
+                  <a:tcPr marL="91440" marR="73152" marT="36576" marB="36576" anchor="ctr">
+                    <a:lnL w="9525" cap="flat" cmpd="sng" algn="ctr">
+                      <a:solidFill>
+                        <a:srgbClr val="BFBFBF"/>
+                      </a:solidFill>
+                      <a:prstDash val="solid"/>
+                      <a:round/>
+                      <a:headEnd type="none" w="med" len="med"/>
+                      <a:tailEnd type="none" w="med" len="med"/>
+                    </a:lnL>
+                    <a:lnR w="9525" cap="flat" cmpd="sng" algn="ctr">
+                      <a:solidFill>
+                        <a:srgbClr val="BFBFBF"/>
+                      </a:solidFill>
+                      <a:prstDash val="solid"/>
+                      <a:round/>
+                      <a:headEnd type="none" w="med" len="med"/>
+                      <a:tailEnd type="none" w="med" len="med"/>
+                    </a:lnR>
+                    <a:lnT w="9525" cap="flat" cmpd="sng" algn="ctr">
+                      <a:solidFill>
+                        <a:srgbClr val="BFBFBF"/>
+                      </a:solidFill>
+                      <a:prstDash val="solid"/>
+                      <a:round/>
+                      <a:headEnd type="none" w="med" len="med"/>
+                      <a:tailEnd type="none" w="med" len="med"/>
+                    </a:lnT>
+                    <a:lnB w="9525" cap="flat" cmpd="sng" algn="ctr">
+                      <a:solidFill>
+                        <a:srgbClr val="BFBFBF"/>
+                      </a:solidFill>
+                      <a:prstDash val="solid"/>
+                      <a:round/>
+                      <a:headEnd type="none" w="med" len="med"/>
+                      <a:tailEnd type="none" w="med" len="med"/>
+                    </a:lnB>
+                    <a:solidFill>
+                      <a:srgbClr val="FFFFFF"/>
+                    </a:solidFill>
+                  </a:tcPr>
+                </a:tc>
+                <a:tc>
+                  <a:txBody>
+                    <a:bodyPr/>
+                    <a:lstStyle/>
+                    <a:p>
+                      <a:pPr algn="ctr">
+                        <a:buNone/>
+                      </a:pPr>
+                      <a:r>
+                        <a:rPr lang="ja-JP" altLang="en-US" sz="1300" b="0" dirty="0">
+                          <a:solidFill>
+                            <a:srgbClr val="333333"/>
+                          </a:solidFill>
+                          <a:latin typeface="メイリオ" panose="020B0604030504040204" pitchFamily="50" charset="-128"/>
+                          <a:ea typeface="メイリオ" panose="020B0604030504040204" pitchFamily="50" charset="-128"/>
+                          <a:cs typeface="メイリオ"/>
+                        </a:rPr>
+                        <a:t>100,000</a:t>
+                      </a:r>
+                      <a:endParaRPr lang="ja-JP" altLang="en-US" sz="1300" dirty="0">
+                        <a:latin typeface="メイリオ"/>
+                        <a:ea typeface="メイリオ"/>
+                        <a:cs typeface="メイリオ"/>
+                      </a:endParaRPr>
+                    </a:p>
+                  </a:txBody>
+                  <a:tcPr marL="91440" marR="73152" marT="36576" marB="36576" anchor="ctr">
+                    <a:lnL w="9525" cap="flat" cmpd="sng" algn="ctr">
+                      <a:solidFill>
+                        <a:srgbClr val="BFBFBF"/>
+                      </a:solidFill>
+                      <a:prstDash val="solid"/>
+                      <a:round/>
+                      <a:headEnd type="none" w="med" len="med"/>
+                      <a:tailEnd type="none" w="med" len="med"/>
+                    </a:lnL>
+                    <a:lnR w="9525" cap="flat" cmpd="sng" algn="ctr">
+                      <a:solidFill>
+                        <a:srgbClr val="BFBFBF"/>
+                      </a:solidFill>
+                      <a:prstDash val="solid"/>
+                      <a:round/>
+                      <a:headEnd type="none" w="med" len="med"/>
+                      <a:tailEnd type="none" w="med" len="med"/>
+                    </a:lnR>
+                    <a:lnT w="9525" cap="flat" cmpd="sng" algn="ctr">
+                      <a:solidFill>
+                        <a:srgbClr val="BFBFBF"/>
+                      </a:solidFill>
+                      <a:prstDash val="solid"/>
+                      <a:round/>
+                      <a:headEnd type="none" w="med" len="med"/>
+                      <a:tailEnd type="none" w="med" len="med"/>
+                    </a:lnT>
+                    <a:lnB w="9525" cap="flat" cmpd="sng" algn="ctr">
+                      <a:solidFill>
+                        <a:srgbClr val="BFBFBF"/>
+                      </a:solidFill>
+                      <a:prstDash val="solid"/>
+                      <a:round/>
+                      <a:headEnd type="none" w="med" len="med"/>
+                      <a:tailEnd type="none" w="med" len="med"/>
+                    </a:lnB>
+                    <a:solidFill>
+                      <a:srgbClr val="FFFFFF"/>
+                    </a:solidFill>
+                  </a:tcPr>
+                </a:tc>
+              </a:tr>
+              <a:tr h="393192">
+                <a:tc>
+                  <a:txBody>
+                    <a:bodyPr/>
+                    <a:lstStyle/>
+                    <a:p>
+                      <a:pPr algn="ctr">
+                        <a:buNone/>
+                      </a:pPr>
+                      <a:r>
+                        <a:rPr lang="ja-JP" altLang="en-US" sz="1200" b="1" dirty="0">
+                          <a:solidFill>
+                            <a:srgbClr val="002060"/>
+                          </a:solidFill>
+                          <a:latin typeface="メイリオ" panose="020B0604030504040204" pitchFamily="50" charset="-128"/>
+                          <a:ea typeface="メイリオ" panose="020B0604030504040204" pitchFamily="50" charset="-128"/>
+                          <a:cs typeface="メイリオ"/>
+                        </a:rPr>
+                        <a:t>ツール（円）</a:t>
+                      </a:r>
+                      <a:endParaRPr lang="ja-JP" altLang="en-US" sz="1200" dirty="0">
+                        <a:latin typeface="メイリオ"/>
+                        <a:ea typeface="メイリオ"/>
+                        <a:cs typeface="メイリオ"/>
+                      </a:endParaRPr>
+                    </a:p>
+                  </a:txBody>
+                  <a:tcPr marL="91440" marR="73152" marT="36576" marB="36576" anchor="ctr">
+                    <a:lnL w="9525" cap="flat" cmpd="sng" algn="ctr">
+                      <a:solidFill>
+                        <a:srgbClr val="BFBFBF"/>
+                      </a:solidFill>
+                      <a:prstDash val="solid"/>
+                      <a:round/>
+                      <a:headEnd type="none" w="med" len="med"/>
+                      <a:tailEnd type="none" w="med" len="med"/>
+                    </a:lnL>
+                    <a:lnR w="9525" cap="flat" cmpd="sng" algn="ctr">
+                      <a:solidFill>
+                        <a:srgbClr val="BFBFBF"/>
+                      </a:solidFill>
+                      <a:prstDash val="solid"/>
+                      <a:round/>
+                      <a:headEnd type="none" w="med" len="med"/>
+                      <a:tailEnd type="none" w="med" len="med"/>
+                    </a:lnR>
+                    <a:lnT w="9525" cap="flat" cmpd="sng" algn="ctr">
+                      <a:solidFill>
+                        <a:srgbClr val="BFBFBF"/>
+                      </a:solidFill>
+                      <a:prstDash val="solid"/>
+                      <a:round/>
+                      <a:headEnd type="none" w="med" len="med"/>
+                      <a:tailEnd type="none" w="med" len="med"/>
+                    </a:lnT>
+                    <a:lnB w="9525" cap="flat" cmpd="sng" algn="ctr">
+                      <a:solidFill>
+                        <a:srgbClr val="BFBFBF"/>
+                      </a:solidFill>
+                      <a:prstDash val="solid"/>
+                      <a:round/>
+                      <a:headEnd type="none" w="med" len="med"/>
+                      <a:tailEnd type="none" w="med" len="med"/>
+                    </a:lnB>
+                    <a:solidFill>
+                      <a:srgbClr val="F2F2F2"/>
+                    </a:solidFill>
+                  </a:tcPr>
+                </a:tc>
+                <a:tc>
+                  <a:txBody>
+                    <a:bodyPr/>
+                    <a:lstStyle/>
+                    <a:p>
+                      <a:pPr algn="ctr">
+                        <a:buNone/>
+                      </a:pPr>
+                      <a:r>
+                        <a:rPr lang="ja-JP" altLang="en-US" sz="1300" b="0" dirty="0">
+                          <a:solidFill>
+                            <a:srgbClr val="333333"/>
+                          </a:solidFill>
+                          <a:latin typeface="メイリオ" panose="020B0604030504040204" pitchFamily="50" charset="-128"/>
+                          <a:ea typeface="メイリオ" panose="020B0604030504040204" pitchFamily="50" charset="-128"/>
+                          <a:cs typeface="メイリオ"/>
+                        </a:rPr>
+                        <a:t>165,000</a:t>
+                      </a:r>
+                      <a:endParaRPr lang="ja-JP" altLang="en-US" sz="1300" dirty="0">
+                        <a:latin typeface="メイリオ"/>
+                        <a:ea typeface="メイリオ"/>
+                        <a:cs typeface="メイリオ"/>
+                      </a:endParaRPr>
+                    </a:p>
+                  </a:txBody>
+                  <a:tcPr marL="91440" marR="73152" marT="36576" marB="36576" anchor="ctr">
+                    <a:lnL w="9525" cap="flat" cmpd="sng" algn="ctr">
+                      <a:solidFill>
+                        <a:srgbClr val="BFBFBF"/>
+                      </a:solidFill>
+                      <a:prstDash val="solid"/>
+                      <a:round/>
+                      <a:headEnd type="none" w="med" len="med"/>
+                      <a:tailEnd type="none" w="med" len="med"/>
+                    </a:lnL>
+                    <a:lnR w="9525" cap="flat" cmpd="sng" algn="ctr">
+                      <a:solidFill>
+                        <a:srgbClr val="BFBFBF"/>
+                      </a:solidFill>
+                      <a:prstDash val="solid"/>
+                      <a:round/>
+                      <a:headEnd type="none" w="med" len="med"/>
+                      <a:tailEnd type="none" w="med" len="med"/>
+                    </a:lnR>
+                    <a:lnT w="9525" cap="flat" cmpd="sng" algn="ctr">
+                      <a:solidFill>
+                        <a:srgbClr val="BFBFBF"/>
+                      </a:solidFill>
+                      <a:prstDash val="solid"/>
+                      <a:round/>
+                      <a:headEnd type="none" w="med" len="med"/>
+                      <a:tailEnd type="none" w="med" len="med"/>
+                    </a:lnT>
+                    <a:lnB w="9525" cap="flat" cmpd="sng" algn="ctr">
+                      <a:solidFill>
+                        <a:srgbClr val="BFBFBF"/>
+                      </a:solidFill>
+                      <a:prstDash val="solid"/>
+                      <a:round/>
+                      <a:headEnd type="none" w="med" len="med"/>
+                      <a:tailEnd type="none" w="med" len="med"/>
+                    </a:lnB>
+                    <a:solidFill>
+                      <a:srgbClr val="FFFFFF"/>
+                    </a:solidFill>
+                  </a:tcPr>
+                </a:tc>
+                <a:tc>
+                  <a:txBody>
+                    <a:bodyPr/>
+                    <a:lstStyle/>
+                    <a:p>
+                      <a:pPr algn="ctr">
+                        <a:buNone/>
+                      </a:pPr>
+                      <a:r>
+                        <a:rPr lang="ja-JP" altLang="en-US" sz="1300" b="0" dirty="0">
+                          <a:solidFill>
+                            <a:srgbClr val="333333"/>
+                          </a:solidFill>
+                          <a:latin typeface="メイリオ" panose="020B0604030504040204" pitchFamily="50" charset="-128"/>
+                          <a:ea typeface="メイリオ" panose="020B0604030504040204" pitchFamily="50" charset="-128"/>
+                          <a:cs typeface="メイリオ"/>
+                        </a:rPr>
+                        <a:t>60,000</a:t>
+                      </a:r>
+                      <a:endParaRPr lang="ja-JP" altLang="en-US" sz="1300" dirty="0">
+                        <a:latin typeface="メイリオ"/>
+                        <a:ea typeface="メイリオ"/>
+                        <a:cs typeface="メイリオ"/>
+                      </a:endParaRPr>
+                    </a:p>
+                  </a:txBody>
+                  <a:tcPr marL="91440" marR="73152" marT="36576" marB="36576" anchor="ctr">
+                    <a:lnL w="9525" cap="flat" cmpd="sng" algn="ctr">
+                      <a:solidFill>
+                        <a:srgbClr val="BFBFBF"/>
+                      </a:solidFill>
+                      <a:prstDash val="solid"/>
+                      <a:round/>
+                      <a:headEnd type="none" w="med" len="med"/>
+                      <a:tailEnd type="none" w="med" len="med"/>
+                    </a:lnL>
+                    <a:lnR w="9525" cap="flat" cmpd="sng" algn="ctr">
+                      <a:solidFill>
+                        <a:srgbClr val="BFBFBF"/>
+                      </a:solidFill>
+                      <a:prstDash val="solid"/>
+                      <a:round/>
+                      <a:headEnd type="none" w="med" len="med"/>
+                      <a:tailEnd type="none" w="med" len="med"/>
+                    </a:lnR>
+                    <a:lnT w="9525" cap="flat" cmpd="sng" algn="ctr">
+                      <a:solidFill>
+                        <a:srgbClr val="BFBFBF"/>
+                      </a:solidFill>
+                      <a:prstDash val="solid"/>
+                      <a:round/>
+                      <a:headEnd type="none" w="med" len="med"/>
+                      <a:tailEnd type="none" w="med" len="med"/>
+                    </a:lnT>
+                    <a:lnB w="9525" cap="flat" cmpd="sng" algn="ctr">
+                      <a:solidFill>
+                        <a:srgbClr val="BFBFBF"/>
+                      </a:solidFill>
+                      <a:prstDash val="solid"/>
+                      <a:round/>
+                      <a:headEnd type="none" w="med" len="med"/>
+                      <a:tailEnd type="none" w="med" len="med"/>
+                    </a:lnB>
+                    <a:solidFill>
+                      <a:srgbClr val="FFFFFF"/>
+                    </a:solidFill>
+                  </a:tcPr>
+                </a:tc>
+                <a:tc>
+                  <a:txBody>
+                    <a:bodyPr/>
+                    <a:lstStyle/>
+                    <a:p>
+                      <a:pPr algn="ctr">
+                        <a:buNone/>
+                      </a:pPr>
+                      <a:r>
+                        <a:rPr lang="ja-JP" altLang="en-US" sz="1300" b="0" dirty="0">
+                          <a:solidFill>
+                            <a:srgbClr val="333333"/>
+                          </a:solidFill>
+                          <a:latin typeface="メイリオ" panose="020B0604030504040204" pitchFamily="50" charset="-128"/>
+                          <a:ea typeface="メイリオ" panose="020B0604030504040204" pitchFamily="50" charset="-128"/>
+                          <a:cs typeface="メイリオ"/>
+                        </a:rPr>
+                        <a:t>60,000</a:t>
+                      </a:r>
+                      <a:endParaRPr lang="ja-JP" altLang="en-US" sz="1300" dirty="0">
+                        <a:latin typeface="メイリオ"/>
+                        <a:ea typeface="メイリオ"/>
+                        <a:cs typeface="メイリオ"/>
+                      </a:endParaRPr>
+                    </a:p>
+                  </a:txBody>
+                  <a:tcPr marL="91440" marR="73152" marT="36576" marB="36576" anchor="ctr">
+                    <a:lnL w="9525" cap="flat" cmpd="sng" algn="ctr">
+                      <a:solidFill>
+                        <a:srgbClr val="BFBFBF"/>
+                      </a:solidFill>
+                      <a:prstDash val="solid"/>
+                      <a:round/>
+                      <a:headEnd type="none" w="med" len="med"/>
+                      <a:tailEnd type="none" w="med" len="med"/>
+                    </a:lnL>
+                    <a:lnR w="9525" cap="flat" cmpd="sng" algn="ctr">
+                      <a:solidFill>
+                        <a:srgbClr val="BFBFBF"/>
+                      </a:solidFill>
+                      <a:prstDash val="solid"/>
+                      <a:round/>
+                      <a:headEnd type="none" w="med" len="med"/>
+                      <a:tailEnd type="none" w="med" len="med"/>
+                    </a:lnR>
+                    <a:lnT w="9525" cap="flat" cmpd="sng" algn="ctr">
+                      <a:solidFill>
+                        <a:srgbClr val="BFBFBF"/>
+                      </a:solidFill>
+                      <a:prstDash val="solid"/>
+                      <a:round/>
+                      <a:headEnd type="none" w="med" len="med"/>
+                      <a:tailEnd type="none" w="med" len="med"/>
+                    </a:lnT>
+                    <a:lnB w="9525" cap="flat" cmpd="sng" algn="ctr">
+                      <a:solidFill>
+                        <a:srgbClr val="BFBFBF"/>
+                      </a:solidFill>
+                      <a:prstDash val="solid"/>
+                      <a:round/>
+                      <a:headEnd type="none" w="med" len="med"/>
+                      <a:tailEnd type="none" w="med" len="med"/>
+                    </a:lnB>
+                    <a:solidFill>
+                      <a:srgbClr val="FFFFFF"/>
+                    </a:solidFill>
+                  </a:tcPr>
+                </a:tc>
+                <a:tc>
+                  <a:txBody>
+                    <a:bodyPr/>
+                    <a:lstStyle/>
+                    <a:p>
+                      <a:pPr algn="ctr">
+                        <a:buNone/>
+                      </a:pPr>
+                      <a:r>
+                        <a:rPr lang="ja-JP" altLang="en-US" sz="1300" b="0" dirty="0">
+                          <a:solidFill>
+                            <a:srgbClr val="333333"/>
+                          </a:solidFill>
+                          <a:latin typeface="メイリオ" panose="020B0604030504040204" pitchFamily="50" charset="-128"/>
+                          <a:ea typeface="メイリオ" panose="020B0604030504040204" pitchFamily="50" charset="-128"/>
+                          <a:cs typeface="メイリオ"/>
+                        </a:rPr>
+                        <a:t>60,000</a:t>
+                      </a:r>
+                      <a:endParaRPr lang="ja-JP" altLang="en-US" sz="1300" dirty="0">
+                        <a:latin typeface="メイリオ"/>
+                        <a:ea typeface="メイリオ"/>
+                        <a:cs typeface="メイリオ"/>
+                      </a:endParaRPr>
+                    </a:p>
+                  </a:txBody>
+                  <a:tcPr marL="91440" marR="73152" marT="36576" marB="36576" anchor="ctr">
+                    <a:lnL w="9525" cap="flat" cmpd="sng" algn="ctr">
+                      <a:solidFill>
+                        <a:srgbClr val="BFBFBF"/>
+                      </a:solidFill>
+                      <a:prstDash val="solid"/>
+                      <a:round/>
+                      <a:headEnd type="none" w="med" len="med"/>
+                      <a:tailEnd type="none" w="med" len="med"/>
+                    </a:lnL>
+                    <a:lnR w="9525" cap="flat" cmpd="sng" algn="ctr">
+                      <a:solidFill>
+                        <a:srgbClr val="BFBFBF"/>
+                      </a:solidFill>
+                      <a:prstDash val="solid"/>
+                      <a:round/>
+                      <a:headEnd type="none" w="med" len="med"/>
+                      <a:tailEnd type="none" w="med" len="med"/>
+                    </a:lnR>
+                    <a:lnT w="9525" cap="flat" cmpd="sng" algn="ctr">
+                      <a:solidFill>
+                        <a:srgbClr val="BFBFBF"/>
+                      </a:solidFill>
+                      <a:prstDash val="solid"/>
+                      <a:round/>
+                      <a:headEnd type="none" w="med" len="med"/>
+                      <a:tailEnd type="none" w="med" len="med"/>
+                    </a:lnT>
+                    <a:lnB w="9525" cap="flat" cmpd="sng" algn="ctr">
+                      <a:solidFill>
+                        <a:srgbClr val="BFBFBF"/>
+                      </a:solidFill>
+                      <a:prstDash val="solid"/>
+                      <a:round/>
+                      <a:headEnd type="none" w="med" len="med"/>
+                      <a:tailEnd type="none" w="med" len="med"/>
+                    </a:lnB>
+                    <a:solidFill>
+                      <a:srgbClr val="FFFFFF"/>
+                    </a:solidFill>
+                  </a:tcPr>
+                </a:tc>
+                <a:tc>
+                  <a:txBody>
+                    <a:bodyPr/>
+                    <a:lstStyle/>
+                    <a:p>
+                      <a:pPr algn="ctr">
+                        <a:buNone/>
+                      </a:pPr>
+                      <a:r>
+                        <a:rPr lang="ja-JP" altLang="en-US" sz="1300" b="0" dirty="0">
+                          <a:solidFill>
+                            <a:srgbClr val="333333"/>
+                          </a:solidFill>
+                          <a:latin typeface="メイリオ" panose="020B0604030504040204" pitchFamily="50" charset="-128"/>
+                          <a:ea typeface="メイリオ" panose="020B0604030504040204" pitchFamily="50" charset="-128"/>
+                          <a:cs typeface="メイリオ"/>
+                        </a:rPr>
+                        <a:t>60,000</a:t>
+                      </a:r>
+                      <a:endParaRPr lang="ja-JP" altLang="en-US" sz="1300" dirty="0">
+                        <a:latin typeface="メイリオ"/>
+                        <a:ea typeface="メイリオ"/>
+                        <a:cs typeface="メイリオ"/>
+                      </a:endParaRPr>
+                    </a:p>
+                  </a:txBody>
+                  <a:tcPr marL="91440" marR="73152" marT="36576" marB="36576" anchor="ctr">
+                    <a:lnL w="9525" cap="flat" cmpd="sng" algn="ctr">
+                      <a:solidFill>
+                        <a:srgbClr val="BFBFBF"/>
+                      </a:solidFill>
+                      <a:prstDash val="solid"/>
+                      <a:round/>
+                      <a:headEnd type="none" w="med" len="med"/>
+                      <a:tailEnd type="none" w="med" len="med"/>
+                    </a:lnL>
+                    <a:lnR w="9525" cap="flat" cmpd="sng" algn="ctr">
+                      <a:solidFill>
+                        <a:srgbClr val="BFBFBF"/>
+                      </a:solidFill>
+                      <a:prstDash val="solid"/>
+                      <a:round/>
+                      <a:headEnd type="none" w="med" len="med"/>
+                      <a:tailEnd type="none" w="med" len="med"/>
+                    </a:lnR>
+                    <a:lnT w="9525" cap="flat" cmpd="sng" algn="ctr">
+                      <a:solidFill>
+                        <a:srgbClr val="BFBFBF"/>
+                      </a:solidFill>
+                      <a:prstDash val="solid"/>
+                      <a:round/>
+                      <a:headEnd type="none" w="med" len="med"/>
+                      <a:tailEnd type="none" w="med" len="med"/>
+                    </a:lnT>
+                    <a:lnB w="9525" cap="flat" cmpd="sng" algn="ctr">
+                      <a:solidFill>
+                        <a:srgbClr val="BFBFBF"/>
+                      </a:solidFill>
+                      <a:prstDash val="solid"/>
+                      <a:round/>
+                      <a:headEnd type="none" w="med" len="med"/>
+                      <a:tailEnd type="none" w="med" len="med"/>
+                    </a:lnB>
+                    <a:solidFill>
+                      <a:srgbClr val="FFFFFF"/>
+                    </a:solidFill>
+                  </a:tcPr>
+                </a:tc>
+                <a:tc>
+                  <a:txBody>
+                    <a:bodyPr/>
+                    <a:lstStyle/>
+                    <a:p>
+                      <a:pPr algn="ctr">
+                        <a:buNone/>
+                      </a:pPr>
+                      <a:r>
+                        <a:rPr lang="ja-JP" altLang="en-US" sz="1300" b="0" dirty="0">
+                          <a:solidFill>
+                            <a:srgbClr val="333333"/>
+                          </a:solidFill>
+                          <a:latin typeface="メイリオ" panose="020B0604030504040204" pitchFamily="50" charset="-128"/>
+                          <a:ea typeface="メイリオ" panose="020B0604030504040204" pitchFamily="50" charset="-128"/>
+                          <a:cs typeface="メイリオ"/>
+                        </a:rPr>
+                        <a:t>60,000</a:t>
+                      </a:r>
+                      <a:endParaRPr lang="ja-JP" altLang="en-US" sz="1300" dirty="0">
+                        <a:latin typeface="メイリオ"/>
+                        <a:ea typeface="メイリオ"/>
+                        <a:cs typeface="メイリオ"/>
+                      </a:endParaRPr>
+                    </a:p>
+                  </a:txBody>
+                  <a:tcPr marL="91440" marR="73152" marT="36576" marB="36576" anchor="ctr">
+                    <a:lnL w="9525" cap="flat" cmpd="sng" algn="ctr">
+                      <a:solidFill>
+                        <a:srgbClr val="BFBFBF"/>
+                      </a:solidFill>
+                      <a:prstDash val="solid"/>
+                      <a:round/>
+                      <a:headEnd type="none" w="med" len="med"/>
+                      <a:tailEnd type="none" w="med" len="med"/>
+                    </a:lnL>
+                    <a:lnR w="9525" cap="flat" cmpd="sng" algn="ctr">
+                      <a:solidFill>
+                        <a:srgbClr val="BFBFBF"/>
+                      </a:solidFill>
+                      <a:prstDash val="solid"/>
+                      <a:round/>
+                      <a:headEnd type="none" w="med" len="med"/>
+                      <a:tailEnd type="none" w="med" len="med"/>
+                    </a:lnR>
+                    <a:lnT w="9525" cap="flat" cmpd="sng" algn="ctr">
+                      <a:solidFill>
+                        <a:srgbClr val="BFBFBF"/>
+                      </a:solidFill>
+                      <a:prstDash val="solid"/>
+                      <a:round/>
+                      <a:headEnd type="none" w="med" len="med"/>
+                      <a:tailEnd type="none" w="med" len="med"/>
+                    </a:lnT>
+                    <a:lnB w="9525" cap="flat" cmpd="sng" algn="ctr">
+                      <a:solidFill>
+                        <a:srgbClr val="BFBFBF"/>
+                      </a:solidFill>
+                      <a:prstDash val="solid"/>
+                      <a:round/>
+                      <a:headEnd type="none" w="med" len="med"/>
+                      <a:tailEnd type="none" w="med" len="med"/>
+                    </a:lnB>
+                    <a:solidFill>
+                      <a:srgbClr val="FFFFFF"/>
+                    </a:solidFill>
+                  </a:tcPr>
+                </a:tc>
+                <a:tc>
+                  <a:txBody>
+                    <a:bodyPr/>
+                    <a:lstStyle/>
+                    <a:p>
+                      <a:pPr algn="ctr">
+                        <a:buNone/>
+                      </a:pPr>
+                      <a:r>
+                        <a:rPr lang="ja-JP" altLang="en-US" sz="1300" b="0" dirty="0">
+                          <a:solidFill>
+                            <a:srgbClr val="333333"/>
+                          </a:solidFill>
+                          <a:latin typeface="メイリオ" panose="020B0604030504040204" pitchFamily="50" charset="-128"/>
+                          <a:ea typeface="メイリオ" panose="020B0604030504040204" pitchFamily="50" charset="-128"/>
+                          <a:cs typeface="メイリオ"/>
+                        </a:rPr>
+                        <a:t>60,000</a:t>
+                      </a:r>
+                      <a:endParaRPr lang="ja-JP" altLang="en-US" sz="1300" dirty="0">
+                        <a:latin typeface="メイリオ"/>
+                        <a:ea typeface="メイリオ"/>
+                        <a:cs typeface="メイリオ"/>
+                      </a:endParaRPr>
+                    </a:p>
+                  </a:txBody>
+                  <a:tcPr marL="91440" marR="73152" marT="36576" marB="36576" anchor="ctr">
+                    <a:lnL w="9525" cap="flat" cmpd="sng" algn="ctr">
+                      <a:solidFill>
+                        <a:srgbClr val="BFBFBF"/>
+                      </a:solidFill>
+                      <a:prstDash val="solid"/>
+                      <a:round/>
+                      <a:headEnd type="none" w="med" len="med"/>
+                      <a:tailEnd type="none" w="med" len="med"/>
+                    </a:lnL>
+                    <a:lnR w="9525" cap="flat" cmpd="sng" algn="ctr">
+                      <a:solidFill>
+                        <a:srgbClr val="BFBFBF"/>
+                      </a:solidFill>
+                      <a:prstDash val="solid"/>
+                      <a:round/>
+                      <a:headEnd type="none" w="med" len="med"/>
+                      <a:tailEnd type="none" w="med" len="med"/>
+                    </a:lnR>
+                    <a:lnT w="9525" cap="flat" cmpd="sng" algn="ctr">
+                      <a:solidFill>
+                        <a:srgbClr val="BFBFBF"/>
+                      </a:solidFill>
+                      <a:prstDash val="solid"/>
+                      <a:round/>
+                      <a:headEnd type="none" w="med" len="med"/>
+                      <a:tailEnd type="none" w="med" len="med"/>
+                    </a:lnT>
+                    <a:lnB w="9525" cap="flat" cmpd="sng" algn="ctr">
+                      <a:solidFill>
+                        <a:srgbClr val="BFBFBF"/>
+                      </a:solidFill>
+                      <a:prstDash val="solid"/>
+                      <a:round/>
+                      <a:headEnd type="none" w="med" len="med"/>
+                      <a:tailEnd type="none" w="med" len="med"/>
+                    </a:lnB>
+                    <a:solidFill>
+                      <a:srgbClr val="FFFFFF"/>
+                    </a:solidFill>
+                  </a:tcPr>
+                </a:tc>
+              </a:tr>
+              <a:tr h="393192">
+                <a:tc>
+                  <a:txBody>
+                    <a:bodyPr/>
+                    <a:lstStyle/>
+                    <a:p>
+                      <a:pPr algn="ctr">
+                        <a:buNone/>
+                      </a:pPr>
+                      <a:r>
+                        <a:rPr lang="ja-JP" altLang="en-US" sz="1200" b="1" dirty="0">
+                          <a:solidFill>
+                            <a:srgbClr val="002060"/>
+                          </a:solidFill>
+                          <a:latin typeface="メイリオ" panose="020B0604030504040204" pitchFamily="50" charset="-128"/>
+                          <a:ea typeface="メイリオ" panose="020B0604030504040204" pitchFamily="50" charset="-128"/>
+                          <a:cs typeface="メイリオ"/>
+                        </a:rPr>
+                        <a:t>LINE利用料（円）</a:t>
+                      </a:r>
+                      <a:endParaRPr lang="ja-JP" altLang="en-US" sz="1200" dirty="0">
+                        <a:latin typeface="メイリオ"/>
+                        <a:ea typeface="メイリオ"/>
+                        <a:cs typeface="メイリオ"/>
+                      </a:endParaRPr>
+                    </a:p>
+                  </a:txBody>
+                  <a:tcPr marL="91440" marR="73152" marT="36576" marB="36576" anchor="ctr">
+                    <a:lnL w="9525" cap="flat" cmpd="sng" algn="ctr">
+                      <a:solidFill>
+                        <a:srgbClr val="BFBFBF"/>
+                      </a:solidFill>
+                      <a:prstDash val="solid"/>
+                      <a:round/>
+                      <a:headEnd type="none" w="med" len="med"/>
+                      <a:tailEnd type="none" w="med" len="med"/>
+                    </a:lnL>
+                    <a:lnR w="9525" cap="flat" cmpd="sng" algn="ctr">
+                      <a:solidFill>
+                        <a:srgbClr val="BFBFBF"/>
+                      </a:solidFill>
+                      <a:prstDash val="solid"/>
+                      <a:round/>
+                      <a:headEnd type="none" w="med" len="med"/>
+                      <a:tailEnd type="none" w="med" len="med"/>
+                    </a:lnR>
+                    <a:lnT w="9525" cap="flat" cmpd="sng" algn="ctr">
+                      <a:solidFill>
+                        <a:srgbClr val="BFBFBF"/>
+                      </a:solidFill>
+                      <a:prstDash val="solid"/>
+                      <a:round/>
+                      <a:headEnd type="none" w="med" len="med"/>
+                      <a:tailEnd type="none" w="med" len="med"/>
+                    </a:lnT>
+                    <a:lnB w="9525" cap="flat" cmpd="sng" algn="ctr">
+                      <a:solidFill>
+                        <a:srgbClr val="BFBFBF"/>
+                      </a:solidFill>
+                      <a:prstDash val="solid"/>
+                      <a:round/>
+                      <a:headEnd type="none" w="med" len="med"/>
+                      <a:tailEnd type="none" w="med" len="med"/>
+                    </a:lnB>
+                    <a:solidFill>
+                      <a:srgbClr val="F2F2F2"/>
+                    </a:solidFill>
+                  </a:tcPr>
+                </a:tc>
+                <a:tc>
+                  <a:txBody>
+                    <a:bodyPr/>
+                    <a:lstStyle/>
+                    <a:p>
+                      <a:pPr algn="ctr">
+                        <a:buNone/>
+                      </a:pPr>
+                      <a:r>
+                        <a:rPr lang="ja-JP" altLang="en-US" sz="1300" b="0" dirty="0">
+                          <a:solidFill>
+                            <a:srgbClr val="333333"/>
+                          </a:solidFill>
+                          <a:latin typeface="メイリオ" panose="020B0604030504040204" pitchFamily="50" charset="-128"/>
+                          <a:ea typeface="メイリオ" panose="020B0604030504040204" pitchFamily="50" charset="-128"/>
+                          <a:cs typeface="メイリオ"/>
+                        </a:rPr>
+                        <a:t>30,000</a:t>
+                      </a:r>
+                      <a:endParaRPr lang="ja-JP" altLang="en-US" sz="1300" dirty="0">
+                        <a:latin typeface="メイリオ"/>
+                        <a:ea typeface="メイリオ"/>
+                        <a:cs typeface="メイリオ"/>
+                      </a:endParaRPr>
+                    </a:p>
+                  </a:txBody>
+                  <a:tcPr marL="91440" marR="73152" marT="36576" marB="36576" anchor="ctr">
+                    <a:lnL w="9525" cap="flat" cmpd="sng" algn="ctr">
+                      <a:solidFill>
+                        <a:srgbClr val="BFBFBF"/>
+                      </a:solidFill>
+                      <a:prstDash val="solid"/>
+                      <a:round/>
+                      <a:headEnd type="none" w="med" len="med"/>
+                      <a:tailEnd type="none" w="med" len="med"/>
+                    </a:lnL>
+                    <a:lnR w="9525" cap="flat" cmpd="sng" algn="ctr">
+                      <a:solidFill>
+                        <a:srgbClr val="BFBFBF"/>
+                      </a:solidFill>
+                      <a:prstDash val="solid"/>
+                      <a:round/>
+                      <a:headEnd type="none" w="med" len="med"/>
+                      <a:tailEnd type="none" w="med" len="med"/>
+                    </a:lnR>
+                    <a:lnT w="9525" cap="flat" cmpd="sng" algn="ctr">
+                      <a:solidFill>
+                        <a:srgbClr val="BFBFBF"/>
+                      </a:solidFill>
+                      <a:prstDash val="solid"/>
+                      <a:round/>
+                      <a:headEnd type="none" w="med" len="med"/>
+                      <a:tailEnd type="none" w="med" len="med"/>
+                    </a:lnT>
+                    <a:lnB w="9525" cap="flat" cmpd="sng" algn="ctr">
+                      <a:solidFill>
+                        <a:srgbClr val="BFBFBF"/>
+                      </a:solidFill>
+                      <a:prstDash val="solid"/>
+                      <a:round/>
+                      <a:headEnd type="none" w="med" len="med"/>
+                      <a:tailEnd type="none" w="med" len="med"/>
+                    </a:lnB>
+                    <a:solidFill>
+                      <a:srgbClr val="FFFFFF"/>
+                    </a:solidFill>
+                  </a:tcPr>
+                </a:tc>
+                <a:tc>
+                  <a:txBody>
+                    <a:bodyPr/>
+                    <a:lstStyle/>
+                    <a:p>
+                      <a:pPr algn="ctr">
+                        <a:buNone/>
+                      </a:pPr>
+                      <a:r>
+                        <a:rPr lang="ja-JP" altLang="en-US" sz="1300" b="0" dirty="0">
+                          <a:solidFill>
+                            <a:srgbClr val="333333"/>
+                          </a:solidFill>
+                          <a:latin typeface="メイリオ" panose="020B0604030504040204" pitchFamily="50" charset="-128"/>
+                          <a:ea typeface="メイリオ" panose="020B0604030504040204" pitchFamily="50" charset="-128"/>
+                          <a:cs typeface="メイリオ"/>
+                        </a:rPr>
+                        <a:t>5,000</a:t>
+                      </a:r>
+                      <a:endParaRPr lang="ja-JP" altLang="en-US" sz="1300" dirty="0">
+                        <a:latin typeface="メイリオ"/>
+                        <a:ea typeface="メイリオ"/>
+                        <a:cs typeface="メイリオ"/>
+                      </a:endParaRPr>
+                    </a:p>
+                  </a:txBody>
+                  <a:tcPr marL="91440" marR="73152" marT="36576" marB="36576" anchor="ctr">
+                    <a:lnL w="9525" cap="flat" cmpd="sng" algn="ctr">
+                      <a:solidFill>
+                        <a:srgbClr val="BFBFBF"/>
+                      </a:solidFill>
+                      <a:prstDash val="solid"/>
+                      <a:round/>
+                      <a:headEnd type="none" w="med" len="med"/>
+                      <a:tailEnd type="none" w="med" len="med"/>
+                    </a:lnL>
+                    <a:lnR w="9525" cap="flat" cmpd="sng" algn="ctr">
+                      <a:solidFill>
+                        <a:srgbClr val="BFBFBF"/>
+                      </a:solidFill>
+                      <a:prstDash val="solid"/>
+                      <a:round/>
+                      <a:headEnd type="none" w="med" len="med"/>
+                      <a:tailEnd type="none" w="med" len="med"/>
+                    </a:lnR>
+                    <a:lnT w="9525" cap="flat" cmpd="sng" algn="ctr">
+                      <a:solidFill>
+                        <a:srgbClr val="BFBFBF"/>
+                      </a:solidFill>
+                      <a:prstDash val="solid"/>
+                      <a:round/>
+                      <a:headEnd type="none" w="med" len="med"/>
+                      <a:tailEnd type="none" w="med" len="med"/>
+                    </a:lnT>
+                    <a:lnB w="9525" cap="flat" cmpd="sng" algn="ctr">
+                      <a:solidFill>
+                        <a:srgbClr val="BFBFBF"/>
+                      </a:solidFill>
+                      <a:prstDash val="solid"/>
+                      <a:round/>
+                      <a:headEnd type="none" w="med" len="med"/>
+                      <a:tailEnd type="none" w="med" len="med"/>
+                    </a:lnB>
+                    <a:solidFill>
+                      <a:srgbClr val="FFFFFF"/>
+                    </a:solidFill>
+                  </a:tcPr>
+                </a:tc>
+                <a:tc>
+                  <a:txBody>
+                    <a:bodyPr/>
+                    <a:lstStyle/>
+                    <a:p>
+                      <a:pPr algn="ctr">
+                        <a:buNone/>
+                      </a:pPr>
+                      <a:r>
+                        <a:rPr lang="ja-JP" altLang="en-US" sz="1300" b="0" dirty="0">
+                          <a:solidFill>
+                            <a:srgbClr val="333333"/>
+                          </a:solidFill>
+                          <a:latin typeface="メイリオ" panose="020B0604030504040204" pitchFamily="50" charset="-128"/>
+                          <a:ea typeface="メイリオ" panose="020B0604030504040204" pitchFamily="50" charset="-128"/>
+                          <a:cs typeface="メイリオ"/>
+                        </a:rPr>
+                        <a:t>5,000</a:t>
+                      </a:r>
+                      <a:endParaRPr lang="ja-JP" altLang="en-US" sz="1300" dirty="0">
+                        <a:latin typeface="メイリオ"/>
+                        <a:ea typeface="メイリオ"/>
+                        <a:cs typeface="メイリオ"/>
+                      </a:endParaRPr>
+                    </a:p>
+                  </a:txBody>
+                  <a:tcPr marL="91440" marR="73152" marT="36576" marB="36576" anchor="ctr">
+                    <a:lnL w="9525" cap="flat" cmpd="sng" algn="ctr">
+                      <a:solidFill>
+                        <a:srgbClr val="BFBFBF"/>
+                      </a:solidFill>
+                      <a:prstDash val="solid"/>
+                      <a:round/>
+                      <a:headEnd type="none" w="med" len="med"/>
+                      <a:tailEnd type="none" w="med" len="med"/>
+                    </a:lnL>
+                    <a:lnR w="9525" cap="flat" cmpd="sng" algn="ctr">
+                      <a:solidFill>
+                        <a:srgbClr val="BFBFBF"/>
+                      </a:solidFill>
+                      <a:prstDash val="solid"/>
+                      <a:round/>
+                      <a:headEnd type="none" w="med" len="med"/>
+                      <a:tailEnd type="none" w="med" len="med"/>
+                    </a:lnR>
+                    <a:lnT w="9525" cap="flat" cmpd="sng" algn="ctr">
+                      <a:solidFill>
+                        <a:srgbClr val="BFBFBF"/>
+                      </a:solidFill>
+                      <a:prstDash val="solid"/>
+                      <a:round/>
+                      <a:headEnd type="none" w="med" len="med"/>
+                      <a:tailEnd type="none" w="med" len="med"/>
+                    </a:lnT>
+                    <a:lnB w="9525" cap="flat" cmpd="sng" algn="ctr">
+                      <a:solidFill>
+                        <a:srgbClr val="BFBFBF"/>
+                      </a:solidFill>
+                      <a:prstDash val="solid"/>
+                      <a:round/>
+                      <a:headEnd type="none" w="med" len="med"/>
+                      <a:tailEnd type="none" w="med" len="med"/>
+                    </a:lnB>
+                    <a:solidFill>
+                      <a:srgbClr val="FFFFFF"/>
+                    </a:solidFill>
+                  </a:tcPr>
+                </a:tc>
+                <a:tc>
+                  <a:txBody>
+                    <a:bodyPr/>
+                    <a:lstStyle/>
+                    <a:p>
+                      <a:pPr algn="ctr">
+                        <a:buNone/>
+                      </a:pPr>
+                      <a:r>
+                        <a:rPr lang="ja-JP" altLang="en-US" sz="1300" b="0" dirty="0">
+                          <a:solidFill>
+                            <a:srgbClr val="333333"/>
+                          </a:solidFill>
+                          <a:latin typeface="メイリオ" panose="020B0604030504040204" pitchFamily="50" charset="-128"/>
+                          <a:ea typeface="メイリオ" panose="020B0604030504040204" pitchFamily="50" charset="-128"/>
+                          <a:cs typeface="メイリオ"/>
+                        </a:rPr>
+                        <a:t>5,000</a:t>
+                      </a:r>
+                      <a:endParaRPr lang="ja-JP" altLang="en-US" sz="1300" dirty="0">
+                        <a:latin typeface="メイリオ"/>
+                        <a:ea typeface="メイリオ"/>
+                        <a:cs typeface="メイリオ"/>
+                      </a:endParaRPr>
+                    </a:p>
+                  </a:txBody>
+                  <a:tcPr marL="91440" marR="73152" marT="36576" marB="36576" anchor="ctr">
+                    <a:lnL w="9525" cap="flat" cmpd="sng" algn="ctr">
+                      <a:solidFill>
+                        <a:srgbClr val="BFBFBF"/>
+                      </a:solidFill>
+                      <a:prstDash val="solid"/>
+                      <a:round/>
+                      <a:headEnd type="none" w="med" len="med"/>
+                      <a:tailEnd type="none" w="med" len="med"/>
+                    </a:lnL>
+                    <a:lnR w="9525" cap="flat" cmpd="sng" algn="ctr">
+                      <a:solidFill>
+                        <a:srgbClr val="BFBFBF"/>
+                      </a:solidFill>
+                      <a:prstDash val="solid"/>
+                      <a:round/>
+                      <a:headEnd type="none" w="med" len="med"/>
+                      <a:tailEnd type="none" w="med" len="med"/>
+                    </a:lnR>
+                    <a:lnT w="9525" cap="flat" cmpd="sng" algn="ctr">
+                      <a:solidFill>
+                        <a:srgbClr val="BFBFBF"/>
+                      </a:solidFill>
+                      <a:prstDash val="solid"/>
+                      <a:round/>
+                      <a:headEnd type="none" w="med" len="med"/>
+                      <a:tailEnd type="none" w="med" len="med"/>
+                    </a:lnT>
+                    <a:lnB w="9525" cap="flat" cmpd="sng" algn="ctr">
+                      <a:solidFill>
+                        <a:srgbClr val="BFBFBF"/>
+                      </a:solidFill>
+                      <a:prstDash val="solid"/>
+                      <a:round/>
+                      <a:headEnd type="none" w="med" len="med"/>
+                      <a:tailEnd type="none" w="med" len="med"/>
+                    </a:lnB>
+                    <a:solidFill>
+                      <a:srgbClr val="FFFFFF"/>
+                    </a:solidFill>
+                  </a:tcPr>
+                </a:tc>
+                <a:tc>
+                  <a:txBody>
+                    <a:bodyPr/>
+                    <a:lstStyle/>
+                    <a:p>
+                      <a:pPr algn="ctr">
+                        <a:buNone/>
+                      </a:pPr>
+                      <a:r>
+                        <a:rPr lang="ja-JP" altLang="en-US" sz="1300" b="0" dirty="0">
+                          <a:solidFill>
+                            <a:srgbClr val="333333"/>
+                          </a:solidFill>
+                          <a:latin typeface="メイリオ" panose="020B0604030504040204" pitchFamily="50" charset="-128"/>
+                          <a:ea typeface="メイリオ" panose="020B0604030504040204" pitchFamily="50" charset="-128"/>
+                          <a:cs typeface="メイリオ"/>
+                        </a:rPr>
+                        <a:t>5,000</a:t>
+                      </a:r>
+                      <a:endParaRPr lang="ja-JP" altLang="en-US" sz="1300" dirty="0">
+                        <a:latin typeface="メイリオ"/>
+                        <a:ea typeface="メイリオ"/>
+                        <a:cs typeface="メイリオ"/>
+                      </a:endParaRPr>
+                    </a:p>
+                  </a:txBody>
+                  <a:tcPr marL="91440" marR="73152" marT="36576" marB="36576" anchor="ctr">
+                    <a:lnL w="9525" cap="flat" cmpd="sng" algn="ctr">
+                      <a:solidFill>
+                        <a:srgbClr val="BFBFBF"/>
+                      </a:solidFill>
+                      <a:prstDash val="solid"/>
+                      <a:round/>
+                      <a:headEnd type="none" w="med" len="med"/>
+                      <a:tailEnd type="none" w="med" len="med"/>
+                    </a:lnL>
+                    <a:lnR w="9525" cap="flat" cmpd="sng" algn="ctr">
+                      <a:solidFill>
+                        <a:srgbClr val="BFBFBF"/>
+                      </a:solidFill>
+                      <a:prstDash val="solid"/>
+                      <a:round/>
+                      <a:headEnd type="none" w="med" len="med"/>
+                      <a:tailEnd type="none" w="med" len="med"/>
+                    </a:lnR>
+                    <a:lnT w="9525" cap="flat" cmpd="sng" algn="ctr">
+                      <a:solidFill>
+                        <a:srgbClr val="BFBFBF"/>
+                      </a:solidFill>
+                      <a:prstDash val="solid"/>
+                      <a:round/>
+                      <a:headEnd type="none" w="med" len="med"/>
+                      <a:tailEnd type="none" w="med" len="med"/>
+                    </a:lnT>
+                    <a:lnB w="9525" cap="flat" cmpd="sng" algn="ctr">
+                      <a:solidFill>
+                        <a:srgbClr val="BFBFBF"/>
+                      </a:solidFill>
+                      <a:prstDash val="solid"/>
+                      <a:round/>
+                      <a:headEnd type="none" w="med" len="med"/>
+                      <a:tailEnd type="none" w="med" len="med"/>
+                    </a:lnB>
+                    <a:solidFill>
+                      <a:srgbClr val="FFFFFF"/>
+                    </a:solidFill>
+                  </a:tcPr>
+                </a:tc>
+                <a:tc>
+                  <a:txBody>
+                    <a:bodyPr/>
+                    <a:lstStyle/>
+                    <a:p>
+                      <a:pPr algn="ctr">
+                        <a:buNone/>
+                      </a:pPr>
+                      <a:r>
+                        <a:rPr lang="ja-JP" altLang="en-US" sz="1300" b="0" dirty="0">
+                          <a:solidFill>
+                            <a:srgbClr val="333333"/>
+                          </a:solidFill>
+                          <a:latin typeface="メイリオ" panose="020B0604030504040204" pitchFamily="50" charset="-128"/>
+                          <a:ea typeface="メイリオ" panose="020B0604030504040204" pitchFamily="50" charset="-128"/>
+                          <a:cs typeface="メイリオ"/>
+                        </a:rPr>
+                        <a:t>5,000</a:t>
+                      </a:r>
+                      <a:endParaRPr lang="ja-JP" altLang="en-US" sz="1300" dirty="0">
+                        <a:latin typeface="メイリオ"/>
+                        <a:ea typeface="メイリオ"/>
+                        <a:cs typeface="メイリオ"/>
+                      </a:endParaRPr>
+                    </a:p>
+                  </a:txBody>
+                  <a:tcPr marL="91440" marR="73152" marT="36576" marB="36576" anchor="ctr">
+                    <a:lnL w="9525" cap="flat" cmpd="sng" algn="ctr">
+                      <a:solidFill>
+                        <a:srgbClr val="BFBFBF"/>
+                      </a:solidFill>
+                      <a:prstDash val="solid"/>
+                      <a:round/>
+                      <a:headEnd type="none" w="med" len="med"/>
+                      <a:tailEnd type="none" w="med" len="med"/>
+                    </a:lnL>
+                    <a:lnR w="9525" cap="flat" cmpd="sng" algn="ctr">
+                      <a:solidFill>
+                        <a:srgbClr val="BFBFBF"/>
+                      </a:solidFill>
+                      <a:prstDash val="solid"/>
+                      <a:round/>
+                      <a:headEnd type="none" w="med" len="med"/>
+                      <a:tailEnd type="none" w="med" len="med"/>
+                    </a:lnR>
+                    <a:lnT w="9525" cap="flat" cmpd="sng" algn="ctr">
+                      <a:solidFill>
+                        <a:srgbClr val="BFBFBF"/>
+                      </a:solidFill>
+                      <a:prstDash val="solid"/>
+                      <a:round/>
+                      <a:headEnd type="none" w="med" len="med"/>
+                      <a:tailEnd type="none" w="med" len="med"/>
+                    </a:lnT>
+                    <a:lnB w="9525" cap="flat" cmpd="sng" algn="ctr">
+                      <a:solidFill>
+                        <a:srgbClr val="BFBFBF"/>
+                      </a:solidFill>
+                      <a:prstDash val="solid"/>
+                      <a:round/>
+                      <a:headEnd type="none" w="med" len="med"/>
+                      <a:tailEnd type="none" w="med" len="med"/>
+                    </a:lnB>
+                    <a:solidFill>
+                      <a:srgbClr val="FFFFFF"/>
+                    </a:solidFill>
+                  </a:tcPr>
+                </a:tc>
+                <a:tc>
+                  <a:txBody>
+                    <a:bodyPr/>
+                    <a:lstStyle/>
+                    <a:p>
+                      <a:pPr algn="ctr">
+                        <a:buNone/>
+                      </a:pPr>
+                      <a:r>
+                        <a:rPr lang="ja-JP" altLang="en-US" sz="1300" b="0" dirty="0">
+                          <a:solidFill>
+                            <a:srgbClr val="333333"/>
+                          </a:solidFill>
+                          <a:latin typeface="メイリオ" panose="020B0604030504040204" pitchFamily="50" charset="-128"/>
+                          <a:ea typeface="メイリオ" panose="020B0604030504040204" pitchFamily="50" charset="-128"/>
+                          <a:cs typeface="メイリオ"/>
+                        </a:rPr>
+                        <a:t>5,000</a:t>
+                      </a:r>
+                      <a:endParaRPr lang="ja-JP" altLang="en-US" sz="1300" dirty="0">
+                        <a:latin typeface="メイリオ"/>
+                        <a:ea typeface="メイリオ"/>
+                        <a:cs typeface="メイリオ"/>
+                      </a:endParaRPr>
+                    </a:p>
+                  </a:txBody>
+                  <a:tcPr marL="91440" marR="73152" marT="36576" marB="36576" anchor="ctr">
+                    <a:lnL w="9525" cap="flat" cmpd="sng" algn="ctr">
+                      <a:solidFill>
+                        <a:srgbClr val="BFBFBF"/>
+                      </a:solidFill>
+                      <a:prstDash val="solid"/>
+                      <a:round/>
+                      <a:headEnd type="none" w="med" len="med"/>
+                      <a:tailEnd type="none" w="med" len="med"/>
+                    </a:lnL>
+                    <a:lnR w="9525" cap="flat" cmpd="sng" algn="ctr">
+                      <a:solidFill>
+                        <a:srgbClr val="BFBFBF"/>
+                      </a:solidFill>
+                      <a:prstDash val="solid"/>
+                      <a:round/>
+                      <a:headEnd type="none" w="med" len="med"/>
+                      <a:tailEnd type="none" w="med" len="med"/>
+                    </a:lnR>
+                    <a:lnT w="9525" cap="flat" cmpd="sng" algn="ctr">
+                      <a:solidFill>
+                        <a:srgbClr val="BFBFBF"/>
+                      </a:solidFill>
+                      <a:prstDash val="solid"/>
+                      <a:round/>
+                      <a:headEnd type="none" w="med" len="med"/>
+                      <a:tailEnd type="none" w="med" len="med"/>
+                    </a:lnT>
+                    <a:lnB w="9525" cap="flat" cmpd="sng" algn="ctr">
+                      <a:solidFill>
+                        <a:srgbClr val="BFBFBF"/>
+                      </a:solidFill>
+                      <a:prstDash val="solid"/>
+                      <a:round/>
+                      <a:headEnd type="none" w="med" len="med"/>
+                      <a:tailEnd type="none" w="med" len="med"/>
+                    </a:lnB>
+                    <a:solidFill>
+                      <a:srgbClr val="FFFFFF"/>
+                    </a:solidFill>
+                  </a:tcPr>
+                </a:tc>
+              </a:tr>
+              <a:tr h="393192">
+                <a:tc>
+                  <a:txBody>
+                    <a:bodyPr/>
+                    <a:lstStyle/>
+                    <a:p>
+                      <a:pPr algn="ctr">
+                        <a:buNone/>
+                      </a:pPr>
+                      <a:r>
+                        <a:rPr lang="ja-JP" altLang="en-US" sz="1200" b="1" dirty="0">
+                          <a:solidFill>
+                            <a:srgbClr val="002060"/>
+                          </a:solidFill>
+                          <a:latin typeface="メイリオ" panose="020B0604030504040204" pitchFamily="50" charset="-128"/>
+                          <a:ea typeface="メイリオ" panose="020B0604030504040204" pitchFamily="50" charset="-128"/>
+                          <a:cs typeface="メイリオ"/>
+                        </a:rPr>
+                        <a:t>合計（円）</a:t>
+                      </a:r>
+                      <a:endParaRPr lang="ja-JP" altLang="en-US" sz="1200" dirty="0">
+                        <a:latin typeface="メイリオ"/>
+                        <a:ea typeface="メイリオ"/>
+                        <a:cs typeface="メイリオ"/>
+                      </a:endParaRPr>
+                    </a:p>
+                  </a:txBody>
+                  <a:tcPr marL="91440" marR="73152" marT="36576" marB="36576" anchor="ctr">
+                    <a:lnL w="9525" cap="flat" cmpd="sng" algn="ctr">
+                      <a:solidFill>
+                        <a:srgbClr val="BFBFBF"/>
+                      </a:solidFill>
+                      <a:prstDash val="solid"/>
+                      <a:round/>
+                      <a:headEnd type="none" w="med" len="med"/>
+                      <a:tailEnd type="none" w="med" len="med"/>
+                    </a:lnL>
+                    <a:lnR w="9525" cap="flat" cmpd="sng" algn="ctr">
+                      <a:solidFill>
+                        <a:srgbClr val="BFBFBF"/>
+                      </a:solidFill>
+                      <a:prstDash val="solid"/>
+                      <a:round/>
+                      <a:headEnd type="none" w="med" len="med"/>
+                      <a:tailEnd type="none" w="med" len="med"/>
+                    </a:lnR>
+                    <a:lnT w="9525" cap="flat" cmpd="sng" algn="ctr">
+                      <a:solidFill>
+                        <a:srgbClr val="BFBFBF"/>
+                      </a:solidFill>
+                      <a:prstDash val="solid"/>
+                      <a:round/>
+                      <a:headEnd type="none" w="med" len="med"/>
+                      <a:tailEnd type="none" w="med" len="med"/>
+                    </a:lnT>
+                    <a:lnB w="9525" cap="flat" cmpd="sng" algn="ctr">
+                      <a:solidFill>
+                        <a:srgbClr val="BFBFBF"/>
+                      </a:solidFill>
+                      <a:prstDash val="solid"/>
+                      <a:round/>
+                      <a:headEnd type="none" w="med" len="med"/>
+                      <a:tailEnd type="none" w="med" len="med"/>
+                    </a:lnB>
+                    <a:solidFill>
+                      <a:srgbClr val="F2F2F2"/>
+                    </a:solidFill>
+                  </a:tcPr>
+                </a:tc>
+                <a:tc>
+                  <a:txBody>
+                    <a:bodyPr/>
+                    <a:lstStyle/>
+                    <a:p>
+                      <a:pPr algn="ctr">
+                        <a:buNone/>
+                      </a:pPr>
+                      <a:r>
+                        <a:rPr lang="ja-JP" altLang="en-US" sz="1300" b="1" dirty="0">
+                          <a:solidFill>
+                            <a:srgbClr val="002060"/>
+                          </a:solidFill>
+                          <a:latin typeface="メイリオ" panose="020B0604030504040204" pitchFamily="50" charset="-128"/>
+                          <a:ea typeface="メイリオ" panose="020B0604030504040204" pitchFamily="50" charset="-128"/>
+                          <a:cs typeface="メイリオ"/>
+                        </a:rPr>
+                        <a:t>295,000</a:t>
+                      </a:r>
+                      <a:endParaRPr lang="ja-JP" altLang="en-US" sz="1300" dirty="0">
+                        <a:latin typeface="メイリオ"/>
+                        <a:ea typeface="メイリオ"/>
+                        <a:cs typeface="メイリオ"/>
+                      </a:endParaRPr>
+                    </a:p>
+                  </a:txBody>
+                  <a:tcPr marL="91440" marR="73152" marT="36576" marB="36576" anchor="ctr">
+                    <a:lnL w="9525" cap="flat" cmpd="sng" algn="ctr">
+                      <a:solidFill>
+                        <a:srgbClr val="BFBFBF"/>
+                      </a:solidFill>
+                      <a:prstDash val="solid"/>
+                      <a:round/>
+                      <a:headEnd type="none" w="med" len="med"/>
+                      <a:tailEnd type="none" w="med" len="med"/>
+                    </a:lnL>
+                    <a:lnR w="9525" cap="flat" cmpd="sng" algn="ctr">
+                      <a:solidFill>
+                        <a:srgbClr val="BFBFBF"/>
+                      </a:solidFill>
+                      <a:prstDash val="solid"/>
+                      <a:round/>
+                      <a:headEnd type="none" w="med" len="med"/>
+                      <a:tailEnd type="none" w="med" len="med"/>
+                    </a:lnR>
+                    <a:lnT w="9525" cap="flat" cmpd="sng" algn="ctr">
+                      <a:solidFill>
+                        <a:srgbClr val="BFBFBF"/>
+                      </a:solidFill>
+                      <a:prstDash val="solid"/>
+                      <a:round/>
+                      <a:headEnd type="none" w="med" len="med"/>
+                      <a:tailEnd type="none" w="med" len="med"/>
+                    </a:lnT>
+                    <a:lnB w="9525" cap="flat" cmpd="sng" algn="ctr">
+                      <a:solidFill>
+                        <a:srgbClr val="BFBFBF"/>
+                      </a:solidFill>
+                      <a:prstDash val="solid"/>
+                      <a:round/>
+                      <a:headEnd type="none" w="med" len="med"/>
+                      <a:tailEnd type="none" w="med" len="med"/>
+                    </a:lnB>
+                    <a:solidFill>
+                      <a:srgbClr val="FFFFFF"/>
+                    </a:solidFill>
+                  </a:tcPr>
+                </a:tc>
+                <a:tc>
+                  <a:txBody>
+                    <a:bodyPr/>
+                    <a:lstStyle/>
+                    <a:p>
+                      <a:pPr algn="ctr">
+                        <a:buNone/>
+                      </a:pPr>
+                      <a:r>
+                        <a:rPr lang="ja-JP" altLang="en-US" sz="1300" b="1" dirty="0">
+                          <a:solidFill>
+                            <a:srgbClr val="002060"/>
+                          </a:solidFill>
+                          <a:latin typeface="メイリオ" panose="020B0604030504040204" pitchFamily="50" charset="-128"/>
+                          <a:ea typeface="メイリオ" panose="020B0604030504040204" pitchFamily="50" charset="-128"/>
+                          <a:cs typeface="メイリオ"/>
+                        </a:rPr>
+                        <a:t>365,000</a:t>
+                      </a:r>
+                      <a:endParaRPr lang="ja-JP" altLang="en-US" sz="1300" dirty="0">
+                        <a:latin typeface="メイリオ"/>
+                        <a:ea typeface="メイリオ"/>
+                        <a:cs typeface="メイリオ"/>
+                      </a:endParaRPr>
+                    </a:p>
+                  </a:txBody>
+                  <a:tcPr marL="91440" marR="73152" marT="36576" marB="36576" anchor="ctr">
+                    <a:lnL w="9525" cap="flat" cmpd="sng" algn="ctr">
+                      <a:solidFill>
+                        <a:srgbClr val="BFBFBF"/>
+                      </a:solidFill>
+                      <a:prstDash val="solid"/>
+                      <a:round/>
+                      <a:headEnd type="none" w="med" len="med"/>
+                      <a:tailEnd type="none" w="med" len="med"/>
+                    </a:lnL>
+                    <a:lnR w="9525" cap="flat" cmpd="sng" algn="ctr">
+                      <a:solidFill>
+                        <a:srgbClr val="BFBFBF"/>
+                      </a:solidFill>
+                      <a:prstDash val="solid"/>
+                      <a:round/>
+                      <a:headEnd type="none" w="med" len="med"/>
+                      <a:tailEnd type="none" w="med" len="med"/>
+                    </a:lnR>
+                    <a:lnT w="9525" cap="flat" cmpd="sng" algn="ctr">
+                      <a:solidFill>
+                        <a:srgbClr val="BFBFBF"/>
+                      </a:solidFill>
+                      <a:prstDash val="solid"/>
+                      <a:round/>
+                      <a:headEnd type="none" w="med" len="med"/>
+                      <a:tailEnd type="none" w="med" len="med"/>
+                    </a:lnT>
+                    <a:lnB w="9525" cap="flat" cmpd="sng" algn="ctr">
+                      <a:solidFill>
+                        <a:srgbClr val="BFBFBF"/>
+                      </a:solidFill>
+                      <a:prstDash val="solid"/>
+                      <a:round/>
+                      <a:headEnd type="none" w="med" len="med"/>
+                      <a:tailEnd type="none" w="med" len="med"/>
+                    </a:lnB>
+                    <a:solidFill>
+                      <a:srgbClr val="FFFFFF"/>
+                    </a:solidFill>
+                  </a:tcPr>
+                </a:tc>
+                <a:tc>
+                  <a:txBody>
+                    <a:bodyPr/>
+                    <a:lstStyle/>
+                    <a:p>
+                      <a:pPr algn="ctr">
+                        <a:buNone/>
+                      </a:pPr>
+                      <a:r>
+                        <a:rPr lang="ja-JP" altLang="en-US" sz="1300" b="1" dirty="0">
+                          <a:solidFill>
+                            <a:srgbClr val="002060"/>
+                          </a:solidFill>
+                          <a:latin typeface="メイリオ" panose="020B0604030504040204" pitchFamily="50" charset="-128"/>
+                          <a:ea typeface="メイリオ" panose="020B0604030504040204" pitchFamily="50" charset="-128"/>
+                          <a:cs typeface="メイリオ"/>
+                        </a:rPr>
+                        <a:t>165,000</a:t>
+                      </a:r>
+                      <a:endParaRPr lang="ja-JP" altLang="en-US" sz="1300" dirty="0">
+                        <a:latin typeface="メイリオ"/>
+                        <a:ea typeface="メイリオ"/>
+                        <a:cs typeface="メイリオ"/>
+                      </a:endParaRPr>
+                    </a:p>
+                  </a:txBody>
+                  <a:tcPr marL="91440" marR="73152" marT="36576" marB="36576" anchor="ctr">
+                    <a:lnL w="9525" cap="flat" cmpd="sng" algn="ctr">
+                      <a:solidFill>
+                        <a:srgbClr val="BFBFBF"/>
+                      </a:solidFill>
+                      <a:prstDash val="solid"/>
+                      <a:round/>
+                      <a:headEnd type="none" w="med" len="med"/>
+                      <a:tailEnd type="none" w="med" len="med"/>
+                    </a:lnL>
+                    <a:lnR w="9525" cap="flat" cmpd="sng" algn="ctr">
+                      <a:solidFill>
+                        <a:srgbClr val="BFBFBF"/>
+                      </a:solidFill>
+                      <a:prstDash val="solid"/>
+                      <a:round/>
+                      <a:headEnd type="none" w="med" len="med"/>
+                      <a:tailEnd type="none" w="med" len="med"/>
+                    </a:lnR>
+                    <a:lnT w="9525" cap="flat" cmpd="sng" algn="ctr">
+                      <a:solidFill>
+                        <a:srgbClr val="BFBFBF"/>
+                      </a:solidFill>
+                      <a:prstDash val="solid"/>
+                      <a:round/>
+                      <a:headEnd type="none" w="med" len="med"/>
+                      <a:tailEnd type="none" w="med" len="med"/>
+                    </a:lnT>
+                    <a:lnB w="9525" cap="flat" cmpd="sng" algn="ctr">
+                      <a:solidFill>
+                        <a:srgbClr val="BFBFBF"/>
+                      </a:solidFill>
+                      <a:prstDash val="solid"/>
+                      <a:round/>
+                      <a:headEnd type="none" w="med" len="med"/>
+                      <a:tailEnd type="none" w="med" len="med"/>
+                    </a:lnB>
+                    <a:solidFill>
+                      <a:srgbClr val="FFFFFF"/>
+                    </a:solidFill>
+                  </a:tcPr>
+                </a:tc>
+                <a:tc>
+                  <a:txBody>
+                    <a:bodyPr/>
+                    <a:lstStyle/>
+                    <a:p>
+                      <a:pPr algn="ctr">
+                        <a:buNone/>
+                      </a:pPr>
+                      <a:r>
+                        <a:rPr lang="ja-JP" altLang="en-US" sz="1300" b="1" dirty="0">
+                          <a:solidFill>
+                            <a:srgbClr val="002060"/>
+                          </a:solidFill>
+                          <a:latin typeface="メイリオ" panose="020B0604030504040204" pitchFamily="50" charset="-128"/>
+                          <a:ea typeface="メイリオ" panose="020B0604030504040204" pitchFamily="50" charset="-128"/>
+                          <a:cs typeface="メイリオ"/>
+                        </a:rPr>
+                        <a:t>165,000</a:t>
+                      </a:r>
+                      <a:endParaRPr lang="ja-JP" altLang="en-US" sz="1300" dirty="0">
+                        <a:latin typeface="メイリオ"/>
+                        <a:ea typeface="メイリオ"/>
+                        <a:cs typeface="メイリオ"/>
+                      </a:endParaRPr>
+                    </a:p>
+                  </a:txBody>
+                  <a:tcPr marL="91440" marR="73152" marT="36576" marB="36576" anchor="ctr">
+                    <a:lnL w="9525" cap="flat" cmpd="sng" algn="ctr">
+                      <a:solidFill>
+                        <a:srgbClr val="BFBFBF"/>
+                      </a:solidFill>
+                      <a:prstDash val="solid"/>
+                      <a:round/>
+                      <a:headEnd type="none" w="med" len="med"/>
+                      <a:tailEnd type="none" w="med" len="med"/>
+                    </a:lnL>
+                    <a:lnR w="9525" cap="flat" cmpd="sng" algn="ctr">
+                      <a:solidFill>
+                        <a:srgbClr val="BFBFBF"/>
+                      </a:solidFill>
+                      <a:prstDash val="solid"/>
+                      <a:round/>
+                      <a:headEnd type="none" w="med" len="med"/>
+                      <a:tailEnd type="none" w="med" len="med"/>
+                    </a:lnR>
+                    <a:lnT w="9525" cap="flat" cmpd="sng" algn="ctr">
+                      <a:solidFill>
+                        <a:srgbClr val="BFBFBF"/>
+                      </a:solidFill>
+                      <a:prstDash val="solid"/>
+                      <a:round/>
+                      <a:headEnd type="none" w="med" len="med"/>
+                      <a:tailEnd type="none" w="med" len="med"/>
+                    </a:lnT>
+                    <a:lnB w="9525" cap="flat" cmpd="sng" algn="ctr">
+                      <a:solidFill>
+                        <a:srgbClr val="BFBFBF"/>
+                      </a:solidFill>
+                      <a:prstDash val="solid"/>
+                      <a:round/>
+                      <a:headEnd type="none" w="med" len="med"/>
+                      <a:tailEnd type="none" w="med" len="med"/>
+                    </a:lnB>
+                    <a:solidFill>
+                      <a:srgbClr val="FFFFFF"/>
+                    </a:solidFill>
+                  </a:tcPr>
+                </a:tc>
+                <a:tc>
+                  <a:txBody>
+                    <a:bodyPr/>
+                    <a:lstStyle/>
+                    <a:p>
+                      <a:pPr algn="ctr">
+                        <a:buNone/>
+                      </a:pPr>
+                      <a:r>
+                        <a:rPr lang="ja-JP" altLang="en-US" sz="1300" b="1" dirty="0">
+                          <a:solidFill>
+                            <a:srgbClr val="002060"/>
+                          </a:solidFill>
+                          <a:latin typeface="メイリオ" panose="020B0604030504040204" pitchFamily="50" charset="-128"/>
+                          <a:ea typeface="メイリオ" panose="020B0604030504040204" pitchFamily="50" charset="-128"/>
+                          <a:cs typeface="メイリオ"/>
+                        </a:rPr>
+                        <a:t>365,000</a:t>
+                      </a:r>
+                      <a:endParaRPr lang="ja-JP" altLang="en-US" sz="1300" dirty="0">
+                        <a:latin typeface="メイリオ"/>
+                        <a:ea typeface="メイリオ"/>
+                        <a:cs typeface="メイリオ"/>
+                      </a:endParaRPr>
+                    </a:p>
+                  </a:txBody>
+                  <a:tcPr marL="91440" marR="73152" marT="36576" marB="36576" anchor="ctr">
+                    <a:lnL w="9525" cap="flat" cmpd="sng" algn="ctr">
+                      <a:solidFill>
+                        <a:srgbClr val="BFBFBF"/>
+                      </a:solidFill>
+                      <a:prstDash val="solid"/>
+                      <a:round/>
+                      <a:headEnd type="none" w="med" len="med"/>
+                      <a:tailEnd type="none" w="med" len="med"/>
+                    </a:lnL>
+                    <a:lnR w="9525" cap="flat" cmpd="sng" algn="ctr">
+                      <a:solidFill>
+                        <a:srgbClr val="BFBFBF"/>
+                      </a:solidFill>
+                      <a:prstDash val="solid"/>
+                      <a:round/>
+                      <a:headEnd type="none" w="med" len="med"/>
+                      <a:tailEnd type="none" w="med" len="med"/>
+                    </a:lnR>
+                    <a:lnT w="9525" cap="flat" cmpd="sng" algn="ctr">
+                      <a:solidFill>
+                        <a:srgbClr val="BFBFBF"/>
+                      </a:solidFill>
+                      <a:prstDash val="solid"/>
+                      <a:round/>
+                      <a:headEnd type="none" w="med" len="med"/>
+                      <a:tailEnd type="none" w="med" len="med"/>
+                    </a:lnT>
+                    <a:lnB w="9525" cap="flat" cmpd="sng" algn="ctr">
+                      <a:solidFill>
+                        <a:srgbClr val="BFBFBF"/>
+                      </a:solidFill>
+                      <a:prstDash val="solid"/>
+                      <a:round/>
+                      <a:headEnd type="none" w="med" len="med"/>
+                      <a:tailEnd type="none" w="med" len="med"/>
+                    </a:lnB>
+                    <a:solidFill>
+                      <a:srgbClr val="FFFFFF"/>
+                    </a:solidFill>
+                  </a:tcPr>
+                </a:tc>
+                <a:tc>
+                  <a:txBody>
+                    <a:bodyPr/>
+                    <a:lstStyle/>
+                    <a:p>
+                      <a:pPr algn="ctr">
+                        <a:buNone/>
+                      </a:pPr>
+                      <a:r>
+                        <a:rPr lang="ja-JP" altLang="en-US" sz="1300" b="1" dirty="0">
+                          <a:solidFill>
+                            <a:srgbClr val="002060"/>
+                          </a:solidFill>
+                          <a:latin typeface="メイリオ" panose="020B0604030504040204" pitchFamily="50" charset="-128"/>
+                          <a:ea typeface="メイリオ" panose="020B0604030504040204" pitchFamily="50" charset="-128"/>
+                          <a:cs typeface="メイリオ"/>
+                        </a:rPr>
+                        <a:t>165,000</a:t>
+                      </a:r>
+                      <a:endParaRPr lang="ja-JP" altLang="en-US" sz="1300" dirty="0">
+                        <a:latin typeface="メイリオ"/>
+                        <a:ea typeface="メイリオ"/>
+                        <a:cs typeface="メイリオ"/>
+                      </a:endParaRPr>
+                    </a:p>
+                  </a:txBody>
+                  <a:tcPr marL="91440" marR="73152" marT="36576" marB="36576" anchor="ctr">
+                    <a:lnL w="9525" cap="flat" cmpd="sng" algn="ctr">
+                      <a:solidFill>
+                        <a:srgbClr val="BFBFBF"/>
+                      </a:solidFill>
+                      <a:prstDash val="solid"/>
+                      <a:round/>
+                      <a:headEnd type="none" w="med" len="med"/>
+                      <a:tailEnd type="none" w="med" len="med"/>
+                    </a:lnL>
+                    <a:lnR w="9525" cap="flat" cmpd="sng" algn="ctr">
+                      <a:solidFill>
+                        <a:srgbClr val="BFBFBF"/>
+                      </a:solidFill>
+                      <a:prstDash val="solid"/>
+                      <a:round/>
+                      <a:headEnd type="none" w="med" len="med"/>
+                      <a:tailEnd type="none" w="med" len="med"/>
+                    </a:lnR>
+                    <a:lnT w="9525" cap="flat" cmpd="sng" algn="ctr">
+                      <a:solidFill>
+                        <a:srgbClr val="BFBFBF"/>
+                      </a:solidFill>
+                      <a:prstDash val="solid"/>
+                      <a:round/>
+                      <a:headEnd type="none" w="med" len="med"/>
+                      <a:tailEnd type="none" w="med" len="med"/>
+                    </a:lnT>
+                    <a:lnB w="9525" cap="flat" cmpd="sng" algn="ctr">
+                      <a:solidFill>
+                        <a:srgbClr val="BFBFBF"/>
+                      </a:solidFill>
+                      <a:prstDash val="solid"/>
+                      <a:round/>
+                      <a:headEnd type="none" w="med" len="med"/>
+                      <a:tailEnd type="none" w="med" len="med"/>
+                    </a:lnB>
+                    <a:solidFill>
+                      <a:srgbClr val="FFFFFF"/>
+                    </a:solidFill>
+                  </a:tcPr>
+                </a:tc>
+                <a:tc>
+                  <a:txBody>
+                    <a:bodyPr/>
+                    <a:lstStyle/>
+                    <a:p>
+                      <a:pPr algn="ctr">
+                        <a:buNone/>
+                      </a:pPr>
+                      <a:r>
+                        <a:rPr lang="ja-JP" altLang="en-US" sz="1300" b="1" dirty="0">
+                          <a:solidFill>
+                            <a:srgbClr val="002060"/>
+                          </a:solidFill>
+                          <a:latin typeface="メイリオ" panose="020B0604030504040204" pitchFamily="50" charset="-128"/>
+                          <a:ea typeface="メイリオ" panose="020B0604030504040204" pitchFamily="50" charset="-128"/>
+                          <a:cs typeface="メイリオ"/>
+                        </a:rPr>
+                        <a:t>165,000</a:t>
+                      </a:r>
+                      <a:endParaRPr lang="ja-JP" altLang="en-US" sz="1300" dirty="0">
+                        <a:latin typeface="メイリオ"/>
+                        <a:ea typeface="メイリオ"/>
+                        <a:cs typeface="メイリオ"/>
+                      </a:endParaRPr>
+                    </a:p>
+                  </a:txBody>
+                  <a:tcPr marL="91440" marR="73152" marT="36576" marB="36576" anchor="ctr">
+                    <a:lnL w="9525" cap="flat" cmpd="sng" algn="ctr">
+                      <a:solidFill>
+                        <a:srgbClr val="BFBFBF"/>
+                      </a:solidFill>
+                      <a:prstDash val="solid"/>
+                      <a:round/>
+                      <a:headEnd type="none" w="med" len="med"/>
+                      <a:tailEnd type="none" w="med" len="med"/>
+                    </a:lnL>
+                    <a:lnR w="9525" cap="flat" cmpd="sng" algn="ctr">
+                      <a:solidFill>
+                        <a:srgbClr val="BFBFBF"/>
+                      </a:solidFill>
+                      <a:prstDash val="solid"/>
+                      <a:round/>
+                      <a:headEnd type="none" w="med" len="med"/>
+                      <a:tailEnd type="none" w="med" len="med"/>
+                    </a:lnR>
+                    <a:lnT w="9525" cap="flat" cmpd="sng" algn="ctr">
+                      <a:solidFill>
+                        <a:srgbClr val="BFBFBF"/>
+                      </a:solidFill>
+                      <a:prstDash val="solid"/>
+                      <a:round/>
+                      <a:headEnd type="none" w="med" len="med"/>
+                      <a:tailEnd type="none" w="med" len="med"/>
+                    </a:lnT>
+                    <a:lnB w="9525" cap="flat" cmpd="sng" algn="ctr">
+                      <a:solidFill>
+                        <a:srgbClr val="BFBFBF"/>
+                      </a:solidFill>
+                      <a:prstDash val="solid"/>
+                      <a:round/>
+                      <a:headEnd type="none" w="med" len="med"/>
+                      <a:tailEnd type="none" w="med" len="med"/>
+                    </a:lnB>
+                    <a:solidFill>
+                      <a:srgbClr val="FFFFFF"/>
+                    </a:solidFill>
+                  </a:tcPr>
+                </a:tc>
+              </a:tr>
+            </a:tbl>
+          </a:graphicData>
+        </a:graphic>
+      </p:graphicFrame>
       <p:sp>
         <p:nvSpPr>
-          <p:cNvPr id="5" name="差し込み 概算お見積り（SIM）の表"/>
+          <p:cNvPr id="6" name="注記"/>
           <p:cNvSpPr/>
           <p:nvPr/>
         </p:nvSpPr>
         <p:spPr>
           <a:xfrm>
-            <a:off x="502920" y="1600200"/>
-            <a:ext cx="8897112" cy="4480560"/>
+            <a:off x="502920" y="5440680"/>
+            <a:ext cx="8897112" cy="182880"/>
           </a:xfrm>
           <a:prstGeom prst="rect">
             <a:avLst/>
           </a:prstGeom>
           <a:noFill/>
-          <a:ln w="9525">
-            <a:solidFill>
-              <a:srgbClr val="7F7F7F"/>
-            </a:solidFill>
-            <a:prstDash val="dash"/>
+          <a:ln>
+            <a:noFill/>
           </a:ln>
         </p:spPr>
         <p:txBody>
-          <a:bodyPr wrap="square" lIns="73152" tIns="36576" rIns="73152" bIns="36576" rtlCol="0" anchor="ctr">
+          <a:bodyPr wrap="square" lIns="0" tIns="0" rIns="0" bIns="0" rtlCol="0" anchor="t">
             <a:noAutofit/>
           </a:bodyPr>
           <a:lstStyle/>
           <a:p>
-            <a:pPr algn="ctr">
+            <a:pPr algn="l">
               <a:buNone/>
             </a:pPr>
             <a:r>
-              <a:rPr lang="ja-JP" altLang="en-US" sz="1400" b="1" dirty="0">
+              <a:rPr lang="ja-JP" altLang="en-US" sz="900" b="0" dirty="0">
                 <a:solidFill>
                   <a:srgbClr val="7F7F7F"/>
                 </a:solidFill>
@@ -15727,7 +20783,101 @@
                 <a:ea typeface="メイリオ" panose="020B0604030504040204" pitchFamily="50" charset="-128"/>
                 <a:cs typeface="メイリオ"/>
               </a:rPr>
-              <a:t>概算お見積り（SIM）の表</a:t>
+              <a:t>※プラン②（平常期は月10万円で算出）。イベントは3か月おき（1・4か月目）と仮に置いて算出。広告費は含まない</a:t>
+            </a:r>
+            <a:endParaRPr lang="ja-JP" altLang="en-US" sz="1200" dirty="0">
+              <a:latin typeface="メイリオ"/>
+              <a:ea typeface="メイリオ"/>
+              <a:cs typeface="メイリオ"/>
+            </a:endParaRPr>
+          </a:p>
+        </p:txBody>
+      </p:sp>
+      <p:sp>
+        <p:nvSpPr>
+          <p:cNvPr id="7" name="注記"/>
+          <p:cNvSpPr/>
+          <p:nvPr/>
+        </p:nvSpPr>
+        <p:spPr>
+          <a:xfrm>
+            <a:off x="502920" y="5623560"/>
+            <a:ext cx="8897112" cy="182880"/>
+          </a:xfrm>
+          <a:prstGeom prst="rect">
+            <a:avLst/>
+          </a:prstGeom>
+          <a:noFill/>
+          <a:ln>
+            <a:noFill/>
+          </a:ln>
+        </p:spPr>
+        <p:txBody>
+          <a:bodyPr wrap="square" lIns="0" tIns="0" rIns="0" bIns="0" rtlCol="0" anchor="t">
+            <a:noAutofit/>
+          </a:bodyPr>
+          <a:lstStyle/>
+          <a:p>
+            <a:pPr algn="l">
+              <a:buNone/>
+            </a:pPr>
+            <a:r>
+              <a:rPr lang="ja-JP" altLang="en-US" sz="900" b="0" dirty="0">
+                <a:solidFill>
+                  <a:srgbClr val="7F7F7F"/>
+                </a:solidFill>
+                <a:latin typeface="メイリオ" panose="020B0604030504040204" pitchFamily="50" charset="-128"/>
+                <a:ea typeface="メイリオ" panose="020B0604030504040204" pitchFamily="50" charset="-128"/>
+                <a:cs typeface="メイリオ"/>
+              </a:rPr>
+              <a:t>※追える人数＝ブロックされずに届く友だちの数。友だちの入口はポップアップツール・サンクスLINE誘導</a:t>
+            </a:r>
+            <a:endParaRPr lang="ja-JP" altLang="en-US" sz="1200" dirty="0">
+              <a:latin typeface="メイリオ"/>
+              <a:ea typeface="メイリオ"/>
+              <a:cs typeface="メイリオ"/>
+            </a:endParaRPr>
+          </a:p>
+        </p:txBody>
+      </p:sp>
+      <p:sp>
+        <p:nvSpPr>
+          <p:cNvPr id="8" name="注記"/>
+          <p:cNvSpPr/>
+          <p:nvPr/>
+        </p:nvSpPr>
+        <p:spPr>
+          <a:xfrm>
+            <a:off x="502920" y="5806440"/>
+            <a:ext cx="8897112" cy="182880"/>
+          </a:xfrm>
+          <a:prstGeom prst="rect">
+            <a:avLst/>
+          </a:prstGeom>
+          <a:noFill/>
+          <a:ln>
+            <a:noFill/>
+          </a:ln>
+        </p:spPr>
+        <p:txBody>
+          <a:bodyPr wrap="square" lIns="0" tIns="0" rIns="0" bIns="0" rtlCol="0" anchor="t">
+            <a:noAutofit/>
+          </a:bodyPr>
+          <a:lstStyle/>
+          <a:p>
+            <a:pPr algn="l">
+              <a:buNone/>
+            </a:pPr>
+            <a:r>
+              <a:rPr lang="ja-JP" altLang="en-US" sz="900" b="0" dirty="0">
+                <a:solidFill>
+                  <a:srgbClr val="7F7F7F"/>
+                </a:solidFill>
+                <a:latin typeface="メイリオ" panose="020B0604030504040204" pitchFamily="50" charset="-128"/>
+                <a:ea typeface="メイリオ" panose="020B0604030504040204" pitchFamily="50" charset="-128"/>
+                <a:cs typeface="メイリオ"/>
+              </a:rPr>
+              <a:t>※ツール＝ポップアップツール・サンクスLINE誘導。LINE利用料＝LINE公式アカウントの開設・月額の利用料</a:t>
             </a:r>
             <a:endParaRPr lang="ja-JP" altLang="en-US" sz="1200" dirty="0">
               <a:latin typeface="メイリオ"/>

--- a/202610_株式会社すなおコンサルティング御中_LINE公式アカウント運用のご提案.pptx
+++ b/202610_株式会社すなおコンサルティング御中_LINE公式アカウント運用のご提案.pptx
@@ -15586,7 +15586,7 @@
                 <a:cs typeface="メイリオ"/>
                 <a:sym typeface="Meiryo"/>
               </a:rPr>
-              <a:t>概算お見積り：6か月の見込み</a:t>
+              <a:t>概算お見積り：6か月目に追える人数554人</a:t>
             </a:r>
           </a:p>
         </p:txBody>
@@ -15676,7 +15676,7 @@
                 <a:cs typeface="メイリオ"/>
                 <a:sym typeface="Meiryo"/>
               </a:rPr>
-              <a:t>イベントのたびに友だちが増え、6か月目に追える人数は554人</a:t>
+              <a:t>イベントに合わせた運用で、セミナー予約・サロン入会へつなげる</a:t>
             </a:r>
             <a:endParaRPr lang="en-US" altLang="ja-JP" sz="1600" b="1" dirty="0">
               <a:latin typeface="メイリオ" panose="020B0604030504040204" pitchFamily="50" charset="-128"/>
@@ -15687,5105 +15687,216 @@
           </a:p>
         </p:txBody>
       </p:sp>
-      <p:graphicFrame>
-        <p:nvGraphicFramePr>
-          <p:cNvPr id="5" name="概算お見積り 4"/>
-          <p:cNvGraphicFramePr>
-            <a:graphicFrameLocks noGrp="1"/>
-          </p:cNvGraphicFramePr>
-          <p:nvPr/>
-        </p:nvGraphicFramePr>
-        <p:xfrm>
-          <a:off x="502920" y="1554480"/>
-          <a:ext cx="8897112" cy="3712464"/>
-        </p:xfrm>
-        <a:graphic>
-          <a:graphicData uri="http://schemas.openxmlformats.org/drawingml/2006/table">
-            <a:tbl>
-              <a:tblPr/>
-              <a:tblGrid>
-                <a:gridCol w="2103120"/>
-                <a:gridCol w="914400"/>
-                <a:gridCol w="979932"/>
-                <a:gridCol w="979932"/>
-                <a:gridCol w="979932"/>
-                <a:gridCol w="979932"/>
-                <a:gridCol w="979932"/>
-                <a:gridCol w="979932"/>
-              </a:tblGrid>
-              <a:tr h="566928">
-                <a:tc>
-                  <a:txBody>
-                    <a:bodyPr/>
-                    <a:lstStyle/>
-                    <a:p>
-                      <a:pPr algn="ctr">
-                        <a:buNone/>
-                      </a:pPr>
-                      <a:endParaRPr lang="ja-JP" altLang="en-US" sz="1200" dirty="0">
-                        <a:latin typeface="メイリオ"/>
-                        <a:ea typeface="メイリオ"/>
-                        <a:cs typeface="メイリオ"/>
-                      </a:endParaRPr>
-                    </a:p>
-                  </a:txBody>
-                  <a:tcPr marL="73152" marR="73152" marT="27432" marB="27432" anchor="ctr">
-                    <a:lnL w="9525" cap="flat" cmpd="sng" algn="ctr">
-                      <a:solidFill>
-                        <a:srgbClr val="BFBFBF"/>
-                      </a:solidFill>
-                      <a:prstDash val="solid"/>
-                      <a:round/>
-                      <a:headEnd type="none" w="med" len="med"/>
-                      <a:tailEnd type="none" w="med" len="med"/>
-                    </a:lnL>
-                    <a:lnR w="9525" cap="flat" cmpd="sng" algn="ctr">
-                      <a:solidFill>
-                        <a:srgbClr val="BFBFBF"/>
-                      </a:solidFill>
-                      <a:prstDash val="solid"/>
-                      <a:round/>
-                      <a:headEnd type="none" w="med" len="med"/>
-                      <a:tailEnd type="none" w="med" len="med"/>
-                    </a:lnR>
-                    <a:lnT w="9525" cap="flat" cmpd="sng" algn="ctr">
-                      <a:solidFill>
-                        <a:srgbClr val="BFBFBF"/>
-                      </a:solidFill>
-                      <a:prstDash val="solid"/>
-                      <a:round/>
-                      <a:headEnd type="none" w="med" len="med"/>
-                      <a:tailEnd type="none" w="med" len="med"/>
-                    </a:lnT>
-                    <a:lnB w="9525" cap="flat" cmpd="sng" algn="ctr">
-                      <a:solidFill>
-                        <a:srgbClr val="BFBFBF"/>
-                      </a:solidFill>
-                      <a:prstDash val="solid"/>
-                      <a:round/>
-                      <a:headEnd type="none" w="med" len="med"/>
-                      <a:tailEnd type="none" w="med" len="med"/>
-                    </a:lnB>
-                    <a:solidFill>
-                      <a:srgbClr val="002060"/>
-                    </a:solidFill>
-                  </a:tcPr>
-                </a:tc>
-                <a:tc>
-                  <a:txBody>
-                    <a:bodyPr/>
-                    <a:lstStyle/>
-                    <a:p>
-                      <a:pPr algn="ctr">
-                        <a:buNone/>
-                      </a:pPr>
-                      <a:r>
-                        <a:rPr lang="ja-JP" altLang="en-US" sz="1200" b="1" dirty="0">
-                          <a:solidFill>
-                            <a:srgbClr val="FFFFFF"/>
-                          </a:solidFill>
-                          <a:latin typeface="メイリオ" panose="020B0604030504040204" pitchFamily="50" charset="-128"/>
-                          <a:ea typeface="メイリオ" panose="020B0604030504040204" pitchFamily="50" charset="-128"/>
-                          <a:cs typeface="メイリオ"/>
-                        </a:rPr>
-                        <a:t>初期</a:t>
-                      </a:r>
-                      <a:endParaRPr lang="ja-JP" altLang="en-US" sz="1200" dirty="0">
-                        <a:latin typeface="メイリオ"/>
-                        <a:ea typeface="メイリオ"/>
-                        <a:cs typeface="メイリオ"/>
-                      </a:endParaRPr>
-                    </a:p>
-                  </a:txBody>
-                  <a:tcPr marL="73152" marR="73152" marT="27432" marB="27432" anchor="ctr">
-                    <a:lnL w="9525" cap="flat" cmpd="sng" algn="ctr">
-                      <a:solidFill>
-                        <a:srgbClr val="BFBFBF"/>
-                      </a:solidFill>
-                      <a:prstDash val="solid"/>
-                      <a:round/>
-                      <a:headEnd type="none" w="med" len="med"/>
-                      <a:tailEnd type="none" w="med" len="med"/>
-                    </a:lnL>
-                    <a:lnR w="9525" cap="flat" cmpd="sng" algn="ctr">
-                      <a:solidFill>
-                        <a:srgbClr val="BFBFBF"/>
-                      </a:solidFill>
-                      <a:prstDash val="solid"/>
-                      <a:round/>
-                      <a:headEnd type="none" w="med" len="med"/>
-                      <a:tailEnd type="none" w="med" len="med"/>
-                    </a:lnR>
-                    <a:lnT w="9525" cap="flat" cmpd="sng" algn="ctr">
-                      <a:solidFill>
-                        <a:srgbClr val="BFBFBF"/>
-                      </a:solidFill>
-                      <a:prstDash val="solid"/>
-                      <a:round/>
-                      <a:headEnd type="none" w="med" len="med"/>
-                      <a:tailEnd type="none" w="med" len="med"/>
-                    </a:lnT>
-                    <a:lnB w="9525" cap="flat" cmpd="sng" algn="ctr">
-                      <a:solidFill>
-                        <a:srgbClr val="BFBFBF"/>
-                      </a:solidFill>
-                      <a:prstDash val="solid"/>
-                      <a:round/>
-                      <a:headEnd type="none" w="med" len="med"/>
-                      <a:tailEnd type="none" w="med" len="med"/>
-                    </a:lnB>
-                    <a:solidFill>
-                      <a:srgbClr val="002060"/>
-                    </a:solidFill>
-                  </a:tcPr>
-                </a:tc>
-                <a:tc>
-                  <a:txBody>
-                    <a:bodyPr/>
-                    <a:lstStyle/>
-                    <a:p>
-                      <a:pPr algn="ctr">
-                        <a:buNone/>
-                      </a:pPr>
-                      <a:r>
-                        <a:rPr lang="ja-JP" altLang="en-US" sz="1200" b="1" dirty="0">
-                          <a:solidFill>
-                            <a:srgbClr val="FFFFFF"/>
-                          </a:solidFill>
-                          <a:latin typeface="メイリオ" panose="020B0604030504040204" pitchFamily="50" charset="-128"/>
-                          <a:ea typeface="メイリオ" panose="020B0604030504040204" pitchFamily="50" charset="-128"/>
-                          <a:cs typeface="メイリオ"/>
-                        </a:rPr>
-                        <a:t>1か月目</a:t>
-                      </a:r>
-                      <a:br>
-                        <a:rPr lang="ja-JP" altLang="en-US" sz="1200" b="1" dirty="0">
-                          <a:solidFill>
-                            <a:srgbClr val="FFFFFF"/>
-                          </a:solidFill>
-                          <a:latin typeface="メイリオ" panose="020B0604030504040204" pitchFamily="50" charset="-128"/>
-                          <a:ea typeface="メイリオ" panose="020B0604030504040204" pitchFamily="50" charset="-128"/>
-                          <a:cs typeface="メイリオ"/>
-                        </a:rPr>
-                      </a:br>
-                      <a:r>
-                        <a:rPr lang="ja-JP" altLang="en-US" sz="1200" b="1" dirty="0">
-                          <a:solidFill>
-                            <a:srgbClr val="FFFFFF"/>
-                          </a:solidFill>
-                          <a:latin typeface="メイリオ" panose="020B0604030504040204" pitchFamily="50" charset="-128"/>
-                          <a:ea typeface="メイリオ" panose="020B0604030504040204" pitchFamily="50" charset="-128"/>
-                          <a:cs typeface="メイリオ"/>
-                        </a:rPr>
-                        <a:t>イベント期</a:t>
-                      </a:r>
-                      <a:endParaRPr lang="ja-JP" altLang="en-US" sz="1200" dirty="0">
-                        <a:latin typeface="メイリオ"/>
-                        <a:ea typeface="メイリオ"/>
-                        <a:cs typeface="メイリオ"/>
-                      </a:endParaRPr>
-                    </a:p>
-                  </a:txBody>
-                  <a:tcPr marL="73152" marR="73152" marT="27432" marB="27432" anchor="ctr">
-                    <a:lnL w="9525" cap="flat" cmpd="sng" algn="ctr">
-                      <a:solidFill>
-                        <a:srgbClr val="BFBFBF"/>
-                      </a:solidFill>
-                      <a:prstDash val="solid"/>
-                      <a:round/>
-                      <a:headEnd type="none" w="med" len="med"/>
-                      <a:tailEnd type="none" w="med" len="med"/>
-                    </a:lnL>
-                    <a:lnR w="9525" cap="flat" cmpd="sng" algn="ctr">
-                      <a:solidFill>
-                        <a:srgbClr val="BFBFBF"/>
-                      </a:solidFill>
-                      <a:prstDash val="solid"/>
-                      <a:round/>
-                      <a:headEnd type="none" w="med" len="med"/>
-                      <a:tailEnd type="none" w="med" len="med"/>
-                    </a:lnR>
-                    <a:lnT w="9525" cap="flat" cmpd="sng" algn="ctr">
-                      <a:solidFill>
-                        <a:srgbClr val="BFBFBF"/>
-                      </a:solidFill>
-                      <a:prstDash val="solid"/>
-                      <a:round/>
-                      <a:headEnd type="none" w="med" len="med"/>
-                      <a:tailEnd type="none" w="med" len="med"/>
-                    </a:lnT>
-                    <a:lnB w="9525" cap="flat" cmpd="sng" algn="ctr">
-                      <a:solidFill>
-                        <a:srgbClr val="BFBFBF"/>
-                      </a:solidFill>
-                      <a:prstDash val="solid"/>
-                      <a:round/>
-                      <a:headEnd type="none" w="med" len="med"/>
-                      <a:tailEnd type="none" w="med" len="med"/>
-                    </a:lnB>
-                    <a:solidFill>
-                      <a:srgbClr val="002060"/>
-                    </a:solidFill>
-                  </a:tcPr>
-                </a:tc>
-                <a:tc>
-                  <a:txBody>
-                    <a:bodyPr/>
-                    <a:lstStyle/>
-                    <a:p>
-                      <a:pPr algn="ctr">
-                        <a:buNone/>
-                      </a:pPr>
-                      <a:r>
-                        <a:rPr lang="ja-JP" altLang="en-US" sz="1200" b="1" dirty="0">
-                          <a:solidFill>
-                            <a:srgbClr val="FFFFFF"/>
-                          </a:solidFill>
-                          <a:latin typeface="メイリオ" panose="020B0604030504040204" pitchFamily="50" charset="-128"/>
-                          <a:ea typeface="メイリオ" panose="020B0604030504040204" pitchFamily="50" charset="-128"/>
-                          <a:cs typeface="メイリオ"/>
-                        </a:rPr>
-                        <a:t>2か月目</a:t>
-                      </a:r>
-                      <a:br>
-                        <a:rPr lang="ja-JP" altLang="en-US" sz="1200" b="1" dirty="0">
-                          <a:solidFill>
-                            <a:srgbClr val="FFFFFF"/>
-                          </a:solidFill>
-                          <a:latin typeface="メイリオ" panose="020B0604030504040204" pitchFamily="50" charset="-128"/>
-                          <a:ea typeface="メイリオ" panose="020B0604030504040204" pitchFamily="50" charset="-128"/>
-                          <a:cs typeface="メイリオ"/>
-                        </a:rPr>
-                      </a:br>
-                      <a:r>
-                        <a:rPr lang="ja-JP" altLang="en-US" sz="1200" b="1" dirty="0">
-                          <a:solidFill>
-                            <a:srgbClr val="FFFFFF"/>
-                          </a:solidFill>
-                          <a:latin typeface="メイリオ" panose="020B0604030504040204" pitchFamily="50" charset="-128"/>
-                          <a:ea typeface="メイリオ" panose="020B0604030504040204" pitchFamily="50" charset="-128"/>
-                          <a:cs typeface="メイリオ"/>
-                        </a:rPr>
-                        <a:t>平常期</a:t>
-                      </a:r>
-                      <a:endParaRPr lang="ja-JP" altLang="en-US" sz="1200" dirty="0">
-                        <a:latin typeface="メイリオ"/>
-                        <a:ea typeface="メイリオ"/>
-                        <a:cs typeface="メイリオ"/>
-                      </a:endParaRPr>
-                    </a:p>
-                  </a:txBody>
-                  <a:tcPr marL="73152" marR="73152" marT="27432" marB="27432" anchor="ctr">
-                    <a:lnL w="9525" cap="flat" cmpd="sng" algn="ctr">
-                      <a:solidFill>
-                        <a:srgbClr val="BFBFBF"/>
-                      </a:solidFill>
-                      <a:prstDash val="solid"/>
-                      <a:round/>
-                      <a:headEnd type="none" w="med" len="med"/>
-                      <a:tailEnd type="none" w="med" len="med"/>
-                    </a:lnL>
-                    <a:lnR w="9525" cap="flat" cmpd="sng" algn="ctr">
-                      <a:solidFill>
-                        <a:srgbClr val="BFBFBF"/>
-                      </a:solidFill>
-                      <a:prstDash val="solid"/>
-                      <a:round/>
-                      <a:headEnd type="none" w="med" len="med"/>
-                      <a:tailEnd type="none" w="med" len="med"/>
-                    </a:lnR>
-                    <a:lnT w="9525" cap="flat" cmpd="sng" algn="ctr">
-                      <a:solidFill>
-                        <a:srgbClr val="BFBFBF"/>
-                      </a:solidFill>
-                      <a:prstDash val="solid"/>
-                      <a:round/>
-                      <a:headEnd type="none" w="med" len="med"/>
-                      <a:tailEnd type="none" w="med" len="med"/>
-                    </a:lnT>
-                    <a:lnB w="9525" cap="flat" cmpd="sng" algn="ctr">
-                      <a:solidFill>
-                        <a:srgbClr val="BFBFBF"/>
-                      </a:solidFill>
-                      <a:prstDash val="solid"/>
-                      <a:round/>
-                      <a:headEnd type="none" w="med" len="med"/>
-                      <a:tailEnd type="none" w="med" len="med"/>
-                    </a:lnB>
-                    <a:solidFill>
-                      <a:srgbClr val="002060"/>
-                    </a:solidFill>
-                  </a:tcPr>
-                </a:tc>
-                <a:tc>
-                  <a:txBody>
-                    <a:bodyPr/>
-                    <a:lstStyle/>
-                    <a:p>
-                      <a:pPr algn="ctr">
-                        <a:buNone/>
-                      </a:pPr>
-                      <a:r>
-                        <a:rPr lang="ja-JP" altLang="en-US" sz="1200" b="1" dirty="0">
-                          <a:solidFill>
-                            <a:srgbClr val="FFFFFF"/>
-                          </a:solidFill>
-                          <a:latin typeface="メイリオ" panose="020B0604030504040204" pitchFamily="50" charset="-128"/>
-                          <a:ea typeface="メイリオ" panose="020B0604030504040204" pitchFamily="50" charset="-128"/>
-                          <a:cs typeface="メイリオ"/>
-                        </a:rPr>
-                        <a:t>3か月目</a:t>
-                      </a:r>
-                      <a:br>
-                        <a:rPr lang="ja-JP" altLang="en-US" sz="1200" b="1" dirty="0">
-                          <a:solidFill>
-                            <a:srgbClr val="FFFFFF"/>
-                          </a:solidFill>
-                          <a:latin typeface="メイリオ" panose="020B0604030504040204" pitchFamily="50" charset="-128"/>
-                          <a:ea typeface="メイリオ" panose="020B0604030504040204" pitchFamily="50" charset="-128"/>
-                          <a:cs typeface="メイリオ"/>
-                        </a:rPr>
-                      </a:br>
-                      <a:r>
-                        <a:rPr lang="ja-JP" altLang="en-US" sz="1200" b="1" dirty="0">
-                          <a:solidFill>
-                            <a:srgbClr val="FFFFFF"/>
-                          </a:solidFill>
-                          <a:latin typeface="メイリオ" panose="020B0604030504040204" pitchFamily="50" charset="-128"/>
-                          <a:ea typeface="メイリオ" panose="020B0604030504040204" pitchFamily="50" charset="-128"/>
-                          <a:cs typeface="メイリオ"/>
-                        </a:rPr>
-                        <a:t>平常期</a:t>
-                      </a:r>
-                      <a:endParaRPr lang="ja-JP" altLang="en-US" sz="1200" dirty="0">
-                        <a:latin typeface="メイリオ"/>
-                        <a:ea typeface="メイリオ"/>
-                        <a:cs typeface="メイリオ"/>
-                      </a:endParaRPr>
-                    </a:p>
-                  </a:txBody>
-                  <a:tcPr marL="73152" marR="73152" marT="27432" marB="27432" anchor="ctr">
-                    <a:lnL w="9525" cap="flat" cmpd="sng" algn="ctr">
-                      <a:solidFill>
-                        <a:srgbClr val="BFBFBF"/>
-                      </a:solidFill>
-                      <a:prstDash val="solid"/>
-                      <a:round/>
-                      <a:headEnd type="none" w="med" len="med"/>
-                      <a:tailEnd type="none" w="med" len="med"/>
-                    </a:lnL>
-                    <a:lnR w="9525" cap="flat" cmpd="sng" algn="ctr">
-                      <a:solidFill>
-                        <a:srgbClr val="BFBFBF"/>
-                      </a:solidFill>
-                      <a:prstDash val="solid"/>
-                      <a:round/>
-                      <a:headEnd type="none" w="med" len="med"/>
-                      <a:tailEnd type="none" w="med" len="med"/>
-                    </a:lnR>
-                    <a:lnT w="9525" cap="flat" cmpd="sng" algn="ctr">
-                      <a:solidFill>
-                        <a:srgbClr val="BFBFBF"/>
-                      </a:solidFill>
-                      <a:prstDash val="solid"/>
-                      <a:round/>
-                      <a:headEnd type="none" w="med" len="med"/>
-                      <a:tailEnd type="none" w="med" len="med"/>
-                    </a:lnT>
-                    <a:lnB w="9525" cap="flat" cmpd="sng" algn="ctr">
-                      <a:solidFill>
-                        <a:srgbClr val="BFBFBF"/>
-                      </a:solidFill>
-                      <a:prstDash val="solid"/>
-                      <a:round/>
-                      <a:headEnd type="none" w="med" len="med"/>
-                      <a:tailEnd type="none" w="med" len="med"/>
-                    </a:lnB>
-                    <a:solidFill>
-                      <a:srgbClr val="002060"/>
-                    </a:solidFill>
-                  </a:tcPr>
-                </a:tc>
-                <a:tc>
-                  <a:txBody>
-                    <a:bodyPr/>
-                    <a:lstStyle/>
-                    <a:p>
-                      <a:pPr algn="ctr">
-                        <a:buNone/>
-                      </a:pPr>
-                      <a:r>
-                        <a:rPr lang="ja-JP" altLang="en-US" sz="1200" b="1" dirty="0">
-                          <a:solidFill>
-                            <a:srgbClr val="FFFFFF"/>
-                          </a:solidFill>
-                          <a:latin typeface="メイリオ" panose="020B0604030504040204" pitchFamily="50" charset="-128"/>
-                          <a:ea typeface="メイリオ" panose="020B0604030504040204" pitchFamily="50" charset="-128"/>
-                          <a:cs typeface="メイリオ"/>
-                        </a:rPr>
-                        <a:t>4か月目</a:t>
-                      </a:r>
-                      <a:br>
-                        <a:rPr lang="ja-JP" altLang="en-US" sz="1200" b="1" dirty="0">
-                          <a:solidFill>
-                            <a:srgbClr val="FFFFFF"/>
-                          </a:solidFill>
-                          <a:latin typeface="メイリオ" panose="020B0604030504040204" pitchFamily="50" charset="-128"/>
-                          <a:ea typeface="メイリオ" panose="020B0604030504040204" pitchFamily="50" charset="-128"/>
-                          <a:cs typeface="メイリオ"/>
-                        </a:rPr>
-                      </a:br>
-                      <a:r>
-                        <a:rPr lang="ja-JP" altLang="en-US" sz="1200" b="1" dirty="0">
-                          <a:solidFill>
-                            <a:srgbClr val="FFFFFF"/>
-                          </a:solidFill>
-                          <a:latin typeface="メイリオ" panose="020B0604030504040204" pitchFamily="50" charset="-128"/>
-                          <a:ea typeface="メイリオ" panose="020B0604030504040204" pitchFamily="50" charset="-128"/>
-                          <a:cs typeface="メイリオ"/>
-                        </a:rPr>
-                        <a:t>イベント期</a:t>
-                      </a:r>
-                      <a:endParaRPr lang="ja-JP" altLang="en-US" sz="1200" dirty="0">
-                        <a:latin typeface="メイリオ"/>
-                        <a:ea typeface="メイリオ"/>
-                        <a:cs typeface="メイリオ"/>
-                      </a:endParaRPr>
-                    </a:p>
-                  </a:txBody>
-                  <a:tcPr marL="73152" marR="73152" marT="27432" marB="27432" anchor="ctr">
-                    <a:lnL w="9525" cap="flat" cmpd="sng" algn="ctr">
-                      <a:solidFill>
-                        <a:srgbClr val="BFBFBF"/>
-                      </a:solidFill>
-                      <a:prstDash val="solid"/>
-                      <a:round/>
-                      <a:headEnd type="none" w="med" len="med"/>
-                      <a:tailEnd type="none" w="med" len="med"/>
-                    </a:lnL>
-                    <a:lnR w="9525" cap="flat" cmpd="sng" algn="ctr">
-                      <a:solidFill>
-                        <a:srgbClr val="BFBFBF"/>
-                      </a:solidFill>
-                      <a:prstDash val="solid"/>
-                      <a:round/>
-                      <a:headEnd type="none" w="med" len="med"/>
-                      <a:tailEnd type="none" w="med" len="med"/>
-                    </a:lnR>
-                    <a:lnT w="9525" cap="flat" cmpd="sng" algn="ctr">
-                      <a:solidFill>
-                        <a:srgbClr val="BFBFBF"/>
-                      </a:solidFill>
-                      <a:prstDash val="solid"/>
-                      <a:round/>
-                      <a:headEnd type="none" w="med" len="med"/>
-                      <a:tailEnd type="none" w="med" len="med"/>
-                    </a:lnT>
-                    <a:lnB w="9525" cap="flat" cmpd="sng" algn="ctr">
-                      <a:solidFill>
-                        <a:srgbClr val="BFBFBF"/>
-                      </a:solidFill>
-                      <a:prstDash val="solid"/>
-                      <a:round/>
-                      <a:headEnd type="none" w="med" len="med"/>
-                      <a:tailEnd type="none" w="med" len="med"/>
-                    </a:lnB>
-                    <a:solidFill>
-                      <a:srgbClr val="002060"/>
-                    </a:solidFill>
-                  </a:tcPr>
-                </a:tc>
-                <a:tc>
-                  <a:txBody>
-                    <a:bodyPr/>
-                    <a:lstStyle/>
-                    <a:p>
-                      <a:pPr algn="ctr">
-                        <a:buNone/>
-                      </a:pPr>
-                      <a:r>
-                        <a:rPr lang="ja-JP" altLang="en-US" sz="1200" b="1" dirty="0">
-                          <a:solidFill>
-                            <a:srgbClr val="FFFFFF"/>
-                          </a:solidFill>
-                          <a:latin typeface="メイリオ" panose="020B0604030504040204" pitchFamily="50" charset="-128"/>
-                          <a:ea typeface="メイリオ" panose="020B0604030504040204" pitchFamily="50" charset="-128"/>
-                          <a:cs typeface="メイリオ"/>
-                        </a:rPr>
-                        <a:t>5か月目</a:t>
-                      </a:r>
-                      <a:br>
-                        <a:rPr lang="ja-JP" altLang="en-US" sz="1200" b="1" dirty="0">
-                          <a:solidFill>
-                            <a:srgbClr val="FFFFFF"/>
-                          </a:solidFill>
-                          <a:latin typeface="メイリオ" panose="020B0604030504040204" pitchFamily="50" charset="-128"/>
-                          <a:ea typeface="メイリオ" panose="020B0604030504040204" pitchFamily="50" charset="-128"/>
-                          <a:cs typeface="メイリオ"/>
-                        </a:rPr>
-                      </a:br>
-                      <a:r>
-                        <a:rPr lang="ja-JP" altLang="en-US" sz="1200" b="1" dirty="0">
-                          <a:solidFill>
-                            <a:srgbClr val="FFFFFF"/>
-                          </a:solidFill>
-                          <a:latin typeface="メイリオ" panose="020B0604030504040204" pitchFamily="50" charset="-128"/>
-                          <a:ea typeface="メイリオ" panose="020B0604030504040204" pitchFamily="50" charset="-128"/>
-                          <a:cs typeface="メイリオ"/>
-                        </a:rPr>
-                        <a:t>平常期</a:t>
-                      </a:r>
-                      <a:endParaRPr lang="ja-JP" altLang="en-US" sz="1200" dirty="0">
-                        <a:latin typeface="メイリオ"/>
-                        <a:ea typeface="メイリオ"/>
-                        <a:cs typeface="メイリオ"/>
-                      </a:endParaRPr>
-                    </a:p>
-                  </a:txBody>
-                  <a:tcPr marL="73152" marR="73152" marT="27432" marB="27432" anchor="ctr">
-                    <a:lnL w="9525" cap="flat" cmpd="sng" algn="ctr">
-                      <a:solidFill>
-                        <a:srgbClr val="BFBFBF"/>
-                      </a:solidFill>
-                      <a:prstDash val="solid"/>
-                      <a:round/>
-                      <a:headEnd type="none" w="med" len="med"/>
-                      <a:tailEnd type="none" w="med" len="med"/>
-                    </a:lnL>
-                    <a:lnR w="9525" cap="flat" cmpd="sng" algn="ctr">
-                      <a:solidFill>
-                        <a:srgbClr val="BFBFBF"/>
-                      </a:solidFill>
-                      <a:prstDash val="solid"/>
-                      <a:round/>
-                      <a:headEnd type="none" w="med" len="med"/>
-                      <a:tailEnd type="none" w="med" len="med"/>
-                    </a:lnR>
-                    <a:lnT w="9525" cap="flat" cmpd="sng" algn="ctr">
-                      <a:solidFill>
-                        <a:srgbClr val="BFBFBF"/>
-                      </a:solidFill>
-                      <a:prstDash val="solid"/>
-                      <a:round/>
-                      <a:headEnd type="none" w="med" len="med"/>
-                      <a:tailEnd type="none" w="med" len="med"/>
-                    </a:lnT>
-                    <a:lnB w="9525" cap="flat" cmpd="sng" algn="ctr">
-                      <a:solidFill>
-                        <a:srgbClr val="BFBFBF"/>
-                      </a:solidFill>
-                      <a:prstDash val="solid"/>
-                      <a:round/>
-                      <a:headEnd type="none" w="med" len="med"/>
-                      <a:tailEnd type="none" w="med" len="med"/>
-                    </a:lnB>
-                    <a:solidFill>
-                      <a:srgbClr val="002060"/>
-                    </a:solidFill>
-                  </a:tcPr>
-                </a:tc>
-                <a:tc>
-                  <a:txBody>
-                    <a:bodyPr/>
-                    <a:lstStyle/>
-                    <a:p>
-                      <a:pPr algn="ctr">
-                        <a:buNone/>
-                      </a:pPr>
-                      <a:r>
-                        <a:rPr lang="ja-JP" altLang="en-US" sz="1200" b="1" dirty="0">
-                          <a:solidFill>
-                            <a:srgbClr val="FFFFFF"/>
-                          </a:solidFill>
-                          <a:latin typeface="メイリオ" panose="020B0604030504040204" pitchFamily="50" charset="-128"/>
-                          <a:ea typeface="メイリオ" panose="020B0604030504040204" pitchFamily="50" charset="-128"/>
-                          <a:cs typeface="メイリオ"/>
-                        </a:rPr>
-                        <a:t>6か月目</a:t>
-                      </a:r>
-                      <a:br>
-                        <a:rPr lang="ja-JP" altLang="en-US" sz="1200" b="1" dirty="0">
-                          <a:solidFill>
-                            <a:srgbClr val="FFFFFF"/>
-                          </a:solidFill>
-                          <a:latin typeface="メイリオ" panose="020B0604030504040204" pitchFamily="50" charset="-128"/>
-                          <a:ea typeface="メイリオ" panose="020B0604030504040204" pitchFamily="50" charset="-128"/>
-                          <a:cs typeface="メイリオ"/>
-                        </a:rPr>
-                      </a:br>
-                      <a:r>
-                        <a:rPr lang="ja-JP" altLang="en-US" sz="1200" b="1" dirty="0">
-                          <a:solidFill>
-                            <a:srgbClr val="FFFFFF"/>
-                          </a:solidFill>
-                          <a:latin typeface="メイリオ" panose="020B0604030504040204" pitchFamily="50" charset="-128"/>
-                          <a:ea typeface="メイリオ" panose="020B0604030504040204" pitchFamily="50" charset="-128"/>
-                          <a:cs typeface="メイリオ"/>
-                        </a:rPr>
-                        <a:t>平常期</a:t>
-                      </a:r>
-                      <a:endParaRPr lang="ja-JP" altLang="en-US" sz="1200" dirty="0">
-                        <a:latin typeface="メイリオ"/>
-                        <a:ea typeface="メイリオ"/>
-                        <a:cs typeface="メイリオ"/>
-                      </a:endParaRPr>
-                    </a:p>
-                  </a:txBody>
-                  <a:tcPr marL="73152" marR="73152" marT="27432" marB="27432" anchor="ctr">
-                    <a:lnL w="9525" cap="flat" cmpd="sng" algn="ctr">
-                      <a:solidFill>
-                        <a:srgbClr val="BFBFBF"/>
-                      </a:solidFill>
-                      <a:prstDash val="solid"/>
-                      <a:round/>
-                      <a:headEnd type="none" w="med" len="med"/>
-                      <a:tailEnd type="none" w="med" len="med"/>
-                    </a:lnL>
-                    <a:lnR w="9525" cap="flat" cmpd="sng" algn="ctr">
-                      <a:solidFill>
-                        <a:srgbClr val="BFBFBF"/>
-                      </a:solidFill>
-                      <a:prstDash val="solid"/>
-                      <a:round/>
-                      <a:headEnd type="none" w="med" len="med"/>
-                      <a:tailEnd type="none" w="med" len="med"/>
-                    </a:lnR>
-                    <a:lnT w="9525" cap="flat" cmpd="sng" algn="ctr">
-                      <a:solidFill>
-                        <a:srgbClr val="BFBFBF"/>
-                      </a:solidFill>
-                      <a:prstDash val="solid"/>
-                      <a:round/>
-                      <a:headEnd type="none" w="med" len="med"/>
-                      <a:tailEnd type="none" w="med" len="med"/>
-                    </a:lnT>
-                    <a:lnB w="9525" cap="flat" cmpd="sng" algn="ctr">
-                      <a:solidFill>
-                        <a:srgbClr val="BFBFBF"/>
-                      </a:solidFill>
-                      <a:prstDash val="solid"/>
-                      <a:round/>
-                      <a:headEnd type="none" w="med" len="med"/>
-                      <a:tailEnd type="none" w="med" len="med"/>
-                    </a:lnB>
-                    <a:solidFill>
-                      <a:srgbClr val="002060"/>
-                    </a:solidFill>
-                  </a:tcPr>
-                </a:tc>
-              </a:tr>
-              <a:tr h="393192">
-                <a:tc>
-                  <a:txBody>
-                    <a:bodyPr/>
-                    <a:lstStyle/>
-                    <a:p>
-                      <a:pPr algn="ctr">
-                        <a:buNone/>
-                      </a:pPr>
-                      <a:r>
-                        <a:rPr lang="ja-JP" altLang="en-US" sz="1200" b="1" dirty="0">
-                          <a:solidFill>
-                            <a:srgbClr val="002060"/>
-                          </a:solidFill>
-                          <a:latin typeface="メイリオ" panose="020B0604030504040204" pitchFamily="50" charset="-128"/>
-                          <a:ea typeface="メイリオ" panose="020B0604030504040204" pitchFamily="50" charset="-128"/>
-                          <a:cs typeface="メイリオ"/>
-                        </a:rPr>
-                        <a:t>友だちの増加（人）</a:t>
-                      </a:r>
-                      <a:endParaRPr lang="ja-JP" altLang="en-US" sz="1200" dirty="0">
-                        <a:latin typeface="メイリオ"/>
-                        <a:ea typeface="メイリオ"/>
-                        <a:cs typeface="メイリオ"/>
-                      </a:endParaRPr>
-                    </a:p>
-                  </a:txBody>
-                  <a:tcPr marL="91440" marR="73152" marT="36576" marB="36576" anchor="ctr">
-                    <a:lnL w="9525" cap="flat" cmpd="sng" algn="ctr">
-                      <a:solidFill>
-                        <a:srgbClr val="BFBFBF"/>
-                      </a:solidFill>
-                      <a:prstDash val="solid"/>
-                      <a:round/>
-                      <a:headEnd type="none" w="med" len="med"/>
-                      <a:tailEnd type="none" w="med" len="med"/>
-                    </a:lnL>
-                    <a:lnR w="9525" cap="flat" cmpd="sng" algn="ctr">
-                      <a:solidFill>
-                        <a:srgbClr val="BFBFBF"/>
-                      </a:solidFill>
-                      <a:prstDash val="solid"/>
-                      <a:round/>
-                      <a:headEnd type="none" w="med" len="med"/>
-                      <a:tailEnd type="none" w="med" len="med"/>
-                    </a:lnR>
-                    <a:lnT w="9525" cap="flat" cmpd="sng" algn="ctr">
-                      <a:solidFill>
-                        <a:srgbClr val="BFBFBF"/>
-                      </a:solidFill>
-                      <a:prstDash val="solid"/>
-                      <a:round/>
-                      <a:headEnd type="none" w="med" len="med"/>
-                      <a:tailEnd type="none" w="med" len="med"/>
-                    </a:lnT>
-                    <a:lnB w="9525" cap="flat" cmpd="sng" algn="ctr">
-                      <a:solidFill>
-                        <a:srgbClr val="BFBFBF"/>
-                      </a:solidFill>
-                      <a:prstDash val="solid"/>
-                      <a:round/>
-                      <a:headEnd type="none" w="med" len="med"/>
-                      <a:tailEnd type="none" w="med" len="med"/>
-                    </a:lnB>
-                    <a:solidFill>
-                      <a:srgbClr val="DCE6F2"/>
-                    </a:solidFill>
-                  </a:tcPr>
-                </a:tc>
-                <a:tc>
-                  <a:txBody>
-                    <a:bodyPr/>
-                    <a:lstStyle/>
-                    <a:p>
-                      <a:pPr algn="ctr">
-                        <a:buNone/>
-                      </a:pPr>
-                      <a:r>
-                        <a:rPr lang="ja-JP" altLang="en-US" sz="1300" b="0" dirty="0">
-                          <a:solidFill>
-                            <a:srgbClr val="333333"/>
-                          </a:solidFill>
-                          <a:latin typeface="メイリオ" panose="020B0604030504040204" pitchFamily="50" charset="-128"/>
-                          <a:ea typeface="メイリオ" panose="020B0604030504040204" pitchFamily="50" charset="-128"/>
-                          <a:cs typeface="メイリオ"/>
-                        </a:rPr>
-                        <a:t>-</a:t>
-                      </a:r>
-                      <a:endParaRPr lang="ja-JP" altLang="en-US" sz="1300" dirty="0">
-                        <a:latin typeface="メイリオ"/>
-                        <a:ea typeface="メイリオ"/>
-                        <a:cs typeface="メイリオ"/>
-                      </a:endParaRPr>
-                    </a:p>
-                  </a:txBody>
-                  <a:tcPr marL="91440" marR="73152" marT="36576" marB="36576" anchor="ctr">
-                    <a:lnL w="9525" cap="flat" cmpd="sng" algn="ctr">
-                      <a:solidFill>
-                        <a:srgbClr val="BFBFBF"/>
-                      </a:solidFill>
-                      <a:prstDash val="solid"/>
-                      <a:round/>
-                      <a:headEnd type="none" w="med" len="med"/>
-                      <a:tailEnd type="none" w="med" len="med"/>
-                    </a:lnL>
-                    <a:lnR w="9525" cap="flat" cmpd="sng" algn="ctr">
-                      <a:solidFill>
-                        <a:srgbClr val="BFBFBF"/>
-                      </a:solidFill>
-                      <a:prstDash val="solid"/>
-                      <a:round/>
-                      <a:headEnd type="none" w="med" len="med"/>
-                      <a:tailEnd type="none" w="med" len="med"/>
-                    </a:lnR>
-                    <a:lnT w="9525" cap="flat" cmpd="sng" algn="ctr">
-                      <a:solidFill>
-                        <a:srgbClr val="BFBFBF"/>
-                      </a:solidFill>
-                      <a:prstDash val="solid"/>
-                      <a:round/>
-                      <a:headEnd type="none" w="med" len="med"/>
-                      <a:tailEnd type="none" w="med" len="med"/>
-                    </a:lnT>
-                    <a:lnB w="9525" cap="flat" cmpd="sng" algn="ctr">
-                      <a:solidFill>
-                        <a:srgbClr val="BFBFBF"/>
-                      </a:solidFill>
-                      <a:prstDash val="solid"/>
-                      <a:round/>
-                      <a:headEnd type="none" w="med" len="med"/>
-                      <a:tailEnd type="none" w="med" len="med"/>
-                    </a:lnB>
-                    <a:solidFill>
-                      <a:srgbClr val="FFFFFF"/>
-                    </a:solidFill>
-                  </a:tcPr>
-                </a:tc>
-                <a:tc>
-                  <a:txBody>
-                    <a:bodyPr/>
-                    <a:lstStyle/>
-                    <a:p>
-                      <a:pPr algn="ctr">
-                        <a:buNone/>
-                      </a:pPr>
-                      <a:r>
-                        <a:rPr lang="ja-JP" altLang="en-US" sz="1300" b="0" dirty="0">
-                          <a:solidFill>
-                            <a:srgbClr val="333333"/>
-                          </a:solidFill>
-                          <a:latin typeface="メイリオ" panose="020B0604030504040204" pitchFamily="50" charset="-128"/>
-                          <a:ea typeface="メイリオ" panose="020B0604030504040204" pitchFamily="50" charset="-128"/>
-                          <a:cs typeface="メイリオ"/>
-                        </a:rPr>
-                        <a:t>401</a:t>
-                      </a:r>
-                      <a:endParaRPr lang="ja-JP" altLang="en-US" sz="1300" dirty="0">
-                        <a:latin typeface="メイリオ"/>
-                        <a:ea typeface="メイリオ"/>
-                        <a:cs typeface="メイリオ"/>
-                      </a:endParaRPr>
-                    </a:p>
-                  </a:txBody>
-                  <a:tcPr marL="91440" marR="73152" marT="36576" marB="36576" anchor="ctr">
-                    <a:lnL w="9525" cap="flat" cmpd="sng" algn="ctr">
-                      <a:solidFill>
-                        <a:srgbClr val="BFBFBF"/>
-                      </a:solidFill>
-                      <a:prstDash val="solid"/>
-                      <a:round/>
-                      <a:headEnd type="none" w="med" len="med"/>
-                      <a:tailEnd type="none" w="med" len="med"/>
-                    </a:lnL>
-                    <a:lnR w="9525" cap="flat" cmpd="sng" algn="ctr">
-                      <a:solidFill>
-                        <a:srgbClr val="BFBFBF"/>
-                      </a:solidFill>
-                      <a:prstDash val="solid"/>
-                      <a:round/>
-                      <a:headEnd type="none" w="med" len="med"/>
-                      <a:tailEnd type="none" w="med" len="med"/>
-                    </a:lnR>
-                    <a:lnT w="9525" cap="flat" cmpd="sng" algn="ctr">
-                      <a:solidFill>
-                        <a:srgbClr val="BFBFBF"/>
-                      </a:solidFill>
-                      <a:prstDash val="solid"/>
-                      <a:round/>
-                      <a:headEnd type="none" w="med" len="med"/>
-                      <a:tailEnd type="none" w="med" len="med"/>
-                    </a:lnT>
-                    <a:lnB w="9525" cap="flat" cmpd="sng" algn="ctr">
-                      <a:solidFill>
-                        <a:srgbClr val="BFBFBF"/>
-                      </a:solidFill>
-                      <a:prstDash val="solid"/>
-                      <a:round/>
-                      <a:headEnd type="none" w="med" len="med"/>
-                      <a:tailEnd type="none" w="med" len="med"/>
-                    </a:lnB>
-                    <a:solidFill>
-                      <a:srgbClr val="FFFFFF"/>
-                    </a:solidFill>
-                  </a:tcPr>
-                </a:tc>
-                <a:tc>
-                  <a:txBody>
-                    <a:bodyPr/>
-                    <a:lstStyle/>
-                    <a:p>
-                      <a:pPr algn="ctr">
-                        <a:buNone/>
-                      </a:pPr>
-                      <a:r>
-                        <a:rPr lang="ja-JP" altLang="en-US" sz="1300" b="0" dirty="0">
-                          <a:solidFill>
-                            <a:srgbClr val="333333"/>
-                          </a:solidFill>
-                          <a:latin typeface="メイリオ" panose="020B0604030504040204" pitchFamily="50" charset="-128"/>
-                          <a:ea typeface="メイリオ" panose="020B0604030504040204" pitchFamily="50" charset="-128"/>
-                          <a:cs typeface="メイリオ"/>
-                        </a:rPr>
-                        <a:t>0</a:t>
-                      </a:r>
-                      <a:endParaRPr lang="ja-JP" altLang="en-US" sz="1300" dirty="0">
-                        <a:latin typeface="メイリオ"/>
-                        <a:ea typeface="メイリオ"/>
-                        <a:cs typeface="メイリオ"/>
-                      </a:endParaRPr>
-                    </a:p>
-                  </a:txBody>
-                  <a:tcPr marL="91440" marR="73152" marT="36576" marB="36576" anchor="ctr">
-                    <a:lnL w="9525" cap="flat" cmpd="sng" algn="ctr">
-                      <a:solidFill>
-                        <a:srgbClr val="BFBFBF"/>
-                      </a:solidFill>
-                      <a:prstDash val="solid"/>
-                      <a:round/>
-                      <a:headEnd type="none" w="med" len="med"/>
-                      <a:tailEnd type="none" w="med" len="med"/>
-                    </a:lnL>
-                    <a:lnR w="9525" cap="flat" cmpd="sng" algn="ctr">
-                      <a:solidFill>
-                        <a:srgbClr val="BFBFBF"/>
-                      </a:solidFill>
-                      <a:prstDash val="solid"/>
-                      <a:round/>
-                      <a:headEnd type="none" w="med" len="med"/>
-                      <a:tailEnd type="none" w="med" len="med"/>
-                    </a:lnR>
-                    <a:lnT w="9525" cap="flat" cmpd="sng" algn="ctr">
-                      <a:solidFill>
-                        <a:srgbClr val="BFBFBF"/>
-                      </a:solidFill>
-                      <a:prstDash val="solid"/>
-                      <a:round/>
-                      <a:headEnd type="none" w="med" len="med"/>
-                      <a:tailEnd type="none" w="med" len="med"/>
-                    </a:lnT>
-                    <a:lnB w="9525" cap="flat" cmpd="sng" algn="ctr">
-                      <a:solidFill>
-                        <a:srgbClr val="BFBFBF"/>
-                      </a:solidFill>
-                      <a:prstDash val="solid"/>
-                      <a:round/>
-                      <a:headEnd type="none" w="med" len="med"/>
-                      <a:tailEnd type="none" w="med" len="med"/>
-                    </a:lnB>
-                    <a:solidFill>
-                      <a:srgbClr val="FFFFFF"/>
-                    </a:solidFill>
-                  </a:tcPr>
-                </a:tc>
-                <a:tc>
-                  <a:txBody>
-                    <a:bodyPr/>
-                    <a:lstStyle/>
-                    <a:p>
-                      <a:pPr algn="ctr">
-                        <a:buNone/>
-                      </a:pPr>
-                      <a:r>
-                        <a:rPr lang="ja-JP" altLang="en-US" sz="1300" b="0" dirty="0">
-                          <a:solidFill>
-                            <a:srgbClr val="333333"/>
-                          </a:solidFill>
-                          <a:latin typeface="メイリオ" panose="020B0604030504040204" pitchFamily="50" charset="-128"/>
-                          <a:ea typeface="メイリオ" panose="020B0604030504040204" pitchFamily="50" charset="-128"/>
-                          <a:cs typeface="メイリオ"/>
-                        </a:rPr>
-                        <a:t>0</a:t>
-                      </a:r>
-                      <a:endParaRPr lang="ja-JP" altLang="en-US" sz="1300" dirty="0">
-                        <a:latin typeface="メイリオ"/>
-                        <a:ea typeface="メイリオ"/>
-                        <a:cs typeface="メイリオ"/>
-                      </a:endParaRPr>
-                    </a:p>
-                  </a:txBody>
-                  <a:tcPr marL="91440" marR="73152" marT="36576" marB="36576" anchor="ctr">
-                    <a:lnL w="9525" cap="flat" cmpd="sng" algn="ctr">
-                      <a:solidFill>
-                        <a:srgbClr val="BFBFBF"/>
-                      </a:solidFill>
-                      <a:prstDash val="solid"/>
-                      <a:round/>
-                      <a:headEnd type="none" w="med" len="med"/>
-                      <a:tailEnd type="none" w="med" len="med"/>
-                    </a:lnL>
-                    <a:lnR w="9525" cap="flat" cmpd="sng" algn="ctr">
-                      <a:solidFill>
-                        <a:srgbClr val="BFBFBF"/>
-                      </a:solidFill>
-                      <a:prstDash val="solid"/>
-                      <a:round/>
-                      <a:headEnd type="none" w="med" len="med"/>
-                      <a:tailEnd type="none" w="med" len="med"/>
-                    </a:lnR>
-                    <a:lnT w="9525" cap="flat" cmpd="sng" algn="ctr">
-                      <a:solidFill>
-                        <a:srgbClr val="BFBFBF"/>
-                      </a:solidFill>
-                      <a:prstDash val="solid"/>
-                      <a:round/>
-                      <a:headEnd type="none" w="med" len="med"/>
-                      <a:tailEnd type="none" w="med" len="med"/>
-                    </a:lnT>
-                    <a:lnB w="9525" cap="flat" cmpd="sng" algn="ctr">
-                      <a:solidFill>
-                        <a:srgbClr val="BFBFBF"/>
-                      </a:solidFill>
-                      <a:prstDash val="solid"/>
-                      <a:round/>
-                      <a:headEnd type="none" w="med" len="med"/>
-                      <a:tailEnd type="none" w="med" len="med"/>
-                    </a:lnB>
-                    <a:solidFill>
-                      <a:srgbClr val="FFFFFF"/>
-                    </a:solidFill>
-                  </a:tcPr>
-                </a:tc>
-                <a:tc>
-                  <a:txBody>
-                    <a:bodyPr/>
-                    <a:lstStyle/>
-                    <a:p>
-                      <a:pPr algn="ctr">
-                        <a:buNone/>
-                      </a:pPr>
-                      <a:r>
-                        <a:rPr lang="ja-JP" altLang="en-US" sz="1300" b="0" dirty="0">
-                          <a:solidFill>
-                            <a:srgbClr val="333333"/>
-                          </a:solidFill>
-                          <a:latin typeface="メイリオ" panose="020B0604030504040204" pitchFamily="50" charset="-128"/>
-                          <a:ea typeface="メイリオ" panose="020B0604030504040204" pitchFamily="50" charset="-128"/>
-                          <a:cs typeface="メイリオ"/>
-                        </a:rPr>
-                        <a:t>401</a:t>
-                      </a:r>
-                      <a:endParaRPr lang="ja-JP" altLang="en-US" sz="1300" dirty="0">
-                        <a:latin typeface="メイリオ"/>
-                        <a:ea typeface="メイリオ"/>
-                        <a:cs typeface="メイリオ"/>
-                      </a:endParaRPr>
-                    </a:p>
-                  </a:txBody>
-                  <a:tcPr marL="91440" marR="73152" marT="36576" marB="36576" anchor="ctr">
-                    <a:lnL w="9525" cap="flat" cmpd="sng" algn="ctr">
-                      <a:solidFill>
-                        <a:srgbClr val="BFBFBF"/>
-                      </a:solidFill>
-                      <a:prstDash val="solid"/>
-                      <a:round/>
-                      <a:headEnd type="none" w="med" len="med"/>
-                      <a:tailEnd type="none" w="med" len="med"/>
-                    </a:lnL>
-                    <a:lnR w="9525" cap="flat" cmpd="sng" algn="ctr">
-                      <a:solidFill>
-                        <a:srgbClr val="BFBFBF"/>
-                      </a:solidFill>
-                      <a:prstDash val="solid"/>
-                      <a:round/>
-                      <a:headEnd type="none" w="med" len="med"/>
-                      <a:tailEnd type="none" w="med" len="med"/>
-                    </a:lnR>
-                    <a:lnT w="9525" cap="flat" cmpd="sng" algn="ctr">
-                      <a:solidFill>
-                        <a:srgbClr val="BFBFBF"/>
-                      </a:solidFill>
-                      <a:prstDash val="solid"/>
-                      <a:round/>
-                      <a:headEnd type="none" w="med" len="med"/>
-                      <a:tailEnd type="none" w="med" len="med"/>
-                    </a:lnT>
-                    <a:lnB w="9525" cap="flat" cmpd="sng" algn="ctr">
-                      <a:solidFill>
-                        <a:srgbClr val="BFBFBF"/>
-                      </a:solidFill>
-                      <a:prstDash val="solid"/>
-                      <a:round/>
-                      <a:headEnd type="none" w="med" len="med"/>
-                      <a:tailEnd type="none" w="med" len="med"/>
-                    </a:lnB>
-                    <a:solidFill>
-                      <a:srgbClr val="FFFFFF"/>
-                    </a:solidFill>
-                  </a:tcPr>
-                </a:tc>
-                <a:tc>
-                  <a:txBody>
-                    <a:bodyPr/>
-                    <a:lstStyle/>
-                    <a:p>
-                      <a:pPr algn="ctr">
-                        <a:buNone/>
-                      </a:pPr>
-                      <a:r>
-                        <a:rPr lang="ja-JP" altLang="en-US" sz="1300" b="0" dirty="0">
-                          <a:solidFill>
-                            <a:srgbClr val="333333"/>
-                          </a:solidFill>
-                          <a:latin typeface="メイリオ" panose="020B0604030504040204" pitchFamily="50" charset="-128"/>
-                          <a:ea typeface="メイリオ" panose="020B0604030504040204" pitchFamily="50" charset="-128"/>
-                          <a:cs typeface="メイリオ"/>
-                        </a:rPr>
-                        <a:t>0</a:t>
-                      </a:r>
-                      <a:endParaRPr lang="ja-JP" altLang="en-US" sz="1300" dirty="0">
-                        <a:latin typeface="メイリオ"/>
-                        <a:ea typeface="メイリオ"/>
-                        <a:cs typeface="メイリオ"/>
-                      </a:endParaRPr>
-                    </a:p>
-                  </a:txBody>
-                  <a:tcPr marL="91440" marR="73152" marT="36576" marB="36576" anchor="ctr">
-                    <a:lnL w="9525" cap="flat" cmpd="sng" algn="ctr">
-                      <a:solidFill>
-                        <a:srgbClr val="BFBFBF"/>
-                      </a:solidFill>
-                      <a:prstDash val="solid"/>
-                      <a:round/>
-                      <a:headEnd type="none" w="med" len="med"/>
-                      <a:tailEnd type="none" w="med" len="med"/>
-                    </a:lnL>
-                    <a:lnR w="9525" cap="flat" cmpd="sng" algn="ctr">
-                      <a:solidFill>
-                        <a:srgbClr val="BFBFBF"/>
-                      </a:solidFill>
-                      <a:prstDash val="solid"/>
-                      <a:round/>
-                      <a:headEnd type="none" w="med" len="med"/>
-                      <a:tailEnd type="none" w="med" len="med"/>
-                    </a:lnR>
-                    <a:lnT w="9525" cap="flat" cmpd="sng" algn="ctr">
-                      <a:solidFill>
-                        <a:srgbClr val="BFBFBF"/>
-                      </a:solidFill>
-                      <a:prstDash val="solid"/>
-                      <a:round/>
-                      <a:headEnd type="none" w="med" len="med"/>
-                      <a:tailEnd type="none" w="med" len="med"/>
-                    </a:lnT>
-                    <a:lnB w="9525" cap="flat" cmpd="sng" algn="ctr">
-                      <a:solidFill>
-                        <a:srgbClr val="BFBFBF"/>
-                      </a:solidFill>
-                      <a:prstDash val="solid"/>
-                      <a:round/>
-                      <a:headEnd type="none" w="med" len="med"/>
-                      <a:tailEnd type="none" w="med" len="med"/>
-                    </a:lnB>
-                    <a:solidFill>
-                      <a:srgbClr val="FFFFFF"/>
-                    </a:solidFill>
-                  </a:tcPr>
-                </a:tc>
-                <a:tc>
-                  <a:txBody>
-                    <a:bodyPr/>
-                    <a:lstStyle/>
-                    <a:p>
-                      <a:pPr algn="ctr">
-                        <a:buNone/>
-                      </a:pPr>
-                      <a:r>
-                        <a:rPr lang="ja-JP" altLang="en-US" sz="1300" b="0" dirty="0">
-                          <a:solidFill>
-                            <a:srgbClr val="333333"/>
-                          </a:solidFill>
-                          <a:latin typeface="メイリオ" panose="020B0604030504040204" pitchFamily="50" charset="-128"/>
-                          <a:ea typeface="メイリオ" panose="020B0604030504040204" pitchFamily="50" charset="-128"/>
-                          <a:cs typeface="メイリオ"/>
-                        </a:rPr>
-                        <a:t>0</a:t>
-                      </a:r>
-                      <a:endParaRPr lang="ja-JP" altLang="en-US" sz="1300" dirty="0">
-                        <a:latin typeface="メイリオ"/>
-                        <a:ea typeface="メイリオ"/>
-                        <a:cs typeface="メイリオ"/>
-                      </a:endParaRPr>
-                    </a:p>
-                  </a:txBody>
-                  <a:tcPr marL="91440" marR="73152" marT="36576" marB="36576" anchor="ctr">
-                    <a:lnL w="9525" cap="flat" cmpd="sng" algn="ctr">
-                      <a:solidFill>
-                        <a:srgbClr val="BFBFBF"/>
-                      </a:solidFill>
-                      <a:prstDash val="solid"/>
-                      <a:round/>
-                      <a:headEnd type="none" w="med" len="med"/>
-                      <a:tailEnd type="none" w="med" len="med"/>
-                    </a:lnL>
-                    <a:lnR w="9525" cap="flat" cmpd="sng" algn="ctr">
-                      <a:solidFill>
-                        <a:srgbClr val="BFBFBF"/>
-                      </a:solidFill>
-                      <a:prstDash val="solid"/>
-                      <a:round/>
-                      <a:headEnd type="none" w="med" len="med"/>
-                      <a:tailEnd type="none" w="med" len="med"/>
-                    </a:lnR>
-                    <a:lnT w="9525" cap="flat" cmpd="sng" algn="ctr">
-                      <a:solidFill>
-                        <a:srgbClr val="BFBFBF"/>
-                      </a:solidFill>
-                      <a:prstDash val="solid"/>
-                      <a:round/>
-                      <a:headEnd type="none" w="med" len="med"/>
-                      <a:tailEnd type="none" w="med" len="med"/>
-                    </a:lnT>
-                    <a:lnB w="9525" cap="flat" cmpd="sng" algn="ctr">
-                      <a:solidFill>
-                        <a:srgbClr val="BFBFBF"/>
-                      </a:solidFill>
-                      <a:prstDash val="solid"/>
-                      <a:round/>
-                      <a:headEnd type="none" w="med" len="med"/>
-                      <a:tailEnd type="none" w="med" len="med"/>
-                    </a:lnB>
-                    <a:solidFill>
-                      <a:srgbClr val="FFFFFF"/>
-                    </a:solidFill>
-                  </a:tcPr>
-                </a:tc>
-              </a:tr>
-              <a:tr h="393192">
-                <a:tc>
-                  <a:txBody>
-                    <a:bodyPr/>
-                    <a:lstStyle/>
-                    <a:p>
-                      <a:pPr algn="ctr">
-                        <a:buNone/>
-                      </a:pPr>
-                      <a:r>
-                        <a:rPr lang="ja-JP" altLang="en-US" sz="1200" b="1" dirty="0">
-                          <a:solidFill>
-                            <a:srgbClr val="002060"/>
-                          </a:solidFill>
-                          <a:latin typeface="メイリオ" panose="020B0604030504040204" pitchFamily="50" charset="-128"/>
-                          <a:ea typeface="メイリオ" panose="020B0604030504040204" pitchFamily="50" charset="-128"/>
-                          <a:cs typeface="メイリオ"/>
-                        </a:rPr>
-                        <a:t>追える人数（人）</a:t>
-                      </a:r>
-                      <a:endParaRPr lang="ja-JP" altLang="en-US" sz="1200" dirty="0">
-                        <a:latin typeface="メイリオ"/>
-                        <a:ea typeface="メイリオ"/>
-                        <a:cs typeface="メイリオ"/>
-                      </a:endParaRPr>
-                    </a:p>
-                  </a:txBody>
-                  <a:tcPr marL="91440" marR="73152" marT="36576" marB="36576" anchor="ctr">
-                    <a:lnL w="9525" cap="flat" cmpd="sng" algn="ctr">
-                      <a:solidFill>
-                        <a:srgbClr val="BFBFBF"/>
-                      </a:solidFill>
-                      <a:prstDash val="solid"/>
-                      <a:round/>
-                      <a:headEnd type="none" w="med" len="med"/>
-                      <a:tailEnd type="none" w="med" len="med"/>
-                    </a:lnL>
-                    <a:lnR w="9525" cap="flat" cmpd="sng" algn="ctr">
-                      <a:solidFill>
-                        <a:srgbClr val="BFBFBF"/>
-                      </a:solidFill>
-                      <a:prstDash val="solid"/>
-                      <a:round/>
-                      <a:headEnd type="none" w="med" len="med"/>
-                      <a:tailEnd type="none" w="med" len="med"/>
-                    </a:lnR>
-                    <a:lnT w="9525" cap="flat" cmpd="sng" algn="ctr">
-                      <a:solidFill>
-                        <a:srgbClr val="BFBFBF"/>
-                      </a:solidFill>
-                      <a:prstDash val="solid"/>
-                      <a:round/>
-                      <a:headEnd type="none" w="med" len="med"/>
-                      <a:tailEnd type="none" w="med" len="med"/>
-                    </a:lnT>
-                    <a:lnB w="9525" cap="flat" cmpd="sng" algn="ctr">
-                      <a:solidFill>
-                        <a:srgbClr val="BFBFBF"/>
-                      </a:solidFill>
-                      <a:prstDash val="solid"/>
-                      <a:round/>
-                      <a:headEnd type="none" w="med" len="med"/>
-                      <a:tailEnd type="none" w="med" len="med"/>
-                    </a:lnB>
-                    <a:solidFill>
-                      <a:srgbClr val="DCE6F2"/>
-                    </a:solidFill>
-                  </a:tcPr>
-                </a:tc>
-                <a:tc>
-                  <a:txBody>
-                    <a:bodyPr/>
-                    <a:lstStyle/>
-                    <a:p>
-                      <a:pPr algn="ctr">
-                        <a:buNone/>
-                      </a:pPr>
-                      <a:r>
-                        <a:rPr lang="ja-JP" altLang="en-US" sz="1300" b="0" dirty="0">
-                          <a:solidFill>
-                            <a:srgbClr val="333333"/>
-                          </a:solidFill>
-                          <a:latin typeface="メイリオ" panose="020B0604030504040204" pitchFamily="50" charset="-128"/>
-                          <a:ea typeface="メイリオ" panose="020B0604030504040204" pitchFamily="50" charset="-128"/>
-                          <a:cs typeface="メイリオ"/>
-                        </a:rPr>
-                        <a:t>-</a:t>
-                      </a:r>
-                      <a:endParaRPr lang="ja-JP" altLang="en-US" sz="1300" dirty="0">
-                        <a:latin typeface="メイリオ"/>
-                        <a:ea typeface="メイリオ"/>
-                        <a:cs typeface="メイリオ"/>
-                      </a:endParaRPr>
-                    </a:p>
-                  </a:txBody>
-                  <a:tcPr marL="91440" marR="73152" marT="36576" marB="36576" anchor="ctr">
-                    <a:lnL w="9525" cap="flat" cmpd="sng" algn="ctr">
-                      <a:solidFill>
-                        <a:srgbClr val="BFBFBF"/>
-                      </a:solidFill>
-                      <a:prstDash val="solid"/>
-                      <a:round/>
-                      <a:headEnd type="none" w="med" len="med"/>
-                      <a:tailEnd type="none" w="med" len="med"/>
-                    </a:lnL>
-                    <a:lnR w="9525" cap="flat" cmpd="sng" algn="ctr">
-                      <a:solidFill>
-                        <a:srgbClr val="BFBFBF"/>
-                      </a:solidFill>
-                      <a:prstDash val="solid"/>
-                      <a:round/>
-                      <a:headEnd type="none" w="med" len="med"/>
-                      <a:tailEnd type="none" w="med" len="med"/>
-                    </a:lnR>
-                    <a:lnT w="9525" cap="flat" cmpd="sng" algn="ctr">
-                      <a:solidFill>
-                        <a:srgbClr val="BFBFBF"/>
-                      </a:solidFill>
-                      <a:prstDash val="solid"/>
-                      <a:round/>
-                      <a:headEnd type="none" w="med" len="med"/>
-                      <a:tailEnd type="none" w="med" len="med"/>
-                    </a:lnT>
-                    <a:lnB w="9525" cap="flat" cmpd="sng" algn="ctr">
-                      <a:solidFill>
-                        <a:srgbClr val="BFBFBF"/>
-                      </a:solidFill>
-                      <a:prstDash val="solid"/>
-                      <a:round/>
-                      <a:headEnd type="none" w="med" len="med"/>
-                      <a:tailEnd type="none" w="med" len="med"/>
-                    </a:lnB>
-                    <a:solidFill>
-                      <a:srgbClr val="FFFFFF"/>
-                    </a:solidFill>
-                  </a:tcPr>
-                </a:tc>
-                <a:tc>
-                  <a:txBody>
-                    <a:bodyPr/>
-                    <a:lstStyle/>
-                    <a:p>
-                      <a:pPr algn="ctr">
-                        <a:buNone/>
-                      </a:pPr>
-                      <a:r>
-                        <a:rPr lang="ja-JP" altLang="en-US" sz="1300" b="1" dirty="0">
-                          <a:solidFill>
-                            <a:srgbClr val="002060"/>
-                          </a:solidFill>
-                          <a:latin typeface="メイリオ" panose="020B0604030504040204" pitchFamily="50" charset="-128"/>
-                          <a:ea typeface="メイリオ" panose="020B0604030504040204" pitchFamily="50" charset="-128"/>
-                          <a:cs typeface="メイリオ"/>
-                        </a:rPr>
-                        <a:t>289</a:t>
-                      </a:r>
-                      <a:endParaRPr lang="ja-JP" altLang="en-US" sz="1300" dirty="0">
-                        <a:latin typeface="メイリオ"/>
-                        <a:ea typeface="メイリオ"/>
-                        <a:cs typeface="メイリオ"/>
-                      </a:endParaRPr>
-                    </a:p>
-                  </a:txBody>
-                  <a:tcPr marL="91440" marR="73152" marT="36576" marB="36576" anchor="ctr">
-                    <a:lnL w="9525" cap="flat" cmpd="sng" algn="ctr">
-                      <a:solidFill>
-                        <a:srgbClr val="BFBFBF"/>
-                      </a:solidFill>
-                      <a:prstDash val="solid"/>
-                      <a:round/>
-                      <a:headEnd type="none" w="med" len="med"/>
-                      <a:tailEnd type="none" w="med" len="med"/>
-                    </a:lnL>
-                    <a:lnR w="9525" cap="flat" cmpd="sng" algn="ctr">
-                      <a:solidFill>
-                        <a:srgbClr val="BFBFBF"/>
-                      </a:solidFill>
-                      <a:prstDash val="solid"/>
-                      <a:round/>
-                      <a:headEnd type="none" w="med" len="med"/>
-                      <a:tailEnd type="none" w="med" len="med"/>
-                    </a:lnR>
-                    <a:lnT w="9525" cap="flat" cmpd="sng" algn="ctr">
-                      <a:solidFill>
-                        <a:srgbClr val="BFBFBF"/>
-                      </a:solidFill>
-                      <a:prstDash val="solid"/>
-                      <a:round/>
-                      <a:headEnd type="none" w="med" len="med"/>
-                      <a:tailEnd type="none" w="med" len="med"/>
-                    </a:lnT>
-                    <a:lnB w="9525" cap="flat" cmpd="sng" algn="ctr">
-                      <a:solidFill>
-                        <a:srgbClr val="BFBFBF"/>
-                      </a:solidFill>
-                      <a:prstDash val="solid"/>
-                      <a:round/>
-                      <a:headEnd type="none" w="med" len="med"/>
-                      <a:tailEnd type="none" w="med" len="med"/>
-                    </a:lnB>
-                    <a:solidFill>
-                      <a:srgbClr val="FFFFFF"/>
-                    </a:solidFill>
-                  </a:tcPr>
-                </a:tc>
-                <a:tc>
-                  <a:txBody>
-                    <a:bodyPr/>
-                    <a:lstStyle/>
-                    <a:p>
-                      <a:pPr algn="ctr">
-                        <a:buNone/>
-                      </a:pPr>
-                      <a:r>
-                        <a:rPr lang="ja-JP" altLang="en-US" sz="1300" b="1" dirty="0">
-                          <a:solidFill>
-                            <a:srgbClr val="002060"/>
-                          </a:solidFill>
-                          <a:latin typeface="メイリオ" panose="020B0604030504040204" pitchFamily="50" charset="-128"/>
-                          <a:ea typeface="メイリオ" panose="020B0604030504040204" pitchFamily="50" charset="-128"/>
-                          <a:cs typeface="メイリオ"/>
-                        </a:rPr>
-                        <a:t>285</a:t>
-                      </a:r>
-                      <a:endParaRPr lang="ja-JP" altLang="en-US" sz="1300" dirty="0">
-                        <a:latin typeface="メイリオ"/>
-                        <a:ea typeface="メイリオ"/>
-                        <a:cs typeface="メイリオ"/>
-                      </a:endParaRPr>
-                    </a:p>
-                  </a:txBody>
-                  <a:tcPr marL="91440" marR="73152" marT="36576" marB="36576" anchor="ctr">
-                    <a:lnL w="9525" cap="flat" cmpd="sng" algn="ctr">
-                      <a:solidFill>
-                        <a:srgbClr val="BFBFBF"/>
-                      </a:solidFill>
-                      <a:prstDash val="solid"/>
-                      <a:round/>
-                      <a:headEnd type="none" w="med" len="med"/>
-                      <a:tailEnd type="none" w="med" len="med"/>
-                    </a:lnL>
-                    <a:lnR w="9525" cap="flat" cmpd="sng" algn="ctr">
-                      <a:solidFill>
-                        <a:srgbClr val="BFBFBF"/>
-                      </a:solidFill>
-                      <a:prstDash val="solid"/>
-                      <a:round/>
-                      <a:headEnd type="none" w="med" len="med"/>
-                      <a:tailEnd type="none" w="med" len="med"/>
-                    </a:lnR>
-                    <a:lnT w="9525" cap="flat" cmpd="sng" algn="ctr">
-                      <a:solidFill>
-                        <a:srgbClr val="BFBFBF"/>
-                      </a:solidFill>
-                      <a:prstDash val="solid"/>
-                      <a:round/>
-                      <a:headEnd type="none" w="med" len="med"/>
-                      <a:tailEnd type="none" w="med" len="med"/>
-                    </a:lnT>
-                    <a:lnB w="9525" cap="flat" cmpd="sng" algn="ctr">
-                      <a:solidFill>
-                        <a:srgbClr val="BFBFBF"/>
-                      </a:solidFill>
-                      <a:prstDash val="solid"/>
-                      <a:round/>
-                      <a:headEnd type="none" w="med" len="med"/>
-                      <a:tailEnd type="none" w="med" len="med"/>
-                    </a:lnB>
-                    <a:solidFill>
-                      <a:srgbClr val="FFFFFF"/>
-                    </a:solidFill>
-                  </a:tcPr>
-                </a:tc>
-                <a:tc>
-                  <a:txBody>
-                    <a:bodyPr/>
-                    <a:lstStyle/>
-                    <a:p>
-                      <a:pPr algn="ctr">
-                        <a:buNone/>
-                      </a:pPr>
-                      <a:r>
-                        <a:rPr lang="ja-JP" altLang="en-US" sz="1300" b="1" dirty="0">
-                          <a:solidFill>
-                            <a:srgbClr val="002060"/>
-                          </a:solidFill>
-                          <a:latin typeface="メイリオ" panose="020B0604030504040204" pitchFamily="50" charset="-128"/>
-                          <a:ea typeface="メイリオ" panose="020B0604030504040204" pitchFamily="50" charset="-128"/>
-                          <a:cs typeface="メイリオ"/>
-                        </a:rPr>
-                        <a:t>283</a:t>
-                      </a:r>
-                      <a:endParaRPr lang="ja-JP" altLang="en-US" sz="1300" dirty="0">
-                        <a:latin typeface="メイリオ"/>
-                        <a:ea typeface="メイリオ"/>
-                        <a:cs typeface="メイリオ"/>
-                      </a:endParaRPr>
-                    </a:p>
-                  </a:txBody>
-                  <a:tcPr marL="91440" marR="73152" marT="36576" marB="36576" anchor="ctr">
-                    <a:lnL w="9525" cap="flat" cmpd="sng" algn="ctr">
-                      <a:solidFill>
-                        <a:srgbClr val="BFBFBF"/>
-                      </a:solidFill>
-                      <a:prstDash val="solid"/>
-                      <a:round/>
-                      <a:headEnd type="none" w="med" len="med"/>
-                      <a:tailEnd type="none" w="med" len="med"/>
-                    </a:lnL>
-                    <a:lnR w="9525" cap="flat" cmpd="sng" algn="ctr">
-                      <a:solidFill>
-                        <a:srgbClr val="BFBFBF"/>
-                      </a:solidFill>
-                      <a:prstDash val="solid"/>
-                      <a:round/>
-                      <a:headEnd type="none" w="med" len="med"/>
-                      <a:tailEnd type="none" w="med" len="med"/>
-                    </a:lnR>
-                    <a:lnT w="9525" cap="flat" cmpd="sng" algn="ctr">
-                      <a:solidFill>
-                        <a:srgbClr val="BFBFBF"/>
-                      </a:solidFill>
-                      <a:prstDash val="solid"/>
-                      <a:round/>
-                      <a:headEnd type="none" w="med" len="med"/>
-                      <a:tailEnd type="none" w="med" len="med"/>
-                    </a:lnT>
-                    <a:lnB w="9525" cap="flat" cmpd="sng" algn="ctr">
-                      <a:solidFill>
-                        <a:srgbClr val="BFBFBF"/>
-                      </a:solidFill>
-                      <a:prstDash val="solid"/>
-                      <a:round/>
-                      <a:headEnd type="none" w="med" len="med"/>
-                      <a:tailEnd type="none" w="med" len="med"/>
-                    </a:lnB>
-                    <a:solidFill>
-                      <a:srgbClr val="FFFFFF"/>
-                    </a:solidFill>
-                  </a:tcPr>
-                </a:tc>
-                <a:tc>
-                  <a:txBody>
-                    <a:bodyPr/>
-                    <a:lstStyle/>
-                    <a:p>
-                      <a:pPr algn="ctr">
-                        <a:buNone/>
-                      </a:pPr>
-                      <a:r>
-                        <a:rPr lang="ja-JP" altLang="en-US" sz="1300" b="1" dirty="0">
-                          <a:solidFill>
-                            <a:srgbClr val="002060"/>
-                          </a:solidFill>
-                          <a:latin typeface="メイリオ" panose="020B0604030504040204" pitchFamily="50" charset="-128"/>
-                          <a:ea typeface="メイリオ" panose="020B0604030504040204" pitchFamily="50" charset="-128"/>
-                          <a:cs typeface="メイリオ"/>
-                        </a:rPr>
-                        <a:t>562</a:t>
-                      </a:r>
-                      <a:endParaRPr lang="ja-JP" altLang="en-US" sz="1300" dirty="0">
-                        <a:latin typeface="メイリオ"/>
-                        <a:ea typeface="メイリオ"/>
-                        <a:cs typeface="メイリオ"/>
-                      </a:endParaRPr>
-                    </a:p>
-                  </a:txBody>
-                  <a:tcPr marL="91440" marR="73152" marT="36576" marB="36576" anchor="ctr">
-                    <a:lnL w="9525" cap="flat" cmpd="sng" algn="ctr">
-                      <a:solidFill>
-                        <a:srgbClr val="BFBFBF"/>
-                      </a:solidFill>
-                      <a:prstDash val="solid"/>
-                      <a:round/>
-                      <a:headEnd type="none" w="med" len="med"/>
-                      <a:tailEnd type="none" w="med" len="med"/>
-                    </a:lnL>
-                    <a:lnR w="9525" cap="flat" cmpd="sng" algn="ctr">
-                      <a:solidFill>
-                        <a:srgbClr val="BFBFBF"/>
-                      </a:solidFill>
-                      <a:prstDash val="solid"/>
-                      <a:round/>
-                      <a:headEnd type="none" w="med" len="med"/>
-                      <a:tailEnd type="none" w="med" len="med"/>
-                    </a:lnR>
-                    <a:lnT w="9525" cap="flat" cmpd="sng" algn="ctr">
-                      <a:solidFill>
-                        <a:srgbClr val="BFBFBF"/>
-                      </a:solidFill>
-                      <a:prstDash val="solid"/>
-                      <a:round/>
-                      <a:headEnd type="none" w="med" len="med"/>
-                      <a:tailEnd type="none" w="med" len="med"/>
-                    </a:lnT>
-                    <a:lnB w="9525" cap="flat" cmpd="sng" algn="ctr">
-                      <a:solidFill>
-                        <a:srgbClr val="BFBFBF"/>
-                      </a:solidFill>
-                      <a:prstDash val="solid"/>
-                      <a:round/>
-                      <a:headEnd type="none" w="med" len="med"/>
-                      <a:tailEnd type="none" w="med" len="med"/>
-                    </a:lnB>
-                    <a:solidFill>
-                      <a:srgbClr val="FFFFFF"/>
-                    </a:solidFill>
-                  </a:tcPr>
-                </a:tc>
-                <a:tc>
-                  <a:txBody>
-                    <a:bodyPr/>
-                    <a:lstStyle/>
-                    <a:p>
-                      <a:pPr algn="ctr">
-                        <a:buNone/>
-                      </a:pPr>
-                      <a:r>
-                        <a:rPr lang="ja-JP" altLang="en-US" sz="1300" b="1" dirty="0">
-                          <a:solidFill>
-                            <a:srgbClr val="002060"/>
-                          </a:solidFill>
-                          <a:latin typeface="メイリオ" panose="020B0604030504040204" pitchFamily="50" charset="-128"/>
-                          <a:ea typeface="メイリオ" panose="020B0604030504040204" pitchFamily="50" charset="-128"/>
-                          <a:cs typeface="メイリオ"/>
-                        </a:rPr>
-                        <a:t>558</a:t>
-                      </a:r>
-                      <a:endParaRPr lang="ja-JP" altLang="en-US" sz="1300" dirty="0">
-                        <a:latin typeface="メイリオ"/>
-                        <a:ea typeface="メイリオ"/>
-                        <a:cs typeface="メイリオ"/>
-                      </a:endParaRPr>
-                    </a:p>
-                  </a:txBody>
-                  <a:tcPr marL="91440" marR="73152" marT="36576" marB="36576" anchor="ctr">
-                    <a:lnL w="9525" cap="flat" cmpd="sng" algn="ctr">
-                      <a:solidFill>
-                        <a:srgbClr val="BFBFBF"/>
-                      </a:solidFill>
-                      <a:prstDash val="solid"/>
-                      <a:round/>
-                      <a:headEnd type="none" w="med" len="med"/>
-                      <a:tailEnd type="none" w="med" len="med"/>
-                    </a:lnL>
-                    <a:lnR w="9525" cap="flat" cmpd="sng" algn="ctr">
-                      <a:solidFill>
-                        <a:srgbClr val="BFBFBF"/>
-                      </a:solidFill>
-                      <a:prstDash val="solid"/>
-                      <a:round/>
-                      <a:headEnd type="none" w="med" len="med"/>
-                      <a:tailEnd type="none" w="med" len="med"/>
-                    </a:lnR>
-                    <a:lnT w="9525" cap="flat" cmpd="sng" algn="ctr">
-                      <a:solidFill>
-                        <a:srgbClr val="BFBFBF"/>
-                      </a:solidFill>
-                      <a:prstDash val="solid"/>
-                      <a:round/>
-                      <a:headEnd type="none" w="med" len="med"/>
-                      <a:tailEnd type="none" w="med" len="med"/>
-                    </a:lnT>
-                    <a:lnB w="9525" cap="flat" cmpd="sng" algn="ctr">
-                      <a:solidFill>
-                        <a:srgbClr val="BFBFBF"/>
-                      </a:solidFill>
-                      <a:prstDash val="solid"/>
-                      <a:round/>
-                      <a:headEnd type="none" w="med" len="med"/>
-                      <a:tailEnd type="none" w="med" len="med"/>
-                    </a:lnB>
-                    <a:solidFill>
-                      <a:srgbClr val="FFFFFF"/>
-                    </a:solidFill>
-                  </a:tcPr>
-                </a:tc>
-                <a:tc>
-                  <a:txBody>
-                    <a:bodyPr/>
-                    <a:lstStyle/>
-                    <a:p>
-                      <a:pPr algn="ctr">
-                        <a:buNone/>
-                      </a:pPr>
-                      <a:r>
-                        <a:rPr lang="ja-JP" altLang="en-US" sz="1300" b="1" dirty="0">
-                          <a:solidFill>
-                            <a:srgbClr val="002060"/>
-                          </a:solidFill>
-                          <a:latin typeface="メイリオ" panose="020B0604030504040204" pitchFamily="50" charset="-128"/>
-                          <a:ea typeface="メイリオ" panose="020B0604030504040204" pitchFamily="50" charset="-128"/>
-                          <a:cs typeface="メイリオ"/>
-                        </a:rPr>
-                        <a:t>554</a:t>
-                      </a:r>
-                      <a:endParaRPr lang="ja-JP" altLang="en-US" sz="1300" dirty="0">
-                        <a:latin typeface="メイリオ"/>
-                        <a:ea typeface="メイリオ"/>
-                        <a:cs typeface="メイリオ"/>
-                      </a:endParaRPr>
-                    </a:p>
-                  </a:txBody>
-                  <a:tcPr marL="91440" marR="73152" marT="36576" marB="36576" anchor="ctr">
-                    <a:lnL w="9525" cap="flat" cmpd="sng" algn="ctr">
-                      <a:solidFill>
-                        <a:srgbClr val="BFBFBF"/>
-                      </a:solidFill>
-                      <a:prstDash val="solid"/>
-                      <a:round/>
-                      <a:headEnd type="none" w="med" len="med"/>
-                      <a:tailEnd type="none" w="med" len="med"/>
-                    </a:lnL>
-                    <a:lnR w="9525" cap="flat" cmpd="sng" algn="ctr">
-                      <a:solidFill>
-                        <a:srgbClr val="BFBFBF"/>
-                      </a:solidFill>
-                      <a:prstDash val="solid"/>
-                      <a:round/>
-                      <a:headEnd type="none" w="med" len="med"/>
-                      <a:tailEnd type="none" w="med" len="med"/>
-                    </a:lnR>
-                    <a:lnT w="9525" cap="flat" cmpd="sng" algn="ctr">
-                      <a:solidFill>
-                        <a:srgbClr val="BFBFBF"/>
-                      </a:solidFill>
-                      <a:prstDash val="solid"/>
-                      <a:round/>
-                      <a:headEnd type="none" w="med" len="med"/>
-                      <a:tailEnd type="none" w="med" len="med"/>
-                    </a:lnT>
-                    <a:lnB w="9525" cap="flat" cmpd="sng" algn="ctr">
-                      <a:solidFill>
-                        <a:srgbClr val="BFBFBF"/>
-                      </a:solidFill>
-                      <a:prstDash val="solid"/>
-                      <a:round/>
-                      <a:headEnd type="none" w="med" len="med"/>
-                      <a:tailEnd type="none" w="med" len="med"/>
-                    </a:lnB>
-                    <a:solidFill>
-                      <a:srgbClr val="FFFFFF"/>
-                    </a:solidFill>
-                  </a:tcPr>
-                </a:tc>
-              </a:tr>
-              <a:tr h="393192">
-                <a:tc>
-                  <a:txBody>
-                    <a:bodyPr/>
-                    <a:lstStyle/>
-                    <a:p>
-                      <a:pPr algn="ctr">
-                        <a:buNone/>
-                      </a:pPr>
-                      <a:r>
-                        <a:rPr lang="ja-JP" altLang="en-US" sz="1200" b="1" dirty="0">
-                          <a:solidFill>
-                            <a:srgbClr val="002060"/>
-                          </a:solidFill>
-                          <a:latin typeface="メイリオ" panose="020B0604030504040204" pitchFamily="50" charset="-128"/>
-                          <a:ea typeface="メイリオ" panose="020B0604030504040204" pitchFamily="50" charset="-128"/>
-                          <a:cs typeface="メイリオ"/>
-                        </a:rPr>
-                        <a:t>セミナー予約（件）</a:t>
-                      </a:r>
-                      <a:endParaRPr lang="ja-JP" altLang="en-US" sz="1200" dirty="0">
-                        <a:latin typeface="メイリオ"/>
-                        <a:ea typeface="メイリオ"/>
-                        <a:cs typeface="メイリオ"/>
-                      </a:endParaRPr>
-                    </a:p>
-                  </a:txBody>
-                  <a:tcPr marL="91440" marR="73152" marT="36576" marB="36576" anchor="ctr">
-                    <a:lnL w="9525" cap="flat" cmpd="sng" algn="ctr">
-                      <a:solidFill>
-                        <a:srgbClr val="BFBFBF"/>
-                      </a:solidFill>
-                      <a:prstDash val="solid"/>
-                      <a:round/>
-                      <a:headEnd type="none" w="med" len="med"/>
-                      <a:tailEnd type="none" w="med" len="med"/>
-                    </a:lnL>
-                    <a:lnR w="9525" cap="flat" cmpd="sng" algn="ctr">
-                      <a:solidFill>
-                        <a:srgbClr val="BFBFBF"/>
-                      </a:solidFill>
-                      <a:prstDash val="solid"/>
-                      <a:round/>
-                      <a:headEnd type="none" w="med" len="med"/>
-                      <a:tailEnd type="none" w="med" len="med"/>
-                    </a:lnR>
-                    <a:lnT w="9525" cap="flat" cmpd="sng" algn="ctr">
-                      <a:solidFill>
-                        <a:srgbClr val="BFBFBF"/>
-                      </a:solidFill>
-                      <a:prstDash val="solid"/>
-                      <a:round/>
-                      <a:headEnd type="none" w="med" len="med"/>
-                      <a:tailEnd type="none" w="med" len="med"/>
-                    </a:lnT>
-                    <a:lnB w="9525" cap="flat" cmpd="sng" algn="ctr">
-                      <a:solidFill>
-                        <a:srgbClr val="BFBFBF"/>
-                      </a:solidFill>
-                      <a:prstDash val="solid"/>
-                      <a:round/>
-                      <a:headEnd type="none" w="med" len="med"/>
-                      <a:tailEnd type="none" w="med" len="med"/>
-                    </a:lnB>
-                    <a:solidFill>
-                      <a:srgbClr val="DCE6F2"/>
-                    </a:solidFill>
-                  </a:tcPr>
-                </a:tc>
-                <a:tc>
-                  <a:txBody>
-                    <a:bodyPr/>
-                    <a:lstStyle/>
-                    <a:p>
-                      <a:pPr algn="ctr">
-                        <a:buNone/>
-                      </a:pPr>
-                      <a:r>
-                        <a:rPr lang="ja-JP" altLang="en-US" sz="1300" b="0" dirty="0">
-                          <a:solidFill>
-                            <a:srgbClr val="333333"/>
-                          </a:solidFill>
-                          <a:latin typeface="メイリオ" panose="020B0604030504040204" pitchFamily="50" charset="-128"/>
-                          <a:ea typeface="メイリオ" panose="020B0604030504040204" pitchFamily="50" charset="-128"/>
-                          <a:cs typeface="メイリオ"/>
-                        </a:rPr>
-                        <a:t>-</a:t>
-                      </a:r>
-                      <a:endParaRPr lang="ja-JP" altLang="en-US" sz="1300" dirty="0">
-                        <a:latin typeface="メイリオ"/>
-                        <a:ea typeface="メイリオ"/>
-                        <a:cs typeface="メイリオ"/>
-                      </a:endParaRPr>
-                    </a:p>
-                  </a:txBody>
-                  <a:tcPr marL="91440" marR="73152" marT="36576" marB="36576" anchor="ctr">
-                    <a:lnL w="9525" cap="flat" cmpd="sng" algn="ctr">
-                      <a:solidFill>
-                        <a:srgbClr val="BFBFBF"/>
-                      </a:solidFill>
-                      <a:prstDash val="solid"/>
-                      <a:round/>
-                      <a:headEnd type="none" w="med" len="med"/>
-                      <a:tailEnd type="none" w="med" len="med"/>
-                    </a:lnL>
-                    <a:lnR w="9525" cap="flat" cmpd="sng" algn="ctr">
-                      <a:solidFill>
-                        <a:srgbClr val="BFBFBF"/>
-                      </a:solidFill>
-                      <a:prstDash val="solid"/>
-                      <a:round/>
-                      <a:headEnd type="none" w="med" len="med"/>
-                      <a:tailEnd type="none" w="med" len="med"/>
-                    </a:lnR>
-                    <a:lnT w="9525" cap="flat" cmpd="sng" algn="ctr">
-                      <a:solidFill>
-                        <a:srgbClr val="BFBFBF"/>
-                      </a:solidFill>
-                      <a:prstDash val="solid"/>
-                      <a:round/>
-                      <a:headEnd type="none" w="med" len="med"/>
-                      <a:tailEnd type="none" w="med" len="med"/>
-                    </a:lnT>
-                    <a:lnB w="9525" cap="flat" cmpd="sng" algn="ctr">
-                      <a:solidFill>
-                        <a:srgbClr val="BFBFBF"/>
-                      </a:solidFill>
-                      <a:prstDash val="solid"/>
-                      <a:round/>
-                      <a:headEnd type="none" w="med" len="med"/>
-                      <a:tailEnd type="none" w="med" len="med"/>
-                    </a:lnB>
-                    <a:solidFill>
-                      <a:srgbClr val="FFFFFF"/>
-                    </a:solidFill>
-                  </a:tcPr>
-                </a:tc>
-                <a:tc>
-                  <a:txBody>
-                    <a:bodyPr/>
-                    <a:lstStyle/>
-                    <a:p>
-                      <a:pPr algn="ctr">
-                        <a:buNone/>
-                      </a:pPr>
-                      <a:r>
-                        <a:rPr lang="ja-JP" altLang="en-US" sz="1300" b="0" dirty="0">
-                          <a:solidFill>
-                            <a:srgbClr val="333333"/>
-                          </a:solidFill>
-                          <a:latin typeface="メイリオ" panose="020B0604030504040204" pitchFamily="50" charset="-128"/>
-                          <a:ea typeface="メイリオ" panose="020B0604030504040204" pitchFamily="50" charset="-128"/>
-                          <a:cs typeface="メイリオ"/>
-                        </a:rPr>
-                        <a:t>5</a:t>
-                      </a:r>
-                      <a:endParaRPr lang="ja-JP" altLang="en-US" sz="1300" dirty="0">
-                        <a:latin typeface="メイリオ"/>
-                        <a:ea typeface="メイリオ"/>
-                        <a:cs typeface="メイリオ"/>
-                      </a:endParaRPr>
-                    </a:p>
-                  </a:txBody>
-                  <a:tcPr marL="91440" marR="73152" marT="36576" marB="36576" anchor="ctr">
-                    <a:lnL w="9525" cap="flat" cmpd="sng" algn="ctr">
-                      <a:solidFill>
-                        <a:srgbClr val="BFBFBF"/>
-                      </a:solidFill>
-                      <a:prstDash val="solid"/>
-                      <a:round/>
-                      <a:headEnd type="none" w="med" len="med"/>
-                      <a:tailEnd type="none" w="med" len="med"/>
-                    </a:lnL>
-                    <a:lnR w="9525" cap="flat" cmpd="sng" algn="ctr">
-                      <a:solidFill>
-                        <a:srgbClr val="BFBFBF"/>
-                      </a:solidFill>
-                      <a:prstDash val="solid"/>
-                      <a:round/>
-                      <a:headEnd type="none" w="med" len="med"/>
-                      <a:tailEnd type="none" w="med" len="med"/>
-                    </a:lnR>
-                    <a:lnT w="9525" cap="flat" cmpd="sng" algn="ctr">
-                      <a:solidFill>
-                        <a:srgbClr val="BFBFBF"/>
-                      </a:solidFill>
-                      <a:prstDash val="solid"/>
-                      <a:round/>
-                      <a:headEnd type="none" w="med" len="med"/>
-                      <a:tailEnd type="none" w="med" len="med"/>
-                    </a:lnT>
-                    <a:lnB w="9525" cap="flat" cmpd="sng" algn="ctr">
-                      <a:solidFill>
-                        <a:srgbClr val="BFBFBF"/>
-                      </a:solidFill>
-                      <a:prstDash val="solid"/>
-                      <a:round/>
-                      <a:headEnd type="none" w="med" len="med"/>
-                      <a:tailEnd type="none" w="med" len="med"/>
-                    </a:lnB>
-                    <a:solidFill>
-                      <a:srgbClr val="FFFFFF"/>
-                    </a:solidFill>
-                  </a:tcPr>
-                </a:tc>
-                <a:tc>
-                  <a:txBody>
-                    <a:bodyPr/>
-                    <a:lstStyle/>
-                    <a:p>
-                      <a:pPr algn="ctr">
-                        <a:buNone/>
-                      </a:pPr>
-                      <a:r>
-                        <a:rPr lang="ja-JP" altLang="en-US" sz="1300" b="0" dirty="0">
-                          <a:solidFill>
-                            <a:srgbClr val="333333"/>
-                          </a:solidFill>
-                          <a:latin typeface="メイリオ" panose="020B0604030504040204" pitchFamily="50" charset="-128"/>
-                          <a:ea typeface="メイリオ" panose="020B0604030504040204" pitchFamily="50" charset="-128"/>
-                          <a:cs typeface="メイリオ"/>
-                        </a:rPr>
-                        <a:t>0</a:t>
-                      </a:r>
-                      <a:endParaRPr lang="ja-JP" altLang="en-US" sz="1300" dirty="0">
-                        <a:latin typeface="メイリオ"/>
-                        <a:ea typeface="メイリオ"/>
-                        <a:cs typeface="メイリオ"/>
-                      </a:endParaRPr>
-                    </a:p>
-                  </a:txBody>
-                  <a:tcPr marL="91440" marR="73152" marT="36576" marB="36576" anchor="ctr">
-                    <a:lnL w="9525" cap="flat" cmpd="sng" algn="ctr">
-                      <a:solidFill>
-                        <a:srgbClr val="BFBFBF"/>
-                      </a:solidFill>
-                      <a:prstDash val="solid"/>
-                      <a:round/>
-                      <a:headEnd type="none" w="med" len="med"/>
-                      <a:tailEnd type="none" w="med" len="med"/>
-                    </a:lnL>
-                    <a:lnR w="9525" cap="flat" cmpd="sng" algn="ctr">
-                      <a:solidFill>
-                        <a:srgbClr val="BFBFBF"/>
-                      </a:solidFill>
-                      <a:prstDash val="solid"/>
-                      <a:round/>
-                      <a:headEnd type="none" w="med" len="med"/>
-                      <a:tailEnd type="none" w="med" len="med"/>
-                    </a:lnR>
-                    <a:lnT w="9525" cap="flat" cmpd="sng" algn="ctr">
-                      <a:solidFill>
-                        <a:srgbClr val="BFBFBF"/>
-                      </a:solidFill>
-                      <a:prstDash val="solid"/>
-                      <a:round/>
-                      <a:headEnd type="none" w="med" len="med"/>
-                      <a:tailEnd type="none" w="med" len="med"/>
-                    </a:lnT>
-                    <a:lnB w="9525" cap="flat" cmpd="sng" algn="ctr">
-                      <a:solidFill>
-                        <a:srgbClr val="BFBFBF"/>
-                      </a:solidFill>
-                      <a:prstDash val="solid"/>
-                      <a:round/>
-                      <a:headEnd type="none" w="med" len="med"/>
-                      <a:tailEnd type="none" w="med" len="med"/>
-                    </a:lnB>
-                    <a:solidFill>
-                      <a:srgbClr val="FFFFFF"/>
-                    </a:solidFill>
-                  </a:tcPr>
-                </a:tc>
-                <a:tc>
-                  <a:txBody>
-                    <a:bodyPr/>
-                    <a:lstStyle/>
-                    <a:p>
-                      <a:pPr algn="ctr">
-                        <a:buNone/>
-                      </a:pPr>
-                      <a:r>
-                        <a:rPr lang="ja-JP" altLang="en-US" sz="1300" b="0" dirty="0">
-                          <a:solidFill>
-                            <a:srgbClr val="333333"/>
-                          </a:solidFill>
-                          <a:latin typeface="メイリオ" panose="020B0604030504040204" pitchFamily="50" charset="-128"/>
-                          <a:ea typeface="メイリオ" panose="020B0604030504040204" pitchFamily="50" charset="-128"/>
-                          <a:cs typeface="メイリオ"/>
-                        </a:rPr>
-                        <a:t>0</a:t>
-                      </a:r>
-                      <a:endParaRPr lang="ja-JP" altLang="en-US" sz="1300" dirty="0">
-                        <a:latin typeface="メイリオ"/>
-                        <a:ea typeface="メイリオ"/>
-                        <a:cs typeface="メイリオ"/>
-                      </a:endParaRPr>
-                    </a:p>
-                  </a:txBody>
-                  <a:tcPr marL="91440" marR="73152" marT="36576" marB="36576" anchor="ctr">
-                    <a:lnL w="9525" cap="flat" cmpd="sng" algn="ctr">
-                      <a:solidFill>
-                        <a:srgbClr val="BFBFBF"/>
-                      </a:solidFill>
-                      <a:prstDash val="solid"/>
-                      <a:round/>
-                      <a:headEnd type="none" w="med" len="med"/>
-                      <a:tailEnd type="none" w="med" len="med"/>
-                    </a:lnL>
-                    <a:lnR w="9525" cap="flat" cmpd="sng" algn="ctr">
-                      <a:solidFill>
-                        <a:srgbClr val="BFBFBF"/>
-                      </a:solidFill>
-                      <a:prstDash val="solid"/>
-                      <a:round/>
-                      <a:headEnd type="none" w="med" len="med"/>
-                      <a:tailEnd type="none" w="med" len="med"/>
-                    </a:lnR>
-                    <a:lnT w="9525" cap="flat" cmpd="sng" algn="ctr">
-                      <a:solidFill>
-                        <a:srgbClr val="BFBFBF"/>
-                      </a:solidFill>
-                      <a:prstDash val="solid"/>
-                      <a:round/>
-                      <a:headEnd type="none" w="med" len="med"/>
-                      <a:tailEnd type="none" w="med" len="med"/>
-                    </a:lnT>
-                    <a:lnB w="9525" cap="flat" cmpd="sng" algn="ctr">
-                      <a:solidFill>
-                        <a:srgbClr val="BFBFBF"/>
-                      </a:solidFill>
-                      <a:prstDash val="solid"/>
-                      <a:round/>
-                      <a:headEnd type="none" w="med" len="med"/>
-                      <a:tailEnd type="none" w="med" len="med"/>
-                    </a:lnB>
-                    <a:solidFill>
-                      <a:srgbClr val="FFFFFF"/>
-                    </a:solidFill>
-                  </a:tcPr>
-                </a:tc>
-                <a:tc>
-                  <a:txBody>
-                    <a:bodyPr/>
-                    <a:lstStyle/>
-                    <a:p>
-                      <a:pPr algn="ctr">
-                        <a:buNone/>
-                      </a:pPr>
-                      <a:r>
-                        <a:rPr lang="ja-JP" altLang="en-US" sz="1300" b="0" dirty="0">
-                          <a:solidFill>
-                            <a:srgbClr val="333333"/>
-                          </a:solidFill>
-                          <a:latin typeface="メイリオ" panose="020B0604030504040204" pitchFamily="50" charset="-128"/>
-                          <a:ea typeface="メイリオ" panose="020B0604030504040204" pitchFamily="50" charset="-128"/>
-                          <a:cs typeface="メイリオ"/>
-                        </a:rPr>
-                        <a:t>7</a:t>
-                      </a:r>
-                      <a:endParaRPr lang="ja-JP" altLang="en-US" sz="1300" dirty="0">
-                        <a:latin typeface="メイリオ"/>
-                        <a:ea typeface="メイリオ"/>
-                        <a:cs typeface="メイリオ"/>
-                      </a:endParaRPr>
-                    </a:p>
-                  </a:txBody>
-                  <a:tcPr marL="91440" marR="73152" marT="36576" marB="36576" anchor="ctr">
-                    <a:lnL w="9525" cap="flat" cmpd="sng" algn="ctr">
-                      <a:solidFill>
-                        <a:srgbClr val="BFBFBF"/>
-                      </a:solidFill>
-                      <a:prstDash val="solid"/>
-                      <a:round/>
-                      <a:headEnd type="none" w="med" len="med"/>
-                      <a:tailEnd type="none" w="med" len="med"/>
-                    </a:lnL>
-                    <a:lnR w="9525" cap="flat" cmpd="sng" algn="ctr">
-                      <a:solidFill>
-                        <a:srgbClr val="BFBFBF"/>
-                      </a:solidFill>
-                      <a:prstDash val="solid"/>
-                      <a:round/>
-                      <a:headEnd type="none" w="med" len="med"/>
-                      <a:tailEnd type="none" w="med" len="med"/>
-                    </a:lnR>
-                    <a:lnT w="9525" cap="flat" cmpd="sng" algn="ctr">
-                      <a:solidFill>
-                        <a:srgbClr val="BFBFBF"/>
-                      </a:solidFill>
-                      <a:prstDash val="solid"/>
-                      <a:round/>
-                      <a:headEnd type="none" w="med" len="med"/>
-                      <a:tailEnd type="none" w="med" len="med"/>
-                    </a:lnT>
-                    <a:lnB w="9525" cap="flat" cmpd="sng" algn="ctr">
-                      <a:solidFill>
-                        <a:srgbClr val="BFBFBF"/>
-                      </a:solidFill>
-                      <a:prstDash val="solid"/>
-                      <a:round/>
-                      <a:headEnd type="none" w="med" len="med"/>
-                      <a:tailEnd type="none" w="med" len="med"/>
-                    </a:lnB>
-                    <a:solidFill>
-                      <a:srgbClr val="FFFFFF"/>
-                    </a:solidFill>
-                  </a:tcPr>
-                </a:tc>
-                <a:tc>
-                  <a:txBody>
-                    <a:bodyPr/>
-                    <a:lstStyle/>
-                    <a:p>
-                      <a:pPr algn="ctr">
-                        <a:buNone/>
-                      </a:pPr>
-                      <a:r>
-                        <a:rPr lang="ja-JP" altLang="en-US" sz="1300" b="0" dirty="0">
-                          <a:solidFill>
-                            <a:srgbClr val="333333"/>
-                          </a:solidFill>
-                          <a:latin typeface="メイリオ" panose="020B0604030504040204" pitchFamily="50" charset="-128"/>
-                          <a:ea typeface="メイリオ" panose="020B0604030504040204" pitchFamily="50" charset="-128"/>
-                          <a:cs typeface="メイリオ"/>
-                        </a:rPr>
-                        <a:t>0</a:t>
-                      </a:r>
-                      <a:endParaRPr lang="ja-JP" altLang="en-US" sz="1300" dirty="0">
-                        <a:latin typeface="メイリオ"/>
-                        <a:ea typeface="メイリオ"/>
-                        <a:cs typeface="メイリオ"/>
-                      </a:endParaRPr>
-                    </a:p>
-                  </a:txBody>
-                  <a:tcPr marL="91440" marR="73152" marT="36576" marB="36576" anchor="ctr">
-                    <a:lnL w="9525" cap="flat" cmpd="sng" algn="ctr">
-                      <a:solidFill>
-                        <a:srgbClr val="BFBFBF"/>
-                      </a:solidFill>
-                      <a:prstDash val="solid"/>
-                      <a:round/>
-                      <a:headEnd type="none" w="med" len="med"/>
-                      <a:tailEnd type="none" w="med" len="med"/>
-                    </a:lnL>
-                    <a:lnR w="9525" cap="flat" cmpd="sng" algn="ctr">
-                      <a:solidFill>
-                        <a:srgbClr val="BFBFBF"/>
-                      </a:solidFill>
-                      <a:prstDash val="solid"/>
-                      <a:round/>
-                      <a:headEnd type="none" w="med" len="med"/>
-                      <a:tailEnd type="none" w="med" len="med"/>
-                    </a:lnR>
-                    <a:lnT w="9525" cap="flat" cmpd="sng" algn="ctr">
-                      <a:solidFill>
-                        <a:srgbClr val="BFBFBF"/>
-                      </a:solidFill>
-                      <a:prstDash val="solid"/>
-                      <a:round/>
-                      <a:headEnd type="none" w="med" len="med"/>
-                      <a:tailEnd type="none" w="med" len="med"/>
-                    </a:lnT>
-                    <a:lnB w="9525" cap="flat" cmpd="sng" algn="ctr">
-                      <a:solidFill>
-                        <a:srgbClr val="BFBFBF"/>
-                      </a:solidFill>
-                      <a:prstDash val="solid"/>
-                      <a:round/>
-                      <a:headEnd type="none" w="med" len="med"/>
-                      <a:tailEnd type="none" w="med" len="med"/>
-                    </a:lnB>
-                    <a:solidFill>
-                      <a:srgbClr val="FFFFFF"/>
-                    </a:solidFill>
-                  </a:tcPr>
-                </a:tc>
-                <a:tc>
-                  <a:txBody>
-                    <a:bodyPr/>
-                    <a:lstStyle/>
-                    <a:p>
-                      <a:pPr algn="ctr">
-                        <a:buNone/>
-                      </a:pPr>
-                      <a:r>
-                        <a:rPr lang="ja-JP" altLang="en-US" sz="1300" b="0" dirty="0">
-                          <a:solidFill>
-                            <a:srgbClr val="333333"/>
-                          </a:solidFill>
-                          <a:latin typeface="メイリオ" panose="020B0604030504040204" pitchFamily="50" charset="-128"/>
-                          <a:ea typeface="メイリオ" panose="020B0604030504040204" pitchFamily="50" charset="-128"/>
-                          <a:cs typeface="メイリオ"/>
-                        </a:rPr>
-                        <a:t>0</a:t>
-                      </a:r>
-                      <a:endParaRPr lang="ja-JP" altLang="en-US" sz="1300" dirty="0">
-                        <a:latin typeface="メイリオ"/>
-                        <a:ea typeface="メイリオ"/>
-                        <a:cs typeface="メイリオ"/>
-                      </a:endParaRPr>
-                    </a:p>
-                  </a:txBody>
-                  <a:tcPr marL="91440" marR="73152" marT="36576" marB="36576" anchor="ctr">
-                    <a:lnL w="9525" cap="flat" cmpd="sng" algn="ctr">
-                      <a:solidFill>
-                        <a:srgbClr val="BFBFBF"/>
-                      </a:solidFill>
-                      <a:prstDash val="solid"/>
-                      <a:round/>
-                      <a:headEnd type="none" w="med" len="med"/>
-                      <a:tailEnd type="none" w="med" len="med"/>
-                    </a:lnL>
-                    <a:lnR w="9525" cap="flat" cmpd="sng" algn="ctr">
-                      <a:solidFill>
-                        <a:srgbClr val="BFBFBF"/>
-                      </a:solidFill>
-                      <a:prstDash val="solid"/>
-                      <a:round/>
-                      <a:headEnd type="none" w="med" len="med"/>
-                      <a:tailEnd type="none" w="med" len="med"/>
-                    </a:lnR>
-                    <a:lnT w="9525" cap="flat" cmpd="sng" algn="ctr">
-                      <a:solidFill>
-                        <a:srgbClr val="BFBFBF"/>
-                      </a:solidFill>
-                      <a:prstDash val="solid"/>
-                      <a:round/>
-                      <a:headEnd type="none" w="med" len="med"/>
-                      <a:tailEnd type="none" w="med" len="med"/>
-                    </a:lnT>
-                    <a:lnB w="9525" cap="flat" cmpd="sng" algn="ctr">
-                      <a:solidFill>
-                        <a:srgbClr val="BFBFBF"/>
-                      </a:solidFill>
-                      <a:prstDash val="solid"/>
-                      <a:round/>
-                      <a:headEnd type="none" w="med" len="med"/>
-                      <a:tailEnd type="none" w="med" len="med"/>
-                    </a:lnB>
-                    <a:solidFill>
-                      <a:srgbClr val="FFFFFF"/>
-                    </a:solidFill>
-                  </a:tcPr>
-                </a:tc>
-              </a:tr>
-              <a:tr h="393192">
-                <a:tc>
-                  <a:txBody>
-                    <a:bodyPr/>
-                    <a:lstStyle/>
-                    <a:p>
-                      <a:pPr algn="ctr">
-                        <a:buNone/>
-                      </a:pPr>
-                      <a:r>
-                        <a:rPr lang="ja-JP" altLang="en-US" sz="1200" b="1" dirty="0">
-                          <a:solidFill>
-                            <a:srgbClr val="002060"/>
-                          </a:solidFill>
-                          <a:latin typeface="メイリオ" panose="020B0604030504040204" pitchFamily="50" charset="-128"/>
-                          <a:ea typeface="メイリオ" panose="020B0604030504040204" pitchFamily="50" charset="-128"/>
-                          <a:cs typeface="メイリオ"/>
-                        </a:rPr>
-                        <a:t>サロン入会（件）</a:t>
-                      </a:r>
-                      <a:endParaRPr lang="ja-JP" altLang="en-US" sz="1200" dirty="0">
-                        <a:latin typeface="メイリオ"/>
-                        <a:ea typeface="メイリオ"/>
-                        <a:cs typeface="メイリオ"/>
-                      </a:endParaRPr>
-                    </a:p>
-                  </a:txBody>
-                  <a:tcPr marL="91440" marR="73152" marT="36576" marB="36576" anchor="ctr">
-                    <a:lnL w="9525" cap="flat" cmpd="sng" algn="ctr">
-                      <a:solidFill>
-                        <a:srgbClr val="BFBFBF"/>
-                      </a:solidFill>
-                      <a:prstDash val="solid"/>
-                      <a:round/>
-                      <a:headEnd type="none" w="med" len="med"/>
-                      <a:tailEnd type="none" w="med" len="med"/>
-                    </a:lnL>
-                    <a:lnR w="9525" cap="flat" cmpd="sng" algn="ctr">
-                      <a:solidFill>
-                        <a:srgbClr val="BFBFBF"/>
-                      </a:solidFill>
-                      <a:prstDash val="solid"/>
-                      <a:round/>
-                      <a:headEnd type="none" w="med" len="med"/>
-                      <a:tailEnd type="none" w="med" len="med"/>
-                    </a:lnR>
-                    <a:lnT w="9525" cap="flat" cmpd="sng" algn="ctr">
-                      <a:solidFill>
-                        <a:srgbClr val="BFBFBF"/>
-                      </a:solidFill>
-                      <a:prstDash val="solid"/>
-                      <a:round/>
-                      <a:headEnd type="none" w="med" len="med"/>
-                      <a:tailEnd type="none" w="med" len="med"/>
-                    </a:lnT>
-                    <a:lnB w="9525" cap="flat" cmpd="sng" algn="ctr">
-                      <a:solidFill>
-                        <a:srgbClr val="BFBFBF"/>
-                      </a:solidFill>
-                      <a:prstDash val="solid"/>
-                      <a:round/>
-                      <a:headEnd type="none" w="med" len="med"/>
-                      <a:tailEnd type="none" w="med" len="med"/>
-                    </a:lnB>
-                    <a:solidFill>
-                      <a:srgbClr val="DCE6F2"/>
-                    </a:solidFill>
-                  </a:tcPr>
-                </a:tc>
-                <a:tc>
-                  <a:txBody>
-                    <a:bodyPr/>
-                    <a:lstStyle/>
-                    <a:p>
-                      <a:pPr algn="ctr">
-                        <a:buNone/>
-                      </a:pPr>
-                      <a:r>
-                        <a:rPr lang="ja-JP" altLang="en-US" sz="1300" b="0" dirty="0">
-                          <a:solidFill>
-                            <a:srgbClr val="333333"/>
-                          </a:solidFill>
-                          <a:latin typeface="メイリオ" panose="020B0604030504040204" pitchFamily="50" charset="-128"/>
-                          <a:ea typeface="メイリオ" panose="020B0604030504040204" pitchFamily="50" charset="-128"/>
-                          <a:cs typeface="メイリオ"/>
-                        </a:rPr>
-                        <a:t>-</a:t>
-                      </a:r>
-                      <a:endParaRPr lang="ja-JP" altLang="en-US" sz="1300" dirty="0">
-                        <a:latin typeface="メイリオ"/>
-                        <a:ea typeface="メイリオ"/>
-                        <a:cs typeface="メイリオ"/>
-                      </a:endParaRPr>
-                    </a:p>
-                  </a:txBody>
-                  <a:tcPr marL="91440" marR="73152" marT="36576" marB="36576" anchor="ctr">
-                    <a:lnL w="9525" cap="flat" cmpd="sng" algn="ctr">
-                      <a:solidFill>
-                        <a:srgbClr val="BFBFBF"/>
-                      </a:solidFill>
-                      <a:prstDash val="solid"/>
-                      <a:round/>
-                      <a:headEnd type="none" w="med" len="med"/>
-                      <a:tailEnd type="none" w="med" len="med"/>
-                    </a:lnL>
-                    <a:lnR w="9525" cap="flat" cmpd="sng" algn="ctr">
-                      <a:solidFill>
-                        <a:srgbClr val="BFBFBF"/>
-                      </a:solidFill>
-                      <a:prstDash val="solid"/>
-                      <a:round/>
-                      <a:headEnd type="none" w="med" len="med"/>
-                      <a:tailEnd type="none" w="med" len="med"/>
-                    </a:lnR>
-                    <a:lnT w="9525" cap="flat" cmpd="sng" algn="ctr">
-                      <a:solidFill>
-                        <a:srgbClr val="BFBFBF"/>
-                      </a:solidFill>
-                      <a:prstDash val="solid"/>
-                      <a:round/>
-                      <a:headEnd type="none" w="med" len="med"/>
-                      <a:tailEnd type="none" w="med" len="med"/>
-                    </a:lnT>
-                    <a:lnB w="9525" cap="flat" cmpd="sng" algn="ctr">
-                      <a:solidFill>
-                        <a:srgbClr val="BFBFBF"/>
-                      </a:solidFill>
-                      <a:prstDash val="solid"/>
-                      <a:round/>
-                      <a:headEnd type="none" w="med" len="med"/>
-                      <a:tailEnd type="none" w="med" len="med"/>
-                    </a:lnB>
-                    <a:solidFill>
-                      <a:srgbClr val="FFFFFF"/>
-                    </a:solidFill>
-                  </a:tcPr>
-                </a:tc>
-                <a:tc>
-                  <a:txBody>
-                    <a:bodyPr/>
-                    <a:lstStyle/>
-                    <a:p>
-                      <a:pPr algn="ctr">
-                        <a:buNone/>
-                      </a:pPr>
-                      <a:r>
-                        <a:rPr lang="ja-JP" altLang="en-US" sz="1300" b="0" dirty="0">
-                          <a:solidFill>
-                            <a:srgbClr val="333333"/>
-                          </a:solidFill>
-                          <a:latin typeface="メイリオ" panose="020B0604030504040204" pitchFamily="50" charset="-128"/>
-                          <a:ea typeface="メイリオ" panose="020B0604030504040204" pitchFamily="50" charset="-128"/>
-                          <a:cs typeface="メイリオ"/>
-                        </a:rPr>
-                        <a:t>1</a:t>
-                      </a:r>
-                      <a:endParaRPr lang="ja-JP" altLang="en-US" sz="1300" dirty="0">
-                        <a:latin typeface="メイリオ"/>
-                        <a:ea typeface="メイリオ"/>
-                        <a:cs typeface="メイリオ"/>
-                      </a:endParaRPr>
-                    </a:p>
-                  </a:txBody>
-                  <a:tcPr marL="91440" marR="73152" marT="36576" marB="36576" anchor="ctr">
-                    <a:lnL w="9525" cap="flat" cmpd="sng" algn="ctr">
-                      <a:solidFill>
-                        <a:srgbClr val="BFBFBF"/>
-                      </a:solidFill>
-                      <a:prstDash val="solid"/>
-                      <a:round/>
-                      <a:headEnd type="none" w="med" len="med"/>
-                      <a:tailEnd type="none" w="med" len="med"/>
-                    </a:lnL>
-                    <a:lnR w="9525" cap="flat" cmpd="sng" algn="ctr">
-                      <a:solidFill>
-                        <a:srgbClr val="BFBFBF"/>
-                      </a:solidFill>
-                      <a:prstDash val="solid"/>
-                      <a:round/>
-                      <a:headEnd type="none" w="med" len="med"/>
-                      <a:tailEnd type="none" w="med" len="med"/>
-                    </a:lnR>
-                    <a:lnT w="9525" cap="flat" cmpd="sng" algn="ctr">
-                      <a:solidFill>
-                        <a:srgbClr val="BFBFBF"/>
-                      </a:solidFill>
-                      <a:prstDash val="solid"/>
-                      <a:round/>
-                      <a:headEnd type="none" w="med" len="med"/>
-                      <a:tailEnd type="none" w="med" len="med"/>
-                    </a:lnT>
-                    <a:lnB w="9525" cap="flat" cmpd="sng" algn="ctr">
-                      <a:solidFill>
-                        <a:srgbClr val="BFBFBF"/>
-                      </a:solidFill>
-                      <a:prstDash val="solid"/>
-                      <a:round/>
-                      <a:headEnd type="none" w="med" len="med"/>
-                      <a:tailEnd type="none" w="med" len="med"/>
-                    </a:lnB>
-                    <a:solidFill>
-                      <a:srgbClr val="FFFFFF"/>
-                    </a:solidFill>
-                  </a:tcPr>
-                </a:tc>
-                <a:tc>
-                  <a:txBody>
-                    <a:bodyPr/>
-                    <a:lstStyle/>
-                    <a:p>
-                      <a:pPr algn="ctr">
-                        <a:buNone/>
-                      </a:pPr>
-                      <a:r>
-                        <a:rPr lang="ja-JP" altLang="en-US" sz="1300" b="0" dirty="0">
-                          <a:solidFill>
-                            <a:srgbClr val="333333"/>
-                          </a:solidFill>
-                          <a:latin typeface="メイリオ" panose="020B0604030504040204" pitchFamily="50" charset="-128"/>
-                          <a:ea typeface="メイリオ" panose="020B0604030504040204" pitchFamily="50" charset="-128"/>
-                          <a:cs typeface="メイリオ"/>
-                        </a:rPr>
-                        <a:t>1</a:t>
-                      </a:r>
-                      <a:endParaRPr lang="ja-JP" altLang="en-US" sz="1300" dirty="0">
-                        <a:latin typeface="メイリオ"/>
-                        <a:ea typeface="メイリオ"/>
-                        <a:cs typeface="メイリオ"/>
-                      </a:endParaRPr>
-                    </a:p>
-                  </a:txBody>
-                  <a:tcPr marL="91440" marR="73152" marT="36576" marB="36576" anchor="ctr">
-                    <a:lnL w="9525" cap="flat" cmpd="sng" algn="ctr">
-                      <a:solidFill>
-                        <a:srgbClr val="BFBFBF"/>
-                      </a:solidFill>
-                      <a:prstDash val="solid"/>
-                      <a:round/>
-                      <a:headEnd type="none" w="med" len="med"/>
-                      <a:tailEnd type="none" w="med" len="med"/>
-                    </a:lnL>
-                    <a:lnR w="9525" cap="flat" cmpd="sng" algn="ctr">
-                      <a:solidFill>
-                        <a:srgbClr val="BFBFBF"/>
-                      </a:solidFill>
-                      <a:prstDash val="solid"/>
-                      <a:round/>
-                      <a:headEnd type="none" w="med" len="med"/>
-                      <a:tailEnd type="none" w="med" len="med"/>
-                    </a:lnR>
-                    <a:lnT w="9525" cap="flat" cmpd="sng" algn="ctr">
-                      <a:solidFill>
-                        <a:srgbClr val="BFBFBF"/>
-                      </a:solidFill>
-                      <a:prstDash val="solid"/>
-                      <a:round/>
-                      <a:headEnd type="none" w="med" len="med"/>
-                      <a:tailEnd type="none" w="med" len="med"/>
-                    </a:lnT>
-                    <a:lnB w="9525" cap="flat" cmpd="sng" algn="ctr">
-                      <a:solidFill>
-                        <a:srgbClr val="BFBFBF"/>
-                      </a:solidFill>
-                      <a:prstDash val="solid"/>
-                      <a:round/>
-                      <a:headEnd type="none" w="med" len="med"/>
-                      <a:tailEnd type="none" w="med" len="med"/>
-                    </a:lnB>
-                    <a:solidFill>
-                      <a:srgbClr val="FFFFFF"/>
-                    </a:solidFill>
-                  </a:tcPr>
-                </a:tc>
-                <a:tc>
-                  <a:txBody>
-                    <a:bodyPr/>
-                    <a:lstStyle/>
-                    <a:p>
-                      <a:pPr algn="ctr">
-                        <a:buNone/>
-                      </a:pPr>
-                      <a:r>
-                        <a:rPr lang="ja-JP" altLang="en-US" sz="1300" b="0" dirty="0">
-                          <a:solidFill>
-                            <a:srgbClr val="333333"/>
-                          </a:solidFill>
-                          <a:latin typeface="メイリオ" panose="020B0604030504040204" pitchFamily="50" charset="-128"/>
-                          <a:ea typeface="メイリオ" panose="020B0604030504040204" pitchFamily="50" charset="-128"/>
-                          <a:cs typeface="メイリオ"/>
-                        </a:rPr>
-                        <a:t>1</a:t>
-                      </a:r>
-                      <a:endParaRPr lang="ja-JP" altLang="en-US" sz="1300" dirty="0">
-                        <a:latin typeface="メイリオ"/>
-                        <a:ea typeface="メイリオ"/>
-                        <a:cs typeface="メイリオ"/>
-                      </a:endParaRPr>
-                    </a:p>
-                  </a:txBody>
-                  <a:tcPr marL="91440" marR="73152" marT="36576" marB="36576" anchor="ctr">
-                    <a:lnL w="9525" cap="flat" cmpd="sng" algn="ctr">
-                      <a:solidFill>
-                        <a:srgbClr val="BFBFBF"/>
-                      </a:solidFill>
-                      <a:prstDash val="solid"/>
-                      <a:round/>
-                      <a:headEnd type="none" w="med" len="med"/>
-                      <a:tailEnd type="none" w="med" len="med"/>
-                    </a:lnL>
-                    <a:lnR w="9525" cap="flat" cmpd="sng" algn="ctr">
-                      <a:solidFill>
-                        <a:srgbClr val="BFBFBF"/>
-                      </a:solidFill>
-                      <a:prstDash val="solid"/>
-                      <a:round/>
-                      <a:headEnd type="none" w="med" len="med"/>
-                      <a:tailEnd type="none" w="med" len="med"/>
-                    </a:lnR>
-                    <a:lnT w="9525" cap="flat" cmpd="sng" algn="ctr">
-                      <a:solidFill>
-                        <a:srgbClr val="BFBFBF"/>
-                      </a:solidFill>
-                      <a:prstDash val="solid"/>
-                      <a:round/>
-                      <a:headEnd type="none" w="med" len="med"/>
-                      <a:tailEnd type="none" w="med" len="med"/>
-                    </a:lnT>
-                    <a:lnB w="9525" cap="flat" cmpd="sng" algn="ctr">
-                      <a:solidFill>
-                        <a:srgbClr val="BFBFBF"/>
-                      </a:solidFill>
-                      <a:prstDash val="solid"/>
-                      <a:round/>
-                      <a:headEnd type="none" w="med" len="med"/>
-                      <a:tailEnd type="none" w="med" len="med"/>
-                    </a:lnB>
-                    <a:solidFill>
-                      <a:srgbClr val="FFFFFF"/>
-                    </a:solidFill>
-                  </a:tcPr>
-                </a:tc>
-                <a:tc>
-                  <a:txBody>
-                    <a:bodyPr/>
-                    <a:lstStyle/>
-                    <a:p>
-                      <a:pPr algn="ctr">
-                        <a:buNone/>
-                      </a:pPr>
-                      <a:r>
-                        <a:rPr lang="ja-JP" altLang="en-US" sz="1300" b="0" dirty="0">
-                          <a:solidFill>
-                            <a:srgbClr val="333333"/>
-                          </a:solidFill>
-                          <a:latin typeface="メイリオ" panose="020B0604030504040204" pitchFamily="50" charset="-128"/>
-                          <a:ea typeface="メイリオ" panose="020B0604030504040204" pitchFamily="50" charset="-128"/>
-                          <a:cs typeface="メイリオ"/>
-                        </a:rPr>
-                        <a:t>1</a:t>
-                      </a:r>
-                      <a:endParaRPr lang="ja-JP" altLang="en-US" sz="1300" dirty="0">
-                        <a:latin typeface="メイリオ"/>
-                        <a:ea typeface="メイリオ"/>
-                        <a:cs typeface="メイリオ"/>
-                      </a:endParaRPr>
-                    </a:p>
-                  </a:txBody>
-                  <a:tcPr marL="91440" marR="73152" marT="36576" marB="36576" anchor="ctr">
-                    <a:lnL w="9525" cap="flat" cmpd="sng" algn="ctr">
-                      <a:solidFill>
-                        <a:srgbClr val="BFBFBF"/>
-                      </a:solidFill>
-                      <a:prstDash val="solid"/>
-                      <a:round/>
-                      <a:headEnd type="none" w="med" len="med"/>
-                      <a:tailEnd type="none" w="med" len="med"/>
-                    </a:lnL>
-                    <a:lnR w="9525" cap="flat" cmpd="sng" algn="ctr">
-                      <a:solidFill>
-                        <a:srgbClr val="BFBFBF"/>
-                      </a:solidFill>
-                      <a:prstDash val="solid"/>
-                      <a:round/>
-                      <a:headEnd type="none" w="med" len="med"/>
-                      <a:tailEnd type="none" w="med" len="med"/>
-                    </a:lnR>
-                    <a:lnT w="9525" cap="flat" cmpd="sng" algn="ctr">
-                      <a:solidFill>
-                        <a:srgbClr val="BFBFBF"/>
-                      </a:solidFill>
-                      <a:prstDash val="solid"/>
-                      <a:round/>
-                      <a:headEnd type="none" w="med" len="med"/>
-                      <a:tailEnd type="none" w="med" len="med"/>
-                    </a:lnT>
-                    <a:lnB w="9525" cap="flat" cmpd="sng" algn="ctr">
-                      <a:solidFill>
-                        <a:srgbClr val="BFBFBF"/>
-                      </a:solidFill>
-                      <a:prstDash val="solid"/>
-                      <a:round/>
-                      <a:headEnd type="none" w="med" len="med"/>
-                      <a:tailEnd type="none" w="med" len="med"/>
-                    </a:lnB>
-                    <a:solidFill>
-                      <a:srgbClr val="FFFFFF"/>
-                    </a:solidFill>
-                  </a:tcPr>
-                </a:tc>
-                <a:tc>
-                  <a:txBody>
-                    <a:bodyPr/>
-                    <a:lstStyle/>
-                    <a:p>
-                      <a:pPr algn="ctr">
-                        <a:buNone/>
-                      </a:pPr>
-                      <a:r>
-                        <a:rPr lang="ja-JP" altLang="en-US" sz="1300" b="0" dirty="0">
-                          <a:solidFill>
-                            <a:srgbClr val="333333"/>
-                          </a:solidFill>
-                          <a:latin typeface="メイリオ" panose="020B0604030504040204" pitchFamily="50" charset="-128"/>
-                          <a:ea typeface="メイリオ" panose="020B0604030504040204" pitchFamily="50" charset="-128"/>
-                          <a:cs typeface="メイリオ"/>
-                        </a:rPr>
-                        <a:t>1</a:t>
-                      </a:r>
-                      <a:endParaRPr lang="ja-JP" altLang="en-US" sz="1300" dirty="0">
-                        <a:latin typeface="メイリオ"/>
-                        <a:ea typeface="メイリオ"/>
-                        <a:cs typeface="メイリオ"/>
-                      </a:endParaRPr>
-                    </a:p>
-                  </a:txBody>
-                  <a:tcPr marL="91440" marR="73152" marT="36576" marB="36576" anchor="ctr">
-                    <a:lnL w="9525" cap="flat" cmpd="sng" algn="ctr">
-                      <a:solidFill>
-                        <a:srgbClr val="BFBFBF"/>
-                      </a:solidFill>
-                      <a:prstDash val="solid"/>
-                      <a:round/>
-                      <a:headEnd type="none" w="med" len="med"/>
-                      <a:tailEnd type="none" w="med" len="med"/>
-                    </a:lnL>
-                    <a:lnR w="9525" cap="flat" cmpd="sng" algn="ctr">
-                      <a:solidFill>
-                        <a:srgbClr val="BFBFBF"/>
-                      </a:solidFill>
-                      <a:prstDash val="solid"/>
-                      <a:round/>
-                      <a:headEnd type="none" w="med" len="med"/>
-                      <a:tailEnd type="none" w="med" len="med"/>
-                    </a:lnR>
-                    <a:lnT w="9525" cap="flat" cmpd="sng" algn="ctr">
-                      <a:solidFill>
-                        <a:srgbClr val="BFBFBF"/>
-                      </a:solidFill>
-                      <a:prstDash val="solid"/>
-                      <a:round/>
-                      <a:headEnd type="none" w="med" len="med"/>
-                      <a:tailEnd type="none" w="med" len="med"/>
-                    </a:lnT>
-                    <a:lnB w="9525" cap="flat" cmpd="sng" algn="ctr">
-                      <a:solidFill>
-                        <a:srgbClr val="BFBFBF"/>
-                      </a:solidFill>
-                      <a:prstDash val="solid"/>
-                      <a:round/>
-                      <a:headEnd type="none" w="med" len="med"/>
-                      <a:tailEnd type="none" w="med" len="med"/>
-                    </a:lnB>
-                    <a:solidFill>
-                      <a:srgbClr val="FFFFFF"/>
-                    </a:solidFill>
-                  </a:tcPr>
-                </a:tc>
-                <a:tc>
-                  <a:txBody>
-                    <a:bodyPr/>
-                    <a:lstStyle/>
-                    <a:p>
-                      <a:pPr algn="ctr">
-                        <a:buNone/>
-                      </a:pPr>
-                      <a:r>
-                        <a:rPr lang="ja-JP" altLang="en-US" sz="1300" b="0" dirty="0">
-                          <a:solidFill>
-                            <a:srgbClr val="333333"/>
-                          </a:solidFill>
-                          <a:latin typeface="メイリオ" panose="020B0604030504040204" pitchFamily="50" charset="-128"/>
-                          <a:ea typeface="メイリオ" panose="020B0604030504040204" pitchFamily="50" charset="-128"/>
-                          <a:cs typeface="メイリオ"/>
-                        </a:rPr>
-                        <a:t>1</a:t>
-                      </a:r>
-                      <a:endParaRPr lang="ja-JP" altLang="en-US" sz="1300" dirty="0">
-                        <a:latin typeface="メイリオ"/>
-                        <a:ea typeface="メイリオ"/>
-                        <a:cs typeface="メイリオ"/>
-                      </a:endParaRPr>
-                    </a:p>
-                  </a:txBody>
-                  <a:tcPr marL="91440" marR="73152" marT="36576" marB="36576" anchor="ctr">
-                    <a:lnL w="9525" cap="flat" cmpd="sng" algn="ctr">
-                      <a:solidFill>
-                        <a:srgbClr val="BFBFBF"/>
-                      </a:solidFill>
-                      <a:prstDash val="solid"/>
-                      <a:round/>
-                      <a:headEnd type="none" w="med" len="med"/>
-                      <a:tailEnd type="none" w="med" len="med"/>
-                    </a:lnL>
-                    <a:lnR w="9525" cap="flat" cmpd="sng" algn="ctr">
-                      <a:solidFill>
-                        <a:srgbClr val="BFBFBF"/>
-                      </a:solidFill>
-                      <a:prstDash val="solid"/>
-                      <a:round/>
-                      <a:headEnd type="none" w="med" len="med"/>
-                      <a:tailEnd type="none" w="med" len="med"/>
-                    </a:lnR>
-                    <a:lnT w="9525" cap="flat" cmpd="sng" algn="ctr">
-                      <a:solidFill>
-                        <a:srgbClr val="BFBFBF"/>
-                      </a:solidFill>
-                      <a:prstDash val="solid"/>
-                      <a:round/>
-                      <a:headEnd type="none" w="med" len="med"/>
-                      <a:tailEnd type="none" w="med" len="med"/>
-                    </a:lnT>
-                    <a:lnB w="9525" cap="flat" cmpd="sng" algn="ctr">
-                      <a:solidFill>
-                        <a:srgbClr val="BFBFBF"/>
-                      </a:solidFill>
-                      <a:prstDash val="solid"/>
-                      <a:round/>
-                      <a:headEnd type="none" w="med" len="med"/>
-                      <a:tailEnd type="none" w="med" len="med"/>
-                    </a:lnB>
-                    <a:solidFill>
-                      <a:srgbClr val="FFFFFF"/>
-                    </a:solidFill>
-                  </a:tcPr>
-                </a:tc>
-              </a:tr>
-              <a:tr h="393192">
-                <a:tc>
-                  <a:txBody>
-                    <a:bodyPr/>
-                    <a:lstStyle/>
-                    <a:p>
-                      <a:pPr algn="ctr">
-                        <a:buNone/>
-                      </a:pPr>
-                      <a:r>
-                        <a:rPr lang="ja-JP" altLang="en-US" sz="1200" b="1" dirty="0">
-                          <a:solidFill>
-                            <a:srgbClr val="002060"/>
-                          </a:solidFill>
-                          <a:latin typeface="メイリオ" panose="020B0604030504040204" pitchFamily="50" charset="-128"/>
-                          <a:ea typeface="メイリオ" panose="020B0604030504040204" pitchFamily="50" charset="-128"/>
-                          <a:cs typeface="メイリオ"/>
-                        </a:rPr>
-                        <a:t>LINE運用コンサル（円）</a:t>
-                      </a:r>
-                      <a:endParaRPr lang="ja-JP" altLang="en-US" sz="1200" dirty="0">
-                        <a:latin typeface="メイリオ"/>
-                        <a:ea typeface="メイリオ"/>
-                        <a:cs typeface="メイリオ"/>
-                      </a:endParaRPr>
-                    </a:p>
-                  </a:txBody>
-                  <a:tcPr marL="91440" marR="73152" marT="36576" marB="36576" anchor="ctr">
-                    <a:lnL w="9525" cap="flat" cmpd="sng" algn="ctr">
-                      <a:solidFill>
-                        <a:srgbClr val="BFBFBF"/>
-                      </a:solidFill>
-                      <a:prstDash val="solid"/>
-                      <a:round/>
-                      <a:headEnd type="none" w="med" len="med"/>
-                      <a:tailEnd type="none" w="med" len="med"/>
-                    </a:lnL>
-                    <a:lnR w="9525" cap="flat" cmpd="sng" algn="ctr">
-                      <a:solidFill>
-                        <a:srgbClr val="BFBFBF"/>
-                      </a:solidFill>
-                      <a:prstDash val="solid"/>
-                      <a:round/>
-                      <a:headEnd type="none" w="med" len="med"/>
-                      <a:tailEnd type="none" w="med" len="med"/>
-                    </a:lnR>
-                    <a:lnT w="9525" cap="flat" cmpd="sng" algn="ctr">
-                      <a:solidFill>
-                        <a:srgbClr val="BFBFBF"/>
-                      </a:solidFill>
-                      <a:prstDash val="solid"/>
-                      <a:round/>
-                      <a:headEnd type="none" w="med" len="med"/>
-                      <a:tailEnd type="none" w="med" len="med"/>
-                    </a:lnT>
-                    <a:lnB w="9525" cap="flat" cmpd="sng" algn="ctr">
-                      <a:solidFill>
-                        <a:srgbClr val="BFBFBF"/>
-                      </a:solidFill>
-                      <a:prstDash val="solid"/>
-                      <a:round/>
-                      <a:headEnd type="none" w="med" len="med"/>
-                      <a:tailEnd type="none" w="med" len="med"/>
-                    </a:lnB>
-                    <a:solidFill>
-                      <a:srgbClr val="F2F2F2"/>
-                    </a:solidFill>
-                  </a:tcPr>
-                </a:tc>
-                <a:tc>
-                  <a:txBody>
-                    <a:bodyPr/>
-                    <a:lstStyle/>
-                    <a:p>
-                      <a:pPr algn="ctr">
-                        <a:buNone/>
-                      </a:pPr>
-                      <a:r>
-                        <a:rPr lang="ja-JP" altLang="en-US" sz="1300" b="0" dirty="0">
-                          <a:solidFill>
-                            <a:srgbClr val="333333"/>
-                          </a:solidFill>
-                          <a:latin typeface="メイリオ" panose="020B0604030504040204" pitchFamily="50" charset="-128"/>
-                          <a:ea typeface="メイリオ" panose="020B0604030504040204" pitchFamily="50" charset="-128"/>
-                          <a:cs typeface="メイリオ"/>
-                        </a:rPr>
-                        <a:t>100,000</a:t>
-                      </a:r>
-                      <a:endParaRPr lang="ja-JP" altLang="en-US" sz="1300" dirty="0">
-                        <a:latin typeface="メイリオ"/>
-                        <a:ea typeface="メイリオ"/>
-                        <a:cs typeface="メイリオ"/>
-                      </a:endParaRPr>
-                    </a:p>
-                  </a:txBody>
-                  <a:tcPr marL="91440" marR="73152" marT="36576" marB="36576" anchor="ctr">
-                    <a:lnL w="9525" cap="flat" cmpd="sng" algn="ctr">
-                      <a:solidFill>
-                        <a:srgbClr val="BFBFBF"/>
-                      </a:solidFill>
-                      <a:prstDash val="solid"/>
-                      <a:round/>
-                      <a:headEnd type="none" w="med" len="med"/>
-                      <a:tailEnd type="none" w="med" len="med"/>
-                    </a:lnL>
-                    <a:lnR w="9525" cap="flat" cmpd="sng" algn="ctr">
-                      <a:solidFill>
-                        <a:srgbClr val="BFBFBF"/>
-                      </a:solidFill>
-                      <a:prstDash val="solid"/>
-                      <a:round/>
-                      <a:headEnd type="none" w="med" len="med"/>
-                      <a:tailEnd type="none" w="med" len="med"/>
-                    </a:lnR>
-                    <a:lnT w="9525" cap="flat" cmpd="sng" algn="ctr">
-                      <a:solidFill>
-                        <a:srgbClr val="BFBFBF"/>
-                      </a:solidFill>
-                      <a:prstDash val="solid"/>
-                      <a:round/>
-                      <a:headEnd type="none" w="med" len="med"/>
-                      <a:tailEnd type="none" w="med" len="med"/>
-                    </a:lnT>
-                    <a:lnB w="9525" cap="flat" cmpd="sng" algn="ctr">
-                      <a:solidFill>
-                        <a:srgbClr val="BFBFBF"/>
-                      </a:solidFill>
-                      <a:prstDash val="solid"/>
-                      <a:round/>
-                      <a:headEnd type="none" w="med" len="med"/>
-                      <a:tailEnd type="none" w="med" len="med"/>
-                    </a:lnB>
-                    <a:solidFill>
-                      <a:srgbClr val="FFFFFF"/>
-                    </a:solidFill>
-                  </a:tcPr>
-                </a:tc>
-                <a:tc>
-                  <a:txBody>
-                    <a:bodyPr/>
-                    <a:lstStyle/>
-                    <a:p>
-                      <a:pPr algn="ctr">
-                        <a:buNone/>
-                      </a:pPr>
-                      <a:r>
-                        <a:rPr lang="ja-JP" altLang="en-US" sz="1300" b="0" dirty="0">
-                          <a:solidFill>
-                            <a:srgbClr val="333333"/>
-                          </a:solidFill>
-                          <a:latin typeface="メイリオ" panose="020B0604030504040204" pitchFamily="50" charset="-128"/>
-                          <a:ea typeface="メイリオ" panose="020B0604030504040204" pitchFamily="50" charset="-128"/>
-                          <a:cs typeface="メイリオ"/>
-                        </a:rPr>
-                        <a:t>300,000</a:t>
-                      </a:r>
-                      <a:endParaRPr lang="ja-JP" altLang="en-US" sz="1300" dirty="0">
-                        <a:latin typeface="メイリオ"/>
-                        <a:ea typeface="メイリオ"/>
-                        <a:cs typeface="メイリオ"/>
-                      </a:endParaRPr>
-                    </a:p>
-                  </a:txBody>
-                  <a:tcPr marL="91440" marR="73152" marT="36576" marB="36576" anchor="ctr">
-                    <a:lnL w="9525" cap="flat" cmpd="sng" algn="ctr">
-                      <a:solidFill>
-                        <a:srgbClr val="BFBFBF"/>
-                      </a:solidFill>
-                      <a:prstDash val="solid"/>
-                      <a:round/>
-                      <a:headEnd type="none" w="med" len="med"/>
-                      <a:tailEnd type="none" w="med" len="med"/>
-                    </a:lnL>
-                    <a:lnR w="9525" cap="flat" cmpd="sng" algn="ctr">
-                      <a:solidFill>
-                        <a:srgbClr val="BFBFBF"/>
-                      </a:solidFill>
-                      <a:prstDash val="solid"/>
-                      <a:round/>
-                      <a:headEnd type="none" w="med" len="med"/>
-                      <a:tailEnd type="none" w="med" len="med"/>
-                    </a:lnR>
-                    <a:lnT w="9525" cap="flat" cmpd="sng" algn="ctr">
-                      <a:solidFill>
-                        <a:srgbClr val="BFBFBF"/>
-                      </a:solidFill>
-                      <a:prstDash val="solid"/>
-                      <a:round/>
-                      <a:headEnd type="none" w="med" len="med"/>
-                      <a:tailEnd type="none" w="med" len="med"/>
-                    </a:lnT>
-                    <a:lnB w="9525" cap="flat" cmpd="sng" algn="ctr">
-                      <a:solidFill>
-                        <a:srgbClr val="BFBFBF"/>
-                      </a:solidFill>
-                      <a:prstDash val="solid"/>
-                      <a:round/>
-                      <a:headEnd type="none" w="med" len="med"/>
-                      <a:tailEnd type="none" w="med" len="med"/>
-                    </a:lnB>
-                    <a:solidFill>
-                      <a:srgbClr val="FFFFFF"/>
-                    </a:solidFill>
-                  </a:tcPr>
-                </a:tc>
-                <a:tc>
-                  <a:txBody>
-                    <a:bodyPr/>
-                    <a:lstStyle/>
-                    <a:p>
-                      <a:pPr algn="ctr">
-                        <a:buNone/>
-                      </a:pPr>
-                      <a:r>
-                        <a:rPr lang="ja-JP" altLang="en-US" sz="1300" b="0" dirty="0">
-                          <a:solidFill>
-                            <a:srgbClr val="333333"/>
-                          </a:solidFill>
-                          <a:latin typeface="メイリオ" panose="020B0604030504040204" pitchFamily="50" charset="-128"/>
-                          <a:ea typeface="メイリオ" panose="020B0604030504040204" pitchFamily="50" charset="-128"/>
-                          <a:cs typeface="メイリオ"/>
-                        </a:rPr>
-                        <a:t>100,000</a:t>
-                      </a:r>
-                      <a:endParaRPr lang="ja-JP" altLang="en-US" sz="1300" dirty="0">
-                        <a:latin typeface="メイリオ"/>
-                        <a:ea typeface="メイリオ"/>
-                        <a:cs typeface="メイリオ"/>
-                      </a:endParaRPr>
-                    </a:p>
-                  </a:txBody>
-                  <a:tcPr marL="91440" marR="73152" marT="36576" marB="36576" anchor="ctr">
-                    <a:lnL w="9525" cap="flat" cmpd="sng" algn="ctr">
-                      <a:solidFill>
-                        <a:srgbClr val="BFBFBF"/>
-                      </a:solidFill>
-                      <a:prstDash val="solid"/>
-                      <a:round/>
-                      <a:headEnd type="none" w="med" len="med"/>
-                      <a:tailEnd type="none" w="med" len="med"/>
-                    </a:lnL>
-                    <a:lnR w="9525" cap="flat" cmpd="sng" algn="ctr">
-                      <a:solidFill>
-                        <a:srgbClr val="BFBFBF"/>
-                      </a:solidFill>
-                      <a:prstDash val="solid"/>
-                      <a:round/>
-                      <a:headEnd type="none" w="med" len="med"/>
-                      <a:tailEnd type="none" w="med" len="med"/>
-                    </a:lnR>
-                    <a:lnT w="9525" cap="flat" cmpd="sng" algn="ctr">
-                      <a:solidFill>
-                        <a:srgbClr val="BFBFBF"/>
-                      </a:solidFill>
-                      <a:prstDash val="solid"/>
-                      <a:round/>
-                      <a:headEnd type="none" w="med" len="med"/>
-                      <a:tailEnd type="none" w="med" len="med"/>
-                    </a:lnT>
-                    <a:lnB w="9525" cap="flat" cmpd="sng" algn="ctr">
-                      <a:solidFill>
-                        <a:srgbClr val="BFBFBF"/>
-                      </a:solidFill>
-                      <a:prstDash val="solid"/>
-                      <a:round/>
-                      <a:headEnd type="none" w="med" len="med"/>
-                      <a:tailEnd type="none" w="med" len="med"/>
-                    </a:lnB>
-                    <a:solidFill>
-                      <a:srgbClr val="FFFFFF"/>
-                    </a:solidFill>
-                  </a:tcPr>
-                </a:tc>
-                <a:tc>
-                  <a:txBody>
-                    <a:bodyPr/>
-                    <a:lstStyle/>
-                    <a:p>
-                      <a:pPr algn="ctr">
-                        <a:buNone/>
-                      </a:pPr>
-                      <a:r>
-                        <a:rPr lang="ja-JP" altLang="en-US" sz="1300" b="0" dirty="0">
-                          <a:solidFill>
-                            <a:srgbClr val="333333"/>
-                          </a:solidFill>
-                          <a:latin typeface="メイリオ" panose="020B0604030504040204" pitchFamily="50" charset="-128"/>
-                          <a:ea typeface="メイリオ" panose="020B0604030504040204" pitchFamily="50" charset="-128"/>
-                          <a:cs typeface="メイリオ"/>
-                        </a:rPr>
-                        <a:t>100,000</a:t>
-                      </a:r>
-                      <a:endParaRPr lang="ja-JP" altLang="en-US" sz="1300" dirty="0">
-                        <a:latin typeface="メイリオ"/>
-                        <a:ea typeface="メイリオ"/>
-                        <a:cs typeface="メイリオ"/>
-                      </a:endParaRPr>
-                    </a:p>
-                  </a:txBody>
-                  <a:tcPr marL="91440" marR="73152" marT="36576" marB="36576" anchor="ctr">
-                    <a:lnL w="9525" cap="flat" cmpd="sng" algn="ctr">
-                      <a:solidFill>
-                        <a:srgbClr val="BFBFBF"/>
-                      </a:solidFill>
-                      <a:prstDash val="solid"/>
-                      <a:round/>
-                      <a:headEnd type="none" w="med" len="med"/>
-                      <a:tailEnd type="none" w="med" len="med"/>
-                    </a:lnL>
-                    <a:lnR w="9525" cap="flat" cmpd="sng" algn="ctr">
-                      <a:solidFill>
-                        <a:srgbClr val="BFBFBF"/>
-                      </a:solidFill>
-                      <a:prstDash val="solid"/>
-                      <a:round/>
-                      <a:headEnd type="none" w="med" len="med"/>
-                      <a:tailEnd type="none" w="med" len="med"/>
-                    </a:lnR>
-                    <a:lnT w="9525" cap="flat" cmpd="sng" algn="ctr">
-                      <a:solidFill>
-                        <a:srgbClr val="BFBFBF"/>
-                      </a:solidFill>
-                      <a:prstDash val="solid"/>
-                      <a:round/>
-                      <a:headEnd type="none" w="med" len="med"/>
-                      <a:tailEnd type="none" w="med" len="med"/>
-                    </a:lnT>
-                    <a:lnB w="9525" cap="flat" cmpd="sng" algn="ctr">
-                      <a:solidFill>
-                        <a:srgbClr val="BFBFBF"/>
-                      </a:solidFill>
-                      <a:prstDash val="solid"/>
-                      <a:round/>
-                      <a:headEnd type="none" w="med" len="med"/>
-                      <a:tailEnd type="none" w="med" len="med"/>
-                    </a:lnB>
-                    <a:solidFill>
-                      <a:srgbClr val="FFFFFF"/>
-                    </a:solidFill>
-                  </a:tcPr>
-                </a:tc>
-                <a:tc>
-                  <a:txBody>
-                    <a:bodyPr/>
-                    <a:lstStyle/>
-                    <a:p>
-                      <a:pPr algn="ctr">
-                        <a:buNone/>
-                      </a:pPr>
-                      <a:r>
-                        <a:rPr lang="ja-JP" altLang="en-US" sz="1300" b="0" dirty="0">
-                          <a:solidFill>
-                            <a:srgbClr val="333333"/>
-                          </a:solidFill>
-                          <a:latin typeface="メイリオ" panose="020B0604030504040204" pitchFamily="50" charset="-128"/>
-                          <a:ea typeface="メイリオ" panose="020B0604030504040204" pitchFamily="50" charset="-128"/>
-                          <a:cs typeface="メイリオ"/>
-                        </a:rPr>
-                        <a:t>300,000</a:t>
-                      </a:r>
-                      <a:endParaRPr lang="ja-JP" altLang="en-US" sz="1300" dirty="0">
-                        <a:latin typeface="メイリオ"/>
-                        <a:ea typeface="メイリオ"/>
-                        <a:cs typeface="メイリオ"/>
-                      </a:endParaRPr>
-                    </a:p>
-                  </a:txBody>
-                  <a:tcPr marL="91440" marR="73152" marT="36576" marB="36576" anchor="ctr">
-                    <a:lnL w="9525" cap="flat" cmpd="sng" algn="ctr">
-                      <a:solidFill>
-                        <a:srgbClr val="BFBFBF"/>
-                      </a:solidFill>
-                      <a:prstDash val="solid"/>
-                      <a:round/>
-                      <a:headEnd type="none" w="med" len="med"/>
-                      <a:tailEnd type="none" w="med" len="med"/>
-                    </a:lnL>
-                    <a:lnR w="9525" cap="flat" cmpd="sng" algn="ctr">
-                      <a:solidFill>
-                        <a:srgbClr val="BFBFBF"/>
-                      </a:solidFill>
-                      <a:prstDash val="solid"/>
-                      <a:round/>
-                      <a:headEnd type="none" w="med" len="med"/>
-                      <a:tailEnd type="none" w="med" len="med"/>
-                    </a:lnR>
-                    <a:lnT w="9525" cap="flat" cmpd="sng" algn="ctr">
-                      <a:solidFill>
-                        <a:srgbClr val="BFBFBF"/>
-                      </a:solidFill>
-                      <a:prstDash val="solid"/>
-                      <a:round/>
-                      <a:headEnd type="none" w="med" len="med"/>
-                      <a:tailEnd type="none" w="med" len="med"/>
-                    </a:lnT>
-                    <a:lnB w="9525" cap="flat" cmpd="sng" algn="ctr">
-                      <a:solidFill>
-                        <a:srgbClr val="BFBFBF"/>
-                      </a:solidFill>
-                      <a:prstDash val="solid"/>
-                      <a:round/>
-                      <a:headEnd type="none" w="med" len="med"/>
-                      <a:tailEnd type="none" w="med" len="med"/>
-                    </a:lnB>
-                    <a:solidFill>
-                      <a:srgbClr val="FFFFFF"/>
-                    </a:solidFill>
-                  </a:tcPr>
-                </a:tc>
-                <a:tc>
-                  <a:txBody>
-                    <a:bodyPr/>
-                    <a:lstStyle/>
-                    <a:p>
-                      <a:pPr algn="ctr">
-                        <a:buNone/>
-                      </a:pPr>
-                      <a:r>
-                        <a:rPr lang="ja-JP" altLang="en-US" sz="1300" b="0" dirty="0">
-                          <a:solidFill>
-                            <a:srgbClr val="333333"/>
-                          </a:solidFill>
-                          <a:latin typeface="メイリオ" panose="020B0604030504040204" pitchFamily="50" charset="-128"/>
-                          <a:ea typeface="メイリオ" panose="020B0604030504040204" pitchFamily="50" charset="-128"/>
-                          <a:cs typeface="メイリオ"/>
-                        </a:rPr>
-                        <a:t>100,000</a:t>
-                      </a:r>
-                      <a:endParaRPr lang="ja-JP" altLang="en-US" sz="1300" dirty="0">
-                        <a:latin typeface="メイリオ"/>
-                        <a:ea typeface="メイリオ"/>
-                        <a:cs typeface="メイリオ"/>
-                      </a:endParaRPr>
-                    </a:p>
-                  </a:txBody>
-                  <a:tcPr marL="91440" marR="73152" marT="36576" marB="36576" anchor="ctr">
-                    <a:lnL w="9525" cap="flat" cmpd="sng" algn="ctr">
-                      <a:solidFill>
-                        <a:srgbClr val="BFBFBF"/>
-                      </a:solidFill>
-                      <a:prstDash val="solid"/>
-                      <a:round/>
-                      <a:headEnd type="none" w="med" len="med"/>
-                      <a:tailEnd type="none" w="med" len="med"/>
-                    </a:lnL>
-                    <a:lnR w="9525" cap="flat" cmpd="sng" algn="ctr">
-                      <a:solidFill>
-                        <a:srgbClr val="BFBFBF"/>
-                      </a:solidFill>
-                      <a:prstDash val="solid"/>
-                      <a:round/>
-                      <a:headEnd type="none" w="med" len="med"/>
-                      <a:tailEnd type="none" w="med" len="med"/>
-                    </a:lnR>
-                    <a:lnT w="9525" cap="flat" cmpd="sng" algn="ctr">
-                      <a:solidFill>
-                        <a:srgbClr val="BFBFBF"/>
-                      </a:solidFill>
-                      <a:prstDash val="solid"/>
-                      <a:round/>
-                      <a:headEnd type="none" w="med" len="med"/>
-                      <a:tailEnd type="none" w="med" len="med"/>
-                    </a:lnT>
-                    <a:lnB w="9525" cap="flat" cmpd="sng" algn="ctr">
-                      <a:solidFill>
-                        <a:srgbClr val="BFBFBF"/>
-                      </a:solidFill>
-                      <a:prstDash val="solid"/>
-                      <a:round/>
-                      <a:headEnd type="none" w="med" len="med"/>
-                      <a:tailEnd type="none" w="med" len="med"/>
-                    </a:lnB>
-                    <a:solidFill>
-                      <a:srgbClr val="FFFFFF"/>
-                    </a:solidFill>
-                  </a:tcPr>
-                </a:tc>
-                <a:tc>
-                  <a:txBody>
-                    <a:bodyPr/>
-                    <a:lstStyle/>
-                    <a:p>
-                      <a:pPr algn="ctr">
-                        <a:buNone/>
-                      </a:pPr>
-                      <a:r>
-                        <a:rPr lang="ja-JP" altLang="en-US" sz="1300" b="0" dirty="0">
-                          <a:solidFill>
-                            <a:srgbClr val="333333"/>
-                          </a:solidFill>
-                          <a:latin typeface="メイリオ" panose="020B0604030504040204" pitchFamily="50" charset="-128"/>
-                          <a:ea typeface="メイリオ" panose="020B0604030504040204" pitchFamily="50" charset="-128"/>
-                          <a:cs typeface="メイリオ"/>
-                        </a:rPr>
-                        <a:t>100,000</a:t>
-                      </a:r>
-                      <a:endParaRPr lang="ja-JP" altLang="en-US" sz="1300" dirty="0">
-                        <a:latin typeface="メイリオ"/>
-                        <a:ea typeface="メイリオ"/>
-                        <a:cs typeface="メイリオ"/>
-                      </a:endParaRPr>
-                    </a:p>
-                  </a:txBody>
-                  <a:tcPr marL="91440" marR="73152" marT="36576" marB="36576" anchor="ctr">
-                    <a:lnL w="9525" cap="flat" cmpd="sng" algn="ctr">
-                      <a:solidFill>
-                        <a:srgbClr val="BFBFBF"/>
-                      </a:solidFill>
-                      <a:prstDash val="solid"/>
-                      <a:round/>
-                      <a:headEnd type="none" w="med" len="med"/>
-                      <a:tailEnd type="none" w="med" len="med"/>
-                    </a:lnL>
-                    <a:lnR w="9525" cap="flat" cmpd="sng" algn="ctr">
-                      <a:solidFill>
-                        <a:srgbClr val="BFBFBF"/>
-                      </a:solidFill>
-                      <a:prstDash val="solid"/>
-                      <a:round/>
-                      <a:headEnd type="none" w="med" len="med"/>
-                      <a:tailEnd type="none" w="med" len="med"/>
-                    </a:lnR>
-                    <a:lnT w="9525" cap="flat" cmpd="sng" algn="ctr">
-                      <a:solidFill>
-                        <a:srgbClr val="BFBFBF"/>
-                      </a:solidFill>
-                      <a:prstDash val="solid"/>
-                      <a:round/>
-                      <a:headEnd type="none" w="med" len="med"/>
-                      <a:tailEnd type="none" w="med" len="med"/>
-                    </a:lnT>
-                    <a:lnB w="9525" cap="flat" cmpd="sng" algn="ctr">
-                      <a:solidFill>
-                        <a:srgbClr val="BFBFBF"/>
-                      </a:solidFill>
-                      <a:prstDash val="solid"/>
-                      <a:round/>
-                      <a:headEnd type="none" w="med" len="med"/>
-                      <a:tailEnd type="none" w="med" len="med"/>
-                    </a:lnB>
-                    <a:solidFill>
-                      <a:srgbClr val="FFFFFF"/>
-                    </a:solidFill>
-                  </a:tcPr>
-                </a:tc>
-              </a:tr>
-              <a:tr h="393192">
-                <a:tc>
-                  <a:txBody>
-                    <a:bodyPr/>
-                    <a:lstStyle/>
-                    <a:p>
-                      <a:pPr algn="ctr">
-                        <a:buNone/>
-                      </a:pPr>
-                      <a:r>
-                        <a:rPr lang="ja-JP" altLang="en-US" sz="1200" b="1" dirty="0">
-                          <a:solidFill>
-                            <a:srgbClr val="002060"/>
-                          </a:solidFill>
-                          <a:latin typeface="メイリオ" panose="020B0604030504040204" pitchFamily="50" charset="-128"/>
-                          <a:ea typeface="メイリオ" panose="020B0604030504040204" pitchFamily="50" charset="-128"/>
-                          <a:cs typeface="メイリオ"/>
-                        </a:rPr>
-                        <a:t>ツール（円）</a:t>
-                      </a:r>
-                      <a:endParaRPr lang="ja-JP" altLang="en-US" sz="1200" dirty="0">
-                        <a:latin typeface="メイリオ"/>
-                        <a:ea typeface="メイリオ"/>
-                        <a:cs typeface="メイリオ"/>
-                      </a:endParaRPr>
-                    </a:p>
-                  </a:txBody>
-                  <a:tcPr marL="91440" marR="73152" marT="36576" marB="36576" anchor="ctr">
-                    <a:lnL w="9525" cap="flat" cmpd="sng" algn="ctr">
-                      <a:solidFill>
-                        <a:srgbClr val="BFBFBF"/>
-                      </a:solidFill>
-                      <a:prstDash val="solid"/>
-                      <a:round/>
-                      <a:headEnd type="none" w="med" len="med"/>
-                      <a:tailEnd type="none" w="med" len="med"/>
-                    </a:lnL>
-                    <a:lnR w="9525" cap="flat" cmpd="sng" algn="ctr">
-                      <a:solidFill>
-                        <a:srgbClr val="BFBFBF"/>
-                      </a:solidFill>
-                      <a:prstDash val="solid"/>
-                      <a:round/>
-                      <a:headEnd type="none" w="med" len="med"/>
-                      <a:tailEnd type="none" w="med" len="med"/>
-                    </a:lnR>
-                    <a:lnT w="9525" cap="flat" cmpd="sng" algn="ctr">
-                      <a:solidFill>
-                        <a:srgbClr val="BFBFBF"/>
-                      </a:solidFill>
-                      <a:prstDash val="solid"/>
-                      <a:round/>
-                      <a:headEnd type="none" w="med" len="med"/>
-                      <a:tailEnd type="none" w="med" len="med"/>
-                    </a:lnT>
-                    <a:lnB w="9525" cap="flat" cmpd="sng" algn="ctr">
-                      <a:solidFill>
-                        <a:srgbClr val="BFBFBF"/>
-                      </a:solidFill>
-                      <a:prstDash val="solid"/>
-                      <a:round/>
-                      <a:headEnd type="none" w="med" len="med"/>
-                      <a:tailEnd type="none" w="med" len="med"/>
-                    </a:lnB>
-                    <a:solidFill>
-                      <a:srgbClr val="F2F2F2"/>
-                    </a:solidFill>
-                  </a:tcPr>
-                </a:tc>
-                <a:tc>
-                  <a:txBody>
-                    <a:bodyPr/>
-                    <a:lstStyle/>
-                    <a:p>
-                      <a:pPr algn="ctr">
-                        <a:buNone/>
-                      </a:pPr>
-                      <a:r>
-                        <a:rPr lang="ja-JP" altLang="en-US" sz="1300" b="0" dirty="0">
-                          <a:solidFill>
-                            <a:srgbClr val="333333"/>
-                          </a:solidFill>
-                          <a:latin typeface="メイリオ" panose="020B0604030504040204" pitchFamily="50" charset="-128"/>
-                          <a:ea typeface="メイリオ" panose="020B0604030504040204" pitchFamily="50" charset="-128"/>
-                          <a:cs typeface="メイリオ"/>
-                        </a:rPr>
-                        <a:t>165,000</a:t>
-                      </a:r>
-                      <a:endParaRPr lang="ja-JP" altLang="en-US" sz="1300" dirty="0">
-                        <a:latin typeface="メイリオ"/>
-                        <a:ea typeface="メイリオ"/>
-                        <a:cs typeface="メイリオ"/>
-                      </a:endParaRPr>
-                    </a:p>
-                  </a:txBody>
-                  <a:tcPr marL="91440" marR="73152" marT="36576" marB="36576" anchor="ctr">
-                    <a:lnL w="9525" cap="flat" cmpd="sng" algn="ctr">
-                      <a:solidFill>
-                        <a:srgbClr val="BFBFBF"/>
-                      </a:solidFill>
-                      <a:prstDash val="solid"/>
-                      <a:round/>
-                      <a:headEnd type="none" w="med" len="med"/>
-                      <a:tailEnd type="none" w="med" len="med"/>
-                    </a:lnL>
-                    <a:lnR w="9525" cap="flat" cmpd="sng" algn="ctr">
-                      <a:solidFill>
-                        <a:srgbClr val="BFBFBF"/>
-                      </a:solidFill>
-                      <a:prstDash val="solid"/>
-                      <a:round/>
-                      <a:headEnd type="none" w="med" len="med"/>
-                      <a:tailEnd type="none" w="med" len="med"/>
-                    </a:lnR>
-                    <a:lnT w="9525" cap="flat" cmpd="sng" algn="ctr">
-                      <a:solidFill>
-                        <a:srgbClr val="BFBFBF"/>
-                      </a:solidFill>
-                      <a:prstDash val="solid"/>
-                      <a:round/>
-                      <a:headEnd type="none" w="med" len="med"/>
-                      <a:tailEnd type="none" w="med" len="med"/>
-                    </a:lnT>
-                    <a:lnB w="9525" cap="flat" cmpd="sng" algn="ctr">
-                      <a:solidFill>
-                        <a:srgbClr val="BFBFBF"/>
-                      </a:solidFill>
-                      <a:prstDash val="solid"/>
-                      <a:round/>
-                      <a:headEnd type="none" w="med" len="med"/>
-                      <a:tailEnd type="none" w="med" len="med"/>
-                    </a:lnB>
-                    <a:solidFill>
-                      <a:srgbClr val="FFFFFF"/>
-                    </a:solidFill>
-                  </a:tcPr>
-                </a:tc>
-                <a:tc>
-                  <a:txBody>
-                    <a:bodyPr/>
-                    <a:lstStyle/>
-                    <a:p>
-                      <a:pPr algn="ctr">
-                        <a:buNone/>
-                      </a:pPr>
-                      <a:r>
-                        <a:rPr lang="ja-JP" altLang="en-US" sz="1300" b="0" dirty="0">
-                          <a:solidFill>
-                            <a:srgbClr val="333333"/>
-                          </a:solidFill>
-                          <a:latin typeface="メイリオ" panose="020B0604030504040204" pitchFamily="50" charset="-128"/>
-                          <a:ea typeface="メイリオ" panose="020B0604030504040204" pitchFamily="50" charset="-128"/>
-                          <a:cs typeface="メイリオ"/>
-                        </a:rPr>
-                        <a:t>60,000</a:t>
-                      </a:r>
-                      <a:endParaRPr lang="ja-JP" altLang="en-US" sz="1300" dirty="0">
-                        <a:latin typeface="メイリオ"/>
-                        <a:ea typeface="メイリオ"/>
-                        <a:cs typeface="メイリオ"/>
-                      </a:endParaRPr>
-                    </a:p>
-                  </a:txBody>
-                  <a:tcPr marL="91440" marR="73152" marT="36576" marB="36576" anchor="ctr">
-                    <a:lnL w="9525" cap="flat" cmpd="sng" algn="ctr">
-                      <a:solidFill>
-                        <a:srgbClr val="BFBFBF"/>
-                      </a:solidFill>
-                      <a:prstDash val="solid"/>
-                      <a:round/>
-                      <a:headEnd type="none" w="med" len="med"/>
-                      <a:tailEnd type="none" w="med" len="med"/>
-                    </a:lnL>
-                    <a:lnR w="9525" cap="flat" cmpd="sng" algn="ctr">
-                      <a:solidFill>
-                        <a:srgbClr val="BFBFBF"/>
-                      </a:solidFill>
-                      <a:prstDash val="solid"/>
-                      <a:round/>
-                      <a:headEnd type="none" w="med" len="med"/>
-                      <a:tailEnd type="none" w="med" len="med"/>
-                    </a:lnR>
-                    <a:lnT w="9525" cap="flat" cmpd="sng" algn="ctr">
-                      <a:solidFill>
-                        <a:srgbClr val="BFBFBF"/>
-                      </a:solidFill>
-                      <a:prstDash val="solid"/>
-                      <a:round/>
-                      <a:headEnd type="none" w="med" len="med"/>
-                      <a:tailEnd type="none" w="med" len="med"/>
-                    </a:lnT>
-                    <a:lnB w="9525" cap="flat" cmpd="sng" algn="ctr">
-                      <a:solidFill>
-                        <a:srgbClr val="BFBFBF"/>
-                      </a:solidFill>
-                      <a:prstDash val="solid"/>
-                      <a:round/>
-                      <a:headEnd type="none" w="med" len="med"/>
-                      <a:tailEnd type="none" w="med" len="med"/>
-                    </a:lnB>
-                    <a:solidFill>
-                      <a:srgbClr val="FFFFFF"/>
-                    </a:solidFill>
-                  </a:tcPr>
-                </a:tc>
-                <a:tc>
-                  <a:txBody>
-                    <a:bodyPr/>
-                    <a:lstStyle/>
-                    <a:p>
-                      <a:pPr algn="ctr">
-                        <a:buNone/>
-                      </a:pPr>
-                      <a:r>
-                        <a:rPr lang="ja-JP" altLang="en-US" sz="1300" b="0" dirty="0">
-                          <a:solidFill>
-                            <a:srgbClr val="333333"/>
-                          </a:solidFill>
-                          <a:latin typeface="メイリオ" panose="020B0604030504040204" pitchFamily="50" charset="-128"/>
-                          <a:ea typeface="メイリオ" panose="020B0604030504040204" pitchFamily="50" charset="-128"/>
-                          <a:cs typeface="メイリオ"/>
-                        </a:rPr>
-                        <a:t>60,000</a:t>
-                      </a:r>
-                      <a:endParaRPr lang="ja-JP" altLang="en-US" sz="1300" dirty="0">
-                        <a:latin typeface="メイリオ"/>
-                        <a:ea typeface="メイリオ"/>
-                        <a:cs typeface="メイリオ"/>
-                      </a:endParaRPr>
-                    </a:p>
-                  </a:txBody>
-                  <a:tcPr marL="91440" marR="73152" marT="36576" marB="36576" anchor="ctr">
-                    <a:lnL w="9525" cap="flat" cmpd="sng" algn="ctr">
-                      <a:solidFill>
-                        <a:srgbClr val="BFBFBF"/>
-                      </a:solidFill>
-                      <a:prstDash val="solid"/>
-                      <a:round/>
-                      <a:headEnd type="none" w="med" len="med"/>
-                      <a:tailEnd type="none" w="med" len="med"/>
-                    </a:lnL>
-                    <a:lnR w="9525" cap="flat" cmpd="sng" algn="ctr">
-                      <a:solidFill>
-                        <a:srgbClr val="BFBFBF"/>
-                      </a:solidFill>
-                      <a:prstDash val="solid"/>
-                      <a:round/>
-                      <a:headEnd type="none" w="med" len="med"/>
-                      <a:tailEnd type="none" w="med" len="med"/>
-                    </a:lnR>
-                    <a:lnT w="9525" cap="flat" cmpd="sng" algn="ctr">
-                      <a:solidFill>
-                        <a:srgbClr val="BFBFBF"/>
-                      </a:solidFill>
-                      <a:prstDash val="solid"/>
-                      <a:round/>
-                      <a:headEnd type="none" w="med" len="med"/>
-                      <a:tailEnd type="none" w="med" len="med"/>
-                    </a:lnT>
-                    <a:lnB w="9525" cap="flat" cmpd="sng" algn="ctr">
-                      <a:solidFill>
-                        <a:srgbClr val="BFBFBF"/>
-                      </a:solidFill>
-                      <a:prstDash val="solid"/>
-                      <a:round/>
-                      <a:headEnd type="none" w="med" len="med"/>
-                      <a:tailEnd type="none" w="med" len="med"/>
-                    </a:lnB>
-                    <a:solidFill>
-                      <a:srgbClr val="FFFFFF"/>
-                    </a:solidFill>
-                  </a:tcPr>
-                </a:tc>
-                <a:tc>
-                  <a:txBody>
-                    <a:bodyPr/>
-                    <a:lstStyle/>
-                    <a:p>
-                      <a:pPr algn="ctr">
-                        <a:buNone/>
-                      </a:pPr>
-                      <a:r>
-                        <a:rPr lang="ja-JP" altLang="en-US" sz="1300" b="0" dirty="0">
-                          <a:solidFill>
-                            <a:srgbClr val="333333"/>
-                          </a:solidFill>
-                          <a:latin typeface="メイリオ" panose="020B0604030504040204" pitchFamily="50" charset="-128"/>
-                          <a:ea typeface="メイリオ" panose="020B0604030504040204" pitchFamily="50" charset="-128"/>
-                          <a:cs typeface="メイリオ"/>
-                        </a:rPr>
-                        <a:t>60,000</a:t>
-                      </a:r>
-                      <a:endParaRPr lang="ja-JP" altLang="en-US" sz="1300" dirty="0">
-                        <a:latin typeface="メイリオ"/>
-                        <a:ea typeface="メイリオ"/>
-                        <a:cs typeface="メイリオ"/>
-                      </a:endParaRPr>
-                    </a:p>
-                  </a:txBody>
-                  <a:tcPr marL="91440" marR="73152" marT="36576" marB="36576" anchor="ctr">
-                    <a:lnL w="9525" cap="flat" cmpd="sng" algn="ctr">
-                      <a:solidFill>
-                        <a:srgbClr val="BFBFBF"/>
-                      </a:solidFill>
-                      <a:prstDash val="solid"/>
-                      <a:round/>
-                      <a:headEnd type="none" w="med" len="med"/>
-                      <a:tailEnd type="none" w="med" len="med"/>
-                    </a:lnL>
-                    <a:lnR w="9525" cap="flat" cmpd="sng" algn="ctr">
-                      <a:solidFill>
-                        <a:srgbClr val="BFBFBF"/>
-                      </a:solidFill>
-                      <a:prstDash val="solid"/>
-                      <a:round/>
-                      <a:headEnd type="none" w="med" len="med"/>
-                      <a:tailEnd type="none" w="med" len="med"/>
-                    </a:lnR>
-                    <a:lnT w="9525" cap="flat" cmpd="sng" algn="ctr">
-                      <a:solidFill>
-                        <a:srgbClr val="BFBFBF"/>
-                      </a:solidFill>
-                      <a:prstDash val="solid"/>
-                      <a:round/>
-                      <a:headEnd type="none" w="med" len="med"/>
-                      <a:tailEnd type="none" w="med" len="med"/>
-                    </a:lnT>
-                    <a:lnB w="9525" cap="flat" cmpd="sng" algn="ctr">
-                      <a:solidFill>
-                        <a:srgbClr val="BFBFBF"/>
-                      </a:solidFill>
-                      <a:prstDash val="solid"/>
-                      <a:round/>
-                      <a:headEnd type="none" w="med" len="med"/>
-                      <a:tailEnd type="none" w="med" len="med"/>
-                    </a:lnB>
-                    <a:solidFill>
-                      <a:srgbClr val="FFFFFF"/>
-                    </a:solidFill>
-                  </a:tcPr>
-                </a:tc>
-                <a:tc>
-                  <a:txBody>
-                    <a:bodyPr/>
-                    <a:lstStyle/>
-                    <a:p>
-                      <a:pPr algn="ctr">
-                        <a:buNone/>
-                      </a:pPr>
-                      <a:r>
-                        <a:rPr lang="ja-JP" altLang="en-US" sz="1300" b="0" dirty="0">
-                          <a:solidFill>
-                            <a:srgbClr val="333333"/>
-                          </a:solidFill>
-                          <a:latin typeface="メイリオ" panose="020B0604030504040204" pitchFamily="50" charset="-128"/>
-                          <a:ea typeface="メイリオ" panose="020B0604030504040204" pitchFamily="50" charset="-128"/>
-                          <a:cs typeface="メイリオ"/>
-                        </a:rPr>
-                        <a:t>60,000</a:t>
-                      </a:r>
-                      <a:endParaRPr lang="ja-JP" altLang="en-US" sz="1300" dirty="0">
-                        <a:latin typeface="メイリオ"/>
-                        <a:ea typeface="メイリオ"/>
-                        <a:cs typeface="メイリオ"/>
-                      </a:endParaRPr>
-                    </a:p>
-                  </a:txBody>
-                  <a:tcPr marL="91440" marR="73152" marT="36576" marB="36576" anchor="ctr">
-                    <a:lnL w="9525" cap="flat" cmpd="sng" algn="ctr">
-                      <a:solidFill>
-                        <a:srgbClr val="BFBFBF"/>
-                      </a:solidFill>
-                      <a:prstDash val="solid"/>
-                      <a:round/>
-                      <a:headEnd type="none" w="med" len="med"/>
-                      <a:tailEnd type="none" w="med" len="med"/>
-                    </a:lnL>
-                    <a:lnR w="9525" cap="flat" cmpd="sng" algn="ctr">
-                      <a:solidFill>
-                        <a:srgbClr val="BFBFBF"/>
-                      </a:solidFill>
-                      <a:prstDash val="solid"/>
-                      <a:round/>
-                      <a:headEnd type="none" w="med" len="med"/>
-                      <a:tailEnd type="none" w="med" len="med"/>
-                    </a:lnR>
-                    <a:lnT w="9525" cap="flat" cmpd="sng" algn="ctr">
-                      <a:solidFill>
-                        <a:srgbClr val="BFBFBF"/>
-                      </a:solidFill>
-                      <a:prstDash val="solid"/>
-                      <a:round/>
-                      <a:headEnd type="none" w="med" len="med"/>
-                      <a:tailEnd type="none" w="med" len="med"/>
-                    </a:lnT>
-                    <a:lnB w="9525" cap="flat" cmpd="sng" algn="ctr">
-                      <a:solidFill>
-                        <a:srgbClr val="BFBFBF"/>
-                      </a:solidFill>
-                      <a:prstDash val="solid"/>
-                      <a:round/>
-                      <a:headEnd type="none" w="med" len="med"/>
-                      <a:tailEnd type="none" w="med" len="med"/>
-                    </a:lnB>
-                    <a:solidFill>
-                      <a:srgbClr val="FFFFFF"/>
-                    </a:solidFill>
-                  </a:tcPr>
-                </a:tc>
-                <a:tc>
-                  <a:txBody>
-                    <a:bodyPr/>
-                    <a:lstStyle/>
-                    <a:p>
-                      <a:pPr algn="ctr">
-                        <a:buNone/>
-                      </a:pPr>
-                      <a:r>
-                        <a:rPr lang="ja-JP" altLang="en-US" sz="1300" b="0" dirty="0">
-                          <a:solidFill>
-                            <a:srgbClr val="333333"/>
-                          </a:solidFill>
-                          <a:latin typeface="メイリオ" panose="020B0604030504040204" pitchFamily="50" charset="-128"/>
-                          <a:ea typeface="メイリオ" panose="020B0604030504040204" pitchFamily="50" charset="-128"/>
-                          <a:cs typeface="メイリオ"/>
-                        </a:rPr>
-                        <a:t>60,000</a:t>
-                      </a:r>
-                      <a:endParaRPr lang="ja-JP" altLang="en-US" sz="1300" dirty="0">
-                        <a:latin typeface="メイリオ"/>
-                        <a:ea typeface="メイリオ"/>
-                        <a:cs typeface="メイリオ"/>
-                      </a:endParaRPr>
-                    </a:p>
-                  </a:txBody>
-                  <a:tcPr marL="91440" marR="73152" marT="36576" marB="36576" anchor="ctr">
-                    <a:lnL w="9525" cap="flat" cmpd="sng" algn="ctr">
-                      <a:solidFill>
-                        <a:srgbClr val="BFBFBF"/>
-                      </a:solidFill>
-                      <a:prstDash val="solid"/>
-                      <a:round/>
-                      <a:headEnd type="none" w="med" len="med"/>
-                      <a:tailEnd type="none" w="med" len="med"/>
-                    </a:lnL>
-                    <a:lnR w="9525" cap="flat" cmpd="sng" algn="ctr">
-                      <a:solidFill>
-                        <a:srgbClr val="BFBFBF"/>
-                      </a:solidFill>
-                      <a:prstDash val="solid"/>
-                      <a:round/>
-                      <a:headEnd type="none" w="med" len="med"/>
-                      <a:tailEnd type="none" w="med" len="med"/>
-                    </a:lnR>
-                    <a:lnT w="9525" cap="flat" cmpd="sng" algn="ctr">
-                      <a:solidFill>
-                        <a:srgbClr val="BFBFBF"/>
-                      </a:solidFill>
-                      <a:prstDash val="solid"/>
-                      <a:round/>
-                      <a:headEnd type="none" w="med" len="med"/>
-                      <a:tailEnd type="none" w="med" len="med"/>
-                    </a:lnT>
-                    <a:lnB w="9525" cap="flat" cmpd="sng" algn="ctr">
-                      <a:solidFill>
-                        <a:srgbClr val="BFBFBF"/>
-                      </a:solidFill>
-                      <a:prstDash val="solid"/>
-                      <a:round/>
-                      <a:headEnd type="none" w="med" len="med"/>
-                      <a:tailEnd type="none" w="med" len="med"/>
-                    </a:lnB>
-                    <a:solidFill>
-                      <a:srgbClr val="FFFFFF"/>
-                    </a:solidFill>
-                  </a:tcPr>
-                </a:tc>
-                <a:tc>
-                  <a:txBody>
-                    <a:bodyPr/>
-                    <a:lstStyle/>
-                    <a:p>
-                      <a:pPr algn="ctr">
-                        <a:buNone/>
-                      </a:pPr>
-                      <a:r>
-                        <a:rPr lang="ja-JP" altLang="en-US" sz="1300" b="0" dirty="0">
-                          <a:solidFill>
-                            <a:srgbClr val="333333"/>
-                          </a:solidFill>
-                          <a:latin typeface="メイリオ" panose="020B0604030504040204" pitchFamily="50" charset="-128"/>
-                          <a:ea typeface="メイリオ" panose="020B0604030504040204" pitchFamily="50" charset="-128"/>
-                          <a:cs typeface="メイリオ"/>
-                        </a:rPr>
-                        <a:t>60,000</a:t>
-                      </a:r>
-                      <a:endParaRPr lang="ja-JP" altLang="en-US" sz="1300" dirty="0">
-                        <a:latin typeface="メイリオ"/>
-                        <a:ea typeface="メイリオ"/>
-                        <a:cs typeface="メイリオ"/>
-                      </a:endParaRPr>
-                    </a:p>
-                  </a:txBody>
-                  <a:tcPr marL="91440" marR="73152" marT="36576" marB="36576" anchor="ctr">
-                    <a:lnL w="9525" cap="flat" cmpd="sng" algn="ctr">
-                      <a:solidFill>
-                        <a:srgbClr val="BFBFBF"/>
-                      </a:solidFill>
-                      <a:prstDash val="solid"/>
-                      <a:round/>
-                      <a:headEnd type="none" w="med" len="med"/>
-                      <a:tailEnd type="none" w="med" len="med"/>
-                    </a:lnL>
-                    <a:lnR w="9525" cap="flat" cmpd="sng" algn="ctr">
-                      <a:solidFill>
-                        <a:srgbClr val="BFBFBF"/>
-                      </a:solidFill>
-                      <a:prstDash val="solid"/>
-                      <a:round/>
-                      <a:headEnd type="none" w="med" len="med"/>
-                      <a:tailEnd type="none" w="med" len="med"/>
-                    </a:lnR>
-                    <a:lnT w="9525" cap="flat" cmpd="sng" algn="ctr">
-                      <a:solidFill>
-                        <a:srgbClr val="BFBFBF"/>
-                      </a:solidFill>
-                      <a:prstDash val="solid"/>
-                      <a:round/>
-                      <a:headEnd type="none" w="med" len="med"/>
-                      <a:tailEnd type="none" w="med" len="med"/>
-                    </a:lnT>
-                    <a:lnB w="9525" cap="flat" cmpd="sng" algn="ctr">
-                      <a:solidFill>
-                        <a:srgbClr val="BFBFBF"/>
-                      </a:solidFill>
-                      <a:prstDash val="solid"/>
-                      <a:round/>
-                      <a:headEnd type="none" w="med" len="med"/>
-                      <a:tailEnd type="none" w="med" len="med"/>
-                    </a:lnB>
-                    <a:solidFill>
-                      <a:srgbClr val="FFFFFF"/>
-                    </a:solidFill>
-                  </a:tcPr>
-                </a:tc>
-              </a:tr>
-              <a:tr h="393192">
-                <a:tc>
-                  <a:txBody>
-                    <a:bodyPr/>
-                    <a:lstStyle/>
-                    <a:p>
-                      <a:pPr algn="ctr">
-                        <a:buNone/>
-                      </a:pPr>
-                      <a:r>
-                        <a:rPr lang="ja-JP" altLang="en-US" sz="1200" b="1" dirty="0">
-                          <a:solidFill>
-                            <a:srgbClr val="002060"/>
-                          </a:solidFill>
-                          <a:latin typeface="メイリオ" panose="020B0604030504040204" pitchFamily="50" charset="-128"/>
-                          <a:ea typeface="メイリオ" panose="020B0604030504040204" pitchFamily="50" charset="-128"/>
-                          <a:cs typeface="メイリオ"/>
-                        </a:rPr>
-                        <a:t>LINE利用料（円）</a:t>
-                      </a:r>
-                      <a:endParaRPr lang="ja-JP" altLang="en-US" sz="1200" dirty="0">
-                        <a:latin typeface="メイリオ"/>
-                        <a:ea typeface="メイリオ"/>
-                        <a:cs typeface="メイリオ"/>
-                      </a:endParaRPr>
-                    </a:p>
-                  </a:txBody>
-                  <a:tcPr marL="91440" marR="73152" marT="36576" marB="36576" anchor="ctr">
-                    <a:lnL w="9525" cap="flat" cmpd="sng" algn="ctr">
-                      <a:solidFill>
-                        <a:srgbClr val="BFBFBF"/>
-                      </a:solidFill>
-                      <a:prstDash val="solid"/>
-                      <a:round/>
-                      <a:headEnd type="none" w="med" len="med"/>
-                      <a:tailEnd type="none" w="med" len="med"/>
-                    </a:lnL>
-                    <a:lnR w="9525" cap="flat" cmpd="sng" algn="ctr">
-                      <a:solidFill>
-                        <a:srgbClr val="BFBFBF"/>
-                      </a:solidFill>
-                      <a:prstDash val="solid"/>
-                      <a:round/>
-                      <a:headEnd type="none" w="med" len="med"/>
-                      <a:tailEnd type="none" w="med" len="med"/>
-                    </a:lnR>
-                    <a:lnT w="9525" cap="flat" cmpd="sng" algn="ctr">
-                      <a:solidFill>
-                        <a:srgbClr val="BFBFBF"/>
-                      </a:solidFill>
-                      <a:prstDash val="solid"/>
-                      <a:round/>
-                      <a:headEnd type="none" w="med" len="med"/>
-                      <a:tailEnd type="none" w="med" len="med"/>
-                    </a:lnT>
-                    <a:lnB w="9525" cap="flat" cmpd="sng" algn="ctr">
-                      <a:solidFill>
-                        <a:srgbClr val="BFBFBF"/>
-                      </a:solidFill>
-                      <a:prstDash val="solid"/>
-                      <a:round/>
-                      <a:headEnd type="none" w="med" len="med"/>
-                      <a:tailEnd type="none" w="med" len="med"/>
-                    </a:lnB>
-                    <a:solidFill>
-                      <a:srgbClr val="F2F2F2"/>
-                    </a:solidFill>
-                  </a:tcPr>
-                </a:tc>
-                <a:tc>
-                  <a:txBody>
-                    <a:bodyPr/>
-                    <a:lstStyle/>
-                    <a:p>
-                      <a:pPr algn="ctr">
-                        <a:buNone/>
-                      </a:pPr>
-                      <a:r>
-                        <a:rPr lang="ja-JP" altLang="en-US" sz="1300" b="0" dirty="0">
-                          <a:solidFill>
-                            <a:srgbClr val="333333"/>
-                          </a:solidFill>
-                          <a:latin typeface="メイリオ" panose="020B0604030504040204" pitchFamily="50" charset="-128"/>
-                          <a:ea typeface="メイリオ" panose="020B0604030504040204" pitchFamily="50" charset="-128"/>
-                          <a:cs typeface="メイリオ"/>
-                        </a:rPr>
-                        <a:t>30,000</a:t>
-                      </a:r>
-                      <a:endParaRPr lang="ja-JP" altLang="en-US" sz="1300" dirty="0">
-                        <a:latin typeface="メイリオ"/>
-                        <a:ea typeface="メイリオ"/>
-                        <a:cs typeface="メイリオ"/>
-                      </a:endParaRPr>
-                    </a:p>
-                  </a:txBody>
-                  <a:tcPr marL="91440" marR="73152" marT="36576" marB="36576" anchor="ctr">
-                    <a:lnL w="9525" cap="flat" cmpd="sng" algn="ctr">
-                      <a:solidFill>
-                        <a:srgbClr val="BFBFBF"/>
-                      </a:solidFill>
-                      <a:prstDash val="solid"/>
-                      <a:round/>
-                      <a:headEnd type="none" w="med" len="med"/>
-                      <a:tailEnd type="none" w="med" len="med"/>
-                    </a:lnL>
-                    <a:lnR w="9525" cap="flat" cmpd="sng" algn="ctr">
-                      <a:solidFill>
-                        <a:srgbClr val="BFBFBF"/>
-                      </a:solidFill>
-                      <a:prstDash val="solid"/>
-                      <a:round/>
-                      <a:headEnd type="none" w="med" len="med"/>
-                      <a:tailEnd type="none" w="med" len="med"/>
-                    </a:lnR>
-                    <a:lnT w="9525" cap="flat" cmpd="sng" algn="ctr">
-                      <a:solidFill>
-                        <a:srgbClr val="BFBFBF"/>
-                      </a:solidFill>
-                      <a:prstDash val="solid"/>
-                      <a:round/>
-                      <a:headEnd type="none" w="med" len="med"/>
-                      <a:tailEnd type="none" w="med" len="med"/>
-                    </a:lnT>
-                    <a:lnB w="9525" cap="flat" cmpd="sng" algn="ctr">
-                      <a:solidFill>
-                        <a:srgbClr val="BFBFBF"/>
-                      </a:solidFill>
-                      <a:prstDash val="solid"/>
-                      <a:round/>
-                      <a:headEnd type="none" w="med" len="med"/>
-                      <a:tailEnd type="none" w="med" len="med"/>
-                    </a:lnB>
-                    <a:solidFill>
-                      <a:srgbClr val="FFFFFF"/>
-                    </a:solidFill>
-                  </a:tcPr>
-                </a:tc>
-                <a:tc>
-                  <a:txBody>
-                    <a:bodyPr/>
-                    <a:lstStyle/>
-                    <a:p>
-                      <a:pPr algn="ctr">
-                        <a:buNone/>
-                      </a:pPr>
-                      <a:r>
-                        <a:rPr lang="ja-JP" altLang="en-US" sz="1300" b="0" dirty="0">
-                          <a:solidFill>
-                            <a:srgbClr val="333333"/>
-                          </a:solidFill>
-                          <a:latin typeface="メイリオ" panose="020B0604030504040204" pitchFamily="50" charset="-128"/>
-                          <a:ea typeface="メイリオ" panose="020B0604030504040204" pitchFamily="50" charset="-128"/>
-                          <a:cs typeface="メイリオ"/>
-                        </a:rPr>
-                        <a:t>5,000</a:t>
-                      </a:r>
-                      <a:endParaRPr lang="ja-JP" altLang="en-US" sz="1300" dirty="0">
-                        <a:latin typeface="メイリオ"/>
-                        <a:ea typeface="メイリオ"/>
-                        <a:cs typeface="メイリオ"/>
-                      </a:endParaRPr>
-                    </a:p>
-                  </a:txBody>
-                  <a:tcPr marL="91440" marR="73152" marT="36576" marB="36576" anchor="ctr">
-                    <a:lnL w="9525" cap="flat" cmpd="sng" algn="ctr">
-                      <a:solidFill>
-                        <a:srgbClr val="BFBFBF"/>
-                      </a:solidFill>
-                      <a:prstDash val="solid"/>
-                      <a:round/>
-                      <a:headEnd type="none" w="med" len="med"/>
-                      <a:tailEnd type="none" w="med" len="med"/>
-                    </a:lnL>
-                    <a:lnR w="9525" cap="flat" cmpd="sng" algn="ctr">
-                      <a:solidFill>
-                        <a:srgbClr val="BFBFBF"/>
-                      </a:solidFill>
-                      <a:prstDash val="solid"/>
-                      <a:round/>
-                      <a:headEnd type="none" w="med" len="med"/>
-                      <a:tailEnd type="none" w="med" len="med"/>
-                    </a:lnR>
-                    <a:lnT w="9525" cap="flat" cmpd="sng" algn="ctr">
-                      <a:solidFill>
-                        <a:srgbClr val="BFBFBF"/>
-                      </a:solidFill>
-                      <a:prstDash val="solid"/>
-                      <a:round/>
-                      <a:headEnd type="none" w="med" len="med"/>
-                      <a:tailEnd type="none" w="med" len="med"/>
-                    </a:lnT>
-                    <a:lnB w="9525" cap="flat" cmpd="sng" algn="ctr">
-                      <a:solidFill>
-                        <a:srgbClr val="BFBFBF"/>
-                      </a:solidFill>
-                      <a:prstDash val="solid"/>
-                      <a:round/>
-                      <a:headEnd type="none" w="med" len="med"/>
-                      <a:tailEnd type="none" w="med" len="med"/>
-                    </a:lnB>
-                    <a:solidFill>
-                      <a:srgbClr val="FFFFFF"/>
-                    </a:solidFill>
-                  </a:tcPr>
-                </a:tc>
-                <a:tc>
-                  <a:txBody>
-                    <a:bodyPr/>
-                    <a:lstStyle/>
-                    <a:p>
-                      <a:pPr algn="ctr">
-                        <a:buNone/>
-                      </a:pPr>
-                      <a:r>
-                        <a:rPr lang="ja-JP" altLang="en-US" sz="1300" b="0" dirty="0">
-                          <a:solidFill>
-                            <a:srgbClr val="333333"/>
-                          </a:solidFill>
-                          <a:latin typeface="メイリオ" panose="020B0604030504040204" pitchFamily="50" charset="-128"/>
-                          <a:ea typeface="メイリオ" panose="020B0604030504040204" pitchFamily="50" charset="-128"/>
-                          <a:cs typeface="メイリオ"/>
-                        </a:rPr>
-                        <a:t>5,000</a:t>
-                      </a:r>
-                      <a:endParaRPr lang="ja-JP" altLang="en-US" sz="1300" dirty="0">
-                        <a:latin typeface="メイリオ"/>
-                        <a:ea typeface="メイリオ"/>
-                        <a:cs typeface="メイリオ"/>
-                      </a:endParaRPr>
-                    </a:p>
-                  </a:txBody>
-                  <a:tcPr marL="91440" marR="73152" marT="36576" marB="36576" anchor="ctr">
-                    <a:lnL w="9525" cap="flat" cmpd="sng" algn="ctr">
-                      <a:solidFill>
-                        <a:srgbClr val="BFBFBF"/>
-                      </a:solidFill>
-                      <a:prstDash val="solid"/>
-                      <a:round/>
-                      <a:headEnd type="none" w="med" len="med"/>
-                      <a:tailEnd type="none" w="med" len="med"/>
-                    </a:lnL>
-                    <a:lnR w="9525" cap="flat" cmpd="sng" algn="ctr">
-                      <a:solidFill>
-                        <a:srgbClr val="BFBFBF"/>
-                      </a:solidFill>
-                      <a:prstDash val="solid"/>
-                      <a:round/>
-                      <a:headEnd type="none" w="med" len="med"/>
-                      <a:tailEnd type="none" w="med" len="med"/>
-                    </a:lnR>
-                    <a:lnT w="9525" cap="flat" cmpd="sng" algn="ctr">
-                      <a:solidFill>
-                        <a:srgbClr val="BFBFBF"/>
-                      </a:solidFill>
-                      <a:prstDash val="solid"/>
-                      <a:round/>
-                      <a:headEnd type="none" w="med" len="med"/>
-                      <a:tailEnd type="none" w="med" len="med"/>
-                    </a:lnT>
-                    <a:lnB w="9525" cap="flat" cmpd="sng" algn="ctr">
-                      <a:solidFill>
-                        <a:srgbClr val="BFBFBF"/>
-                      </a:solidFill>
-                      <a:prstDash val="solid"/>
-                      <a:round/>
-                      <a:headEnd type="none" w="med" len="med"/>
-                      <a:tailEnd type="none" w="med" len="med"/>
-                    </a:lnB>
-                    <a:solidFill>
-                      <a:srgbClr val="FFFFFF"/>
-                    </a:solidFill>
-                  </a:tcPr>
-                </a:tc>
-                <a:tc>
-                  <a:txBody>
-                    <a:bodyPr/>
-                    <a:lstStyle/>
-                    <a:p>
-                      <a:pPr algn="ctr">
-                        <a:buNone/>
-                      </a:pPr>
-                      <a:r>
-                        <a:rPr lang="ja-JP" altLang="en-US" sz="1300" b="0" dirty="0">
-                          <a:solidFill>
-                            <a:srgbClr val="333333"/>
-                          </a:solidFill>
-                          <a:latin typeface="メイリオ" panose="020B0604030504040204" pitchFamily="50" charset="-128"/>
-                          <a:ea typeface="メイリオ" panose="020B0604030504040204" pitchFamily="50" charset="-128"/>
-                          <a:cs typeface="メイリオ"/>
-                        </a:rPr>
-                        <a:t>5,000</a:t>
-                      </a:r>
-                      <a:endParaRPr lang="ja-JP" altLang="en-US" sz="1300" dirty="0">
-                        <a:latin typeface="メイリオ"/>
-                        <a:ea typeface="メイリオ"/>
-                        <a:cs typeface="メイリオ"/>
-                      </a:endParaRPr>
-                    </a:p>
-                  </a:txBody>
-                  <a:tcPr marL="91440" marR="73152" marT="36576" marB="36576" anchor="ctr">
-                    <a:lnL w="9525" cap="flat" cmpd="sng" algn="ctr">
-                      <a:solidFill>
-                        <a:srgbClr val="BFBFBF"/>
-                      </a:solidFill>
-                      <a:prstDash val="solid"/>
-                      <a:round/>
-                      <a:headEnd type="none" w="med" len="med"/>
-                      <a:tailEnd type="none" w="med" len="med"/>
-                    </a:lnL>
-                    <a:lnR w="9525" cap="flat" cmpd="sng" algn="ctr">
-                      <a:solidFill>
-                        <a:srgbClr val="BFBFBF"/>
-                      </a:solidFill>
-                      <a:prstDash val="solid"/>
-                      <a:round/>
-                      <a:headEnd type="none" w="med" len="med"/>
-                      <a:tailEnd type="none" w="med" len="med"/>
-                    </a:lnR>
-                    <a:lnT w="9525" cap="flat" cmpd="sng" algn="ctr">
-                      <a:solidFill>
-                        <a:srgbClr val="BFBFBF"/>
-                      </a:solidFill>
-                      <a:prstDash val="solid"/>
-                      <a:round/>
-                      <a:headEnd type="none" w="med" len="med"/>
-                      <a:tailEnd type="none" w="med" len="med"/>
-                    </a:lnT>
-                    <a:lnB w="9525" cap="flat" cmpd="sng" algn="ctr">
-                      <a:solidFill>
-                        <a:srgbClr val="BFBFBF"/>
-                      </a:solidFill>
-                      <a:prstDash val="solid"/>
-                      <a:round/>
-                      <a:headEnd type="none" w="med" len="med"/>
-                      <a:tailEnd type="none" w="med" len="med"/>
-                    </a:lnB>
-                    <a:solidFill>
-                      <a:srgbClr val="FFFFFF"/>
-                    </a:solidFill>
-                  </a:tcPr>
-                </a:tc>
-                <a:tc>
-                  <a:txBody>
-                    <a:bodyPr/>
-                    <a:lstStyle/>
-                    <a:p>
-                      <a:pPr algn="ctr">
-                        <a:buNone/>
-                      </a:pPr>
-                      <a:r>
-                        <a:rPr lang="ja-JP" altLang="en-US" sz="1300" b="0" dirty="0">
-                          <a:solidFill>
-                            <a:srgbClr val="333333"/>
-                          </a:solidFill>
-                          <a:latin typeface="メイリオ" panose="020B0604030504040204" pitchFamily="50" charset="-128"/>
-                          <a:ea typeface="メイリオ" panose="020B0604030504040204" pitchFamily="50" charset="-128"/>
-                          <a:cs typeface="メイリオ"/>
-                        </a:rPr>
-                        <a:t>5,000</a:t>
-                      </a:r>
-                      <a:endParaRPr lang="ja-JP" altLang="en-US" sz="1300" dirty="0">
-                        <a:latin typeface="メイリオ"/>
-                        <a:ea typeface="メイリオ"/>
-                        <a:cs typeface="メイリオ"/>
-                      </a:endParaRPr>
-                    </a:p>
-                  </a:txBody>
-                  <a:tcPr marL="91440" marR="73152" marT="36576" marB="36576" anchor="ctr">
-                    <a:lnL w="9525" cap="flat" cmpd="sng" algn="ctr">
-                      <a:solidFill>
-                        <a:srgbClr val="BFBFBF"/>
-                      </a:solidFill>
-                      <a:prstDash val="solid"/>
-                      <a:round/>
-                      <a:headEnd type="none" w="med" len="med"/>
-                      <a:tailEnd type="none" w="med" len="med"/>
-                    </a:lnL>
-                    <a:lnR w="9525" cap="flat" cmpd="sng" algn="ctr">
-                      <a:solidFill>
-                        <a:srgbClr val="BFBFBF"/>
-                      </a:solidFill>
-                      <a:prstDash val="solid"/>
-                      <a:round/>
-                      <a:headEnd type="none" w="med" len="med"/>
-                      <a:tailEnd type="none" w="med" len="med"/>
-                    </a:lnR>
-                    <a:lnT w="9525" cap="flat" cmpd="sng" algn="ctr">
-                      <a:solidFill>
-                        <a:srgbClr val="BFBFBF"/>
-                      </a:solidFill>
-                      <a:prstDash val="solid"/>
-                      <a:round/>
-                      <a:headEnd type="none" w="med" len="med"/>
-                      <a:tailEnd type="none" w="med" len="med"/>
-                    </a:lnT>
-                    <a:lnB w="9525" cap="flat" cmpd="sng" algn="ctr">
-                      <a:solidFill>
-                        <a:srgbClr val="BFBFBF"/>
-                      </a:solidFill>
-                      <a:prstDash val="solid"/>
-                      <a:round/>
-                      <a:headEnd type="none" w="med" len="med"/>
-                      <a:tailEnd type="none" w="med" len="med"/>
-                    </a:lnB>
-                    <a:solidFill>
-                      <a:srgbClr val="FFFFFF"/>
-                    </a:solidFill>
-                  </a:tcPr>
-                </a:tc>
-                <a:tc>
-                  <a:txBody>
-                    <a:bodyPr/>
-                    <a:lstStyle/>
-                    <a:p>
-                      <a:pPr algn="ctr">
-                        <a:buNone/>
-                      </a:pPr>
-                      <a:r>
-                        <a:rPr lang="ja-JP" altLang="en-US" sz="1300" b="0" dirty="0">
-                          <a:solidFill>
-                            <a:srgbClr val="333333"/>
-                          </a:solidFill>
-                          <a:latin typeface="メイリオ" panose="020B0604030504040204" pitchFamily="50" charset="-128"/>
-                          <a:ea typeface="メイリオ" panose="020B0604030504040204" pitchFamily="50" charset="-128"/>
-                          <a:cs typeface="メイリオ"/>
-                        </a:rPr>
-                        <a:t>5,000</a:t>
-                      </a:r>
-                      <a:endParaRPr lang="ja-JP" altLang="en-US" sz="1300" dirty="0">
-                        <a:latin typeface="メイリオ"/>
-                        <a:ea typeface="メイリオ"/>
-                        <a:cs typeface="メイリオ"/>
-                      </a:endParaRPr>
-                    </a:p>
-                  </a:txBody>
-                  <a:tcPr marL="91440" marR="73152" marT="36576" marB="36576" anchor="ctr">
-                    <a:lnL w="9525" cap="flat" cmpd="sng" algn="ctr">
-                      <a:solidFill>
-                        <a:srgbClr val="BFBFBF"/>
-                      </a:solidFill>
-                      <a:prstDash val="solid"/>
-                      <a:round/>
-                      <a:headEnd type="none" w="med" len="med"/>
-                      <a:tailEnd type="none" w="med" len="med"/>
-                    </a:lnL>
-                    <a:lnR w="9525" cap="flat" cmpd="sng" algn="ctr">
-                      <a:solidFill>
-                        <a:srgbClr val="BFBFBF"/>
-                      </a:solidFill>
-                      <a:prstDash val="solid"/>
-                      <a:round/>
-                      <a:headEnd type="none" w="med" len="med"/>
-                      <a:tailEnd type="none" w="med" len="med"/>
-                    </a:lnR>
-                    <a:lnT w="9525" cap="flat" cmpd="sng" algn="ctr">
-                      <a:solidFill>
-                        <a:srgbClr val="BFBFBF"/>
-                      </a:solidFill>
-                      <a:prstDash val="solid"/>
-                      <a:round/>
-                      <a:headEnd type="none" w="med" len="med"/>
-                      <a:tailEnd type="none" w="med" len="med"/>
-                    </a:lnT>
-                    <a:lnB w="9525" cap="flat" cmpd="sng" algn="ctr">
-                      <a:solidFill>
-                        <a:srgbClr val="BFBFBF"/>
-                      </a:solidFill>
-                      <a:prstDash val="solid"/>
-                      <a:round/>
-                      <a:headEnd type="none" w="med" len="med"/>
-                      <a:tailEnd type="none" w="med" len="med"/>
-                    </a:lnB>
-                    <a:solidFill>
-                      <a:srgbClr val="FFFFFF"/>
-                    </a:solidFill>
-                  </a:tcPr>
-                </a:tc>
-                <a:tc>
-                  <a:txBody>
-                    <a:bodyPr/>
-                    <a:lstStyle/>
-                    <a:p>
-                      <a:pPr algn="ctr">
-                        <a:buNone/>
-                      </a:pPr>
-                      <a:r>
-                        <a:rPr lang="ja-JP" altLang="en-US" sz="1300" b="0" dirty="0">
-                          <a:solidFill>
-                            <a:srgbClr val="333333"/>
-                          </a:solidFill>
-                          <a:latin typeface="メイリオ" panose="020B0604030504040204" pitchFamily="50" charset="-128"/>
-                          <a:ea typeface="メイリオ" panose="020B0604030504040204" pitchFamily="50" charset="-128"/>
-                          <a:cs typeface="メイリオ"/>
-                        </a:rPr>
-                        <a:t>5,000</a:t>
-                      </a:r>
-                      <a:endParaRPr lang="ja-JP" altLang="en-US" sz="1300" dirty="0">
-                        <a:latin typeface="メイリオ"/>
-                        <a:ea typeface="メイリオ"/>
-                        <a:cs typeface="メイリオ"/>
-                      </a:endParaRPr>
-                    </a:p>
-                  </a:txBody>
-                  <a:tcPr marL="91440" marR="73152" marT="36576" marB="36576" anchor="ctr">
-                    <a:lnL w="9525" cap="flat" cmpd="sng" algn="ctr">
-                      <a:solidFill>
-                        <a:srgbClr val="BFBFBF"/>
-                      </a:solidFill>
-                      <a:prstDash val="solid"/>
-                      <a:round/>
-                      <a:headEnd type="none" w="med" len="med"/>
-                      <a:tailEnd type="none" w="med" len="med"/>
-                    </a:lnL>
-                    <a:lnR w="9525" cap="flat" cmpd="sng" algn="ctr">
-                      <a:solidFill>
-                        <a:srgbClr val="BFBFBF"/>
-                      </a:solidFill>
-                      <a:prstDash val="solid"/>
-                      <a:round/>
-                      <a:headEnd type="none" w="med" len="med"/>
-                      <a:tailEnd type="none" w="med" len="med"/>
-                    </a:lnR>
-                    <a:lnT w="9525" cap="flat" cmpd="sng" algn="ctr">
-                      <a:solidFill>
-                        <a:srgbClr val="BFBFBF"/>
-                      </a:solidFill>
-                      <a:prstDash val="solid"/>
-                      <a:round/>
-                      <a:headEnd type="none" w="med" len="med"/>
-                      <a:tailEnd type="none" w="med" len="med"/>
-                    </a:lnT>
-                    <a:lnB w="9525" cap="flat" cmpd="sng" algn="ctr">
-                      <a:solidFill>
-                        <a:srgbClr val="BFBFBF"/>
-                      </a:solidFill>
-                      <a:prstDash val="solid"/>
-                      <a:round/>
-                      <a:headEnd type="none" w="med" len="med"/>
-                      <a:tailEnd type="none" w="med" len="med"/>
-                    </a:lnB>
-                    <a:solidFill>
-                      <a:srgbClr val="FFFFFF"/>
-                    </a:solidFill>
-                  </a:tcPr>
-                </a:tc>
-              </a:tr>
-              <a:tr h="393192">
-                <a:tc>
-                  <a:txBody>
-                    <a:bodyPr/>
-                    <a:lstStyle/>
-                    <a:p>
-                      <a:pPr algn="ctr">
-                        <a:buNone/>
-                      </a:pPr>
-                      <a:r>
-                        <a:rPr lang="ja-JP" altLang="en-US" sz="1200" b="1" dirty="0">
-                          <a:solidFill>
-                            <a:srgbClr val="002060"/>
-                          </a:solidFill>
-                          <a:latin typeface="メイリオ" panose="020B0604030504040204" pitchFamily="50" charset="-128"/>
-                          <a:ea typeface="メイリオ" panose="020B0604030504040204" pitchFamily="50" charset="-128"/>
-                          <a:cs typeface="メイリオ"/>
-                        </a:rPr>
-                        <a:t>合計（円）</a:t>
-                      </a:r>
-                      <a:endParaRPr lang="ja-JP" altLang="en-US" sz="1200" dirty="0">
-                        <a:latin typeface="メイリオ"/>
-                        <a:ea typeface="メイリオ"/>
-                        <a:cs typeface="メイリオ"/>
-                      </a:endParaRPr>
-                    </a:p>
-                  </a:txBody>
-                  <a:tcPr marL="91440" marR="73152" marT="36576" marB="36576" anchor="ctr">
-                    <a:lnL w="9525" cap="flat" cmpd="sng" algn="ctr">
-                      <a:solidFill>
-                        <a:srgbClr val="BFBFBF"/>
-                      </a:solidFill>
-                      <a:prstDash val="solid"/>
-                      <a:round/>
-                      <a:headEnd type="none" w="med" len="med"/>
-                      <a:tailEnd type="none" w="med" len="med"/>
-                    </a:lnL>
-                    <a:lnR w="9525" cap="flat" cmpd="sng" algn="ctr">
-                      <a:solidFill>
-                        <a:srgbClr val="BFBFBF"/>
-                      </a:solidFill>
-                      <a:prstDash val="solid"/>
-                      <a:round/>
-                      <a:headEnd type="none" w="med" len="med"/>
-                      <a:tailEnd type="none" w="med" len="med"/>
-                    </a:lnR>
-                    <a:lnT w="9525" cap="flat" cmpd="sng" algn="ctr">
-                      <a:solidFill>
-                        <a:srgbClr val="BFBFBF"/>
-                      </a:solidFill>
-                      <a:prstDash val="solid"/>
-                      <a:round/>
-                      <a:headEnd type="none" w="med" len="med"/>
-                      <a:tailEnd type="none" w="med" len="med"/>
-                    </a:lnT>
-                    <a:lnB w="9525" cap="flat" cmpd="sng" algn="ctr">
-                      <a:solidFill>
-                        <a:srgbClr val="BFBFBF"/>
-                      </a:solidFill>
-                      <a:prstDash val="solid"/>
-                      <a:round/>
-                      <a:headEnd type="none" w="med" len="med"/>
-                      <a:tailEnd type="none" w="med" len="med"/>
-                    </a:lnB>
-                    <a:solidFill>
-                      <a:srgbClr val="F2F2F2"/>
-                    </a:solidFill>
-                  </a:tcPr>
-                </a:tc>
-                <a:tc>
-                  <a:txBody>
-                    <a:bodyPr/>
-                    <a:lstStyle/>
-                    <a:p>
-                      <a:pPr algn="ctr">
-                        <a:buNone/>
-                      </a:pPr>
-                      <a:r>
-                        <a:rPr lang="ja-JP" altLang="en-US" sz="1300" b="1" dirty="0">
-                          <a:solidFill>
-                            <a:srgbClr val="002060"/>
-                          </a:solidFill>
-                          <a:latin typeface="メイリオ" panose="020B0604030504040204" pitchFamily="50" charset="-128"/>
-                          <a:ea typeface="メイリオ" panose="020B0604030504040204" pitchFamily="50" charset="-128"/>
-                          <a:cs typeface="メイリオ"/>
-                        </a:rPr>
-                        <a:t>295,000</a:t>
-                      </a:r>
-                      <a:endParaRPr lang="ja-JP" altLang="en-US" sz="1300" dirty="0">
-                        <a:latin typeface="メイリオ"/>
-                        <a:ea typeface="メイリオ"/>
-                        <a:cs typeface="メイリオ"/>
-                      </a:endParaRPr>
-                    </a:p>
-                  </a:txBody>
-                  <a:tcPr marL="91440" marR="73152" marT="36576" marB="36576" anchor="ctr">
-                    <a:lnL w="9525" cap="flat" cmpd="sng" algn="ctr">
-                      <a:solidFill>
-                        <a:srgbClr val="BFBFBF"/>
-                      </a:solidFill>
-                      <a:prstDash val="solid"/>
-                      <a:round/>
-                      <a:headEnd type="none" w="med" len="med"/>
-                      <a:tailEnd type="none" w="med" len="med"/>
-                    </a:lnL>
-                    <a:lnR w="9525" cap="flat" cmpd="sng" algn="ctr">
-                      <a:solidFill>
-                        <a:srgbClr val="BFBFBF"/>
-                      </a:solidFill>
-                      <a:prstDash val="solid"/>
-                      <a:round/>
-                      <a:headEnd type="none" w="med" len="med"/>
-                      <a:tailEnd type="none" w="med" len="med"/>
-                    </a:lnR>
-                    <a:lnT w="9525" cap="flat" cmpd="sng" algn="ctr">
-                      <a:solidFill>
-                        <a:srgbClr val="BFBFBF"/>
-                      </a:solidFill>
-                      <a:prstDash val="solid"/>
-                      <a:round/>
-                      <a:headEnd type="none" w="med" len="med"/>
-                      <a:tailEnd type="none" w="med" len="med"/>
-                    </a:lnT>
-                    <a:lnB w="9525" cap="flat" cmpd="sng" algn="ctr">
-                      <a:solidFill>
-                        <a:srgbClr val="BFBFBF"/>
-                      </a:solidFill>
-                      <a:prstDash val="solid"/>
-                      <a:round/>
-                      <a:headEnd type="none" w="med" len="med"/>
-                      <a:tailEnd type="none" w="med" len="med"/>
-                    </a:lnB>
-                    <a:solidFill>
-                      <a:srgbClr val="FFFFFF"/>
-                    </a:solidFill>
-                  </a:tcPr>
-                </a:tc>
-                <a:tc>
-                  <a:txBody>
-                    <a:bodyPr/>
-                    <a:lstStyle/>
-                    <a:p>
-                      <a:pPr algn="ctr">
-                        <a:buNone/>
-                      </a:pPr>
-                      <a:r>
-                        <a:rPr lang="ja-JP" altLang="en-US" sz="1300" b="1" dirty="0">
-                          <a:solidFill>
-                            <a:srgbClr val="002060"/>
-                          </a:solidFill>
-                          <a:latin typeface="メイリオ" panose="020B0604030504040204" pitchFamily="50" charset="-128"/>
-                          <a:ea typeface="メイリオ" panose="020B0604030504040204" pitchFamily="50" charset="-128"/>
-                          <a:cs typeface="メイリオ"/>
-                        </a:rPr>
-                        <a:t>365,000</a:t>
-                      </a:r>
-                      <a:endParaRPr lang="ja-JP" altLang="en-US" sz="1300" dirty="0">
-                        <a:latin typeface="メイリオ"/>
-                        <a:ea typeface="メイリオ"/>
-                        <a:cs typeface="メイリオ"/>
-                      </a:endParaRPr>
-                    </a:p>
-                  </a:txBody>
-                  <a:tcPr marL="91440" marR="73152" marT="36576" marB="36576" anchor="ctr">
-                    <a:lnL w="9525" cap="flat" cmpd="sng" algn="ctr">
-                      <a:solidFill>
-                        <a:srgbClr val="BFBFBF"/>
-                      </a:solidFill>
-                      <a:prstDash val="solid"/>
-                      <a:round/>
-                      <a:headEnd type="none" w="med" len="med"/>
-                      <a:tailEnd type="none" w="med" len="med"/>
-                    </a:lnL>
-                    <a:lnR w="9525" cap="flat" cmpd="sng" algn="ctr">
-                      <a:solidFill>
-                        <a:srgbClr val="BFBFBF"/>
-                      </a:solidFill>
-                      <a:prstDash val="solid"/>
-                      <a:round/>
-                      <a:headEnd type="none" w="med" len="med"/>
-                      <a:tailEnd type="none" w="med" len="med"/>
-                    </a:lnR>
-                    <a:lnT w="9525" cap="flat" cmpd="sng" algn="ctr">
-                      <a:solidFill>
-                        <a:srgbClr val="BFBFBF"/>
-                      </a:solidFill>
-                      <a:prstDash val="solid"/>
-                      <a:round/>
-                      <a:headEnd type="none" w="med" len="med"/>
-                      <a:tailEnd type="none" w="med" len="med"/>
-                    </a:lnT>
-                    <a:lnB w="9525" cap="flat" cmpd="sng" algn="ctr">
-                      <a:solidFill>
-                        <a:srgbClr val="BFBFBF"/>
-                      </a:solidFill>
-                      <a:prstDash val="solid"/>
-                      <a:round/>
-                      <a:headEnd type="none" w="med" len="med"/>
-                      <a:tailEnd type="none" w="med" len="med"/>
-                    </a:lnB>
-                    <a:solidFill>
-                      <a:srgbClr val="FFFFFF"/>
-                    </a:solidFill>
-                  </a:tcPr>
-                </a:tc>
-                <a:tc>
-                  <a:txBody>
-                    <a:bodyPr/>
-                    <a:lstStyle/>
-                    <a:p>
-                      <a:pPr algn="ctr">
-                        <a:buNone/>
-                      </a:pPr>
-                      <a:r>
-                        <a:rPr lang="ja-JP" altLang="en-US" sz="1300" b="1" dirty="0">
-                          <a:solidFill>
-                            <a:srgbClr val="002060"/>
-                          </a:solidFill>
-                          <a:latin typeface="メイリオ" panose="020B0604030504040204" pitchFamily="50" charset="-128"/>
-                          <a:ea typeface="メイリオ" panose="020B0604030504040204" pitchFamily="50" charset="-128"/>
-                          <a:cs typeface="メイリオ"/>
-                        </a:rPr>
-                        <a:t>165,000</a:t>
-                      </a:r>
-                      <a:endParaRPr lang="ja-JP" altLang="en-US" sz="1300" dirty="0">
-                        <a:latin typeface="メイリオ"/>
-                        <a:ea typeface="メイリオ"/>
-                        <a:cs typeface="メイリオ"/>
-                      </a:endParaRPr>
-                    </a:p>
-                  </a:txBody>
-                  <a:tcPr marL="91440" marR="73152" marT="36576" marB="36576" anchor="ctr">
-                    <a:lnL w="9525" cap="flat" cmpd="sng" algn="ctr">
-                      <a:solidFill>
-                        <a:srgbClr val="BFBFBF"/>
-                      </a:solidFill>
-                      <a:prstDash val="solid"/>
-                      <a:round/>
-                      <a:headEnd type="none" w="med" len="med"/>
-                      <a:tailEnd type="none" w="med" len="med"/>
-                    </a:lnL>
-                    <a:lnR w="9525" cap="flat" cmpd="sng" algn="ctr">
-                      <a:solidFill>
-                        <a:srgbClr val="BFBFBF"/>
-                      </a:solidFill>
-                      <a:prstDash val="solid"/>
-                      <a:round/>
-                      <a:headEnd type="none" w="med" len="med"/>
-                      <a:tailEnd type="none" w="med" len="med"/>
-                    </a:lnR>
-                    <a:lnT w="9525" cap="flat" cmpd="sng" algn="ctr">
-                      <a:solidFill>
-                        <a:srgbClr val="BFBFBF"/>
-                      </a:solidFill>
-                      <a:prstDash val="solid"/>
-                      <a:round/>
-                      <a:headEnd type="none" w="med" len="med"/>
-                      <a:tailEnd type="none" w="med" len="med"/>
-                    </a:lnT>
-                    <a:lnB w="9525" cap="flat" cmpd="sng" algn="ctr">
-                      <a:solidFill>
-                        <a:srgbClr val="BFBFBF"/>
-                      </a:solidFill>
-                      <a:prstDash val="solid"/>
-                      <a:round/>
-                      <a:headEnd type="none" w="med" len="med"/>
-                      <a:tailEnd type="none" w="med" len="med"/>
-                    </a:lnB>
-                    <a:solidFill>
-                      <a:srgbClr val="FFFFFF"/>
-                    </a:solidFill>
-                  </a:tcPr>
-                </a:tc>
-                <a:tc>
-                  <a:txBody>
-                    <a:bodyPr/>
-                    <a:lstStyle/>
-                    <a:p>
-                      <a:pPr algn="ctr">
-                        <a:buNone/>
-                      </a:pPr>
-                      <a:r>
-                        <a:rPr lang="ja-JP" altLang="en-US" sz="1300" b="1" dirty="0">
-                          <a:solidFill>
-                            <a:srgbClr val="002060"/>
-                          </a:solidFill>
-                          <a:latin typeface="メイリオ" panose="020B0604030504040204" pitchFamily="50" charset="-128"/>
-                          <a:ea typeface="メイリオ" panose="020B0604030504040204" pitchFamily="50" charset="-128"/>
-                          <a:cs typeface="メイリオ"/>
-                        </a:rPr>
-                        <a:t>165,000</a:t>
-                      </a:r>
-                      <a:endParaRPr lang="ja-JP" altLang="en-US" sz="1300" dirty="0">
-                        <a:latin typeface="メイリオ"/>
-                        <a:ea typeface="メイリオ"/>
-                        <a:cs typeface="メイリオ"/>
-                      </a:endParaRPr>
-                    </a:p>
-                  </a:txBody>
-                  <a:tcPr marL="91440" marR="73152" marT="36576" marB="36576" anchor="ctr">
-                    <a:lnL w="9525" cap="flat" cmpd="sng" algn="ctr">
-                      <a:solidFill>
-                        <a:srgbClr val="BFBFBF"/>
-                      </a:solidFill>
-                      <a:prstDash val="solid"/>
-                      <a:round/>
-                      <a:headEnd type="none" w="med" len="med"/>
-                      <a:tailEnd type="none" w="med" len="med"/>
-                    </a:lnL>
-                    <a:lnR w="9525" cap="flat" cmpd="sng" algn="ctr">
-                      <a:solidFill>
-                        <a:srgbClr val="BFBFBF"/>
-                      </a:solidFill>
-                      <a:prstDash val="solid"/>
-                      <a:round/>
-                      <a:headEnd type="none" w="med" len="med"/>
-                      <a:tailEnd type="none" w="med" len="med"/>
-                    </a:lnR>
-                    <a:lnT w="9525" cap="flat" cmpd="sng" algn="ctr">
-                      <a:solidFill>
-                        <a:srgbClr val="BFBFBF"/>
-                      </a:solidFill>
-                      <a:prstDash val="solid"/>
-                      <a:round/>
-                      <a:headEnd type="none" w="med" len="med"/>
-                      <a:tailEnd type="none" w="med" len="med"/>
-                    </a:lnT>
-                    <a:lnB w="9525" cap="flat" cmpd="sng" algn="ctr">
-                      <a:solidFill>
-                        <a:srgbClr val="BFBFBF"/>
-                      </a:solidFill>
-                      <a:prstDash val="solid"/>
-                      <a:round/>
-                      <a:headEnd type="none" w="med" len="med"/>
-                      <a:tailEnd type="none" w="med" len="med"/>
-                    </a:lnB>
-                    <a:solidFill>
-                      <a:srgbClr val="FFFFFF"/>
-                    </a:solidFill>
-                  </a:tcPr>
-                </a:tc>
-                <a:tc>
-                  <a:txBody>
-                    <a:bodyPr/>
-                    <a:lstStyle/>
-                    <a:p>
-                      <a:pPr algn="ctr">
-                        <a:buNone/>
-                      </a:pPr>
-                      <a:r>
-                        <a:rPr lang="ja-JP" altLang="en-US" sz="1300" b="1" dirty="0">
-                          <a:solidFill>
-                            <a:srgbClr val="002060"/>
-                          </a:solidFill>
-                          <a:latin typeface="メイリオ" panose="020B0604030504040204" pitchFamily="50" charset="-128"/>
-                          <a:ea typeface="メイリオ" panose="020B0604030504040204" pitchFamily="50" charset="-128"/>
-                          <a:cs typeface="メイリオ"/>
-                        </a:rPr>
-                        <a:t>365,000</a:t>
-                      </a:r>
-                      <a:endParaRPr lang="ja-JP" altLang="en-US" sz="1300" dirty="0">
-                        <a:latin typeface="メイリオ"/>
-                        <a:ea typeface="メイリオ"/>
-                        <a:cs typeface="メイリオ"/>
-                      </a:endParaRPr>
-                    </a:p>
-                  </a:txBody>
-                  <a:tcPr marL="91440" marR="73152" marT="36576" marB="36576" anchor="ctr">
-                    <a:lnL w="9525" cap="flat" cmpd="sng" algn="ctr">
-                      <a:solidFill>
-                        <a:srgbClr val="BFBFBF"/>
-                      </a:solidFill>
-                      <a:prstDash val="solid"/>
-                      <a:round/>
-                      <a:headEnd type="none" w="med" len="med"/>
-                      <a:tailEnd type="none" w="med" len="med"/>
-                    </a:lnL>
-                    <a:lnR w="9525" cap="flat" cmpd="sng" algn="ctr">
-                      <a:solidFill>
-                        <a:srgbClr val="BFBFBF"/>
-                      </a:solidFill>
-                      <a:prstDash val="solid"/>
-                      <a:round/>
-                      <a:headEnd type="none" w="med" len="med"/>
-                      <a:tailEnd type="none" w="med" len="med"/>
-                    </a:lnR>
-                    <a:lnT w="9525" cap="flat" cmpd="sng" algn="ctr">
-                      <a:solidFill>
-                        <a:srgbClr val="BFBFBF"/>
-                      </a:solidFill>
-                      <a:prstDash val="solid"/>
-                      <a:round/>
-                      <a:headEnd type="none" w="med" len="med"/>
-                      <a:tailEnd type="none" w="med" len="med"/>
-                    </a:lnT>
-                    <a:lnB w="9525" cap="flat" cmpd="sng" algn="ctr">
-                      <a:solidFill>
-                        <a:srgbClr val="BFBFBF"/>
-                      </a:solidFill>
-                      <a:prstDash val="solid"/>
-                      <a:round/>
-                      <a:headEnd type="none" w="med" len="med"/>
-                      <a:tailEnd type="none" w="med" len="med"/>
-                    </a:lnB>
-                    <a:solidFill>
-                      <a:srgbClr val="FFFFFF"/>
-                    </a:solidFill>
-                  </a:tcPr>
-                </a:tc>
-                <a:tc>
-                  <a:txBody>
-                    <a:bodyPr/>
-                    <a:lstStyle/>
-                    <a:p>
-                      <a:pPr algn="ctr">
-                        <a:buNone/>
-                      </a:pPr>
-                      <a:r>
-                        <a:rPr lang="ja-JP" altLang="en-US" sz="1300" b="1" dirty="0">
-                          <a:solidFill>
-                            <a:srgbClr val="002060"/>
-                          </a:solidFill>
-                          <a:latin typeface="メイリオ" panose="020B0604030504040204" pitchFamily="50" charset="-128"/>
-                          <a:ea typeface="メイリオ" panose="020B0604030504040204" pitchFamily="50" charset="-128"/>
-                          <a:cs typeface="メイリオ"/>
-                        </a:rPr>
-                        <a:t>165,000</a:t>
-                      </a:r>
-                      <a:endParaRPr lang="ja-JP" altLang="en-US" sz="1300" dirty="0">
-                        <a:latin typeface="メイリオ"/>
-                        <a:ea typeface="メイリオ"/>
-                        <a:cs typeface="メイリオ"/>
-                      </a:endParaRPr>
-                    </a:p>
-                  </a:txBody>
-                  <a:tcPr marL="91440" marR="73152" marT="36576" marB="36576" anchor="ctr">
-                    <a:lnL w="9525" cap="flat" cmpd="sng" algn="ctr">
-                      <a:solidFill>
-                        <a:srgbClr val="BFBFBF"/>
-                      </a:solidFill>
-                      <a:prstDash val="solid"/>
-                      <a:round/>
-                      <a:headEnd type="none" w="med" len="med"/>
-                      <a:tailEnd type="none" w="med" len="med"/>
-                    </a:lnL>
-                    <a:lnR w="9525" cap="flat" cmpd="sng" algn="ctr">
-                      <a:solidFill>
-                        <a:srgbClr val="BFBFBF"/>
-                      </a:solidFill>
-                      <a:prstDash val="solid"/>
-                      <a:round/>
-                      <a:headEnd type="none" w="med" len="med"/>
-                      <a:tailEnd type="none" w="med" len="med"/>
-                    </a:lnR>
-                    <a:lnT w="9525" cap="flat" cmpd="sng" algn="ctr">
-                      <a:solidFill>
-                        <a:srgbClr val="BFBFBF"/>
-                      </a:solidFill>
-                      <a:prstDash val="solid"/>
-                      <a:round/>
-                      <a:headEnd type="none" w="med" len="med"/>
-                      <a:tailEnd type="none" w="med" len="med"/>
-                    </a:lnT>
-                    <a:lnB w="9525" cap="flat" cmpd="sng" algn="ctr">
-                      <a:solidFill>
-                        <a:srgbClr val="BFBFBF"/>
-                      </a:solidFill>
-                      <a:prstDash val="solid"/>
-                      <a:round/>
-                      <a:headEnd type="none" w="med" len="med"/>
-                      <a:tailEnd type="none" w="med" len="med"/>
-                    </a:lnB>
-                    <a:solidFill>
-                      <a:srgbClr val="FFFFFF"/>
-                    </a:solidFill>
-                  </a:tcPr>
-                </a:tc>
-                <a:tc>
-                  <a:txBody>
-                    <a:bodyPr/>
-                    <a:lstStyle/>
-                    <a:p>
-                      <a:pPr algn="ctr">
-                        <a:buNone/>
-                      </a:pPr>
-                      <a:r>
-                        <a:rPr lang="ja-JP" altLang="en-US" sz="1300" b="1" dirty="0">
-                          <a:solidFill>
-                            <a:srgbClr val="002060"/>
-                          </a:solidFill>
-                          <a:latin typeface="メイリオ" panose="020B0604030504040204" pitchFamily="50" charset="-128"/>
-                          <a:ea typeface="メイリオ" panose="020B0604030504040204" pitchFamily="50" charset="-128"/>
-                          <a:cs typeface="メイリオ"/>
-                        </a:rPr>
-                        <a:t>165,000</a:t>
-                      </a:r>
-                      <a:endParaRPr lang="ja-JP" altLang="en-US" sz="1300" dirty="0">
-                        <a:latin typeface="メイリオ"/>
-                        <a:ea typeface="メイリオ"/>
-                        <a:cs typeface="メイリオ"/>
-                      </a:endParaRPr>
-                    </a:p>
-                  </a:txBody>
-                  <a:tcPr marL="91440" marR="73152" marT="36576" marB="36576" anchor="ctr">
-                    <a:lnL w="9525" cap="flat" cmpd="sng" algn="ctr">
-                      <a:solidFill>
-                        <a:srgbClr val="BFBFBF"/>
-                      </a:solidFill>
-                      <a:prstDash val="solid"/>
-                      <a:round/>
-                      <a:headEnd type="none" w="med" len="med"/>
-                      <a:tailEnd type="none" w="med" len="med"/>
-                    </a:lnL>
-                    <a:lnR w="9525" cap="flat" cmpd="sng" algn="ctr">
-                      <a:solidFill>
-                        <a:srgbClr val="BFBFBF"/>
-                      </a:solidFill>
-                      <a:prstDash val="solid"/>
-                      <a:round/>
-                      <a:headEnd type="none" w="med" len="med"/>
-                      <a:tailEnd type="none" w="med" len="med"/>
-                    </a:lnR>
-                    <a:lnT w="9525" cap="flat" cmpd="sng" algn="ctr">
-                      <a:solidFill>
-                        <a:srgbClr val="BFBFBF"/>
-                      </a:solidFill>
-                      <a:prstDash val="solid"/>
-                      <a:round/>
-                      <a:headEnd type="none" w="med" len="med"/>
-                      <a:tailEnd type="none" w="med" len="med"/>
-                    </a:lnT>
-                    <a:lnB w="9525" cap="flat" cmpd="sng" algn="ctr">
-                      <a:solidFill>
-                        <a:srgbClr val="BFBFBF"/>
-                      </a:solidFill>
-                      <a:prstDash val="solid"/>
-                      <a:round/>
-                      <a:headEnd type="none" w="med" len="med"/>
-                      <a:tailEnd type="none" w="med" len="med"/>
-                    </a:lnB>
-                    <a:solidFill>
-                      <a:srgbClr val="FFFFFF"/>
-                    </a:solidFill>
-                  </a:tcPr>
-                </a:tc>
-              </a:tr>
-            </a:tbl>
-          </a:graphicData>
-        </a:graphic>
-      </p:graphicFrame>
       <p:sp>
         <p:nvSpPr>
-          <p:cNvPr id="6" name="注記"/>
+          <p:cNvPr id="341" name="正方形/長方形 4"/>
           <p:cNvSpPr/>
           <p:nvPr/>
         </p:nvSpPr>
         <p:spPr>
           <a:xfrm>
-            <a:off x="502920" y="5440680"/>
-            <a:ext cx="8897112" cy="182880"/>
+            <a:off x="261360" y="1517760"/>
+            <a:ext cx="2899440" cy="383760"/>
+          </a:xfrm>
+          <a:prstGeom prst="rect">
+            <a:avLst/>
+          </a:prstGeom>
+          <a:solidFill>
+            <a:schemeClr val="tx2"/>
+          </a:solidFill>
+          <a:ln>
+            <a:noFill/>
+          </a:ln>
+        </p:spPr>
+        <p:style>
+          <a:lnRef idx="2">
+            <a:schemeClr val="accent1">
+              <a:shade val="15000"/>
+            </a:schemeClr>
+          </a:lnRef>
+          <a:fillRef idx="1">
+            <a:schemeClr val="accent1"/>
+          </a:fillRef>
+          <a:effectRef idx="0">
+            <a:schemeClr val="accent1"/>
+          </a:effectRef>
+          <a:fontRef idx="minor"/>
+        </p:style>
+        <p:txBody>
+          <a:bodyPr lIns="90000" tIns="45000" rIns="90000" bIns="45000" anchor="ctr">
+            <a:noAutofit/>
+          </a:bodyPr>
+          <a:lstStyle/>
+          <a:p>
+            <a:pPr algn="ctr" defTabSz="914400">
+              <a:lnSpc>
+                <a:spcPct val="100000"/>
+              </a:lnSpc>
+            </a:pPr>
+            <a:r>
+              <a:rPr lang="ja-JP" sz="1400" b="0" u="none" strike="noStrike">
+                <a:solidFill>
+                  <a:schemeClr val="lt1"/>
+                </a:solidFill>
+                <a:effectLst/>
+                <a:uFillTx/>
+                <a:latin typeface="メイリオ"/>
+                <a:ea typeface="メイリオ"/>
+                <a:cs typeface="メイリオ"/>
+              </a:rPr>
+              <a:t>初期</a:t>
+            </a:r>
+            <a:endParaRPr lang="en-US" sz="1400" b="0" u="none" strike="noStrike">
+              <a:solidFill>
+                <a:srgbClr val="FFFFFF"/>
+              </a:solidFill>
+              <a:effectLst/>
+              <a:uFillTx/>
+              <a:latin typeface="メイリオ"/>
+              <a:ea typeface="メイリオ"/>
+              <a:cs typeface="メイリオ"/>
+            </a:endParaRPr>
+          </a:p>
+        </p:txBody>
+      </p:sp>
+      <p:sp>
+        <p:nvSpPr>
+          <p:cNvPr id="342" name="正方形/長方形 6"/>
+          <p:cNvSpPr/>
+          <p:nvPr/>
+        </p:nvSpPr>
+        <p:spPr>
+          <a:xfrm>
+            <a:off x="3337560" y="1517760"/>
+            <a:ext cx="2899440" cy="383760"/>
+          </a:xfrm>
+          <a:prstGeom prst="rect">
+            <a:avLst/>
+          </a:prstGeom>
+          <a:solidFill>
+            <a:schemeClr val="tx2"/>
+          </a:solidFill>
+          <a:ln>
+            <a:noFill/>
+          </a:ln>
+        </p:spPr>
+        <p:style>
+          <a:lnRef idx="2">
+            <a:schemeClr val="accent1">
+              <a:shade val="15000"/>
+            </a:schemeClr>
+          </a:lnRef>
+          <a:fillRef idx="1">
+            <a:schemeClr val="accent1"/>
+          </a:fillRef>
+          <a:effectRef idx="0">
+            <a:schemeClr val="accent1"/>
+          </a:effectRef>
+          <a:fontRef idx="minor"/>
+        </p:style>
+        <p:txBody>
+          <a:bodyPr lIns="90000" tIns="45000" rIns="90000" bIns="45000" anchor="ctr">
+            <a:noAutofit/>
+          </a:bodyPr>
+          <a:lstStyle/>
+          <a:p>
+            <a:pPr algn="ctr" defTabSz="914400">
+              <a:lnSpc>
+                <a:spcPct val="100000"/>
+              </a:lnSpc>
+            </a:pPr>
+            <a:r>
+              <a:rPr lang="ja-JP" sz="1400" b="0" u="none" strike="noStrike">
+                <a:solidFill>
+                  <a:schemeClr val="lt1"/>
+                </a:solidFill>
+                <a:effectLst/>
+                <a:uFillTx/>
+                <a:latin typeface="メイリオ"/>
+                <a:ea typeface="メイリオ"/>
+                <a:cs typeface="メイリオ"/>
+              </a:rPr>
+              <a:t>月次</a:t>
+            </a:r>
+            <a:endParaRPr lang="en-US" sz="1400" b="0" u="none" strike="noStrike">
+              <a:solidFill>
+                <a:srgbClr val="FFFFFF"/>
+              </a:solidFill>
+              <a:effectLst/>
+              <a:uFillTx/>
+              <a:latin typeface="メイリオ"/>
+              <a:ea typeface="メイリオ"/>
+              <a:cs typeface="メイリオ"/>
+            </a:endParaRPr>
+          </a:p>
+        </p:txBody>
+      </p:sp>
+      <p:sp>
+        <p:nvSpPr>
+          <p:cNvPr id="343" name="正方形/長方形 7"/>
+          <p:cNvSpPr/>
+          <p:nvPr/>
+        </p:nvSpPr>
+        <p:spPr>
+          <a:xfrm>
+            <a:off x="261360" y="1956960"/>
+            <a:ext cx="2899440" cy="676440"/>
           </a:xfrm>
           <a:prstGeom prst="rect">
             <a:avLst/>
           </a:prstGeom>
           <a:noFill/>
           <a:ln>
-            <a:noFill/>
+            <a:solidFill>
+              <a:srgbClr val="223852"/>
+            </a:solidFill>
+            <a:round/>
           </a:ln>
         </p:spPr>
+        <p:style>
+          <a:lnRef idx="2">
+            <a:schemeClr val="accent1">
+              <a:shade val="15000"/>
+            </a:schemeClr>
+          </a:lnRef>
+          <a:fillRef idx="1">
+            <a:schemeClr val="accent1"/>
+          </a:fillRef>
+          <a:effectRef idx="0">
+            <a:schemeClr val="accent1"/>
+          </a:effectRef>
+          <a:fontRef idx="minor"/>
+        </p:style>
         <p:txBody>
-          <a:bodyPr wrap="square" lIns="0" tIns="0" rIns="0" bIns="0" rtlCol="0" anchor="t">
+          <a:bodyPr lIns="90000" tIns="45000" rIns="90000" bIns="45000" anchor="ctr">
             <a:noAutofit/>
           </a:bodyPr>
           <a:lstStyle/>
           <a:p>
-            <a:pPr algn="l">
-              <a:buNone/>
+            <a:pPr algn="ctr" defTabSz="914400">
+              <a:lnSpc>
+                <a:spcPct val="100000"/>
+              </a:lnSpc>
             </a:pPr>
             <a:r>
-              <a:rPr lang="ja-JP" altLang="en-US" sz="900" b="0" dirty="0">
-                <a:solidFill>
-                  <a:srgbClr val="7F7F7F"/>
-                </a:solidFill>
-                <a:latin typeface="メイリオ" panose="020B0604030504040204" pitchFamily="50" charset="-128"/>
-                <a:ea typeface="メイリオ" panose="020B0604030504040204" pitchFamily="50" charset="-128"/>
-                <a:cs typeface="メイリオ"/>
-              </a:rPr>
-              <a:t>※プラン②（平常期は月10万円で算出）。イベントは3か月おき（1・4か月目）と仮に置いて算出。広告費は含まない</a:t>
-            </a:r>
-            <a:endParaRPr lang="ja-JP" altLang="en-US" sz="1200" dirty="0">
+              <a:rPr lang="en-US" sz="1600" b="1" u="none" strike="noStrike">
+                <a:solidFill>
+                  <a:schemeClr val="dk1"/>
+                </a:solidFill>
+                <a:effectLst/>
+                <a:uFillTx/>
+                <a:latin typeface="メイリオ"/>
+                <a:ea typeface="メイリオ"/>
+                <a:cs typeface="メイリオ"/>
+              </a:rPr>
+              <a:t>¥295,000〜</a:t>
+            </a:r>
+            <a:endParaRPr lang="en-US" sz="1600" b="0" u="none" strike="noStrike">
+              <a:solidFill>
+                <a:srgbClr val="000000"/>
+              </a:solidFill>
+              <a:effectLst/>
+              <a:uFillTx/>
               <a:latin typeface="メイリオ"/>
               <a:ea typeface="メイリオ"/>
               <a:cs typeface="メイリオ"/>
@@ -20795,91 +15906,2671 @@
       </p:sp>
       <p:sp>
         <p:nvSpPr>
-          <p:cNvPr id="7" name="注記"/>
+          <p:cNvPr id="344" name="正方形/長方形 9"/>
           <p:cNvSpPr/>
           <p:nvPr/>
         </p:nvSpPr>
         <p:spPr>
           <a:xfrm>
-            <a:off x="502920" y="5623560"/>
-            <a:ext cx="8897112" cy="182880"/>
+            <a:off x="3337560" y="1956960"/>
+            <a:ext cx="2899440" cy="676440"/>
           </a:xfrm>
           <a:prstGeom prst="rect">
             <a:avLst/>
           </a:prstGeom>
           <a:noFill/>
           <a:ln>
-            <a:noFill/>
+            <a:solidFill>
+              <a:srgbClr val="223852"/>
+            </a:solidFill>
+            <a:round/>
           </a:ln>
         </p:spPr>
+        <p:style>
+          <a:lnRef idx="2">
+            <a:schemeClr val="accent1">
+              <a:shade val="15000"/>
+            </a:schemeClr>
+          </a:lnRef>
+          <a:fillRef idx="1">
+            <a:schemeClr val="accent1"/>
+          </a:fillRef>
+          <a:effectRef idx="0">
+            <a:schemeClr val="accent1"/>
+          </a:effectRef>
+          <a:fontRef idx="minor"/>
+        </p:style>
         <p:txBody>
-          <a:bodyPr wrap="square" lIns="0" tIns="0" rIns="0" bIns="0" rtlCol="0" anchor="t">
+          <a:bodyPr lIns="90000" tIns="45000" rIns="90000" bIns="45000" anchor="ctr">
             <a:noAutofit/>
           </a:bodyPr>
           <a:lstStyle/>
           <a:p>
-            <a:pPr algn="l">
-              <a:buNone/>
+            <a:pPr algn="ctr" defTabSz="914400">
+              <a:lnSpc>
+                <a:spcPct val="100000"/>
+              </a:lnSpc>
             </a:pPr>
             <a:r>
-              <a:rPr lang="ja-JP" altLang="en-US" sz="900" b="0" dirty="0">
-                <a:solidFill>
-                  <a:srgbClr val="7F7F7F"/>
-                </a:solidFill>
-                <a:latin typeface="メイリオ" panose="020B0604030504040204" pitchFamily="50" charset="-128"/>
-                <a:ea typeface="メイリオ" panose="020B0604030504040204" pitchFamily="50" charset="-128"/>
-                <a:cs typeface="メイリオ"/>
-              </a:rPr>
-              <a:t>※追える人数＝ブロックされずに届く友だちの数。友だちの入口はポップアップツール・サンクスLINE誘導</a:t>
-            </a:r>
-            <a:endParaRPr lang="ja-JP" altLang="en-US" sz="1200" dirty="0">
+              <a:rPr lang="en-US" sz="1600" b="1" u="none" strike="noStrike">
+                <a:solidFill>
+                  <a:schemeClr val="dk1"/>
+                </a:solidFill>
+                <a:effectLst/>
+                <a:uFillTx/>
+                <a:latin typeface="メイリオ"/>
+                <a:ea typeface="メイリオ"/>
+                <a:cs typeface="メイリオ"/>
+              </a:rPr>
+              <a:t>イベント期 ¥365,000〜</a:t>
+            </a:r>
+            <a:endParaRPr lang="en-US" sz="1600" b="0" u="none" strike="noStrike">
+              <a:solidFill>
+                <a:srgbClr val="000000"/>
+              </a:solidFill>
+              <a:effectLst/>
+              <a:uFillTx/>
               <a:latin typeface="メイリオ"/>
               <a:ea typeface="メイリオ"/>
               <a:cs typeface="メイリオ"/>
             </a:endParaRPr>
           </a:p>
+          <a:p>
+            <a:pPr algn="ctr" defTabSz="914400">
+              <a:lnSpc>
+                <a:spcPct val="100000"/>
+              </a:lnSpc>
+            </a:pPr>
+            <a:r>
+              <a:rPr lang="en-US" sz="1600" b="1" u="none" strike="noStrike">
+                <a:solidFill>
+                  <a:schemeClr val="dk1"/>
+                </a:solidFill>
+                <a:effectLst/>
+                <a:uFillTx/>
+                <a:latin typeface="メイリオ"/>
+                <a:ea typeface="メイリオ"/>
+                <a:cs typeface="メイリオ"/>
+              </a:rPr>
+              <a:t>平常期 ¥165,000〜</a:t>
+            </a:r>
+            <a:endParaRPr lang="en-US" sz="1600" b="0" u="none" strike="noStrike">
+              <a:solidFill>
+                <a:srgbClr val="000000"/>
+              </a:solidFill>
+              <a:effectLst/>
+              <a:uFillTx/>
+              <a:latin typeface="メイリオ"/>
+              <a:ea typeface="メイリオ"/>
+              <a:cs typeface="メイリオ"/>
+            </a:endParaRPr>
+          </a:p>
         </p:txBody>
       </p:sp>
       <p:sp>
         <p:nvSpPr>
-          <p:cNvPr id="8" name="注記"/>
+          <p:cNvPr id="345" name="矢印: 右 14"/>
           <p:cNvSpPr/>
           <p:nvPr/>
         </p:nvSpPr>
         <p:spPr>
           <a:xfrm>
-            <a:off x="502920" y="5806440"/>
-            <a:ext cx="8897112" cy="182880"/>
+            <a:off x="6379200" y="1956960"/>
+            <a:ext cx="365400" cy="2797560"/>
+          </a:xfrm>
+          <a:prstGeom prst="rightArrow">
+            <a:avLst>
+              <a:gd name="adj1" fmla="val 50000"/>
+              <a:gd name="adj2" fmla="val 50000"/>
+            </a:avLst>
+          </a:prstGeom>
+          <a:solidFill>
+            <a:schemeClr val="tx1"/>
+          </a:solidFill>
+          <a:ln>
+            <a:noFill/>
+          </a:ln>
+        </p:spPr>
+        <p:style>
+          <a:lnRef idx="2">
+            <a:schemeClr val="accent1">
+              <a:shade val="15000"/>
+            </a:schemeClr>
+          </a:lnRef>
+          <a:fillRef idx="1">
+            <a:schemeClr val="accent1"/>
+          </a:fillRef>
+          <a:effectRef idx="0">
+            <a:schemeClr val="accent1"/>
+          </a:effectRef>
+          <a:fontRef idx="minor"/>
+        </p:style>
+        <p:txBody>
+          <a:bodyPr lIns="90000" tIns="45000" rIns="90000" bIns="45000" anchor="ctr">
+            <a:noAutofit/>
+          </a:bodyPr>
+          <a:lstStyle/>
+          <a:p>
+            <a:pPr algn="ctr" defTabSz="914400">
+              <a:lnSpc>
+                <a:spcPct val="100000"/>
+              </a:lnSpc>
+            </a:pPr>
+            <a:endParaRPr lang="en-US" sz="1800" b="0" u="none" strike="noStrike">
+              <a:solidFill>
+                <a:schemeClr val="lt1"/>
+              </a:solidFill>
+              <a:effectLst/>
+              <a:uFillTx/>
+              <a:latin typeface="メイリオ"/>
+              <a:ea typeface="メイリオ"/>
+              <a:cs typeface="メイリオ"/>
+            </a:endParaRPr>
+          </a:p>
+        </p:txBody>
+      </p:sp>
+      <p:sp>
+        <p:nvSpPr>
+          <p:cNvPr id="346" name="正方形/長方形 16"/>
+          <p:cNvSpPr/>
+          <p:nvPr/>
+        </p:nvSpPr>
+        <p:spPr>
+          <a:xfrm>
+            <a:off x="6744960" y="1517760"/>
+            <a:ext cx="2899440" cy="383760"/>
+          </a:xfrm>
+          <a:prstGeom prst="rect">
+            <a:avLst/>
+          </a:prstGeom>
+          <a:solidFill>
+            <a:schemeClr val="tx1"/>
+          </a:solidFill>
+          <a:ln>
+            <a:noFill/>
+          </a:ln>
+        </p:spPr>
+        <p:style>
+          <a:lnRef idx="2">
+            <a:schemeClr val="accent1">
+              <a:shade val="15000"/>
+            </a:schemeClr>
+          </a:lnRef>
+          <a:fillRef idx="1">
+            <a:schemeClr val="accent1"/>
+          </a:fillRef>
+          <a:effectRef idx="0">
+            <a:schemeClr val="accent1"/>
+          </a:effectRef>
+          <a:fontRef idx="minor"/>
+        </p:style>
+        <p:txBody>
+          <a:bodyPr lIns="90000" tIns="45000" rIns="90000" bIns="45000" anchor="ctr">
+            <a:noAutofit/>
+          </a:bodyPr>
+          <a:lstStyle/>
+          <a:p>
+            <a:pPr algn="ctr" defTabSz="914400">
+              <a:lnSpc>
+                <a:spcPct val="100000"/>
+              </a:lnSpc>
+            </a:pPr>
+            <a:r>
+              <a:rPr lang="en-US" sz="1400" b="0" u="none" strike="noStrike">
+                <a:solidFill>
+                  <a:schemeClr val="lt1"/>
+                </a:solidFill>
+                <a:effectLst/>
+                <a:uFillTx/>
+                <a:latin typeface="メイリオ"/>
+                <a:ea typeface="メイリオ"/>
+                <a:cs typeface="メイリオ"/>
+              </a:rPr>
+              <a:t>6</a:t>
+            </a:r>
+            <a:r>
+              <a:rPr lang="ja-JP" sz="1400" b="0" u="none" strike="noStrike">
+                <a:solidFill>
+                  <a:schemeClr val="lt1"/>
+                </a:solidFill>
+                <a:effectLst/>
+                <a:uFillTx/>
+                <a:latin typeface="メイリオ"/>
+                <a:ea typeface="メイリオ"/>
+                <a:cs typeface="メイリオ"/>
+              </a:rPr>
+              <a:t>か月後</a:t>
+            </a:r>
+            <a:endParaRPr lang="en-US" sz="1400" b="0" u="none" strike="noStrike">
+              <a:solidFill>
+                <a:srgbClr val="FFFFFF"/>
+              </a:solidFill>
+              <a:effectLst/>
+              <a:uFillTx/>
+              <a:latin typeface="メイリオ"/>
+              <a:ea typeface="メイリオ"/>
+              <a:cs typeface="メイリオ"/>
+            </a:endParaRPr>
+          </a:p>
+        </p:txBody>
+      </p:sp>
+      <p:sp>
+        <p:nvSpPr>
+          <p:cNvPr id="347" name="テキスト ボックス 18"/>
+          <p:cNvSpPr/>
+          <p:nvPr/>
+        </p:nvSpPr>
+        <p:spPr>
+          <a:xfrm>
+            <a:off x="261360" y="2688480"/>
+            <a:ext cx="2899080" cy="347040"/>
           </a:xfrm>
           <a:prstGeom prst="rect">
             <a:avLst/>
           </a:prstGeom>
           <a:noFill/>
+          <a:ln w="0">
+            <a:noFill/>
+          </a:ln>
+        </p:spPr>
+        <p:style>
+          <a:lnRef idx="0">
+            <a:scrgbClr r="0" g="0" b="0"/>
+          </a:lnRef>
+          <a:fillRef idx="0">
+            <a:scrgbClr r="0" g="0" b="0"/>
+          </a:fillRef>
+          <a:effectRef idx="0">
+            <a:scrgbClr r="0" g="0" b="0"/>
+          </a:effectRef>
+          <a:fontRef idx="minor"/>
+        </p:style>
+        <p:txBody>
+          <a:bodyPr lIns="90000" tIns="45000" rIns="90000" bIns="45000" anchor="ctr">
+            <a:noAutofit/>
+          </a:bodyPr>
+          <a:lstStyle/>
+          <a:p>
+            <a:pPr algn="ctr" defTabSz="914400">
+              <a:lnSpc>
+                <a:spcPct val="100000"/>
+              </a:lnSpc>
+            </a:pPr>
+            <a:r>
+              <a:rPr lang="en-US" sz="1400" b="0" u="none" strike="noStrike">
+                <a:solidFill>
+                  <a:schemeClr val="dk1"/>
+                </a:solidFill>
+                <a:effectLst/>
+                <a:uFillTx/>
+                <a:latin typeface="メイリオ"/>
+                <a:ea typeface="メイリオ"/>
+                <a:cs typeface="メイリオ"/>
+              </a:rPr>
+              <a:t>&lt;</a:t>
+            </a:r>
+            <a:r>
+              <a:rPr lang="ja-JP" sz="1400" b="0" u="none" strike="noStrike">
+                <a:solidFill>
+                  <a:schemeClr val="dk1"/>
+                </a:solidFill>
+                <a:effectLst/>
+                <a:uFillTx/>
+                <a:latin typeface="メイリオ"/>
+                <a:ea typeface="メイリオ"/>
+                <a:cs typeface="メイリオ"/>
+              </a:rPr>
+              <a:t>実施内容</a:t>
+            </a:r>
+            <a:r>
+              <a:rPr lang="en-US" sz="1400" b="0" u="none" strike="noStrike">
+                <a:solidFill>
+                  <a:schemeClr val="dk1"/>
+                </a:solidFill>
+                <a:effectLst/>
+                <a:uFillTx/>
+                <a:latin typeface="メイリオ"/>
+                <a:ea typeface="メイリオ"/>
+                <a:cs typeface="メイリオ"/>
+              </a:rPr>
+              <a:t>&gt;</a:t>
+            </a:r>
+            <a:endParaRPr lang="en-US" sz="1400" b="0" u="none" strike="noStrike">
+              <a:solidFill>
+                <a:srgbClr val="000000"/>
+              </a:solidFill>
+              <a:effectLst/>
+              <a:uFillTx/>
+              <a:latin typeface="メイリオ"/>
+              <a:ea typeface="メイリオ"/>
+              <a:cs typeface="メイリオ"/>
+            </a:endParaRPr>
+          </a:p>
+        </p:txBody>
+      </p:sp>
+      <p:sp>
+        <p:nvSpPr>
+          <p:cNvPr id="348" name="テキスト ボックス 20"/>
+          <p:cNvSpPr/>
+          <p:nvPr/>
+        </p:nvSpPr>
+        <p:spPr>
+          <a:xfrm>
+            <a:off x="3337560" y="2688480"/>
+            <a:ext cx="2899080" cy="347040"/>
+          </a:xfrm>
+          <a:prstGeom prst="rect">
+            <a:avLst/>
+          </a:prstGeom>
+          <a:noFill/>
+          <a:ln w="0">
+            <a:noFill/>
+          </a:ln>
+        </p:spPr>
+        <p:style>
+          <a:lnRef idx="0">
+            <a:scrgbClr r="0" g="0" b="0"/>
+          </a:lnRef>
+          <a:fillRef idx="0">
+            <a:scrgbClr r="0" g="0" b="0"/>
+          </a:fillRef>
+          <a:effectRef idx="0">
+            <a:scrgbClr r="0" g="0" b="0"/>
+          </a:effectRef>
+          <a:fontRef idx="minor"/>
+        </p:style>
+        <p:txBody>
+          <a:bodyPr lIns="90000" tIns="45000" rIns="90000" bIns="45000" anchor="ctr">
+            <a:noAutofit/>
+          </a:bodyPr>
+          <a:lstStyle/>
+          <a:p>
+            <a:pPr algn="ctr" defTabSz="914400">
+              <a:lnSpc>
+                <a:spcPct val="100000"/>
+              </a:lnSpc>
+            </a:pPr>
+            <a:r>
+              <a:rPr lang="en-US" sz="1400" b="0" u="none" strike="noStrike">
+                <a:solidFill>
+                  <a:schemeClr val="dk1"/>
+                </a:solidFill>
+                <a:effectLst/>
+                <a:uFillTx/>
+                <a:latin typeface="メイリオ"/>
+                <a:ea typeface="メイリオ"/>
+                <a:cs typeface="メイリオ"/>
+              </a:rPr>
+              <a:t>&lt;</a:t>
+            </a:r>
+            <a:r>
+              <a:rPr lang="ja-JP" sz="1400" b="0" u="none" strike="noStrike">
+                <a:solidFill>
+                  <a:schemeClr val="dk1"/>
+                </a:solidFill>
+                <a:effectLst/>
+                <a:uFillTx/>
+                <a:latin typeface="メイリオ"/>
+                <a:ea typeface="メイリオ"/>
+                <a:cs typeface="メイリオ"/>
+              </a:rPr>
+              <a:t>実施内容</a:t>
+            </a:r>
+            <a:r>
+              <a:rPr lang="en-US" sz="1400" b="0" u="none" strike="noStrike">
+                <a:solidFill>
+                  <a:schemeClr val="dk1"/>
+                </a:solidFill>
+                <a:effectLst/>
+                <a:uFillTx/>
+                <a:latin typeface="メイリオ"/>
+                <a:ea typeface="メイリオ"/>
+                <a:cs typeface="メイリオ"/>
+              </a:rPr>
+              <a:t>&gt;</a:t>
+            </a:r>
+            <a:endParaRPr lang="en-US" sz="1400" b="0" u="none" strike="noStrike">
+              <a:solidFill>
+                <a:srgbClr val="000000"/>
+              </a:solidFill>
+              <a:effectLst/>
+              <a:uFillTx/>
+              <a:latin typeface="メイリオ"/>
+              <a:ea typeface="メイリオ"/>
+              <a:cs typeface="メイリオ"/>
+            </a:endParaRPr>
+          </a:p>
+        </p:txBody>
+      </p:sp>
+      <p:sp>
+        <p:nvSpPr>
+          <p:cNvPr id="349" name="正方形/長方形 24"/>
+          <p:cNvSpPr/>
+          <p:nvPr/>
+        </p:nvSpPr>
+        <p:spPr>
+          <a:xfrm>
+            <a:off x="3383280" y="3090600"/>
+            <a:ext cx="1425960" cy="447840"/>
+          </a:xfrm>
+          <a:prstGeom prst="rect">
+            <a:avLst/>
+          </a:prstGeom>
+          <a:solidFill>
+            <a:srgbClr val="00B050"/>
+          </a:solidFill>
           <a:ln>
             <a:noFill/>
           </a:ln>
         </p:spPr>
+        <p:style>
+          <a:lnRef idx="2">
+            <a:schemeClr val="accent1">
+              <a:shade val="15000"/>
+            </a:schemeClr>
+          </a:lnRef>
+          <a:fillRef idx="1">
+            <a:schemeClr val="accent1"/>
+          </a:fillRef>
+          <a:effectRef idx="0">
+            <a:schemeClr val="accent1"/>
+          </a:effectRef>
+          <a:fontRef idx="minor"/>
+        </p:style>
         <p:txBody>
-          <a:bodyPr wrap="square" lIns="0" tIns="0" rIns="0" bIns="0" rtlCol="0" anchor="t">
+          <a:bodyPr lIns="45720" tIns="18360" rIns="45720" bIns="18360" anchor="ctr">
             <a:noAutofit/>
           </a:bodyPr>
           <a:lstStyle/>
           <a:p>
-            <a:pPr algn="l">
-              <a:buNone/>
+            <a:pPr algn="ctr" defTabSz="914400">
+              <a:lnSpc>
+                <a:spcPct val="100000"/>
+              </a:lnSpc>
             </a:pPr>
             <a:r>
-              <a:rPr lang="ja-JP" altLang="en-US" sz="900" b="0" dirty="0">
-                <a:solidFill>
-                  <a:srgbClr val="7F7F7F"/>
-                </a:solidFill>
-                <a:latin typeface="メイリオ" panose="020B0604030504040204" pitchFamily="50" charset="-128"/>
-                <a:ea typeface="メイリオ" panose="020B0604030504040204" pitchFamily="50" charset="-128"/>
-                <a:cs typeface="メイリオ"/>
-              </a:rPr>
-              <a:t>※ツール＝ポップアップツール・サンクスLINE誘導。LINE利用料＝LINE公式アカウントの開設・月額の利用料</a:t>
-            </a:r>
-            <a:endParaRPr lang="ja-JP" altLang="en-US" sz="1200" dirty="0">
+              <a:rPr lang="ja-JP" sz="1300" b="0" u="none" strike="noStrike">
+                <a:solidFill>
+                  <a:schemeClr val="lt1"/>
+                </a:solidFill>
+                <a:effectLst/>
+                <a:uFillTx/>
+                <a:latin typeface="メイリオ"/>
+                <a:ea typeface="メイリオ"/>
+                <a:cs typeface="メイリオ"/>
+              </a:rPr>
+              <a:t>イベント期の</a:t>
+            </a:r>
+            <a:endParaRPr lang="en-US" sz="1300" b="0" u="none" strike="noStrike">
+              <a:solidFill>
+                <a:srgbClr val="FFFFFF"/>
+              </a:solidFill>
+              <a:effectLst/>
+              <a:uFillTx/>
+              <a:latin typeface="メイリオ"/>
+              <a:ea typeface="メイリオ"/>
+              <a:cs typeface="メイリオ"/>
+            </a:endParaRPr>
+          </a:p>
+          <a:p>
+            <a:pPr algn="ctr" defTabSz="914400">
+              <a:lnSpc>
+                <a:spcPct val="100000"/>
+              </a:lnSpc>
+            </a:pPr>
+            <a:r>
+              <a:rPr lang="ja-JP" sz="1300" b="0" u="none" strike="noStrike">
+                <a:solidFill>
+                  <a:schemeClr val="lt1"/>
+                </a:solidFill>
+                <a:effectLst/>
+                <a:uFillTx/>
+                <a:latin typeface="メイリオ"/>
+                <a:ea typeface="メイリオ"/>
+                <a:cs typeface="メイリオ"/>
+              </a:rPr>
+              <a:t>企画配信</a:t>
+            </a:r>
+            <a:endParaRPr lang="en-US" sz="1300" b="0" u="none" strike="noStrike">
+              <a:solidFill>
+                <a:srgbClr val="FFFFFF"/>
+              </a:solidFill>
+              <a:effectLst/>
+              <a:uFillTx/>
+              <a:latin typeface="メイリオ"/>
+              <a:ea typeface="メイリオ"/>
+              <a:cs typeface="メイリオ"/>
+            </a:endParaRPr>
+          </a:p>
+        </p:txBody>
+      </p:sp>
+      <p:sp>
+        <p:nvSpPr>
+          <p:cNvPr id="350" name="正方形/長方形 28"/>
+          <p:cNvSpPr/>
+          <p:nvPr/>
+        </p:nvSpPr>
+        <p:spPr>
+          <a:xfrm>
+            <a:off x="4846320" y="3090600"/>
+            <a:ext cx="1343880" cy="447840"/>
+          </a:xfrm>
+          <a:prstGeom prst="rect">
+            <a:avLst/>
+          </a:prstGeom>
+          <a:solidFill>
+            <a:schemeClr val="bg1">
+              <a:lumMod val="95000"/>
+            </a:schemeClr>
+          </a:solidFill>
+          <a:ln>
+            <a:noFill/>
+          </a:ln>
+        </p:spPr>
+        <p:style>
+          <a:lnRef idx="2">
+            <a:schemeClr val="accent1">
+              <a:shade val="15000"/>
+            </a:schemeClr>
+          </a:lnRef>
+          <a:fillRef idx="1">
+            <a:schemeClr val="accent1"/>
+          </a:fillRef>
+          <a:effectRef idx="0">
+            <a:schemeClr val="accent1"/>
+          </a:effectRef>
+          <a:fontRef idx="minor"/>
+        </p:style>
+        <p:txBody>
+          <a:bodyPr lIns="45720" tIns="18360" rIns="45720" bIns="18360" anchor="ctr">
+            <a:noAutofit/>
+          </a:bodyPr>
+          <a:lstStyle/>
+          <a:p>
+            <a:pPr algn="ctr" defTabSz="914400">
+              <a:lnSpc>
+                <a:spcPct val="100000"/>
+              </a:lnSpc>
+            </a:pPr>
+            <a:r>
+              <a:rPr lang="zh-CN" sz="1300" b="0" u="none" strike="noStrike">
+                <a:solidFill>
+                  <a:schemeClr val="dk1"/>
+                </a:solidFill>
+                <a:effectLst/>
+                <a:uFillTx/>
+                <a:latin typeface="メイリオ"/>
+                <a:ea typeface="メイリオ"/>
+                <a:cs typeface="メイリオ"/>
+              </a:rPr>
+              <a:t>月4〜5回</a:t>
+            </a:r>
+            <a:endParaRPr lang="en-US" sz="1300" b="0" u="none" strike="noStrike">
+              <a:solidFill>
+                <a:srgbClr val="000000"/>
+              </a:solidFill>
+              <a:effectLst/>
+              <a:uFillTx/>
+              <a:latin typeface="メイリオ"/>
+              <a:ea typeface="メイリオ"/>
+              <a:cs typeface="メイリオ"/>
+            </a:endParaRPr>
+          </a:p>
+        </p:txBody>
+      </p:sp>
+      <p:sp>
+        <p:nvSpPr>
+          <p:cNvPr id="351" name="正方形/長方形 32"/>
+          <p:cNvSpPr/>
+          <p:nvPr/>
+        </p:nvSpPr>
+        <p:spPr>
+          <a:xfrm>
+            <a:off x="3383280" y="3579840"/>
+            <a:ext cx="1425960" cy="484200"/>
+          </a:xfrm>
+          <a:prstGeom prst="rect">
+            <a:avLst/>
+          </a:prstGeom>
+          <a:solidFill>
+            <a:srgbClr val="00B050"/>
+          </a:solidFill>
+          <a:ln>
+            <a:noFill/>
+          </a:ln>
+        </p:spPr>
+        <p:style>
+          <a:lnRef idx="2">
+            <a:schemeClr val="accent1">
+              <a:shade val="15000"/>
+            </a:schemeClr>
+          </a:lnRef>
+          <a:fillRef idx="1">
+            <a:schemeClr val="accent1"/>
+          </a:fillRef>
+          <a:effectRef idx="0">
+            <a:schemeClr val="accent1"/>
+          </a:effectRef>
+          <a:fontRef idx="minor"/>
+        </p:style>
+        <p:txBody>
+          <a:bodyPr lIns="36576" tIns="0" rIns="36576" bIns="0" anchor="ctr">
+            <a:noAutofit/>
+          </a:bodyPr>
+          <a:lstStyle/>
+          <a:p>
+            <a:pPr algn="ctr" defTabSz="914400">
+              <a:lnSpc>
+                <a:spcPct val="90000"/>
+              </a:lnSpc>
+            </a:pPr>
+            <a:r>
+              <a:rPr lang="ja-JP" sz="1200" b="0" u="none" strike="noStrike">
+                <a:solidFill>
+                  <a:schemeClr val="lt1"/>
+                </a:solidFill>
+                <a:effectLst/>
+                <a:uFillTx/>
+                <a:latin typeface="メイリオ"/>
+                <a:ea typeface="メイリオ"/>
+                <a:cs typeface="メイリオ"/>
+              </a:rPr>
+              <a:t>平常期の</a:t>
+            </a:r>
+            <a:endParaRPr lang="en-US" sz="1200" b="0" u="none" strike="noStrike">
+              <a:solidFill>
+                <a:srgbClr val="FFFFFF"/>
+              </a:solidFill>
+              <a:effectLst/>
+              <a:uFillTx/>
+              <a:latin typeface="メイリオ"/>
+              <a:ea typeface="メイリオ"/>
+              <a:cs typeface="メイリオ"/>
+            </a:endParaRPr>
+          </a:p>
+          <a:p>
+            <a:pPr algn="ctr" defTabSz="914400">
+              <a:lnSpc>
+                <a:spcPct val="90000"/>
+              </a:lnSpc>
+            </a:pPr>
+            <a:r>
+              <a:rPr lang="ja-JP" sz="1200" b="0" u="none" strike="noStrike">
+                <a:solidFill>
+                  <a:schemeClr val="lt1"/>
+                </a:solidFill>
+                <a:effectLst/>
+                <a:uFillTx/>
+                <a:latin typeface="メイリオ"/>
+                <a:ea typeface="メイリオ"/>
+                <a:cs typeface="メイリオ"/>
+              </a:rPr>
+              <a:t>企画配信</a:t>
+            </a:r>
+            <a:endParaRPr lang="en-US" sz="1200" b="0" u="none" strike="noStrike">
+              <a:solidFill>
+                <a:srgbClr val="FFFFFF"/>
+              </a:solidFill>
+              <a:effectLst/>
+              <a:uFillTx/>
+              <a:latin typeface="メイリオ"/>
+              <a:ea typeface="メイリオ"/>
+              <a:cs typeface="メイリオ"/>
+            </a:endParaRPr>
+          </a:p>
+        </p:txBody>
+      </p:sp>
+      <p:sp>
+        <p:nvSpPr>
+          <p:cNvPr id="352" name="正方形/長方形 36"/>
+          <p:cNvSpPr/>
+          <p:nvPr/>
+        </p:nvSpPr>
+        <p:spPr>
+          <a:xfrm>
+            <a:off x="4846320" y="3579840"/>
+            <a:ext cx="1343880" cy="484200"/>
+          </a:xfrm>
+          <a:prstGeom prst="rect">
+            <a:avLst/>
+          </a:prstGeom>
+          <a:solidFill>
+            <a:schemeClr val="bg1">
+              <a:lumMod val="95000"/>
+            </a:schemeClr>
+          </a:solidFill>
+          <a:ln>
+            <a:noFill/>
+          </a:ln>
+        </p:spPr>
+        <p:style>
+          <a:lnRef idx="2">
+            <a:schemeClr val="accent1">
+              <a:shade val="15000"/>
+            </a:schemeClr>
+          </a:lnRef>
+          <a:fillRef idx="1">
+            <a:schemeClr val="accent1"/>
+          </a:fillRef>
+          <a:effectRef idx="0">
+            <a:schemeClr val="accent1"/>
+          </a:effectRef>
+          <a:fontRef idx="minor"/>
+        </p:style>
+        <p:txBody>
+          <a:bodyPr lIns="36576" tIns="0" rIns="36576" bIns="0" anchor="ctr">
+            <a:noAutofit/>
+          </a:bodyPr>
+          <a:lstStyle/>
+          <a:p>
+            <a:pPr algn="ctr" defTabSz="914400">
+              <a:lnSpc>
+                <a:spcPct val="100000"/>
+              </a:lnSpc>
+            </a:pPr>
+            <a:r>
+              <a:rPr lang="ja-JP" sz="1200" b="0" u="none" strike="noStrike">
+                <a:solidFill>
+                  <a:schemeClr val="dk1"/>
+                </a:solidFill>
+                <a:effectLst/>
+                <a:uFillTx/>
+                <a:latin typeface="メイリオ"/>
+                <a:ea typeface="メイリオ"/>
+                <a:cs typeface="メイリオ"/>
+              </a:rPr>
+              <a:t>月2回</a:t>
+            </a:r>
+            <a:endParaRPr lang="en-US" sz="1200" b="0" u="none" strike="noStrike">
+              <a:solidFill>
+                <a:srgbClr val="000000"/>
+              </a:solidFill>
+              <a:effectLst/>
+              <a:uFillTx/>
+              <a:latin typeface="メイリオ"/>
+              <a:ea typeface="メイリオ"/>
+              <a:cs typeface="メイリオ"/>
+            </a:endParaRPr>
+          </a:p>
+        </p:txBody>
+      </p:sp>
+      <p:sp>
+        <p:nvSpPr>
+          <p:cNvPr id="353" name="正方形/長方形 40"/>
+          <p:cNvSpPr/>
+          <p:nvPr/>
+        </p:nvSpPr>
+        <p:spPr>
+          <a:xfrm>
+            <a:off x="3383280" y="4069080"/>
+            <a:ext cx="1425960" cy="447840"/>
+          </a:xfrm>
+          <a:prstGeom prst="rect">
+            <a:avLst/>
+          </a:prstGeom>
+          <a:solidFill>
+            <a:srgbClr val="00B050"/>
+          </a:solidFill>
+          <a:ln>
+            <a:noFill/>
+          </a:ln>
+        </p:spPr>
+        <p:style>
+          <a:lnRef idx="2">
+            <a:schemeClr val="accent1">
+              <a:shade val="15000"/>
+            </a:schemeClr>
+          </a:lnRef>
+          <a:fillRef idx="1">
+            <a:schemeClr val="accent1"/>
+          </a:fillRef>
+          <a:effectRef idx="0">
+            <a:schemeClr val="accent1"/>
+          </a:effectRef>
+          <a:fontRef idx="minor"/>
+        </p:style>
+        <p:txBody>
+          <a:bodyPr lIns="45720" tIns="18360" rIns="45720" bIns="18360" anchor="ctr">
+            <a:noAutofit/>
+          </a:bodyPr>
+          <a:lstStyle/>
+          <a:p>
+            <a:pPr algn="ctr" defTabSz="914400">
+              <a:lnSpc>
+                <a:spcPct val="100000"/>
+              </a:lnSpc>
+            </a:pPr>
+            <a:r>
+              <a:rPr lang="ja-JP" sz="1300" b="0" u="none" strike="noStrike">
+                <a:solidFill>
+                  <a:schemeClr val="lt1"/>
+                </a:solidFill>
+                <a:effectLst/>
+                <a:uFillTx/>
+                <a:latin typeface="メイリオ"/>
+                <a:ea typeface="メイリオ"/>
+                <a:cs typeface="メイリオ"/>
+              </a:rPr>
+              <a:t>前日・当日の</a:t>
+            </a:r>
+            <a:endParaRPr lang="en-US" sz="1300" b="0" u="none" strike="noStrike">
+              <a:solidFill>
+                <a:srgbClr val="FFFFFF"/>
+              </a:solidFill>
+              <a:effectLst/>
+              <a:uFillTx/>
+              <a:latin typeface="メイリオ"/>
+              <a:ea typeface="メイリオ"/>
+              <a:cs typeface="メイリオ"/>
+            </a:endParaRPr>
+          </a:p>
+          <a:p>
+            <a:pPr algn="ctr" defTabSz="914400">
+              <a:lnSpc>
+                <a:spcPct val="100000"/>
+              </a:lnSpc>
+            </a:pPr>
+            <a:r>
+              <a:rPr lang="ja-JP" sz="1300" b="0" u="none" strike="noStrike">
+                <a:solidFill>
+                  <a:schemeClr val="lt1"/>
+                </a:solidFill>
+                <a:effectLst/>
+                <a:uFillTx/>
+                <a:latin typeface="メイリオ"/>
+                <a:ea typeface="メイリオ"/>
+                <a:cs typeface="メイリオ"/>
+              </a:rPr>
+              <a:t>お知らせ</a:t>
+            </a:r>
+            <a:endParaRPr lang="en-US" sz="1300" b="0" u="none" strike="noStrike">
+              <a:solidFill>
+                <a:srgbClr val="FFFFFF"/>
+              </a:solidFill>
+              <a:effectLst/>
+              <a:uFillTx/>
+              <a:latin typeface="メイリオ"/>
+              <a:ea typeface="メイリオ"/>
+              <a:cs typeface="メイリオ"/>
+            </a:endParaRPr>
+          </a:p>
+        </p:txBody>
+      </p:sp>
+      <p:sp>
+        <p:nvSpPr>
+          <p:cNvPr id="354" name="正方形/長方形 45"/>
+          <p:cNvSpPr/>
+          <p:nvPr/>
+        </p:nvSpPr>
+        <p:spPr>
+          <a:xfrm>
+            <a:off x="4846320" y="4069080"/>
+            <a:ext cx="1343880" cy="447840"/>
+          </a:xfrm>
+          <a:prstGeom prst="rect">
+            <a:avLst/>
+          </a:prstGeom>
+          <a:solidFill>
+            <a:schemeClr val="bg1">
+              <a:lumMod val="95000"/>
+            </a:schemeClr>
+          </a:solidFill>
+          <a:ln>
+            <a:noFill/>
+          </a:ln>
+        </p:spPr>
+        <p:style>
+          <a:lnRef idx="2">
+            <a:schemeClr val="accent1">
+              <a:shade val="15000"/>
+            </a:schemeClr>
+          </a:lnRef>
+          <a:fillRef idx="1">
+            <a:schemeClr val="accent1"/>
+          </a:fillRef>
+          <a:effectRef idx="0">
+            <a:schemeClr val="accent1"/>
+          </a:effectRef>
+          <a:fontRef idx="minor"/>
+        </p:style>
+        <p:txBody>
+          <a:bodyPr lIns="45720" tIns="18360" rIns="45720" bIns="18360" anchor="ctr">
+            <a:noAutofit/>
+          </a:bodyPr>
+          <a:lstStyle/>
+          <a:p>
+            <a:pPr algn="ctr" defTabSz="914400">
+              <a:lnSpc>
+                <a:spcPct val="100000"/>
+              </a:lnSpc>
+            </a:pPr>
+            <a:r>
+              <a:rPr lang="en-US" sz="1300" b="0" u="none" strike="noStrike">
+                <a:solidFill>
+                  <a:schemeClr val="dk1"/>
+                </a:solidFill>
+                <a:effectLst/>
+                <a:uFillTx/>
+                <a:latin typeface="メイリオ"/>
+                <a:ea typeface="メイリオ"/>
+                <a:cs typeface="メイリオ"/>
+              </a:rPr>
+              <a:t>日程ごとに配信</a:t>
+            </a:r>
+            <a:endParaRPr lang="en-US" sz="1300" b="0" u="none" strike="noStrike">
+              <a:solidFill>
+                <a:srgbClr val="000000"/>
+              </a:solidFill>
+              <a:effectLst/>
+              <a:uFillTx/>
+              <a:latin typeface="メイリオ"/>
+              <a:ea typeface="メイリオ"/>
+              <a:cs typeface="メイリオ"/>
+            </a:endParaRPr>
+          </a:p>
+        </p:txBody>
+      </p:sp>
+      <p:sp>
+        <p:nvSpPr>
+          <p:cNvPr id="355" name="正方形/長方形 49"/>
+          <p:cNvSpPr/>
+          <p:nvPr/>
+        </p:nvSpPr>
+        <p:spPr>
+          <a:xfrm>
+            <a:off x="3383280" y="4558320"/>
+            <a:ext cx="1425960" cy="447840"/>
+          </a:xfrm>
+          <a:prstGeom prst="rect">
+            <a:avLst/>
+          </a:prstGeom>
+          <a:solidFill>
+            <a:srgbClr val="00B050"/>
+          </a:solidFill>
+          <a:ln>
+            <a:noFill/>
+          </a:ln>
+        </p:spPr>
+        <p:style>
+          <a:lnRef idx="2">
+            <a:schemeClr val="accent1">
+              <a:shade val="15000"/>
+            </a:schemeClr>
+          </a:lnRef>
+          <a:fillRef idx="1">
+            <a:schemeClr val="accent1"/>
+          </a:fillRef>
+          <a:effectRef idx="0">
+            <a:schemeClr val="accent1"/>
+          </a:effectRef>
+          <a:fontRef idx="minor"/>
+        </p:style>
+        <p:txBody>
+          <a:bodyPr lIns="45720" tIns="18360" rIns="45720" bIns="18360" anchor="ctr">
+            <a:noAutofit/>
+          </a:bodyPr>
+          <a:lstStyle/>
+          <a:p>
+            <a:pPr algn="ctr" defTabSz="914400">
+              <a:lnSpc>
+                <a:spcPct val="100000"/>
+              </a:lnSpc>
+            </a:pPr>
+            <a:r>
+              <a:rPr lang="ja-JP" sz="1300" b="0" u="none" strike="noStrike">
+                <a:solidFill>
+                  <a:schemeClr val="lt1"/>
+                </a:solidFill>
+                <a:effectLst/>
+                <a:uFillTx/>
+                <a:latin typeface="メイリオ"/>
+                <a:ea typeface="メイリオ"/>
+                <a:cs typeface="メイリオ"/>
+              </a:rPr>
+              <a:t>申込み</a:t>
+            </a:r>
+            <a:endParaRPr lang="en-US" sz="1300" b="0" u="none" strike="noStrike">
+              <a:solidFill>
+                <a:srgbClr val="FFFFFF"/>
+              </a:solidFill>
+              <a:effectLst/>
+              <a:uFillTx/>
+              <a:latin typeface="メイリオ"/>
+              <a:ea typeface="メイリオ"/>
+              <a:cs typeface="メイリオ"/>
+            </a:endParaRPr>
+          </a:p>
+          <a:p>
+            <a:pPr algn="ctr" defTabSz="914400">
+              <a:lnSpc>
+                <a:spcPct val="100000"/>
+              </a:lnSpc>
+            </a:pPr>
+            <a:r>
+              <a:rPr lang="ja-JP" sz="1300" b="0" u="none" strike="noStrike">
+                <a:solidFill>
+                  <a:schemeClr val="lt1"/>
+                </a:solidFill>
+                <a:effectLst/>
+                <a:uFillTx/>
+                <a:latin typeface="メイリオ"/>
+                <a:ea typeface="メイリオ"/>
+                <a:cs typeface="メイリオ"/>
+              </a:rPr>
+              <a:t>フォームの案内</a:t>
+            </a:r>
+            <a:endParaRPr lang="en-US" sz="1300" b="0" u="none" strike="noStrike">
+              <a:solidFill>
+                <a:srgbClr val="FFFFFF"/>
+              </a:solidFill>
+              <a:effectLst/>
+              <a:uFillTx/>
+              <a:latin typeface="メイリオ"/>
+              <a:ea typeface="メイリオ"/>
+              <a:cs typeface="メイリオ"/>
+            </a:endParaRPr>
+          </a:p>
+        </p:txBody>
+      </p:sp>
+      <p:sp>
+        <p:nvSpPr>
+          <p:cNvPr id="356" name="正方形/長方形 53"/>
+          <p:cNvSpPr/>
+          <p:nvPr/>
+        </p:nvSpPr>
+        <p:spPr>
+          <a:xfrm>
+            <a:off x="4846320" y="4558320"/>
+            <a:ext cx="1343880" cy="447840"/>
+          </a:xfrm>
+          <a:prstGeom prst="rect">
+            <a:avLst/>
+          </a:prstGeom>
+          <a:solidFill>
+            <a:schemeClr val="bg1">
+              <a:lumMod val="95000"/>
+            </a:schemeClr>
+          </a:solidFill>
+          <a:ln>
+            <a:noFill/>
+          </a:ln>
+        </p:spPr>
+        <p:style>
+          <a:lnRef idx="2">
+            <a:schemeClr val="accent1">
+              <a:shade val="15000"/>
+            </a:schemeClr>
+          </a:lnRef>
+          <a:fillRef idx="1">
+            <a:schemeClr val="accent1"/>
+          </a:fillRef>
+          <a:effectRef idx="0">
+            <a:schemeClr val="accent1"/>
+          </a:effectRef>
+          <a:fontRef idx="minor"/>
+        </p:style>
+        <p:txBody>
+          <a:bodyPr lIns="45720" tIns="18360" rIns="45720" bIns="18360" anchor="ctr">
+            <a:noAutofit/>
+          </a:bodyPr>
+          <a:lstStyle/>
+          <a:p>
+            <a:pPr algn="ctr" defTabSz="914400">
+              <a:lnSpc>
+                <a:spcPct val="100000"/>
+              </a:lnSpc>
+            </a:pPr>
+            <a:r>
+              <a:rPr lang="en-US" sz="1300" b="0" u="none" strike="noStrike">
+                <a:solidFill>
+                  <a:schemeClr val="dk1"/>
+                </a:solidFill>
+                <a:effectLst/>
+                <a:uFillTx/>
+                <a:latin typeface="メイリオ"/>
+                <a:ea typeface="メイリオ"/>
+                <a:cs typeface="メイリオ"/>
+              </a:rPr>
+              <a:t>イベント直後</a:t>
+            </a:r>
+            <a:endParaRPr lang="en-US" sz="1300" b="0" u="none" strike="noStrike">
+              <a:solidFill>
+                <a:srgbClr val="000000"/>
+              </a:solidFill>
+              <a:effectLst/>
+              <a:uFillTx/>
+              <a:latin typeface="メイリオ"/>
+              <a:ea typeface="メイリオ"/>
+              <a:cs typeface="メイリオ"/>
+            </a:endParaRPr>
+          </a:p>
+        </p:txBody>
+      </p:sp>
+      <p:sp>
+        <p:nvSpPr>
+          <p:cNvPr id="357" name="正方形/長方形 57"/>
+          <p:cNvSpPr/>
+          <p:nvPr/>
+        </p:nvSpPr>
+        <p:spPr>
+          <a:xfrm>
+            <a:off x="3383280" y="5047560"/>
+            <a:ext cx="1425960" cy="447840"/>
+          </a:xfrm>
+          <a:prstGeom prst="rect">
+            <a:avLst/>
+          </a:prstGeom>
+          <a:solidFill>
+            <a:srgbClr val="00B050"/>
+          </a:solidFill>
+          <a:ln>
+            <a:noFill/>
+          </a:ln>
+        </p:spPr>
+        <p:style>
+          <a:lnRef idx="2">
+            <a:schemeClr val="accent1">
+              <a:shade val="15000"/>
+            </a:schemeClr>
+          </a:lnRef>
+          <a:fillRef idx="1">
+            <a:schemeClr val="accent1"/>
+          </a:fillRef>
+          <a:effectRef idx="0">
+            <a:schemeClr val="accent1"/>
+          </a:effectRef>
+          <a:fontRef idx="minor"/>
+        </p:style>
+        <p:txBody>
+          <a:bodyPr lIns="45720" tIns="18360" rIns="45720" bIns="18360" anchor="ctr">
+            <a:noAutofit/>
+          </a:bodyPr>
+          <a:lstStyle/>
+          <a:p>
+            <a:pPr algn="ctr" defTabSz="914400">
+              <a:lnSpc>
+                <a:spcPct val="100000"/>
+              </a:lnSpc>
+            </a:pPr>
+            <a:r>
+              <a:rPr lang="ja-JP" sz="1300" b="0" u="none" strike="noStrike">
+                <a:solidFill>
+                  <a:schemeClr val="lt1"/>
+                </a:solidFill>
+                <a:effectLst/>
+                <a:uFillTx/>
+                <a:latin typeface="メイリオ"/>
+                <a:ea typeface="メイリオ"/>
+                <a:cs typeface="メイリオ"/>
+              </a:rPr>
+              <a:t>ステップ配信</a:t>
+            </a:r>
+            <a:endParaRPr lang="en-US" sz="1300" b="0" u="none" strike="noStrike">
+              <a:solidFill>
+                <a:srgbClr val="FFFFFF"/>
+              </a:solidFill>
+              <a:effectLst/>
+              <a:uFillTx/>
+              <a:latin typeface="メイリオ"/>
+              <a:ea typeface="メイリオ"/>
+              <a:cs typeface="メイリオ"/>
+            </a:endParaRPr>
+          </a:p>
+        </p:txBody>
+      </p:sp>
+      <p:sp>
+        <p:nvSpPr>
+          <p:cNvPr id="358" name="正方形/長方形 61"/>
+          <p:cNvSpPr/>
+          <p:nvPr/>
+        </p:nvSpPr>
+        <p:spPr>
+          <a:xfrm>
+            <a:off x="4846320" y="5047560"/>
+            <a:ext cx="1343880" cy="447840"/>
+          </a:xfrm>
+          <a:prstGeom prst="rect">
+            <a:avLst/>
+          </a:prstGeom>
+          <a:solidFill>
+            <a:schemeClr val="bg1">
+              <a:lumMod val="95000"/>
+            </a:schemeClr>
+          </a:solidFill>
+          <a:ln>
+            <a:noFill/>
+          </a:ln>
+        </p:spPr>
+        <p:style>
+          <a:lnRef idx="2">
+            <a:schemeClr val="accent1">
+              <a:shade val="15000"/>
+            </a:schemeClr>
+          </a:lnRef>
+          <a:fillRef idx="1">
+            <a:schemeClr val="accent1"/>
+          </a:fillRef>
+          <a:effectRef idx="0">
+            <a:schemeClr val="accent1"/>
+          </a:effectRef>
+          <a:fontRef idx="minor"/>
+        </p:style>
+        <p:txBody>
+          <a:bodyPr lIns="45720" tIns="18360" rIns="45720" bIns="18360" anchor="ctr">
+            <a:noAutofit/>
+          </a:bodyPr>
+          <a:lstStyle/>
+          <a:p>
+            <a:pPr algn="ctr" defTabSz="914400">
+              <a:lnSpc>
+                <a:spcPct val="100000"/>
+              </a:lnSpc>
+            </a:pPr>
+            <a:r>
+              <a:rPr lang="ja-JP" sz="1300" b="0" u="none" strike="noStrike">
+                <a:solidFill>
+                  <a:schemeClr val="dk1"/>
+                </a:solidFill>
+                <a:effectLst/>
+                <a:uFillTx/>
+                <a:latin typeface="メイリオ"/>
+                <a:ea typeface="メイリオ"/>
+                <a:cs typeface="メイリオ"/>
+              </a:rPr>
+              <a:t>5通の改善</a:t>
+            </a:r>
+            <a:endParaRPr lang="en-US" sz="1300" b="0" u="none" strike="noStrike">
+              <a:solidFill>
+                <a:srgbClr val="000000"/>
+              </a:solidFill>
+              <a:effectLst/>
+              <a:uFillTx/>
+              <a:latin typeface="メイリオ"/>
+              <a:ea typeface="メイリオ"/>
+              <a:cs typeface="メイリオ"/>
+            </a:endParaRPr>
+          </a:p>
+        </p:txBody>
+      </p:sp>
+      <p:sp>
+        <p:nvSpPr>
+          <p:cNvPr id="359" name="正方形/長方形 65"/>
+          <p:cNvSpPr/>
+          <p:nvPr/>
+        </p:nvSpPr>
+        <p:spPr>
+          <a:xfrm>
+            <a:off x="3383280" y="5536800"/>
+            <a:ext cx="1425960" cy="447840"/>
+          </a:xfrm>
+          <a:prstGeom prst="rect">
+            <a:avLst/>
+          </a:prstGeom>
+          <a:solidFill>
+            <a:srgbClr val="00B050"/>
+          </a:solidFill>
+          <a:ln>
+            <a:noFill/>
+          </a:ln>
+        </p:spPr>
+        <p:style>
+          <a:lnRef idx="2">
+            <a:schemeClr val="accent1">
+              <a:shade val="15000"/>
+            </a:schemeClr>
+          </a:lnRef>
+          <a:fillRef idx="1">
+            <a:schemeClr val="accent1"/>
+          </a:fillRef>
+          <a:effectRef idx="0">
+            <a:schemeClr val="accent1"/>
+          </a:effectRef>
+          <a:fontRef idx="minor"/>
+        </p:style>
+        <p:txBody>
+          <a:bodyPr lIns="45720" tIns="18360" rIns="45720" bIns="18360" anchor="ctr">
+            <a:noAutofit/>
+          </a:bodyPr>
+          <a:lstStyle/>
+          <a:p>
+            <a:pPr algn="ctr" defTabSz="914400">
+              <a:lnSpc>
+                <a:spcPct val="100000"/>
+              </a:lnSpc>
+            </a:pPr>
+            <a:r>
+              <a:rPr lang="ja-JP" sz="1300" b="0" u="none" strike="noStrike">
+                <a:solidFill>
+                  <a:schemeClr val="lt1"/>
+                </a:solidFill>
+                <a:effectLst/>
+                <a:uFillTx/>
+                <a:latin typeface="メイリオ"/>
+                <a:ea typeface="メイリオ"/>
+                <a:cs typeface="メイリオ"/>
+              </a:rPr>
+              <a:t>友だちの入口</a:t>
+            </a:r>
+            <a:endParaRPr lang="en-US" sz="1300" b="0" u="none" strike="noStrike">
+              <a:solidFill>
+                <a:srgbClr val="FFFFFF"/>
+              </a:solidFill>
+              <a:effectLst/>
+              <a:uFillTx/>
+              <a:latin typeface="メイリオ"/>
+              <a:ea typeface="メイリオ"/>
+              <a:cs typeface="メイリオ"/>
+            </a:endParaRPr>
+          </a:p>
+        </p:txBody>
+      </p:sp>
+      <p:sp>
+        <p:nvSpPr>
+          <p:cNvPr id="360" name="正方形/長方形 69"/>
+          <p:cNvSpPr/>
+          <p:nvPr/>
+        </p:nvSpPr>
+        <p:spPr>
+          <a:xfrm>
+            <a:off x="4846320" y="5536800"/>
+            <a:ext cx="1343880" cy="447840"/>
+          </a:xfrm>
+          <a:prstGeom prst="rect">
+            <a:avLst/>
+          </a:prstGeom>
+          <a:solidFill>
+            <a:schemeClr val="bg1">
+              <a:lumMod val="95000"/>
+            </a:schemeClr>
+          </a:solidFill>
+          <a:ln>
+            <a:noFill/>
+          </a:ln>
+        </p:spPr>
+        <p:style>
+          <a:lnRef idx="2">
+            <a:schemeClr val="accent1">
+              <a:shade val="15000"/>
+            </a:schemeClr>
+          </a:lnRef>
+          <a:fillRef idx="1">
+            <a:schemeClr val="accent1"/>
+          </a:fillRef>
+          <a:effectRef idx="0">
+            <a:schemeClr val="accent1"/>
+          </a:effectRef>
+          <a:fontRef idx="minor"/>
+        </p:style>
+        <p:txBody>
+          <a:bodyPr lIns="45720" tIns="18360" rIns="45720" bIns="18360" anchor="ctr">
+            <a:noAutofit/>
+          </a:bodyPr>
+          <a:lstStyle/>
+          <a:p>
+            <a:pPr algn="ctr" defTabSz="914400">
+              <a:lnSpc>
+                <a:spcPct val="100000"/>
+              </a:lnSpc>
+            </a:pPr>
+            <a:r>
+              <a:rPr lang="en-US" sz="1300" b="0" u="none" strike="noStrike">
+                <a:solidFill>
+                  <a:schemeClr val="dk1"/>
+                </a:solidFill>
+                <a:effectLst/>
+                <a:uFillTx/>
+                <a:latin typeface="メイリオ"/>
+                <a:ea typeface="メイリオ"/>
+                <a:cs typeface="メイリオ"/>
+              </a:rPr>
+              <a:t>運用</a:t>
+            </a:r>
+            <a:endParaRPr lang="en-US" sz="1300" b="0" u="none" strike="noStrike">
+              <a:solidFill>
+                <a:srgbClr val="000000"/>
+              </a:solidFill>
+              <a:effectLst/>
+              <a:uFillTx/>
+              <a:latin typeface="メイリオ"/>
+              <a:ea typeface="メイリオ"/>
+              <a:cs typeface="メイリオ"/>
+            </a:endParaRPr>
+          </a:p>
+        </p:txBody>
+      </p:sp>
+      <p:sp>
+        <p:nvSpPr>
+          <p:cNvPr id="361" name="正方形/長方形 79"/>
+          <p:cNvSpPr/>
+          <p:nvPr/>
+        </p:nvSpPr>
+        <p:spPr>
+          <a:xfrm>
+            <a:off x="6812280" y="1956960"/>
+            <a:ext cx="1425960" cy="402120"/>
+          </a:xfrm>
+          <a:prstGeom prst="rect">
+            <a:avLst/>
+          </a:prstGeom>
+          <a:solidFill>
+            <a:srgbClr val="04FA0A"/>
+          </a:solidFill>
+          <a:ln>
+            <a:noFill/>
+          </a:ln>
+        </p:spPr>
+        <p:style>
+          <a:lnRef idx="2">
+            <a:schemeClr val="accent1">
+              <a:shade val="15000"/>
+            </a:schemeClr>
+          </a:lnRef>
+          <a:fillRef idx="1">
+            <a:schemeClr val="accent1"/>
+          </a:fillRef>
+          <a:effectRef idx="0">
+            <a:schemeClr val="accent1"/>
+          </a:effectRef>
+          <a:fontRef idx="minor"/>
+        </p:style>
+        <p:txBody>
+          <a:bodyPr lIns="45720" tIns="45000" rIns="45720" bIns="45000" anchor="ctr">
+            <a:noAutofit/>
+          </a:bodyPr>
+          <a:lstStyle/>
+          <a:p>
+            <a:pPr algn="ctr" defTabSz="914400">
+              <a:lnSpc>
+                <a:spcPct val="100000"/>
+              </a:lnSpc>
+            </a:pPr>
+            <a:r>
+              <a:rPr lang="ja-JP" sz="1400" b="1" u="none" strike="noStrike">
+                <a:solidFill>
+                  <a:schemeClr val="lt1"/>
+                </a:solidFill>
+                <a:effectLst/>
+                <a:uFillTx/>
+                <a:latin typeface="メイリオ"/>
+                <a:ea typeface="メイリオ"/>
+                <a:cs typeface="メイリオ"/>
+              </a:rPr>
+              <a:t>追える人数</a:t>
+            </a:r>
+            <a:endParaRPr lang="en-US" sz="1400" b="0" u="none" strike="noStrike">
+              <a:solidFill>
+                <a:srgbClr val="000000"/>
+              </a:solidFill>
+              <a:effectLst/>
+              <a:uFillTx/>
+              <a:latin typeface="メイリオ"/>
+              <a:ea typeface="メイリオ"/>
+              <a:cs typeface="メイリオ"/>
+            </a:endParaRPr>
+          </a:p>
+        </p:txBody>
+      </p:sp>
+      <p:sp>
+        <p:nvSpPr>
+          <p:cNvPr id="362" name="正方形/長方形 81"/>
+          <p:cNvSpPr/>
+          <p:nvPr/>
+        </p:nvSpPr>
+        <p:spPr>
+          <a:xfrm>
+            <a:off x="6812280" y="2432160"/>
+            <a:ext cx="1425960" cy="402120"/>
+          </a:xfrm>
+          <a:prstGeom prst="rect">
+            <a:avLst/>
+          </a:prstGeom>
+          <a:solidFill>
+            <a:srgbClr val="04FA0A"/>
+          </a:solidFill>
+          <a:ln>
+            <a:noFill/>
+          </a:ln>
+        </p:spPr>
+        <p:style>
+          <a:lnRef idx="2">
+            <a:schemeClr val="accent1">
+              <a:shade val="15000"/>
+            </a:schemeClr>
+          </a:lnRef>
+          <a:fillRef idx="1">
+            <a:schemeClr val="accent1"/>
+          </a:fillRef>
+          <a:effectRef idx="0">
+            <a:schemeClr val="accent1"/>
+          </a:effectRef>
+          <a:fontRef idx="minor"/>
+        </p:style>
+        <p:txBody>
+          <a:bodyPr lIns="45720" tIns="45000" rIns="45720" bIns="45000" anchor="ctr">
+            <a:noAutofit/>
+          </a:bodyPr>
+          <a:lstStyle/>
+          <a:p>
+            <a:pPr algn="ctr" defTabSz="914400">
+              <a:lnSpc>
+                <a:spcPct val="100000"/>
+              </a:lnSpc>
+            </a:pPr>
+            <a:r>
+              <a:rPr lang="ja-JP" sz="1400" b="1" u="none" strike="noStrike">
+                <a:solidFill>
+                  <a:schemeClr val="lt1"/>
+                </a:solidFill>
+                <a:effectLst/>
+                <a:uFillTx/>
+                <a:latin typeface="メイリオ"/>
+                <a:ea typeface="メイリオ"/>
+                <a:cs typeface="メイリオ"/>
+              </a:rPr>
+              <a:t>セミナー予約</a:t>
+            </a:r>
+            <a:endParaRPr lang="en-US" sz="1400" b="0" u="none" strike="noStrike">
+              <a:solidFill>
+                <a:srgbClr val="000000"/>
+              </a:solidFill>
+              <a:effectLst/>
+              <a:uFillTx/>
+              <a:latin typeface="メイリオ"/>
+              <a:ea typeface="メイリオ"/>
+              <a:cs typeface="メイリオ"/>
+            </a:endParaRPr>
+          </a:p>
+        </p:txBody>
+      </p:sp>
+      <p:sp>
+        <p:nvSpPr>
+          <p:cNvPr id="364" name="正方形/長方形 85"/>
+          <p:cNvSpPr/>
+          <p:nvPr/>
+        </p:nvSpPr>
+        <p:spPr>
+          <a:xfrm>
+            <a:off x="6812280" y="2907792"/>
+            <a:ext cx="1425960" cy="402120"/>
+          </a:xfrm>
+          <a:prstGeom prst="rect">
+            <a:avLst/>
+          </a:prstGeom>
+          <a:solidFill>
+            <a:srgbClr val="04FA0A"/>
+          </a:solidFill>
+          <a:ln>
+            <a:noFill/>
+          </a:ln>
+        </p:spPr>
+        <p:style>
+          <a:lnRef idx="2">
+            <a:schemeClr val="accent1">
+              <a:shade val="15000"/>
+            </a:schemeClr>
+          </a:lnRef>
+          <a:fillRef idx="1">
+            <a:schemeClr val="accent1"/>
+          </a:fillRef>
+          <a:effectRef idx="0">
+            <a:schemeClr val="accent1"/>
+          </a:effectRef>
+          <a:fontRef idx="minor"/>
+        </p:style>
+        <p:txBody>
+          <a:bodyPr lIns="45720" tIns="45000" rIns="45720" bIns="45000" anchor="ctr">
+            <a:noAutofit/>
+          </a:bodyPr>
+          <a:lstStyle/>
+          <a:p>
+            <a:pPr algn="ctr" defTabSz="914400">
+              <a:lnSpc>
+                <a:spcPct val="100000"/>
+              </a:lnSpc>
+            </a:pPr>
+            <a:r>
+              <a:rPr lang="zh-CN" sz="1400" b="1" u="none" strike="noStrike">
+                <a:solidFill>
+                  <a:schemeClr val="lt1"/>
+                </a:solidFill>
+                <a:effectLst/>
+                <a:uFillTx/>
+                <a:latin typeface="メイリオ"/>
+                <a:ea typeface="メイリオ"/>
+                <a:cs typeface="メイリオ"/>
+              </a:rPr>
+              <a:t>サロン入会</a:t>
+            </a:r>
+            <a:endParaRPr lang="en-US" sz="1400" b="0" u="none" strike="noStrike">
+              <a:solidFill>
+                <a:srgbClr val="000000"/>
+              </a:solidFill>
+              <a:effectLst/>
+              <a:uFillTx/>
+              <a:latin typeface="メイリオ"/>
+              <a:ea typeface="メイリオ"/>
+              <a:cs typeface="メイリオ"/>
+            </a:endParaRPr>
+          </a:p>
+        </p:txBody>
+      </p:sp>
+      <p:sp>
+        <p:nvSpPr>
+          <p:cNvPr id="365" name="正方形/長方形 11"/>
+          <p:cNvSpPr/>
+          <p:nvPr/>
+        </p:nvSpPr>
+        <p:spPr>
+          <a:xfrm>
+            <a:off x="307080" y="3090600"/>
+            <a:ext cx="1425960" cy="447840"/>
+          </a:xfrm>
+          <a:prstGeom prst="rect">
+            <a:avLst/>
+          </a:prstGeom>
+          <a:solidFill>
+            <a:srgbClr val="00B050"/>
+          </a:solidFill>
+          <a:ln>
+            <a:noFill/>
+          </a:ln>
+        </p:spPr>
+        <p:style>
+          <a:lnRef idx="2">
+            <a:schemeClr val="accent1">
+              <a:shade val="15000"/>
+            </a:schemeClr>
+          </a:lnRef>
+          <a:fillRef idx="1">
+            <a:schemeClr val="accent1"/>
+          </a:fillRef>
+          <a:effectRef idx="0">
+            <a:schemeClr val="accent1"/>
+          </a:effectRef>
+          <a:fontRef idx="minor"/>
+        </p:style>
+        <p:txBody>
+          <a:bodyPr lIns="45720" tIns="18360" rIns="45720" bIns="18360" anchor="ctr">
+            <a:noAutofit/>
+          </a:bodyPr>
+          <a:lstStyle/>
+          <a:p>
+            <a:pPr algn="ctr" defTabSz="914400">
+              <a:lnSpc>
+                <a:spcPct val="100000"/>
+              </a:lnSpc>
+            </a:pPr>
+            <a:r>
+              <a:rPr lang="ja-JP" sz="1300" b="0" u="none" strike="noStrike">
+                <a:solidFill>
+                  <a:schemeClr val="lt1"/>
+                </a:solidFill>
+                <a:effectLst/>
+                <a:uFillTx/>
+                <a:latin typeface="メイリオ"/>
+                <a:ea typeface="メイリオ"/>
+                <a:cs typeface="メイリオ"/>
+              </a:rPr>
+              <a:t>ポップアップ</a:t>
+            </a:r>
+            <a:endParaRPr lang="en-US" sz="1300" b="0" u="none" strike="noStrike">
+              <a:solidFill>
+                <a:srgbClr val="FFFFFF"/>
+              </a:solidFill>
+              <a:effectLst/>
+              <a:uFillTx/>
+              <a:latin typeface="メイリオ"/>
+              <a:ea typeface="メイリオ"/>
+              <a:cs typeface="メイリオ"/>
+            </a:endParaRPr>
+          </a:p>
+          <a:p>
+            <a:pPr algn="ctr" defTabSz="914400">
+              <a:lnSpc>
+                <a:spcPct val="100000"/>
+              </a:lnSpc>
+            </a:pPr>
+            <a:r>
+              <a:rPr lang="ja-JP" sz="1300" b="0" u="none" strike="noStrike">
+                <a:solidFill>
+                  <a:schemeClr val="lt1"/>
+                </a:solidFill>
+                <a:effectLst/>
+                <a:uFillTx/>
+                <a:latin typeface="メイリオ"/>
+                <a:ea typeface="メイリオ"/>
+                <a:cs typeface="メイリオ"/>
+              </a:rPr>
+              <a:t>ツール</a:t>
+            </a:r>
+            <a:endParaRPr lang="en-US" sz="1300" b="0" u="none" strike="noStrike">
+              <a:solidFill>
+                <a:srgbClr val="FFFFFF"/>
+              </a:solidFill>
+              <a:effectLst/>
+              <a:uFillTx/>
+              <a:latin typeface="メイリオ"/>
+              <a:ea typeface="メイリオ"/>
+              <a:cs typeface="メイリオ"/>
+            </a:endParaRPr>
+          </a:p>
+        </p:txBody>
+      </p:sp>
+      <p:sp>
+        <p:nvSpPr>
+          <p:cNvPr id="366" name="正方形/長方形 13"/>
+          <p:cNvSpPr/>
+          <p:nvPr/>
+        </p:nvSpPr>
+        <p:spPr>
+          <a:xfrm>
+            <a:off x="1770120" y="3090600"/>
+            <a:ext cx="1343880" cy="447840"/>
+          </a:xfrm>
+          <a:prstGeom prst="rect">
+            <a:avLst/>
+          </a:prstGeom>
+          <a:solidFill>
+            <a:schemeClr val="bg1">
+              <a:lumMod val="95000"/>
+            </a:schemeClr>
+          </a:solidFill>
+          <a:ln>
+            <a:noFill/>
+          </a:ln>
+        </p:spPr>
+        <p:style>
+          <a:lnRef idx="2">
+            <a:schemeClr val="accent1">
+              <a:shade val="15000"/>
+            </a:schemeClr>
+          </a:lnRef>
+          <a:fillRef idx="1">
+            <a:schemeClr val="accent1"/>
+          </a:fillRef>
+          <a:effectRef idx="0">
+            <a:schemeClr val="accent1"/>
+          </a:effectRef>
+          <a:fontRef idx="minor"/>
+        </p:style>
+        <p:txBody>
+          <a:bodyPr lIns="45720" tIns="18360" rIns="45720" bIns="18360" anchor="ctr">
+            <a:noAutofit/>
+          </a:bodyPr>
+          <a:lstStyle/>
+          <a:p>
+            <a:pPr algn="ctr" defTabSz="914400">
+              <a:lnSpc>
+                <a:spcPct val="100000"/>
+              </a:lnSpc>
+            </a:pPr>
+            <a:r>
+              <a:rPr lang="zh-CN" sz="1300" b="0" u="none" strike="noStrike">
+                <a:solidFill>
+                  <a:schemeClr val="dk1"/>
+                </a:solidFill>
+                <a:effectLst/>
+                <a:uFillTx/>
+                <a:latin typeface="メイリオ"/>
+                <a:ea typeface="メイリオ"/>
+                <a:cs typeface="メイリオ"/>
+              </a:rPr>
+              <a:t>導入</a:t>
+            </a:r>
+            <a:endParaRPr lang="en-US" sz="1300" b="0" u="none" strike="noStrike">
+              <a:solidFill>
+                <a:srgbClr val="000000"/>
+              </a:solidFill>
+              <a:effectLst/>
+              <a:uFillTx/>
+              <a:latin typeface="メイリオ"/>
+              <a:ea typeface="メイリオ"/>
+              <a:cs typeface="メイリオ"/>
+            </a:endParaRPr>
+          </a:p>
+        </p:txBody>
+      </p:sp>
+      <p:sp>
+        <p:nvSpPr>
+          <p:cNvPr id="367" name="正方形/長方形 17"/>
+          <p:cNvSpPr/>
+          <p:nvPr/>
+        </p:nvSpPr>
+        <p:spPr>
+          <a:xfrm>
+            <a:off x="307080" y="3579840"/>
+            <a:ext cx="1425960" cy="447840"/>
+          </a:xfrm>
+          <a:prstGeom prst="rect">
+            <a:avLst/>
+          </a:prstGeom>
+          <a:solidFill>
+            <a:srgbClr val="00B050"/>
+          </a:solidFill>
+          <a:ln>
+            <a:noFill/>
+          </a:ln>
+        </p:spPr>
+        <p:style>
+          <a:lnRef idx="2">
+            <a:schemeClr val="accent1">
+              <a:shade val="15000"/>
+            </a:schemeClr>
+          </a:lnRef>
+          <a:fillRef idx="1">
+            <a:schemeClr val="accent1"/>
+          </a:fillRef>
+          <a:effectRef idx="0">
+            <a:schemeClr val="accent1"/>
+          </a:effectRef>
+          <a:fontRef idx="minor"/>
+        </p:style>
+        <p:txBody>
+          <a:bodyPr lIns="45720" tIns="18360" rIns="45720" bIns="18360" anchor="ctr">
+            <a:noAutofit/>
+          </a:bodyPr>
+          <a:lstStyle/>
+          <a:p>
+            <a:pPr algn="ctr" defTabSz="914400">
+              <a:lnSpc>
+                <a:spcPct val="100000"/>
+              </a:lnSpc>
+            </a:pPr>
+            <a:r>
+              <a:rPr lang="ja-JP" sz="1300" b="0" u="none" strike="noStrike">
+                <a:solidFill>
+                  <a:schemeClr val="lt1"/>
+                </a:solidFill>
+                <a:effectLst/>
+                <a:uFillTx/>
+                <a:latin typeface="メイリオ"/>
+                <a:ea typeface="メイリオ"/>
+                <a:cs typeface="メイリオ"/>
+              </a:rPr>
+              <a:t>サンクス</a:t>
+            </a:r>
+            <a:endParaRPr lang="en-US" sz="1300" b="0" u="none" strike="noStrike">
+              <a:solidFill>
+                <a:srgbClr val="FFFFFF"/>
+              </a:solidFill>
+              <a:effectLst/>
+              <a:uFillTx/>
+              <a:latin typeface="メイリオ"/>
+              <a:ea typeface="メイリオ"/>
+              <a:cs typeface="メイリオ"/>
+            </a:endParaRPr>
+          </a:p>
+          <a:p>
+            <a:pPr algn="ctr" defTabSz="914400">
+              <a:lnSpc>
+                <a:spcPct val="100000"/>
+              </a:lnSpc>
+            </a:pPr>
+            <a:r>
+              <a:rPr lang="ja-JP" sz="1300" b="0" u="none" strike="noStrike">
+                <a:solidFill>
+                  <a:schemeClr val="lt1"/>
+                </a:solidFill>
+                <a:effectLst/>
+                <a:uFillTx/>
+                <a:latin typeface="メイリオ"/>
+                <a:ea typeface="メイリオ"/>
+                <a:cs typeface="メイリオ"/>
+              </a:rPr>
+              <a:t>LINE誘導</a:t>
+            </a:r>
+            <a:endParaRPr lang="en-US" sz="1300" b="0" u="none" strike="noStrike">
+              <a:solidFill>
+                <a:srgbClr val="FFFFFF"/>
+              </a:solidFill>
+              <a:effectLst/>
+              <a:uFillTx/>
+              <a:latin typeface="メイリオ"/>
+              <a:ea typeface="メイリオ"/>
+              <a:cs typeface="メイリオ"/>
+            </a:endParaRPr>
+          </a:p>
+        </p:txBody>
+      </p:sp>
+      <p:sp>
+        <p:nvSpPr>
+          <p:cNvPr id="368" name="正方形/長方形 21"/>
+          <p:cNvSpPr/>
+          <p:nvPr/>
+        </p:nvSpPr>
+        <p:spPr>
+          <a:xfrm>
+            <a:off x="1770120" y="3579840"/>
+            <a:ext cx="1343880" cy="447840"/>
+          </a:xfrm>
+          <a:prstGeom prst="rect">
+            <a:avLst/>
+          </a:prstGeom>
+          <a:solidFill>
+            <a:schemeClr val="bg1">
+              <a:lumMod val="95000"/>
+            </a:schemeClr>
+          </a:solidFill>
+          <a:ln>
+            <a:noFill/>
+          </a:ln>
+        </p:spPr>
+        <p:style>
+          <a:lnRef idx="2">
+            <a:schemeClr val="accent1">
+              <a:shade val="15000"/>
+            </a:schemeClr>
+          </a:lnRef>
+          <a:fillRef idx="1">
+            <a:schemeClr val="accent1"/>
+          </a:fillRef>
+          <a:effectRef idx="0">
+            <a:schemeClr val="accent1"/>
+          </a:effectRef>
+          <a:fontRef idx="minor"/>
+        </p:style>
+        <p:txBody>
+          <a:bodyPr lIns="45720" tIns="18360" rIns="45720" bIns="18360" anchor="ctr">
+            <a:noAutofit/>
+          </a:bodyPr>
+          <a:lstStyle/>
+          <a:p>
+            <a:pPr algn="ctr" defTabSz="914400">
+              <a:lnSpc>
+                <a:spcPct val="100000"/>
+              </a:lnSpc>
+            </a:pPr>
+            <a:r>
+              <a:rPr lang="ja-JP" sz="1300" b="0" u="none" strike="noStrike">
+                <a:solidFill>
+                  <a:schemeClr val="dk1"/>
+                </a:solidFill>
+                <a:effectLst/>
+                <a:uFillTx/>
+                <a:latin typeface="メイリオ"/>
+                <a:ea typeface="メイリオ"/>
+                <a:cs typeface="メイリオ"/>
+              </a:rPr>
+              <a:t>導入</a:t>
+            </a:r>
+            <a:endParaRPr lang="en-US" sz="1300" b="0" u="none" strike="noStrike">
+              <a:solidFill>
+                <a:srgbClr val="000000"/>
+              </a:solidFill>
+              <a:effectLst/>
+              <a:uFillTx/>
+              <a:latin typeface="メイリオ"/>
+              <a:ea typeface="メイリオ"/>
+              <a:cs typeface="メイリオ"/>
+            </a:endParaRPr>
+          </a:p>
+        </p:txBody>
+      </p:sp>
+      <p:sp>
+        <p:nvSpPr>
+          <p:cNvPr id="369" name="正方形/長方形 25"/>
+          <p:cNvSpPr/>
+          <p:nvPr/>
+        </p:nvSpPr>
+        <p:spPr>
+          <a:xfrm>
+            <a:off x="307080" y="4069080"/>
+            <a:ext cx="1425960" cy="447840"/>
+          </a:xfrm>
+          <a:prstGeom prst="rect">
+            <a:avLst/>
+          </a:prstGeom>
+          <a:solidFill>
+            <a:srgbClr val="00B050"/>
+          </a:solidFill>
+          <a:ln>
+            <a:noFill/>
+          </a:ln>
+        </p:spPr>
+        <p:style>
+          <a:lnRef idx="2">
+            <a:schemeClr val="accent1">
+              <a:shade val="15000"/>
+            </a:schemeClr>
+          </a:lnRef>
+          <a:fillRef idx="1">
+            <a:schemeClr val="accent1"/>
+          </a:fillRef>
+          <a:effectRef idx="0">
+            <a:schemeClr val="accent1"/>
+          </a:effectRef>
+          <a:fontRef idx="minor"/>
+        </p:style>
+        <p:txBody>
+          <a:bodyPr lIns="45720" tIns="18360" rIns="45720" bIns="18360" anchor="ctr">
+            <a:noAutofit/>
+          </a:bodyPr>
+          <a:lstStyle/>
+          <a:p>
+            <a:pPr algn="ctr" defTabSz="914400">
+              <a:lnSpc>
+                <a:spcPct val="100000"/>
+              </a:lnSpc>
+            </a:pPr>
+            <a:r>
+              <a:rPr lang="ja-JP" sz="1300" b="0" u="none" strike="noStrike">
+                <a:solidFill>
+                  <a:schemeClr val="lt1"/>
+                </a:solidFill>
+                <a:effectLst/>
+                <a:uFillTx/>
+                <a:latin typeface="メイリオ"/>
+                <a:ea typeface="メイリオ"/>
+                <a:cs typeface="メイリオ"/>
+              </a:rPr>
+              <a:t>ステップ配信</a:t>
+            </a:r>
+            <a:endParaRPr lang="en-US" sz="1300" b="0" u="none" strike="noStrike">
+              <a:solidFill>
+                <a:srgbClr val="FFFFFF"/>
+              </a:solidFill>
+              <a:effectLst/>
+              <a:uFillTx/>
+              <a:latin typeface="メイリオ"/>
+              <a:ea typeface="メイリオ"/>
+              <a:cs typeface="メイリオ"/>
+            </a:endParaRPr>
+          </a:p>
+        </p:txBody>
+      </p:sp>
+      <p:sp>
+        <p:nvSpPr>
+          <p:cNvPr id="370" name="正方形/長方形 29"/>
+          <p:cNvSpPr/>
+          <p:nvPr/>
+        </p:nvSpPr>
+        <p:spPr>
+          <a:xfrm>
+            <a:off x="1770120" y="4069080"/>
+            <a:ext cx="1343880" cy="447840"/>
+          </a:xfrm>
+          <a:prstGeom prst="rect">
+            <a:avLst/>
+          </a:prstGeom>
+          <a:solidFill>
+            <a:schemeClr val="bg1">
+              <a:lumMod val="95000"/>
+            </a:schemeClr>
+          </a:solidFill>
+          <a:ln>
+            <a:noFill/>
+          </a:ln>
+        </p:spPr>
+        <p:style>
+          <a:lnRef idx="2">
+            <a:schemeClr val="accent1">
+              <a:shade val="15000"/>
+            </a:schemeClr>
+          </a:lnRef>
+          <a:fillRef idx="1">
+            <a:schemeClr val="accent1"/>
+          </a:fillRef>
+          <a:effectRef idx="0">
+            <a:schemeClr val="accent1"/>
+          </a:effectRef>
+          <a:fontRef idx="minor"/>
+        </p:style>
+        <p:txBody>
+          <a:bodyPr lIns="45720" tIns="18360" rIns="45720" bIns="18360" anchor="ctr">
+            <a:noAutofit/>
+          </a:bodyPr>
+          <a:lstStyle/>
+          <a:p>
+            <a:pPr algn="ctr" defTabSz="914400">
+              <a:lnSpc>
+                <a:spcPct val="100000"/>
+              </a:lnSpc>
+            </a:pPr>
+            <a:r>
+              <a:rPr lang="en-US" sz="1300" b="0" u="none" strike="noStrike">
+                <a:solidFill>
+                  <a:schemeClr val="dk1"/>
+                </a:solidFill>
+                <a:effectLst/>
+                <a:uFillTx/>
+                <a:latin typeface="メイリオ"/>
+                <a:ea typeface="メイリオ"/>
+                <a:cs typeface="メイリオ"/>
+              </a:rPr>
+              <a:t>5通を構築</a:t>
+            </a:r>
+            <a:endParaRPr lang="en-US" sz="1300" b="0" u="none" strike="noStrike">
+              <a:solidFill>
+                <a:srgbClr val="000000"/>
+              </a:solidFill>
+              <a:effectLst/>
+              <a:uFillTx/>
+              <a:latin typeface="メイリオ"/>
+              <a:ea typeface="メイリオ"/>
+              <a:cs typeface="メイリオ"/>
+            </a:endParaRPr>
+          </a:p>
+        </p:txBody>
+      </p:sp>
+      <p:sp>
+        <p:nvSpPr>
+          <p:cNvPr id="371" name="正方形/長方形 33"/>
+          <p:cNvSpPr/>
+          <p:nvPr/>
+        </p:nvSpPr>
+        <p:spPr>
+          <a:xfrm>
+            <a:off x="307080" y="4558320"/>
+            <a:ext cx="1425960" cy="447840"/>
+          </a:xfrm>
+          <a:prstGeom prst="rect">
+            <a:avLst/>
+          </a:prstGeom>
+          <a:solidFill>
+            <a:srgbClr val="00B050"/>
+          </a:solidFill>
+          <a:ln>
+            <a:noFill/>
+          </a:ln>
+        </p:spPr>
+        <p:style>
+          <a:lnRef idx="2">
+            <a:schemeClr val="accent1">
+              <a:shade val="15000"/>
+            </a:schemeClr>
+          </a:lnRef>
+          <a:fillRef idx="1">
+            <a:schemeClr val="accent1"/>
+          </a:fillRef>
+          <a:effectRef idx="0">
+            <a:schemeClr val="accent1"/>
+          </a:effectRef>
+          <a:fontRef idx="minor"/>
+        </p:style>
+        <p:txBody>
+          <a:bodyPr lIns="45720" tIns="18360" rIns="45720" bIns="18360" anchor="ctr">
+            <a:noAutofit/>
+          </a:bodyPr>
+          <a:lstStyle/>
+          <a:p>
+            <a:pPr algn="ctr" defTabSz="914400">
+              <a:lnSpc>
+                <a:spcPct val="100000"/>
+              </a:lnSpc>
+            </a:pPr>
+            <a:r>
+              <a:rPr lang="ja-JP" sz="1300" b="0" u="none" strike="noStrike">
+                <a:solidFill>
+                  <a:schemeClr val="lt1"/>
+                </a:solidFill>
+                <a:effectLst/>
+                <a:uFillTx/>
+                <a:latin typeface="メイリオ"/>
+                <a:ea typeface="メイリオ"/>
+                <a:cs typeface="メイリオ"/>
+              </a:rPr>
+              <a:t>配信の設計</a:t>
+            </a:r>
+            <a:endParaRPr lang="en-US" sz="1300" b="0" u="none" strike="noStrike">
+              <a:solidFill>
+                <a:srgbClr val="FFFFFF"/>
+              </a:solidFill>
+              <a:effectLst/>
+              <a:uFillTx/>
+              <a:latin typeface="メイリオ"/>
+              <a:ea typeface="メイリオ"/>
+              <a:cs typeface="メイリオ"/>
+            </a:endParaRPr>
+          </a:p>
+        </p:txBody>
+      </p:sp>
+      <p:sp>
+        <p:nvSpPr>
+          <p:cNvPr id="372" name="正方形/長方形 37"/>
+          <p:cNvSpPr/>
+          <p:nvPr/>
+        </p:nvSpPr>
+        <p:spPr>
+          <a:xfrm>
+            <a:off x="1770120" y="4558320"/>
+            <a:ext cx="1343880" cy="447840"/>
+          </a:xfrm>
+          <a:prstGeom prst="rect">
+            <a:avLst/>
+          </a:prstGeom>
+          <a:solidFill>
+            <a:schemeClr val="bg1">
+              <a:lumMod val="95000"/>
+            </a:schemeClr>
+          </a:solidFill>
+          <a:ln>
+            <a:noFill/>
+          </a:ln>
+        </p:spPr>
+        <p:style>
+          <a:lnRef idx="2">
+            <a:schemeClr val="accent1">
+              <a:shade val="15000"/>
+            </a:schemeClr>
+          </a:lnRef>
+          <a:fillRef idx="1">
+            <a:schemeClr val="accent1"/>
+          </a:fillRef>
+          <a:effectRef idx="0">
+            <a:schemeClr val="accent1"/>
+          </a:effectRef>
+          <a:fontRef idx="minor"/>
+        </p:style>
+        <p:txBody>
+          <a:bodyPr lIns="45720" tIns="18360" rIns="45720" bIns="18360" anchor="ctr">
+            <a:noAutofit/>
+          </a:bodyPr>
+          <a:lstStyle/>
+          <a:p>
+            <a:pPr algn="ctr" defTabSz="914400">
+              <a:lnSpc>
+                <a:spcPct val="100000"/>
+              </a:lnSpc>
+            </a:pPr>
+            <a:r>
+              <a:rPr lang="ja-JP" sz="1300" b="0" u="none" strike="noStrike">
+                <a:solidFill>
+                  <a:schemeClr val="dk1"/>
+                </a:solidFill>
+                <a:effectLst/>
+                <a:uFillTx/>
+                <a:latin typeface="メイリオ"/>
+                <a:ea typeface="メイリオ"/>
+                <a:cs typeface="メイリオ"/>
+              </a:rPr>
+              <a:t>段階ごとに設計</a:t>
+            </a:r>
+            <a:endParaRPr lang="en-US" sz="1300" b="0" u="none" strike="noStrike">
+              <a:solidFill>
+                <a:srgbClr val="000000"/>
+              </a:solidFill>
+              <a:effectLst/>
+              <a:uFillTx/>
+              <a:latin typeface="メイリオ"/>
+              <a:ea typeface="メイリオ"/>
+              <a:cs typeface="メイリオ"/>
+            </a:endParaRPr>
+          </a:p>
+        </p:txBody>
+      </p:sp>
+      <p:sp>
+        <p:nvSpPr>
+          <p:cNvPr id="373" name="正方形/長方形 41"/>
+          <p:cNvSpPr/>
+          <p:nvPr/>
+        </p:nvSpPr>
+        <p:spPr>
+          <a:xfrm>
+            <a:off x="307080" y="5047560"/>
+            <a:ext cx="1425960" cy="447840"/>
+          </a:xfrm>
+          <a:prstGeom prst="rect">
+            <a:avLst/>
+          </a:prstGeom>
+          <a:solidFill>
+            <a:srgbClr val="00B050"/>
+          </a:solidFill>
+          <a:ln>
+            <a:noFill/>
+          </a:ln>
+        </p:spPr>
+        <p:style>
+          <a:lnRef idx="2">
+            <a:schemeClr val="accent1">
+              <a:shade val="15000"/>
+            </a:schemeClr>
+          </a:lnRef>
+          <a:fillRef idx="1">
+            <a:schemeClr val="accent1"/>
+          </a:fillRef>
+          <a:effectRef idx="0">
+            <a:schemeClr val="accent1"/>
+          </a:effectRef>
+          <a:fontRef idx="minor"/>
+        </p:style>
+        <p:txBody>
+          <a:bodyPr lIns="45720" tIns="18360" rIns="45720" bIns="18360" anchor="ctr">
+            <a:noAutofit/>
+          </a:bodyPr>
+          <a:lstStyle/>
+          <a:p>
+            <a:pPr algn="ctr" defTabSz="914400">
+              <a:lnSpc>
+                <a:spcPct val="100000"/>
+              </a:lnSpc>
+            </a:pPr>
+            <a:r>
+              <a:rPr lang="ja-JP" sz="1300" b="0" u="none" strike="noStrike">
+                <a:solidFill>
+                  <a:schemeClr val="lt1"/>
+                </a:solidFill>
+                <a:effectLst/>
+                <a:uFillTx/>
+                <a:latin typeface="メイリオ"/>
+                <a:ea typeface="メイリオ"/>
+                <a:cs typeface="メイリオ"/>
+              </a:rPr>
+              <a:t>LINE公式</a:t>
+            </a:r>
+            <a:endParaRPr lang="en-US" sz="1300" b="0" u="none" strike="noStrike">
+              <a:solidFill>
+                <a:srgbClr val="FFFFFF"/>
+              </a:solidFill>
+              <a:effectLst/>
+              <a:uFillTx/>
+              <a:latin typeface="メイリオ"/>
+              <a:ea typeface="メイリオ"/>
+              <a:cs typeface="メイリオ"/>
+            </a:endParaRPr>
+          </a:p>
+          <a:p>
+            <a:pPr algn="ctr" defTabSz="914400">
+              <a:lnSpc>
+                <a:spcPct val="100000"/>
+              </a:lnSpc>
+            </a:pPr>
+            <a:r>
+              <a:rPr lang="ja-JP" sz="1300" b="0" u="none" strike="noStrike">
+                <a:solidFill>
+                  <a:schemeClr val="lt1"/>
+                </a:solidFill>
+                <a:effectLst/>
+                <a:uFillTx/>
+                <a:latin typeface="メイリオ"/>
+                <a:ea typeface="メイリオ"/>
+                <a:cs typeface="メイリオ"/>
+              </a:rPr>
+              <a:t>アカウント</a:t>
+            </a:r>
+            <a:endParaRPr lang="en-US" sz="1300" b="0" u="none" strike="noStrike">
+              <a:solidFill>
+                <a:srgbClr val="FFFFFF"/>
+              </a:solidFill>
+              <a:effectLst/>
+              <a:uFillTx/>
+              <a:latin typeface="メイリオ"/>
+              <a:ea typeface="メイリオ"/>
+              <a:cs typeface="メイリオ"/>
+            </a:endParaRPr>
+          </a:p>
+        </p:txBody>
+      </p:sp>
+      <p:sp>
+        <p:nvSpPr>
+          <p:cNvPr id="374" name="正方形/長方形 46"/>
+          <p:cNvSpPr/>
+          <p:nvPr/>
+        </p:nvSpPr>
+        <p:spPr>
+          <a:xfrm>
+            <a:off x="1770120" y="5047560"/>
+            <a:ext cx="1343880" cy="447840"/>
+          </a:xfrm>
+          <a:prstGeom prst="rect">
+            <a:avLst/>
+          </a:prstGeom>
+          <a:solidFill>
+            <a:schemeClr val="bg1">
+              <a:lumMod val="95000"/>
+            </a:schemeClr>
+          </a:solidFill>
+          <a:ln>
+            <a:noFill/>
+          </a:ln>
+        </p:spPr>
+        <p:style>
+          <a:lnRef idx="2">
+            <a:schemeClr val="accent1">
+              <a:shade val="15000"/>
+            </a:schemeClr>
+          </a:lnRef>
+          <a:fillRef idx="1">
+            <a:schemeClr val="accent1"/>
+          </a:fillRef>
+          <a:effectRef idx="0">
+            <a:schemeClr val="accent1"/>
+          </a:effectRef>
+          <a:fontRef idx="minor"/>
+        </p:style>
+        <p:txBody>
+          <a:bodyPr lIns="45720" tIns="18360" rIns="45720" bIns="18360" anchor="ctr">
+            <a:noAutofit/>
+          </a:bodyPr>
+          <a:lstStyle/>
+          <a:p>
+            <a:pPr algn="ctr" defTabSz="914400">
+              <a:lnSpc>
+                <a:spcPct val="100000"/>
+              </a:lnSpc>
+            </a:pPr>
+            <a:r>
+              <a:rPr lang="ja-JP" sz="1300" b="0" u="none" strike="noStrike">
+                <a:solidFill>
+                  <a:schemeClr val="dk1"/>
+                </a:solidFill>
+                <a:effectLst/>
+                <a:uFillTx/>
+                <a:latin typeface="メイリオ"/>
+                <a:ea typeface="メイリオ"/>
+                <a:cs typeface="メイリオ"/>
+              </a:rPr>
+              <a:t>開設</a:t>
+            </a:r>
+            <a:endParaRPr lang="en-US" sz="1300" b="0" u="none" strike="noStrike">
+              <a:solidFill>
+                <a:srgbClr val="000000"/>
+              </a:solidFill>
+              <a:effectLst/>
+              <a:uFillTx/>
+              <a:latin typeface="メイリオ"/>
+              <a:ea typeface="メイリオ"/>
+              <a:cs typeface="メイリオ"/>
+            </a:endParaRPr>
+          </a:p>
+        </p:txBody>
+      </p:sp>
+      <p:sp>
+        <p:nvSpPr>
+          <p:cNvPr id="375" name="テキスト ボックス 10"/>
+          <p:cNvSpPr/>
+          <p:nvPr/>
+        </p:nvSpPr>
+        <p:spPr>
+          <a:xfrm>
+            <a:off x="8256960" y="1956960"/>
+            <a:ext cx="1325520" cy="402120"/>
+          </a:xfrm>
+          <a:prstGeom prst="rect">
+            <a:avLst/>
+          </a:prstGeom>
+          <a:noFill/>
+          <a:ln w="0">
+            <a:noFill/>
+          </a:ln>
+        </p:spPr>
+        <p:style>
+          <a:lnRef idx="0">
+            <a:scrgbClr r="0" g="0" b="0"/>
+          </a:lnRef>
+          <a:fillRef idx="0">
+            <a:scrgbClr r="0" g="0" b="0"/>
+          </a:fillRef>
+          <a:effectRef idx="0">
+            <a:scrgbClr r="0" g="0" b="0"/>
+          </a:effectRef>
+          <a:fontRef idx="minor"/>
+        </p:style>
+        <p:txBody>
+          <a:bodyPr lIns="90000" tIns="45000" rIns="90000" bIns="45000" anchor="ctr">
+            <a:noAutofit/>
+          </a:bodyPr>
+          <a:lstStyle/>
+          <a:p>
+            <a:pPr algn="ctr" defTabSz="914400">
+              <a:lnSpc>
+                <a:spcPct val="100000"/>
+              </a:lnSpc>
+            </a:pPr>
+            <a:r>
+              <a:rPr lang="zh-CN" sz="1400" b="1" u="none" strike="noStrike">
+                <a:solidFill>
+                  <a:srgbClr val="002060"/>
+                </a:solidFill>
+                <a:effectLst/>
+                <a:uFillTx/>
+                <a:latin typeface="メイリオ"/>
+                <a:ea typeface="メイリオ"/>
+                <a:cs typeface="メイリオ"/>
+              </a:rPr>
+              <a:t>554人</a:t>
+            </a:r>
+            <a:endParaRPr lang="en-US" sz="1400" b="0" u="none" strike="noStrike">
+              <a:solidFill>
+                <a:srgbClr val="002060"/>
+              </a:solidFill>
+              <a:effectLst/>
+              <a:uFillTx/>
+              <a:latin typeface="メイリオ"/>
+              <a:ea typeface="メイリオ"/>
+              <a:cs typeface="メイリオ"/>
+            </a:endParaRPr>
+          </a:p>
+        </p:txBody>
+      </p:sp>
+      <p:sp>
+        <p:nvSpPr>
+          <p:cNvPr id="376" name="テキスト ボックス 15"/>
+          <p:cNvSpPr/>
+          <p:nvPr/>
+        </p:nvSpPr>
+        <p:spPr>
+          <a:xfrm>
+            <a:off x="8256960" y="2432160"/>
+            <a:ext cx="1325520" cy="402120"/>
+          </a:xfrm>
+          <a:prstGeom prst="rect">
+            <a:avLst/>
+          </a:prstGeom>
+          <a:noFill/>
+          <a:ln w="0">
+            <a:noFill/>
+          </a:ln>
+        </p:spPr>
+        <p:style>
+          <a:lnRef idx="0">
+            <a:scrgbClr r="0" g="0" b="0"/>
+          </a:lnRef>
+          <a:fillRef idx="0">
+            <a:scrgbClr r="0" g="0" b="0"/>
+          </a:fillRef>
+          <a:effectRef idx="0">
+            <a:scrgbClr r="0" g="0" b="0"/>
+          </a:effectRef>
+          <a:fontRef idx="minor"/>
+        </p:style>
+        <p:txBody>
+          <a:bodyPr lIns="90000" tIns="45000" rIns="90000" bIns="45000" anchor="ctr">
+            <a:noAutofit/>
+          </a:bodyPr>
+          <a:lstStyle/>
+          <a:p>
+            <a:pPr algn="ctr" defTabSz="914400">
+              <a:lnSpc>
+                <a:spcPct val="100000"/>
+              </a:lnSpc>
+            </a:pPr>
+            <a:r>
+              <a:rPr lang="en-US" sz="1400" b="1" u="none" strike="noStrike">
+                <a:solidFill>
+                  <a:srgbClr val="002060"/>
+                </a:solidFill>
+                <a:effectLst/>
+                <a:uFillTx/>
+                <a:latin typeface="メイリオ"/>
+                <a:ea typeface="メイリオ"/>
+                <a:cs typeface="メイリオ"/>
+              </a:rPr>
+              <a:t>12件/6か月</a:t>
+            </a:r>
+            <a:endParaRPr lang="en-US" sz="1400" b="0" u="none" strike="noStrike">
+              <a:solidFill>
+                <a:srgbClr val="002060"/>
+              </a:solidFill>
+              <a:effectLst/>
+              <a:uFillTx/>
+              <a:latin typeface="メイリオ"/>
+              <a:ea typeface="メイリオ"/>
+              <a:cs typeface="メイリオ"/>
+            </a:endParaRPr>
+          </a:p>
+        </p:txBody>
+      </p:sp>
+      <p:sp>
+        <p:nvSpPr>
+          <p:cNvPr id="378" name="テキスト ボックス 26"/>
+          <p:cNvSpPr/>
+          <p:nvPr/>
+        </p:nvSpPr>
+        <p:spPr>
+          <a:xfrm>
+            <a:off x="8256960" y="2907792"/>
+            <a:ext cx="1325520" cy="402120"/>
+          </a:xfrm>
+          <a:prstGeom prst="rect">
+            <a:avLst/>
+          </a:prstGeom>
+          <a:noFill/>
+          <a:ln w="0">
+            <a:noFill/>
+          </a:ln>
+        </p:spPr>
+        <p:style>
+          <a:lnRef idx="0">
+            <a:scrgbClr r="0" g="0" b="0"/>
+          </a:lnRef>
+          <a:fillRef idx="0">
+            <a:scrgbClr r="0" g="0" b="0"/>
+          </a:fillRef>
+          <a:effectRef idx="0">
+            <a:scrgbClr r="0" g="0" b="0"/>
+          </a:effectRef>
+          <a:fontRef idx="minor"/>
+        </p:style>
+        <p:txBody>
+          <a:bodyPr lIns="90000" tIns="45000" rIns="90000" bIns="45000" anchor="ctr">
+            <a:noAutofit/>
+          </a:bodyPr>
+          <a:lstStyle/>
+          <a:p>
+            <a:pPr algn="ctr" defTabSz="914400">
+              <a:lnSpc>
+                <a:spcPct val="100000"/>
+              </a:lnSpc>
+            </a:pPr>
+            <a:r>
+              <a:rPr lang="en-US" sz="1400" b="1" u="none" strike="noStrike">
+                <a:solidFill>
+                  <a:srgbClr val="002060"/>
+                </a:solidFill>
+                <a:effectLst/>
+                <a:uFillTx/>
+                <a:latin typeface="メイリオ"/>
+                <a:ea typeface="メイリオ"/>
+                <a:cs typeface="メイリオ"/>
+              </a:rPr>
+              <a:t>6件/6か月</a:t>
+            </a:r>
+            <a:endParaRPr lang="en-US" sz="1400" b="0" u="none" strike="noStrike">
+              <a:solidFill>
+                <a:srgbClr val="002060"/>
+              </a:solidFill>
+              <a:effectLst/>
+              <a:uFillTx/>
               <a:latin typeface="メイリオ"/>
               <a:ea typeface="メイリオ"/>
               <a:cs typeface="メイリオ"/>
